--- a/Documentation/User Manual Source/Release Notes Vecto4.x.pptx
+++ b/Documentation/User Manual Source/Release Notes Vecto4.x.pptx
@@ -220,7 +220,7 @@
           <a:p>
             <a:fld id="{390E69D5-8A05-43AD-B5FD-86D96081B052}" type="datetimeFigureOut">
               <a:rPr lang="de-AT" smtClean="0"/>
-              <a:t>12.10.2023</a:t>
+              <a:t>17.10.2023</a:t>
             </a:fld>
             <a:endParaRPr lang="de-AT"/>
           </a:p>
@@ -1971,7 +1971,7 @@
                 <a:latin typeface="Arial"/>
                 <a:ea typeface="DejaVu Sans"/>
               </a:rPr>
-              <a:t>VECTO 4.0.0.3210 </a:t>
+              <a:t>VECTO 4.0.0.3211 </a:t>
             </a:r>
             <a:endParaRPr lang="en-US" sz="3200" b="0" strike="noStrike" spc="-1" dirty="0">
               <a:latin typeface="Arial"/>
@@ -1995,7 +1995,7 @@
                 <a:latin typeface="Arial"/>
                 <a:ea typeface="DejaVu Sans"/>
               </a:rPr>
-              <a:t>16</a:t>
+              <a:t>17</a:t>
             </a:r>
             <a:r>
               <a:rPr lang="en-US" sz="2000" b="1" strike="noStrike" spc="-1" dirty="0">

--- a/Documentation/User Manual Source/Release Notes Vecto4.x.pptx
+++ b/Documentation/User Manual Source/Release Notes Vecto4.x.pptx
@@ -220,7 +220,7 @@
           <a:p>
             <a:fld id="{390E69D5-8A05-43AD-B5FD-86D96081B052}" type="datetimeFigureOut">
               <a:rPr lang="de-AT" smtClean="0"/>
-              <a:t>12.10.2023</a:t>
+              <a:t>17.10.2023</a:t>
             </a:fld>
             <a:endParaRPr lang="de-AT"/>
           </a:p>
@@ -2203,6 +2203,13 @@
               <a:t>nd Amendment </a:t>
             </a:r>
             <a:br>
+              <a:rPr lang="en-US" sz="2400" b="1" dirty="0"/>
+            </a:br>
+            <a:r>
+              <a:rPr lang="en-US" sz="2400" b="1" dirty="0"/>
+              <a:t>of Regulation (EU) 2017/2400</a:t>
+            </a:r>
+            <a:br>
               <a:rPr lang="en-US" sz="2800" b="1" dirty="0"/>
             </a:br>
             <a:br>
@@ -2284,8 +2291,8 @@
         </p:nvSpPr>
         <p:spPr>
           <a:xfrm>
-            <a:off x="588206" y="932447"/>
-            <a:ext cx="8394645" cy="5254889"/>
+            <a:off x="588206" y="1140311"/>
+            <a:ext cx="8394645" cy="5047025"/>
           </a:xfrm>
         </p:spPr>
         <p:txBody>
@@ -2295,8 +2302,11 @@
           <a:lstStyle/>
           <a:p>
             <a:pPr>
-              <a:spcBef>
-                <a:spcPts val="1200"/>
+              <a:lnSpc>
+                <a:spcPct val="120000"/>
+              </a:lnSpc>
+              <a:spcBef>
+                <a:spcPts val="600"/>
               </a:spcBef>
             </a:pPr>
             <a:r>
@@ -2306,8 +2316,11 @@
           </a:p>
           <a:p>
             <a:pPr lvl="1">
-              <a:spcBef>
-                <a:spcPts val="1200"/>
+              <a:lnSpc>
+                <a:spcPct val="120000"/>
+              </a:lnSpc>
+              <a:spcBef>
+                <a:spcPts val="600"/>
               </a:spcBef>
             </a:pPr>
             <a:r>
@@ -2321,8 +2334,11 @@
           </a:p>
           <a:p>
             <a:pPr lvl="1">
-              <a:spcBef>
-                <a:spcPts val="1200"/>
+              <a:lnSpc>
+                <a:spcPct val="120000"/>
+              </a:lnSpc>
+              <a:spcBef>
+                <a:spcPts val="600"/>
               </a:spcBef>
             </a:pPr>
             <a:r>
@@ -2332,8 +2348,11 @@
           </a:p>
           <a:p>
             <a:pPr lvl="1">
-              <a:spcBef>
-                <a:spcPts val="1200"/>
+              <a:lnSpc>
+                <a:spcPct val="120000"/>
+              </a:lnSpc>
+              <a:spcBef>
+                <a:spcPts val="600"/>
               </a:spcBef>
             </a:pPr>
             <a:r>
@@ -2347,8 +2366,11 @@
           </a:p>
           <a:p>
             <a:pPr lvl="1">
-              <a:spcBef>
-                <a:spcPts val="1200"/>
+              <a:lnSpc>
+                <a:spcPct val="120000"/>
+              </a:lnSpc>
+              <a:spcBef>
+                <a:spcPts val="600"/>
               </a:spcBef>
             </a:pPr>
             <a:r>
@@ -2358,8 +2380,11 @@
           </a:p>
           <a:p>
             <a:pPr lvl="1">
-              <a:spcBef>
-                <a:spcPts val="1200"/>
+              <a:lnSpc>
+                <a:spcPct val="120000"/>
+              </a:lnSpc>
+              <a:spcBef>
+                <a:spcPts val="600"/>
               </a:spcBef>
             </a:pPr>
             <a:r>
@@ -2373,8 +2398,11 @@
           </a:p>
           <a:p>
             <a:pPr>
-              <a:spcBef>
-                <a:spcPts val="1200"/>
+              <a:lnSpc>
+                <a:spcPct val="120000"/>
+              </a:lnSpc>
+              <a:spcBef>
+                <a:spcPts val="600"/>
               </a:spcBef>
             </a:pPr>
             <a:r>
@@ -2384,8 +2412,11 @@
           </a:p>
           <a:p>
             <a:pPr>
-              <a:spcBef>
-                <a:spcPts val="1200"/>
+              <a:lnSpc>
+                <a:spcPct val="120000"/>
+              </a:lnSpc>
+              <a:spcBef>
+                <a:spcPts val="600"/>
               </a:spcBef>
             </a:pPr>
             <a:r>
@@ -2395,8 +2426,11 @@
           </a:p>
           <a:p>
             <a:pPr lvl="1">
-              <a:spcBef>
-                <a:spcPts val="1200"/>
+              <a:lnSpc>
+                <a:spcPct val="120000"/>
+              </a:lnSpc>
+              <a:spcBef>
+                <a:spcPts val="600"/>
               </a:spcBef>
             </a:pPr>
             <a:r>
@@ -2410,8 +2444,11 @@
           </a:p>
           <a:p>
             <a:pPr>
-              <a:spcBef>
-                <a:spcPts val="1200"/>
+              <a:lnSpc>
+                <a:spcPct val="120000"/>
+              </a:lnSpc>
+              <a:spcBef>
+                <a:spcPts val="600"/>
               </a:spcBef>
             </a:pPr>
             <a:r>
@@ -2421,8 +2458,11 @@
           </a:p>
           <a:p>
             <a:pPr lvl="1">
-              <a:spcBef>
-                <a:spcPts val="1200"/>
+              <a:lnSpc>
+                <a:spcPct val="120000"/>
+              </a:lnSpc>
+              <a:spcBef>
+                <a:spcPts val="600"/>
               </a:spcBef>
             </a:pPr>
             <a:r>
@@ -2433,8 +2473,11 @@
           </a:p>
           <a:p>
             <a:pPr lvl="1">
-              <a:spcBef>
-                <a:spcPts val="1200"/>
+              <a:lnSpc>
+                <a:spcPct val="120000"/>
+              </a:lnSpc>
+              <a:spcBef>
+                <a:spcPts val="600"/>
               </a:spcBef>
             </a:pPr>
             <a:r>
@@ -2445,8 +2488,11 @@
           </a:p>
           <a:p>
             <a:pPr lvl="1">
-              <a:spcBef>
-                <a:spcPts val="1200"/>
+              <a:lnSpc>
+                <a:spcPct val="120000"/>
+              </a:lnSpc>
+              <a:spcBef>
+                <a:spcPts val="600"/>
               </a:spcBef>
             </a:pPr>
             <a:r>
@@ -2457,8 +2503,11 @@
           </a:p>
           <a:p>
             <a:pPr>
-              <a:spcBef>
-                <a:spcPts val="1200"/>
+              <a:lnSpc>
+                <a:spcPct val="120000"/>
+              </a:lnSpc>
+              <a:spcBef>
+                <a:spcPts val="600"/>
               </a:spcBef>
             </a:pPr>
             <a:r>
@@ -2468,8 +2517,11 @@
           </a:p>
           <a:p>
             <a:pPr>
-              <a:spcBef>
-                <a:spcPts val="1200"/>
+              <a:lnSpc>
+                <a:spcPct val="120000"/>
+              </a:lnSpc>
+              <a:spcBef>
+                <a:spcPts val="600"/>
               </a:spcBef>
             </a:pPr>
             <a:r>
@@ -2479,16 +2531,22 @@
           </a:p>
           <a:p>
             <a:pPr>
-              <a:spcBef>
-                <a:spcPts val="1200"/>
+              <a:lnSpc>
+                <a:spcPct val="120000"/>
+              </a:lnSpc>
+              <a:spcBef>
+                <a:spcPts val="600"/>
               </a:spcBef>
             </a:pPr>
             <a:endParaRPr lang="pt-BR" sz="2000" dirty="0"/>
           </a:p>
           <a:p>
             <a:pPr>
-              <a:spcBef>
-                <a:spcPts val="1200"/>
+              <a:lnSpc>
+                <a:spcPct val="120000"/>
+              </a:lnSpc>
+              <a:spcBef>
+                <a:spcPts val="600"/>
               </a:spcBef>
             </a:pPr>
             <a:r>

--- a/Documentation/User Manual Source/Release Notes Vecto4.x.pptx
+++ b/Documentation/User Manual Source/Release Notes Vecto4.x.pptx
@@ -5,17 +5,18 @@
     <p:sldMasterId id="2147483661" r:id="rId1"/>
   </p:sldMasterIdLst>
   <p:notesMasterIdLst>
-    <p:notesMasterId r:id="rId10"/>
+    <p:notesMasterId r:id="rId11"/>
   </p:notesMasterIdLst>
   <p:sldIdLst>
     <p:sldId id="256" r:id="rId2"/>
-    <p:sldId id="1320" r:id="rId3"/>
-    <p:sldId id="1289" r:id="rId4"/>
-    <p:sldId id="1314" r:id="rId5"/>
-    <p:sldId id="1318" r:id="rId6"/>
-    <p:sldId id="1315" r:id="rId7"/>
-    <p:sldId id="1319" r:id="rId8"/>
-    <p:sldId id="1316" r:id="rId9"/>
+    <p:sldId id="258" r:id="rId3"/>
+    <p:sldId id="1320" r:id="rId4"/>
+    <p:sldId id="1289" r:id="rId5"/>
+    <p:sldId id="1314" r:id="rId6"/>
+    <p:sldId id="1318" r:id="rId7"/>
+    <p:sldId id="1315" r:id="rId8"/>
+    <p:sldId id="1319" r:id="rId9"/>
+    <p:sldId id="1316" r:id="rId10"/>
   </p:sldIdLst>
   <p:sldSz cx="9144000" cy="6858000" type="screen4x3"/>
   <p:notesSz cx="7772400" cy="10058400"/>
@@ -120,6 +121,7 @@
         <p14:section name="Standardabschnitt" id="{9B5D7305-A192-4B1D-99D4-70BE9E08F5C8}">
           <p14:sldIdLst>
             <p14:sldId id="256"/>
+            <p14:sldId id="258"/>
             <p14:sldId id="1320"/>
             <p14:sldId id="1289"/>
             <p14:sldId id="1314"/>
@@ -220,7 +222,7 @@
           <a:p>
             <a:fld id="{390E69D5-8A05-43AD-B5FD-86D96081B052}" type="datetimeFigureOut">
               <a:rPr lang="de-AT" smtClean="0"/>
-              <a:t>17.10.2023</a:t>
+              <a:t>23.10.2023</a:t>
             </a:fld>
             <a:endParaRPr lang="de-AT"/>
           </a:p>
@@ -923,6 +925,36 @@
 </p:sldLayout>
 </file>
 
+<file path=ppt/slideLayouts/slideLayout4.xml><?xml version="1.0" encoding="utf-8"?>
+<p:sldLayout xmlns:a="http://schemas.openxmlformats.org/drawingml/2006/main" xmlns:r="http://schemas.openxmlformats.org/officeDocument/2006/relationships" xmlns:p="http://schemas.openxmlformats.org/presentationml/2006/main" type="blank">
+  <p:cSld name="1_Blank Slide">
+    <p:spTree>
+      <p:nvGrpSpPr>
+        <p:cNvPr id="1" name=""/>
+        <p:cNvGrpSpPr/>
+        <p:nvPr/>
+      </p:nvGrpSpPr>
+      <p:grpSpPr>
+        <a:xfrm>
+          <a:off x="0" y="0"/>
+          <a:ext cx="0" cy="0"/>
+          <a:chOff x="0" y="0"/>
+          <a:chExt cx="0" cy="0"/>
+        </a:xfrm>
+      </p:grpSpPr>
+    </p:spTree>
+    <p:extLst>
+      <p:ext uri="{BB962C8B-B14F-4D97-AF65-F5344CB8AC3E}">
+        <p14:creationId xmlns:p14="http://schemas.microsoft.com/office/powerpoint/2010/main" val="3052418887"/>
+      </p:ext>
+    </p:extLst>
+  </p:cSld>
+  <p:clrMapOvr>
+    <a:masterClrMapping/>
+  </p:clrMapOvr>
+</p:sldLayout>
+</file>
+
 <file path=ppt/slideMasters/slideMaster1.xml><?xml version="1.0" encoding="utf-8"?>
 <p:sldMaster xmlns:a="http://schemas.openxmlformats.org/drawingml/2006/main" xmlns:r="http://schemas.openxmlformats.org/officeDocument/2006/relationships" xmlns:p="http://schemas.openxmlformats.org/presentationml/2006/main">
   <p:cSld>
@@ -1113,7 +1145,7 @@
           <p:nvPr/>
         </p:nvPicPr>
         <p:blipFill>
-          <a:blip r:embed="rId5"/>
+          <a:blip r:embed="rId6"/>
           <a:stretch/>
         </p:blipFill>
         <p:spPr>
@@ -1136,7 +1168,7 @@
           <p:nvPr/>
         </p:nvPicPr>
         <p:blipFill>
-          <a:blip r:embed="rId6"/>
+          <a:blip r:embed="rId7"/>
           <a:stretch/>
         </p:blipFill>
         <p:spPr>
@@ -1397,6 +1429,7 @@
     <p:sldLayoutId id="2147483662" r:id="rId1"/>
     <p:sldLayoutId id="2147483676" r:id="rId2"/>
     <p:sldLayoutId id="2147483677" r:id="rId3"/>
+    <p:sldLayoutId id="2147483678" r:id="rId4"/>
   </p:sldLayoutIdLst>
   <p:hf sldNum="0" hdr="0" ftr="0" dt="0"/>
   <p:txStyles>
@@ -1919,6 +1952,406 @@
       </p:grpSpPr>
       <p:sp>
         <p:nvSpPr>
+          <p:cNvPr id="92" name="PlaceHolder 1"/>
+          <p:cNvSpPr>
+            <a:spLocks noGrp="1"/>
+          </p:cNvSpPr>
+          <p:nvPr>
+            <p:ph type="title"/>
+          </p:nvPr>
+        </p:nvSpPr>
+        <p:spPr>
+          <a:xfrm>
+            <a:off x="468360" y="476640"/>
+            <a:ext cx="8217720" cy="680400"/>
+          </a:xfrm>
+          <a:prstGeom prst="rect">
+            <a:avLst/>
+          </a:prstGeom>
+          <a:noFill/>
+          <a:ln w="0">
+            <a:noFill/>
+          </a:ln>
+        </p:spPr>
+        <p:txBody>
+          <a:bodyPr lIns="90000" tIns="45000" rIns="90000" bIns="45000" numCol="1" spcCol="0" anchor="ctr">
+            <a:noAutofit/>
+          </a:bodyPr>
+          <a:lstStyle/>
+          <a:p>
+            <a:pPr algn="ctr">
+              <a:lnSpc>
+                <a:spcPct val="100000"/>
+              </a:lnSpc>
+              <a:buNone/>
+            </a:pPr>
+            <a:r>
+              <a:rPr lang="en-US" sz="2400" b="1" strike="noStrike" spc="-1" dirty="0">
+                <a:solidFill>
+                  <a:srgbClr val="990000"/>
+                </a:solidFill>
+                <a:latin typeface="Arial"/>
+              </a:rPr>
+              <a:t>Vecto 4.0.1.3217 OFFICIAL RELEASE</a:t>
+            </a:r>
+            <a:br>
+              <a:rPr sz="2400" dirty="0"/>
+            </a:br>
+            <a:r>
+              <a:rPr lang="en-US" sz="1600" spc="-1" dirty="0">
+                <a:latin typeface="Arial"/>
+              </a:rPr>
+              <a:t>23.10.2023</a:t>
+            </a:r>
+            <a:endParaRPr lang="en-US" sz="1600" b="0" strike="noStrike" spc="-1" dirty="0">
+              <a:latin typeface="Arial"/>
+            </a:endParaRPr>
+          </a:p>
+        </p:txBody>
+      </p:sp>
+      <p:sp>
+        <p:nvSpPr>
+          <p:cNvPr id="93" name="PlaceHolder 2"/>
+          <p:cNvSpPr>
+            <a:spLocks noGrp="1"/>
+          </p:cNvSpPr>
+          <p:nvPr>
+            <p:ph/>
+          </p:nvPr>
+        </p:nvSpPr>
+        <p:spPr>
+          <a:xfrm>
+            <a:off x="323640" y="1268640"/>
+            <a:ext cx="8496360" cy="4823640"/>
+          </a:xfrm>
+          <a:prstGeom prst="rect">
+            <a:avLst/>
+          </a:prstGeom>
+          <a:noFill/>
+          <a:ln w="0">
+            <a:noFill/>
+          </a:ln>
+        </p:spPr>
+        <p:txBody>
+          <a:bodyPr lIns="90000" tIns="45000" rIns="90000" bIns="45000" numCol="1" spcCol="0" anchor="t">
+            <a:noAutofit/>
+          </a:bodyPr>
+          <a:lstStyle/>
+          <a:p>
+            <a:pPr marL="343080" indent="-343080">
+              <a:lnSpc>
+                <a:spcPct val="100000"/>
+              </a:lnSpc>
+              <a:spcBef>
+                <a:spcPts val="320"/>
+              </a:spcBef>
+              <a:buClr>
+                <a:srgbClr val="000000"/>
+              </a:buClr>
+              <a:buFont typeface="Symbol"/>
+              <a:buChar char=""/>
+              <a:tabLst>
+                <a:tab pos="1886040" algn="l"/>
+              </a:tabLst>
+            </a:pPr>
+            <a:r>
+              <a:rPr lang="en-US" sz="1600" b="1" spc="-1" dirty="0">
+                <a:solidFill>
+                  <a:srgbClr val="000000"/>
+                </a:solidFill>
+              </a:rPr>
+              <a:t>Improvements</a:t>
+            </a:r>
+          </a:p>
+          <a:p>
+            <a:pPr marL="800280" lvl="1" indent="-343080">
+              <a:lnSpc>
+                <a:spcPct val="100000"/>
+              </a:lnSpc>
+              <a:spcBef>
+                <a:spcPts val="320"/>
+              </a:spcBef>
+              <a:buClr>
+                <a:srgbClr val="000000"/>
+              </a:buClr>
+              <a:buFont typeface="Symbol"/>
+              <a:buChar char=""/>
+              <a:tabLst>
+                <a:tab pos="1886040" algn="l"/>
+              </a:tabLst>
+            </a:pPr>
+            <a:r>
+              <a:rPr lang="en-US" sz="1400" spc="-1" dirty="0">
+                <a:solidFill>
+                  <a:srgbClr val="000000"/>
+                </a:solidFill>
+              </a:rPr>
+              <a:t>VTP mode: create zip archive for input and output files</a:t>
+            </a:r>
+          </a:p>
+          <a:p>
+            <a:pPr marL="343080" indent="-343080">
+              <a:lnSpc>
+                <a:spcPct val="100000"/>
+              </a:lnSpc>
+              <a:spcBef>
+                <a:spcPts val="320"/>
+              </a:spcBef>
+              <a:buClr>
+                <a:srgbClr val="000000"/>
+              </a:buClr>
+              <a:buFont typeface="Symbol"/>
+              <a:buChar char=""/>
+              <a:tabLst>
+                <a:tab pos="1886040" algn="l"/>
+              </a:tabLst>
+            </a:pPr>
+            <a:r>
+              <a:rPr lang="en-US" sz="1600" b="1" spc="-1" dirty="0">
+                <a:solidFill>
+                  <a:srgbClr val="000000"/>
+                </a:solidFill>
+              </a:rPr>
+              <a:t>- Bugfixes</a:t>
+            </a:r>
+          </a:p>
+          <a:p>
+            <a:pPr marL="800280" lvl="1" indent="-343080">
+              <a:lnSpc>
+                <a:spcPct val="100000"/>
+              </a:lnSpc>
+              <a:spcBef>
+                <a:spcPts val="320"/>
+              </a:spcBef>
+              <a:buClr>
+                <a:srgbClr val="000000"/>
+              </a:buClr>
+              <a:buFont typeface="Symbol"/>
+              <a:buChar char=""/>
+              <a:tabLst>
+                <a:tab pos="1886040" algn="l"/>
+              </a:tabLst>
+            </a:pPr>
+            <a:r>
+              <a:rPr lang="en-US" sz="1400" spc="-1" dirty="0">
+                <a:solidFill>
+                  <a:srgbClr val="000000"/>
+                </a:solidFill>
+              </a:rPr>
+              <a:t>bugfix in CIF for complete(d) buses - do not write </a:t>
+            </a:r>
+            <a:r>
+              <a:rPr lang="en-US" sz="1400" spc="-1" dirty="0" err="1">
+                <a:solidFill>
+                  <a:srgbClr val="000000"/>
+                </a:solidFill>
+              </a:rPr>
+              <a:t>PrimaryVehicleSubgroup</a:t>
+            </a:r>
+            <a:r>
+              <a:rPr lang="en-US" sz="1400" spc="-1" dirty="0">
+                <a:solidFill>
+                  <a:srgbClr val="000000"/>
+                </a:solidFill>
+              </a:rPr>
+              <a:t> element</a:t>
+            </a:r>
+          </a:p>
+          <a:p>
+            <a:pPr marL="800280" lvl="1" indent="-343080">
+              <a:lnSpc>
+                <a:spcPct val="100000"/>
+              </a:lnSpc>
+              <a:spcBef>
+                <a:spcPts val="320"/>
+              </a:spcBef>
+              <a:buClr>
+                <a:srgbClr val="000000"/>
+              </a:buClr>
+              <a:buFont typeface="Symbol"/>
+              <a:buChar char=""/>
+              <a:tabLst>
+                <a:tab pos="1886040" algn="l"/>
+              </a:tabLst>
+            </a:pPr>
+            <a:r>
+              <a:rPr lang="en-US" sz="1400" spc="-1" dirty="0">
+                <a:solidFill>
+                  <a:srgbClr val="000000"/>
+                </a:solidFill>
+              </a:rPr>
+              <a:t>fix hybrid strategy: power comparison</a:t>
+            </a:r>
+          </a:p>
+          <a:p>
+            <a:pPr marL="800280" lvl="1" indent="-343080">
+              <a:lnSpc>
+                <a:spcPct val="100000"/>
+              </a:lnSpc>
+              <a:spcBef>
+                <a:spcPts val="320"/>
+              </a:spcBef>
+              <a:buClr>
+                <a:srgbClr val="000000"/>
+              </a:buClr>
+              <a:buFont typeface="Symbol"/>
+              <a:buChar char=""/>
+              <a:tabLst>
+                <a:tab pos="1886040" algn="l"/>
+              </a:tabLst>
+            </a:pPr>
+            <a:r>
+              <a:rPr lang="en-US" sz="1400" spc="-1" dirty="0">
+                <a:solidFill>
+                  <a:srgbClr val="000000"/>
+                </a:solidFill>
+              </a:rPr>
+              <a:t>fix exempted vehicles do not work (error message that XML version is not supported)</a:t>
+            </a:r>
+          </a:p>
+          <a:p>
+            <a:pPr marL="800280" lvl="1" indent="-343080">
+              <a:lnSpc>
+                <a:spcPct val="100000"/>
+              </a:lnSpc>
+              <a:spcBef>
+                <a:spcPts val="320"/>
+              </a:spcBef>
+              <a:buClr>
+                <a:srgbClr val="000000"/>
+              </a:buClr>
+              <a:buFont typeface="Symbol"/>
+              <a:buChar char=""/>
+              <a:tabLst>
+                <a:tab pos="1886040" algn="l"/>
+              </a:tabLst>
+            </a:pPr>
+            <a:r>
+              <a:rPr lang="en-US" sz="1400" spc="-1" dirty="0">
+                <a:solidFill>
+                  <a:srgbClr val="000000"/>
+                </a:solidFill>
+              </a:rPr>
+              <a:t>bugfix in XML schema: remove wrong PS technology entry for lorries</a:t>
+            </a:r>
+          </a:p>
+          <a:p>
+            <a:pPr marL="800280" lvl="1" indent="-343080">
+              <a:lnSpc>
+                <a:spcPct val="100000"/>
+              </a:lnSpc>
+              <a:spcBef>
+                <a:spcPts val="320"/>
+              </a:spcBef>
+              <a:buClr>
+                <a:srgbClr val="000000"/>
+              </a:buClr>
+              <a:buFont typeface="Symbol"/>
+              <a:buChar char=""/>
+              <a:tabLst>
+                <a:tab pos="1886040" algn="l"/>
+              </a:tabLst>
+            </a:pPr>
+            <a:r>
+              <a:rPr lang="en-US" sz="1400" spc="-1" dirty="0">
+                <a:solidFill>
+                  <a:srgbClr val="000000"/>
+                </a:solidFill>
+              </a:rPr>
+              <a:t>bugfix for conditioning power demand for IHPC vehicles</a:t>
+            </a:r>
+            <a:endParaRPr lang="en-US" sz="1050" strike="noStrike" spc="-1" dirty="0">
+              <a:latin typeface="Arial"/>
+            </a:endParaRPr>
+          </a:p>
+          <a:p>
+            <a:pPr>
+              <a:lnSpc>
+                <a:spcPct val="100000"/>
+              </a:lnSpc>
+              <a:buNone/>
+              <a:tabLst>
+                <a:tab pos="1886040" algn="l"/>
+              </a:tabLst>
+            </a:pPr>
+            <a:endParaRPr lang="en-US" sz="1400" b="0" strike="noStrike" spc="-1" dirty="0">
+              <a:latin typeface="Arial"/>
+            </a:endParaRPr>
+          </a:p>
+          <a:p>
+            <a:pPr>
+              <a:lnSpc>
+                <a:spcPct val="100000"/>
+              </a:lnSpc>
+              <a:spcBef>
+                <a:spcPts val="281"/>
+              </a:spcBef>
+              <a:buNone/>
+              <a:tabLst>
+                <a:tab pos="1886040" algn="l"/>
+              </a:tabLst>
+            </a:pPr>
+            <a:endParaRPr lang="en-US" sz="1400" b="0" strike="noStrike" spc="-1" dirty="0">
+              <a:latin typeface="Arial"/>
+            </a:endParaRPr>
+          </a:p>
+          <a:p>
+            <a:pPr>
+              <a:lnSpc>
+                <a:spcPct val="100000"/>
+              </a:lnSpc>
+              <a:buNone/>
+              <a:tabLst>
+                <a:tab pos="1886040" algn="l"/>
+              </a:tabLst>
+            </a:pPr>
+            <a:endParaRPr lang="en-US" sz="1400" b="0" strike="noStrike" spc="-1" dirty="0">
+              <a:latin typeface="Arial"/>
+            </a:endParaRPr>
+          </a:p>
+          <a:p>
+            <a:pPr>
+              <a:lnSpc>
+                <a:spcPct val="100000"/>
+              </a:lnSpc>
+              <a:buNone/>
+              <a:tabLst>
+                <a:tab pos="1886040" algn="l"/>
+              </a:tabLst>
+            </a:pPr>
+            <a:endParaRPr lang="en-US" sz="1400" b="0" strike="noStrike" spc="-1" dirty="0">
+              <a:latin typeface="Arial"/>
+            </a:endParaRPr>
+          </a:p>
+        </p:txBody>
+      </p:sp>
+    </p:spTree>
+  </p:cSld>
+  <p:clrMapOvr>
+    <a:masterClrMapping/>
+  </p:clrMapOvr>
+</p:sld>
+</file>
+
+<file path=ppt/slides/slide3.xml><?xml version="1.0" encoding="utf-8"?>
+<p:sld xmlns:a="http://schemas.openxmlformats.org/drawingml/2006/main" xmlns:r="http://schemas.openxmlformats.org/officeDocument/2006/relationships" xmlns:p="http://schemas.openxmlformats.org/presentationml/2006/main">
+  <p:cSld>
+    <p:spTree>
+      <p:nvGrpSpPr>
+        <p:cNvPr id="1" name=""/>
+        <p:cNvGrpSpPr/>
+        <p:nvPr/>
+      </p:nvGrpSpPr>
+      <p:grpSpPr>
+        <a:xfrm>
+          <a:off x="0" y="0"/>
+          <a:ext cx="0" cy="0"/>
+          <a:chOff x="0" y="0"/>
+          <a:chExt cx="0" cy="0"/>
+        </a:xfrm>
+      </p:grpSpPr>
+      <p:sp>
+        <p:nvSpPr>
           <p:cNvPr id="88" name="Text Box 94"/>
           <p:cNvSpPr/>
           <p:nvPr/>
@@ -2143,7 +2576,7 @@
 </p:sld>
 </file>
 
-<file path=ppt/slides/slide3.xml><?xml version="1.0" encoding="utf-8"?>
+<file path=ppt/slides/slide4.xml><?xml version="1.0" encoding="utf-8"?>
 <p:sld xmlns:a="http://schemas.openxmlformats.org/drawingml/2006/main" xmlns:r="http://schemas.openxmlformats.org/officeDocument/2006/relationships" xmlns:p="http://schemas.openxmlformats.org/presentationml/2006/main">
   <p:cSld>
     <p:spTree>
@@ -2262,7 +2695,7 @@
 </p:sld>
 </file>
 
-<file path=ppt/slides/slide4.xml><?xml version="1.0" encoding="utf-8"?>
+<file path=ppt/slides/slide5.xml><?xml version="1.0" encoding="utf-8"?>
 <p:sld xmlns:a="http://schemas.openxmlformats.org/drawingml/2006/main" xmlns:r="http://schemas.openxmlformats.org/officeDocument/2006/relationships" xmlns:p="http://schemas.openxmlformats.org/presentationml/2006/main">
   <p:cSld>
     <p:spTree>
@@ -2604,7 +3037,7 @@
 </p:sld>
 </file>
 
-<file path=ppt/slides/slide5.xml><?xml version="1.0" encoding="utf-8"?>
+<file path=ppt/slides/slide6.xml><?xml version="1.0" encoding="utf-8"?>
 <p:sld xmlns:a="http://schemas.openxmlformats.org/drawingml/2006/main" xmlns:r="http://schemas.openxmlformats.org/officeDocument/2006/relationships" xmlns:p="http://schemas.openxmlformats.org/presentationml/2006/main">
   <p:cSld>
     <p:spTree>
@@ -4431,7 +4864,7 @@
 </p:sld>
 </file>
 
-<file path=ppt/slides/slide6.xml><?xml version="1.0" encoding="utf-8"?>
+<file path=ppt/slides/slide7.xml><?xml version="1.0" encoding="utf-8"?>
 <p:sld xmlns:a="http://schemas.openxmlformats.org/drawingml/2006/main" xmlns:r="http://schemas.openxmlformats.org/officeDocument/2006/relationships" xmlns:p="http://schemas.openxmlformats.org/presentationml/2006/main">
   <p:cSld>
     <p:spTree>
@@ -4541,7 +4974,7 @@
 </p:sld>
 </file>
 
-<file path=ppt/slides/slide7.xml><?xml version="1.0" encoding="utf-8"?>
+<file path=ppt/slides/slide8.xml><?xml version="1.0" encoding="utf-8"?>
 <p:sld xmlns:a="http://schemas.openxmlformats.org/drawingml/2006/main" xmlns:r="http://schemas.openxmlformats.org/officeDocument/2006/relationships" xmlns:p="http://schemas.openxmlformats.org/presentationml/2006/main">
   <p:cSld>
     <p:spTree>
@@ -4718,7 +5151,7 @@
 </p:sld>
 </file>
 
-<file path=ppt/slides/slide8.xml><?xml version="1.0" encoding="utf-8"?>
+<file path=ppt/slides/slide9.xml><?xml version="1.0" encoding="utf-8"?>
 <p:sld xmlns:a="http://schemas.openxmlformats.org/drawingml/2006/main" xmlns:r="http://schemas.openxmlformats.org/officeDocument/2006/relationships" xmlns:p="http://schemas.openxmlformats.org/presentationml/2006/main">
   <p:cSld>
     <p:spTree>

--- a/Documentation/User Manual Source/Release Notes Vecto4.x.pptx
+++ b/Documentation/User Manual Source/Release Notes Vecto4.x.pptx
@@ -5,18 +5,20 @@
     <p:sldMasterId id="2147483661" r:id="rId1"/>
   </p:sldMasterIdLst>
   <p:notesMasterIdLst>
-    <p:notesMasterId r:id="rId11"/>
+    <p:notesMasterId r:id="rId13"/>
   </p:notesMasterIdLst>
   <p:sldIdLst>
     <p:sldId id="256" r:id="rId2"/>
-    <p:sldId id="258" r:id="rId3"/>
-    <p:sldId id="1320" r:id="rId4"/>
-    <p:sldId id="1289" r:id="rId5"/>
-    <p:sldId id="1314" r:id="rId6"/>
-    <p:sldId id="1318" r:id="rId7"/>
-    <p:sldId id="1315" r:id="rId8"/>
-    <p:sldId id="1319" r:id="rId9"/>
-    <p:sldId id="1316" r:id="rId10"/>
+    <p:sldId id="1322" r:id="rId3"/>
+    <p:sldId id="258" r:id="rId4"/>
+    <p:sldId id="1321" r:id="rId5"/>
+    <p:sldId id="1320" r:id="rId6"/>
+    <p:sldId id="1289" r:id="rId7"/>
+    <p:sldId id="1314" r:id="rId8"/>
+    <p:sldId id="1318" r:id="rId9"/>
+    <p:sldId id="1315" r:id="rId10"/>
+    <p:sldId id="1319" r:id="rId11"/>
+    <p:sldId id="1316" r:id="rId12"/>
   </p:sldIdLst>
   <p:sldSz cx="9144000" cy="6858000" type="screen4x3"/>
   <p:notesSz cx="7772400" cy="10058400"/>
@@ -121,7 +123,9 @@
         <p14:section name="Standardabschnitt" id="{9B5D7305-A192-4B1D-99D4-70BE9E08F5C8}">
           <p14:sldIdLst>
             <p14:sldId id="256"/>
+            <p14:sldId id="1322"/>
             <p14:sldId id="258"/>
+            <p14:sldId id="1321"/>
             <p14:sldId id="1320"/>
             <p14:sldId id="1289"/>
             <p14:sldId id="1314"/>
@@ -222,7 +226,7 @@
           <a:p>
             <a:fld id="{390E69D5-8A05-43AD-B5FD-86D96081B052}" type="datetimeFigureOut">
               <a:rPr lang="de-AT" smtClean="0"/>
-              <a:t>23.10.2023</a:t>
+              <a:t>18.12.2023</a:t>
             </a:fld>
             <a:endParaRPr lang="de-AT"/>
           </a:p>
@@ -1933,6 +1937,682 @@
 </p:sld>
 </file>
 
+<file path=ppt/slides/slide10.xml><?xml version="1.0" encoding="utf-8"?>
+<p:sld xmlns:a="http://schemas.openxmlformats.org/drawingml/2006/main" xmlns:r="http://schemas.openxmlformats.org/officeDocument/2006/relationships" xmlns:p="http://schemas.openxmlformats.org/presentationml/2006/main">
+  <p:cSld>
+    <p:spTree>
+      <p:nvGrpSpPr>
+        <p:cNvPr id="1" name=""/>
+        <p:cNvGrpSpPr/>
+        <p:nvPr/>
+      </p:nvGrpSpPr>
+      <p:grpSpPr>
+        <a:xfrm>
+          <a:off x="0" y="0"/>
+          <a:ext cx="0" cy="0"/>
+          <a:chOff x="0" y="0"/>
+          <a:chExt cx="0" cy="0"/>
+        </a:xfrm>
+      </p:grpSpPr>
+      <p:sp>
+        <p:nvSpPr>
+          <p:cNvPr id="5" name="Titel 4"/>
+          <p:cNvSpPr>
+            <a:spLocks noGrp="1"/>
+          </p:cNvSpPr>
+          <p:nvPr>
+            <p:ph type="title"/>
+          </p:nvPr>
+        </p:nvSpPr>
+        <p:spPr>
+          <a:xfrm>
+            <a:off x="588206" y="453541"/>
+            <a:ext cx="8229240" cy="1128611"/>
+          </a:xfrm>
+        </p:spPr>
+        <p:txBody>
+          <a:bodyPr/>
+          <a:lstStyle/>
+          <a:p>
+            <a:r>
+              <a:rPr lang="en-US" dirty="0"/>
+              <a:t>Implementation of Declaration Mode for </a:t>
+            </a:r>
+            <a:r>
+              <a:rPr lang="en-US" dirty="0" err="1"/>
+              <a:t>xEV</a:t>
+            </a:r>
+            <a:r>
+              <a:rPr lang="en-US" dirty="0"/>
+              <a:t>-Vehicles</a:t>
+            </a:r>
+            <a:br>
+              <a:rPr lang="en-US" dirty="0"/>
+            </a:br>
+            <a:endParaRPr lang="en-GB" dirty="0"/>
+          </a:p>
+        </p:txBody>
+      </p:sp>
+      <p:sp>
+        <p:nvSpPr>
+          <p:cNvPr id="2" name="Textfeld 1">
+            <a:extLst>
+              <a:ext uri="{FF2B5EF4-FFF2-40B4-BE49-F238E27FC236}">
+                <a16:creationId xmlns:a16="http://schemas.microsoft.com/office/drawing/2014/main" id="{7F97F0DD-10D2-4FD8-BC61-46C366138663}"/>
+              </a:ext>
+            </a:extLst>
+          </p:cNvPr>
+          <p:cNvSpPr txBox="1"/>
+          <p:nvPr/>
+        </p:nvSpPr>
+        <p:spPr>
+          <a:xfrm>
+            <a:off x="588206" y="1210614"/>
+            <a:ext cx="7967588" cy="3385542"/>
+          </a:xfrm>
+          <a:prstGeom prst="rect">
+            <a:avLst/>
+          </a:prstGeom>
+          <a:noFill/>
+        </p:spPr>
+        <p:txBody>
+          <a:bodyPr wrap="square" rtlCol="0">
+            <a:spAutoFit/>
+          </a:bodyPr>
+          <a:lstStyle/>
+          <a:p>
+            <a:pPr marL="342900" indent="-342900">
+              <a:spcBef>
+                <a:spcPts val="1200"/>
+              </a:spcBef>
+              <a:buFont typeface="Arial" panose="020B0604020202020204" pitchFamily="34" charset="0"/>
+              <a:buChar char="•"/>
+            </a:pPr>
+            <a:r>
+              <a:rPr lang="en-GB" sz="2000" dirty="0"/>
+              <a:t>Generic auxiliary parametrisation</a:t>
+            </a:r>
+          </a:p>
+          <a:p>
+            <a:pPr marL="342900" indent="-342900">
+              <a:spcBef>
+                <a:spcPts val="1200"/>
+              </a:spcBef>
+              <a:buFont typeface="Arial" panose="020B0604020202020204" pitchFamily="34" charset="0"/>
+              <a:buChar char="•"/>
+            </a:pPr>
+            <a:r>
+              <a:rPr lang="en-GB" sz="2000" dirty="0"/>
+              <a:t>Generic parametrisation of usable SOC range</a:t>
+            </a:r>
+          </a:p>
+          <a:p>
+            <a:pPr marL="342900" indent="-342900">
+              <a:spcBef>
+                <a:spcPts val="1200"/>
+              </a:spcBef>
+              <a:buFont typeface="Arial" panose="020B0604020202020204" pitchFamily="34" charset="0"/>
+              <a:buChar char="•"/>
+            </a:pPr>
+            <a:r>
+              <a:rPr lang="en-GB" sz="2000" dirty="0"/>
+              <a:t>Generic parametrisation of Serial/Parallel Hybrid Strategy parameters</a:t>
+            </a:r>
+          </a:p>
+          <a:p>
+            <a:pPr marL="342900" indent="-342900">
+              <a:spcBef>
+                <a:spcPts val="1200"/>
+              </a:spcBef>
+              <a:buFont typeface="Arial" panose="020B0604020202020204" pitchFamily="34" charset="0"/>
+              <a:buChar char="•"/>
+            </a:pPr>
+            <a:r>
+              <a:rPr lang="en-GB" sz="2000" dirty="0"/>
+              <a:t>Automated simulation of OVC-HEV</a:t>
+            </a:r>
+          </a:p>
+          <a:p>
+            <a:pPr marL="742950" lvl="1" indent="-285750">
+              <a:spcBef>
+                <a:spcPts val="1200"/>
+              </a:spcBef>
+              <a:buFont typeface="Arial" panose="020B0604020202020204" pitchFamily="34" charset="0"/>
+              <a:buChar char="•"/>
+            </a:pPr>
+            <a:r>
+              <a:rPr lang="en-GB" sz="1600" dirty="0"/>
+              <a:t>Charge depleting mode (CD): The propulsion energy is provided by the electric storage only</a:t>
+            </a:r>
+          </a:p>
+          <a:p>
+            <a:pPr marL="742950" lvl="1" indent="-285750">
+              <a:spcBef>
+                <a:spcPts val="1200"/>
+              </a:spcBef>
+              <a:buFont typeface="Arial" panose="020B0604020202020204" pitchFamily="34" charset="0"/>
+              <a:buChar char="•"/>
+            </a:pPr>
+            <a:r>
+              <a:rPr lang="en-GB" sz="1600" dirty="0"/>
+              <a:t>Charge sustaining mode (CS): The propulsion energy is provided by the fuel storage</a:t>
+            </a:r>
+            <a:endParaRPr lang="en-GB" sz="2000" dirty="0"/>
+          </a:p>
+        </p:txBody>
+      </p:sp>
+    </p:spTree>
+    <p:extLst>
+      <p:ext uri="{BB962C8B-B14F-4D97-AF65-F5344CB8AC3E}">
+        <p14:creationId xmlns:p14="http://schemas.microsoft.com/office/powerpoint/2010/main" val="3750009579"/>
+      </p:ext>
+    </p:extLst>
+  </p:cSld>
+  <p:clrMapOvr>
+    <a:masterClrMapping/>
+  </p:clrMapOvr>
+</p:sld>
+</file>
+
+<file path=ppt/slides/slide11.xml><?xml version="1.0" encoding="utf-8"?>
+<p:sld xmlns:a="http://schemas.openxmlformats.org/drawingml/2006/main" xmlns:r="http://schemas.openxmlformats.org/officeDocument/2006/relationships" xmlns:p="http://schemas.openxmlformats.org/presentationml/2006/main">
+  <p:cSld>
+    <p:spTree>
+      <p:nvGrpSpPr>
+        <p:cNvPr id="1" name=""/>
+        <p:cNvGrpSpPr/>
+        <p:nvPr/>
+      </p:nvGrpSpPr>
+      <p:grpSpPr>
+        <a:xfrm>
+          <a:off x="0" y="0"/>
+          <a:ext cx="0" cy="0"/>
+          <a:chOff x="0" y="0"/>
+          <a:chExt cx="0" cy="0"/>
+        </a:xfrm>
+      </p:grpSpPr>
+      <p:sp>
+        <p:nvSpPr>
+          <p:cNvPr id="5" name="Titel 4"/>
+          <p:cNvSpPr>
+            <a:spLocks noGrp="1"/>
+          </p:cNvSpPr>
+          <p:nvPr>
+            <p:ph type="title"/>
+          </p:nvPr>
+        </p:nvSpPr>
+        <p:spPr>
+          <a:xfrm>
+            <a:off x="588206" y="453541"/>
+            <a:ext cx="8229240" cy="1128611"/>
+          </a:xfrm>
+        </p:spPr>
+        <p:txBody>
+          <a:bodyPr/>
+          <a:lstStyle/>
+          <a:p>
+            <a:r>
+              <a:rPr lang="en-US" dirty="0"/>
+              <a:t>Implementation of Declaration Mode for </a:t>
+            </a:r>
+            <a:r>
+              <a:rPr lang="en-US" dirty="0" err="1"/>
+              <a:t>xEV</a:t>
+            </a:r>
+            <a:r>
+              <a:rPr lang="en-US" dirty="0"/>
+              <a:t>-Lorries</a:t>
+            </a:r>
+            <a:br>
+              <a:rPr lang="en-US" dirty="0"/>
+            </a:br>
+            <a:endParaRPr lang="en-GB" dirty="0"/>
+          </a:p>
+        </p:txBody>
+      </p:sp>
+      <p:sp>
+        <p:nvSpPr>
+          <p:cNvPr id="10" name="Inhaltsplatzhalter 5">
+            <a:extLst>
+              <a:ext uri="{FF2B5EF4-FFF2-40B4-BE49-F238E27FC236}">
+                <a16:creationId xmlns:a16="http://schemas.microsoft.com/office/drawing/2014/main" id="{9AC94515-EF8A-4107-800D-FAA5237CA306}"/>
+              </a:ext>
+            </a:extLst>
+          </p:cNvPr>
+          <p:cNvSpPr txBox="1">
+            <a:spLocks/>
+          </p:cNvSpPr>
+          <p:nvPr/>
+        </p:nvSpPr>
+        <p:spPr>
+          <a:xfrm>
+            <a:off x="749355" y="1085088"/>
+            <a:ext cx="8394645" cy="5128557"/>
+          </a:xfrm>
+          <a:prstGeom prst="rect">
+            <a:avLst/>
+          </a:prstGeom>
+          <a:noFill/>
+          <a:ln w="0">
+            <a:noFill/>
+          </a:ln>
+        </p:spPr>
+        <p:txBody>
+          <a:bodyPr lIns="0" tIns="0" rIns="0" bIns="0" anchor="t">
+            <a:normAutofit/>
+          </a:bodyPr>
+          <a:lstStyle>
+            <a:lvl1pPr marL="228600" indent="-228600" algn="l" defTabSz="914400" rtl="0" eaLnBrk="1" latinLnBrk="0" hangingPunct="1">
+              <a:lnSpc>
+                <a:spcPct val="90000"/>
+              </a:lnSpc>
+              <a:spcBef>
+                <a:spcPts val="1000"/>
+              </a:spcBef>
+              <a:buFont typeface="Arial" panose="020B0604020202020204" pitchFamily="34" charset="0"/>
+              <a:buChar char="•"/>
+              <a:defRPr sz="2800" kern="1200">
+                <a:solidFill>
+                  <a:schemeClr val="tx1"/>
+                </a:solidFill>
+                <a:latin typeface="+mn-lt"/>
+                <a:ea typeface="+mn-ea"/>
+                <a:cs typeface="+mn-cs"/>
+              </a:defRPr>
+            </a:lvl1pPr>
+            <a:lvl2pPr marL="715963" indent="-266700" algn="l" defTabSz="914400" rtl="0" eaLnBrk="1" latinLnBrk="0" hangingPunct="1">
+              <a:lnSpc>
+                <a:spcPct val="90000"/>
+              </a:lnSpc>
+              <a:spcBef>
+                <a:spcPts val="500"/>
+              </a:spcBef>
+              <a:buFont typeface="Wingdings" panose="05000000000000000000" pitchFamily="2" charset="2"/>
+              <a:buChar char="§"/>
+              <a:defRPr sz="2400" kern="1200">
+                <a:solidFill>
+                  <a:schemeClr val="tx1"/>
+                </a:solidFill>
+                <a:latin typeface="+mn-lt"/>
+                <a:ea typeface="+mn-ea"/>
+                <a:cs typeface="+mn-cs"/>
+              </a:defRPr>
+            </a:lvl2pPr>
+            <a:lvl3pPr marL="1143000" indent="-228600" algn="l" defTabSz="914400" rtl="0" eaLnBrk="1" latinLnBrk="0" hangingPunct="1">
+              <a:lnSpc>
+                <a:spcPct val="90000"/>
+              </a:lnSpc>
+              <a:spcBef>
+                <a:spcPts val="500"/>
+              </a:spcBef>
+              <a:buFont typeface="Arial" panose="020B0604020202020204" pitchFamily="34" charset="0"/>
+              <a:buChar char="•"/>
+              <a:defRPr sz="2000" kern="1200">
+                <a:solidFill>
+                  <a:schemeClr val="tx1"/>
+                </a:solidFill>
+                <a:latin typeface="+mn-lt"/>
+                <a:ea typeface="+mn-ea"/>
+                <a:cs typeface="+mn-cs"/>
+              </a:defRPr>
+            </a:lvl3pPr>
+            <a:lvl4pPr marL="1600200" indent="-228600" algn="l" defTabSz="914400" rtl="0" eaLnBrk="1" latinLnBrk="0" hangingPunct="1">
+              <a:lnSpc>
+                <a:spcPct val="90000"/>
+              </a:lnSpc>
+              <a:spcBef>
+                <a:spcPts val="500"/>
+              </a:spcBef>
+              <a:buFont typeface="Arial" panose="020B0604020202020204" pitchFamily="34" charset="0"/>
+              <a:buChar char="•"/>
+              <a:defRPr sz="1800" kern="1200">
+                <a:solidFill>
+                  <a:schemeClr val="tx1"/>
+                </a:solidFill>
+                <a:latin typeface="+mn-lt"/>
+                <a:ea typeface="+mn-ea"/>
+                <a:cs typeface="+mn-cs"/>
+              </a:defRPr>
+            </a:lvl4pPr>
+            <a:lvl5pPr marL="2057400" indent="-228600" algn="l" defTabSz="914400" rtl="0" eaLnBrk="1" latinLnBrk="0" hangingPunct="1">
+              <a:lnSpc>
+                <a:spcPct val="90000"/>
+              </a:lnSpc>
+              <a:spcBef>
+                <a:spcPts val="500"/>
+              </a:spcBef>
+              <a:buFont typeface="Arial" panose="020B0604020202020204" pitchFamily="34" charset="0"/>
+              <a:buChar char="•"/>
+              <a:defRPr sz="1800" kern="1200">
+                <a:solidFill>
+                  <a:schemeClr val="tx1"/>
+                </a:solidFill>
+                <a:latin typeface="+mn-lt"/>
+                <a:ea typeface="+mn-ea"/>
+                <a:cs typeface="+mn-cs"/>
+              </a:defRPr>
+            </a:lvl5pPr>
+            <a:lvl6pPr marL="2514600" indent="-228600" algn="l" defTabSz="914400" rtl="0" eaLnBrk="1" latinLnBrk="0" hangingPunct="1">
+              <a:lnSpc>
+                <a:spcPct val="90000"/>
+              </a:lnSpc>
+              <a:spcBef>
+                <a:spcPts val="500"/>
+              </a:spcBef>
+              <a:buFont typeface="Arial" panose="020B0604020202020204" pitchFamily="34" charset="0"/>
+              <a:buChar char="•"/>
+              <a:defRPr sz="1800" kern="1200">
+                <a:solidFill>
+                  <a:schemeClr val="tx1"/>
+                </a:solidFill>
+                <a:latin typeface="+mn-lt"/>
+                <a:ea typeface="+mn-ea"/>
+                <a:cs typeface="+mn-cs"/>
+              </a:defRPr>
+            </a:lvl6pPr>
+            <a:lvl7pPr marL="2971800" indent="-228600" algn="l" defTabSz="914400" rtl="0" eaLnBrk="1" latinLnBrk="0" hangingPunct="1">
+              <a:lnSpc>
+                <a:spcPct val="90000"/>
+              </a:lnSpc>
+              <a:spcBef>
+                <a:spcPts val="500"/>
+              </a:spcBef>
+              <a:buFont typeface="Arial" panose="020B0604020202020204" pitchFamily="34" charset="0"/>
+              <a:buChar char="•"/>
+              <a:defRPr sz="1800" kern="1200">
+                <a:solidFill>
+                  <a:schemeClr val="tx1"/>
+                </a:solidFill>
+                <a:latin typeface="+mn-lt"/>
+                <a:ea typeface="+mn-ea"/>
+                <a:cs typeface="+mn-cs"/>
+              </a:defRPr>
+            </a:lvl7pPr>
+            <a:lvl8pPr marL="3429000" indent="-228600" algn="l" defTabSz="914400" rtl="0" eaLnBrk="1" latinLnBrk="0" hangingPunct="1">
+              <a:lnSpc>
+                <a:spcPct val="90000"/>
+              </a:lnSpc>
+              <a:spcBef>
+                <a:spcPts val="500"/>
+              </a:spcBef>
+              <a:buFont typeface="Arial" panose="020B0604020202020204" pitchFamily="34" charset="0"/>
+              <a:buChar char="•"/>
+              <a:defRPr sz="1800" kern="1200">
+                <a:solidFill>
+                  <a:schemeClr val="tx1"/>
+                </a:solidFill>
+                <a:latin typeface="+mn-lt"/>
+                <a:ea typeface="+mn-ea"/>
+                <a:cs typeface="+mn-cs"/>
+              </a:defRPr>
+            </a:lvl8pPr>
+            <a:lvl9pPr marL="3886200" indent="-228600" algn="l" defTabSz="914400" rtl="0" eaLnBrk="1" latinLnBrk="0" hangingPunct="1">
+              <a:lnSpc>
+                <a:spcPct val="90000"/>
+              </a:lnSpc>
+              <a:spcBef>
+                <a:spcPts val="500"/>
+              </a:spcBef>
+              <a:buFont typeface="Arial" panose="020B0604020202020204" pitchFamily="34" charset="0"/>
+              <a:buChar char="•"/>
+              <a:defRPr sz="1800" kern="1200">
+                <a:solidFill>
+                  <a:schemeClr val="tx1"/>
+                </a:solidFill>
+                <a:latin typeface="+mn-lt"/>
+                <a:ea typeface="+mn-ea"/>
+                <a:cs typeface="+mn-cs"/>
+              </a:defRPr>
+            </a:lvl9pPr>
+          </a:lstStyle>
+          <a:p>
+            <a:pPr>
+              <a:spcBef>
+                <a:spcPts val="1200"/>
+              </a:spcBef>
+            </a:pPr>
+            <a:endParaRPr lang="en-US" sz="1800" dirty="0"/>
+          </a:p>
+          <a:p>
+            <a:pPr>
+              <a:spcBef>
+                <a:spcPts val="1200"/>
+              </a:spcBef>
+            </a:pPr>
+            <a:r>
+              <a:rPr lang="pt-BR" sz="2000" dirty="0"/>
+              <a:t>Generic E-PTO for PEV and S-HEV in Declaration Mode</a:t>
+            </a:r>
+          </a:p>
+          <a:p>
+            <a:pPr>
+              <a:spcBef>
+                <a:spcPts val="1200"/>
+              </a:spcBef>
+            </a:pPr>
+            <a:r>
+              <a:rPr lang="pt-BR" sz="2000" dirty="0"/>
+              <a:t>E-PTO for PEV and S-HEV in Engineering Mode</a:t>
+            </a:r>
+            <a:endParaRPr lang="de-AT" sz="2000" dirty="0"/>
+          </a:p>
+          <a:p>
+            <a:pPr>
+              <a:spcBef>
+                <a:spcPts val="1200"/>
+              </a:spcBef>
+            </a:pPr>
+            <a:endParaRPr lang="en-US" sz="1800" dirty="0"/>
+          </a:p>
+        </p:txBody>
+      </p:sp>
+      <p:sp>
+        <p:nvSpPr>
+          <p:cNvPr id="13" name="Titel 4">
+            <a:extLst>
+              <a:ext uri="{FF2B5EF4-FFF2-40B4-BE49-F238E27FC236}">
+                <a16:creationId xmlns:a16="http://schemas.microsoft.com/office/drawing/2014/main" id="{BF7865A9-6D29-429C-8E5A-628574C8ECAA}"/>
+              </a:ext>
+            </a:extLst>
+          </p:cNvPr>
+          <p:cNvSpPr txBox="1">
+            <a:spLocks/>
+          </p:cNvSpPr>
+          <p:nvPr/>
+        </p:nvSpPr>
+        <p:spPr>
+          <a:xfrm>
+            <a:off x="588206" y="2622197"/>
+            <a:ext cx="8229240" cy="541326"/>
+          </a:xfrm>
+          <a:prstGeom prst="rect">
+            <a:avLst/>
+          </a:prstGeom>
+          <a:noFill/>
+          <a:ln w="0">
+            <a:noFill/>
+          </a:ln>
+        </p:spPr>
+        <p:txBody>
+          <a:bodyPr lIns="0" tIns="0" rIns="0" bIns="0" anchor="ctr">
+            <a:noAutofit/>
+          </a:bodyPr>
+          <a:lstStyle>
+            <a:lvl1pPr algn="l" defTabSz="914400" rtl="0" eaLnBrk="1" latinLnBrk="0" hangingPunct="1">
+              <a:lnSpc>
+                <a:spcPct val="90000"/>
+              </a:lnSpc>
+              <a:spcBef>
+                <a:spcPct val="0"/>
+              </a:spcBef>
+              <a:buNone/>
+              <a:defRPr lang="de-AT" sz="2400" b="1" kern="1200" noProof="0" dirty="0">
+                <a:solidFill>
+                  <a:srgbClr val="990000"/>
+                </a:solidFill>
+                <a:latin typeface="+mj-lt"/>
+                <a:ea typeface="+mj-ea"/>
+                <a:cs typeface="+mj-cs"/>
+              </a:defRPr>
+            </a:lvl1pPr>
+          </a:lstStyle>
+          <a:p>
+            <a:r>
+              <a:rPr lang="en-US" dirty="0"/>
+              <a:t>Implementation of Declaration Mode for Buses</a:t>
+            </a:r>
+            <a:br>
+              <a:rPr lang="en-US" dirty="0"/>
+            </a:br>
+            <a:endParaRPr lang="en-GB" dirty="0"/>
+          </a:p>
+        </p:txBody>
+      </p:sp>
+      <p:sp>
+        <p:nvSpPr>
+          <p:cNvPr id="14" name="Inhaltsplatzhalter 5">
+            <a:extLst>
+              <a:ext uri="{FF2B5EF4-FFF2-40B4-BE49-F238E27FC236}">
+                <a16:creationId xmlns:a16="http://schemas.microsoft.com/office/drawing/2014/main" id="{346F72FC-4385-4A8E-8F9F-B0A7B6786FA6}"/>
+              </a:ext>
+            </a:extLst>
+          </p:cNvPr>
+          <p:cNvSpPr>
+            <a:spLocks noGrp="1"/>
+          </p:cNvSpPr>
+          <p:nvPr>
+            <p:ph idx="1"/>
+          </p:nvPr>
+        </p:nvSpPr>
+        <p:spPr>
+          <a:xfrm>
+            <a:off x="588206" y="2861362"/>
+            <a:ext cx="8394645" cy="1384882"/>
+          </a:xfrm>
+        </p:spPr>
+        <p:txBody>
+          <a:bodyPr>
+            <a:normAutofit/>
+          </a:bodyPr>
+          <a:lstStyle/>
+          <a:p>
+            <a:pPr>
+              <a:spcBef>
+                <a:spcPts val="1200"/>
+              </a:spcBef>
+            </a:pPr>
+            <a:endParaRPr lang="en-US" sz="1800" dirty="0"/>
+          </a:p>
+          <a:p>
+            <a:pPr>
+              <a:spcBef>
+                <a:spcPts val="1200"/>
+              </a:spcBef>
+            </a:pPr>
+            <a:r>
+              <a:rPr lang="de-DE" sz="2000" dirty="0" err="1"/>
+              <a:t>Factor</a:t>
+            </a:r>
+            <a:r>
+              <a:rPr lang="de-DE" sz="2000" dirty="0"/>
+              <a:t> Method </a:t>
+            </a:r>
+            <a:r>
+              <a:rPr lang="de-DE" sz="2000" dirty="0" err="1"/>
+              <a:t>for</a:t>
+            </a:r>
+            <a:r>
+              <a:rPr lang="de-DE" sz="2000" dirty="0"/>
+              <a:t> </a:t>
+            </a:r>
+            <a:r>
+              <a:rPr lang="de-DE" sz="2000" dirty="0" err="1"/>
+              <a:t>conventional</a:t>
+            </a:r>
+            <a:r>
+              <a:rPr lang="de-DE" sz="2000" dirty="0"/>
+              <a:t> and </a:t>
+            </a:r>
+            <a:r>
+              <a:rPr lang="de-DE" sz="2000" dirty="0" err="1"/>
+              <a:t>xEV</a:t>
+            </a:r>
+            <a:r>
+              <a:rPr lang="de-DE" sz="2000" dirty="0"/>
+              <a:t>-Buses</a:t>
+            </a:r>
+          </a:p>
+          <a:p>
+            <a:pPr>
+              <a:spcBef>
+                <a:spcPts val="1200"/>
+              </a:spcBef>
+            </a:pPr>
+            <a:r>
+              <a:rPr lang="de-DE" sz="2000" dirty="0"/>
+              <a:t>Updated </a:t>
+            </a:r>
+            <a:r>
+              <a:rPr lang="de-DE" sz="2000" dirty="0" err="1"/>
+              <a:t>bus</a:t>
+            </a:r>
+            <a:r>
+              <a:rPr lang="de-DE" sz="2000" dirty="0"/>
+              <a:t> </a:t>
+            </a:r>
+            <a:r>
+              <a:rPr lang="de-DE" sz="2000" dirty="0" err="1"/>
+              <a:t>auxiliary</a:t>
+            </a:r>
+            <a:r>
+              <a:rPr lang="de-DE" sz="2000" dirty="0"/>
+              <a:t> </a:t>
+            </a:r>
+            <a:r>
+              <a:rPr lang="de-DE" sz="2000" dirty="0" err="1"/>
+              <a:t>model</a:t>
+            </a:r>
+            <a:endParaRPr lang="de-DE" sz="2000" dirty="0"/>
+          </a:p>
+          <a:p>
+            <a:pPr>
+              <a:spcBef>
+                <a:spcPts val="1200"/>
+              </a:spcBef>
+            </a:pPr>
+            <a:endParaRPr lang="de-DE" sz="2000" dirty="0"/>
+          </a:p>
+          <a:p>
+            <a:pPr>
+              <a:spcBef>
+                <a:spcPts val="1200"/>
+              </a:spcBef>
+            </a:pPr>
+            <a:endParaRPr lang="de-AT" sz="2000" dirty="0"/>
+          </a:p>
+          <a:p>
+            <a:pPr>
+              <a:spcBef>
+                <a:spcPts val="1200"/>
+              </a:spcBef>
+            </a:pPr>
+            <a:endParaRPr lang="en-US" sz="1800" dirty="0"/>
+          </a:p>
+        </p:txBody>
+      </p:sp>
+    </p:spTree>
+    <p:extLst>
+      <p:ext uri="{BB962C8B-B14F-4D97-AF65-F5344CB8AC3E}">
+        <p14:creationId xmlns:p14="http://schemas.microsoft.com/office/powerpoint/2010/main" val="3849441777"/>
+      </p:ext>
+    </p:extLst>
+  </p:cSld>
+  <p:clrMapOvr>
+    <a:masterClrMapping/>
+  </p:clrMapOvr>
+</p:sld>
+</file>
+
 <file path=ppt/slides/slide2.xml><?xml version="1.0" encoding="utf-8"?>
 <p:sld xmlns:a="http://schemas.openxmlformats.org/drawingml/2006/main" xmlns:r="http://schemas.openxmlformats.org/officeDocument/2006/relationships" xmlns:p="http://schemas.openxmlformats.org/presentationml/2006/main">
   <p:cSld>
@@ -1992,7 +2672,7 @@
                 </a:solidFill>
                 <a:latin typeface="Arial"/>
               </a:rPr>
-              <a:t>Vecto 4.0.1.3217 OFFICIAL RELEASE</a:t>
+              <a:t>Vecto 4.0.2.3273 OFFICIAL RELEASE</a:t>
             </a:r>
             <a:br>
               <a:rPr sz="2400" dirty="0"/>
@@ -2001,7 +2681,7 @@
               <a:rPr lang="en-US" sz="1600" spc="-1" dirty="0">
                 <a:latin typeface="Arial"/>
               </a:rPr>
-              <a:t>23.10.2023</a:t>
+              <a:t>18.12.2023</a:t>
             </a:r>
             <a:endParaRPr lang="en-US" sz="1600" b="0" strike="noStrike" spc="-1" dirty="0">
               <a:latin typeface="Arial"/>
@@ -2060,7 +2740,7 @@
                   <a:srgbClr val="000000"/>
                 </a:solidFill>
               </a:rPr>
-              <a:t>Improvements</a:t>
+              <a:t>Bugfixes (1/2)</a:t>
             </a:r>
           </a:p>
           <a:p>
@@ -2081,16 +2761,32 @@
               </a:tabLst>
             </a:pPr>
             <a:r>
-              <a:rPr lang="en-US" sz="1400" spc="-1" dirty="0">
-                <a:solidFill>
-                  <a:srgbClr val="000000"/>
-                </a:solidFill>
-              </a:rPr>
-              <a:t>VTP mode: create zip archive for input and output files</a:t>
-            </a:r>
-          </a:p>
-          <a:p>
-            <a:pPr marL="343080" indent="-343080">
+              <a:rPr lang="en-US" sz="1200" spc="-1" dirty="0">
+                <a:solidFill>
+                  <a:srgbClr val="000000"/>
+                </a:solidFill>
+              </a:rPr>
+              <a:t>CodeEU-94: </a:t>
+            </a:r>
+            <a:r>
+              <a:rPr lang="en-US" sz="1200" spc="-1" dirty="0" err="1">
+                <a:solidFill>
+                  <a:srgbClr val="000000"/>
+                </a:solidFill>
+              </a:rPr>
+              <a:t>DistanceRun</a:t>
+            </a:r>
+            <a:r>
+              <a:rPr lang="en-US" sz="1200" spc="-1" dirty="0">
+                <a:solidFill>
+                  <a:srgbClr val="000000"/>
+                </a:solidFill>
+              </a:rPr>
+              <a:t> got an unexpected response</a:t>
+            </a:r>
+          </a:p>
+          <a:p>
+            <a:pPr marL="800280" lvl="1" indent="-343080">
               <a:lnSpc>
                 <a:spcPct val="100000"/>
               </a:lnSpc>
@@ -2107,12 +2803,28 @@
               </a:tabLst>
             </a:pPr>
             <a:r>
-              <a:rPr lang="en-US" sz="1600" b="1" spc="-1" dirty="0">
-                <a:solidFill>
-                  <a:srgbClr val="000000"/>
-                </a:solidFill>
-              </a:rPr>
-              <a:t>- Bugfixes</a:t>
+              <a:rPr lang="en-US" sz="1200" spc="-1" dirty="0">
+                <a:solidFill>
+                  <a:srgbClr val="000000"/>
+                </a:solidFill>
+              </a:rPr>
+              <a:t>CodeEU-153: </a:t>
+            </a:r>
+            <a:r>
+              <a:rPr lang="en-US" sz="1200" spc="-1" dirty="0" err="1">
+                <a:solidFill>
+                  <a:srgbClr val="000000"/>
+                </a:solidFill>
+              </a:rPr>
+              <a:t>DrivingActionAccelerate</a:t>
+            </a:r>
+            <a:r>
+              <a:rPr lang="en-US" sz="1200" spc="-1" dirty="0">
+                <a:solidFill>
+                  <a:srgbClr val="000000"/>
+                </a:solidFill>
+              </a:rPr>
+              <a:t>: Failed to find operating point after Overload</a:t>
             </a:r>
           </a:p>
           <a:p>
@@ -2133,28 +2845,60 @@
               </a:tabLst>
             </a:pPr>
             <a:r>
-              <a:rPr lang="en-US" sz="1400" spc="-1" dirty="0">
-                <a:solidFill>
-                  <a:srgbClr val="000000"/>
-                </a:solidFill>
-              </a:rPr>
-              <a:t>bugfix in CIF for complete(d) buses - do not write </a:t>
-            </a:r>
-            <a:r>
-              <a:rPr lang="en-US" sz="1400" spc="-1" dirty="0" err="1">
-                <a:solidFill>
-                  <a:srgbClr val="000000"/>
-                </a:solidFill>
-              </a:rPr>
-              <a:t>PrimaryVehicleSubgroup</a:t>
-            </a:r>
-            <a:r>
-              <a:rPr lang="en-US" sz="1400" spc="-1" dirty="0">
-                <a:solidFill>
-                  <a:srgbClr val="000000"/>
-                </a:solidFill>
-              </a:rPr>
-              <a:t> element</a:t>
+              <a:rPr lang="en-US" sz="1200" spc="-1" dirty="0">
+                <a:solidFill>
+                  <a:srgbClr val="000000"/>
+                </a:solidFill>
+              </a:rPr>
+              <a:t>CodeEU-158: Urban </a:t>
+            </a:r>
+            <a:r>
+              <a:rPr lang="en-US" sz="1200" spc="-1" dirty="0" err="1">
+                <a:solidFill>
+                  <a:srgbClr val="000000"/>
+                </a:solidFill>
+              </a:rPr>
+              <a:t>RefLoad</a:t>
+            </a:r>
+            <a:r>
+              <a:rPr lang="en-US" sz="1200" spc="-1" dirty="0">
+                <a:solidFill>
+                  <a:srgbClr val="000000"/>
+                </a:solidFill>
+              </a:rPr>
+              <a:t> </a:t>
+            </a:r>
+            <a:r>
+              <a:rPr lang="en-US" sz="1200" spc="-1" dirty="0" err="1">
+                <a:solidFill>
+                  <a:srgbClr val="000000"/>
+                </a:solidFill>
+              </a:rPr>
+              <a:t>DrivingActionAccelerate</a:t>
+            </a:r>
+            <a:r>
+              <a:rPr lang="en-US" sz="1200" spc="-1" dirty="0">
+                <a:solidFill>
+                  <a:srgbClr val="000000"/>
+                </a:solidFill>
+              </a:rPr>
+              <a:t>: Failed to find operating point (IEPC </a:t>
+            </a:r>
+            <a:r>
+              <a:rPr lang="en-US" sz="1200" spc="-1" dirty="0" err="1">
+                <a:solidFill>
+                  <a:srgbClr val="000000"/>
+                </a:solidFill>
+              </a:rPr>
+              <a:t>Wheelhub</a:t>
+            </a:r>
+            <a:r>
+              <a:rPr lang="en-US" sz="1200" spc="-1" dirty="0">
+                <a:solidFill>
+                  <a:srgbClr val="000000"/>
+                </a:solidFill>
+              </a:rPr>
+              <a:t> 1 measured)</a:t>
             </a:r>
           </a:p>
           <a:p>
@@ -2175,12 +2919,12 @@
               </a:tabLst>
             </a:pPr>
             <a:r>
-              <a:rPr lang="en-US" sz="1400" spc="-1" dirty="0">
-                <a:solidFill>
-                  <a:srgbClr val="000000"/>
-                </a:solidFill>
-              </a:rPr>
-              <a:t>fix hybrid strategy: power comparison</a:t>
+              <a:rPr lang="en-US" sz="1200" spc="-1" dirty="0">
+                <a:solidFill>
+                  <a:srgbClr val="000000"/>
+                </a:solidFill>
+              </a:rPr>
+              <a:t>CodeEU-168: Vecto Declaration Simulation with P1-Hybrid shows multiple errors - Simulation Aborts!</a:t>
             </a:r>
           </a:p>
           <a:p>
@@ -2201,12 +2945,28 @@
               </a:tabLst>
             </a:pPr>
             <a:r>
-              <a:rPr lang="en-US" sz="1400" spc="-1" dirty="0">
-                <a:solidFill>
-                  <a:srgbClr val="000000"/>
-                </a:solidFill>
-              </a:rPr>
-              <a:t>fix exempted vehicles do not work (error message that XML version is not supported)</a:t>
+              <a:rPr lang="en-US" sz="1200" spc="-1" dirty="0">
+                <a:solidFill>
+                  <a:srgbClr val="000000"/>
+                </a:solidFill>
+              </a:rPr>
+              <a:t>CodeEU-191: Boosting limits HEV </a:t>
+            </a:r>
+            <a:r>
+              <a:rPr lang="en-US" sz="1200" spc="-1" dirty="0" err="1">
+                <a:solidFill>
+                  <a:srgbClr val="000000"/>
+                </a:solidFill>
+              </a:rPr>
+              <a:t>ovc</a:t>
+            </a:r>
+            <a:r>
+              <a:rPr lang="en-US" sz="1200" spc="-1" dirty="0">
+                <a:solidFill>
+                  <a:srgbClr val="000000"/>
+                </a:solidFill>
+              </a:rPr>
+              <a:t> are not working</a:t>
             </a:r>
           </a:p>
           <a:p>
@@ -2227,12 +2987,12 @@
               </a:tabLst>
             </a:pPr>
             <a:r>
-              <a:rPr lang="en-US" sz="1400" spc="-1" dirty="0">
-                <a:solidFill>
-                  <a:srgbClr val="000000"/>
-                </a:solidFill>
-              </a:rPr>
-              <a:t>bugfix in XML schema: remove wrong PS technology entry for lorries</a:t>
+              <a:rPr lang="en-US" sz="1200" spc="-1" dirty="0">
+                <a:solidFill>
+                  <a:srgbClr val="000000"/>
+                </a:solidFill>
+              </a:rPr>
+              <a:t>CodeEU-202: EMS Standard Values: Continuous/Overload Torque 0 Nm</a:t>
             </a:r>
           </a:p>
           <a:p>
@@ -2253,16 +3013,482 @@
               </a:tabLst>
             </a:pPr>
             <a:r>
-              <a:rPr lang="en-US" sz="1400" spc="-1" dirty="0">
-                <a:solidFill>
-                  <a:srgbClr val="000000"/>
-                </a:solidFill>
-              </a:rPr>
-              <a:t>bugfix for conditioning power demand for IHPC vehicles</a:t>
-            </a:r>
-            <a:endParaRPr lang="en-US" sz="1050" strike="noStrike" spc="-1" dirty="0">
-              <a:latin typeface="Arial"/>
+              <a:rPr lang="en-US" sz="1200" spc="-1" dirty="0">
+                <a:solidFill>
+                  <a:srgbClr val="000000"/>
+                </a:solidFill>
+              </a:rPr>
+              <a:t>CodeEU-203: </a:t>
+            </a:r>
+            <a:r>
+              <a:rPr lang="en-US" sz="1200" spc="-1" dirty="0" err="1">
+                <a:solidFill>
+                  <a:srgbClr val="000000"/>
+                </a:solidFill>
+              </a:rPr>
+              <a:t>HybridStrategy</a:t>
+            </a:r>
+            <a:r>
+              <a:rPr lang="en-US" sz="1200" spc="-1" dirty="0">
+                <a:solidFill>
+                  <a:srgbClr val="000000"/>
+                </a:solidFill>
+              </a:rPr>
+              <a:t> error for IHPC type 1 hybrid lorry</a:t>
+            </a:r>
+          </a:p>
+          <a:p>
+            <a:pPr marL="800280" lvl="1" indent="-343080">
+              <a:lnSpc>
+                <a:spcPct val="100000"/>
+              </a:lnSpc>
+              <a:spcBef>
+                <a:spcPts val="320"/>
+              </a:spcBef>
+              <a:buClr>
+                <a:srgbClr val="000000"/>
+              </a:buClr>
+              <a:buFont typeface="Symbol"/>
+              <a:buChar char=""/>
+              <a:tabLst>
+                <a:tab pos="1886040" algn="l"/>
+              </a:tabLst>
+            </a:pPr>
+            <a:r>
+              <a:rPr lang="en-US" sz="1200" spc="-1" dirty="0">
+                <a:solidFill>
+                  <a:srgbClr val="000000"/>
+                </a:solidFill>
+              </a:rPr>
+              <a:t>CodeEU-206: VTP + PEMS test done by Renault Trucks France - VECTO tool errors most probably linked to automatic gearbox (with torque converter)</a:t>
+            </a:r>
+          </a:p>
+          <a:p>
+            <a:pPr marL="800280" lvl="1" indent="-343080">
+              <a:lnSpc>
+                <a:spcPct val="100000"/>
+              </a:lnSpc>
+              <a:spcBef>
+                <a:spcPts val="320"/>
+              </a:spcBef>
+              <a:buClr>
+                <a:srgbClr val="000000"/>
+              </a:buClr>
+              <a:buFont typeface="Symbol"/>
+              <a:buChar char=""/>
+              <a:tabLst>
+                <a:tab pos="1886040" algn="l"/>
+              </a:tabLst>
+            </a:pPr>
+            <a:r>
+              <a:rPr lang="en-US" sz="1200" spc="-1" dirty="0">
+                <a:solidFill>
+                  <a:srgbClr val="000000"/>
+                </a:solidFill>
+              </a:rPr>
+              <a:t>CodeEU-211: Hybrid P1 configurations with errors</a:t>
+            </a:r>
+          </a:p>
+          <a:p>
+            <a:pPr marL="800280" lvl="1" indent="-343080">
+              <a:lnSpc>
+                <a:spcPct val="100000"/>
+              </a:lnSpc>
+              <a:spcBef>
+                <a:spcPts val="320"/>
+              </a:spcBef>
+              <a:buClr>
+                <a:srgbClr val="000000"/>
+              </a:buClr>
+              <a:buFont typeface="Symbol"/>
+              <a:buChar char=""/>
+              <a:tabLst>
+                <a:tab pos="1886040" algn="l"/>
+              </a:tabLst>
+            </a:pPr>
+            <a:r>
+              <a:rPr lang="en-US" sz="1200" spc="-1" dirty="0">
+                <a:solidFill>
+                  <a:srgbClr val="000000"/>
+                </a:solidFill>
+              </a:rPr>
+              <a:t>CodeEU-215: </a:t>
+            </a:r>
+            <a:r>
+              <a:rPr lang="en-US" sz="1200" spc="-1" dirty="0" err="1">
+                <a:solidFill>
+                  <a:srgbClr val="000000"/>
+                </a:solidFill>
+              </a:rPr>
+              <a:t>MultiStep</a:t>
+            </a:r>
+            <a:r>
+              <a:rPr lang="en-US" sz="1200" spc="-1" dirty="0">
+                <a:solidFill>
+                  <a:srgbClr val="000000"/>
+                </a:solidFill>
+              </a:rPr>
+              <a:t> tool help</a:t>
+            </a:r>
+          </a:p>
+          <a:p>
+            <a:pPr marL="800280" lvl="1" indent="-343080">
+              <a:lnSpc>
+                <a:spcPct val="100000"/>
+              </a:lnSpc>
+              <a:spcBef>
+                <a:spcPts val="320"/>
+              </a:spcBef>
+              <a:buClr>
+                <a:srgbClr val="000000"/>
+              </a:buClr>
+              <a:buFont typeface="Symbol"/>
+              <a:buChar char=""/>
+              <a:tabLst>
+                <a:tab pos="1886040" algn="l"/>
+              </a:tabLst>
+            </a:pPr>
+            <a:r>
+              <a:rPr lang="en-US" sz="1200" spc="-1" dirty="0">
+                <a:solidFill>
+                  <a:srgbClr val="000000"/>
+                </a:solidFill>
+              </a:rPr>
+              <a:t>CodeEU-216: </a:t>
+            </a:r>
+            <a:r>
+              <a:rPr lang="en-US" sz="1200" spc="-1" dirty="0" err="1">
+                <a:solidFill>
+                  <a:srgbClr val="000000"/>
+                </a:solidFill>
+              </a:rPr>
+              <a:t>NrOfGears</a:t>
+            </a:r>
+            <a:r>
+              <a:rPr lang="en-US" sz="1200" spc="-1" dirty="0">
+                <a:solidFill>
+                  <a:srgbClr val="000000"/>
+                </a:solidFill>
+              </a:rPr>
+              <a:t> in CIF is 1 for IEPC no matter how many gears it has</a:t>
+            </a:r>
+          </a:p>
+          <a:p>
+            <a:pPr marL="800280" lvl="1" indent="-343080">
+              <a:lnSpc>
+                <a:spcPct val="100000"/>
+              </a:lnSpc>
+              <a:spcBef>
+                <a:spcPts val="320"/>
+              </a:spcBef>
+              <a:buClr>
+                <a:srgbClr val="000000"/>
+              </a:buClr>
+              <a:buFont typeface="Symbol"/>
+              <a:buChar char=""/>
+              <a:tabLst>
+                <a:tab pos="1886040" algn="l"/>
+              </a:tabLst>
+            </a:pPr>
+            <a:r>
+              <a:rPr lang="en-US" sz="1200" spc="-1" dirty="0">
+                <a:solidFill>
+                  <a:srgbClr val="000000"/>
+                </a:solidFill>
+              </a:rPr>
+              <a:t>CodeEU-220: Error manual transmission 2. gear</a:t>
+            </a:r>
+          </a:p>
+          <a:p>
+            <a:pPr marL="800280" lvl="1" indent="-343080">
+              <a:lnSpc>
+                <a:spcPct val="100000"/>
+              </a:lnSpc>
+              <a:spcBef>
+                <a:spcPts val="320"/>
+              </a:spcBef>
+              <a:buClr>
+                <a:srgbClr val="000000"/>
+              </a:buClr>
+              <a:buFont typeface="Symbol"/>
+              <a:buChar char=""/>
+              <a:tabLst>
+                <a:tab pos="1886040" algn="l"/>
+              </a:tabLst>
+            </a:pPr>
+            <a:r>
+              <a:rPr lang="en-US" sz="1200" spc="-1" dirty="0">
+                <a:solidFill>
+                  <a:srgbClr val="000000"/>
+                </a:solidFill>
+              </a:rPr>
+              <a:t>CodeEU-224: Issue with PEV complete vehicle simulation (Vecto </a:t>
+            </a:r>
+            <a:r>
+              <a:rPr lang="en-US" sz="1200" spc="-1" dirty="0" err="1">
+                <a:solidFill>
+                  <a:srgbClr val="000000"/>
+                </a:solidFill>
+              </a:rPr>
+              <a:t>MultiStage</a:t>
+            </a:r>
+            <a:r>
+              <a:rPr lang="en-US" sz="1200" spc="-1" dirty="0">
+                <a:solidFill>
+                  <a:srgbClr val="000000"/>
+                </a:solidFill>
+              </a:rPr>
+              <a:t>)</a:t>
+            </a:r>
+          </a:p>
+          <a:p>
+            <a:pPr marL="800280" lvl="1" indent="-343080">
+              <a:lnSpc>
+                <a:spcPct val="100000"/>
+              </a:lnSpc>
+              <a:spcBef>
+                <a:spcPts val="320"/>
+              </a:spcBef>
+              <a:buClr>
+                <a:srgbClr val="000000"/>
+              </a:buClr>
+              <a:buFont typeface="Symbol"/>
+              <a:buChar char=""/>
+              <a:tabLst>
+                <a:tab pos="1886040" algn="l"/>
+              </a:tabLst>
+            </a:pPr>
+            <a:r>
+              <a:rPr lang="en-US" sz="1200" spc="-1" dirty="0">
+                <a:solidFill>
+                  <a:srgbClr val="000000"/>
+                </a:solidFill>
+              </a:rPr>
+              <a:t>CodeEU-231: IVECO CONFIDENTIAL : hybrid buses completed simulation aborted</a:t>
+            </a:r>
+          </a:p>
+          <a:p>
+            <a:pPr marL="800280" lvl="1" indent="-343080">
+              <a:lnSpc>
+                <a:spcPct val="100000"/>
+              </a:lnSpc>
+              <a:spcBef>
+                <a:spcPts val="320"/>
+              </a:spcBef>
+              <a:buClr>
+                <a:srgbClr val="000000"/>
+              </a:buClr>
+              <a:buFont typeface="Symbol"/>
+              <a:buChar char=""/>
+              <a:tabLst>
+                <a:tab pos="1886040" algn="l"/>
+              </a:tabLst>
+            </a:pPr>
+            <a:r>
+              <a:rPr lang="en-US" sz="1200" spc="-1" dirty="0">
+                <a:solidFill>
+                  <a:srgbClr val="000000"/>
+                </a:solidFill>
+              </a:rPr>
+              <a:t>CodeEU-234: Error Conventional Lorry Gear: 1C </a:t>
+            </a:r>
+            <a:r>
+              <a:rPr lang="en-US" sz="1200" spc="-1" dirty="0" err="1">
+                <a:solidFill>
+                  <a:srgbClr val="000000"/>
+                </a:solidFill>
+              </a:rPr>
+              <a:t>DistanceRun</a:t>
+            </a:r>
+            <a:r>
+              <a:rPr lang="en-US" sz="1200" spc="-1" dirty="0">
+                <a:solidFill>
+                  <a:srgbClr val="000000"/>
+                </a:solidFill>
+              </a:rPr>
+              <a:t> got an unexpected response</a:t>
+            </a:r>
+          </a:p>
+          <a:p>
+            <a:pPr marL="800280" lvl="1" indent="-343080">
+              <a:lnSpc>
+                <a:spcPct val="100000"/>
+              </a:lnSpc>
+              <a:spcBef>
+                <a:spcPts val="320"/>
+              </a:spcBef>
+              <a:buClr>
+                <a:srgbClr val="000000"/>
+              </a:buClr>
+              <a:buFont typeface="Symbol"/>
+              <a:buChar char=""/>
+              <a:tabLst>
+                <a:tab pos="1886040" algn="l"/>
+              </a:tabLst>
+            </a:pPr>
+            <a:r>
+              <a:rPr lang="en-US" sz="1200" spc="-1" dirty="0">
+                <a:solidFill>
+                  <a:srgbClr val="000000"/>
+                </a:solidFill>
+              </a:rPr>
+              <a:t>CodeEU-235: </a:t>
+            </a:r>
+            <a:r>
+              <a:rPr lang="en-US" sz="1200" spc="-1" dirty="0" err="1">
+                <a:solidFill>
+                  <a:srgbClr val="000000"/>
+                </a:solidFill>
+              </a:rPr>
+              <a:t>Tyre</a:t>
+            </a:r>
+            <a:r>
+              <a:rPr lang="en-US" sz="1200" spc="-1" dirty="0">
+                <a:solidFill>
+                  <a:srgbClr val="000000"/>
+                </a:solidFill>
+              </a:rPr>
+              <a:t> error calculation buses "invalid </a:t>
+            </a:r>
+            <a:r>
+              <a:rPr lang="en-US" sz="1200" spc="-1" dirty="0" err="1">
+                <a:solidFill>
+                  <a:srgbClr val="000000"/>
+                </a:solidFill>
+              </a:rPr>
+              <a:t>xsi:type</a:t>
+            </a:r>
+            <a:r>
+              <a:rPr lang="en-US" sz="1200" spc="-1" dirty="0">
+                <a:solidFill>
+                  <a:srgbClr val="000000"/>
+                </a:solidFill>
+              </a:rPr>
+              <a:t> '</a:t>
+            </a:r>
+            <a:r>
+              <a:rPr lang="en-US" sz="1200" spc="-1" dirty="0" err="1">
+                <a:solidFill>
+                  <a:srgbClr val="000000"/>
+                </a:solidFill>
+              </a:rPr>
+              <a:t>TyreDataDeclarationType</a:t>
+            </a:r>
+            <a:r>
+              <a:rPr lang="en-US" sz="1200" spc="-1" dirty="0">
+                <a:solidFill>
+                  <a:srgbClr val="000000"/>
+                </a:solidFill>
+              </a:rPr>
+              <a:t>'"</a:t>
+            </a:r>
+          </a:p>
+          <a:p>
+            <a:pPr marL="800280" lvl="1" indent="-343080">
+              <a:lnSpc>
+                <a:spcPct val="100000"/>
+              </a:lnSpc>
+              <a:spcBef>
+                <a:spcPts val="320"/>
+              </a:spcBef>
+              <a:buClr>
+                <a:srgbClr val="000000"/>
+              </a:buClr>
+              <a:buFont typeface="Symbol"/>
+              <a:buChar char=""/>
+              <a:tabLst>
+                <a:tab pos="1886040" algn="l"/>
+              </a:tabLst>
+            </a:pPr>
+            <a:r>
+              <a:rPr lang="en-US" sz="1200" spc="-1" dirty="0">
+                <a:solidFill>
+                  <a:srgbClr val="000000"/>
+                </a:solidFill>
+              </a:rPr>
+              <a:t>CodeEU-238: Bus VIF files not valid in Multistep VECTO</a:t>
+            </a:r>
+          </a:p>
+          <a:p>
+            <a:pPr marL="800280" lvl="1" indent="-343080">
+              <a:lnSpc>
+                <a:spcPct val="100000"/>
+              </a:lnSpc>
+              <a:spcBef>
+                <a:spcPts val="320"/>
+              </a:spcBef>
+              <a:buClr>
+                <a:srgbClr val="000000"/>
+              </a:buClr>
+              <a:buFont typeface="Symbol"/>
+              <a:buChar char=""/>
+              <a:tabLst>
+                <a:tab pos="1886040" algn="l"/>
+              </a:tabLst>
+            </a:pPr>
+            <a:r>
+              <a:rPr lang="en-US" sz="1200" spc="-1" dirty="0">
+                <a:solidFill>
+                  <a:srgbClr val="000000"/>
+                </a:solidFill>
+              </a:rPr>
+              <a:t>CodeEU-243: Simulation aborted: Gear 5 </a:t>
+            </a:r>
+            <a:r>
+              <a:rPr lang="en-US" sz="1200" spc="-1" dirty="0" err="1">
+                <a:solidFill>
+                  <a:srgbClr val="000000"/>
+                </a:solidFill>
+              </a:rPr>
+              <a:t>Lossmap</a:t>
+            </a:r>
+            <a:r>
+              <a:rPr lang="en-US" sz="1200" spc="-1" dirty="0">
+                <a:solidFill>
+                  <a:srgbClr val="000000"/>
+                </a:solidFill>
+              </a:rPr>
+              <a:t> not </a:t>
+            </a:r>
+            <a:r>
+              <a:rPr lang="en-US" sz="1200" spc="-1" dirty="0" err="1">
+                <a:solidFill>
+                  <a:srgbClr val="000000"/>
+                </a:solidFill>
+              </a:rPr>
+              <a:t>sufficiant</a:t>
+            </a:r>
+            <a:endParaRPr lang="en-US" sz="1200" spc="-1" dirty="0">
+              <a:solidFill>
+                <a:srgbClr val="000000"/>
+              </a:solidFill>
             </a:endParaRPr>
+          </a:p>
+          <a:p>
+            <a:pPr marL="800280" lvl="1" indent="-343080">
+              <a:lnSpc>
+                <a:spcPct val="100000"/>
+              </a:lnSpc>
+              <a:spcBef>
+                <a:spcPts val="320"/>
+              </a:spcBef>
+              <a:buClr>
+                <a:srgbClr val="000000"/>
+              </a:buClr>
+              <a:buFont typeface="Symbol"/>
+              <a:buChar char=""/>
+              <a:tabLst>
+                <a:tab pos="1886040" algn="l"/>
+              </a:tabLst>
+            </a:pPr>
+            <a:r>
+              <a:rPr lang="en-US" sz="1200" spc="-1" dirty="0">
+                <a:solidFill>
+                  <a:srgbClr val="000000"/>
+                </a:solidFill>
+              </a:rPr>
+              <a:t>CodeEU-244: Signature validation fails for old (prior to v4) Manufacturer reports</a:t>
+            </a:r>
           </a:p>
           <a:p>
             <a:pPr>
@@ -2278,6 +3504,426 @@
               <a:latin typeface="Arial"/>
             </a:endParaRPr>
           </a:p>
+        </p:txBody>
+      </p:sp>
+    </p:spTree>
+    <p:extLst>
+      <p:ext uri="{BB962C8B-B14F-4D97-AF65-F5344CB8AC3E}">
+        <p14:creationId xmlns:p14="http://schemas.microsoft.com/office/powerpoint/2010/main" val="3358657800"/>
+      </p:ext>
+    </p:extLst>
+  </p:cSld>
+  <p:clrMapOvr>
+    <a:masterClrMapping/>
+  </p:clrMapOvr>
+</p:sld>
+</file>
+
+<file path=ppt/slides/slide3.xml><?xml version="1.0" encoding="utf-8"?>
+<p:sld xmlns:a="http://schemas.openxmlformats.org/drawingml/2006/main" xmlns:r="http://schemas.openxmlformats.org/officeDocument/2006/relationships" xmlns:p="http://schemas.openxmlformats.org/presentationml/2006/main">
+  <p:cSld>
+    <p:spTree>
+      <p:nvGrpSpPr>
+        <p:cNvPr id="1" name=""/>
+        <p:cNvGrpSpPr/>
+        <p:nvPr/>
+      </p:nvGrpSpPr>
+      <p:grpSpPr>
+        <a:xfrm>
+          <a:off x="0" y="0"/>
+          <a:ext cx="0" cy="0"/>
+          <a:chOff x="0" y="0"/>
+          <a:chExt cx="0" cy="0"/>
+        </a:xfrm>
+      </p:grpSpPr>
+      <p:sp>
+        <p:nvSpPr>
+          <p:cNvPr id="92" name="PlaceHolder 1"/>
+          <p:cNvSpPr>
+            <a:spLocks noGrp="1"/>
+          </p:cNvSpPr>
+          <p:nvPr>
+            <p:ph type="title"/>
+          </p:nvPr>
+        </p:nvSpPr>
+        <p:spPr>
+          <a:xfrm>
+            <a:off x="468360" y="476640"/>
+            <a:ext cx="8217720" cy="680400"/>
+          </a:xfrm>
+          <a:prstGeom prst="rect">
+            <a:avLst/>
+          </a:prstGeom>
+          <a:noFill/>
+          <a:ln w="0">
+            <a:noFill/>
+          </a:ln>
+        </p:spPr>
+        <p:txBody>
+          <a:bodyPr lIns="90000" tIns="45000" rIns="90000" bIns="45000" numCol="1" spcCol="0" anchor="ctr">
+            <a:noAutofit/>
+          </a:bodyPr>
+          <a:lstStyle/>
+          <a:p>
+            <a:pPr algn="ctr">
+              <a:lnSpc>
+                <a:spcPct val="100000"/>
+              </a:lnSpc>
+              <a:buNone/>
+            </a:pPr>
+            <a:r>
+              <a:rPr lang="en-US" sz="2400" b="1" strike="noStrike" spc="-1" dirty="0">
+                <a:solidFill>
+                  <a:srgbClr val="990000"/>
+                </a:solidFill>
+                <a:latin typeface="Arial"/>
+              </a:rPr>
+              <a:t>Vecto 4.0.2.3273 OFFICIAL RELEASE</a:t>
+            </a:r>
+            <a:br>
+              <a:rPr sz="2400" dirty="0"/>
+            </a:br>
+            <a:r>
+              <a:rPr lang="en-US" sz="1600" spc="-1" dirty="0">
+                <a:latin typeface="Arial"/>
+              </a:rPr>
+              <a:t>18.12.2023</a:t>
+            </a:r>
+            <a:endParaRPr lang="en-US" sz="1600" b="0" strike="noStrike" spc="-1" dirty="0">
+              <a:latin typeface="Arial"/>
+            </a:endParaRPr>
+          </a:p>
+        </p:txBody>
+      </p:sp>
+      <p:sp>
+        <p:nvSpPr>
+          <p:cNvPr id="93" name="PlaceHolder 2"/>
+          <p:cNvSpPr>
+            <a:spLocks noGrp="1"/>
+          </p:cNvSpPr>
+          <p:nvPr>
+            <p:ph/>
+          </p:nvPr>
+        </p:nvSpPr>
+        <p:spPr>
+          <a:xfrm>
+            <a:off x="323640" y="1268640"/>
+            <a:ext cx="8496360" cy="4823640"/>
+          </a:xfrm>
+          <a:prstGeom prst="rect">
+            <a:avLst/>
+          </a:prstGeom>
+          <a:noFill/>
+          <a:ln w="0">
+            <a:noFill/>
+          </a:ln>
+        </p:spPr>
+        <p:txBody>
+          <a:bodyPr lIns="90000" tIns="45000" rIns="90000" bIns="45000" numCol="1" spcCol="0" anchor="t">
+            <a:noAutofit/>
+          </a:bodyPr>
+          <a:lstStyle/>
+          <a:p>
+            <a:pPr marL="343080" indent="-343080">
+              <a:lnSpc>
+                <a:spcPct val="100000"/>
+              </a:lnSpc>
+              <a:spcBef>
+                <a:spcPts val="320"/>
+              </a:spcBef>
+              <a:buClr>
+                <a:srgbClr val="000000"/>
+              </a:buClr>
+              <a:buFont typeface="Symbol"/>
+              <a:buChar char=""/>
+              <a:tabLst>
+                <a:tab pos="1886040" algn="l"/>
+              </a:tabLst>
+            </a:pPr>
+            <a:r>
+              <a:rPr lang="en-US" sz="1600" b="1" spc="-1" dirty="0">
+                <a:solidFill>
+                  <a:srgbClr val="000000"/>
+                </a:solidFill>
+              </a:rPr>
+              <a:t>Bugfixes (2/2)</a:t>
+            </a:r>
+          </a:p>
+          <a:p>
+            <a:pPr marL="800280" lvl="1" indent="-343080">
+              <a:lnSpc>
+                <a:spcPct val="100000"/>
+              </a:lnSpc>
+              <a:spcBef>
+                <a:spcPts val="320"/>
+              </a:spcBef>
+              <a:buClr>
+                <a:srgbClr val="000000"/>
+              </a:buClr>
+              <a:buFont typeface="Symbol"/>
+              <a:buChar char=""/>
+              <a:tabLst>
+                <a:tab pos="1886040" algn="l"/>
+              </a:tabLst>
+            </a:pPr>
+            <a:r>
+              <a:rPr lang="en-US" sz="1200" spc="-1" dirty="0">
+                <a:solidFill>
+                  <a:srgbClr val="000000"/>
+                </a:solidFill>
+              </a:rPr>
+              <a:t>CodeEU-249: Fix handling gear torque limits in case of IEPC </a:t>
+            </a:r>
+            <a:r>
+              <a:rPr lang="en-US" sz="1200" spc="-1" dirty="0" err="1">
+                <a:solidFill>
+                  <a:srgbClr val="000000"/>
+                </a:solidFill>
+              </a:rPr>
+              <a:t>WheelHub</a:t>
+            </a:r>
+            <a:r>
+              <a:rPr lang="en-US" sz="1200" spc="-1" dirty="0">
+                <a:solidFill>
+                  <a:srgbClr val="000000"/>
+                </a:solidFill>
+              </a:rPr>
+              <a:t> motor and only one side is measured</a:t>
+            </a:r>
+          </a:p>
+          <a:p>
+            <a:pPr marL="800280" lvl="1" indent="-343080">
+              <a:lnSpc>
+                <a:spcPct val="100000"/>
+              </a:lnSpc>
+              <a:spcBef>
+                <a:spcPts val="320"/>
+              </a:spcBef>
+              <a:buClr>
+                <a:srgbClr val="000000"/>
+              </a:buClr>
+              <a:buFont typeface="Symbol"/>
+              <a:buChar char=""/>
+              <a:tabLst>
+                <a:tab pos="1886040" algn="l"/>
+              </a:tabLst>
+            </a:pPr>
+            <a:r>
+              <a:rPr lang="en-US" sz="1200" spc="-1" dirty="0">
+                <a:solidFill>
+                  <a:srgbClr val="000000"/>
+                </a:solidFill>
+              </a:rPr>
+              <a:t>CodeEU-250: Maximum vehicle speed exceeded during pre-processing</a:t>
+            </a:r>
+          </a:p>
+          <a:p>
+            <a:pPr marL="800280" lvl="1" indent="-343080">
+              <a:lnSpc>
+                <a:spcPct val="100000"/>
+              </a:lnSpc>
+              <a:spcBef>
+                <a:spcPts val="320"/>
+              </a:spcBef>
+              <a:buClr>
+                <a:srgbClr val="000000"/>
+              </a:buClr>
+              <a:buFont typeface="Symbol"/>
+              <a:buChar char=""/>
+              <a:tabLst>
+                <a:tab pos="1886040" algn="l"/>
+              </a:tabLst>
+            </a:pPr>
+            <a:r>
+              <a:rPr lang="en-US" sz="1200" spc="-1" dirty="0">
+                <a:solidFill>
+                  <a:srgbClr val="000000"/>
+                </a:solidFill>
+              </a:rPr>
+              <a:t>CodeEU-253: Replace VTP </a:t>
+            </a:r>
+            <a:r>
+              <a:rPr lang="en-US" sz="1200" spc="-1" dirty="0" err="1">
+                <a:solidFill>
+                  <a:srgbClr val="000000"/>
+                </a:solidFill>
+              </a:rPr>
+              <a:t>HeavyBus</a:t>
+            </a:r>
+            <a:r>
+              <a:rPr lang="en-US" sz="1200" spc="-1" dirty="0">
+                <a:solidFill>
+                  <a:srgbClr val="000000"/>
+                </a:solidFill>
+              </a:rPr>
+              <a:t> in Generic Vehicles with VTP Truck</a:t>
+            </a:r>
+          </a:p>
+          <a:p>
+            <a:pPr marL="800280" lvl="1" indent="-343080">
+              <a:lnSpc>
+                <a:spcPct val="100000"/>
+              </a:lnSpc>
+              <a:spcBef>
+                <a:spcPts val="320"/>
+              </a:spcBef>
+              <a:buClr>
+                <a:srgbClr val="000000"/>
+              </a:buClr>
+              <a:buFont typeface="Symbol"/>
+              <a:buChar char=""/>
+              <a:tabLst>
+                <a:tab pos="1886040" algn="l"/>
+              </a:tabLst>
+            </a:pPr>
+            <a:r>
+              <a:rPr lang="en-US" sz="1200" spc="-1" dirty="0">
+                <a:solidFill>
+                  <a:srgbClr val="000000"/>
+                </a:solidFill>
+              </a:rPr>
+              <a:t>CodeEU-259: Inconsistent calculation of </a:t>
+            </a:r>
+            <a:r>
+              <a:rPr lang="en-US" sz="1200" spc="-1" dirty="0" err="1">
+                <a:solidFill>
+                  <a:srgbClr val="000000"/>
+                </a:solidFill>
+              </a:rPr>
+              <a:t>AverageRRC</a:t>
+            </a:r>
+            <a:r>
+              <a:rPr lang="en-US" sz="1200" spc="-1" dirty="0">
+                <a:solidFill>
+                  <a:srgbClr val="000000"/>
+                </a:solidFill>
+              </a:rPr>
+              <a:t> in CIF</a:t>
+            </a:r>
+          </a:p>
+          <a:p>
+            <a:pPr marL="800280" lvl="1" indent="-343080">
+              <a:lnSpc>
+                <a:spcPct val="100000"/>
+              </a:lnSpc>
+              <a:spcBef>
+                <a:spcPts val="320"/>
+              </a:spcBef>
+              <a:buClr>
+                <a:srgbClr val="000000"/>
+              </a:buClr>
+              <a:buFont typeface="Symbol"/>
+              <a:buChar char=""/>
+              <a:tabLst>
+                <a:tab pos="1886040" algn="l"/>
+              </a:tabLst>
+            </a:pPr>
+            <a:r>
+              <a:rPr lang="en-US" sz="1200" spc="-1" dirty="0">
+                <a:solidFill>
+                  <a:srgbClr val="000000"/>
+                </a:solidFill>
+              </a:rPr>
+              <a:t>CodeEU-260: Handling of overload buffer in case Continuous Torque is 0Nm</a:t>
+            </a:r>
+          </a:p>
+          <a:p>
+            <a:pPr marL="800280" lvl="1" indent="-343080">
+              <a:lnSpc>
+                <a:spcPct val="100000"/>
+              </a:lnSpc>
+              <a:spcBef>
+                <a:spcPts val="320"/>
+              </a:spcBef>
+              <a:buClr>
+                <a:srgbClr val="000000"/>
+              </a:buClr>
+              <a:buFont typeface="Symbol"/>
+              <a:buChar char=""/>
+              <a:tabLst>
+                <a:tab pos="1886040" algn="l"/>
+              </a:tabLst>
+            </a:pPr>
+            <a:r>
+              <a:rPr lang="en-US" sz="1200" spc="-1" dirty="0">
+                <a:solidFill>
+                  <a:srgbClr val="000000"/>
+                </a:solidFill>
+              </a:rPr>
+              <a:t>CodeEU-261: </a:t>
+            </a:r>
+            <a:r>
+              <a:rPr lang="en-US" sz="1200" spc="-1" dirty="0" err="1">
+                <a:solidFill>
+                  <a:srgbClr val="000000"/>
+                </a:solidFill>
+              </a:rPr>
+              <a:t>SuperCap</a:t>
+            </a:r>
+            <a:r>
+              <a:rPr lang="en-US" sz="1200" spc="-1" dirty="0">
+                <a:solidFill>
+                  <a:srgbClr val="000000"/>
+                </a:solidFill>
+              </a:rPr>
+              <a:t> internal resistance standard values correction</a:t>
+            </a:r>
+          </a:p>
+          <a:p>
+            <a:pPr marL="800280" lvl="1" indent="-343080">
+              <a:lnSpc>
+                <a:spcPct val="100000"/>
+              </a:lnSpc>
+              <a:spcBef>
+                <a:spcPts val="320"/>
+              </a:spcBef>
+              <a:buClr>
+                <a:srgbClr val="000000"/>
+              </a:buClr>
+              <a:buFont typeface="Symbol"/>
+              <a:buChar char=""/>
+              <a:tabLst>
+                <a:tab pos="1886040" algn="l"/>
+              </a:tabLst>
+            </a:pPr>
+            <a:r>
+              <a:rPr lang="en-US" sz="1200" spc="-1" dirty="0">
+                <a:solidFill>
+                  <a:srgbClr val="000000"/>
+                </a:solidFill>
+              </a:rPr>
+              <a:t>CodeEU-263: Determination of rated power for IEPCs for MRF and CIF</a:t>
+            </a:r>
+          </a:p>
+          <a:p>
+            <a:pPr marL="800280" lvl="1" indent="-343080">
+              <a:lnSpc>
+                <a:spcPct val="100000"/>
+              </a:lnSpc>
+              <a:spcBef>
+                <a:spcPts val="320"/>
+              </a:spcBef>
+              <a:buClr>
+                <a:srgbClr val="000000"/>
+              </a:buClr>
+              <a:buFont typeface="Symbol"/>
+              <a:buChar char=""/>
+              <a:tabLst>
+                <a:tab pos="1886040" algn="l"/>
+              </a:tabLst>
+            </a:pPr>
+            <a:r>
+              <a:rPr lang="en-US" sz="1200" spc="-1" dirty="0">
+                <a:solidFill>
+                  <a:srgbClr val="000000"/>
+                </a:solidFill>
+              </a:rPr>
+              <a:t>CodeEU-266: Fix Measured Speed Testcases</a:t>
+            </a:r>
+            <a:endParaRPr lang="en-US" sz="1200" b="0" strike="noStrike" spc="-1" dirty="0">
+              <a:latin typeface="Arial"/>
+            </a:endParaRPr>
+          </a:p>
           <a:p>
             <a:pPr>
               <a:lnSpc>
@@ -2291,7 +3937,7 @@
                 <a:tab pos="1886040" algn="l"/>
               </a:tabLst>
             </a:pPr>
-            <a:endParaRPr lang="en-US" sz="1400" b="0" strike="noStrike" spc="-1" dirty="0">
+            <a:endParaRPr lang="en-US" sz="1200" b="0" strike="noStrike" spc="-1" dirty="0">
               <a:latin typeface="Arial"/>
             </a:endParaRPr>
           </a:p>
@@ -2333,7 +3979,412 @@
 </p:sld>
 </file>
 
-<file path=ppt/slides/slide3.xml><?xml version="1.0" encoding="utf-8"?>
+<file path=ppt/slides/slide4.xml><?xml version="1.0" encoding="utf-8"?>
+<p:sld xmlns:a="http://schemas.openxmlformats.org/drawingml/2006/main" xmlns:r="http://schemas.openxmlformats.org/officeDocument/2006/relationships" xmlns:p="http://schemas.openxmlformats.org/presentationml/2006/main">
+  <p:cSld>
+    <p:spTree>
+      <p:nvGrpSpPr>
+        <p:cNvPr id="1" name=""/>
+        <p:cNvGrpSpPr/>
+        <p:nvPr/>
+      </p:nvGrpSpPr>
+      <p:grpSpPr>
+        <a:xfrm>
+          <a:off x="0" y="0"/>
+          <a:ext cx="0" cy="0"/>
+          <a:chOff x="0" y="0"/>
+          <a:chExt cx="0" cy="0"/>
+        </a:xfrm>
+      </p:grpSpPr>
+      <p:sp>
+        <p:nvSpPr>
+          <p:cNvPr id="92" name="PlaceHolder 1"/>
+          <p:cNvSpPr>
+            <a:spLocks noGrp="1"/>
+          </p:cNvSpPr>
+          <p:nvPr>
+            <p:ph type="title"/>
+          </p:nvPr>
+        </p:nvSpPr>
+        <p:spPr>
+          <a:xfrm>
+            <a:off x="468360" y="476640"/>
+            <a:ext cx="8217720" cy="680400"/>
+          </a:xfrm>
+          <a:prstGeom prst="rect">
+            <a:avLst/>
+          </a:prstGeom>
+          <a:noFill/>
+          <a:ln w="0">
+            <a:noFill/>
+          </a:ln>
+        </p:spPr>
+        <p:txBody>
+          <a:bodyPr lIns="90000" tIns="45000" rIns="90000" bIns="45000" numCol="1" spcCol="0" anchor="ctr">
+            <a:noAutofit/>
+          </a:bodyPr>
+          <a:lstStyle/>
+          <a:p>
+            <a:pPr algn="ctr">
+              <a:lnSpc>
+                <a:spcPct val="100000"/>
+              </a:lnSpc>
+              <a:buNone/>
+            </a:pPr>
+            <a:r>
+              <a:rPr lang="en-US" sz="2400" b="1" strike="noStrike" spc="-1" dirty="0">
+                <a:solidFill>
+                  <a:srgbClr val="990000"/>
+                </a:solidFill>
+                <a:latin typeface="Arial"/>
+              </a:rPr>
+              <a:t>Vecto 4.0.1.3217 OFFICIAL RELEASE</a:t>
+            </a:r>
+            <a:br>
+              <a:rPr sz="2400" dirty="0"/>
+            </a:br>
+            <a:r>
+              <a:rPr lang="en-US" sz="1600" spc="-1" dirty="0">
+                <a:latin typeface="Arial"/>
+              </a:rPr>
+              <a:t>23.10.2023</a:t>
+            </a:r>
+            <a:endParaRPr lang="en-US" sz="1600" b="0" strike="noStrike" spc="-1" dirty="0">
+              <a:latin typeface="Arial"/>
+            </a:endParaRPr>
+          </a:p>
+        </p:txBody>
+      </p:sp>
+      <p:sp>
+        <p:nvSpPr>
+          <p:cNvPr id="93" name="PlaceHolder 2"/>
+          <p:cNvSpPr>
+            <a:spLocks noGrp="1"/>
+          </p:cNvSpPr>
+          <p:nvPr>
+            <p:ph/>
+          </p:nvPr>
+        </p:nvSpPr>
+        <p:spPr>
+          <a:xfrm>
+            <a:off x="323640" y="1268640"/>
+            <a:ext cx="8496360" cy="4823640"/>
+          </a:xfrm>
+          <a:prstGeom prst="rect">
+            <a:avLst/>
+          </a:prstGeom>
+          <a:noFill/>
+          <a:ln w="0">
+            <a:noFill/>
+          </a:ln>
+        </p:spPr>
+        <p:txBody>
+          <a:bodyPr lIns="90000" tIns="45000" rIns="90000" bIns="45000" numCol="1" spcCol="0" anchor="t">
+            <a:noAutofit/>
+          </a:bodyPr>
+          <a:lstStyle/>
+          <a:p>
+            <a:pPr marL="343080" indent="-343080">
+              <a:lnSpc>
+                <a:spcPct val="100000"/>
+              </a:lnSpc>
+              <a:spcBef>
+                <a:spcPts val="320"/>
+              </a:spcBef>
+              <a:buClr>
+                <a:srgbClr val="000000"/>
+              </a:buClr>
+              <a:buFont typeface="Symbol"/>
+              <a:buChar char=""/>
+              <a:tabLst>
+                <a:tab pos="1886040" algn="l"/>
+              </a:tabLst>
+            </a:pPr>
+            <a:r>
+              <a:rPr lang="en-US" sz="1600" b="1" spc="-1" dirty="0">
+                <a:solidFill>
+                  <a:srgbClr val="000000"/>
+                </a:solidFill>
+              </a:rPr>
+              <a:t>Improvements</a:t>
+            </a:r>
+          </a:p>
+          <a:p>
+            <a:pPr marL="800280" lvl="1" indent="-343080">
+              <a:lnSpc>
+                <a:spcPct val="100000"/>
+              </a:lnSpc>
+              <a:spcBef>
+                <a:spcPts val="320"/>
+              </a:spcBef>
+              <a:buClr>
+                <a:srgbClr val="000000"/>
+              </a:buClr>
+              <a:buFont typeface="Symbol"/>
+              <a:buChar char=""/>
+              <a:tabLst>
+                <a:tab pos="1886040" algn="l"/>
+              </a:tabLst>
+            </a:pPr>
+            <a:r>
+              <a:rPr lang="en-US" sz="1400" spc="-1" dirty="0">
+                <a:solidFill>
+                  <a:srgbClr val="000000"/>
+                </a:solidFill>
+              </a:rPr>
+              <a:t>VTP mode: create zip archive for input and output files</a:t>
+            </a:r>
+          </a:p>
+          <a:p>
+            <a:pPr marL="343080" indent="-343080">
+              <a:lnSpc>
+                <a:spcPct val="100000"/>
+              </a:lnSpc>
+              <a:spcBef>
+                <a:spcPts val="320"/>
+              </a:spcBef>
+              <a:buClr>
+                <a:srgbClr val="000000"/>
+              </a:buClr>
+              <a:buFont typeface="Symbol"/>
+              <a:buChar char=""/>
+              <a:tabLst>
+                <a:tab pos="1886040" algn="l"/>
+              </a:tabLst>
+            </a:pPr>
+            <a:r>
+              <a:rPr lang="en-US" sz="1600" b="1" spc="-1" dirty="0">
+                <a:solidFill>
+                  <a:srgbClr val="000000"/>
+                </a:solidFill>
+              </a:rPr>
+              <a:t>- Bugfixes</a:t>
+            </a:r>
+          </a:p>
+          <a:p>
+            <a:pPr marL="800280" lvl="1" indent="-343080">
+              <a:lnSpc>
+                <a:spcPct val="100000"/>
+              </a:lnSpc>
+              <a:spcBef>
+                <a:spcPts val="320"/>
+              </a:spcBef>
+              <a:buClr>
+                <a:srgbClr val="000000"/>
+              </a:buClr>
+              <a:buFont typeface="Symbol"/>
+              <a:buChar char=""/>
+              <a:tabLst>
+                <a:tab pos="1886040" algn="l"/>
+              </a:tabLst>
+            </a:pPr>
+            <a:r>
+              <a:rPr lang="en-US" sz="1400" spc="-1" dirty="0">
+                <a:solidFill>
+                  <a:srgbClr val="000000"/>
+                </a:solidFill>
+              </a:rPr>
+              <a:t>bugfix in CIF for complete(d) buses - do not write </a:t>
+            </a:r>
+            <a:r>
+              <a:rPr lang="en-US" sz="1400" spc="-1" dirty="0" err="1">
+                <a:solidFill>
+                  <a:srgbClr val="000000"/>
+                </a:solidFill>
+              </a:rPr>
+              <a:t>PrimaryVehicleSubgroup</a:t>
+            </a:r>
+            <a:r>
+              <a:rPr lang="en-US" sz="1400" spc="-1" dirty="0">
+                <a:solidFill>
+                  <a:srgbClr val="000000"/>
+                </a:solidFill>
+              </a:rPr>
+              <a:t> element</a:t>
+            </a:r>
+          </a:p>
+          <a:p>
+            <a:pPr marL="800280" lvl="1" indent="-343080">
+              <a:lnSpc>
+                <a:spcPct val="100000"/>
+              </a:lnSpc>
+              <a:spcBef>
+                <a:spcPts val="320"/>
+              </a:spcBef>
+              <a:buClr>
+                <a:srgbClr val="000000"/>
+              </a:buClr>
+              <a:buFont typeface="Symbol"/>
+              <a:buChar char=""/>
+              <a:tabLst>
+                <a:tab pos="1886040" algn="l"/>
+              </a:tabLst>
+            </a:pPr>
+            <a:r>
+              <a:rPr lang="en-US" sz="1400" spc="-1" dirty="0">
+                <a:solidFill>
+                  <a:srgbClr val="000000"/>
+                </a:solidFill>
+              </a:rPr>
+              <a:t>fix hybrid strategy: power comparison</a:t>
+            </a:r>
+          </a:p>
+          <a:p>
+            <a:pPr marL="800280" lvl="1" indent="-343080">
+              <a:lnSpc>
+                <a:spcPct val="100000"/>
+              </a:lnSpc>
+              <a:spcBef>
+                <a:spcPts val="320"/>
+              </a:spcBef>
+              <a:buClr>
+                <a:srgbClr val="000000"/>
+              </a:buClr>
+              <a:buFont typeface="Symbol"/>
+              <a:buChar char=""/>
+              <a:tabLst>
+                <a:tab pos="1886040" algn="l"/>
+              </a:tabLst>
+            </a:pPr>
+            <a:r>
+              <a:rPr lang="en-US" sz="1400" spc="-1" dirty="0">
+                <a:solidFill>
+                  <a:srgbClr val="000000"/>
+                </a:solidFill>
+              </a:rPr>
+              <a:t>fix exempted vehicles do not work (error message that XML version is not supported)</a:t>
+            </a:r>
+          </a:p>
+          <a:p>
+            <a:pPr marL="800280" lvl="1" indent="-343080">
+              <a:lnSpc>
+                <a:spcPct val="100000"/>
+              </a:lnSpc>
+              <a:spcBef>
+                <a:spcPts val="320"/>
+              </a:spcBef>
+              <a:buClr>
+                <a:srgbClr val="000000"/>
+              </a:buClr>
+              <a:buFont typeface="Symbol"/>
+              <a:buChar char=""/>
+              <a:tabLst>
+                <a:tab pos="1886040" algn="l"/>
+              </a:tabLst>
+            </a:pPr>
+            <a:r>
+              <a:rPr lang="en-US" sz="1400" spc="-1" dirty="0">
+                <a:solidFill>
+                  <a:srgbClr val="000000"/>
+                </a:solidFill>
+              </a:rPr>
+              <a:t>bugfix in XML schema: remove wrong PS technology entry for lorries</a:t>
+            </a:r>
+          </a:p>
+          <a:p>
+            <a:pPr marL="800280" lvl="1" indent="-343080">
+              <a:lnSpc>
+                <a:spcPct val="100000"/>
+              </a:lnSpc>
+              <a:spcBef>
+                <a:spcPts val="320"/>
+              </a:spcBef>
+              <a:buClr>
+                <a:srgbClr val="000000"/>
+              </a:buClr>
+              <a:buFont typeface="Symbol"/>
+              <a:buChar char=""/>
+              <a:tabLst>
+                <a:tab pos="1886040" algn="l"/>
+              </a:tabLst>
+            </a:pPr>
+            <a:r>
+              <a:rPr lang="en-US" sz="1400" spc="-1" dirty="0">
+                <a:solidFill>
+                  <a:srgbClr val="000000"/>
+                </a:solidFill>
+              </a:rPr>
+              <a:t>bugfix for conditioning power demand for IHPC vehicles</a:t>
+            </a:r>
+            <a:endParaRPr lang="en-US" sz="1050" strike="noStrike" spc="-1" dirty="0">
+              <a:latin typeface="Arial"/>
+            </a:endParaRPr>
+          </a:p>
+          <a:p>
+            <a:pPr>
+              <a:lnSpc>
+                <a:spcPct val="100000"/>
+              </a:lnSpc>
+              <a:buNone/>
+              <a:tabLst>
+                <a:tab pos="1886040" algn="l"/>
+              </a:tabLst>
+            </a:pPr>
+            <a:endParaRPr lang="en-US" sz="1400" b="0" strike="noStrike" spc="-1" dirty="0">
+              <a:latin typeface="Arial"/>
+            </a:endParaRPr>
+          </a:p>
+          <a:p>
+            <a:pPr>
+              <a:lnSpc>
+                <a:spcPct val="100000"/>
+              </a:lnSpc>
+              <a:spcBef>
+                <a:spcPts val="281"/>
+              </a:spcBef>
+              <a:buNone/>
+              <a:tabLst>
+                <a:tab pos="1886040" algn="l"/>
+              </a:tabLst>
+            </a:pPr>
+            <a:endParaRPr lang="en-US" sz="1400" b="0" strike="noStrike" spc="-1" dirty="0">
+              <a:latin typeface="Arial"/>
+            </a:endParaRPr>
+          </a:p>
+          <a:p>
+            <a:pPr>
+              <a:lnSpc>
+                <a:spcPct val="100000"/>
+              </a:lnSpc>
+              <a:buNone/>
+              <a:tabLst>
+                <a:tab pos="1886040" algn="l"/>
+              </a:tabLst>
+            </a:pPr>
+            <a:endParaRPr lang="en-US" sz="1400" b="0" strike="noStrike" spc="-1" dirty="0">
+              <a:latin typeface="Arial"/>
+            </a:endParaRPr>
+          </a:p>
+          <a:p>
+            <a:pPr>
+              <a:lnSpc>
+                <a:spcPct val="100000"/>
+              </a:lnSpc>
+              <a:buNone/>
+              <a:tabLst>
+                <a:tab pos="1886040" algn="l"/>
+              </a:tabLst>
+            </a:pPr>
+            <a:endParaRPr lang="en-US" sz="1400" b="0" strike="noStrike" spc="-1" dirty="0">
+              <a:latin typeface="Arial"/>
+            </a:endParaRPr>
+          </a:p>
+        </p:txBody>
+      </p:sp>
+    </p:spTree>
+    <p:extLst>
+      <p:ext uri="{BB962C8B-B14F-4D97-AF65-F5344CB8AC3E}">
+        <p14:creationId xmlns:p14="http://schemas.microsoft.com/office/powerpoint/2010/main" val="890012610"/>
+      </p:ext>
+    </p:extLst>
+  </p:cSld>
+  <p:clrMapOvr>
+    <a:masterClrMapping/>
+  </p:clrMapOvr>
+</p:sld>
+</file>
+
+<file path=ppt/slides/slide5.xml><?xml version="1.0" encoding="utf-8"?>
 <p:sld xmlns:a="http://schemas.openxmlformats.org/drawingml/2006/main" xmlns:r="http://schemas.openxmlformats.org/officeDocument/2006/relationships" xmlns:p="http://schemas.openxmlformats.org/presentationml/2006/main">
   <p:cSld>
     <p:spTree>
@@ -2576,7 +4627,7 @@
 </p:sld>
 </file>
 
-<file path=ppt/slides/slide4.xml><?xml version="1.0" encoding="utf-8"?>
+<file path=ppt/slides/slide6.xml><?xml version="1.0" encoding="utf-8"?>
 <p:sld xmlns:a="http://schemas.openxmlformats.org/drawingml/2006/main" xmlns:r="http://schemas.openxmlformats.org/officeDocument/2006/relationships" xmlns:p="http://schemas.openxmlformats.org/presentationml/2006/main">
   <p:cSld>
     <p:spTree>
@@ -2695,7 +4746,7 @@
 </p:sld>
 </file>
 
-<file path=ppt/slides/slide5.xml><?xml version="1.0" encoding="utf-8"?>
+<file path=ppt/slides/slide7.xml><?xml version="1.0" encoding="utf-8"?>
 <p:sld xmlns:a="http://schemas.openxmlformats.org/drawingml/2006/main" xmlns:r="http://schemas.openxmlformats.org/officeDocument/2006/relationships" xmlns:p="http://schemas.openxmlformats.org/presentationml/2006/main">
   <p:cSld>
     <p:spTree>
@@ -3037,7 +5088,7 @@
 </p:sld>
 </file>
 
-<file path=ppt/slides/slide6.xml><?xml version="1.0" encoding="utf-8"?>
+<file path=ppt/slides/slide8.xml><?xml version="1.0" encoding="utf-8"?>
 <p:sld xmlns:a="http://schemas.openxmlformats.org/drawingml/2006/main" xmlns:r="http://schemas.openxmlformats.org/officeDocument/2006/relationships" xmlns:p="http://schemas.openxmlformats.org/presentationml/2006/main">
   <p:cSld>
     <p:spTree>
@@ -4864,7 +6915,7 @@
 </p:sld>
 </file>
 
-<file path=ppt/slides/slide7.xml><?xml version="1.0" encoding="utf-8"?>
+<file path=ppt/slides/slide9.xml><?xml version="1.0" encoding="utf-8"?>
 <p:sld xmlns:a="http://schemas.openxmlformats.org/drawingml/2006/main" xmlns:r="http://schemas.openxmlformats.org/officeDocument/2006/relationships" xmlns:p="http://schemas.openxmlformats.org/presentationml/2006/main">
   <p:cSld>
     <p:spTree>
@@ -4965,682 +7016,6 @@
     <p:extLst>
       <p:ext uri="{BB962C8B-B14F-4D97-AF65-F5344CB8AC3E}">
         <p14:creationId xmlns:p14="http://schemas.microsoft.com/office/powerpoint/2010/main" val="3711980566"/>
-      </p:ext>
-    </p:extLst>
-  </p:cSld>
-  <p:clrMapOvr>
-    <a:masterClrMapping/>
-  </p:clrMapOvr>
-</p:sld>
-</file>
-
-<file path=ppt/slides/slide8.xml><?xml version="1.0" encoding="utf-8"?>
-<p:sld xmlns:a="http://schemas.openxmlformats.org/drawingml/2006/main" xmlns:r="http://schemas.openxmlformats.org/officeDocument/2006/relationships" xmlns:p="http://schemas.openxmlformats.org/presentationml/2006/main">
-  <p:cSld>
-    <p:spTree>
-      <p:nvGrpSpPr>
-        <p:cNvPr id="1" name=""/>
-        <p:cNvGrpSpPr/>
-        <p:nvPr/>
-      </p:nvGrpSpPr>
-      <p:grpSpPr>
-        <a:xfrm>
-          <a:off x="0" y="0"/>
-          <a:ext cx="0" cy="0"/>
-          <a:chOff x="0" y="0"/>
-          <a:chExt cx="0" cy="0"/>
-        </a:xfrm>
-      </p:grpSpPr>
-      <p:sp>
-        <p:nvSpPr>
-          <p:cNvPr id="5" name="Titel 4"/>
-          <p:cNvSpPr>
-            <a:spLocks noGrp="1"/>
-          </p:cNvSpPr>
-          <p:nvPr>
-            <p:ph type="title"/>
-          </p:nvPr>
-        </p:nvSpPr>
-        <p:spPr>
-          <a:xfrm>
-            <a:off x="588206" y="453541"/>
-            <a:ext cx="8229240" cy="1128611"/>
-          </a:xfrm>
-        </p:spPr>
-        <p:txBody>
-          <a:bodyPr/>
-          <a:lstStyle/>
-          <a:p>
-            <a:r>
-              <a:rPr lang="en-US" dirty="0"/>
-              <a:t>Implementation of Declaration Mode for </a:t>
-            </a:r>
-            <a:r>
-              <a:rPr lang="en-US" dirty="0" err="1"/>
-              <a:t>xEV</a:t>
-            </a:r>
-            <a:r>
-              <a:rPr lang="en-US" dirty="0"/>
-              <a:t>-Vehicles</a:t>
-            </a:r>
-            <a:br>
-              <a:rPr lang="en-US" dirty="0"/>
-            </a:br>
-            <a:endParaRPr lang="en-GB" dirty="0"/>
-          </a:p>
-        </p:txBody>
-      </p:sp>
-      <p:sp>
-        <p:nvSpPr>
-          <p:cNvPr id="2" name="Textfeld 1">
-            <a:extLst>
-              <a:ext uri="{FF2B5EF4-FFF2-40B4-BE49-F238E27FC236}">
-                <a16:creationId xmlns:a16="http://schemas.microsoft.com/office/drawing/2014/main" id="{7F97F0DD-10D2-4FD8-BC61-46C366138663}"/>
-              </a:ext>
-            </a:extLst>
-          </p:cNvPr>
-          <p:cNvSpPr txBox="1"/>
-          <p:nvPr/>
-        </p:nvSpPr>
-        <p:spPr>
-          <a:xfrm>
-            <a:off x="588206" y="1210614"/>
-            <a:ext cx="7967588" cy="3385542"/>
-          </a:xfrm>
-          <a:prstGeom prst="rect">
-            <a:avLst/>
-          </a:prstGeom>
-          <a:noFill/>
-        </p:spPr>
-        <p:txBody>
-          <a:bodyPr wrap="square" rtlCol="0">
-            <a:spAutoFit/>
-          </a:bodyPr>
-          <a:lstStyle/>
-          <a:p>
-            <a:pPr marL="342900" indent="-342900">
-              <a:spcBef>
-                <a:spcPts val="1200"/>
-              </a:spcBef>
-              <a:buFont typeface="Arial" panose="020B0604020202020204" pitchFamily="34" charset="0"/>
-              <a:buChar char="•"/>
-            </a:pPr>
-            <a:r>
-              <a:rPr lang="en-GB" sz="2000" dirty="0"/>
-              <a:t>Generic auxiliary parametrisation</a:t>
-            </a:r>
-          </a:p>
-          <a:p>
-            <a:pPr marL="342900" indent="-342900">
-              <a:spcBef>
-                <a:spcPts val="1200"/>
-              </a:spcBef>
-              <a:buFont typeface="Arial" panose="020B0604020202020204" pitchFamily="34" charset="0"/>
-              <a:buChar char="•"/>
-            </a:pPr>
-            <a:r>
-              <a:rPr lang="en-GB" sz="2000" dirty="0"/>
-              <a:t>Generic parametrisation of usable SOC range</a:t>
-            </a:r>
-          </a:p>
-          <a:p>
-            <a:pPr marL="342900" indent="-342900">
-              <a:spcBef>
-                <a:spcPts val="1200"/>
-              </a:spcBef>
-              <a:buFont typeface="Arial" panose="020B0604020202020204" pitchFamily="34" charset="0"/>
-              <a:buChar char="•"/>
-            </a:pPr>
-            <a:r>
-              <a:rPr lang="en-GB" sz="2000" dirty="0"/>
-              <a:t>Generic parametrisation of Serial/Parallel Hybrid Strategy parameters</a:t>
-            </a:r>
-          </a:p>
-          <a:p>
-            <a:pPr marL="342900" indent="-342900">
-              <a:spcBef>
-                <a:spcPts val="1200"/>
-              </a:spcBef>
-              <a:buFont typeface="Arial" panose="020B0604020202020204" pitchFamily="34" charset="0"/>
-              <a:buChar char="•"/>
-            </a:pPr>
-            <a:r>
-              <a:rPr lang="en-GB" sz="2000" dirty="0"/>
-              <a:t>Automated simulation of OVC-HEV</a:t>
-            </a:r>
-          </a:p>
-          <a:p>
-            <a:pPr marL="742950" lvl="1" indent="-285750">
-              <a:spcBef>
-                <a:spcPts val="1200"/>
-              </a:spcBef>
-              <a:buFont typeface="Arial" panose="020B0604020202020204" pitchFamily="34" charset="0"/>
-              <a:buChar char="•"/>
-            </a:pPr>
-            <a:r>
-              <a:rPr lang="en-GB" sz="1600" dirty="0"/>
-              <a:t>Charge depleting mode (CD): The propulsion energy is provided by the electric storage only</a:t>
-            </a:r>
-          </a:p>
-          <a:p>
-            <a:pPr marL="742950" lvl="1" indent="-285750">
-              <a:spcBef>
-                <a:spcPts val="1200"/>
-              </a:spcBef>
-              <a:buFont typeface="Arial" panose="020B0604020202020204" pitchFamily="34" charset="0"/>
-              <a:buChar char="•"/>
-            </a:pPr>
-            <a:r>
-              <a:rPr lang="en-GB" sz="1600" dirty="0"/>
-              <a:t>Charge sustaining mode (CS): The propulsion energy is provided by the fuel storage</a:t>
-            </a:r>
-            <a:endParaRPr lang="en-GB" sz="2000" dirty="0"/>
-          </a:p>
-        </p:txBody>
-      </p:sp>
-    </p:spTree>
-    <p:extLst>
-      <p:ext uri="{BB962C8B-B14F-4D97-AF65-F5344CB8AC3E}">
-        <p14:creationId xmlns:p14="http://schemas.microsoft.com/office/powerpoint/2010/main" val="3750009579"/>
-      </p:ext>
-    </p:extLst>
-  </p:cSld>
-  <p:clrMapOvr>
-    <a:masterClrMapping/>
-  </p:clrMapOvr>
-</p:sld>
-</file>
-
-<file path=ppt/slides/slide9.xml><?xml version="1.0" encoding="utf-8"?>
-<p:sld xmlns:a="http://schemas.openxmlformats.org/drawingml/2006/main" xmlns:r="http://schemas.openxmlformats.org/officeDocument/2006/relationships" xmlns:p="http://schemas.openxmlformats.org/presentationml/2006/main">
-  <p:cSld>
-    <p:spTree>
-      <p:nvGrpSpPr>
-        <p:cNvPr id="1" name=""/>
-        <p:cNvGrpSpPr/>
-        <p:nvPr/>
-      </p:nvGrpSpPr>
-      <p:grpSpPr>
-        <a:xfrm>
-          <a:off x="0" y="0"/>
-          <a:ext cx="0" cy="0"/>
-          <a:chOff x="0" y="0"/>
-          <a:chExt cx="0" cy="0"/>
-        </a:xfrm>
-      </p:grpSpPr>
-      <p:sp>
-        <p:nvSpPr>
-          <p:cNvPr id="5" name="Titel 4"/>
-          <p:cNvSpPr>
-            <a:spLocks noGrp="1"/>
-          </p:cNvSpPr>
-          <p:nvPr>
-            <p:ph type="title"/>
-          </p:nvPr>
-        </p:nvSpPr>
-        <p:spPr>
-          <a:xfrm>
-            <a:off x="588206" y="453541"/>
-            <a:ext cx="8229240" cy="1128611"/>
-          </a:xfrm>
-        </p:spPr>
-        <p:txBody>
-          <a:bodyPr/>
-          <a:lstStyle/>
-          <a:p>
-            <a:r>
-              <a:rPr lang="en-US" dirty="0"/>
-              <a:t>Implementation of Declaration Mode for </a:t>
-            </a:r>
-            <a:r>
-              <a:rPr lang="en-US" dirty="0" err="1"/>
-              <a:t>xEV</a:t>
-            </a:r>
-            <a:r>
-              <a:rPr lang="en-US" dirty="0"/>
-              <a:t>-Lorries</a:t>
-            </a:r>
-            <a:br>
-              <a:rPr lang="en-US" dirty="0"/>
-            </a:br>
-            <a:endParaRPr lang="en-GB" dirty="0"/>
-          </a:p>
-        </p:txBody>
-      </p:sp>
-      <p:sp>
-        <p:nvSpPr>
-          <p:cNvPr id="10" name="Inhaltsplatzhalter 5">
-            <a:extLst>
-              <a:ext uri="{FF2B5EF4-FFF2-40B4-BE49-F238E27FC236}">
-                <a16:creationId xmlns:a16="http://schemas.microsoft.com/office/drawing/2014/main" id="{9AC94515-EF8A-4107-800D-FAA5237CA306}"/>
-              </a:ext>
-            </a:extLst>
-          </p:cNvPr>
-          <p:cNvSpPr txBox="1">
-            <a:spLocks/>
-          </p:cNvSpPr>
-          <p:nvPr/>
-        </p:nvSpPr>
-        <p:spPr>
-          <a:xfrm>
-            <a:off x="749355" y="1085088"/>
-            <a:ext cx="8394645" cy="5128557"/>
-          </a:xfrm>
-          <a:prstGeom prst="rect">
-            <a:avLst/>
-          </a:prstGeom>
-          <a:noFill/>
-          <a:ln w="0">
-            <a:noFill/>
-          </a:ln>
-        </p:spPr>
-        <p:txBody>
-          <a:bodyPr lIns="0" tIns="0" rIns="0" bIns="0" anchor="t">
-            <a:normAutofit/>
-          </a:bodyPr>
-          <a:lstStyle>
-            <a:lvl1pPr marL="228600" indent="-228600" algn="l" defTabSz="914400" rtl="0" eaLnBrk="1" latinLnBrk="0" hangingPunct="1">
-              <a:lnSpc>
-                <a:spcPct val="90000"/>
-              </a:lnSpc>
-              <a:spcBef>
-                <a:spcPts val="1000"/>
-              </a:spcBef>
-              <a:buFont typeface="Arial" panose="020B0604020202020204" pitchFamily="34" charset="0"/>
-              <a:buChar char="•"/>
-              <a:defRPr sz="2800" kern="1200">
-                <a:solidFill>
-                  <a:schemeClr val="tx1"/>
-                </a:solidFill>
-                <a:latin typeface="+mn-lt"/>
-                <a:ea typeface="+mn-ea"/>
-                <a:cs typeface="+mn-cs"/>
-              </a:defRPr>
-            </a:lvl1pPr>
-            <a:lvl2pPr marL="715963" indent="-266700" algn="l" defTabSz="914400" rtl="0" eaLnBrk="1" latinLnBrk="0" hangingPunct="1">
-              <a:lnSpc>
-                <a:spcPct val="90000"/>
-              </a:lnSpc>
-              <a:spcBef>
-                <a:spcPts val="500"/>
-              </a:spcBef>
-              <a:buFont typeface="Wingdings" panose="05000000000000000000" pitchFamily="2" charset="2"/>
-              <a:buChar char="§"/>
-              <a:defRPr sz="2400" kern="1200">
-                <a:solidFill>
-                  <a:schemeClr val="tx1"/>
-                </a:solidFill>
-                <a:latin typeface="+mn-lt"/>
-                <a:ea typeface="+mn-ea"/>
-                <a:cs typeface="+mn-cs"/>
-              </a:defRPr>
-            </a:lvl2pPr>
-            <a:lvl3pPr marL="1143000" indent="-228600" algn="l" defTabSz="914400" rtl="0" eaLnBrk="1" latinLnBrk="0" hangingPunct="1">
-              <a:lnSpc>
-                <a:spcPct val="90000"/>
-              </a:lnSpc>
-              <a:spcBef>
-                <a:spcPts val="500"/>
-              </a:spcBef>
-              <a:buFont typeface="Arial" panose="020B0604020202020204" pitchFamily="34" charset="0"/>
-              <a:buChar char="•"/>
-              <a:defRPr sz="2000" kern="1200">
-                <a:solidFill>
-                  <a:schemeClr val="tx1"/>
-                </a:solidFill>
-                <a:latin typeface="+mn-lt"/>
-                <a:ea typeface="+mn-ea"/>
-                <a:cs typeface="+mn-cs"/>
-              </a:defRPr>
-            </a:lvl3pPr>
-            <a:lvl4pPr marL="1600200" indent="-228600" algn="l" defTabSz="914400" rtl="0" eaLnBrk="1" latinLnBrk="0" hangingPunct="1">
-              <a:lnSpc>
-                <a:spcPct val="90000"/>
-              </a:lnSpc>
-              <a:spcBef>
-                <a:spcPts val="500"/>
-              </a:spcBef>
-              <a:buFont typeface="Arial" panose="020B0604020202020204" pitchFamily="34" charset="0"/>
-              <a:buChar char="•"/>
-              <a:defRPr sz="1800" kern="1200">
-                <a:solidFill>
-                  <a:schemeClr val="tx1"/>
-                </a:solidFill>
-                <a:latin typeface="+mn-lt"/>
-                <a:ea typeface="+mn-ea"/>
-                <a:cs typeface="+mn-cs"/>
-              </a:defRPr>
-            </a:lvl4pPr>
-            <a:lvl5pPr marL="2057400" indent="-228600" algn="l" defTabSz="914400" rtl="0" eaLnBrk="1" latinLnBrk="0" hangingPunct="1">
-              <a:lnSpc>
-                <a:spcPct val="90000"/>
-              </a:lnSpc>
-              <a:spcBef>
-                <a:spcPts val="500"/>
-              </a:spcBef>
-              <a:buFont typeface="Arial" panose="020B0604020202020204" pitchFamily="34" charset="0"/>
-              <a:buChar char="•"/>
-              <a:defRPr sz="1800" kern="1200">
-                <a:solidFill>
-                  <a:schemeClr val="tx1"/>
-                </a:solidFill>
-                <a:latin typeface="+mn-lt"/>
-                <a:ea typeface="+mn-ea"/>
-                <a:cs typeface="+mn-cs"/>
-              </a:defRPr>
-            </a:lvl5pPr>
-            <a:lvl6pPr marL="2514600" indent="-228600" algn="l" defTabSz="914400" rtl="0" eaLnBrk="1" latinLnBrk="0" hangingPunct="1">
-              <a:lnSpc>
-                <a:spcPct val="90000"/>
-              </a:lnSpc>
-              <a:spcBef>
-                <a:spcPts val="500"/>
-              </a:spcBef>
-              <a:buFont typeface="Arial" panose="020B0604020202020204" pitchFamily="34" charset="0"/>
-              <a:buChar char="•"/>
-              <a:defRPr sz="1800" kern="1200">
-                <a:solidFill>
-                  <a:schemeClr val="tx1"/>
-                </a:solidFill>
-                <a:latin typeface="+mn-lt"/>
-                <a:ea typeface="+mn-ea"/>
-                <a:cs typeface="+mn-cs"/>
-              </a:defRPr>
-            </a:lvl6pPr>
-            <a:lvl7pPr marL="2971800" indent="-228600" algn="l" defTabSz="914400" rtl="0" eaLnBrk="1" latinLnBrk="0" hangingPunct="1">
-              <a:lnSpc>
-                <a:spcPct val="90000"/>
-              </a:lnSpc>
-              <a:spcBef>
-                <a:spcPts val="500"/>
-              </a:spcBef>
-              <a:buFont typeface="Arial" panose="020B0604020202020204" pitchFamily="34" charset="0"/>
-              <a:buChar char="•"/>
-              <a:defRPr sz="1800" kern="1200">
-                <a:solidFill>
-                  <a:schemeClr val="tx1"/>
-                </a:solidFill>
-                <a:latin typeface="+mn-lt"/>
-                <a:ea typeface="+mn-ea"/>
-                <a:cs typeface="+mn-cs"/>
-              </a:defRPr>
-            </a:lvl7pPr>
-            <a:lvl8pPr marL="3429000" indent="-228600" algn="l" defTabSz="914400" rtl="0" eaLnBrk="1" latinLnBrk="0" hangingPunct="1">
-              <a:lnSpc>
-                <a:spcPct val="90000"/>
-              </a:lnSpc>
-              <a:spcBef>
-                <a:spcPts val="500"/>
-              </a:spcBef>
-              <a:buFont typeface="Arial" panose="020B0604020202020204" pitchFamily="34" charset="0"/>
-              <a:buChar char="•"/>
-              <a:defRPr sz="1800" kern="1200">
-                <a:solidFill>
-                  <a:schemeClr val="tx1"/>
-                </a:solidFill>
-                <a:latin typeface="+mn-lt"/>
-                <a:ea typeface="+mn-ea"/>
-                <a:cs typeface="+mn-cs"/>
-              </a:defRPr>
-            </a:lvl8pPr>
-            <a:lvl9pPr marL="3886200" indent="-228600" algn="l" defTabSz="914400" rtl="0" eaLnBrk="1" latinLnBrk="0" hangingPunct="1">
-              <a:lnSpc>
-                <a:spcPct val="90000"/>
-              </a:lnSpc>
-              <a:spcBef>
-                <a:spcPts val="500"/>
-              </a:spcBef>
-              <a:buFont typeface="Arial" panose="020B0604020202020204" pitchFamily="34" charset="0"/>
-              <a:buChar char="•"/>
-              <a:defRPr sz="1800" kern="1200">
-                <a:solidFill>
-                  <a:schemeClr val="tx1"/>
-                </a:solidFill>
-                <a:latin typeface="+mn-lt"/>
-                <a:ea typeface="+mn-ea"/>
-                <a:cs typeface="+mn-cs"/>
-              </a:defRPr>
-            </a:lvl9pPr>
-          </a:lstStyle>
-          <a:p>
-            <a:pPr>
-              <a:spcBef>
-                <a:spcPts val="1200"/>
-              </a:spcBef>
-            </a:pPr>
-            <a:endParaRPr lang="en-US" sz="1800" dirty="0"/>
-          </a:p>
-          <a:p>
-            <a:pPr>
-              <a:spcBef>
-                <a:spcPts val="1200"/>
-              </a:spcBef>
-            </a:pPr>
-            <a:r>
-              <a:rPr lang="pt-BR" sz="2000" dirty="0"/>
-              <a:t>Generic E-PTO for PEV and S-HEV in Declaration Mode</a:t>
-            </a:r>
-          </a:p>
-          <a:p>
-            <a:pPr>
-              <a:spcBef>
-                <a:spcPts val="1200"/>
-              </a:spcBef>
-            </a:pPr>
-            <a:r>
-              <a:rPr lang="pt-BR" sz="2000" dirty="0"/>
-              <a:t>E-PTO for PEV and S-HEV in Engineering Mode</a:t>
-            </a:r>
-            <a:endParaRPr lang="de-AT" sz="2000" dirty="0"/>
-          </a:p>
-          <a:p>
-            <a:pPr>
-              <a:spcBef>
-                <a:spcPts val="1200"/>
-              </a:spcBef>
-            </a:pPr>
-            <a:endParaRPr lang="en-US" sz="1800" dirty="0"/>
-          </a:p>
-        </p:txBody>
-      </p:sp>
-      <p:sp>
-        <p:nvSpPr>
-          <p:cNvPr id="13" name="Titel 4">
-            <a:extLst>
-              <a:ext uri="{FF2B5EF4-FFF2-40B4-BE49-F238E27FC236}">
-                <a16:creationId xmlns:a16="http://schemas.microsoft.com/office/drawing/2014/main" id="{BF7865A9-6D29-429C-8E5A-628574C8ECAA}"/>
-              </a:ext>
-            </a:extLst>
-          </p:cNvPr>
-          <p:cNvSpPr txBox="1">
-            <a:spLocks/>
-          </p:cNvSpPr>
-          <p:nvPr/>
-        </p:nvSpPr>
-        <p:spPr>
-          <a:xfrm>
-            <a:off x="588206" y="2622197"/>
-            <a:ext cx="8229240" cy="541326"/>
-          </a:xfrm>
-          <a:prstGeom prst="rect">
-            <a:avLst/>
-          </a:prstGeom>
-          <a:noFill/>
-          <a:ln w="0">
-            <a:noFill/>
-          </a:ln>
-        </p:spPr>
-        <p:txBody>
-          <a:bodyPr lIns="0" tIns="0" rIns="0" bIns="0" anchor="ctr">
-            <a:noAutofit/>
-          </a:bodyPr>
-          <a:lstStyle>
-            <a:lvl1pPr algn="l" defTabSz="914400" rtl="0" eaLnBrk="1" latinLnBrk="0" hangingPunct="1">
-              <a:lnSpc>
-                <a:spcPct val="90000"/>
-              </a:lnSpc>
-              <a:spcBef>
-                <a:spcPct val="0"/>
-              </a:spcBef>
-              <a:buNone/>
-              <a:defRPr lang="de-AT" sz="2400" b="1" kern="1200" noProof="0" dirty="0">
-                <a:solidFill>
-                  <a:srgbClr val="990000"/>
-                </a:solidFill>
-                <a:latin typeface="+mj-lt"/>
-                <a:ea typeface="+mj-ea"/>
-                <a:cs typeface="+mj-cs"/>
-              </a:defRPr>
-            </a:lvl1pPr>
-          </a:lstStyle>
-          <a:p>
-            <a:r>
-              <a:rPr lang="en-US" dirty="0"/>
-              <a:t>Implementation of Declaration Mode for Buses</a:t>
-            </a:r>
-            <a:br>
-              <a:rPr lang="en-US" dirty="0"/>
-            </a:br>
-            <a:endParaRPr lang="en-GB" dirty="0"/>
-          </a:p>
-        </p:txBody>
-      </p:sp>
-      <p:sp>
-        <p:nvSpPr>
-          <p:cNvPr id="14" name="Inhaltsplatzhalter 5">
-            <a:extLst>
-              <a:ext uri="{FF2B5EF4-FFF2-40B4-BE49-F238E27FC236}">
-                <a16:creationId xmlns:a16="http://schemas.microsoft.com/office/drawing/2014/main" id="{346F72FC-4385-4A8E-8F9F-B0A7B6786FA6}"/>
-              </a:ext>
-            </a:extLst>
-          </p:cNvPr>
-          <p:cNvSpPr>
-            <a:spLocks noGrp="1"/>
-          </p:cNvSpPr>
-          <p:nvPr>
-            <p:ph idx="1"/>
-          </p:nvPr>
-        </p:nvSpPr>
-        <p:spPr>
-          <a:xfrm>
-            <a:off x="588206" y="2861362"/>
-            <a:ext cx="8394645" cy="1384882"/>
-          </a:xfrm>
-        </p:spPr>
-        <p:txBody>
-          <a:bodyPr>
-            <a:normAutofit/>
-          </a:bodyPr>
-          <a:lstStyle/>
-          <a:p>
-            <a:pPr>
-              <a:spcBef>
-                <a:spcPts val="1200"/>
-              </a:spcBef>
-            </a:pPr>
-            <a:endParaRPr lang="en-US" sz="1800" dirty="0"/>
-          </a:p>
-          <a:p>
-            <a:pPr>
-              <a:spcBef>
-                <a:spcPts val="1200"/>
-              </a:spcBef>
-            </a:pPr>
-            <a:r>
-              <a:rPr lang="de-DE" sz="2000" dirty="0" err="1"/>
-              <a:t>Factor</a:t>
-            </a:r>
-            <a:r>
-              <a:rPr lang="de-DE" sz="2000" dirty="0"/>
-              <a:t> Method </a:t>
-            </a:r>
-            <a:r>
-              <a:rPr lang="de-DE" sz="2000" dirty="0" err="1"/>
-              <a:t>for</a:t>
-            </a:r>
-            <a:r>
-              <a:rPr lang="de-DE" sz="2000" dirty="0"/>
-              <a:t> </a:t>
-            </a:r>
-            <a:r>
-              <a:rPr lang="de-DE" sz="2000" dirty="0" err="1"/>
-              <a:t>conventional</a:t>
-            </a:r>
-            <a:r>
-              <a:rPr lang="de-DE" sz="2000" dirty="0"/>
-              <a:t> and </a:t>
-            </a:r>
-            <a:r>
-              <a:rPr lang="de-DE" sz="2000" dirty="0" err="1"/>
-              <a:t>xEV</a:t>
-            </a:r>
-            <a:r>
-              <a:rPr lang="de-DE" sz="2000" dirty="0"/>
-              <a:t>-Buses</a:t>
-            </a:r>
-          </a:p>
-          <a:p>
-            <a:pPr>
-              <a:spcBef>
-                <a:spcPts val="1200"/>
-              </a:spcBef>
-            </a:pPr>
-            <a:r>
-              <a:rPr lang="de-DE" sz="2000" dirty="0"/>
-              <a:t>Updated </a:t>
-            </a:r>
-            <a:r>
-              <a:rPr lang="de-DE" sz="2000" dirty="0" err="1"/>
-              <a:t>bus</a:t>
-            </a:r>
-            <a:r>
-              <a:rPr lang="de-DE" sz="2000" dirty="0"/>
-              <a:t> </a:t>
-            </a:r>
-            <a:r>
-              <a:rPr lang="de-DE" sz="2000" dirty="0" err="1"/>
-              <a:t>auxiliary</a:t>
-            </a:r>
-            <a:r>
-              <a:rPr lang="de-DE" sz="2000" dirty="0"/>
-              <a:t> </a:t>
-            </a:r>
-            <a:r>
-              <a:rPr lang="de-DE" sz="2000" dirty="0" err="1"/>
-              <a:t>model</a:t>
-            </a:r>
-            <a:endParaRPr lang="de-DE" sz="2000" dirty="0"/>
-          </a:p>
-          <a:p>
-            <a:pPr>
-              <a:spcBef>
-                <a:spcPts val="1200"/>
-              </a:spcBef>
-            </a:pPr>
-            <a:endParaRPr lang="de-DE" sz="2000" dirty="0"/>
-          </a:p>
-          <a:p>
-            <a:pPr>
-              <a:spcBef>
-                <a:spcPts val="1200"/>
-              </a:spcBef>
-            </a:pPr>
-            <a:endParaRPr lang="de-AT" sz="2000" dirty="0"/>
-          </a:p>
-          <a:p>
-            <a:pPr>
-              <a:spcBef>
-                <a:spcPts val="1200"/>
-              </a:spcBef>
-            </a:pPr>
-            <a:endParaRPr lang="en-US" sz="1800" dirty="0"/>
-          </a:p>
-        </p:txBody>
-      </p:sp>
-    </p:spTree>
-    <p:extLst>
-      <p:ext uri="{BB962C8B-B14F-4D97-AF65-F5344CB8AC3E}">
-        <p14:creationId xmlns:p14="http://schemas.microsoft.com/office/powerpoint/2010/main" val="3849441777"/>
       </p:ext>
     </p:extLst>
   </p:cSld>

--- a/Documentation/User Manual Source/Release Notes Vecto4.x.pptx
+++ b/Documentation/User Manual Source/Release Notes Vecto4.x.pptx
@@ -5,20 +5,21 @@
     <p:sldMasterId id="2147483661" r:id="rId1"/>
   </p:sldMasterIdLst>
   <p:notesMasterIdLst>
-    <p:notesMasterId r:id="rId13"/>
+    <p:notesMasterId r:id="rId14"/>
   </p:notesMasterIdLst>
   <p:sldIdLst>
     <p:sldId id="256" r:id="rId2"/>
     <p:sldId id="1322" r:id="rId3"/>
-    <p:sldId id="258" r:id="rId4"/>
-    <p:sldId id="1321" r:id="rId5"/>
-    <p:sldId id="1320" r:id="rId6"/>
-    <p:sldId id="1289" r:id="rId7"/>
-    <p:sldId id="1314" r:id="rId8"/>
-    <p:sldId id="1318" r:id="rId9"/>
-    <p:sldId id="1315" r:id="rId10"/>
-    <p:sldId id="1319" r:id="rId11"/>
-    <p:sldId id="1316" r:id="rId12"/>
+    <p:sldId id="1323" r:id="rId4"/>
+    <p:sldId id="258" r:id="rId5"/>
+    <p:sldId id="1321" r:id="rId6"/>
+    <p:sldId id="1320" r:id="rId7"/>
+    <p:sldId id="1289" r:id="rId8"/>
+    <p:sldId id="1314" r:id="rId9"/>
+    <p:sldId id="1318" r:id="rId10"/>
+    <p:sldId id="1315" r:id="rId11"/>
+    <p:sldId id="1319" r:id="rId12"/>
+    <p:sldId id="1316" r:id="rId13"/>
   </p:sldIdLst>
   <p:sldSz cx="9144000" cy="6858000" type="screen4x3"/>
   <p:notesSz cx="7772400" cy="10058400"/>
@@ -124,6 +125,7 @@
           <p14:sldIdLst>
             <p14:sldId id="256"/>
             <p14:sldId id="1322"/>
+            <p14:sldId id="1323"/>
             <p14:sldId id="258"/>
             <p14:sldId id="1321"/>
             <p14:sldId id="1320"/>
@@ -226,7 +228,7 @@
           <a:p>
             <a:fld id="{390E69D5-8A05-43AD-B5FD-86D96081B052}" type="datetimeFigureOut">
               <a:rPr lang="de-AT" smtClean="0"/>
-              <a:t>18.12.2023</a:t>
+              <a:t>20.12.2023</a:t>
             </a:fld>
             <a:endParaRPr lang="de-AT"/>
           </a:p>
@@ -1956,6 +1958,116 @@
       </p:grpSpPr>
       <p:sp>
         <p:nvSpPr>
+          <p:cNvPr id="6" name="Inhaltsplatzhalter 5"/>
+          <p:cNvSpPr>
+            <a:spLocks noGrp="1"/>
+          </p:cNvSpPr>
+          <p:nvPr>
+            <p:ph idx="1"/>
+          </p:nvPr>
+        </p:nvSpPr>
+        <p:spPr>
+          <a:xfrm>
+            <a:off x="588206" y="1300092"/>
+            <a:ext cx="8394645" cy="4195735"/>
+          </a:xfrm>
+        </p:spPr>
+        <p:txBody>
+          <a:bodyPr>
+            <a:normAutofit/>
+          </a:bodyPr>
+          <a:lstStyle/>
+          <a:p>
+            <a:pPr>
+              <a:spcBef>
+                <a:spcPts val="1200"/>
+              </a:spcBef>
+            </a:pPr>
+            <a:r>
+              <a:rPr lang="en-US" sz="1800" dirty="0"/>
+              <a:t>XML Job Files &lt; v2.4 are no longer supported</a:t>
+            </a:r>
+          </a:p>
+          <a:p>
+            <a:pPr>
+              <a:spcBef>
+                <a:spcPts val="1200"/>
+              </a:spcBef>
+            </a:pPr>
+            <a:r>
+              <a:rPr lang="en-US" sz="1800" dirty="0"/>
+              <a:t>Dropped support for .NET Framework 4.5 (EOL 04/2022)</a:t>
+            </a:r>
+          </a:p>
+          <a:p>
+            <a:pPr>
+              <a:spcBef>
+                <a:spcPts val="1200"/>
+              </a:spcBef>
+            </a:pPr>
+            <a:endParaRPr lang="en-US" sz="1800" dirty="0"/>
+          </a:p>
+        </p:txBody>
+      </p:sp>
+      <p:sp>
+        <p:nvSpPr>
+          <p:cNvPr id="5" name="Titel 4"/>
+          <p:cNvSpPr>
+            <a:spLocks noGrp="1"/>
+          </p:cNvSpPr>
+          <p:nvPr>
+            <p:ph type="title"/>
+          </p:nvPr>
+        </p:nvSpPr>
+        <p:spPr>
+          <a:xfrm>
+            <a:off x="588206" y="453542"/>
+            <a:ext cx="8229240" cy="478905"/>
+          </a:xfrm>
+        </p:spPr>
+        <p:txBody>
+          <a:bodyPr/>
+          <a:lstStyle/>
+          <a:p>
+            <a:r>
+              <a:rPr lang="en-GB" dirty="0"/>
+              <a:t>Changes</a:t>
+            </a:r>
+          </a:p>
+        </p:txBody>
+      </p:sp>
+    </p:spTree>
+    <p:extLst>
+      <p:ext uri="{BB962C8B-B14F-4D97-AF65-F5344CB8AC3E}">
+        <p14:creationId xmlns:p14="http://schemas.microsoft.com/office/powerpoint/2010/main" val="3711980566"/>
+      </p:ext>
+    </p:extLst>
+  </p:cSld>
+  <p:clrMapOvr>
+    <a:masterClrMapping/>
+  </p:clrMapOvr>
+</p:sld>
+</file>
+
+<file path=ppt/slides/slide11.xml><?xml version="1.0" encoding="utf-8"?>
+<p:sld xmlns:a="http://schemas.openxmlformats.org/drawingml/2006/main" xmlns:r="http://schemas.openxmlformats.org/officeDocument/2006/relationships" xmlns:p="http://schemas.openxmlformats.org/presentationml/2006/main">
+  <p:cSld>
+    <p:spTree>
+      <p:nvGrpSpPr>
+        <p:cNvPr id="1" name=""/>
+        <p:cNvGrpSpPr/>
+        <p:nvPr/>
+      </p:nvGrpSpPr>
+      <p:grpSpPr>
+        <a:xfrm>
+          <a:off x="0" y="0"/>
+          <a:ext cx="0" cy="0"/>
+          <a:chOff x="0" y="0"/>
+          <a:chExt cx="0" cy="0"/>
+        </a:xfrm>
+      </p:grpSpPr>
+      <p:sp>
+        <p:nvSpPr>
           <p:cNvPr id="5" name="Titel 4"/>
           <p:cNvSpPr>
             <a:spLocks noGrp="1"/>
@@ -2114,7 +2226,7 @@
 </p:sld>
 </file>
 
-<file path=ppt/slides/slide11.xml><?xml version="1.0" encoding="utf-8"?>
+<file path=ppt/slides/slide12.xml><?xml version="1.0" encoding="utf-8"?>
 <p:sld xmlns:a="http://schemas.openxmlformats.org/drawingml/2006/main" xmlns:r="http://schemas.openxmlformats.org/officeDocument/2006/relationships" xmlns:p="http://schemas.openxmlformats.org/presentationml/2006/main">
   <p:cSld>
     <p:spTree>
@@ -2672,7 +2784,7 @@
                 </a:solidFill>
                 <a:latin typeface="Arial"/>
               </a:rPr>
-              <a:t>Vecto 4.0.2.3273 OFFICIAL RELEASE</a:t>
+              <a:t>Vecto 4.0.2.3275 OFFICIAL RELEASE</a:t>
             </a:r>
             <a:br>
               <a:rPr sz="2400" dirty="0"/>
@@ -2681,7 +2793,7 @@
               <a:rPr lang="en-US" sz="1600" spc="-1" dirty="0">
                 <a:latin typeface="Arial"/>
               </a:rPr>
-              <a:t>18.12.2023</a:t>
+              <a:t>20.12.2023</a:t>
             </a:r>
             <a:endParaRPr lang="en-US" sz="1600" b="0" strike="noStrike" spc="-1" dirty="0">
               <a:latin typeface="Arial"/>
@@ -2701,8 +2813,8 @@
         </p:nvSpPr>
         <p:spPr>
           <a:xfrm>
-            <a:off x="323640" y="1268640"/>
-            <a:ext cx="8496360" cy="4823640"/>
+            <a:off x="323640" y="1639018"/>
+            <a:ext cx="8496360" cy="4453261"/>
           </a:xfrm>
           <a:prstGeom prst="rect">
             <a:avLst/>
@@ -2740,7 +2852,7 @@
                   <a:srgbClr val="000000"/>
                 </a:solidFill>
               </a:rPr>
-              <a:t>Bugfixes (1/2)</a:t>
+              <a:t>Hotfix</a:t>
             </a:r>
           </a:p>
           <a:p>
@@ -2766,23 +2878,7 @@
                   <a:srgbClr val="000000"/>
                 </a:solidFill>
               </a:rPr>
-              <a:t>CodeEU-94: </a:t>
-            </a:r>
-            <a:r>
-              <a:rPr lang="en-US" sz="1200" spc="-1" dirty="0" err="1">
-                <a:solidFill>
-                  <a:srgbClr val="000000"/>
-                </a:solidFill>
-              </a:rPr>
-              <a:t>DistanceRun</a:t>
-            </a:r>
-            <a:r>
-              <a:rPr lang="en-US" sz="1200" spc="-1" dirty="0">
-                <a:solidFill>
-                  <a:srgbClr val="000000"/>
-                </a:solidFill>
-              </a:rPr>
-              <a:t> got an unexpected response</a:t>
+              <a:t>CodeEU-273, CodeEU-274: Changes in the AMT shift strategy regarding idling speed caused simulation aborts</a:t>
             </a:r>
           </a:p>
           <a:p>
@@ -2808,701 +2904,8 @@
                   <a:srgbClr val="000000"/>
                 </a:solidFill>
               </a:rPr>
-              <a:t>CodeEU-153: </a:t>
-            </a:r>
-            <a:r>
-              <a:rPr lang="en-US" sz="1200" spc="-1" dirty="0" err="1">
-                <a:solidFill>
-                  <a:srgbClr val="000000"/>
-                </a:solidFill>
-              </a:rPr>
-              <a:t>DrivingActionAccelerate</a:t>
-            </a:r>
-            <a:r>
-              <a:rPr lang="en-US" sz="1200" spc="-1" dirty="0">
-                <a:solidFill>
-                  <a:srgbClr val="000000"/>
-                </a:solidFill>
-              </a:rPr>
-              <a:t>: Failed to find operating point after Overload</a:t>
-            </a:r>
-          </a:p>
-          <a:p>
-            <a:pPr marL="800280" lvl="1" indent="-343080">
-              <a:lnSpc>
-                <a:spcPct val="100000"/>
-              </a:lnSpc>
-              <a:spcBef>
-                <a:spcPts val="320"/>
-              </a:spcBef>
-              <a:buClr>
-                <a:srgbClr val="000000"/>
-              </a:buClr>
-              <a:buFont typeface="Symbol"/>
-              <a:buChar char=""/>
-              <a:tabLst>
-                <a:tab pos="1886040" algn="l"/>
-              </a:tabLst>
-            </a:pPr>
-            <a:r>
-              <a:rPr lang="en-US" sz="1200" spc="-1" dirty="0">
-                <a:solidFill>
-                  <a:srgbClr val="000000"/>
-                </a:solidFill>
-              </a:rPr>
-              <a:t>CodeEU-158: Urban </a:t>
-            </a:r>
-            <a:r>
-              <a:rPr lang="en-US" sz="1200" spc="-1" dirty="0" err="1">
-                <a:solidFill>
-                  <a:srgbClr val="000000"/>
-                </a:solidFill>
-              </a:rPr>
-              <a:t>RefLoad</a:t>
-            </a:r>
-            <a:r>
-              <a:rPr lang="en-US" sz="1200" spc="-1" dirty="0">
-                <a:solidFill>
-                  <a:srgbClr val="000000"/>
-                </a:solidFill>
-              </a:rPr>
-              <a:t> </a:t>
-            </a:r>
-            <a:r>
-              <a:rPr lang="en-US" sz="1200" spc="-1" dirty="0" err="1">
-                <a:solidFill>
-                  <a:srgbClr val="000000"/>
-                </a:solidFill>
-              </a:rPr>
-              <a:t>DrivingActionAccelerate</a:t>
-            </a:r>
-            <a:r>
-              <a:rPr lang="en-US" sz="1200" spc="-1" dirty="0">
-                <a:solidFill>
-                  <a:srgbClr val="000000"/>
-                </a:solidFill>
-              </a:rPr>
-              <a:t>: Failed to find operating point (IEPC </a:t>
-            </a:r>
-            <a:r>
-              <a:rPr lang="en-US" sz="1200" spc="-1" dirty="0" err="1">
-                <a:solidFill>
-                  <a:srgbClr val="000000"/>
-                </a:solidFill>
-              </a:rPr>
-              <a:t>Wheelhub</a:t>
-            </a:r>
-            <a:r>
-              <a:rPr lang="en-US" sz="1200" spc="-1" dirty="0">
-                <a:solidFill>
-                  <a:srgbClr val="000000"/>
-                </a:solidFill>
-              </a:rPr>
-              <a:t> 1 measured)</a:t>
-            </a:r>
-          </a:p>
-          <a:p>
-            <a:pPr marL="800280" lvl="1" indent="-343080">
-              <a:lnSpc>
-                <a:spcPct val="100000"/>
-              </a:lnSpc>
-              <a:spcBef>
-                <a:spcPts val="320"/>
-              </a:spcBef>
-              <a:buClr>
-                <a:srgbClr val="000000"/>
-              </a:buClr>
-              <a:buFont typeface="Symbol"/>
-              <a:buChar char=""/>
-              <a:tabLst>
-                <a:tab pos="1886040" algn="l"/>
-              </a:tabLst>
-            </a:pPr>
-            <a:r>
-              <a:rPr lang="en-US" sz="1200" spc="-1" dirty="0">
-                <a:solidFill>
-                  <a:srgbClr val="000000"/>
-                </a:solidFill>
-              </a:rPr>
-              <a:t>CodeEU-168: Vecto Declaration Simulation with P1-Hybrid shows multiple errors - Simulation Aborts!</a:t>
-            </a:r>
-          </a:p>
-          <a:p>
-            <a:pPr marL="800280" lvl="1" indent="-343080">
-              <a:lnSpc>
-                <a:spcPct val="100000"/>
-              </a:lnSpc>
-              <a:spcBef>
-                <a:spcPts val="320"/>
-              </a:spcBef>
-              <a:buClr>
-                <a:srgbClr val="000000"/>
-              </a:buClr>
-              <a:buFont typeface="Symbol"/>
-              <a:buChar char=""/>
-              <a:tabLst>
-                <a:tab pos="1886040" algn="l"/>
-              </a:tabLst>
-            </a:pPr>
-            <a:r>
-              <a:rPr lang="en-US" sz="1200" spc="-1" dirty="0">
-                <a:solidFill>
-                  <a:srgbClr val="000000"/>
-                </a:solidFill>
-              </a:rPr>
-              <a:t>CodeEU-191: Boosting limits HEV </a:t>
-            </a:r>
-            <a:r>
-              <a:rPr lang="en-US" sz="1200" spc="-1" dirty="0" err="1">
-                <a:solidFill>
-                  <a:srgbClr val="000000"/>
-                </a:solidFill>
-              </a:rPr>
-              <a:t>ovc</a:t>
-            </a:r>
-            <a:r>
-              <a:rPr lang="en-US" sz="1200" spc="-1" dirty="0">
-                <a:solidFill>
-                  <a:srgbClr val="000000"/>
-                </a:solidFill>
-              </a:rPr>
-              <a:t> are not working</a:t>
-            </a:r>
-          </a:p>
-          <a:p>
-            <a:pPr marL="800280" lvl="1" indent="-343080">
-              <a:lnSpc>
-                <a:spcPct val="100000"/>
-              </a:lnSpc>
-              <a:spcBef>
-                <a:spcPts val="320"/>
-              </a:spcBef>
-              <a:buClr>
-                <a:srgbClr val="000000"/>
-              </a:buClr>
-              <a:buFont typeface="Symbol"/>
-              <a:buChar char=""/>
-              <a:tabLst>
-                <a:tab pos="1886040" algn="l"/>
-              </a:tabLst>
-            </a:pPr>
-            <a:r>
-              <a:rPr lang="en-US" sz="1200" spc="-1" dirty="0">
-                <a:solidFill>
-                  <a:srgbClr val="000000"/>
-                </a:solidFill>
-              </a:rPr>
-              <a:t>CodeEU-202: EMS Standard Values: Continuous/Overload Torque 0 Nm</a:t>
-            </a:r>
-          </a:p>
-          <a:p>
-            <a:pPr marL="800280" lvl="1" indent="-343080">
-              <a:lnSpc>
-                <a:spcPct val="100000"/>
-              </a:lnSpc>
-              <a:spcBef>
-                <a:spcPts val="320"/>
-              </a:spcBef>
-              <a:buClr>
-                <a:srgbClr val="000000"/>
-              </a:buClr>
-              <a:buFont typeface="Symbol"/>
-              <a:buChar char=""/>
-              <a:tabLst>
-                <a:tab pos="1886040" algn="l"/>
-              </a:tabLst>
-            </a:pPr>
-            <a:r>
-              <a:rPr lang="en-US" sz="1200" spc="-1" dirty="0">
-                <a:solidFill>
-                  <a:srgbClr val="000000"/>
-                </a:solidFill>
-              </a:rPr>
-              <a:t>CodeEU-203: </a:t>
-            </a:r>
-            <a:r>
-              <a:rPr lang="en-US" sz="1200" spc="-1" dirty="0" err="1">
-                <a:solidFill>
-                  <a:srgbClr val="000000"/>
-                </a:solidFill>
-              </a:rPr>
-              <a:t>HybridStrategy</a:t>
-            </a:r>
-            <a:r>
-              <a:rPr lang="en-US" sz="1200" spc="-1" dirty="0">
-                <a:solidFill>
-                  <a:srgbClr val="000000"/>
-                </a:solidFill>
-              </a:rPr>
-              <a:t> error for IHPC type 1 hybrid lorry</a:t>
-            </a:r>
-          </a:p>
-          <a:p>
-            <a:pPr marL="800280" lvl="1" indent="-343080">
-              <a:lnSpc>
-                <a:spcPct val="100000"/>
-              </a:lnSpc>
-              <a:spcBef>
-                <a:spcPts val="320"/>
-              </a:spcBef>
-              <a:buClr>
-                <a:srgbClr val="000000"/>
-              </a:buClr>
-              <a:buFont typeface="Symbol"/>
-              <a:buChar char=""/>
-              <a:tabLst>
-                <a:tab pos="1886040" algn="l"/>
-              </a:tabLst>
-            </a:pPr>
-            <a:r>
-              <a:rPr lang="en-US" sz="1200" spc="-1" dirty="0">
-                <a:solidFill>
-                  <a:srgbClr val="000000"/>
-                </a:solidFill>
-              </a:rPr>
-              <a:t>CodeEU-206: VTP + PEMS test done by Renault Trucks France - VECTO tool errors most probably linked to automatic gearbox (with torque converter)</a:t>
-            </a:r>
-          </a:p>
-          <a:p>
-            <a:pPr marL="800280" lvl="1" indent="-343080">
-              <a:lnSpc>
-                <a:spcPct val="100000"/>
-              </a:lnSpc>
-              <a:spcBef>
-                <a:spcPts val="320"/>
-              </a:spcBef>
-              <a:buClr>
-                <a:srgbClr val="000000"/>
-              </a:buClr>
-              <a:buFont typeface="Symbol"/>
-              <a:buChar char=""/>
-              <a:tabLst>
-                <a:tab pos="1886040" algn="l"/>
-              </a:tabLst>
-            </a:pPr>
-            <a:r>
-              <a:rPr lang="en-US" sz="1200" spc="-1" dirty="0">
-                <a:solidFill>
-                  <a:srgbClr val="000000"/>
-                </a:solidFill>
-              </a:rPr>
-              <a:t>CodeEU-211: Hybrid P1 configurations with errors</a:t>
-            </a:r>
-          </a:p>
-          <a:p>
-            <a:pPr marL="800280" lvl="1" indent="-343080">
-              <a:lnSpc>
-                <a:spcPct val="100000"/>
-              </a:lnSpc>
-              <a:spcBef>
-                <a:spcPts val="320"/>
-              </a:spcBef>
-              <a:buClr>
-                <a:srgbClr val="000000"/>
-              </a:buClr>
-              <a:buFont typeface="Symbol"/>
-              <a:buChar char=""/>
-              <a:tabLst>
-                <a:tab pos="1886040" algn="l"/>
-              </a:tabLst>
-            </a:pPr>
-            <a:r>
-              <a:rPr lang="en-US" sz="1200" spc="-1" dirty="0">
-                <a:solidFill>
-                  <a:srgbClr val="000000"/>
-                </a:solidFill>
-              </a:rPr>
-              <a:t>CodeEU-215: </a:t>
-            </a:r>
-            <a:r>
-              <a:rPr lang="en-US" sz="1200" spc="-1" dirty="0" err="1">
-                <a:solidFill>
-                  <a:srgbClr val="000000"/>
-                </a:solidFill>
-              </a:rPr>
-              <a:t>MultiStep</a:t>
-            </a:r>
-            <a:r>
-              <a:rPr lang="en-US" sz="1200" spc="-1" dirty="0">
-                <a:solidFill>
-                  <a:srgbClr val="000000"/>
-                </a:solidFill>
-              </a:rPr>
-              <a:t> tool help</a:t>
-            </a:r>
-          </a:p>
-          <a:p>
-            <a:pPr marL="800280" lvl="1" indent="-343080">
-              <a:lnSpc>
-                <a:spcPct val="100000"/>
-              </a:lnSpc>
-              <a:spcBef>
-                <a:spcPts val="320"/>
-              </a:spcBef>
-              <a:buClr>
-                <a:srgbClr val="000000"/>
-              </a:buClr>
-              <a:buFont typeface="Symbol"/>
-              <a:buChar char=""/>
-              <a:tabLst>
-                <a:tab pos="1886040" algn="l"/>
-              </a:tabLst>
-            </a:pPr>
-            <a:r>
-              <a:rPr lang="en-US" sz="1200" spc="-1" dirty="0">
-                <a:solidFill>
-                  <a:srgbClr val="000000"/>
-                </a:solidFill>
-              </a:rPr>
-              <a:t>CodeEU-216: </a:t>
-            </a:r>
-            <a:r>
-              <a:rPr lang="en-US" sz="1200" spc="-1" dirty="0" err="1">
-                <a:solidFill>
-                  <a:srgbClr val="000000"/>
-                </a:solidFill>
-              </a:rPr>
-              <a:t>NrOfGears</a:t>
-            </a:r>
-            <a:r>
-              <a:rPr lang="en-US" sz="1200" spc="-1" dirty="0">
-                <a:solidFill>
-                  <a:srgbClr val="000000"/>
-                </a:solidFill>
-              </a:rPr>
-              <a:t> in CIF is 1 for IEPC no matter how many gears it has</a:t>
-            </a:r>
-          </a:p>
-          <a:p>
-            <a:pPr marL="800280" lvl="1" indent="-343080">
-              <a:lnSpc>
-                <a:spcPct val="100000"/>
-              </a:lnSpc>
-              <a:spcBef>
-                <a:spcPts val="320"/>
-              </a:spcBef>
-              <a:buClr>
-                <a:srgbClr val="000000"/>
-              </a:buClr>
-              <a:buFont typeface="Symbol"/>
-              <a:buChar char=""/>
-              <a:tabLst>
-                <a:tab pos="1886040" algn="l"/>
-              </a:tabLst>
-            </a:pPr>
-            <a:r>
-              <a:rPr lang="en-US" sz="1200" spc="-1" dirty="0">
-                <a:solidFill>
-                  <a:srgbClr val="000000"/>
-                </a:solidFill>
-              </a:rPr>
-              <a:t>CodeEU-220: Error manual transmission 2. gear</a:t>
-            </a:r>
-          </a:p>
-          <a:p>
-            <a:pPr marL="800280" lvl="1" indent="-343080">
-              <a:lnSpc>
-                <a:spcPct val="100000"/>
-              </a:lnSpc>
-              <a:spcBef>
-                <a:spcPts val="320"/>
-              </a:spcBef>
-              <a:buClr>
-                <a:srgbClr val="000000"/>
-              </a:buClr>
-              <a:buFont typeface="Symbol"/>
-              <a:buChar char=""/>
-              <a:tabLst>
-                <a:tab pos="1886040" algn="l"/>
-              </a:tabLst>
-            </a:pPr>
-            <a:r>
-              <a:rPr lang="en-US" sz="1200" spc="-1" dirty="0">
-                <a:solidFill>
-                  <a:srgbClr val="000000"/>
-                </a:solidFill>
-              </a:rPr>
-              <a:t>CodeEU-224: Issue with PEV complete vehicle simulation (Vecto </a:t>
-            </a:r>
-            <a:r>
-              <a:rPr lang="en-US" sz="1200" spc="-1" dirty="0" err="1">
-                <a:solidFill>
-                  <a:srgbClr val="000000"/>
-                </a:solidFill>
-              </a:rPr>
-              <a:t>MultiStage</a:t>
-            </a:r>
-            <a:r>
-              <a:rPr lang="en-US" sz="1200" spc="-1" dirty="0">
-                <a:solidFill>
-                  <a:srgbClr val="000000"/>
-                </a:solidFill>
-              </a:rPr>
-              <a:t>)</a:t>
-            </a:r>
-          </a:p>
-          <a:p>
-            <a:pPr marL="800280" lvl="1" indent="-343080">
-              <a:lnSpc>
-                <a:spcPct val="100000"/>
-              </a:lnSpc>
-              <a:spcBef>
-                <a:spcPts val="320"/>
-              </a:spcBef>
-              <a:buClr>
-                <a:srgbClr val="000000"/>
-              </a:buClr>
-              <a:buFont typeface="Symbol"/>
-              <a:buChar char=""/>
-              <a:tabLst>
-                <a:tab pos="1886040" algn="l"/>
-              </a:tabLst>
-            </a:pPr>
-            <a:r>
-              <a:rPr lang="en-US" sz="1200" spc="-1" dirty="0">
-                <a:solidFill>
-                  <a:srgbClr val="000000"/>
-                </a:solidFill>
-              </a:rPr>
-              <a:t>CodeEU-231: IVECO CONFIDENTIAL : hybrid buses completed simulation aborted</a:t>
-            </a:r>
-          </a:p>
-          <a:p>
-            <a:pPr marL="800280" lvl="1" indent="-343080">
-              <a:lnSpc>
-                <a:spcPct val="100000"/>
-              </a:lnSpc>
-              <a:spcBef>
-                <a:spcPts val="320"/>
-              </a:spcBef>
-              <a:buClr>
-                <a:srgbClr val="000000"/>
-              </a:buClr>
-              <a:buFont typeface="Symbol"/>
-              <a:buChar char=""/>
-              <a:tabLst>
-                <a:tab pos="1886040" algn="l"/>
-              </a:tabLst>
-            </a:pPr>
-            <a:r>
-              <a:rPr lang="en-US" sz="1200" spc="-1" dirty="0">
-                <a:solidFill>
-                  <a:srgbClr val="000000"/>
-                </a:solidFill>
-              </a:rPr>
-              <a:t>CodeEU-234: Error Conventional Lorry Gear: 1C </a:t>
-            </a:r>
-            <a:r>
-              <a:rPr lang="en-US" sz="1200" spc="-1" dirty="0" err="1">
-                <a:solidFill>
-                  <a:srgbClr val="000000"/>
-                </a:solidFill>
-              </a:rPr>
-              <a:t>DistanceRun</a:t>
-            </a:r>
-            <a:r>
-              <a:rPr lang="en-US" sz="1200" spc="-1" dirty="0">
-                <a:solidFill>
-                  <a:srgbClr val="000000"/>
-                </a:solidFill>
-              </a:rPr>
-              <a:t> got an unexpected response</a:t>
-            </a:r>
-          </a:p>
-          <a:p>
-            <a:pPr marL="800280" lvl="1" indent="-343080">
-              <a:lnSpc>
-                <a:spcPct val="100000"/>
-              </a:lnSpc>
-              <a:spcBef>
-                <a:spcPts val="320"/>
-              </a:spcBef>
-              <a:buClr>
-                <a:srgbClr val="000000"/>
-              </a:buClr>
-              <a:buFont typeface="Symbol"/>
-              <a:buChar char=""/>
-              <a:tabLst>
-                <a:tab pos="1886040" algn="l"/>
-              </a:tabLst>
-            </a:pPr>
-            <a:r>
-              <a:rPr lang="en-US" sz="1200" spc="-1" dirty="0">
-                <a:solidFill>
-                  <a:srgbClr val="000000"/>
-                </a:solidFill>
-              </a:rPr>
-              <a:t>CodeEU-235: </a:t>
-            </a:r>
-            <a:r>
-              <a:rPr lang="en-US" sz="1200" spc="-1" dirty="0" err="1">
-                <a:solidFill>
-                  <a:srgbClr val="000000"/>
-                </a:solidFill>
-              </a:rPr>
-              <a:t>Tyre</a:t>
-            </a:r>
-            <a:r>
-              <a:rPr lang="en-US" sz="1200" spc="-1" dirty="0">
-                <a:solidFill>
-                  <a:srgbClr val="000000"/>
-                </a:solidFill>
-              </a:rPr>
-              <a:t> error calculation buses "invalid </a:t>
-            </a:r>
-            <a:r>
-              <a:rPr lang="en-US" sz="1200" spc="-1" dirty="0" err="1">
-                <a:solidFill>
-                  <a:srgbClr val="000000"/>
-                </a:solidFill>
-              </a:rPr>
-              <a:t>xsi:type</a:t>
-            </a:r>
-            <a:r>
-              <a:rPr lang="en-US" sz="1200" spc="-1" dirty="0">
-                <a:solidFill>
-                  <a:srgbClr val="000000"/>
-                </a:solidFill>
-              </a:rPr>
-              <a:t> '</a:t>
-            </a:r>
-            <a:r>
-              <a:rPr lang="en-US" sz="1200" spc="-1" dirty="0" err="1">
-                <a:solidFill>
-                  <a:srgbClr val="000000"/>
-                </a:solidFill>
-              </a:rPr>
-              <a:t>TyreDataDeclarationType</a:t>
-            </a:r>
-            <a:r>
-              <a:rPr lang="en-US" sz="1200" spc="-1" dirty="0">
-                <a:solidFill>
-                  <a:srgbClr val="000000"/>
-                </a:solidFill>
-              </a:rPr>
-              <a:t>'"</a:t>
-            </a:r>
-          </a:p>
-          <a:p>
-            <a:pPr marL="800280" lvl="1" indent="-343080">
-              <a:lnSpc>
-                <a:spcPct val="100000"/>
-              </a:lnSpc>
-              <a:spcBef>
-                <a:spcPts val="320"/>
-              </a:spcBef>
-              <a:buClr>
-                <a:srgbClr val="000000"/>
-              </a:buClr>
-              <a:buFont typeface="Symbol"/>
-              <a:buChar char=""/>
-              <a:tabLst>
-                <a:tab pos="1886040" algn="l"/>
-              </a:tabLst>
-            </a:pPr>
-            <a:r>
-              <a:rPr lang="en-US" sz="1200" spc="-1" dirty="0">
-                <a:solidFill>
-                  <a:srgbClr val="000000"/>
-                </a:solidFill>
-              </a:rPr>
-              <a:t>CodeEU-238: Bus VIF files not valid in Multistep VECTO</a:t>
-            </a:r>
-          </a:p>
-          <a:p>
-            <a:pPr marL="800280" lvl="1" indent="-343080">
-              <a:lnSpc>
-                <a:spcPct val="100000"/>
-              </a:lnSpc>
-              <a:spcBef>
-                <a:spcPts val="320"/>
-              </a:spcBef>
-              <a:buClr>
-                <a:srgbClr val="000000"/>
-              </a:buClr>
-              <a:buFont typeface="Symbol"/>
-              <a:buChar char=""/>
-              <a:tabLst>
-                <a:tab pos="1886040" algn="l"/>
-              </a:tabLst>
-            </a:pPr>
-            <a:r>
-              <a:rPr lang="en-US" sz="1200" spc="-1" dirty="0">
-                <a:solidFill>
-                  <a:srgbClr val="000000"/>
-                </a:solidFill>
-              </a:rPr>
-              <a:t>CodeEU-243: Simulation aborted: Gear 5 </a:t>
-            </a:r>
-            <a:r>
-              <a:rPr lang="en-US" sz="1200" spc="-1" dirty="0" err="1">
-                <a:solidFill>
-                  <a:srgbClr val="000000"/>
-                </a:solidFill>
-              </a:rPr>
-              <a:t>Lossmap</a:t>
-            </a:r>
-            <a:r>
-              <a:rPr lang="en-US" sz="1200" spc="-1" dirty="0">
-                <a:solidFill>
-                  <a:srgbClr val="000000"/>
-                </a:solidFill>
-              </a:rPr>
-              <a:t> not </a:t>
-            </a:r>
-            <a:r>
-              <a:rPr lang="en-US" sz="1200" spc="-1" dirty="0" err="1">
-                <a:solidFill>
-                  <a:srgbClr val="000000"/>
-                </a:solidFill>
-              </a:rPr>
-              <a:t>sufficiant</a:t>
-            </a:r>
-            <a:endParaRPr lang="en-US" sz="1200" spc="-1" dirty="0">
-              <a:solidFill>
-                <a:srgbClr val="000000"/>
-              </a:solidFill>
-            </a:endParaRPr>
-          </a:p>
-          <a:p>
-            <a:pPr marL="800280" lvl="1" indent="-343080">
-              <a:lnSpc>
-                <a:spcPct val="100000"/>
-              </a:lnSpc>
-              <a:spcBef>
-                <a:spcPts val="320"/>
-              </a:spcBef>
-              <a:buClr>
-                <a:srgbClr val="000000"/>
-              </a:buClr>
-              <a:buFont typeface="Symbol"/>
-              <a:buChar char=""/>
-              <a:tabLst>
-                <a:tab pos="1886040" algn="l"/>
-              </a:tabLst>
-            </a:pPr>
-            <a:r>
-              <a:rPr lang="en-US" sz="1200" spc="-1" dirty="0">
-                <a:solidFill>
-                  <a:srgbClr val="000000"/>
-                </a:solidFill>
-              </a:rPr>
-              <a:t>CodeEU-244: Signature validation fails for old (prior to v4) Manufacturer reports</a:t>
-            </a:r>
-          </a:p>
-          <a:p>
-            <a:pPr>
-              <a:lnSpc>
-                <a:spcPct val="100000"/>
-              </a:lnSpc>
-              <a:buNone/>
-              <a:tabLst>
-                <a:tab pos="1886040" algn="l"/>
-              </a:tabLst>
-            </a:pPr>
-            <a:endParaRPr lang="en-US" sz="1400" b="0" strike="noStrike" spc="-1" dirty="0">
-              <a:latin typeface="Arial"/>
-            </a:endParaRPr>
+              <a:t>CodeEU-260: regression fix handling overload buffer</a:t>
+            </a:r>
           </a:p>
         </p:txBody>
       </p:sp>
@@ -3646,7 +3049,7 @@
                   <a:srgbClr val="000000"/>
                 </a:solidFill>
               </a:rPr>
-              <a:t>Bugfixes (2/2)</a:t>
+              <a:t>Bugfixes (1/2)</a:t>
             </a:r>
           </a:p>
           <a:p>
@@ -3672,7 +3075,7 @@
                   <a:srgbClr val="000000"/>
                 </a:solidFill>
               </a:rPr>
-              <a:t>CodeEU-249: Fix handling gear torque limits in case of IEPC </a:t>
+              <a:t>CodeEU-94: </a:t>
             </a:r>
             <a:r>
               <a:rPr lang="en-US" sz="1200" spc="-1" dirty="0" err="1">
@@ -3680,7 +3083,7 @@
                   <a:srgbClr val="000000"/>
                 </a:solidFill>
               </a:rPr>
-              <a:t>WheelHub</a:t>
+              <a:t>DistanceRun</a:t>
             </a:r>
             <a:r>
               <a:rPr lang="en-US" sz="1200" spc="-1" dirty="0">
@@ -3688,7 +3091,7 @@
                   <a:srgbClr val="000000"/>
                 </a:solidFill>
               </a:rPr>
-              <a:t> motor and only one side is measured</a:t>
+              <a:t> got an unexpected response</a:t>
             </a:r>
           </a:p>
           <a:p>
@@ -3714,7 +3117,23 @@
                   <a:srgbClr val="000000"/>
                 </a:solidFill>
               </a:rPr>
-              <a:t>CodeEU-250: Maximum vehicle speed exceeded during pre-processing</a:t>
+              <a:t>CodeEU-153: </a:t>
+            </a:r>
+            <a:r>
+              <a:rPr lang="en-US" sz="1200" spc="-1" dirty="0" err="1">
+                <a:solidFill>
+                  <a:srgbClr val="000000"/>
+                </a:solidFill>
+              </a:rPr>
+              <a:t>DrivingActionAccelerate</a:t>
+            </a:r>
+            <a:r>
+              <a:rPr lang="en-US" sz="1200" spc="-1" dirty="0">
+                <a:solidFill>
+                  <a:srgbClr val="000000"/>
+                </a:solidFill>
+              </a:rPr>
+              <a:t>: Failed to find operating point after Overload</a:t>
             </a:r>
           </a:p>
           <a:p>
@@ -3740,7 +3159,7 @@
                   <a:srgbClr val="000000"/>
                 </a:solidFill>
               </a:rPr>
-              <a:t>CodeEU-253: Replace VTP </a:t>
+              <a:t>CodeEU-158: Urban </a:t>
             </a:r>
             <a:r>
               <a:rPr lang="en-US" sz="1200" spc="-1" dirty="0" err="1">
@@ -3748,7 +3167,7 @@
                   <a:srgbClr val="000000"/>
                 </a:solidFill>
               </a:rPr>
-              <a:t>HeavyBus</a:t>
+              <a:t>RefLoad</a:t>
             </a:r>
             <a:r>
               <a:rPr lang="en-US" sz="1200" spc="-1" dirty="0">
@@ -3756,7 +3175,39 @@
                   <a:srgbClr val="000000"/>
                 </a:solidFill>
               </a:rPr>
-              <a:t> in Generic Vehicles with VTP Truck</a:t>
+              <a:t> </a:t>
+            </a:r>
+            <a:r>
+              <a:rPr lang="en-US" sz="1200" spc="-1" dirty="0" err="1">
+                <a:solidFill>
+                  <a:srgbClr val="000000"/>
+                </a:solidFill>
+              </a:rPr>
+              <a:t>DrivingActionAccelerate</a:t>
+            </a:r>
+            <a:r>
+              <a:rPr lang="en-US" sz="1200" spc="-1" dirty="0">
+                <a:solidFill>
+                  <a:srgbClr val="000000"/>
+                </a:solidFill>
+              </a:rPr>
+              <a:t>: Failed to find operating point (IEPC </a:t>
+            </a:r>
+            <a:r>
+              <a:rPr lang="en-US" sz="1200" spc="-1" dirty="0" err="1">
+                <a:solidFill>
+                  <a:srgbClr val="000000"/>
+                </a:solidFill>
+              </a:rPr>
+              <a:t>Wheelhub</a:t>
+            </a:r>
+            <a:r>
+              <a:rPr lang="en-US" sz="1200" spc="-1" dirty="0">
+                <a:solidFill>
+                  <a:srgbClr val="000000"/>
+                </a:solidFill>
+              </a:rPr>
+              <a:t> 1 measured)</a:t>
             </a:r>
           </a:p>
           <a:p>
@@ -3782,23 +3233,7 @@
                   <a:srgbClr val="000000"/>
                 </a:solidFill>
               </a:rPr>
-              <a:t>CodeEU-259: Inconsistent calculation of </a:t>
-            </a:r>
-            <a:r>
-              <a:rPr lang="en-US" sz="1200" spc="-1" dirty="0" err="1">
-                <a:solidFill>
-                  <a:srgbClr val="000000"/>
-                </a:solidFill>
-              </a:rPr>
-              <a:t>AverageRRC</a:t>
-            </a:r>
-            <a:r>
-              <a:rPr lang="en-US" sz="1200" spc="-1" dirty="0">
-                <a:solidFill>
-                  <a:srgbClr val="000000"/>
-                </a:solidFill>
-              </a:rPr>
-              <a:t> in CIF</a:t>
+              <a:t>CodeEU-168: Vecto Declaration Simulation with P1-Hybrid shows multiple errors - Simulation Aborts!</a:t>
             </a:r>
           </a:p>
           <a:p>
@@ -3824,7 +3259,23 @@
                   <a:srgbClr val="000000"/>
                 </a:solidFill>
               </a:rPr>
-              <a:t>CodeEU-260: Handling of overload buffer in case Continuous Torque is 0Nm</a:t>
+              <a:t>CodeEU-191: Boosting limits HEV </a:t>
+            </a:r>
+            <a:r>
+              <a:rPr lang="en-US" sz="1200" spc="-1" dirty="0" err="1">
+                <a:solidFill>
+                  <a:srgbClr val="000000"/>
+                </a:solidFill>
+              </a:rPr>
+              <a:t>ovc</a:t>
+            </a:r>
+            <a:r>
+              <a:rPr lang="en-US" sz="1200" spc="-1" dirty="0">
+                <a:solidFill>
+                  <a:srgbClr val="000000"/>
+                </a:solidFill>
+              </a:rPr>
+              <a:t> are not working</a:t>
             </a:r>
           </a:p>
           <a:p>
@@ -3850,23 +3301,7 @@
                   <a:srgbClr val="000000"/>
                 </a:solidFill>
               </a:rPr>
-              <a:t>CodeEU-261: </a:t>
-            </a:r>
-            <a:r>
-              <a:rPr lang="en-US" sz="1200" spc="-1" dirty="0" err="1">
-                <a:solidFill>
-                  <a:srgbClr val="000000"/>
-                </a:solidFill>
-              </a:rPr>
-              <a:t>SuperCap</a:t>
-            </a:r>
-            <a:r>
-              <a:rPr lang="en-US" sz="1200" spc="-1" dirty="0">
-                <a:solidFill>
-                  <a:srgbClr val="000000"/>
-                </a:solidFill>
-              </a:rPr>
-              <a:t> internal resistance standard values correction</a:t>
+              <a:t>CodeEU-202: EMS Standard Values: Continuous/Overload Torque 0 Nm</a:t>
             </a:r>
           </a:p>
           <a:p>
@@ -3892,7 +3327,23 @@
                   <a:srgbClr val="000000"/>
                 </a:solidFill>
               </a:rPr>
-              <a:t>CodeEU-263: Determination of rated power for IEPCs for MRF and CIF</a:t>
+              <a:t>CodeEU-203: </a:t>
+            </a:r>
+            <a:r>
+              <a:rPr lang="en-US" sz="1200" spc="-1" dirty="0" err="1">
+                <a:solidFill>
+                  <a:srgbClr val="000000"/>
+                </a:solidFill>
+              </a:rPr>
+              <a:t>HybridStrategy</a:t>
+            </a:r>
+            <a:r>
+              <a:rPr lang="en-US" sz="1200" spc="-1" dirty="0">
+                <a:solidFill>
+                  <a:srgbClr val="000000"/>
+                </a:solidFill>
+              </a:rPr>
+              <a:t> error for IHPC type 1 hybrid lorry</a:t>
             </a:r>
           </a:p>
           <a:p>
@@ -3918,60 +3369,458 @@
                   <a:srgbClr val="000000"/>
                 </a:solidFill>
               </a:rPr>
-              <a:t>CodeEU-266: Fix Measured Speed Testcases</a:t>
-            </a:r>
-            <a:endParaRPr lang="en-US" sz="1200" b="0" strike="noStrike" spc="-1" dirty="0">
-              <a:latin typeface="Arial"/>
+              <a:t>CodeEU-206: VTP + PEMS test done by Renault Trucks France - VECTO tool errors most probably linked to automatic gearbox (with torque converter)</a:t>
+            </a:r>
+          </a:p>
+          <a:p>
+            <a:pPr marL="800280" lvl="1" indent="-343080">
+              <a:lnSpc>
+                <a:spcPct val="100000"/>
+              </a:lnSpc>
+              <a:spcBef>
+                <a:spcPts val="320"/>
+              </a:spcBef>
+              <a:buClr>
+                <a:srgbClr val="000000"/>
+              </a:buClr>
+              <a:buFont typeface="Symbol"/>
+              <a:buChar char=""/>
+              <a:tabLst>
+                <a:tab pos="1886040" algn="l"/>
+              </a:tabLst>
+            </a:pPr>
+            <a:r>
+              <a:rPr lang="en-US" sz="1200" spc="-1" dirty="0">
+                <a:solidFill>
+                  <a:srgbClr val="000000"/>
+                </a:solidFill>
+              </a:rPr>
+              <a:t>CodeEU-211: Hybrid P1 configurations with errors</a:t>
+            </a:r>
+          </a:p>
+          <a:p>
+            <a:pPr marL="800280" lvl="1" indent="-343080">
+              <a:lnSpc>
+                <a:spcPct val="100000"/>
+              </a:lnSpc>
+              <a:spcBef>
+                <a:spcPts val="320"/>
+              </a:spcBef>
+              <a:buClr>
+                <a:srgbClr val="000000"/>
+              </a:buClr>
+              <a:buFont typeface="Symbol"/>
+              <a:buChar char=""/>
+              <a:tabLst>
+                <a:tab pos="1886040" algn="l"/>
+              </a:tabLst>
+            </a:pPr>
+            <a:r>
+              <a:rPr lang="en-US" sz="1200" spc="-1" dirty="0">
+                <a:solidFill>
+                  <a:srgbClr val="000000"/>
+                </a:solidFill>
+              </a:rPr>
+              <a:t>CodeEU-215: </a:t>
+            </a:r>
+            <a:r>
+              <a:rPr lang="en-US" sz="1200" spc="-1" dirty="0" err="1">
+                <a:solidFill>
+                  <a:srgbClr val="000000"/>
+                </a:solidFill>
+              </a:rPr>
+              <a:t>MultiStep</a:t>
+            </a:r>
+            <a:r>
+              <a:rPr lang="en-US" sz="1200" spc="-1" dirty="0">
+                <a:solidFill>
+                  <a:srgbClr val="000000"/>
+                </a:solidFill>
+              </a:rPr>
+              <a:t> tool help</a:t>
+            </a:r>
+          </a:p>
+          <a:p>
+            <a:pPr marL="800280" lvl="1" indent="-343080">
+              <a:lnSpc>
+                <a:spcPct val="100000"/>
+              </a:lnSpc>
+              <a:spcBef>
+                <a:spcPts val="320"/>
+              </a:spcBef>
+              <a:buClr>
+                <a:srgbClr val="000000"/>
+              </a:buClr>
+              <a:buFont typeface="Symbol"/>
+              <a:buChar char=""/>
+              <a:tabLst>
+                <a:tab pos="1886040" algn="l"/>
+              </a:tabLst>
+            </a:pPr>
+            <a:r>
+              <a:rPr lang="en-US" sz="1200" spc="-1" dirty="0">
+                <a:solidFill>
+                  <a:srgbClr val="000000"/>
+                </a:solidFill>
+              </a:rPr>
+              <a:t>CodeEU-216: </a:t>
+            </a:r>
+            <a:r>
+              <a:rPr lang="en-US" sz="1200" spc="-1" dirty="0" err="1">
+                <a:solidFill>
+                  <a:srgbClr val="000000"/>
+                </a:solidFill>
+              </a:rPr>
+              <a:t>NrOfGears</a:t>
+            </a:r>
+            <a:r>
+              <a:rPr lang="en-US" sz="1200" spc="-1" dirty="0">
+                <a:solidFill>
+                  <a:srgbClr val="000000"/>
+                </a:solidFill>
+              </a:rPr>
+              <a:t> in CIF is 1 for IEPC no matter how many gears it has</a:t>
+            </a:r>
+          </a:p>
+          <a:p>
+            <a:pPr marL="800280" lvl="1" indent="-343080">
+              <a:lnSpc>
+                <a:spcPct val="100000"/>
+              </a:lnSpc>
+              <a:spcBef>
+                <a:spcPts val="320"/>
+              </a:spcBef>
+              <a:buClr>
+                <a:srgbClr val="000000"/>
+              </a:buClr>
+              <a:buFont typeface="Symbol"/>
+              <a:buChar char=""/>
+              <a:tabLst>
+                <a:tab pos="1886040" algn="l"/>
+              </a:tabLst>
+            </a:pPr>
+            <a:r>
+              <a:rPr lang="en-US" sz="1200" spc="-1" dirty="0">
+                <a:solidFill>
+                  <a:srgbClr val="000000"/>
+                </a:solidFill>
+              </a:rPr>
+              <a:t>CodeEU-220: Error manual transmission 2. gear</a:t>
+            </a:r>
+          </a:p>
+          <a:p>
+            <a:pPr marL="800280" lvl="1" indent="-343080">
+              <a:lnSpc>
+                <a:spcPct val="100000"/>
+              </a:lnSpc>
+              <a:spcBef>
+                <a:spcPts val="320"/>
+              </a:spcBef>
+              <a:buClr>
+                <a:srgbClr val="000000"/>
+              </a:buClr>
+              <a:buFont typeface="Symbol"/>
+              <a:buChar char=""/>
+              <a:tabLst>
+                <a:tab pos="1886040" algn="l"/>
+              </a:tabLst>
+            </a:pPr>
+            <a:r>
+              <a:rPr lang="en-US" sz="1200" spc="-1" dirty="0">
+                <a:solidFill>
+                  <a:srgbClr val="000000"/>
+                </a:solidFill>
+              </a:rPr>
+              <a:t>CodeEU-224: Issue with PEV complete vehicle simulation (Vecto </a:t>
+            </a:r>
+            <a:r>
+              <a:rPr lang="en-US" sz="1200" spc="-1" dirty="0" err="1">
+                <a:solidFill>
+                  <a:srgbClr val="000000"/>
+                </a:solidFill>
+              </a:rPr>
+              <a:t>MultiStage</a:t>
+            </a:r>
+            <a:r>
+              <a:rPr lang="en-US" sz="1200" spc="-1" dirty="0">
+                <a:solidFill>
+                  <a:srgbClr val="000000"/>
+                </a:solidFill>
+              </a:rPr>
+              <a:t>)</a:t>
+            </a:r>
+          </a:p>
+          <a:p>
+            <a:pPr marL="800280" lvl="1" indent="-343080">
+              <a:lnSpc>
+                <a:spcPct val="100000"/>
+              </a:lnSpc>
+              <a:spcBef>
+                <a:spcPts val="320"/>
+              </a:spcBef>
+              <a:buClr>
+                <a:srgbClr val="000000"/>
+              </a:buClr>
+              <a:buFont typeface="Symbol"/>
+              <a:buChar char=""/>
+              <a:tabLst>
+                <a:tab pos="1886040" algn="l"/>
+              </a:tabLst>
+            </a:pPr>
+            <a:r>
+              <a:rPr lang="en-US" sz="1200" spc="-1" dirty="0">
+                <a:solidFill>
+                  <a:srgbClr val="000000"/>
+                </a:solidFill>
+              </a:rPr>
+              <a:t>CodeEU-231: IVECO CONFIDENTIAL : hybrid buses completed simulation aborted</a:t>
+            </a:r>
+          </a:p>
+          <a:p>
+            <a:pPr marL="800280" lvl="1" indent="-343080">
+              <a:lnSpc>
+                <a:spcPct val="100000"/>
+              </a:lnSpc>
+              <a:spcBef>
+                <a:spcPts val="320"/>
+              </a:spcBef>
+              <a:buClr>
+                <a:srgbClr val="000000"/>
+              </a:buClr>
+              <a:buFont typeface="Symbol"/>
+              <a:buChar char=""/>
+              <a:tabLst>
+                <a:tab pos="1886040" algn="l"/>
+              </a:tabLst>
+            </a:pPr>
+            <a:r>
+              <a:rPr lang="en-US" sz="1200" spc="-1" dirty="0">
+                <a:solidFill>
+                  <a:srgbClr val="000000"/>
+                </a:solidFill>
+              </a:rPr>
+              <a:t>CodeEU-234: Error Conventional Lorry Gear: 1C </a:t>
+            </a:r>
+            <a:r>
+              <a:rPr lang="en-US" sz="1200" spc="-1" dirty="0" err="1">
+                <a:solidFill>
+                  <a:srgbClr val="000000"/>
+                </a:solidFill>
+              </a:rPr>
+              <a:t>DistanceRun</a:t>
+            </a:r>
+            <a:r>
+              <a:rPr lang="en-US" sz="1200" spc="-1" dirty="0">
+                <a:solidFill>
+                  <a:srgbClr val="000000"/>
+                </a:solidFill>
+              </a:rPr>
+              <a:t> got an unexpected response</a:t>
+            </a:r>
+          </a:p>
+          <a:p>
+            <a:pPr marL="800280" lvl="1" indent="-343080">
+              <a:lnSpc>
+                <a:spcPct val="100000"/>
+              </a:lnSpc>
+              <a:spcBef>
+                <a:spcPts val="320"/>
+              </a:spcBef>
+              <a:buClr>
+                <a:srgbClr val="000000"/>
+              </a:buClr>
+              <a:buFont typeface="Symbol"/>
+              <a:buChar char=""/>
+              <a:tabLst>
+                <a:tab pos="1886040" algn="l"/>
+              </a:tabLst>
+            </a:pPr>
+            <a:r>
+              <a:rPr lang="en-US" sz="1200" spc="-1" dirty="0">
+                <a:solidFill>
+                  <a:srgbClr val="000000"/>
+                </a:solidFill>
+              </a:rPr>
+              <a:t>CodeEU-235: </a:t>
+            </a:r>
+            <a:r>
+              <a:rPr lang="en-US" sz="1200" spc="-1" dirty="0" err="1">
+                <a:solidFill>
+                  <a:srgbClr val="000000"/>
+                </a:solidFill>
+              </a:rPr>
+              <a:t>Tyre</a:t>
+            </a:r>
+            <a:r>
+              <a:rPr lang="en-US" sz="1200" spc="-1" dirty="0">
+                <a:solidFill>
+                  <a:srgbClr val="000000"/>
+                </a:solidFill>
+              </a:rPr>
+              <a:t> error calculation buses "invalid </a:t>
+            </a:r>
+            <a:r>
+              <a:rPr lang="en-US" sz="1200" spc="-1" dirty="0" err="1">
+                <a:solidFill>
+                  <a:srgbClr val="000000"/>
+                </a:solidFill>
+              </a:rPr>
+              <a:t>xsi:type</a:t>
+            </a:r>
+            <a:r>
+              <a:rPr lang="en-US" sz="1200" spc="-1" dirty="0">
+                <a:solidFill>
+                  <a:srgbClr val="000000"/>
+                </a:solidFill>
+              </a:rPr>
+              <a:t> '</a:t>
+            </a:r>
+            <a:r>
+              <a:rPr lang="en-US" sz="1200" spc="-1" dirty="0" err="1">
+                <a:solidFill>
+                  <a:srgbClr val="000000"/>
+                </a:solidFill>
+              </a:rPr>
+              <a:t>TyreDataDeclarationType</a:t>
+            </a:r>
+            <a:r>
+              <a:rPr lang="en-US" sz="1200" spc="-1" dirty="0">
+                <a:solidFill>
+                  <a:srgbClr val="000000"/>
+                </a:solidFill>
+              </a:rPr>
+              <a:t>'"</a:t>
+            </a:r>
+          </a:p>
+          <a:p>
+            <a:pPr marL="800280" lvl="1" indent="-343080">
+              <a:lnSpc>
+                <a:spcPct val="100000"/>
+              </a:lnSpc>
+              <a:spcBef>
+                <a:spcPts val="320"/>
+              </a:spcBef>
+              <a:buClr>
+                <a:srgbClr val="000000"/>
+              </a:buClr>
+              <a:buFont typeface="Symbol"/>
+              <a:buChar char=""/>
+              <a:tabLst>
+                <a:tab pos="1886040" algn="l"/>
+              </a:tabLst>
+            </a:pPr>
+            <a:r>
+              <a:rPr lang="en-US" sz="1200" spc="-1" dirty="0">
+                <a:solidFill>
+                  <a:srgbClr val="000000"/>
+                </a:solidFill>
+              </a:rPr>
+              <a:t>CodeEU-238: Bus VIF files not valid in Multistep VECTO</a:t>
+            </a:r>
+          </a:p>
+          <a:p>
+            <a:pPr marL="800280" lvl="1" indent="-343080">
+              <a:lnSpc>
+                <a:spcPct val="100000"/>
+              </a:lnSpc>
+              <a:spcBef>
+                <a:spcPts val="320"/>
+              </a:spcBef>
+              <a:buClr>
+                <a:srgbClr val="000000"/>
+              </a:buClr>
+              <a:buFont typeface="Symbol"/>
+              <a:buChar char=""/>
+              <a:tabLst>
+                <a:tab pos="1886040" algn="l"/>
+              </a:tabLst>
+            </a:pPr>
+            <a:r>
+              <a:rPr lang="en-US" sz="1200" spc="-1" dirty="0">
+                <a:solidFill>
+                  <a:srgbClr val="000000"/>
+                </a:solidFill>
+              </a:rPr>
+              <a:t>CodeEU-243: Simulation aborted: Gear 5 </a:t>
+            </a:r>
+            <a:r>
+              <a:rPr lang="en-US" sz="1200" spc="-1" dirty="0" err="1">
+                <a:solidFill>
+                  <a:srgbClr val="000000"/>
+                </a:solidFill>
+              </a:rPr>
+              <a:t>Lossmap</a:t>
+            </a:r>
+            <a:r>
+              <a:rPr lang="en-US" sz="1200" spc="-1" dirty="0">
+                <a:solidFill>
+                  <a:srgbClr val="000000"/>
+                </a:solidFill>
+              </a:rPr>
+              <a:t> not </a:t>
+            </a:r>
+            <a:r>
+              <a:rPr lang="en-US" sz="1200" spc="-1" dirty="0" err="1">
+                <a:solidFill>
+                  <a:srgbClr val="000000"/>
+                </a:solidFill>
+              </a:rPr>
+              <a:t>sufficiant</a:t>
+            </a:r>
+            <a:endParaRPr lang="en-US" sz="1200" spc="-1" dirty="0">
+              <a:solidFill>
+                <a:srgbClr val="000000"/>
+              </a:solidFill>
             </a:endParaRPr>
           </a:p>
           <a:p>
+            <a:pPr marL="800280" lvl="1" indent="-343080">
+              <a:lnSpc>
+                <a:spcPct val="100000"/>
+              </a:lnSpc>
+              <a:spcBef>
+                <a:spcPts val="320"/>
+              </a:spcBef>
+              <a:buClr>
+                <a:srgbClr val="000000"/>
+              </a:buClr>
+              <a:buFont typeface="Symbol"/>
+              <a:buChar char=""/>
+              <a:tabLst>
+                <a:tab pos="1886040" algn="l"/>
+              </a:tabLst>
+            </a:pPr>
+            <a:r>
+              <a:rPr lang="en-US" sz="1200" spc="-1" dirty="0">
+                <a:solidFill>
+                  <a:srgbClr val="000000"/>
+                </a:solidFill>
+              </a:rPr>
+              <a:t>CodeEU-244: Signature validation fails for old (prior to v4) Manufacturer reports</a:t>
+            </a:r>
+          </a:p>
+          <a:p>
             <a:pPr>
               <a:lnSpc>
                 <a:spcPct val="100000"/>
               </a:lnSpc>
-              <a:spcBef>
-                <a:spcPts val="281"/>
-              </a:spcBef>
               <a:buNone/>
               <a:tabLst>
                 <a:tab pos="1886040" algn="l"/>
               </a:tabLst>
             </a:pPr>
-            <a:endParaRPr lang="en-US" sz="1200" b="0" strike="noStrike" spc="-1" dirty="0">
-              <a:latin typeface="Arial"/>
-            </a:endParaRPr>
-          </a:p>
-          <a:p>
-            <a:pPr>
-              <a:lnSpc>
-                <a:spcPct val="100000"/>
-              </a:lnSpc>
-              <a:buNone/>
-              <a:tabLst>
-                <a:tab pos="1886040" algn="l"/>
-              </a:tabLst>
-            </a:pPr>
             <a:endParaRPr lang="en-US" sz="1400" b="0" strike="noStrike" spc="-1" dirty="0">
               <a:latin typeface="Arial"/>
             </a:endParaRPr>
           </a:p>
-          <a:p>
-            <a:pPr>
-              <a:lnSpc>
-                <a:spcPct val="100000"/>
-              </a:lnSpc>
-              <a:buNone/>
-              <a:tabLst>
-                <a:tab pos="1886040" algn="l"/>
-              </a:tabLst>
-            </a:pPr>
-            <a:endParaRPr lang="en-US" sz="1400" b="0" strike="noStrike" spc="-1" dirty="0">
-              <a:latin typeface="Arial"/>
-            </a:endParaRPr>
-          </a:p>
         </p:txBody>
       </p:sp>
     </p:spTree>
+    <p:extLst>
+      <p:ext uri="{BB962C8B-B14F-4D97-AF65-F5344CB8AC3E}">
+        <p14:creationId xmlns:p14="http://schemas.microsoft.com/office/powerpoint/2010/main" val="4241918010"/>
+      </p:ext>
+    </p:extLst>
   </p:cSld>
   <p:clrMapOvr>
     <a:masterClrMapping/>
@@ -4038,7 +3887,7 @@
                 </a:solidFill>
                 <a:latin typeface="Arial"/>
               </a:rPr>
-              <a:t>Vecto 4.0.1.3217 OFFICIAL RELEASE</a:t>
+              <a:t>Vecto 4.0.2.3273 OFFICIAL RELEASE</a:t>
             </a:r>
             <a:br>
               <a:rPr sz="2400" dirty="0"/>
@@ -4047,7 +3896,7 @@
               <a:rPr lang="en-US" sz="1600" spc="-1" dirty="0">
                 <a:latin typeface="Arial"/>
               </a:rPr>
-              <a:t>23.10.2023</a:t>
+              <a:t>18.12.2023</a:t>
             </a:r>
             <a:endParaRPr lang="en-US" sz="1600" b="0" strike="noStrike" spc="-1" dirty="0">
               <a:latin typeface="Arial"/>
@@ -4106,6 +3955,466 @@
                   <a:srgbClr val="000000"/>
                 </a:solidFill>
               </a:rPr>
+              <a:t>Bugfixes (2/2)</a:t>
+            </a:r>
+          </a:p>
+          <a:p>
+            <a:pPr marL="800280" lvl="1" indent="-343080">
+              <a:lnSpc>
+                <a:spcPct val="100000"/>
+              </a:lnSpc>
+              <a:spcBef>
+                <a:spcPts val="320"/>
+              </a:spcBef>
+              <a:buClr>
+                <a:srgbClr val="000000"/>
+              </a:buClr>
+              <a:buFont typeface="Symbol"/>
+              <a:buChar char=""/>
+              <a:tabLst>
+                <a:tab pos="1886040" algn="l"/>
+              </a:tabLst>
+            </a:pPr>
+            <a:r>
+              <a:rPr lang="en-US" sz="1200" spc="-1" dirty="0">
+                <a:solidFill>
+                  <a:srgbClr val="000000"/>
+                </a:solidFill>
+              </a:rPr>
+              <a:t>CodeEU-249: Fix handling gear torque limits in case of IEPC </a:t>
+            </a:r>
+            <a:r>
+              <a:rPr lang="en-US" sz="1200" spc="-1" dirty="0" err="1">
+                <a:solidFill>
+                  <a:srgbClr val="000000"/>
+                </a:solidFill>
+              </a:rPr>
+              <a:t>WheelHub</a:t>
+            </a:r>
+            <a:r>
+              <a:rPr lang="en-US" sz="1200" spc="-1" dirty="0">
+                <a:solidFill>
+                  <a:srgbClr val="000000"/>
+                </a:solidFill>
+              </a:rPr>
+              <a:t> motor and only one side is measured</a:t>
+            </a:r>
+          </a:p>
+          <a:p>
+            <a:pPr marL="800280" lvl="1" indent="-343080">
+              <a:lnSpc>
+                <a:spcPct val="100000"/>
+              </a:lnSpc>
+              <a:spcBef>
+                <a:spcPts val="320"/>
+              </a:spcBef>
+              <a:buClr>
+                <a:srgbClr val="000000"/>
+              </a:buClr>
+              <a:buFont typeface="Symbol"/>
+              <a:buChar char=""/>
+              <a:tabLst>
+                <a:tab pos="1886040" algn="l"/>
+              </a:tabLst>
+            </a:pPr>
+            <a:r>
+              <a:rPr lang="en-US" sz="1200" spc="-1" dirty="0">
+                <a:solidFill>
+                  <a:srgbClr val="000000"/>
+                </a:solidFill>
+              </a:rPr>
+              <a:t>CodeEU-250: Maximum vehicle speed exceeded during pre-processing</a:t>
+            </a:r>
+          </a:p>
+          <a:p>
+            <a:pPr marL="800280" lvl="1" indent="-343080">
+              <a:lnSpc>
+                <a:spcPct val="100000"/>
+              </a:lnSpc>
+              <a:spcBef>
+                <a:spcPts val="320"/>
+              </a:spcBef>
+              <a:buClr>
+                <a:srgbClr val="000000"/>
+              </a:buClr>
+              <a:buFont typeface="Symbol"/>
+              <a:buChar char=""/>
+              <a:tabLst>
+                <a:tab pos="1886040" algn="l"/>
+              </a:tabLst>
+            </a:pPr>
+            <a:r>
+              <a:rPr lang="en-US" sz="1200" spc="-1" dirty="0">
+                <a:solidFill>
+                  <a:srgbClr val="000000"/>
+                </a:solidFill>
+              </a:rPr>
+              <a:t>CodeEU-253: Replace VTP </a:t>
+            </a:r>
+            <a:r>
+              <a:rPr lang="en-US" sz="1200" spc="-1" dirty="0" err="1">
+                <a:solidFill>
+                  <a:srgbClr val="000000"/>
+                </a:solidFill>
+              </a:rPr>
+              <a:t>HeavyBus</a:t>
+            </a:r>
+            <a:r>
+              <a:rPr lang="en-US" sz="1200" spc="-1" dirty="0">
+                <a:solidFill>
+                  <a:srgbClr val="000000"/>
+                </a:solidFill>
+              </a:rPr>
+              <a:t> in Generic Vehicles with VTP Truck</a:t>
+            </a:r>
+          </a:p>
+          <a:p>
+            <a:pPr marL="800280" lvl="1" indent="-343080">
+              <a:lnSpc>
+                <a:spcPct val="100000"/>
+              </a:lnSpc>
+              <a:spcBef>
+                <a:spcPts val="320"/>
+              </a:spcBef>
+              <a:buClr>
+                <a:srgbClr val="000000"/>
+              </a:buClr>
+              <a:buFont typeface="Symbol"/>
+              <a:buChar char=""/>
+              <a:tabLst>
+                <a:tab pos="1886040" algn="l"/>
+              </a:tabLst>
+            </a:pPr>
+            <a:r>
+              <a:rPr lang="en-US" sz="1200" spc="-1" dirty="0">
+                <a:solidFill>
+                  <a:srgbClr val="000000"/>
+                </a:solidFill>
+              </a:rPr>
+              <a:t>CodeEU-259: Inconsistent calculation of </a:t>
+            </a:r>
+            <a:r>
+              <a:rPr lang="en-US" sz="1200" spc="-1" dirty="0" err="1">
+                <a:solidFill>
+                  <a:srgbClr val="000000"/>
+                </a:solidFill>
+              </a:rPr>
+              <a:t>AverageRRC</a:t>
+            </a:r>
+            <a:r>
+              <a:rPr lang="en-US" sz="1200" spc="-1" dirty="0">
+                <a:solidFill>
+                  <a:srgbClr val="000000"/>
+                </a:solidFill>
+              </a:rPr>
+              <a:t> in CIF</a:t>
+            </a:r>
+          </a:p>
+          <a:p>
+            <a:pPr marL="800280" lvl="1" indent="-343080">
+              <a:lnSpc>
+                <a:spcPct val="100000"/>
+              </a:lnSpc>
+              <a:spcBef>
+                <a:spcPts val="320"/>
+              </a:spcBef>
+              <a:buClr>
+                <a:srgbClr val="000000"/>
+              </a:buClr>
+              <a:buFont typeface="Symbol"/>
+              <a:buChar char=""/>
+              <a:tabLst>
+                <a:tab pos="1886040" algn="l"/>
+              </a:tabLst>
+            </a:pPr>
+            <a:r>
+              <a:rPr lang="en-US" sz="1200" spc="-1" dirty="0">
+                <a:solidFill>
+                  <a:srgbClr val="000000"/>
+                </a:solidFill>
+              </a:rPr>
+              <a:t>CodeEU-260: Handling of overload buffer in case Continuous Torque is 0Nm</a:t>
+            </a:r>
+          </a:p>
+          <a:p>
+            <a:pPr marL="800280" lvl="1" indent="-343080">
+              <a:lnSpc>
+                <a:spcPct val="100000"/>
+              </a:lnSpc>
+              <a:spcBef>
+                <a:spcPts val="320"/>
+              </a:spcBef>
+              <a:buClr>
+                <a:srgbClr val="000000"/>
+              </a:buClr>
+              <a:buFont typeface="Symbol"/>
+              <a:buChar char=""/>
+              <a:tabLst>
+                <a:tab pos="1886040" algn="l"/>
+              </a:tabLst>
+            </a:pPr>
+            <a:r>
+              <a:rPr lang="en-US" sz="1200" spc="-1" dirty="0">
+                <a:solidFill>
+                  <a:srgbClr val="000000"/>
+                </a:solidFill>
+              </a:rPr>
+              <a:t>CodeEU-261: </a:t>
+            </a:r>
+            <a:r>
+              <a:rPr lang="en-US" sz="1200" spc="-1" dirty="0" err="1">
+                <a:solidFill>
+                  <a:srgbClr val="000000"/>
+                </a:solidFill>
+              </a:rPr>
+              <a:t>SuperCap</a:t>
+            </a:r>
+            <a:r>
+              <a:rPr lang="en-US" sz="1200" spc="-1" dirty="0">
+                <a:solidFill>
+                  <a:srgbClr val="000000"/>
+                </a:solidFill>
+              </a:rPr>
+              <a:t> internal resistance standard values correction</a:t>
+            </a:r>
+          </a:p>
+          <a:p>
+            <a:pPr marL="800280" lvl="1" indent="-343080">
+              <a:lnSpc>
+                <a:spcPct val="100000"/>
+              </a:lnSpc>
+              <a:spcBef>
+                <a:spcPts val="320"/>
+              </a:spcBef>
+              <a:buClr>
+                <a:srgbClr val="000000"/>
+              </a:buClr>
+              <a:buFont typeface="Symbol"/>
+              <a:buChar char=""/>
+              <a:tabLst>
+                <a:tab pos="1886040" algn="l"/>
+              </a:tabLst>
+            </a:pPr>
+            <a:r>
+              <a:rPr lang="en-US" sz="1200" spc="-1" dirty="0">
+                <a:solidFill>
+                  <a:srgbClr val="000000"/>
+                </a:solidFill>
+              </a:rPr>
+              <a:t>CodeEU-263: Determination of rated power for IEPCs for MRF and CIF</a:t>
+            </a:r>
+          </a:p>
+          <a:p>
+            <a:pPr marL="800280" lvl="1" indent="-343080">
+              <a:lnSpc>
+                <a:spcPct val="100000"/>
+              </a:lnSpc>
+              <a:spcBef>
+                <a:spcPts val="320"/>
+              </a:spcBef>
+              <a:buClr>
+                <a:srgbClr val="000000"/>
+              </a:buClr>
+              <a:buFont typeface="Symbol"/>
+              <a:buChar char=""/>
+              <a:tabLst>
+                <a:tab pos="1886040" algn="l"/>
+              </a:tabLst>
+            </a:pPr>
+            <a:r>
+              <a:rPr lang="en-US" sz="1200" spc="-1" dirty="0">
+                <a:solidFill>
+                  <a:srgbClr val="000000"/>
+                </a:solidFill>
+              </a:rPr>
+              <a:t>CodeEU-266: Fix Measured Speed Testcases</a:t>
+            </a:r>
+            <a:endParaRPr lang="en-US" sz="1200" b="0" strike="noStrike" spc="-1" dirty="0">
+              <a:latin typeface="Arial"/>
+            </a:endParaRPr>
+          </a:p>
+          <a:p>
+            <a:pPr>
+              <a:lnSpc>
+                <a:spcPct val="100000"/>
+              </a:lnSpc>
+              <a:spcBef>
+                <a:spcPts val="281"/>
+              </a:spcBef>
+              <a:buNone/>
+              <a:tabLst>
+                <a:tab pos="1886040" algn="l"/>
+              </a:tabLst>
+            </a:pPr>
+            <a:endParaRPr lang="en-US" sz="1200" b="0" strike="noStrike" spc="-1" dirty="0">
+              <a:latin typeface="Arial"/>
+            </a:endParaRPr>
+          </a:p>
+          <a:p>
+            <a:pPr>
+              <a:lnSpc>
+                <a:spcPct val="100000"/>
+              </a:lnSpc>
+              <a:buNone/>
+              <a:tabLst>
+                <a:tab pos="1886040" algn="l"/>
+              </a:tabLst>
+            </a:pPr>
+            <a:endParaRPr lang="en-US" sz="1400" b="0" strike="noStrike" spc="-1" dirty="0">
+              <a:latin typeface="Arial"/>
+            </a:endParaRPr>
+          </a:p>
+          <a:p>
+            <a:pPr>
+              <a:lnSpc>
+                <a:spcPct val="100000"/>
+              </a:lnSpc>
+              <a:buNone/>
+              <a:tabLst>
+                <a:tab pos="1886040" algn="l"/>
+              </a:tabLst>
+            </a:pPr>
+            <a:endParaRPr lang="en-US" sz="1400" b="0" strike="noStrike" spc="-1" dirty="0">
+              <a:latin typeface="Arial"/>
+            </a:endParaRPr>
+          </a:p>
+        </p:txBody>
+      </p:sp>
+    </p:spTree>
+  </p:cSld>
+  <p:clrMapOvr>
+    <a:masterClrMapping/>
+  </p:clrMapOvr>
+</p:sld>
+</file>
+
+<file path=ppt/slides/slide5.xml><?xml version="1.0" encoding="utf-8"?>
+<p:sld xmlns:a="http://schemas.openxmlformats.org/drawingml/2006/main" xmlns:r="http://schemas.openxmlformats.org/officeDocument/2006/relationships" xmlns:p="http://schemas.openxmlformats.org/presentationml/2006/main">
+  <p:cSld>
+    <p:spTree>
+      <p:nvGrpSpPr>
+        <p:cNvPr id="1" name=""/>
+        <p:cNvGrpSpPr/>
+        <p:nvPr/>
+      </p:nvGrpSpPr>
+      <p:grpSpPr>
+        <a:xfrm>
+          <a:off x="0" y="0"/>
+          <a:ext cx="0" cy="0"/>
+          <a:chOff x="0" y="0"/>
+          <a:chExt cx="0" cy="0"/>
+        </a:xfrm>
+      </p:grpSpPr>
+      <p:sp>
+        <p:nvSpPr>
+          <p:cNvPr id="92" name="PlaceHolder 1"/>
+          <p:cNvSpPr>
+            <a:spLocks noGrp="1"/>
+          </p:cNvSpPr>
+          <p:nvPr>
+            <p:ph type="title"/>
+          </p:nvPr>
+        </p:nvSpPr>
+        <p:spPr>
+          <a:xfrm>
+            <a:off x="468360" y="476640"/>
+            <a:ext cx="8217720" cy="680400"/>
+          </a:xfrm>
+          <a:prstGeom prst="rect">
+            <a:avLst/>
+          </a:prstGeom>
+          <a:noFill/>
+          <a:ln w="0">
+            <a:noFill/>
+          </a:ln>
+        </p:spPr>
+        <p:txBody>
+          <a:bodyPr lIns="90000" tIns="45000" rIns="90000" bIns="45000" numCol="1" spcCol="0" anchor="ctr">
+            <a:noAutofit/>
+          </a:bodyPr>
+          <a:lstStyle/>
+          <a:p>
+            <a:pPr algn="ctr">
+              <a:lnSpc>
+                <a:spcPct val="100000"/>
+              </a:lnSpc>
+              <a:buNone/>
+            </a:pPr>
+            <a:r>
+              <a:rPr lang="en-US" sz="2400" b="1" strike="noStrike" spc="-1" dirty="0">
+                <a:solidFill>
+                  <a:srgbClr val="990000"/>
+                </a:solidFill>
+                <a:latin typeface="Arial"/>
+              </a:rPr>
+              <a:t>Vecto 4.0.1.3217 OFFICIAL RELEASE</a:t>
+            </a:r>
+            <a:br>
+              <a:rPr sz="2400" dirty="0"/>
+            </a:br>
+            <a:r>
+              <a:rPr lang="en-US" sz="1600" spc="-1" dirty="0">
+                <a:latin typeface="Arial"/>
+              </a:rPr>
+              <a:t>23.10.2023</a:t>
+            </a:r>
+            <a:endParaRPr lang="en-US" sz="1600" b="0" strike="noStrike" spc="-1" dirty="0">
+              <a:latin typeface="Arial"/>
+            </a:endParaRPr>
+          </a:p>
+        </p:txBody>
+      </p:sp>
+      <p:sp>
+        <p:nvSpPr>
+          <p:cNvPr id="93" name="PlaceHolder 2"/>
+          <p:cNvSpPr>
+            <a:spLocks noGrp="1"/>
+          </p:cNvSpPr>
+          <p:nvPr>
+            <p:ph/>
+          </p:nvPr>
+        </p:nvSpPr>
+        <p:spPr>
+          <a:xfrm>
+            <a:off x="323640" y="1268640"/>
+            <a:ext cx="8496360" cy="4823640"/>
+          </a:xfrm>
+          <a:prstGeom prst="rect">
+            <a:avLst/>
+          </a:prstGeom>
+          <a:noFill/>
+          <a:ln w="0">
+            <a:noFill/>
+          </a:ln>
+        </p:spPr>
+        <p:txBody>
+          <a:bodyPr lIns="90000" tIns="45000" rIns="90000" bIns="45000" numCol="1" spcCol="0" anchor="t">
+            <a:noAutofit/>
+          </a:bodyPr>
+          <a:lstStyle/>
+          <a:p>
+            <a:pPr marL="343080" indent="-343080">
+              <a:lnSpc>
+                <a:spcPct val="100000"/>
+              </a:lnSpc>
+              <a:spcBef>
+                <a:spcPts val="320"/>
+              </a:spcBef>
+              <a:buClr>
+                <a:srgbClr val="000000"/>
+              </a:buClr>
+              <a:buFont typeface="Symbol"/>
+              <a:buChar char=""/>
+              <a:tabLst>
+                <a:tab pos="1886040" algn="l"/>
+              </a:tabLst>
+            </a:pPr>
+            <a:r>
+              <a:rPr lang="en-US" sz="1600" b="1" spc="-1" dirty="0">
+                <a:solidFill>
+                  <a:srgbClr val="000000"/>
+                </a:solidFill>
+              </a:rPr>
               <a:t>Improvements</a:t>
             </a:r>
           </a:p>
@@ -4384,7 +4693,7 @@
 </p:sld>
 </file>
 
-<file path=ppt/slides/slide5.xml><?xml version="1.0" encoding="utf-8"?>
+<file path=ppt/slides/slide6.xml><?xml version="1.0" encoding="utf-8"?>
 <p:sld xmlns:a="http://schemas.openxmlformats.org/drawingml/2006/main" xmlns:r="http://schemas.openxmlformats.org/officeDocument/2006/relationships" xmlns:p="http://schemas.openxmlformats.org/presentationml/2006/main">
   <p:cSld>
     <p:spTree>
@@ -4627,7 +4936,7 @@
 </p:sld>
 </file>
 
-<file path=ppt/slides/slide6.xml><?xml version="1.0" encoding="utf-8"?>
+<file path=ppt/slides/slide7.xml><?xml version="1.0" encoding="utf-8"?>
 <p:sld xmlns:a="http://schemas.openxmlformats.org/drawingml/2006/main" xmlns:r="http://schemas.openxmlformats.org/officeDocument/2006/relationships" xmlns:p="http://schemas.openxmlformats.org/presentationml/2006/main">
   <p:cSld>
     <p:spTree>
@@ -4746,7 +5055,7 @@
 </p:sld>
 </file>
 
-<file path=ppt/slides/slide7.xml><?xml version="1.0" encoding="utf-8"?>
+<file path=ppt/slides/slide8.xml><?xml version="1.0" encoding="utf-8"?>
 <p:sld xmlns:a="http://schemas.openxmlformats.org/drawingml/2006/main" xmlns:r="http://schemas.openxmlformats.org/officeDocument/2006/relationships" xmlns:p="http://schemas.openxmlformats.org/presentationml/2006/main">
   <p:cSld>
     <p:spTree>
@@ -5088,7 +5397,7 @@
 </p:sld>
 </file>
 
-<file path=ppt/slides/slide8.xml><?xml version="1.0" encoding="utf-8"?>
+<file path=ppt/slides/slide9.xml><?xml version="1.0" encoding="utf-8"?>
 <p:sld xmlns:a="http://schemas.openxmlformats.org/drawingml/2006/main" xmlns:r="http://schemas.openxmlformats.org/officeDocument/2006/relationships" xmlns:p="http://schemas.openxmlformats.org/presentationml/2006/main">
   <p:cSld>
     <p:spTree>
@@ -6906,116 +7215,6 @@
     <p:extLst>
       <p:ext uri="{BB962C8B-B14F-4D97-AF65-F5344CB8AC3E}">
         <p14:creationId xmlns:p14="http://schemas.microsoft.com/office/powerpoint/2010/main" val="3933703563"/>
-      </p:ext>
-    </p:extLst>
-  </p:cSld>
-  <p:clrMapOvr>
-    <a:masterClrMapping/>
-  </p:clrMapOvr>
-</p:sld>
-</file>
-
-<file path=ppt/slides/slide9.xml><?xml version="1.0" encoding="utf-8"?>
-<p:sld xmlns:a="http://schemas.openxmlformats.org/drawingml/2006/main" xmlns:r="http://schemas.openxmlformats.org/officeDocument/2006/relationships" xmlns:p="http://schemas.openxmlformats.org/presentationml/2006/main">
-  <p:cSld>
-    <p:spTree>
-      <p:nvGrpSpPr>
-        <p:cNvPr id="1" name=""/>
-        <p:cNvGrpSpPr/>
-        <p:nvPr/>
-      </p:nvGrpSpPr>
-      <p:grpSpPr>
-        <a:xfrm>
-          <a:off x="0" y="0"/>
-          <a:ext cx="0" cy="0"/>
-          <a:chOff x="0" y="0"/>
-          <a:chExt cx="0" cy="0"/>
-        </a:xfrm>
-      </p:grpSpPr>
-      <p:sp>
-        <p:nvSpPr>
-          <p:cNvPr id="6" name="Inhaltsplatzhalter 5"/>
-          <p:cNvSpPr>
-            <a:spLocks noGrp="1"/>
-          </p:cNvSpPr>
-          <p:nvPr>
-            <p:ph idx="1"/>
-          </p:nvPr>
-        </p:nvSpPr>
-        <p:spPr>
-          <a:xfrm>
-            <a:off x="588206" y="1300092"/>
-            <a:ext cx="8394645" cy="4195735"/>
-          </a:xfrm>
-        </p:spPr>
-        <p:txBody>
-          <a:bodyPr>
-            <a:normAutofit/>
-          </a:bodyPr>
-          <a:lstStyle/>
-          <a:p>
-            <a:pPr>
-              <a:spcBef>
-                <a:spcPts val="1200"/>
-              </a:spcBef>
-            </a:pPr>
-            <a:r>
-              <a:rPr lang="en-US" sz="1800" dirty="0"/>
-              <a:t>XML Job Files &lt; v2.4 are no longer supported</a:t>
-            </a:r>
-          </a:p>
-          <a:p>
-            <a:pPr>
-              <a:spcBef>
-                <a:spcPts val="1200"/>
-              </a:spcBef>
-            </a:pPr>
-            <a:r>
-              <a:rPr lang="en-US" sz="1800" dirty="0"/>
-              <a:t>Dropped support for .NET Framework 4.5 (EOL 04/2022)</a:t>
-            </a:r>
-          </a:p>
-          <a:p>
-            <a:pPr>
-              <a:spcBef>
-                <a:spcPts val="1200"/>
-              </a:spcBef>
-            </a:pPr>
-            <a:endParaRPr lang="en-US" sz="1800" dirty="0"/>
-          </a:p>
-        </p:txBody>
-      </p:sp>
-      <p:sp>
-        <p:nvSpPr>
-          <p:cNvPr id="5" name="Titel 4"/>
-          <p:cNvSpPr>
-            <a:spLocks noGrp="1"/>
-          </p:cNvSpPr>
-          <p:nvPr>
-            <p:ph type="title"/>
-          </p:nvPr>
-        </p:nvSpPr>
-        <p:spPr>
-          <a:xfrm>
-            <a:off x="588206" y="453542"/>
-            <a:ext cx="8229240" cy="478905"/>
-          </a:xfrm>
-        </p:spPr>
-        <p:txBody>
-          <a:bodyPr/>
-          <a:lstStyle/>
-          <a:p>
-            <a:r>
-              <a:rPr lang="en-GB" dirty="0"/>
-              <a:t>Changes</a:t>
-            </a:r>
-          </a:p>
-        </p:txBody>
-      </p:sp>
-    </p:spTree>
-    <p:extLst>
-      <p:ext uri="{BB962C8B-B14F-4D97-AF65-F5344CB8AC3E}">
-        <p14:creationId xmlns:p14="http://schemas.microsoft.com/office/powerpoint/2010/main" val="3711980566"/>
       </p:ext>
     </p:extLst>
   </p:cSld>

--- a/Documentation/User Manual Source/Release Notes Vecto4.x.pptx
+++ b/Documentation/User Manual Source/Release Notes Vecto4.x.pptx
@@ -26,6 +26,7 @@
     <p:sldId id="270" r:id="rId21"/>
     <p:sldId id="271" r:id="rId22"/>
     <p:sldId id="272" r:id="rId23"/>
+    <p:sldId id="273" r:id="rId24"/>
   </p:sldIdLst>
   <p:sldSz cx="9144000" cy="6858000"/>
   <p:notesSz cx="7559675" cy="10691813"/>
@@ -107,7 +108,7 @@
         <p:txBody>
           <a:bodyPr/>
           <a:p>
-            <a:fld id="{D014D822-30EB-4167-8F91-B2577193BF72}" type="slidenum">
+            <a:fld id="{0A200E93-DC05-4B43-854D-3B4925D2428A}" type="slidenum">
               <a:t>&lt;#&gt;</a:t>
             </a:fld>
           </a:p>
@@ -237,7 +238,7 @@
         <p:spPr>
           <a:xfrm>
             <a:off x="7996320" y="6599160"/>
-            <a:ext cx="923040" cy="242280"/>
+            <a:ext cx="921240" cy="242280"/>
           </a:xfrm>
           <a:prstGeom prst="rect">
             <a:avLst/>
@@ -266,7 +267,7 @@
                 <a:spcPts val="499"/>
               </a:spcBef>
             </a:pPr>
-            <a:fld id="{1DED7567-A7FA-4DB7-98C8-EC8071768526}" type="slidenum">
+            <a:fld id="{F2B64004-FE3A-417F-BCB2-3F7EA274CCEF}" type="slidenum">
               <a:rPr b="1" lang="de-AT" sz="1000" spc="-1" strike="noStrike">
                 <a:solidFill>
                   <a:srgbClr val="7d7d7d"/>
@@ -274,9 +275,9 @@
                 <a:latin typeface="Verdana"/>
                 <a:ea typeface="DejaVu Sans"/>
               </a:rPr>
-              <a:t>2</a:t>
+              <a:t>&lt;number&gt;</a:t>
             </a:fld>
-            <a:endParaRPr b="0" lang="en-GB" sz="1000" spc="-1" strike="noStrike">
+            <a:endParaRPr b="0" lang="en-US" sz="1000" spc="-1" strike="noStrike">
               <a:solidFill>
                 <a:srgbClr val="000000"/>
               </a:solidFill>
@@ -294,7 +295,7 @@
         <p:spPr>
           <a:xfrm>
             <a:off x="144360" y="6627960"/>
-            <a:ext cx="1880280" cy="213480"/>
+            <a:ext cx="1878480" cy="211680"/>
           </a:xfrm>
           <a:prstGeom prst="rect">
             <a:avLst/>
@@ -333,7 +334,7 @@
               </a:rPr>
               <a:t>VECTO Release Notes</a:t>
             </a:r>
-            <a:endParaRPr b="0" lang="en-GB" sz="1100" spc="-1" strike="noStrike">
+            <a:endParaRPr b="0" lang="en-US" sz="1100" spc="-1" strike="noStrike">
               <a:solidFill>
                 <a:srgbClr val="000000"/>
               </a:solidFill>
@@ -355,7 +356,7 @@
         <p:spPr>
           <a:xfrm>
             <a:off x="7389360" y="37800"/>
-            <a:ext cx="1418760" cy="350280"/>
+            <a:ext cx="1416960" cy="348480"/>
           </a:xfrm>
           <a:prstGeom prst="rect">
             <a:avLst/>
@@ -378,7 +379,7 @@
         <p:spPr>
           <a:xfrm>
             <a:off x="107640" y="58680"/>
-            <a:ext cx="975960" cy="329760"/>
+            <a:ext cx="974160" cy="327960"/>
           </a:xfrm>
           <a:prstGeom prst="rect">
             <a:avLst/>
@@ -462,7 +463,7 @@
               <a:buNone/>
             </a:pPr>
             <a:r>
-              <a:rPr b="0" lang="en-GB" sz="4400" spc="-1" strike="noStrike">
+              <a:rPr b="0" lang="en-US" sz="4400" spc="-1" strike="noStrike">
                 <a:solidFill>
                   <a:srgbClr val="000000"/>
                 </a:solidFill>
@@ -470,7 +471,7 @@
               </a:rPr>
               <a:t>Click to edit the title text format</a:t>
             </a:r>
-            <a:endParaRPr b="0" lang="en-GB" sz="4400" spc="-1" strike="noStrike">
+            <a:endParaRPr b="0" lang="en-US" sz="4400" spc="-1" strike="noStrike">
               <a:solidFill>
                 <a:srgbClr val="000000"/>
               </a:solidFill>
@@ -519,7 +520,7 @@
               <a:buChar char=""/>
             </a:pPr>
             <a:r>
-              <a:rPr b="0" lang="en-GB" sz="3200" spc="-1" strike="noStrike">
+              <a:rPr b="0" lang="en-US" sz="3200" spc="-1" strike="noStrike">
                 <a:solidFill>
                   <a:srgbClr val="000000"/>
                 </a:solidFill>
@@ -527,7 +528,7 @@
               </a:rPr>
               <a:t>Click to edit the outline text format</a:t>
             </a:r>
-            <a:endParaRPr b="0" lang="en-GB" sz="3200" spc="-1" strike="noStrike">
+            <a:endParaRPr b="0" lang="en-US" sz="3200" spc="-1" strike="noStrike">
               <a:solidFill>
                 <a:srgbClr val="000000"/>
               </a:solidFill>
@@ -547,7 +548,7 @@
               <a:buChar char=""/>
             </a:pPr>
             <a:r>
-              <a:rPr b="0" lang="en-GB" sz="2800" spc="-1" strike="noStrike">
+              <a:rPr b="0" lang="en-US" sz="2800" spc="-1" strike="noStrike">
                 <a:solidFill>
                   <a:srgbClr val="000000"/>
                 </a:solidFill>
@@ -555,7 +556,7 @@
               </a:rPr>
               <a:t>Second Outline Level</a:t>
             </a:r>
-            <a:endParaRPr b="0" lang="en-GB" sz="2800" spc="-1" strike="noStrike">
+            <a:endParaRPr b="0" lang="en-US" sz="2800" spc="-1" strike="noStrike">
               <a:solidFill>
                 <a:srgbClr val="000000"/>
               </a:solidFill>
@@ -575,7 +576,7 @@
               <a:buChar char=""/>
             </a:pPr>
             <a:r>
-              <a:rPr b="0" lang="en-GB" sz="2400" spc="-1" strike="noStrike">
+              <a:rPr b="0" lang="en-US" sz="2400" spc="-1" strike="noStrike">
                 <a:solidFill>
                   <a:srgbClr val="000000"/>
                 </a:solidFill>
@@ -583,7 +584,7 @@
               </a:rPr>
               <a:t>Third Outline Level</a:t>
             </a:r>
-            <a:endParaRPr b="0" lang="en-GB" sz="2400" spc="-1" strike="noStrike">
+            <a:endParaRPr b="0" lang="en-US" sz="2400" spc="-1" strike="noStrike">
               <a:solidFill>
                 <a:srgbClr val="000000"/>
               </a:solidFill>
@@ -603,7 +604,7 @@
               <a:buChar char=""/>
             </a:pPr>
             <a:r>
-              <a:rPr b="0" lang="en-GB" sz="2000" spc="-1" strike="noStrike">
+              <a:rPr b="0" lang="en-US" sz="2000" spc="-1" strike="noStrike">
                 <a:solidFill>
                   <a:srgbClr val="000000"/>
                 </a:solidFill>
@@ -611,7 +612,7 @@
               </a:rPr>
               <a:t>Fourth Outline Level</a:t>
             </a:r>
-            <a:endParaRPr b="0" lang="en-GB" sz="2000" spc="-1" strike="noStrike">
+            <a:endParaRPr b="0" lang="en-US" sz="2000" spc="-1" strike="noStrike">
               <a:solidFill>
                 <a:srgbClr val="000000"/>
               </a:solidFill>
@@ -631,7 +632,7 @@
               <a:buChar char=""/>
             </a:pPr>
             <a:r>
-              <a:rPr b="0" lang="en-GB" sz="2000" spc="-1" strike="noStrike">
+              <a:rPr b="0" lang="en-US" sz="2000" spc="-1" strike="noStrike">
                 <a:solidFill>
                   <a:srgbClr val="000000"/>
                 </a:solidFill>
@@ -639,7 +640,7 @@
               </a:rPr>
               <a:t>Fifth Outline Level</a:t>
             </a:r>
-            <a:endParaRPr b="0" lang="en-GB" sz="2000" spc="-1" strike="noStrike">
+            <a:endParaRPr b="0" lang="en-US" sz="2000" spc="-1" strike="noStrike">
               <a:solidFill>
                 <a:srgbClr val="000000"/>
               </a:solidFill>
@@ -659,7 +660,7 @@
               <a:buChar char=""/>
             </a:pPr>
             <a:r>
-              <a:rPr b="0" lang="en-GB" sz="2000" spc="-1" strike="noStrike">
+              <a:rPr b="0" lang="en-US" sz="2000" spc="-1" strike="noStrike">
                 <a:solidFill>
                   <a:srgbClr val="000000"/>
                 </a:solidFill>
@@ -667,7 +668,7 @@
               </a:rPr>
               <a:t>Sixth Outline Level</a:t>
             </a:r>
-            <a:endParaRPr b="0" lang="en-GB" sz="2000" spc="-1" strike="noStrike">
+            <a:endParaRPr b="0" lang="en-US" sz="2000" spc="-1" strike="noStrike">
               <a:solidFill>
                 <a:srgbClr val="000000"/>
               </a:solidFill>
@@ -687,7 +688,7 @@
               <a:buChar char=""/>
             </a:pPr>
             <a:r>
-              <a:rPr b="0" lang="en-GB" sz="2000" spc="-1" strike="noStrike">
+              <a:rPr b="0" lang="en-US" sz="2000" spc="-1" strike="noStrike">
                 <a:solidFill>
                   <a:srgbClr val="000000"/>
                 </a:solidFill>
@@ -695,7 +696,7 @@
               </a:rPr>
               <a:t>Seventh Outline Level</a:t>
             </a:r>
-            <a:endParaRPr b="0" lang="en-GB" sz="2000" spc="-1" strike="noStrike">
+            <a:endParaRPr b="0" lang="en-US" sz="2000" spc="-1" strike="noStrike">
               <a:solidFill>
                 <a:srgbClr val="000000"/>
               </a:solidFill>
@@ -788,7 +789,7 @@
         <p:spPr>
           <a:xfrm>
             <a:off x="7996320" y="6599160"/>
-            <a:ext cx="923040" cy="242280"/>
+            <a:ext cx="921240" cy="242280"/>
           </a:xfrm>
           <a:prstGeom prst="rect">
             <a:avLst/>
@@ -817,7 +818,7 @@
                 <a:spcPts val="499"/>
               </a:spcBef>
             </a:pPr>
-            <a:fld id="{CF46D4DB-FCA0-4BE0-9069-6CB462AE7926}" type="slidenum">
+            <a:fld id="{2554B842-F5D8-4574-8100-46EE5E129F9D}" type="slidenum">
               <a:rPr b="1" lang="de-AT" sz="1000" spc="-1" strike="noStrike">
                 <a:solidFill>
                   <a:srgbClr val="7d7d7d"/>
@@ -827,7 +828,7 @@
               </a:rPr>
               <a:t>&lt;number&gt;</a:t>
             </a:fld>
-            <a:endParaRPr b="0" lang="en-GB" sz="1000" spc="-1" strike="noStrike">
+            <a:endParaRPr b="0" lang="en-US" sz="1000" spc="-1" strike="noStrike">
               <a:solidFill>
                 <a:srgbClr val="000000"/>
               </a:solidFill>
@@ -845,7 +846,7 @@
         <p:spPr>
           <a:xfrm>
             <a:off x="144360" y="6627960"/>
-            <a:ext cx="1880280" cy="213480"/>
+            <a:ext cx="1878480" cy="211680"/>
           </a:xfrm>
           <a:prstGeom prst="rect">
             <a:avLst/>
@@ -884,7 +885,7 @@
               </a:rPr>
               <a:t>VECTO Release Notes</a:t>
             </a:r>
-            <a:endParaRPr b="0" lang="en-GB" sz="1100" spc="-1" strike="noStrike">
+            <a:endParaRPr b="0" lang="en-US" sz="1100" spc="-1" strike="noStrike">
               <a:solidFill>
                 <a:srgbClr val="000000"/>
               </a:solidFill>
@@ -906,7 +907,7 @@
         <p:spPr>
           <a:xfrm>
             <a:off x="7389360" y="37800"/>
-            <a:ext cx="1418760" cy="350280"/>
+            <a:ext cx="1416960" cy="348480"/>
           </a:xfrm>
           <a:prstGeom prst="rect">
             <a:avLst/>
@@ -929,7 +930,7 @@
         <p:spPr>
           <a:xfrm>
             <a:off x="107640" y="58680"/>
-            <a:ext cx="975960" cy="329760"/>
+            <a:ext cx="974160" cy="327960"/>
           </a:xfrm>
           <a:prstGeom prst="rect">
             <a:avLst/>
@@ -1013,7 +1014,7 @@
               <a:buNone/>
             </a:pPr>
             <a:r>
-              <a:rPr b="0" lang="en-GB" sz="4400" spc="-1" strike="noStrike">
+              <a:rPr b="0" lang="en-US" sz="4400" spc="-1" strike="noStrike">
                 <a:solidFill>
                   <a:srgbClr val="000000"/>
                 </a:solidFill>
@@ -1021,7 +1022,7 @@
               </a:rPr>
               <a:t>Click to edit the title text format</a:t>
             </a:r>
-            <a:endParaRPr b="0" lang="en-GB" sz="4400" spc="-1" strike="noStrike">
+            <a:endParaRPr b="0" lang="en-US" sz="4400" spc="-1" strike="noStrike">
               <a:solidFill>
                 <a:srgbClr val="000000"/>
               </a:solidFill>
@@ -1070,7 +1071,7 @@
               <a:buChar char=""/>
             </a:pPr>
             <a:r>
-              <a:rPr b="0" lang="en-GB" sz="3200" spc="-1" strike="noStrike">
+              <a:rPr b="0" lang="en-US" sz="3200" spc="-1" strike="noStrike">
                 <a:solidFill>
                   <a:srgbClr val="000000"/>
                 </a:solidFill>
@@ -1078,7 +1079,7 @@
               </a:rPr>
               <a:t>Click to edit the outline text format</a:t>
             </a:r>
-            <a:endParaRPr b="0" lang="en-GB" sz="3200" spc="-1" strike="noStrike">
+            <a:endParaRPr b="0" lang="en-US" sz="3200" spc="-1" strike="noStrike">
               <a:solidFill>
                 <a:srgbClr val="000000"/>
               </a:solidFill>
@@ -1098,7 +1099,7 @@
               <a:buChar char=""/>
             </a:pPr>
             <a:r>
-              <a:rPr b="0" lang="en-GB" sz="2800" spc="-1" strike="noStrike">
+              <a:rPr b="0" lang="en-US" sz="2800" spc="-1" strike="noStrike">
                 <a:solidFill>
                   <a:srgbClr val="000000"/>
                 </a:solidFill>
@@ -1106,7 +1107,7 @@
               </a:rPr>
               <a:t>Second Outline Level</a:t>
             </a:r>
-            <a:endParaRPr b="0" lang="en-GB" sz="2800" spc="-1" strike="noStrike">
+            <a:endParaRPr b="0" lang="en-US" sz="2800" spc="-1" strike="noStrike">
               <a:solidFill>
                 <a:srgbClr val="000000"/>
               </a:solidFill>
@@ -1126,7 +1127,7 @@
               <a:buChar char=""/>
             </a:pPr>
             <a:r>
-              <a:rPr b="0" lang="en-GB" sz="2400" spc="-1" strike="noStrike">
+              <a:rPr b="0" lang="en-US" sz="2400" spc="-1" strike="noStrike">
                 <a:solidFill>
                   <a:srgbClr val="000000"/>
                 </a:solidFill>
@@ -1134,7 +1135,7 @@
               </a:rPr>
               <a:t>Third Outline Level</a:t>
             </a:r>
-            <a:endParaRPr b="0" lang="en-GB" sz="2400" spc="-1" strike="noStrike">
+            <a:endParaRPr b="0" lang="en-US" sz="2400" spc="-1" strike="noStrike">
               <a:solidFill>
                 <a:srgbClr val="000000"/>
               </a:solidFill>
@@ -1154,7 +1155,7 @@
               <a:buChar char=""/>
             </a:pPr>
             <a:r>
-              <a:rPr b="0" lang="en-GB" sz="2000" spc="-1" strike="noStrike">
+              <a:rPr b="0" lang="en-US" sz="2000" spc="-1" strike="noStrike">
                 <a:solidFill>
                   <a:srgbClr val="000000"/>
                 </a:solidFill>
@@ -1162,7 +1163,7 @@
               </a:rPr>
               <a:t>Fourth Outline Level</a:t>
             </a:r>
-            <a:endParaRPr b="0" lang="en-GB" sz="2000" spc="-1" strike="noStrike">
+            <a:endParaRPr b="0" lang="en-US" sz="2000" spc="-1" strike="noStrike">
               <a:solidFill>
                 <a:srgbClr val="000000"/>
               </a:solidFill>
@@ -1182,7 +1183,7 @@
               <a:buChar char=""/>
             </a:pPr>
             <a:r>
-              <a:rPr b="0" lang="en-GB" sz="2000" spc="-1" strike="noStrike">
+              <a:rPr b="0" lang="en-US" sz="2000" spc="-1" strike="noStrike">
                 <a:solidFill>
                   <a:srgbClr val="000000"/>
                 </a:solidFill>
@@ -1190,7 +1191,7 @@
               </a:rPr>
               <a:t>Fifth Outline Level</a:t>
             </a:r>
-            <a:endParaRPr b="0" lang="en-GB" sz="2000" spc="-1" strike="noStrike">
+            <a:endParaRPr b="0" lang="en-US" sz="2000" spc="-1" strike="noStrike">
               <a:solidFill>
                 <a:srgbClr val="000000"/>
               </a:solidFill>
@@ -1210,7 +1211,7 @@
               <a:buChar char=""/>
             </a:pPr>
             <a:r>
-              <a:rPr b="0" lang="en-GB" sz="2000" spc="-1" strike="noStrike">
+              <a:rPr b="0" lang="en-US" sz="2000" spc="-1" strike="noStrike">
                 <a:solidFill>
                   <a:srgbClr val="000000"/>
                 </a:solidFill>
@@ -1218,7 +1219,7 @@
               </a:rPr>
               <a:t>Sixth Outline Level</a:t>
             </a:r>
-            <a:endParaRPr b="0" lang="en-GB" sz="2000" spc="-1" strike="noStrike">
+            <a:endParaRPr b="0" lang="en-US" sz="2000" spc="-1" strike="noStrike">
               <a:solidFill>
                 <a:srgbClr val="000000"/>
               </a:solidFill>
@@ -1238,7 +1239,7 @@
               <a:buChar char=""/>
             </a:pPr>
             <a:r>
-              <a:rPr b="0" lang="en-GB" sz="2000" spc="-1" strike="noStrike">
+              <a:rPr b="0" lang="en-US" sz="2000" spc="-1" strike="noStrike">
                 <a:solidFill>
                   <a:srgbClr val="000000"/>
                 </a:solidFill>
@@ -1246,7 +1247,7 @@
               </a:rPr>
               <a:t>Seventh Outline Level</a:t>
             </a:r>
-            <a:endParaRPr b="0" lang="en-GB" sz="2000" spc="-1" strike="noStrike">
+            <a:endParaRPr b="0" lang="en-US" sz="2000" spc="-1" strike="noStrike">
               <a:solidFill>
                 <a:srgbClr val="000000"/>
               </a:solidFill>
@@ -1339,7 +1340,7 @@
         <p:spPr>
           <a:xfrm>
             <a:off x="7996320" y="6599160"/>
-            <a:ext cx="923040" cy="242280"/>
+            <a:ext cx="921240" cy="242280"/>
           </a:xfrm>
           <a:prstGeom prst="rect">
             <a:avLst/>
@@ -1368,7 +1369,7 @@
                 <a:spcPts val="499"/>
               </a:spcBef>
             </a:pPr>
-            <a:fld id="{A7BBED09-F1E4-40C7-A22A-64D9F3FBC884}" type="slidenum">
+            <a:fld id="{0C6CC2C5-577D-4E12-8584-ED1A1C1C6BCB}" type="slidenum">
               <a:rPr b="1" lang="de-AT" sz="1000" spc="-1" strike="noStrike">
                 <a:solidFill>
                   <a:srgbClr val="7d7d7d"/>
@@ -1378,7 +1379,7 @@
               </a:rPr>
               <a:t>&lt;number&gt;</a:t>
             </a:fld>
-            <a:endParaRPr b="0" lang="en-GB" sz="1000" spc="-1" strike="noStrike">
+            <a:endParaRPr b="0" lang="en-US" sz="1000" spc="-1" strike="noStrike">
               <a:solidFill>
                 <a:srgbClr val="000000"/>
               </a:solidFill>
@@ -1396,7 +1397,7 @@
         <p:spPr>
           <a:xfrm>
             <a:off x="144360" y="6627960"/>
-            <a:ext cx="1880280" cy="213480"/>
+            <a:ext cx="1878480" cy="211680"/>
           </a:xfrm>
           <a:prstGeom prst="rect">
             <a:avLst/>
@@ -1435,7 +1436,7 @@
               </a:rPr>
               <a:t>VECTO Release Notes</a:t>
             </a:r>
-            <a:endParaRPr b="0" lang="en-GB" sz="1100" spc="-1" strike="noStrike">
+            <a:endParaRPr b="0" lang="en-US" sz="1100" spc="-1" strike="noStrike">
               <a:solidFill>
                 <a:srgbClr val="000000"/>
               </a:solidFill>
@@ -1457,7 +1458,7 @@
         <p:spPr>
           <a:xfrm>
             <a:off x="7389360" y="37800"/>
-            <a:ext cx="1418760" cy="350280"/>
+            <a:ext cx="1416960" cy="348480"/>
           </a:xfrm>
           <a:prstGeom prst="rect">
             <a:avLst/>
@@ -1480,7 +1481,7 @@
         <p:spPr>
           <a:xfrm>
             <a:off x="107640" y="58680"/>
-            <a:ext cx="975960" cy="329760"/>
+            <a:ext cx="974160" cy="327960"/>
           </a:xfrm>
           <a:prstGeom prst="rect">
             <a:avLst/>
@@ -1586,7 +1587,7 @@
                 <a:tab algn="l" pos="0"/>
               </a:tabLst>
             </a:pPr>
-            <a:fld id="{67C1345C-63B9-4AC0-80D4-4870391A40ED}" type="slidenum">
+            <a:fld id="{223B15DE-9597-4A2D-876C-909709AF5F6B}" type="slidenum">
               <a:rPr b="0" lang="en-GB" sz="1400" spc="-1" strike="noStrike">
                 <a:solidFill>
                   <a:srgbClr val="000000"/>
@@ -1595,7 +1596,7 @@
               </a:rPr>
               <a:t>&lt;number&gt;</a:t>
             </a:fld>
-            <a:endParaRPr b="0" lang="en-GB" sz="1400" spc="-1" strike="noStrike">
+            <a:endParaRPr b="0" lang="en-US" sz="1400" spc="-1" strike="noStrike">
               <a:solidFill>
                 <a:srgbClr val="000000"/>
               </a:solidFill>
@@ -1636,7 +1637,7 @@
               <a:buNone/>
             </a:pPr>
             <a:r>
-              <a:rPr b="0" lang="en-GB" sz="4400" spc="-1" strike="noStrike">
+              <a:rPr b="0" lang="en-US" sz="4400" spc="-1" strike="noStrike">
                 <a:solidFill>
                   <a:srgbClr val="000000"/>
                 </a:solidFill>
@@ -1644,7 +1645,7 @@
               </a:rPr>
               <a:t>Click to edit the title text format</a:t>
             </a:r>
-            <a:endParaRPr b="0" lang="en-GB" sz="4400" spc="-1" strike="noStrike">
+            <a:endParaRPr b="0" lang="en-US" sz="4400" spc="-1" strike="noStrike">
               <a:solidFill>
                 <a:srgbClr val="000000"/>
               </a:solidFill>
@@ -1693,7 +1694,7 @@
               <a:buChar char=""/>
             </a:pPr>
             <a:r>
-              <a:rPr b="0" lang="en-GB" sz="3200" spc="-1" strike="noStrike">
+              <a:rPr b="0" lang="en-US" sz="3200" spc="-1" strike="noStrike">
                 <a:solidFill>
                   <a:srgbClr val="000000"/>
                 </a:solidFill>
@@ -1701,7 +1702,7 @@
               </a:rPr>
               <a:t>Click to edit the outline text format</a:t>
             </a:r>
-            <a:endParaRPr b="0" lang="en-GB" sz="3200" spc="-1" strike="noStrike">
+            <a:endParaRPr b="0" lang="en-US" sz="3200" spc="-1" strike="noStrike">
               <a:solidFill>
                 <a:srgbClr val="000000"/>
               </a:solidFill>
@@ -1721,7 +1722,7 @@
               <a:buChar char=""/>
             </a:pPr>
             <a:r>
-              <a:rPr b="0" lang="en-GB" sz="2800" spc="-1" strike="noStrike">
+              <a:rPr b="0" lang="en-US" sz="2800" spc="-1" strike="noStrike">
                 <a:solidFill>
                   <a:srgbClr val="000000"/>
                 </a:solidFill>
@@ -1729,7 +1730,7 @@
               </a:rPr>
               <a:t>Second Outline Level</a:t>
             </a:r>
-            <a:endParaRPr b="0" lang="en-GB" sz="2800" spc="-1" strike="noStrike">
+            <a:endParaRPr b="0" lang="en-US" sz="2800" spc="-1" strike="noStrike">
               <a:solidFill>
                 <a:srgbClr val="000000"/>
               </a:solidFill>
@@ -1749,7 +1750,7 @@
               <a:buChar char=""/>
             </a:pPr>
             <a:r>
-              <a:rPr b="0" lang="en-GB" sz="2400" spc="-1" strike="noStrike">
+              <a:rPr b="0" lang="en-US" sz="2400" spc="-1" strike="noStrike">
                 <a:solidFill>
                   <a:srgbClr val="000000"/>
                 </a:solidFill>
@@ -1757,7 +1758,7 @@
               </a:rPr>
               <a:t>Third Outline Level</a:t>
             </a:r>
-            <a:endParaRPr b="0" lang="en-GB" sz="2400" spc="-1" strike="noStrike">
+            <a:endParaRPr b="0" lang="en-US" sz="2400" spc="-1" strike="noStrike">
               <a:solidFill>
                 <a:srgbClr val="000000"/>
               </a:solidFill>
@@ -1777,7 +1778,7 @@
               <a:buChar char=""/>
             </a:pPr>
             <a:r>
-              <a:rPr b="0" lang="en-GB" sz="2000" spc="-1" strike="noStrike">
+              <a:rPr b="0" lang="en-US" sz="2000" spc="-1" strike="noStrike">
                 <a:solidFill>
                   <a:srgbClr val="000000"/>
                 </a:solidFill>
@@ -1785,7 +1786,7 @@
               </a:rPr>
               <a:t>Fourth Outline Level</a:t>
             </a:r>
-            <a:endParaRPr b="0" lang="en-GB" sz="2000" spc="-1" strike="noStrike">
+            <a:endParaRPr b="0" lang="en-US" sz="2000" spc="-1" strike="noStrike">
               <a:solidFill>
                 <a:srgbClr val="000000"/>
               </a:solidFill>
@@ -1805,7 +1806,7 @@
               <a:buChar char=""/>
             </a:pPr>
             <a:r>
-              <a:rPr b="0" lang="en-GB" sz="2000" spc="-1" strike="noStrike">
+              <a:rPr b="0" lang="en-US" sz="2000" spc="-1" strike="noStrike">
                 <a:solidFill>
                   <a:srgbClr val="000000"/>
                 </a:solidFill>
@@ -1813,7 +1814,7 @@
               </a:rPr>
               <a:t>Fifth Outline Level</a:t>
             </a:r>
-            <a:endParaRPr b="0" lang="en-GB" sz="2000" spc="-1" strike="noStrike">
+            <a:endParaRPr b="0" lang="en-US" sz="2000" spc="-1" strike="noStrike">
               <a:solidFill>
                 <a:srgbClr val="000000"/>
               </a:solidFill>
@@ -1833,7 +1834,7 @@
               <a:buChar char=""/>
             </a:pPr>
             <a:r>
-              <a:rPr b="0" lang="en-GB" sz="2000" spc="-1" strike="noStrike">
+              <a:rPr b="0" lang="en-US" sz="2000" spc="-1" strike="noStrike">
                 <a:solidFill>
                   <a:srgbClr val="000000"/>
                 </a:solidFill>
@@ -1841,7 +1842,7 @@
               </a:rPr>
               <a:t>Sixth Outline Level</a:t>
             </a:r>
-            <a:endParaRPr b="0" lang="en-GB" sz="2000" spc="-1" strike="noStrike">
+            <a:endParaRPr b="0" lang="en-US" sz="2000" spc="-1" strike="noStrike">
               <a:solidFill>
                 <a:srgbClr val="000000"/>
               </a:solidFill>
@@ -1861,7 +1862,7 @@
               <a:buChar char=""/>
             </a:pPr>
             <a:r>
-              <a:rPr b="0" lang="en-GB" sz="2000" spc="-1" strike="noStrike">
+              <a:rPr b="0" lang="en-US" sz="2000" spc="-1" strike="noStrike">
                 <a:solidFill>
                   <a:srgbClr val="000000"/>
                 </a:solidFill>
@@ -1869,7 +1870,7 @@
               </a:rPr>
               <a:t>Seventh Outline Level</a:t>
             </a:r>
-            <a:endParaRPr b="0" lang="en-GB" sz="2000" spc="-1" strike="noStrike">
+            <a:endParaRPr b="0" lang="en-US" sz="2000" spc="-1" strike="noStrike">
               <a:solidFill>
                 <a:srgbClr val="000000"/>
               </a:solidFill>
@@ -1962,7 +1963,7 @@
         <p:spPr>
           <a:xfrm>
             <a:off x="7996320" y="6599160"/>
-            <a:ext cx="923040" cy="242280"/>
+            <a:ext cx="921240" cy="242280"/>
           </a:xfrm>
           <a:prstGeom prst="rect">
             <a:avLst/>
@@ -1991,7 +1992,7 @@
                 <a:spcPts val="499"/>
               </a:spcBef>
             </a:pPr>
-            <a:fld id="{1929C6B0-53D7-40A4-9126-E4268CD8E88A}" type="slidenum">
+            <a:fld id="{12B7EC8E-1211-464A-82FD-7F112B629245}" type="slidenum">
               <a:rPr b="1" lang="de-AT" sz="1000" spc="-1" strike="noStrike">
                 <a:solidFill>
                   <a:srgbClr val="7d7d7d"/>
@@ -2001,7 +2002,7 @@
               </a:rPr>
               <a:t>&lt;number&gt;</a:t>
             </a:fld>
-            <a:endParaRPr b="0" lang="en-GB" sz="1000" spc="-1" strike="noStrike">
+            <a:endParaRPr b="0" lang="en-US" sz="1000" spc="-1" strike="noStrike">
               <a:solidFill>
                 <a:srgbClr val="000000"/>
               </a:solidFill>
@@ -2019,7 +2020,7 @@
         <p:spPr>
           <a:xfrm>
             <a:off x="144360" y="6627960"/>
-            <a:ext cx="1880280" cy="213480"/>
+            <a:ext cx="1878480" cy="211680"/>
           </a:xfrm>
           <a:prstGeom prst="rect">
             <a:avLst/>
@@ -2058,7 +2059,7 @@
               </a:rPr>
               <a:t>VECTO Release Notes</a:t>
             </a:r>
-            <a:endParaRPr b="0" lang="en-GB" sz="1100" spc="-1" strike="noStrike">
+            <a:endParaRPr b="0" lang="en-US" sz="1100" spc="-1" strike="noStrike">
               <a:solidFill>
                 <a:srgbClr val="000000"/>
               </a:solidFill>
@@ -2080,7 +2081,7 @@
         <p:spPr>
           <a:xfrm>
             <a:off x="7389360" y="37800"/>
-            <a:ext cx="1418760" cy="350280"/>
+            <a:ext cx="1416960" cy="348480"/>
           </a:xfrm>
           <a:prstGeom prst="rect">
             <a:avLst/>
@@ -2103,7 +2104,7 @@
         <p:spPr>
           <a:xfrm>
             <a:off x="107640" y="58680"/>
-            <a:ext cx="975960" cy="329760"/>
+            <a:ext cx="974160" cy="327960"/>
           </a:xfrm>
           <a:prstGeom prst="rect">
             <a:avLst/>
@@ -2187,7 +2188,7 @@
               <a:buNone/>
             </a:pPr>
             <a:r>
-              <a:rPr b="0" lang="en-GB" sz="4400" spc="-1" strike="noStrike">
+              <a:rPr b="0" lang="en-US" sz="4400" spc="-1" strike="noStrike">
                 <a:solidFill>
                   <a:srgbClr val="000000"/>
                 </a:solidFill>
@@ -2195,7 +2196,7 @@
               </a:rPr>
               <a:t>Click to edit the title text format</a:t>
             </a:r>
-            <a:endParaRPr b="0" lang="en-GB" sz="4400" spc="-1" strike="noStrike">
+            <a:endParaRPr b="0" lang="en-US" sz="4400" spc="-1" strike="noStrike">
               <a:solidFill>
                 <a:srgbClr val="000000"/>
               </a:solidFill>
@@ -2244,7 +2245,7 @@
               <a:buChar char=""/>
             </a:pPr>
             <a:r>
-              <a:rPr b="0" lang="en-GB" sz="3200" spc="-1" strike="noStrike">
+              <a:rPr b="0" lang="en-US" sz="3200" spc="-1" strike="noStrike">
                 <a:solidFill>
                   <a:srgbClr val="000000"/>
                 </a:solidFill>
@@ -2252,7 +2253,7 @@
               </a:rPr>
               <a:t>Click to edit the outline text format</a:t>
             </a:r>
-            <a:endParaRPr b="0" lang="en-GB" sz="3200" spc="-1" strike="noStrike">
+            <a:endParaRPr b="0" lang="en-US" sz="3200" spc="-1" strike="noStrike">
               <a:solidFill>
                 <a:srgbClr val="000000"/>
               </a:solidFill>
@@ -2272,7 +2273,7 @@
               <a:buChar char=""/>
             </a:pPr>
             <a:r>
-              <a:rPr b="0" lang="en-GB" sz="2800" spc="-1" strike="noStrike">
+              <a:rPr b="0" lang="en-US" sz="2800" spc="-1" strike="noStrike">
                 <a:solidFill>
                   <a:srgbClr val="000000"/>
                 </a:solidFill>
@@ -2280,7 +2281,7 @@
               </a:rPr>
               <a:t>Second Outline Level</a:t>
             </a:r>
-            <a:endParaRPr b="0" lang="en-GB" sz="2800" spc="-1" strike="noStrike">
+            <a:endParaRPr b="0" lang="en-US" sz="2800" spc="-1" strike="noStrike">
               <a:solidFill>
                 <a:srgbClr val="000000"/>
               </a:solidFill>
@@ -2300,7 +2301,7 @@
               <a:buChar char=""/>
             </a:pPr>
             <a:r>
-              <a:rPr b="0" lang="en-GB" sz="2400" spc="-1" strike="noStrike">
+              <a:rPr b="0" lang="en-US" sz="2400" spc="-1" strike="noStrike">
                 <a:solidFill>
                   <a:srgbClr val="000000"/>
                 </a:solidFill>
@@ -2308,7 +2309,7 @@
               </a:rPr>
               <a:t>Third Outline Level</a:t>
             </a:r>
-            <a:endParaRPr b="0" lang="en-GB" sz="2400" spc="-1" strike="noStrike">
+            <a:endParaRPr b="0" lang="en-US" sz="2400" spc="-1" strike="noStrike">
               <a:solidFill>
                 <a:srgbClr val="000000"/>
               </a:solidFill>
@@ -2328,7 +2329,7 @@
               <a:buChar char=""/>
             </a:pPr>
             <a:r>
-              <a:rPr b="0" lang="en-GB" sz="2000" spc="-1" strike="noStrike">
+              <a:rPr b="0" lang="en-US" sz="2000" spc="-1" strike="noStrike">
                 <a:solidFill>
                   <a:srgbClr val="000000"/>
                 </a:solidFill>
@@ -2336,7 +2337,7 @@
               </a:rPr>
               <a:t>Fourth Outline Level</a:t>
             </a:r>
-            <a:endParaRPr b="0" lang="en-GB" sz="2000" spc="-1" strike="noStrike">
+            <a:endParaRPr b="0" lang="en-US" sz="2000" spc="-1" strike="noStrike">
               <a:solidFill>
                 <a:srgbClr val="000000"/>
               </a:solidFill>
@@ -2356,7 +2357,7 @@
               <a:buChar char=""/>
             </a:pPr>
             <a:r>
-              <a:rPr b="0" lang="en-GB" sz="2000" spc="-1" strike="noStrike">
+              <a:rPr b="0" lang="en-US" sz="2000" spc="-1" strike="noStrike">
                 <a:solidFill>
                   <a:srgbClr val="000000"/>
                 </a:solidFill>
@@ -2364,7 +2365,7 @@
               </a:rPr>
               <a:t>Fifth Outline Level</a:t>
             </a:r>
-            <a:endParaRPr b="0" lang="en-GB" sz="2000" spc="-1" strike="noStrike">
+            <a:endParaRPr b="0" lang="en-US" sz="2000" spc="-1" strike="noStrike">
               <a:solidFill>
                 <a:srgbClr val="000000"/>
               </a:solidFill>
@@ -2384,7 +2385,7 @@
               <a:buChar char=""/>
             </a:pPr>
             <a:r>
-              <a:rPr b="0" lang="en-GB" sz="2000" spc="-1" strike="noStrike">
+              <a:rPr b="0" lang="en-US" sz="2000" spc="-1" strike="noStrike">
                 <a:solidFill>
                   <a:srgbClr val="000000"/>
                 </a:solidFill>
@@ -2392,7 +2393,7 @@
               </a:rPr>
               <a:t>Sixth Outline Level</a:t>
             </a:r>
-            <a:endParaRPr b="0" lang="en-GB" sz="2000" spc="-1" strike="noStrike">
+            <a:endParaRPr b="0" lang="en-US" sz="2000" spc="-1" strike="noStrike">
               <a:solidFill>
                 <a:srgbClr val="000000"/>
               </a:solidFill>
@@ -2412,7 +2413,7 @@
               <a:buChar char=""/>
             </a:pPr>
             <a:r>
-              <a:rPr b="0" lang="en-GB" sz="2000" spc="-1" strike="noStrike">
+              <a:rPr b="0" lang="en-US" sz="2000" spc="-1" strike="noStrike">
                 <a:solidFill>
                   <a:srgbClr val="000000"/>
                 </a:solidFill>
@@ -2420,7 +2421,7 @@
               </a:rPr>
               <a:t>Seventh Outline Level</a:t>
             </a:r>
-            <a:endParaRPr b="0" lang="en-GB" sz="2000" spc="-1" strike="noStrike">
+            <a:endParaRPr b="0" lang="en-US" sz="2000" spc="-1" strike="noStrike">
               <a:solidFill>
                 <a:srgbClr val="000000"/>
               </a:solidFill>
@@ -2513,7 +2514,7 @@
         <p:spPr>
           <a:xfrm>
             <a:off x="7996320" y="6599160"/>
-            <a:ext cx="923040" cy="242280"/>
+            <a:ext cx="921240" cy="242280"/>
           </a:xfrm>
           <a:prstGeom prst="rect">
             <a:avLst/>
@@ -2542,7 +2543,7 @@
                 <a:spcPts val="499"/>
               </a:spcBef>
             </a:pPr>
-            <a:fld id="{4FDF7032-3CE9-4C0D-A3A7-626EFDB66BDE}" type="slidenum">
+            <a:fld id="{A7029640-FFD1-4A95-9016-73BE269960D3}" type="slidenum">
               <a:rPr b="1" lang="de-AT" sz="1000" spc="-1" strike="noStrike">
                 <a:solidFill>
                   <a:srgbClr val="7d7d7d"/>
@@ -2552,7 +2553,7 @@
               </a:rPr>
               <a:t>&lt;number&gt;</a:t>
             </a:fld>
-            <a:endParaRPr b="0" lang="en-GB" sz="1000" spc="-1" strike="noStrike">
+            <a:endParaRPr b="0" lang="en-US" sz="1000" spc="-1" strike="noStrike">
               <a:solidFill>
                 <a:srgbClr val="000000"/>
               </a:solidFill>
@@ -2570,7 +2571,7 @@
         <p:spPr>
           <a:xfrm>
             <a:off x="144360" y="6627960"/>
-            <a:ext cx="1880280" cy="213480"/>
+            <a:ext cx="1878480" cy="211680"/>
           </a:xfrm>
           <a:prstGeom prst="rect">
             <a:avLst/>
@@ -2609,7 +2610,7 @@
               </a:rPr>
               <a:t>VECTO Release Notes</a:t>
             </a:r>
-            <a:endParaRPr b="0" lang="en-GB" sz="1100" spc="-1" strike="noStrike">
+            <a:endParaRPr b="0" lang="en-US" sz="1100" spc="-1" strike="noStrike">
               <a:solidFill>
                 <a:srgbClr val="000000"/>
               </a:solidFill>
@@ -2631,7 +2632,7 @@
         <p:spPr>
           <a:xfrm>
             <a:off x="7389360" y="37800"/>
-            <a:ext cx="1418760" cy="350280"/>
+            <a:ext cx="1416960" cy="348480"/>
           </a:xfrm>
           <a:prstGeom prst="rect">
             <a:avLst/>
@@ -2654,7 +2655,7 @@
         <p:spPr>
           <a:xfrm>
             <a:off x="107640" y="58680"/>
-            <a:ext cx="975960" cy="329760"/>
+            <a:ext cx="974160" cy="327960"/>
           </a:xfrm>
           <a:prstGeom prst="rect">
             <a:avLst/>
@@ -2738,7 +2739,7 @@
               <a:buNone/>
             </a:pPr>
             <a:r>
-              <a:rPr b="0" lang="en-GB" sz="4400" spc="-1" strike="noStrike">
+              <a:rPr b="0" lang="en-US" sz="4400" spc="-1" strike="noStrike">
                 <a:solidFill>
                   <a:srgbClr val="000000"/>
                 </a:solidFill>
@@ -2746,7 +2747,7 @@
               </a:rPr>
               <a:t>Click to edit the title text format</a:t>
             </a:r>
-            <a:endParaRPr b="0" lang="en-GB" sz="4400" spc="-1" strike="noStrike">
+            <a:endParaRPr b="0" lang="en-US" sz="4400" spc="-1" strike="noStrike">
               <a:solidFill>
                 <a:srgbClr val="000000"/>
               </a:solidFill>
@@ -2795,7 +2796,7 @@
               <a:buChar char=""/>
             </a:pPr>
             <a:r>
-              <a:rPr b="0" lang="en-GB" sz="3200" spc="-1" strike="noStrike">
+              <a:rPr b="0" lang="en-US" sz="3200" spc="-1" strike="noStrike">
                 <a:solidFill>
                   <a:srgbClr val="000000"/>
                 </a:solidFill>
@@ -2803,7 +2804,7 @@
               </a:rPr>
               <a:t>Click to edit the outline text format</a:t>
             </a:r>
-            <a:endParaRPr b="0" lang="en-GB" sz="3200" spc="-1" strike="noStrike">
+            <a:endParaRPr b="0" lang="en-US" sz="3200" spc="-1" strike="noStrike">
               <a:solidFill>
                 <a:srgbClr val="000000"/>
               </a:solidFill>
@@ -2823,7 +2824,7 @@
               <a:buChar char=""/>
             </a:pPr>
             <a:r>
-              <a:rPr b="0" lang="en-GB" sz="2800" spc="-1" strike="noStrike">
+              <a:rPr b="0" lang="en-US" sz="2800" spc="-1" strike="noStrike">
                 <a:solidFill>
                   <a:srgbClr val="000000"/>
                 </a:solidFill>
@@ -2831,7 +2832,7 @@
               </a:rPr>
               <a:t>Second Outline Level</a:t>
             </a:r>
-            <a:endParaRPr b="0" lang="en-GB" sz="2800" spc="-1" strike="noStrike">
+            <a:endParaRPr b="0" lang="en-US" sz="2800" spc="-1" strike="noStrike">
               <a:solidFill>
                 <a:srgbClr val="000000"/>
               </a:solidFill>
@@ -2851,7 +2852,7 @@
               <a:buChar char=""/>
             </a:pPr>
             <a:r>
-              <a:rPr b="0" lang="en-GB" sz="2400" spc="-1" strike="noStrike">
+              <a:rPr b="0" lang="en-US" sz="2400" spc="-1" strike="noStrike">
                 <a:solidFill>
                   <a:srgbClr val="000000"/>
                 </a:solidFill>
@@ -2859,7 +2860,7 @@
               </a:rPr>
               <a:t>Third Outline Level</a:t>
             </a:r>
-            <a:endParaRPr b="0" lang="en-GB" sz="2400" spc="-1" strike="noStrike">
+            <a:endParaRPr b="0" lang="en-US" sz="2400" spc="-1" strike="noStrike">
               <a:solidFill>
                 <a:srgbClr val="000000"/>
               </a:solidFill>
@@ -2879,7 +2880,7 @@
               <a:buChar char=""/>
             </a:pPr>
             <a:r>
-              <a:rPr b="0" lang="en-GB" sz="2000" spc="-1" strike="noStrike">
+              <a:rPr b="0" lang="en-US" sz="2000" spc="-1" strike="noStrike">
                 <a:solidFill>
                   <a:srgbClr val="000000"/>
                 </a:solidFill>
@@ -2887,7 +2888,7 @@
               </a:rPr>
               <a:t>Fourth Outline Level</a:t>
             </a:r>
-            <a:endParaRPr b="0" lang="en-GB" sz="2000" spc="-1" strike="noStrike">
+            <a:endParaRPr b="0" lang="en-US" sz="2000" spc="-1" strike="noStrike">
               <a:solidFill>
                 <a:srgbClr val="000000"/>
               </a:solidFill>
@@ -2907,7 +2908,7 @@
               <a:buChar char=""/>
             </a:pPr>
             <a:r>
-              <a:rPr b="0" lang="en-GB" sz="2000" spc="-1" strike="noStrike">
+              <a:rPr b="0" lang="en-US" sz="2000" spc="-1" strike="noStrike">
                 <a:solidFill>
                   <a:srgbClr val="000000"/>
                 </a:solidFill>
@@ -2915,7 +2916,7 @@
               </a:rPr>
               <a:t>Fifth Outline Level</a:t>
             </a:r>
-            <a:endParaRPr b="0" lang="en-GB" sz="2000" spc="-1" strike="noStrike">
+            <a:endParaRPr b="0" lang="en-US" sz="2000" spc="-1" strike="noStrike">
               <a:solidFill>
                 <a:srgbClr val="000000"/>
               </a:solidFill>
@@ -2935,7 +2936,7 @@
               <a:buChar char=""/>
             </a:pPr>
             <a:r>
-              <a:rPr b="0" lang="en-GB" sz="2000" spc="-1" strike="noStrike">
+              <a:rPr b="0" lang="en-US" sz="2000" spc="-1" strike="noStrike">
                 <a:solidFill>
                   <a:srgbClr val="000000"/>
                 </a:solidFill>
@@ -2943,7 +2944,7 @@
               </a:rPr>
               <a:t>Sixth Outline Level</a:t>
             </a:r>
-            <a:endParaRPr b="0" lang="en-GB" sz="2000" spc="-1" strike="noStrike">
+            <a:endParaRPr b="0" lang="en-US" sz="2000" spc="-1" strike="noStrike">
               <a:solidFill>
                 <a:srgbClr val="000000"/>
               </a:solidFill>
@@ -2963,7 +2964,7 @@
               <a:buChar char=""/>
             </a:pPr>
             <a:r>
-              <a:rPr b="0" lang="en-GB" sz="2000" spc="-1" strike="noStrike">
+              <a:rPr b="0" lang="en-US" sz="2000" spc="-1" strike="noStrike">
                 <a:solidFill>
                   <a:srgbClr val="000000"/>
                 </a:solidFill>
@@ -2971,7 +2972,7 @@
               </a:rPr>
               <a:t>Seventh Outline Level</a:t>
             </a:r>
-            <a:endParaRPr b="0" lang="en-GB" sz="2000" spc="-1" strike="noStrike">
+            <a:endParaRPr b="0" lang="en-US" sz="2000" spc="-1" strike="noStrike">
               <a:solidFill>
                 <a:srgbClr val="000000"/>
               </a:solidFill>
@@ -3015,7 +3016,7 @@
         <p:spPr>
           <a:xfrm>
             <a:off x="539640" y="1052640"/>
-            <a:ext cx="8133840" cy="3945600"/>
+            <a:ext cx="8132040" cy="3945600"/>
           </a:xfrm>
           <a:prstGeom prst="rect">
             <a:avLst/>
@@ -3054,7 +3055,7 @@
               </a:rPr>
               <a:t>VECTO 4.x </a:t>
             </a:r>
-            <a:endParaRPr b="0" lang="en-GB" sz="3200" spc="-1" strike="noStrike">
+            <a:endParaRPr b="0" lang="en-US" sz="3200" spc="-1" strike="noStrike">
               <a:solidFill>
                 <a:srgbClr val="000000"/>
               </a:solidFill>
@@ -3070,7 +3071,7 @@
                 <a:spcPts val="1001"/>
               </a:spcBef>
             </a:pPr>
-            <a:endParaRPr b="0" lang="en-GB" sz="2000" spc="-1" strike="noStrike">
+            <a:endParaRPr b="0" lang="en-US" sz="2000" spc="-1" strike="noStrike">
               <a:solidFill>
                 <a:srgbClr val="000000"/>
               </a:solidFill>
@@ -3086,7 +3087,7 @@
                 <a:spcPts val="1001"/>
               </a:spcBef>
             </a:pPr>
-            <a:endParaRPr b="0" lang="en-GB" sz="2000" spc="-1" strike="noStrike">
+            <a:endParaRPr b="0" lang="en-US" sz="2000" spc="-1" strike="noStrike">
               <a:solidFill>
                 <a:srgbClr val="000000"/>
               </a:solidFill>
@@ -3102,7 +3103,7 @@
                 <a:spcPts val="1001"/>
               </a:spcBef>
             </a:pPr>
-            <a:endParaRPr b="0" lang="en-GB" sz="2000" spc="-1" strike="noStrike">
+            <a:endParaRPr b="0" lang="en-US" sz="2000" spc="-1" strike="noStrike">
               <a:solidFill>
                 <a:srgbClr val="000000"/>
               </a:solidFill>
@@ -3118,7 +3119,7 @@
                 <a:spcPts val="1199"/>
               </a:spcBef>
             </a:pPr>
-            <a:endParaRPr b="0" lang="en-GB" sz="2400" spc="-1" strike="noStrike">
+            <a:endParaRPr b="0" lang="en-US" sz="2400" spc="-1" strike="noStrike">
               <a:solidFill>
                 <a:srgbClr val="000000"/>
               </a:solidFill>
@@ -3134,7 +3135,7 @@
                 <a:spcPts val="1199"/>
               </a:spcBef>
             </a:pPr>
-            <a:endParaRPr b="0" lang="en-GB" sz="2400" spc="-1" strike="noStrike">
+            <a:endParaRPr b="0" lang="en-US" sz="2400" spc="-1" strike="noStrike">
               <a:solidFill>
                 <a:srgbClr val="000000"/>
               </a:solidFill>
@@ -3150,7 +3151,7 @@
                 <a:spcPts val="1199"/>
               </a:spcBef>
             </a:pPr>
-            <a:endParaRPr b="0" lang="en-GB" sz="2400" spc="-1" strike="noStrike">
+            <a:endParaRPr b="0" lang="en-US" sz="2400" spc="-1" strike="noStrike">
               <a:solidFill>
                 <a:srgbClr val="000000"/>
               </a:solidFill>
@@ -3176,7 +3177,7 @@
               </a:rPr>
               <a:t>Release Notes</a:t>
             </a:r>
-            <a:endParaRPr b="0" lang="en-GB" sz="2400" spc="-1" strike="noStrike">
+            <a:endParaRPr b="0" lang="en-US" sz="2400" spc="-1" strike="noStrike">
               <a:solidFill>
                 <a:srgbClr val="000000"/>
               </a:solidFill>
@@ -3198,7 +3199,7 @@
         <p:spPr>
           <a:xfrm>
             <a:off x="2483640" y="2421000"/>
-            <a:ext cx="4173840" cy="1625040"/>
+            <a:ext cx="4172040" cy="1623240"/>
           </a:xfrm>
           <a:prstGeom prst="rect">
             <a:avLst/>
@@ -3251,7 +3252,7 @@
         <p:spPr>
           <a:xfrm>
             <a:off x="468360" y="476640"/>
-            <a:ext cx="8215920" cy="678600"/>
+            <a:ext cx="8214120" cy="676800"/>
           </a:xfrm>
           <a:prstGeom prst="rect">
             <a:avLst/>
@@ -3283,7 +3284,7 @@
                 <a:latin typeface="Arial"/>
                 <a:ea typeface="DejaVu Sans"/>
               </a:rPr>
-              <a:t>Vecto 4.0.1.3217 OFFICIAL RELEASE</a:t>
+              <a:t>Vecto 4.0.2.3273 OFFICIAL RELEASE</a:t>
             </a:r>
             <a:br>
               <a:rPr sz="2400"/>
@@ -3296,9 +3297,9 @@
                 <a:latin typeface="Arial"/>
                 <a:ea typeface="DejaVu Sans"/>
               </a:rPr>
-              <a:t>23.10.2023</a:t>
-            </a:r>
-            <a:endParaRPr b="0" lang="en-GB" sz="1600" spc="-1" strike="noStrike">
+              <a:t>18.12.2023</a:t>
+            </a:r>
+            <a:endParaRPr b="0" lang="en-US" sz="1600" spc="-1" strike="noStrike">
               <a:solidFill>
                 <a:srgbClr val="000000"/>
               </a:solidFill>
@@ -3320,7 +3321,7 @@
         <p:spPr>
           <a:xfrm>
             <a:off x="323640" y="1268640"/>
-            <a:ext cx="8494560" cy="4821840"/>
+            <a:ext cx="8492760" cy="4820040"/>
           </a:xfrm>
           <a:prstGeom prst="rect">
             <a:avLst/>
@@ -3359,9 +3360,9 @@
                 <a:latin typeface="Arial"/>
                 <a:ea typeface="DejaVu Sans"/>
               </a:rPr>
-              <a:t>Improvements</a:t>
-            </a:r>
-            <a:endParaRPr b="0" lang="en-GB" sz="1600" spc="-1" strike="noStrike">
+              <a:t>Bugfixes (2/2)</a:t>
+            </a:r>
+            <a:endParaRPr b="0" lang="en-US" sz="1600" spc="-1" strike="noStrike">
               <a:solidFill>
                 <a:srgbClr val="000000"/>
               </a:solidFill>
@@ -3386,24 +3387,24 @@
               </a:tabLst>
             </a:pPr>
             <a:r>
-              <a:rPr b="0" lang="en-US" sz="1400" spc="-1" strike="noStrike">
-                <a:solidFill>
-                  <a:srgbClr val="000000"/>
-                </a:solidFill>
-                <a:latin typeface="Arial"/>
-                <a:ea typeface="DejaVu Sans"/>
-              </a:rPr>
-              <a:t>VTP mode: create zip archive for input and output files</a:t>
-            </a:r>
-            <a:endParaRPr b="0" lang="en-GB" sz="1400" spc="-1" strike="noStrike">
-              <a:solidFill>
-                <a:srgbClr val="000000"/>
-              </a:solidFill>
-              <a:latin typeface="Arial"/>
-            </a:endParaRPr>
-          </a:p>
-          <a:p>
-            <a:pPr marL="343080" indent="-343080" defTabSz="914400">
+              <a:rPr b="0" lang="en-US" sz="1200" spc="-1" strike="noStrike">
+                <a:solidFill>
+                  <a:srgbClr val="000000"/>
+                </a:solidFill>
+                <a:latin typeface="Arial"/>
+                <a:ea typeface="DejaVu Sans"/>
+              </a:rPr>
+              <a:t>CodeEU-249: Fix handling gear torque limits in case of IEPC WheelHub motor and only one side is measured</a:t>
+            </a:r>
+            <a:endParaRPr b="0" lang="en-US" sz="1200" spc="-1" strike="noStrike">
+              <a:solidFill>
+                <a:srgbClr val="000000"/>
+              </a:solidFill>
+              <a:latin typeface="Arial"/>
+            </a:endParaRPr>
+          </a:p>
+          <a:p>
+            <a:pPr lvl="1" marL="800280" indent="-343080" defTabSz="914400">
               <a:lnSpc>
                 <a:spcPct val="100000"/>
               </a:lnSpc>
@@ -3420,16 +3421,16 @@
               </a:tabLst>
             </a:pPr>
             <a:r>
-              <a:rPr b="1" lang="en-US" sz="1600" spc="-1" strike="noStrike">
-                <a:solidFill>
-                  <a:srgbClr val="000000"/>
-                </a:solidFill>
-                <a:latin typeface="Arial"/>
-                <a:ea typeface="DejaVu Sans"/>
-              </a:rPr>
-              <a:t>- Bugfixes</a:t>
-            </a:r>
-            <a:endParaRPr b="0" lang="en-GB" sz="1600" spc="-1" strike="noStrike">
+              <a:rPr b="0" lang="en-US" sz="1200" spc="-1" strike="noStrike">
+                <a:solidFill>
+                  <a:srgbClr val="000000"/>
+                </a:solidFill>
+                <a:latin typeface="Arial"/>
+                <a:ea typeface="DejaVu Sans"/>
+              </a:rPr>
+              <a:t>CodeEU-250: Maximum vehicle speed exceeded during pre-processing</a:t>
+            </a:r>
+            <a:endParaRPr b="0" lang="en-US" sz="1200" spc="-1" strike="noStrike">
               <a:solidFill>
                 <a:srgbClr val="000000"/>
               </a:solidFill>
@@ -3454,16 +3455,16 @@
               </a:tabLst>
             </a:pPr>
             <a:r>
-              <a:rPr b="0" lang="en-US" sz="1400" spc="-1" strike="noStrike">
-                <a:solidFill>
-                  <a:srgbClr val="000000"/>
-                </a:solidFill>
-                <a:latin typeface="Arial"/>
-                <a:ea typeface="DejaVu Sans"/>
-              </a:rPr>
-              <a:t>bugfix in CIF for complete(d) buses - do not write PrimaryVehicleSubgroup element</a:t>
-            </a:r>
-            <a:endParaRPr b="0" lang="en-GB" sz="1400" spc="-1" strike="noStrike">
+              <a:rPr b="0" lang="en-US" sz="1200" spc="-1" strike="noStrike">
+                <a:solidFill>
+                  <a:srgbClr val="000000"/>
+                </a:solidFill>
+                <a:latin typeface="Arial"/>
+                <a:ea typeface="DejaVu Sans"/>
+              </a:rPr>
+              <a:t>CodeEU-253: Replace VTP HeavyBus in Generic Vehicles with VTP Truck</a:t>
+            </a:r>
+            <a:endParaRPr b="0" lang="en-US" sz="1200" spc="-1" strike="noStrike">
               <a:solidFill>
                 <a:srgbClr val="000000"/>
               </a:solidFill>
@@ -3488,16 +3489,16 @@
               </a:tabLst>
             </a:pPr>
             <a:r>
-              <a:rPr b="0" lang="en-US" sz="1400" spc="-1" strike="noStrike">
-                <a:solidFill>
-                  <a:srgbClr val="000000"/>
-                </a:solidFill>
-                <a:latin typeface="Arial"/>
-                <a:ea typeface="DejaVu Sans"/>
-              </a:rPr>
-              <a:t>fix hybrid strategy: power comparison</a:t>
-            </a:r>
-            <a:endParaRPr b="0" lang="en-GB" sz="1400" spc="-1" strike="noStrike">
+              <a:rPr b="0" lang="en-US" sz="1200" spc="-1" strike="noStrike">
+                <a:solidFill>
+                  <a:srgbClr val="000000"/>
+                </a:solidFill>
+                <a:latin typeface="Arial"/>
+                <a:ea typeface="DejaVu Sans"/>
+              </a:rPr>
+              <a:t>CodeEU-259: Inconsistent calculation of AverageRRC in CIF</a:t>
+            </a:r>
+            <a:endParaRPr b="0" lang="en-US" sz="1200" spc="-1" strike="noStrike">
               <a:solidFill>
                 <a:srgbClr val="000000"/>
               </a:solidFill>
@@ -3522,16 +3523,16 @@
               </a:tabLst>
             </a:pPr>
             <a:r>
-              <a:rPr b="0" lang="en-US" sz="1400" spc="-1" strike="noStrike">
-                <a:solidFill>
-                  <a:srgbClr val="000000"/>
-                </a:solidFill>
-                <a:latin typeface="Arial"/>
-                <a:ea typeface="DejaVu Sans"/>
-              </a:rPr>
-              <a:t>fix exempted vehicles do not work (error message that XML version is not supported)</a:t>
-            </a:r>
-            <a:endParaRPr b="0" lang="en-GB" sz="1400" spc="-1" strike="noStrike">
+              <a:rPr b="0" lang="en-US" sz="1200" spc="-1" strike="noStrike">
+                <a:solidFill>
+                  <a:srgbClr val="000000"/>
+                </a:solidFill>
+                <a:latin typeface="Arial"/>
+                <a:ea typeface="DejaVu Sans"/>
+              </a:rPr>
+              <a:t>CodeEU-260: Handling of overload buffer in case Continuous Torque is 0Nm</a:t>
+            </a:r>
+            <a:endParaRPr b="0" lang="en-US" sz="1200" spc="-1" strike="noStrike">
               <a:solidFill>
                 <a:srgbClr val="000000"/>
               </a:solidFill>
@@ -3556,16 +3557,16 @@
               </a:tabLst>
             </a:pPr>
             <a:r>
-              <a:rPr b="0" lang="en-US" sz="1400" spc="-1" strike="noStrike">
-                <a:solidFill>
-                  <a:srgbClr val="000000"/>
-                </a:solidFill>
-                <a:latin typeface="Arial"/>
-                <a:ea typeface="DejaVu Sans"/>
-              </a:rPr>
-              <a:t>bugfix in XML schema: remove wrong PS technology entry for lorries</a:t>
-            </a:r>
-            <a:endParaRPr b="0" lang="en-GB" sz="1400" spc="-1" strike="noStrike">
+              <a:rPr b="0" lang="en-US" sz="1200" spc="-1" strike="noStrike">
+                <a:solidFill>
+                  <a:srgbClr val="000000"/>
+                </a:solidFill>
+                <a:latin typeface="Arial"/>
+                <a:ea typeface="DejaVu Sans"/>
+              </a:rPr>
+              <a:t>CodeEU-261: SuperCap internal resistance standard values correction</a:t>
+            </a:r>
+            <a:endParaRPr b="0" lang="en-US" sz="1200" spc="-1" strike="noStrike">
               <a:solidFill>
                 <a:srgbClr val="000000"/>
               </a:solidFill>
@@ -3590,16 +3591,50 @@
               </a:tabLst>
             </a:pPr>
             <a:r>
-              <a:rPr b="0" lang="en-US" sz="1400" spc="-1" strike="noStrike">
-                <a:solidFill>
-                  <a:srgbClr val="000000"/>
-                </a:solidFill>
-                <a:latin typeface="Arial"/>
-                <a:ea typeface="DejaVu Sans"/>
-              </a:rPr>
-              <a:t>bugfix for conditioning power demand for IHPC vehicles</a:t>
-            </a:r>
-            <a:endParaRPr b="0" lang="en-GB" sz="1400" spc="-1" strike="noStrike">
+              <a:rPr b="0" lang="en-US" sz="1200" spc="-1" strike="noStrike">
+                <a:solidFill>
+                  <a:srgbClr val="000000"/>
+                </a:solidFill>
+                <a:latin typeface="Arial"/>
+                <a:ea typeface="DejaVu Sans"/>
+              </a:rPr>
+              <a:t>CodeEU-263: Determination of rated power for IEPCs for MRF and CIF</a:t>
+            </a:r>
+            <a:endParaRPr b="0" lang="en-US" sz="1200" spc="-1" strike="noStrike">
+              <a:solidFill>
+                <a:srgbClr val="000000"/>
+              </a:solidFill>
+              <a:latin typeface="Arial"/>
+            </a:endParaRPr>
+          </a:p>
+          <a:p>
+            <a:pPr lvl="1" marL="800280" indent="-343080" defTabSz="914400">
+              <a:lnSpc>
+                <a:spcPct val="100000"/>
+              </a:lnSpc>
+              <a:spcBef>
+                <a:spcPts val="320"/>
+              </a:spcBef>
+              <a:buClr>
+                <a:srgbClr val="000000"/>
+              </a:buClr>
+              <a:buFont typeface="Symbol"/>
+              <a:buChar char=""/>
+              <a:tabLst>
+                <a:tab algn="l" pos="1886040"/>
+              </a:tabLst>
+            </a:pPr>
+            <a:r>
+              <a:rPr b="0" lang="en-US" sz="1200" spc="-1" strike="noStrike">
+                <a:solidFill>
+                  <a:srgbClr val="000000"/>
+                </a:solidFill>
+                <a:latin typeface="Arial"/>
+                <a:ea typeface="DejaVu Sans"/>
+              </a:rPr>
+              <a:t>CodeEU-266: Fix Measured Speed Testcases</a:t>
+            </a:r>
+            <a:endParaRPr b="0" lang="en-US" sz="1200" spc="-1" strike="noStrike">
               <a:solidFill>
                 <a:srgbClr val="000000"/>
               </a:solidFill>
@@ -3611,12 +3646,15 @@
               <a:lnSpc>
                 <a:spcPct val="100000"/>
               </a:lnSpc>
+              <a:spcBef>
+                <a:spcPts val="281"/>
+              </a:spcBef>
               <a:buNone/>
               <a:tabLst>
                 <a:tab algn="l" pos="0"/>
               </a:tabLst>
             </a:pPr>
-            <a:endParaRPr b="0" lang="en-GB" sz="1400" spc="-1" strike="noStrike">
+            <a:endParaRPr b="0" lang="en-US" sz="1200" spc="-1" strike="noStrike">
               <a:solidFill>
                 <a:srgbClr val="000000"/>
               </a:solidFill>
@@ -3628,15 +3666,12 @@
               <a:lnSpc>
                 <a:spcPct val="100000"/>
               </a:lnSpc>
-              <a:spcBef>
-                <a:spcPts val="281"/>
-              </a:spcBef>
               <a:buNone/>
               <a:tabLst>
                 <a:tab algn="l" pos="0"/>
               </a:tabLst>
             </a:pPr>
-            <a:endParaRPr b="0" lang="en-GB" sz="1400" spc="-1" strike="noStrike">
+            <a:endParaRPr b="0" lang="en-US" sz="1400" spc="-1" strike="noStrike">
               <a:solidFill>
                 <a:srgbClr val="000000"/>
               </a:solidFill>
@@ -3653,24 +3688,7 @@
                 <a:tab algn="l" pos="0"/>
               </a:tabLst>
             </a:pPr>
-            <a:endParaRPr b="0" lang="en-GB" sz="1400" spc="-1" strike="noStrike">
-              <a:solidFill>
-                <a:srgbClr val="000000"/>
-              </a:solidFill>
-              <a:latin typeface="Arial"/>
-            </a:endParaRPr>
-          </a:p>
-          <a:p>
-            <a:pPr indent="0" defTabSz="914400">
-              <a:lnSpc>
-                <a:spcPct val="100000"/>
-              </a:lnSpc>
-              <a:buNone/>
-              <a:tabLst>
-                <a:tab algn="l" pos="0"/>
-              </a:tabLst>
-            </a:pPr>
-            <a:endParaRPr b="0" lang="en-GB" sz="1400" spc="-1" strike="noStrike">
+            <a:endParaRPr b="0" lang="en-US" sz="1400" spc="-1" strike="noStrike">
               <a:solidFill>
                 <a:srgbClr val="000000"/>
               </a:solidFill>
@@ -3711,14 +3729,18 @@
       </p:grpSpPr>
       <p:sp>
         <p:nvSpPr>
-          <p:cNvPr id="61" name="Text Box 94"/>
-          <p:cNvSpPr/>
-          <p:nvPr/>
+          <p:cNvPr id="61" name="PlaceHolder 1"/>
+          <p:cNvSpPr>
+            <a:spLocks noGrp="1"/>
+          </p:cNvSpPr>
+          <p:nvPr>
+            <p:ph type="title"/>
+          </p:nvPr>
         </p:nvSpPr>
         <p:spPr>
           <a:xfrm>
-            <a:off x="539640" y="1052640"/>
-            <a:ext cx="8133840" cy="3945600"/>
+            <a:off x="468360" y="476640"/>
+            <a:ext cx="8214120" cy="676800"/>
           </a:xfrm>
           <a:prstGeom prst="rect">
             <a:avLst/>
@@ -3728,168 +3750,44 @@
             <a:noFill/>
           </a:ln>
         </p:spPr>
-        <p:style>
-          <a:lnRef idx="0"/>
-          <a:fillRef idx="0"/>
-          <a:effectRef idx="0"/>
-          <a:fontRef idx="minor"/>
-        </p:style>
         <p:txBody>
-          <a:bodyPr lIns="90000" rIns="90000" tIns="45000" bIns="45000" anchor="t">
-            <a:spAutoFit/>
+          <a:bodyPr numCol="1" spcCol="0" lIns="90000" rIns="90000" tIns="45000" bIns="45000" anchor="ctr">
+            <a:noAutofit/>
           </a:bodyPr>
           <a:p>
-            <a:pPr algn="ctr" defTabSz="914400">
-              <a:lnSpc>
-                <a:spcPct val="100000"/>
-              </a:lnSpc>
-              <a:spcBef>
-                <a:spcPts val="1599"/>
-              </a:spcBef>
-            </a:pPr>
-            <a:r>
-              <a:rPr b="1" lang="en-US" sz="3200" spc="-1" strike="noStrike">
+            <a:pPr indent="0" algn="ctr" defTabSz="914400">
+              <a:lnSpc>
+                <a:spcPct val="100000"/>
+              </a:lnSpc>
+              <a:buNone/>
+              <a:tabLst>
+                <a:tab algn="l" pos="0"/>
+              </a:tabLst>
+            </a:pPr>
+            <a:r>
+              <a:rPr b="1" lang="en-US" sz="2400" spc="-1" strike="noStrike">
                 <a:solidFill>
                   <a:srgbClr val="990000"/>
                 </a:solidFill>
                 <a:latin typeface="Arial"/>
                 <a:ea typeface="DejaVu Sans"/>
               </a:rPr>
-              <a:t>VECTO 4.0.0.3210 </a:t>
-            </a:r>
-            <a:endParaRPr b="0" lang="en-GB" sz="3200" spc="-1" strike="noStrike">
-              <a:solidFill>
-                <a:srgbClr val="000000"/>
-              </a:solidFill>
-              <a:latin typeface="Arial"/>
-            </a:endParaRPr>
-          </a:p>
-          <a:p>
-            <a:pPr algn="ctr" defTabSz="914400">
-              <a:lnSpc>
-                <a:spcPct val="100000"/>
-              </a:lnSpc>
-              <a:spcBef>
-                <a:spcPts val="1001"/>
-              </a:spcBef>
-            </a:pPr>
-            <a:r>
-              <a:rPr b="1" lang="en-US" sz="2000" spc="-1" strike="noStrike">
+              <a:t>Vecto 4.0.1.3217 OFFICIAL RELEASE</a:t>
+            </a:r>
+            <a:br>
+              <a:rPr sz="2400"/>
+            </a:br>
+            <a:r>
+              <a:rPr b="1" lang="en-US" sz="1600" spc="-1" strike="noStrike">
                 <a:solidFill>
                   <a:srgbClr val="990000"/>
                 </a:solidFill>
                 <a:latin typeface="Arial"/>
                 <a:ea typeface="DejaVu Sans"/>
               </a:rPr>
-              <a:t>16.10.2023</a:t>
-            </a:r>
-            <a:endParaRPr b="0" lang="en-GB" sz="2000" spc="-1" strike="noStrike">
-              <a:solidFill>
-                <a:srgbClr val="000000"/>
-              </a:solidFill>
-              <a:latin typeface="Arial"/>
-            </a:endParaRPr>
-          </a:p>
-          <a:p>
-            <a:pPr algn="ctr" defTabSz="914400">
-              <a:lnSpc>
-                <a:spcPct val="100000"/>
-              </a:lnSpc>
-              <a:spcBef>
-                <a:spcPts val="1001"/>
-              </a:spcBef>
-            </a:pPr>
-            <a:endParaRPr b="0" lang="en-GB" sz="2000" spc="-1" strike="noStrike">
-              <a:solidFill>
-                <a:srgbClr val="000000"/>
-              </a:solidFill>
-              <a:latin typeface="Arial"/>
-            </a:endParaRPr>
-          </a:p>
-          <a:p>
-            <a:pPr algn="ctr" defTabSz="914400">
-              <a:lnSpc>
-                <a:spcPct val="100000"/>
-              </a:lnSpc>
-              <a:spcBef>
-                <a:spcPts val="1001"/>
-              </a:spcBef>
-            </a:pPr>
-            <a:endParaRPr b="0" lang="en-GB" sz="2000" spc="-1" strike="noStrike">
-              <a:solidFill>
-                <a:srgbClr val="000000"/>
-              </a:solidFill>
-              <a:latin typeface="Arial"/>
-            </a:endParaRPr>
-          </a:p>
-          <a:p>
-            <a:pPr algn="ctr" defTabSz="914400">
-              <a:lnSpc>
-                <a:spcPct val="100000"/>
-              </a:lnSpc>
-              <a:spcBef>
-                <a:spcPts val="1199"/>
-              </a:spcBef>
-            </a:pPr>
-            <a:endParaRPr b="0" lang="en-GB" sz="2400" spc="-1" strike="noStrike">
-              <a:solidFill>
-                <a:srgbClr val="000000"/>
-              </a:solidFill>
-              <a:latin typeface="Arial"/>
-            </a:endParaRPr>
-          </a:p>
-          <a:p>
-            <a:pPr algn="ctr" defTabSz="914400">
-              <a:lnSpc>
-                <a:spcPct val="100000"/>
-              </a:lnSpc>
-              <a:spcBef>
-                <a:spcPts val="1199"/>
-              </a:spcBef>
-            </a:pPr>
-            <a:endParaRPr b="0" lang="en-GB" sz="2400" spc="-1" strike="noStrike">
-              <a:solidFill>
-                <a:srgbClr val="000000"/>
-              </a:solidFill>
-              <a:latin typeface="Arial"/>
-            </a:endParaRPr>
-          </a:p>
-          <a:p>
-            <a:pPr algn="ctr" defTabSz="914400">
-              <a:lnSpc>
-                <a:spcPct val="100000"/>
-              </a:lnSpc>
-              <a:spcBef>
-                <a:spcPts val="1199"/>
-              </a:spcBef>
-            </a:pPr>
-            <a:endParaRPr b="0" lang="en-GB" sz="2400" spc="-1" strike="noStrike">
-              <a:solidFill>
-                <a:srgbClr val="000000"/>
-              </a:solidFill>
-              <a:latin typeface="Arial"/>
-            </a:endParaRPr>
-          </a:p>
-          <a:p>
-            <a:pPr algn="ctr" defTabSz="914400">
-              <a:lnSpc>
-                <a:spcPct val="100000"/>
-              </a:lnSpc>
-              <a:spcBef>
-                <a:spcPts val="1199"/>
-              </a:spcBef>
-            </a:pPr>
-            <a:r>
-              <a:rPr b="1" lang="en-US" sz="2400" spc="-1" strike="noStrike">
-                <a:solidFill>
-                  <a:srgbClr val="990000"/>
-                </a:solidFill>
-                <a:latin typeface="Arial"/>
-                <a:ea typeface="DejaVu Sans"/>
-              </a:rPr>
-              <a:t>Release Notes</a:t>
-            </a:r>
-            <a:endParaRPr b="0" lang="en-GB" sz="2400" spc="-1" strike="noStrike">
+              <a:t>23.10.2023</a:t>
+            </a:r>
+            <a:endParaRPr b="0" lang="en-US" sz="1600" spc="-1" strike="noStrike">
               <a:solidFill>
                 <a:srgbClr val="000000"/>
               </a:solidFill>
@@ -3898,29 +3796,378 @@
           </a:p>
         </p:txBody>
       </p:sp>
-      <p:pic>
-        <p:nvPicPr>
-          <p:cNvPr id="62" name="Picture 2" descr=""/>
-          <p:cNvPicPr/>
-          <p:nvPr/>
-        </p:nvPicPr>
-        <p:blipFill>
-          <a:blip r:embed="rId1"/>
-          <a:stretch/>
-        </p:blipFill>
+      <p:sp>
+        <p:nvSpPr>
+          <p:cNvPr id="62" name="PlaceHolder 2"/>
+          <p:cNvSpPr>
+            <a:spLocks noGrp="1"/>
+          </p:cNvSpPr>
+          <p:nvPr>
+            <p:ph/>
+          </p:nvPr>
+        </p:nvSpPr>
         <p:spPr>
           <a:xfrm>
-            <a:off x="2483640" y="2421000"/>
-            <a:ext cx="4173840" cy="1625040"/>
+            <a:off x="323640" y="1268640"/>
+            <a:ext cx="8492760" cy="4820040"/>
           </a:xfrm>
           <a:prstGeom prst="rect">
             <a:avLst/>
           </a:prstGeom>
+          <a:noFill/>
           <a:ln w="0">
             <a:noFill/>
           </a:ln>
         </p:spPr>
-      </p:pic>
+        <p:txBody>
+          <a:bodyPr numCol="1" spcCol="0" lIns="90000" rIns="90000" tIns="45000" bIns="45000" anchor="t">
+            <a:noAutofit/>
+          </a:bodyPr>
+          <a:p>
+            <a:pPr marL="343080" indent="-343080" defTabSz="914400">
+              <a:lnSpc>
+                <a:spcPct val="100000"/>
+              </a:lnSpc>
+              <a:spcBef>
+                <a:spcPts val="320"/>
+              </a:spcBef>
+              <a:buClr>
+                <a:srgbClr val="000000"/>
+              </a:buClr>
+              <a:buFont typeface="Symbol"/>
+              <a:buChar char=""/>
+              <a:tabLst>
+                <a:tab algn="l" pos="1886040"/>
+              </a:tabLst>
+            </a:pPr>
+            <a:r>
+              <a:rPr b="1" lang="en-US" sz="1600" spc="-1" strike="noStrike">
+                <a:solidFill>
+                  <a:srgbClr val="000000"/>
+                </a:solidFill>
+                <a:latin typeface="Arial"/>
+                <a:ea typeface="DejaVu Sans"/>
+              </a:rPr>
+              <a:t>Improvements</a:t>
+            </a:r>
+            <a:endParaRPr b="0" lang="en-US" sz="1600" spc="-1" strike="noStrike">
+              <a:solidFill>
+                <a:srgbClr val="000000"/>
+              </a:solidFill>
+              <a:latin typeface="Arial"/>
+            </a:endParaRPr>
+          </a:p>
+          <a:p>
+            <a:pPr lvl="1" marL="800280" indent="-343080" defTabSz="914400">
+              <a:lnSpc>
+                <a:spcPct val="100000"/>
+              </a:lnSpc>
+              <a:spcBef>
+                <a:spcPts val="320"/>
+              </a:spcBef>
+              <a:buClr>
+                <a:srgbClr val="000000"/>
+              </a:buClr>
+              <a:buFont typeface="Symbol"/>
+              <a:buChar char=""/>
+              <a:tabLst>
+                <a:tab algn="l" pos="1886040"/>
+              </a:tabLst>
+            </a:pPr>
+            <a:r>
+              <a:rPr b="0" lang="en-US" sz="1400" spc="-1" strike="noStrike">
+                <a:solidFill>
+                  <a:srgbClr val="000000"/>
+                </a:solidFill>
+                <a:latin typeface="Arial"/>
+                <a:ea typeface="DejaVu Sans"/>
+              </a:rPr>
+              <a:t>VTP mode: create zip archive for input and output files</a:t>
+            </a:r>
+            <a:endParaRPr b="0" lang="en-US" sz="1400" spc="-1" strike="noStrike">
+              <a:solidFill>
+                <a:srgbClr val="000000"/>
+              </a:solidFill>
+              <a:latin typeface="Arial"/>
+            </a:endParaRPr>
+          </a:p>
+          <a:p>
+            <a:pPr marL="343080" indent="-343080" defTabSz="914400">
+              <a:lnSpc>
+                <a:spcPct val="100000"/>
+              </a:lnSpc>
+              <a:spcBef>
+                <a:spcPts val="320"/>
+              </a:spcBef>
+              <a:buClr>
+                <a:srgbClr val="000000"/>
+              </a:buClr>
+              <a:buFont typeface="Symbol"/>
+              <a:buChar char=""/>
+              <a:tabLst>
+                <a:tab algn="l" pos="1886040"/>
+              </a:tabLst>
+            </a:pPr>
+            <a:r>
+              <a:rPr b="1" lang="en-US" sz="1600" spc="-1" strike="noStrike">
+                <a:solidFill>
+                  <a:srgbClr val="000000"/>
+                </a:solidFill>
+                <a:latin typeface="Arial"/>
+                <a:ea typeface="DejaVu Sans"/>
+              </a:rPr>
+              <a:t>- Bugfixes</a:t>
+            </a:r>
+            <a:endParaRPr b="0" lang="en-US" sz="1600" spc="-1" strike="noStrike">
+              <a:solidFill>
+                <a:srgbClr val="000000"/>
+              </a:solidFill>
+              <a:latin typeface="Arial"/>
+            </a:endParaRPr>
+          </a:p>
+          <a:p>
+            <a:pPr lvl="1" marL="800280" indent="-343080" defTabSz="914400">
+              <a:lnSpc>
+                <a:spcPct val="100000"/>
+              </a:lnSpc>
+              <a:spcBef>
+                <a:spcPts val="320"/>
+              </a:spcBef>
+              <a:buClr>
+                <a:srgbClr val="000000"/>
+              </a:buClr>
+              <a:buFont typeface="Symbol"/>
+              <a:buChar char=""/>
+              <a:tabLst>
+                <a:tab algn="l" pos="1886040"/>
+              </a:tabLst>
+            </a:pPr>
+            <a:r>
+              <a:rPr b="0" lang="en-US" sz="1400" spc="-1" strike="noStrike">
+                <a:solidFill>
+                  <a:srgbClr val="000000"/>
+                </a:solidFill>
+                <a:latin typeface="Arial"/>
+                <a:ea typeface="DejaVu Sans"/>
+              </a:rPr>
+              <a:t>bugfix in CIF for complete(d) buses - do not write PrimaryVehicleSubgroup element</a:t>
+            </a:r>
+            <a:endParaRPr b="0" lang="en-US" sz="1400" spc="-1" strike="noStrike">
+              <a:solidFill>
+                <a:srgbClr val="000000"/>
+              </a:solidFill>
+              <a:latin typeface="Arial"/>
+            </a:endParaRPr>
+          </a:p>
+          <a:p>
+            <a:pPr lvl="1" marL="800280" indent="-343080" defTabSz="914400">
+              <a:lnSpc>
+                <a:spcPct val="100000"/>
+              </a:lnSpc>
+              <a:spcBef>
+                <a:spcPts val="320"/>
+              </a:spcBef>
+              <a:buClr>
+                <a:srgbClr val="000000"/>
+              </a:buClr>
+              <a:buFont typeface="Symbol"/>
+              <a:buChar char=""/>
+              <a:tabLst>
+                <a:tab algn="l" pos="1886040"/>
+              </a:tabLst>
+            </a:pPr>
+            <a:r>
+              <a:rPr b="0" lang="en-US" sz="1400" spc="-1" strike="noStrike">
+                <a:solidFill>
+                  <a:srgbClr val="000000"/>
+                </a:solidFill>
+                <a:latin typeface="Arial"/>
+                <a:ea typeface="DejaVu Sans"/>
+              </a:rPr>
+              <a:t>fix hybrid strategy: power comparison</a:t>
+            </a:r>
+            <a:endParaRPr b="0" lang="en-US" sz="1400" spc="-1" strike="noStrike">
+              <a:solidFill>
+                <a:srgbClr val="000000"/>
+              </a:solidFill>
+              <a:latin typeface="Arial"/>
+            </a:endParaRPr>
+          </a:p>
+          <a:p>
+            <a:pPr lvl="1" marL="800280" indent="-343080" defTabSz="914400">
+              <a:lnSpc>
+                <a:spcPct val="100000"/>
+              </a:lnSpc>
+              <a:spcBef>
+                <a:spcPts val="320"/>
+              </a:spcBef>
+              <a:buClr>
+                <a:srgbClr val="000000"/>
+              </a:buClr>
+              <a:buFont typeface="Symbol"/>
+              <a:buChar char=""/>
+              <a:tabLst>
+                <a:tab algn="l" pos="1886040"/>
+              </a:tabLst>
+            </a:pPr>
+            <a:r>
+              <a:rPr b="0" lang="en-US" sz="1400" spc="-1" strike="noStrike">
+                <a:solidFill>
+                  <a:srgbClr val="000000"/>
+                </a:solidFill>
+                <a:latin typeface="Arial"/>
+                <a:ea typeface="DejaVu Sans"/>
+              </a:rPr>
+              <a:t>fix exempted vehicles do not work (error message that XML version is not supported)</a:t>
+            </a:r>
+            <a:endParaRPr b="0" lang="en-US" sz="1400" spc="-1" strike="noStrike">
+              <a:solidFill>
+                <a:srgbClr val="000000"/>
+              </a:solidFill>
+              <a:latin typeface="Arial"/>
+            </a:endParaRPr>
+          </a:p>
+          <a:p>
+            <a:pPr lvl="1" marL="800280" indent="-343080" defTabSz="914400">
+              <a:lnSpc>
+                <a:spcPct val="100000"/>
+              </a:lnSpc>
+              <a:spcBef>
+                <a:spcPts val="320"/>
+              </a:spcBef>
+              <a:buClr>
+                <a:srgbClr val="000000"/>
+              </a:buClr>
+              <a:buFont typeface="Symbol"/>
+              <a:buChar char=""/>
+              <a:tabLst>
+                <a:tab algn="l" pos="1886040"/>
+              </a:tabLst>
+            </a:pPr>
+            <a:r>
+              <a:rPr b="0" lang="en-US" sz="1400" spc="-1" strike="noStrike">
+                <a:solidFill>
+                  <a:srgbClr val="000000"/>
+                </a:solidFill>
+                <a:latin typeface="Arial"/>
+                <a:ea typeface="DejaVu Sans"/>
+              </a:rPr>
+              <a:t>bugfix in XML schema: remove wrong PS technology entry for lorries</a:t>
+            </a:r>
+            <a:endParaRPr b="0" lang="en-US" sz="1400" spc="-1" strike="noStrike">
+              <a:solidFill>
+                <a:srgbClr val="000000"/>
+              </a:solidFill>
+              <a:latin typeface="Arial"/>
+            </a:endParaRPr>
+          </a:p>
+          <a:p>
+            <a:pPr lvl="1" marL="800280" indent="-343080" defTabSz="914400">
+              <a:lnSpc>
+                <a:spcPct val="100000"/>
+              </a:lnSpc>
+              <a:spcBef>
+                <a:spcPts val="320"/>
+              </a:spcBef>
+              <a:buClr>
+                <a:srgbClr val="000000"/>
+              </a:buClr>
+              <a:buFont typeface="Symbol"/>
+              <a:buChar char=""/>
+              <a:tabLst>
+                <a:tab algn="l" pos="1886040"/>
+              </a:tabLst>
+            </a:pPr>
+            <a:r>
+              <a:rPr b="0" lang="en-US" sz="1400" spc="-1" strike="noStrike">
+                <a:solidFill>
+                  <a:srgbClr val="000000"/>
+                </a:solidFill>
+                <a:latin typeface="Arial"/>
+                <a:ea typeface="DejaVu Sans"/>
+              </a:rPr>
+              <a:t>bugfix for conditioning power demand for IHPC vehicles</a:t>
+            </a:r>
+            <a:endParaRPr b="0" lang="en-US" sz="1400" spc="-1" strike="noStrike">
+              <a:solidFill>
+                <a:srgbClr val="000000"/>
+              </a:solidFill>
+              <a:latin typeface="Arial"/>
+            </a:endParaRPr>
+          </a:p>
+          <a:p>
+            <a:pPr indent="0" defTabSz="914400">
+              <a:lnSpc>
+                <a:spcPct val="100000"/>
+              </a:lnSpc>
+              <a:buNone/>
+              <a:tabLst>
+                <a:tab algn="l" pos="0"/>
+              </a:tabLst>
+            </a:pPr>
+            <a:endParaRPr b="0" lang="en-US" sz="1400" spc="-1" strike="noStrike">
+              <a:solidFill>
+                <a:srgbClr val="000000"/>
+              </a:solidFill>
+              <a:latin typeface="Arial"/>
+            </a:endParaRPr>
+          </a:p>
+          <a:p>
+            <a:pPr indent="0" defTabSz="914400">
+              <a:lnSpc>
+                <a:spcPct val="100000"/>
+              </a:lnSpc>
+              <a:spcBef>
+                <a:spcPts val="281"/>
+              </a:spcBef>
+              <a:buNone/>
+              <a:tabLst>
+                <a:tab algn="l" pos="0"/>
+              </a:tabLst>
+            </a:pPr>
+            <a:endParaRPr b="0" lang="en-US" sz="1400" spc="-1" strike="noStrike">
+              <a:solidFill>
+                <a:srgbClr val="000000"/>
+              </a:solidFill>
+              <a:latin typeface="Arial"/>
+            </a:endParaRPr>
+          </a:p>
+          <a:p>
+            <a:pPr indent="0" defTabSz="914400">
+              <a:lnSpc>
+                <a:spcPct val="100000"/>
+              </a:lnSpc>
+              <a:buNone/>
+              <a:tabLst>
+                <a:tab algn="l" pos="0"/>
+              </a:tabLst>
+            </a:pPr>
+            <a:endParaRPr b="0" lang="en-US" sz="1400" spc="-1" strike="noStrike">
+              <a:solidFill>
+                <a:srgbClr val="000000"/>
+              </a:solidFill>
+              <a:latin typeface="Arial"/>
+            </a:endParaRPr>
+          </a:p>
+          <a:p>
+            <a:pPr indent="0" defTabSz="914400">
+              <a:lnSpc>
+                <a:spcPct val="100000"/>
+              </a:lnSpc>
+              <a:buNone/>
+              <a:tabLst>
+                <a:tab algn="l" pos="0"/>
+              </a:tabLst>
+            </a:pPr>
+            <a:endParaRPr b="0" lang="en-US" sz="1400" spc="-1" strike="noStrike">
+              <a:solidFill>
+                <a:srgbClr val="000000"/>
+              </a:solidFill>
+              <a:latin typeface="Arial"/>
+            </a:endParaRPr>
+          </a:p>
+        </p:txBody>
+      </p:sp>
     </p:spTree>
   </p:cSld>
   <mc:AlternateContent>
@@ -3953,18 +4200,14 @@
       </p:grpSpPr>
       <p:sp>
         <p:nvSpPr>
-          <p:cNvPr id="63" name="PlaceHolder 1"/>
-          <p:cNvSpPr>
-            <a:spLocks noGrp="1"/>
-          </p:cNvSpPr>
-          <p:nvPr>
-            <p:ph type="title"/>
-          </p:nvPr>
+          <p:cNvPr id="63" name="Text Box 94"/>
+          <p:cNvSpPr/>
+          <p:nvPr/>
         </p:nvSpPr>
         <p:spPr>
           <a:xfrm>
-            <a:off x="722160" y="2320200"/>
-            <a:ext cx="7770600" cy="1528200"/>
+            <a:off x="539640" y="1052640"/>
+            <a:ext cx="8132040" cy="3945600"/>
           </a:xfrm>
           <a:prstGeom prst="rect">
             <a:avLst/>
@@ -3974,26 +4217,157 @@
             <a:noFill/>
           </a:ln>
         </p:spPr>
+        <p:style>
+          <a:lnRef idx="0"/>
+          <a:fillRef idx="0"/>
+          <a:effectRef idx="0"/>
+          <a:fontRef idx="minor"/>
+        </p:style>
         <p:txBody>
-          <a:bodyPr lIns="0" rIns="0" tIns="0" bIns="0" anchor="ctr">
-            <a:noAutofit/>
+          <a:bodyPr lIns="90000" rIns="90000" tIns="45000" bIns="45000" anchor="t">
+            <a:spAutoFit/>
           </a:bodyPr>
           <a:p>
-            <a:pPr indent="0" algn="ctr" defTabSz="914400">
-              <a:lnSpc>
-                <a:spcPct val="90000"/>
-              </a:lnSpc>
-              <a:spcBef>
-                <a:spcPts val="4201"/>
-              </a:spcBef>
-              <a:buNone/>
-              <a:tabLst>
-                <a:tab algn="l" pos="0"/>
-              </a:tabLst>
-            </a:pPr>
-            <a:br>
-              <a:rPr sz="2400"/>
-            </a:br>
+            <a:pPr algn="ctr" defTabSz="914400">
+              <a:lnSpc>
+                <a:spcPct val="100000"/>
+              </a:lnSpc>
+              <a:spcBef>
+                <a:spcPts val="1599"/>
+              </a:spcBef>
+            </a:pPr>
+            <a:r>
+              <a:rPr b="1" lang="en-US" sz="3200" spc="-1" strike="noStrike">
+                <a:solidFill>
+                  <a:srgbClr val="990000"/>
+                </a:solidFill>
+                <a:latin typeface="Arial"/>
+                <a:ea typeface="DejaVu Sans"/>
+              </a:rPr>
+              <a:t>VECTO 4.0.0.3210 </a:t>
+            </a:r>
+            <a:endParaRPr b="0" lang="en-US" sz="3200" spc="-1" strike="noStrike">
+              <a:solidFill>
+                <a:srgbClr val="000000"/>
+              </a:solidFill>
+              <a:latin typeface="Arial"/>
+            </a:endParaRPr>
+          </a:p>
+          <a:p>
+            <a:pPr algn="ctr" defTabSz="914400">
+              <a:lnSpc>
+                <a:spcPct val="100000"/>
+              </a:lnSpc>
+              <a:spcBef>
+                <a:spcPts val="1001"/>
+              </a:spcBef>
+            </a:pPr>
+            <a:r>
+              <a:rPr b="1" lang="en-US" sz="2000" spc="-1" strike="noStrike">
+                <a:solidFill>
+                  <a:srgbClr val="990000"/>
+                </a:solidFill>
+                <a:latin typeface="Arial"/>
+                <a:ea typeface="DejaVu Sans"/>
+              </a:rPr>
+              <a:t>16.10.2023</a:t>
+            </a:r>
+            <a:endParaRPr b="0" lang="en-US" sz="2000" spc="-1" strike="noStrike">
+              <a:solidFill>
+                <a:srgbClr val="000000"/>
+              </a:solidFill>
+              <a:latin typeface="Arial"/>
+            </a:endParaRPr>
+          </a:p>
+          <a:p>
+            <a:pPr algn="ctr" defTabSz="914400">
+              <a:lnSpc>
+                <a:spcPct val="100000"/>
+              </a:lnSpc>
+              <a:spcBef>
+                <a:spcPts val="1001"/>
+              </a:spcBef>
+            </a:pPr>
+            <a:endParaRPr b="0" lang="en-US" sz="2000" spc="-1" strike="noStrike">
+              <a:solidFill>
+                <a:srgbClr val="000000"/>
+              </a:solidFill>
+              <a:latin typeface="Arial"/>
+            </a:endParaRPr>
+          </a:p>
+          <a:p>
+            <a:pPr algn="ctr" defTabSz="914400">
+              <a:lnSpc>
+                <a:spcPct val="100000"/>
+              </a:lnSpc>
+              <a:spcBef>
+                <a:spcPts val="1001"/>
+              </a:spcBef>
+            </a:pPr>
+            <a:endParaRPr b="0" lang="en-US" sz="2000" spc="-1" strike="noStrike">
+              <a:solidFill>
+                <a:srgbClr val="000000"/>
+              </a:solidFill>
+              <a:latin typeface="Arial"/>
+            </a:endParaRPr>
+          </a:p>
+          <a:p>
+            <a:pPr algn="ctr" defTabSz="914400">
+              <a:lnSpc>
+                <a:spcPct val="100000"/>
+              </a:lnSpc>
+              <a:spcBef>
+                <a:spcPts val="1199"/>
+              </a:spcBef>
+            </a:pPr>
+            <a:endParaRPr b="0" lang="en-US" sz="2400" spc="-1" strike="noStrike">
+              <a:solidFill>
+                <a:srgbClr val="000000"/>
+              </a:solidFill>
+              <a:latin typeface="Arial"/>
+            </a:endParaRPr>
+          </a:p>
+          <a:p>
+            <a:pPr algn="ctr" defTabSz="914400">
+              <a:lnSpc>
+                <a:spcPct val="100000"/>
+              </a:lnSpc>
+              <a:spcBef>
+                <a:spcPts val="1199"/>
+              </a:spcBef>
+            </a:pPr>
+            <a:endParaRPr b="0" lang="en-US" sz="2400" spc="-1" strike="noStrike">
+              <a:solidFill>
+                <a:srgbClr val="000000"/>
+              </a:solidFill>
+              <a:latin typeface="Arial"/>
+            </a:endParaRPr>
+          </a:p>
+          <a:p>
+            <a:pPr algn="ctr" defTabSz="914400">
+              <a:lnSpc>
+                <a:spcPct val="100000"/>
+              </a:lnSpc>
+              <a:spcBef>
+                <a:spcPts val="1199"/>
+              </a:spcBef>
+            </a:pPr>
+            <a:endParaRPr b="0" lang="en-US" sz="2400" spc="-1" strike="noStrike">
+              <a:solidFill>
+                <a:srgbClr val="000000"/>
+              </a:solidFill>
+              <a:latin typeface="Arial"/>
+            </a:endParaRPr>
+          </a:p>
+          <a:p>
+            <a:pPr algn="ctr" defTabSz="914400">
+              <a:lnSpc>
+                <a:spcPct val="100000"/>
+              </a:lnSpc>
+              <a:spcBef>
+                <a:spcPts val="1199"/>
+              </a:spcBef>
+            </a:pPr>
             <a:r>
               <a:rPr b="1" lang="en-US" sz="2400" spc="-1" strike="noStrike">
                 <a:solidFill>
@@ -4002,31 +4376,9 @@
                 <a:latin typeface="Arial"/>
                 <a:ea typeface="DejaVu Sans"/>
               </a:rPr>
-              <a:t>First official VECTO release for the 2nd Amendment </a:t>
-            </a:r>
-            <a:br>
-              <a:rPr sz="2400"/>
-            </a:br>
-            <a:r>
-              <a:rPr b="1" lang="en-US" sz="2400" spc="-1" strike="noStrike">
-                <a:solidFill>
-                  <a:srgbClr val="990000"/>
-                </a:solidFill>
-                <a:latin typeface="Arial"/>
-                <a:ea typeface="DejaVu Sans"/>
-              </a:rPr>
-              <a:t>of Regulation (EU) 2017/2400</a:t>
-            </a:r>
-            <a:br>
-              <a:rPr sz="2800"/>
-            </a:br>
-            <a:br>
-              <a:rPr sz="2800"/>
-            </a:br>
-            <a:br>
-              <a:rPr sz="2400"/>
-            </a:br>
-            <a:endParaRPr b="0" lang="en-GB" sz="2400" spc="-1" strike="noStrike">
+              <a:t>Release Notes</a:t>
+            </a:r>
+            <a:endParaRPr b="0" lang="en-US" sz="2400" spc="-1" strike="noStrike">
               <a:solidFill>
                 <a:srgbClr val="000000"/>
               </a:solidFill>
@@ -4035,65 +4387,29 @@
           </a:p>
         </p:txBody>
       </p:sp>
-      <p:sp>
-        <p:nvSpPr>
-          <p:cNvPr id="64" name="PlaceHolder 2"/>
-          <p:cNvSpPr>
-            <a:spLocks noGrp="1"/>
-          </p:cNvSpPr>
-          <p:nvPr>
-            <p:ph/>
-          </p:nvPr>
-        </p:nvSpPr>
+      <p:pic>
+        <p:nvPicPr>
+          <p:cNvPr id="64" name="Picture 2" descr=""/>
+          <p:cNvPicPr/>
+          <p:nvPr/>
+        </p:nvPicPr>
+        <p:blipFill>
+          <a:blip r:embed="rId1"/>
+          <a:stretch/>
+        </p:blipFill>
         <p:spPr>
           <a:xfrm>
-            <a:off x="722160" y="4276440"/>
-            <a:ext cx="7770600" cy="405720"/>
+            <a:off x="2483640" y="2421000"/>
+            <a:ext cx="4172040" cy="1623240"/>
           </a:xfrm>
           <a:prstGeom prst="rect">
             <a:avLst/>
           </a:prstGeom>
-          <a:noFill/>
           <a:ln w="0">
             <a:noFill/>
           </a:ln>
         </p:spPr>
-        <p:txBody>
-          <a:bodyPr lIns="0" rIns="0" tIns="0" bIns="0" anchor="ctr">
-            <a:noAutofit/>
-          </a:bodyPr>
-          <a:p>
-            <a:pPr indent="0" algn="ctr" defTabSz="914400">
-              <a:lnSpc>
-                <a:spcPct val="90000"/>
-              </a:lnSpc>
-              <a:spcBef>
-                <a:spcPts val="1001"/>
-              </a:spcBef>
-              <a:buNone/>
-              <a:tabLst>
-                <a:tab algn="l" pos="0"/>
-              </a:tabLst>
-            </a:pPr>
-            <a:r>
-              <a:rPr b="0" lang="en-GB" sz="2000" spc="-1" strike="noStrike">
-                <a:solidFill>
-                  <a:schemeClr val="dk1"/>
-                </a:solidFill>
-                <a:latin typeface="Arial"/>
-                <a:ea typeface="DejaVu Sans"/>
-              </a:rPr>
-              <a:t>TUG</a:t>
-            </a:r>
-            <a:endParaRPr b="0" lang="en-GB" sz="2000" spc="-1" strike="noStrike">
-              <a:solidFill>
-                <a:srgbClr val="000000"/>
-              </a:solidFill>
-              <a:latin typeface="Arial"/>
-            </a:endParaRPr>
-          </a:p>
-        </p:txBody>
-      </p:sp>
+      </p:pic>
     </p:spTree>
   </p:cSld>
   <mc:AlternateContent>
@@ -4131,581 +4447,13 @@
             <a:spLocks noGrp="1"/>
           </p:cNvSpPr>
           <p:nvPr>
-            <p:ph/>
-          </p:nvPr>
-        </p:nvSpPr>
-        <p:spPr>
-          <a:xfrm>
-            <a:off x="588240" y="1140480"/>
-            <a:ext cx="8392680" cy="5045400"/>
-          </a:xfrm>
-          <a:prstGeom prst="rect">
-            <a:avLst/>
-          </a:prstGeom>
-          <a:noFill/>
-          <a:ln w="0">
-            <a:noFill/>
-          </a:ln>
-        </p:spPr>
-        <p:txBody>
-          <a:bodyPr lIns="0" rIns="0" tIns="0" bIns="0" anchor="t">
-            <a:normAutofit fontScale="64999"/>
-          </a:bodyPr>
-          <a:p>
-            <a:pPr marL="228600" indent="-228600" defTabSz="914400">
-              <a:lnSpc>
-                <a:spcPct val="120000"/>
-              </a:lnSpc>
-              <a:spcBef>
-                <a:spcPts val="601"/>
-              </a:spcBef>
-              <a:buClr>
-                <a:srgbClr val="000000"/>
-              </a:buClr>
-              <a:buFont typeface="Arial"/>
-              <a:buChar char="•"/>
-            </a:pPr>
-            <a:r>
-              <a:rPr b="0" lang="en-US" sz="2000" spc="-1" strike="noStrike">
-                <a:solidFill>
-                  <a:schemeClr val="dk1"/>
-                </a:solidFill>
-                <a:latin typeface="Arial"/>
-                <a:ea typeface="DejaVu Sans"/>
-              </a:rPr>
-              <a:t>Declaration Mode</a:t>
-            </a:r>
-            <a:endParaRPr b="0" lang="en-GB" sz="2000" spc="-1" strike="noStrike">
-              <a:solidFill>
-                <a:srgbClr val="000000"/>
-              </a:solidFill>
-              <a:latin typeface="Arial"/>
-            </a:endParaRPr>
-          </a:p>
-          <a:p>
-            <a:pPr lvl="1" marL="716040" indent="-266760" defTabSz="914400">
-              <a:lnSpc>
-                <a:spcPct val="120000"/>
-              </a:lnSpc>
-              <a:spcBef>
-                <a:spcPts val="601"/>
-              </a:spcBef>
-              <a:buClr>
-                <a:srgbClr val="000000"/>
-              </a:buClr>
-              <a:buFont typeface="Wingdings" charset="2"/>
-              <a:buChar char=""/>
-            </a:pPr>
-            <a:r>
-              <a:rPr b="0" lang="en-US" sz="1600" spc="-1" strike="noStrike">
-                <a:solidFill>
-                  <a:schemeClr val="dk1"/>
-                </a:solidFill>
-                <a:latin typeface="Arial"/>
-                <a:ea typeface="DejaVu Sans"/>
-              </a:rPr>
-              <a:t>xEV-Heavy Lorries</a:t>
-            </a:r>
-            <a:endParaRPr b="0" lang="en-GB" sz="1600" spc="-1" strike="noStrike">
-              <a:solidFill>
-                <a:srgbClr val="000000"/>
-              </a:solidFill>
-              <a:latin typeface="Arial"/>
-            </a:endParaRPr>
-          </a:p>
-          <a:p>
-            <a:pPr lvl="1" marL="716040" indent="-266760" defTabSz="914400">
-              <a:lnSpc>
-                <a:spcPct val="120000"/>
-              </a:lnSpc>
-              <a:spcBef>
-                <a:spcPts val="601"/>
-              </a:spcBef>
-              <a:buClr>
-                <a:srgbClr val="000000"/>
-              </a:buClr>
-              <a:buFont typeface="Wingdings" charset="2"/>
-              <a:buChar char=""/>
-            </a:pPr>
-            <a:r>
-              <a:rPr b="0" lang="en-US" sz="1600" spc="-1" strike="noStrike">
-                <a:solidFill>
-                  <a:schemeClr val="dk1"/>
-                </a:solidFill>
-                <a:latin typeface="Arial"/>
-                <a:ea typeface="DejaVu Sans"/>
-              </a:rPr>
-              <a:t>Conventional Medium Lorries</a:t>
-            </a:r>
-            <a:endParaRPr b="0" lang="en-GB" sz="1600" spc="-1" strike="noStrike">
-              <a:solidFill>
-                <a:srgbClr val="000000"/>
-              </a:solidFill>
-              <a:latin typeface="Arial"/>
-            </a:endParaRPr>
-          </a:p>
-          <a:p>
-            <a:pPr lvl="1" marL="716040" indent="-266760" defTabSz="914400">
-              <a:lnSpc>
-                <a:spcPct val="120000"/>
-              </a:lnSpc>
-              <a:spcBef>
-                <a:spcPts val="601"/>
-              </a:spcBef>
-              <a:buClr>
-                <a:srgbClr val="000000"/>
-              </a:buClr>
-              <a:buFont typeface="Wingdings" charset="2"/>
-              <a:buChar char=""/>
-            </a:pPr>
-            <a:r>
-              <a:rPr b="0" lang="en-US" sz="1600" spc="-1" strike="noStrike">
-                <a:solidFill>
-                  <a:schemeClr val="dk1"/>
-                </a:solidFill>
-                <a:latin typeface="Arial"/>
-                <a:ea typeface="DejaVu Sans"/>
-              </a:rPr>
-              <a:t>xEV Medium Lorries</a:t>
-            </a:r>
-            <a:endParaRPr b="0" lang="en-GB" sz="1600" spc="-1" strike="noStrike">
-              <a:solidFill>
-                <a:srgbClr val="000000"/>
-              </a:solidFill>
-              <a:latin typeface="Arial"/>
-            </a:endParaRPr>
-          </a:p>
-          <a:p>
-            <a:pPr lvl="1" marL="716040" indent="-266760" defTabSz="914400">
-              <a:lnSpc>
-                <a:spcPct val="120000"/>
-              </a:lnSpc>
-              <a:spcBef>
-                <a:spcPts val="601"/>
-              </a:spcBef>
-              <a:buClr>
-                <a:srgbClr val="000000"/>
-              </a:buClr>
-              <a:buFont typeface="Wingdings" charset="2"/>
-              <a:buChar char=""/>
-            </a:pPr>
-            <a:r>
-              <a:rPr b="0" lang="en-US" sz="1600" spc="-1" strike="noStrike">
-                <a:solidFill>
-                  <a:schemeClr val="dk1"/>
-                </a:solidFill>
-                <a:latin typeface="Arial"/>
-                <a:ea typeface="DejaVu Sans"/>
-              </a:rPr>
-              <a:t>Conventional Buses</a:t>
-            </a:r>
-            <a:endParaRPr b="0" lang="en-GB" sz="1600" spc="-1" strike="noStrike">
-              <a:solidFill>
-                <a:srgbClr val="000000"/>
-              </a:solidFill>
-              <a:latin typeface="Arial"/>
-            </a:endParaRPr>
-          </a:p>
-          <a:p>
-            <a:pPr lvl="1" marL="716040" indent="-266760" defTabSz="914400">
-              <a:lnSpc>
-                <a:spcPct val="120000"/>
-              </a:lnSpc>
-              <a:spcBef>
-                <a:spcPts val="601"/>
-              </a:spcBef>
-              <a:buClr>
-                <a:srgbClr val="000000"/>
-              </a:buClr>
-              <a:buFont typeface="Wingdings" charset="2"/>
-              <a:buChar char=""/>
-            </a:pPr>
-            <a:r>
-              <a:rPr b="0" lang="en-US" sz="1600" spc="-1" strike="noStrike">
-                <a:solidFill>
-                  <a:schemeClr val="dk1"/>
-                </a:solidFill>
-                <a:latin typeface="Arial"/>
-                <a:ea typeface="DejaVu Sans"/>
-              </a:rPr>
-              <a:t>xEV Buses</a:t>
-            </a:r>
-            <a:endParaRPr b="0" lang="en-GB" sz="1600" spc="-1" strike="noStrike">
-              <a:solidFill>
-                <a:srgbClr val="000000"/>
-              </a:solidFill>
-              <a:latin typeface="Arial"/>
-            </a:endParaRPr>
-          </a:p>
-          <a:p>
-            <a:pPr marL="228600" indent="-228600" defTabSz="914400">
-              <a:lnSpc>
-                <a:spcPct val="120000"/>
-              </a:lnSpc>
-              <a:spcBef>
-                <a:spcPts val="601"/>
-              </a:spcBef>
-              <a:buClr>
-                <a:srgbClr val="000000"/>
-              </a:buClr>
-              <a:buFont typeface="Arial"/>
-              <a:buChar char="•"/>
-            </a:pPr>
-            <a:r>
-              <a:rPr b="0" lang="en-US" sz="2000" spc="-1" strike="noStrike">
-                <a:solidFill>
-                  <a:schemeClr val="dk1"/>
-                </a:solidFill>
-                <a:latin typeface="Arial"/>
-                <a:ea typeface="DejaVu Sans"/>
-              </a:rPr>
-              <a:t>Dedicated user interface for simulating buses in Declaration Mode using the multistep approach: VECTOMultistep.exe </a:t>
-            </a:r>
-            <a:endParaRPr b="0" lang="en-GB" sz="2000" spc="-1" strike="noStrike">
-              <a:solidFill>
-                <a:srgbClr val="000000"/>
-              </a:solidFill>
-              <a:latin typeface="Arial"/>
-            </a:endParaRPr>
-          </a:p>
-          <a:p>
-            <a:pPr marL="228600" indent="-228600" defTabSz="914400">
-              <a:lnSpc>
-                <a:spcPct val="120000"/>
-              </a:lnSpc>
-              <a:spcBef>
-                <a:spcPts val="601"/>
-              </a:spcBef>
-              <a:buClr>
-                <a:srgbClr val="000000"/>
-              </a:buClr>
-              <a:buFont typeface="Arial"/>
-              <a:buChar char="•"/>
-            </a:pPr>
-            <a:r>
-              <a:rPr b="0" lang="en-US" sz="2000" spc="-1" strike="noStrike">
-                <a:solidFill>
-                  <a:schemeClr val="dk1"/>
-                </a:solidFill>
-                <a:latin typeface="Arial"/>
-                <a:ea typeface="DejaVu Sans"/>
-              </a:rPr>
-              <a:t>Engineering Mode</a:t>
-            </a:r>
-            <a:endParaRPr b="0" lang="en-GB" sz="2000" spc="-1" strike="noStrike">
-              <a:solidFill>
-                <a:srgbClr val="000000"/>
-              </a:solidFill>
-              <a:latin typeface="Arial"/>
-            </a:endParaRPr>
-          </a:p>
-          <a:p>
-            <a:pPr lvl="1" marL="716040" indent="-266760" defTabSz="914400">
-              <a:lnSpc>
-                <a:spcPct val="120000"/>
-              </a:lnSpc>
-              <a:spcBef>
-                <a:spcPts val="601"/>
-              </a:spcBef>
-              <a:buClr>
-                <a:srgbClr val="000000"/>
-              </a:buClr>
-              <a:buFont typeface="Wingdings" charset="2"/>
-              <a:buChar char=""/>
-            </a:pPr>
-            <a:r>
-              <a:rPr b="0" lang="en-US" sz="1600" spc="-1" strike="noStrike">
-                <a:solidFill>
-                  <a:schemeClr val="dk1"/>
-                </a:solidFill>
-                <a:latin typeface="Arial"/>
-                <a:ea typeface="DejaVu Sans"/>
-              </a:rPr>
-              <a:t>xEV-Vehicles</a:t>
-            </a:r>
-            <a:endParaRPr b="0" lang="en-GB" sz="1600" spc="-1" strike="noStrike">
-              <a:solidFill>
-                <a:srgbClr val="000000"/>
-              </a:solidFill>
-              <a:latin typeface="Arial"/>
-            </a:endParaRPr>
-          </a:p>
-          <a:p>
-            <a:pPr marL="228600" indent="-228600" defTabSz="914400">
-              <a:lnSpc>
-                <a:spcPct val="120000"/>
-              </a:lnSpc>
-              <a:spcBef>
-                <a:spcPts val="601"/>
-              </a:spcBef>
-              <a:buClr>
-                <a:srgbClr val="000000"/>
-              </a:buClr>
-              <a:buFont typeface="Arial"/>
-              <a:buChar char="•"/>
-            </a:pPr>
-            <a:r>
-              <a:rPr b="0" lang="pt-BR" sz="2000" spc="-1" strike="noStrike">
-                <a:solidFill>
-                  <a:schemeClr val="dk1"/>
-                </a:solidFill>
-                <a:latin typeface="Arial"/>
-                <a:ea typeface="DejaVu Sans"/>
-              </a:rPr>
-              <a:t>Updated XML-Reports and Vehicle Information Files to support new Vehicle Architectures</a:t>
-            </a:r>
-            <a:endParaRPr b="0" lang="en-GB" sz="2000" spc="-1" strike="noStrike">
-              <a:solidFill>
-                <a:srgbClr val="000000"/>
-              </a:solidFill>
-              <a:latin typeface="Arial"/>
-            </a:endParaRPr>
-          </a:p>
-          <a:p>
-            <a:pPr lvl="1" marL="716040" indent="-266760" defTabSz="914400">
-              <a:lnSpc>
-                <a:spcPct val="120000"/>
-              </a:lnSpc>
-              <a:spcBef>
-                <a:spcPts val="601"/>
-              </a:spcBef>
-              <a:buClr>
-                <a:srgbClr val="000000"/>
-              </a:buClr>
-              <a:buFont typeface="Wingdings" charset="2"/>
-              <a:buChar char=""/>
-            </a:pPr>
-            <a:r>
-              <a:rPr b="0" lang="pt-BR" sz="1600" spc="-1" strike="noStrike">
-                <a:solidFill>
-                  <a:schemeClr val="dk1"/>
-                </a:solidFill>
-                <a:latin typeface="Arial"/>
-                <a:ea typeface="DejaVu Sans"/>
-              </a:rPr>
-              <a:t>New Manufacturer Record File (MRF):</a:t>
-            </a:r>
-            <a:endParaRPr b="0" lang="en-GB" sz="1600" spc="-1" strike="noStrike">
-              <a:solidFill>
-                <a:srgbClr val="000000"/>
-              </a:solidFill>
-              <a:latin typeface="Arial"/>
-            </a:endParaRPr>
-          </a:p>
-          <a:p>
-            <a:pPr lvl="1" marL="716040" indent="-266760" defTabSz="914400">
-              <a:lnSpc>
-                <a:spcPct val="120000"/>
-              </a:lnSpc>
-              <a:spcBef>
-                <a:spcPts val="601"/>
-              </a:spcBef>
-              <a:buClr>
-                <a:srgbClr val="000000"/>
-              </a:buClr>
-              <a:buFont typeface="Wingdings" charset="2"/>
-              <a:buChar char=""/>
-            </a:pPr>
-            <a:r>
-              <a:rPr b="0" lang="pt-BR" sz="1600" spc="-1" strike="noStrike">
-                <a:solidFill>
-                  <a:schemeClr val="dk1"/>
-                </a:solidFill>
-                <a:latin typeface="Arial"/>
-                <a:ea typeface="DejaVu Sans"/>
-              </a:rPr>
-              <a:t>New Customer Information File (CIF): </a:t>
-            </a:r>
-            <a:endParaRPr b="0" lang="en-GB" sz="1600" spc="-1" strike="noStrike">
-              <a:solidFill>
-                <a:srgbClr val="000000"/>
-              </a:solidFill>
-              <a:latin typeface="Arial"/>
-            </a:endParaRPr>
-          </a:p>
-          <a:p>
-            <a:pPr lvl="1" marL="716040" indent="-266760" defTabSz="914400">
-              <a:lnSpc>
-                <a:spcPct val="120000"/>
-              </a:lnSpc>
-              <a:spcBef>
-                <a:spcPts val="601"/>
-              </a:spcBef>
-              <a:buClr>
-                <a:srgbClr val="000000"/>
-              </a:buClr>
-              <a:buFont typeface="Wingdings" charset="2"/>
-              <a:buChar char=""/>
-            </a:pPr>
-            <a:r>
-              <a:rPr b="0" lang="pt-BR" sz="1600" spc="-1" strike="noStrike">
-                <a:solidFill>
-                  <a:schemeClr val="dk1"/>
-                </a:solidFill>
-                <a:latin typeface="Arial"/>
-                <a:ea typeface="DejaVu Sans"/>
-              </a:rPr>
-              <a:t>Multistep Output (VIF):</a:t>
-            </a:r>
-            <a:endParaRPr b="0" lang="en-GB" sz="1600" spc="-1" strike="noStrike">
-              <a:solidFill>
-                <a:srgbClr val="000000"/>
-              </a:solidFill>
-              <a:latin typeface="Arial"/>
-            </a:endParaRPr>
-          </a:p>
-          <a:p>
-            <a:pPr marL="228600" indent="-228600" defTabSz="914400">
-              <a:lnSpc>
-                <a:spcPct val="120000"/>
-              </a:lnSpc>
-              <a:spcBef>
-                <a:spcPts val="601"/>
-              </a:spcBef>
-              <a:buClr>
-                <a:srgbClr val="000000"/>
-              </a:buClr>
-              <a:buFont typeface="Arial"/>
-              <a:buChar char="•"/>
-            </a:pPr>
-            <a:r>
-              <a:rPr b="0" lang="pt-BR" sz="2000" spc="-1" strike="noStrike">
-                <a:solidFill>
-                  <a:schemeClr val="dk1"/>
-                </a:solidFill>
-                <a:latin typeface="Arial"/>
-                <a:ea typeface="DejaVu Sans"/>
-              </a:rPr>
-              <a:t>Updated simulation output (.vsum, .vmod)</a:t>
-            </a:r>
-            <a:endParaRPr b="0" lang="en-GB" sz="2000" spc="-1" strike="noStrike">
-              <a:solidFill>
-                <a:srgbClr val="000000"/>
-              </a:solidFill>
-              <a:latin typeface="Arial"/>
-            </a:endParaRPr>
-          </a:p>
-          <a:p>
-            <a:pPr marL="228600" indent="-228600" defTabSz="914400">
-              <a:lnSpc>
-                <a:spcPct val="120000"/>
-              </a:lnSpc>
-              <a:spcBef>
-                <a:spcPts val="601"/>
-              </a:spcBef>
-              <a:buClr>
-                <a:srgbClr val="000000"/>
-              </a:buClr>
-              <a:buFont typeface="Arial"/>
-              <a:buChar char="•"/>
-            </a:pPr>
-            <a:r>
-              <a:rPr b="0" lang="pt-BR" sz="2000" spc="-1" strike="noStrike">
-                <a:solidFill>
-                  <a:schemeClr val="dk1"/>
-                </a:solidFill>
-                <a:latin typeface="Arial"/>
-                <a:ea typeface="DejaVu Sans"/>
-              </a:rPr>
-              <a:t>Updated Hashing Tool to handle new powertrain components (electric motor, battery, supercap ...)</a:t>
-            </a:r>
-            <a:endParaRPr b="0" lang="en-GB" sz="2000" spc="-1" strike="noStrike">
-              <a:solidFill>
-                <a:srgbClr val="000000"/>
-              </a:solidFill>
-              <a:latin typeface="Arial"/>
-            </a:endParaRPr>
-          </a:p>
-          <a:p>
-            <a:pPr indent="0" defTabSz="914400">
-              <a:lnSpc>
-                <a:spcPct val="120000"/>
-              </a:lnSpc>
-              <a:spcBef>
-                <a:spcPts val="601"/>
-              </a:spcBef>
-              <a:buNone/>
-              <a:tabLst>
-                <a:tab algn="l" pos="0"/>
-              </a:tabLst>
-            </a:pPr>
-            <a:endParaRPr b="0" lang="en-GB" sz="2000" spc="-1" strike="noStrike">
-              <a:solidFill>
-                <a:srgbClr val="000000"/>
-              </a:solidFill>
-              <a:latin typeface="Arial"/>
-            </a:endParaRPr>
-          </a:p>
-          <a:p>
-            <a:pPr marL="228600" indent="-228600" defTabSz="914400">
-              <a:lnSpc>
-                <a:spcPct val="120000"/>
-              </a:lnSpc>
-              <a:spcBef>
-                <a:spcPts val="601"/>
-              </a:spcBef>
-              <a:buClr>
-                <a:srgbClr val="000000"/>
-              </a:buClr>
-              <a:buFont typeface="Arial"/>
-              <a:buChar char="•"/>
-              <a:tabLst>
-                <a:tab algn="l" pos="0"/>
-              </a:tabLst>
-            </a:pPr>
-            <a:r>
-              <a:rPr b="0" lang="pt-BR" sz="2000" spc="-1" strike="noStrike">
-                <a:solidFill>
-                  <a:schemeClr val="dk1"/>
-                </a:solidFill>
-                <a:latin typeface="Arial"/>
-                <a:ea typeface="DejaVu Sans"/>
-              </a:rPr>
-              <a:t>Supports .NET Framework 4.8 and .NET 6.0</a:t>
-            </a:r>
-            <a:endParaRPr b="0" lang="en-GB" sz="2000" spc="-1" strike="noStrike">
-              <a:solidFill>
-                <a:srgbClr val="000000"/>
-              </a:solidFill>
-              <a:latin typeface="Arial"/>
-            </a:endParaRPr>
-          </a:p>
-          <a:p>
-            <a:pPr indent="0" defTabSz="914400">
-              <a:lnSpc>
-                <a:spcPct val="90000"/>
-              </a:lnSpc>
-              <a:spcBef>
-                <a:spcPts val="1199"/>
-              </a:spcBef>
-              <a:buNone/>
-              <a:tabLst>
-                <a:tab algn="l" pos="0"/>
-              </a:tabLst>
-            </a:pPr>
-            <a:endParaRPr b="0" lang="en-GB" sz="2000" spc="-1" strike="noStrike">
-              <a:solidFill>
-                <a:srgbClr val="000000"/>
-              </a:solidFill>
-              <a:latin typeface="Arial"/>
-            </a:endParaRPr>
-          </a:p>
-        </p:txBody>
-      </p:sp>
-      <p:sp>
-        <p:nvSpPr>
-          <p:cNvPr id="66" name="PlaceHolder 2"/>
-          <p:cNvSpPr>
-            <a:spLocks noGrp="1"/>
-          </p:cNvSpPr>
-          <p:nvPr>
             <p:ph type="title"/>
           </p:nvPr>
         </p:nvSpPr>
         <p:spPr>
           <a:xfrm>
-            <a:off x="588240" y="453600"/>
-            <a:ext cx="8227440" cy="477000"/>
+            <a:off x="722160" y="2320200"/>
+            <a:ext cx="7768800" cy="1526400"/>
           </a:xfrm>
           <a:prstGeom prst="rect">
             <a:avLst/>
@@ -4720,26 +4468,113 @@
             <a:noAutofit/>
           </a:bodyPr>
           <a:p>
-            <a:pPr indent="0" defTabSz="914400">
+            <a:pPr indent="0" algn="ctr" defTabSz="914400">
               <a:lnSpc>
                 <a:spcPct val="90000"/>
               </a:lnSpc>
+              <a:spcBef>
+                <a:spcPts val="4201"/>
+              </a:spcBef>
               <a:buNone/>
               <a:tabLst>
                 <a:tab algn="l" pos="0"/>
               </a:tabLst>
             </a:pPr>
-            <a:r>
-              <a:rPr b="1" lang="en-GB" sz="2400" spc="-1" strike="noStrike">
+            <a:br>
+              <a:rPr sz="2400"/>
+            </a:br>
+            <a:r>
+              <a:rPr b="1" lang="en-US" sz="2400" spc="-1" strike="noStrike">
                 <a:solidFill>
                   <a:srgbClr val="990000"/>
                 </a:solidFill>
                 <a:latin typeface="Arial"/>
                 <a:ea typeface="DejaVu Sans"/>
               </a:rPr>
-              <a:t>Features</a:t>
-            </a:r>
-            <a:endParaRPr b="0" lang="en-GB" sz="2400" spc="-1" strike="noStrike">
+              <a:t>First official VECTO release for the 2nd Amendment </a:t>
+            </a:r>
+            <a:br>
+              <a:rPr sz="2400"/>
+            </a:br>
+            <a:r>
+              <a:rPr b="1" lang="en-US" sz="2400" spc="-1" strike="noStrike">
+                <a:solidFill>
+                  <a:srgbClr val="990000"/>
+                </a:solidFill>
+                <a:latin typeface="Arial"/>
+                <a:ea typeface="DejaVu Sans"/>
+              </a:rPr>
+              <a:t>of Regulation (EU) 2017/2400</a:t>
+            </a:r>
+            <a:br>
+              <a:rPr sz="2800"/>
+            </a:br>
+            <a:br>
+              <a:rPr sz="2800"/>
+            </a:br>
+            <a:br>
+              <a:rPr sz="2400"/>
+            </a:br>
+            <a:endParaRPr b="0" lang="en-US" sz="2400" spc="-1" strike="noStrike">
+              <a:solidFill>
+                <a:srgbClr val="000000"/>
+              </a:solidFill>
+              <a:latin typeface="Arial"/>
+            </a:endParaRPr>
+          </a:p>
+        </p:txBody>
+      </p:sp>
+      <p:sp>
+        <p:nvSpPr>
+          <p:cNvPr id="66" name="PlaceHolder 2"/>
+          <p:cNvSpPr>
+            <a:spLocks noGrp="1"/>
+          </p:cNvSpPr>
+          <p:nvPr>
+            <p:ph/>
+          </p:nvPr>
+        </p:nvSpPr>
+        <p:spPr>
+          <a:xfrm>
+            <a:off x="722160" y="4276440"/>
+            <a:ext cx="7768800" cy="403920"/>
+          </a:xfrm>
+          <a:prstGeom prst="rect">
+            <a:avLst/>
+          </a:prstGeom>
+          <a:noFill/>
+          <a:ln w="0">
+            <a:noFill/>
+          </a:ln>
+        </p:spPr>
+        <p:txBody>
+          <a:bodyPr lIns="0" rIns="0" tIns="0" bIns="0" anchor="ctr">
+            <a:noAutofit/>
+          </a:bodyPr>
+          <a:p>
+            <a:pPr indent="0" algn="ctr" defTabSz="914400">
+              <a:lnSpc>
+                <a:spcPct val="90000"/>
+              </a:lnSpc>
+              <a:spcBef>
+                <a:spcPts val="1001"/>
+              </a:spcBef>
+              <a:buNone/>
+              <a:tabLst>
+                <a:tab algn="l" pos="0"/>
+              </a:tabLst>
+            </a:pPr>
+            <a:r>
+              <a:rPr b="0" lang="en-GB" sz="2000" spc="-1" strike="noStrike">
+                <a:solidFill>
+                  <a:schemeClr val="dk1"/>
+                </a:solidFill>
+                <a:latin typeface="Arial"/>
+                <a:ea typeface="DejaVu Sans"/>
+              </a:rPr>
+              <a:t>TUG</a:t>
+            </a:r>
+            <a:endParaRPr b="0" lang="en-US" sz="2000" spc="-1" strike="noStrike">
               <a:solidFill>
                 <a:srgbClr val="000000"/>
               </a:solidFill>
@@ -4785,13 +4620,581 @@
             <a:spLocks noGrp="1"/>
           </p:cNvSpPr>
           <p:nvPr>
+            <p:ph/>
+          </p:nvPr>
+        </p:nvSpPr>
+        <p:spPr>
+          <a:xfrm>
+            <a:off x="588240" y="1140480"/>
+            <a:ext cx="8390880" cy="5043600"/>
+          </a:xfrm>
+          <a:prstGeom prst="rect">
+            <a:avLst/>
+          </a:prstGeom>
+          <a:noFill/>
+          <a:ln w="0">
+            <a:noFill/>
+          </a:ln>
+        </p:spPr>
+        <p:txBody>
+          <a:bodyPr lIns="0" rIns="0" tIns="0" bIns="0" anchor="t">
+            <a:normAutofit fontScale="64999"/>
+          </a:bodyPr>
+          <a:p>
+            <a:pPr marL="228600" indent="-228600" defTabSz="914400">
+              <a:lnSpc>
+                <a:spcPct val="120000"/>
+              </a:lnSpc>
+              <a:spcBef>
+                <a:spcPts val="601"/>
+              </a:spcBef>
+              <a:buClr>
+                <a:srgbClr val="000000"/>
+              </a:buClr>
+              <a:buFont typeface="Arial"/>
+              <a:buChar char="•"/>
+            </a:pPr>
+            <a:r>
+              <a:rPr b="0" lang="en-US" sz="2000" spc="-1" strike="noStrike">
+                <a:solidFill>
+                  <a:schemeClr val="dk1"/>
+                </a:solidFill>
+                <a:latin typeface="Arial"/>
+                <a:ea typeface="DejaVu Sans"/>
+              </a:rPr>
+              <a:t>Declaration Mode</a:t>
+            </a:r>
+            <a:endParaRPr b="0" lang="en-US" sz="2000" spc="-1" strike="noStrike">
+              <a:solidFill>
+                <a:srgbClr val="000000"/>
+              </a:solidFill>
+              <a:latin typeface="Arial"/>
+            </a:endParaRPr>
+          </a:p>
+          <a:p>
+            <a:pPr lvl="1" marL="716040" indent="-266760" defTabSz="914400">
+              <a:lnSpc>
+                <a:spcPct val="120000"/>
+              </a:lnSpc>
+              <a:spcBef>
+                <a:spcPts val="601"/>
+              </a:spcBef>
+              <a:buClr>
+                <a:srgbClr val="000000"/>
+              </a:buClr>
+              <a:buFont typeface="Wingdings" charset="2"/>
+              <a:buChar char=""/>
+            </a:pPr>
+            <a:r>
+              <a:rPr b="0" lang="en-US" sz="1600" spc="-1" strike="noStrike">
+                <a:solidFill>
+                  <a:schemeClr val="dk1"/>
+                </a:solidFill>
+                <a:latin typeface="Arial"/>
+                <a:ea typeface="DejaVu Sans"/>
+              </a:rPr>
+              <a:t>xEV-Heavy Lorries</a:t>
+            </a:r>
+            <a:endParaRPr b="0" lang="en-US" sz="1600" spc="-1" strike="noStrike">
+              <a:solidFill>
+                <a:srgbClr val="000000"/>
+              </a:solidFill>
+              <a:latin typeface="Arial"/>
+            </a:endParaRPr>
+          </a:p>
+          <a:p>
+            <a:pPr lvl="1" marL="716040" indent="-266760" defTabSz="914400">
+              <a:lnSpc>
+                <a:spcPct val="120000"/>
+              </a:lnSpc>
+              <a:spcBef>
+                <a:spcPts val="601"/>
+              </a:spcBef>
+              <a:buClr>
+                <a:srgbClr val="000000"/>
+              </a:buClr>
+              <a:buFont typeface="Wingdings" charset="2"/>
+              <a:buChar char=""/>
+            </a:pPr>
+            <a:r>
+              <a:rPr b="0" lang="en-US" sz="1600" spc="-1" strike="noStrike">
+                <a:solidFill>
+                  <a:schemeClr val="dk1"/>
+                </a:solidFill>
+                <a:latin typeface="Arial"/>
+                <a:ea typeface="DejaVu Sans"/>
+              </a:rPr>
+              <a:t>Conventional Medium Lorries</a:t>
+            </a:r>
+            <a:endParaRPr b="0" lang="en-US" sz="1600" spc="-1" strike="noStrike">
+              <a:solidFill>
+                <a:srgbClr val="000000"/>
+              </a:solidFill>
+              <a:latin typeface="Arial"/>
+            </a:endParaRPr>
+          </a:p>
+          <a:p>
+            <a:pPr lvl="1" marL="716040" indent="-266760" defTabSz="914400">
+              <a:lnSpc>
+                <a:spcPct val="120000"/>
+              </a:lnSpc>
+              <a:spcBef>
+                <a:spcPts val="601"/>
+              </a:spcBef>
+              <a:buClr>
+                <a:srgbClr val="000000"/>
+              </a:buClr>
+              <a:buFont typeface="Wingdings" charset="2"/>
+              <a:buChar char=""/>
+            </a:pPr>
+            <a:r>
+              <a:rPr b="0" lang="en-US" sz="1600" spc="-1" strike="noStrike">
+                <a:solidFill>
+                  <a:schemeClr val="dk1"/>
+                </a:solidFill>
+                <a:latin typeface="Arial"/>
+                <a:ea typeface="DejaVu Sans"/>
+              </a:rPr>
+              <a:t>xEV Medium Lorries</a:t>
+            </a:r>
+            <a:endParaRPr b="0" lang="en-US" sz="1600" spc="-1" strike="noStrike">
+              <a:solidFill>
+                <a:srgbClr val="000000"/>
+              </a:solidFill>
+              <a:latin typeface="Arial"/>
+            </a:endParaRPr>
+          </a:p>
+          <a:p>
+            <a:pPr lvl="1" marL="716040" indent="-266760" defTabSz="914400">
+              <a:lnSpc>
+                <a:spcPct val="120000"/>
+              </a:lnSpc>
+              <a:spcBef>
+                <a:spcPts val="601"/>
+              </a:spcBef>
+              <a:buClr>
+                <a:srgbClr val="000000"/>
+              </a:buClr>
+              <a:buFont typeface="Wingdings" charset="2"/>
+              <a:buChar char=""/>
+            </a:pPr>
+            <a:r>
+              <a:rPr b="0" lang="en-US" sz="1600" spc="-1" strike="noStrike">
+                <a:solidFill>
+                  <a:schemeClr val="dk1"/>
+                </a:solidFill>
+                <a:latin typeface="Arial"/>
+                <a:ea typeface="DejaVu Sans"/>
+              </a:rPr>
+              <a:t>Conventional Buses</a:t>
+            </a:r>
+            <a:endParaRPr b="0" lang="en-US" sz="1600" spc="-1" strike="noStrike">
+              <a:solidFill>
+                <a:srgbClr val="000000"/>
+              </a:solidFill>
+              <a:latin typeface="Arial"/>
+            </a:endParaRPr>
+          </a:p>
+          <a:p>
+            <a:pPr lvl="1" marL="716040" indent="-266760" defTabSz="914400">
+              <a:lnSpc>
+                <a:spcPct val="120000"/>
+              </a:lnSpc>
+              <a:spcBef>
+                <a:spcPts val="601"/>
+              </a:spcBef>
+              <a:buClr>
+                <a:srgbClr val="000000"/>
+              </a:buClr>
+              <a:buFont typeface="Wingdings" charset="2"/>
+              <a:buChar char=""/>
+            </a:pPr>
+            <a:r>
+              <a:rPr b="0" lang="en-US" sz="1600" spc="-1" strike="noStrike">
+                <a:solidFill>
+                  <a:schemeClr val="dk1"/>
+                </a:solidFill>
+                <a:latin typeface="Arial"/>
+                <a:ea typeface="DejaVu Sans"/>
+              </a:rPr>
+              <a:t>xEV Buses</a:t>
+            </a:r>
+            <a:endParaRPr b="0" lang="en-US" sz="1600" spc="-1" strike="noStrike">
+              <a:solidFill>
+                <a:srgbClr val="000000"/>
+              </a:solidFill>
+              <a:latin typeface="Arial"/>
+            </a:endParaRPr>
+          </a:p>
+          <a:p>
+            <a:pPr marL="228600" indent="-228600" defTabSz="914400">
+              <a:lnSpc>
+                <a:spcPct val="120000"/>
+              </a:lnSpc>
+              <a:spcBef>
+                <a:spcPts val="601"/>
+              </a:spcBef>
+              <a:buClr>
+                <a:srgbClr val="000000"/>
+              </a:buClr>
+              <a:buFont typeface="Arial"/>
+              <a:buChar char="•"/>
+            </a:pPr>
+            <a:r>
+              <a:rPr b="0" lang="en-US" sz="2000" spc="-1" strike="noStrike">
+                <a:solidFill>
+                  <a:schemeClr val="dk1"/>
+                </a:solidFill>
+                <a:latin typeface="Arial"/>
+                <a:ea typeface="DejaVu Sans"/>
+              </a:rPr>
+              <a:t>Dedicated user interface for simulating buses in Declaration Mode using the multistep approach: VECTOMultistep.exe </a:t>
+            </a:r>
+            <a:endParaRPr b="0" lang="en-US" sz="2000" spc="-1" strike="noStrike">
+              <a:solidFill>
+                <a:srgbClr val="000000"/>
+              </a:solidFill>
+              <a:latin typeface="Arial"/>
+            </a:endParaRPr>
+          </a:p>
+          <a:p>
+            <a:pPr marL="228600" indent="-228600" defTabSz="914400">
+              <a:lnSpc>
+                <a:spcPct val="120000"/>
+              </a:lnSpc>
+              <a:spcBef>
+                <a:spcPts val="601"/>
+              </a:spcBef>
+              <a:buClr>
+                <a:srgbClr val="000000"/>
+              </a:buClr>
+              <a:buFont typeface="Arial"/>
+              <a:buChar char="•"/>
+            </a:pPr>
+            <a:r>
+              <a:rPr b="0" lang="en-US" sz="2000" spc="-1" strike="noStrike">
+                <a:solidFill>
+                  <a:schemeClr val="dk1"/>
+                </a:solidFill>
+                <a:latin typeface="Arial"/>
+                <a:ea typeface="DejaVu Sans"/>
+              </a:rPr>
+              <a:t>Engineering Mode</a:t>
+            </a:r>
+            <a:endParaRPr b="0" lang="en-US" sz="2000" spc="-1" strike="noStrike">
+              <a:solidFill>
+                <a:srgbClr val="000000"/>
+              </a:solidFill>
+              <a:latin typeface="Arial"/>
+            </a:endParaRPr>
+          </a:p>
+          <a:p>
+            <a:pPr lvl="1" marL="716040" indent="-266760" defTabSz="914400">
+              <a:lnSpc>
+                <a:spcPct val="120000"/>
+              </a:lnSpc>
+              <a:spcBef>
+                <a:spcPts val="601"/>
+              </a:spcBef>
+              <a:buClr>
+                <a:srgbClr val="000000"/>
+              </a:buClr>
+              <a:buFont typeface="Wingdings" charset="2"/>
+              <a:buChar char=""/>
+            </a:pPr>
+            <a:r>
+              <a:rPr b="0" lang="en-US" sz="1600" spc="-1" strike="noStrike">
+                <a:solidFill>
+                  <a:schemeClr val="dk1"/>
+                </a:solidFill>
+                <a:latin typeface="Arial"/>
+                <a:ea typeface="DejaVu Sans"/>
+              </a:rPr>
+              <a:t>xEV-Vehicles</a:t>
+            </a:r>
+            <a:endParaRPr b="0" lang="en-US" sz="1600" spc="-1" strike="noStrike">
+              <a:solidFill>
+                <a:srgbClr val="000000"/>
+              </a:solidFill>
+              <a:latin typeface="Arial"/>
+            </a:endParaRPr>
+          </a:p>
+          <a:p>
+            <a:pPr marL="228600" indent="-228600" defTabSz="914400">
+              <a:lnSpc>
+                <a:spcPct val="120000"/>
+              </a:lnSpc>
+              <a:spcBef>
+                <a:spcPts val="601"/>
+              </a:spcBef>
+              <a:buClr>
+                <a:srgbClr val="000000"/>
+              </a:buClr>
+              <a:buFont typeface="Arial"/>
+              <a:buChar char="•"/>
+            </a:pPr>
+            <a:r>
+              <a:rPr b="0" lang="pt-BR" sz="2000" spc="-1" strike="noStrike">
+                <a:solidFill>
+                  <a:schemeClr val="dk1"/>
+                </a:solidFill>
+                <a:latin typeface="Arial"/>
+                <a:ea typeface="DejaVu Sans"/>
+              </a:rPr>
+              <a:t>Updated XML-Reports and Vehicle Information Files to support new Vehicle Architectures</a:t>
+            </a:r>
+            <a:endParaRPr b="0" lang="en-US" sz="2000" spc="-1" strike="noStrike">
+              <a:solidFill>
+                <a:srgbClr val="000000"/>
+              </a:solidFill>
+              <a:latin typeface="Arial"/>
+            </a:endParaRPr>
+          </a:p>
+          <a:p>
+            <a:pPr lvl="1" marL="716040" indent="-266760" defTabSz="914400">
+              <a:lnSpc>
+                <a:spcPct val="120000"/>
+              </a:lnSpc>
+              <a:spcBef>
+                <a:spcPts val="601"/>
+              </a:spcBef>
+              <a:buClr>
+                <a:srgbClr val="000000"/>
+              </a:buClr>
+              <a:buFont typeface="Wingdings" charset="2"/>
+              <a:buChar char=""/>
+            </a:pPr>
+            <a:r>
+              <a:rPr b="0" lang="pt-BR" sz="1600" spc="-1" strike="noStrike">
+                <a:solidFill>
+                  <a:schemeClr val="dk1"/>
+                </a:solidFill>
+                <a:latin typeface="Arial"/>
+                <a:ea typeface="DejaVu Sans"/>
+              </a:rPr>
+              <a:t>New Manufacturer Record File (MRF):</a:t>
+            </a:r>
+            <a:endParaRPr b="0" lang="en-US" sz="1600" spc="-1" strike="noStrike">
+              <a:solidFill>
+                <a:srgbClr val="000000"/>
+              </a:solidFill>
+              <a:latin typeface="Arial"/>
+            </a:endParaRPr>
+          </a:p>
+          <a:p>
+            <a:pPr lvl="1" marL="716040" indent="-266760" defTabSz="914400">
+              <a:lnSpc>
+                <a:spcPct val="120000"/>
+              </a:lnSpc>
+              <a:spcBef>
+                <a:spcPts val="601"/>
+              </a:spcBef>
+              <a:buClr>
+                <a:srgbClr val="000000"/>
+              </a:buClr>
+              <a:buFont typeface="Wingdings" charset="2"/>
+              <a:buChar char=""/>
+            </a:pPr>
+            <a:r>
+              <a:rPr b="0" lang="pt-BR" sz="1600" spc="-1" strike="noStrike">
+                <a:solidFill>
+                  <a:schemeClr val="dk1"/>
+                </a:solidFill>
+                <a:latin typeface="Arial"/>
+                <a:ea typeface="DejaVu Sans"/>
+              </a:rPr>
+              <a:t>New Customer Information File (CIF): </a:t>
+            </a:r>
+            <a:endParaRPr b="0" lang="en-US" sz="1600" spc="-1" strike="noStrike">
+              <a:solidFill>
+                <a:srgbClr val="000000"/>
+              </a:solidFill>
+              <a:latin typeface="Arial"/>
+            </a:endParaRPr>
+          </a:p>
+          <a:p>
+            <a:pPr lvl="1" marL="716040" indent="-266760" defTabSz="914400">
+              <a:lnSpc>
+                <a:spcPct val="120000"/>
+              </a:lnSpc>
+              <a:spcBef>
+                <a:spcPts val="601"/>
+              </a:spcBef>
+              <a:buClr>
+                <a:srgbClr val="000000"/>
+              </a:buClr>
+              <a:buFont typeface="Wingdings" charset="2"/>
+              <a:buChar char=""/>
+            </a:pPr>
+            <a:r>
+              <a:rPr b="0" lang="pt-BR" sz="1600" spc="-1" strike="noStrike">
+                <a:solidFill>
+                  <a:schemeClr val="dk1"/>
+                </a:solidFill>
+                <a:latin typeface="Arial"/>
+                <a:ea typeface="DejaVu Sans"/>
+              </a:rPr>
+              <a:t>Multistep Output (VIF):</a:t>
+            </a:r>
+            <a:endParaRPr b="0" lang="en-US" sz="1600" spc="-1" strike="noStrike">
+              <a:solidFill>
+                <a:srgbClr val="000000"/>
+              </a:solidFill>
+              <a:latin typeface="Arial"/>
+            </a:endParaRPr>
+          </a:p>
+          <a:p>
+            <a:pPr marL="228600" indent="-228600" defTabSz="914400">
+              <a:lnSpc>
+                <a:spcPct val="120000"/>
+              </a:lnSpc>
+              <a:spcBef>
+                <a:spcPts val="601"/>
+              </a:spcBef>
+              <a:buClr>
+                <a:srgbClr val="000000"/>
+              </a:buClr>
+              <a:buFont typeface="Arial"/>
+              <a:buChar char="•"/>
+            </a:pPr>
+            <a:r>
+              <a:rPr b="0" lang="pt-BR" sz="2000" spc="-1" strike="noStrike">
+                <a:solidFill>
+                  <a:schemeClr val="dk1"/>
+                </a:solidFill>
+                <a:latin typeface="Arial"/>
+                <a:ea typeface="DejaVu Sans"/>
+              </a:rPr>
+              <a:t>Updated simulation output (.vsum, .vmod)</a:t>
+            </a:r>
+            <a:endParaRPr b="0" lang="en-US" sz="2000" spc="-1" strike="noStrike">
+              <a:solidFill>
+                <a:srgbClr val="000000"/>
+              </a:solidFill>
+              <a:latin typeface="Arial"/>
+            </a:endParaRPr>
+          </a:p>
+          <a:p>
+            <a:pPr marL="228600" indent="-228600" defTabSz="914400">
+              <a:lnSpc>
+                <a:spcPct val="120000"/>
+              </a:lnSpc>
+              <a:spcBef>
+                <a:spcPts val="601"/>
+              </a:spcBef>
+              <a:buClr>
+                <a:srgbClr val="000000"/>
+              </a:buClr>
+              <a:buFont typeface="Arial"/>
+              <a:buChar char="•"/>
+            </a:pPr>
+            <a:r>
+              <a:rPr b="0" lang="pt-BR" sz="2000" spc="-1" strike="noStrike">
+                <a:solidFill>
+                  <a:schemeClr val="dk1"/>
+                </a:solidFill>
+                <a:latin typeface="Arial"/>
+                <a:ea typeface="DejaVu Sans"/>
+              </a:rPr>
+              <a:t>Updated Hashing Tool to handle new powertrain components (electric motor, battery, supercap ...)</a:t>
+            </a:r>
+            <a:endParaRPr b="0" lang="en-US" sz="2000" spc="-1" strike="noStrike">
+              <a:solidFill>
+                <a:srgbClr val="000000"/>
+              </a:solidFill>
+              <a:latin typeface="Arial"/>
+            </a:endParaRPr>
+          </a:p>
+          <a:p>
+            <a:pPr indent="0" defTabSz="914400">
+              <a:lnSpc>
+                <a:spcPct val="120000"/>
+              </a:lnSpc>
+              <a:spcBef>
+                <a:spcPts val="601"/>
+              </a:spcBef>
+              <a:buNone/>
+              <a:tabLst>
+                <a:tab algn="l" pos="0"/>
+              </a:tabLst>
+            </a:pPr>
+            <a:endParaRPr b="0" lang="en-US" sz="2000" spc="-1" strike="noStrike">
+              <a:solidFill>
+                <a:srgbClr val="000000"/>
+              </a:solidFill>
+              <a:latin typeface="Arial"/>
+            </a:endParaRPr>
+          </a:p>
+          <a:p>
+            <a:pPr marL="228600" indent="-228600" defTabSz="914400">
+              <a:lnSpc>
+                <a:spcPct val="120000"/>
+              </a:lnSpc>
+              <a:spcBef>
+                <a:spcPts val="601"/>
+              </a:spcBef>
+              <a:buClr>
+                <a:srgbClr val="000000"/>
+              </a:buClr>
+              <a:buFont typeface="Arial"/>
+              <a:buChar char="•"/>
+              <a:tabLst>
+                <a:tab algn="l" pos="0"/>
+              </a:tabLst>
+            </a:pPr>
+            <a:r>
+              <a:rPr b="0" lang="pt-BR" sz="2000" spc="-1" strike="noStrike">
+                <a:solidFill>
+                  <a:schemeClr val="dk1"/>
+                </a:solidFill>
+                <a:latin typeface="Arial"/>
+                <a:ea typeface="DejaVu Sans"/>
+              </a:rPr>
+              <a:t>Supports .NET Framework 4.8 and .NET 6.0</a:t>
+            </a:r>
+            <a:endParaRPr b="0" lang="en-US" sz="2000" spc="-1" strike="noStrike">
+              <a:solidFill>
+                <a:srgbClr val="000000"/>
+              </a:solidFill>
+              <a:latin typeface="Arial"/>
+            </a:endParaRPr>
+          </a:p>
+          <a:p>
+            <a:pPr indent="0" defTabSz="914400">
+              <a:lnSpc>
+                <a:spcPct val="90000"/>
+              </a:lnSpc>
+              <a:spcBef>
+                <a:spcPts val="1199"/>
+              </a:spcBef>
+              <a:buNone/>
+              <a:tabLst>
+                <a:tab algn="l" pos="0"/>
+              </a:tabLst>
+            </a:pPr>
+            <a:endParaRPr b="0" lang="en-US" sz="2000" spc="-1" strike="noStrike">
+              <a:solidFill>
+                <a:srgbClr val="000000"/>
+              </a:solidFill>
+              <a:latin typeface="Arial"/>
+            </a:endParaRPr>
+          </a:p>
+        </p:txBody>
+      </p:sp>
+      <p:sp>
+        <p:nvSpPr>
+          <p:cNvPr id="68" name="PlaceHolder 2"/>
+          <p:cNvSpPr>
+            <a:spLocks noGrp="1"/>
+          </p:cNvSpPr>
+          <p:nvPr>
             <p:ph type="title"/>
           </p:nvPr>
         </p:nvSpPr>
         <p:spPr>
           <a:xfrm>
             <a:off x="588240" y="453600"/>
-            <a:ext cx="8227440" cy="1126800"/>
+            <a:ext cx="8225640" cy="475200"/>
           </a:xfrm>
           <a:prstGeom prst="rect">
             <a:avLst/>
@@ -4816,6 +5219,92 @@
               </a:tabLst>
             </a:pPr>
             <a:r>
+              <a:rPr b="1" lang="en-GB" sz="2400" spc="-1" strike="noStrike">
+                <a:solidFill>
+                  <a:srgbClr val="990000"/>
+                </a:solidFill>
+                <a:latin typeface="Arial"/>
+                <a:ea typeface="DejaVu Sans"/>
+              </a:rPr>
+              <a:t>Features</a:t>
+            </a:r>
+            <a:endParaRPr b="0" lang="en-US" sz="2400" spc="-1" strike="noStrike">
+              <a:solidFill>
+                <a:srgbClr val="000000"/>
+              </a:solidFill>
+              <a:latin typeface="Arial"/>
+            </a:endParaRPr>
+          </a:p>
+        </p:txBody>
+      </p:sp>
+    </p:spTree>
+  </p:cSld>
+  <mc:AlternateContent>
+    <mc:Choice Requires="p14">
+      <p:transition spd="slow" p14:dur="2000"/>
+    </mc:Choice>
+    <mc:Fallback>
+      <p:transition spd="slow"/>
+    </mc:Fallback>
+  </mc:AlternateContent>
+</p:sld>
+</file>
+
+<file path=ppt/slides/slide15.xml><?xml version="1.0" encoding="utf-8"?>
+<p:sld xmlns:a="http://schemas.openxmlformats.org/drawingml/2006/main" xmlns:p="http://schemas.openxmlformats.org/presentationml/2006/main" xmlns:r="http://schemas.openxmlformats.org/officeDocument/2006/relationships" xmlns:p14="http://schemas.microsoft.com/office/powerpoint/2010/main" xmlns:p15="http://schemas.microsoft.com/office/powerpoint/2012/main" xmlns:mc="http://schemas.openxmlformats.org/markup-compatibility/2006">
+  <p:cSld>
+    <p:spTree>
+      <p:nvGrpSpPr>
+        <p:cNvPr id="1" name=""/>
+        <p:cNvGrpSpPr/>
+        <p:nvPr/>
+      </p:nvGrpSpPr>
+      <p:grpSpPr>
+        <a:xfrm>
+          <a:off x="0" y="0"/>
+          <a:ext cx="0" cy="0"/>
+          <a:chOff x="0" y="0"/>
+          <a:chExt cx="0" cy="0"/>
+        </a:xfrm>
+      </p:grpSpPr>
+      <p:sp>
+        <p:nvSpPr>
+          <p:cNvPr id="69" name="PlaceHolder 1"/>
+          <p:cNvSpPr>
+            <a:spLocks noGrp="1"/>
+          </p:cNvSpPr>
+          <p:nvPr>
+            <p:ph type="title"/>
+          </p:nvPr>
+        </p:nvSpPr>
+        <p:spPr>
+          <a:xfrm>
+            <a:off x="588240" y="453600"/>
+            <a:ext cx="8225640" cy="1125000"/>
+          </a:xfrm>
+          <a:prstGeom prst="rect">
+            <a:avLst/>
+          </a:prstGeom>
+          <a:noFill/>
+          <a:ln w="0">
+            <a:noFill/>
+          </a:ln>
+        </p:spPr>
+        <p:txBody>
+          <a:bodyPr lIns="0" rIns="0" tIns="0" bIns="0" anchor="ctr">
+            <a:noAutofit/>
+          </a:bodyPr>
+          <a:p>
+            <a:pPr indent="0" defTabSz="914400">
+              <a:lnSpc>
+                <a:spcPct val="90000"/>
+              </a:lnSpc>
+              <a:buNone/>
+              <a:tabLst>
+                <a:tab algn="l" pos="0"/>
+              </a:tabLst>
+            </a:pPr>
+            <a:r>
               <a:rPr b="1" lang="en-US" sz="2400" spc="-1" strike="noStrike">
                 <a:solidFill>
                   <a:srgbClr val="990000"/>
@@ -4828,7 +5317,7 @@
             <a:br>
               <a:rPr sz="2400"/>
             </a:br>
-            <a:endParaRPr b="0" lang="en-GB" sz="2400" spc="-1" strike="noStrike">
+            <a:endParaRPr b="0" lang="en-US" sz="2400" spc="-1" strike="noStrike">
               <a:solidFill>
                 <a:srgbClr val="000000"/>
               </a:solidFill>
@@ -4839,7 +5328,7 @@
       </p:sp>
       <p:graphicFrame>
         <p:nvGraphicFramePr>
-          <p:cNvPr id="68" name="Inhaltsplatzhalter 4"/>
+          <p:cNvPr id="70" name="Inhaltsplatzhalter 4"/>
           <p:cNvGraphicFramePr/>
           <p:nvPr/>
         </p:nvGraphicFramePr>
@@ -4886,7 +5375,7 @@
                         </a:rPr>
                         <a:t> </a:t>
                       </a:r>
-                      <a:endParaRPr b="0" lang="en-GB" sz="900" spc="-1" strike="noStrike">
+                      <a:endParaRPr b="0" lang="en-US" sz="900" spc="-1" strike="noStrike">
                         <a:solidFill>
                           <a:srgbClr val="000000"/>
                         </a:solidFill>
@@ -4945,7 +5434,7 @@
                         </a:rPr>
                         <a:t>Medium Lorries (XML)</a:t>
                       </a:r>
-                      <a:endParaRPr b="0" lang="en-GB" sz="900" spc="-1" strike="noStrike">
+                      <a:endParaRPr b="0" lang="en-US" sz="900" spc="-1" strike="noStrike">
                         <a:solidFill>
                           <a:srgbClr val="000000"/>
                         </a:solidFill>
@@ -5004,7 +5493,7 @@
                         </a:rPr>
                         <a:t>Heavy Lorries (XML)</a:t>
                       </a:r>
-                      <a:endParaRPr b="0" lang="en-GB" sz="900" spc="-1" strike="noStrike">
+                      <a:endParaRPr b="0" lang="en-US" sz="900" spc="-1" strike="noStrike">
                         <a:solidFill>
                           <a:srgbClr val="000000"/>
                         </a:solidFill>
@@ -5063,7 +5552,7 @@
                         </a:rPr>
                         <a:t>Primary buses (XML)</a:t>
                       </a:r>
-                      <a:endParaRPr b="0" lang="en-GB" sz="900" spc="-1" strike="noStrike">
+                      <a:endParaRPr b="0" lang="en-US" sz="900" spc="-1" strike="noStrike">
                         <a:solidFill>
                           <a:srgbClr val="000000"/>
                         </a:solidFill>
@@ -5135,7 +5624,7 @@
                         </a:rPr>
                         <a:t>(GUI)</a:t>
                       </a:r>
-                      <a:endParaRPr b="0" lang="en-GB" sz="900" spc="-1" strike="noStrike">
+                      <a:endParaRPr b="0" lang="en-US" sz="900" spc="-1" strike="noStrike">
                         <a:solidFill>
                           <a:srgbClr val="000000"/>
                         </a:solidFill>
@@ -5194,7 +5683,7 @@
                         </a:rPr>
                         <a:t>Interim buses (XML)</a:t>
                       </a:r>
-                      <a:endParaRPr b="0" lang="en-GB" sz="900" spc="-1" strike="noStrike">
+                      <a:endParaRPr b="0" lang="en-US" sz="900" spc="-1" strike="noStrike">
                         <a:solidFill>
                           <a:srgbClr val="000000"/>
                         </a:solidFill>
@@ -5253,7 +5742,7 @@
                         </a:rPr>
                         <a:t>Completed buses (JSON v7)</a:t>
                       </a:r>
-                      <a:endParaRPr b="0" lang="en-GB" sz="900" spc="-1" strike="noStrike">
+                      <a:endParaRPr b="0" lang="en-US" sz="900" spc="-1" strike="noStrike">
                         <a:solidFill>
                           <a:srgbClr val="000000"/>
                         </a:solidFill>
@@ -5325,7 +5814,7 @@
                         </a:rPr>
                         <a:t>(GUI)</a:t>
                       </a:r>
-                      <a:endParaRPr b="0" lang="en-GB" sz="900" spc="-1" strike="noStrike">
+                      <a:endParaRPr b="0" lang="en-US" sz="900" spc="-1" strike="noStrike">
                         <a:solidFill>
                           <a:srgbClr val="000000"/>
                         </a:solidFill>
@@ -5384,7 +5873,7 @@
                         </a:rPr>
                         <a:t>Completed buses (XML)</a:t>
                       </a:r>
-                      <a:endParaRPr b="0" lang="en-GB" sz="900" spc="-1" strike="noStrike">
+                      <a:endParaRPr b="0" lang="en-US" sz="900" spc="-1" strike="noStrike">
                         <a:solidFill>
                           <a:srgbClr val="000000"/>
                         </a:solidFill>
@@ -5443,7 +5932,7 @@
                         </a:rPr>
                         <a:t>Complete buses (JSON v10)</a:t>
                       </a:r>
-                      <a:endParaRPr b="0" lang="en-GB" sz="900" spc="-1" strike="noStrike">
+                      <a:endParaRPr b="0" lang="en-US" sz="900" spc="-1" strike="noStrike">
                         <a:solidFill>
                           <a:srgbClr val="000000"/>
                         </a:solidFill>
@@ -5502,7 +5991,7 @@
                         </a:rPr>
                         <a:t>Complete buses (XML)</a:t>
                       </a:r>
-                      <a:endParaRPr b="0" lang="en-GB" sz="900" spc="-1" strike="noStrike">
+                      <a:endParaRPr b="0" lang="en-US" sz="900" spc="-1" strike="noStrike">
                         <a:solidFill>
                           <a:srgbClr val="000000"/>
                         </a:solidFill>
@@ -5563,7 +6052,7 @@
                         </a:rPr>
                         <a:t>VECTO.exe</a:t>
                       </a:r>
-                      <a:endParaRPr b="0" lang="en-GB" sz="900" spc="-1" strike="noStrike">
+                      <a:endParaRPr b="0" lang="en-US" sz="900" spc="-1" strike="noStrike">
                         <a:solidFill>
                           <a:srgbClr val="000000"/>
                         </a:solidFill>
@@ -5622,7 +6111,7 @@
                         </a:rPr>
                         <a:t>X</a:t>
                       </a:r>
-                      <a:endParaRPr b="0" lang="en-GB" sz="900" spc="-1" strike="noStrike">
+                      <a:endParaRPr b="0" lang="en-US" sz="900" spc="-1" strike="noStrike">
                         <a:solidFill>
                           <a:srgbClr val="000000"/>
                         </a:solidFill>
@@ -5681,7 +6170,7 @@
                         </a:rPr>
                         <a:t>X</a:t>
                       </a:r>
-                      <a:endParaRPr b="0" lang="en-GB" sz="900" spc="-1" strike="noStrike">
+                      <a:endParaRPr b="0" lang="en-US" sz="900" spc="-1" strike="noStrike">
                         <a:solidFill>
                           <a:srgbClr val="000000"/>
                         </a:solidFill>
@@ -5740,7 +6229,7 @@
                         </a:rPr>
                         <a:t>X</a:t>
                       </a:r>
-                      <a:endParaRPr b="0" lang="en-GB" sz="900" spc="-1" strike="noStrike">
+                      <a:endParaRPr b="0" lang="en-US" sz="900" spc="-1" strike="noStrike">
                         <a:solidFill>
                           <a:srgbClr val="000000"/>
                         </a:solidFill>
@@ -5799,7 +6288,7 @@
                         </a:rPr>
                         <a:t> </a:t>
                       </a:r>
-                      <a:endParaRPr b="0" lang="en-GB" sz="900" spc="-1" strike="noStrike">
+                      <a:endParaRPr b="0" lang="en-US" sz="900" spc="-1" strike="noStrike">
                         <a:solidFill>
                           <a:srgbClr val="000000"/>
                         </a:solidFill>
@@ -5858,7 +6347,7 @@
                         </a:rPr>
                         <a:t> </a:t>
                       </a:r>
-                      <a:endParaRPr b="0" lang="en-GB" sz="900" spc="-1" strike="noStrike">
+                      <a:endParaRPr b="0" lang="en-US" sz="900" spc="-1" strike="noStrike">
                         <a:solidFill>
                           <a:srgbClr val="000000"/>
                         </a:solidFill>
@@ -5917,7 +6406,7 @@
                         </a:rPr>
                         <a:t>X</a:t>
                       </a:r>
-                      <a:endParaRPr b="0" lang="en-GB" sz="900" spc="-1" strike="noStrike">
+                      <a:endParaRPr b="0" lang="en-US" sz="900" spc="-1" strike="noStrike">
                         <a:solidFill>
                           <a:srgbClr val="000000"/>
                         </a:solidFill>
@@ -5976,7 +6465,7 @@
                         </a:rPr>
                         <a:t> </a:t>
                       </a:r>
-                      <a:endParaRPr b="0" lang="en-GB" sz="900" spc="-1" strike="noStrike">
+                      <a:endParaRPr b="0" lang="en-US" sz="900" spc="-1" strike="noStrike">
                         <a:solidFill>
                           <a:srgbClr val="000000"/>
                         </a:solidFill>
@@ -6035,7 +6524,7 @@
                         </a:rPr>
                         <a:t>X</a:t>
                       </a:r>
-                      <a:endParaRPr b="0" lang="en-GB" sz="900" spc="-1" strike="noStrike">
+                      <a:endParaRPr b="0" lang="en-US" sz="900" spc="-1" strike="noStrike">
                         <a:solidFill>
                           <a:srgbClr val="000000"/>
                         </a:solidFill>
@@ -6094,7 +6583,7 @@
                         </a:rPr>
                         <a:t>X</a:t>
                       </a:r>
-                      <a:endParaRPr b="0" lang="en-GB" sz="900" spc="-1" strike="noStrike">
+                      <a:endParaRPr b="0" lang="en-US" sz="900" spc="-1" strike="noStrike">
                         <a:solidFill>
                           <a:srgbClr val="000000"/>
                         </a:solidFill>
@@ -6153,7 +6642,7 @@
                         </a:rPr>
                         <a:t>X</a:t>
                       </a:r>
-                      <a:endParaRPr b="0" lang="en-GB" sz="900" spc="-1" strike="noStrike">
+                      <a:endParaRPr b="0" lang="en-US" sz="900" spc="-1" strike="noStrike">
                         <a:solidFill>
                           <a:srgbClr val="000000"/>
                         </a:solidFill>
@@ -6214,7 +6703,7 @@
                         </a:rPr>
                         <a:t>VECTOcmd.exe</a:t>
                       </a:r>
-                      <a:endParaRPr b="0" lang="en-GB" sz="900" spc="-1" strike="noStrike">
+                      <a:endParaRPr b="0" lang="en-US" sz="900" spc="-1" strike="noStrike">
                         <a:solidFill>
                           <a:srgbClr val="000000"/>
                         </a:solidFill>
@@ -6273,7 +6762,7 @@
                         </a:rPr>
                         <a:t>X</a:t>
                       </a:r>
-                      <a:endParaRPr b="0" lang="en-GB" sz="900" spc="-1" strike="noStrike">
+                      <a:endParaRPr b="0" lang="en-US" sz="900" spc="-1" strike="noStrike">
                         <a:solidFill>
                           <a:srgbClr val="000000"/>
                         </a:solidFill>
@@ -6332,7 +6821,7 @@
                         </a:rPr>
                         <a:t>X</a:t>
                       </a:r>
-                      <a:endParaRPr b="0" lang="en-GB" sz="900" spc="-1" strike="noStrike">
+                      <a:endParaRPr b="0" lang="en-US" sz="900" spc="-1" strike="noStrike">
                         <a:solidFill>
                           <a:srgbClr val="000000"/>
                         </a:solidFill>
@@ -6391,7 +6880,7 @@
                         </a:rPr>
                         <a:t>X</a:t>
                       </a:r>
-                      <a:endParaRPr b="0" lang="en-GB" sz="900" spc="-1" strike="noStrike">
+                      <a:endParaRPr b="0" lang="en-US" sz="900" spc="-1" strike="noStrike">
                         <a:solidFill>
                           <a:srgbClr val="000000"/>
                         </a:solidFill>
@@ -6450,7 +6939,7 @@
                         </a:rPr>
                         <a:t> </a:t>
                       </a:r>
-                      <a:endParaRPr b="0" lang="en-GB" sz="900" spc="-1" strike="noStrike">
+                      <a:endParaRPr b="0" lang="en-US" sz="900" spc="-1" strike="noStrike">
                         <a:solidFill>
                           <a:srgbClr val="000000"/>
                         </a:solidFill>
@@ -6509,7 +6998,7 @@
                         </a:rPr>
                         <a:t> </a:t>
                       </a:r>
-                      <a:endParaRPr b="0" lang="en-GB" sz="900" spc="-1" strike="noStrike">
+                      <a:endParaRPr b="0" lang="en-US" sz="900" spc="-1" strike="noStrike">
                         <a:solidFill>
                           <a:srgbClr val="000000"/>
                         </a:solidFill>
@@ -6568,7 +7057,7 @@
                         </a:rPr>
                         <a:t>X</a:t>
                       </a:r>
-                      <a:endParaRPr b="0" lang="en-GB" sz="900" spc="-1" strike="noStrike">
+                      <a:endParaRPr b="0" lang="en-US" sz="900" spc="-1" strike="noStrike">
                         <a:solidFill>
                           <a:srgbClr val="000000"/>
                         </a:solidFill>
@@ -6627,7 +7116,7 @@
                         </a:rPr>
                         <a:t> </a:t>
                       </a:r>
-                      <a:endParaRPr b="0" lang="en-GB" sz="900" spc="-1" strike="noStrike">
+                      <a:endParaRPr b="0" lang="en-US" sz="900" spc="-1" strike="noStrike">
                         <a:solidFill>
                           <a:srgbClr val="000000"/>
                         </a:solidFill>
@@ -6686,7 +7175,7 @@
                         </a:rPr>
                         <a:t>X</a:t>
                       </a:r>
-                      <a:endParaRPr b="0" lang="en-GB" sz="900" spc="-1" strike="noStrike">
+                      <a:endParaRPr b="0" lang="en-US" sz="900" spc="-1" strike="noStrike">
                         <a:solidFill>
                           <a:srgbClr val="000000"/>
                         </a:solidFill>
@@ -6745,7 +7234,7 @@
                         </a:rPr>
                         <a:t>X</a:t>
                       </a:r>
-                      <a:endParaRPr b="0" lang="en-GB" sz="900" spc="-1" strike="noStrike">
+                      <a:endParaRPr b="0" lang="en-US" sz="900" spc="-1" strike="noStrike">
                         <a:solidFill>
                           <a:srgbClr val="000000"/>
                         </a:solidFill>
@@ -6804,7 +7293,7 @@
                         </a:rPr>
                         <a:t>X</a:t>
                       </a:r>
-                      <a:endParaRPr b="0" lang="en-GB" sz="900" spc="-1" strike="noStrike">
+                      <a:endParaRPr b="0" lang="en-US" sz="900" spc="-1" strike="noStrike">
                         <a:solidFill>
                           <a:srgbClr val="000000"/>
                         </a:solidFill>
@@ -6865,7 +7354,7 @@
                         </a:rPr>
                         <a:t>VECTOMultistep.exe</a:t>
                       </a:r>
-                      <a:endParaRPr b="0" lang="en-GB" sz="900" spc="-1" strike="noStrike">
+                      <a:endParaRPr b="0" lang="en-US" sz="900" spc="-1" strike="noStrike">
                         <a:solidFill>
                           <a:srgbClr val="000000"/>
                         </a:solidFill>
@@ -6924,7 +7413,7 @@
                         </a:rPr>
                         <a:t>X</a:t>
                       </a:r>
-                      <a:endParaRPr b="0" lang="en-GB" sz="900" spc="-1" strike="noStrike">
+                      <a:endParaRPr b="0" lang="en-US" sz="900" spc="-1" strike="noStrike">
                         <a:solidFill>
                           <a:srgbClr val="000000"/>
                         </a:solidFill>
@@ -6983,7 +7472,7 @@
                         </a:rPr>
                         <a:t>X</a:t>
                       </a:r>
-                      <a:endParaRPr b="0" lang="en-GB" sz="900" spc="-1" strike="noStrike">
+                      <a:endParaRPr b="0" lang="en-US" sz="900" spc="-1" strike="noStrike">
                         <a:solidFill>
                           <a:srgbClr val="000000"/>
                         </a:solidFill>
@@ -7042,7 +7531,7 @@
                         </a:rPr>
                         <a:t>X</a:t>
                       </a:r>
-                      <a:endParaRPr b="0" lang="en-GB" sz="900" spc="-1" strike="noStrike">
+                      <a:endParaRPr b="0" lang="en-US" sz="900" spc="-1" strike="noStrike">
                         <a:solidFill>
                           <a:srgbClr val="000000"/>
                         </a:solidFill>
@@ -7103,7 +7592,7 @@
                         </a:rPr>
                         <a:t>X</a:t>
                       </a:r>
-                      <a:endParaRPr b="0" lang="en-GB" sz="900" spc="-1" strike="noStrike">
+                      <a:endParaRPr b="0" lang="en-US" sz="900" spc="-1" strike="noStrike">
                         <a:solidFill>
                           <a:srgbClr val="000000"/>
                         </a:solidFill>
@@ -7164,7 +7653,7 @@
                         </a:rPr>
                         <a:t>X</a:t>
                       </a:r>
-                      <a:endParaRPr b="0" lang="en-GB" sz="900" spc="-1" strike="noStrike">
+                      <a:endParaRPr b="0" lang="en-US" sz="900" spc="-1" strike="noStrike">
                         <a:solidFill>
                           <a:srgbClr val="000000"/>
                         </a:solidFill>
@@ -7225,7 +7714,7 @@
                         </a:rPr>
                         <a:t>X</a:t>
                       </a:r>
-                      <a:endParaRPr b="0" lang="en-GB" sz="900" spc="-1" strike="noStrike">
+                      <a:endParaRPr b="0" lang="en-US" sz="900" spc="-1" strike="noStrike">
                         <a:solidFill>
                           <a:srgbClr val="000000"/>
                         </a:solidFill>
@@ -7286,7 +7775,7 @@
                         </a:rPr>
                         <a:t>X</a:t>
                       </a:r>
-                      <a:endParaRPr b="0" lang="en-GB" sz="900" spc="-1" strike="noStrike">
+                      <a:endParaRPr b="0" lang="en-US" sz="900" spc="-1" strike="noStrike">
                         <a:solidFill>
                           <a:srgbClr val="000000"/>
                         </a:solidFill>
@@ -7347,7 +7836,7 @@
                         </a:rPr>
                         <a:t>X</a:t>
                       </a:r>
-                      <a:endParaRPr b="0" lang="en-GB" sz="900" spc="-1" strike="noStrike">
+                      <a:endParaRPr b="0" lang="en-US" sz="900" spc="-1" strike="noStrike">
                         <a:solidFill>
                           <a:srgbClr val="000000"/>
                         </a:solidFill>
@@ -7408,7 +7897,7 @@
                         </a:rPr>
                         <a:t>X</a:t>
                       </a:r>
-                      <a:endParaRPr b="0" lang="en-GB" sz="900" spc="-1" strike="noStrike">
+                      <a:endParaRPr b="0" lang="en-US" sz="900" spc="-1" strike="noStrike">
                         <a:solidFill>
                           <a:srgbClr val="000000"/>
                         </a:solidFill>
@@ -7469,7 +7958,7 @@
                         </a:rPr>
                         <a:t>X</a:t>
                       </a:r>
-                      <a:endParaRPr b="0" lang="en-GB" sz="900" spc="-1" strike="noStrike">
+                      <a:endParaRPr b="0" lang="en-US" sz="900" spc="-1" strike="noStrike">
                         <a:solidFill>
                           <a:srgbClr val="000000"/>
                         </a:solidFill>
@@ -7530,7 +8019,7 @@
                         </a:rPr>
                         <a:t>Comments</a:t>
                       </a:r>
-                      <a:endParaRPr b="0" lang="en-GB" sz="900" spc="-1" strike="noStrike">
+                      <a:endParaRPr b="0" lang="en-US" sz="900" spc="-1" strike="noStrike">
                         <a:solidFill>
                           <a:srgbClr val="000000"/>
                         </a:solidFill>
@@ -7589,7 +8078,7 @@
                         </a:rPr>
                         <a:t> </a:t>
                       </a:r>
-                      <a:endParaRPr b="0" lang="en-GB" sz="900" spc="-1" strike="noStrike">
+                      <a:endParaRPr b="0" lang="en-US" sz="900" spc="-1" strike="noStrike">
                         <a:solidFill>
                           <a:srgbClr val="000000"/>
                         </a:solidFill>
@@ -7648,7 +8137,7 @@
                         </a:rPr>
                         <a:t> </a:t>
                       </a:r>
-                      <a:endParaRPr b="0" lang="en-GB" sz="900" spc="-1" strike="noStrike">
+                      <a:endParaRPr b="0" lang="en-US" sz="900" spc="-1" strike="noStrike">
                         <a:solidFill>
                           <a:srgbClr val="000000"/>
                         </a:solidFill>
@@ -7707,7 +8196,7 @@
                         </a:rPr>
                         <a:t> </a:t>
                       </a:r>
-                      <a:endParaRPr b="0" lang="en-GB" sz="900" spc="-1" strike="noStrike">
+                      <a:endParaRPr b="0" lang="en-US" sz="900" spc="-1" strike="noStrike">
                         <a:solidFill>
                           <a:srgbClr val="000000"/>
                         </a:solidFill>
@@ -7766,7 +8255,7 @@
                         </a:rPr>
                         <a:t>function: generates updated VIF</a:t>
                       </a:r>
-                      <a:endParaRPr b="0" lang="en-GB" sz="900" spc="-1" strike="noStrike">
+                      <a:endParaRPr b="0" lang="en-US" sz="900" spc="-1" strike="noStrike">
                         <a:solidFill>
                           <a:srgbClr val="000000"/>
                         </a:solidFill>
@@ -7810,7 +8299,7 @@
                       <a:noAutofit/>
                     </a:bodyPr>
                     <a:p>
-                      <a:endParaRPr b="0" lang="en-GB" sz="1800" spc="-1" strike="noStrike">
+                      <a:endParaRPr b="0" lang="en-US" sz="1800" spc="-1" strike="noStrike">
                         <a:solidFill>
                           <a:srgbClr val="000000"/>
                         </a:solidFill>
@@ -7857,7 +8346,7 @@
                         </a:rPr>
                         <a:t> </a:t>
                       </a:r>
-                      <a:endParaRPr b="0" lang="en-GB" sz="900" spc="-1" strike="noStrike">
+                      <a:endParaRPr b="0" lang="en-US" sz="900" spc="-1" strike="noStrike">
                         <a:solidFill>
                           <a:srgbClr val="000000"/>
                         </a:solidFill>
@@ -7916,7 +8405,7 @@
                         </a:rPr>
                         <a:t> </a:t>
                       </a:r>
-                      <a:endParaRPr b="0" lang="en-GB" sz="900" spc="-1" strike="noStrike">
+                      <a:endParaRPr b="0" lang="en-US" sz="900" spc="-1" strike="noStrike">
                         <a:solidFill>
                           <a:srgbClr val="000000"/>
                         </a:solidFill>
@@ -7975,7 +8464,7 @@
                         </a:rPr>
                         <a:t> </a:t>
                       </a:r>
-                      <a:endParaRPr b="0" lang="en-GB" sz="900" spc="-1" strike="noStrike">
+                      <a:endParaRPr b="0" lang="en-US" sz="900" spc="-1" strike="noStrike">
                         <a:solidFill>
                           <a:srgbClr val="000000"/>
                         </a:solidFill>
@@ -8034,7 +8523,7 @@
                         </a:rPr>
                         <a:t>"Single step" manufacturing process</a:t>
                       </a:r>
-                      <a:endParaRPr b="0" lang="en-GB" sz="900" spc="-1" strike="noStrike">
+                      <a:endParaRPr b="0" lang="en-US" sz="900" spc="-1" strike="noStrike">
                         <a:solidFill>
                           <a:srgbClr val="000000"/>
                         </a:solidFill>
@@ -8078,7 +8567,7 @@
                       <a:noAutofit/>
                     </a:bodyPr>
                     <a:p>
-                      <a:endParaRPr b="0" lang="en-GB" sz="1800" spc="-1" strike="noStrike">
+                      <a:endParaRPr b="0" lang="en-US" sz="1800" spc="-1" strike="noStrike">
                         <a:solidFill>
                           <a:srgbClr val="000000"/>
                         </a:solidFill>
@@ -8111,14 +8600,14 @@
       </p:graphicFrame>
       <p:sp>
         <p:nvSpPr>
-          <p:cNvPr id="69" name="Textfeld 8"/>
+          <p:cNvPr id="71" name="Textfeld 8"/>
           <p:cNvSpPr/>
           <p:nvPr/>
         </p:nvSpPr>
         <p:spPr>
           <a:xfrm>
             <a:off x="6509160" y="4789800"/>
-            <a:ext cx="2001960" cy="394920"/>
+            <a:ext cx="2000160" cy="394920"/>
           </a:xfrm>
           <a:prstGeom prst="rect">
             <a:avLst/>
@@ -8174,7 +8663,7 @@
               </a:rPr>
               <a:t>… Simulation only</a:t>
             </a:r>
-            <a:endParaRPr b="0" lang="en-GB" sz="1000" spc="-1" strike="noStrike">
+            <a:endParaRPr b="0" lang="en-US" sz="1000" spc="-1" strike="noStrike">
               <a:solidFill>
                 <a:srgbClr val="000000"/>
               </a:solidFill>
@@ -8231,204 +8720,7 @@
               </a:rPr>
               <a:t> Simulation and editing</a:t>
             </a:r>
-            <a:endParaRPr b="0" lang="en-GB" sz="1000" spc="-1" strike="noStrike">
-              <a:solidFill>
-                <a:srgbClr val="000000"/>
-              </a:solidFill>
-              <a:latin typeface="Arial"/>
-            </a:endParaRPr>
-          </a:p>
-        </p:txBody>
-      </p:sp>
-    </p:spTree>
-  </p:cSld>
-  <mc:AlternateContent>
-    <mc:Choice Requires="p14">
-      <p:transition spd="slow" p14:dur="2000"/>
-    </mc:Choice>
-    <mc:Fallback>
-      <p:transition spd="slow"/>
-    </mc:Fallback>
-  </mc:AlternateContent>
-</p:sld>
-</file>
-
-<file path=ppt/slides/slide15.xml><?xml version="1.0" encoding="utf-8"?>
-<p:sld xmlns:a="http://schemas.openxmlformats.org/drawingml/2006/main" xmlns:p="http://schemas.openxmlformats.org/presentationml/2006/main" xmlns:r="http://schemas.openxmlformats.org/officeDocument/2006/relationships" xmlns:p14="http://schemas.microsoft.com/office/powerpoint/2010/main" xmlns:p15="http://schemas.microsoft.com/office/powerpoint/2012/main" xmlns:mc="http://schemas.openxmlformats.org/markup-compatibility/2006">
-  <p:cSld>
-    <p:spTree>
-      <p:nvGrpSpPr>
-        <p:cNvPr id="1" name=""/>
-        <p:cNvGrpSpPr/>
-        <p:nvPr/>
-      </p:nvGrpSpPr>
-      <p:grpSpPr>
-        <a:xfrm>
-          <a:off x="0" y="0"/>
-          <a:ext cx="0" cy="0"/>
-          <a:chOff x="0" y="0"/>
-          <a:chExt cx="0" cy="0"/>
-        </a:xfrm>
-      </p:grpSpPr>
-      <p:sp>
-        <p:nvSpPr>
-          <p:cNvPr id="70" name="PlaceHolder 1"/>
-          <p:cNvSpPr>
-            <a:spLocks noGrp="1"/>
-          </p:cNvSpPr>
-          <p:nvPr>
-            <p:ph/>
-          </p:nvPr>
-        </p:nvSpPr>
-        <p:spPr>
-          <a:xfrm>
-            <a:off x="588240" y="1299960"/>
-            <a:ext cx="8392680" cy="4194000"/>
-          </a:xfrm>
-          <a:prstGeom prst="rect">
-            <a:avLst/>
-          </a:prstGeom>
-          <a:noFill/>
-          <a:ln w="0">
-            <a:noFill/>
-          </a:ln>
-        </p:spPr>
-        <p:txBody>
-          <a:bodyPr lIns="0" rIns="0" tIns="0" bIns="0" anchor="t">
-            <a:normAutofit/>
-          </a:bodyPr>
-          <a:p>
-            <a:pPr marL="228600" indent="-228600" defTabSz="914400">
-              <a:lnSpc>
-                <a:spcPct val="90000"/>
-              </a:lnSpc>
-              <a:spcBef>
-                <a:spcPts val="1199"/>
-              </a:spcBef>
-              <a:buClr>
-                <a:srgbClr val="000000"/>
-              </a:buClr>
-              <a:buFont typeface="Arial"/>
-              <a:buChar char="•"/>
-            </a:pPr>
-            <a:r>
-              <a:rPr b="0" lang="en-US" sz="1800" spc="-1" strike="noStrike">
-                <a:solidFill>
-                  <a:schemeClr val="dk1"/>
-                </a:solidFill>
-                <a:latin typeface="Arial"/>
-                <a:ea typeface="DejaVu Sans"/>
-              </a:rPr>
-              <a:t>XML Job Files &lt; v2.4 are no longer supported</a:t>
-            </a:r>
-            <a:endParaRPr b="0" lang="en-GB" sz="1800" spc="-1" strike="noStrike">
-              <a:solidFill>
-                <a:srgbClr val="000000"/>
-              </a:solidFill>
-              <a:latin typeface="Arial"/>
-            </a:endParaRPr>
-          </a:p>
-          <a:p>
-            <a:pPr marL="228600" indent="-228600" defTabSz="914400">
-              <a:lnSpc>
-                <a:spcPct val="90000"/>
-              </a:lnSpc>
-              <a:spcBef>
-                <a:spcPts val="1199"/>
-              </a:spcBef>
-              <a:buClr>
-                <a:srgbClr val="000000"/>
-              </a:buClr>
-              <a:buFont typeface="Arial"/>
-              <a:buChar char="•"/>
-            </a:pPr>
-            <a:r>
-              <a:rPr b="0" lang="en-US" sz="1800" spc="-1" strike="noStrike">
-                <a:solidFill>
-                  <a:schemeClr val="dk1"/>
-                </a:solidFill>
-                <a:latin typeface="Arial"/>
-                <a:ea typeface="DejaVu Sans"/>
-              </a:rPr>
-              <a:t>Dropped support for .NET Framework 4.5 (EOL 04/2022)</a:t>
-            </a:r>
-            <a:endParaRPr b="0" lang="en-GB" sz="1800" spc="-1" strike="noStrike">
-              <a:solidFill>
-                <a:srgbClr val="000000"/>
-              </a:solidFill>
-              <a:latin typeface="Arial"/>
-            </a:endParaRPr>
-          </a:p>
-          <a:p>
-            <a:pPr indent="0" defTabSz="914400">
-              <a:lnSpc>
-                <a:spcPct val="90000"/>
-              </a:lnSpc>
-              <a:spcBef>
-                <a:spcPts val="1199"/>
-              </a:spcBef>
-              <a:buNone/>
-              <a:tabLst>
-                <a:tab algn="l" pos="0"/>
-              </a:tabLst>
-            </a:pPr>
-            <a:endParaRPr b="0" lang="en-GB" sz="1800" spc="-1" strike="noStrike">
-              <a:solidFill>
-                <a:srgbClr val="000000"/>
-              </a:solidFill>
-              <a:latin typeface="Arial"/>
-            </a:endParaRPr>
-          </a:p>
-        </p:txBody>
-      </p:sp>
-      <p:sp>
-        <p:nvSpPr>
-          <p:cNvPr id="71" name="PlaceHolder 2"/>
-          <p:cNvSpPr>
-            <a:spLocks noGrp="1"/>
-          </p:cNvSpPr>
-          <p:nvPr>
-            <p:ph type="title"/>
-          </p:nvPr>
-        </p:nvSpPr>
-        <p:spPr>
-          <a:xfrm>
-            <a:off x="588240" y="453600"/>
-            <a:ext cx="8227440" cy="477000"/>
-          </a:xfrm>
-          <a:prstGeom prst="rect">
-            <a:avLst/>
-          </a:prstGeom>
-          <a:noFill/>
-          <a:ln w="0">
-            <a:noFill/>
-          </a:ln>
-        </p:spPr>
-        <p:txBody>
-          <a:bodyPr lIns="0" rIns="0" tIns="0" bIns="0" anchor="ctr">
-            <a:noAutofit/>
-          </a:bodyPr>
-          <a:p>
-            <a:pPr indent="0" defTabSz="914400">
-              <a:lnSpc>
-                <a:spcPct val="90000"/>
-              </a:lnSpc>
-              <a:buNone/>
-              <a:tabLst>
-                <a:tab algn="l" pos="0"/>
-              </a:tabLst>
-            </a:pPr>
-            <a:r>
-              <a:rPr b="1" lang="en-GB" sz="2400" spc="-1" strike="noStrike">
-                <a:solidFill>
-                  <a:srgbClr val="990000"/>
-                </a:solidFill>
-                <a:latin typeface="Arial"/>
-                <a:ea typeface="DejaVu Sans"/>
-              </a:rPr>
-              <a:t>Changes</a:t>
-            </a:r>
-            <a:endParaRPr b="0" lang="en-GB" sz="2400" spc="-1" strike="noStrike">
+            <a:endParaRPr b="0" lang="en-US" sz="1000" spc="-1" strike="noStrike">
               <a:solidFill>
                 <a:srgbClr val="000000"/>
               </a:solidFill>
@@ -8474,13 +8766,124 @@
             <a:spLocks noGrp="1"/>
           </p:cNvSpPr>
           <p:nvPr>
+            <p:ph/>
+          </p:nvPr>
+        </p:nvSpPr>
+        <p:spPr>
+          <a:xfrm>
+            <a:off x="588240" y="1299960"/>
+            <a:ext cx="8390880" cy="4192200"/>
+          </a:xfrm>
+          <a:prstGeom prst="rect">
+            <a:avLst/>
+          </a:prstGeom>
+          <a:noFill/>
+          <a:ln w="0">
+            <a:noFill/>
+          </a:ln>
+        </p:spPr>
+        <p:txBody>
+          <a:bodyPr lIns="0" rIns="0" tIns="0" bIns="0" anchor="t">
+            <a:normAutofit/>
+          </a:bodyPr>
+          <a:p>
+            <a:pPr marL="228600" indent="-228600" defTabSz="914400">
+              <a:lnSpc>
+                <a:spcPct val="90000"/>
+              </a:lnSpc>
+              <a:spcBef>
+                <a:spcPts val="1199"/>
+              </a:spcBef>
+              <a:buClr>
+                <a:srgbClr val="000000"/>
+              </a:buClr>
+              <a:buFont typeface="Arial"/>
+              <a:buChar char="•"/>
+            </a:pPr>
+            <a:r>
+              <a:rPr b="0" lang="en-US" sz="1800" spc="-1" strike="noStrike">
+                <a:solidFill>
+                  <a:schemeClr val="dk1"/>
+                </a:solidFill>
+                <a:latin typeface="Arial"/>
+                <a:ea typeface="DejaVu Sans"/>
+              </a:rPr>
+              <a:t>XML Job Files &lt; v2.4 are no longer supported</a:t>
+            </a:r>
+            <a:endParaRPr b="0" lang="en-US" sz="1800" spc="-1" strike="noStrike">
+              <a:solidFill>
+                <a:srgbClr val="000000"/>
+              </a:solidFill>
+              <a:latin typeface="Arial"/>
+            </a:endParaRPr>
+          </a:p>
+          <a:p>
+            <a:pPr marL="228600" indent="-228600" defTabSz="914400">
+              <a:lnSpc>
+                <a:spcPct val="90000"/>
+              </a:lnSpc>
+              <a:spcBef>
+                <a:spcPts val="1199"/>
+              </a:spcBef>
+              <a:buClr>
+                <a:srgbClr val="000000"/>
+              </a:buClr>
+              <a:buFont typeface="Arial"/>
+              <a:buChar char="•"/>
+            </a:pPr>
+            <a:r>
+              <a:rPr b="0" lang="en-US" sz="1800" spc="-1" strike="noStrike">
+                <a:solidFill>
+                  <a:schemeClr val="dk1"/>
+                </a:solidFill>
+                <a:latin typeface="Arial"/>
+                <a:ea typeface="DejaVu Sans"/>
+              </a:rPr>
+              <a:t>Dropped support for .NET Framework 4.5 (EOL 04/2022)</a:t>
+            </a:r>
+            <a:endParaRPr b="0" lang="en-US" sz="1800" spc="-1" strike="noStrike">
+              <a:solidFill>
+                <a:srgbClr val="000000"/>
+              </a:solidFill>
+              <a:latin typeface="Arial"/>
+            </a:endParaRPr>
+          </a:p>
+          <a:p>
+            <a:pPr indent="0" defTabSz="914400">
+              <a:lnSpc>
+                <a:spcPct val="90000"/>
+              </a:lnSpc>
+              <a:spcBef>
+                <a:spcPts val="1199"/>
+              </a:spcBef>
+              <a:buNone/>
+              <a:tabLst>
+                <a:tab algn="l" pos="0"/>
+              </a:tabLst>
+            </a:pPr>
+            <a:endParaRPr b="0" lang="en-US" sz="1800" spc="-1" strike="noStrike">
+              <a:solidFill>
+                <a:srgbClr val="000000"/>
+              </a:solidFill>
+              <a:latin typeface="Arial"/>
+            </a:endParaRPr>
+          </a:p>
+        </p:txBody>
+      </p:sp>
+      <p:sp>
+        <p:nvSpPr>
+          <p:cNvPr id="73" name="PlaceHolder 2"/>
+          <p:cNvSpPr>
+            <a:spLocks noGrp="1"/>
+          </p:cNvSpPr>
+          <p:nvPr>
             <p:ph type="title"/>
           </p:nvPr>
         </p:nvSpPr>
         <p:spPr>
           <a:xfrm>
             <a:off x="588240" y="453600"/>
-            <a:ext cx="8227440" cy="1126800"/>
+            <a:ext cx="8225640" cy="475200"/>
           </a:xfrm>
           <a:prstGeom prst="rect">
             <a:avLst/>
@@ -8505,236 +8908,16 @@
               </a:tabLst>
             </a:pPr>
             <a:r>
-              <a:rPr b="1" lang="en-US" sz="2400" spc="-1" strike="noStrike">
+              <a:rPr b="1" lang="en-GB" sz="2400" spc="-1" strike="noStrike">
                 <a:solidFill>
                   <a:srgbClr val="990000"/>
                 </a:solidFill>
                 <a:latin typeface="Arial"/>
                 <a:ea typeface="DejaVu Sans"/>
               </a:rPr>
-              <a:t>Implementation of Declaration Mode for xEV-Vehicles</a:t>
-            </a:r>
-            <a:br>
-              <a:rPr sz="2400"/>
-            </a:br>
-            <a:endParaRPr b="0" lang="en-GB" sz="2400" spc="-1" strike="noStrike">
-              <a:solidFill>
-                <a:srgbClr val="000000"/>
-              </a:solidFill>
-              <a:latin typeface="Arial"/>
-            </a:endParaRPr>
-          </a:p>
-        </p:txBody>
-      </p:sp>
-      <p:sp>
-        <p:nvSpPr>
-          <p:cNvPr id="73" name="Textfeld 1"/>
-          <p:cNvSpPr/>
-          <p:nvPr/>
-        </p:nvSpPr>
-        <p:spPr>
-          <a:xfrm>
-            <a:off x="588240" y="1210680"/>
-            <a:ext cx="7965720" cy="3350520"/>
-          </a:xfrm>
-          <a:prstGeom prst="rect">
-            <a:avLst/>
-          </a:prstGeom>
-          <a:noFill/>
-          <a:ln w="0">
-            <a:noFill/>
-          </a:ln>
-        </p:spPr>
-        <p:style>
-          <a:lnRef idx="0"/>
-          <a:fillRef idx="0"/>
-          <a:effectRef idx="0"/>
-          <a:fontRef idx="minor"/>
-        </p:style>
-        <p:txBody>
-          <a:bodyPr lIns="90000" rIns="90000" tIns="45000" bIns="45000" anchor="t">
-            <a:spAutoFit/>
-          </a:bodyPr>
-          <a:p>
-            <a:pPr marL="343080" indent="-343080" defTabSz="914400">
-              <a:lnSpc>
-                <a:spcPct val="100000"/>
-              </a:lnSpc>
-              <a:spcBef>
-                <a:spcPts val="1199"/>
-              </a:spcBef>
-              <a:buClr>
-                <a:srgbClr val="000000"/>
-              </a:buClr>
-              <a:buFont typeface="Arial"/>
-              <a:buChar char="•"/>
-            </a:pPr>
-            <a:r>
-              <a:rPr b="0" lang="en-GB" sz="2000" spc="-1" strike="noStrike">
-                <a:solidFill>
-                  <a:schemeClr val="dk1"/>
-                </a:solidFill>
-                <a:latin typeface="Arial"/>
-                <a:ea typeface="DejaVu Sans"/>
-              </a:rPr>
-              <a:t>Generic auxiliary parametrisation</a:t>
-            </a:r>
-            <a:endParaRPr b="0" lang="en-GB" sz="2000" spc="-1" strike="noStrike">
-              <a:solidFill>
-                <a:srgbClr val="000000"/>
-              </a:solidFill>
-              <a:latin typeface="Arial"/>
-            </a:endParaRPr>
-          </a:p>
-          <a:p>
-            <a:pPr marL="343080" indent="-343080" defTabSz="914400">
-              <a:lnSpc>
-                <a:spcPct val="100000"/>
-              </a:lnSpc>
-              <a:spcBef>
-                <a:spcPts val="1199"/>
-              </a:spcBef>
-              <a:buClr>
-                <a:srgbClr val="000000"/>
-              </a:buClr>
-              <a:buFont typeface="Arial"/>
-              <a:buChar char="•"/>
-            </a:pPr>
-            <a:r>
-              <a:rPr b="0" lang="en-GB" sz="2000" spc="-1" strike="noStrike">
-                <a:solidFill>
-                  <a:schemeClr val="dk1"/>
-                </a:solidFill>
-                <a:latin typeface="Arial"/>
-                <a:ea typeface="DejaVu Sans"/>
-              </a:rPr>
-              <a:t>Generic parametrisation of usable SOC range</a:t>
-            </a:r>
-            <a:endParaRPr b="0" lang="en-GB" sz="2000" spc="-1" strike="noStrike">
-              <a:solidFill>
-                <a:srgbClr val="000000"/>
-              </a:solidFill>
-              <a:latin typeface="Arial"/>
-            </a:endParaRPr>
-          </a:p>
-          <a:p>
-            <a:pPr marL="343080" indent="-343080" defTabSz="914400">
-              <a:lnSpc>
-                <a:spcPct val="100000"/>
-              </a:lnSpc>
-              <a:spcBef>
-                <a:spcPts val="1199"/>
-              </a:spcBef>
-              <a:buClr>
-                <a:srgbClr val="000000"/>
-              </a:buClr>
-              <a:buFont typeface="Arial"/>
-              <a:buChar char="•"/>
-            </a:pPr>
-            <a:r>
-              <a:rPr b="0" lang="en-GB" sz="2000" spc="-1" strike="noStrike">
-                <a:solidFill>
-                  <a:schemeClr val="dk1"/>
-                </a:solidFill>
-                <a:latin typeface="Arial"/>
-                <a:ea typeface="DejaVu Sans"/>
-              </a:rPr>
-              <a:t>Generic parametrisation of Serial/Parallel Hybrid Strategy parameters</a:t>
-            </a:r>
-            <a:endParaRPr b="0" lang="en-GB" sz="2000" spc="-1" strike="noStrike">
-              <a:solidFill>
-                <a:srgbClr val="000000"/>
-              </a:solidFill>
-              <a:latin typeface="Arial"/>
-            </a:endParaRPr>
-          </a:p>
-          <a:p>
-            <a:pPr marL="343080" indent="-343080" defTabSz="914400">
-              <a:lnSpc>
-                <a:spcPct val="100000"/>
-              </a:lnSpc>
-              <a:spcBef>
-                <a:spcPts val="1199"/>
-              </a:spcBef>
-              <a:buClr>
-                <a:srgbClr val="000000"/>
-              </a:buClr>
-              <a:buFont typeface="Arial"/>
-              <a:buChar char="•"/>
-            </a:pPr>
-            <a:r>
-              <a:rPr b="0" lang="en-GB" sz="2000" spc="-1" strike="noStrike">
-                <a:solidFill>
-                  <a:schemeClr val="dk1"/>
-                </a:solidFill>
-                <a:latin typeface="Arial"/>
-                <a:ea typeface="DejaVu Sans"/>
-              </a:rPr>
-              <a:t>Automated simulation of OVC-HEV</a:t>
-            </a:r>
-            <a:endParaRPr b="0" lang="en-GB" sz="2000" spc="-1" strike="noStrike">
-              <a:solidFill>
-                <a:srgbClr val="000000"/>
-              </a:solidFill>
-              <a:latin typeface="Arial"/>
-            </a:endParaRPr>
-          </a:p>
-          <a:p>
-            <a:pPr lvl="1" marL="743040" indent="-285840" defTabSz="914400">
-              <a:lnSpc>
-                <a:spcPct val="100000"/>
-              </a:lnSpc>
-              <a:spcBef>
-                <a:spcPts val="1199"/>
-              </a:spcBef>
-              <a:buClr>
-                <a:srgbClr val="000000"/>
-              </a:buClr>
-              <a:buFont typeface="Arial"/>
-              <a:buChar char="•"/>
-            </a:pPr>
-            <a:r>
-              <a:rPr b="0" lang="en-GB" sz="1600" spc="-1" strike="noStrike">
-                <a:solidFill>
-                  <a:schemeClr val="dk1"/>
-                </a:solidFill>
-                <a:latin typeface="Arial"/>
-                <a:ea typeface="DejaVu Sans"/>
-              </a:rPr>
-              <a:t>Charge depleting mode (CD): The propulsion energy is provided by the electric storage only</a:t>
-            </a:r>
-            <a:endParaRPr b="0" lang="en-GB" sz="1600" spc="-1" strike="noStrike">
-              <a:solidFill>
-                <a:srgbClr val="000000"/>
-              </a:solidFill>
-              <a:latin typeface="Arial"/>
-            </a:endParaRPr>
-          </a:p>
-          <a:p>
-            <a:pPr lvl="1" marL="743040" indent="-285840" defTabSz="914400">
-              <a:lnSpc>
-                <a:spcPct val="100000"/>
-              </a:lnSpc>
-              <a:spcBef>
-                <a:spcPts val="1199"/>
-              </a:spcBef>
-              <a:buClr>
-                <a:srgbClr val="000000"/>
-              </a:buClr>
-              <a:buFont typeface="Arial"/>
-              <a:buChar char="•"/>
-            </a:pPr>
-            <a:r>
-              <a:rPr b="0" lang="en-GB" sz="1600" spc="-1" strike="noStrike">
-                <a:solidFill>
-                  <a:schemeClr val="dk1"/>
-                </a:solidFill>
-                <a:latin typeface="Arial"/>
-                <a:ea typeface="DejaVu Sans"/>
-              </a:rPr>
-              <a:t>Charge sustaining mode (CS): The propulsion energy is provided by the fuel storage</a:t>
-            </a:r>
-            <a:endParaRPr b="0" lang="en-GB" sz="1600" spc="-1" strike="noStrike">
+              <a:t>Changes</a:t>
+            </a:r>
+            <a:endParaRPr b="0" lang="en-US" sz="2400" spc="-1" strike="noStrike">
               <a:solidFill>
                 <a:srgbClr val="000000"/>
               </a:solidFill>
@@ -8786,7 +8969,7 @@
         <p:spPr>
           <a:xfrm>
             <a:off x="588240" y="453600"/>
-            <a:ext cx="8227440" cy="1126800"/>
+            <a:ext cx="8225640" cy="1125000"/>
           </a:xfrm>
           <a:prstGeom prst="rect">
             <a:avLst/>
@@ -8818,12 +9001,12 @@
                 <a:latin typeface="Arial"/>
                 <a:ea typeface="DejaVu Sans"/>
               </a:rPr>
-              <a:t>Implementation of Declaration Mode for xEV-Lorries</a:t>
+              <a:t>Implementation of Declaration Mode for xEV-Vehicles</a:t>
             </a:r>
             <a:br>
               <a:rPr sz="2400"/>
             </a:br>
-            <a:endParaRPr b="0" lang="en-GB" sz="2400" spc="-1" strike="noStrike">
+            <a:endParaRPr b="0" lang="en-US" sz="2400" spc="-1" strike="noStrike">
               <a:solidFill>
                 <a:srgbClr val="000000"/>
               </a:solidFill>
@@ -8834,14 +9017,320 @@
       </p:sp>
       <p:sp>
         <p:nvSpPr>
-          <p:cNvPr id="75" name="Inhaltsplatzhalter 5"/>
+          <p:cNvPr id="75" name="Textfeld 1"/>
+          <p:cNvSpPr/>
+          <p:nvPr/>
+        </p:nvSpPr>
+        <p:spPr>
+          <a:xfrm>
+            <a:off x="588240" y="1210680"/>
+            <a:ext cx="7963920" cy="3350520"/>
+          </a:xfrm>
+          <a:prstGeom prst="rect">
+            <a:avLst/>
+          </a:prstGeom>
+          <a:noFill/>
+          <a:ln w="0">
+            <a:noFill/>
+          </a:ln>
+        </p:spPr>
+        <p:style>
+          <a:lnRef idx="0"/>
+          <a:fillRef idx="0"/>
+          <a:effectRef idx="0"/>
+          <a:fontRef idx="minor"/>
+        </p:style>
+        <p:txBody>
+          <a:bodyPr lIns="90000" rIns="90000" tIns="45000" bIns="45000" anchor="t">
+            <a:spAutoFit/>
+          </a:bodyPr>
+          <a:p>
+            <a:pPr marL="343080" indent="-343080" defTabSz="914400">
+              <a:lnSpc>
+                <a:spcPct val="100000"/>
+              </a:lnSpc>
+              <a:spcBef>
+                <a:spcPts val="1199"/>
+              </a:spcBef>
+              <a:buClr>
+                <a:srgbClr val="000000"/>
+              </a:buClr>
+              <a:buFont typeface="Arial"/>
+              <a:buChar char="•"/>
+            </a:pPr>
+            <a:r>
+              <a:rPr b="0" lang="en-GB" sz="2000" spc="-1" strike="noStrike">
+                <a:solidFill>
+                  <a:schemeClr val="dk1"/>
+                </a:solidFill>
+                <a:latin typeface="Arial"/>
+                <a:ea typeface="DejaVu Sans"/>
+              </a:rPr>
+              <a:t>Generic auxiliary parametrisation</a:t>
+            </a:r>
+            <a:endParaRPr b="0" lang="en-US" sz="2000" spc="-1" strike="noStrike">
+              <a:solidFill>
+                <a:srgbClr val="000000"/>
+              </a:solidFill>
+              <a:latin typeface="Arial"/>
+            </a:endParaRPr>
+          </a:p>
+          <a:p>
+            <a:pPr marL="343080" indent="-343080" defTabSz="914400">
+              <a:lnSpc>
+                <a:spcPct val="100000"/>
+              </a:lnSpc>
+              <a:spcBef>
+                <a:spcPts val="1199"/>
+              </a:spcBef>
+              <a:buClr>
+                <a:srgbClr val="000000"/>
+              </a:buClr>
+              <a:buFont typeface="Arial"/>
+              <a:buChar char="•"/>
+            </a:pPr>
+            <a:r>
+              <a:rPr b="0" lang="en-GB" sz="2000" spc="-1" strike="noStrike">
+                <a:solidFill>
+                  <a:schemeClr val="dk1"/>
+                </a:solidFill>
+                <a:latin typeface="Arial"/>
+                <a:ea typeface="DejaVu Sans"/>
+              </a:rPr>
+              <a:t>Generic parametrisation of usable SOC range</a:t>
+            </a:r>
+            <a:endParaRPr b="0" lang="en-US" sz="2000" spc="-1" strike="noStrike">
+              <a:solidFill>
+                <a:srgbClr val="000000"/>
+              </a:solidFill>
+              <a:latin typeface="Arial"/>
+            </a:endParaRPr>
+          </a:p>
+          <a:p>
+            <a:pPr marL="343080" indent="-343080" defTabSz="914400">
+              <a:lnSpc>
+                <a:spcPct val="100000"/>
+              </a:lnSpc>
+              <a:spcBef>
+                <a:spcPts val="1199"/>
+              </a:spcBef>
+              <a:buClr>
+                <a:srgbClr val="000000"/>
+              </a:buClr>
+              <a:buFont typeface="Arial"/>
+              <a:buChar char="•"/>
+            </a:pPr>
+            <a:r>
+              <a:rPr b="0" lang="en-GB" sz="2000" spc="-1" strike="noStrike">
+                <a:solidFill>
+                  <a:schemeClr val="dk1"/>
+                </a:solidFill>
+                <a:latin typeface="Arial"/>
+                <a:ea typeface="DejaVu Sans"/>
+              </a:rPr>
+              <a:t>Generic parametrisation of Serial/Parallel Hybrid Strategy parameters</a:t>
+            </a:r>
+            <a:endParaRPr b="0" lang="en-US" sz="2000" spc="-1" strike="noStrike">
+              <a:solidFill>
+                <a:srgbClr val="000000"/>
+              </a:solidFill>
+              <a:latin typeface="Arial"/>
+            </a:endParaRPr>
+          </a:p>
+          <a:p>
+            <a:pPr marL="343080" indent="-343080" defTabSz="914400">
+              <a:lnSpc>
+                <a:spcPct val="100000"/>
+              </a:lnSpc>
+              <a:spcBef>
+                <a:spcPts val="1199"/>
+              </a:spcBef>
+              <a:buClr>
+                <a:srgbClr val="000000"/>
+              </a:buClr>
+              <a:buFont typeface="Arial"/>
+              <a:buChar char="•"/>
+            </a:pPr>
+            <a:r>
+              <a:rPr b="0" lang="en-GB" sz="2000" spc="-1" strike="noStrike">
+                <a:solidFill>
+                  <a:schemeClr val="dk1"/>
+                </a:solidFill>
+                <a:latin typeface="Arial"/>
+                <a:ea typeface="DejaVu Sans"/>
+              </a:rPr>
+              <a:t>Automated simulation of OVC-HEV</a:t>
+            </a:r>
+            <a:endParaRPr b="0" lang="en-US" sz="2000" spc="-1" strike="noStrike">
+              <a:solidFill>
+                <a:srgbClr val="000000"/>
+              </a:solidFill>
+              <a:latin typeface="Arial"/>
+            </a:endParaRPr>
+          </a:p>
+          <a:p>
+            <a:pPr lvl="1" marL="743040" indent="-285840" defTabSz="914400">
+              <a:lnSpc>
+                <a:spcPct val="100000"/>
+              </a:lnSpc>
+              <a:spcBef>
+                <a:spcPts val="1199"/>
+              </a:spcBef>
+              <a:buClr>
+                <a:srgbClr val="000000"/>
+              </a:buClr>
+              <a:buFont typeface="Arial"/>
+              <a:buChar char="•"/>
+            </a:pPr>
+            <a:r>
+              <a:rPr b="0" lang="en-GB" sz="1600" spc="-1" strike="noStrike">
+                <a:solidFill>
+                  <a:schemeClr val="dk1"/>
+                </a:solidFill>
+                <a:latin typeface="Arial"/>
+                <a:ea typeface="DejaVu Sans"/>
+              </a:rPr>
+              <a:t>Charge depleting mode (CD): The propulsion energy is provided by the electric storage only</a:t>
+            </a:r>
+            <a:endParaRPr b="0" lang="en-US" sz="1600" spc="-1" strike="noStrike">
+              <a:solidFill>
+                <a:srgbClr val="000000"/>
+              </a:solidFill>
+              <a:latin typeface="Arial"/>
+            </a:endParaRPr>
+          </a:p>
+          <a:p>
+            <a:pPr lvl="1" marL="743040" indent="-285840" defTabSz="914400">
+              <a:lnSpc>
+                <a:spcPct val="100000"/>
+              </a:lnSpc>
+              <a:spcBef>
+                <a:spcPts val="1199"/>
+              </a:spcBef>
+              <a:buClr>
+                <a:srgbClr val="000000"/>
+              </a:buClr>
+              <a:buFont typeface="Arial"/>
+              <a:buChar char="•"/>
+            </a:pPr>
+            <a:r>
+              <a:rPr b="0" lang="en-GB" sz="1600" spc="-1" strike="noStrike">
+                <a:solidFill>
+                  <a:schemeClr val="dk1"/>
+                </a:solidFill>
+                <a:latin typeface="Arial"/>
+                <a:ea typeface="DejaVu Sans"/>
+              </a:rPr>
+              <a:t>Charge sustaining mode (CS): The propulsion energy is provided by the fuel storage</a:t>
+            </a:r>
+            <a:endParaRPr b="0" lang="en-US" sz="1600" spc="-1" strike="noStrike">
+              <a:solidFill>
+                <a:srgbClr val="000000"/>
+              </a:solidFill>
+              <a:latin typeface="Arial"/>
+            </a:endParaRPr>
+          </a:p>
+        </p:txBody>
+      </p:sp>
+    </p:spTree>
+  </p:cSld>
+  <mc:AlternateContent>
+    <mc:Choice Requires="p14">
+      <p:transition spd="slow" p14:dur="2000"/>
+    </mc:Choice>
+    <mc:Fallback>
+      <p:transition spd="slow"/>
+    </mc:Fallback>
+  </mc:AlternateContent>
+</p:sld>
+</file>
+
+<file path=ppt/slides/slide18.xml><?xml version="1.0" encoding="utf-8"?>
+<p:sld xmlns:a="http://schemas.openxmlformats.org/drawingml/2006/main" xmlns:p="http://schemas.openxmlformats.org/presentationml/2006/main" xmlns:r="http://schemas.openxmlformats.org/officeDocument/2006/relationships" xmlns:p14="http://schemas.microsoft.com/office/powerpoint/2010/main" xmlns:p15="http://schemas.microsoft.com/office/powerpoint/2012/main" xmlns:mc="http://schemas.openxmlformats.org/markup-compatibility/2006">
+  <p:cSld>
+    <p:spTree>
+      <p:nvGrpSpPr>
+        <p:cNvPr id="1" name=""/>
+        <p:cNvGrpSpPr/>
+        <p:nvPr/>
+      </p:nvGrpSpPr>
+      <p:grpSpPr>
+        <a:xfrm>
+          <a:off x="0" y="0"/>
+          <a:ext cx="0" cy="0"/>
+          <a:chOff x="0" y="0"/>
+          <a:chExt cx="0" cy="0"/>
+        </a:xfrm>
+      </p:grpSpPr>
+      <p:sp>
+        <p:nvSpPr>
+          <p:cNvPr id="76" name="PlaceHolder 1"/>
+          <p:cNvSpPr>
+            <a:spLocks noGrp="1"/>
+          </p:cNvSpPr>
+          <p:nvPr>
+            <p:ph type="title"/>
+          </p:nvPr>
+        </p:nvSpPr>
+        <p:spPr>
+          <a:xfrm>
+            <a:off x="588240" y="453600"/>
+            <a:ext cx="8225640" cy="1125000"/>
+          </a:xfrm>
+          <a:prstGeom prst="rect">
+            <a:avLst/>
+          </a:prstGeom>
+          <a:noFill/>
+          <a:ln w="0">
+            <a:noFill/>
+          </a:ln>
+        </p:spPr>
+        <p:txBody>
+          <a:bodyPr lIns="0" rIns="0" tIns="0" bIns="0" anchor="ctr">
+            <a:noAutofit/>
+          </a:bodyPr>
+          <a:p>
+            <a:pPr indent="0" defTabSz="914400">
+              <a:lnSpc>
+                <a:spcPct val="90000"/>
+              </a:lnSpc>
+              <a:buNone/>
+              <a:tabLst>
+                <a:tab algn="l" pos="0"/>
+              </a:tabLst>
+            </a:pPr>
+            <a:r>
+              <a:rPr b="1" lang="en-US" sz="2400" spc="-1" strike="noStrike">
+                <a:solidFill>
+                  <a:srgbClr val="990000"/>
+                </a:solidFill>
+                <a:latin typeface="Arial"/>
+                <a:ea typeface="DejaVu Sans"/>
+              </a:rPr>
+              <a:t>Implementation of Declaration Mode for xEV-Lorries</a:t>
+            </a:r>
+            <a:br>
+              <a:rPr sz="2400"/>
+            </a:br>
+            <a:endParaRPr b="0" lang="en-US" sz="2400" spc="-1" strike="noStrike">
+              <a:solidFill>
+                <a:srgbClr val="000000"/>
+              </a:solidFill>
+              <a:latin typeface="Arial"/>
+            </a:endParaRPr>
+          </a:p>
+        </p:txBody>
+      </p:sp>
+      <p:sp>
+        <p:nvSpPr>
+          <p:cNvPr id="77" name="Inhaltsplatzhalter 5"/>
           <p:cNvSpPr/>
           <p:nvPr/>
         </p:nvSpPr>
         <p:spPr>
           <a:xfrm>
             <a:off x="749520" y="1085040"/>
-            <a:ext cx="8392680" cy="5126760"/>
+            <a:ext cx="8390880" cy="5124960"/>
           </a:xfrm>
           <a:prstGeom prst="rect">
             <a:avLst/>
@@ -8870,7 +9359,7 @@
                 <a:spcPts val="1199"/>
               </a:spcBef>
             </a:pPr>
-            <a:endParaRPr b="0" lang="en-GB" sz="1800" spc="-1" strike="noStrike">
+            <a:endParaRPr b="0" lang="en-US" sz="1800" spc="-1" strike="noStrike">
               <a:solidFill>
                 <a:srgbClr val="000000"/>
               </a:solidFill>
@@ -8901,7 +9390,7 @@
               </a:rPr>
               <a:t>Generic E-PTO for PEV and S-HEV in Declaration Mode</a:t>
             </a:r>
-            <a:endParaRPr b="0" lang="en-GB" sz="2000" spc="-1" strike="noStrike">
+            <a:endParaRPr b="0" lang="en-US" sz="2000" spc="-1" strike="noStrike">
               <a:solidFill>
                 <a:srgbClr val="000000"/>
               </a:solidFill>
@@ -8932,7 +9421,7 @@
               </a:rPr>
               <a:t>E-PTO for PEV and S-HEV in Engineering Mode</a:t>
             </a:r>
-            <a:endParaRPr b="0" lang="en-GB" sz="2000" spc="-1" strike="noStrike">
+            <a:endParaRPr b="0" lang="en-US" sz="2000" spc="-1" strike="noStrike">
               <a:solidFill>
                 <a:srgbClr val="000000"/>
               </a:solidFill>
@@ -8948,7 +9437,7 @@
                 <a:spcPts val="1199"/>
               </a:spcBef>
             </a:pPr>
-            <a:endParaRPr b="0" lang="en-GB" sz="1800" spc="-1" strike="noStrike">
+            <a:endParaRPr b="0" lang="en-US" sz="1800" spc="-1" strike="noStrike">
               <a:solidFill>
                 <a:srgbClr val="000000"/>
               </a:solidFill>
@@ -8959,14 +9448,14 @@
       </p:sp>
       <p:sp>
         <p:nvSpPr>
-          <p:cNvPr id="76" name="Titel 4"/>
+          <p:cNvPr id="78" name="Titel 4"/>
           <p:cNvSpPr/>
           <p:nvPr/>
         </p:nvSpPr>
         <p:spPr>
           <a:xfrm>
             <a:off x="588240" y="2622240"/>
-            <a:ext cx="8227440" cy="539640"/>
+            <a:ext cx="8225640" cy="537840"/>
           </a:xfrm>
           <a:prstGeom prst="rect">
             <a:avLst/>
@@ -9005,7 +9494,7 @@
             <a:br>
               <a:rPr sz="2400"/>
             </a:br>
-            <a:endParaRPr b="0" lang="en-GB" sz="2400" spc="-1" strike="noStrike">
+            <a:endParaRPr b="0" lang="en-US" sz="2400" spc="-1" strike="noStrike">
               <a:solidFill>
                 <a:srgbClr val="000000"/>
               </a:solidFill>
@@ -9016,7 +9505,7 @@
       </p:sp>
       <p:sp>
         <p:nvSpPr>
-          <p:cNvPr id="77" name="PlaceHolder 2"/>
+          <p:cNvPr id="79" name="PlaceHolder 2"/>
           <p:cNvSpPr>
             <a:spLocks noGrp="1"/>
           </p:cNvSpPr>
@@ -9027,7 +9516,7 @@
         <p:spPr>
           <a:xfrm>
             <a:off x="588240" y="2861280"/>
-            <a:ext cx="8392680" cy="1383120"/>
+            <a:ext cx="8390880" cy="1381320"/>
           </a:xfrm>
           <a:prstGeom prst="rect">
             <a:avLst/>
@@ -9054,7 +9543,7 @@
                 <a:tab algn="l" pos="0"/>
               </a:tabLst>
             </a:pPr>
-            <a:endParaRPr b="0" lang="en-GB" sz="1800" spc="-1" strike="noStrike">
+            <a:endParaRPr b="0" lang="en-US" sz="1800" spc="-1" strike="noStrike">
               <a:solidFill>
                 <a:srgbClr val="000000"/>
               </a:solidFill>
@@ -9088,7 +9577,7 @@
               </a:rPr>
               <a:t>Factor Method for conventional and xEV-Buses</a:t>
             </a:r>
-            <a:endParaRPr b="0" lang="en-GB" sz="2000" spc="-1" strike="noStrike">
+            <a:endParaRPr b="0" lang="en-US" sz="2000" spc="-1" strike="noStrike">
               <a:solidFill>
                 <a:srgbClr val="000000"/>
               </a:solidFill>
@@ -9122,7 +9611,7 @@
               </a:rPr>
               <a:t>Updated bus auxiliary model</a:t>
             </a:r>
-            <a:endParaRPr b="0" lang="en-GB" sz="2000" spc="-1" strike="noStrike">
+            <a:endParaRPr b="0" lang="en-US" sz="2000" spc="-1" strike="noStrike">
               <a:solidFill>
                 <a:srgbClr val="000000"/>
               </a:solidFill>
@@ -9142,7 +9631,7 @@
                 <a:tab algn="l" pos="0"/>
               </a:tabLst>
             </a:pPr>
-            <a:endParaRPr b="0" lang="en-GB" sz="2000" spc="-1" strike="noStrike">
+            <a:endParaRPr b="0" lang="en-US" sz="2000" spc="-1" strike="noStrike">
               <a:solidFill>
                 <a:srgbClr val="000000"/>
               </a:solidFill>
@@ -9162,7 +9651,7 @@
                 <a:tab algn="l" pos="0"/>
               </a:tabLst>
             </a:pPr>
-            <a:endParaRPr b="0" lang="en-GB" sz="2000" spc="-1" strike="noStrike">
+            <a:endParaRPr b="0" lang="en-US" sz="2000" spc="-1" strike="noStrike">
               <a:solidFill>
                 <a:srgbClr val="000000"/>
               </a:solidFill>
@@ -9182,7 +9671,7 @@
                 <a:tab algn="l" pos="0"/>
               </a:tabLst>
             </a:pPr>
-            <a:endParaRPr b="0" lang="en-GB" sz="1800" spc="-1" strike="noStrike">
+            <a:endParaRPr b="0" lang="en-US" sz="1800" spc="-1" strike="noStrike">
               <a:solidFill>
                 <a:srgbClr val="000000"/>
               </a:solidFill>
@@ -9234,7 +9723,7 @@
         <p:spPr>
           <a:xfrm>
             <a:off x="468360" y="476640"/>
-            <a:ext cx="8215920" cy="678600"/>
+            <a:ext cx="8214120" cy="676800"/>
           </a:xfrm>
           <a:prstGeom prst="rect">
             <a:avLst/>
@@ -9266,7 +9755,7 @@
                 <a:latin typeface="Arial"/>
                 <a:ea typeface="DejaVu Sans"/>
               </a:rPr>
-              <a:t>Vecto 4.1.0.3392 RELEASE CANDIDATE</a:t>
+              <a:t>Vecto 4.1.1.3413 OFFICIAL RELEASE</a:t>
             </a:r>
             <a:br>
               <a:rPr sz="2400"/>
@@ -9279,9 +9768,9 @@
                 <a:latin typeface="Arial"/>
                 <a:ea typeface="DejaVu Sans"/>
               </a:rPr>
-              <a:t>15.04.2024</a:t>
-            </a:r>
-            <a:endParaRPr b="0" lang="en-GB" sz="1600" spc="-1" strike="noStrike">
+              <a:t>06.05.2024</a:t>
+            </a:r>
+            <a:endParaRPr b="0" lang="en-US" sz="1600" spc="-1" strike="noStrike">
               <a:solidFill>
                 <a:srgbClr val="000000"/>
               </a:solidFill>
@@ -9303,7 +9792,7 @@
         <p:spPr>
           <a:xfrm>
             <a:off x="323640" y="1639080"/>
-            <a:ext cx="8494560" cy="4451400"/>
+            <a:ext cx="8492760" cy="4449600"/>
           </a:xfrm>
           <a:prstGeom prst="rect">
             <a:avLst/>
@@ -9318,6 +9807,26 @@
             <a:noAutofit/>
           </a:bodyPr>
           <a:p>
+            <a:pPr marL="343080" indent="0" defTabSz="914400">
+              <a:lnSpc>
+                <a:spcPct val="100000"/>
+              </a:lnSpc>
+              <a:spcBef>
+                <a:spcPts val="320"/>
+              </a:spcBef>
+              <a:buNone/>
+              <a:tabLst>
+                <a:tab algn="l" pos="0"/>
+              </a:tabLst>
+            </a:pPr>
+            <a:endParaRPr b="0" lang="en-US" sz="1600" spc="-1" strike="noStrike">
+              <a:solidFill>
+                <a:srgbClr val="000000"/>
+              </a:solidFill>
+              <a:latin typeface="Arial"/>
+            </a:endParaRPr>
+          </a:p>
+          <a:p>
             <a:pPr marL="343080" indent="-343080" defTabSz="914400">
               <a:lnSpc>
                 <a:spcPct val="100000"/>
@@ -9342,50 +9851,17 @@
                 <a:latin typeface="Arial"/>
                 <a:ea typeface="DejaVu Sans"/>
               </a:rPr>
-              <a:t>Features</a:t>
-            </a:r>
-            <a:br>
-              <a:rPr sz="1600"/>
-            </a:br>
-            <a:r>
-              <a:rPr b="0" lang="en-US" sz="1200" spc="-1" strike="noStrike">
-                <a:solidFill>
-                  <a:schemeClr val="dk1"/>
-                </a:solidFill>
-                <a:latin typeface="Arial"/>
-                <a:ea typeface="DejaVu Sans"/>
-              </a:rPr>
-              <a:t>CodeEU-577: Add missing mission profiles to vocational and non-vocational</a:t>
-            </a:r>
-            <a:endParaRPr b="0" lang="en-GB" sz="1200" spc="-1" strike="noStrike">
-              <a:solidFill>
-                <a:srgbClr val="000000"/>
-              </a:solidFill>
-              <a:latin typeface="Arial"/>
-            </a:endParaRPr>
-          </a:p>
-          <a:p>
-            <a:pPr marL="343080" indent="0" defTabSz="914400">
-              <a:lnSpc>
-                <a:spcPct val="100000"/>
-              </a:lnSpc>
-              <a:spcBef>
-                <a:spcPts val="320"/>
-              </a:spcBef>
-              <a:buNone/>
-              <a:tabLst>
-                <a:tab algn="l" pos="1886040"/>
-              </a:tabLst>
-            </a:pPr>
-            <a:endParaRPr b="0" lang="en-GB" sz="1200" spc="-1" strike="noStrike">
-              <a:solidFill>
-                <a:srgbClr val="000000"/>
-              </a:solidFill>
-              <a:latin typeface="Arial"/>
-            </a:endParaRPr>
-          </a:p>
-          <a:p>
-            <a:pPr marL="343080" indent="-343080" defTabSz="914400">
+              <a:t>Bugfixes </a:t>
+            </a:r>
+            <a:endParaRPr b="0" lang="en-US" sz="1600" spc="-1" strike="noStrike">
+              <a:solidFill>
+                <a:srgbClr val="000000"/>
+              </a:solidFill>
+              <a:latin typeface="Arial"/>
+            </a:endParaRPr>
+          </a:p>
+          <a:p>
+            <a:pPr lvl="1" marL="800280" indent="-343080" defTabSz="914400">
               <a:lnSpc>
                 <a:spcPct val="100000"/>
               </a:lnSpc>
@@ -9402,16 +9878,16 @@
               </a:tabLst>
             </a:pPr>
             <a:r>
-              <a:rPr b="1" lang="en-US" sz="1600" spc="-1" strike="noStrike">
-                <a:solidFill>
-                  <a:srgbClr val="000000"/>
-                </a:solidFill>
-                <a:latin typeface="Arial"/>
-                <a:ea typeface="DejaVu Sans"/>
-              </a:rPr>
-              <a:t>Bugfixes (1/4)</a:t>
-            </a:r>
-            <a:endParaRPr b="0" lang="en-GB" sz="1600" spc="-1" strike="noStrike">
+              <a:rPr b="0" lang="en-US" sz="1200" spc="-1" strike="noStrike">
+                <a:solidFill>
+                  <a:srgbClr val="000000"/>
+                </a:solidFill>
+                <a:latin typeface="Arial"/>
+                <a:ea typeface="DejaVu Sans"/>
+              </a:rPr>
+              <a:t>CodeEU-615: Multistep freezes after loading VIF chassis</a:t>
+            </a:r>
+            <a:endParaRPr b="0" lang="en-US" sz="1200" spc="-1" strike="noStrike">
               <a:solidFill>
                 <a:srgbClr val="000000"/>
               </a:solidFill>
@@ -9443,9 +9919,9 @@
                 <a:latin typeface="Arial"/>
                 <a:ea typeface="DejaVu Sans"/>
               </a:rPr>
-              <a:t>CodeEU-331: Gear 1 DrivingActionAccelerate: Fail</a:t>
-            </a:r>
-            <a:endParaRPr b="0" lang="en-GB" sz="1200" spc="-1" strike="noStrike">
+              <a:t>CodeEU-616: Multistep tool freezes</a:t>
+            </a:r>
+            <a:endParaRPr b="0" lang="en-US" sz="1200" spc="-1" strike="noStrike">
               <a:solidFill>
                 <a:srgbClr val="000000"/>
               </a:solidFill>
@@ -9477,9 +9953,9 @@
                 <a:latin typeface="Arial"/>
                 <a:ea typeface="DejaVu Sans"/>
               </a:rPr>
-              <a:t>CodeEU-367: Gear 1 DrivingActionAccelerate: Fail</a:t>
-            </a:r>
-            <a:endParaRPr b="0" lang="en-GB" sz="1200" spc="-1" strike="noStrike">
+              <a:t>CodeEU-619: restore wrong exempted techs in XSD for backwards compatibility</a:t>
+            </a:r>
+            <a:endParaRPr b="0" lang="en-US" sz="1200" spc="-1" strike="noStrike">
               <a:solidFill>
                 <a:srgbClr val="000000"/>
               </a:solidFill>
@@ -9511,9 +9987,9 @@
                 <a:latin typeface="Arial"/>
                 <a:ea typeface="DejaVu Sans"/>
               </a:rPr>
-              <a:t>CodeEU-372: ADT Error on Bus Category Primary Vehicle Simulation on VECTO</a:t>
-            </a:r>
-            <a:endParaRPr b="0" lang="en-GB" sz="1200" spc="-1" strike="noStrike">
+              <a:t>CodeEU-617: Results change depending the time format</a:t>
+            </a:r>
+            <a:endParaRPr b="0" lang="en-US" sz="1200" spc="-1" strike="noStrike">
               <a:solidFill>
                 <a:srgbClr val="000000"/>
               </a:solidFill>
@@ -9545,267 +10021,9 @@
                 <a:latin typeface="Arial"/>
                 <a:ea typeface="DejaVu Sans"/>
               </a:rPr>
-              <a:t>CodeEU-373: ADT Error on Bus Category Primary Vehicle Simulation on VECTO</a:t>
-            </a:r>
-            <a:endParaRPr b="0" lang="en-GB" sz="1200" spc="-1" strike="noStrike">
-              <a:solidFill>
-                <a:srgbClr val="000000"/>
-              </a:solidFill>
-              <a:latin typeface="Arial"/>
-            </a:endParaRPr>
-          </a:p>
-          <a:p>
-            <a:pPr lvl="1" marL="800280" indent="-343080" defTabSz="914400">
-              <a:lnSpc>
-                <a:spcPct val="100000"/>
-              </a:lnSpc>
-              <a:spcBef>
-                <a:spcPts val="320"/>
-              </a:spcBef>
-              <a:buClr>
-                <a:srgbClr val="000000"/>
-              </a:buClr>
-              <a:buFont typeface="Symbol"/>
-              <a:buChar char=""/>
-              <a:tabLst>
-                <a:tab algn="l" pos="1886040"/>
-              </a:tabLst>
-            </a:pPr>
-            <a:r>
-              <a:rPr b="0" lang="en-US" sz="1200" spc="-1" strike="noStrike">
-                <a:solidFill>
-                  <a:srgbClr val="000000"/>
-                </a:solidFill>
-                <a:latin typeface="Arial"/>
-                <a:ea typeface="DejaVu Sans"/>
-              </a:rPr>
-              <a:t>CodeEU-374: ADT Error on Bus Category Primary Vehicle Simulation on VECTO</a:t>
-            </a:r>
-            <a:endParaRPr b="0" lang="en-GB" sz="1200" spc="-1" strike="noStrike">
-              <a:solidFill>
-                <a:srgbClr val="000000"/>
-              </a:solidFill>
-              <a:latin typeface="Arial"/>
-            </a:endParaRPr>
-          </a:p>
-          <a:p>
-            <a:pPr lvl="1" marL="800280" indent="-343080" defTabSz="914400">
-              <a:lnSpc>
-                <a:spcPct val="100000"/>
-              </a:lnSpc>
-              <a:spcBef>
-                <a:spcPts val="320"/>
-              </a:spcBef>
-              <a:buClr>
-                <a:srgbClr val="000000"/>
-              </a:buClr>
-              <a:buFont typeface="Symbol"/>
-              <a:buChar char=""/>
-              <a:tabLst>
-                <a:tab algn="l" pos="1886040"/>
-              </a:tabLst>
-            </a:pPr>
-            <a:r>
-              <a:rPr b="0" lang="en-US" sz="1200" spc="-1" strike="noStrike">
-                <a:solidFill>
-                  <a:srgbClr val="000000"/>
-                </a:solidFill>
-                <a:latin typeface="Arial"/>
-                <a:ea typeface="DejaVu Sans"/>
-              </a:rPr>
-              <a:t>CodeEU-375: ADT Error on Bus Category Primary Vehicle Simulation on VECTO</a:t>
-            </a:r>
-            <a:endParaRPr b="0" lang="en-GB" sz="1200" spc="-1" strike="noStrike">
-              <a:solidFill>
-                <a:srgbClr val="000000"/>
-              </a:solidFill>
-              <a:latin typeface="Arial"/>
-            </a:endParaRPr>
-          </a:p>
-          <a:p>
-            <a:pPr lvl="1" marL="800280" indent="-343080" defTabSz="914400">
-              <a:lnSpc>
-                <a:spcPct val="100000"/>
-              </a:lnSpc>
-              <a:spcBef>
-                <a:spcPts val="320"/>
-              </a:spcBef>
-              <a:buClr>
-                <a:srgbClr val="000000"/>
-              </a:buClr>
-              <a:buFont typeface="Symbol"/>
-              <a:buChar char=""/>
-              <a:tabLst>
-                <a:tab algn="l" pos="1886040"/>
-              </a:tabLst>
-            </a:pPr>
-            <a:r>
-              <a:rPr b="0" lang="en-US" sz="1200" spc="-1" strike="noStrike">
-                <a:solidFill>
-                  <a:srgbClr val="000000"/>
-                </a:solidFill>
-                <a:latin typeface="Arial"/>
-                <a:ea typeface="DejaVu Sans"/>
-              </a:rPr>
-              <a:t>CodeEU-393: Finished Run VEH-PrimaryBus_nonSmart Interurban _P32SD_ReferenceLoad with ERROR: 16</a:t>
-            </a:r>
-            <a:endParaRPr b="0" lang="en-GB" sz="1200" spc="-1" strike="noStrike">
-              <a:solidFill>
-                <a:srgbClr val="000000"/>
-              </a:solidFill>
-              <a:latin typeface="Arial"/>
-            </a:endParaRPr>
-          </a:p>
-          <a:p>
-            <a:pPr lvl="1" marL="800280" indent="-343080" defTabSz="914400">
-              <a:lnSpc>
-                <a:spcPct val="100000"/>
-              </a:lnSpc>
-              <a:spcBef>
-                <a:spcPts val="320"/>
-              </a:spcBef>
-              <a:buClr>
-                <a:srgbClr val="000000"/>
-              </a:buClr>
-              <a:buFont typeface="Symbol"/>
-              <a:buChar char=""/>
-              <a:tabLst>
-                <a:tab algn="l" pos="1886040"/>
-              </a:tabLst>
-            </a:pPr>
-            <a:r>
-              <a:rPr b="0" lang="en-US" sz="1200" spc="-1" strike="noStrike">
-                <a:solidFill>
-                  <a:srgbClr val="000000"/>
-                </a:solidFill>
-                <a:latin typeface="Arial"/>
-                <a:ea typeface="DejaVu Sans"/>
-              </a:rPr>
-              <a:t>CodeEU-439: 615 (Interurban _P32DD_ReferenceLoad) - absTime: 7129.6359 [s], distance: 53875.9765 [m], dt: 0.6388 [s], v: 0.5098 [m/s], Gear: 1 | DrivingActionAccelerate: Failed</a:t>
-            </a:r>
-            <a:endParaRPr b="0" lang="en-GB" sz="1200" spc="-1" strike="noStrike">
-              <a:solidFill>
-                <a:srgbClr val="000000"/>
-              </a:solidFill>
-              <a:latin typeface="Arial"/>
-            </a:endParaRPr>
-          </a:p>
-          <a:p>
-            <a:pPr lvl="1" marL="800280" indent="-343080" defTabSz="914400">
-              <a:lnSpc>
-                <a:spcPct val="100000"/>
-              </a:lnSpc>
-              <a:spcBef>
-                <a:spcPts val="320"/>
-              </a:spcBef>
-              <a:buClr>
-                <a:srgbClr val="000000"/>
-              </a:buClr>
-              <a:buFont typeface="Symbol"/>
-              <a:buChar char=""/>
-              <a:tabLst>
-                <a:tab algn="l" pos="1886040"/>
-              </a:tabLst>
-            </a:pPr>
-            <a:r>
-              <a:rPr b="0" lang="en-US" sz="1200" spc="-1" strike="noStrike">
-                <a:solidFill>
-                  <a:srgbClr val="000000"/>
-                </a:solidFill>
-                <a:latin typeface="Arial"/>
-                <a:ea typeface="DejaVu Sans"/>
-              </a:rPr>
-              <a:t>CodeEU-446: Finished Run VEH-PrimaryBus_nonSmart Interurban _P32SD_ReferenceLoad with ERROR: 16</a:t>
-            </a:r>
-            <a:endParaRPr b="0" lang="en-GB" sz="1200" spc="-1" strike="noStrike">
-              <a:solidFill>
-                <a:srgbClr val="000000"/>
-              </a:solidFill>
-              <a:latin typeface="Arial"/>
-            </a:endParaRPr>
-          </a:p>
-          <a:p>
-            <a:pPr lvl="1" marL="800280" indent="-343080" defTabSz="914400">
-              <a:lnSpc>
-                <a:spcPct val="100000"/>
-              </a:lnSpc>
-              <a:spcBef>
-                <a:spcPts val="320"/>
-              </a:spcBef>
-              <a:buClr>
-                <a:srgbClr val="000000"/>
-              </a:buClr>
-              <a:buFont typeface="Symbol"/>
-              <a:buChar char=""/>
-              <a:tabLst>
-                <a:tab algn="l" pos="1886040"/>
-              </a:tabLst>
-            </a:pPr>
-            <a:r>
-              <a:rPr b="0" lang="en-US" sz="1200" spc="-1" strike="noStrike">
-                <a:solidFill>
-                  <a:srgbClr val="000000"/>
-                </a:solidFill>
-                <a:latin typeface="Arial"/>
-                <a:ea typeface="DejaVu Sans"/>
-              </a:rPr>
-              <a:t>CodeEU-449: Finished Run VEH-PrimaryBus_nonSmart Interurban _P32SD_ReferenceLoad with ERROR: 16</a:t>
-            </a:r>
-            <a:endParaRPr b="0" lang="en-GB" sz="1200" spc="-1" strike="noStrike">
-              <a:solidFill>
-                <a:srgbClr val="000000"/>
-              </a:solidFill>
-              <a:latin typeface="Arial"/>
-            </a:endParaRPr>
-          </a:p>
-          <a:p>
-            <a:pPr lvl="1" marL="800280" indent="-343080" defTabSz="914400">
-              <a:lnSpc>
-                <a:spcPct val="100000"/>
-              </a:lnSpc>
-              <a:spcBef>
-                <a:spcPts val="320"/>
-              </a:spcBef>
-              <a:buClr>
-                <a:srgbClr val="000000"/>
-              </a:buClr>
-              <a:buFont typeface="Symbol"/>
-              <a:buChar char=""/>
-              <a:tabLst>
-                <a:tab algn="l" pos="1886040"/>
-              </a:tabLst>
-            </a:pPr>
-            <a:r>
-              <a:rPr b="0" lang="en-US" sz="1200" spc="-1" strike="noStrike">
-                <a:solidFill>
-                  <a:srgbClr val="000000"/>
-                </a:solidFill>
-                <a:latin typeface="Arial"/>
-                <a:ea typeface="DejaVu Sans"/>
-              </a:rPr>
-              <a:t>CodeEU-478: Finished Run VEH-PrimaryBus_nonSmart Urban _P31SD_ReferenceLoad with ERROR: 4 (Urban _P31SD_ReferenceLoad) - absTime: 8606.6241 [s], distance: 39112.5127 [m], dt: 1.1131 [s], v: 0.1833 [m/s], Gear: 1 | DrivingActionAccelerate: Failed to find operating poi</a:t>
-            </a:r>
-            <a:endParaRPr b="0" lang="en-GB" sz="1200" spc="-1" strike="noStrike">
-              <a:solidFill>
-                <a:srgbClr val="000000"/>
-              </a:solidFill>
-              <a:latin typeface="Arial"/>
-            </a:endParaRPr>
-          </a:p>
-          <a:p>
-            <a:pPr marL="800280" indent="0" defTabSz="914400">
-              <a:lnSpc>
-                <a:spcPct val="100000"/>
-              </a:lnSpc>
-              <a:spcBef>
-                <a:spcPts val="320"/>
-              </a:spcBef>
-              <a:buNone/>
-              <a:tabLst>
-                <a:tab algn="l" pos="0"/>
-              </a:tabLst>
-            </a:pPr>
-            <a:endParaRPr b="0" lang="en-GB" sz="1200" spc="-1" strike="noStrike">
+              <a:t>CodeEU-635: Revert multiple summary in CIF</a:t>
+            </a:r>
+            <a:endParaRPr b="0" lang="en-US" sz="1200" spc="-1" strike="noStrike">
               <a:solidFill>
                 <a:srgbClr val="000000"/>
               </a:solidFill>
@@ -9857,7 +10075,7 @@
         <p:spPr>
           <a:xfrm>
             <a:off x="468360" y="476640"/>
-            <a:ext cx="8215920" cy="678600"/>
+            <a:ext cx="8214120" cy="676800"/>
           </a:xfrm>
           <a:prstGeom prst="rect">
             <a:avLst/>
@@ -9904,7 +10122,7 @@
               </a:rPr>
               <a:t>15.04.2024</a:t>
             </a:r>
-            <a:endParaRPr b="0" lang="en-GB" sz="1600" spc="-1" strike="noStrike">
+            <a:endParaRPr b="0" lang="en-US" sz="1600" spc="-1" strike="noStrike">
               <a:solidFill>
                 <a:srgbClr val="000000"/>
               </a:solidFill>
@@ -9925,8 +10143,8 @@
         </p:nvSpPr>
         <p:spPr>
           <a:xfrm>
-            <a:off x="323640" y="1459080"/>
-            <a:ext cx="8494560" cy="4659480"/>
+            <a:off x="323640" y="1639080"/>
+            <a:ext cx="8492760" cy="4449600"/>
           </a:xfrm>
           <a:prstGeom prst="rect">
             <a:avLst/>
@@ -9941,26 +10159,6 @@
             <a:noAutofit/>
           </a:bodyPr>
           <a:p>
-            <a:pPr marL="343080" indent="0" defTabSz="914400">
-              <a:lnSpc>
-                <a:spcPct val="100000"/>
-              </a:lnSpc>
-              <a:spcBef>
-                <a:spcPts val="320"/>
-              </a:spcBef>
-              <a:buNone/>
-              <a:tabLst>
-                <a:tab algn="l" pos="0"/>
-              </a:tabLst>
-            </a:pPr>
-            <a:endParaRPr b="0" lang="en-GB" sz="1600" spc="-1" strike="noStrike">
-              <a:solidFill>
-                <a:srgbClr val="000000"/>
-              </a:solidFill>
-              <a:latin typeface="Arial"/>
-            </a:endParaRPr>
-          </a:p>
-          <a:p>
             <a:pPr marL="343080" indent="-343080" defTabSz="914400">
               <a:lnSpc>
                 <a:spcPct val="100000"/>
@@ -9985,17 +10183,50 @@
                 <a:latin typeface="Arial"/>
                 <a:ea typeface="DejaVu Sans"/>
               </a:rPr>
-              <a:t>Bugfixes (2/4)</a:t>
-            </a:r>
-            <a:endParaRPr b="0" lang="en-GB" sz="1600" spc="-1" strike="noStrike">
-              <a:solidFill>
-                <a:srgbClr val="000000"/>
-              </a:solidFill>
-              <a:latin typeface="Arial"/>
-            </a:endParaRPr>
-          </a:p>
-          <a:p>
-            <a:pPr lvl="1" marL="800280" indent="-343080" defTabSz="914400">
+              <a:t>Features</a:t>
+            </a:r>
+            <a:br>
+              <a:rPr sz="1600"/>
+            </a:br>
+            <a:r>
+              <a:rPr b="0" lang="en-US" sz="1200" spc="-1" strike="noStrike">
+                <a:solidFill>
+                  <a:schemeClr val="dk1"/>
+                </a:solidFill>
+                <a:latin typeface="Arial"/>
+                <a:ea typeface="DejaVu Sans"/>
+              </a:rPr>
+              <a:t>CodeEU-577: Add missing mission profiles to vocational and non-vocational</a:t>
+            </a:r>
+            <a:endParaRPr b="0" lang="en-US" sz="1200" spc="-1" strike="noStrike">
+              <a:solidFill>
+                <a:srgbClr val="000000"/>
+              </a:solidFill>
+              <a:latin typeface="Arial"/>
+            </a:endParaRPr>
+          </a:p>
+          <a:p>
+            <a:pPr marL="343080" indent="0" defTabSz="914400">
+              <a:lnSpc>
+                <a:spcPct val="100000"/>
+              </a:lnSpc>
+              <a:spcBef>
+                <a:spcPts val="320"/>
+              </a:spcBef>
+              <a:buNone/>
+              <a:tabLst>
+                <a:tab algn="l" pos="0"/>
+              </a:tabLst>
+            </a:pPr>
+            <a:endParaRPr b="0" lang="en-US" sz="1200" spc="-1" strike="noStrike">
+              <a:solidFill>
+                <a:srgbClr val="000000"/>
+              </a:solidFill>
+              <a:latin typeface="Arial"/>
+            </a:endParaRPr>
+          </a:p>
+          <a:p>
+            <a:pPr marL="343080" indent="-343080" defTabSz="914400">
               <a:lnSpc>
                 <a:spcPct val="100000"/>
               </a:lnSpc>
@@ -10012,16 +10243,16 @@
               </a:tabLst>
             </a:pPr>
             <a:r>
-              <a:rPr b="0" lang="en-US" sz="1200" spc="-1" strike="noStrike">
-                <a:solidFill>
-                  <a:srgbClr val="000000"/>
-                </a:solidFill>
-                <a:latin typeface="Arial"/>
-                <a:ea typeface="DejaVu Sans"/>
-              </a:rPr>
-              <a:t>CodeEU-481: Finished Run VEH-PrimaryBus_nonSmart Urban _P31SD_ReferenceLoad with ERROR: 4 (Urban _P31SD_ReferenceLoad) - absTime: 8606.6241 [s], distance: 39112.5127 [m], dt: 1.1131 [s], v: 0.1833 [m/s], Gear: 1 |</a:t>
-            </a:r>
-            <a:endParaRPr b="0" lang="en-GB" sz="1200" spc="-1" strike="noStrike">
+              <a:rPr b="1" lang="en-US" sz="1600" spc="-1" strike="noStrike">
+                <a:solidFill>
+                  <a:srgbClr val="000000"/>
+                </a:solidFill>
+                <a:latin typeface="Arial"/>
+                <a:ea typeface="DejaVu Sans"/>
+              </a:rPr>
+              <a:t>Bugfixes (1/4)</a:t>
+            </a:r>
+            <a:endParaRPr b="0" lang="en-US" sz="1600" spc="-1" strike="noStrike">
               <a:solidFill>
                 <a:srgbClr val="000000"/>
               </a:solidFill>
@@ -10053,9 +10284,9 @@
                 <a:latin typeface="Arial"/>
                 <a:ea typeface="DejaVu Sans"/>
               </a:rPr>
-              <a:t>CodeEU-488: Finished Run VEH-PrimaryBus_nonSmart Urban _P31SD_ReferenceLoad with ERROR: 4 (Urban _P31SD_ReferenceLoad) - absTime: 8606.6241 [s], distance: 39112.5127 [m], dt: 1.1131 [s], v: 0.1833 [m/s], Gear: 1 | DrivingActionAccelerate: Failed to find operating poi</a:t>
-            </a:r>
-            <a:endParaRPr b="0" lang="en-GB" sz="1200" spc="-1" strike="noStrike">
+              <a:t>CodeEU-331: Gear 1 DrivingActionAccelerate: Fail</a:t>
+            </a:r>
+            <a:endParaRPr b="0" lang="en-US" sz="1200" spc="-1" strike="noStrike">
               <a:solidFill>
                 <a:srgbClr val="000000"/>
               </a:solidFill>
@@ -10087,9 +10318,9 @@
                 <a:latin typeface="Arial"/>
                 <a:ea typeface="DejaVu Sans"/>
               </a:rPr>
-              <a:t>CodeEU-494: Finished Run VEH-PrimaryBus_nonSmart Urban _P31SD_ReferenceLoad with ERROR: 26 (Urban _P31SD_ReferenceLoad) - absTime: 8606.6241 [s], distance: 39112.5127 [m], dt: 1.1131 [s], v: 0.1833 [m/s], Gear: 1 | DrivingActionAccelerate: Failed to fi</a:t>
-            </a:r>
-            <a:endParaRPr b="0" lang="en-GB" sz="1200" spc="-1" strike="noStrike">
+              <a:t>CodeEU-367: Gear 1 DrivingActionAccelerate: Fail</a:t>
+            </a:r>
+            <a:endParaRPr b="0" lang="en-US" sz="1200" spc="-1" strike="noStrike">
               <a:solidFill>
                 <a:srgbClr val="000000"/>
               </a:solidFill>
@@ -10121,9 +10352,9 @@
                 <a:latin typeface="Arial"/>
                 <a:ea typeface="DejaVu Sans"/>
               </a:rPr>
-              <a:t>CodeEU-420: Finished Run VEH-PrimaryBus_nonSmart Interurban _P32SD_ReferenceLoad with ERROR: 16</a:t>
-            </a:r>
-            <a:endParaRPr b="0" lang="en-GB" sz="1200" spc="-1" strike="noStrike">
+              <a:t>CodeEU-372: ADT Error on Bus Category Primary Vehicle Simulation on VECTO</a:t>
+            </a:r>
+            <a:endParaRPr b="0" lang="en-US" sz="1200" spc="-1" strike="noStrike">
               <a:solidFill>
                 <a:srgbClr val="000000"/>
               </a:solidFill>
@@ -10155,9 +10386,9 @@
                 <a:latin typeface="Arial"/>
                 <a:ea typeface="DejaVu Sans"/>
               </a:rPr>
-              <a:t>CodeEU-573: Unhandled powertrain architecture Conventional Vehicle to calculate gradability</a:t>
-            </a:r>
-            <a:endParaRPr b="0" lang="en-GB" sz="1200" spc="-1" strike="noStrike">
+              <a:t>CodeEU-373: ADT Error on Bus Category Primary Vehicle Simulation on VECTO</a:t>
+            </a:r>
+            <a:endParaRPr b="0" lang="en-US" sz="1200" spc="-1" strike="noStrike">
               <a:solidFill>
                 <a:srgbClr val="000000"/>
               </a:solidFill>
@@ -10189,9 +10420,9 @@
                 <a:latin typeface="Arial"/>
                 <a:ea typeface="DejaVu Sans"/>
               </a:rPr>
-              <a:t>CodeEU-582: unhandled powertrain architecture ConventionalVehicle to calculate gradability, 11:44:36.63,</a:t>
-            </a:r>
-            <a:endParaRPr b="0" lang="en-GB" sz="1200" spc="-1" strike="noStrike">
+              <a:t>CodeEU-374: ADT Error on Bus Category Primary Vehicle Simulation on VECTO</a:t>
+            </a:r>
+            <a:endParaRPr b="0" lang="en-US" sz="1200" spc="-1" strike="noStrike">
               <a:solidFill>
                 <a:srgbClr val="000000"/>
               </a:solidFill>
@@ -10223,9 +10454,9 @@
                 <a:latin typeface="Arial"/>
                 <a:ea typeface="DejaVu Sans"/>
               </a:rPr>
-              <a:t>CodeEU-595: Inconsistency exempted vehicles "Fuel cell vehicle" vs. "FCV Article 9 exempted"</a:t>
-            </a:r>
-            <a:endParaRPr b="0" lang="en-GB" sz="1200" spc="-1" strike="noStrike">
+              <a:t>CodeEU-375: ADT Error on Bus Category Primary Vehicle Simulation on VECTO</a:t>
+            </a:r>
+            <a:endParaRPr b="0" lang="en-US" sz="1200" spc="-1" strike="noStrike">
               <a:solidFill>
                 <a:srgbClr val="000000"/>
               </a:solidFill>
@@ -10257,9 +10488,9 @@
                 <a:latin typeface="Arial"/>
                 <a:ea typeface="DejaVu Sans"/>
               </a:rPr>
-              <a:t>CodeEU-501: Help regarding VTP vdri format is not up to date in v4</a:t>
-            </a:r>
-            <a:endParaRPr b="0" lang="en-GB" sz="1200" spc="-1" strike="noStrike">
+              <a:t>CodeEU-393: Finished Run VEH-PrimaryBus_nonSmart Interurban _P32SD_ReferenceLoad with ERROR: 16</a:t>
+            </a:r>
+            <a:endParaRPr b="0" lang="en-US" sz="1200" spc="-1" strike="noStrike">
               <a:solidFill>
                 <a:srgbClr val="000000"/>
               </a:solidFill>
@@ -10291,9 +10522,9 @@
                 <a:latin typeface="Arial"/>
                 <a:ea typeface="DejaVu Sans"/>
               </a:rPr>
-              <a:t>CodeEU-594: inadequate validation for auxiliaries in completed vehicle XML</a:t>
-            </a:r>
-            <a:endParaRPr b="0" lang="en-GB" sz="1200" spc="-1" strike="noStrike">
+              <a:t>CodeEU-439: 615 (Interurban _P32DD_ReferenceLoad) - absTime: 7129.6359 [s], distance: 53875.9765 [m], dt: 0.6388 [s], v: 0.5098 [m/s], Gear: 1 | DrivingActionAccelerate: Failed</a:t>
+            </a:r>
+            <a:endParaRPr b="0" lang="en-US" sz="1200" spc="-1" strike="noStrike">
               <a:solidFill>
                 <a:srgbClr val="000000"/>
               </a:solidFill>
@@ -10325,9 +10556,9 @@
                 <a:latin typeface="Arial"/>
                 <a:ea typeface="DejaVu Sans"/>
               </a:rPr>
-              <a:t>CodeEU-580: Potential error in XML schema v2.4 (exempted vehicles)</a:t>
-            </a:r>
-            <a:endParaRPr b="0" lang="en-GB" sz="1200" spc="-1" strike="noStrike">
+              <a:t>CodeEU-446: Finished Run VEH-PrimaryBus_nonSmart Interurban _P32SD_ReferenceLoad with ERROR: 16</a:t>
+            </a:r>
+            <a:endParaRPr b="0" lang="en-US" sz="1200" spc="-1" strike="noStrike">
               <a:solidFill>
                 <a:srgbClr val="000000"/>
               </a:solidFill>
@@ -10359,9 +10590,9 @@
                 <a:latin typeface="Arial"/>
                 <a:ea typeface="DejaVu Sans"/>
               </a:rPr>
-              <a:t>CodeEU-551: Article-10-2 XLRASF5E00G419905</a:t>
-            </a:r>
-            <a:endParaRPr b="0" lang="en-GB" sz="1200" spc="-1" strike="noStrike">
+              <a:t>CodeEU-449: Finished Run VEH-PrimaryBus_nonSmart Interurban _P32SD_ReferenceLoad with ERROR: 16</a:t>
+            </a:r>
+            <a:endParaRPr b="0" lang="en-US" sz="1200" spc="-1" strike="noStrike">
               <a:solidFill>
                 <a:srgbClr val="000000"/>
               </a:solidFill>
@@ -10393,43 +10624,29 @@
                 <a:latin typeface="Arial"/>
                 <a:ea typeface="DejaVu Sans"/>
               </a:rPr>
-              <a:t>CodeEU-547: Max ICE Off timespan for buses</a:t>
-            </a:r>
-            <a:endParaRPr b="0" lang="en-GB" sz="1200" spc="-1" strike="noStrike">
-              <a:solidFill>
-                <a:srgbClr val="000000"/>
-              </a:solidFill>
-              <a:latin typeface="Arial"/>
-            </a:endParaRPr>
-          </a:p>
-          <a:p>
-            <a:pPr lvl="1" marL="800280" indent="-343080" defTabSz="914400">
+              <a:t>CodeEU-478: Finished Run VEH-PrimaryBus_nonSmart Urban _P31SD_ReferenceLoad with ERROR: 4 (Urban _P31SD_ReferenceLoad) - absTime: 8606.6241 [s], distance: 39112.5127 [m], dt: 1.1131 [s], v: 0.1833 [m/s], Gear: 1 | DrivingActionAccelerate: Failed to find operating poi</a:t>
+            </a:r>
+            <a:endParaRPr b="0" lang="en-US" sz="1200" spc="-1" strike="noStrike">
+              <a:solidFill>
+                <a:srgbClr val="000000"/>
+              </a:solidFill>
+              <a:latin typeface="Arial"/>
+            </a:endParaRPr>
+          </a:p>
+          <a:p>
+            <a:pPr marL="800280" indent="0" defTabSz="914400">
               <a:lnSpc>
                 <a:spcPct val="100000"/>
               </a:lnSpc>
               <a:spcBef>
                 <a:spcPts val="320"/>
               </a:spcBef>
-              <a:buClr>
-                <a:srgbClr val="000000"/>
-              </a:buClr>
-              <a:buFont typeface="Symbol"/>
-              <a:buChar char=""/>
-              <a:tabLst>
-                <a:tab algn="l" pos="1886040"/>
-              </a:tabLst>
-            </a:pPr>
-            <a:r>
-              <a:rPr b="0" lang="en-US" sz="1200" spc="-1" strike="noStrike">
-                <a:solidFill>
-                  <a:srgbClr val="000000"/>
-                </a:solidFill>
-                <a:latin typeface="Arial"/>
-                <a:ea typeface="DejaVu Sans"/>
-              </a:rPr>
-              <a:t>CodeEU-583: Incorrect internal resistance for SuperCap used in factor method</a:t>
-            </a:r>
-            <a:endParaRPr b="0" lang="en-GB" sz="1200" spc="-1" strike="noStrike">
+              <a:buNone/>
+              <a:tabLst>
+                <a:tab algn="l" pos="0"/>
+              </a:tabLst>
+            </a:pPr>
+            <a:endParaRPr b="0" lang="en-US" sz="1200" spc="-1" strike="noStrike">
               <a:solidFill>
                 <a:srgbClr val="000000"/>
               </a:solidFill>
@@ -10481,7 +10698,7 @@
         <p:spPr>
           <a:xfrm>
             <a:off x="468360" y="476640"/>
-            <a:ext cx="8215920" cy="678600"/>
+            <a:ext cx="8214120" cy="676800"/>
           </a:xfrm>
           <a:prstGeom prst="rect">
             <a:avLst/>
@@ -10528,7 +10745,7 @@
               </a:rPr>
               <a:t>15.04.2024</a:t>
             </a:r>
-            <a:endParaRPr b="0" lang="en-GB" sz="1600" spc="-1" strike="noStrike">
+            <a:endParaRPr b="0" lang="en-US" sz="1600" spc="-1" strike="noStrike">
               <a:solidFill>
                 <a:srgbClr val="000000"/>
               </a:solidFill>
@@ -10550,7 +10767,7 @@
         <p:spPr>
           <a:xfrm>
             <a:off x="323640" y="1459080"/>
-            <a:ext cx="8494560" cy="4659480"/>
+            <a:ext cx="8492760" cy="4657680"/>
           </a:xfrm>
           <a:prstGeom prst="rect">
             <a:avLst/>
@@ -10577,7 +10794,7 @@
                 <a:tab algn="l" pos="0"/>
               </a:tabLst>
             </a:pPr>
-            <a:endParaRPr b="0" lang="en-GB" sz="1600" spc="-1" strike="noStrike">
+            <a:endParaRPr b="0" lang="en-US" sz="1600" spc="-1" strike="noStrike">
               <a:solidFill>
                 <a:srgbClr val="000000"/>
               </a:solidFill>
@@ -10609,9 +10826,9 @@
                 <a:latin typeface="Arial"/>
                 <a:ea typeface="DejaVu Sans"/>
               </a:rPr>
-              <a:t>Bugfixes (3/4)</a:t>
-            </a:r>
-            <a:endParaRPr b="0" lang="en-GB" sz="1600" spc="-1" strike="noStrike">
+              <a:t>Bugfixes (2/4)</a:t>
+            </a:r>
+            <a:endParaRPr b="0" lang="en-US" sz="1600" spc="-1" strike="noStrike">
               <a:solidFill>
                 <a:srgbClr val="000000"/>
               </a:solidFill>
@@ -10643,9 +10860,9 @@
                 <a:latin typeface="Arial"/>
                 <a:ea typeface="DejaVu Sans"/>
               </a:rPr>
-              <a:t>CodeEU-571: Article10-2-issue | VECTO-4.0.3 | Order-Nr 28202896 | HEV P1 Error Mercedes-Benz and Setra Hybrid Buses</a:t>
-            </a:r>
-            <a:endParaRPr b="0" lang="en-GB" sz="1200" spc="-1" strike="noStrike">
+              <a:t>CodeEU-481: Finished Run VEH-PrimaryBus_nonSmart Urban _P31SD_ReferenceLoad with ERROR: 4 (Urban _P31SD_ReferenceLoad) - absTime: 8606.6241 [s], distance: 39112.5127 [m], dt: 1.1131 [s], v: 0.1833 [m/s], Gear: 1 |</a:t>
+            </a:r>
+            <a:endParaRPr b="0" lang="en-US" sz="1200" spc="-1" strike="noStrike">
               <a:solidFill>
                 <a:srgbClr val="000000"/>
               </a:solidFill>
@@ -10677,9 +10894,9 @@
                 <a:latin typeface="Arial"/>
                 <a:ea typeface="DejaVu Sans"/>
               </a:rPr>
-              <a:t>CodeEU-526: VTP calculation aborted on fuel consumption map</a:t>
-            </a:r>
-            <a:endParaRPr b="0" lang="en-GB" sz="1200" spc="-1" strike="noStrike">
+              <a:t>CodeEU-488: Finished Run VEH-PrimaryBus_nonSmart Urban _P31SD_ReferenceLoad with ERROR: 4 (Urban _P31SD_ReferenceLoad) - absTime: 8606.6241 [s], distance: 39112.5127 [m], dt: 1.1131 [s], v: 0.1833 [m/s], Gear: 1 | DrivingActionAccelerate: Failed to find operating poi</a:t>
+            </a:r>
+            <a:endParaRPr b="0" lang="en-US" sz="1200" spc="-1" strike="noStrike">
               <a:solidFill>
                 <a:srgbClr val="000000"/>
               </a:solidFill>
@@ -10711,9 +10928,9 @@
                 <a:latin typeface="Arial"/>
                 <a:ea typeface="DejaVu Sans"/>
               </a:rPr>
-              <a:t>CodeEU-502: Error in VECTO calculation WMA10CZZ0RF022326</a:t>
-            </a:r>
-            <a:endParaRPr b="0" lang="en-GB" sz="1200" spc="-1" strike="noStrike">
+              <a:t>CodeEU-494: Finished Run VEH-PrimaryBus_nonSmart Urban _P31SD_ReferenceLoad with ERROR: 26 (Urban _P31SD_ReferenceLoad) - absTime: 8606.6241 [s], distance: 39112.5127 [m], dt: 1.1131 [s], v: 0.1833 [m/s], Gear: 1 | DrivingActionAccelerate: Failed to fi</a:t>
+            </a:r>
+            <a:endParaRPr b="0" lang="en-US" sz="1200" spc="-1" strike="noStrike">
               <a:solidFill>
                 <a:srgbClr val="000000"/>
               </a:solidFill>
@@ -10745,9 +10962,9 @@
                 <a:latin typeface="Arial"/>
                 <a:ea typeface="DejaVu Sans"/>
               </a:rPr>
-              <a:t>CodeEU-401: Electric steering system with conventional vehicle not according to 2017/2400</a:t>
-            </a:r>
-            <a:endParaRPr b="0" lang="en-GB" sz="1200" spc="-1" strike="noStrike">
+              <a:t>CodeEU-420: Finished Run VEH-PrimaryBus_nonSmart Interurban _P32SD_ReferenceLoad with ERROR: 16</a:t>
+            </a:r>
+            <a:endParaRPr b="0" lang="en-US" sz="1200" spc="-1" strike="noStrike">
               <a:solidFill>
                 <a:srgbClr val="000000"/>
               </a:solidFill>
@@ -10779,9 +10996,9 @@
                 <a:latin typeface="Arial"/>
                 <a:ea typeface="DejaVu Sans"/>
               </a:rPr>
-              <a:t>CodeEU-476: Setting Initial SoC in REESS editor leads to error</a:t>
-            </a:r>
-            <a:endParaRPr b="0" lang="en-GB" sz="1200" spc="-1" strike="noStrike">
+              <a:t>CodeEU-573: Unhandled powertrain architecture Conventional Vehicle to calculate gradability</a:t>
+            </a:r>
+            <a:endParaRPr b="0" lang="en-US" sz="1200" spc="-1" strike="noStrike">
               <a:solidFill>
                 <a:srgbClr val="000000"/>
               </a:solidFill>
@@ -10813,9 +11030,9 @@
                 <a:latin typeface="Arial"/>
                 <a:ea typeface="DejaVu Sans"/>
               </a:rPr>
-              <a:t>CodeEU-533: Question about heavy lorry_IEPC_Gb×4speed: Failed to generate electric power map - at least two negative entries are required</a:t>
-            </a:r>
-            <a:endParaRPr b="0" lang="en-GB" sz="1200" spc="-1" strike="noStrike">
+              <a:t>CodeEU-582: unhandled powertrain architecture ConventionalVehicle to calculate gradability, 11:44:36.63,</a:t>
+            </a:r>
+            <a:endParaRPr b="0" lang="en-US" sz="1200" spc="-1" strike="noStrike">
               <a:solidFill>
                 <a:srgbClr val="000000"/>
               </a:solidFill>
@@ -10847,9 +11064,9 @@
                 <a:latin typeface="Arial"/>
                 <a:ea typeface="DejaVu Sans"/>
               </a:rPr>
-              <a:t>CodeEU-456: Clarification Documentation official Results</a:t>
-            </a:r>
-            <a:endParaRPr b="0" lang="en-GB" sz="1200" spc="-1" strike="noStrike">
+              <a:t>CodeEU-595: Inconsistency exempted vehicles "Fuel cell vehicle" vs. "FCV Article 9 exempted"</a:t>
+            </a:r>
+            <a:endParaRPr b="0" lang="en-US" sz="1200" spc="-1" strike="noStrike">
               <a:solidFill>
                 <a:srgbClr val="000000"/>
               </a:solidFill>
@@ -10881,9 +11098,9 @@
                 <a:latin typeface="Arial"/>
                 <a:ea typeface="DejaVu Sans"/>
               </a:rPr>
-              <a:t>CodeEU-506: Article 10(2) issue - VIN YS2P6X200R2201285</a:t>
-            </a:r>
-            <a:endParaRPr b="0" lang="en-GB" sz="1200" spc="-1" strike="noStrike">
+              <a:t>CodeEU-501: Help regarding VTP vdri format is not up to date in v4</a:t>
+            </a:r>
+            <a:endParaRPr b="0" lang="en-US" sz="1200" spc="-1" strike="noStrike">
               <a:solidFill>
                 <a:srgbClr val="000000"/>
               </a:solidFill>
@@ -10915,9 +11132,9 @@
                 <a:latin typeface="Arial"/>
                 <a:ea typeface="DejaVu Sans"/>
               </a:rPr>
-              <a:t>CodeEU-507: Article 10(2) issue - VIN YS2P6X20005732399</a:t>
-            </a:r>
-            <a:endParaRPr b="0" lang="en-GB" sz="1200" spc="-1" strike="noStrike">
+              <a:t>CodeEU-594: inadequate validation for auxiliaries in completed vehicle XML</a:t>
+            </a:r>
+            <a:endParaRPr b="0" lang="en-US" sz="1200" spc="-1" strike="noStrike">
               <a:solidFill>
                 <a:srgbClr val="000000"/>
               </a:solidFill>
@@ -10949,9 +11166,9 @@
                 <a:latin typeface="Arial"/>
                 <a:ea typeface="DejaVu Sans"/>
               </a:rPr>
-              <a:t>CodeEU-508: Article 10(2) issue - VIN S2P6X20005734199</a:t>
-            </a:r>
-            <a:endParaRPr b="0" lang="en-GB" sz="1200" spc="-1" strike="noStrike">
+              <a:t>CodeEU-580: Potential error in XML schema v2.4 (exempted vehicles)</a:t>
+            </a:r>
+            <a:endParaRPr b="0" lang="en-US" sz="1200" spc="-1" strike="noStrike">
               <a:solidFill>
                 <a:srgbClr val="000000"/>
               </a:solidFill>
@@ -10983,9 +11200,9 @@
                 <a:latin typeface="Arial"/>
                 <a:ea typeface="DejaVu Sans"/>
               </a:rPr>
-              <a:t>CodeEU-499: Object Reference not set Error</a:t>
-            </a:r>
-            <a:endParaRPr b="0" lang="en-GB" sz="1200" spc="-1" strike="noStrike">
+              <a:t>CodeEU-551: Article-10-2 XLRASF5E00G419905</a:t>
+            </a:r>
+            <a:endParaRPr b="0" lang="en-US" sz="1200" spc="-1" strike="noStrike">
               <a:solidFill>
                 <a:srgbClr val="000000"/>
               </a:solidFill>
@@ -11017,9 +11234,9 @@
                 <a:latin typeface="Arial"/>
                 <a:ea typeface="DejaVu Sans"/>
               </a:rPr>
-              <a:t>CodeEU-546: Problem with P181 (Cooling Fan Technology) for a conventional vehicle</a:t>
-            </a:r>
-            <a:endParaRPr b="0" lang="en-GB" sz="1200" spc="-1" strike="noStrike">
+              <a:t>CodeEU-547: Max ICE Off timespan for buses</a:t>
+            </a:r>
+            <a:endParaRPr b="0" lang="en-US" sz="1200" spc="-1" strike="noStrike">
               <a:solidFill>
                 <a:srgbClr val="000000"/>
               </a:solidFill>
@@ -11051,43 +11268,9 @@
                 <a:latin typeface="Arial"/>
                 <a:ea typeface="DejaVu Sans"/>
               </a:rPr>
-              <a:t>CodeEU-516: Article10-2-issue | VECTO-4.0.3 | Order-Nr 28208044 | HEV P1 Error Mercedes-Benz and Setra Hybrid Buses</a:t>
-            </a:r>
-            <a:endParaRPr b="0" lang="en-GB" sz="1200" spc="-1" strike="noStrike">
-              <a:solidFill>
-                <a:srgbClr val="000000"/>
-              </a:solidFill>
-              <a:latin typeface="Arial"/>
-            </a:endParaRPr>
-          </a:p>
-          <a:p>
-            <a:pPr lvl="1" marL="800280" indent="-343080" defTabSz="914400">
-              <a:lnSpc>
-                <a:spcPct val="100000"/>
-              </a:lnSpc>
-              <a:spcBef>
-                <a:spcPts val="320"/>
-              </a:spcBef>
-              <a:buClr>
-                <a:srgbClr val="000000"/>
-              </a:buClr>
-              <a:buFont typeface="Symbol"/>
-              <a:buChar char=""/>
-              <a:tabLst>
-                <a:tab algn="l" pos="1886040"/>
-              </a:tabLst>
-            </a:pPr>
-            <a:r>
-              <a:rPr b="0" lang="en-US" sz="1200" spc="-1" strike="noStrike">
-                <a:solidFill>
-                  <a:srgbClr val="000000"/>
-                </a:solidFill>
-                <a:latin typeface="Arial"/>
-                <a:ea typeface="DejaVu Sans"/>
-              </a:rPr>
-              <a:t>CodeEU-517: Article10-2-issue | VECTO-4.0.3 | Order-Nr 28208037 | HEV P1 Error Mercedes-Benz and Setra Hybrid Buses</a:t>
-            </a:r>
-            <a:endParaRPr b="0" lang="en-GB" sz="1200" spc="-1" strike="noStrike">
+              <a:t>CodeEU-583: Incorrect internal resistance for SuperCap used in factor method</a:t>
+            </a:r>
+            <a:endParaRPr b="0" lang="en-US" sz="1200" spc="-1" strike="noStrike">
               <a:solidFill>
                 <a:srgbClr val="000000"/>
               </a:solidFill>
@@ -11139,7 +11322,7 @@
         <p:spPr>
           <a:xfrm>
             <a:off x="468360" y="476640"/>
-            <a:ext cx="8215920" cy="678600"/>
+            <a:ext cx="8214120" cy="676800"/>
           </a:xfrm>
           <a:prstGeom prst="rect">
             <a:avLst/>
@@ -11186,7 +11369,7 @@
               </a:rPr>
               <a:t>15.04.2024</a:t>
             </a:r>
-            <a:endParaRPr b="0" lang="en-GB" sz="1600" spc="-1" strike="noStrike">
+            <a:endParaRPr b="0" lang="en-US" sz="1600" spc="-1" strike="noStrike">
               <a:solidFill>
                 <a:srgbClr val="000000"/>
               </a:solidFill>
@@ -11208,7 +11391,7 @@
         <p:spPr>
           <a:xfrm>
             <a:off x="323640" y="1459080"/>
-            <a:ext cx="8494560" cy="4659480"/>
+            <a:ext cx="8492760" cy="4657680"/>
           </a:xfrm>
           <a:prstGeom prst="rect">
             <a:avLst/>
@@ -11235,7 +11418,7 @@
                 <a:tab algn="l" pos="0"/>
               </a:tabLst>
             </a:pPr>
-            <a:endParaRPr b="0" lang="en-GB" sz="1600" spc="-1" strike="noStrike">
+            <a:endParaRPr b="0" lang="en-US" sz="1600" spc="-1" strike="noStrike">
               <a:solidFill>
                 <a:srgbClr val="000000"/>
               </a:solidFill>
@@ -11267,9 +11450,9 @@
                 <a:latin typeface="Arial"/>
                 <a:ea typeface="DejaVu Sans"/>
               </a:rPr>
-              <a:t>Bugfixes (4/4)</a:t>
-            </a:r>
-            <a:endParaRPr b="0" lang="en-GB" sz="1600" spc="-1" strike="noStrike">
+              <a:t>Bugfixes (3/4)</a:t>
+            </a:r>
+            <a:endParaRPr b="0" lang="en-US" sz="1600" spc="-1" strike="noStrike">
               <a:solidFill>
                 <a:srgbClr val="000000"/>
               </a:solidFill>
@@ -11301,9 +11484,9 @@
                 <a:latin typeface="Arial"/>
                 <a:ea typeface="DejaVu Sans"/>
               </a:rPr>
-              <a:t>CodeEU-519: Article10-2-issue | VECTO-4.0.3 | Order-Nr 10098181 | HEV P1 Error Mercedes-Benz and Setra Hybrid Buses</a:t>
-            </a:r>
-            <a:endParaRPr b="0" lang="en-GB" sz="1200" spc="-1" strike="noStrike">
+              <a:t>CodeEU-571: Article10-2-issue | VECTO-4.0.3 | Order-Nr 28202896 | HEV P1 Error Mercedes-Benz and Setra Hybrid Buses</a:t>
+            </a:r>
+            <a:endParaRPr b="0" lang="en-US" sz="1200" spc="-1" strike="noStrike">
               <a:solidFill>
                 <a:srgbClr val="000000"/>
               </a:solidFill>
@@ -11335,9 +11518,9 @@
                 <a:latin typeface="Arial"/>
                 <a:ea typeface="DejaVu Sans"/>
               </a:rPr>
-              <a:t>CodeEU-527: Article10-2-issue | VECTO-4.0.3 | Order-Nr 28196233 | HEV P1 Error Mercedes-Benz and Setra Hybrid Buses</a:t>
-            </a:r>
-            <a:endParaRPr b="0" lang="en-GB" sz="1200" spc="-1" strike="noStrike">
+              <a:t>CodeEU-526: VTP calculation aborted on fuel consumption map</a:t>
+            </a:r>
+            <a:endParaRPr b="0" lang="en-US" sz="1200" spc="-1" strike="noStrike">
               <a:solidFill>
                 <a:srgbClr val="000000"/>
               </a:solidFill>
@@ -11369,9 +11552,9 @@
                 <a:latin typeface="Arial"/>
                 <a:ea typeface="DejaVu Sans"/>
               </a:rPr>
-              <a:t>CodeEU-528: Article10-2-issue | VECTO-4.0.3 | Order-Nr 28196652 | HEV P1 Error Mercedes-Benz and Setra Hybrid Buses</a:t>
-            </a:r>
-            <a:endParaRPr b="0" lang="en-GB" sz="1200" spc="-1" strike="noStrike">
+              <a:t>CodeEU-502: Error in VECTO calculation WMA10CZZ0RF022326</a:t>
+            </a:r>
+            <a:endParaRPr b="0" lang="en-US" sz="1200" spc="-1" strike="noStrike">
               <a:solidFill>
                 <a:srgbClr val="000000"/>
               </a:solidFill>
@@ -11403,9 +11586,9 @@
                 <a:latin typeface="Arial"/>
                 <a:ea typeface="DejaVu Sans"/>
               </a:rPr>
-              <a:t>CodeEU-338: Eco-roll only, without engine stop, impact on CO2 emission</a:t>
-            </a:r>
-            <a:endParaRPr b="0" lang="en-GB" sz="1200" spc="-1" strike="noStrike">
+              <a:t>CodeEU-401: Electric steering system with conventional vehicle not according to 2017/2400</a:t>
+            </a:r>
+            <a:endParaRPr b="0" lang="en-US" sz="1200" spc="-1" strike="noStrike">
               <a:solidFill>
                 <a:srgbClr val="000000"/>
               </a:solidFill>
@@ -11437,9 +11620,9 @@
                 <a:latin typeface="Arial"/>
                 <a:ea typeface="DejaVu Sans"/>
               </a:rPr>
-              <a:t>CodeEU-475: XML files loading in VTP Job not OK; No auxiliary data and torque curve visible, Job can't be saved in VECTO 4.0.3.3330</a:t>
-            </a:r>
-            <a:endParaRPr b="0" lang="en-GB" sz="1200" spc="-1" strike="noStrike">
+              <a:t>CodeEU-476: Setting Initial SoC in REESS editor leads to error</a:t>
+            </a:r>
+            <a:endParaRPr b="0" lang="en-US" sz="1200" spc="-1" strike="noStrike">
               <a:solidFill>
                 <a:srgbClr val="000000"/>
               </a:solidFill>
@@ -11471,9 +11654,281 @@
                 <a:latin typeface="Arial"/>
                 <a:ea typeface="DejaVu Sans"/>
               </a:rPr>
-              <a:t>CodeEU-610: VTP mode is broken due to changes in the Clutch component.</a:t>
-            </a:r>
-            <a:endParaRPr b="0" lang="en-GB" sz="1200" spc="-1" strike="noStrike">
+              <a:t>CodeEU-533: Question about heavy lorry_IEPC_Gb×4speed: Failed to generate electric power map - at least two negative entries are required</a:t>
+            </a:r>
+            <a:endParaRPr b="0" lang="en-US" sz="1200" spc="-1" strike="noStrike">
+              <a:solidFill>
+                <a:srgbClr val="000000"/>
+              </a:solidFill>
+              <a:latin typeface="Arial"/>
+            </a:endParaRPr>
+          </a:p>
+          <a:p>
+            <a:pPr lvl="1" marL="800280" indent="-343080" defTabSz="914400">
+              <a:lnSpc>
+                <a:spcPct val="100000"/>
+              </a:lnSpc>
+              <a:spcBef>
+                <a:spcPts val="320"/>
+              </a:spcBef>
+              <a:buClr>
+                <a:srgbClr val="000000"/>
+              </a:buClr>
+              <a:buFont typeface="Symbol"/>
+              <a:buChar char=""/>
+              <a:tabLst>
+                <a:tab algn="l" pos="1886040"/>
+              </a:tabLst>
+            </a:pPr>
+            <a:r>
+              <a:rPr b="0" lang="en-US" sz="1200" spc="-1" strike="noStrike">
+                <a:solidFill>
+                  <a:srgbClr val="000000"/>
+                </a:solidFill>
+                <a:latin typeface="Arial"/>
+                <a:ea typeface="DejaVu Sans"/>
+              </a:rPr>
+              <a:t>CodeEU-456: Clarification Documentation official Results</a:t>
+            </a:r>
+            <a:endParaRPr b="0" lang="en-US" sz="1200" spc="-1" strike="noStrike">
+              <a:solidFill>
+                <a:srgbClr val="000000"/>
+              </a:solidFill>
+              <a:latin typeface="Arial"/>
+            </a:endParaRPr>
+          </a:p>
+          <a:p>
+            <a:pPr lvl="1" marL="800280" indent="-343080" defTabSz="914400">
+              <a:lnSpc>
+                <a:spcPct val="100000"/>
+              </a:lnSpc>
+              <a:spcBef>
+                <a:spcPts val="320"/>
+              </a:spcBef>
+              <a:buClr>
+                <a:srgbClr val="000000"/>
+              </a:buClr>
+              <a:buFont typeface="Symbol"/>
+              <a:buChar char=""/>
+              <a:tabLst>
+                <a:tab algn="l" pos="1886040"/>
+              </a:tabLst>
+            </a:pPr>
+            <a:r>
+              <a:rPr b="0" lang="en-US" sz="1200" spc="-1" strike="noStrike">
+                <a:solidFill>
+                  <a:srgbClr val="000000"/>
+                </a:solidFill>
+                <a:latin typeface="Arial"/>
+                <a:ea typeface="DejaVu Sans"/>
+              </a:rPr>
+              <a:t>CodeEU-506: Article 10(2) issue - VIN YS2P6X200R2201285</a:t>
+            </a:r>
+            <a:endParaRPr b="0" lang="en-US" sz="1200" spc="-1" strike="noStrike">
+              <a:solidFill>
+                <a:srgbClr val="000000"/>
+              </a:solidFill>
+              <a:latin typeface="Arial"/>
+            </a:endParaRPr>
+          </a:p>
+          <a:p>
+            <a:pPr lvl="1" marL="800280" indent="-343080" defTabSz="914400">
+              <a:lnSpc>
+                <a:spcPct val="100000"/>
+              </a:lnSpc>
+              <a:spcBef>
+                <a:spcPts val="320"/>
+              </a:spcBef>
+              <a:buClr>
+                <a:srgbClr val="000000"/>
+              </a:buClr>
+              <a:buFont typeface="Symbol"/>
+              <a:buChar char=""/>
+              <a:tabLst>
+                <a:tab algn="l" pos="1886040"/>
+              </a:tabLst>
+            </a:pPr>
+            <a:r>
+              <a:rPr b="0" lang="en-US" sz="1200" spc="-1" strike="noStrike">
+                <a:solidFill>
+                  <a:srgbClr val="000000"/>
+                </a:solidFill>
+                <a:latin typeface="Arial"/>
+                <a:ea typeface="DejaVu Sans"/>
+              </a:rPr>
+              <a:t>CodeEU-507: Article 10(2) issue - VIN YS2P6X20005732399</a:t>
+            </a:r>
+            <a:endParaRPr b="0" lang="en-US" sz="1200" spc="-1" strike="noStrike">
+              <a:solidFill>
+                <a:srgbClr val="000000"/>
+              </a:solidFill>
+              <a:latin typeface="Arial"/>
+            </a:endParaRPr>
+          </a:p>
+          <a:p>
+            <a:pPr lvl="1" marL="800280" indent="-343080" defTabSz="914400">
+              <a:lnSpc>
+                <a:spcPct val="100000"/>
+              </a:lnSpc>
+              <a:spcBef>
+                <a:spcPts val="320"/>
+              </a:spcBef>
+              <a:buClr>
+                <a:srgbClr val="000000"/>
+              </a:buClr>
+              <a:buFont typeface="Symbol"/>
+              <a:buChar char=""/>
+              <a:tabLst>
+                <a:tab algn="l" pos="1886040"/>
+              </a:tabLst>
+            </a:pPr>
+            <a:r>
+              <a:rPr b="0" lang="en-US" sz="1200" spc="-1" strike="noStrike">
+                <a:solidFill>
+                  <a:srgbClr val="000000"/>
+                </a:solidFill>
+                <a:latin typeface="Arial"/>
+                <a:ea typeface="DejaVu Sans"/>
+              </a:rPr>
+              <a:t>CodeEU-508: Article 10(2) issue - VIN S2P6X20005734199</a:t>
+            </a:r>
+            <a:endParaRPr b="0" lang="en-US" sz="1200" spc="-1" strike="noStrike">
+              <a:solidFill>
+                <a:srgbClr val="000000"/>
+              </a:solidFill>
+              <a:latin typeface="Arial"/>
+            </a:endParaRPr>
+          </a:p>
+          <a:p>
+            <a:pPr lvl="1" marL="800280" indent="-343080" defTabSz="914400">
+              <a:lnSpc>
+                <a:spcPct val="100000"/>
+              </a:lnSpc>
+              <a:spcBef>
+                <a:spcPts val="320"/>
+              </a:spcBef>
+              <a:buClr>
+                <a:srgbClr val="000000"/>
+              </a:buClr>
+              <a:buFont typeface="Symbol"/>
+              <a:buChar char=""/>
+              <a:tabLst>
+                <a:tab algn="l" pos="1886040"/>
+              </a:tabLst>
+            </a:pPr>
+            <a:r>
+              <a:rPr b="0" lang="en-US" sz="1200" spc="-1" strike="noStrike">
+                <a:solidFill>
+                  <a:srgbClr val="000000"/>
+                </a:solidFill>
+                <a:latin typeface="Arial"/>
+                <a:ea typeface="DejaVu Sans"/>
+              </a:rPr>
+              <a:t>CodeEU-499: Object Reference not set Error</a:t>
+            </a:r>
+            <a:endParaRPr b="0" lang="en-US" sz="1200" spc="-1" strike="noStrike">
+              <a:solidFill>
+                <a:srgbClr val="000000"/>
+              </a:solidFill>
+              <a:latin typeface="Arial"/>
+            </a:endParaRPr>
+          </a:p>
+          <a:p>
+            <a:pPr lvl="1" marL="800280" indent="-343080" defTabSz="914400">
+              <a:lnSpc>
+                <a:spcPct val="100000"/>
+              </a:lnSpc>
+              <a:spcBef>
+                <a:spcPts val="320"/>
+              </a:spcBef>
+              <a:buClr>
+                <a:srgbClr val="000000"/>
+              </a:buClr>
+              <a:buFont typeface="Symbol"/>
+              <a:buChar char=""/>
+              <a:tabLst>
+                <a:tab algn="l" pos="1886040"/>
+              </a:tabLst>
+            </a:pPr>
+            <a:r>
+              <a:rPr b="0" lang="en-US" sz="1200" spc="-1" strike="noStrike">
+                <a:solidFill>
+                  <a:srgbClr val="000000"/>
+                </a:solidFill>
+                <a:latin typeface="Arial"/>
+                <a:ea typeface="DejaVu Sans"/>
+              </a:rPr>
+              <a:t>CodeEU-546: Problem with P181 (Cooling Fan Technology) for a conventional vehicle</a:t>
+            </a:r>
+            <a:endParaRPr b="0" lang="en-US" sz="1200" spc="-1" strike="noStrike">
+              <a:solidFill>
+                <a:srgbClr val="000000"/>
+              </a:solidFill>
+              <a:latin typeface="Arial"/>
+            </a:endParaRPr>
+          </a:p>
+          <a:p>
+            <a:pPr lvl="1" marL="800280" indent="-343080" defTabSz="914400">
+              <a:lnSpc>
+                <a:spcPct val="100000"/>
+              </a:lnSpc>
+              <a:spcBef>
+                <a:spcPts val="320"/>
+              </a:spcBef>
+              <a:buClr>
+                <a:srgbClr val="000000"/>
+              </a:buClr>
+              <a:buFont typeface="Symbol"/>
+              <a:buChar char=""/>
+              <a:tabLst>
+                <a:tab algn="l" pos="1886040"/>
+              </a:tabLst>
+            </a:pPr>
+            <a:r>
+              <a:rPr b="0" lang="en-US" sz="1200" spc="-1" strike="noStrike">
+                <a:solidFill>
+                  <a:srgbClr val="000000"/>
+                </a:solidFill>
+                <a:latin typeface="Arial"/>
+                <a:ea typeface="DejaVu Sans"/>
+              </a:rPr>
+              <a:t>CodeEU-516: Article10-2-issue | VECTO-4.0.3 | Order-Nr 28208044 | HEV P1 Error Mercedes-Benz and Setra Hybrid Buses</a:t>
+            </a:r>
+            <a:endParaRPr b="0" lang="en-US" sz="1200" spc="-1" strike="noStrike">
+              <a:solidFill>
+                <a:srgbClr val="000000"/>
+              </a:solidFill>
+              <a:latin typeface="Arial"/>
+            </a:endParaRPr>
+          </a:p>
+          <a:p>
+            <a:pPr lvl="1" marL="800280" indent="-343080" defTabSz="914400">
+              <a:lnSpc>
+                <a:spcPct val="100000"/>
+              </a:lnSpc>
+              <a:spcBef>
+                <a:spcPts val="320"/>
+              </a:spcBef>
+              <a:buClr>
+                <a:srgbClr val="000000"/>
+              </a:buClr>
+              <a:buFont typeface="Symbol"/>
+              <a:buChar char=""/>
+              <a:tabLst>
+                <a:tab algn="l" pos="1886040"/>
+              </a:tabLst>
+            </a:pPr>
+            <a:r>
+              <a:rPr b="0" lang="en-US" sz="1200" spc="-1" strike="noStrike">
+                <a:solidFill>
+                  <a:srgbClr val="000000"/>
+                </a:solidFill>
+                <a:latin typeface="Arial"/>
+                <a:ea typeface="DejaVu Sans"/>
+              </a:rPr>
+              <a:t>CodeEU-517: Article10-2-issue | VECTO-4.0.3 | Order-Nr 28208037 | HEV P1 Error Mercedes-Benz and Setra Hybrid Buses</a:t>
+            </a:r>
+            <a:endParaRPr b="0" lang="en-US" sz="1200" spc="-1" strike="noStrike">
               <a:solidFill>
                 <a:srgbClr val="000000"/>
               </a:solidFill>
@@ -11525,7 +11980,7 @@
         <p:spPr>
           <a:xfrm>
             <a:off x="468360" y="476640"/>
-            <a:ext cx="8215920" cy="678600"/>
+            <a:ext cx="8214120" cy="676800"/>
           </a:xfrm>
           <a:prstGeom prst="rect">
             <a:avLst/>
@@ -11557,7 +12012,7 @@
                 <a:latin typeface="Arial"/>
                 <a:ea typeface="DejaVu Sans"/>
               </a:rPr>
-              <a:t>Vecto 4.0.3.3330 OFFICIAL RELEASE</a:t>
+              <a:t>Vecto 4.1.0.3392 RELEASE CANDIDATE</a:t>
             </a:r>
             <a:br>
               <a:rPr sz="2400"/>
@@ -11570,9 +12025,9 @@
                 <a:latin typeface="Arial"/>
                 <a:ea typeface="DejaVu Sans"/>
               </a:rPr>
-              <a:t>13.02.2024</a:t>
-            </a:r>
-            <a:endParaRPr b="0" lang="en-GB" sz="1600" spc="-1" strike="noStrike">
+              <a:t>15.04.2024</a:t>
+            </a:r>
+            <a:endParaRPr b="0" lang="en-US" sz="1600" spc="-1" strike="noStrike">
               <a:solidFill>
                 <a:srgbClr val="000000"/>
               </a:solidFill>
@@ -11593,8 +12048,8 @@
         </p:nvSpPr>
         <p:spPr>
           <a:xfrm>
-            <a:off x="323640" y="1639080"/>
-            <a:ext cx="8494560" cy="4451400"/>
+            <a:off x="323640" y="1459080"/>
+            <a:ext cx="8492760" cy="4657680"/>
           </a:xfrm>
           <a:prstGeom prst="rect">
             <a:avLst/>
@@ -11609,6 +12064,26 @@
             <a:noAutofit/>
           </a:bodyPr>
           <a:p>
+            <a:pPr marL="343080" indent="0" defTabSz="914400">
+              <a:lnSpc>
+                <a:spcPct val="100000"/>
+              </a:lnSpc>
+              <a:spcBef>
+                <a:spcPts val="320"/>
+              </a:spcBef>
+              <a:buNone/>
+              <a:tabLst>
+                <a:tab algn="l" pos="0"/>
+              </a:tabLst>
+            </a:pPr>
+            <a:endParaRPr b="0" lang="en-US" sz="1600" spc="-1" strike="noStrike">
+              <a:solidFill>
+                <a:srgbClr val="000000"/>
+              </a:solidFill>
+              <a:latin typeface="Arial"/>
+            </a:endParaRPr>
+          </a:p>
+          <a:p>
             <a:pPr marL="343080" indent="-343080" defTabSz="914400">
               <a:lnSpc>
                 <a:spcPct val="100000"/>
@@ -11633,9 +12108,9 @@
                 <a:latin typeface="Arial"/>
                 <a:ea typeface="DejaVu Sans"/>
               </a:rPr>
-              <a:t>Bugfixes</a:t>
-            </a:r>
-            <a:endParaRPr b="0" lang="en-GB" sz="1600" spc="-1" strike="noStrike">
+              <a:t>Bugfixes (4/4)</a:t>
+            </a:r>
+            <a:endParaRPr b="0" lang="en-US" sz="1600" spc="-1" strike="noStrike">
               <a:solidFill>
                 <a:srgbClr val="000000"/>
               </a:solidFill>
@@ -11667,9 +12142,9 @@
                 <a:latin typeface="Arial"/>
                 <a:ea typeface="DejaVu Sans"/>
               </a:rPr>
-              <a:t>CodeEU-293: DistanceRun got an unexpected response</a:t>
-            </a:r>
-            <a:endParaRPr b="0" lang="en-GB" sz="1200" spc="-1" strike="noStrike">
+              <a:t>CodeEU-519: Article10-2-issue | VECTO-4.0.3 | Order-Nr 10098181 | HEV P1 Error Mercedes-Benz and Setra Hybrid Buses</a:t>
+            </a:r>
+            <a:endParaRPr b="0" lang="en-US" sz="1200" spc="-1" strike="noStrike">
               <a:solidFill>
                 <a:srgbClr val="000000"/>
               </a:solidFill>
@@ -11701,9 +12176,9 @@
                 <a:latin typeface="Arial"/>
                 <a:ea typeface="DejaVu Sans"/>
               </a:rPr>
-              <a:t>CodeEU-298: Object reference not set to an instance of an object</a:t>
-            </a:r>
-            <a:endParaRPr b="0" lang="en-GB" sz="1200" spc="-1" strike="noStrike">
+              <a:t>CodeEU-527: Article10-2-issue | VECTO-4.0.3 | Order-Nr 28196233 | HEV P1 Error Mercedes-Benz and Setra Hybrid Buses</a:t>
+            </a:r>
+            <a:endParaRPr b="0" lang="en-US" sz="1200" spc="-1" strike="noStrike">
               <a:solidFill>
                 <a:srgbClr val="000000"/>
               </a:solidFill>
@@ -11735,9 +12210,9 @@
                 <a:latin typeface="Arial"/>
                 <a:ea typeface="DejaVu Sans"/>
               </a:rPr>
-              <a:t>CodeEU-300: Full drive torque miscalculation</a:t>
-            </a:r>
-            <a:endParaRPr b="0" lang="en-GB" sz="1200" spc="-1" strike="noStrike">
+              <a:t>CodeEU-528: Article10-2-issue | VECTO-4.0.3 | Order-Nr 28196652 | HEV P1 Error Mercedes-Benz and Setra Hybrid Buses</a:t>
+            </a:r>
+            <a:endParaRPr b="0" lang="en-US" sz="1200" spc="-1" strike="noStrike">
               <a:solidFill>
                 <a:srgbClr val="000000"/>
               </a:solidFill>
@@ -11769,9 +12244,9 @@
                 <a:latin typeface="Arial"/>
                 <a:ea typeface="DejaVu Sans"/>
               </a:rPr>
-              <a:t>CodeEU-336: Feature: Hashing tool must validate the previous step data for multi-step jobs</a:t>
-            </a:r>
-            <a:endParaRPr b="0" lang="en-GB" sz="1200" spc="-1" strike="noStrike">
+              <a:t>CodeEU-338: Eco-roll only, without engine stop, impact on CO2 emission</a:t>
+            </a:r>
+            <a:endParaRPr b="0" lang="en-US" sz="1200" spc="-1" strike="noStrike">
               <a:solidFill>
                 <a:srgbClr val="000000"/>
               </a:solidFill>
@@ -11803,9 +12278,9 @@
                 <a:latin typeface="Arial"/>
                 <a:ea typeface="DejaVu Sans"/>
               </a:rPr>
-              <a:t>CodeEU-337: Electric Citybus - ERROR with "31a-Specific" bus configuration</a:t>
-            </a:r>
-            <a:endParaRPr b="0" lang="en-GB" sz="1200" spc="-1" strike="noStrike">
+              <a:t>CodeEU-475: XML files loading in VTP Job not OK; No auxiliary data and torque curve visible, Job can't be saved in VECTO 4.0.3.3330</a:t>
+            </a:r>
+            <a:endParaRPr b="0" lang="en-US" sz="1200" spc="-1" strike="noStrike">
               <a:solidFill>
                 <a:srgbClr val="000000"/>
               </a:solidFill>
@@ -11837,349 +12312,9 @@
                 <a:latin typeface="Arial"/>
                 <a:ea typeface="DejaVu Sans"/>
               </a:rPr>
-              <a:t>CodeEU-343: Cannot simulate Primary Vehicle using vectocmd.exe</a:t>
-            </a:r>
-            <a:endParaRPr b="0" lang="en-GB" sz="1200" spc="-1" strike="noStrike">
-              <a:solidFill>
-                <a:srgbClr val="000000"/>
-              </a:solidFill>
-              <a:latin typeface="Arial"/>
-            </a:endParaRPr>
-          </a:p>
-          <a:p>
-            <a:pPr lvl="1" marL="800280" indent="-343080" defTabSz="914400">
-              <a:lnSpc>
-                <a:spcPct val="100000"/>
-              </a:lnSpc>
-              <a:spcBef>
-                <a:spcPts val="320"/>
-              </a:spcBef>
-              <a:buClr>
-                <a:srgbClr val="000000"/>
-              </a:buClr>
-              <a:buFont typeface="Symbol"/>
-              <a:buChar char=""/>
-              <a:tabLst>
-                <a:tab algn="l" pos="1886040"/>
-              </a:tabLst>
-            </a:pPr>
-            <a:r>
-              <a:rPr b="0" lang="en-US" sz="1200" spc="-1" strike="noStrike">
-                <a:solidFill>
-                  <a:srgbClr val="000000"/>
-                </a:solidFill>
-                <a:latin typeface="Arial"/>
-                <a:ea typeface="DejaVu Sans"/>
-              </a:rPr>
-              <a:t>CodeEU-387: VECTO sometimes fails to properly read Tyre data from primary vehicle xml</a:t>
-            </a:r>
-            <a:endParaRPr b="0" lang="en-GB" sz="1200" spc="-1" strike="noStrike">
-              <a:solidFill>
-                <a:srgbClr val="000000"/>
-              </a:solidFill>
-              <a:latin typeface="Arial"/>
-            </a:endParaRPr>
-          </a:p>
-          <a:p>
-            <a:pPr lvl="1" marL="800280" indent="-343080" defTabSz="914400">
-              <a:lnSpc>
-                <a:spcPct val="100000"/>
-              </a:lnSpc>
-              <a:spcBef>
-                <a:spcPts val="320"/>
-              </a:spcBef>
-              <a:buClr>
-                <a:srgbClr val="000000"/>
-              </a:buClr>
-              <a:buFont typeface="Symbol"/>
-              <a:buChar char=""/>
-              <a:tabLst>
-                <a:tab algn="l" pos="1886040"/>
-              </a:tabLst>
-            </a:pPr>
-            <a:r>
-              <a:rPr b="0" lang="en-US" sz="1200" spc="-1" strike="noStrike">
-                <a:solidFill>
-                  <a:srgbClr val="000000"/>
-                </a:solidFill>
-                <a:latin typeface="Arial"/>
-                <a:ea typeface="DejaVu Sans"/>
-              </a:rPr>
-              <a:t>CodeEU-427: Vehicle speed resulting to exceeding max gearbox speed</a:t>
-            </a:r>
-            <a:endParaRPr b="0" lang="en-GB" sz="1200" spc="-1" strike="noStrike">
-              <a:solidFill>
-                <a:srgbClr val="000000"/>
-              </a:solidFill>
-              <a:latin typeface="Arial"/>
-            </a:endParaRPr>
-          </a:p>
-          <a:p>
-            <a:pPr lvl="1" marL="800280" indent="-343080" defTabSz="914400">
-              <a:lnSpc>
-                <a:spcPct val="100000"/>
-              </a:lnSpc>
-              <a:spcBef>
-                <a:spcPts val="320"/>
-              </a:spcBef>
-              <a:buClr>
-                <a:srgbClr val="000000"/>
-              </a:buClr>
-              <a:buFont typeface="Symbol"/>
-              <a:buChar char=""/>
-              <a:tabLst>
-                <a:tab algn="l" pos="1886040"/>
-              </a:tabLst>
-            </a:pPr>
-            <a:r>
-              <a:rPr b="0" lang="en-US" sz="1200" spc="-1" strike="noStrike">
-                <a:solidFill>
-                  <a:srgbClr val="000000"/>
-                </a:solidFill>
-                <a:latin typeface="Arial"/>
-                <a:ea typeface="DejaVu Sans"/>
-              </a:rPr>
-              <a:t>CodeEU-428: Remove speed safety margin for gearbox re-engaging</a:t>
-            </a:r>
-            <a:endParaRPr b="0" lang="en-GB" sz="1200" spc="-1" strike="noStrike">
-              <a:solidFill>
-                <a:srgbClr val="000000"/>
-              </a:solidFill>
-              <a:latin typeface="Arial"/>
-            </a:endParaRPr>
-          </a:p>
-          <a:p>
-            <a:pPr lvl="1" marL="800280" indent="-343080" defTabSz="914400">
-              <a:lnSpc>
-                <a:spcPct val="100000"/>
-              </a:lnSpc>
-              <a:spcBef>
-                <a:spcPts val="320"/>
-              </a:spcBef>
-              <a:buClr>
-                <a:srgbClr val="000000"/>
-              </a:buClr>
-              <a:buFont typeface="Symbol"/>
-              <a:buChar char=""/>
-              <a:tabLst>
-                <a:tab algn="l" pos="1886040"/>
-              </a:tabLst>
-            </a:pPr>
-            <a:r>
-              <a:rPr b="0" lang="en-US" sz="1200" spc="-1" strike="noStrike">
-                <a:solidFill>
-                  <a:srgbClr val="000000"/>
-                </a:solidFill>
-                <a:latin typeface="Arial"/>
-                <a:ea typeface="DejaVu Sans"/>
-              </a:rPr>
-              <a:t>CodeEU-438: Mismatch XML schema vs Regulation (exempted vehicles)</a:t>
-            </a:r>
-            <a:endParaRPr b="0" lang="en-GB" sz="1200" spc="-1" strike="noStrike">
-              <a:solidFill>
-                <a:srgbClr val="000000"/>
-              </a:solidFill>
-              <a:latin typeface="Arial"/>
-            </a:endParaRPr>
-          </a:p>
-          <a:p>
-            <a:pPr lvl="1" marL="800280" indent="-343080" defTabSz="914400">
-              <a:lnSpc>
-                <a:spcPct val="100000"/>
-              </a:lnSpc>
-              <a:spcBef>
-                <a:spcPts val="320"/>
-              </a:spcBef>
-              <a:buClr>
-                <a:srgbClr val="000000"/>
-              </a:buClr>
-              <a:buFont typeface="Symbol"/>
-              <a:buChar char=""/>
-              <a:tabLst>
-                <a:tab algn="l" pos="1886040"/>
-              </a:tabLst>
-            </a:pPr>
-            <a:r>
-              <a:rPr b="0" lang="en-US" sz="1200" spc="-1" strike="noStrike">
-                <a:solidFill>
-                  <a:srgbClr val="000000"/>
-                </a:solidFill>
-                <a:latin typeface="Arial"/>
-                <a:ea typeface="DejaVu Sans"/>
-              </a:rPr>
-              <a:t>CodeEU-248: Bus P2 hybrid VECTO error in urban cycle</a:t>
-            </a:r>
-            <a:endParaRPr b="0" lang="en-GB" sz="1200" spc="-1" strike="noStrike">
-              <a:solidFill>
-                <a:srgbClr val="000000"/>
-              </a:solidFill>
-              <a:latin typeface="Arial"/>
-            </a:endParaRPr>
-          </a:p>
-          <a:p>
-            <a:pPr lvl="1" marL="800280" indent="-343080" defTabSz="914400">
-              <a:lnSpc>
-                <a:spcPct val="100000"/>
-              </a:lnSpc>
-              <a:spcBef>
-                <a:spcPts val="320"/>
-              </a:spcBef>
-              <a:buClr>
-                <a:srgbClr val="000000"/>
-              </a:buClr>
-              <a:buFont typeface="Symbol"/>
-              <a:buChar char=""/>
-              <a:tabLst>
-                <a:tab algn="l" pos="1886040"/>
-              </a:tabLst>
-            </a:pPr>
-            <a:r>
-              <a:rPr b="0" lang="en-US" sz="1200" spc="-1" strike="noStrike">
-                <a:solidFill>
-                  <a:srgbClr val="000000"/>
-                </a:solidFill>
-                <a:latin typeface="Arial"/>
-                <a:ea typeface="DejaVu Sans"/>
-              </a:rPr>
-              <a:t>CodeEU-278: Simulation crash when writing fuel consumption results to reports</a:t>
-            </a:r>
-            <a:endParaRPr b="0" lang="en-GB" sz="1200" spc="-1" strike="noStrike">
-              <a:solidFill>
-                <a:srgbClr val="000000"/>
-              </a:solidFill>
-              <a:latin typeface="Arial"/>
-            </a:endParaRPr>
-          </a:p>
-          <a:p>
-            <a:pPr lvl="1" marL="800280" indent="-343080" defTabSz="914400">
-              <a:lnSpc>
-                <a:spcPct val="100000"/>
-              </a:lnSpc>
-              <a:spcBef>
-                <a:spcPts val="320"/>
-              </a:spcBef>
-              <a:buClr>
-                <a:srgbClr val="000000"/>
-              </a:buClr>
-              <a:buFont typeface="Symbol"/>
-              <a:buChar char=""/>
-              <a:tabLst>
-                <a:tab algn="l" pos="1886040"/>
-              </a:tabLst>
-            </a:pPr>
-            <a:r>
-              <a:rPr b="0" lang="en-US" sz="1200" spc="-1" strike="noStrike">
-                <a:solidFill>
-                  <a:srgbClr val="000000"/>
-                </a:solidFill>
-                <a:latin typeface="Arial"/>
-                <a:ea typeface="DejaVu Sans"/>
-              </a:rPr>
-              <a:t>CodeEU-284: New error message and failed simulation obtained for P2 hybrid buses</a:t>
-            </a:r>
-            <a:endParaRPr b="0" lang="en-GB" sz="1200" spc="-1" strike="noStrike">
-              <a:solidFill>
-                <a:srgbClr val="000000"/>
-              </a:solidFill>
-              <a:latin typeface="Arial"/>
-            </a:endParaRPr>
-          </a:p>
-          <a:p>
-            <a:pPr lvl="1" marL="800280" indent="-343080" defTabSz="914400">
-              <a:lnSpc>
-                <a:spcPct val="100000"/>
-              </a:lnSpc>
-              <a:spcBef>
-                <a:spcPts val="320"/>
-              </a:spcBef>
-              <a:buClr>
-                <a:srgbClr val="000000"/>
-              </a:buClr>
-              <a:buFont typeface="Symbol"/>
-              <a:buChar char=""/>
-              <a:tabLst>
-                <a:tab algn="l" pos="1886040"/>
-              </a:tabLst>
-            </a:pPr>
-            <a:r>
-              <a:rPr b="0" lang="en-US" sz="1200" spc="-1" strike="noStrike">
-                <a:solidFill>
-                  <a:srgbClr val="000000"/>
-                </a:solidFill>
-                <a:latin typeface="Arial"/>
-                <a:ea typeface="DejaVu Sans"/>
-              </a:rPr>
-              <a:t>CodeEU-285: PEV vehicle error in routine to write the results with new vecto version  4.0.2.3275</a:t>
-            </a:r>
-            <a:endParaRPr b="0" lang="en-GB" sz="1200" spc="-1" strike="noStrike">
-              <a:solidFill>
-                <a:srgbClr val="000000"/>
-              </a:solidFill>
-              <a:latin typeface="Arial"/>
-            </a:endParaRPr>
-          </a:p>
-          <a:p>
-            <a:pPr lvl="1" marL="800280" indent="-343080" defTabSz="914400">
-              <a:lnSpc>
-                <a:spcPct val="100000"/>
-              </a:lnSpc>
-              <a:spcBef>
-                <a:spcPts val="320"/>
-              </a:spcBef>
-              <a:buClr>
-                <a:srgbClr val="000000"/>
-              </a:buClr>
-              <a:buFont typeface="Symbol"/>
-              <a:buChar char=""/>
-              <a:tabLst>
-                <a:tab algn="l" pos="1886040"/>
-              </a:tabLst>
-            </a:pPr>
-            <a:r>
-              <a:rPr b="0" lang="en-US" sz="1200" spc="-1" strike="noStrike">
-                <a:solidFill>
-                  <a:srgbClr val="000000"/>
-                </a:solidFill>
-                <a:latin typeface="Arial"/>
-                <a:ea typeface="DejaVu Sans"/>
-              </a:rPr>
-              <a:t>CodeEU-287: PEV_IEPC error message:"can only operate on SI Objects with the same unit"</a:t>
-            </a:r>
-            <a:endParaRPr b="0" lang="en-GB" sz="1200" spc="-1" strike="noStrike">
-              <a:solidFill>
-                <a:srgbClr val="000000"/>
-              </a:solidFill>
-              <a:latin typeface="Arial"/>
-            </a:endParaRPr>
-          </a:p>
-          <a:p>
-            <a:pPr lvl="1" marL="800280" indent="-343080" defTabSz="914400">
-              <a:lnSpc>
-                <a:spcPct val="100000"/>
-              </a:lnSpc>
-              <a:spcBef>
-                <a:spcPts val="320"/>
-              </a:spcBef>
-              <a:buClr>
-                <a:srgbClr val="000000"/>
-              </a:buClr>
-              <a:buFont typeface="Symbol"/>
-              <a:buChar char=""/>
-              <a:tabLst>
-                <a:tab algn="l" pos="1886040"/>
-              </a:tabLst>
-            </a:pPr>
-            <a:r>
-              <a:rPr b="0" lang="en-US" sz="1200" spc="-1" strike="noStrike">
-                <a:solidFill>
-                  <a:srgbClr val="000000"/>
-                </a:solidFill>
-                <a:latin typeface="Arial"/>
-                <a:ea typeface="DejaVu Sans"/>
-              </a:rPr>
-              <a:t>CodeEU-289: VECTO Simulation Error for bus with validated input data</a:t>
-            </a:r>
-            <a:endParaRPr b="0" lang="en-GB" sz="1200" spc="-1" strike="noStrike">
+              <a:t>CodeEU-610: VTP mode is broken due to changes in the Clutch component.</a:t>
+            </a:r>
+            <a:endParaRPr b="0" lang="en-US" sz="1200" spc="-1" strike="noStrike">
               <a:solidFill>
                 <a:srgbClr val="000000"/>
               </a:solidFill>
@@ -12231,7 +12366,7 @@
         <p:spPr>
           <a:xfrm>
             <a:off x="468360" y="476640"/>
-            <a:ext cx="8215920" cy="678600"/>
+            <a:ext cx="8214120" cy="676800"/>
           </a:xfrm>
           <a:prstGeom prst="rect">
             <a:avLst/>
@@ -12263,7 +12398,7 @@
                 <a:latin typeface="Arial"/>
                 <a:ea typeface="DejaVu Sans"/>
               </a:rPr>
-              <a:t>Vecto 4.0.2.3275 OFFICIAL RELEASE</a:t>
+              <a:t>Vecto 4.0.3.3330 OFFICIAL RELEASE</a:t>
             </a:r>
             <a:br>
               <a:rPr sz="2400"/>
@@ -12276,9 +12411,9 @@
                 <a:latin typeface="Arial"/>
                 <a:ea typeface="DejaVu Sans"/>
               </a:rPr>
-              <a:t>20.12.2023</a:t>
-            </a:r>
-            <a:endParaRPr b="0" lang="en-GB" sz="1600" spc="-1" strike="noStrike">
+              <a:t>13.02.2024</a:t>
+            </a:r>
+            <a:endParaRPr b="0" lang="en-US" sz="1600" spc="-1" strike="noStrike">
               <a:solidFill>
                 <a:srgbClr val="000000"/>
               </a:solidFill>
@@ -12300,7 +12435,7 @@
         <p:spPr>
           <a:xfrm>
             <a:off x="323640" y="1639080"/>
-            <a:ext cx="8494560" cy="4451400"/>
+            <a:ext cx="8492760" cy="4449600"/>
           </a:xfrm>
           <a:prstGeom prst="rect">
             <a:avLst/>
@@ -12339,9 +12474,9 @@
                 <a:latin typeface="Arial"/>
                 <a:ea typeface="DejaVu Sans"/>
               </a:rPr>
-              <a:t>Hotfix</a:t>
-            </a:r>
-            <a:endParaRPr b="0" lang="en-GB" sz="1600" spc="-1" strike="noStrike">
+              <a:t>Bugfixes</a:t>
+            </a:r>
+            <a:endParaRPr b="0" lang="en-US" sz="1600" spc="-1" strike="noStrike">
               <a:solidFill>
                 <a:srgbClr val="000000"/>
               </a:solidFill>
@@ -12373,9 +12508,9 @@
                 <a:latin typeface="Arial"/>
                 <a:ea typeface="DejaVu Sans"/>
               </a:rPr>
-              <a:t>CodeEU-273, CodeEU-274: Changes in the AMT shift strategy regarding idling speed caused simulation aborts</a:t>
-            </a:r>
-            <a:endParaRPr b="0" lang="en-GB" sz="1200" spc="-1" strike="noStrike">
+              <a:t>CodeEU-293: DistanceRun got an unexpected response</a:t>
+            </a:r>
+            <a:endParaRPr b="0" lang="en-US" sz="1200" spc="-1" strike="noStrike">
               <a:solidFill>
                 <a:srgbClr val="000000"/>
               </a:solidFill>
@@ -12407,9 +12542,485 @@
                 <a:latin typeface="Arial"/>
                 <a:ea typeface="DejaVu Sans"/>
               </a:rPr>
-              <a:t>CodeEU-260: regression fix handling overload buffer</a:t>
-            </a:r>
-            <a:endParaRPr b="0" lang="en-GB" sz="1200" spc="-1" strike="noStrike">
+              <a:t>CodeEU-298: Object reference not set to an instance of an object</a:t>
+            </a:r>
+            <a:endParaRPr b="0" lang="en-US" sz="1200" spc="-1" strike="noStrike">
+              <a:solidFill>
+                <a:srgbClr val="000000"/>
+              </a:solidFill>
+              <a:latin typeface="Arial"/>
+            </a:endParaRPr>
+          </a:p>
+          <a:p>
+            <a:pPr lvl="1" marL="800280" indent="-343080" defTabSz="914400">
+              <a:lnSpc>
+                <a:spcPct val="100000"/>
+              </a:lnSpc>
+              <a:spcBef>
+                <a:spcPts val="320"/>
+              </a:spcBef>
+              <a:buClr>
+                <a:srgbClr val="000000"/>
+              </a:buClr>
+              <a:buFont typeface="Symbol"/>
+              <a:buChar char=""/>
+              <a:tabLst>
+                <a:tab algn="l" pos="1886040"/>
+              </a:tabLst>
+            </a:pPr>
+            <a:r>
+              <a:rPr b="0" lang="en-US" sz="1200" spc="-1" strike="noStrike">
+                <a:solidFill>
+                  <a:srgbClr val="000000"/>
+                </a:solidFill>
+                <a:latin typeface="Arial"/>
+                <a:ea typeface="DejaVu Sans"/>
+              </a:rPr>
+              <a:t>CodeEU-300: Full drive torque miscalculation</a:t>
+            </a:r>
+            <a:endParaRPr b="0" lang="en-US" sz="1200" spc="-1" strike="noStrike">
+              <a:solidFill>
+                <a:srgbClr val="000000"/>
+              </a:solidFill>
+              <a:latin typeface="Arial"/>
+            </a:endParaRPr>
+          </a:p>
+          <a:p>
+            <a:pPr lvl="1" marL="800280" indent="-343080" defTabSz="914400">
+              <a:lnSpc>
+                <a:spcPct val="100000"/>
+              </a:lnSpc>
+              <a:spcBef>
+                <a:spcPts val="320"/>
+              </a:spcBef>
+              <a:buClr>
+                <a:srgbClr val="000000"/>
+              </a:buClr>
+              <a:buFont typeface="Symbol"/>
+              <a:buChar char=""/>
+              <a:tabLst>
+                <a:tab algn="l" pos="1886040"/>
+              </a:tabLst>
+            </a:pPr>
+            <a:r>
+              <a:rPr b="0" lang="en-US" sz="1200" spc="-1" strike="noStrike">
+                <a:solidFill>
+                  <a:srgbClr val="000000"/>
+                </a:solidFill>
+                <a:latin typeface="Arial"/>
+                <a:ea typeface="DejaVu Sans"/>
+              </a:rPr>
+              <a:t>CodeEU-336: Feature: Hashing tool must validate the previous step data for multi-step jobs</a:t>
+            </a:r>
+            <a:endParaRPr b="0" lang="en-US" sz="1200" spc="-1" strike="noStrike">
+              <a:solidFill>
+                <a:srgbClr val="000000"/>
+              </a:solidFill>
+              <a:latin typeface="Arial"/>
+            </a:endParaRPr>
+          </a:p>
+          <a:p>
+            <a:pPr lvl="1" marL="800280" indent="-343080" defTabSz="914400">
+              <a:lnSpc>
+                <a:spcPct val="100000"/>
+              </a:lnSpc>
+              <a:spcBef>
+                <a:spcPts val="320"/>
+              </a:spcBef>
+              <a:buClr>
+                <a:srgbClr val="000000"/>
+              </a:buClr>
+              <a:buFont typeface="Symbol"/>
+              <a:buChar char=""/>
+              <a:tabLst>
+                <a:tab algn="l" pos="1886040"/>
+              </a:tabLst>
+            </a:pPr>
+            <a:r>
+              <a:rPr b="0" lang="en-US" sz="1200" spc="-1" strike="noStrike">
+                <a:solidFill>
+                  <a:srgbClr val="000000"/>
+                </a:solidFill>
+                <a:latin typeface="Arial"/>
+                <a:ea typeface="DejaVu Sans"/>
+              </a:rPr>
+              <a:t>CodeEU-337: Electric Citybus - ERROR with "31a-Specific" bus configuration</a:t>
+            </a:r>
+            <a:endParaRPr b="0" lang="en-US" sz="1200" spc="-1" strike="noStrike">
+              <a:solidFill>
+                <a:srgbClr val="000000"/>
+              </a:solidFill>
+              <a:latin typeface="Arial"/>
+            </a:endParaRPr>
+          </a:p>
+          <a:p>
+            <a:pPr lvl="1" marL="800280" indent="-343080" defTabSz="914400">
+              <a:lnSpc>
+                <a:spcPct val="100000"/>
+              </a:lnSpc>
+              <a:spcBef>
+                <a:spcPts val="320"/>
+              </a:spcBef>
+              <a:buClr>
+                <a:srgbClr val="000000"/>
+              </a:buClr>
+              <a:buFont typeface="Symbol"/>
+              <a:buChar char=""/>
+              <a:tabLst>
+                <a:tab algn="l" pos="1886040"/>
+              </a:tabLst>
+            </a:pPr>
+            <a:r>
+              <a:rPr b="0" lang="en-US" sz="1200" spc="-1" strike="noStrike">
+                <a:solidFill>
+                  <a:srgbClr val="000000"/>
+                </a:solidFill>
+                <a:latin typeface="Arial"/>
+                <a:ea typeface="DejaVu Sans"/>
+              </a:rPr>
+              <a:t>CodeEU-343: Cannot simulate Primary Vehicle using vectocmd.exe</a:t>
+            </a:r>
+            <a:endParaRPr b="0" lang="en-US" sz="1200" spc="-1" strike="noStrike">
+              <a:solidFill>
+                <a:srgbClr val="000000"/>
+              </a:solidFill>
+              <a:latin typeface="Arial"/>
+            </a:endParaRPr>
+          </a:p>
+          <a:p>
+            <a:pPr lvl="1" marL="800280" indent="-343080" defTabSz="914400">
+              <a:lnSpc>
+                <a:spcPct val="100000"/>
+              </a:lnSpc>
+              <a:spcBef>
+                <a:spcPts val="320"/>
+              </a:spcBef>
+              <a:buClr>
+                <a:srgbClr val="000000"/>
+              </a:buClr>
+              <a:buFont typeface="Symbol"/>
+              <a:buChar char=""/>
+              <a:tabLst>
+                <a:tab algn="l" pos="1886040"/>
+              </a:tabLst>
+            </a:pPr>
+            <a:r>
+              <a:rPr b="0" lang="en-US" sz="1200" spc="-1" strike="noStrike">
+                <a:solidFill>
+                  <a:srgbClr val="000000"/>
+                </a:solidFill>
+                <a:latin typeface="Arial"/>
+                <a:ea typeface="DejaVu Sans"/>
+              </a:rPr>
+              <a:t>CodeEU-387: VECTO sometimes fails to properly read Tyre data from primary vehicle xml</a:t>
+            </a:r>
+            <a:endParaRPr b="0" lang="en-US" sz="1200" spc="-1" strike="noStrike">
+              <a:solidFill>
+                <a:srgbClr val="000000"/>
+              </a:solidFill>
+              <a:latin typeface="Arial"/>
+            </a:endParaRPr>
+          </a:p>
+          <a:p>
+            <a:pPr lvl="1" marL="800280" indent="-343080" defTabSz="914400">
+              <a:lnSpc>
+                <a:spcPct val="100000"/>
+              </a:lnSpc>
+              <a:spcBef>
+                <a:spcPts val="320"/>
+              </a:spcBef>
+              <a:buClr>
+                <a:srgbClr val="000000"/>
+              </a:buClr>
+              <a:buFont typeface="Symbol"/>
+              <a:buChar char=""/>
+              <a:tabLst>
+                <a:tab algn="l" pos="1886040"/>
+              </a:tabLst>
+            </a:pPr>
+            <a:r>
+              <a:rPr b="0" lang="en-US" sz="1200" spc="-1" strike="noStrike">
+                <a:solidFill>
+                  <a:srgbClr val="000000"/>
+                </a:solidFill>
+                <a:latin typeface="Arial"/>
+                <a:ea typeface="DejaVu Sans"/>
+              </a:rPr>
+              <a:t>CodeEU-427: Vehicle speed resulting to exceeding max gearbox speed</a:t>
+            </a:r>
+            <a:endParaRPr b="0" lang="en-US" sz="1200" spc="-1" strike="noStrike">
+              <a:solidFill>
+                <a:srgbClr val="000000"/>
+              </a:solidFill>
+              <a:latin typeface="Arial"/>
+            </a:endParaRPr>
+          </a:p>
+          <a:p>
+            <a:pPr lvl="1" marL="800280" indent="-343080" defTabSz="914400">
+              <a:lnSpc>
+                <a:spcPct val="100000"/>
+              </a:lnSpc>
+              <a:spcBef>
+                <a:spcPts val="320"/>
+              </a:spcBef>
+              <a:buClr>
+                <a:srgbClr val="000000"/>
+              </a:buClr>
+              <a:buFont typeface="Symbol"/>
+              <a:buChar char=""/>
+              <a:tabLst>
+                <a:tab algn="l" pos="1886040"/>
+              </a:tabLst>
+            </a:pPr>
+            <a:r>
+              <a:rPr b="0" lang="en-US" sz="1200" spc="-1" strike="noStrike">
+                <a:solidFill>
+                  <a:srgbClr val="000000"/>
+                </a:solidFill>
+                <a:latin typeface="Arial"/>
+                <a:ea typeface="DejaVu Sans"/>
+              </a:rPr>
+              <a:t>CodeEU-428: Remove speed safety margin for gearbox re-engaging</a:t>
+            </a:r>
+            <a:endParaRPr b="0" lang="en-US" sz="1200" spc="-1" strike="noStrike">
+              <a:solidFill>
+                <a:srgbClr val="000000"/>
+              </a:solidFill>
+              <a:latin typeface="Arial"/>
+            </a:endParaRPr>
+          </a:p>
+          <a:p>
+            <a:pPr lvl="1" marL="800280" indent="-343080" defTabSz="914400">
+              <a:lnSpc>
+                <a:spcPct val="100000"/>
+              </a:lnSpc>
+              <a:spcBef>
+                <a:spcPts val="320"/>
+              </a:spcBef>
+              <a:buClr>
+                <a:srgbClr val="000000"/>
+              </a:buClr>
+              <a:buFont typeface="Symbol"/>
+              <a:buChar char=""/>
+              <a:tabLst>
+                <a:tab algn="l" pos="1886040"/>
+              </a:tabLst>
+            </a:pPr>
+            <a:r>
+              <a:rPr b="0" lang="en-US" sz="1200" spc="-1" strike="noStrike">
+                <a:solidFill>
+                  <a:srgbClr val="000000"/>
+                </a:solidFill>
+                <a:latin typeface="Arial"/>
+                <a:ea typeface="DejaVu Sans"/>
+              </a:rPr>
+              <a:t>CodeEU-438: Mismatch XML schema vs Regulation (exempted vehicles)</a:t>
+            </a:r>
+            <a:endParaRPr b="0" lang="en-US" sz="1200" spc="-1" strike="noStrike">
+              <a:solidFill>
+                <a:srgbClr val="000000"/>
+              </a:solidFill>
+              <a:latin typeface="Arial"/>
+            </a:endParaRPr>
+          </a:p>
+          <a:p>
+            <a:pPr lvl="1" marL="800280" indent="-343080" defTabSz="914400">
+              <a:lnSpc>
+                <a:spcPct val="100000"/>
+              </a:lnSpc>
+              <a:spcBef>
+                <a:spcPts val="320"/>
+              </a:spcBef>
+              <a:buClr>
+                <a:srgbClr val="000000"/>
+              </a:buClr>
+              <a:buFont typeface="Symbol"/>
+              <a:buChar char=""/>
+              <a:tabLst>
+                <a:tab algn="l" pos="1886040"/>
+              </a:tabLst>
+            </a:pPr>
+            <a:r>
+              <a:rPr b="0" lang="en-US" sz="1200" spc="-1" strike="noStrike">
+                <a:solidFill>
+                  <a:srgbClr val="000000"/>
+                </a:solidFill>
+                <a:latin typeface="Arial"/>
+                <a:ea typeface="DejaVu Sans"/>
+              </a:rPr>
+              <a:t>CodeEU-248: Bus P2 hybrid VECTO error in urban cycle</a:t>
+            </a:r>
+            <a:endParaRPr b="0" lang="en-US" sz="1200" spc="-1" strike="noStrike">
+              <a:solidFill>
+                <a:srgbClr val="000000"/>
+              </a:solidFill>
+              <a:latin typeface="Arial"/>
+            </a:endParaRPr>
+          </a:p>
+          <a:p>
+            <a:pPr lvl="1" marL="800280" indent="-343080" defTabSz="914400">
+              <a:lnSpc>
+                <a:spcPct val="100000"/>
+              </a:lnSpc>
+              <a:spcBef>
+                <a:spcPts val="320"/>
+              </a:spcBef>
+              <a:buClr>
+                <a:srgbClr val="000000"/>
+              </a:buClr>
+              <a:buFont typeface="Symbol"/>
+              <a:buChar char=""/>
+              <a:tabLst>
+                <a:tab algn="l" pos="1886040"/>
+              </a:tabLst>
+            </a:pPr>
+            <a:r>
+              <a:rPr b="0" lang="en-US" sz="1200" spc="-1" strike="noStrike">
+                <a:solidFill>
+                  <a:srgbClr val="000000"/>
+                </a:solidFill>
+                <a:latin typeface="Arial"/>
+                <a:ea typeface="DejaVu Sans"/>
+              </a:rPr>
+              <a:t>CodeEU-278: Simulation crash when writing fuel consumption results to reports</a:t>
+            </a:r>
+            <a:endParaRPr b="0" lang="en-US" sz="1200" spc="-1" strike="noStrike">
+              <a:solidFill>
+                <a:srgbClr val="000000"/>
+              </a:solidFill>
+              <a:latin typeface="Arial"/>
+            </a:endParaRPr>
+          </a:p>
+          <a:p>
+            <a:pPr lvl="1" marL="800280" indent="-343080" defTabSz="914400">
+              <a:lnSpc>
+                <a:spcPct val="100000"/>
+              </a:lnSpc>
+              <a:spcBef>
+                <a:spcPts val="320"/>
+              </a:spcBef>
+              <a:buClr>
+                <a:srgbClr val="000000"/>
+              </a:buClr>
+              <a:buFont typeface="Symbol"/>
+              <a:buChar char=""/>
+              <a:tabLst>
+                <a:tab algn="l" pos="1886040"/>
+              </a:tabLst>
+            </a:pPr>
+            <a:r>
+              <a:rPr b="0" lang="en-US" sz="1200" spc="-1" strike="noStrike">
+                <a:solidFill>
+                  <a:srgbClr val="000000"/>
+                </a:solidFill>
+                <a:latin typeface="Arial"/>
+                <a:ea typeface="DejaVu Sans"/>
+              </a:rPr>
+              <a:t>CodeEU-284: New error message and failed simulation obtained for P2 hybrid buses</a:t>
+            </a:r>
+            <a:endParaRPr b="0" lang="en-US" sz="1200" spc="-1" strike="noStrike">
+              <a:solidFill>
+                <a:srgbClr val="000000"/>
+              </a:solidFill>
+              <a:latin typeface="Arial"/>
+            </a:endParaRPr>
+          </a:p>
+          <a:p>
+            <a:pPr lvl="1" marL="800280" indent="-343080" defTabSz="914400">
+              <a:lnSpc>
+                <a:spcPct val="100000"/>
+              </a:lnSpc>
+              <a:spcBef>
+                <a:spcPts val="320"/>
+              </a:spcBef>
+              <a:buClr>
+                <a:srgbClr val="000000"/>
+              </a:buClr>
+              <a:buFont typeface="Symbol"/>
+              <a:buChar char=""/>
+              <a:tabLst>
+                <a:tab algn="l" pos="1886040"/>
+              </a:tabLst>
+            </a:pPr>
+            <a:r>
+              <a:rPr b="0" lang="en-US" sz="1200" spc="-1" strike="noStrike">
+                <a:solidFill>
+                  <a:srgbClr val="000000"/>
+                </a:solidFill>
+                <a:latin typeface="Arial"/>
+                <a:ea typeface="DejaVu Sans"/>
+              </a:rPr>
+              <a:t>CodeEU-285: PEV vehicle error in routine to write the results with new vecto version  4.0.2.3275</a:t>
+            </a:r>
+            <a:endParaRPr b="0" lang="en-US" sz="1200" spc="-1" strike="noStrike">
+              <a:solidFill>
+                <a:srgbClr val="000000"/>
+              </a:solidFill>
+              <a:latin typeface="Arial"/>
+            </a:endParaRPr>
+          </a:p>
+          <a:p>
+            <a:pPr lvl="1" marL="800280" indent="-343080" defTabSz="914400">
+              <a:lnSpc>
+                <a:spcPct val="100000"/>
+              </a:lnSpc>
+              <a:spcBef>
+                <a:spcPts val="320"/>
+              </a:spcBef>
+              <a:buClr>
+                <a:srgbClr val="000000"/>
+              </a:buClr>
+              <a:buFont typeface="Symbol"/>
+              <a:buChar char=""/>
+              <a:tabLst>
+                <a:tab algn="l" pos="1886040"/>
+              </a:tabLst>
+            </a:pPr>
+            <a:r>
+              <a:rPr b="0" lang="en-US" sz="1200" spc="-1" strike="noStrike">
+                <a:solidFill>
+                  <a:srgbClr val="000000"/>
+                </a:solidFill>
+                <a:latin typeface="Arial"/>
+                <a:ea typeface="DejaVu Sans"/>
+              </a:rPr>
+              <a:t>CodeEU-287: PEV_IEPC error message:"can only operate on SI Objects with the same unit"</a:t>
+            </a:r>
+            <a:endParaRPr b="0" lang="en-US" sz="1200" spc="-1" strike="noStrike">
+              <a:solidFill>
+                <a:srgbClr val="000000"/>
+              </a:solidFill>
+              <a:latin typeface="Arial"/>
+            </a:endParaRPr>
+          </a:p>
+          <a:p>
+            <a:pPr lvl="1" marL="800280" indent="-343080" defTabSz="914400">
+              <a:lnSpc>
+                <a:spcPct val="100000"/>
+              </a:lnSpc>
+              <a:spcBef>
+                <a:spcPts val="320"/>
+              </a:spcBef>
+              <a:buClr>
+                <a:srgbClr val="000000"/>
+              </a:buClr>
+              <a:buFont typeface="Symbol"/>
+              <a:buChar char=""/>
+              <a:tabLst>
+                <a:tab algn="l" pos="1886040"/>
+              </a:tabLst>
+            </a:pPr>
+            <a:r>
+              <a:rPr b="0" lang="en-US" sz="1200" spc="-1" strike="noStrike">
+                <a:solidFill>
+                  <a:srgbClr val="000000"/>
+                </a:solidFill>
+                <a:latin typeface="Arial"/>
+                <a:ea typeface="DejaVu Sans"/>
+              </a:rPr>
+              <a:t>CodeEU-289: VECTO Simulation Error for bus with validated input data</a:t>
+            </a:r>
+            <a:endParaRPr b="0" lang="en-US" sz="1200" spc="-1" strike="noStrike">
               <a:solidFill>
                 <a:srgbClr val="000000"/>
               </a:solidFill>
@@ -12461,7 +13072,7 @@
         <p:spPr>
           <a:xfrm>
             <a:off x="468360" y="476640"/>
-            <a:ext cx="8215920" cy="678600"/>
+            <a:ext cx="8214120" cy="676800"/>
           </a:xfrm>
           <a:prstGeom prst="rect">
             <a:avLst/>
@@ -12493,7 +13104,7 @@
                 <a:latin typeface="Arial"/>
                 <a:ea typeface="DejaVu Sans"/>
               </a:rPr>
-              <a:t>Vecto 4.0.2.3273 OFFICIAL RELEASE</a:t>
+              <a:t>Vecto 4.0.2.3275 OFFICIAL RELEASE</a:t>
             </a:r>
             <a:br>
               <a:rPr sz="2400"/>
@@ -12506,9 +13117,9 @@
                 <a:latin typeface="Arial"/>
                 <a:ea typeface="DejaVu Sans"/>
               </a:rPr>
-              <a:t>18.12.2023</a:t>
-            </a:r>
-            <a:endParaRPr b="0" lang="en-GB" sz="1600" spc="-1" strike="noStrike">
+              <a:t>20.12.2023</a:t>
+            </a:r>
+            <a:endParaRPr b="0" lang="en-US" sz="1600" spc="-1" strike="noStrike">
               <a:solidFill>
                 <a:srgbClr val="000000"/>
               </a:solidFill>
@@ -12529,8 +13140,8 @@
         </p:nvSpPr>
         <p:spPr>
           <a:xfrm>
-            <a:off x="323640" y="1268640"/>
-            <a:ext cx="8494560" cy="4821840"/>
+            <a:off x="323640" y="1639080"/>
+            <a:ext cx="8492760" cy="4449600"/>
           </a:xfrm>
           <a:prstGeom prst="rect">
             <a:avLst/>
@@ -12569,9 +13180,9 @@
                 <a:latin typeface="Arial"/>
                 <a:ea typeface="DejaVu Sans"/>
               </a:rPr>
-              <a:t>Bugfixes (1/2)</a:t>
-            </a:r>
-            <a:endParaRPr b="0" lang="en-GB" sz="1600" spc="-1" strike="noStrike">
+              <a:t>Hotfix</a:t>
+            </a:r>
+            <a:endParaRPr b="0" lang="en-US" sz="1600" spc="-1" strike="noStrike">
               <a:solidFill>
                 <a:srgbClr val="000000"/>
               </a:solidFill>
@@ -12603,9 +13214,9 @@
                 <a:latin typeface="Arial"/>
                 <a:ea typeface="DejaVu Sans"/>
               </a:rPr>
-              <a:t>CodeEU-94: DistanceRun got an unexpected response</a:t>
-            </a:r>
-            <a:endParaRPr b="0" lang="en-GB" sz="1200" spc="-1" strike="noStrike">
+              <a:t>CodeEU-273, CodeEU-274: Changes in the AMT shift strategy regarding idling speed caused simulation aborts</a:t>
+            </a:r>
+            <a:endParaRPr b="0" lang="en-US" sz="1200" spc="-1" strike="noStrike">
               <a:solidFill>
                 <a:srgbClr val="000000"/>
               </a:solidFill>
@@ -12637,604 +13248,9 @@
                 <a:latin typeface="Arial"/>
                 <a:ea typeface="DejaVu Sans"/>
               </a:rPr>
-              <a:t>CodeEU-153: DrivingActionAccelerate: Failed to find operating point after Overload</a:t>
-            </a:r>
-            <a:endParaRPr b="0" lang="en-GB" sz="1200" spc="-1" strike="noStrike">
-              <a:solidFill>
-                <a:srgbClr val="000000"/>
-              </a:solidFill>
-              <a:latin typeface="Arial"/>
-            </a:endParaRPr>
-          </a:p>
-          <a:p>
-            <a:pPr lvl="1" marL="800280" indent="-343080" defTabSz="914400">
-              <a:lnSpc>
-                <a:spcPct val="100000"/>
-              </a:lnSpc>
-              <a:spcBef>
-                <a:spcPts val="320"/>
-              </a:spcBef>
-              <a:buClr>
-                <a:srgbClr val="000000"/>
-              </a:buClr>
-              <a:buFont typeface="Symbol"/>
-              <a:buChar char=""/>
-              <a:tabLst>
-                <a:tab algn="l" pos="1886040"/>
-              </a:tabLst>
-            </a:pPr>
-            <a:r>
-              <a:rPr b="0" lang="en-US" sz="1200" spc="-1" strike="noStrike">
-                <a:solidFill>
-                  <a:srgbClr val="000000"/>
-                </a:solidFill>
-                <a:latin typeface="Arial"/>
-                <a:ea typeface="DejaVu Sans"/>
-              </a:rPr>
-              <a:t>CodeEU-158: Urban RefLoad DrivingActionAccelerate: Failed to find operating point (IEPC Wheelhub 1 measured)</a:t>
-            </a:r>
-            <a:endParaRPr b="0" lang="en-GB" sz="1200" spc="-1" strike="noStrike">
-              <a:solidFill>
-                <a:srgbClr val="000000"/>
-              </a:solidFill>
-              <a:latin typeface="Arial"/>
-            </a:endParaRPr>
-          </a:p>
-          <a:p>
-            <a:pPr lvl="1" marL="800280" indent="-343080" defTabSz="914400">
-              <a:lnSpc>
-                <a:spcPct val="100000"/>
-              </a:lnSpc>
-              <a:spcBef>
-                <a:spcPts val="320"/>
-              </a:spcBef>
-              <a:buClr>
-                <a:srgbClr val="000000"/>
-              </a:buClr>
-              <a:buFont typeface="Symbol"/>
-              <a:buChar char=""/>
-              <a:tabLst>
-                <a:tab algn="l" pos="1886040"/>
-              </a:tabLst>
-            </a:pPr>
-            <a:r>
-              <a:rPr b="0" lang="en-US" sz="1200" spc="-1" strike="noStrike">
-                <a:solidFill>
-                  <a:srgbClr val="000000"/>
-                </a:solidFill>
-                <a:latin typeface="Arial"/>
-                <a:ea typeface="DejaVu Sans"/>
-              </a:rPr>
-              <a:t>CodeEU-168: Vecto Declaration Simulation with P1-Hybrid shows multiple errors - Simulation Aborts!</a:t>
-            </a:r>
-            <a:endParaRPr b="0" lang="en-GB" sz="1200" spc="-1" strike="noStrike">
-              <a:solidFill>
-                <a:srgbClr val="000000"/>
-              </a:solidFill>
-              <a:latin typeface="Arial"/>
-            </a:endParaRPr>
-          </a:p>
-          <a:p>
-            <a:pPr lvl="1" marL="800280" indent="-343080" defTabSz="914400">
-              <a:lnSpc>
-                <a:spcPct val="100000"/>
-              </a:lnSpc>
-              <a:spcBef>
-                <a:spcPts val="320"/>
-              </a:spcBef>
-              <a:buClr>
-                <a:srgbClr val="000000"/>
-              </a:buClr>
-              <a:buFont typeface="Symbol"/>
-              <a:buChar char=""/>
-              <a:tabLst>
-                <a:tab algn="l" pos="1886040"/>
-              </a:tabLst>
-            </a:pPr>
-            <a:r>
-              <a:rPr b="0" lang="en-US" sz="1200" spc="-1" strike="noStrike">
-                <a:solidFill>
-                  <a:srgbClr val="000000"/>
-                </a:solidFill>
-                <a:latin typeface="Arial"/>
-                <a:ea typeface="DejaVu Sans"/>
-              </a:rPr>
-              <a:t>CodeEU-191: Boosting limits HEV ovc are not working</a:t>
-            </a:r>
-            <a:endParaRPr b="0" lang="en-GB" sz="1200" spc="-1" strike="noStrike">
-              <a:solidFill>
-                <a:srgbClr val="000000"/>
-              </a:solidFill>
-              <a:latin typeface="Arial"/>
-            </a:endParaRPr>
-          </a:p>
-          <a:p>
-            <a:pPr lvl="1" marL="800280" indent="-343080" defTabSz="914400">
-              <a:lnSpc>
-                <a:spcPct val="100000"/>
-              </a:lnSpc>
-              <a:spcBef>
-                <a:spcPts val="320"/>
-              </a:spcBef>
-              <a:buClr>
-                <a:srgbClr val="000000"/>
-              </a:buClr>
-              <a:buFont typeface="Symbol"/>
-              <a:buChar char=""/>
-              <a:tabLst>
-                <a:tab algn="l" pos="1886040"/>
-              </a:tabLst>
-            </a:pPr>
-            <a:r>
-              <a:rPr b="0" lang="en-US" sz="1200" spc="-1" strike="noStrike">
-                <a:solidFill>
-                  <a:srgbClr val="000000"/>
-                </a:solidFill>
-                <a:latin typeface="Arial"/>
-                <a:ea typeface="DejaVu Sans"/>
-              </a:rPr>
-              <a:t>CodeEU-202: EMS Standard Values: Continuous/Overload Torque 0 Nm</a:t>
-            </a:r>
-            <a:endParaRPr b="0" lang="en-GB" sz="1200" spc="-1" strike="noStrike">
-              <a:solidFill>
-                <a:srgbClr val="000000"/>
-              </a:solidFill>
-              <a:latin typeface="Arial"/>
-            </a:endParaRPr>
-          </a:p>
-          <a:p>
-            <a:pPr lvl="1" marL="800280" indent="-343080" defTabSz="914400">
-              <a:lnSpc>
-                <a:spcPct val="100000"/>
-              </a:lnSpc>
-              <a:spcBef>
-                <a:spcPts val="320"/>
-              </a:spcBef>
-              <a:buClr>
-                <a:srgbClr val="000000"/>
-              </a:buClr>
-              <a:buFont typeface="Symbol"/>
-              <a:buChar char=""/>
-              <a:tabLst>
-                <a:tab algn="l" pos="1886040"/>
-              </a:tabLst>
-            </a:pPr>
-            <a:r>
-              <a:rPr b="0" lang="en-US" sz="1200" spc="-1" strike="noStrike">
-                <a:solidFill>
-                  <a:srgbClr val="000000"/>
-                </a:solidFill>
-                <a:latin typeface="Arial"/>
-                <a:ea typeface="DejaVu Sans"/>
-              </a:rPr>
-              <a:t>CodeEU-203: HybridStrategy error for IHPC type 1 hybrid lorry</a:t>
-            </a:r>
-            <a:endParaRPr b="0" lang="en-GB" sz="1200" spc="-1" strike="noStrike">
-              <a:solidFill>
-                <a:srgbClr val="000000"/>
-              </a:solidFill>
-              <a:latin typeface="Arial"/>
-            </a:endParaRPr>
-          </a:p>
-          <a:p>
-            <a:pPr lvl="1" marL="800280" indent="-343080" defTabSz="914400">
-              <a:lnSpc>
-                <a:spcPct val="100000"/>
-              </a:lnSpc>
-              <a:spcBef>
-                <a:spcPts val="320"/>
-              </a:spcBef>
-              <a:buClr>
-                <a:srgbClr val="000000"/>
-              </a:buClr>
-              <a:buFont typeface="Symbol"/>
-              <a:buChar char=""/>
-              <a:tabLst>
-                <a:tab algn="l" pos="1886040"/>
-              </a:tabLst>
-            </a:pPr>
-            <a:r>
-              <a:rPr b="0" lang="en-US" sz="1200" spc="-1" strike="noStrike">
-                <a:solidFill>
-                  <a:srgbClr val="000000"/>
-                </a:solidFill>
-                <a:latin typeface="Arial"/>
-                <a:ea typeface="DejaVu Sans"/>
-              </a:rPr>
-              <a:t>CodeEU-206: VTP + PEMS test done by Renault Trucks France - VECTO tool errors most probably linked to automatic gearbox (with torque converter)</a:t>
-            </a:r>
-            <a:endParaRPr b="0" lang="en-GB" sz="1200" spc="-1" strike="noStrike">
-              <a:solidFill>
-                <a:srgbClr val="000000"/>
-              </a:solidFill>
-              <a:latin typeface="Arial"/>
-            </a:endParaRPr>
-          </a:p>
-          <a:p>
-            <a:pPr lvl="1" marL="800280" indent="-343080" defTabSz="914400">
-              <a:lnSpc>
-                <a:spcPct val="100000"/>
-              </a:lnSpc>
-              <a:spcBef>
-                <a:spcPts val="320"/>
-              </a:spcBef>
-              <a:buClr>
-                <a:srgbClr val="000000"/>
-              </a:buClr>
-              <a:buFont typeface="Symbol"/>
-              <a:buChar char=""/>
-              <a:tabLst>
-                <a:tab algn="l" pos="1886040"/>
-              </a:tabLst>
-            </a:pPr>
-            <a:r>
-              <a:rPr b="0" lang="en-US" sz="1200" spc="-1" strike="noStrike">
-                <a:solidFill>
-                  <a:srgbClr val="000000"/>
-                </a:solidFill>
-                <a:latin typeface="Arial"/>
-                <a:ea typeface="DejaVu Sans"/>
-              </a:rPr>
-              <a:t>CodeEU-211: Hybrid P1 configurations with errors</a:t>
-            </a:r>
-            <a:endParaRPr b="0" lang="en-GB" sz="1200" spc="-1" strike="noStrike">
-              <a:solidFill>
-                <a:srgbClr val="000000"/>
-              </a:solidFill>
-              <a:latin typeface="Arial"/>
-            </a:endParaRPr>
-          </a:p>
-          <a:p>
-            <a:pPr lvl="1" marL="800280" indent="-343080" defTabSz="914400">
-              <a:lnSpc>
-                <a:spcPct val="100000"/>
-              </a:lnSpc>
-              <a:spcBef>
-                <a:spcPts val="320"/>
-              </a:spcBef>
-              <a:buClr>
-                <a:srgbClr val="000000"/>
-              </a:buClr>
-              <a:buFont typeface="Symbol"/>
-              <a:buChar char=""/>
-              <a:tabLst>
-                <a:tab algn="l" pos="1886040"/>
-              </a:tabLst>
-            </a:pPr>
-            <a:r>
-              <a:rPr b="0" lang="en-US" sz="1200" spc="-1" strike="noStrike">
-                <a:solidFill>
-                  <a:srgbClr val="000000"/>
-                </a:solidFill>
-                <a:latin typeface="Arial"/>
-                <a:ea typeface="DejaVu Sans"/>
-              </a:rPr>
-              <a:t>CodeEU-215: MultiStep tool help</a:t>
-            </a:r>
-            <a:endParaRPr b="0" lang="en-GB" sz="1200" spc="-1" strike="noStrike">
-              <a:solidFill>
-                <a:srgbClr val="000000"/>
-              </a:solidFill>
-              <a:latin typeface="Arial"/>
-            </a:endParaRPr>
-          </a:p>
-          <a:p>
-            <a:pPr lvl="1" marL="800280" indent="-343080" defTabSz="914400">
-              <a:lnSpc>
-                <a:spcPct val="100000"/>
-              </a:lnSpc>
-              <a:spcBef>
-                <a:spcPts val="320"/>
-              </a:spcBef>
-              <a:buClr>
-                <a:srgbClr val="000000"/>
-              </a:buClr>
-              <a:buFont typeface="Symbol"/>
-              <a:buChar char=""/>
-              <a:tabLst>
-                <a:tab algn="l" pos="1886040"/>
-              </a:tabLst>
-            </a:pPr>
-            <a:r>
-              <a:rPr b="0" lang="en-US" sz="1200" spc="-1" strike="noStrike">
-                <a:solidFill>
-                  <a:srgbClr val="000000"/>
-                </a:solidFill>
-                <a:latin typeface="Arial"/>
-                <a:ea typeface="DejaVu Sans"/>
-              </a:rPr>
-              <a:t>CodeEU-216: NrOfGears in CIF is 1 for IEPC no matter how many gears it has</a:t>
-            </a:r>
-            <a:endParaRPr b="0" lang="en-GB" sz="1200" spc="-1" strike="noStrike">
-              <a:solidFill>
-                <a:srgbClr val="000000"/>
-              </a:solidFill>
-              <a:latin typeface="Arial"/>
-            </a:endParaRPr>
-          </a:p>
-          <a:p>
-            <a:pPr lvl="1" marL="800280" indent="-343080" defTabSz="914400">
-              <a:lnSpc>
-                <a:spcPct val="100000"/>
-              </a:lnSpc>
-              <a:spcBef>
-                <a:spcPts val="320"/>
-              </a:spcBef>
-              <a:buClr>
-                <a:srgbClr val="000000"/>
-              </a:buClr>
-              <a:buFont typeface="Symbol"/>
-              <a:buChar char=""/>
-              <a:tabLst>
-                <a:tab algn="l" pos="1886040"/>
-              </a:tabLst>
-            </a:pPr>
-            <a:r>
-              <a:rPr b="0" lang="en-US" sz="1200" spc="-1" strike="noStrike">
-                <a:solidFill>
-                  <a:srgbClr val="000000"/>
-                </a:solidFill>
-                <a:latin typeface="Arial"/>
-                <a:ea typeface="DejaVu Sans"/>
-              </a:rPr>
-              <a:t>CodeEU-220: Error manual transmission 2. gear</a:t>
-            </a:r>
-            <a:endParaRPr b="0" lang="en-GB" sz="1200" spc="-1" strike="noStrike">
-              <a:solidFill>
-                <a:srgbClr val="000000"/>
-              </a:solidFill>
-              <a:latin typeface="Arial"/>
-            </a:endParaRPr>
-          </a:p>
-          <a:p>
-            <a:pPr lvl="1" marL="800280" indent="-343080" defTabSz="914400">
-              <a:lnSpc>
-                <a:spcPct val="100000"/>
-              </a:lnSpc>
-              <a:spcBef>
-                <a:spcPts val="320"/>
-              </a:spcBef>
-              <a:buClr>
-                <a:srgbClr val="000000"/>
-              </a:buClr>
-              <a:buFont typeface="Symbol"/>
-              <a:buChar char=""/>
-              <a:tabLst>
-                <a:tab algn="l" pos="1886040"/>
-              </a:tabLst>
-            </a:pPr>
-            <a:r>
-              <a:rPr b="0" lang="en-US" sz="1200" spc="-1" strike="noStrike">
-                <a:solidFill>
-                  <a:srgbClr val="000000"/>
-                </a:solidFill>
-                <a:latin typeface="Arial"/>
-                <a:ea typeface="DejaVu Sans"/>
-              </a:rPr>
-              <a:t>CodeEU-224: Issue with PEV complete vehicle simulation (Vecto MultiStage)</a:t>
-            </a:r>
-            <a:endParaRPr b="0" lang="en-GB" sz="1200" spc="-1" strike="noStrike">
-              <a:solidFill>
-                <a:srgbClr val="000000"/>
-              </a:solidFill>
-              <a:latin typeface="Arial"/>
-            </a:endParaRPr>
-          </a:p>
-          <a:p>
-            <a:pPr lvl="1" marL="800280" indent="-343080" defTabSz="914400">
-              <a:lnSpc>
-                <a:spcPct val="100000"/>
-              </a:lnSpc>
-              <a:spcBef>
-                <a:spcPts val="320"/>
-              </a:spcBef>
-              <a:buClr>
-                <a:srgbClr val="000000"/>
-              </a:buClr>
-              <a:buFont typeface="Symbol"/>
-              <a:buChar char=""/>
-              <a:tabLst>
-                <a:tab algn="l" pos="1886040"/>
-              </a:tabLst>
-            </a:pPr>
-            <a:r>
-              <a:rPr b="0" lang="en-US" sz="1200" spc="-1" strike="noStrike">
-                <a:solidFill>
-                  <a:srgbClr val="000000"/>
-                </a:solidFill>
-                <a:latin typeface="Arial"/>
-                <a:ea typeface="DejaVu Sans"/>
-              </a:rPr>
-              <a:t>CodeEU-231: IVECO CONFIDENTIAL : hybrid buses completed simulation aborted</a:t>
-            </a:r>
-            <a:endParaRPr b="0" lang="en-GB" sz="1200" spc="-1" strike="noStrike">
-              <a:solidFill>
-                <a:srgbClr val="000000"/>
-              </a:solidFill>
-              <a:latin typeface="Arial"/>
-            </a:endParaRPr>
-          </a:p>
-          <a:p>
-            <a:pPr lvl="1" marL="800280" indent="-343080" defTabSz="914400">
-              <a:lnSpc>
-                <a:spcPct val="100000"/>
-              </a:lnSpc>
-              <a:spcBef>
-                <a:spcPts val="320"/>
-              </a:spcBef>
-              <a:buClr>
-                <a:srgbClr val="000000"/>
-              </a:buClr>
-              <a:buFont typeface="Symbol"/>
-              <a:buChar char=""/>
-              <a:tabLst>
-                <a:tab algn="l" pos="1886040"/>
-              </a:tabLst>
-            </a:pPr>
-            <a:r>
-              <a:rPr b="0" lang="en-US" sz="1200" spc="-1" strike="noStrike">
-                <a:solidFill>
-                  <a:srgbClr val="000000"/>
-                </a:solidFill>
-                <a:latin typeface="Arial"/>
-                <a:ea typeface="DejaVu Sans"/>
-              </a:rPr>
-              <a:t>CodeEU-234: Error Conventional Lorry Gear: 1C DistanceRun got an unexpected response</a:t>
-            </a:r>
-            <a:endParaRPr b="0" lang="en-GB" sz="1200" spc="-1" strike="noStrike">
-              <a:solidFill>
-                <a:srgbClr val="000000"/>
-              </a:solidFill>
-              <a:latin typeface="Arial"/>
-            </a:endParaRPr>
-          </a:p>
-          <a:p>
-            <a:pPr lvl="1" marL="800280" indent="-343080" defTabSz="914400">
-              <a:lnSpc>
-                <a:spcPct val="100000"/>
-              </a:lnSpc>
-              <a:spcBef>
-                <a:spcPts val="320"/>
-              </a:spcBef>
-              <a:buClr>
-                <a:srgbClr val="000000"/>
-              </a:buClr>
-              <a:buFont typeface="Symbol"/>
-              <a:buChar char=""/>
-              <a:tabLst>
-                <a:tab algn="l" pos="1886040"/>
-              </a:tabLst>
-            </a:pPr>
-            <a:r>
-              <a:rPr b="0" lang="en-US" sz="1200" spc="-1" strike="noStrike">
-                <a:solidFill>
-                  <a:srgbClr val="000000"/>
-                </a:solidFill>
-                <a:latin typeface="Arial"/>
-                <a:ea typeface="DejaVu Sans"/>
-              </a:rPr>
-              <a:t>CodeEU-235: Tyre error calculation buses "invalid xsi:type 'TyreDataDeclarationType'"</a:t>
-            </a:r>
-            <a:endParaRPr b="0" lang="en-GB" sz="1200" spc="-1" strike="noStrike">
-              <a:solidFill>
-                <a:srgbClr val="000000"/>
-              </a:solidFill>
-              <a:latin typeface="Arial"/>
-            </a:endParaRPr>
-          </a:p>
-          <a:p>
-            <a:pPr lvl="1" marL="800280" indent="-343080" defTabSz="914400">
-              <a:lnSpc>
-                <a:spcPct val="100000"/>
-              </a:lnSpc>
-              <a:spcBef>
-                <a:spcPts val="320"/>
-              </a:spcBef>
-              <a:buClr>
-                <a:srgbClr val="000000"/>
-              </a:buClr>
-              <a:buFont typeface="Symbol"/>
-              <a:buChar char=""/>
-              <a:tabLst>
-                <a:tab algn="l" pos="1886040"/>
-              </a:tabLst>
-            </a:pPr>
-            <a:r>
-              <a:rPr b="0" lang="en-US" sz="1200" spc="-1" strike="noStrike">
-                <a:solidFill>
-                  <a:srgbClr val="000000"/>
-                </a:solidFill>
-                <a:latin typeface="Arial"/>
-                <a:ea typeface="DejaVu Sans"/>
-              </a:rPr>
-              <a:t>CodeEU-238: Bus VIF files not valid in Multistep VECTO</a:t>
-            </a:r>
-            <a:endParaRPr b="0" lang="en-GB" sz="1200" spc="-1" strike="noStrike">
-              <a:solidFill>
-                <a:srgbClr val="000000"/>
-              </a:solidFill>
-              <a:latin typeface="Arial"/>
-            </a:endParaRPr>
-          </a:p>
-          <a:p>
-            <a:pPr lvl="1" marL="800280" indent="-343080" defTabSz="914400">
-              <a:lnSpc>
-                <a:spcPct val="100000"/>
-              </a:lnSpc>
-              <a:spcBef>
-                <a:spcPts val="320"/>
-              </a:spcBef>
-              <a:buClr>
-                <a:srgbClr val="000000"/>
-              </a:buClr>
-              <a:buFont typeface="Symbol"/>
-              <a:buChar char=""/>
-              <a:tabLst>
-                <a:tab algn="l" pos="1886040"/>
-              </a:tabLst>
-            </a:pPr>
-            <a:r>
-              <a:rPr b="0" lang="en-US" sz="1200" spc="-1" strike="noStrike">
-                <a:solidFill>
-                  <a:srgbClr val="000000"/>
-                </a:solidFill>
-                <a:latin typeface="Arial"/>
-                <a:ea typeface="DejaVu Sans"/>
-              </a:rPr>
-              <a:t>CodeEU-243: Simulation aborted: Gear 5 Lossmap not sufficiant</a:t>
-            </a:r>
-            <a:endParaRPr b="0" lang="en-GB" sz="1200" spc="-1" strike="noStrike">
-              <a:solidFill>
-                <a:srgbClr val="000000"/>
-              </a:solidFill>
-              <a:latin typeface="Arial"/>
-            </a:endParaRPr>
-          </a:p>
-          <a:p>
-            <a:pPr lvl="1" marL="800280" indent="-343080" defTabSz="914400">
-              <a:lnSpc>
-                <a:spcPct val="100000"/>
-              </a:lnSpc>
-              <a:spcBef>
-                <a:spcPts val="320"/>
-              </a:spcBef>
-              <a:buClr>
-                <a:srgbClr val="000000"/>
-              </a:buClr>
-              <a:buFont typeface="Symbol"/>
-              <a:buChar char=""/>
-              <a:tabLst>
-                <a:tab algn="l" pos="1886040"/>
-              </a:tabLst>
-            </a:pPr>
-            <a:r>
-              <a:rPr b="0" lang="en-US" sz="1200" spc="-1" strike="noStrike">
-                <a:solidFill>
-                  <a:srgbClr val="000000"/>
-                </a:solidFill>
-                <a:latin typeface="Arial"/>
-                <a:ea typeface="DejaVu Sans"/>
-              </a:rPr>
-              <a:t>CodeEU-244: Signature validation fails for old (prior to v4) Manufacturer reports</a:t>
-            </a:r>
-            <a:endParaRPr b="0" lang="en-GB" sz="1200" spc="-1" strike="noStrike">
-              <a:solidFill>
-                <a:srgbClr val="000000"/>
-              </a:solidFill>
-              <a:latin typeface="Arial"/>
-            </a:endParaRPr>
-          </a:p>
-          <a:p>
-            <a:pPr indent="0" defTabSz="914400">
-              <a:lnSpc>
-                <a:spcPct val="100000"/>
-              </a:lnSpc>
-              <a:buNone/>
-              <a:tabLst>
-                <a:tab algn="l" pos="0"/>
-              </a:tabLst>
-            </a:pPr>
-            <a:endParaRPr b="0" lang="en-GB" sz="1400" spc="-1" strike="noStrike">
+              <a:t>CodeEU-260: regression fix handling overload buffer</a:t>
+            </a:r>
+            <a:endParaRPr b="0" lang="en-US" sz="1200" spc="-1" strike="noStrike">
               <a:solidFill>
                 <a:srgbClr val="000000"/>
               </a:solidFill>
@@ -13286,7 +13302,7 @@
         <p:spPr>
           <a:xfrm>
             <a:off x="468360" y="476640"/>
-            <a:ext cx="8215920" cy="678600"/>
+            <a:ext cx="8214120" cy="676800"/>
           </a:xfrm>
           <a:prstGeom prst="rect">
             <a:avLst/>
@@ -13333,7 +13349,7 @@
               </a:rPr>
               <a:t>18.12.2023</a:t>
             </a:r>
-            <a:endParaRPr b="0" lang="en-GB" sz="1600" spc="-1" strike="noStrike">
+            <a:endParaRPr b="0" lang="en-US" sz="1600" spc="-1" strike="noStrike">
               <a:solidFill>
                 <a:srgbClr val="000000"/>
               </a:solidFill>
@@ -13355,7 +13371,7 @@
         <p:spPr>
           <a:xfrm>
             <a:off x="323640" y="1268640"/>
-            <a:ext cx="8494560" cy="4821840"/>
+            <a:ext cx="8492760" cy="4820040"/>
           </a:xfrm>
           <a:prstGeom prst="rect">
             <a:avLst/>
@@ -13394,9 +13410,9 @@
                 <a:latin typeface="Arial"/>
                 <a:ea typeface="DejaVu Sans"/>
               </a:rPr>
-              <a:t>Bugfixes (2/2)</a:t>
-            </a:r>
-            <a:endParaRPr b="0" lang="en-GB" sz="1600" spc="-1" strike="noStrike">
+              <a:t>Bugfixes (1/2)</a:t>
+            </a:r>
+            <a:endParaRPr b="0" lang="en-US" sz="1600" spc="-1" strike="noStrike">
               <a:solidFill>
                 <a:srgbClr val="000000"/>
               </a:solidFill>
@@ -13428,9 +13444,9 @@
                 <a:latin typeface="Arial"/>
                 <a:ea typeface="DejaVu Sans"/>
               </a:rPr>
-              <a:t>CodeEU-249: Fix handling gear torque limits in case of IEPC WheelHub motor and only one side is measured</a:t>
-            </a:r>
-            <a:endParaRPr b="0" lang="en-GB" sz="1200" spc="-1" strike="noStrike">
+              <a:t>CodeEU-94: DistanceRun got an unexpected response</a:t>
+            </a:r>
+            <a:endParaRPr b="0" lang="en-US" sz="1200" spc="-1" strike="noStrike">
               <a:solidFill>
                 <a:srgbClr val="000000"/>
               </a:solidFill>
@@ -13462,9 +13478,9 @@
                 <a:latin typeface="Arial"/>
                 <a:ea typeface="DejaVu Sans"/>
               </a:rPr>
-              <a:t>CodeEU-250: Maximum vehicle speed exceeded during pre-processing</a:t>
-            </a:r>
-            <a:endParaRPr b="0" lang="en-GB" sz="1200" spc="-1" strike="noStrike">
+              <a:t>CodeEU-153: DrivingActionAccelerate: Failed to find operating point after Overload</a:t>
+            </a:r>
+            <a:endParaRPr b="0" lang="en-US" sz="1200" spc="-1" strike="noStrike">
               <a:solidFill>
                 <a:srgbClr val="000000"/>
               </a:solidFill>
@@ -13496,9 +13512,9 @@
                 <a:latin typeface="Arial"/>
                 <a:ea typeface="DejaVu Sans"/>
               </a:rPr>
-              <a:t>CodeEU-253: Replace VTP HeavyBus in Generic Vehicles with VTP Truck</a:t>
-            </a:r>
-            <a:endParaRPr b="0" lang="en-GB" sz="1200" spc="-1" strike="noStrike">
+              <a:t>CodeEU-158: Urban RefLoad DrivingActionAccelerate: Failed to find operating point (IEPC Wheelhub 1 measured)</a:t>
+            </a:r>
+            <a:endParaRPr b="0" lang="en-US" sz="1200" spc="-1" strike="noStrike">
               <a:solidFill>
                 <a:srgbClr val="000000"/>
               </a:solidFill>
@@ -13530,9 +13546,9 @@
                 <a:latin typeface="Arial"/>
                 <a:ea typeface="DejaVu Sans"/>
               </a:rPr>
-              <a:t>CodeEU-259: Inconsistent calculation of AverageRRC in CIF</a:t>
-            </a:r>
-            <a:endParaRPr b="0" lang="en-GB" sz="1200" spc="-1" strike="noStrike">
+              <a:t>CodeEU-168: Vecto Declaration Simulation with P1-Hybrid shows multiple errors - Simulation Aborts!</a:t>
+            </a:r>
+            <a:endParaRPr b="0" lang="en-US" sz="1200" spc="-1" strike="noStrike">
               <a:solidFill>
                 <a:srgbClr val="000000"/>
               </a:solidFill>
@@ -13564,9 +13580,9 @@
                 <a:latin typeface="Arial"/>
                 <a:ea typeface="DejaVu Sans"/>
               </a:rPr>
-              <a:t>CodeEU-260: Handling of overload buffer in case Continuous Torque is 0Nm</a:t>
-            </a:r>
-            <a:endParaRPr b="0" lang="en-GB" sz="1200" spc="-1" strike="noStrike">
+              <a:t>CodeEU-191: Boosting limits HEV ovc are not working</a:t>
+            </a:r>
+            <a:endParaRPr b="0" lang="en-US" sz="1200" spc="-1" strike="noStrike">
               <a:solidFill>
                 <a:srgbClr val="000000"/>
               </a:solidFill>
@@ -13598,9 +13614,9 @@
                 <a:latin typeface="Arial"/>
                 <a:ea typeface="DejaVu Sans"/>
               </a:rPr>
-              <a:t>CodeEU-261: SuperCap internal resistance standard values correction</a:t>
-            </a:r>
-            <a:endParaRPr b="0" lang="en-GB" sz="1200" spc="-1" strike="noStrike">
+              <a:t>CodeEU-202: EMS Standard Values: Continuous/Overload Torque 0 Nm</a:t>
+            </a:r>
+            <a:endParaRPr b="0" lang="en-US" sz="1200" spc="-1" strike="noStrike">
               <a:solidFill>
                 <a:srgbClr val="000000"/>
               </a:solidFill>
@@ -13632,9 +13648,9 @@
                 <a:latin typeface="Arial"/>
                 <a:ea typeface="DejaVu Sans"/>
               </a:rPr>
-              <a:t>CodeEU-263: Determination of rated power for IEPCs for MRF and CIF</a:t>
-            </a:r>
-            <a:endParaRPr b="0" lang="en-GB" sz="1200" spc="-1" strike="noStrike">
+              <a:t>CodeEU-203: HybridStrategy error for IHPC type 1 hybrid lorry</a:t>
+            </a:r>
+            <a:endParaRPr b="0" lang="en-US" sz="1200" spc="-1" strike="noStrike">
               <a:solidFill>
                 <a:srgbClr val="000000"/>
               </a:solidFill>
@@ -13666,9 +13682,383 @@
                 <a:latin typeface="Arial"/>
                 <a:ea typeface="DejaVu Sans"/>
               </a:rPr>
-              <a:t>CodeEU-266: Fix Measured Speed Testcases</a:t>
-            </a:r>
-            <a:endParaRPr b="0" lang="en-GB" sz="1200" spc="-1" strike="noStrike">
+              <a:t>CodeEU-206: VTP + PEMS test done by Renault Trucks France - VECTO tool errors most probably linked to automatic gearbox (with torque converter)</a:t>
+            </a:r>
+            <a:endParaRPr b="0" lang="en-US" sz="1200" spc="-1" strike="noStrike">
+              <a:solidFill>
+                <a:srgbClr val="000000"/>
+              </a:solidFill>
+              <a:latin typeface="Arial"/>
+            </a:endParaRPr>
+          </a:p>
+          <a:p>
+            <a:pPr lvl="1" marL="800280" indent="-343080" defTabSz="914400">
+              <a:lnSpc>
+                <a:spcPct val="100000"/>
+              </a:lnSpc>
+              <a:spcBef>
+                <a:spcPts val="320"/>
+              </a:spcBef>
+              <a:buClr>
+                <a:srgbClr val="000000"/>
+              </a:buClr>
+              <a:buFont typeface="Symbol"/>
+              <a:buChar char=""/>
+              <a:tabLst>
+                <a:tab algn="l" pos="1886040"/>
+              </a:tabLst>
+            </a:pPr>
+            <a:r>
+              <a:rPr b="0" lang="en-US" sz="1200" spc="-1" strike="noStrike">
+                <a:solidFill>
+                  <a:srgbClr val="000000"/>
+                </a:solidFill>
+                <a:latin typeface="Arial"/>
+                <a:ea typeface="DejaVu Sans"/>
+              </a:rPr>
+              <a:t>CodeEU-211: Hybrid P1 configurations with errors</a:t>
+            </a:r>
+            <a:endParaRPr b="0" lang="en-US" sz="1200" spc="-1" strike="noStrike">
+              <a:solidFill>
+                <a:srgbClr val="000000"/>
+              </a:solidFill>
+              <a:latin typeface="Arial"/>
+            </a:endParaRPr>
+          </a:p>
+          <a:p>
+            <a:pPr lvl="1" marL="800280" indent="-343080" defTabSz="914400">
+              <a:lnSpc>
+                <a:spcPct val="100000"/>
+              </a:lnSpc>
+              <a:spcBef>
+                <a:spcPts val="320"/>
+              </a:spcBef>
+              <a:buClr>
+                <a:srgbClr val="000000"/>
+              </a:buClr>
+              <a:buFont typeface="Symbol"/>
+              <a:buChar char=""/>
+              <a:tabLst>
+                <a:tab algn="l" pos="1886040"/>
+              </a:tabLst>
+            </a:pPr>
+            <a:r>
+              <a:rPr b="0" lang="en-US" sz="1200" spc="-1" strike="noStrike">
+                <a:solidFill>
+                  <a:srgbClr val="000000"/>
+                </a:solidFill>
+                <a:latin typeface="Arial"/>
+                <a:ea typeface="DejaVu Sans"/>
+              </a:rPr>
+              <a:t>CodeEU-215: MultiStep tool help</a:t>
+            </a:r>
+            <a:endParaRPr b="0" lang="en-US" sz="1200" spc="-1" strike="noStrike">
+              <a:solidFill>
+                <a:srgbClr val="000000"/>
+              </a:solidFill>
+              <a:latin typeface="Arial"/>
+            </a:endParaRPr>
+          </a:p>
+          <a:p>
+            <a:pPr lvl="1" marL="800280" indent="-343080" defTabSz="914400">
+              <a:lnSpc>
+                <a:spcPct val="100000"/>
+              </a:lnSpc>
+              <a:spcBef>
+                <a:spcPts val="320"/>
+              </a:spcBef>
+              <a:buClr>
+                <a:srgbClr val="000000"/>
+              </a:buClr>
+              <a:buFont typeface="Symbol"/>
+              <a:buChar char=""/>
+              <a:tabLst>
+                <a:tab algn="l" pos="1886040"/>
+              </a:tabLst>
+            </a:pPr>
+            <a:r>
+              <a:rPr b="0" lang="en-US" sz="1200" spc="-1" strike="noStrike">
+                <a:solidFill>
+                  <a:srgbClr val="000000"/>
+                </a:solidFill>
+                <a:latin typeface="Arial"/>
+                <a:ea typeface="DejaVu Sans"/>
+              </a:rPr>
+              <a:t>CodeEU-216: NrOfGears in CIF is 1 for IEPC no matter how many gears it has</a:t>
+            </a:r>
+            <a:endParaRPr b="0" lang="en-US" sz="1200" spc="-1" strike="noStrike">
+              <a:solidFill>
+                <a:srgbClr val="000000"/>
+              </a:solidFill>
+              <a:latin typeface="Arial"/>
+            </a:endParaRPr>
+          </a:p>
+          <a:p>
+            <a:pPr lvl="1" marL="800280" indent="-343080" defTabSz="914400">
+              <a:lnSpc>
+                <a:spcPct val="100000"/>
+              </a:lnSpc>
+              <a:spcBef>
+                <a:spcPts val="320"/>
+              </a:spcBef>
+              <a:buClr>
+                <a:srgbClr val="000000"/>
+              </a:buClr>
+              <a:buFont typeface="Symbol"/>
+              <a:buChar char=""/>
+              <a:tabLst>
+                <a:tab algn="l" pos="1886040"/>
+              </a:tabLst>
+            </a:pPr>
+            <a:r>
+              <a:rPr b="0" lang="en-US" sz="1200" spc="-1" strike="noStrike">
+                <a:solidFill>
+                  <a:srgbClr val="000000"/>
+                </a:solidFill>
+                <a:latin typeface="Arial"/>
+                <a:ea typeface="DejaVu Sans"/>
+              </a:rPr>
+              <a:t>CodeEU-220: Error manual transmission 2. gear</a:t>
+            </a:r>
+            <a:endParaRPr b="0" lang="en-US" sz="1200" spc="-1" strike="noStrike">
+              <a:solidFill>
+                <a:srgbClr val="000000"/>
+              </a:solidFill>
+              <a:latin typeface="Arial"/>
+            </a:endParaRPr>
+          </a:p>
+          <a:p>
+            <a:pPr lvl="1" marL="800280" indent="-343080" defTabSz="914400">
+              <a:lnSpc>
+                <a:spcPct val="100000"/>
+              </a:lnSpc>
+              <a:spcBef>
+                <a:spcPts val="320"/>
+              </a:spcBef>
+              <a:buClr>
+                <a:srgbClr val="000000"/>
+              </a:buClr>
+              <a:buFont typeface="Symbol"/>
+              <a:buChar char=""/>
+              <a:tabLst>
+                <a:tab algn="l" pos="1886040"/>
+              </a:tabLst>
+            </a:pPr>
+            <a:r>
+              <a:rPr b="0" lang="en-US" sz="1200" spc="-1" strike="noStrike">
+                <a:solidFill>
+                  <a:srgbClr val="000000"/>
+                </a:solidFill>
+                <a:latin typeface="Arial"/>
+                <a:ea typeface="DejaVu Sans"/>
+              </a:rPr>
+              <a:t>CodeEU-224: Issue with PEV complete vehicle simulation (Vecto MultiStage)</a:t>
+            </a:r>
+            <a:endParaRPr b="0" lang="en-US" sz="1200" spc="-1" strike="noStrike">
+              <a:solidFill>
+                <a:srgbClr val="000000"/>
+              </a:solidFill>
+              <a:latin typeface="Arial"/>
+            </a:endParaRPr>
+          </a:p>
+          <a:p>
+            <a:pPr lvl="1" marL="800280" indent="-343080" defTabSz="914400">
+              <a:lnSpc>
+                <a:spcPct val="100000"/>
+              </a:lnSpc>
+              <a:spcBef>
+                <a:spcPts val="320"/>
+              </a:spcBef>
+              <a:buClr>
+                <a:srgbClr val="000000"/>
+              </a:buClr>
+              <a:buFont typeface="Symbol"/>
+              <a:buChar char=""/>
+              <a:tabLst>
+                <a:tab algn="l" pos="1886040"/>
+              </a:tabLst>
+            </a:pPr>
+            <a:r>
+              <a:rPr b="0" lang="en-US" sz="1200" spc="-1" strike="noStrike">
+                <a:solidFill>
+                  <a:srgbClr val="000000"/>
+                </a:solidFill>
+                <a:latin typeface="Arial"/>
+                <a:ea typeface="DejaVu Sans"/>
+              </a:rPr>
+              <a:t>CodeEU-231: IVECO CONFIDENTIAL : hybrid buses completed simulation aborted</a:t>
+            </a:r>
+            <a:endParaRPr b="0" lang="en-US" sz="1200" spc="-1" strike="noStrike">
+              <a:solidFill>
+                <a:srgbClr val="000000"/>
+              </a:solidFill>
+              <a:latin typeface="Arial"/>
+            </a:endParaRPr>
+          </a:p>
+          <a:p>
+            <a:pPr lvl="1" marL="800280" indent="-343080" defTabSz="914400">
+              <a:lnSpc>
+                <a:spcPct val="100000"/>
+              </a:lnSpc>
+              <a:spcBef>
+                <a:spcPts val="320"/>
+              </a:spcBef>
+              <a:buClr>
+                <a:srgbClr val="000000"/>
+              </a:buClr>
+              <a:buFont typeface="Symbol"/>
+              <a:buChar char=""/>
+              <a:tabLst>
+                <a:tab algn="l" pos="1886040"/>
+              </a:tabLst>
+            </a:pPr>
+            <a:r>
+              <a:rPr b="0" lang="en-US" sz="1200" spc="-1" strike="noStrike">
+                <a:solidFill>
+                  <a:srgbClr val="000000"/>
+                </a:solidFill>
+                <a:latin typeface="Arial"/>
+                <a:ea typeface="DejaVu Sans"/>
+              </a:rPr>
+              <a:t>CodeEU-234: Error Conventional Lorry Gear: 1C DistanceRun got an unexpected response</a:t>
+            </a:r>
+            <a:endParaRPr b="0" lang="en-US" sz="1200" spc="-1" strike="noStrike">
+              <a:solidFill>
+                <a:srgbClr val="000000"/>
+              </a:solidFill>
+              <a:latin typeface="Arial"/>
+            </a:endParaRPr>
+          </a:p>
+          <a:p>
+            <a:pPr lvl="1" marL="800280" indent="-343080" defTabSz="914400">
+              <a:lnSpc>
+                <a:spcPct val="100000"/>
+              </a:lnSpc>
+              <a:spcBef>
+                <a:spcPts val="320"/>
+              </a:spcBef>
+              <a:buClr>
+                <a:srgbClr val="000000"/>
+              </a:buClr>
+              <a:buFont typeface="Symbol"/>
+              <a:buChar char=""/>
+              <a:tabLst>
+                <a:tab algn="l" pos="1886040"/>
+              </a:tabLst>
+            </a:pPr>
+            <a:r>
+              <a:rPr b="0" lang="en-US" sz="1200" spc="-1" strike="noStrike">
+                <a:solidFill>
+                  <a:srgbClr val="000000"/>
+                </a:solidFill>
+                <a:latin typeface="Arial"/>
+                <a:ea typeface="DejaVu Sans"/>
+              </a:rPr>
+              <a:t>CodeEU-235: Tyre error calculation buses "invalid xsi:type 'TyreDataDeclarationType'"</a:t>
+            </a:r>
+            <a:endParaRPr b="0" lang="en-US" sz="1200" spc="-1" strike="noStrike">
+              <a:solidFill>
+                <a:srgbClr val="000000"/>
+              </a:solidFill>
+              <a:latin typeface="Arial"/>
+            </a:endParaRPr>
+          </a:p>
+          <a:p>
+            <a:pPr lvl="1" marL="800280" indent="-343080" defTabSz="914400">
+              <a:lnSpc>
+                <a:spcPct val="100000"/>
+              </a:lnSpc>
+              <a:spcBef>
+                <a:spcPts val="320"/>
+              </a:spcBef>
+              <a:buClr>
+                <a:srgbClr val="000000"/>
+              </a:buClr>
+              <a:buFont typeface="Symbol"/>
+              <a:buChar char=""/>
+              <a:tabLst>
+                <a:tab algn="l" pos="1886040"/>
+              </a:tabLst>
+            </a:pPr>
+            <a:r>
+              <a:rPr b="0" lang="en-US" sz="1200" spc="-1" strike="noStrike">
+                <a:solidFill>
+                  <a:srgbClr val="000000"/>
+                </a:solidFill>
+                <a:latin typeface="Arial"/>
+                <a:ea typeface="DejaVu Sans"/>
+              </a:rPr>
+              <a:t>CodeEU-238: Bus VIF files not valid in Multistep VECTO</a:t>
+            </a:r>
+            <a:endParaRPr b="0" lang="en-US" sz="1200" spc="-1" strike="noStrike">
+              <a:solidFill>
+                <a:srgbClr val="000000"/>
+              </a:solidFill>
+              <a:latin typeface="Arial"/>
+            </a:endParaRPr>
+          </a:p>
+          <a:p>
+            <a:pPr lvl="1" marL="800280" indent="-343080" defTabSz="914400">
+              <a:lnSpc>
+                <a:spcPct val="100000"/>
+              </a:lnSpc>
+              <a:spcBef>
+                <a:spcPts val="320"/>
+              </a:spcBef>
+              <a:buClr>
+                <a:srgbClr val="000000"/>
+              </a:buClr>
+              <a:buFont typeface="Symbol"/>
+              <a:buChar char=""/>
+              <a:tabLst>
+                <a:tab algn="l" pos="1886040"/>
+              </a:tabLst>
+            </a:pPr>
+            <a:r>
+              <a:rPr b="0" lang="en-US" sz="1200" spc="-1" strike="noStrike">
+                <a:solidFill>
+                  <a:srgbClr val="000000"/>
+                </a:solidFill>
+                <a:latin typeface="Arial"/>
+                <a:ea typeface="DejaVu Sans"/>
+              </a:rPr>
+              <a:t>CodeEU-243: Simulation aborted: Gear 5 Lossmap not sufficiant</a:t>
+            </a:r>
+            <a:endParaRPr b="0" lang="en-US" sz="1200" spc="-1" strike="noStrike">
+              <a:solidFill>
+                <a:srgbClr val="000000"/>
+              </a:solidFill>
+              <a:latin typeface="Arial"/>
+            </a:endParaRPr>
+          </a:p>
+          <a:p>
+            <a:pPr lvl="1" marL="800280" indent="-343080" defTabSz="914400">
+              <a:lnSpc>
+                <a:spcPct val="100000"/>
+              </a:lnSpc>
+              <a:spcBef>
+                <a:spcPts val="320"/>
+              </a:spcBef>
+              <a:buClr>
+                <a:srgbClr val="000000"/>
+              </a:buClr>
+              <a:buFont typeface="Symbol"/>
+              <a:buChar char=""/>
+              <a:tabLst>
+                <a:tab algn="l" pos="1886040"/>
+              </a:tabLst>
+            </a:pPr>
+            <a:r>
+              <a:rPr b="0" lang="en-US" sz="1200" spc="-1" strike="noStrike">
+                <a:solidFill>
+                  <a:srgbClr val="000000"/>
+                </a:solidFill>
+                <a:latin typeface="Arial"/>
+                <a:ea typeface="DejaVu Sans"/>
+              </a:rPr>
+              <a:t>CodeEU-244: Signature validation fails for old (prior to v4) Manufacturer reports</a:t>
+            </a:r>
+            <a:endParaRPr b="0" lang="en-US" sz="1200" spc="-1" strike="noStrike">
               <a:solidFill>
                 <a:srgbClr val="000000"/>
               </a:solidFill>
@@ -13680,49 +14070,12 @@
               <a:lnSpc>
                 <a:spcPct val="100000"/>
               </a:lnSpc>
-              <a:spcBef>
-                <a:spcPts val="281"/>
-              </a:spcBef>
               <a:buNone/>
               <a:tabLst>
                 <a:tab algn="l" pos="0"/>
               </a:tabLst>
             </a:pPr>
-            <a:endParaRPr b="0" lang="en-GB" sz="1200" spc="-1" strike="noStrike">
-              <a:solidFill>
-                <a:srgbClr val="000000"/>
-              </a:solidFill>
-              <a:latin typeface="Arial"/>
-            </a:endParaRPr>
-          </a:p>
-          <a:p>
-            <a:pPr indent="0" defTabSz="914400">
-              <a:lnSpc>
-                <a:spcPct val="100000"/>
-              </a:lnSpc>
-              <a:buNone/>
-              <a:tabLst>
-                <a:tab algn="l" pos="0"/>
-              </a:tabLst>
-            </a:pPr>
-            <a:endParaRPr b="0" lang="en-GB" sz="1400" spc="-1" strike="noStrike">
-              <a:solidFill>
-                <a:srgbClr val="000000"/>
-              </a:solidFill>
-              <a:latin typeface="Arial"/>
-            </a:endParaRPr>
-          </a:p>
-          <a:p>
-            <a:pPr indent="0" defTabSz="914400">
-              <a:lnSpc>
-                <a:spcPct val="100000"/>
-              </a:lnSpc>
-              <a:buNone/>
-              <a:tabLst>
-                <a:tab algn="l" pos="0"/>
-              </a:tabLst>
-            </a:pPr>
-            <a:endParaRPr b="0" lang="en-GB" sz="1400" spc="-1" strike="noStrike">
+            <a:endParaRPr b="0" lang="en-US" sz="1400" spc="-1" strike="noStrike">
               <a:solidFill>
                 <a:srgbClr val="000000"/>
               </a:solidFill>

--- a/Documentation/User Manual Source/Release Notes Vecto4.x.pptx
+++ b/Documentation/User Manual Source/Release Notes Vecto4.x.pptx
@@ -27,6 +27,7 @@
     <p:sldId id="271" r:id="rId22"/>
     <p:sldId id="272" r:id="rId23"/>
     <p:sldId id="273" r:id="rId24"/>
+    <p:sldId id="274" r:id="rId25"/>
   </p:sldIdLst>
   <p:sldSz cx="9144000" cy="6858000"/>
   <p:notesSz cx="7559675" cy="10691813"/>
@@ -108,7 +109,7 @@
         <p:txBody>
           <a:bodyPr/>
           <a:p>
-            <a:fld id="{0A200E93-DC05-4B43-854D-3B4925D2428A}" type="slidenum">
+            <a:fld id="{77C7D978-9448-4EC2-A939-C281ADF181EA}" type="slidenum">
               <a:t>&lt;#&gt;</a:t>
             </a:fld>
           </a:p>
@@ -238,7 +239,7 @@
         <p:spPr>
           <a:xfrm>
             <a:off x="7996320" y="6599160"/>
-            <a:ext cx="921240" cy="242280"/>
+            <a:ext cx="920880" cy="242280"/>
           </a:xfrm>
           <a:prstGeom prst="rect">
             <a:avLst/>
@@ -267,7 +268,7 @@
                 <a:spcPts val="499"/>
               </a:spcBef>
             </a:pPr>
-            <a:fld id="{F2B64004-FE3A-417F-BCB2-3F7EA274CCEF}" type="slidenum">
+            <a:fld id="{3E83C7EE-AF91-4A04-B36B-B5D9FAF42C04}" type="slidenum">
               <a:rPr b="1" lang="de-AT" sz="1000" spc="-1" strike="noStrike">
                 <a:solidFill>
                   <a:srgbClr val="7d7d7d"/>
@@ -295,7 +296,7 @@
         <p:spPr>
           <a:xfrm>
             <a:off x="144360" y="6627960"/>
-            <a:ext cx="1878480" cy="211680"/>
+            <a:ext cx="1878120" cy="211320"/>
           </a:xfrm>
           <a:prstGeom prst="rect">
             <a:avLst/>
@@ -356,7 +357,7 @@
         <p:spPr>
           <a:xfrm>
             <a:off x="7389360" y="37800"/>
-            <a:ext cx="1416960" cy="348480"/>
+            <a:ext cx="1416600" cy="348120"/>
           </a:xfrm>
           <a:prstGeom prst="rect">
             <a:avLst/>
@@ -379,7 +380,7 @@
         <p:spPr>
           <a:xfrm>
             <a:off x="107640" y="58680"/>
-            <a:ext cx="974160" cy="327960"/>
+            <a:ext cx="973800" cy="327600"/>
           </a:xfrm>
           <a:prstGeom prst="rect">
             <a:avLst/>
@@ -789,7 +790,7 @@
         <p:spPr>
           <a:xfrm>
             <a:off x="7996320" y="6599160"/>
-            <a:ext cx="921240" cy="242280"/>
+            <a:ext cx="920880" cy="242280"/>
           </a:xfrm>
           <a:prstGeom prst="rect">
             <a:avLst/>
@@ -818,7 +819,7 @@
                 <a:spcPts val="499"/>
               </a:spcBef>
             </a:pPr>
-            <a:fld id="{2554B842-F5D8-4574-8100-46EE5E129F9D}" type="slidenum">
+            <a:fld id="{F205227D-8AED-4363-AED6-7FE246A52FAC}" type="slidenum">
               <a:rPr b="1" lang="de-AT" sz="1000" spc="-1" strike="noStrike">
                 <a:solidFill>
                   <a:srgbClr val="7d7d7d"/>
@@ -846,7 +847,7 @@
         <p:spPr>
           <a:xfrm>
             <a:off x="144360" y="6627960"/>
-            <a:ext cx="1878480" cy="211680"/>
+            <a:ext cx="1878120" cy="211320"/>
           </a:xfrm>
           <a:prstGeom prst="rect">
             <a:avLst/>
@@ -907,7 +908,7 @@
         <p:spPr>
           <a:xfrm>
             <a:off x="7389360" y="37800"/>
-            <a:ext cx="1416960" cy="348480"/>
+            <a:ext cx="1416600" cy="348120"/>
           </a:xfrm>
           <a:prstGeom prst="rect">
             <a:avLst/>
@@ -930,7 +931,7 @@
         <p:spPr>
           <a:xfrm>
             <a:off x="107640" y="58680"/>
-            <a:ext cx="974160" cy="327960"/>
+            <a:ext cx="973800" cy="327600"/>
           </a:xfrm>
           <a:prstGeom prst="rect">
             <a:avLst/>
@@ -1340,7 +1341,7 @@
         <p:spPr>
           <a:xfrm>
             <a:off x="7996320" y="6599160"/>
-            <a:ext cx="921240" cy="242280"/>
+            <a:ext cx="920880" cy="242280"/>
           </a:xfrm>
           <a:prstGeom prst="rect">
             <a:avLst/>
@@ -1369,7 +1370,7 @@
                 <a:spcPts val="499"/>
               </a:spcBef>
             </a:pPr>
-            <a:fld id="{0C6CC2C5-577D-4E12-8584-ED1A1C1C6BCB}" type="slidenum">
+            <a:fld id="{8D75DCB9-05E5-45B0-BA73-0738D7344A9C}" type="slidenum">
               <a:rPr b="1" lang="de-AT" sz="1000" spc="-1" strike="noStrike">
                 <a:solidFill>
                   <a:srgbClr val="7d7d7d"/>
@@ -1397,7 +1398,7 @@
         <p:spPr>
           <a:xfrm>
             <a:off x="144360" y="6627960"/>
-            <a:ext cx="1878480" cy="211680"/>
+            <a:ext cx="1878120" cy="211320"/>
           </a:xfrm>
           <a:prstGeom prst="rect">
             <a:avLst/>
@@ -1458,7 +1459,7 @@
         <p:spPr>
           <a:xfrm>
             <a:off x="7389360" y="37800"/>
-            <a:ext cx="1416960" cy="348480"/>
+            <a:ext cx="1416600" cy="348120"/>
           </a:xfrm>
           <a:prstGeom prst="rect">
             <a:avLst/>
@@ -1481,7 +1482,7 @@
         <p:spPr>
           <a:xfrm>
             <a:off x="107640" y="58680"/>
-            <a:ext cx="974160" cy="327960"/>
+            <a:ext cx="973800" cy="327600"/>
           </a:xfrm>
           <a:prstGeom prst="rect">
             <a:avLst/>
@@ -1587,7 +1588,7 @@
                 <a:tab algn="l" pos="0"/>
               </a:tabLst>
             </a:pPr>
-            <a:fld id="{223B15DE-9597-4A2D-876C-909709AF5F6B}" type="slidenum">
+            <a:fld id="{7CDE0CB7-CAA2-4A92-94C2-3D872D25F3D6}" type="slidenum">
               <a:rPr b="0" lang="en-GB" sz="1400" spc="-1" strike="noStrike">
                 <a:solidFill>
                   <a:srgbClr val="000000"/>
@@ -1963,7 +1964,7 @@
         <p:spPr>
           <a:xfrm>
             <a:off x="7996320" y="6599160"/>
-            <a:ext cx="921240" cy="242280"/>
+            <a:ext cx="920880" cy="242280"/>
           </a:xfrm>
           <a:prstGeom prst="rect">
             <a:avLst/>
@@ -1992,7 +1993,7 @@
                 <a:spcPts val="499"/>
               </a:spcBef>
             </a:pPr>
-            <a:fld id="{12B7EC8E-1211-464A-82FD-7F112B629245}" type="slidenum">
+            <a:fld id="{2C3AB175-3729-418F-8350-C2F9E87C2BD9}" type="slidenum">
               <a:rPr b="1" lang="de-AT" sz="1000" spc="-1" strike="noStrike">
                 <a:solidFill>
                   <a:srgbClr val="7d7d7d"/>
@@ -2020,7 +2021,7 @@
         <p:spPr>
           <a:xfrm>
             <a:off x="144360" y="6627960"/>
-            <a:ext cx="1878480" cy="211680"/>
+            <a:ext cx="1878120" cy="211320"/>
           </a:xfrm>
           <a:prstGeom prst="rect">
             <a:avLst/>
@@ -2081,7 +2082,7 @@
         <p:spPr>
           <a:xfrm>
             <a:off x="7389360" y="37800"/>
-            <a:ext cx="1416960" cy="348480"/>
+            <a:ext cx="1416600" cy="348120"/>
           </a:xfrm>
           <a:prstGeom prst="rect">
             <a:avLst/>
@@ -2104,7 +2105,7 @@
         <p:spPr>
           <a:xfrm>
             <a:off x="107640" y="58680"/>
-            <a:ext cx="974160" cy="327960"/>
+            <a:ext cx="973800" cy="327600"/>
           </a:xfrm>
           <a:prstGeom prst="rect">
             <a:avLst/>
@@ -2514,7 +2515,7 @@
         <p:spPr>
           <a:xfrm>
             <a:off x="7996320" y="6599160"/>
-            <a:ext cx="921240" cy="242280"/>
+            <a:ext cx="920880" cy="242280"/>
           </a:xfrm>
           <a:prstGeom prst="rect">
             <a:avLst/>
@@ -2543,7 +2544,7 @@
                 <a:spcPts val="499"/>
               </a:spcBef>
             </a:pPr>
-            <a:fld id="{A7029640-FFD1-4A95-9016-73BE269960D3}" type="slidenum">
+            <a:fld id="{2656D8AE-A4D2-4574-89F0-1CFEC82BBE34}" type="slidenum">
               <a:rPr b="1" lang="de-AT" sz="1000" spc="-1" strike="noStrike">
                 <a:solidFill>
                   <a:srgbClr val="7d7d7d"/>
@@ -2571,7 +2572,7 @@
         <p:spPr>
           <a:xfrm>
             <a:off x="144360" y="6627960"/>
-            <a:ext cx="1878480" cy="211680"/>
+            <a:ext cx="1878120" cy="211320"/>
           </a:xfrm>
           <a:prstGeom prst="rect">
             <a:avLst/>
@@ -2632,7 +2633,7 @@
         <p:spPr>
           <a:xfrm>
             <a:off x="7389360" y="37800"/>
-            <a:ext cx="1416960" cy="348480"/>
+            <a:ext cx="1416600" cy="348120"/>
           </a:xfrm>
           <a:prstGeom prst="rect">
             <a:avLst/>
@@ -2655,7 +2656,7 @@
         <p:spPr>
           <a:xfrm>
             <a:off x="107640" y="58680"/>
-            <a:ext cx="974160" cy="327960"/>
+            <a:ext cx="973800" cy="327600"/>
           </a:xfrm>
           <a:prstGeom prst="rect">
             <a:avLst/>
@@ -3016,7 +3017,7 @@
         <p:spPr>
           <a:xfrm>
             <a:off x="539640" y="1052640"/>
-            <a:ext cx="8132040" cy="3945600"/>
+            <a:ext cx="8131680" cy="3945600"/>
           </a:xfrm>
           <a:prstGeom prst="rect">
             <a:avLst/>
@@ -3199,7 +3200,7 @@
         <p:spPr>
           <a:xfrm>
             <a:off x="2483640" y="2421000"/>
-            <a:ext cx="4172040" cy="1623240"/>
+            <a:ext cx="4171680" cy="1622880"/>
           </a:xfrm>
           <a:prstGeom prst="rect">
             <a:avLst/>
@@ -3252,7 +3253,7 @@
         <p:spPr>
           <a:xfrm>
             <a:off x="468360" y="476640"/>
-            <a:ext cx="8214120" cy="676800"/>
+            <a:ext cx="8213760" cy="676440"/>
           </a:xfrm>
           <a:prstGeom prst="rect">
             <a:avLst/>
@@ -3321,7 +3322,7 @@
         <p:spPr>
           <a:xfrm>
             <a:off x="323640" y="1268640"/>
-            <a:ext cx="8492760" cy="4820040"/>
+            <a:ext cx="8492400" cy="4819680"/>
           </a:xfrm>
           <a:prstGeom prst="rect">
             <a:avLst/>
@@ -3360,7 +3361,7 @@
                 <a:latin typeface="Arial"/>
                 <a:ea typeface="DejaVu Sans"/>
               </a:rPr>
-              <a:t>Bugfixes (2/2)</a:t>
+              <a:t>Bugfixes (1/2)</a:t>
             </a:r>
             <a:endParaRPr b="0" lang="en-US" sz="1600" spc="-1" strike="noStrike">
               <a:solidFill>
@@ -3394,7 +3395,7 @@
                 <a:latin typeface="Arial"/>
                 <a:ea typeface="DejaVu Sans"/>
               </a:rPr>
-              <a:t>CodeEU-249: Fix handling gear torque limits in case of IEPC WheelHub motor and only one side is measured</a:t>
+              <a:t>CodeEU-94: DistanceRun got an unexpected response</a:t>
             </a:r>
             <a:endParaRPr b="0" lang="en-US" sz="1200" spc="-1" strike="noStrike">
               <a:solidFill>
@@ -3428,7 +3429,7 @@
                 <a:latin typeface="Arial"/>
                 <a:ea typeface="DejaVu Sans"/>
               </a:rPr>
-              <a:t>CodeEU-250: Maximum vehicle speed exceeded during pre-processing</a:t>
+              <a:t>CodeEU-153: DrivingActionAccelerate: Failed to find operating point after Overload</a:t>
             </a:r>
             <a:endParaRPr b="0" lang="en-US" sz="1200" spc="-1" strike="noStrike">
               <a:solidFill>
@@ -3462,7 +3463,7 @@
                 <a:latin typeface="Arial"/>
                 <a:ea typeface="DejaVu Sans"/>
               </a:rPr>
-              <a:t>CodeEU-253: Replace VTP HeavyBus in Generic Vehicles with VTP Truck</a:t>
+              <a:t>CodeEU-158: Urban RefLoad DrivingActionAccelerate: Failed to find operating point (IEPC Wheelhub 1 measured)</a:t>
             </a:r>
             <a:endParaRPr b="0" lang="en-US" sz="1200" spc="-1" strike="noStrike">
               <a:solidFill>
@@ -3496,7 +3497,7 @@
                 <a:latin typeface="Arial"/>
                 <a:ea typeface="DejaVu Sans"/>
               </a:rPr>
-              <a:t>CodeEU-259: Inconsistent calculation of AverageRRC in CIF</a:t>
+              <a:t>CodeEU-168: Vecto Declaration Simulation with P1-Hybrid shows multiple errors - Simulation Aborts!</a:t>
             </a:r>
             <a:endParaRPr b="0" lang="en-US" sz="1200" spc="-1" strike="noStrike">
               <a:solidFill>
@@ -3530,7 +3531,7 @@
                 <a:latin typeface="Arial"/>
                 <a:ea typeface="DejaVu Sans"/>
               </a:rPr>
-              <a:t>CodeEU-260: Handling of overload buffer in case Continuous Torque is 0Nm</a:t>
+              <a:t>CodeEU-191: Boosting limits HEV ovc are not working</a:t>
             </a:r>
             <a:endParaRPr b="0" lang="en-US" sz="1200" spc="-1" strike="noStrike">
               <a:solidFill>
@@ -3564,7 +3565,7 @@
                 <a:latin typeface="Arial"/>
                 <a:ea typeface="DejaVu Sans"/>
               </a:rPr>
-              <a:t>CodeEU-261: SuperCap internal resistance standard values correction</a:t>
+              <a:t>CodeEU-202: EMS Standard Values: Continuous/Overload Torque 0 Nm</a:t>
             </a:r>
             <a:endParaRPr b="0" lang="en-US" sz="1200" spc="-1" strike="noStrike">
               <a:solidFill>
@@ -3598,7 +3599,7 @@
                 <a:latin typeface="Arial"/>
                 <a:ea typeface="DejaVu Sans"/>
               </a:rPr>
-              <a:t>CodeEU-263: Determination of rated power for IEPCs for MRF and CIF</a:t>
+              <a:t>CodeEU-203: HybridStrategy error for IHPC type 1 hybrid lorry</a:t>
             </a:r>
             <a:endParaRPr b="0" lang="en-US" sz="1200" spc="-1" strike="noStrike">
               <a:solidFill>
@@ -3632,7 +3633,7 @@
                 <a:latin typeface="Arial"/>
                 <a:ea typeface="DejaVu Sans"/>
               </a:rPr>
-              <a:t>CodeEU-266: Fix Measured Speed Testcases</a:t>
+              <a:t>CodeEU-206: VTP + PEMS test done by Renault Trucks France - VECTO tool errors most probably linked to automatic gearbox (with torque converter)</a:t>
             </a:r>
             <a:endParaRPr b="0" lang="en-US" sz="1200" spc="-1" strike="noStrike">
               <a:solidFill>
@@ -3642,18 +3643,32 @@
             </a:endParaRPr>
           </a:p>
           <a:p>
-            <a:pPr indent="0" defTabSz="914400">
-              <a:lnSpc>
-                <a:spcPct val="100000"/>
-              </a:lnSpc>
-              <a:spcBef>
-                <a:spcPts val="281"/>
-              </a:spcBef>
-              <a:buNone/>
-              <a:tabLst>
-                <a:tab algn="l" pos="0"/>
-              </a:tabLst>
-            </a:pPr>
+            <a:pPr lvl="1" marL="800280" indent="-343080" defTabSz="914400">
+              <a:lnSpc>
+                <a:spcPct val="100000"/>
+              </a:lnSpc>
+              <a:spcBef>
+                <a:spcPts val="320"/>
+              </a:spcBef>
+              <a:buClr>
+                <a:srgbClr val="000000"/>
+              </a:buClr>
+              <a:buFont typeface="Symbol"/>
+              <a:buChar char=""/>
+              <a:tabLst>
+                <a:tab algn="l" pos="1886040"/>
+              </a:tabLst>
+            </a:pPr>
+            <a:r>
+              <a:rPr b="0" lang="en-US" sz="1200" spc="-1" strike="noStrike">
+                <a:solidFill>
+                  <a:srgbClr val="000000"/>
+                </a:solidFill>
+                <a:latin typeface="Arial"/>
+                <a:ea typeface="DejaVu Sans"/>
+              </a:rPr>
+              <a:t>CodeEU-211: Hybrid P1 configurations with errors</a:t>
+            </a:r>
             <a:endParaRPr b="0" lang="en-US" sz="1200" spc="-1" strike="noStrike">
               <a:solidFill>
                 <a:srgbClr val="000000"/>
@@ -3662,16 +3677,339 @@
             </a:endParaRPr>
           </a:p>
           <a:p>
-            <a:pPr indent="0" defTabSz="914400">
-              <a:lnSpc>
-                <a:spcPct val="100000"/>
-              </a:lnSpc>
-              <a:buNone/>
-              <a:tabLst>
-                <a:tab algn="l" pos="0"/>
-              </a:tabLst>
-            </a:pPr>
-            <a:endParaRPr b="0" lang="en-US" sz="1400" spc="-1" strike="noStrike">
+            <a:pPr lvl="1" marL="800280" indent="-343080" defTabSz="914400">
+              <a:lnSpc>
+                <a:spcPct val="100000"/>
+              </a:lnSpc>
+              <a:spcBef>
+                <a:spcPts val="320"/>
+              </a:spcBef>
+              <a:buClr>
+                <a:srgbClr val="000000"/>
+              </a:buClr>
+              <a:buFont typeface="Symbol"/>
+              <a:buChar char=""/>
+              <a:tabLst>
+                <a:tab algn="l" pos="1886040"/>
+              </a:tabLst>
+            </a:pPr>
+            <a:r>
+              <a:rPr b="0" lang="en-US" sz="1200" spc="-1" strike="noStrike">
+                <a:solidFill>
+                  <a:srgbClr val="000000"/>
+                </a:solidFill>
+                <a:latin typeface="Arial"/>
+                <a:ea typeface="DejaVu Sans"/>
+              </a:rPr>
+              <a:t>CodeEU-215: MultiStep tool help</a:t>
+            </a:r>
+            <a:endParaRPr b="0" lang="en-US" sz="1200" spc="-1" strike="noStrike">
+              <a:solidFill>
+                <a:srgbClr val="000000"/>
+              </a:solidFill>
+              <a:latin typeface="Arial"/>
+            </a:endParaRPr>
+          </a:p>
+          <a:p>
+            <a:pPr lvl="1" marL="800280" indent="-343080" defTabSz="914400">
+              <a:lnSpc>
+                <a:spcPct val="100000"/>
+              </a:lnSpc>
+              <a:spcBef>
+                <a:spcPts val="320"/>
+              </a:spcBef>
+              <a:buClr>
+                <a:srgbClr val="000000"/>
+              </a:buClr>
+              <a:buFont typeface="Symbol"/>
+              <a:buChar char=""/>
+              <a:tabLst>
+                <a:tab algn="l" pos="1886040"/>
+              </a:tabLst>
+            </a:pPr>
+            <a:r>
+              <a:rPr b="0" lang="en-US" sz="1200" spc="-1" strike="noStrike">
+                <a:solidFill>
+                  <a:srgbClr val="000000"/>
+                </a:solidFill>
+                <a:latin typeface="Arial"/>
+                <a:ea typeface="DejaVu Sans"/>
+              </a:rPr>
+              <a:t>CodeEU-216: NrOfGears in CIF is 1 for IEPC no matter how many gears it has</a:t>
+            </a:r>
+            <a:endParaRPr b="0" lang="en-US" sz="1200" spc="-1" strike="noStrike">
+              <a:solidFill>
+                <a:srgbClr val="000000"/>
+              </a:solidFill>
+              <a:latin typeface="Arial"/>
+            </a:endParaRPr>
+          </a:p>
+          <a:p>
+            <a:pPr lvl="1" marL="800280" indent="-343080" defTabSz="914400">
+              <a:lnSpc>
+                <a:spcPct val="100000"/>
+              </a:lnSpc>
+              <a:spcBef>
+                <a:spcPts val="320"/>
+              </a:spcBef>
+              <a:buClr>
+                <a:srgbClr val="000000"/>
+              </a:buClr>
+              <a:buFont typeface="Symbol"/>
+              <a:buChar char=""/>
+              <a:tabLst>
+                <a:tab algn="l" pos="1886040"/>
+              </a:tabLst>
+            </a:pPr>
+            <a:r>
+              <a:rPr b="0" lang="en-US" sz="1200" spc="-1" strike="noStrike">
+                <a:solidFill>
+                  <a:srgbClr val="000000"/>
+                </a:solidFill>
+                <a:latin typeface="Arial"/>
+                <a:ea typeface="DejaVu Sans"/>
+              </a:rPr>
+              <a:t>CodeEU-220: Error manual transmission 2. gear</a:t>
+            </a:r>
+            <a:endParaRPr b="0" lang="en-US" sz="1200" spc="-1" strike="noStrike">
+              <a:solidFill>
+                <a:srgbClr val="000000"/>
+              </a:solidFill>
+              <a:latin typeface="Arial"/>
+            </a:endParaRPr>
+          </a:p>
+          <a:p>
+            <a:pPr lvl="1" marL="800280" indent="-343080" defTabSz="914400">
+              <a:lnSpc>
+                <a:spcPct val="100000"/>
+              </a:lnSpc>
+              <a:spcBef>
+                <a:spcPts val="320"/>
+              </a:spcBef>
+              <a:buClr>
+                <a:srgbClr val="000000"/>
+              </a:buClr>
+              <a:buFont typeface="Symbol"/>
+              <a:buChar char=""/>
+              <a:tabLst>
+                <a:tab algn="l" pos="1886040"/>
+              </a:tabLst>
+            </a:pPr>
+            <a:r>
+              <a:rPr b="0" lang="en-US" sz="1200" spc="-1" strike="noStrike">
+                <a:solidFill>
+                  <a:srgbClr val="000000"/>
+                </a:solidFill>
+                <a:latin typeface="Arial"/>
+                <a:ea typeface="DejaVu Sans"/>
+              </a:rPr>
+              <a:t>CodeEU-224: Issue with PEV complete vehicle simulation (Vecto MultiStage)</a:t>
+            </a:r>
+            <a:endParaRPr b="0" lang="en-US" sz="1200" spc="-1" strike="noStrike">
+              <a:solidFill>
+                <a:srgbClr val="000000"/>
+              </a:solidFill>
+              <a:latin typeface="Arial"/>
+            </a:endParaRPr>
+          </a:p>
+          <a:p>
+            <a:pPr lvl="1" marL="800280" indent="-343080" defTabSz="914400">
+              <a:lnSpc>
+                <a:spcPct val="100000"/>
+              </a:lnSpc>
+              <a:spcBef>
+                <a:spcPts val="320"/>
+              </a:spcBef>
+              <a:buClr>
+                <a:srgbClr val="000000"/>
+              </a:buClr>
+              <a:buFont typeface="Symbol"/>
+              <a:buChar char=""/>
+              <a:tabLst>
+                <a:tab algn="l" pos="1886040"/>
+              </a:tabLst>
+            </a:pPr>
+            <a:r>
+              <a:rPr b="0" lang="en-US" sz="1200" spc="-1" strike="noStrike">
+                <a:solidFill>
+                  <a:srgbClr val="000000"/>
+                </a:solidFill>
+                <a:latin typeface="Arial"/>
+                <a:ea typeface="DejaVu Sans"/>
+              </a:rPr>
+              <a:t>CodeEU-231: IVECO CONFIDENTIAL : hybrid buses completed simulation aborted</a:t>
+            </a:r>
+            <a:endParaRPr b="0" lang="en-US" sz="1200" spc="-1" strike="noStrike">
+              <a:solidFill>
+                <a:srgbClr val="000000"/>
+              </a:solidFill>
+              <a:latin typeface="Arial"/>
+            </a:endParaRPr>
+          </a:p>
+          <a:p>
+            <a:pPr lvl="1" marL="800280" indent="-343080" defTabSz="914400">
+              <a:lnSpc>
+                <a:spcPct val="100000"/>
+              </a:lnSpc>
+              <a:spcBef>
+                <a:spcPts val="320"/>
+              </a:spcBef>
+              <a:buClr>
+                <a:srgbClr val="000000"/>
+              </a:buClr>
+              <a:buFont typeface="Symbol"/>
+              <a:buChar char=""/>
+              <a:tabLst>
+                <a:tab algn="l" pos="1886040"/>
+              </a:tabLst>
+            </a:pPr>
+            <a:r>
+              <a:rPr b="0" lang="en-US" sz="1200" spc="-1" strike="noStrike">
+                <a:solidFill>
+                  <a:srgbClr val="000000"/>
+                </a:solidFill>
+                <a:latin typeface="Arial"/>
+                <a:ea typeface="DejaVu Sans"/>
+              </a:rPr>
+              <a:t>CodeEU-234: Error Conventional Lorry Gear: 1C DistanceRun got an unexpected response</a:t>
+            </a:r>
+            <a:endParaRPr b="0" lang="en-US" sz="1200" spc="-1" strike="noStrike">
+              <a:solidFill>
+                <a:srgbClr val="000000"/>
+              </a:solidFill>
+              <a:latin typeface="Arial"/>
+            </a:endParaRPr>
+          </a:p>
+          <a:p>
+            <a:pPr lvl="1" marL="800280" indent="-343080" defTabSz="914400">
+              <a:lnSpc>
+                <a:spcPct val="100000"/>
+              </a:lnSpc>
+              <a:spcBef>
+                <a:spcPts val="320"/>
+              </a:spcBef>
+              <a:buClr>
+                <a:srgbClr val="000000"/>
+              </a:buClr>
+              <a:buFont typeface="Symbol"/>
+              <a:buChar char=""/>
+              <a:tabLst>
+                <a:tab algn="l" pos="1886040"/>
+              </a:tabLst>
+            </a:pPr>
+            <a:r>
+              <a:rPr b="0" lang="en-US" sz="1200" spc="-1" strike="noStrike">
+                <a:solidFill>
+                  <a:srgbClr val="000000"/>
+                </a:solidFill>
+                <a:latin typeface="Arial"/>
+                <a:ea typeface="DejaVu Sans"/>
+              </a:rPr>
+              <a:t>CodeEU-235: Tyre error calculation buses "invalid xsi:type 'TyreDataDeclarationType'"</a:t>
+            </a:r>
+            <a:endParaRPr b="0" lang="en-US" sz="1200" spc="-1" strike="noStrike">
+              <a:solidFill>
+                <a:srgbClr val="000000"/>
+              </a:solidFill>
+              <a:latin typeface="Arial"/>
+            </a:endParaRPr>
+          </a:p>
+          <a:p>
+            <a:pPr lvl="1" marL="800280" indent="-343080" defTabSz="914400">
+              <a:lnSpc>
+                <a:spcPct val="100000"/>
+              </a:lnSpc>
+              <a:spcBef>
+                <a:spcPts val="320"/>
+              </a:spcBef>
+              <a:buClr>
+                <a:srgbClr val="000000"/>
+              </a:buClr>
+              <a:buFont typeface="Symbol"/>
+              <a:buChar char=""/>
+              <a:tabLst>
+                <a:tab algn="l" pos="1886040"/>
+              </a:tabLst>
+            </a:pPr>
+            <a:r>
+              <a:rPr b="0" lang="en-US" sz="1200" spc="-1" strike="noStrike">
+                <a:solidFill>
+                  <a:srgbClr val="000000"/>
+                </a:solidFill>
+                <a:latin typeface="Arial"/>
+                <a:ea typeface="DejaVu Sans"/>
+              </a:rPr>
+              <a:t>CodeEU-238: Bus VIF files not valid in Multistep VECTO</a:t>
+            </a:r>
+            <a:endParaRPr b="0" lang="en-US" sz="1200" spc="-1" strike="noStrike">
+              <a:solidFill>
+                <a:srgbClr val="000000"/>
+              </a:solidFill>
+              <a:latin typeface="Arial"/>
+            </a:endParaRPr>
+          </a:p>
+          <a:p>
+            <a:pPr lvl="1" marL="800280" indent="-343080" defTabSz="914400">
+              <a:lnSpc>
+                <a:spcPct val="100000"/>
+              </a:lnSpc>
+              <a:spcBef>
+                <a:spcPts val="320"/>
+              </a:spcBef>
+              <a:buClr>
+                <a:srgbClr val="000000"/>
+              </a:buClr>
+              <a:buFont typeface="Symbol"/>
+              <a:buChar char=""/>
+              <a:tabLst>
+                <a:tab algn="l" pos="1886040"/>
+              </a:tabLst>
+            </a:pPr>
+            <a:r>
+              <a:rPr b="0" lang="en-US" sz="1200" spc="-1" strike="noStrike">
+                <a:solidFill>
+                  <a:srgbClr val="000000"/>
+                </a:solidFill>
+                <a:latin typeface="Arial"/>
+                <a:ea typeface="DejaVu Sans"/>
+              </a:rPr>
+              <a:t>CodeEU-243: Simulation aborted: Gear 5 Lossmap not sufficiant</a:t>
+            </a:r>
+            <a:endParaRPr b="0" lang="en-US" sz="1200" spc="-1" strike="noStrike">
+              <a:solidFill>
+                <a:srgbClr val="000000"/>
+              </a:solidFill>
+              <a:latin typeface="Arial"/>
+            </a:endParaRPr>
+          </a:p>
+          <a:p>
+            <a:pPr lvl="1" marL="800280" indent="-343080" defTabSz="914400">
+              <a:lnSpc>
+                <a:spcPct val="100000"/>
+              </a:lnSpc>
+              <a:spcBef>
+                <a:spcPts val="320"/>
+              </a:spcBef>
+              <a:buClr>
+                <a:srgbClr val="000000"/>
+              </a:buClr>
+              <a:buFont typeface="Symbol"/>
+              <a:buChar char=""/>
+              <a:tabLst>
+                <a:tab algn="l" pos="1886040"/>
+              </a:tabLst>
+            </a:pPr>
+            <a:r>
+              <a:rPr b="0" lang="en-US" sz="1200" spc="-1" strike="noStrike">
+                <a:solidFill>
+                  <a:srgbClr val="000000"/>
+                </a:solidFill>
+                <a:latin typeface="Arial"/>
+                <a:ea typeface="DejaVu Sans"/>
+              </a:rPr>
+              <a:t>CodeEU-244: Signature validation fails for old (prior to v4) Manufacturer reports</a:t>
+            </a:r>
+            <a:endParaRPr b="0" lang="en-US" sz="1200" spc="-1" strike="noStrike">
               <a:solidFill>
                 <a:srgbClr val="000000"/>
               </a:solidFill>
@@ -3740,7 +4078,7 @@
         <p:spPr>
           <a:xfrm>
             <a:off x="468360" y="476640"/>
-            <a:ext cx="8214120" cy="676800"/>
+            <a:ext cx="8213760" cy="676440"/>
           </a:xfrm>
           <a:prstGeom prst="rect">
             <a:avLst/>
@@ -3772,7 +4110,7 @@
                 <a:latin typeface="Arial"/>
                 <a:ea typeface="DejaVu Sans"/>
               </a:rPr>
-              <a:t>Vecto 4.0.1.3217 OFFICIAL RELEASE</a:t>
+              <a:t>Vecto 4.0.2.3273 OFFICIAL RELEASE</a:t>
             </a:r>
             <a:br>
               <a:rPr sz="2400"/>
@@ -3785,7 +4123,7 @@
                 <a:latin typeface="Arial"/>
                 <a:ea typeface="DejaVu Sans"/>
               </a:rPr>
-              <a:t>23.10.2023</a:t>
+              <a:t>18.12.2023</a:t>
             </a:r>
             <a:endParaRPr b="0" lang="en-US" sz="1600" spc="-1" strike="noStrike">
               <a:solidFill>
@@ -3809,7 +4147,7 @@
         <p:spPr>
           <a:xfrm>
             <a:off x="323640" y="1268640"/>
-            <a:ext cx="8492760" cy="4820040"/>
+            <a:ext cx="8492400" cy="4819680"/>
           </a:xfrm>
           <a:prstGeom prst="rect">
             <a:avLst/>
@@ -3848,7 +4186,7 @@
                 <a:latin typeface="Arial"/>
                 <a:ea typeface="DejaVu Sans"/>
               </a:rPr>
-              <a:t>Improvements</a:t>
+              <a:t>Bugfixes (2/2)</a:t>
             </a:r>
             <a:endParaRPr b="0" lang="en-US" sz="1600" spc="-1" strike="noStrike">
               <a:solidFill>
@@ -3875,24 +4213,24 @@
               </a:tabLst>
             </a:pPr>
             <a:r>
-              <a:rPr b="0" lang="en-US" sz="1400" spc="-1" strike="noStrike">
-                <a:solidFill>
-                  <a:srgbClr val="000000"/>
-                </a:solidFill>
-                <a:latin typeface="Arial"/>
-                <a:ea typeface="DejaVu Sans"/>
-              </a:rPr>
-              <a:t>VTP mode: create zip archive for input and output files</a:t>
-            </a:r>
-            <a:endParaRPr b="0" lang="en-US" sz="1400" spc="-1" strike="noStrike">
-              <a:solidFill>
-                <a:srgbClr val="000000"/>
-              </a:solidFill>
-              <a:latin typeface="Arial"/>
-            </a:endParaRPr>
-          </a:p>
-          <a:p>
-            <a:pPr marL="343080" indent="-343080" defTabSz="914400">
+              <a:rPr b="0" lang="en-US" sz="1200" spc="-1" strike="noStrike">
+                <a:solidFill>
+                  <a:srgbClr val="000000"/>
+                </a:solidFill>
+                <a:latin typeface="Arial"/>
+                <a:ea typeface="DejaVu Sans"/>
+              </a:rPr>
+              <a:t>CodeEU-249: Fix handling gear torque limits in case of IEPC WheelHub motor and only one side is measured</a:t>
+            </a:r>
+            <a:endParaRPr b="0" lang="en-US" sz="1200" spc="-1" strike="noStrike">
+              <a:solidFill>
+                <a:srgbClr val="000000"/>
+              </a:solidFill>
+              <a:latin typeface="Arial"/>
+            </a:endParaRPr>
+          </a:p>
+          <a:p>
+            <a:pPr lvl="1" marL="800280" indent="-343080" defTabSz="914400">
               <a:lnSpc>
                 <a:spcPct val="100000"/>
               </a:lnSpc>
@@ -3909,16 +4247,16 @@
               </a:tabLst>
             </a:pPr>
             <a:r>
-              <a:rPr b="1" lang="en-US" sz="1600" spc="-1" strike="noStrike">
-                <a:solidFill>
-                  <a:srgbClr val="000000"/>
-                </a:solidFill>
-                <a:latin typeface="Arial"/>
-                <a:ea typeface="DejaVu Sans"/>
-              </a:rPr>
-              <a:t>- Bugfixes</a:t>
-            </a:r>
-            <a:endParaRPr b="0" lang="en-US" sz="1600" spc="-1" strike="noStrike">
+              <a:rPr b="0" lang="en-US" sz="1200" spc="-1" strike="noStrike">
+                <a:solidFill>
+                  <a:srgbClr val="000000"/>
+                </a:solidFill>
+                <a:latin typeface="Arial"/>
+                <a:ea typeface="DejaVu Sans"/>
+              </a:rPr>
+              <a:t>CodeEU-250: Maximum vehicle speed exceeded during pre-processing</a:t>
+            </a:r>
+            <a:endParaRPr b="0" lang="en-US" sz="1200" spc="-1" strike="noStrike">
               <a:solidFill>
                 <a:srgbClr val="000000"/>
               </a:solidFill>
@@ -3943,16 +4281,16 @@
               </a:tabLst>
             </a:pPr>
             <a:r>
-              <a:rPr b="0" lang="en-US" sz="1400" spc="-1" strike="noStrike">
-                <a:solidFill>
-                  <a:srgbClr val="000000"/>
-                </a:solidFill>
-                <a:latin typeface="Arial"/>
-                <a:ea typeface="DejaVu Sans"/>
-              </a:rPr>
-              <a:t>bugfix in CIF for complete(d) buses - do not write PrimaryVehicleSubgroup element</a:t>
-            </a:r>
-            <a:endParaRPr b="0" lang="en-US" sz="1400" spc="-1" strike="noStrike">
+              <a:rPr b="0" lang="en-US" sz="1200" spc="-1" strike="noStrike">
+                <a:solidFill>
+                  <a:srgbClr val="000000"/>
+                </a:solidFill>
+                <a:latin typeface="Arial"/>
+                <a:ea typeface="DejaVu Sans"/>
+              </a:rPr>
+              <a:t>CodeEU-253: Replace VTP HeavyBus in Generic Vehicles with VTP Truck</a:t>
+            </a:r>
+            <a:endParaRPr b="0" lang="en-US" sz="1200" spc="-1" strike="noStrike">
               <a:solidFill>
                 <a:srgbClr val="000000"/>
               </a:solidFill>
@@ -3977,16 +4315,16 @@
               </a:tabLst>
             </a:pPr>
             <a:r>
-              <a:rPr b="0" lang="en-US" sz="1400" spc="-1" strike="noStrike">
-                <a:solidFill>
-                  <a:srgbClr val="000000"/>
-                </a:solidFill>
-                <a:latin typeface="Arial"/>
-                <a:ea typeface="DejaVu Sans"/>
-              </a:rPr>
-              <a:t>fix hybrid strategy: power comparison</a:t>
-            </a:r>
-            <a:endParaRPr b="0" lang="en-US" sz="1400" spc="-1" strike="noStrike">
+              <a:rPr b="0" lang="en-US" sz="1200" spc="-1" strike="noStrike">
+                <a:solidFill>
+                  <a:srgbClr val="000000"/>
+                </a:solidFill>
+                <a:latin typeface="Arial"/>
+                <a:ea typeface="DejaVu Sans"/>
+              </a:rPr>
+              <a:t>CodeEU-259: Inconsistent calculation of AverageRRC in CIF</a:t>
+            </a:r>
+            <a:endParaRPr b="0" lang="en-US" sz="1200" spc="-1" strike="noStrike">
               <a:solidFill>
                 <a:srgbClr val="000000"/>
               </a:solidFill>
@@ -4011,16 +4349,16 @@
               </a:tabLst>
             </a:pPr>
             <a:r>
-              <a:rPr b="0" lang="en-US" sz="1400" spc="-1" strike="noStrike">
-                <a:solidFill>
-                  <a:srgbClr val="000000"/>
-                </a:solidFill>
-                <a:latin typeface="Arial"/>
-                <a:ea typeface="DejaVu Sans"/>
-              </a:rPr>
-              <a:t>fix exempted vehicles do not work (error message that XML version is not supported)</a:t>
-            </a:r>
-            <a:endParaRPr b="0" lang="en-US" sz="1400" spc="-1" strike="noStrike">
+              <a:rPr b="0" lang="en-US" sz="1200" spc="-1" strike="noStrike">
+                <a:solidFill>
+                  <a:srgbClr val="000000"/>
+                </a:solidFill>
+                <a:latin typeface="Arial"/>
+                <a:ea typeface="DejaVu Sans"/>
+              </a:rPr>
+              <a:t>CodeEU-260: Handling of overload buffer in case Continuous Torque is 0Nm</a:t>
+            </a:r>
+            <a:endParaRPr b="0" lang="en-US" sz="1200" spc="-1" strike="noStrike">
               <a:solidFill>
                 <a:srgbClr val="000000"/>
               </a:solidFill>
@@ -4045,16 +4383,16 @@
               </a:tabLst>
             </a:pPr>
             <a:r>
-              <a:rPr b="0" lang="en-US" sz="1400" spc="-1" strike="noStrike">
-                <a:solidFill>
-                  <a:srgbClr val="000000"/>
-                </a:solidFill>
-                <a:latin typeface="Arial"/>
-                <a:ea typeface="DejaVu Sans"/>
-              </a:rPr>
-              <a:t>bugfix in XML schema: remove wrong PS technology entry for lorries</a:t>
-            </a:r>
-            <a:endParaRPr b="0" lang="en-US" sz="1400" spc="-1" strike="noStrike">
+              <a:rPr b="0" lang="en-US" sz="1200" spc="-1" strike="noStrike">
+                <a:solidFill>
+                  <a:srgbClr val="000000"/>
+                </a:solidFill>
+                <a:latin typeface="Arial"/>
+                <a:ea typeface="DejaVu Sans"/>
+              </a:rPr>
+              <a:t>CodeEU-261: SuperCap internal resistance standard values correction</a:t>
+            </a:r>
+            <a:endParaRPr b="0" lang="en-US" sz="1200" spc="-1" strike="noStrike">
               <a:solidFill>
                 <a:srgbClr val="000000"/>
               </a:solidFill>
@@ -4079,16 +4417,50 @@
               </a:tabLst>
             </a:pPr>
             <a:r>
-              <a:rPr b="0" lang="en-US" sz="1400" spc="-1" strike="noStrike">
-                <a:solidFill>
-                  <a:srgbClr val="000000"/>
-                </a:solidFill>
-                <a:latin typeface="Arial"/>
-                <a:ea typeface="DejaVu Sans"/>
-              </a:rPr>
-              <a:t>bugfix for conditioning power demand for IHPC vehicles</a:t>
-            </a:r>
-            <a:endParaRPr b="0" lang="en-US" sz="1400" spc="-1" strike="noStrike">
+              <a:rPr b="0" lang="en-US" sz="1200" spc="-1" strike="noStrike">
+                <a:solidFill>
+                  <a:srgbClr val="000000"/>
+                </a:solidFill>
+                <a:latin typeface="Arial"/>
+                <a:ea typeface="DejaVu Sans"/>
+              </a:rPr>
+              <a:t>CodeEU-263: Determination of rated power for IEPCs for MRF and CIF</a:t>
+            </a:r>
+            <a:endParaRPr b="0" lang="en-US" sz="1200" spc="-1" strike="noStrike">
+              <a:solidFill>
+                <a:srgbClr val="000000"/>
+              </a:solidFill>
+              <a:latin typeface="Arial"/>
+            </a:endParaRPr>
+          </a:p>
+          <a:p>
+            <a:pPr lvl="1" marL="800280" indent="-343080" defTabSz="914400">
+              <a:lnSpc>
+                <a:spcPct val="100000"/>
+              </a:lnSpc>
+              <a:spcBef>
+                <a:spcPts val="320"/>
+              </a:spcBef>
+              <a:buClr>
+                <a:srgbClr val="000000"/>
+              </a:buClr>
+              <a:buFont typeface="Symbol"/>
+              <a:buChar char=""/>
+              <a:tabLst>
+                <a:tab algn="l" pos="1886040"/>
+              </a:tabLst>
+            </a:pPr>
+            <a:r>
+              <a:rPr b="0" lang="en-US" sz="1200" spc="-1" strike="noStrike">
+                <a:solidFill>
+                  <a:srgbClr val="000000"/>
+                </a:solidFill>
+                <a:latin typeface="Arial"/>
+                <a:ea typeface="DejaVu Sans"/>
+              </a:rPr>
+              <a:t>CodeEU-266: Fix Measured Speed Testcases</a:t>
+            </a:r>
+            <a:endParaRPr b="0" lang="en-US" sz="1200" spc="-1" strike="noStrike">
               <a:solidFill>
                 <a:srgbClr val="000000"/>
               </a:solidFill>
@@ -4100,32 +4472,15 @@
               <a:lnSpc>
                 <a:spcPct val="100000"/>
               </a:lnSpc>
+              <a:spcBef>
+                <a:spcPts val="281"/>
+              </a:spcBef>
               <a:buNone/>
               <a:tabLst>
                 <a:tab algn="l" pos="0"/>
               </a:tabLst>
             </a:pPr>
-            <a:endParaRPr b="0" lang="en-US" sz="1400" spc="-1" strike="noStrike">
-              <a:solidFill>
-                <a:srgbClr val="000000"/>
-              </a:solidFill>
-              <a:latin typeface="Arial"/>
-            </a:endParaRPr>
-          </a:p>
-          <a:p>
-            <a:pPr indent="0" defTabSz="914400">
-              <a:lnSpc>
-                <a:spcPct val="100000"/>
-              </a:lnSpc>
-              <a:spcBef>
-                <a:spcPts val="281"/>
-              </a:spcBef>
-              <a:buNone/>
-              <a:tabLst>
-                <a:tab algn="l" pos="0"/>
-              </a:tabLst>
-            </a:pPr>
-            <a:endParaRPr b="0" lang="en-US" sz="1400" spc="-1" strike="noStrike">
+            <a:endParaRPr b="0" lang="en-US" sz="1200" spc="-1" strike="noStrike">
               <a:solidFill>
                 <a:srgbClr val="000000"/>
               </a:solidFill>
@@ -4200,14 +4555,18 @@
       </p:grpSpPr>
       <p:sp>
         <p:nvSpPr>
-          <p:cNvPr id="63" name="Text Box 94"/>
-          <p:cNvSpPr/>
-          <p:nvPr/>
+          <p:cNvPr id="63" name="PlaceHolder 1"/>
+          <p:cNvSpPr>
+            <a:spLocks noGrp="1"/>
+          </p:cNvSpPr>
+          <p:nvPr>
+            <p:ph type="title"/>
+          </p:nvPr>
         </p:nvSpPr>
         <p:spPr>
           <a:xfrm>
-            <a:off x="539640" y="1052640"/>
-            <a:ext cx="8132040" cy="3945600"/>
+            <a:off x="468360" y="476640"/>
+            <a:ext cx="8213760" cy="676440"/>
           </a:xfrm>
           <a:prstGeom prst="rect">
             <a:avLst/>
@@ -4217,168 +4576,44 @@
             <a:noFill/>
           </a:ln>
         </p:spPr>
-        <p:style>
-          <a:lnRef idx="0"/>
-          <a:fillRef idx="0"/>
-          <a:effectRef idx="0"/>
-          <a:fontRef idx="minor"/>
-        </p:style>
         <p:txBody>
-          <a:bodyPr lIns="90000" rIns="90000" tIns="45000" bIns="45000" anchor="t">
-            <a:spAutoFit/>
+          <a:bodyPr numCol="1" spcCol="0" lIns="90000" rIns="90000" tIns="45000" bIns="45000" anchor="ctr">
+            <a:noAutofit/>
           </a:bodyPr>
           <a:p>
-            <a:pPr algn="ctr" defTabSz="914400">
-              <a:lnSpc>
-                <a:spcPct val="100000"/>
-              </a:lnSpc>
-              <a:spcBef>
-                <a:spcPts val="1599"/>
-              </a:spcBef>
-            </a:pPr>
-            <a:r>
-              <a:rPr b="1" lang="en-US" sz="3200" spc="-1" strike="noStrike">
+            <a:pPr indent="0" algn="ctr" defTabSz="914400">
+              <a:lnSpc>
+                <a:spcPct val="100000"/>
+              </a:lnSpc>
+              <a:buNone/>
+              <a:tabLst>
+                <a:tab algn="l" pos="0"/>
+              </a:tabLst>
+            </a:pPr>
+            <a:r>
+              <a:rPr b="1" lang="en-US" sz="2400" spc="-1" strike="noStrike">
                 <a:solidFill>
                   <a:srgbClr val="990000"/>
                 </a:solidFill>
                 <a:latin typeface="Arial"/>
                 <a:ea typeface="DejaVu Sans"/>
               </a:rPr>
-              <a:t>VECTO 4.0.0.3210 </a:t>
-            </a:r>
-            <a:endParaRPr b="0" lang="en-US" sz="3200" spc="-1" strike="noStrike">
-              <a:solidFill>
-                <a:srgbClr val="000000"/>
-              </a:solidFill>
-              <a:latin typeface="Arial"/>
-            </a:endParaRPr>
-          </a:p>
-          <a:p>
-            <a:pPr algn="ctr" defTabSz="914400">
-              <a:lnSpc>
-                <a:spcPct val="100000"/>
-              </a:lnSpc>
-              <a:spcBef>
-                <a:spcPts val="1001"/>
-              </a:spcBef>
-            </a:pPr>
-            <a:r>
-              <a:rPr b="1" lang="en-US" sz="2000" spc="-1" strike="noStrike">
+              <a:t>Vecto 4.0.1.3217 OFFICIAL RELEASE</a:t>
+            </a:r>
+            <a:br>
+              <a:rPr sz="2400"/>
+            </a:br>
+            <a:r>
+              <a:rPr b="1" lang="en-US" sz="1600" spc="-1" strike="noStrike">
                 <a:solidFill>
                   <a:srgbClr val="990000"/>
                 </a:solidFill>
                 <a:latin typeface="Arial"/>
                 <a:ea typeface="DejaVu Sans"/>
               </a:rPr>
-              <a:t>16.10.2023</a:t>
-            </a:r>
-            <a:endParaRPr b="0" lang="en-US" sz="2000" spc="-1" strike="noStrike">
-              <a:solidFill>
-                <a:srgbClr val="000000"/>
-              </a:solidFill>
-              <a:latin typeface="Arial"/>
-            </a:endParaRPr>
-          </a:p>
-          <a:p>
-            <a:pPr algn="ctr" defTabSz="914400">
-              <a:lnSpc>
-                <a:spcPct val="100000"/>
-              </a:lnSpc>
-              <a:spcBef>
-                <a:spcPts val="1001"/>
-              </a:spcBef>
-            </a:pPr>
-            <a:endParaRPr b="0" lang="en-US" sz="2000" spc="-1" strike="noStrike">
-              <a:solidFill>
-                <a:srgbClr val="000000"/>
-              </a:solidFill>
-              <a:latin typeface="Arial"/>
-            </a:endParaRPr>
-          </a:p>
-          <a:p>
-            <a:pPr algn="ctr" defTabSz="914400">
-              <a:lnSpc>
-                <a:spcPct val="100000"/>
-              </a:lnSpc>
-              <a:spcBef>
-                <a:spcPts val="1001"/>
-              </a:spcBef>
-            </a:pPr>
-            <a:endParaRPr b="0" lang="en-US" sz="2000" spc="-1" strike="noStrike">
-              <a:solidFill>
-                <a:srgbClr val="000000"/>
-              </a:solidFill>
-              <a:latin typeface="Arial"/>
-            </a:endParaRPr>
-          </a:p>
-          <a:p>
-            <a:pPr algn="ctr" defTabSz="914400">
-              <a:lnSpc>
-                <a:spcPct val="100000"/>
-              </a:lnSpc>
-              <a:spcBef>
-                <a:spcPts val="1199"/>
-              </a:spcBef>
-            </a:pPr>
-            <a:endParaRPr b="0" lang="en-US" sz="2400" spc="-1" strike="noStrike">
-              <a:solidFill>
-                <a:srgbClr val="000000"/>
-              </a:solidFill>
-              <a:latin typeface="Arial"/>
-            </a:endParaRPr>
-          </a:p>
-          <a:p>
-            <a:pPr algn="ctr" defTabSz="914400">
-              <a:lnSpc>
-                <a:spcPct val="100000"/>
-              </a:lnSpc>
-              <a:spcBef>
-                <a:spcPts val="1199"/>
-              </a:spcBef>
-            </a:pPr>
-            <a:endParaRPr b="0" lang="en-US" sz="2400" spc="-1" strike="noStrike">
-              <a:solidFill>
-                <a:srgbClr val="000000"/>
-              </a:solidFill>
-              <a:latin typeface="Arial"/>
-            </a:endParaRPr>
-          </a:p>
-          <a:p>
-            <a:pPr algn="ctr" defTabSz="914400">
-              <a:lnSpc>
-                <a:spcPct val="100000"/>
-              </a:lnSpc>
-              <a:spcBef>
-                <a:spcPts val="1199"/>
-              </a:spcBef>
-            </a:pPr>
-            <a:endParaRPr b="0" lang="en-US" sz="2400" spc="-1" strike="noStrike">
-              <a:solidFill>
-                <a:srgbClr val="000000"/>
-              </a:solidFill>
-              <a:latin typeface="Arial"/>
-            </a:endParaRPr>
-          </a:p>
-          <a:p>
-            <a:pPr algn="ctr" defTabSz="914400">
-              <a:lnSpc>
-                <a:spcPct val="100000"/>
-              </a:lnSpc>
-              <a:spcBef>
-                <a:spcPts val="1199"/>
-              </a:spcBef>
-            </a:pPr>
-            <a:r>
-              <a:rPr b="1" lang="en-US" sz="2400" spc="-1" strike="noStrike">
-                <a:solidFill>
-                  <a:srgbClr val="990000"/>
-                </a:solidFill>
-                <a:latin typeface="Arial"/>
-                <a:ea typeface="DejaVu Sans"/>
-              </a:rPr>
-              <a:t>Release Notes</a:t>
-            </a:r>
-            <a:endParaRPr b="0" lang="en-US" sz="2400" spc="-1" strike="noStrike">
+              <a:t>23.10.2023</a:t>
+            </a:r>
+            <a:endParaRPr b="0" lang="en-US" sz="1600" spc="-1" strike="noStrike">
               <a:solidFill>
                 <a:srgbClr val="000000"/>
               </a:solidFill>
@@ -4387,29 +4622,378 @@
           </a:p>
         </p:txBody>
       </p:sp>
-      <p:pic>
-        <p:nvPicPr>
-          <p:cNvPr id="64" name="Picture 2" descr=""/>
-          <p:cNvPicPr/>
-          <p:nvPr/>
-        </p:nvPicPr>
-        <p:blipFill>
-          <a:blip r:embed="rId1"/>
-          <a:stretch/>
-        </p:blipFill>
+      <p:sp>
+        <p:nvSpPr>
+          <p:cNvPr id="64" name="PlaceHolder 2"/>
+          <p:cNvSpPr>
+            <a:spLocks noGrp="1"/>
+          </p:cNvSpPr>
+          <p:nvPr>
+            <p:ph/>
+          </p:nvPr>
+        </p:nvSpPr>
         <p:spPr>
           <a:xfrm>
-            <a:off x="2483640" y="2421000"/>
-            <a:ext cx="4172040" cy="1623240"/>
+            <a:off x="323640" y="1268640"/>
+            <a:ext cx="8492400" cy="4819680"/>
           </a:xfrm>
           <a:prstGeom prst="rect">
             <a:avLst/>
           </a:prstGeom>
+          <a:noFill/>
           <a:ln w="0">
             <a:noFill/>
           </a:ln>
         </p:spPr>
-      </p:pic>
+        <p:txBody>
+          <a:bodyPr numCol="1" spcCol="0" lIns="90000" rIns="90000" tIns="45000" bIns="45000" anchor="t">
+            <a:noAutofit/>
+          </a:bodyPr>
+          <a:p>
+            <a:pPr marL="343080" indent="-343080" defTabSz="914400">
+              <a:lnSpc>
+                <a:spcPct val="100000"/>
+              </a:lnSpc>
+              <a:spcBef>
+                <a:spcPts val="320"/>
+              </a:spcBef>
+              <a:buClr>
+                <a:srgbClr val="000000"/>
+              </a:buClr>
+              <a:buFont typeface="Symbol"/>
+              <a:buChar char=""/>
+              <a:tabLst>
+                <a:tab algn="l" pos="1886040"/>
+              </a:tabLst>
+            </a:pPr>
+            <a:r>
+              <a:rPr b="1" lang="en-US" sz="1600" spc="-1" strike="noStrike">
+                <a:solidFill>
+                  <a:srgbClr val="000000"/>
+                </a:solidFill>
+                <a:latin typeface="Arial"/>
+                <a:ea typeface="DejaVu Sans"/>
+              </a:rPr>
+              <a:t>Improvements</a:t>
+            </a:r>
+            <a:endParaRPr b="0" lang="en-US" sz="1600" spc="-1" strike="noStrike">
+              <a:solidFill>
+                <a:srgbClr val="000000"/>
+              </a:solidFill>
+              <a:latin typeface="Arial"/>
+            </a:endParaRPr>
+          </a:p>
+          <a:p>
+            <a:pPr lvl="1" marL="800280" indent="-343080" defTabSz="914400">
+              <a:lnSpc>
+                <a:spcPct val="100000"/>
+              </a:lnSpc>
+              <a:spcBef>
+                <a:spcPts val="320"/>
+              </a:spcBef>
+              <a:buClr>
+                <a:srgbClr val="000000"/>
+              </a:buClr>
+              <a:buFont typeface="Symbol"/>
+              <a:buChar char=""/>
+              <a:tabLst>
+                <a:tab algn="l" pos="1886040"/>
+              </a:tabLst>
+            </a:pPr>
+            <a:r>
+              <a:rPr b="0" lang="en-US" sz="1400" spc="-1" strike="noStrike">
+                <a:solidFill>
+                  <a:srgbClr val="000000"/>
+                </a:solidFill>
+                <a:latin typeface="Arial"/>
+                <a:ea typeface="DejaVu Sans"/>
+              </a:rPr>
+              <a:t>VTP mode: create zip archive for input and output files</a:t>
+            </a:r>
+            <a:endParaRPr b="0" lang="en-US" sz="1400" spc="-1" strike="noStrike">
+              <a:solidFill>
+                <a:srgbClr val="000000"/>
+              </a:solidFill>
+              <a:latin typeface="Arial"/>
+            </a:endParaRPr>
+          </a:p>
+          <a:p>
+            <a:pPr marL="343080" indent="-343080" defTabSz="914400">
+              <a:lnSpc>
+                <a:spcPct val="100000"/>
+              </a:lnSpc>
+              <a:spcBef>
+                <a:spcPts val="320"/>
+              </a:spcBef>
+              <a:buClr>
+                <a:srgbClr val="000000"/>
+              </a:buClr>
+              <a:buFont typeface="Symbol"/>
+              <a:buChar char=""/>
+              <a:tabLst>
+                <a:tab algn="l" pos="1886040"/>
+              </a:tabLst>
+            </a:pPr>
+            <a:r>
+              <a:rPr b="1" lang="en-US" sz="1600" spc="-1" strike="noStrike">
+                <a:solidFill>
+                  <a:srgbClr val="000000"/>
+                </a:solidFill>
+                <a:latin typeface="Arial"/>
+                <a:ea typeface="DejaVu Sans"/>
+              </a:rPr>
+              <a:t>- Bugfixes</a:t>
+            </a:r>
+            <a:endParaRPr b="0" lang="en-US" sz="1600" spc="-1" strike="noStrike">
+              <a:solidFill>
+                <a:srgbClr val="000000"/>
+              </a:solidFill>
+              <a:latin typeface="Arial"/>
+            </a:endParaRPr>
+          </a:p>
+          <a:p>
+            <a:pPr lvl="1" marL="800280" indent="-343080" defTabSz="914400">
+              <a:lnSpc>
+                <a:spcPct val="100000"/>
+              </a:lnSpc>
+              <a:spcBef>
+                <a:spcPts val="320"/>
+              </a:spcBef>
+              <a:buClr>
+                <a:srgbClr val="000000"/>
+              </a:buClr>
+              <a:buFont typeface="Symbol"/>
+              <a:buChar char=""/>
+              <a:tabLst>
+                <a:tab algn="l" pos="1886040"/>
+              </a:tabLst>
+            </a:pPr>
+            <a:r>
+              <a:rPr b="0" lang="en-US" sz="1400" spc="-1" strike="noStrike">
+                <a:solidFill>
+                  <a:srgbClr val="000000"/>
+                </a:solidFill>
+                <a:latin typeface="Arial"/>
+                <a:ea typeface="DejaVu Sans"/>
+              </a:rPr>
+              <a:t>bugfix in CIF for complete(d) buses - do not write PrimaryVehicleSubgroup element</a:t>
+            </a:r>
+            <a:endParaRPr b="0" lang="en-US" sz="1400" spc="-1" strike="noStrike">
+              <a:solidFill>
+                <a:srgbClr val="000000"/>
+              </a:solidFill>
+              <a:latin typeface="Arial"/>
+            </a:endParaRPr>
+          </a:p>
+          <a:p>
+            <a:pPr lvl="1" marL="800280" indent="-343080" defTabSz="914400">
+              <a:lnSpc>
+                <a:spcPct val="100000"/>
+              </a:lnSpc>
+              <a:spcBef>
+                <a:spcPts val="320"/>
+              </a:spcBef>
+              <a:buClr>
+                <a:srgbClr val="000000"/>
+              </a:buClr>
+              <a:buFont typeface="Symbol"/>
+              <a:buChar char=""/>
+              <a:tabLst>
+                <a:tab algn="l" pos="1886040"/>
+              </a:tabLst>
+            </a:pPr>
+            <a:r>
+              <a:rPr b="0" lang="en-US" sz="1400" spc="-1" strike="noStrike">
+                <a:solidFill>
+                  <a:srgbClr val="000000"/>
+                </a:solidFill>
+                <a:latin typeface="Arial"/>
+                <a:ea typeface="DejaVu Sans"/>
+              </a:rPr>
+              <a:t>fix hybrid strategy: power comparison</a:t>
+            </a:r>
+            <a:endParaRPr b="0" lang="en-US" sz="1400" spc="-1" strike="noStrike">
+              <a:solidFill>
+                <a:srgbClr val="000000"/>
+              </a:solidFill>
+              <a:latin typeface="Arial"/>
+            </a:endParaRPr>
+          </a:p>
+          <a:p>
+            <a:pPr lvl="1" marL="800280" indent="-343080" defTabSz="914400">
+              <a:lnSpc>
+                <a:spcPct val="100000"/>
+              </a:lnSpc>
+              <a:spcBef>
+                <a:spcPts val="320"/>
+              </a:spcBef>
+              <a:buClr>
+                <a:srgbClr val="000000"/>
+              </a:buClr>
+              <a:buFont typeface="Symbol"/>
+              <a:buChar char=""/>
+              <a:tabLst>
+                <a:tab algn="l" pos="1886040"/>
+              </a:tabLst>
+            </a:pPr>
+            <a:r>
+              <a:rPr b="0" lang="en-US" sz="1400" spc="-1" strike="noStrike">
+                <a:solidFill>
+                  <a:srgbClr val="000000"/>
+                </a:solidFill>
+                <a:latin typeface="Arial"/>
+                <a:ea typeface="DejaVu Sans"/>
+              </a:rPr>
+              <a:t>fix exempted vehicles do not work (error message that XML version is not supported)</a:t>
+            </a:r>
+            <a:endParaRPr b="0" lang="en-US" sz="1400" spc="-1" strike="noStrike">
+              <a:solidFill>
+                <a:srgbClr val="000000"/>
+              </a:solidFill>
+              <a:latin typeface="Arial"/>
+            </a:endParaRPr>
+          </a:p>
+          <a:p>
+            <a:pPr lvl="1" marL="800280" indent="-343080" defTabSz="914400">
+              <a:lnSpc>
+                <a:spcPct val="100000"/>
+              </a:lnSpc>
+              <a:spcBef>
+                <a:spcPts val="320"/>
+              </a:spcBef>
+              <a:buClr>
+                <a:srgbClr val="000000"/>
+              </a:buClr>
+              <a:buFont typeface="Symbol"/>
+              <a:buChar char=""/>
+              <a:tabLst>
+                <a:tab algn="l" pos="1886040"/>
+              </a:tabLst>
+            </a:pPr>
+            <a:r>
+              <a:rPr b="0" lang="en-US" sz="1400" spc="-1" strike="noStrike">
+                <a:solidFill>
+                  <a:srgbClr val="000000"/>
+                </a:solidFill>
+                <a:latin typeface="Arial"/>
+                <a:ea typeface="DejaVu Sans"/>
+              </a:rPr>
+              <a:t>bugfix in XML schema: remove wrong PS technology entry for lorries</a:t>
+            </a:r>
+            <a:endParaRPr b="0" lang="en-US" sz="1400" spc="-1" strike="noStrike">
+              <a:solidFill>
+                <a:srgbClr val="000000"/>
+              </a:solidFill>
+              <a:latin typeface="Arial"/>
+            </a:endParaRPr>
+          </a:p>
+          <a:p>
+            <a:pPr lvl="1" marL="800280" indent="-343080" defTabSz="914400">
+              <a:lnSpc>
+                <a:spcPct val="100000"/>
+              </a:lnSpc>
+              <a:spcBef>
+                <a:spcPts val="320"/>
+              </a:spcBef>
+              <a:buClr>
+                <a:srgbClr val="000000"/>
+              </a:buClr>
+              <a:buFont typeface="Symbol"/>
+              <a:buChar char=""/>
+              <a:tabLst>
+                <a:tab algn="l" pos="1886040"/>
+              </a:tabLst>
+            </a:pPr>
+            <a:r>
+              <a:rPr b="0" lang="en-US" sz="1400" spc="-1" strike="noStrike">
+                <a:solidFill>
+                  <a:srgbClr val="000000"/>
+                </a:solidFill>
+                <a:latin typeface="Arial"/>
+                <a:ea typeface="DejaVu Sans"/>
+              </a:rPr>
+              <a:t>bugfix for conditioning power demand for IHPC vehicles</a:t>
+            </a:r>
+            <a:endParaRPr b="0" lang="en-US" sz="1400" spc="-1" strike="noStrike">
+              <a:solidFill>
+                <a:srgbClr val="000000"/>
+              </a:solidFill>
+              <a:latin typeface="Arial"/>
+            </a:endParaRPr>
+          </a:p>
+          <a:p>
+            <a:pPr indent="0" defTabSz="914400">
+              <a:lnSpc>
+                <a:spcPct val="100000"/>
+              </a:lnSpc>
+              <a:buNone/>
+              <a:tabLst>
+                <a:tab algn="l" pos="0"/>
+              </a:tabLst>
+            </a:pPr>
+            <a:endParaRPr b="0" lang="en-US" sz="1400" spc="-1" strike="noStrike">
+              <a:solidFill>
+                <a:srgbClr val="000000"/>
+              </a:solidFill>
+              <a:latin typeface="Arial"/>
+            </a:endParaRPr>
+          </a:p>
+          <a:p>
+            <a:pPr indent="0" defTabSz="914400">
+              <a:lnSpc>
+                <a:spcPct val="100000"/>
+              </a:lnSpc>
+              <a:spcBef>
+                <a:spcPts val="281"/>
+              </a:spcBef>
+              <a:buNone/>
+              <a:tabLst>
+                <a:tab algn="l" pos="0"/>
+              </a:tabLst>
+            </a:pPr>
+            <a:endParaRPr b="0" lang="en-US" sz="1400" spc="-1" strike="noStrike">
+              <a:solidFill>
+                <a:srgbClr val="000000"/>
+              </a:solidFill>
+              <a:latin typeface="Arial"/>
+            </a:endParaRPr>
+          </a:p>
+          <a:p>
+            <a:pPr indent="0" defTabSz="914400">
+              <a:lnSpc>
+                <a:spcPct val="100000"/>
+              </a:lnSpc>
+              <a:buNone/>
+              <a:tabLst>
+                <a:tab algn="l" pos="0"/>
+              </a:tabLst>
+            </a:pPr>
+            <a:endParaRPr b="0" lang="en-US" sz="1400" spc="-1" strike="noStrike">
+              <a:solidFill>
+                <a:srgbClr val="000000"/>
+              </a:solidFill>
+              <a:latin typeface="Arial"/>
+            </a:endParaRPr>
+          </a:p>
+          <a:p>
+            <a:pPr indent="0" defTabSz="914400">
+              <a:lnSpc>
+                <a:spcPct val="100000"/>
+              </a:lnSpc>
+              <a:buNone/>
+              <a:tabLst>
+                <a:tab algn="l" pos="0"/>
+              </a:tabLst>
+            </a:pPr>
+            <a:endParaRPr b="0" lang="en-US" sz="1400" spc="-1" strike="noStrike">
+              <a:solidFill>
+                <a:srgbClr val="000000"/>
+              </a:solidFill>
+              <a:latin typeface="Arial"/>
+            </a:endParaRPr>
+          </a:p>
+        </p:txBody>
+      </p:sp>
     </p:spTree>
   </p:cSld>
   <mc:AlternateContent>
@@ -4442,18 +5026,14 @@
       </p:grpSpPr>
       <p:sp>
         <p:nvSpPr>
-          <p:cNvPr id="65" name="PlaceHolder 1"/>
-          <p:cNvSpPr>
-            <a:spLocks noGrp="1"/>
-          </p:cNvSpPr>
-          <p:nvPr>
-            <p:ph type="title"/>
-          </p:nvPr>
+          <p:cNvPr id="65" name="Text Box 94"/>
+          <p:cNvSpPr/>
+          <p:nvPr/>
         </p:nvSpPr>
         <p:spPr>
           <a:xfrm>
-            <a:off x="722160" y="2320200"/>
-            <a:ext cx="7768800" cy="1526400"/>
+            <a:off x="539640" y="1052640"/>
+            <a:ext cx="8131680" cy="3945600"/>
           </a:xfrm>
           <a:prstGeom prst="rect">
             <a:avLst/>
@@ -4463,26 +5043,157 @@
             <a:noFill/>
           </a:ln>
         </p:spPr>
+        <p:style>
+          <a:lnRef idx="0"/>
+          <a:fillRef idx="0"/>
+          <a:effectRef idx="0"/>
+          <a:fontRef idx="minor"/>
+        </p:style>
         <p:txBody>
-          <a:bodyPr lIns="0" rIns="0" tIns="0" bIns="0" anchor="ctr">
-            <a:noAutofit/>
+          <a:bodyPr lIns="90000" rIns="90000" tIns="45000" bIns="45000" anchor="t">
+            <a:spAutoFit/>
           </a:bodyPr>
           <a:p>
-            <a:pPr indent="0" algn="ctr" defTabSz="914400">
-              <a:lnSpc>
-                <a:spcPct val="90000"/>
-              </a:lnSpc>
-              <a:spcBef>
-                <a:spcPts val="4201"/>
-              </a:spcBef>
-              <a:buNone/>
-              <a:tabLst>
-                <a:tab algn="l" pos="0"/>
-              </a:tabLst>
-            </a:pPr>
-            <a:br>
-              <a:rPr sz="2400"/>
-            </a:br>
+            <a:pPr algn="ctr" defTabSz="914400">
+              <a:lnSpc>
+                <a:spcPct val="100000"/>
+              </a:lnSpc>
+              <a:spcBef>
+                <a:spcPts val="1599"/>
+              </a:spcBef>
+            </a:pPr>
+            <a:r>
+              <a:rPr b="1" lang="en-US" sz="3200" spc="-1" strike="noStrike">
+                <a:solidFill>
+                  <a:srgbClr val="990000"/>
+                </a:solidFill>
+                <a:latin typeface="Arial"/>
+                <a:ea typeface="DejaVu Sans"/>
+              </a:rPr>
+              <a:t>VECTO 4.0.0.3210 </a:t>
+            </a:r>
+            <a:endParaRPr b="0" lang="en-US" sz="3200" spc="-1" strike="noStrike">
+              <a:solidFill>
+                <a:srgbClr val="000000"/>
+              </a:solidFill>
+              <a:latin typeface="Arial"/>
+            </a:endParaRPr>
+          </a:p>
+          <a:p>
+            <a:pPr algn="ctr" defTabSz="914400">
+              <a:lnSpc>
+                <a:spcPct val="100000"/>
+              </a:lnSpc>
+              <a:spcBef>
+                <a:spcPts val="1001"/>
+              </a:spcBef>
+            </a:pPr>
+            <a:r>
+              <a:rPr b="1" lang="en-US" sz="2000" spc="-1" strike="noStrike">
+                <a:solidFill>
+                  <a:srgbClr val="990000"/>
+                </a:solidFill>
+                <a:latin typeface="Arial"/>
+                <a:ea typeface="DejaVu Sans"/>
+              </a:rPr>
+              <a:t>16.10.2023</a:t>
+            </a:r>
+            <a:endParaRPr b="0" lang="en-US" sz="2000" spc="-1" strike="noStrike">
+              <a:solidFill>
+                <a:srgbClr val="000000"/>
+              </a:solidFill>
+              <a:latin typeface="Arial"/>
+            </a:endParaRPr>
+          </a:p>
+          <a:p>
+            <a:pPr algn="ctr" defTabSz="914400">
+              <a:lnSpc>
+                <a:spcPct val="100000"/>
+              </a:lnSpc>
+              <a:spcBef>
+                <a:spcPts val="1001"/>
+              </a:spcBef>
+            </a:pPr>
+            <a:endParaRPr b="0" lang="en-US" sz="2000" spc="-1" strike="noStrike">
+              <a:solidFill>
+                <a:srgbClr val="000000"/>
+              </a:solidFill>
+              <a:latin typeface="Arial"/>
+            </a:endParaRPr>
+          </a:p>
+          <a:p>
+            <a:pPr algn="ctr" defTabSz="914400">
+              <a:lnSpc>
+                <a:spcPct val="100000"/>
+              </a:lnSpc>
+              <a:spcBef>
+                <a:spcPts val="1001"/>
+              </a:spcBef>
+            </a:pPr>
+            <a:endParaRPr b="0" lang="en-US" sz="2000" spc="-1" strike="noStrike">
+              <a:solidFill>
+                <a:srgbClr val="000000"/>
+              </a:solidFill>
+              <a:latin typeface="Arial"/>
+            </a:endParaRPr>
+          </a:p>
+          <a:p>
+            <a:pPr algn="ctr" defTabSz="914400">
+              <a:lnSpc>
+                <a:spcPct val="100000"/>
+              </a:lnSpc>
+              <a:spcBef>
+                <a:spcPts val="1199"/>
+              </a:spcBef>
+            </a:pPr>
+            <a:endParaRPr b="0" lang="en-US" sz="2400" spc="-1" strike="noStrike">
+              <a:solidFill>
+                <a:srgbClr val="000000"/>
+              </a:solidFill>
+              <a:latin typeface="Arial"/>
+            </a:endParaRPr>
+          </a:p>
+          <a:p>
+            <a:pPr algn="ctr" defTabSz="914400">
+              <a:lnSpc>
+                <a:spcPct val="100000"/>
+              </a:lnSpc>
+              <a:spcBef>
+                <a:spcPts val="1199"/>
+              </a:spcBef>
+            </a:pPr>
+            <a:endParaRPr b="0" lang="en-US" sz="2400" spc="-1" strike="noStrike">
+              <a:solidFill>
+                <a:srgbClr val="000000"/>
+              </a:solidFill>
+              <a:latin typeface="Arial"/>
+            </a:endParaRPr>
+          </a:p>
+          <a:p>
+            <a:pPr algn="ctr" defTabSz="914400">
+              <a:lnSpc>
+                <a:spcPct val="100000"/>
+              </a:lnSpc>
+              <a:spcBef>
+                <a:spcPts val="1199"/>
+              </a:spcBef>
+            </a:pPr>
+            <a:endParaRPr b="0" lang="en-US" sz="2400" spc="-1" strike="noStrike">
+              <a:solidFill>
+                <a:srgbClr val="000000"/>
+              </a:solidFill>
+              <a:latin typeface="Arial"/>
+            </a:endParaRPr>
+          </a:p>
+          <a:p>
+            <a:pPr algn="ctr" defTabSz="914400">
+              <a:lnSpc>
+                <a:spcPct val="100000"/>
+              </a:lnSpc>
+              <a:spcBef>
+                <a:spcPts val="1199"/>
+              </a:spcBef>
+            </a:pPr>
             <a:r>
               <a:rPr b="1" lang="en-US" sz="2400" spc="-1" strike="noStrike">
                 <a:solidFill>
@@ -4491,30 +5202,8 @@
                 <a:latin typeface="Arial"/>
                 <a:ea typeface="DejaVu Sans"/>
               </a:rPr>
-              <a:t>First official VECTO release for the 2nd Amendment </a:t>
-            </a:r>
-            <a:br>
-              <a:rPr sz="2400"/>
-            </a:br>
-            <a:r>
-              <a:rPr b="1" lang="en-US" sz="2400" spc="-1" strike="noStrike">
-                <a:solidFill>
-                  <a:srgbClr val="990000"/>
-                </a:solidFill>
-                <a:latin typeface="Arial"/>
-                <a:ea typeface="DejaVu Sans"/>
-              </a:rPr>
-              <a:t>of Regulation (EU) 2017/2400</a:t>
-            </a:r>
-            <a:br>
-              <a:rPr sz="2800"/>
-            </a:br>
-            <a:br>
-              <a:rPr sz="2800"/>
-            </a:br>
-            <a:br>
-              <a:rPr sz="2400"/>
-            </a:br>
+              <a:t>Release Notes</a:t>
+            </a:r>
             <a:endParaRPr b="0" lang="en-US" sz="2400" spc="-1" strike="noStrike">
               <a:solidFill>
                 <a:srgbClr val="000000"/>
@@ -4524,65 +5213,29 @@
           </a:p>
         </p:txBody>
       </p:sp>
-      <p:sp>
-        <p:nvSpPr>
-          <p:cNvPr id="66" name="PlaceHolder 2"/>
-          <p:cNvSpPr>
-            <a:spLocks noGrp="1"/>
-          </p:cNvSpPr>
-          <p:nvPr>
-            <p:ph/>
-          </p:nvPr>
-        </p:nvSpPr>
+      <p:pic>
+        <p:nvPicPr>
+          <p:cNvPr id="66" name="Picture 2" descr=""/>
+          <p:cNvPicPr/>
+          <p:nvPr/>
+        </p:nvPicPr>
+        <p:blipFill>
+          <a:blip r:embed="rId1"/>
+          <a:stretch/>
+        </p:blipFill>
         <p:spPr>
           <a:xfrm>
-            <a:off x="722160" y="4276440"/>
-            <a:ext cx="7768800" cy="403920"/>
+            <a:off x="2483640" y="2421000"/>
+            <a:ext cx="4171680" cy="1622880"/>
           </a:xfrm>
           <a:prstGeom prst="rect">
             <a:avLst/>
           </a:prstGeom>
-          <a:noFill/>
           <a:ln w="0">
             <a:noFill/>
           </a:ln>
         </p:spPr>
-        <p:txBody>
-          <a:bodyPr lIns="0" rIns="0" tIns="0" bIns="0" anchor="ctr">
-            <a:noAutofit/>
-          </a:bodyPr>
-          <a:p>
-            <a:pPr indent="0" algn="ctr" defTabSz="914400">
-              <a:lnSpc>
-                <a:spcPct val="90000"/>
-              </a:lnSpc>
-              <a:spcBef>
-                <a:spcPts val="1001"/>
-              </a:spcBef>
-              <a:buNone/>
-              <a:tabLst>
-                <a:tab algn="l" pos="0"/>
-              </a:tabLst>
-            </a:pPr>
-            <a:r>
-              <a:rPr b="0" lang="en-GB" sz="2000" spc="-1" strike="noStrike">
-                <a:solidFill>
-                  <a:schemeClr val="dk1"/>
-                </a:solidFill>
-                <a:latin typeface="Arial"/>
-                <a:ea typeface="DejaVu Sans"/>
-              </a:rPr>
-              <a:t>TUG</a:t>
-            </a:r>
-            <a:endParaRPr b="0" lang="en-US" sz="2000" spc="-1" strike="noStrike">
-              <a:solidFill>
-                <a:srgbClr val="000000"/>
-              </a:solidFill>
-              <a:latin typeface="Arial"/>
-            </a:endParaRPr>
-          </a:p>
-        </p:txBody>
-      </p:sp>
+      </p:pic>
     </p:spTree>
   </p:cSld>
   <mc:AlternateContent>
@@ -4620,581 +5273,13 @@
             <a:spLocks noGrp="1"/>
           </p:cNvSpPr>
           <p:nvPr>
-            <p:ph/>
-          </p:nvPr>
-        </p:nvSpPr>
-        <p:spPr>
-          <a:xfrm>
-            <a:off x="588240" y="1140480"/>
-            <a:ext cx="8390880" cy="5043600"/>
-          </a:xfrm>
-          <a:prstGeom prst="rect">
-            <a:avLst/>
-          </a:prstGeom>
-          <a:noFill/>
-          <a:ln w="0">
-            <a:noFill/>
-          </a:ln>
-        </p:spPr>
-        <p:txBody>
-          <a:bodyPr lIns="0" rIns="0" tIns="0" bIns="0" anchor="t">
-            <a:normAutofit fontScale="64999"/>
-          </a:bodyPr>
-          <a:p>
-            <a:pPr marL="228600" indent="-228600" defTabSz="914400">
-              <a:lnSpc>
-                <a:spcPct val="120000"/>
-              </a:lnSpc>
-              <a:spcBef>
-                <a:spcPts val="601"/>
-              </a:spcBef>
-              <a:buClr>
-                <a:srgbClr val="000000"/>
-              </a:buClr>
-              <a:buFont typeface="Arial"/>
-              <a:buChar char="•"/>
-            </a:pPr>
-            <a:r>
-              <a:rPr b="0" lang="en-US" sz="2000" spc="-1" strike="noStrike">
-                <a:solidFill>
-                  <a:schemeClr val="dk1"/>
-                </a:solidFill>
-                <a:latin typeface="Arial"/>
-                <a:ea typeface="DejaVu Sans"/>
-              </a:rPr>
-              <a:t>Declaration Mode</a:t>
-            </a:r>
-            <a:endParaRPr b="0" lang="en-US" sz="2000" spc="-1" strike="noStrike">
-              <a:solidFill>
-                <a:srgbClr val="000000"/>
-              </a:solidFill>
-              <a:latin typeface="Arial"/>
-            </a:endParaRPr>
-          </a:p>
-          <a:p>
-            <a:pPr lvl="1" marL="716040" indent="-266760" defTabSz="914400">
-              <a:lnSpc>
-                <a:spcPct val="120000"/>
-              </a:lnSpc>
-              <a:spcBef>
-                <a:spcPts val="601"/>
-              </a:spcBef>
-              <a:buClr>
-                <a:srgbClr val="000000"/>
-              </a:buClr>
-              <a:buFont typeface="Wingdings" charset="2"/>
-              <a:buChar char=""/>
-            </a:pPr>
-            <a:r>
-              <a:rPr b="0" lang="en-US" sz="1600" spc="-1" strike="noStrike">
-                <a:solidFill>
-                  <a:schemeClr val="dk1"/>
-                </a:solidFill>
-                <a:latin typeface="Arial"/>
-                <a:ea typeface="DejaVu Sans"/>
-              </a:rPr>
-              <a:t>xEV-Heavy Lorries</a:t>
-            </a:r>
-            <a:endParaRPr b="0" lang="en-US" sz="1600" spc="-1" strike="noStrike">
-              <a:solidFill>
-                <a:srgbClr val="000000"/>
-              </a:solidFill>
-              <a:latin typeface="Arial"/>
-            </a:endParaRPr>
-          </a:p>
-          <a:p>
-            <a:pPr lvl="1" marL="716040" indent="-266760" defTabSz="914400">
-              <a:lnSpc>
-                <a:spcPct val="120000"/>
-              </a:lnSpc>
-              <a:spcBef>
-                <a:spcPts val="601"/>
-              </a:spcBef>
-              <a:buClr>
-                <a:srgbClr val="000000"/>
-              </a:buClr>
-              <a:buFont typeface="Wingdings" charset="2"/>
-              <a:buChar char=""/>
-            </a:pPr>
-            <a:r>
-              <a:rPr b="0" lang="en-US" sz="1600" spc="-1" strike="noStrike">
-                <a:solidFill>
-                  <a:schemeClr val="dk1"/>
-                </a:solidFill>
-                <a:latin typeface="Arial"/>
-                <a:ea typeface="DejaVu Sans"/>
-              </a:rPr>
-              <a:t>Conventional Medium Lorries</a:t>
-            </a:r>
-            <a:endParaRPr b="0" lang="en-US" sz="1600" spc="-1" strike="noStrike">
-              <a:solidFill>
-                <a:srgbClr val="000000"/>
-              </a:solidFill>
-              <a:latin typeface="Arial"/>
-            </a:endParaRPr>
-          </a:p>
-          <a:p>
-            <a:pPr lvl="1" marL="716040" indent="-266760" defTabSz="914400">
-              <a:lnSpc>
-                <a:spcPct val="120000"/>
-              </a:lnSpc>
-              <a:spcBef>
-                <a:spcPts val="601"/>
-              </a:spcBef>
-              <a:buClr>
-                <a:srgbClr val="000000"/>
-              </a:buClr>
-              <a:buFont typeface="Wingdings" charset="2"/>
-              <a:buChar char=""/>
-            </a:pPr>
-            <a:r>
-              <a:rPr b="0" lang="en-US" sz="1600" spc="-1" strike="noStrike">
-                <a:solidFill>
-                  <a:schemeClr val="dk1"/>
-                </a:solidFill>
-                <a:latin typeface="Arial"/>
-                <a:ea typeface="DejaVu Sans"/>
-              </a:rPr>
-              <a:t>xEV Medium Lorries</a:t>
-            </a:r>
-            <a:endParaRPr b="0" lang="en-US" sz="1600" spc="-1" strike="noStrike">
-              <a:solidFill>
-                <a:srgbClr val="000000"/>
-              </a:solidFill>
-              <a:latin typeface="Arial"/>
-            </a:endParaRPr>
-          </a:p>
-          <a:p>
-            <a:pPr lvl="1" marL="716040" indent="-266760" defTabSz="914400">
-              <a:lnSpc>
-                <a:spcPct val="120000"/>
-              </a:lnSpc>
-              <a:spcBef>
-                <a:spcPts val="601"/>
-              </a:spcBef>
-              <a:buClr>
-                <a:srgbClr val="000000"/>
-              </a:buClr>
-              <a:buFont typeface="Wingdings" charset="2"/>
-              <a:buChar char=""/>
-            </a:pPr>
-            <a:r>
-              <a:rPr b="0" lang="en-US" sz="1600" spc="-1" strike="noStrike">
-                <a:solidFill>
-                  <a:schemeClr val="dk1"/>
-                </a:solidFill>
-                <a:latin typeface="Arial"/>
-                <a:ea typeface="DejaVu Sans"/>
-              </a:rPr>
-              <a:t>Conventional Buses</a:t>
-            </a:r>
-            <a:endParaRPr b="0" lang="en-US" sz="1600" spc="-1" strike="noStrike">
-              <a:solidFill>
-                <a:srgbClr val="000000"/>
-              </a:solidFill>
-              <a:latin typeface="Arial"/>
-            </a:endParaRPr>
-          </a:p>
-          <a:p>
-            <a:pPr lvl="1" marL="716040" indent="-266760" defTabSz="914400">
-              <a:lnSpc>
-                <a:spcPct val="120000"/>
-              </a:lnSpc>
-              <a:spcBef>
-                <a:spcPts val="601"/>
-              </a:spcBef>
-              <a:buClr>
-                <a:srgbClr val="000000"/>
-              </a:buClr>
-              <a:buFont typeface="Wingdings" charset="2"/>
-              <a:buChar char=""/>
-            </a:pPr>
-            <a:r>
-              <a:rPr b="0" lang="en-US" sz="1600" spc="-1" strike="noStrike">
-                <a:solidFill>
-                  <a:schemeClr val="dk1"/>
-                </a:solidFill>
-                <a:latin typeface="Arial"/>
-                <a:ea typeface="DejaVu Sans"/>
-              </a:rPr>
-              <a:t>xEV Buses</a:t>
-            </a:r>
-            <a:endParaRPr b="0" lang="en-US" sz="1600" spc="-1" strike="noStrike">
-              <a:solidFill>
-                <a:srgbClr val="000000"/>
-              </a:solidFill>
-              <a:latin typeface="Arial"/>
-            </a:endParaRPr>
-          </a:p>
-          <a:p>
-            <a:pPr marL="228600" indent="-228600" defTabSz="914400">
-              <a:lnSpc>
-                <a:spcPct val="120000"/>
-              </a:lnSpc>
-              <a:spcBef>
-                <a:spcPts val="601"/>
-              </a:spcBef>
-              <a:buClr>
-                <a:srgbClr val="000000"/>
-              </a:buClr>
-              <a:buFont typeface="Arial"/>
-              <a:buChar char="•"/>
-            </a:pPr>
-            <a:r>
-              <a:rPr b="0" lang="en-US" sz="2000" spc="-1" strike="noStrike">
-                <a:solidFill>
-                  <a:schemeClr val="dk1"/>
-                </a:solidFill>
-                <a:latin typeface="Arial"/>
-                <a:ea typeface="DejaVu Sans"/>
-              </a:rPr>
-              <a:t>Dedicated user interface for simulating buses in Declaration Mode using the multistep approach: VECTOMultistep.exe </a:t>
-            </a:r>
-            <a:endParaRPr b="0" lang="en-US" sz="2000" spc="-1" strike="noStrike">
-              <a:solidFill>
-                <a:srgbClr val="000000"/>
-              </a:solidFill>
-              <a:latin typeface="Arial"/>
-            </a:endParaRPr>
-          </a:p>
-          <a:p>
-            <a:pPr marL="228600" indent="-228600" defTabSz="914400">
-              <a:lnSpc>
-                <a:spcPct val="120000"/>
-              </a:lnSpc>
-              <a:spcBef>
-                <a:spcPts val="601"/>
-              </a:spcBef>
-              <a:buClr>
-                <a:srgbClr val="000000"/>
-              </a:buClr>
-              <a:buFont typeface="Arial"/>
-              <a:buChar char="•"/>
-            </a:pPr>
-            <a:r>
-              <a:rPr b="0" lang="en-US" sz="2000" spc="-1" strike="noStrike">
-                <a:solidFill>
-                  <a:schemeClr val="dk1"/>
-                </a:solidFill>
-                <a:latin typeface="Arial"/>
-                <a:ea typeface="DejaVu Sans"/>
-              </a:rPr>
-              <a:t>Engineering Mode</a:t>
-            </a:r>
-            <a:endParaRPr b="0" lang="en-US" sz="2000" spc="-1" strike="noStrike">
-              <a:solidFill>
-                <a:srgbClr val="000000"/>
-              </a:solidFill>
-              <a:latin typeface="Arial"/>
-            </a:endParaRPr>
-          </a:p>
-          <a:p>
-            <a:pPr lvl="1" marL="716040" indent="-266760" defTabSz="914400">
-              <a:lnSpc>
-                <a:spcPct val="120000"/>
-              </a:lnSpc>
-              <a:spcBef>
-                <a:spcPts val="601"/>
-              </a:spcBef>
-              <a:buClr>
-                <a:srgbClr val="000000"/>
-              </a:buClr>
-              <a:buFont typeface="Wingdings" charset="2"/>
-              <a:buChar char=""/>
-            </a:pPr>
-            <a:r>
-              <a:rPr b="0" lang="en-US" sz="1600" spc="-1" strike="noStrike">
-                <a:solidFill>
-                  <a:schemeClr val="dk1"/>
-                </a:solidFill>
-                <a:latin typeface="Arial"/>
-                <a:ea typeface="DejaVu Sans"/>
-              </a:rPr>
-              <a:t>xEV-Vehicles</a:t>
-            </a:r>
-            <a:endParaRPr b="0" lang="en-US" sz="1600" spc="-1" strike="noStrike">
-              <a:solidFill>
-                <a:srgbClr val="000000"/>
-              </a:solidFill>
-              <a:latin typeface="Arial"/>
-            </a:endParaRPr>
-          </a:p>
-          <a:p>
-            <a:pPr marL="228600" indent="-228600" defTabSz="914400">
-              <a:lnSpc>
-                <a:spcPct val="120000"/>
-              </a:lnSpc>
-              <a:spcBef>
-                <a:spcPts val="601"/>
-              </a:spcBef>
-              <a:buClr>
-                <a:srgbClr val="000000"/>
-              </a:buClr>
-              <a:buFont typeface="Arial"/>
-              <a:buChar char="•"/>
-            </a:pPr>
-            <a:r>
-              <a:rPr b="0" lang="pt-BR" sz="2000" spc="-1" strike="noStrike">
-                <a:solidFill>
-                  <a:schemeClr val="dk1"/>
-                </a:solidFill>
-                <a:latin typeface="Arial"/>
-                <a:ea typeface="DejaVu Sans"/>
-              </a:rPr>
-              <a:t>Updated XML-Reports and Vehicle Information Files to support new Vehicle Architectures</a:t>
-            </a:r>
-            <a:endParaRPr b="0" lang="en-US" sz="2000" spc="-1" strike="noStrike">
-              <a:solidFill>
-                <a:srgbClr val="000000"/>
-              </a:solidFill>
-              <a:latin typeface="Arial"/>
-            </a:endParaRPr>
-          </a:p>
-          <a:p>
-            <a:pPr lvl="1" marL="716040" indent="-266760" defTabSz="914400">
-              <a:lnSpc>
-                <a:spcPct val="120000"/>
-              </a:lnSpc>
-              <a:spcBef>
-                <a:spcPts val="601"/>
-              </a:spcBef>
-              <a:buClr>
-                <a:srgbClr val="000000"/>
-              </a:buClr>
-              <a:buFont typeface="Wingdings" charset="2"/>
-              <a:buChar char=""/>
-            </a:pPr>
-            <a:r>
-              <a:rPr b="0" lang="pt-BR" sz="1600" spc="-1" strike="noStrike">
-                <a:solidFill>
-                  <a:schemeClr val="dk1"/>
-                </a:solidFill>
-                <a:latin typeface="Arial"/>
-                <a:ea typeface="DejaVu Sans"/>
-              </a:rPr>
-              <a:t>New Manufacturer Record File (MRF):</a:t>
-            </a:r>
-            <a:endParaRPr b="0" lang="en-US" sz="1600" spc="-1" strike="noStrike">
-              <a:solidFill>
-                <a:srgbClr val="000000"/>
-              </a:solidFill>
-              <a:latin typeface="Arial"/>
-            </a:endParaRPr>
-          </a:p>
-          <a:p>
-            <a:pPr lvl="1" marL="716040" indent="-266760" defTabSz="914400">
-              <a:lnSpc>
-                <a:spcPct val="120000"/>
-              </a:lnSpc>
-              <a:spcBef>
-                <a:spcPts val="601"/>
-              </a:spcBef>
-              <a:buClr>
-                <a:srgbClr val="000000"/>
-              </a:buClr>
-              <a:buFont typeface="Wingdings" charset="2"/>
-              <a:buChar char=""/>
-            </a:pPr>
-            <a:r>
-              <a:rPr b="0" lang="pt-BR" sz="1600" spc="-1" strike="noStrike">
-                <a:solidFill>
-                  <a:schemeClr val="dk1"/>
-                </a:solidFill>
-                <a:latin typeface="Arial"/>
-                <a:ea typeface="DejaVu Sans"/>
-              </a:rPr>
-              <a:t>New Customer Information File (CIF): </a:t>
-            </a:r>
-            <a:endParaRPr b="0" lang="en-US" sz="1600" spc="-1" strike="noStrike">
-              <a:solidFill>
-                <a:srgbClr val="000000"/>
-              </a:solidFill>
-              <a:latin typeface="Arial"/>
-            </a:endParaRPr>
-          </a:p>
-          <a:p>
-            <a:pPr lvl="1" marL="716040" indent="-266760" defTabSz="914400">
-              <a:lnSpc>
-                <a:spcPct val="120000"/>
-              </a:lnSpc>
-              <a:spcBef>
-                <a:spcPts val="601"/>
-              </a:spcBef>
-              <a:buClr>
-                <a:srgbClr val="000000"/>
-              </a:buClr>
-              <a:buFont typeface="Wingdings" charset="2"/>
-              <a:buChar char=""/>
-            </a:pPr>
-            <a:r>
-              <a:rPr b="0" lang="pt-BR" sz="1600" spc="-1" strike="noStrike">
-                <a:solidFill>
-                  <a:schemeClr val="dk1"/>
-                </a:solidFill>
-                <a:latin typeface="Arial"/>
-                <a:ea typeface="DejaVu Sans"/>
-              </a:rPr>
-              <a:t>Multistep Output (VIF):</a:t>
-            </a:r>
-            <a:endParaRPr b="0" lang="en-US" sz="1600" spc="-1" strike="noStrike">
-              <a:solidFill>
-                <a:srgbClr val="000000"/>
-              </a:solidFill>
-              <a:latin typeface="Arial"/>
-            </a:endParaRPr>
-          </a:p>
-          <a:p>
-            <a:pPr marL="228600" indent="-228600" defTabSz="914400">
-              <a:lnSpc>
-                <a:spcPct val="120000"/>
-              </a:lnSpc>
-              <a:spcBef>
-                <a:spcPts val="601"/>
-              </a:spcBef>
-              <a:buClr>
-                <a:srgbClr val="000000"/>
-              </a:buClr>
-              <a:buFont typeface="Arial"/>
-              <a:buChar char="•"/>
-            </a:pPr>
-            <a:r>
-              <a:rPr b="0" lang="pt-BR" sz="2000" spc="-1" strike="noStrike">
-                <a:solidFill>
-                  <a:schemeClr val="dk1"/>
-                </a:solidFill>
-                <a:latin typeface="Arial"/>
-                <a:ea typeface="DejaVu Sans"/>
-              </a:rPr>
-              <a:t>Updated simulation output (.vsum, .vmod)</a:t>
-            </a:r>
-            <a:endParaRPr b="0" lang="en-US" sz="2000" spc="-1" strike="noStrike">
-              <a:solidFill>
-                <a:srgbClr val="000000"/>
-              </a:solidFill>
-              <a:latin typeface="Arial"/>
-            </a:endParaRPr>
-          </a:p>
-          <a:p>
-            <a:pPr marL="228600" indent="-228600" defTabSz="914400">
-              <a:lnSpc>
-                <a:spcPct val="120000"/>
-              </a:lnSpc>
-              <a:spcBef>
-                <a:spcPts val="601"/>
-              </a:spcBef>
-              <a:buClr>
-                <a:srgbClr val="000000"/>
-              </a:buClr>
-              <a:buFont typeface="Arial"/>
-              <a:buChar char="•"/>
-            </a:pPr>
-            <a:r>
-              <a:rPr b="0" lang="pt-BR" sz="2000" spc="-1" strike="noStrike">
-                <a:solidFill>
-                  <a:schemeClr val="dk1"/>
-                </a:solidFill>
-                <a:latin typeface="Arial"/>
-                <a:ea typeface="DejaVu Sans"/>
-              </a:rPr>
-              <a:t>Updated Hashing Tool to handle new powertrain components (electric motor, battery, supercap ...)</a:t>
-            </a:r>
-            <a:endParaRPr b="0" lang="en-US" sz="2000" spc="-1" strike="noStrike">
-              <a:solidFill>
-                <a:srgbClr val="000000"/>
-              </a:solidFill>
-              <a:latin typeface="Arial"/>
-            </a:endParaRPr>
-          </a:p>
-          <a:p>
-            <a:pPr indent="0" defTabSz="914400">
-              <a:lnSpc>
-                <a:spcPct val="120000"/>
-              </a:lnSpc>
-              <a:spcBef>
-                <a:spcPts val="601"/>
-              </a:spcBef>
-              <a:buNone/>
-              <a:tabLst>
-                <a:tab algn="l" pos="0"/>
-              </a:tabLst>
-            </a:pPr>
-            <a:endParaRPr b="0" lang="en-US" sz="2000" spc="-1" strike="noStrike">
-              <a:solidFill>
-                <a:srgbClr val="000000"/>
-              </a:solidFill>
-              <a:latin typeface="Arial"/>
-            </a:endParaRPr>
-          </a:p>
-          <a:p>
-            <a:pPr marL="228600" indent="-228600" defTabSz="914400">
-              <a:lnSpc>
-                <a:spcPct val="120000"/>
-              </a:lnSpc>
-              <a:spcBef>
-                <a:spcPts val="601"/>
-              </a:spcBef>
-              <a:buClr>
-                <a:srgbClr val="000000"/>
-              </a:buClr>
-              <a:buFont typeface="Arial"/>
-              <a:buChar char="•"/>
-              <a:tabLst>
-                <a:tab algn="l" pos="0"/>
-              </a:tabLst>
-            </a:pPr>
-            <a:r>
-              <a:rPr b="0" lang="pt-BR" sz="2000" spc="-1" strike="noStrike">
-                <a:solidFill>
-                  <a:schemeClr val="dk1"/>
-                </a:solidFill>
-                <a:latin typeface="Arial"/>
-                <a:ea typeface="DejaVu Sans"/>
-              </a:rPr>
-              <a:t>Supports .NET Framework 4.8 and .NET 6.0</a:t>
-            </a:r>
-            <a:endParaRPr b="0" lang="en-US" sz="2000" spc="-1" strike="noStrike">
-              <a:solidFill>
-                <a:srgbClr val="000000"/>
-              </a:solidFill>
-              <a:latin typeface="Arial"/>
-            </a:endParaRPr>
-          </a:p>
-          <a:p>
-            <a:pPr indent="0" defTabSz="914400">
-              <a:lnSpc>
-                <a:spcPct val="90000"/>
-              </a:lnSpc>
-              <a:spcBef>
-                <a:spcPts val="1199"/>
-              </a:spcBef>
-              <a:buNone/>
-              <a:tabLst>
-                <a:tab algn="l" pos="0"/>
-              </a:tabLst>
-            </a:pPr>
-            <a:endParaRPr b="0" lang="en-US" sz="2000" spc="-1" strike="noStrike">
-              <a:solidFill>
-                <a:srgbClr val="000000"/>
-              </a:solidFill>
-              <a:latin typeface="Arial"/>
-            </a:endParaRPr>
-          </a:p>
-        </p:txBody>
-      </p:sp>
-      <p:sp>
-        <p:nvSpPr>
-          <p:cNvPr id="68" name="PlaceHolder 2"/>
-          <p:cNvSpPr>
-            <a:spLocks noGrp="1"/>
-          </p:cNvSpPr>
-          <p:nvPr>
             <p:ph type="title"/>
           </p:nvPr>
         </p:nvSpPr>
         <p:spPr>
           <a:xfrm>
-            <a:off x="588240" y="453600"/>
-            <a:ext cx="8225640" cy="475200"/>
+            <a:off x="722160" y="2320200"/>
+            <a:ext cx="7768440" cy="1526040"/>
           </a:xfrm>
           <a:prstGeom prst="rect">
             <a:avLst/>
@@ -5209,26 +5294,113 @@
             <a:noAutofit/>
           </a:bodyPr>
           <a:p>
-            <a:pPr indent="0" defTabSz="914400">
+            <a:pPr indent="0" algn="ctr" defTabSz="914400">
               <a:lnSpc>
                 <a:spcPct val="90000"/>
               </a:lnSpc>
+              <a:spcBef>
+                <a:spcPts val="4201"/>
+              </a:spcBef>
               <a:buNone/>
               <a:tabLst>
                 <a:tab algn="l" pos="0"/>
               </a:tabLst>
             </a:pPr>
-            <a:r>
-              <a:rPr b="1" lang="en-GB" sz="2400" spc="-1" strike="noStrike">
+            <a:br>
+              <a:rPr sz="2400"/>
+            </a:br>
+            <a:r>
+              <a:rPr b="1" lang="en-US" sz="2400" spc="-1" strike="noStrike">
                 <a:solidFill>
                   <a:srgbClr val="990000"/>
                 </a:solidFill>
                 <a:latin typeface="Arial"/>
                 <a:ea typeface="DejaVu Sans"/>
               </a:rPr>
-              <a:t>Features</a:t>
-            </a:r>
+              <a:t>First official VECTO release for the 2nd Amendment </a:t>
+            </a:r>
+            <a:br>
+              <a:rPr sz="2400"/>
+            </a:br>
+            <a:r>
+              <a:rPr b="1" lang="en-US" sz="2400" spc="-1" strike="noStrike">
+                <a:solidFill>
+                  <a:srgbClr val="990000"/>
+                </a:solidFill>
+                <a:latin typeface="Arial"/>
+                <a:ea typeface="DejaVu Sans"/>
+              </a:rPr>
+              <a:t>of Regulation (EU) 2017/2400</a:t>
+            </a:r>
+            <a:br>
+              <a:rPr sz="2800"/>
+            </a:br>
+            <a:br>
+              <a:rPr sz="2800"/>
+            </a:br>
+            <a:br>
+              <a:rPr sz="2400"/>
+            </a:br>
             <a:endParaRPr b="0" lang="en-US" sz="2400" spc="-1" strike="noStrike">
+              <a:solidFill>
+                <a:srgbClr val="000000"/>
+              </a:solidFill>
+              <a:latin typeface="Arial"/>
+            </a:endParaRPr>
+          </a:p>
+        </p:txBody>
+      </p:sp>
+      <p:sp>
+        <p:nvSpPr>
+          <p:cNvPr id="68" name="PlaceHolder 2"/>
+          <p:cNvSpPr>
+            <a:spLocks noGrp="1"/>
+          </p:cNvSpPr>
+          <p:nvPr>
+            <p:ph/>
+          </p:nvPr>
+        </p:nvSpPr>
+        <p:spPr>
+          <a:xfrm>
+            <a:off x="722160" y="4276440"/>
+            <a:ext cx="7768440" cy="403560"/>
+          </a:xfrm>
+          <a:prstGeom prst="rect">
+            <a:avLst/>
+          </a:prstGeom>
+          <a:noFill/>
+          <a:ln w="0">
+            <a:noFill/>
+          </a:ln>
+        </p:spPr>
+        <p:txBody>
+          <a:bodyPr lIns="0" rIns="0" tIns="0" bIns="0" anchor="ctr">
+            <a:noAutofit/>
+          </a:bodyPr>
+          <a:p>
+            <a:pPr indent="0" algn="ctr" defTabSz="914400">
+              <a:lnSpc>
+                <a:spcPct val="90000"/>
+              </a:lnSpc>
+              <a:spcBef>
+                <a:spcPts val="1001"/>
+              </a:spcBef>
+              <a:buNone/>
+              <a:tabLst>
+                <a:tab algn="l" pos="0"/>
+              </a:tabLst>
+            </a:pPr>
+            <a:r>
+              <a:rPr b="0" lang="en-GB" sz="2000" spc="-1" strike="noStrike">
+                <a:solidFill>
+                  <a:schemeClr val="dk1"/>
+                </a:solidFill>
+                <a:latin typeface="Arial"/>
+                <a:ea typeface="DejaVu Sans"/>
+              </a:rPr>
+              <a:t>TUG</a:t>
+            </a:r>
+            <a:endParaRPr b="0" lang="en-US" sz="2000" spc="-1" strike="noStrike">
               <a:solidFill>
                 <a:srgbClr val="000000"/>
               </a:solidFill>
@@ -5274,13 +5446,581 @@
             <a:spLocks noGrp="1"/>
           </p:cNvSpPr>
           <p:nvPr>
+            <p:ph/>
+          </p:nvPr>
+        </p:nvSpPr>
+        <p:spPr>
+          <a:xfrm>
+            <a:off x="588240" y="1140480"/>
+            <a:ext cx="8390520" cy="5043240"/>
+          </a:xfrm>
+          <a:prstGeom prst="rect">
+            <a:avLst/>
+          </a:prstGeom>
+          <a:noFill/>
+          <a:ln w="0">
+            <a:noFill/>
+          </a:ln>
+        </p:spPr>
+        <p:txBody>
+          <a:bodyPr lIns="0" rIns="0" tIns="0" bIns="0" anchor="t">
+            <a:normAutofit fontScale="64999"/>
+          </a:bodyPr>
+          <a:p>
+            <a:pPr marL="228600" indent="-228600" defTabSz="914400">
+              <a:lnSpc>
+                <a:spcPct val="120000"/>
+              </a:lnSpc>
+              <a:spcBef>
+                <a:spcPts val="601"/>
+              </a:spcBef>
+              <a:buClr>
+                <a:srgbClr val="000000"/>
+              </a:buClr>
+              <a:buFont typeface="Arial"/>
+              <a:buChar char="•"/>
+            </a:pPr>
+            <a:r>
+              <a:rPr b="0" lang="en-US" sz="2000" spc="-1" strike="noStrike">
+                <a:solidFill>
+                  <a:schemeClr val="dk1"/>
+                </a:solidFill>
+                <a:latin typeface="Arial"/>
+                <a:ea typeface="DejaVu Sans"/>
+              </a:rPr>
+              <a:t>Declaration Mode</a:t>
+            </a:r>
+            <a:endParaRPr b="0" lang="en-US" sz="2000" spc="-1" strike="noStrike">
+              <a:solidFill>
+                <a:srgbClr val="000000"/>
+              </a:solidFill>
+              <a:latin typeface="Arial"/>
+            </a:endParaRPr>
+          </a:p>
+          <a:p>
+            <a:pPr lvl="1" marL="716040" indent="-266760" defTabSz="914400">
+              <a:lnSpc>
+                <a:spcPct val="120000"/>
+              </a:lnSpc>
+              <a:spcBef>
+                <a:spcPts val="601"/>
+              </a:spcBef>
+              <a:buClr>
+                <a:srgbClr val="000000"/>
+              </a:buClr>
+              <a:buFont typeface="Wingdings" charset="2"/>
+              <a:buChar char=""/>
+            </a:pPr>
+            <a:r>
+              <a:rPr b="0" lang="en-US" sz="1600" spc="-1" strike="noStrike">
+                <a:solidFill>
+                  <a:schemeClr val="dk1"/>
+                </a:solidFill>
+                <a:latin typeface="Arial"/>
+                <a:ea typeface="DejaVu Sans"/>
+              </a:rPr>
+              <a:t>xEV-Heavy Lorries</a:t>
+            </a:r>
+            <a:endParaRPr b="0" lang="en-US" sz="1600" spc="-1" strike="noStrike">
+              <a:solidFill>
+                <a:srgbClr val="000000"/>
+              </a:solidFill>
+              <a:latin typeface="Arial"/>
+            </a:endParaRPr>
+          </a:p>
+          <a:p>
+            <a:pPr lvl="1" marL="716040" indent="-266760" defTabSz="914400">
+              <a:lnSpc>
+                <a:spcPct val="120000"/>
+              </a:lnSpc>
+              <a:spcBef>
+                <a:spcPts val="601"/>
+              </a:spcBef>
+              <a:buClr>
+                <a:srgbClr val="000000"/>
+              </a:buClr>
+              <a:buFont typeface="Wingdings" charset="2"/>
+              <a:buChar char=""/>
+            </a:pPr>
+            <a:r>
+              <a:rPr b="0" lang="en-US" sz="1600" spc="-1" strike="noStrike">
+                <a:solidFill>
+                  <a:schemeClr val="dk1"/>
+                </a:solidFill>
+                <a:latin typeface="Arial"/>
+                <a:ea typeface="DejaVu Sans"/>
+              </a:rPr>
+              <a:t>Conventional Medium Lorries</a:t>
+            </a:r>
+            <a:endParaRPr b="0" lang="en-US" sz="1600" spc="-1" strike="noStrike">
+              <a:solidFill>
+                <a:srgbClr val="000000"/>
+              </a:solidFill>
+              <a:latin typeface="Arial"/>
+            </a:endParaRPr>
+          </a:p>
+          <a:p>
+            <a:pPr lvl="1" marL="716040" indent="-266760" defTabSz="914400">
+              <a:lnSpc>
+                <a:spcPct val="120000"/>
+              </a:lnSpc>
+              <a:spcBef>
+                <a:spcPts val="601"/>
+              </a:spcBef>
+              <a:buClr>
+                <a:srgbClr val="000000"/>
+              </a:buClr>
+              <a:buFont typeface="Wingdings" charset="2"/>
+              <a:buChar char=""/>
+            </a:pPr>
+            <a:r>
+              <a:rPr b="0" lang="en-US" sz="1600" spc="-1" strike="noStrike">
+                <a:solidFill>
+                  <a:schemeClr val="dk1"/>
+                </a:solidFill>
+                <a:latin typeface="Arial"/>
+                <a:ea typeface="DejaVu Sans"/>
+              </a:rPr>
+              <a:t>xEV Medium Lorries</a:t>
+            </a:r>
+            <a:endParaRPr b="0" lang="en-US" sz="1600" spc="-1" strike="noStrike">
+              <a:solidFill>
+                <a:srgbClr val="000000"/>
+              </a:solidFill>
+              <a:latin typeface="Arial"/>
+            </a:endParaRPr>
+          </a:p>
+          <a:p>
+            <a:pPr lvl="1" marL="716040" indent="-266760" defTabSz="914400">
+              <a:lnSpc>
+                <a:spcPct val="120000"/>
+              </a:lnSpc>
+              <a:spcBef>
+                <a:spcPts val="601"/>
+              </a:spcBef>
+              <a:buClr>
+                <a:srgbClr val="000000"/>
+              </a:buClr>
+              <a:buFont typeface="Wingdings" charset="2"/>
+              <a:buChar char=""/>
+            </a:pPr>
+            <a:r>
+              <a:rPr b="0" lang="en-US" sz="1600" spc="-1" strike="noStrike">
+                <a:solidFill>
+                  <a:schemeClr val="dk1"/>
+                </a:solidFill>
+                <a:latin typeface="Arial"/>
+                <a:ea typeface="DejaVu Sans"/>
+              </a:rPr>
+              <a:t>Conventional Buses</a:t>
+            </a:r>
+            <a:endParaRPr b="0" lang="en-US" sz="1600" spc="-1" strike="noStrike">
+              <a:solidFill>
+                <a:srgbClr val="000000"/>
+              </a:solidFill>
+              <a:latin typeface="Arial"/>
+            </a:endParaRPr>
+          </a:p>
+          <a:p>
+            <a:pPr lvl="1" marL="716040" indent="-266760" defTabSz="914400">
+              <a:lnSpc>
+                <a:spcPct val="120000"/>
+              </a:lnSpc>
+              <a:spcBef>
+                <a:spcPts val="601"/>
+              </a:spcBef>
+              <a:buClr>
+                <a:srgbClr val="000000"/>
+              </a:buClr>
+              <a:buFont typeface="Wingdings" charset="2"/>
+              <a:buChar char=""/>
+            </a:pPr>
+            <a:r>
+              <a:rPr b="0" lang="en-US" sz="1600" spc="-1" strike="noStrike">
+                <a:solidFill>
+                  <a:schemeClr val="dk1"/>
+                </a:solidFill>
+                <a:latin typeface="Arial"/>
+                <a:ea typeface="DejaVu Sans"/>
+              </a:rPr>
+              <a:t>xEV Buses</a:t>
+            </a:r>
+            <a:endParaRPr b="0" lang="en-US" sz="1600" spc="-1" strike="noStrike">
+              <a:solidFill>
+                <a:srgbClr val="000000"/>
+              </a:solidFill>
+              <a:latin typeface="Arial"/>
+            </a:endParaRPr>
+          </a:p>
+          <a:p>
+            <a:pPr marL="228600" indent="-228600" defTabSz="914400">
+              <a:lnSpc>
+                <a:spcPct val="120000"/>
+              </a:lnSpc>
+              <a:spcBef>
+                <a:spcPts val="601"/>
+              </a:spcBef>
+              <a:buClr>
+                <a:srgbClr val="000000"/>
+              </a:buClr>
+              <a:buFont typeface="Arial"/>
+              <a:buChar char="•"/>
+            </a:pPr>
+            <a:r>
+              <a:rPr b="0" lang="en-US" sz="2000" spc="-1" strike="noStrike">
+                <a:solidFill>
+                  <a:schemeClr val="dk1"/>
+                </a:solidFill>
+                <a:latin typeface="Arial"/>
+                <a:ea typeface="DejaVu Sans"/>
+              </a:rPr>
+              <a:t>Dedicated user interface for simulating buses in Declaration Mode using the multistep approach: VECTOMultistep.exe </a:t>
+            </a:r>
+            <a:endParaRPr b="0" lang="en-US" sz="2000" spc="-1" strike="noStrike">
+              <a:solidFill>
+                <a:srgbClr val="000000"/>
+              </a:solidFill>
+              <a:latin typeface="Arial"/>
+            </a:endParaRPr>
+          </a:p>
+          <a:p>
+            <a:pPr marL="228600" indent="-228600" defTabSz="914400">
+              <a:lnSpc>
+                <a:spcPct val="120000"/>
+              </a:lnSpc>
+              <a:spcBef>
+                <a:spcPts val="601"/>
+              </a:spcBef>
+              <a:buClr>
+                <a:srgbClr val="000000"/>
+              </a:buClr>
+              <a:buFont typeface="Arial"/>
+              <a:buChar char="•"/>
+            </a:pPr>
+            <a:r>
+              <a:rPr b="0" lang="en-US" sz="2000" spc="-1" strike="noStrike">
+                <a:solidFill>
+                  <a:schemeClr val="dk1"/>
+                </a:solidFill>
+                <a:latin typeface="Arial"/>
+                <a:ea typeface="DejaVu Sans"/>
+              </a:rPr>
+              <a:t>Engineering Mode</a:t>
+            </a:r>
+            <a:endParaRPr b="0" lang="en-US" sz="2000" spc="-1" strike="noStrike">
+              <a:solidFill>
+                <a:srgbClr val="000000"/>
+              </a:solidFill>
+              <a:latin typeface="Arial"/>
+            </a:endParaRPr>
+          </a:p>
+          <a:p>
+            <a:pPr lvl="1" marL="716040" indent="-266760" defTabSz="914400">
+              <a:lnSpc>
+                <a:spcPct val="120000"/>
+              </a:lnSpc>
+              <a:spcBef>
+                <a:spcPts val="601"/>
+              </a:spcBef>
+              <a:buClr>
+                <a:srgbClr val="000000"/>
+              </a:buClr>
+              <a:buFont typeface="Wingdings" charset="2"/>
+              <a:buChar char=""/>
+            </a:pPr>
+            <a:r>
+              <a:rPr b="0" lang="en-US" sz="1600" spc="-1" strike="noStrike">
+                <a:solidFill>
+                  <a:schemeClr val="dk1"/>
+                </a:solidFill>
+                <a:latin typeface="Arial"/>
+                <a:ea typeface="DejaVu Sans"/>
+              </a:rPr>
+              <a:t>xEV-Vehicles</a:t>
+            </a:r>
+            <a:endParaRPr b="0" lang="en-US" sz="1600" spc="-1" strike="noStrike">
+              <a:solidFill>
+                <a:srgbClr val="000000"/>
+              </a:solidFill>
+              <a:latin typeface="Arial"/>
+            </a:endParaRPr>
+          </a:p>
+          <a:p>
+            <a:pPr marL="228600" indent="-228600" defTabSz="914400">
+              <a:lnSpc>
+                <a:spcPct val="120000"/>
+              </a:lnSpc>
+              <a:spcBef>
+                <a:spcPts val="601"/>
+              </a:spcBef>
+              <a:buClr>
+                <a:srgbClr val="000000"/>
+              </a:buClr>
+              <a:buFont typeface="Arial"/>
+              <a:buChar char="•"/>
+            </a:pPr>
+            <a:r>
+              <a:rPr b="0" lang="pt-BR" sz="2000" spc="-1" strike="noStrike">
+                <a:solidFill>
+                  <a:schemeClr val="dk1"/>
+                </a:solidFill>
+                <a:latin typeface="Arial"/>
+                <a:ea typeface="DejaVu Sans"/>
+              </a:rPr>
+              <a:t>Updated XML-Reports and Vehicle Information Files to support new Vehicle Architectures</a:t>
+            </a:r>
+            <a:endParaRPr b="0" lang="en-US" sz="2000" spc="-1" strike="noStrike">
+              <a:solidFill>
+                <a:srgbClr val="000000"/>
+              </a:solidFill>
+              <a:latin typeface="Arial"/>
+            </a:endParaRPr>
+          </a:p>
+          <a:p>
+            <a:pPr lvl="1" marL="716040" indent="-266760" defTabSz="914400">
+              <a:lnSpc>
+                <a:spcPct val="120000"/>
+              </a:lnSpc>
+              <a:spcBef>
+                <a:spcPts val="601"/>
+              </a:spcBef>
+              <a:buClr>
+                <a:srgbClr val="000000"/>
+              </a:buClr>
+              <a:buFont typeface="Wingdings" charset="2"/>
+              <a:buChar char=""/>
+            </a:pPr>
+            <a:r>
+              <a:rPr b="0" lang="pt-BR" sz="1600" spc="-1" strike="noStrike">
+                <a:solidFill>
+                  <a:schemeClr val="dk1"/>
+                </a:solidFill>
+                <a:latin typeface="Arial"/>
+                <a:ea typeface="DejaVu Sans"/>
+              </a:rPr>
+              <a:t>New Manufacturer Record File (MRF):</a:t>
+            </a:r>
+            <a:endParaRPr b="0" lang="en-US" sz="1600" spc="-1" strike="noStrike">
+              <a:solidFill>
+                <a:srgbClr val="000000"/>
+              </a:solidFill>
+              <a:latin typeface="Arial"/>
+            </a:endParaRPr>
+          </a:p>
+          <a:p>
+            <a:pPr lvl="1" marL="716040" indent="-266760" defTabSz="914400">
+              <a:lnSpc>
+                <a:spcPct val="120000"/>
+              </a:lnSpc>
+              <a:spcBef>
+                <a:spcPts val="601"/>
+              </a:spcBef>
+              <a:buClr>
+                <a:srgbClr val="000000"/>
+              </a:buClr>
+              <a:buFont typeface="Wingdings" charset="2"/>
+              <a:buChar char=""/>
+            </a:pPr>
+            <a:r>
+              <a:rPr b="0" lang="pt-BR" sz="1600" spc="-1" strike="noStrike">
+                <a:solidFill>
+                  <a:schemeClr val="dk1"/>
+                </a:solidFill>
+                <a:latin typeface="Arial"/>
+                <a:ea typeface="DejaVu Sans"/>
+              </a:rPr>
+              <a:t>New Customer Information File (CIF): </a:t>
+            </a:r>
+            <a:endParaRPr b="0" lang="en-US" sz="1600" spc="-1" strike="noStrike">
+              <a:solidFill>
+                <a:srgbClr val="000000"/>
+              </a:solidFill>
+              <a:latin typeface="Arial"/>
+            </a:endParaRPr>
+          </a:p>
+          <a:p>
+            <a:pPr lvl="1" marL="716040" indent="-266760" defTabSz="914400">
+              <a:lnSpc>
+                <a:spcPct val="120000"/>
+              </a:lnSpc>
+              <a:spcBef>
+                <a:spcPts val="601"/>
+              </a:spcBef>
+              <a:buClr>
+                <a:srgbClr val="000000"/>
+              </a:buClr>
+              <a:buFont typeface="Wingdings" charset="2"/>
+              <a:buChar char=""/>
+            </a:pPr>
+            <a:r>
+              <a:rPr b="0" lang="pt-BR" sz="1600" spc="-1" strike="noStrike">
+                <a:solidFill>
+                  <a:schemeClr val="dk1"/>
+                </a:solidFill>
+                <a:latin typeface="Arial"/>
+                <a:ea typeface="DejaVu Sans"/>
+              </a:rPr>
+              <a:t>Multistep Output (VIF):</a:t>
+            </a:r>
+            <a:endParaRPr b="0" lang="en-US" sz="1600" spc="-1" strike="noStrike">
+              <a:solidFill>
+                <a:srgbClr val="000000"/>
+              </a:solidFill>
+              <a:latin typeface="Arial"/>
+            </a:endParaRPr>
+          </a:p>
+          <a:p>
+            <a:pPr marL="228600" indent="-228600" defTabSz="914400">
+              <a:lnSpc>
+                <a:spcPct val="120000"/>
+              </a:lnSpc>
+              <a:spcBef>
+                <a:spcPts val="601"/>
+              </a:spcBef>
+              <a:buClr>
+                <a:srgbClr val="000000"/>
+              </a:buClr>
+              <a:buFont typeface="Arial"/>
+              <a:buChar char="•"/>
+            </a:pPr>
+            <a:r>
+              <a:rPr b="0" lang="pt-BR" sz="2000" spc="-1" strike="noStrike">
+                <a:solidFill>
+                  <a:schemeClr val="dk1"/>
+                </a:solidFill>
+                <a:latin typeface="Arial"/>
+                <a:ea typeface="DejaVu Sans"/>
+              </a:rPr>
+              <a:t>Updated simulation output (.vsum, .vmod)</a:t>
+            </a:r>
+            <a:endParaRPr b="0" lang="en-US" sz="2000" spc="-1" strike="noStrike">
+              <a:solidFill>
+                <a:srgbClr val="000000"/>
+              </a:solidFill>
+              <a:latin typeface="Arial"/>
+            </a:endParaRPr>
+          </a:p>
+          <a:p>
+            <a:pPr marL="228600" indent="-228600" defTabSz="914400">
+              <a:lnSpc>
+                <a:spcPct val="120000"/>
+              </a:lnSpc>
+              <a:spcBef>
+                <a:spcPts val="601"/>
+              </a:spcBef>
+              <a:buClr>
+                <a:srgbClr val="000000"/>
+              </a:buClr>
+              <a:buFont typeface="Arial"/>
+              <a:buChar char="•"/>
+            </a:pPr>
+            <a:r>
+              <a:rPr b="0" lang="pt-BR" sz="2000" spc="-1" strike="noStrike">
+                <a:solidFill>
+                  <a:schemeClr val="dk1"/>
+                </a:solidFill>
+                <a:latin typeface="Arial"/>
+                <a:ea typeface="DejaVu Sans"/>
+              </a:rPr>
+              <a:t>Updated Hashing Tool to handle new powertrain components (electric motor, battery, supercap ...)</a:t>
+            </a:r>
+            <a:endParaRPr b="0" lang="en-US" sz="2000" spc="-1" strike="noStrike">
+              <a:solidFill>
+                <a:srgbClr val="000000"/>
+              </a:solidFill>
+              <a:latin typeface="Arial"/>
+            </a:endParaRPr>
+          </a:p>
+          <a:p>
+            <a:pPr indent="0" defTabSz="914400">
+              <a:lnSpc>
+                <a:spcPct val="120000"/>
+              </a:lnSpc>
+              <a:spcBef>
+                <a:spcPts val="601"/>
+              </a:spcBef>
+              <a:buNone/>
+              <a:tabLst>
+                <a:tab algn="l" pos="0"/>
+              </a:tabLst>
+            </a:pPr>
+            <a:endParaRPr b="0" lang="en-US" sz="2000" spc="-1" strike="noStrike">
+              <a:solidFill>
+                <a:srgbClr val="000000"/>
+              </a:solidFill>
+              <a:latin typeface="Arial"/>
+            </a:endParaRPr>
+          </a:p>
+          <a:p>
+            <a:pPr marL="228600" indent="-228600" defTabSz="914400">
+              <a:lnSpc>
+                <a:spcPct val="120000"/>
+              </a:lnSpc>
+              <a:spcBef>
+                <a:spcPts val="601"/>
+              </a:spcBef>
+              <a:buClr>
+                <a:srgbClr val="000000"/>
+              </a:buClr>
+              <a:buFont typeface="Arial"/>
+              <a:buChar char="•"/>
+              <a:tabLst>
+                <a:tab algn="l" pos="0"/>
+              </a:tabLst>
+            </a:pPr>
+            <a:r>
+              <a:rPr b="0" lang="pt-BR" sz="2000" spc="-1" strike="noStrike">
+                <a:solidFill>
+                  <a:schemeClr val="dk1"/>
+                </a:solidFill>
+                <a:latin typeface="Arial"/>
+                <a:ea typeface="DejaVu Sans"/>
+              </a:rPr>
+              <a:t>Supports .NET Framework 4.8 and .NET 6.0</a:t>
+            </a:r>
+            <a:endParaRPr b="0" lang="en-US" sz="2000" spc="-1" strike="noStrike">
+              <a:solidFill>
+                <a:srgbClr val="000000"/>
+              </a:solidFill>
+              <a:latin typeface="Arial"/>
+            </a:endParaRPr>
+          </a:p>
+          <a:p>
+            <a:pPr indent="0" defTabSz="914400">
+              <a:lnSpc>
+                <a:spcPct val="90000"/>
+              </a:lnSpc>
+              <a:spcBef>
+                <a:spcPts val="1199"/>
+              </a:spcBef>
+              <a:buNone/>
+              <a:tabLst>
+                <a:tab algn="l" pos="0"/>
+              </a:tabLst>
+            </a:pPr>
+            <a:endParaRPr b="0" lang="en-US" sz="2000" spc="-1" strike="noStrike">
+              <a:solidFill>
+                <a:srgbClr val="000000"/>
+              </a:solidFill>
+              <a:latin typeface="Arial"/>
+            </a:endParaRPr>
+          </a:p>
+        </p:txBody>
+      </p:sp>
+      <p:sp>
+        <p:nvSpPr>
+          <p:cNvPr id="70" name="PlaceHolder 2"/>
+          <p:cNvSpPr>
+            <a:spLocks noGrp="1"/>
+          </p:cNvSpPr>
+          <p:nvPr>
             <p:ph type="title"/>
           </p:nvPr>
         </p:nvSpPr>
         <p:spPr>
           <a:xfrm>
             <a:off x="588240" y="453600"/>
-            <a:ext cx="8225640" cy="1125000"/>
+            <a:ext cx="8225280" cy="474840"/>
           </a:xfrm>
           <a:prstGeom prst="rect">
             <a:avLst/>
@@ -5305,6 +6045,92 @@
               </a:tabLst>
             </a:pPr>
             <a:r>
+              <a:rPr b="1" lang="en-GB" sz="2400" spc="-1" strike="noStrike">
+                <a:solidFill>
+                  <a:srgbClr val="990000"/>
+                </a:solidFill>
+                <a:latin typeface="Arial"/>
+                <a:ea typeface="DejaVu Sans"/>
+              </a:rPr>
+              <a:t>Features</a:t>
+            </a:r>
+            <a:endParaRPr b="0" lang="en-US" sz="2400" spc="-1" strike="noStrike">
+              <a:solidFill>
+                <a:srgbClr val="000000"/>
+              </a:solidFill>
+              <a:latin typeface="Arial"/>
+            </a:endParaRPr>
+          </a:p>
+        </p:txBody>
+      </p:sp>
+    </p:spTree>
+  </p:cSld>
+  <mc:AlternateContent>
+    <mc:Choice Requires="p14">
+      <p:transition spd="slow" p14:dur="2000"/>
+    </mc:Choice>
+    <mc:Fallback>
+      <p:transition spd="slow"/>
+    </mc:Fallback>
+  </mc:AlternateContent>
+</p:sld>
+</file>
+
+<file path=ppt/slides/slide16.xml><?xml version="1.0" encoding="utf-8"?>
+<p:sld xmlns:a="http://schemas.openxmlformats.org/drawingml/2006/main" xmlns:p="http://schemas.openxmlformats.org/presentationml/2006/main" xmlns:r="http://schemas.openxmlformats.org/officeDocument/2006/relationships" xmlns:p14="http://schemas.microsoft.com/office/powerpoint/2010/main" xmlns:p15="http://schemas.microsoft.com/office/powerpoint/2012/main" xmlns:mc="http://schemas.openxmlformats.org/markup-compatibility/2006">
+  <p:cSld>
+    <p:spTree>
+      <p:nvGrpSpPr>
+        <p:cNvPr id="1" name=""/>
+        <p:cNvGrpSpPr/>
+        <p:nvPr/>
+      </p:nvGrpSpPr>
+      <p:grpSpPr>
+        <a:xfrm>
+          <a:off x="0" y="0"/>
+          <a:ext cx="0" cy="0"/>
+          <a:chOff x="0" y="0"/>
+          <a:chExt cx="0" cy="0"/>
+        </a:xfrm>
+      </p:grpSpPr>
+      <p:sp>
+        <p:nvSpPr>
+          <p:cNvPr id="71" name="PlaceHolder 1"/>
+          <p:cNvSpPr>
+            <a:spLocks noGrp="1"/>
+          </p:cNvSpPr>
+          <p:nvPr>
+            <p:ph type="title"/>
+          </p:nvPr>
+        </p:nvSpPr>
+        <p:spPr>
+          <a:xfrm>
+            <a:off x="588240" y="453600"/>
+            <a:ext cx="8225280" cy="1124640"/>
+          </a:xfrm>
+          <a:prstGeom prst="rect">
+            <a:avLst/>
+          </a:prstGeom>
+          <a:noFill/>
+          <a:ln w="0">
+            <a:noFill/>
+          </a:ln>
+        </p:spPr>
+        <p:txBody>
+          <a:bodyPr lIns="0" rIns="0" tIns="0" bIns="0" anchor="ctr">
+            <a:noAutofit/>
+          </a:bodyPr>
+          <a:p>
+            <a:pPr indent="0" defTabSz="914400">
+              <a:lnSpc>
+                <a:spcPct val="90000"/>
+              </a:lnSpc>
+              <a:buNone/>
+              <a:tabLst>
+                <a:tab algn="l" pos="0"/>
+              </a:tabLst>
+            </a:pPr>
+            <a:r>
               <a:rPr b="1" lang="en-US" sz="2400" spc="-1" strike="noStrike">
                 <a:solidFill>
                   <a:srgbClr val="990000"/>
@@ -5328,7 +6154,7 @@
       </p:sp>
       <p:graphicFrame>
         <p:nvGraphicFramePr>
-          <p:cNvPr id="70" name="Inhaltsplatzhalter 4"/>
+          <p:cNvPr id="72" name="Inhaltsplatzhalter 4"/>
           <p:cNvGraphicFramePr/>
           <p:nvPr/>
         </p:nvGraphicFramePr>
@@ -8600,14 +9426,14 @@
       </p:graphicFrame>
       <p:sp>
         <p:nvSpPr>
-          <p:cNvPr id="71" name="Textfeld 8"/>
+          <p:cNvPr id="73" name="Textfeld 8"/>
           <p:cNvSpPr/>
           <p:nvPr/>
         </p:nvSpPr>
         <p:spPr>
           <a:xfrm>
             <a:off x="6509160" y="4789800"/>
-            <a:ext cx="2000160" cy="394920"/>
+            <a:ext cx="1999800" cy="394920"/>
           </a:xfrm>
           <a:prstGeom prst="rect">
             <a:avLst/>
@@ -8721,203 +9547,6 @@
               <a:t> Simulation and editing</a:t>
             </a:r>
             <a:endParaRPr b="0" lang="en-US" sz="1000" spc="-1" strike="noStrike">
-              <a:solidFill>
-                <a:srgbClr val="000000"/>
-              </a:solidFill>
-              <a:latin typeface="Arial"/>
-            </a:endParaRPr>
-          </a:p>
-        </p:txBody>
-      </p:sp>
-    </p:spTree>
-  </p:cSld>
-  <mc:AlternateContent>
-    <mc:Choice Requires="p14">
-      <p:transition spd="slow" p14:dur="2000"/>
-    </mc:Choice>
-    <mc:Fallback>
-      <p:transition spd="slow"/>
-    </mc:Fallback>
-  </mc:AlternateContent>
-</p:sld>
-</file>
-
-<file path=ppt/slides/slide16.xml><?xml version="1.0" encoding="utf-8"?>
-<p:sld xmlns:a="http://schemas.openxmlformats.org/drawingml/2006/main" xmlns:p="http://schemas.openxmlformats.org/presentationml/2006/main" xmlns:r="http://schemas.openxmlformats.org/officeDocument/2006/relationships" xmlns:p14="http://schemas.microsoft.com/office/powerpoint/2010/main" xmlns:p15="http://schemas.microsoft.com/office/powerpoint/2012/main" xmlns:mc="http://schemas.openxmlformats.org/markup-compatibility/2006">
-  <p:cSld>
-    <p:spTree>
-      <p:nvGrpSpPr>
-        <p:cNvPr id="1" name=""/>
-        <p:cNvGrpSpPr/>
-        <p:nvPr/>
-      </p:nvGrpSpPr>
-      <p:grpSpPr>
-        <a:xfrm>
-          <a:off x="0" y="0"/>
-          <a:ext cx="0" cy="0"/>
-          <a:chOff x="0" y="0"/>
-          <a:chExt cx="0" cy="0"/>
-        </a:xfrm>
-      </p:grpSpPr>
-      <p:sp>
-        <p:nvSpPr>
-          <p:cNvPr id="72" name="PlaceHolder 1"/>
-          <p:cNvSpPr>
-            <a:spLocks noGrp="1"/>
-          </p:cNvSpPr>
-          <p:nvPr>
-            <p:ph/>
-          </p:nvPr>
-        </p:nvSpPr>
-        <p:spPr>
-          <a:xfrm>
-            <a:off x="588240" y="1299960"/>
-            <a:ext cx="8390880" cy="4192200"/>
-          </a:xfrm>
-          <a:prstGeom prst="rect">
-            <a:avLst/>
-          </a:prstGeom>
-          <a:noFill/>
-          <a:ln w="0">
-            <a:noFill/>
-          </a:ln>
-        </p:spPr>
-        <p:txBody>
-          <a:bodyPr lIns="0" rIns="0" tIns="0" bIns="0" anchor="t">
-            <a:normAutofit/>
-          </a:bodyPr>
-          <a:p>
-            <a:pPr marL="228600" indent="-228600" defTabSz="914400">
-              <a:lnSpc>
-                <a:spcPct val="90000"/>
-              </a:lnSpc>
-              <a:spcBef>
-                <a:spcPts val="1199"/>
-              </a:spcBef>
-              <a:buClr>
-                <a:srgbClr val="000000"/>
-              </a:buClr>
-              <a:buFont typeface="Arial"/>
-              <a:buChar char="•"/>
-            </a:pPr>
-            <a:r>
-              <a:rPr b="0" lang="en-US" sz="1800" spc="-1" strike="noStrike">
-                <a:solidFill>
-                  <a:schemeClr val="dk1"/>
-                </a:solidFill>
-                <a:latin typeface="Arial"/>
-                <a:ea typeface="DejaVu Sans"/>
-              </a:rPr>
-              <a:t>XML Job Files &lt; v2.4 are no longer supported</a:t>
-            </a:r>
-            <a:endParaRPr b="0" lang="en-US" sz="1800" spc="-1" strike="noStrike">
-              <a:solidFill>
-                <a:srgbClr val="000000"/>
-              </a:solidFill>
-              <a:latin typeface="Arial"/>
-            </a:endParaRPr>
-          </a:p>
-          <a:p>
-            <a:pPr marL="228600" indent="-228600" defTabSz="914400">
-              <a:lnSpc>
-                <a:spcPct val="90000"/>
-              </a:lnSpc>
-              <a:spcBef>
-                <a:spcPts val="1199"/>
-              </a:spcBef>
-              <a:buClr>
-                <a:srgbClr val="000000"/>
-              </a:buClr>
-              <a:buFont typeface="Arial"/>
-              <a:buChar char="•"/>
-            </a:pPr>
-            <a:r>
-              <a:rPr b="0" lang="en-US" sz="1800" spc="-1" strike="noStrike">
-                <a:solidFill>
-                  <a:schemeClr val="dk1"/>
-                </a:solidFill>
-                <a:latin typeface="Arial"/>
-                <a:ea typeface="DejaVu Sans"/>
-              </a:rPr>
-              <a:t>Dropped support for .NET Framework 4.5 (EOL 04/2022)</a:t>
-            </a:r>
-            <a:endParaRPr b="0" lang="en-US" sz="1800" spc="-1" strike="noStrike">
-              <a:solidFill>
-                <a:srgbClr val="000000"/>
-              </a:solidFill>
-              <a:latin typeface="Arial"/>
-            </a:endParaRPr>
-          </a:p>
-          <a:p>
-            <a:pPr indent="0" defTabSz="914400">
-              <a:lnSpc>
-                <a:spcPct val="90000"/>
-              </a:lnSpc>
-              <a:spcBef>
-                <a:spcPts val="1199"/>
-              </a:spcBef>
-              <a:buNone/>
-              <a:tabLst>
-                <a:tab algn="l" pos="0"/>
-              </a:tabLst>
-            </a:pPr>
-            <a:endParaRPr b="0" lang="en-US" sz="1800" spc="-1" strike="noStrike">
-              <a:solidFill>
-                <a:srgbClr val="000000"/>
-              </a:solidFill>
-              <a:latin typeface="Arial"/>
-            </a:endParaRPr>
-          </a:p>
-        </p:txBody>
-      </p:sp>
-      <p:sp>
-        <p:nvSpPr>
-          <p:cNvPr id="73" name="PlaceHolder 2"/>
-          <p:cNvSpPr>
-            <a:spLocks noGrp="1"/>
-          </p:cNvSpPr>
-          <p:nvPr>
-            <p:ph type="title"/>
-          </p:nvPr>
-        </p:nvSpPr>
-        <p:spPr>
-          <a:xfrm>
-            <a:off x="588240" y="453600"/>
-            <a:ext cx="8225640" cy="475200"/>
-          </a:xfrm>
-          <a:prstGeom prst="rect">
-            <a:avLst/>
-          </a:prstGeom>
-          <a:noFill/>
-          <a:ln w="0">
-            <a:noFill/>
-          </a:ln>
-        </p:spPr>
-        <p:txBody>
-          <a:bodyPr lIns="0" rIns="0" tIns="0" bIns="0" anchor="ctr">
-            <a:noAutofit/>
-          </a:bodyPr>
-          <a:p>
-            <a:pPr indent="0" defTabSz="914400">
-              <a:lnSpc>
-                <a:spcPct val="90000"/>
-              </a:lnSpc>
-              <a:buNone/>
-              <a:tabLst>
-                <a:tab algn="l" pos="0"/>
-              </a:tabLst>
-            </a:pPr>
-            <a:r>
-              <a:rPr b="1" lang="en-GB" sz="2400" spc="-1" strike="noStrike">
-                <a:solidFill>
-                  <a:srgbClr val="990000"/>
-                </a:solidFill>
-                <a:latin typeface="Arial"/>
-                <a:ea typeface="DejaVu Sans"/>
-              </a:rPr>
-              <a:t>Changes</a:t>
-            </a:r>
-            <a:endParaRPr b="0" lang="en-US" sz="2400" spc="-1" strike="noStrike">
               <a:solidFill>
                 <a:srgbClr val="000000"/>
               </a:solidFill>
@@ -8963,13 +9592,124 @@
             <a:spLocks noGrp="1"/>
           </p:cNvSpPr>
           <p:nvPr>
+            <p:ph/>
+          </p:nvPr>
+        </p:nvSpPr>
+        <p:spPr>
+          <a:xfrm>
+            <a:off x="588240" y="1299960"/>
+            <a:ext cx="8390520" cy="4191840"/>
+          </a:xfrm>
+          <a:prstGeom prst="rect">
+            <a:avLst/>
+          </a:prstGeom>
+          <a:noFill/>
+          <a:ln w="0">
+            <a:noFill/>
+          </a:ln>
+        </p:spPr>
+        <p:txBody>
+          <a:bodyPr lIns="0" rIns="0" tIns="0" bIns="0" anchor="t">
+            <a:normAutofit/>
+          </a:bodyPr>
+          <a:p>
+            <a:pPr marL="228600" indent="-228600" defTabSz="914400">
+              <a:lnSpc>
+                <a:spcPct val="90000"/>
+              </a:lnSpc>
+              <a:spcBef>
+                <a:spcPts val="1199"/>
+              </a:spcBef>
+              <a:buClr>
+                <a:srgbClr val="000000"/>
+              </a:buClr>
+              <a:buFont typeface="Arial"/>
+              <a:buChar char="•"/>
+            </a:pPr>
+            <a:r>
+              <a:rPr b="0" lang="en-US" sz="1800" spc="-1" strike="noStrike">
+                <a:solidFill>
+                  <a:schemeClr val="dk1"/>
+                </a:solidFill>
+                <a:latin typeface="Arial"/>
+                <a:ea typeface="DejaVu Sans"/>
+              </a:rPr>
+              <a:t>XML Job Files &lt; v2.4 are no longer supported</a:t>
+            </a:r>
+            <a:endParaRPr b="0" lang="en-US" sz="1800" spc="-1" strike="noStrike">
+              <a:solidFill>
+                <a:srgbClr val="000000"/>
+              </a:solidFill>
+              <a:latin typeface="Arial"/>
+            </a:endParaRPr>
+          </a:p>
+          <a:p>
+            <a:pPr marL="228600" indent="-228600" defTabSz="914400">
+              <a:lnSpc>
+                <a:spcPct val="90000"/>
+              </a:lnSpc>
+              <a:spcBef>
+                <a:spcPts val="1199"/>
+              </a:spcBef>
+              <a:buClr>
+                <a:srgbClr val="000000"/>
+              </a:buClr>
+              <a:buFont typeface="Arial"/>
+              <a:buChar char="•"/>
+            </a:pPr>
+            <a:r>
+              <a:rPr b="0" lang="en-US" sz="1800" spc="-1" strike="noStrike">
+                <a:solidFill>
+                  <a:schemeClr val="dk1"/>
+                </a:solidFill>
+                <a:latin typeface="Arial"/>
+                <a:ea typeface="DejaVu Sans"/>
+              </a:rPr>
+              <a:t>Dropped support for .NET Framework 4.5 (EOL 04/2022)</a:t>
+            </a:r>
+            <a:endParaRPr b="0" lang="en-US" sz="1800" spc="-1" strike="noStrike">
+              <a:solidFill>
+                <a:srgbClr val="000000"/>
+              </a:solidFill>
+              <a:latin typeface="Arial"/>
+            </a:endParaRPr>
+          </a:p>
+          <a:p>
+            <a:pPr indent="0" defTabSz="914400">
+              <a:lnSpc>
+                <a:spcPct val="90000"/>
+              </a:lnSpc>
+              <a:spcBef>
+                <a:spcPts val="1199"/>
+              </a:spcBef>
+              <a:buNone/>
+              <a:tabLst>
+                <a:tab algn="l" pos="0"/>
+              </a:tabLst>
+            </a:pPr>
+            <a:endParaRPr b="0" lang="en-US" sz="1800" spc="-1" strike="noStrike">
+              <a:solidFill>
+                <a:srgbClr val="000000"/>
+              </a:solidFill>
+              <a:latin typeface="Arial"/>
+            </a:endParaRPr>
+          </a:p>
+        </p:txBody>
+      </p:sp>
+      <p:sp>
+        <p:nvSpPr>
+          <p:cNvPr id="75" name="PlaceHolder 2"/>
+          <p:cNvSpPr>
+            <a:spLocks noGrp="1"/>
+          </p:cNvSpPr>
+          <p:nvPr>
             <p:ph type="title"/>
           </p:nvPr>
         </p:nvSpPr>
         <p:spPr>
           <a:xfrm>
             <a:off x="588240" y="453600"/>
-            <a:ext cx="8225640" cy="1125000"/>
+            <a:ext cx="8225280" cy="474840"/>
           </a:xfrm>
           <a:prstGeom prst="rect">
             <a:avLst/>
@@ -8994,236 +9734,16 @@
               </a:tabLst>
             </a:pPr>
             <a:r>
-              <a:rPr b="1" lang="en-US" sz="2400" spc="-1" strike="noStrike">
+              <a:rPr b="1" lang="en-GB" sz="2400" spc="-1" strike="noStrike">
                 <a:solidFill>
                   <a:srgbClr val="990000"/>
                 </a:solidFill>
                 <a:latin typeface="Arial"/>
                 <a:ea typeface="DejaVu Sans"/>
               </a:rPr>
-              <a:t>Implementation of Declaration Mode for xEV-Vehicles</a:t>
-            </a:r>
-            <a:br>
-              <a:rPr sz="2400"/>
-            </a:br>
+              <a:t>Changes</a:t>
+            </a:r>
             <a:endParaRPr b="0" lang="en-US" sz="2400" spc="-1" strike="noStrike">
-              <a:solidFill>
-                <a:srgbClr val="000000"/>
-              </a:solidFill>
-              <a:latin typeface="Arial"/>
-            </a:endParaRPr>
-          </a:p>
-        </p:txBody>
-      </p:sp>
-      <p:sp>
-        <p:nvSpPr>
-          <p:cNvPr id="75" name="Textfeld 1"/>
-          <p:cNvSpPr/>
-          <p:nvPr/>
-        </p:nvSpPr>
-        <p:spPr>
-          <a:xfrm>
-            <a:off x="588240" y="1210680"/>
-            <a:ext cx="7963920" cy="3350520"/>
-          </a:xfrm>
-          <a:prstGeom prst="rect">
-            <a:avLst/>
-          </a:prstGeom>
-          <a:noFill/>
-          <a:ln w="0">
-            <a:noFill/>
-          </a:ln>
-        </p:spPr>
-        <p:style>
-          <a:lnRef idx="0"/>
-          <a:fillRef idx="0"/>
-          <a:effectRef idx="0"/>
-          <a:fontRef idx="minor"/>
-        </p:style>
-        <p:txBody>
-          <a:bodyPr lIns="90000" rIns="90000" tIns="45000" bIns="45000" anchor="t">
-            <a:spAutoFit/>
-          </a:bodyPr>
-          <a:p>
-            <a:pPr marL="343080" indent="-343080" defTabSz="914400">
-              <a:lnSpc>
-                <a:spcPct val="100000"/>
-              </a:lnSpc>
-              <a:spcBef>
-                <a:spcPts val="1199"/>
-              </a:spcBef>
-              <a:buClr>
-                <a:srgbClr val="000000"/>
-              </a:buClr>
-              <a:buFont typeface="Arial"/>
-              <a:buChar char="•"/>
-            </a:pPr>
-            <a:r>
-              <a:rPr b="0" lang="en-GB" sz="2000" spc="-1" strike="noStrike">
-                <a:solidFill>
-                  <a:schemeClr val="dk1"/>
-                </a:solidFill>
-                <a:latin typeface="Arial"/>
-                <a:ea typeface="DejaVu Sans"/>
-              </a:rPr>
-              <a:t>Generic auxiliary parametrisation</a:t>
-            </a:r>
-            <a:endParaRPr b="0" lang="en-US" sz="2000" spc="-1" strike="noStrike">
-              <a:solidFill>
-                <a:srgbClr val="000000"/>
-              </a:solidFill>
-              <a:latin typeface="Arial"/>
-            </a:endParaRPr>
-          </a:p>
-          <a:p>
-            <a:pPr marL="343080" indent="-343080" defTabSz="914400">
-              <a:lnSpc>
-                <a:spcPct val="100000"/>
-              </a:lnSpc>
-              <a:spcBef>
-                <a:spcPts val="1199"/>
-              </a:spcBef>
-              <a:buClr>
-                <a:srgbClr val="000000"/>
-              </a:buClr>
-              <a:buFont typeface="Arial"/>
-              <a:buChar char="•"/>
-            </a:pPr>
-            <a:r>
-              <a:rPr b="0" lang="en-GB" sz="2000" spc="-1" strike="noStrike">
-                <a:solidFill>
-                  <a:schemeClr val="dk1"/>
-                </a:solidFill>
-                <a:latin typeface="Arial"/>
-                <a:ea typeface="DejaVu Sans"/>
-              </a:rPr>
-              <a:t>Generic parametrisation of usable SOC range</a:t>
-            </a:r>
-            <a:endParaRPr b="0" lang="en-US" sz="2000" spc="-1" strike="noStrike">
-              <a:solidFill>
-                <a:srgbClr val="000000"/>
-              </a:solidFill>
-              <a:latin typeface="Arial"/>
-            </a:endParaRPr>
-          </a:p>
-          <a:p>
-            <a:pPr marL="343080" indent="-343080" defTabSz="914400">
-              <a:lnSpc>
-                <a:spcPct val="100000"/>
-              </a:lnSpc>
-              <a:spcBef>
-                <a:spcPts val="1199"/>
-              </a:spcBef>
-              <a:buClr>
-                <a:srgbClr val="000000"/>
-              </a:buClr>
-              <a:buFont typeface="Arial"/>
-              <a:buChar char="•"/>
-            </a:pPr>
-            <a:r>
-              <a:rPr b="0" lang="en-GB" sz="2000" spc="-1" strike="noStrike">
-                <a:solidFill>
-                  <a:schemeClr val="dk1"/>
-                </a:solidFill>
-                <a:latin typeface="Arial"/>
-                <a:ea typeface="DejaVu Sans"/>
-              </a:rPr>
-              <a:t>Generic parametrisation of Serial/Parallel Hybrid Strategy parameters</a:t>
-            </a:r>
-            <a:endParaRPr b="0" lang="en-US" sz="2000" spc="-1" strike="noStrike">
-              <a:solidFill>
-                <a:srgbClr val="000000"/>
-              </a:solidFill>
-              <a:latin typeface="Arial"/>
-            </a:endParaRPr>
-          </a:p>
-          <a:p>
-            <a:pPr marL="343080" indent="-343080" defTabSz="914400">
-              <a:lnSpc>
-                <a:spcPct val="100000"/>
-              </a:lnSpc>
-              <a:spcBef>
-                <a:spcPts val="1199"/>
-              </a:spcBef>
-              <a:buClr>
-                <a:srgbClr val="000000"/>
-              </a:buClr>
-              <a:buFont typeface="Arial"/>
-              <a:buChar char="•"/>
-            </a:pPr>
-            <a:r>
-              <a:rPr b="0" lang="en-GB" sz="2000" spc="-1" strike="noStrike">
-                <a:solidFill>
-                  <a:schemeClr val="dk1"/>
-                </a:solidFill>
-                <a:latin typeface="Arial"/>
-                <a:ea typeface="DejaVu Sans"/>
-              </a:rPr>
-              <a:t>Automated simulation of OVC-HEV</a:t>
-            </a:r>
-            <a:endParaRPr b="0" lang="en-US" sz="2000" spc="-1" strike="noStrike">
-              <a:solidFill>
-                <a:srgbClr val="000000"/>
-              </a:solidFill>
-              <a:latin typeface="Arial"/>
-            </a:endParaRPr>
-          </a:p>
-          <a:p>
-            <a:pPr lvl="1" marL="743040" indent="-285840" defTabSz="914400">
-              <a:lnSpc>
-                <a:spcPct val="100000"/>
-              </a:lnSpc>
-              <a:spcBef>
-                <a:spcPts val="1199"/>
-              </a:spcBef>
-              <a:buClr>
-                <a:srgbClr val="000000"/>
-              </a:buClr>
-              <a:buFont typeface="Arial"/>
-              <a:buChar char="•"/>
-            </a:pPr>
-            <a:r>
-              <a:rPr b="0" lang="en-GB" sz="1600" spc="-1" strike="noStrike">
-                <a:solidFill>
-                  <a:schemeClr val="dk1"/>
-                </a:solidFill>
-                <a:latin typeface="Arial"/>
-                <a:ea typeface="DejaVu Sans"/>
-              </a:rPr>
-              <a:t>Charge depleting mode (CD): The propulsion energy is provided by the electric storage only</a:t>
-            </a:r>
-            <a:endParaRPr b="0" lang="en-US" sz="1600" spc="-1" strike="noStrike">
-              <a:solidFill>
-                <a:srgbClr val="000000"/>
-              </a:solidFill>
-              <a:latin typeface="Arial"/>
-            </a:endParaRPr>
-          </a:p>
-          <a:p>
-            <a:pPr lvl="1" marL="743040" indent="-285840" defTabSz="914400">
-              <a:lnSpc>
-                <a:spcPct val="100000"/>
-              </a:lnSpc>
-              <a:spcBef>
-                <a:spcPts val="1199"/>
-              </a:spcBef>
-              <a:buClr>
-                <a:srgbClr val="000000"/>
-              </a:buClr>
-              <a:buFont typeface="Arial"/>
-              <a:buChar char="•"/>
-            </a:pPr>
-            <a:r>
-              <a:rPr b="0" lang="en-GB" sz="1600" spc="-1" strike="noStrike">
-                <a:solidFill>
-                  <a:schemeClr val="dk1"/>
-                </a:solidFill>
-                <a:latin typeface="Arial"/>
-                <a:ea typeface="DejaVu Sans"/>
-              </a:rPr>
-              <a:t>Charge sustaining mode (CS): The propulsion energy is provided by the fuel storage</a:t>
-            </a:r>
-            <a:endParaRPr b="0" lang="en-US" sz="1600" spc="-1" strike="noStrike">
               <a:solidFill>
                 <a:srgbClr val="000000"/>
               </a:solidFill>
@@ -9275,7 +9795,7 @@
         <p:spPr>
           <a:xfrm>
             <a:off x="588240" y="453600"/>
-            <a:ext cx="8225640" cy="1125000"/>
+            <a:ext cx="8225280" cy="1124640"/>
           </a:xfrm>
           <a:prstGeom prst="rect">
             <a:avLst/>
@@ -9307,7 +9827,7 @@
                 <a:latin typeface="Arial"/>
                 <a:ea typeface="DejaVu Sans"/>
               </a:rPr>
-              <a:t>Implementation of Declaration Mode for xEV-Lorries</a:t>
+              <a:t>Implementation of Declaration Mode for xEV-Vehicles</a:t>
             </a:r>
             <a:br>
               <a:rPr sz="2400"/>
@@ -9323,14 +9843,320 @@
       </p:sp>
       <p:sp>
         <p:nvSpPr>
-          <p:cNvPr id="77" name="Inhaltsplatzhalter 5"/>
+          <p:cNvPr id="77" name="Textfeld 1"/>
+          <p:cNvSpPr/>
+          <p:nvPr/>
+        </p:nvSpPr>
+        <p:spPr>
+          <a:xfrm>
+            <a:off x="588240" y="1210680"/>
+            <a:ext cx="7963560" cy="3350520"/>
+          </a:xfrm>
+          <a:prstGeom prst="rect">
+            <a:avLst/>
+          </a:prstGeom>
+          <a:noFill/>
+          <a:ln w="0">
+            <a:noFill/>
+          </a:ln>
+        </p:spPr>
+        <p:style>
+          <a:lnRef idx="0"/>
+          <a:fillRef idx="0"/>
+          <a:effectRef idx="0"/>
+          <a:fontRef idx="minor"/>
+        </p:style>
+        <p:txBody>
+          <a:bodyPr lIns="90000" rIns="90000" tIns="45000" bIns="45000" anchor="t">
+            <a:spAutoFit/>
+          </a:bodyPr>
+          <a:p>
+            <a:pPr marL="343080" indent="-343080" defTabSz="914400">
+              <a:lnSpc>
+                <a:spcPct val="100000"/>
+              </a:lnSpc>
+              <a:spcBef>
+                <a:spcPts val="1199"/>
+              </a:spcBef>
+              <a:buClr>
+                <a:srgbClr val="000000"/>
+              </a:buClr>
+              <a:buFont typeface="Arial"/>
+              <a:buChar char="•"/>
+            </a:pPr>
+            <a:r>
+              <a:rPr b="0" lang="en-GB" sz="2000" spc="-1" strike="noStrike">
+                <a:solidFill>
+                  <a:schemeClr val="dk1"/>
+                </a:solidFill>
+                <a:latin typeface="Arial"/>
+                <a:ea typeface="DejaVu Sans"/>
+              </a:rPr>
+              <a:t>Generic auxiliary parametrisation</a:t>
+            </a:r>
+            <a:endParaRPr b="0" lang="en-US" sz="2000" spc="-1" strike="noStrike">
+              <a:solidFill>
+                <a:srgbClr val="000000"/>
+              </a:solidFill>
+              <a:latin typeface="Arial"/>
+            </a:endParaRPr>
+          </a:p>
+          <a:p>
+            <a:pPr marL="343080" indent="-343080" defTabSz="914400">
+              <a:lnSpc>
+                <a:spcPct val="100000"/>
+              </a:lnSpc>
+              <a:spcBef>
+                <a:spcPts val="1199"/>
+              </a:spcBef>
+              <a:buClr>
+                <a:srgbClr val="000000"/>
+              </a:buClr>
+              <a:buFont typeface="Arial"/>
+              <a:buChar char="•"/>
+            </a:pPr>
+            <a:r>
+              <a:rPr b="0" lang="en-GB" sz="2000" spc="-1" strike="noStrike">
+                <a:solidFill>
+                  <a:schemeClr val="dk1"/>
+                </a:solidFill>
+                <a:latin typeface="Arial"/>
+                <a:ea typeface="DejaVu Sans"/>
+              </a:rPr>
+              <a:t>Generic parametrisation of usable SOC range</a:t>
+            </a:r>
+            <a:endParaRPr b="0" lang="en-US" sz="2000" spc="-1" strike="noStrike">
+              <a:solidFill>
+                <a:srgbClr val="000000"/>
+              </a:solidFill>
+              <a:latin typeface="Arial"/>
+            </a:endParaRPr>
+          </a:p>
+          <a:p>
+            <a:pPr marL="343080" indent="-343080" defTabSz="914400">
+              <a:lnSpc>
+                <a:spcPct val="100000"/>
+              </a:lnSpc>
+              <a:spcBef>
+                <a:spcPts val="1199"/>
+              </a:spcBef>
+              <a:buClr>
+                <a:srgbClr val="000000"/>
+              </a:buClr>
+              <a:buFont typeface="Arial"/>
+              <a:buChar char="•"/>
+            </a:pPr>
+            <a:r>
+              <a:rPr b="0" lang="en-GB" sz="2000" spc="-1" strike="noStrike">
+                <a:solidFill>
+                  <a:schemeClr val="dk1"/>
+                </a:solidFill>
+                <a:latin typeface="Arial"/>
+                <a:ea typeface="DejaVu Sans"/>
+              </a:rPr>
+              <a:t>Generic parametrisation of Serial/Parallel Hybrid Strategy parameters</a:t>
+            </a:r>
+            <a:endParaRPr b="0" lang="en-US" sz="2000" spc="-1" strike="noStrike">
+              <a:solidFill>
+                <a:srgbClr val="000000"/>
+              </a:solidFill>
+              <a:latin typeface="Arial"/>
+            </a:endParaRPr>
+          </a:p>
+          <a:p>
+            <a:pPr marL="343080" indent="-343080" defTabSz="914400">
+              <a:lnSpc>
+                <a:spcPct val="100000"/>
+              </a:lnSpc>
+              <a:spcBef>
+                <a:spcPts val="1199"/>
+              </a:spcBef>
+              <a:buClr>
+                <a:srgbClr val="000000"/>
+              </a:buClr>
+              <a:buFont typeface="Arial"/>
+              <a:buChar char="•"/>
+            </a:pPr>
+            <a:r>
+              <a:rPr b="0" lang="en-GB" sz="2000" spc="-1" strike="noStrike">
+                <a:solidFill>
+                  <a:schemeClr val="dk1"/>
+                </a:solidFill>
+                <a:latin typeface="Arial"/>
+                <a:ea typeface="DejaVu Sans"/>
+              </a:rPr>
+              <a:t>Automated simulation of OVC-HEV</a:t>
+            </a:r>
+            <a:endParaRPr b="0" lang="en-US" sz="2000" spc="-1" strike="noStrike">
+              <a:solidFill>
+                <a:srgbClr val="000000"/>
+              </a:solidFill>
+              <a:latin typeface="Arial"/>
+            </a:endParaRPr>
+          </a:p>
+          <a:p>
+            <a:pPr lvl="1" marL="743040" indent="-285840" defTabSz="914400">
+              <a:lnSpc>
+                <a:spcPct val="100000"/>
+              </a:lnSpc>
+              <a:spcBef>
+                <a:spcPts val="1199"/>
+              </a:spcBef>
+              <a:buClr>
+                <a:srgbClr val="000000"/>
+              </a:buClr>
+              <a:buFont typeface="Arial"/>
+              <a:buChar char="•"/>
+            </a:pPr>
+            <a:r>
+              <a:rPr b="0" lang="en-GB" sz="1600" spc="-1" strike="noStrike">
+                <a:solidFill>
+                  <a:schemeClr val="dk1"/>
+                </a:solidFill>
+                <a:latin typeface="Arial"/>
+                <a:ea typeface="DejaVu Sans"/>
+              </a:rPr>
+              <a:t>Charge depleting mode (CD): The propulsion energy is provided by the electric storage only</a:t>
+            </a:r>
+            <a:endParaRPr b="0" lang="en-US" sz="1600" spc="-1" strike="noStrike">
+              <a:solidFill>
+                <a:srgbClr val="000000"/>
+              </a:solidFill>
+              <a:latin typeface="Arial"/>
+            </a:endParaRPr>
+          </a:p>
+          <a:p>
+            <a:pPr lvl="1" marL="743040" indent="-285840" defTabSz="914400">
+              <a:lnSpc>
+                <a:spcPct val="100000"/>
+              </a:lnSpc>
+              <a:spcBef>
+                <a:spcPts val="1199"/>
+              </a:spcBef>
+              <a:buClr>
+                <a:srgbClr val="000000"/>
+              </a:buClr>
+              <a:buFont typeface="Arial"/>
+              <a:buChar char="•"/>
+            </a:pPr>
+            <a:r>
+              <a:rPr b="0" lang="en-GB" sz="1600" spc="-1" strike="noStrike">
+                <a:solidFill>
+                  <a:schemeClr val="dk1"/>
+                </a:solidFill>
+                <a:latin typeface="Arial"/>
+                <a:ea typeface="DejaVu Sans"/>
+              </a:rPr>
+              <a:t>Charge sustaining mode (CS): The propulsion energy is provided by the fuel storage</a:t>
+            </a:r>
+            <a:endParaRPr b="0" lang="en-US" sz="1600" spc="-1" strike="noStrike">
+              <a:solidFill>
+                <a:srgbClr val="000000"/>
+              </a:solidFill>
+              <a:latin typeface="Arial"/>
+            </a:endParaRPr>
+          </a:p>
+        </p:txBody>
+      </p:sp>
+    </p:spTree>
+  </p:cSld>
+  <mc:AlternateContent>
+    <mc:Choice Requires="p14">
+      <p:transition spd="slow" p14:dur="2000"/>
+    </mc:Choice>
+    <mc:Fallback>
+      <p:transition spd="slow"/>
+    </mc:Fallback>
+  </mc:AlternateContent>
+</p:sld>
+</file>
+
+<file path=ppt/slides/slide19.xml><?xml version="1.0" encoding="utf-8"?>
+<p:sld xmlns:a="http://schemas.openxmlformats.org/drawingml/2006/main" xmlns:p="http://schemas.openxmlformats.org/presentationml/2006/main" xmlns:r="http://schemas.openxmlformats.org/officeDocument/2006/relationships" xmlns:p14="http://schemas.microsoft.com/office/powerpoint/2010/main" xmlns:p15="http://schemas.microsoft.com/office/powerpoint/2012/main" xmlns:mc="http://schemas.openxmlformats.org/markup-compatibility/2006">
+  <p:cSld>
+    <p:spTree>
+      <p:nvGrpSpPr>
+        <p:cNvPr id="1" name=""/>
+        <p:cNvGrpSpPr/>
+        <p:nvPr/>
+      </p:nvGrpSpPr>
+      <p:grpSpPr>
+        <a:xfrm>
+          <a:off x="0" y="0"/>
+          <a:ext cx="0" cy="0"/>
+          <a:chOff x="0" y="0"/>
+          <a:chExt cx="0" cy="0"/>
+        </a:xfrm>
+      </p:grpSpPr>
+      <p:sp>
+        <p:nvSpPr>
+          <p:cNvPr id="78" name="PlaceHolder 1"/>
+          <p:cNvSpPr>
+            <a:spLocks noGrp="1"/>
+          </p:cNvSpPr>
+          <p:nvPr>
+            <p:ph type="title"/>
+          </p:nvPr>
+        </p:nvSpPr>
+        <p:spPr>
+          <a:xfrm>
+            <a:off x="588240" y="453600"/>
+            <a:ext cx="8225280" cy="1124640"/>
+          </a:xfrm>
+          <a:prstGeom prst="rect">
+            <a:avLst/>
+          </a:prstGeom>
+          <a:noFill/>
+          <a:ln w="0">
+            <a:noFill/>
+          </a:ln>
+        </p:spPr>
+        <p:txBody>
+          <a:bodyPr lIns="0" rIns="0" tIns="0" bIns="0" anchor="ctr">
+            <a:noAutofit/>
+          </a:bodyPr>
+          <a:p>
+            <a:pPr indent="0" defTabSz="914400">
+              <a:lnSpc>
+                <a:spcPct val="90000"/>
+              </a:lnSpc>
+              <a:buNone/>
+              <a:tabLst>
+                <a:tab algn="l" pos="0"/>
+              </a:tabLst>
+            </a:pPr>
+            <a:r>
+              <a:rPr b="1" lang="en-US" sz="2400" spc="-1" strike="noStrike">
+                <a:solidFill>
+                  <a:srgbClr val="990000"/>
+                </a:solidFill>
+                <a:latin typeface="Arial"/>
+                <a:ea typeface="DejaVu Sans"/>
+              </a:rPr>
+              <a:t>Implementation of Declaration Mode for xEV-Lorries</a:t>
+            </a:r>
+            <a:br>
+              <a:rPr sz="2400"/>
+            </a:br>
+            <a:endParaRPr b="0" lang="en-US" sz="2400" spc="-1" strike="noStrike">
+              <a:solidFill>
+                <a:srgbClr val="000000"/>
+              </a:solidFill>
+              <a:latin typeface="Arial"/>
+            </a:endParaRPr>
+          </a:p>
+        </p:txBody>
+      </p:sp>
+      <p:sp>
+        <p:nvSpPr>
+          <p:cNvPr id="79" name="Inhaltsplatzhalter 5"/>
           <p:cNvSpPr/>
           <p:nvPr/>
         </p:nvSpPr>
         <p:spPr>
           <a:xfrm>
             <a:off x="749520" y="1085040"/>
-            <a:ext cx="8390880" cy="5124960"/>
+            <a:ext cx="8390520" cy="5124600"/>
           </a:xfrm>
           <a:prstGeom prst="rect">
             <a:avLst/>
@@ -9448,14 +10274,14 @@
       </p:sp>
       <p:sp>
         <p:nvSpPr>
-          <p:cNvPr id="78" name="Titel 4"/>
+          <p:cNvPr id="80" name="Titel 4"/>
           <p:cNvSpPr/>
           <p:nvPr/>
         </p:nvSpPr>
         <p:spPr>
           <a:xfrm>
             <a:off x="588240" y="2622240"/>
-            <a:ext cx="8225640" cy="537840"/>
+            <a:ext cx="8225280" cy="537480"/>
           </a:xfrm>
           <a:prstGeom prst="rect">
             <a:avLst/>
@@ -9505,7 +10331,7 @@
       </p:sp>
       <p:sp>
         <p:nvSpPr>
-          <p:cNvPr id="79" name="PlaceHolder 2"/>
+          <p:cNvPr id="81" name="PlaceHolder 2"/>
           <p:cNvSpPr>
             <a:spLocks noGrp="1"/>
           </p:cNvSpPr>
@@ -9516,7 +10342,7 @@
         <p:spPr>
           <a:xfrm>
             <a:off x="588240" y="2861280"/>
-            <a:ext cx="8390880" cy="1381320"/>
+            <a:ext cx="8390520" cy="1380960"/>
           </a:xfrm>
           <a:prstGeom prst="rect">
             <a:avLst/>
@@ -9723,7 +10549,7 @@
         <p:spPr>
           <a:xfrm>
             <a:off x="468360" y="476640"/>
-            <a:ext cx="8214120" cy="676800"/>
+            <a:ext cx="8213760" cy="676440"/>
           </a:xfrm>
           <a:prstGeom prst="rect">
             <a:avLst/>
@@ -9755,7 +10581,7 @@
                 <a:latin typeface="Arial"/>
                 <a:ea typeface="DejaVu Sans"/>
               </a:rPr>
-              <a:t>Vecto 4.1.1.3413 OFFICIAL RELEASE</a:t>
+              <a:t>Vecto 4.1.3.3415 OFFICIAL RELEASE</a:t>
             </a:r>
             <a:br>
               <a:rPr sz="2400"/>
@@ -9768,7 +10594,7 @@
                 <a:latin typeface="Arial"/>
                 <a:ea typeface="DejaVu Sans"/>
               </a:rPr>
-              <a:t>06.05.2024</a:t>
+              <a:t>08.05.2024</a:t>
             </a:r>
             <a:endParaRPr b="0" lang="en-US" sz="1600" spc="-1" strike="noStrike">
               <a:solidFill>
@@ -9792,7 +10618,7 @@
         <p:spPr>
           <a:xfrm>
             <a:off x="323640" y="1639080"/>
-            <a:ext cx="8492760" cy="4449600"/>
+            <a:ext cx="8492400" cy="4449240"/>
           </a:xfrm>
           <a:prstGeom prst="rect">
             <a:avLst/>
@@ -9851,7 +10677,7 @@
                 <a:latin typeface="Arial"/>
                 <a:ea typeface="DejaVu Sans"/>
               </a:rPr>
-              <a:t>Bugfixes </a:t>
+              <a:t>Hotfixes </a:t>
             </a:r>
             <a:endParaRPr b="0" lang="en-US" sz="1600" spc="-1" strike="noStrike">
               <a:solidFill>
@@ -9885,143 +10711,7 @@
                 <a:latin typeface="Arial"/>
                 <a:ea typeface="DejaVu Sans"/>
               </a:rPr>
-              <a:t>CodeEU-615: Multistep freezes after loading VIF chassis</a:t>
-            </a:r>
-            <a:endParaRPr b="0" lang="en-US" sz="1200" spc="-1" strike="noStrike">
-              <a:solidFill>
-                <a:srgbClr val="000000"/>
-              </a:solidFill>
-              <a:latin typeface="Arial"/>
-            </a:endParaRPr>
-          </a:p>
-          <a:p>
-            <a:pPr lvl="1" marL="800280" indent="-343080" defTabSz="914400">
-              <a:lnSpc>
-                <a:spcPct val="100000"/>
-              </a:lnSpc>
-              <a:spcBef>
-                <a:spcPts val="320"/>
-              </a:spcBef>
-              <a:buClr>
-                <a:srgbClr val="000000"/>
-              </a:buClr>
-              <a:buFont typeface="Symbol"/>
-              <a:buChar char=""/>
-              <a:tabLst>
-                <a:tab algn="l" pos="1886040"/>
-              </a:tabLst>
-            </a:pPr>
-            <a:r>
-              <a:rPr b="0" lang="en-US" sz="1200" spc="-1" strike="noStrike">
-                <a:solidFill>
-                  <a:srgbClr val="000000"/>
-                </a:solidFill>
-                <a:latin typeface="Arial"/>
-                <a:ea typeface="DejaVu Sans"/>
-              </a:rPr>
-              <a:t>CodeEU-616: Multistep tool freezes</a:t>
-            </a:r>
-            <a:endParaRPr b="0" lang="en-US" sz="1200" spc="-1" strike="noStrike">
-              <a:solidFill>
-                <a:srgbClr val="000000"/>
-              </a:solidFill>
-              <a:latin typeface="Arial"/>
-            </a:endParaRPr>
-          </a:p>
-          <a:p>
-            <a:pPr lvl="1" marL="800280" indent="-343080" defTabSz="914400">
-              <a:lnSpc>
-                <a:spcPct val="100000"/>
-              </a:lnSpc>
-              <a:spcBef>
-                <a:spcPts val="320"/>
-              </a:spcBef>
-              <a:buClr>
-                <a:srgbClr val="000000"/>
-              </a:buClr>
-              <a:buFont typeface="Symbol"/>
-              <a:buChar char=""/>
-              <a:tabLst>
-                <a:tab algn="l" pos="1886040"/>
-              </a:tabLst>
-            </a:pPr>
-            <a:r>
-              <a:rPr b="0" lang="en-US" sz="1200" spc="-1" strike="noStrike">
-                <a:solidFill>
-                  <a:srgbClr val="000000"/>
-                </a:solidFill>
-                <a:latin typeface="Arial"/>
-                <a:ea typeface="DejaVu Sans"/>
-              </a:rPr>
-              <a:t>CodeEU-619: restore wrong exempted techs in XSD for backwards compatibility</a:t>
-            </a:r>
-            <a:endParaRPr b="0" lang="en-US" sz="1200" spc="-1" strike="noStrike">
-              <a:solidFill>
-                <a:srgbClr val="000000"/>
-              </a:solidFill>
-              <a:latin typeface="Arial"/>
-            </a:endParaRPr>
-          </a:p>
-          <a:p>
-            <a:pPr lvl="1" marL="800280" indent="-343080" defTabSz="914400">
-              <a:lnSpc>
-                <a:spcPct val="100000"/>
-              </a:lnSpc>
-              <a:spcBef>
-                <a:spcPts val="320"/>
-              </a:spcBef>
-              <a:buClr>
-                <a:srgbClr val="000000"/>
-              </a:buClr>
-              <a:buFont typeface="Symbol"/>
-              <a:buChar char=""/>
-              <a:tabLst>
-                <a:tab algn="l" pos="1886040"/>
-              </a:tabLst>
-            </a:pPr>
-            <a:r>
-              <a:rPr b="0" lang="en-US" sz="1200" spc="-1" strike="noStrike">
-                <a:solidFill>
-                  <a:srgbClr val="000000"/>
-                </a:solidFill>
-                <a:latin typeface="Arial"/>
-                <a:ea typeface="DejaVu Sans"/>
-              </a:rPr>
-              <a:t>CodeEU-617: Results change depending the time format</a:t>
-            </a:r>
-            <a:endParaRPr b="0" lang="en-US" sz="1200" spc="-1" strike="noStrike">
-              <a:solidFill>
-                <a:srgbClr val="000000"/>
-              </a:solidFill>
-              <a:latin typeface="Arial"/>
-            </a:endParaRPr>
-          </a:p>
-          <a:p>
-            <a:pPr lvl="1" marL="800280" indent="-343080" defTabSz="914400">
-              <a:lnSpc>
-                <a:spcPct val="100000"/>
-              </a:lnSpc>
-              <a:spcBef>
-                <a:spcPts val="320"/>
-              </a:spcBef>
-              <a:buClr>
-                <a:srgbClr val="000000"/>
-              </a:buClr>
-              <a:buFont typeface="Symbol"/>
-              <a:buChar char=""/>
-              <a:tabLst>
-                <a:tab algn="l" pos="1886040"/>
-              </a:tabLst>
-            </a:pPr>
-            <a:r>
-              <a:rPr b="0" lang="en-US" sz="1200" spc="-1" strike="noStrike">
-                <a:solidFill>
-                  <a:srgbClr val="000000"/>
-                </a:solidFill>
-                <a:latin typeface="Arial"/>
-                <a:ea typeface="DejaVu Sans"/>
-              </a:rPr>
-              <a:t>CodeEU-635: Revert multiple summary in CIF</a:t>
+              <a:t>CodeEU-638: Incorrect construction payloads for group 9 non-vocational vehicle</a:t>
             </a:r>
             <a:endParaRPr b="0" lang="en-US" sz="1200" spc="-1" strike="noStrike">
               <a:solidFill>
@@ -10075,7 +10765,7 @@
         <p:spPr>
           <a:xfrm>
             <a:off x="468360" y="476640"/>
-            <a:ext cx="8214120" cy="676800"/>
+            <a:ext cx="8213760" cy="676440"/>
           </a:xfrm>
           <a:prstGeom prst="rect">
             <a:avLst/>
@@ -10107,7 +10797,7 @@
                 <a:latin typeface="Arial"/>
                 <a:ea typeface="DejaVu Sans"/>
               </a:rPr>
-              <a:t>Vecto 4.1.0.3392 RELEASE CANDIDATE</a:t>
+              <a:t>Vecto 4.1.1.3413 OFFICIAL RELEASE</a:t>
             </a:r>
             <a:br>
               <a:rPr sz="2400"/>
@@ -10120,7 +10810,7 @@
                 <a:latin typeface="Arial"/>
                 <a:ea typeface="DejaVu Sans"/>
               </a:rPr>
-              <a:t>15.04.2024</a:t>
+              <a:t>06.05.2024</a:t>
             </a:r>
             <a:endParaRPr b="0" lang="en-US" sz="1600" spc="-1" strike="noStrike">
               <a:solidFill>
@@ -10144,7 +10834,7 @@
         <p:spPr>
           <a:xfrm>
             <a:off x="323640" y="1639080"/>
-            <a:ext cx="8492760" cy="4449600"/>
+            <a:ext cx="8492400" cy="4449240"/>
           </a:xfrm>
           <a:prstGeom prst="rect">
             <a:avLst/>
@@ -10159,6 +10849,26 @@
             <a:noAutofit/>
           </a:bodyPr>
           <a:p>
+            <a:pPr marL="343080" indent="0" defTabSz="914400">
+              <a:lnSpc>
+                <a:spcPct val="100000"/>
+              </a:lnSpc>
+              <a:spcBef>
+                <a:spcPts val="320"/>
+              </a:spcBef>
+              <a:buNone/>
+              <a:tabLst>
+                <a:tab algn="l" pos="0"/>
+              </a:tabLst>
+            </a:pPr>
+            <a:endParaRPr b="0" lang="en-US" sz="1600" spc="-1" strike="noStrike">
+              <a:solidFill>
+                <a:srgbClr val="000000"/>
+              </a:solidFill>
+              <a:latin typeface="Arial"/>
+            </a:endParaRPr>
+          </a:p>
+          <a:p>
             <a:pPr marL="343080" indent="-343080" defTabSz="914400">
               <a:lnSpc>
                 <a:spcPct val="100000"/>
@@ -10183,50 +10893,17 @@
                 <a:latin typeface="Arial"/>
                 <a:ea typeface="DejaVu Sans"/>
               </a:rPr>
-              <a:t>Features</a:t>
-            </a:r>
-            <a:br>
-              <a:rPr sz="1600"/>
-            </a:br>
-            <a:r>
-              <a:rPr b="0" lang="en-US" sz="1200" spc="-1" strike="noStrike">
-                <a:solidFill>
-                  <a:schemeClr val="dk1"/>
-                </a:solidFill>
-                <a:latin typeface="Arial"/>
-                <a:ea typeface="DejaVu Sans"/>
-              </a:rPr>
-              <a:t>CodeEU-577: Add missing mission profiles to vocational and non-vocational</a:t>
-            </a:r>
-            <a:endParaRPr b="0" lang="en-US" sz="1200" spc="-1" strike="noStrike">
-              <a:solidFill>
-                <a:srgbClr val="000000"/>
-              </a:solidFill>
-              <a:latin typeface="Arial"/>
-            </a:endParaRPr>
-          </a:p>
-          <a:p>
-            <a:pPr marL="343080" indent="0" defTabSz="914400">
-              <a:lnSpc>
-                <a:spcPct val="100000"/>
-              </a:lnSpc>
-              <a:spcBef>
-                <a:spcPts val="320"/>
-              </a:spcBef>
-              <a:buNone/>
-              <a:tabLst>
-                <a:tab algn="l" pos="0"/>
-              </a:tabLst>
-            </a:pPr>
-            <a:endParaRPr b="0" lang="en-US" sz="1200" spc="-1" strike="noStrike">
-              <a:solidFill>
-                <a:srgbClr val="000000"/>
-              </a:solidFill>
-              <a:latin typeface="Arial"/>
-            </a:endParaRPr>
-          </a:p>
-          <a:p>
-            <a:pPr marL="343080" indent="-343080" defTabSz="914400">
+              <a:t>Bugfixes </a:t>
+            </a:r>
+            <a:endParaRPr b="0" lang="en-US" sz="1600" spc="-1" strike="noStrike">
+              <a:solidFill>
+                <a:srgbClr val="000000"/>
+              </a:solidFill>
+              <a:latin typeface="Arial"/>
+            </a:endParaRPr>
+          </a:p>
+          <a:p>
+            <a:pPr lvl="1" marL="800280" indent="-343080" defTabSz="914400">
               <a:lnSpc>
                 <a:spcPct val="100000"/>
               </a:lnSpc>
@@ -10243,16 +10920,16 @@
               </a:tabLst>
             </a:pPr>
             <a:r>
-              <a:rPr b="1" lang="en-US" sz="1600" spc="-1" strike="noStrike">
-                <a:solidFill>
-                  <a:srgbClr val="000000"/>
-                </a:solidFill>
-                <a:latin typeface="Arial"/>
-                <a:ea typeface="DejaVu Sans"/>
-              </a:rPr>
-              <a:t>Bugfixes (1/4)</a:t>
-            </a:r>
-            <a:endParaRPr b="0" lang="en-US" sz="1600" spc="-1" strike="noStrike">
+              <a:rPr b="0" lang="en-US" sz="1200" spc="-1" strike="noStrike">
+                <a:solidFill>
+                  <a:srgbClr val="000000"/>
+                </a:solidFill>
+                <a:latin typeface="Arial"/>
+                <a:ea typeface="DejaVu Sans"/>
+              </a:rPr>
+              <a:t>CodeEU-615: Multistep freezes after loading VIF chassis</a:t>
+            </a:r>
+            <a:endParaRPr b="0" lang="en-US" sz="1200" spc="-1" strike="noStrike">
               <a:solidFill>
                 <a:srgbClr val="000000"/>
               </a:solidFill>
@@ -10284,7 +10961,7 @@
                 <a:latin typeface="Arial"/>
                 <a:ea typeface="DejaVu Sans"/>
               </a:rPr>
-              <a:t>CodeEU-331: Gear 1 DrivingActionAccelerate: Fail</a:t>
+              <a:t>CodeEU-616: Multistep tool freezes</a:t>
             </a:r>
             <a:endParaRPr b="0" lang="en-US" sz="1200" spc="-1" strike="noStrike">
               <a:solidFill>
@@ -10318,7 +10995,7 @@
                 <a:latin typeface="Arial"/>
                 <a:ea typeface="DejaVu Sans"/>
               </a:rPr>
-              <a:t>CodeEU-367: Gear 1 DrivingActionAccelerate: Fail</a:t>
+              <a:t>CodeEU-619: restore wrong exempted techs in XSD for backwards compatibility</a:t>
             </a:r>
             <a:endParaRPr b="0" lang="en-US" sz="1200" spc="-1" strike="noStrike">
               <a:solidFill>
@@ -10352,7 +11029,7 @@
                 <a:latin typeface="Arial"/>
                 <a:ea typeface="DejaVu Sans"/>
               </a:rPr>
-              <a:t>CodeEU-372: ADT Error on Bus Category Primary Vehicle Simulation on VECTO</a:t>
+              <a:t>CodeEU-617: Results change depending the time format</a:t>
             </a:r>
             <a:endParaRPr b="0" lang="en-US" sz="1200" spc="-1" strike="noStrike">
               <a:solidFill>
@@ -10386,266 +11063,8 @@
                 <a:latin typeface="Arial"/>
                 <a:ea typeface="DejaVu Sans"/>
               </a:rPr>
-              <a:t>CodeEU-373: ADT Error on Bus Category Primary Vehicle Simulation on VECTO</a:t>
-            </a:r>
-            <a:endParaRPr b="0" lang="en-US" sz="1200" spc="-1" strike="noStrike">
-              <a:solidFill>
-                <a:srgbClr val="000000"/>
-              </a:solidFill>
-              <a:latin typeface="Arial"/>
-            </a:endParaRPr>
-          </a:p>
-          <a:p>
-            <a:pPr lvl="1" marL="800280" indent="-343080" defTabSz="914400">
-              <a:lnSpc>
-                <a:spcPct val="100000"/>
-              </a:lnSpc>
-              <a:spcBef>
-                <a:spcPts val="320"/>
-              </a:spcBef>
-              <a:buClr>
-                <a:srgbClr val="000000"/>
-              </a:buClr>
-              <a:buFont typeface="Symbol"/>
-              <a:buChar char=""/>
-              <a:tabLst>
-                <a:tab algn="l" pos="1886040"/>
-              </a:tabLst>
-            </a:pPr>
-            <a:r>
-              <a:rPr b="0" lang="en-US" sz="1200" spc="-1" strike="noStrike">
-                <a:solidFill>
-                  <a:srgbClr val="000000"/>
-                </a:solidFill>
-                <a:latin typeface="Arial"/>
-                <a:ea typeface="DejaVu Sans"/>
-              </a:rPr>
-              <a:t>CodeEU-374: ADT Error on Bus Category Primary Vehicle Simulation on VECTO</a:t>
-            </a:r>
-            <a:endParaRPr b="0" lang="en-US" sz="1200" spc="-1" strike="noStrike">
-              <a:solidFill>
-                <a:srgbClr val="000000"/>
-              </a:solidFill>
-              <a:latin typeface="Arial"/>
-            </a:endParaRPr>
-          </a:p>
-          <a:p>
-            <a:pPr lvl="1" marL="800280" indent="-343080" defTabSz="914400">
-              <a:lnSpc>
-                <a:spcPct val="100000"/>
-              </a:lnSpc>
-              <a:spcBef>
-                <a:spcPts val="320"/>
-              </a:spcBef>
-              <a:buClr>
-                <a:srgbClr val="000000"/>
-              </a:buClr>
-              <a:buFont typeface="Symbol"/>
-              <a:buChar char=""/>
-              <a:tabLst>
-                <a:tab algn="l" pos="1886040"/>
-              </a:tabLst>
-            </a:pPr>
-            <a:r>
-              <a:rPr b="0" lang="en-US" sz="1200" spc="-1" strike="noStrike">
-                <a:solidFill>
-                  <a:srgbClr val="000000"/>
-                </a:solidFill>
-                <a:latin typeface="Arial"/>
-                <a:ea typeface="DejaVu Sans"/>
-              </a:rPr>
-              <a:t>CodeEU-375: ADT Error on Bus Category Primary Vehicle Simulation on VECTO</a:t>
-            </a:r>
-            <a:endParaRPr b="0" lang="en-US" sz="1200" spc="-1" strike="noStrike">
-              <a:solidFill>
-                <a:srgbClr val="000000"/>
-              </a:solidFill>
-              <a:latin typeface="Arial"/>
-            </a:endParaRPr>
-          </a:p>
-          <a:p>
-            <a:pPr lvl="1" marL="800280" indent="-343080" defTabSz="914400">
-              <a:lnSpc>
-                <a:spcPct val="100000"/>
-              </a:lnSpc>
-              <a:spcBef>
-                <a:spcPts val="320"/>
-              </a:spcBef>
-              <a:buClr>
-                <a:srgbClr val="000000"/>
-              </a:buClr>
-              <a:buFont typeface="Symbol"/>
-              <a:buChar char=""/>
-              <a:tabLst>
-                <a:tab algn="l" pos="1886040"/>
-              </a:tabLst>
-            </a:pPr>
-            <a:r>
-              <a:rPr b="0" lang="en-US" sz="1200" spc="-1" strike="noStrike">
-                <a:solidFill>
-                  <a:srgbClr val="000000"/>
-                </a:solidFill>
-                <a:latin typeface="Arial"/>
-                <a:ea typeface="DejaVu Sans"/>
-              </a:rPr>
-              <a:t>CodeEU-393: Finished Run VEH-PrimaryBus_nonSmart Interurban _P32SD_ReferenceLoad with ERROR: 16</a:t>
-            </a:r>
-            <a:endParaRPr b="0" lang="en-US" sz="1200" spc="-1" strike="noStrike">
-              <a:solidFill>
-                <a:srgbClr val="000000"/>
-              </a:solidFill>
-              <a:latin typeface="Arial"/>
-            </a:endParaRPr>
-          </a:p>
-          <a:p>
-            <a:pPr lvl="1" marL="800280" indent="-343080" defTabSz="914400">
-              <a:lnSpc>
-                <a:spcPct val="100000"/>
-              </a:lnSpc>
-              <a:spcBef>
-                <a:spcPts val="320"/>
-              </a:spcBef>
-              <a:buClr>
-                <a:srgbClr val="000000"/>
-              </a:buClr>
-              <a:buFont typeface="Symbol"/>
-              <a:buChar char=""/>
-              <a:tabLst>
-                <a:tab algn="l" pos="1886040"/>
-              </a:tabLst>
-            </a:pPr>
-            <a:r>
-              <a:rPr b="0" lang="en-US" sz="1200" spc="-1" strike="noStrike">
-                <a:solidFill>
-                  <a:srgbClr val="000000"/>
-                </a:solidFill>
-                <a:latin typeface="Arial"/>
-                <a:ea typeface="DejaVu Sans"/>
-              </a:rPr>
-              <a:t>CodeEU-439: 615 (Interurban _P32DD_ReferenceLoad) - absTime: 7129.6359 [s], distance: 53875.9765 [m], dt: 0.6388 [s], v: 0.5098 [m/s], Gear: 1 | DrivingActionAccelerate: Failed</a:t>
-            </a:r>
-            <a:endParaRPr b="0" lang="en-US" sz="1200" spc="-1" strike="noStrike">
-              <a:solidFill>
-                <a:srgbClr val="000000"/>
-              </a:solidFill>
-              <a:latin typeface="Arial"/>
-            </a:endParaRPr>
-          </a:p>
-          <a:p>
-            <a:pPr lvl="1" marL="800280" indent="-343080" defTabSz="914400">
-              <a:lnSpc>
-                <a:spcPct val="100000"/>
-              </a:lnSpc>
-              <a:spcBef>
-                <a:spcPts val="320"/>
-              </a:spcBef>
-              <a:buClr>
-                <a:srgbClr val="000000"/>
-              </a:buClr>
-              <a:buFont typeface="Symbol"/>
-              <a:buChar char=""/>
-              <a:tabLst>
-                <a:tab algn="l" pos="1886040"/>
-              </a:tabLst>
-            </a:pPr>
-            <a:r>
-              <a:rPr b="0" lang="en-US" sz="1200" spc="-1" strike="noStrike">
-                <a:solidFill>
-                  <a:srgbClr val="000000"/>
-                </a:solidFill>
-                <a:latin typeface="Arial"/>
-                <a:ea typeface="DejaVu Sans"/>
-              </a:rPr>
-              <a:t>CodeEU-446: Finished Run VEH-PrimaryBus_nonSmart Interurban _P32SD_ReferenceLoad with ERROR: 16</a:t>
-            </a:r>
-            <a:endParaRPr b="0" lang="en-US" sz="1200" spc="-1" strike="noStrike">
-              <a:solidFill>
-                <a:srgbClr val="000000"/>
-              </a:solidFill>
-              <a:latin typeface="Arial"/>
-            </a:endParaRPr>
-          </a:p>
-          <a:p>
-            <a:pPr lvl="1" marL="800280" indent="-343080" defTabSz="914400">
-              <a:lnSpc>
-                <a:spcPct val="100000"/>
-              </a:lnSpc>
-              <a:spcBef>
-                <a:spcPts val="320"/>
-              </a:spcBef>
-              <a:buClr>
-                <a:srgbClr val="000000"/>
-              </a:buClr>
-              <a:buFont typeface="Symbol"/>
-              <a:buChar char=""/>
-              <a:tabLst>
-                <a:tab algn="l" pos="1886040"/>
-              </a:tabLst>
-            </a:pPr>
-            <a:r>
-              <a:rPr b="0" lang="en-US" sz="1200" spc="-1" strike="noStrike">
-                <a:solidFill>
-                  <a:srgbClr val="000000"/>
-                </a:solidFill>
-                <a:latin typeface="Arial"/>
-                <a:ea typeface="DejaVu Sans"/>
-              </a:rPr>
-              <a:t>CodeEU-449: Finished Run VEH-PrimaryBus_nonSmart Interurban _P32SD_ReferenceLoad with ERROR: 16</a:t>
-            </a:r>
-            <a:endParaRPr b="0" lang="en-US" sz="1200" spc="-1" strike="noStrike">
-              <a:solidFill>
-                <a:srgbClr val="000000"/>
-              </a:solidFill>
-              <a:latin typeface="Arial"/>
-            </a:endParaRPr>
-          </a:p>
-          <a:p>
-            <a:pPr lvl="1" marL="800280" indent="-343080" defTabSz="914400">
-              <a:lnSpc>
-                <a:spcPct val="100000"/>
-              </a:lnSpc>
-              <a:spcBef>
-                <a:spcPts val="320"/>
-              </a:spcBef>
-              <a:buClr>
-                <a:srgbClr val="000000"/>
-              </a:buClr>
-              <a:buFont typeface="Symbol"/>
-              <a:buChar char=""/>
-              <a:tabLst>
-                <a:tab algn="l" pos="1886040"/>
-              </a:tabLst>
-            </a:pPr>
-            <a:r>
-              <a:rPr b="0" lang="en-US" sz="1200" spc="-1" strike="noStrike">
-                <a:solidFill>
-                  <a:srgbClr val="000000"/>
-                </a:solidFill>
-                <a:latin typeface="Arial"/>
-                <a:ea typeface="DejaVu Sans"/>
-              </a:rPr>
-              <a:t>CodeEU-478: Finished Run VEH-PrimaryBus_nonSmart Urban _P31SD_ReferenceLoad with ERROR: 4 (Urban _P31SD_ReferenceLoad) - absTime: 8606.6241 [s], distance: 39112.5127 [m], dt: 1.1131 [s], v: 0.1833 [m/s], Gear: 1 | DrivingActionAccelerate: Failed to find operating poi</a:t>
-            </a:r>
-            <a:endParaRPr b="0" lang="en-US" sz="1200" spc="-1" strike="noStrike">
-              <a:solidFill>
-                <a:srgbClr val="000000"/>
-              </a:solidFill>
-              <a:latin typeface="Arial"/>
-            </a:endParaRPr>
-          </a:p>
-          <a:p>
-            <a:pPr marL="800280" indent="0" defTabSz="914400">
-              <a:lnSpc>
-                <a:spcPct val="100000"/>
-              </a:lnSpc>
-              <a:spcBef>
-                <a:spcPts val="320"/>
-              </a:spcBef>
-              <a:buNone/>
-              <a:tabLst>
-                <a:tab algn="l" pos="0"/>
-              </a:tabLst>
-            </a:pPr>
+              <a:t>CodeEU-635: Revert multiple summary in CIF</a:t>
+            </a:r>
             <a:endParaRPr b="0" lang="en-US" sz="1200" spc="-1" strike="noStrike">
               <a:solidFill>
                 <a:srgbClr val="000000"/>
@@ -10698,7 +11117,7 @@
         <p:spPr>
           <a:xfrm>
             <a:off x="468360" y="476640"/>
-            <a:ext cx="8214120" cy="676800"/>
+            <a:ext cx="8213760" cy="676440"/>
           </a:xfrm>
           <a:prstGeom prst="rect">
             <a:avLst/>
@@ -10766,8 +11185,8 @@
         </p:nvSpPr>
         <p:spPr>
           <a:xfrm>
-            <a:off x="323640" y="1459080"/>
-            <a:ext cx="8492760" cy="4657680"/>
+            <a:off x="323640" y="1639080"/>
+            <a:ext cx="8492400" cy="4449240"/>
           </a:xfrm>
           <a:prstGeom prst="rect">
             <a:avLst/>
@@ -10782,26 +11201,6 @@
             <a:noAutofit/>
           </a:bodyPr>
           <a:p>
-            <a:pPr marL="343080" indent="0" defTabSz="914400">
-              <a:lnSpc>
-                <a:spcPct val="100000"/>
-              </a:lnSpc>
-              <a:spcBef>
-                <a:spcPts val="320"/>
-              </a:spcBef>
-              <a:buNone/>
-              <a:tabLst>
-                <a:tab algn="l" pos="0"/>
-              </a:tabLst>
-            </a:pPr>
-            <a:endParaRPr b="0" lang="en-US" sz="1600" spc="-1" strike="noStrike">
-              <a:solidFill>
-                <a:srgbClr val="000000"/>
-              </a:solidFill>
-              <a:latin typeface="Arial"/>
-            </a:endParaRPr>
-          </a:p>
-          <a:p>
             <a:pPr marL="343080" indent="-343080" defTabSz="914400">
               <a:lnSpc>
                 <a:spcPct val="100000"/>
@@ -10826,17 +11225,50 @@
                 <a:latin typeface="Arial"/>
                 <a:ea typeface="DejaVu Sans"/>
               </a:rPr>
-              <a:t>Bugfixes (2/4)</a:t>
-            </a:r>
-            <a:endParaRPr b="0" lang="en-US" sz="1600" spc="-1" strike="noStrike">
-              <a:solidFill>
-                <a:srgbClr val="000000"/>
-              </a:solidFill>
-              <a:latin typeface="Arial"/>
-            </a:endParaRPr>
-          </a:p>
-          <a:p>
-            <a:pPr lvl="1" marL="800280" indent="-343080" defTabSz="914400">
+              <a:t>Features</a:t>
+            </a:r>
+            <a:br>
+              <a:rPr sz="1600"/>
+            </a:br>
+            <a:r>
+              <a:rPr b="0" lang="en-US" sz="1200" spc="-1" strike="noStrike">
+                <a:solidFill>
+                  <a:schemeClr val="dk1"/>
+                </a:solidFill>
+                <a:latin typeface="Arial"/>
+                <a:ea typeface="DejaVu Sans"/>
+              </a:rPr>
+              <a:t>CodeEU-577: Add missing mission profiles to vocational and non-vocational</a:t>
+            </a:r>
+            <a:endParaRPr b="0" lang="en-US" sz="1200" spc="-1" strike="noStrike">
+              <a:solidFill>
+                <a:srgbClr val="000000"/>
+              </a:solidFill>
+              <a:latin typeface="Arial"/>
+            </a:endParaRPr>
+          </a:p>
+          <a:p>
+            <a:pPr marL="343080" indent="0" defTabSz="914400">
+              <a:lnSpc>
+                <a:spcPct val="100000"/>
+              </a:lnSpc>
+              <a:spcBef>
+                <a:spcPts val="320"/>
+              </a:spcBef>
+              <a:buNone/>
+              <a:tabLst>
+                <a:tab algn="l" pos="0"/>
+              </a:tabLst>
+            </a:pPr>
+            <a:endParaRPr b="0" lang="en-US" sz="1200" spc="-1" strike="noStrike">
+              <a:solidFill>
+                <a:srgbClr val="000000"/>
+              </a:solidFill>
+              <a:latin typeface="Arial"/>
+            </a:endParaRPr>
+          </a:p>
+          <a:p>
+            <a:pPr marL="343080" indent="-343080" defTabSz="914400">
               <a:lnSpc>
                 <a:spcPct val="100000"/>
               </a:lnSpc>
@@ -10853,16 +11285,16 @@
               </a:tabLst>
             </a:pPr>
             <a:r>
-              <a:rPr b="0" lang="en-US" sz="1200" spc="-1" strike="noStrike">
-                <a:solidFill>
-                  <a:srgbClr val="000000"/>
-                </a:solidFill>
-                <a:latin typeface="Arial"/>
-                <a:ea typeface="DejaVu Sans"/>
-              </a:rPr>
-              <a:t>CodeEU-481: Finished Run VEH-PrimaryBus_nonSmart Urban _P31SD_ReferenceLoad with ERROR: 4 (Urban _P31SD_ReferenceLoad) - absTime: 8606.6241 [s], distance: 39112.5127 [m], dt: 1.1131 [s], v: 0.1833 [m/s], Gear: 1 |</a:t>
-            </a:r>
-            <a:endParaRPr b="0" lang="en-US" sz="1200" spc="-1" strike="noStrike">
+              <a:rPr b="1" lang="en-US" sz="1600" spc="-1" strike="noStrike">
+                <a:solidFill>
+                  <a:srgbClr val="000000"/>
+                </a:solidFill>
+                <a:latin typeface="Arial"/>
+                <a:ea typeface="DejaVu Sans"/>
+              </a:rPr>
+              <a:t>Bugfixes (1/4)</a:t>
+            </a:r>
+            <a:endParaRPr b="0" lang="en-US" sz="1600" spc="-1" strike="noStrike">
               <a:solidFill>
                 <a:srgbClr val="000000"/>
               </a:solidFill>
@@ -10894,7 +11326,7 @@
                 <a:latin typeface="Arial"/>
                 <a:ea typeface="DejaVu Sans"/>
               </a:rPr>
-              <a:t>CodeEU-488: Finished Run VEH-PrimaryBus_nonSmart Urban _P31SD_ReferenceLoad with ERROR: 4 (Urban _P31SD_ReferenceLoad) - absTime: 8606.6241 [s], distance: 39112.5127 [m], dt: 1.1131 [s], v: 0.1833 [m/s], Gear: 1 | DrivingActionAccelerate: Failed to find operating poi</a:t>
+              <a:t>CodeEU-331: Gear 1 DrivingActionAccelerate: Fail</a:t>
             </a:r>
             <a:endParaRPr b="0" lang="en-US" sz="1200" spc="-1" strike="noStrike">
               <a:solidFill>
@@ -10928,7 +11360,7 @@
                 <a:latin typeface="Arial"/>
                 <a:ea typeface="DejaVu Sans"/>
               </a:rPr>
-              <a:t>CodeEU-494: Finished Run VEH-PrimaryBus_nonSmart Urban _P31SD_ReferenceLoad with ERROR: 26 (Urban _P31SD_ReferenceLoad) - absTime: 8606.6241 [s], distance: 39112.5127 [m], dt: 1.1131 [s], v: 0.1833 [m/s], Gear: 1 | DrivingActionAccelerate: Failed to fi</a:t>
+              <a:t>CodeEU-367: Gear 1 DrivingActionAccelerate: Fail</a:t>
             </a:r>
             <a:endParaRPr b="0" lang="en-US" sz="1200" spc="-1" strike="noStrike">
               <a:solidFill>
@@ -10962,7 +11394,7 @@
                 <a:latin typeface="Arial"/>
                 <a:ea typeface="DejaVu Sans"/>
               </a:rPr>
-              <a:t>CodeEU-420: Finished Run VEH-PrimaryBus_nonSmart Interurban _P32SD_ReferenceLoad with ERROR: 16</a:t>
+              <a:t>CodeEU-372: ADT Error on Bus Category Primary Vehicle Simulation on VECTO</a:t>
             </a:r>
             <a:endParaRPr b="0" lang="en-US" sz="1200" spc="-1" strike="noStrike">
               <a:solidFill>
@@ -10996,7 +11428,7 @@
                 <a:latin typeface="Arial"/>
                 <a:ea typeface="DejaVu Sans"/>
               </a:rPr>
-              <a:t>CodeEU-573: Unhandled powertrain architecture Conventional Vehicle to calculate gradability</a:t>
+              <a:t>CodeEU-373: ADT Error on Bus Category Primary Vehicle Simulation on VECTO</a:t>
             </a:r>
             <a:endParaRPr b="0" lang="en-US" sz="1200" spc="-1" strike="noStrike">
               <a:solidFill>
@@ -11030,7 +11462,7 @@
                 <a:latin typeface="Arial"/>
                 <a:ea typeface="DejaVu Sans"/>
               </a:rPr>
-              <a:t>CodeEU-582: unhandled powertrain architecture ConventionalVehicle to calculate gradability, 11:44:36.63,</a:t>
+              <a:t>CodeEU-374: ADT Error on Bus Category Primary Vehicle Simulation on VECTO</a:t>
             </a:r>
             <a:endParaRPr b="0" lang="en-US" sz="1200" spc="-1" strike="noStrike">
               <a:solidFill>
@@ -11064,7 +11496,7 @@
                 <a:latin typeface="Arial"/>
                 <a:ea typeface="DejaVu Sans"/>
               </a:rPr>
-              <a:t>CodeEU-595: Inconsistency exempted vehicles "Fuel cell vehicle" vs. "FCV Article 9 exempted"</a:t>
+              <a:t>CodeEU-375: ADT Error on Bus Category Primary Vehicle Simulation on VECTO</a:t>
             </a:r>
             <a:endParaRPr b="0" lang="en-US" sz="1200" spc="-1" strike="noStrike">
               <a:solidFill>
@@ -11098,7 +11530,7 @@
                 <a:latin typeface="Arial"/>
                 <a:ea typeface="DejaVu Sans"/>
               </a:rPr>
-              <a:t>CodeEU-501: Help regarding VTP vdri format is not up to date in v4</a:t>
+              <a:t>CodeEU-393: Finished Run VEH-PrimaryBus_nonSmart Interurban _P32SD_ReferenceLoad with ERROR: 16</a:t>
             </a:r>
             <a:endParaRPr b="0" lang="en-US" sz="1200" spc="-1" strike="noStrike">
               <a:solidFill>
@@ -11132,7 +11564,7 @@
                 <a:latin typeface="Arial"/>
                 <a:ea typeface="DejaVu Sans"/>
               </a:rPr>
-              <a:t>CodeEU-594: inadequate validation for auxiliaries in completed vehicle XML</a:t>
+              <a:t>CodeEU-439: 615 (Interurban _P32DD_ReferenceLoad) - absTime: 7129.6359 [s], distance: 53875.9765 [m], dt: 0.6388 [s], v: 0.5098 [m/s], Gear: 1 | DrivingActionAccelerate: Failed</a:t>
             </a:r>
             <a:endParaRPr b="0" lang="en-US" sz="1200" spc="-1" strike="noStrike">
               <a:solidFill>
@@ -11166,7 +11598,7 @@
                 <a:latin typeface="Arial"/>
                 <a:ea typeface="DejaVu Sans"/>
               </a:rPr>
-              <a:t>CodeEU-580: Potential error in XML schema v2.4 (exempted vehicles)</a:t>
+              <a:t>CodeEU-446: Finished Run VEH-PrimaryBus_nonSmart Interurban _P32SD_ReferenceLoad with ERROR: 16</a:t>
             </a:r>
             <a:endParaRPr b="0" lang="en-US" sz="1200" spc="-1" strike="noStrike">
               <a:solidFill>
@@ -11200,7 +11632,7 @@
                 <a:latin typeface="Arial"/>
                 <a:ea typeface="DejaVu Sans"/>
               </a:rPr>
-              <a:t>CodeEU-551: Article-10-2 XLRASF5E00G419905</a:t>
+              <a:t>CodeEU-449: Finished Run VEH-PrimaryBus_nonSmart Interurban _P32SD_ReferenceLoad with ERROR: 16</a:t>
             </a:r>
             <a:endParaRPr b="0" lang="en-US" sz="1200" spc="-1" strike="noStrike">
               <a:solidFill>
@@ -11234,7 +11666,7 @@
                 <a:latin typeface="Arial"/>
                 <a:ea typeface="DejaVu Sans"/>
               </a:rPr>
-              <a:t>CodeEU-547: Max ICE Off timespan for buses</a:t>
+              <a:t>CodeEU-478: Finished Run VEH-PrimaryBus_nonSmart Urban _P31SD_ReferenceLoad with ERROR: 4 (Urban _P31SD_ReferenceLoad) - absTime: 8606.6241 [s], distance: 39112.5127 [m], dt: 1.1131 [s], v: 0.1833 [m/s], Gear: 1 | DrivingActionAccelerate: Failed to find operating poi</a:t>
             </a:r>
             <a:endParaRPr b="0" lang="en-US" sz="1200" spc="-1" strike="noStrike">
               <a:solidFill>
@@ -11244,32 +11676,18 @@
             </a:endParaRPr>
           </a:p>
           <a:p>
-            <a:pPr lvl="1" marL="800280" indent="-343080" defTabSz="914400">
+            <a:pPr marL="800280" indent="0" defTabSz="914400">
               <a:lnSpc>
                 <a:spcPct val="100000"/>
               </a:lnSpc>
               <a:spcBef>
                 <a:spcPts val="320"/>
               </a:spcBef>
-              <a:buClr>
-                <a:srgbClr val="000000"/>
-              </a:buClr>
-              <a:buFont typeface="Symbol"/>
-              <a:buChar char=""/>
-              <a:tabLst>
-                <a:tab algn="l" pos="1886040"/>
-              </a:tabLst>
-            </a:pPr>
-            <a:r>
-              <a:rPr b="0" lang="en-US" sz="1200" spc="-1" strike="noStrike">
-                <a:solidFill>
-                  <a:srgbClr val="000000"/>
-                </a:solidFill>
-                <a:latin typeface="Arial"/>
-                <a:ea typeface="DejaVu Sans"/>
-              </a:rPr>
-              <a:t>CodeEU-583: Incorrect internal resistance for SuperCap used in factor method</a:t>
-            </a:r>
+              <a:buNone/>
+              <a:tabLst>
+                <a:tab algn="l" pos="0"/>
+              </a:tabLst>
+            </a:pPr>
             <a:endParaRPr b="0" lang="en-US" sz="1200" spc="-1" strike="noStrike">
               <a:solidFill>
                 <a:srgbClr val="000000"/>
@@ -11322,7 +11740,7 @@
         <p:spPr>
           <a:xfrm>
             <a:off x="468360" y="476640"/>
-            <a:ext cx="8214120" cy="676800"/>
+            <a:ext cx="8213760" cy="676440"/>
           </a:xfrm>
           <a:prstGeom prst="rect">
             <a:avLst/>
@@ -11391,7 +11809,7 @@
         <p:spPr>
           <a:xfrm>
             <a:off x="323640" y="1459080"/>
-            <a:ext cx="8492760" cy="4657680"/>
+            <a:ext cx="8492400" cy="4657320"/>
           </a:xfrm>
           <a:prstGeom prst="rect">
             <a:avLst/>
@@ -11450,7 +11868,7 @@
                 <a:latin typeface="Arial"/>
                 <a:ea typeface="DejaVu Sans"/>
               </a:rPr>
-              <a:t>Bugfixes (3/4)</a:t>
+              <a:t>Bugfixes (2/4)</a:t>
             </a:r>
             <a:endParaRPr b="0" lang="en-US" sz="1600" spc="-1" strike="noStrike">
               <a:solidFill>
@@ -11484,7 +11902,7 @@
                 <a:latin typeface="Arial"/>
                 <a:ea typeface="DejaVu Sans"/>
               </a:rPr>
-              <a:t>CodeEU-571: Article10-2-issue | VECTO-4.0.3 | Order-Nr 28202896 | HEV P1 Error Mercedes-Benz and Setra Hybrid Buses</a:t>
+              <a:t>CodeEU-481: Finished Run VEH-PrimaryBus_nonSmart Urban _P31SD_ReferenceLoad with ERROR: 4 (Urban _P31SD_ReferenceLoad) - absTime: 8606.6241 [s], distance: 39112.5127 [m], dt: 1.1131 [s], v: 0.1833 [m/s], Gear: 1 |</a:t>
             </a:r>
             <a:endParaRPr b="0" lang="en-US" sz="1200" spc="-1" strike="noStrike">
               <a:solidFill>
@@ -11518,7 +11936,7 @@
                 <a:latin typeface="Arial"/>
                 <a:ea typeface="DejaVu Sans"/>
               </a:rPr>
-              <a:t>CodeEU-526: VTP calculation aborted on fuel consumption map</a:t>
+              <a:t>CodeEU-488: Finished Run VEH-PrimaryBus_nonSmart Urban _P31SD_ReferenceLoad with ERROR: 4 (Urban _P31SD_ReferenceLoad) - absTime: 8606.6241 [s], distance: 39112.5127 [m], dt: 1.1131 [s], v: 0.1833 [m/s], Gear: 1 | DrivingActionAccelerate: Failed to find operating poi</a:t>
             </a:r>
             <a:endParaRPr b="0" lang="en-US" sz="1200" spc="-1" strike="noStrike">
               <a:solidFill>
@@ -11552,7 +11970,7 @@
                 <a:latin typeface="Arial"/>
                 <a:ea typeface="DejaVu Sans"/>
               </a:rPr>
-              <a:t>CodeEU-502: Error in VECTO calculation WMA10CZZ0RF022326</a:t>
+              <a:t>CodeEU-494: Finished Run VEH-PrimaryBus_nonSmart Urban _P31SD_ReferenceLoad with ERROR: 26 (Urban _P31SD_ReferenceLoad) - absTime: 8606.6241 [s], distance: 39112.5127 [m], dt: 1.1131 [s], v: 0.1833 [m/s], Gear: 1 | DrivingActionAccelerate: Failed to fi</a:t>
             </a:r>
             <a:endParaRPr b="0" lang="en-US" sz="1200" spc="-1" strike="noStrike">
               <a:solidFill>
@@ -11586,7 +12004,7 @@
                 <a:latin typeface="Arial"/>
                 <a:ea typeface="DejaVu Sans"/>
               </a:rPr>
-              <a:t>CodeEU-401: Electric steering system with conventional vehicle not according to 2017/2400</a:t>
+              <a:t>CodeEU-420: Finished Run VEH-PrimaryBus_nonSmart Interurban _P32SD_ReferenceLoad with ERROR: 16</a:t>
             </a:r>
             <a:endParaRPr b="0" lang="en-US" sz="1200" spc="-1" strike="noStrike">
               <a:solidFill>
@@ -11620,7 +12038,7 @@
                 <a:latin typeface="Arial"/>
                 <a:ea typeface="DejaVu Sans"/>
               </a:rPr>
-              <a:t>CodeEU-476: Setting Initial SoC in REESS editor leads to error</a:t>
+              <a:t>CodeEU-573: Unhandled powertrain architecture Conventional Vehicle to calculate gradability</a:t>
             </a:r>
             <a:endParaRPr b="0" lang="en-US" sz="1200" spc="-1" strike="noStrike">
               <a:solidFill>
@@ -11654,7 +12072,7 @@
                 <a:latin typeface="Arial"/>
                 <a:ea typeface="DejaVu Sans"/>
               </a:rPr>
-              <a:t>CodeEU-533: Question about heavy lorry_IEPC_Gb×4speed: Failed to generate electric power map - at least two negative entries are required</a:t>
+              <a:t>CodeEU-582: unhandled powertrain architecture ConventionalVehicle to calculate gradability, 11:44:36.63,</a:t>
             </a:r>
             <a:endParaRPr b="0" lang="en-US" sz="1200" spc="-1" strike="noStrike">
               <a:solidFill>
@@ -11688,7 +12106,7 @@
                 <a:latin typeface="Arial"/>
                 <a:ea typeface="DejaVu Sans"/>
               </a:rPr>
-              <a:t>CodeEU-456: Clarification Documentation official Results</a:t>
+              <a:t>CodeEU-595: Inconsistency exempted vehicles "Fuel cell vehicle" vs. "FCV Article 9 exempted"</a:t>
             </a:r>
             <a:endParaRPr b="0" lang="en-US" sz="1200" spc="-1" strike="noStrike">
               <a:solidFill>
@@ -11722,7 +12140,7 @@
                 <a:latin typeface="Arial"/>
                 <a:ea typeface="DejaVu Sans"/>
               </a:rPr>
-              <a:t>CodeEU-506: Article 10(2) issue - VIN YS2P6X200R2201285</a:t>
+              <a:t>CodeEU-501: Help regarding VTP vdri format is not up to date in v4</a:t>
             </a:r>
             <a:endParaRPr b="0" lang="en-US" sz="1200" spc="-1" strike="noStrike">
               <a:solidFill>
@@ -11756,7 +12174,7 @@
                 <a:latin typeface="Arial"/>
                 <a:ea typeface="DejaVu Sans"/>
               </a:rPr>
-              <a:t>CodeEU-507: Article 10(2) issue - VIN YS2P6X20005732399</a:t>
+              <a:t>CodeEU-594: inadequate validation for auxiliaries in completed vehicle XML</a:t>
             </a:r>
             <a:endParaRPr b="0" lang="en-US" sz="1200" spc="-1" strike="noStrike">
               <a:solidFill>
@@ -11790,7 +12208,7 @@
                 <a:latin typeface="Arial"/>
                 <a:ea typeface="DejaVu Sans"/>
               </a:rPr>
-              <a:t>CodeEU-508: Article 10(2) issue - VIN S2P6X20005734199</a:t>
+              <a:t>CodeEU-580: Potential error in XML schema v2.4 (exempted vehicles)</a:t>
             </a:r>
             <a:endParaRPr b="0" lang="en-US" sz="1200" spc="-1" strike="noStrike">
               <a:solidFill>
@@ -11824,7 +12242,7 @@
                 <a:latin typeface="Arial"/>
                 <a:ea typeface="DejaVu Sans"/>
               </a:rPr>
-              <a:t>CodeEU-499: Object Reference not set Error</a:t>
+              <a:t>CodeEU-551: Article-10-2 XLRASF5E00G419905</a:t>
             </a:r>
             <a:endParaRPr b="0" lang="en-US" sz="1200" spc="-1" strike="noStrike">
               <a:solidFill>
@@ -11858,7 +12276,7 @@
                 <a:latin typeface="Arial"/>
                 <a:ea typeface="DejaVu Sans"/>
               </a:rPr>
-              <a:t>CodeEU-546: Problem with P181 (Cooling Fan Technology) for a conventional vehicle</a:t>
+              <a:t>CodeEU-547: Max ICE Off timespan for buses</a:t>
             </a:r>
             <a:endParaRPr b="0" lang="en-US" sz="1200" spc="-1" strike="noStrike">
               <a:solidFill>
@@ -11892,41 +12310,7 @@
                 <a:latin typeface="Arial"/>
                 <a:ea typeface="DejaVu Sans"/>
               </a:rPr>
-              <a:t>CodeEU-516: Article10-2-issue | VECTO-4.0.3 | Order-Nr 28208044 | HEV P1 Error Mercedes-Benz and Setra Hybrid Buses</a:t>
-            </a:r>
-            <a:endParaRPr b="0" lang="en-US" sz="1200" spc="-1" strike="noStrike">
-              <a:solidFill>
-                <a:srgbClr val="000000"/>
-              </a:solidFill>
-              <a:latin typeface="Arial"/>
-            </a:endParaRPr>
-          </a:p>
-          <a:p>
-            <a:pPr lvl="1" marL="800280" indent="-343080" defTabSz="914400">
-              <a:lnSpc>
-                <a:spcPct val="100000"/>
-              </a:lnSpc>
-              <a:spcBef>
-                <a:spcPts val="320"/>
-              </a:spcBef>
-              <a:buClr>
-                <a:srgbClr val="000000"/>
-              </a:buClr>
-              <a:buFont typeface="Symbol"/>
-              <a:buChar char=""/>
-              <a:tabLst>
-                <a:tab algn="l" pos="1886040"/>
-              </a:tabLst>
-            </a:pPr>
-            <a:r>
-              <a:rPr b="0" lang="en-US" sz="1200" spc="-1" strike="noStrike">
-                <a:solidFill>
-                  <a:srgbClr val="000000"/>
-                </a:solidFill>
-                <a:latin typeface="Arial"/>
-                <a:ea typeface="DejaVu Sans"/>
-              </a:rPr>
-              <a:t>CodeEU-517: Article10-2-issue | VECTO-4.0.3 | Order-Nr 28208037 | HEV P1 Error Mercedes-Benz and Setra Hybrid Buses</a:t>
+              <a:t>CodeEU-583: Incorrect internal resistance for SuperCap used in factor method</a:t>
             </a:r>
             <a:endParaRPr b="0" lang="en-US" sz="1200" spc="-1" strike="noStrike">
               <a:solidFill>
@@ -11980,7 +12364,7 @@
         <p:spPr>
           <a:xfrm>
             <a:off x="468360" y="476640"/>
-            <a:ext cx="8214120" cy="676800"/>
+            <a:ext cx="8213760" cy="676440"/>
           </a:xfrm>
           <a:prstGeom prst="rect">
             <a:avLst/>
@@ -12049,7 +12433,7 @@
         <p:spPr>
           <a:xfrm>
             <a:off x="323640" y="1459080"/>
-            <a:ext cx="8492760" cy="4657680"/>
+            <a:ext cx="8492400" cy="4657320"/>
           </a:xfrm>
           <a:prstGeom prst="rect">
             <a:avLst/>
@@ -12108,7 +12492,7 @@
                 <a:latin typeface="Arial"/>
                 <a:ea typeface="DejaVu Sans"/>
               </a:rPr>
-              <a:t>Bugfixes (4/4)</a:t>
+              <a:t>Bugfixes (3/4)</a:t>
             </a:r>
             <a:endParaRPr b="0" lang="en-US" sz="1600" spc="-1" strike="noStrike">
               <a:solidFill>
@@ -12142,7 +12526,7 @@
                 <a:latin typeface="Arial"/>
                 <a:ea typeface="DejaVu Sans"/>
               </a:rPr>
-              <a:t>CodeEU-519: Article10-2-issue | VECTO-4.0.3 | Order-Nr 10098181 | HEV P1 Error Mercedes-Benz and Setra Hybrid Buses</a:t>
+              <a:t>CodeEU-571: Article10-2-issue | VECTO-4.0.3 | Order-Nr 28202896 | HEV P1 Error Mercedes-Benz and Setra Hybrid Buses</a:t>
             </a:r>
             <a:endParaRPr b="0" lang="en-US" sz="1200" spc="-1" strike="noStrike">
               <a:solidFill>
@@ -12176,7 +12560,7 @@
                 <a:latin typeface="Arial"/>
                 <a:ea typeface="DejaVu Sans"/>
               </a:rPr>
-              <a:t>CodeEU-527: Article10-2-issue | VECTO-4.0.3 | Order-Nr 28196233 | HEV P1 Error Mercedes-Benz and Setra Hybrid Buses</a:t>
+              <a:t>CodeEU-526: VTP calculation aborted on fuel consumption map</a:t>
             </a:r>
             <a:endParaRPr b="0" lang="en-US" sz="1200" spc="-1" strike="noStrike">
               <a:solidFill>
@@ -12210,7 +12594,7 @@
                 <a:latin typeface="Arial"/>
                 <a:ea typeface="DejaVu Sans"/>
               </a:rPr>
-              <a:t>CodeEU-528: Article10-2-issue | VECTO-4.0.3 | Order-Nr 28196652 | HEV P1 Error Mercedes-Benz and Setra Hybrid Buses</a:t>
+              <a:t>CodeEU-502: Error in VECTO calculation WMA10CZZ0RF022326</a:t>
             </a:r>
             <a:endParaRPr b="0" lang="en-US" sz="1200" spc="-1" strike="noStrike">
               <a:solidFill>
@@ -12244,7 +12628,7 @@
                 <a:latin typeface="Arial"/>
                 <a:ea typeface="DejaVu Sans"/>
               </a:rPr>
-              <a:t>CodeEU-338: Eco-roll only, without engine stop, impact on CO2 emission</a:t>
+              <a:t>CodeEU-401: Electric steering system with conventional vehicle not according to 2017/2400</a:t>
             </a:r>
             <a:endParaRPr b="0" lang="en-US" sz="1200" spc="-1" strike="noStrike">
               <a:solidFill>
@@ -12278,7 +12662,7 @@
                 <a:latin typeface="Arial"/>
                 <a:ea typeface="DejaVu Sans"/>
               </a:rPr>
-              <a:t>CodeEU-475: XML files loading in VTP Job not OK; No auxiliary data and torque curve visible, Job can't be saved in VECTO 4.0.3.3330</a:t>
+              <a:t>CodeEU-476: Setting Initial SoC in REESS editor leads to error</a:t>
             </a:r>
             <a:endParaRPr b="0" lang="en-US" sz="1200" spc="-1" strike="noStrike">
               <a:solidFill>
@@ -12312,7 +12696,279 @@
                 <a:latin typeface="Arial"/>
                 <a:ea typeface="DejaVu Sans"/>
               </a:rPr>
-              <a:t>CodeEU-610: VTP mode is broken due to changes in the Clutch component.</a:t>
+              <a:t>CodeEU-533: Question about heavy lorry_IEPC_Gb×4speed: Failed to generate electric power map - at least two negative entries are required</a:t>
+            </a:r>
+            <a:endParaRPr b="0" lang="en-US" sz="1200" spc="-1" strike="noStrike">
+              <a:solidFill>
+                <a:srgbClr val="000000"/>
+              </a:solidFill>
+              <a:latin typeface="Arial"/>
+            </a:endParaRPr>
+          </a:p>
+          <a:p>
+            <a:pPr lvl="1" marL="800280" indent="-343080" defTabSz="914400">
+              <a:lnSpc>
+                <a:spcPct val="100000"/>
+              </a:lnSpc>
+              <a:spcBef>
+                <a:spcPts val="320"/>
+              </a:spcBef>
+              <a:buClr>
+                <a:srgbClr val="000000"/>
+              </a:buClr>
+              <a:buFont typeface="Symbol"/>
+              <a:buChar char=""/>
+              <a:tabLst>
+                <a:tab algn="l" pos="1886040"/>
+              </a:tabLst>
+            </a:pPr>
+            <a:r>
+              <a:rPr b="0" lang="en-US" sz="1200" spc="-1" strike="noStrike">
+                <a:solidFill>
+                  <a:srgbClr val="000000"/>
+                </a:solidFill>
+                <a:latin typeface="Arial"/>
+                <a:ea typeface="DejaVu Sans"/>
+              </a:rPr>
+              <a:t>CodeEU-456: Clarification Documentation official Results</a:t>
+            </a:r>
+            <a:endParaRPr b="0" lang="en-US" sz="1200" spc="-1" strike="noStrike">
+              <a:solidFill>
+                <a:srgbClr val="000000"/>
+              </a:solidFill>
+              <a:latin typeface="Arial"/>
+            </a:endParaRPr>
+          </a:p>
+          <a:p>
+            <a:pPr lvl="1" marL="800280" indent="-343080" defTabSz="914400">
+              <a:lnSpc>
+                <a:spcPct val="100000"/>
+              </a:lnSpc>
+              <a:spcBef>
+                <a:spcPts val="320"/>
+              </a:spcBef>
+              <a:buClr>
+                <a:srgbClr val="000000"/>
+              </a:buClr>
+              <a:buFont typeface="Symbol"/>
+              <a:buChar char=""/>
+              <a:tabLst>
+                <a:tab algn="l" pos="1886040"/>
+              </a:tabLst>
+            </a:pPr>
+            <a:r>
+              <a:rPr b="0" lang="en-US" sz="1200" spc="-1" strike="noStrike">
+                <a:solidFill>
+                  <a:srgbClr val="000000"/>
+                </a:solidFill>
+                <a:latin typeface="Arial"/>
+                <a:ea typeface="DejaVu Sans"/>
+              </a:rPr>
+              <a:t>CodeEU-506: Article 10(2) issue - VIN YS2P6X200R2201285</a:t>
+            </a:r>
+            <a:endParaRPr b="0" lang="en-US" sz="1200" spc="-1" strike="noStrike">
+              <a:solidFill>
+                <a:srgbClr val="000000"/>
+              </a:solidFill>
+              <a:latin typeface="Arial"/>
+            </a:endParaRPr>
+          </a:p>
+          <a:p>
+            <a:pPr lvl="1" marL="800280" indent="-343080" defTabSz="914400">
+              <a:lnSpc>
+                <a:spcPct val="100000"/>
+              </a:lnSpc>
+              <a:spcBef>
+                <a:spcPts val="320"/>
+              </a:spcBef>
+              <a:buClr>
+                <a:srgbClr val="000000"/>
+              </a:buClr>
+              <a:buFont typeface="Symbol"/>
+              <a:buChar char=""/>
+              <a:tabLst>
+                <a:tab algn="l" pos="1886040"/>
+              </a:tabLst>
+            </a:pPr>
+            <a:r>
+              <a:rPr b="0" lang="en-US" sz="1200" spc="-1" strike="noStrike">
+                <a:solidFill>
+                  <a:srgbClr val="000000"/>
+                </a:solidFill>
+                <a:latin typeface="Arial"/>
+                <a:ea typeface="DejaVu Sans"/>
+              </a:rPr>
+              <a:t>CodeEU-507: Article 10(2) issue - VIN YS2P6X20005732399</a:t>
+            </a:r>
+            <a:endParaRPr b="0" lang="en-US" sz="1200" spc="-1" strike="noStrike">
+              <a:solidFill>
+                <a:srgbClr val="000000"/>
+              </a:solidFill>
+              <a:latin typeface="Arial"/>
+            </a:endParaRPr>
+          </a:p>
+          <a:p>
+            <a:pPr lvl="1" marL="800280" indent="-343080" defTabSz="914400">
+              <a:lnSpc>
+                <a:spcPct val="100000"/>
+              </a:lnSpc>
+              <a:spcBef>
+                <a:spcPts val="320"/>
+              </a:spcBef>
+              <a:buClr>
+                <a:srgbClr val="000000"/>
+              </a:buClr>
+              <a:buFont typeface="Symbol"/>
+              <a:buChar char=""/>
+              <a:tabLst>
+                <a:tab algn="l" pos="1886040"/>
+              </a:tabLst>
+            </a:pPr>
+            <a:r>
+              <a:rPr b="0" lang="en-US" sz="1200" spc="-1" strike="noStrike">
+                <a:solidFill>
+                  <a:srgbClr val="000000"/>
+                </a:solidFill>
+                <a:latin typeface="Arial"/>
+                <a:ea typeface="DejaVu Sans"/>
+              </a:rPr>
+              <a:t>CodeEU-508: Article 10(2) issue - VIN S2P6X20005734199</a:t>
+            </a:r>
+            <a:endParaRPr b="0" lang="en-US" sz="1200" spc="-1" strike="noStrike">
+              <a:solidFill>
+                <a:srgbClr val="000000"/>
+              </a:solidFill>
+              <a:latin typeface="Arial"/>
+            </a:endParaRPr>
+          </a:p>
+          <a:p>
+            <a:pPr lvl="1" marL="800280" indent="-343080" defTabSz="914400">
+              <a:lnSpc>
+                <a:spcPct val="100000"/>
+              </a:lnSpc>
+              <a:spcBef>
+                <a:spcPts val="320"/>
+              </a:spcBef>
+              <a:buClr>
+                <a:srgbClr val="000000"/>
+              </a:buClr>
+              <a:buFont typeface="Symbol"/>
+              <a:buChar char=""/>
+              <a:tabLst>
+                <a:tab algn="l" pos="1886040"/>
+              </a:tabLst>
+            </a:pPr>
+            <a:r>
+              <a:rPr b="0" lang="en-US" sz="1200" spc="-1" strike="noStrike">
+                <a:solidFill>
+                  <a:srgbClr val="000000"/>
+                </a:solidFill>
+                <a:latin typeface="Arial"/>
+                <a:ea typeface="DejaVu Sans"/>
+              </a:rPr>
+              <a:t>CodeEU-499: Object Reference not set Error</a:t>
+            </a:r>
+            <a:endParaRPr b="0" lang="en-US" sz="1200" spc="-1" strike="noStrike">
+              <a:solidFill>
+                <a:srgbClr val="000000"/>
+              </a:solidFill>
+              <a:latin typeface="Arial"/>
+            </a:endParaRPr>
+          </a:p>
+          <a:p>
+            <a:pPr lvl="1" marL="800280" indent="-343080" defTabSz="914400">
+              <a:lnSpc>
+                <a:spcPct val="100000"/>
+              </a:lnSpc>
+              <a:spcBef>
+                <a:spcPts val="320"/>
+              </a:spcBef>
+              <a:buClr>
+                <a:srgbClr val="000000"/>
+              </a:buClr>
+              <a:buFont typeface="Symbol"/>
+              <a:buChar char=""/>
+              <a:tabLst>
+                <a:tab algn="l" pos="1886040"/>
+              </a:tabLst>
+            </a:pPr>
+            <a:r>
+              <a:rPr b="0" lang="en-US" sz="1200" spc="-1" strike="noStrike">
+                <a:solidFill>
+                  <a:srgbClr val="000000"/>
+                </a:solidFill>
+                <a:latin typeface="Arial"/>
+                <a:ea typeface="DejaVu Sans"/>
+              </a:rPr>
+              <a:t>CodeEU-546: Problem with P181 (Cooling Fan Technology) for a conventional vehicle</a:t>
+            </a:r>
+            <a:endParaRPr b="0" lang="en-US" sz="1200" spc="-1" strike="noStrike">
+              <a:solidFill>
+                <a:srgbClr val="000000"/>
+              </a:solidFill>
+              <a:latin typeface="Arial"/>
+            </a:endParaRPr>
+          </a:p>
+          <a:p>
+            <a:pPr lvl="1" marL="800280" indent="-343080" defTabSz="914400">
+              <a:lnSpc>
+                <a:spcPct val="100000"/>
+              </a:lnSpc>
+              <a:spcBef>
+                <a:spcPts val="320"/>
+              </a:spcBef>
+              <a:buClr>
+                <a:srgbClr val="000000"/>
+              </a:buClr>
+              <a:buFont typeface="Symbol"/>
+              <a:buChar char=""/>
+              <a:tabLst>
+                <a:tab algn="l" pos="1886040"/>
+              </a:tabLst>
+            </a:pPr>
+            <a:r>
+              <a:rPr b="0" lang="en-US" sz="1200" spc="-1" strike="noStrike">
+                <a:solidFill>
+                  <a:srgbClr val="000000"/>
+                </a:solidFill>
+                <a:latin typeface="Arial"/>
+                <a:ea typeface="DejaVu Sans"/>
+              </a:rPr>
+              <a:t>CodeEU-516: Article10-2-issue | VECTO-4.0.3 | Order-Nr 28208044 | HEV P1 Error Mercedes-Benz and Setra Hybrid Buses</a:t>
+            </a:r>
+            <a:endParaRPr b="0" lang="en-US" sz="1200" spc="-1" strike="noStrike">
+              <a:solidFill>
+                <a:srgbClr val="000000"/>
+              </a:solidFill>
+              <a:latin typeface="Arial"/>
+            </a:endParaRPr>
+          </a:p>
+          <a:p>
+            <a:pPr lvl="1" marL="800280" indent="-343080" defTabSz="914400">
+              <a:lnSpc>
+                <a:spcPct val="100000"/>
+              </a:lnSpc>
+              <a:spcBef>
+                <a:spcPts val="320"/>
+              </a:spcBef>
+              <a:buClr>
+                <a:srgbClr val="000000"/>
+              </a:buClr>
+              <a:buFont typeface="Symbol"/>
+              <a:buChar char=""/>
+              <a:tabLst>
+                <a:tab algn="l" pos="1886040"/>
+              </a:tabLst>
+            </a:pPr>
+            <a:r>
+              <a:rPr b="0" lang="en-US" sz="1200" spc="-1" strike="noStrike">
+                <a:solidFill>
+                  <a:srgbClr val="000000"/>
+                </a:solidFill>
+                <a:latin typeface="Arial"/>
+                <a:ea typeface="DejaVu Sans"/>
+              </a:rPr>
+              <a:t>CodeEU-517: Article10-2-issue | VECTO-4.0.3 | Order-Nr 28208037 | HEV P1 Error Mercedes-Benz and Setra Hybrid Buses</a:t>
             </a:r>
             <a:endParaRPr b="0" lang="en-US" sz="1200" spc="-1" strike="noStrike">
               <a:solidFill>
@@ -12366,7 +13022,7 @@
         <p:spPr>
           <a:xfrm>
             <a:off x="468360" y="476640"/>
-            <a:ext cx="8214120" cy="676800"/>
+            <a:ext cx="8213760" cy="676440"/>
           </a:xfrm>
           <a:prstGeom prst="rect">
             <a:avLst/>
@@ -12398,7 +13054,7 @@
                 <a:latin typeface="Arial"/>
                 <a:ea typeface="DejaVu Sans"/>
               </a:rPr>
-              <a:t>Vecto 4.0.3.3330 OFFICIAL RELEASE</a:t>
+              <a:t>Vecto 4.1.0.3392 RELEASE CANDIDATE</a:t>
             </a:r>
             <a:br>
               <a:rPr sz="2400"/>
@@ -12411,7 +13067,7 @@
                 <a:latin typeface="Arial"/>
                 <a:ea typeface="DejaVu Sans"/>
               </a:rPr>
-              <a:t>13.02.2024</a:t>
+              <a:t>15.04.2024</a:t>
             </a:r>
             <a:endParaRPr b="0" lang="en-US" sz="1600" spc="-1" strike="noStrike">
               <a:solidFill>
@@ -12434,8 +13090,8 @@
         </p:nvSpPr>
         <p:spPr>
           <a:xfrm>
-            <a:off x="323640" y="1639080"/>
-            <a:ext cx="8492760" cy="4449600"/>
+            <a:off x="323640" y="1459080"/>
+            <a:ext cx="8492400" cy="4657320"/>
           </a:xfrm>
           <a:prstGeom prst="rect">
             <a:avLst/>
@@ -12450,6 +13106,26 @@
             <a:noAutofit/>
           </a:bodyPr>
           <a:p>
+            <a:pPr marL="343080" indent="0" defTabSz="914400">
+              <a:lnSpc>
+                <a:spcPct val="100000"/>
+              </a:lnSpc>
+              <a:spcBef>
+                <a:spcPts val="320"/>
+              </a:spcBef>
+              <a:buNone/>
+              <a:tabLst>
+                <a:tab algn="l" pos="0"/>
+              </a:tabLst>
+            </a:pPr>
+            <a:endParaRPr b="0" lang="en-US" sz="1600" spc="-1" strike="noStrike">
+              <a:solidFill>
+                <a:srgbClr val="000000"/>
+              </a:solidFill>
+              <a:latin typeface="Arial"/>
+            </a:endParaRPr>
+          </a:p>
+          <a:p>
             <a:pPr marL="343080" indent="-343080" defTabSz="914400">
               <a:lnSpc>
                 <a:spcPct val="100000"/>
@@ -12474,7 +13150,7 @@
                 <a:latin typeface="Arial"/>
                 <a:ea typeface="DejaVu Sans"/>
               </a:rPr>
-              <a:t>Bugfixes</a:t>
+              <a:t>Bugfixes (4/4)</a:t>
             </a:r>
             <a:endParaRPr b="0" lang="en-US" sz="1600" spc="-1" strike="noStrike">
               <a:solidFill>
@@ -12508,7 +13184,7 @@
                 <a:latin typeface="Arial"/>
                 <a:ea typeface="DejaVu Sans"/>
               </a:rPr>
-              <a:t>CodeEU-293: DistanceRun got an unexpected response</a:t>
+              <a:t>CodeEU-519: Article10-2-issue | VECTO-4.0.3 | Order-Nr 10098181 | HEV P1 Error Mercedes-Benz and Setra Hybrid Buses</a:t>
             </a:r>
             <a:endParaRPr b="0" lang="en-US" sz="1200" spc="-1" strike="noStrike">
               <a:solidFill>
@@ -12542,7 +13218,7 @@
                 <a:latin typeface="Arial"/>
                 <a:ea typeface="DejaVu Sans"/>
               </a:rPr>
-              <a:t>CodeEU-298: Object reference not set to an instance of an object</a:t>
+              <a:t>CodeEU-527: Article10-2-issue | VECTO-4.0.3 | Order-Nr 28196233 | HEV P1 Error Mercedes-Benz and Setra Hybrid Buses</a:t>
             </a:r>
             <a:endParaRPr b="0" lang="en-US" sz="1200" spc="-1" strike="noStrike">
               <a:solidFill>
@@ -12576,7 +13252,7 @@
                 <a:latin typeface="Arial"/>
                 <a:ea typeface="DejaVu Sans"/>
               </a:rPr>
-              <a:t>CodeEU-300: Full drive torque miscalculation</a:t>
+              <a:t>CodeEU-528: Article10-2-issue | VECTO-4.0.3 | Order-Nr 28196652 | HEV P1 Error Mercedes-Benz and Setra Hybrid Buses</a:t>
             </a:r>
             <a:endParaRPr b="0" lang="en-US" sz="1200" spc="-1" strike="noStrike">
               <a:solidFill>
@@ -12610,7 +13286,7 @@
                 <a:latin typeface="Arial"/>
                 <a:ea typeface="DejaVu Sans"/>
               </a:rPr>
-              <a:t>CodeEU-336: Feature: Hashing tool must validate the previous step data for multi-step jobs</a:t>
+              <a:t>CodeEU-338: Eco-roll only, without engine stop, impact on CO2 emission</a:t>
             </a:r>
             <a:endParaRPr b="0" lang="en-US" sz="1200" spc="-1" strike="noStrike">
               <a:solidFill>
@@ -12644,7 +13320,7 @@
                 <a:latin typeface="Arial"/>
                 <a:ea typeface="DejaVu Sans"/>
               </a:rPr>
-              <a:t>CodeEU-337: Electric Citybus - ERROR with "31a-Specific" bus configuration</a:t>
+              <a:t>CodeEU-475: XML files loading in VTP Job not OK; No auxiliary data and torque curve visible, Job can't be saved in VECTO 4.0.3.3330</a:t>
             </a:r>
             <a:endParaRPr b="0" lang="en-US" sz="1200" spc="-1" strike="noStrike">
               <a:solidFill>
@@ -12678,347 +13354,7 @@
                 <a:latin typeface="Arial"/>
                 <a:ea typeface="DejaVu Sans"/>
               </a:rPr>
-              <a:t>CodeEU-343: Cannot simulate Primary Vehicle using vectocmd.exe</a:t>
-            </a:r>
-            <a:endParaRPr b="0" lang="en-US" sz="1200" spc="-1" strike="noStrike">
-              <a:solidFill>
-                <a:srgbClr val="000000"/>
-              </a:solidFill>
-              <a:latin typeface="Arial"/>
-            </a:endParaRPr>
-          </a:p>
-          <a:p>
-            <a:pPr lvl="1" marL="800280" indent="-343080" defTabSz="914400">
-              <a:lnSpc>
-                <a:spcPct val="100000"/>
-              </a:lnSpc>
-              <a:spcBef>
-                <a:spcPts val="320"/>
-              </a:spcBef>
-              <a:buClr>
-                <a:srgbClr val="000000"/>
-              </a:buClr>
-              <a:buFont typeface="Symbol"/>
-              <a:buChar char=""/>
-              <a:tabLst>
-                <a:tab algn="l" pos="1886040"/>
-              </a:tabLst>
-            </a:pPr>
-            <a:r>
-              <a:rPr b="0" lang="en-US" sz="1200" spc="-1" strike="noStrike">
-                <a:solidFill>
-                  <a:srgbClr val="000000"/>
-                </a:solidFill>
-                <a:latin typeface="Arial"/>
-                <a:ea typeface="DejaVu Sans"/>
-              </a:rPr>
-              <a:t>CodeEU-387: VECTO sometimes fails to properly read Tyre data from primary vehicle xml</a:t>
-            </a:r>
-            <a:endParaRPr b="0" lang="en-US" sz="1200" spc="-1" strike="noStrike">
-              <a:solidFill>
-                <a:srgbClr val="000000"/>
-              </a:solidFill>
-              <a:latin typeface="Arial"/>
-            </a:endParaRPr>
-          </a:p>
-          <a:p>
-            <a:pPr lvl="1" marL="800280" indent="-343080" defTabSz="914400">
-              <a:lnSpc>
-                <a:spcPct val="100000"/>
-              </a:lnSpc>
-              <a:spcBef>
-                <a:spcPts val="320"/>
-              </a:spcBef>
-              <a:buClr>
-                <a:srgbClr val="000000"/>
-              </a:buClr>
-              <a:buFont typeface="Symbol"/>
-              <a:buChar char=""/>
-              <a:tabLst>
-                <a:tab algn="l" pos="1886040"/>
-              </a:tabLst>
-            </a:pPr>
-            <a:r>
-              <a:rPr b="0" lang="en-US" sz="1200" spc="-1" strike="noStrike">
-                <a:solidFill>
-                  <a:srgbClr val="000000"/>
-                </a:solidFill>
-                <a:latin typeface="Arial"/>
-                <a:ea typeface="DejaVu Sans"/>
-              </a:rPr>
-              <a:t>CodeEU-427: Vehicle speed resulting to exceeding max gearbox speed</a:t>
-            </a:r>
-            <a:endParaRPr b="0" lang="en-US" sz="1200" spc="-1" strike="noStrike">
-              <a:solidFill>
-                <a:srgbClr val="000000"/>
-              </a:solidFill>
-              <a:latin typeface="Arial"/>
-            </a:endParaRPr>
-          </a:p>
-          <a:p>
-            <a:pPr lvl="1" marL="800280" indent="-343080" defTabSz="914400">
-              <a:lnSpc>
-                <a:spcPct val="100000"/>
-              </a:lnSpc>
-              <a:spcBef>
-                <a:spcPts val="320"/>
-              </a:spcBef>
-              <a:buClr>
-                <a:srgbClr val="000000"/>
-              </a:buClr>
-              <a:buFont typeface="Symbol"/>
-              <a:buChar char=""/>
-              <a:tabLst>
-                <a:tab algn="l" pos="1886040"/>
-              </a:tabLst>
-            </a:pPr>
-            <a:r>
-              <a:rPr b="0" lang="en-US" sz="1200" spc="-1" strike="noStrike">
-                <a:solidFill>
-                  <a:srgbClr val="000000"/>
-                </a:solidFill>
-                <a:latin typeface="Arial"/>
-                <a:ea typeface="DejaVu Sans"/>
-              </a:rPr>
-              <a:t>CodeEU-428: Remove speed safety margin for gearbox re-engaging</a:t>
-            </a:r>
-            <a:endParaRPr b="0" lang="en-US" sz="1200" spc="-1" strike="noStrike">
-              <a:solidFill>
-                <a:srgbClr val="000000"/>
-              </a:solidFill>
-              <a:latin typeface="Arial"/>
-            </a:endParaRPr>
-          </a:p>
-          <a:p>
-            <a:pPr lvl="1" marL="800280" indent="-343080" defTabSz="914400">
-              <a:lnSpc>
-                <a:spcPct val="100000"/>
-              </a:lnSpc>
-              <a:spcBef>
-                <a:spcPts val="320"/>
-              </a:spcBef>
-              <a:buClr>
-                <a:srgbClr val="000000"/>
-              </a:buClr>
-              <a:buFont typeface="Symbol"/>
-              <a:buChar char=""/>
-              <a:tabLst>
-                <a:tab algn="l" pos="1886040"/>
-              </a:tabLst>
-            </a:pPr>
-            <a:r>
-              <a:rPr b="0" lang="en-US" sz="1200" spc="-1" strike="noStrike">
-                <a:solidFill>
-                  <a:srgbClr val="000000"/>
-                </a:solidFill>
-                <a:latin typeface="Arial"/>
-                <a:ea typeface="DejaVu Sans"/>
-              </a:rPr>
-              <a:t>CodeEU-438: Mismatch XML schema vs Regulation (exempted vehicles)</a:t>
-            </a:r>
-            <a:endParaRPr b="0" lang="en-US" sz="1200" spc="-1" strike="noStrike">
-              <a:solidFill>
-                <a:srgbClr val="000000"/>
-              </a:solidFill>
-              <a:latin typeface="Arial"/>
-            </a:endParaRPr>
-          </a:p>
-          <a:p>
-            <a:pPr lvl="1" marL="800280" indent="-343080" defTabSz="914400">
-              <a:lnSpc>
-                <a:spcPct val="100000"/>
-              </a:lnSpc>
-              <a:spcBef>
-                <a:spcPts val="320"/>
-              </a:spcBef>
-              <a:buClr>
-                <a:srgbClr val="000000"/>
-              </a:buClr>
-              <a:buFont typeface="Symbol"/>
-              <a:buChar char=""/>
-              <a:tabLst>
-                <a:tab algn="l" pos="1886040"/>
-              </a:tabLst>
-            </a:pPr>
-            <a:r>
-              <a:rPr b="0" lang="en-US" sz="1200" spc="-1" strike="noStrike">
-                <a:solidFill>
-                  <a:srgbClr val="000000"/>
-                </a:solidFill>
-                <a:latin typeface="Arial"/>
-                <a:ea typeface="DejaVu Sans"/>
-              </a:rPr>
-              <a:t>CodeEU-248: Bus P2 hybrid VECTO error in urban cycle</a:t>
-            </a:r>
-            <a:endParaRPr b="0" lang="en-US" sz="1200" spc="-1" strike="noStrike">
-              <a:solidFill>
-                <a:srgbClr val="000000"/>
-              </a:solidFill>
-              <a:latin typeface="Arial"/>
-            </a:endParaRPr>
-          </a:p>
-          <a:p>
-            <a:pPr lvl="1" marL="800280" indent="-343080" defTabSz="914400">
-              <a:lnSpc>
-                <a:spcPct val="100000"/>
-              </a:lnSpc>
-              <a:spcBef>
-                <a:spcPts val="320"/>
-              </a:spcBef>
-              <a:buClr>
-                <a:srgbClr val="000000"/>
-              </a:buClr>
-              <a:buFont typeface="Symbol"/>
-              <a:buChar char=""/>
-              <a:tabLst>
-                <a:tab algn="l" pos="1886040"/>
-              </a:tabLst>
-            </a:pPr>
-            <a:r>
-              <a:rPr b="0" lang="en-US" sz="1200" spc="-1" strike="noStrike">
-                <a:solidFill>
-                  <a:srgbClr val="000000"/>
-                </a:solidFill>
-                <a:latin typeface="Arial"/>
-                <a:ea typeface="DejaVu Sans"/>
-              </a:rPr>
-              <a:t>CodeEU-278: Simulation crash when writing fuel consumption results to reports</a:t>
-            </a:r>
-            <a:endParaRPr b="0" lang="en-US" sz="1200" spc="-1" strike="noStrike">
-              <a:solidFill>
-                <a:srgbClr val="000000"/>
-              </a:solidFill>
-              <a:latin typeface="Arial"/>
-            </a:endParaRPr>
-          </a:p>
-          <a:p>
-            <a:pPr lvl="1" marL="800280" indent="-343080" defTabSz="914400">
-              <a:lnSpc>
-                <a:spcPct val="100000"/>
-              </a:lnSpc>
-              <a:spcBef>
-                <a:spcPts val="320"/>
-              </a:spcBef>
-              <a:buClr>
-                <a:srgbClr val="000000"/>
-              </a:buClr>
-              <a:buFont typeface="Symbol"/>
-              <a:buChar char=""/>
-              <a:tabLst>
-                <a:tab algn="l" pos="1886040"/>
-              </a:tabLst>
-            </a:pPr>
-            <a:r>
-              <a:rPr b="0" lang="en-US" sz="1200" spc="-1" strike="noStrike">
-                <a:solidFill>
-                  <a:srgbClr val="000000"/>
-                </a:solidFill>
-                <a:latin typeface="Arial"/>
-                <a:ea typeface="DejaVu Sans"/>
-              </a:rPr>
-              <a:t>CodeEU-284: New error message and failed simulation obtained for P2 hybrid buses</a:t>
-            </a:r>
-            <a:endParaRPr b="0" lang="en-US" sz="1200" spc="-1" strike="noStrike">
-              <a:solidFill>
-                <a:srgbClr val="000000"/>
-              </a:solidFill>
-              <a:latin typeface="Arial"/>
-            </a:endParaRPr>
-          </a:p>
-          <a:p>
-            <a:pPr lvl="1" marL="800280" indent="-343080" defTabSz="914400">
-              <a:lnSpc>
-                <a:spcPct val="100000"/>
-              </a:lnSpc>
-              <a:spcBef>
-                <a:spcPts val="320"/>
-              </a:spcBef>
-              <a:buClr>
-                <a:srgbClr val="000000"/>
-              </a:buClr>
-              <a:buFont typeface="Symbol"/>
-              <a:buChar char=""/>
-              <a:tabLst>
-                <a:tab algn="l" pos="1886040"/>
-              </a:tabLst>
-            </a:pPr>
-            <a:r>
-              <a:rPr b="0" lang="en-US" sz="1200" spc="-1" strike="noStrike">
-                <a:solidFill>
-                  <a:srgbClr val="000000"/>
-                </a:solidFill>
-                <a:latin typeface="Arial"/>
-                <a:ea typeface="DejaVu Sans"/>
-              </a:rPr>
-              <a:t>CodeEU-285: PEV vehicle error in routine to write the results with new vecto version  4.0.2.3275</a:t>
-            </a:r>
-            <a:endParaRPr b="0" lang="en-US" sz="1200" spc="-1" strike="noStrike">
-              <a:solidFill>
-                <a:srgbClr val="000000"/>
-              </a:solidFill>
-              <a:latin typeface="Arial"/>
-            </a:endParaRPr>
-          </a:p>
-          <a:p>
-            <a:pPr lvl="1" marL="800280" indent="-343080" defTabSz="914400">
-              <a:lnSpc>
-                <a:spcPct val="100000"/>
-              </a:lnSpc>
-              <a:spcBef>
-                <a:spcPts val="320"/>
-              </a:spcBef>
-              <a:buClr>
-                <a:srgbClr val="000000"/>
-              </a:buClr>
-              <a:buFont typeface="Symbol"/>
-              <a:buChar char=""/>
-              <a:tabLst>
-                <a:tab algn="l" pos="1886040"/>
-              </a:tabLst>
-            </a:pPr>
-            <a:r>
-              <a:rPr b="0" lang="en-US" sz="1200" spc="-1" strike="noStrike">
-                <a:solidFill>
-                  <a:srgbClr val="000000"/>
-                </a:solidFill>
-                <a:latin typeface="Arial"/>
-                <a:ea typeface="DejaVu Sans"/>
-              </a:rPr>
-              <a:t>CodeEU-287: PEV_IEPC error message:"can only operate on SI Objects with the same unit"</a:t>
-            </a:r>
-            <a:endParaRPr b="0" lang="en-US" sz="1200" spc="-1" strike="noStrike">
-              <a:solidFill>
-                <a:srgbClr val="000000"/>
-              </a:solidFill>
-              <a:latin typeface="Arial"/>
-            </a:endParaRPr>
-          </a:p>
-          <a:p>
-            <a:pPr lvl="1" marL="800280" indent="-343080" defTabSz="914400">
-              <a:lnSpc>
-                <a:spcPct val="100000"/>
-              </a:lnSpc>
-              <a:spcBef>
-                <a:spcPts val="320"/>
-              </a:spcBef>
-              <a:buClr>
-                <a:srgbClr val="000000"/>
-              </a:buClr>
-              <a:buFont typeface="Symbol"/>
-              <a:buChar char=""/>
-              <a:tabLst>
-                <a:tab algn="l" pos="1886040"/>
-              </a:tabLst>
-            </a:pPr>
-            <a:r>
-              <a:rPr b="0" lang="en-US" sz="1200" spc="-1" strike="noStrike">
-                <a:solidFill>
-                  <a:srgbClr val="000000"/>
-                </a:solidFill>
-                <a:latin typeface="Arial"/>
-                <a:ea typeface="DejaVu Sans"/>
-              </a:rPr>
-              <a:t>CodeEU-289: VECTO Simulation Error for bus with validated input data</a:t>
+              <a:t>CodeEU-610: VTP mode is broken due to changes in the Clutch component.</a:t>
             </a:r>
             <a:endParaRPr b="0" lang="en-US" sz="1200" spc="-1" strike="noStrike">
               <a:solidFill>
@@ -13072,7 +13408,7 @@
         <p:spPr>
           <a:xfrm>
             <a:off x="468360" y="476640"/>
-            <a:ext cx="8214120" cy="676800"/>
+            <a:ext cx="8213760" cy="676440"/>
           </a:xfrm>
           <a:prstGeom prst="rect">
             <a:avLst/>
@@ -13104,7 +13440,7 @@
                 <a:latin typeface="Arial"/>
                 <a:ea typeface="DejaVu Sans"/>
               </a:rPr>
-              <a:t>Vecto 4.0.2.3275 OFFICIAL RELEASE</a:t>
+              <a:t>Vecto 4.0.3.3330 OFFICIAL RELEASE</a:t>
             </a:r>
             <a:br>
               <a:rPr sz="2400"/>
@@ -13117,7 +13453,7 @@
                 <a:latin typeface="Arial"/>
                 <a:ea typeface="DejaVu Sans"/>
               </a:rPr>
-              <a:t>20.12.2023</a:t>
+              <a:t>13.02.2024</a:t>
             </a:r>
             <a:endParaRPr b="0" lang="en-US" sz="1600" spc="-1" strike="noStrike">
               <a:solidFill>
@@ -13141,7 +13477,7 @@
         <p:spPr>
           <a:xfrm>
             <a:off x="323640" y="1639080"/>
-            <a:ext cx="8492760" cy="4449600"/>
+            <a:ext cx="8492400" cy="4449240"/>
           </a:xfrm>
           <a:prstGeom prst="rect">
             <a:avLst/>
@@ -13180,7 +13516,7 @@
                 <a:latin typeface="Arial"/>
                 <a:ea typeface="DejaVu Sans"/>
               </a:rPr>
-              <a:t>Hotfix</a:t>
+              <a:t>Bugfixes</a:t>
             </a:r>
             <a:endParaRPr b="0" lang="en-US" sz="1600" spc="-1" strike="noStrike">
               <a:solidFill>
@@ -13214,7 +13550,7 @@
                 <a:latin typeface="Arial"/>
                 <a:ea typeface="DejaVu Sans"/>
               </a:rPr>
-              <a:t>CodeEU-273, CodeEU-274: Changes in the AMT shift strategy regarding idling speed caused simulation aborts</a:t>
+              <a:t>CodeEU-293: DistanceRun got an unexpected response</a:t>
             </a:r>
             <a:endParaRPr b="0" lang="en-US" sz="1200" spc="-1" strike="noStrike">
               <a:solidFill>
@@ -13248,7 +13584,483 @@
                 <a:latin typeface="Arial"/>
                 <a:ea typeface="DejaVu Sans"/>
               </a:rPr>
-              <a:t>CodeEU-260: regression fix handling overload buffer</a:t>
+              <a:t>CodeEU-298: Object reference not set to an instance of an object</a:t>
+            </a:r>
+            <a:endParaRPr b="0" lang="en-US" sz="1200" spc="-1" strike="noStrike">
+              <a:solidFill>
+                <a:srgbClr val="000000"/>
+              </a:solidFill>
+              <a:latin typeface="Arial"/>
+            </a:endParaRPr>
+          </a:p>
+          <a:p>
+            <a:pPr lvl="1" marL="800280" indent="-343080" defTabSz="914400">
+              <a:lnSpc>
+                <a:spcPct val="100000"/>
+              </a:lnSpc>
+              <a:spcBef>
+                <a:spcPts val="320"/>
+              </a:spcBef>
+              <a:buClr>
+                <a:srgbClr val="000000"/>
+              </a:buClr>
+              <a:buFont typeface="Symbol"/>
+              <a:buChar char=""/>
+              <a:tabLst>
+                <a:tab algn="l" pos="1886040"/>
+              </a:tabLst>
+            </a:pPr>
+            <a:r>
+              <a:rPr b="0" lang="en-US" sz="1200" spc="-1" strike="noStrike">
+                <a:solidFill>
+                  <a:srgbClr val="000000"/>
+                </a:solidFill>
+                <a:latin typeface="Arial"/>
+                <a:ea typeface="DejaVu Sans"/>
+              </a:rPr>
+              <a:t>CodeEU-300: Full drive torque miscalculation</a:t>
+            </a:r>
+            <a:endParaRPr b="0" lang="en-US" sz="1200" spc="-1" strike="noStrike">
+              <a:solidFill>
+                <a:srgbClr val="000000"/>
+              </a:solidFill>
+              <a:latin typeface="Arial"/>
+            </a:endParaRPr>
+          </a:p>
+          <a:p>
+            <a:pPr lvl="1" marL="800280" indent="-343080" defTabSz="914400">
+              <a:lnSpc>
+                <a:spcPct val="100000"/>
+              </a:lnSpc>
+              <a:spcBef>
+                <a:spcPts val="320"/>
+              </a:spcBef>
+              <a:buClr>
+                <a:srgbClr val="000000"/>
+              </a:buClr>
+              <a:buFont typeface="Symbol"/>
+              <a:buChar char=""/>
+              <a:tabLst>
+                <a:tab algn="l" pos="1886040"/>
+              </a:tabLst>
+            </a:pPr>
+            <a:r>
+              <a:rPr b="0" lang="en-US" sz="1200" spc="-1" strike="noStrike">
+                <a:solidFill>
+                  <a:srgbClr val="000000"/>
+                </a:solidFill>
+                <a:latin typeface="Arial"/>
+                <a:ea typeface="DejaVu Sans"/>
+              </a:rPr>
+              <a:t>CodeEU-336: Feature: Hashing tool must validate the previous step data for multi-step jobs</a:t>
+            </a:r>
+            <a:endParaRPr b="0" lang="en-US" sz="1200" spc="-1" strike="noStrike">
+              <a:solidFill>
+                <a:srgbClr val="000000"/>
+              </a:solidFill>
+              <a:latin typeface="Arial"/>
+            </a:endParaRPr>
+          </a:p>
+          <a:p>
+            <a:pPr lvl="1" marL="800280" indent="-343080" defTabSz="914400">
+              <a:lnSpc>
+                <a:spcPct val="100000"/>
+              </a:lnSpc>
+              <a:spcBef>
+                <a:spcPts val="320"/>
+              </a:spcBef>
+              <a:buClr>
+                <a:srgbClr val="000000"/>
+              </a:buClr>
+              <a:buFont typeface="Symbol"/>
+              <a:buChar char=""/>
+              <a:tabLst>
+                <a:tab algn="l" pos="1886040"/>
+              </a:tabLst>
+            </a:pPr>
+            <a:r>
+              <a:rPr b="0" lang="en-US" sz="1200" spc="-1" strike="noStrike">
+                <a:solidFill>
+                  <a:srgbClr val="000000"/>
+                </a:solidFill>
+                <a:latin typeface="Arial"/>
+                <a:ea typeface="DejaVu Sans"/>
+              </a:rPr>
+              <a:t>CodeEU-337: Electric Citybus - ERROR with "31a-Specific" bus configuration</a:t>
+            </a:r>
+            <a:endParaRPr b="0" lang="en-US" sz="1200" spc="-1" strike="noStrike">
+              <a:solidFill>
+                <a:srgbClr val="000000"/>
+              </a:solidFill>
+              <a:latin typeface="Arial"/>
+            </a:endParaRPr>
+          </a:p>
+          <a:p>
+            <a:pPr lvl="1" marL="800280" indent="-343080" defTabSz="914400">
+              <a:lnSpc>
+                <a:spcPct val="100000"/>
+              </a:lnSpc>
+              <a:spcBef>
+                <a:spcPts val="320"/>
+              </a:spcBef>
+              <a:buClr>
+                <a:srgbClr val="000000"/>
+              </a:buClr>
+              <a:buFont typeface="Symbol"/>
+              <a:buChar char=""/>
+              <a:tabLst>
+                <a:tab algn="l" pos="1886040"/>
+              </a:tabLst>
+            </a:pPr>
+            <a:r>
+              <a:rPr b="0" lang="en-US" sz="1200" spc="-1" strike="noStrike">
+                <a:solidFill>
+                  <a:srgbClr val="000000"/>
+                </a:solidFill>
+                <a:latin typeface="Arial"/>
+                <a:ea typeface="DejaVu Sans"/>
+              </a:rPr>
+              <a:t>CodeEU-343: Cannot simulate Primary Vehicle using vectocmd.exe</a:t>
+            </a:r>
+            <a:endParaRPr b="0" lang="en-US" sz="1200" spc="-1" strike="noStrike">
+              <a:solidFill>
+                <a:srgbClr val="000000"/>
+              </a:solidFill>
+              <a:latin typeface="Arial"/>
+            </a:endParaRPr>
+          </a:p>
+          <a:p>
+            <a:pPr lvl="1" marL="800280" indent="-343080" defTabSz="914400">
+              <a:lnSpc>
+                <a:spcPct val="100000"/>
+              </a:lnSpc>
+              <a:spcBef>
+                <a:spcPts val="320"/>
+              </a:spcBef>
+              <a:buClr>
+                <a:srgbClr val="000000"/>
+              </a:buClr>
+              <a:buFont typeface="Symbol"/>
+              <a:buChar char=""/>
+              <a:tabLst>
+                <a:tab algn="l" pos="1886040"/>
+              </a:tabLst>
+            </a:pPr>
+            <a:r>
+              <a:rPr b="0" lang="en-US" sz="1200" spc="-1" strike="noStrike">
+                <a:solidFill>
+                  <a:srgbClr val="000000"/>
+                </a:solidFill>
+                <a:latin typeface="Arial"/>
+                <a:ea typeface="DejaVu Sans"/>
+              </a:rPr>
+              <a:t>CodeEU-387: VECTO sometimes fails to properly read Tyre data from primary vehicle xml</a:t>
+            </a:r>
+            <a:endParaRPr b="0" lang="en-US" sz="1200" spc="-1" strike="noStrike">
+              <a:solidFill>
+                <a:srgbClr val="000000"/>
+              </a:solidFill>
+              <a:latin typeface="Arial"/>
+            </a:endParaRPr>
+          </a:p>
+          <a:p>
+            <a:pPr lvl="1" marL="800280" indent="-343080" defTabSz="914400">
+              <a:lnSpc>
+                <a:spcPct val="100000"/>
+              </a:lnSpc>
+              <a:spcBef>
+                <a:spcPts val="320"/>
+              </a:spcBef>
+              <a:buClr>
+                <a:srgbClr val="000000"/>
+              </a:buClr>
+              <a:buFont typeface="Symbol"/>
+              <a:buChar char=""/>
+              <a:tabLst>
+                <a:tab algn="l" pos="1886040"/>
+              </a:tabLst>
+            </a:pPr>
+            <a:r>
+              <a:rPr b="0" lang="en-US" sz="1200" spc="-1" strike="noStrike">
+                <a:solidFill>
+                  <a:srgbClr val="000000"/>
+                </a:solidFill>
+                <a:latin typeface="Arial"/>
+                <a:ea typeface="DejaVu Sans"/>
+              </a:rPr>
+              <a:t>CodeEU-427: Vehicle speed resulting to exceeding max gearbox speed</a:t>
+            </a:r>
+            <a:endParaRPr b="0" lang="en-US" sz="1200" spc="-1" strike="noStrike">
+              <a:solidFill>
+                <a:srgbClr val="000000"/>
+              </a:solidFill>
+              <a:latin typeface="Arial"/>
+            </a:endParaRPr>
+          </a:p>
+          <a:p>
+            <a:pPr lvl="1" marL="800280" indent="-343080" defTabSz="914400">
+              <a:lnSpc>
+                <a:spcPct val="100000"/>
+              </a:lnSpc>
+              <a:spcBef>
+                <a:spcPts val="320"/>
+              </a:spcBef>
+              <a:buClr>
+                <a:srgbClr val="000000"/>
+              </a:buClr>
+              <a:buFont typeface="Symbol"/>
+              <a:buChar char=""/>
+              <a:tabLst>
+                <a:tab algn="l" pos="1886040"/>
+              </a:tabLst>
+            </a:pPr>
+            <a:r>
+              <a:rPr b="0" lang="en-US" sz="1200" spc="-1" strike="noStrike">
+                <a:solidFill>
+                  <a:srgbClr val="000000"/>
+                </a:solidFill>
+                <a:latin typeface="Arial"/>
+                <a:ea typeface="DejaVu Sans"/>
+              </a:rPr>
+              <a:t>CodeEU-428: Remove speed safety margin for gearbox re-engaging</a:t>
+            </a:r>
+            <a:endParaRPr b="0" lang="en-US" sz="1200" spc="-1" strike="noStrike">
+              <a:solidFill>
+                <a:srgbClr val="000000"/>
+              </a:solidFill>
+              <a:latin typeface="Arial"/>
+            </a:endParaRPr>
+          </a:p>
+          <a:p>
+            <a:pPr lvl="1" marL="800280" indent="-343080" defTabSz="914400">
+              <a:lnSpc>
+                <a:spcPct val="100000"/>
+              </a:lnSpc>
+              <a:spcBef>
+                <a:spcPts val="320"/>
+              </a:spcBef>
+              <a:buClr>
+                <a:srgbClr val="000000"/>
+              </a:buClr>
+              <a:buFont typeface="Symbol"/>
+              <a:buChar char=""/>
+              <a:tabLst>
+                <a:tab algn="l" pos="1886040"/>
+              </a:tabLst>
+            </a:pPr>
+            <a:r>
+              <a:rPr b="0" lang="en-US" sz="1200" spc="-1" strike="noStrike">
+                <a:solidFill>
+                  <a:srgbClr val="000000"/>
+                </a:solidFill>
+                <a:latin typeface="Arial"/>
+                <a:ea typeface="DejaVu Sans"/>
+              </a:rPr>
+              <a:t>CodeEU-438: Mismatch XML schema vs Regulation (exempted vehicles)</a:t>
+            </a:r>
+            <a:endParaRPr b="0" lang="en-US" sz="1200" spc="-1" strike="noStrike">
+              <a:solidFill>
+                <a:srgbClr val="000000"/>
+              </a:solidFill>
+              <a:latin typeface="Arial"/>
+            </a:endParaRPr>
+          </a:p>
+          <a:p>
+            <a:pPr lvl="1" marL="800280" indent="-343080" defTabSz="914400">
+              <a:lnSpc>
+                <a:spcPct val="100000"/>
+              </a:lnSpc>
+              <a:spcBef>
+                <a:spcPts val="320"/>
+              </a:spcBef>
+              <a:buClr>
+                <a:srgbClr val="000000"/>
+              </a:buClr>
+              <a:buFont typeface="Symbol"/>
+              <a:buChar char=""/>
+              <a:tabLst>
+                <a:tab algn="l" pos="1886040"/>
+              </a:tabLst>
+            </a:pPr>
+            <a:r>
+              <a:rPr b="0" lang="en-US" sz="1200" spc="-1" strike="noStrike">
+                <a:solidFill>
+                  <a:srgbClr val="000000"/>
+                </a:solidFill>
+                <a:latin typeface="Arial"/>
+                <a:ea typeface="DejaVu Sans"/>
+              </a:rPr>
+              <a:t>CodeEU-248: Bus P2 hybrid VECTO error in urban cycle</a:t>
+            </a:r>
+            <a:endParaRPr b="0" lang="en-US" sz="1200" spc="-1" strike="noStrike">
+              <a:solidFill>
+                <a:srgbClr val="000000"/>
+              </a:solidFill>
+              <a:latin typeface="Arial"/>
+            </a:endParaRPr>
+          </a:p>
+          <a:p>
+            <a:pPr lvl="1" marL="800280" indent="-343080" defTabSz="914400">
+              <a:lnSpc>
+                <a:spcPct val="100000"/>
+              </a:lnSpc>
+              <a:spcBef>
+                <a:spcPts val="320"/>
+              </a:spcBef>
+              <a:buClr>
+                <a:srgbClr val="000000"/>
+              </a:buClr>
+              <a:buFont typeface="Symbol"/>
+              <a:buChar char=""/>
+              <a:tabLst>
+                <a:tab algn="l" pos="1886040"/>
+              </a:tabLst>
+            </a:pPr>
+            <a:r>
+              <a:rPr b="0" lang="en-US" sz="1200" spc="-1" strike="noStrike">
+                <a:solidFill>
+                  <a:srgbClr val="000000"/>
+                </a:solidFill>
+                <a:latin typeface="Arial"/>
+                <a:ea typeface="DejaVu Sans"/>
+              </a:rPr>
+              <a:t>CodeEU-278: Simulation crash when writing fuel consumption results to reports</a:t>
+            </a:r>
+            <a:endParaRPr b="0" lang="en-US" sz="1200" spc="-1" strike="noStrike">
+              <a:solidFill>
+                <a:srgbClr val="000000"/>
+              </a:solidFill>
+              <a:latin typeface="Arial"/>
+            </a:endParaRPr>
+          </a:p>
+          <a:p>
+            <a:pPr lvl="1" marL="800280" indent="-343080" defTabSz="914400">
+              <a:lnSpc>
+                <a:spcPct val="100000"/>
+              </a:lnSpc>
+              <a:spcBef>
+                <a:spcPts val="320"/>
+              </a:spcBef>
+              <a:buClr>
+                <a:srgbClr val="000000"/>
+              </a:buClr>
+              <a:buFont typeface="Symbol"/>
+              <a:buChar char=""/>
+              <a:tabLst>
+                <a:tab algn="l" pos="1886040"/>
+              </a:tabLst>
+            </a:pPr>
+            <a:r>
+              <a:rPr b="0" lang="en-US" sz="1200" spc="-1" strike="noStrike">
+                <a:solidFill>
+                  <a:srgbClr val="000000"/>
+                </a:solidFill>
+                <a:latin typeface="Arial"/>
+                <a:ea typeface="DejaVu Sans"/>
+              </a:rPr>
+              <a:t>CodeEU-284: New error message and failed simulation obtained for P2 hybrid buses</a:t>
+            </a:r>
+            <a:endParaRPr b="0" lang="en-US" sz="1200" spc="-1" strike="noStrike">
+              <a:solidFill>
+                <a:srgbClr val="000000"/>
+              </a:solidFill>
+              <a:latin typeface="Arial"/>
+            </a:endParaRPr>
+          </a:p>
+          <a:p>
+            <a:pPr lvl="1" marL="800280" indent="-343080" defTabSz="914400">
+              <a:lnSpc>
+                <a:spcPct val="100000"/>
+              </a:lnSpc>
+              <a:spcBef>
+                <a:spcPts val="320"/>
+              </a:spcBef>
+              <a:buClr>
+                <a:srgbClr val="000000"/>
+              </a:buClr>
+              <a:buFont typeface="Symbol"/>
+              <a:buChar char=""/>
+              <a:tabLst>
+                <a:tab algn="l" pos="1886040"/>
+              </a:tabLst>
+            </a:pPr>
+            <a:r>
+              <a:rPr b="0" lang="en-US" sz="1200" spc="-1" strike="noStrike">
+                <a:solidFill>
+                  <a:srgbClr val="000000"/>
+                </a:solidFill>
+                <a:latin typeface="Arial"/>
+                <a:ea typeface="DejaVu Sans"/>
+              </a:rPr>
+              <a:t>CodeEU-285: PEV vehicle error in routine to write the results with new vecto version  4.0.2.3275</a:t>
+            </a:r>
+            <a:endParaRPr b="0" lang="en-US" sz="1200" spc="-1" strike="noStrike">
+              <a:solidFill>
+                <a:srgbClr val="000000"/>
+              </a:solidFill>
+              <a:latin typeface="Arial"/>
+            </a:endParaRPr>
+          </a:p>
+          <a:p>
+            <a:pPr lvl="1" marL="800280" indent="-343080" defTabSz="914400">
+              <a:lnSpc>
+                <a:spcPct val="100000"/>
+              </a:lnSpc>
+              <a:spcBef>
+                <a:spcPts val="320"/>
+              </a:spcBef>
+              <a:buClr>
+                <a:srgbClr val="000000"/>
+              </a:buClr>
+              <a:buFont typeface="Symbol"/>
+              <a:buChar char=""/>
+              <a:tabLst>
+                <a:tab algn="l" pos="1886040"/>
+              </a:tabLst>
+            </a:pPr>
+            <a:r>
+              <a:rPr b="0" lang="en-US" sz="1200" spc="-1" strike="noStrike">
+                <a:solidFill>
+                  <a:srgbClr val="000000"/>
+                </a:solidFill>
+                <a:latin typeface="Arial"/>
+                <a:ea typeface="DejaVu Sans"/>
+              </a:rPr>
+              <a:t>CodeEU-287: PEV_IEPC error message:"can only operate on SI Objects with the same unit"</a:t>
+            </a:r>
+            <a:endParaRPr b="0" lang="en-US" sz="1200" spc="-1" strike="noStrike">
+              <a:solidFill>
+                <a:srgbClr val="000000"/>
+              </a:solidFill>
+              <a:latin typeface="Arial"/>
+            </a:endParaRPr>
+          </a:p>
+          <a:p>
+            <a:pPr lvl="1" marL="800280" indent="-343080" defTabSz="914400">
+              <a:lnSpc>
+                <a:spcPct val="100000"/>
+              </a:lnSpc>
+              <a:spcBef>
+                <a:spcPts val="320"/>
+              </a:spcBef>
+              <a:buClr>
+                <a:srgbClr val="000000"/>
+              </a:buClr>
+              <a:buFont typeface="Symbol"/>
+              <a:buChar char=""/>
+              <a:tabLst>
+                <a:tab algn="l" pos="1886040"/>
+              </a:tabLst>
+            </a:pPr>
+            <a:r>
+              <a:rPr b="0" lang="en-US" sz="1200" spc="-1" strike="noStrike">
+                <a:solidFill>
+                  <a:srgbClr val="000000"/>
+                </a:solidFill>
+                <a:latin typeface="Arial"/>
+                <a:ea typeface="DejaVu Sans"/>
+              </a:rPr>
+              <a:t>CodeEU-289: VECTO Simulation Error for bus with validated input data</a:t>
             </a:r>
             <a:endParaRPr b="0" lang="en-US" sz="1200" spc="-1" strike="noStrike">
               <a:solidFill>
@@ -13302,7 +14114,7 @@
         <p:spPr>
           <a:xfrm>
             <a:off x="468360" y="476640"/>
-            <a:ext cx="8214120" cy="676800"/>
+            <a:ext cx="8213760" cy="676440"/>
           </a:xfrm>
           <a:prstGeom prst="rect">
             <a:avLst/>
@@ -13334,7 +14146,7 @@
                 <a:latin typeface="Arial"/>
                 <a:ea typeface="DejaVu Sans"/>
               </a:rPr>
-              <a:t>Vecto 4.0.2.3273 OFFICIAL RELEASE</a:t>
+              <a:t>Vecto 4.0.2.3275 OFFICIAL RELEASE</a:t>
             </a:r>
             <a:br>
               <a:rPr sz="2400"/>
@@ -13347,7 +14159,7 @@
                 <a:latin typeface="Arial"/>
                 <a:ea typeface="DejaVu Sans"/>
               </a:rPr>
-              <a:t>18.12.2023</a:t>
+              <a:t>20.12.2023</a:t>
             </a:r>
             <a:endParaRPr b="0" lang="en-US" sz="1600" spc="-1" strike="noStrike">
               <a:solidFill>
@@ -13370,8 +14182,8 @@
         </p:nvSpPr>
         <p:spPr>
           <a:xfrm>
-            <a:off x="323640" y="1268640"/>
-            <a:ext cx="8492760" cy="4820040"/>
+            <a:off x="323640" y="1639080"/>
+            <a:ext cx="8492400" cy="4449240"/>
           </a:xfrm>
           <a:prstGeom prst="rect">
             <a:avLst/>
@@ -13410,7 +14222,7 @@
                 <a:latin typeface="Arial"/>
                 <a:ea typeface="DejaVu Sans"/>
               </a:rPr>
-              <a:t>Bugfixes (1/2)</a:t>
+              <a:t>Hotfix</a:t>
             </a:r>
             <a:endParaRPr b="0" lang="en-US" sz="1600" spc="-1" strike="noStrike">
               <a:solidFill>
@@ -13444,7 +14256,7 @@
                 <a:latin typeface="Arial"/>
                 <a:ea typeface="DejaVu Sans"/>
               </a:rPr>
-              <a:t>CodeEU-94: DistanceRun got an unexpected response</a:t>
+              <a:t>CodeEU-273, CodeEU-274: Changes in the AMT shift strategy regarding idling speed caused simulation aborts</a:t>
             </a:r>
             <a:endParaRPr b="0" lang="en-US" sz="1200" spc="-1" strike="noStrike">
               <a:solidFill>
@@ -13478,604 +14290,9 @@
                 <a:latin typeface="Arial"/>
                 <a:ea typeface="DejaVu Sans"/>
               </a:rPr>
-              <a:t>CodeEU-153: DrivingActionAccelerate: Failed to find operating point after Overload</a:t>
+              <a:t>CodeEU-260: regression fix handling overload buffer</a:t>
             </a:r>
             <a:endParaRPr b="0" lang="en-US" sz="1200" spc="-1" strike="noStrike">
-              <a:solidFill>
-                <a:srgbClr val="000000"/>
-              </a:solidFill>
-              <a:latin typeface="Arial"/>
-            </a:endParaRPr>
-          </a:p>
-          <a:p>
-            <a:pPr lvl="1" marL="800280" indent="-343080" defTabSz="914400">
-              <a:lnSpc>
-                <a:spcPct val="100000"/>
-              </a:lnSpc>
-              <a:spcBef>
-                <a:spcPts val="320"/>
-              </a:spcBef>
-              <a:buClr>
-                <a:srgbClr val="000000"/>
-              </a:buClr>
-              <a:buFont typeface="Symbol"/>
-              <a:buChar char=""/>
-              <a:tabLst>
-                <a:tab algn="l" pos="1886040"/>
-              </a:tabLst>
-            </a:pPr>
-            <a:r>
-              <a:rPr b="0" lang="en-US" sz="1200" spc="-1" strike="noStrike">
-                <a:solidFill>
-                  <a:srgbClr val="000000"/>
-                </a:solidFill>
-                <a:latin typeface="Arial"/>
-                <a:ea typeface="DejaVu Sans"/>
-              </a:rPr>
-              <a:t>CodeEU-158: Urban RefLoad DrivingActionAccelerate: Failed to find operating point (IEPC Wheelhub 1 measured)</a:t>
-            </a:r>
-            <a:endParaRPr b="0" lang="en-US" sz="1200" spc="-1" strike="noStrike">
-              <a:solidFill>
-                <a:srgbClr val="000000"/>
-              </a:solidFill>
-              <a:latin typeface="Arial"/>
-            </a:endParaRPr>
-          </a:p>
-          <a:p>
-            <a:pPr lvl="1" marL="800280" indent="-343080" defTabSz="914400">
-              <a:lnSpc>
-                <a:spcPct val="100000"/>
-              </a:lnSpc>
-              <a:spcBef>
-                <a:spcPts val="320"/>
-              </a:spcBef>
-              <a:buClr>
-                <a:srgbClr val="000000"/>
-              </a:buClr>
-              <a:buFont typeface="Symbol"/>
-              <a:buChar char=""/>
-              <a:tabLst>
-                <a:tab algn="l" pos="1886040"/>
-              </a:tabLst>
-            </a:pPr>
-            <a:r>
-              <a:rPr b="0" lang="en-US" sz="1200" spc="-1" strike="noStrike">
-                <a:solidFill>
-                  <a:srgbClr val="000000"/>
-                </a:solidFill>
-                <a:latin typeface="Arial"/>
-                <a:ea typeface="DejaVu Sans"/>
-              </a:rPr>
-              <a:t>CodeEU-168: Vecto Declaration Simulation with P1-Hybrid shows multiple errors - Simulation Aborts!</a:t>
-            </a:r>
-            <a:endParaRPr b="0" lang="en-US" sz="1200" spc="-1" strike="noStrike">
-              <a:solidFill>
-                <a:srgbClr val="000000"/>
-              </a:solidFill>
-              <a:latin typeface="Arial"/>
-            </a:endParaRPr>
-          </a:p>
-          <a:p>
-            <a:pPr lvl="1" marL="800280" indent="-343080" defTabSz="914400">
-              <a:lnSpc>
-                <a:spcPct val="100000"/>
-              </a:lnSpc>
-              <a:spcBef>
-                <a:spcPts val="320"/>
-              </a:spcBef>
-              <a:buClr>
-                <a:srgbClr val="000000"/>
-              </a:buClr>
-              <a:buFont typeface="Symbol"/>
-              <a:buChar char=""/>
-              <a:tabLst>
-                <a:tab algn="l" pos="1886040"/>
-              </a:tabLst>
-            </a:pPr>
-            <a:r>
-              <a:rPr b="0" lang="en-US" sz="1200" spc="-1" strike="noStrike">
-                <a:solidFill>
-                  <a:srgbClr val="000000"/>
-                </a:solidFill>
-                <a:latin typeface="Arial"/>
-                <a:ea typeface="DejaVu Sans"/>
-              </a:rPr>
-              <a:t>CodeEU-191: Boosting limits HEV ovc are not working</a:t>
-            </a:r>
-            <a:endParaRPr b="0" lang="en-US" sz="1200" spc="-1" strike="noStrike">
-              <a:solidFill>
-                <a:srgbClr val="000000"/>
-              </a:solidFill>
-              <a:latin typeface="Arial"/>
-            </a:endParaRPr>
-          </a:p>
-          <a:p>
-            <a:pPr lvl="1" marL="800280" indent="-343080" defTabSz="914400">
-              <a:lnSpc>
-                <a:spcPct val="100000"/>
-              </a:lnSpc>
-              <a:spcBef>
-                <a:spcPts val="320"/>
-              </a:spcBef>
-              <a:buClr>
-                <a:srgbClr val="000000"/>
-              </a:buClr>
-              <a:buFont typeface="Symbol"/>
-              <a:buChar char=""/>
-              <a:tabLst>
-                <a:tab algn="l" pos="1886040"/>
-              </a:tabLst>
-            </a:pPr>
-            <a:r>
-              <a:rPr b="0" lang="en-US" sz="1200" spc="-1" strike="noStrike">
-                <a:solidFill>
-                  <a:srgbClr val="000000"/>
-                </a:solidFill>
-                <a:latin typeface="Arial"/>
-                <a:ea typeface="DejaVu Sans"/>
-              </a:rPr>
-              <a:t>CodeEU-202: EMS Standard Values: Continuous/Overload Torque 0 Nm</a:t>
-            </a:r>
-            <a:endParaRPr b="0" lang="en-US" sz="1200" spc="-1" strike="noStrike">
-              <a:solidFill>
-                <a:srgbClr val="000000"/>
-              </a:solidFill>
-              <a:latin typeface="Arial"/>
-            </a:endParaRPr>
-          </a:p>
-          <a:p>
-            <a:pPr lvl="1" marL="800280" indent="-343080" defTabSz="914400">
-              <a:lnSpc>
-                <a:spcPct val="100000"/>
-              </a:lnSpc>
-              <a:spcBef>
-                <a:spcPts val="320"/>
-              </a:spcBef>
-              <a:buClr>
-                <a:srgbClr val="000000"/>
-              </a:buClr>
-              <a:buFont typeface="Symbol"/>
-              <a:buChar char=""/>
-              <a:tabLst>
-                <a:tab algn="l" pos="1886040"/>
-              </a:tabLst>
-            </a:pPr>
-            <a:r>
-              <a:rPr b="0" lang="en-US" sz="1200" spc="-1" strike="noStrike">
-                <a:solidFill>
-                  <a:srgbClr val="000000"/>
-                </a:solidFill>
-                <a:latin typeface="Arial"/>
-                <a:ea typeface="DejaVu Sans"/>
-              </a:rPr>
-              <a:t>CodeEU-203: HybridStrategy error for IHPC type 1 hybrid lorry</a:t>
-            </a:r>
-            <a:endParaRPr b="0" lang="en-US" sz="1200" spc="-1" strike="noStrike">
-              <a:solidFill>
-                <a:srgbClr val="000000"/>
-              </a:solidFill>
-              <a:latin typeface="Arial"/>
-            </a:endParaRPr>
-          </a:p>
-          <a:p>
-            <a:pPr lvl="1" marL="800280" indent="-343080" defTabSz="914400">
-              <a:lnSpc>
-                <a:spcPct val="100000"/>
-              </a:lnSpc>
-              <a:spcBef>
-                <a:spcPts val="320"/>
-              </a:spcBef>
-              <a:buClr>
-                <a:srgbClr val="000000"/>
-              </a:buClr>
-              <a:buFont typeface="Symbol"/>
-              <a:buChar char=""/>
-              <a:tabLst>
-                <a:tab algn="l" pos="1886040"/>
-              </a:tabLst>
-            </a:pPr>
-            <a:r>
-              <a:rPr b="0" lang="en-US" sz="1200" spc="-1" strike="noStrike">
-                <a:solidFill>
-                  <a:srgbClr val="000000"/>
-                </a:solidFill>
-                <a:latin typeface="Arial"/>
-                <a:ea typeface="DejaVu Sans"/>
-              </a:rPr>
-              <a:t>CodeEU-206: VTP + PEMS test done by Renault Trucks France - VECTO tool errors most probably linked to automatic gearbox (with torque converter)</a:t>
-            </a:r>
-            <a:endParaRPr b="0" lang="en-US" sz="1200" spc="-1" strike="noStrike">
-              <a:solidFill>
-                <a:srgbClr val="000000"/>
-              </a:solidFill>
-              <a:latin typeface="Arial"/>
-            </a:endParaRPr>
-          </a:p>
-          <a:p>
-            <a:pPr lvl="1" marL="800280" indent="-343080" defTabSz="914400">
-              <a:lnSpc>
-                <a:spcPct val="100000"/>
-              </a:lnSpc>
-              <a:spcBef>
-                <a:spcPts val="320"/>
-              </a:spcBef>
-              <a:buClr>
-                <a:srgbClr val="000000"/>
-              </a:buClr>
-              <a:buFont typeface="Symbol"/>
-              <a:buChar char=""/>
-              <a:tabLst>
-                <a:tab algn="l" pos="1886040"/>
-              </a:tabLst>
-            </a:pPr>
-            <a:r>
-              <a:rPr b="0" lang="en-US" sz="1200" spc="-1" strike="noStrike">
-                <a:solidFill>
-                  <a:srgbClr val="000000"/>
-                </a:solidFill>
-                <a:latin typeface="Arial"/>
-                <a:ea typeface="DejaVu Sans"/>
-              </a:rPr>
-              <a:t>CodeEU-211: Hybrid P1 configurations with errors</a:t>
-            </a:r>
-            <a:endParaRPr b="0" lang="en-US" sz="1200" spc="-1" strike="noStrike">
-              <a:solidFill>
-                <a:srgbClr val="000000"/>
-              </a:solidFill>
-              <a:latin typeface="Arial"/>
-            </a:endParaRPr>
-          </a:p>
-          <a:p>
-            <a:pPr lvl="1" marL="800280" indent="-343080" defTabSz="914400">
-              <a:lnSpc>
-                <a:spcPct val="100000"/>
-              </a:lnSpc>
-              <a:spcBef>
-                <a:spcPts val="320"/>
-              </a:spcBef>
-              <a:buClr>
-                <a:srgbClr val="000000"/>
-              </a:buClr>
-              <a:buFont typeface="Symbol"/>
-              <a:buChar char=""/>
-              <a:tabLst>
-                <a:tab algn="l" pos="1886040"/>
-              </a:tabLst>
-            </a:pPr>
-            <a:r>
-              <a:rPr b="0" lang="en-US" sz="1200" spc="-1" strike="noStrike">
-                <a:solidFill>
-                  <a:srgbClr val="000000"/>
-                </a:solidFill>
-                <a:latin typeface="Arial"/>
-                <a:ea typeface="DejaVu Sans"/>
-              </a:rPr>
-              <a:t>CodeEU-215: MultiStep tool help</a:t>
-            </a:r>
-            <a:endParaRPr b="0" lang="en-US" sz="1200" spc="-1" strike="noStrike">
-              <a:solidFill>
-                <a:srgbClr val="000000"/>
-              </a:solidFill>
-              <a:latin typeface="Arial"/>
-            </a:endParaRPr>
-          </a:p>
-          <a:p>
-            <a:pPr lvl="1" marL="800280" indent="-343080" defTabSz="914400">
-              <a:lnSpc>
-                <a:spcPct val="100000"/>
-              </a:lnSpc>
-              <a:spcBef>
-                <a:spcPts val="320"/>
-              </a:spcBef>
-              <a:buClr>
-                <a:srgbClr val="000000"/>
-              </a:buClr>
-              <a:buFont typeface="Symbol"/>
-              <a:buChar char=""/>
-              <a:tabLst>
-                <a:tab algn="l" pos="1886040"/>
-              </a:tabLst>
-            </a:pPr>
-            <a:r>
-              <a:rPr b="0" lang="en-US" sz="1200" spc="-1" strike="noStrike">
-                <a:solidFill>
-                  <a:srgbClr val="000000"/>
-                </a:solidFill>
-                <a:latin typeface="Arial"/>
-                <a:ea typeface="DejaVu Sans"/>
-              </a:rPr>
-              <a:t>CodeEU-216: NrOfGears in CIF is 1 for IEPC no matter how many gears it has</a:t>
-            </a:r>
-            <a:endParaRPr b="0" lang="en-US" sz="1200" spc="-1" strike="noStrike">
-              <a:solidFill>
-                <a:srgbClr val="000000"/>
-              </a:solidFill>
-              <a:latin typeface="Arial"/>
-            </a:endParaRPr>
-          </a:p>
-          <a:p>
-            <a:pPr lvl="1" marL="800280" indent="-343080" defTabSz="914400">
-              <a:lnSpc>
-                <a:spcPct val="100000"/>
-              </a:lnSpc>
-              <a:spcBef>
-                <a:spcPts val="320"/>
-              </a:spcBef>
-              <a:buClr>
-                <a:srgbClr val="000000"/>
-              </a:buClr>
-              <a:buFont typeface="Symbol"/>
-              <a:buChar char=""/>
-              <a:tabLst>
-                <a:tab algn="l" pos="1886040"/>
-              </a:tabLst>
-            </a:pPr>
-            <a:r>
-              <a:rPr b="0" lang="en-US" sz="1200" spc="-1" strike="noStrike">
-                <a:solidFill>
-                  <a:srgbClr val="000000"/>
-                </a:solidFill>
-                <a:latin typeface="Arial"/>
-                <a:ea typeface="DejaVu Sans"/>
-              </a:rPr>
-              <a:t>CodeEU-220: Error manual transmission 2. gear</a:t>
-            </a:r>
-            <a:endParaRPr b="0" lang="en-US" sz="1200" spc="-1" strike="noStrike">
-              <a:solidFill>
-                <a:srgbClr val="000000"/>
-              </a:solidFill>
-              <a:latin typeface="Arial"/>
-            </a:endParaRPr>
-          </a:p>
-          <a:p>
-            <a:pPr lvl="1" marL="800280" indent="-343080" defTabSz="914400">
-              <a:lnSpc>
-                <a:spcPct val="100000"/>
-              </a:lnSpc>
-              <a:spcBef>
-                <a:spcPts val="320"/>
-              </a:spcBef>
-              <a:buClr>
-                <a:srgbClr val="000000"/>
-              </a:buClr>
-              <a:buFont typeface="Symbol"/>
-              <a:buChar char=""/>
-              <a:tabLst>
-                <a:tab algn="l" pos="1886040"/>
-              </a:tabLst>
-            </a:pPr>
-            <a:r>
-              <a:rPr b="0" lang="en-US" sz="1200" spc="-1" strike="noStrike">
-                <a:solidFill>
-                  <a:srgbClr val="000000"/>
-                </a:solidFill>
-                <a:latin typeface="Arial"/>
-                <a:ea typeface="DejaVu Sans"/>
-              </a:rPr>
-              <a:t>CodeEU-224: Issue with PEV complete vehicle simulation (Vecto MultiStage)</a:t>
-            </a:r>
-            <a:endParaRPr b="0" lang="en-US" sz="1200" spc="-1" strike="noStrike">
-              <a:solidFill>
-                <a:srgbClr val="000000"/>
-              </a:solidFill>
-              <a:latin typeface="Arial"/>
-            </a:endParaRPr>
-          </a:p>
-          <a:p>
-            <a:pPr lvl="1" marL="800280" indent="-343080" defTabSz="914400">
-              <a:lnSpc>
-                <a:spcPct val="100000"/>
-              </a:lnSpc>
-              <a:spcBef>
-                <a:spcPts val="320"/>
-              </a:spcBef>
-              <a:buClr>
-                <a:srgbClr val="000000"/>
-              </a:buClr>
-              <a:buFont typeface="Symbol"/>
-              <a:buChar char=""/>
-              <a:tabLst>
-                <a:tab algn="l" pos="1886040"/>
-              </a:tabLst>
-            </a:pPr>
-            <a:r>
-              <a:rPr b="0" lang="en-US" sz="1200" spc="-1" strike="noStrike">
-                <a:solidFill>
-                  <a:srgbClr val="000000"/>
-                </a:solidFill>
-                <a:latin typeface="Arial"/>
-                <a:ea typeface="DejaVu Sans"/>
-              </a:rPr>
-              <a:t>CodeEU-231: IVECO CONFIDENTIAL : hybrid buses completed simulation aborted</a:t>
-            </a:r>
-            <a:endParaRPr b="0" lang="en-US" sz="1200" spc="-1" strike="noStrike">
-              <a:solidFill>
-                <a:srgbClr val="000000"/>
-              </a:solidFill>
-              <a:latin typeface="Arial"/>
-            </a:endParaRPr>
-          </a:p>
-          <a:p>
-            <a:pPr lvl="1" marL="800280" indent="-343080" defTabSz="914400">
-              <a:lnSpc>
-                <a:spcPct val="100000"/>
-              </a:lnSpc>
-              <a:spcBef>
-                <a:spcPts val="320"/>
-              </a:spcBef>
-              <a:buClr>
-                <a:srgbClr val="000000"/>
-              </a:buClr>
-              <a:buFont typeface="Symbol"/>
-              <a:buChar char=""/>
-              <a:tabLst>
-                <a:tab algn="l" pos="1886040"/>
-              </a:tabLst>
-            </a:pPr>
-            <a:r>
-              <a:rPr b="0" lang="en-US" sz="1200" spc="-1" strike="noStrike">
-                <a:solidFill>
-                  <a:srgbClr val="000000"/>
-                </a:solidFill>
-                <a:latin typeface="Arial"/>
-                <a:ea typeface="DejaVu Sans"/>
-              </a:rPr>
-              <a:t>CodeEU-234: Error Conventional Lorry Gear: 1C DistanceRun got an unexpected response</a:t>
-            </a:r>
-            <a:endParaRPr b="0" lang="en-US" sz="1200" spc="-1" strike="noStrike">
-              <a:solidFill>
-                <a:srgbClr val="000000"/>
-              </a:solidFill>
-              <a:latin typeface="Arial"/>
-            </a:endParaRPr>
-          </a:p>
-          <a:p>
-            <a:pPr lvl="1" marL="800280" indent="-343080" defTabSz="914400">
-              <a:lnSpc>
-                <a:spcPct val="100000"/>
-              </a:lnSpc>
-              <a:spcBef>
-                <a:spcPts val="320"/>
-              </a:spcBef>
-              <a:buClr>
-                <a:srgbClr val="000000"/>
-              </a:buClr>
-              <a:buFont typeface="Symbol"/>
-              <a:buChar char=""/>
-              <a:tabLst>
-                <a:tab algn="l" pos="1886040"/>
-              </a:tabLst>
-            </a:pPr>
-            <a:r>
-              <a:rPr b="0" lang="en-US" sz="1200" spc="-1" strike="noStrike">
-                <a:solidFill>
-                  <a:srgbClr val="000000"/>
-                </a:solidFill>
-                <a:latin typeface="Arial"/>
-                <a:ea typeface="DejaVu Sans"/>
-              </a:rPr>
-              <a:t>CodeEU-235: Tyre error calculation buses "invalid xsi:type 'TyreDataDeclarationType'"</a:t>
-            </a:r>
-            <a:endParaRPr b="0" lang="en-US" sz="1200" spc="-1" strike="noStrike">
-              <a:solidFill>
-                <a:srgbClr val="000000"/>
-              </a:solidFill>
-              <a:latin typeface="Arial"/>
-            </a:endParaRPr>
-          </a:p>
-          <a:p>
-            <a:pPr lvl="1" marL="800280" indent="-343080" defTabSz="914400">
-              <a:lnSpc>
-                <a:spcPct val="100000"/>
-              </a:lnSpc>
-              <a:spcBef>
-                <a:spcPts val="320"/>
-              </a:spcBef>
-              <a:buClr>
-                <a:srgbClr val="000000"/>
-              </a:buClr>
-              <a:buFont typeface="Symbol"/>
-              <a:buChar char=""/>
-              <a:tabLst>
-                <a:tab algn="l" pos="1886040"/>
-              </a:tabLst>
-            </a:pPr>
-            <a:r>
-              <a:rPr b="0" lang="en-US" sz="1200" spc="-1" strike="noStrike">
-                <a:solidFill>
-                  <a:srgbClr val="000000"/>
-                </a:solidFill>
-                <a:latin typeface="Arial"/>
-                <a:ea typeface="DejaVu Sans"/>
-              </a:rPr>
-              <a:t>CodeEU-238: Bus VIF files not valid in Multistep VECTO</a:t>
-            </a:r>
-            <a:endParaRPr b="0" lang="en-US" sz="1200" spc="-1" strike="noStrike">
-              <a:solidFill>
-                <a:srgbClr val="000000"/>
-              </a:solidFill>
-              <a:latin typeface="Arial"/>
-            </a:endParaRPr>
-          </a:p>
-          <a:p>
-            <a:pPr lvl="1" marL="800280" indent="-343080" defTabSz="914400">
-              <a:lnSpc>
-                <a:spcPct val="100000"/>
-              </a:lnSpc>
-              <a:spcBef>
-                <a:spcPts val="320"/>
-              </a:spcBef>
-              <a:buClr>
-                <a:srgbClr val="000000"/>
-              </a:buClr>
-              <a:buFont typeface="Symbol"/>
-              <a:buChar char=""/>
-              <a:tabLst>
-                <a:tab algn="l" pos="1886040"/>
-              </a:tabLst>
-            </a:pPr>
-            <a:r>
-              <a:rPr b="0" lang="en-US" sz="1200" spc="-1" strike="noStrike">
-                <a:solidFill>
-                  <a:srgbClr val="000000"/>
-                </a:solidFill>
-                <a:latin typeface="Arial"/>
-                <a:ea typeface="DejaVu Sans"/>
-              </a:rPr>
-              <a:t>CodeEU-243: Simulation aborted: Gear 5 Lossmap not sufficiant</a:t>
-            </a:r>
-            <a:endParaRPr b="0" lang="en-US" sz="1200" spc="-1" strike="noStrike">
-              <a:solidFill>
-                <a:srgbClr val="000000"/>
-              </a:solidFill>
-              <a:latin typeface="Arial"/>
-            </a:endParaRPr>
-          </a:p>
-          <a:p>
-            <a:pPr lvl="1" marL="800280" indent="-343080" defTabSz="914400">
-              <a:lnSpc>
-                <a:spcPct val="100000"/>
-              </a:lnSpc>
-              <a:spcBef>
-                <a:spcPts val="320"/>
-              </a:spcBef>
-              <a:buClr>
-                <a:srgbClr val="000000"/>
-              </a:buClr>
-              <a:buFont typeface="Symbol"/>
-              <a:buChar char=""/>
-              <a:tabLst>
-                <a:tab algn="l" pos="1886040"/>
-              </a:tabLst>
-            </a:pPr>
-            <a:r>
-              <a:rPr b="0" lang="en-US" sz="1200" spc="-1" strike="noStrike">
-                <a:solidFill>
-                  <a:srgbClr val="000000"/>
-                </a:solidFill>
-                <a:latin typeface="Arial"/>
-                <a:ea typeface="DejaVu Sans"/>
-              </a:rPr>
-              <a:t>CodeEU-244: Signature validation fails for old (prior to v4) Manufacturer reports</a:t>
-            </a:r>
-            <a:endParaRPr b="0" lang="en-US" sz="1200" spc="-1" strike="noStrike">
-              <a:solidFill>
-                <a:srgbClr val="000000"/>
-              </a:solidFill>
-              <a:latin typeface="Arial"/>
-            </a:endParaRPr>
-          </a:p>
-          <a:p>
-            <a:pPr indent="0" defTabSz="914400">
-              <a:lnSpc>
-                <a:spcPct val="100000"/>
-              </a:lnSpc>
-              <a:buNone/>
-              <a:tabLst>
-                <a:tab algn="l" pos="0"/>
-              </a:tabLst>
-            </a:pPr>
-            <a:endParaRPr b="0" lang="en-US" sz="1400" spc="-1" strike="noStrike">
               <a:solidFill>
                 <a:srgbClr val="000000"/>
               </a:solidFill>

--- a/Documentation/User Manual Source/Release Notes Vecto4.x.pptx
+++ b/Documentation/User Manual Source/Release Notes Vecto4.x.pptx
@@ -34,6 +34,7 @@
     <p:sldId id="276" r:id="rId29"/>
     <p:sldId id="277" r:id="rId30"/>
     <p:sldId id="278" r:id="rId31"/>
+    <p:sldId id="279" r:id="rId32"/>
   </p:sldIdLst>
   <p:sldSz cx="9144000" cy="6858000"/>
   <p:notesSz cx="7559675" cy="10691813"/>
@@ -115,7 +116,7 @@
         <p:txBody>
           <a:bodyPr/>
           <a:p>
-            <a:fld id="{BA9AB2E1-FC74-4954-B173-3A9A1546D142}" type="slidenum">
+            <a:fld id="{73C07972-B2CA-4E9B-9D2D-7BC413281780}" type="slidenum">
               <a:t>&lt;#&gt;</a:t>
             </a:fld>
           </a:p>
@@ -289,7 +290,7 @@
         <p:spPr>
           <a:xfrm>
             <a:off x="7996320" y="6599160"/>
-            <a:ext cx="919440" cy="242280"/>
+            <a:ext cx="918360" cy="242280"/>
           </a:xfrm>
           <a:prstGeom prst="rect">
             <a:avLst/>
@@ -318,7 +319,7 @@
                 <a:spcPts val="499"/>
               </a:spcBef>
             </a:pPr>
-            <a:fld id="{B5162D42-6B3F-4446-B172-40CB52DBBF4D}" type="slidenum">
+            <a:fld id="{1225AA85-981A-4C49-BB6B-E28E60EF6630}" type="slidenum">
               <a:rPr b="1" lang="de-AT" sz="1000" spc="-1" strike="noStrike">
                 <a:solidFill>
                   <a:srgbClr val="7d7d7d"/>
@@ -346,7 +347,7 @@
         <p:spPr>
           <a:xfrm>
             <a:off x="144360" y="6627960"/>
-            <a:ext cx="1876680" cy="209880"/>
+            <a:ext cx="1875600" cy="208800"/>
           </a:xfrm>
           <a:prstGeom prst="rect">
             <a:avLst/>
@@ -407,7 +408,7 @@
         <p:spPr>
           <a:xfrm>
             <a:off x="7389360" y="37800"/>
-            <a:ext cx="1415160" cy="346680"/>
+            <a:ext cx="1414080" cy="345600"/>
           </a:xfrm>
           <a:prstGeom prst="rect">
             <a:avLst/>
@@ -430,7 +431,7 @@
         <p:spPr>
           <a:xfrm>
             <a:off x="107640" y="58680"/>
-            <a:ext cx="972360" cy="326160"/>
+            <a:ext cx="971280" cy="325080"/>
           </a:xfrm>
           <a:prstGeom prst="rect">
             <a:avLst/>
@@ -840,7 +841,7 @@
         <p:spPr>
           <a:xfrm>
             <a:off x="7996320" y="6599160"/>
-            <a:ext cx="919440" cy="242280"/>
+            <a:ext cx="918360" cy="242280"/>
           </a:xfrm>
           <a:prstGeom prst="rect">
             <a:avLst/>
@@ -869,7 +870,7 @@
                 <a:spcPts val="499"/>
               </a:spcBef>
             </a:pPr>
-            <a:fld id="{8D7DD005-C254-4BBD-94C5-F8D5AC1ABC59}" type="slidenum">
+            <a:fld id="{69389303-FD2F-4320-B55F-B6D5EDC4622A}" type="slidenum">
               <a:rPr b="1" lang="de-AT" sz="1000" spc="-1" strike="noStrike">
                 <a:solidFill>
                   <a:srgbClr val="7d7d7d"/>
@@ -897,7 +898,7 @@
         <p:spPr>
           <a:xfrm>
             <a:off x="144360" y="6627960"/>
-            <a:ext cx="1876680" cy="209880"/>
+            <a:ext cx="1875600" cy="208800"/>
           </a:xfrm>
           <a:prstGeom prst="rect">
             <a:avLst/>
@@ -958,7 +959,7 @@
         <p:spPr>
           <a:xfrm>
             <a:off x="7389360" y="37800"/>
-            <a:ext cx="1415160" cy="346680"/>
+            <a:ext cx="1414080" cy="345600"/>
           </a:xfrm>
           <a:prstGeom prst="rect">
             <a:avLst/>
@@ -981,7 +982,7 @@
         <p:spPr>
           <a:xfrm>
             <a:off x="107640" y="58680"/>
-            <a:ext cx="972360" cy="326160"/>
+            <a:ext cx="971280" cy="325080"/>
           </a:xfrm>
           <a:prstGeom prst="rect">
             <a:avLst/>
@@ -1391,7 +1392,7 @@
         <p:spPr>
           <a:xfrm>
             <a:off x="7996320" y="6599160"/>
-            <a:ext cx="919440" cy="242280"/>
+            <a:ext cx="918360" cy="242280"/>
           </a:xfrm>
           <a:prstGeom prst="rect">
             <a:avLst/>
@@ -1420,7 +1421,7 @@
                 <a:spcPts val="499"/>
               </a:spcBef>
             </a:pPr>
-            <a:fld id="{7DF5946A-85E9-4513-9C3F-81FEF73A0E30}" type="slidenum">
+            <a:fld id="{4F19DA7D-5CF6-4008-88A9-8A4599B29E02}" type="slidenum">
               <a:rPr b="1" lang="de-AT" sz="1000" spc="-1" strike="noStrike">
                 <a:solidFill>
                   <a:srgbClr val="7d7d7d"/>
@@ -1448,7 +1449,7 @@
         <p:spPr>
           <a:xfrm>
             <a:off x="144360" y="6627960"/>
-            <a:ext cx="1876680" cy="209880"/>
+            <a:ext cx="1875600" cy="208800"/>
           </a:xfrm>
           <a:prstGeom prst="rect">
             <a:avLst/>
@@ -1509,7 +1510,7 @@
         <p:spPr>
           <a:xfrm>
             <a:off x="7389360" y="37800"/>
-            <a:ext cx="1415160" cy="346680"/>
+            <a:ext cx="1414080" cy="345600"/>
           </a:xfrm>
           <a:prstGeom prst="rect">
             <a:avLst/>
@@ -1532,7 +1533,7 @@
         <p:spPr>
           <a:xfrm>
             <a:off x="107640" y="58680"/>
-            <a:ext cx="972360" cy="326160"/>
+            <a:ext cx="971280" cy="325080"/>
           </a:xfrm>
           <a:prstGeom prst="rect">
             <a:avLst/>
@@ -1638,7 +1639,7 @@
                 <a:tab algn="l" pos="0"/>
               </a:tabLst>
             </a:pPr>
-            <a:fld id="{AEA0C2CB-0B97-472F-B801-FFDDE8A19E6A}" type="slidenum">
+            <a:fld id="{EC5E592D-DD52-4C41-898B-E3DA2EE4EE62}" type="slidenum">
               <a:rPr b="0" lang="en-GB" sz="1400" spc="-1" strike="noStrike">
                 <a:solidFill>
                   <a:srgbClr val="000000"/>
@@ -2014,7 +2015,7 @@
         <p:spPr>
           <a:xfrm>
             <a:off x="7996320" y="6599160"/>
-            <a:ext cx="919440" cy="242280"/>
+            <a:ext cx="918360" cy="242280"/>
           </a:xfrm>
           <a:prstGeom prst="rect">
             <a:avLst/>
@@ -2043,7 +2044,7 @@
                 <a:spcPts val="499"/>
               </a:spcBef>
             </a:pPr>
-            <a:fld id="{CA533CAD-2156-439D-A87E-EF9C284BB7AD}" type="slidenum">
+            <a:fld id="{83C329BE-18F8-44F3-8608-3C1A19AC10C8}" type="slidenum">
               <a:rPr b="1" lang="de-AT" sz="1000" spc="-1" strike="noStrike">
                 <a:solidFill>
                   <a:srgbClr val="7d7d7d"/>
@@ -2071,7 +2072,7 @@
         <p:spPr>
           <a:xfrm>
             <a:off x="144360" y="6627960"/>
-            <a:ext cx="1876680" cy="209880"/>
+            <a:ext cx="1875600" cy="208800"/>
           </a:xfrm>
           <a:prstGeom prst="rect">
             <a:avLst/>
@@ -2132,7 +2133,7 @@
         <p:spPr>
           <a:xfrm>
             <a:off x="7389360" y="37800"/>
-            <a:ext cx="1415160" cy="346680"/>
+            <a:ext cx="1414080" cy="345600"/>
           </a:xfrm>
           <a:prstGeom prst="rect">
             <a:avLst/>
@@ -2155,7 +2156,7 @@
         <p:spPr>
           <a:xfrm>
             <a:off x="107640" y="58680"/>
-            <a:ext cx="972360" cy="326160"/>
+            <a:ext cx="971280" cy="325080"/>
           </a:xfrm>
           <a:prstGeom prst="rect">
             <a:avLst/>
@@ -2565,7 +2566,7 @@
         <p:spPr>
           <a:xfrm>
             <a:off x="7996320" y="6599160"/>
-            <a:ext cx="919440" cy="242280"/>
+            <a:ext cx="918360" cy="242280"/>
           </a:xfrm>
           <a:prstGeom prst="rect">
             <a:avLst/>
@@ -2594,7 +2595,7 @@
                 <a:spcPts val="499"/>
               </a:spcBef>
             </a:pPr>
-            <a:fld id="{577F6B33-412F-45FA-A2FA-4461196DE28A}" type="slidenum">
+            <a:fld id="{64514520-679C-49A2-A313-C183513503BB}" type="slidenum">
               <a:rPr b="1" lang="de-AT" sz="1000" spc="-1" strike="noStrike">
                 <a:solidFill>
                   <a:srgbClr val="7d7d7d"/>
@@ -2622,7 +2623,7 @@
         <p:spPr>
           <a:xfrm>
             <a:off x="144360" y="6627960"/>
-            <a:ext cx="1876680" cy="209880"/>
+            <a:ext cx="1875600" cy="208800"/>
           </a:xfrm>
           <a:prstGeom prst="rect">
             <a:avLst/>
@@ -2683,7 +2684,7 @@
         <p:spPr>
           <a:xfrm>
             <a:off x="7389360" y="37800"/>
-            <a:ext cx="1415160" cy="346680"/>
+            <a:ext cx="1414080" cy="345600"/>
           </a:xfrm>
           <a:prstGeom prst="rect">
             <a:avLst/>
@@ -2706,7 +2707,7 @@
         <p:spPr>
           <a:xfrm>
             <a:off x="107640" y="58680"/>
-            <a:ext cx="972360" cy="326160"/>
+            <a:ext cx="971280" cy="325080"/>
           </a:xfrm>
           <a:prstGeom prst="rect">
             <a:avLst/>
@@ -3116,7 +3117,7 @@
         <p:spPr>
           <a:xfrm>
             <a:off x="7996320" y="6599160"/>
-            <a:ext cx="919440" cy="242280"/>
+            <a:ext cx="918360" cy="242280"/>
           </a:xfrm>
           <a:prstGeom prst="rect">
             <a:avLst/>
@@ -3145,7 +3146,7 @@
                 <a:spcPts val="499"/>
               </a:spcBef>
             </a:pPr>
-            <a:fld id="{4256F94B-26FD-435C-AA26-B44BE7654D34}" type="slidenum">
+            <a:fld id="{0637BEF0-02E6-4AC9-9B18-F81FC588D525}" type="slidenum">
               <a:rPr b="1" lang="de-AT" sz="1000" spc="-1" strike="noStrike">
                 <a:solidFill>
                   <a:srgbClr val="7d7d7d"/>
@@ -3173,7 +3174,7 @@
         <p:spPr>
           <a:xfrm>
             <a:off x="144360" y="6627960"/>
-            <a:ext cx="1876680" cy="209880"/>
+            <a:ext cx="1875600" cy="208800"/>
           </a:xfrm>
           <a:prstGeom prst="rect">
             <a:avLst/>
@@ -3234,7 +3235,7 @@
         <p:spPr>
           <a:xfrm>
             <a:off x="7389360" y="37800"/>
-            <a:ext cx="1415160" cy="346680"/>
+            <a:ext cx="1414080" cy="345600"/>
           </a:xfrm>
           <a:prstGeom prst="rect">
             <a:avLst/>
@@ -3257,7 +3258,7 @@
         <p:spPr>
           <a:xfrm>
             <a:off x="107640" y="58680"/>
-            <a:ext cx="972360" cy="326160"/>
+            <a:ext cx="971280" cy="325080"/>
           </a:xfrm>
           <a:prstGeom prst="rect">
             <a:avLst/>
@@ -3667,7 +3668,7 @@
         <p:spPr>
           <a:xfrm>
             <a:off x="7996320" y="6599160"/>
-            <a:ext cx="919440" cy="242280"/>
+            <a:ext cx="918360" cy="242280"/>
           </a:xfrm>
           <a:prstGeom prst="rect">
             <a:avLst/>
@@ -3696,7 +3697,7 @@
                 <a:spcPts val="499"/>
               </a:spcBef>
             </a:pPr>
-            <a:fld id="{2BC9793A-67AF-416D-ADFC-47F91706DE04}" type="slidenum">
+            <a:fld id="{34D88BE8-8B30-42A1-AA5C-4293B1677E40}" type="slidenum">
               <a:rPr b="1" lang="de-AT" sz="1000" spc="-1" strike="noStrike">
                 <a:solidFill>
                   <a:srgbClr val="7d7d7d"/>
@@ -3724,7 +3725,7 @@
         <p:spPr>
           <a:xfrm>
             <a:off x="144360" y="6627960"/>
-            <a:ext cx="1876680" cy="209880"/>
+            <a:ext cx="1875600" cy="208800"/>
           </a:xfrm>
           <a:prstGeom prst="rect">
             <a:avLst/>
@@ -3785,7 +3786,7 @@
         <p:spPr>
           <a:xfrm>
             <a:off x="7389360" y="37800"/>
-            <a:ext cx="1415160" cy="346680"/>
+            <a:ext cx="1414080" cy="345600"/>
           </a:xfrm>
           <a:prstGeom prst="rect">
             <a:avLst/>
@@ -3808,7 +3809,7 @@
         <p:spPr>
           <a:xfrm>
             <a:off x="107640" y="58680"/>
-            <a:ext cx="972360" cy="326160"/>
+            <a:ext cx="971280" cy="325080"/>
           </a:xfrm>
           <a:prstGeom prst="rect">
             <a:avLst/>
@@ -4169,7 +4170,7 @@
         <p:spPr>
           <a:xfrm>
             <a:off x="539640" y="1052640"/>
-            <a:ext cx="8130240" cy="3945600"/>
+            <a:ext cx="8129160" cy="3945600"/>
           </a:xfrm>
           <a:prstGeom prst="rect">
             <a:avLst/>
@@ -4352,7 +4353,7 @@
         <p:spPr>
           <a:xfrm>
             <a:off x="2483640" y="2421000"/>
-            <a:ext cx="4170240" cy="1621440"/>
+            <a:ext cx="4169160" cy="1620360"/>
           </a:xfrm>
           <a:prstGeom prst="rect">
             <a:avLst/>
@@ -4405,7 +4406,7 @@
         <p:spPr>
           <a:xfrm>
             <a:off x="468360" y="476640"/>
-            <a:ext cx="8212320" cy="675000"/>
+            <a:ext cx="8211240" cy="673920"/>
           </a:xfrm>
           <a:prstGeom prst="rect">
             <a:avLst/>
@@ -4474,7 +4475,7 @@
         <p:spPr>
           <a:xfrm>
             <a:off x="323640" y="1459080"/>
-            <a:ext cx="8490960" cy="4655880"/>
+            <a:ext cx="8489880" cy="4654800"/>
           </a:xfrm>
           <a:prstGeom prst="rect">
             <a:avLst/>
@@ -4533,7 +4534,7 @@
                 <a:latin typeface="Arial"/>
                 <a:ea typeface="DejaVu Sans"/>
               </a:rPr>
-              <a:t>Bugfixes (3/4)</a:t>
+              <a:t>Bugfixes (2/4)</a:t>
             </a:r>
             <a:endParaRPr b="0" lang="en-US" sz="1600" spc="-1" strike="noStrike">
               <a:solidFill>
@@ -4567,7 +4568,7 @@
                 <a:latin typeface="Arial"/>
                 <a:ea typeface="DejaVu Sans"/>
               </a:rPr>
-              <a:t>CodeEU-571: Article10-2-issue | VECTO-4.0.3 | Order-Nr 28202896 | HEV P1 Error Mercedes-Benz and Setra Hybrid Buses</a:t>
+              <a:t>CodeEU-481: Finished Run VEH-PrimaryBus_nonSmart Urban _P31SD_ReferenceLoad with ERROR: 4 (Urban _P31SD_ReferenceLoad) - absTime: 8606.6241 [s], distance: 39112.5127 [m], dt: 1.1131 [s], v: 0.1833 [m/s], Gear: 1 |</a:t>
             </a:r>
             <a:endParaRPr b="0" lang="en-US" sz="1200" spc="-1" strike="noStrike">
               <a:solidFill>
@@ -4601,7 +4602,7 @@
                 <a:latin typeface="Arial"/>
                 <a:ea typeface="DejaVu Sans"/>
               </a:rPr>
-              <a:t>CodeEU-526: VTP calculation aborted on fuel consumption map</a:t>
+              <a:t>CodeEU-488: Finished Run VEH-PrimaryBus_nonSmart Urban _P31SD_ReferenceLoad with ERROR: 4 (Urban _P31SD_ReferenceLoad) - absTime: 8606.6241 [s], distance: 39112.5127 [m], dt: 1.1131 [s], v: 0.1833 [m/s], Gear: 1 | DrivingActionAccelerate: Failed to find operating poi</a:t>
             </a:r>
             <a:endParaRPr b="0" lang="en-US" sz="1200" spc="-1" strike="noStrike">
               <a:solidFill>
@@ -4635,7 +4636,7 @@
                 <a:latin typeface="Arial"/>
                 <a:ea typeface="DejaVu Sans"/>
               </a:rPr>
-              <a:t>CodeEU-502: Error in VECTO calculation WMA10CZZ0RF022326</a:t>
+              <a:t>CodeEU-494: Finished Run VEH-PrimaryBus_nonSmart Urban _P31SD_ReferenceLoad with ERROR: 26 (Urban _P31SD_ReferenceLoad) - absTime: 8606.6241 [s], distance: 39112.5127 [m], dt: 1.1131 [s], v: 0.1833 [m/s], Gear: 1 | DrivingActionAccelerate: Failed to fi</a:t>
             </a:r>
             <a:endParaRPr b="0" lang="en-US" sz="1200" spc="-1" strike="noStrike">
               <a:solidFill>
@@ -4669,7 +4670,7 @@
                 <a:latin typeface="Arial"/>
                 <a:ea typeface="DejaVu Sans"/>
               </a:rPr>
-              <a:t>CodeEU-401: Electric steering system with conventional vehicle not according to 2017/2400</a:t>
+              <a:t>CodeEU-420: Finished Run VEH-PrimaryBus_nonSmart Interurban _P32SD_ReferenceLoad with ERROR: 16</a:t>
             </a:r>
             <a:endParaRPr b="0" lang="en-US" sz="1200" spc="-1" strike="noStrike">
               <a:solidFill>
@@ -4703,7 +4704,7 @@
                 <a:latin typeface="Arial"/>
                 <a:ea typeface="DejaVu Sans"/>
               </a:rPr>
-              <a:t>CodeEU-476: Setting Initial SoC in REESS editor leads to error</a:t>
+              <a:t>CodeEU-573: Unhandled powertrain architecture Conventional Vehicle to calculate gradability</a:t>
             </a:r>
             <a:endParaRPr b="0" lang="en-US" sz="1200" spc="-1" strike="noStrike">
               <a:solidFill>
@@ -4737,7 +4738,7 @@
                 <a:latin typeface="Arial"/>
                 <a:ea typeface="DejaVu Sans"/>
               </a:rPr>
-              <a:t>CodeEU-533: Question about heavy lorry_IEPC_Gb×4speed: Failed to generate electric power map - at least two negative entries are required</a:t>
+              <a:t>CodeEU-582: unhandled powertrain architecture ConventionalVehicle to calculate gradability, 11:44:36.63,</a:t>
             </a:r>
             <a:endParaRPr b="0" lang="en-US" sz="1200" spc="-1" strike="noStrike">
               <a:solidFill>
@@ -4771,7 +4772,7 @@
                 <a:latin typeface="Arial"/>
                 <a:ea typeface="DejaVu Sans"/>
               </a:rPr>
-              <a:t>CodeEU-456: Clarification Documentation official Results</a:t>
+              <a:t>CodeEU-595: Inconsistency exempted vehicles "Fuel cell vehicle" vs. "FCV Article 9 exempted"</a:t>
             </a:r>
             <a:endParaRPr b="0" lang="en-US" sz="1200" spc="-1" strike="noStrike">
               <a:solidFill>
@@ -4805,7 +4806,7 @@
                 <a:latin typeface="Arial"/>
                 <a:ea typeface="DejaVu Sans"/>
               </a:rPr>
-              <a:t>CodeEU-506: Article 10(2) issue - VIN YS2P6X200R2201285</a:t>
+              <a:t>CodeEU-501: Help regarding VTP vdri format is not up to date in v4</a:t>
             </a:r>
             <a:endParaRPr b="0" lang="en-US" sz="1200" spc="-1" strike="noStrike">
               <a:solidFill>
@@ -4839,7 +4840,7 @@
                 <a:latin typeface="Arial"/>
                 <a:ea typeface="DejaVu Sans"/>
               </a:rPr>
-              <a:t>CodeEU-507: Article 10(2) issue - VIN YS2P6X20005732399</a:t>
+              <a:t>CodeEU-594: inadequate validation for auxiliaries in completed vehicle XML</a:t>
             </a:r>
             <a:endParaRPr b="0" lang="en-US" sz="1200" spc="-1" strike="noStrike">
               <a:solidFill>
@@ -4873,7 +4874,7 @@
                 <a:latin typeface="Arial"/>
                 <a:ea typeface="DejaVu Sans"/>
               </a:rPr>
-              <a:t>CodeEU-508: Article 10(2) issue - VIN S2P6X20005734199</a:t>
+              <a:t>CodeEU-580: Potential error in XML schema v2.4 (exempted vehicles)</a:t>
             </a:r>
             <a:endParaRPr b="0" lang="en-US" sz="1200" spc="-1" strike="noStrike">
               <a:solidFill>
@@ -4907,7 +4908,7 @@
                 <a:latin typeface="Arial"/>
                 <a:ea typeface="DejaVu Sans"/>
               </a:rPr>
-              <a:t>CodeEU-499: Object Reference not set Error</a:t>
+              <a:t>CodeEU-551: Article-10-2 XLRASF5E00G419905</a:t>
             </a:r>
             <a:endParaRPr b="0" lang="en-US" sz="1200" spc="-1" strike="noStrike">
               <a:solidFill>
@@ -4941,7 +4942,7 @@
                 <a:latin typeface="Arial"/>
                 <a:ea typeface="DejaVu Sans"/>
               </a:rPr>
-              <a:t>CodeEU-546: Problem with P181 (Cooling Fan Technology) for a conventional vehicle</a:t>
+              <a:t>CodeEU-547: Max ICE Off timespan for buses</a:t>
             </a:r>
             <a:endParaRPr b="0" lang="en-US" sz="1200" spc="-1" strike="noStrike">
               <a:solidFill>
@@ -4975,41 +4976,7 @@
                 <a:latin typeface="Arial"/>
                 <a:ea typeface="DejaVu Sans"/>
               </a:rPr>
-              <a:t>CodeEU-516: Article10-2-issue | VECTO-4.0.3 | Order-Nr 28208044 | HEV P1 Error Mercedes-Benz and Setra Hybrid Buses</a:t>
-            </a:r>
-            <a:endParaRPr b="0" lang="en-US" sz="1200" spc="-1" strike="noStrike">
-              <a:solidFill>
-                <a:srgbClr val="000000"/>
-              </a:solidFill>
-              <a:latin typeface="Arial"/>
-            </a:endParaRPr>
-          </a:p>
-          <a:p>
-            <a:pPr lvl="1" marL="800280" indent="-343080" defTabSz="914400">
-              <a:lnSpc>
-                <a:spcPct val="100000"/>
-              </a:lnSpc>
-              <a:spcBef>
-                <a:spcPts val="320"/>
-              </a:spcBef>
-              <a:buClr>
-                <a:srgbClr val="000000"/>
-              </a:buClr>
-              <a:buFont typeface="Symbol"/>
-              <a:buChar char=""/>
-              <a:tabLst>
-                <a:tab algn="l" pos="1886040"/>
-              </a:tabLst>
-            </a:pPr>
-            <a:r>
-              <a:rPr b="0" lang="en-US" sz="1200" spc="-1" strike="noStrike">
-                <a:solidFill>
-                  <a:srgbClr val="000000"/>
-                </a:solidFill>
-                <a:latin typeface="Arial"/>
-                <a:ea typeface="DejaVu Sans"/>
-              </a:rPr>
-              <a:t>CodeEU-517: Article10-2-issue | VECTO-4.0.3 | Order-Nr 28208037 | HEV P1 Error Mercedes-Benz and Setra Hybrid Buses</a:t>
+              <a:t>CodeEU-583: Incorrect internal resistance for SuperCap used in factor method</a:t>
             </a:r>
             <a:endParaRPr b="0" lang="en-US" sz="1200" spc="-1" strike="noStrike">
               <a:solidFill>
@@ -5063,7 +5030,7 @@
         <p:spPr>
           <a:xfrm>
             <a:off x="468360" y="476640"/>
-            <a:ext cx="8212320" cy="675000"/>
+            <a:ext cx="8211240" cy="673920"/>
           </a:xfrm>
           <a:prstGeom prst="rect">
             <a:avLst/>
@@ -5132,7 +5099,7 @@
         <p:spPr>
           <a:xfrm>
             <a:off x="323640" y="1459080"/>
-            <a:ext cx="8490960" cy="4655880"/>
+            <a:ext cx="8489880" cy="4654800"/>
           </a:xfrm>
           <a:prstGeom prst="rect">
             <a:avLst/>
@@ -5191,7 +5158,7 @@
                 <a:latin typeface="Arial"/>
                 <a:ea typeface="DejaVu Sans"/>
               </a:rPr>
-              <a:t>Bugfixes (4/4)</a:t>
+              <a:t>Bugfixes (3/4)</a:t>
             </a:r>
             <a:endParaRPr b="0" lang="en-US" sz="1600" spc="-1" strike="noStrike">
               <a:solidFill>
@@ -5225,7 +5192,7 @@
                 <a:latin typeface="Arial"/>
                 <a:ea typeface="DejaVu Sans"/>
               </a:rPr>
-              <a:t>CodeEU-519: Article10-2-issue | VECTO-4.0.3 | Order-Nr 10098181 | HEV P1 Error Mercedes-Benz and Setra Hybrid Buses</a:t>
+              <a:t>CodeEU-571: Article10-2-issue | VECTO-4.0.3 | Order-Nr 28202896 | HEV P1 Error Mercedes-Benz and Setra Hybrid Buses</a:t>
             </a:r>
             <a:endParaRPr b="0" lang="en-US" sz="1200" spc="-1" strike="noStrike">
               <a:solidFill>
@@ -5259,7 +5226,7 @@
                 <a:latin typeface="Arial"/>
                 <a:ea typeface="DejaVu Sans"/>
               </a:rPr>
-              <a:t>CodeEU-527: Article10-2-issue | VECTO-4.0.3 | Order-Nr 28196233 | HEV P1 Error Mercedes-Benz and Setra Hybrid Buses</a:t>
+              <a:t>CodeEU-526: VTP calculation aborted on fuel consumption map</a:t>
             </a:r>
             <a:endParaRPr b="0" lang="en-US" sz="1200" spc="-1" strike="noStrike">
               <a:solidFill>
@@ -5293,7 +5260,7 @@
                 <a:latin typeface="Arial"/>
                 <a:ea typeface="DejaVu Sans"/>
               </a:rPr>
-              <a:t>CodeEU-528: Article10-2-issue | VECTO-4.0.3 | Order-Nr 28196652 | HEV P1 Error Mercedes-Benz and Setra Hybrid Buses</a:t>
+              <a:t>CodeEU-502: Error in VECTO calculation WMA10CZZ0RF022326</a:t>
             </a:r>
             <a:endParaRPr b="0" lang="en-US" sz="1200" spc="-1" strike="noStrike">
               <a:solidFill>
@@ -5327,7 +5294,7 @@
                 <a:latin typeface="Arial"/>
                 <a:ea typeface="DejaVu Sans"/>
               </a:rPr>
-              <a:t>CodeEU-338: Eco-roll only, without engine stop, impact on CO2 emission</a:t>
+              <a:t>CodeEU-401: Electric steering system with conventional vehicle not according to 2017/2400</a:t>
             </a:r>
             <a:endParaRPr b="0" lang="en-US" sz="1200" spc="-1" strike="noStrike">
               <a:solidFill>
@@ -5361,7 +5328,7 @@
                 <a:latin typeface="Arial"/>
                 <a:ea typeface="DejaVu Sans"/>
               </a:rPr>
-              <a:t>CodeEU-475: XML files loading in VTP Job not OK; No auxiliary data and torque curve visible, Job can't be saved in VECTO 4.0.3.3330</a:t>
+              <a:t>CodeEU-476: Setting Initial SoC in REESS editor leads to error</a:t>
             </a:r>
             <a:endParaRPr b="0" lang="en-US" sz="1200" spc="-1" strike="noStrike">
               <a:solidFill>
@@ -5395,7 +5362,279 @@
                 <a:latin typeface="Arial"/>
                 <a:ea typeface="DejaVu Sans"/>
               </a:rPr>
-              <a:t>CodeEU-610: VTP mode is broken due to changes in the Clutch component.</a:t>
+              <a:t>CodeEU-533: Question about heavy lorry_IEPC_Gb×4speed: Failed to generate electric power map - at least two negative entries are required</a:t>
+            </a:r>
+            <a:endParaRPr b="0" lang="en-US" sz="1200" spc="-1" strike="noStrike">
+              <a:solidFill>
+                <a:srgbClr val="000000"/>
+              </a:solidFill>
+              <a:latin typeface="Arial"/>
+            </a:endParaRPr>
+          </a:p>
+          <a:p>
+            <a:pPr lvl="1" marL="800280" indent="-343080" defTabSz="914400">
+              <a:lnSpc>
+                <a:spcPct val="100000"/>
+              </a:lnSpc>
+              <a:spcBef>
+                <a:spcPts val="320"/>
+              </a:spcBef>
+              <a:buClr>
+                <a:srgbClr val="000000"/>
+              </a:buClr>
+              <a:buFont typeface="Symbol"/>
+              <a:buChar char=""/>
+              <a:tabLst>
+                <a:tab algn="l" pos="1886040"/>
+              </a:tabLst>
+            </a:pPr>
+            <a:r>
+              <a:rPr b="0" lang="en-US" sz="1200" spc="-1" strike="noStrike">
+                <a:solidFill>
+                  <a:srgbClr val="000000"/>
+                </a:solidFill>
+                <a:latin typeface="Arial"/>
+                <a:ea typeface="DejaVu Sans"/>
+              </a:rPr>
+              <a:t>CodeEU-456: Clarification Documentation official Results</a:t>
+            </a:r>
+            <a:endParaRPr b="0" lang="en-US" sz="1200" spc="-1" strike="noStrike">
+              <a:solidFill>
+                <a:srgbClr val="000000"/>
+              </a:solidFill>
+              <a:latin typeface="Arial"/>
+            </a:endParaRPr>
+          </a:p>
+          <a:p>
+            <a:pPr lvl="1" marL="800280" indent="-343080" defTabSz="914400">
+              <a:lnSpc>
+                <a:spcPct val="100000"/>
+              </a:lnSpc>
+              <a:spcBef>
+                <a:spcPts val="320"/>
+              </a:spcBef>
+              <a:buClr>
+                <a:srgbClr val="000000"/>
+              </a:buClr>
+              <a:buFont typeface="Symbol"/>
+              <a:buChar char=""/>
+              <a:tabLst>
+                <a:tab algn="l" pos="1886040"/>
+              </a:tabLst>
+            </a:pPr>
+            <a:r>
+              <a:rPr b="0" lang="en-US" sz="1200" spc="-1" strike="noStrike">
+                <a:solidFill>
+                  <a:srgbClr val="000000"/>
+                </a:solidFill>
+                <a:latin typeface="Arial"/>
+                <a:ea typeface="DejaVu Sans"/>
+              </a:rPr>
+              <a:t>CodeEU-506: Article 10(2) issue - VIN YS2P6X200R2201285</a:t>
+            </a:r>
+            <a:endParaRPr b="0" lang="en-US" sz="1200" spc="-1" strike="noStrike">
+              <a:solidFill>
+                <a:srgbClr val="000000"/>
+              </a:solidFill>
+              <a:latin typeface="Arial"/>
+            </a:endParaRPr>
+          </a:p>
+          <a:p>
+            <a:pPr lvl="1" marL="800280" indent="-343080" defTabSz="914400">
+              <a:lnSpc>
+                <a:spcPct val="100000"/>
+              </a:lnSpc>
+              <a:spcBef>
+                <a:spcPts val="320"/>
+              </a:spcBef>
+              <a:buClr>
+                <a:srgbClr val="000000"/>
+              </a:buClr>
+              <a:buFont typeface="Symbol"/>
+              <a:buChar char=""/>
+              <a:tabLst>
+                <a:tab algn="l" pos="1886040"/>
+              </a:tabLst>
+            </a:pPr>
+            <a:r>
+              <a:rPr b="0" lang="en-US" sz="1200" spc="-1" strike="noStrike">
+                <a:solidFill>
+                  <a:srgbClr val="000000"/>
+                </a:solidFill>
+                <a:latin typeface="Arial"/>
+                <a:ea typeface="DejaVu Sans"/>
+              </a:rPr>
+              <a:t>CodeEU-507: Article 10(2) issue - VIN YS2P6X20005732399</a:t>
+            </a:r>
+            <a:endParaRPr b="0" lang="en-US" sz="1200" spc="-1" strike="noStrike">
+              <a:solidFill>
+                <a:srgbClr val="000000"/>
+              </a:solidFill>
+              <a:latin typeface="Arial"/>
+            </a:endParaRPr>
+          </a:p>
+          <a:p>
+            <a:pPr lvl="1" marL="800280" indent="-343080" defTabSz="914400">
+              <a:lnSpc>
+                <a:spcPct val="100000"/>
+              </a:lnSpc>
+              <a:spcBef>
+                <a:spcPts val="320"/>
+              </a:spcBef>
+              <a:buClr>
+                <a:srgbClr val="000000"/>
+              </a:buClr>
+              <a:buFont typeface="Symbol"/>
+              <a:buChar char=""/>
+              <a:tabLst>
+                <a:tab algn="l" pos="1886040"/>
+              </a:tabLst>
+            </a:pPr>
+            <a:r>
+              <a:rPr b="0" lang="en-US" sz="1200" spc="-1" strike="noStrike">
+                <a:solidFill>
+                  <a:srgbClr val="000000"/>
+                </a:solidFill>
+                <a:latin typeface="Arial"/>
+                <a:ea typeface="DejaVu Sans"/>
+              </a:rPr>
+              <a:t>CodeEU-508: Article 10(2) issue - VIN S2P6X20005734199</a:t>
+            </a:r>
+            <a:endParaRPr b="0" lang="en-US" sz="1200" spc="-1" strike="noStrike">
+              <a:solidFill>
+                <a:srgbClr val="000000"/>
+              </a:solidFill>
+              <a:latin typeface="Arial"/>
+            </a:endParaRPr>
+          </a:p>
+          <a:p>
+            <a:pPr lvl="1" marL="800280" indent="-343080" defTabSz="914400">
+              <a:lnSpc>
+                <a:spcPct val="100000"/>
+              </a:lnSpc>
+              <a:spcBef>
+                <a:spcPts val="320"/>
+              </a:spcBef>
+              <a:buClr>
+                <a:srgbClr val="000000"/>
+              </a:buClr>
+              <a:buFont typeface="Symbol"/>
+              <a:buChar char=""/>
+              <a:tabLst>
+                <a:tab algn="l" pos="1886040"/>
+              </a:tabLst>
+            </a:pPr>
+            <a:r>
+              <a:rPr b="0" lang="en-US" sz="1200" spc="-1" strike="noStrike">
+                <a:solidFill>
+                  <a:srgbClr val="000000"/>
+                </a:solidFill>
+                <a:latin typeface="Arial"/>
+                <a:ea typeface="DejaVu Sans"/>
+              </a:rPr>
+              <a:t>CodeEU-499: Object Reference not set Error</a:t>
+            </a:r>
+            <a:endParaRPr b="0" lang="en-US" sz="1200" spc="-1" strike="noStrike">
+              <a:solidFill>
+                <a:srgbClr val="000000"/>
+              </a:solidFill>
+              <a:latin typeface="Arial"/>
+            </a:endParaRPr>
+          </a:p>
+          <a:p>
+            <a:pPr lvl="1" marL="800280" indent="-343080" defTabSz="914400">
+              <a:lnSpc>
+                <a:spcPct val="100000"/>
+              </a:lnSpc>
+              <a:spcBef>
+                <a:spcPts val="320"/>
+              </a:spcBef>
+              <a:buClr>
+                <a:srgbClr val="000000"/>
+              </a:buClr>
+              <a:buFont typeface="Symbol"/>
+              <a:buChar char=""/>
+              <a:tabLst>
+                <a:tab algn="l" pos="1886040"/>
+              </a:tabLst>
+            </a:pPr>
+            <a:r>
+              <a:rPr b="0" lang="en-US" sz="1200" spc="-1" strike="noStrike">
+                <a:solidFill>
+                  <a:srgbClr val="000000"/>
+                </a:solidFill>
+                <a:latin typeface="Arial"/>
+                <a:ea typeface="DejaVu Sans"/>
+              </a:rPr>
+              <a:t>CodeEU-546: Problem with P181 (Cooling Fan Technology) for a conventional vehicle</a:t>
+            </a:r>
+            <a:endParaRPr b="0" lang="en-US" sz="1200" spc="-1" strike="noStrike">
+              <a:solidFill>
+                <a:srgbClr val="000000"/>
+              </a:solidFill>
+              <a:latin typeface="Arial"/>
+            </a:endParaRPr>
+          </a:p>
+          <a:p>
+            <a:pPr lvl="1" marL="800280" indent="-343080" defTabSz="914400">
+              <a:lnSpc>
+                <a:spcPct val="100000"/>
+              </a:lnSpc>
+              <a:spcBef>
+                <a:spcPts val="320"/>
+              </a:spcBef>
+              <a:buClr>
+                <a:srgbClr val="000000"/>
+              </a:buClr>
+              <a:buFont typeface="Symbol"/>
+              <a:buChar char=""/>
+              <a:tabLst>
+                <a:tab algn="l" pos="1886040"/>
+              </a:tabLst>
+            </a:pPr>
+            <a:r>
+              <a:rPr b="0" lang="en-US" sz="1200" spc="-1" strike="noStrike">
+                <a:solidFill>
+                  <a:srgbClr val="000000"/>
+                </a:solidFill>
+                <a:latin typeface="Arial"/>
+                <a:ea typeface="DejaVu Sans"/>
+              </a:rPr>
+              <a:t>CodeEU-516: Article10-2-issue | VECTO-4.0.3 | Order-Nr 28208044 | HEV P1 Error Mercedes-Benz and Setra Hybrid Buses</a:t>
+            </a:r>
+            <a:endParaRPr b="0" lang="en-US" sz="1200" spc="-1" strike="noStrike">
+              <a:solidFill>
+                <a:srgbClr val="000000"/>
+              </a:solidFill>
+              <a:latin typeface="Arial"/>
+            </a:endParaRPr>
+          </a:p>
+          <a:p>
+            <a:pPr lvl="1" marL="800280" indent="-343080" defTabSz="914400">
+              <a:lnSpc>
+                <a:spcPct val="100000"/>
+              </a:lnSpc>
+              <a:spcBef>
+                <a:spcPts val="320"/>
+              </a:spcBef>
+              <a:buClr>
+                <a:srgbClr val="000000"/>
+              </a:buClr>
+              <a:buFont typeface="Symbol"/>
+              <a:buChar char=""/>
+              <a:tabLst>
+                <a:tab algn="l" pos="1886040"/>
+              </a:tabLst>
+            </a:pPr>
+            <a:r>
+              <a:rPr b="0" lang="en-US" sz="1200" spc="-1" strike="noStrike">
+                <a:solidFill>
+                  <a:srgbClr val="000000"/>
+                </a:solidFill>
+                <a:latin typeface="Arial"/>
+                <a:ea typeface="DejaVu Sans"/>
+              </a:rPr>
+              <a:t>CodeEU-517: Article10-2-issue | VECTO-4.0.3 | Order-Nr 28208037 | HEV P1 Error Mercedes-Benz and Setra Hybrid Buses</a:t>
             </a:r>
             <a:endParaRPr b="0" lang="en-US" sz="1200" spc="-1" strike="noStrike">
               <a:solidFill>
@@ -5449,7 +5688,7 @@
         <p:spPr>
           <a:xfrm>
             <a:off x="468360" y="476640"/>
-            <a:ext cx="8212320" cy="675000"/>
+            <a:ext cx="8211240" cy="673920"/>
           </a:xfrm>
           <a:prstGeom prst="rect">
             <a:avLst/>
@@ -5481,7 +5720,7 @@
                 <a:latin typeface="Arial"/>
                 <a:ea typeface="DejaVu Sans"/>
               </a:rPr>
-              <a:t>Vecto 4.0.3.3330 OFFICIAL RELEASE</a:t>
+              <a:t>Vecto 4.1.0.3392 RELEASE CANDIDATE</a:t>
             </a:r>
             <a:br>
               <a:rPr sz="2400"/>
@@ -5494,7 +5733,7 @@
                 <a:latin typeface="Arial"/>
                 <a:ea typeface="DejaVu Sans"/>
               </a:rPr>
-              <a:t>13.02.2024</a:t>
+              <a:t>15.04.2024</a:t>
             </a:r>
             <a:endParaRPr b="0" lang="en-US" sz="1600" spc="-1" strike="noStrike">
               <a:solidFill>
@@ -5517,8 +5756,8 @@
         </p:nvSpPr>
         <p:spPr>
           <a:xfrm>
-            <a:off x="323640" y="1639080"/>
-            <a:ext cx="8490960" cy="4447800"/>
+            <a:off x="323640" y="1459080"/>
+            <a:ext cx="8489880" cy="4654800"/>
           </a:xfrm>
           <a:prstGeom prst="rect">
             <a:avLst/>
@@ -5533,6 +5772,26 @@
             <a:noAutofit/>
           </a:bodyPr>
           <a:p>
+            <a:pPr marL="343080" indent="0" defTabSz="914400">
+              <a:lnSpc>
+                <a:spcPct val="100000"/>
+              </a:lnSpc>
+              <a:spcBef>
+                <a:spcPts val="320"/>
+              </a:spcBef>
+              <a:buNone/>
+              <a:tabLst>
+                <a:tab algn="l" pos="0"/>
+              </a:tabLst>
+            </a:pPr>
+            <a:endParaRPr b="0" lang="en-US" sz="1600" spc="-1" strike="noStrike">
+              <a:solidFill>
+                <a:srgbClr val="000000"/>
+              </a:solidFill>
+              <a:latin typeface="Arial"/>
+            </a:endParaRPr>
+          </a:p>
+          <a:p>
             <a:pPr marL="343080" indent="-343080" defTabSz="914400">
               <a:lnSpc>
                 <a:spcPct val="100000"/>
@@ -5557,7 +5816,7 @@
                 <a:latin typeface="Arial"/>
                 <a:ea typeface="DejaVu Sans"/>
               </a:rPr>
-              <a:t>Bugfixes</a:t>
+              <a:t>Bugfixes (4/4)</a:t>
             </a:r>
             <a:endParaRPr b="0" lang="en-US" sz="1600" spc="-1" strike="noStrike">
               <a:solidFill>
@@ -5591,7 +5850,7 @@
                 <a:latin typeface="Arial"/>
                 <a:ea typeface="DejaVu Sans"/>
               </a:rPr>
-              <a:t>CodeEU-293: DistanceRun got an unexpected response</a:t>
+              <a:t>CodeEU-519: Article10-2-issue | VECTO-4.0.3 | Order-Nr 10098181 | HEV P1 Error Mercedes-Benz and Setra Hybrid Buses</a:t>
             </a:r>
             <a:endParaRPr b="0" lang="en-US" sz="1200" spc="-1" strike="noStrike">
               <a:solidFill>
@@ -5625,7 +5884,7 @@
                 <a:latin typeface="Arial"/>
                 <a:ea typeface="DejaVu Sans"/>
               </a:rPr>
-              <a:t>CodeEU-298: Object reference not set to an instance of an object</a:t>
+              <a:t>CodeEU-527: Article10-2-issue | VECTO-4.0.3 | Order-Nr 28196233 | HEV P1 Error Mercedes-Benz and Setra Hybrid Buses</a:t>
             </a:r>
             <a:endParaRPr b="0" lang="en-US" sz="1200" spc="-1" strike="noStrike">
               <a:solidFill>
@@ -5659,7 +5918,7 @@
                 <a:latin typeface="Arial"/>
                 <a:ea typeface="DejaVu Sans"/>
               </a:rPr>
-              <a:t>CodeEU-300: Full drive torque miscalculation</a:t>
+              <a:t>CodeEU-528: Article10-2-issue | VECTO-4.0.3 | Order-Nr 28196652 | HEV P1 Error Mercedes-Benz and Setra Hybrid Buses</a:t>
             </a:r>
             <a:endParaRPr b="0" lang="en-US" sz="1200" spc="-1" strike="noStrike">
               <a:solidFill>
@@ -5693,7 +5952,7 @@
                 <a:latin typeface="Arial"/>
                 <a:ea typeface="DejaVu Sans"/>
               </a:rPr>
-              <a:t>CodeEU-336: Feature: Hashing tool must validate the previous step data for multi-step jobs</a:t>
+              <a:t>CodeEU-338: Eco-roll only, without engine stop, impact on CO2 emission</a:t>
             </a:r>
             <a:endParaRPr b="0" lang="en-US" sz="1200" spc="-1" strike="noStrike">
               <a:solidFill>
@@ -5727,7 +5986,7 @@
                 <a:latin typeface="Arial"/>
                 <a:ea typeface="DejaVu Sans"/>
               </a:rPr>
-              <a:t>CodeEU-337: Electric Citybus - ERROR with "31a-Specific" bus configuration</a:t>
+              <a:t>CodeEU-475: XML files loading in VTP Job not OK; No auxiliary data and torque curve visible, Job can't be saved in VECTO 4.0.3.3330</a:t>
             </a:r>
             <a:endParaRPr b="0" lang="en-US" sz="1200" spc="-1" strike="noStrike">
               <a:solidFill>
@@ -5761,347 +6020,7 @@
                 <a:latin typeface="Arial"/>
                 <a:ea typeface="DejaVu Sans"/>
               </a:rPr>
-              <a:t>CodeEU-343: Cannot simulate Primary Vehicle using vectocmd.exe</a:t>
-            </a:r>
-            <a:endParaRPr b="0" lang="en-US" sz="1200" spc="-1" strike="noStrike">
-              <a:solidFill>
-                <a:srgbClr val="000000"/>
-              </a:solidFill>
-              <a:latin typeface="Arial"/>
-            </a:endParaRPr>
-          </a:p>
-          <a:p>
-            <a:pPr lvl="1" marL="800280" indent="-343080" defTabSz="914400">
-              <a:lnSpc>
-                <a:spcPct val="100000"/>
-              </a:lnSpc>
-              <a:spcBef>
-                <a:spcPts val="320"/>
-              </a:spcBef>
-              <a:buClr>
-                <a:srgbClr val="000000"/>
-              </a:buClr>
-              <a:buFont typeface="Symbol"/>
-              <a:buChar char=""/>
-              <a:tabLst>
-                <a:tab algn="l" pos="1886040"/>
-              </a:tabLst>
-            </a:pPr>
-            <a:r>
-              <a:rPr b="0" lang="en-US" sz="1200" spc="-1" strike="noStrike">
-                <a:solidFill>
-                  <a:srgbClr val="000000"/>
-                </a:solidFill>
-                <a:latin typeface="Arial"/>
-                <a:ea typeface="DejaVu Sans"/>
-              </a:rPr>
-              <a:t>CodeEU-387: VECTO sometimes fails to properly read Tyre data from primary vehicle xml</a:t>
-            </a:r>
-            <a:endParaRPr b="0" lang="en-US" sz="1200" spc="-1" strike="noStrike">
-              <a:solidFill>
-                <a:srgbClr val="000000"/>
-              </a:solidFill>
-              <a:latin typeface="Arial"/>
-            </a:endParaRPr>
-          </a:p>
-          <a:p>
-            <a:pPr lvl="1" marL="800280" indent="-343080" defTabSz="914400">
-              <a:lnSpc>
-                <a:spcPct val="100000"/>
-              </a:lnSpc>
-              <a:spcBef>
-                <a:spcPts val="320"/>
-              </a:spcBef>
-              <a:buClr>
-                <a:srgbClr val="000000"/>
-              </a:buClr>
-              <a:buFont typeface="Symbol"/>
-              <a:buChar char=""/>
-              <a:tabLst>
-                <a:tab algn="l" pos="1886040"/>
-              </a:tabLst>
-            </a:pPr>
-            <a:r>
-              <a:rPr b="0" lang="en-US" sz="1200" spc="-1" strike="noStrike">
-                <a:solidFill>
-                  <a:srgbClr val="000000"/>
-                </a:solidFill>
-                <a:latin typeface="Arial"/>
-                <a:ea typeface="DejaVu Sans"/>
-              </a:rPr>
-              <a:t>CodeEU-427: Vehicle speed resulting to exceeding max gearbox speed</a:t>
-            </a:r>
-            <a:endParaRPr b="0" lang="en-US" sz="1200" spc="-1" strike="noStrike">
-              <a:solidFill>
-                <a:srgbClr val="000000"/>
-              </a:solidFill>
-              <a:latin typeface="Arial"/>
-            </a:endParaRPr>
-          </a:p>
-          <a:p>
-            <a:pPr lvl="1" marL="800280" indent="-343080" defTabSz="914400">
-              <a:lnSpc>
-                <a:spcPct val="100000"/>
-              </a:lnSpc>
-              <a:spcBef>
-                <a:spcPts val="320"/>
-              </a:spcBef>
-              <a:buClr>
-                <a:srgbClr val="000000"/>
-              </a:buClr>
-              <a:buFont typeface="Symbol"/>
-              <a:buChar char=""/>
-              <a:tabLst>
-                <a:tab algn="l" pos="1886040"/>
-              </a:tabLst>
-            </a:pPr>
-            <a:r>
-              <a:rPr b="0" lang="en-US" sz="1200" spc="-1" strike="noStrike">
-                <a:solidFill>
-                  <a:srgbClr val="000000"/>
-                </a:solidFill>
-                <a:latin typeface="Arial"/>
-                <a:ea typeface="DejaVu Sans"/>
-              </a:rPr>
-              <a:t>CodeEU-428: Remove speed safety margin for gearbox re-engaging</a:t>
-            </a:r>
-            <a:endParaRPr b="0" lang="en-US" sz="1200" spc="-1" strike="noStrike">
-              <a:solidFill>
-                <a:srgbClr val="000000"/>
-              </a:solidFill>
-              <a:latin typeface="Arial"/>
-            </a:endParaRPr>
-          </a:p>
-          <a:p>
-            <a:pPr lvl="1" marL="800280" indent="-343080" defTabSz="914400">
-              <a:lnSpc>
-                <a:spcPct val="100000"/>
-              </a:lnSpc>
-              <a:spcBef>
-                <a:spcPts val="320"/>
-              </a:spcBef>
-              <a:buClr>
-                <a:srgbClr val="000000"/>
-              </a:buClr>
-              <a:buFont typeface="Symbol"/>
-              <a:buChar char=""/>
-              <a:tabLst>
-                <a:tab algn="l" pos="1886040"/>
-              </a:tabLst>
-            </a:pPr>
-            <a:r>
-              <a:rPr b="0" lang="en-US" sz="1200" spc="-1" strike="noStrike">
-                <a:solidFill>
-                  <a:srgbClr val="000000"/>
-                </a:solidFill>
-                <a:latin typeface="Arial"/>
-                <a:ea typeface="DejaVu Sans"/>
-              </a:rPr>
-              <a:t>CodeEU-438: Mismatch XML schema vs Regulation (exempted vehicles)</a:t>
-            </a:r>
-            <a:endParaRPr b="0" lang="en-US" sz="1200" spc="-1" strike="noStrike">
-              <a:solidFill>
-                <a:srgbClr val="000000"/>
-              </a:solidFill>
-              <a:latin typeface="Arial"/>
-            </a:endParaRPr>
-          </a:p>
-          <a:p>
-            <a:pPr lvl="1" marL="800280" indent="-343080" defTabSz="914400">
-              <a:lnSpc>
-                <a:spcPct val="100000"/>
-              </a:lnSpc>
-              <a:spcBef>
-                <a:spcPts val="320"/>
-              </a:spcBef>
-              <a:buClr>
-                <a:srgbClr val="000000"/>
-              </a:buClr>
-              <a:buFont typeface="Symbol"/>
-              <a:buChar char=""/>
-              <a:tabLst>
-                <a:tab algn="l" pos="1886040"/>
-              </a:tabLst>
-            </a:pPr>
-            <a:r>
-              <a:rPr b="0" lang="en-US" sz="1200" spc="-1" strike="noStrike">
-                <a:solidFill>
-                  <a:srgbClr val="000000"/>
-                </a:solidFill>
-                <a:latin typeface="Arial"/>
-                <a:ea typeface="DejaVu Sans"/>
-              </a:rPr>
-              <a:t>CodeEU-248: Bus P2 hybrid VECTO error in urban cycle</a:t>
-            </a:r>
-            <a:endParaRPr b="0" lang="en-US" sz="1200" spc="-1" strike="noStrike">
-              <a:solidFill>
-                <a:srgbClr val="000000"/>
-              </a:solidFill>
-              <a:latin typeface="Arial"/>
-            </a:endParaRPr>
-          </a:p>
-          <a:p>
-            <a:pPr lvl="1" marL="800280" indent="-343080" defTabSz="914400">
-              <a:lnSpc>
-                <a:spcPct val="100000"/>
-              </a:lnSpc>
-              <a:spcBef>
-                <a:spcPts val="320"/>
-              </a:spcBef>
-              <a:buClr>
-                <a:srgbClr val="000000"/>
-              </a:buClr>
-              <a:buFont typeface="Symbol"/>
-              <a:buChar char=""/>
-              <a:tabLst>
-                <a:tab algn="l" pos="1886040"/>
-              </a:tabLst>
-            </a:pPr>
-            <a:r>
-              <a:rPr b="0" lang="en-US" sz="1200" spc="-1" strike="noStrike">
-                <a:solidFill>
-                  <a:srgbClr val="000000"/>
-                </a:solidFill>
-                <a:latin typeface="Arial"/>
-                <a:ea typeface="DejaVu Sans"/>
-              </a:rPr>
-              <a:t>CodeEU-278: Simulation crash when writing fuel consumption results to reports</a:t>
-            </a:r>
-            <a:endParaRPr b="0" lang="en-US" sz="1200" spc="-1" strike="noStrike">
-              <a:solidFill>
-                <a:srgbClr val="000000"/>
-              </a:solidFill>
-              <a:latin typeface="Arial"/>
-            </a:endParaRPr>
-          </a:p>
-          <a:p>
-            <a:pPr lvl="1" marL="800280" indent="-343080" defTabSz="914400">
-              <a:lnSpc>
-                <a:spcPct val="100000"/>
-              </a:lnSpc>
-              <a:spcBef>
-                <a:spcPts val="320"/>
-              </a:spcBef>
-              <a:buClr>
-                <a:srgbClr val="000000"/>
-              </a:buClr>
-              <a:buFont typeface="Symbol"/>
-              <a:buChar char=""/>
-              <a:tabLst>
-                <a:tab algn="l" pos="1886040"/>
-              </a:tabLst>
-            </a:pPr>
-            <a:r>
-              <a:rPr b="0" lang="en-US" sz="1200" spc="-1" strike="noStrike">
-                <a:solidFill>
-                  <a:srgbClr val="000000"/>
-                </a:solidFill>
-                <a:latin typeface="Arial"/>
-                <a:ea typeface="DejaVu Sans"/>
-              </a:rPr>
-              <a:t>CodeEU-284: New error message and failed simulation obtained for P2 hybrid buses</a:t>
-            </a:r>
-            <a:endParaRPr b="0" lang="en-US" sz="1200" spc="-1" strike="noStrike">
-              <a:solidFill>
-                <a:srgbClr val="000000"/>
-              </a:solidFill>
-              <a:latin typeface="Arial"/>
-            </a:endParaRPr>
-          </a:p>
-          <a:p>
-            <a:pPr lvl="1" marL="800280" indent="-343080" defTabSz="914400">
-              <a:lnSpc>
-                <a:spcPct val="100000"/>
-              </a:lnSpc>
-              <a:spcBef>
-                <a:spcPts val="320"/>
-              </a:spcBef>
-              <a:buClr>
-                <a:srgbClr val="000000"/>
-              </a:buClr>
-              <a:buFont typeface="Symbol"/>
-              <a:buChar char=""/>
-              <a:tabLst>
-                <a:tab algn="l" pos="1886040"/>
-              </a:tabLst>
-            </a:pPr>
-            <a:r>
-              <a:rPr b="0" lang="en-US" sz="1200" spc="-1" strike="noStrike">
-                <a:solidFill>
-                  <a:srgbClr val="000000"/>
-                </a:solidFill>
-                <a:latin typeface="Arial"/>
-                <a:ea typeface="DejaVu Sans"/>
-              </a:rPr>
-              <a:t>CodeEU-285: PEV vehicle error in routine to write the results with new vecto version  4.0.2.3275</a:t>
-            </a:r>
-            <a:endParaRPr b="0" lang="en-US" sz="1200" spc="-1" strike="noStrike">
-              <a:solidFill>
-                <a:srgbClr val="000000"/>
-              </a:solidFill>
-              <a:latin typeface="Arial"/>
-            </a:endParaRPr>
-          </a:p>
-          <a:p>
-            <a:pPr lvl="1" marL="800280" indent="-343080" defTabSz="914400">
-              <a:lnSpc>
-                <a:spcPct val="100000"/>
-              </a:lnSpc>
-              <a:spcBef>
-                <a:spcPts val="320"/>
-              </a:spcBef>
-              <a:buClr>
-                <a:srgbClr val="000000"/>
-              </a:buClr>
-              <a:buFont typeface="Symbol"/>
-              <a:buChar char=""/>
-              <a:tabLst>
-                <a:tab algn="l" pos="1886040"/>
-              </a:tabLst>
-            </a:pPr>
-            <a:r>
-              <a:rPr b="0" lang="en-US" sz="1200" spc="-1" strike="noStrike">
-                <a:solidFill>
-                  <a:srgbClr val="000000"/>
-                </a:solidFill>
-                <a:latin typeface="Arial"/>
-                <a:ea typeface="DejaVu Sans"/>
-              </a:rPr>
-              <a:t>CodeEU-287: PEV_IEPC error message:"can only operate on SI Objects with the same unit"</a:t>
-            </a:r>
-            <a:endParaRPr b="0" lang="en-US" sz="1200" spc="-1" strike="noStrike">
-              <a:solidFill>
-                <a:srgbClr val="000000"/>
-              </a:solidFill>
-              <a:latin typeface="Arial"/>
-            </a:endParaRPr>
-          </a:p>
-          <a:p>
-            <a:pPr lvl="1" marL="800280" indent="-343080" defTabSz="914400">
-              <a:lnSpc>
-                <a:spcPct val="100000"/>
-              </a:lnSpc>
-              <a:spcBef>
-                <a:spcPts val="320"/>
-              </a:spcBef>
-              <a:buClr>
-                <a:srgbClr val="000000"/>
-              </a:buClr>
-              <a:buFont typeface="Symbol"/>
-              <a:buChar char=""/>
-              <a:tabLst>
-                <a:tab algn="l" pos="1886040"/>
-              </a:tabLst>
-            </a:pPr>
-            <a:r>
-              <a:rPr b="0" lang="en-US" sz="1200" spc="-1" strike="noStrike">
-                <a:solidFill>
-                  <a:srgbClr val="000000"/>
-                </a:solidFill>
-                <a:latin typeface="Arial"/>
-                <a:ea typeface="DejaVu Sans"/>
-              </a:rPr>
-              <a:t>CodeEU-289: VECTO Simulation Error for bus with validated input data</a:t>
+              <a:t>CodeEU-610: VTP mode is broken due to changes in the Clutch component.</a:t>
             </a:r>
             <a:endParaRPr b="0" lang="en-US" sz="1200" spc="-1" strike="noStrike">
               <a:solidFill>
@@ -6155,7 +6074,7 @@
         <p:spPr>
           <a:xfrm>
             <a:off x="468360" y="476640"/>
-            <a:ext cx="8212320" cy="675000"/>
+            <a:ext cx="8211240" cy="673920"/>
           </a:xfrm>
           <a:prstGeom prst="rect">
             <a:avLst/>
@@ -6187,7 +6106,7 @@
                 <a:latin typeface="Arial"/>
                 <a:ea typeface="DejaVu Sans"/>
               </a:rPr>
-              <a:t>Vecto 4.0.2.3275 OFFICIAL RELEASE</a:t>
+              <a:t>Vecto 4.0.3.3330 OFFICIAL RELEASE</a:t>
             </a:r>
             <a:br>
               <a:rPr sz="2400"/>
@@ -6200,7 +6119,7 @@
                 <a:latin typeface="Arial"/>
                 <a:ea typeface="DejaVu Sans"/>
               </a:rPr>
-              <a:t>20.12.2023</a:t>
+              <a:t>13.02.2024</a:t>
             </a:r>
             <a:endParaRPr b="0" lang="en-US" sz="1600" spc="-1" strike="noStrike">
               <a:solidFill>
@@ -6224,7 +6143,7 @@
         <p:spPr>
           <a:xfrm>
             <a:off x="323640" y="1639080"/>
-            <a:ext cx="8490960" cy="4447800"/>
+            <a:ext cx="8489880" cy="4446720"/>
           </a:xfrm>
           <a:prstGeom prst="rect">
             <a:avLst/>
@@ -6263,7 +6182,7 @@
                 <a:latin typeface="Arial"/>
                 <a:ea typeface="DejaVu Sans"/>
               </a:rPr>
-              <a:t>Hotfix</a:t>
+              <a:t>Bugfixes</a:t>
             </a:r>
             <a:endParaRPr b="0" lang="en-US" sz="1600" spc="-1" strike="noStrike">
               <a:solidFill>
@@ -6297,7 +6216,7 @@
                 <a:latin typeface="Arial"/>
                 <a:ea typeface="DejaVu Sans"/>
               </a:rPr>
-              <a:t>CodeEU-273, CodeEU-274: Changes in the AMT shift strategy regarding idling speed caused simulation aborts</a:t>
+              <a:t>CodeEU-293: DistanceRun got an unexpected response</a:t>
             </a:r>
             <a:endParaRPr b="0" lang="en-US" sz="1200" spc="-1" strike="noStrike">
               <a:solidFill>
@@ -6331,7 +6250,483 @@
                 <a:latin typeface="Arial"/>
                 <a:ea typeface="DejaVu Sans"/>
               </a:rPr>
-              <a:t>CodeEU-260: regression fix handling overload buffer</a:t>
+              <a:t>CodeEU-298: Object reference not set to an instance of an object</a:t>
+            </a:r>
+            <a:endParaRPr b="0" lang="en-US" sz="1200" spc="-1" strike="noStrike">
+              <a:solidFill>
+                <a:srgbClr val="000000"/>
+              </a:solidFill>
+              <a:latin typeface="Arial"/>
+            </a:endParaRPr>
+          </a:p>
+          <a:p>
+            <a:pPr lvl="1" marL="800280" indent="-343080" defTabSz="914400">
+              <a:lnSpc>
+                <a:spcPct val="100000"/>
+              </a:lnSpc>
+              <a:spcBef>
+                <a:spcPts val="320"/>
+              </a:spcBef>
+              <a:buClr>
+                <a:srgbClr val="000000"/>
+              </a:buClr>
+              <a:buFont typeface="Symbol"/>
+              <a:buChar char=""/>
+              <a:tabLst>
+                <a:tab algn="l" pos="1886040"/>
+              </a:tabLst>
+            </a:pPr>
+            <a:r>
+              <a:rPr b="0" lang="en-US" sz="1200" spc="-1" strike="noStrike">
+                <a:solidFill>
+                  <a:srgbClr val="000000"/>
+                </a:solidFill>
+                <a:latin typeface="Arial"/>
+                <a:ea typeface="DejaVu Sans"/>
+              </a:rPr>
+              <a:t>CodeEU-300: Full drive torque miscalculation</a:t>
+            </a:r>
+            <a:endParaRPr b="0" lang="en-US" sz="1200" spc="-1" strike="noStrike">
+              <a:solidFill>
+                <a:srgbClr val="000000"/>
+              </a:solidFill>
+              <a:latin typeface="Arial"/>
+            </a:endParaRPr>
+          </a:p>
+          <a:p>
+            <a:pPr lvl="1" marL="800280" indent="-343080" defTabSz="914400">
+              <a:lnSpc>
+                <a:spcPct val="100000"/>
+              </a:lnSpc>
+              <a:spcBef>
+                <a:spcPts val="320"/>
+              </a:spcBef>
+              <a:buClr>
+                <a:srgbClr val="000000"/>
+              </a:buClr>
+              <a:buFont typeface="Symbol"/>
+              <a:buChar char=""/>
+              <a:tabLst>
+                <a:tab algn="l" pos="1886040"/>
+              </a:tabLst>
+            </a:pPr>
+            <a:r>
+              <a:rPr b="0" lang="en-US" sz="1200" spc="-1" strike="noStrike">
+                <a:solidFill>
+                  <a:srgbClr val="000000"/>
+                </a:solidFill>
+                <a:latin typeface="Arial"/>
+                <a:ea typeface="DejaVu Sans"/>
+              </a:rPr>
+              <a:t>CodeEU-336: Feature: Hashing tool must validate the previous step data for multi-step jobs</a:t>
+            </a:r>
+            <a:endParaRPr b="0" lang="en-US" sz="1200" spc="-1" strike="noStrike">
+              <a:solidFill>
+                <a:srgbClr val="000000"/>
+              </a:solidFill>
+              <a:latin typeface="Arial"/>
+            </a:endParaRPr>
+          </a:p>
+          <a:p>
+            <a:pPr lvl="1" marL="800280" indent="-343080" defTabSz="914400">
+              <a:lnSpc>
+                <a:spcPct val="100000"/>
+              </a:lnSpc>
+              <a:spcBef>
+                <a:spcPts val="320"/>
+              </a:spcBef>
+              <a:buClr>
+                <a:srgbClr val="000000"/>
+              </a:buClr>
+              <a:buFont typeface="Symbol"/>
+              <a:buChar char=""/>
+              <a:tabLst>
+                <a:tab algn="l" pos="1886040"/>
+              </a:tabLst>
+            </a:pPr>
+            <a:r>
+              <a:rPr b="0" lang="en-US" sz="1200" spc="-1" strike="noStrike">
+                <a:solidFill>
+                  <a:srgbClr val="000000"/>
+                </a:solidFill>
+                <a:latin typeface="Arial"/>
+                <a:ea typeface="DejaVu Sans"/>
+              </a:rPr>
+              <a:t>CodeEU-337: Electric Citybus - ERROR with "31a-Specific" bus configuration</a:t>
+            </a:r>
+            <a:endParaRPr b="0" lang="en-US" sz="1200" spc="-1" strike="noStrike">
+              <a:solidFill>
+                <a:srgbClr val="000000"/>
+              </a:solidFill>
+              <a:latin typeface="Arial"/>
+            </a:endParaRPr>
+          </a:p>
+          <a:p>
+            <a:pPr lvl="1" marL="800280" indent="-343080" defTabSz="914400">
+              <a:lnSpc>
+                <a:spcPct val="100000"/>
+              </a:lnSpc>
+              <a:spcBef>
+                <a:spcPts val="320"/>
+              </a:spcBef>
+              <a:buClr>
+                <a:srgbClr val="000000"/>
+              </a:buClr>
+              <a:buFont typeface="Symbol"/>
+              <a:buChar char=""/>
+              <a:tabLst>
+                <a:tab algn="l" pos="1886040"/>
+              </a:tabLst>
+            </a:pPr>
+            <a:r>
+              <a:rPr b="0" lang="en-US" sz="1200" spc="-1" strike="noStrike">
+                <a:solidFill>
+                  <a:srgbClr val="000000"/>
+                </a:solidFill>
+                <a:latin typeface="Arial"/>
+                <a:ea typeface="DejaVu Sans"/>
+              </a:rPr>
+              <a:t>CodeEU-343: Cannot simulate Primary Vehicle using vectocmd.exe</a:t>
+            </a:r>
+            <a:endParaRPr b="0" lang="en-US" sz="1200" spc="-1" strike="noStrike">
+              <a:solidFill>
+                <a:srgbClr val="000000"/>
+              </a:solidFill>
+              <a:latin typeface="Arial"/>
+            </a:endParaRPr>
+          </a:p>
+          <a:p>
+            <a:pPr lvl="1" marL="800280" indent="-343080" defTabSz="914400">
+              <a:lnSpc>
+                <a:spcPct val="100000"/>
+              </a:lnSpc>
+              <a:spcBef>
+                <a:spcPts val="320"/>
+              </a:spcBef>
+              <a:buClr>
+                <a:srgbClr val="000000"/>
+              </a:buClr>
+              <a:buFont typeface="Symbol"/>
+              <a:buChar char=""/>
+              <a:tabLst>
+                <a:tab algn="l" pos="1886040"/>
+              </a:tabLst>
+            </a:pPr>
+            <a:r>
+              <a:rPr b="0" lang="en-US" sz="1200" spc="-1" strike="noStrike">
+                <a:solidFill>
+                  <a:srgbClr val="000000"/>
+                </a:solidFill>
+                <a:latin typeface="Arial"/>
+                <a:ea typeface="DejaVu Sans"/>
+              </a:rPr>
+              <a:t>CodeEU-387: VECTO sometimes fails to properly read Tyre data from primary vehicle xml</a:t>
+            </a:r>
+            <a:endParaRPr b="0" lang="en-US" sz="1200" spc="-1" strike="noStrike">
+              <a:solidFill>
+                <a:srgbClr val="000000"/>
+              </a:solidFill>
+              <a:latin typeface="Arial"/>
+            </a:endParaRPr>
+          </a:p>
+          <a:p>
+            <a:pPr lvl="1" marL="800280" indent="-343080" defTabSz="914400">
+              <a:lnSpc>
+                <a:spcPct val="100000"/>
+              </a:lnSpc>
+              <a:spcBef>
+                <a:spcPts val="320"/>
+              </a:spcBef>
+              <a:buClr>
+                <a:srgbClr val="000000"/>
+              </a:buClr>
+              <a:buFont typeface="Symbol"/>
+              <a:buChar char=""/>
+              <a:tabLst>
+                <a:tab algn="l" pos="1886040"/>
+              </a:tabLst>
+            </a:pPr>
+            <a:r>
+              <a:rPr b="0" lang="en-US" sz="1200" spc="-1" strike="noStrike">
+                <a:solidFill>
+                  <a:srgbClr val="000000"/>
+                </a:solidFill>
+                <a:latin typeface="Arial"/>
+                <a:ea typeface="DejaVu Sans"/>
+              </a:rPr>
+              <a:t>CodeEU-427: Vehicle speed resulting to exceeding max gearbox speed</a:t>
+            </a:r>
+            <a:endParaRPr b="0" lang="en-US" sz="1200" spc="-1" strike="noStrike">
+              <a:solidFill>
+                <a:srgbClr val="000000"/>
+              </a:solidFill>
+              <a:latin typeface="Arial"/>
+            </a:endParaRPr>
+          </a:p>
+          <a:p>
+            <a:pPr lvl="1" marL="800280" indent="-343080" defTabSz="914400">
+              <a:lnSpc>
+                <a:spcPct val="100000"/>
+              </a:lnSpc>
+              <a:spcBef>
+                <a:spcPts val="320"/>
+              </a:spcBef>
+              <a:buClr>
+                <a:srgbClr val="000000"/>
+              </a:buClr>
+              <a:buFont typeface="Symbol"/>
+              <a:buChar char=""/>
+              <a:tabLst>
+                <a:tab algn="l" pos="1886040"/>
+              </a:tabLst>
+            </a:pPr>
+            <a:r>
+              <a:rPr b="0" lang="en-US" sz="1200" spc="-1" strike="noStrike">
+                <a:solidFill>
+                  <a:srgbClr val="000000"/>
+                </a:solidFill>
+                <a:latin typeface="Arial"/>
+                <a:ea typeface="DejaVu Sans"/>
+              </a:rPr>
+              <a:t>CodeEU-428: Remove speed safety margin for gearbox re-engaging</a:t>
+            </a:r>
+            <a:endParaRPr b="0" lang="en-US" sz="1200" spc="-1" strike="noStrike">
+              <a:solidFill>
+                <a:srgbClr val="000000"/>
+              </a:solidFill>
+              <a:latin typeface="Arial"/>
+            </a:endParaRPr>
+          </a:p>
+          <a:p>
+            <a:pPr lvl="1" marL="800280" indent="-343080" defTabSz="914400">
+              <a:lnSpc>
+                <a:spcPct val="100000"/>
+              </a:lnSpc>
+              <a:spcBef>
+                <a:spcPts val="320"/>
+              </a:spcBef>
+              <a:buClr>
+                <a:srgbClr val="000000"/>
+              </a:buClr>
+              <a:buFont typeface="Symbol"/>
+              <a:buChar char=""/>
+              <a:tabLst>
+                <a:tab algn="l" pos="1886040"/>
+              </a:tabLst>
+            </a:pPr>
+            <a:r>
+              <a:rPr b="0" lang="en-US" sz="1200" spc="-1" strike="noStrike">
+                <a:solidFill>
+                  <a:srgbClr val="000000"/>
+                </a:solidFill>
+                <a:latin typeface="Arial"/>
+                <a:ea typeface="DejaVu Sans"/>
+              </a:rPr>
+              <a:t>CodeEU-438: Mismatch XML schema vs Regulation (exempted vehicles)</a:t>
+            </a:r>
+            <a:endParaRPr b="0" lang="en-US" sz="1200" spc="-1" strike="noStrike">
+              <a:solidFill>
+                <a:srgbClr val="000000"/>
+              </a:solidFill>
+              <a:latin typeface="Arial"/>
+            </a:endParaRPr>
+          </a:p>
+          <a:p>
+            <a:pPr lvl="1" marL="800280" indent="-343080" defTabSz="914400">
+              <a:lnSpc>
+                <a:spcPct val="100000"/>
+              </a:lnSpc>
+              <a:spcBef>
+                <a:spcPts val="320"/>
+              </a:spcBef>
+              <a:buClr>
+                <a:srgbClr val="000000"/>
+              </a:buClr>
+              <a:buFont typeface="Symbol"/>
+              <a:buChar char=""/>
+              <a:tabLst>
+                <a:tab algn="l" pos="1886040"/>
+              </a:tabLst>
+            </a:pPr>
+            <a:r>
+              <a:rPr b="0" lang="en-US" sz="1200" spc="-1" strike="noStrike">
+                <a:solidFill>
+                  <a:srgbClr val="000000"/>
+                </a:solidFill>
+                <a:latin typeface="Arial"/>
+                <a:ea typeface="DejaVu Sans"/>
+              </a:rPr>
+              <a:t>CodeEU-248: Bus P2 hybrid VECTO error in urban cycle</a:t>
+            </a:r>
+            <a:endParaRPr b="0" lang="en-US" sz="1200" spc="-1" strike="noStrike">
+              <a:solidFill>
+                <a:srgbClr val="000000"/>
+              </a:solidFill>
+              <a:latin typeface="Arial"/>
+            </a:endParaRPr>
+          </a:p>
+          <a:p>
+            <a:pPr lvl="1" marL="800280" indent="-343080" defTabSz="914400">
+              <a:lnSpc>
+                <a:spcPct val="100000"/>
+              </a:lnSpc>
+              <a:spcBef>
+                <a:spcPts val="320"/>
+              </a:spcBef>
+              <a:buClr>
+                <a:srgbClr val="000000"/>
+              </a:buClr>
+              <a:buFont typeface="Symbol"/>
+              <a:buChar char=""/>
+              <a:tabLst>
+                <a:tab algn="l" pos="1886040"/>
+              </a:tabLst>
+            </a:pPr>
+            <a:r>
+              <a:rPr b="0" lang="en-US" sz="1200" spc="-1" strike="noStrike">
+                <a:solidFill>
+                  <a:srgbClr val="000000"/>
+                </a:solidFill>
+                <a:latin typeface="Arial"/>
+                <a:ea typeface="DejaVu Sans"/>
+              </a:rPr>
+              <a:t>CodeEU-278: Simulation crash when writing fuel consumption results to reports</a:t>
+            </a:r>
+            <a:endParaRPr b="0" lang="en-US" sz="1200" spc="-1" strike="noStrike">
+              <a:solidFill>
+                <a:srgbClr val="000000"/>
+              </a:solidFill>
+              <a:latin typeface="Arial"/>
+            </a:endParaRPr>
+          </a:p>
+          <a:p>
+            <a:pPr lvl="1" marL="800280" indent="-343080" defTabSz="914400">
+              <a:lnSpc>
+                <a:spcPct val="100000"/>
+              </a:lnSpc>
+              <a:spcBef>
+                <a:spcPts val="320"/>
+              </a:spcBef>
+              <a:buClr>
+                <a:srgbClr val="000000"/>
+              </a:buClr>
+              <a:buFont typeface="Symbol"/>
+              <a:buChar char=""/>
+              <a:tabLst>
+                <a:tab algn="l" pos="1886040"/>
+              </a:tabLst>
+            </a:pPr>
+            <a:r>
+              <a:rPr b="0" lang="en-US" sz="1200" spc="-1" strike="noStrike">
+                <a:solidFill>
+                  <a:srgbClr val="000000"/>
+                </a:solidFill>
+                <a:latin typeface="Arial"/>
+                <a:ea typeface="DejaVu Sans"/>
+              </a:rPr>
+              <a:t>CodeEU-284: New error message and failed simulation obtained for P2 hybrid buses</a:t>
+            </a:r>
+            <a:endParaRPr b="0" lang="en-US" sz="1200" spc="-1" strike="noStrike">
+              <a:solidFill>
+                <a:srgbClr val="000000"/>
+              </a:solidFill>
+              <a:latin typeface="Arial"/>
+            </a:endParaRPr>
+          </a:p>
+          <a:p>
+            <a:pPr lvl="1" marL="800280" indent="-343080" defTabSz="914400">
+              <a:lnSpc>
+                <a:spcPct val="100000"/>
+              </a:lnSpc>
+              <a:spcBef>
+                <a:spcPts val="320"/>
+              </a:spcBef>
+              <a:buClr>
+                <a:srgbClr val="000000"/>
+              </a:buClr>
+              <a:buFont typeface="Symbol"/>
+              <a:buChar char=""/>
+              <a:tabLst>
+                <a:tab algn="l" pos="1886040"/>
+              </a:tabLst>
+            </a:pPr>
+            <a:r>
+              <a:rPr b="0" lang="en-US" sz="1200" spc="-1" strike="noStrike">
+                <a:solidFill>
+                  <a:srgbClr val="000000"/>
+                </a:solidFill>
+                <a:latin typeface="Arial"/>
+                <a:ea typeface="DejaVu Sans"/>
+              </a:rPr>
+              <a:t>CodeEU-285: PEV vehicle error in routine to write the results with new vecto version  4.0.2.3275</a:t>
+            </a:r>
+            <a:endParaRPr b="0" lang="en-US" sz="1200" spc="-1" strike="noStrike">
+              <a:solidFill>
+                <a:srgbClr val="000000"/>
+              </a:solidFill>
+              <a:latin typeface="Arial"/>
+            </a:endParaRPr>
+          </a:p>
+          <a:p>
+            <a:pPr lvl="1" marL="800280" indent="-343080" defTabSz="914400">
+              <a:lnSpc>
+                <a:spcPct val="100000"/>
+              </a:lnSpc>
+              <a:spcBef>
+                <a:spcPts val="320"/>
+              </a:spcBef>
+              <a:buClr>
+                <a:srgbClr val="000000"/>
+              </a:buClr>
+              <a:buFont typeface="Symbol"/>
+              <a:buChar char=""/>
+              <a:tabLst>
+                <a:tab algn="l" pos="1886040"/>
+              </a:tabLst>
+            </a:pPr>
+            <a:r>
+              <a:rPr b="0" lang="en-US" sz="1200" spc="-1" strike="noStrike">
+                <a:solidFill>
+                  <a:srgbClr val="000000"/>
+                </a:solidFill>
+                <a:latin typeface="Arial"/>
+                <a:ea typeface="DejaVu Sans"/>
+              </a:rPr>
+              <a:t>CodeEU-287: PEV_IEPC error message:"can only operate on SI Objects with the same unit"</a:t>
+            </a:r>
+            <a:endParaRPr b="0" lang="en-US" sz="1200" spc="-1" strike="noStrike">
+              <a:solidFill>
+                <a:srgbClr val="000000"/>
+              </a:solidFill>
+              <a:latin typeface="Arial"/>
+            </a:endParaRPr>
+          </a:p>
+          <a:p>
+            <a:pPr lvl="1" marL="800280" indent="-343080" defTabSz="914400">
+              <a:lnSpc>
+                <a:spcPct val="100000"/>
+              </a:lnSpc>
+              <a:spcBef>
+                <a:spcPts val="320"/>
+              </a:spcBef>
+              <a:buClr>
+                <a:srgbClr val="000000"/>
+              </a:buClr>
+              <a:buFont typeface="Symbol"/>
+              <a:buChar char=""/>
+              <a:tabLst>
+                <a:tab algn="l" pos="1886040"/>
+              </a:tabLst>
+            </a:pPr>
+            <a:r>
+              <a:rPr b="0" lang="en-US" sz="1200" spc="-1" strike="noStrike">
+                <a:solidFill>
+                  <a:srgbClr val="000000"/>
+                </a:solidFill>
+                <a:latin typeface="Arial"/>
+                <a:ea typeface="DejaVu Sans"/>
+              </a:rPr>
+              <a:t>CodeEU-289: VECTO Simulation Error for bus with validated input data</a:t>
             </a:r>
             <a:endParaRPr b="0" lang="en-US" sz="1200" spc="-1" strike="noStrike">
               <a:solidFill>
@@ -6385,7 +6780,7 @@
         <p:spPr>
           <a:xfrm>
             <a:off x="468360" y="476640"/>
-            <a:ext cx="8212320" cy="675000"/>
+            <a:ext cx="8211240" cy="673920"/>
           </a:xfrm>
           <a:prstGeom prst="rect">
             <a:avLst/>
@@ -6417,7 +6812,7 @@
                 <a:latin typeface="Arial"/>
                 <a:ea typeface="DejaVu Sans"/>
               </a:rPr>
-              <a:t>Vecto 4.0.2.3273 OFFICIAL RELEASE</a:t>
+              <a:t>Vecto 4.0.2.3275 OFFICIAL RELEASE</a:t>
             </a:r>
             <a:br>
               <a:rPr sz="2400"/>
@@ -6430,7 +6825,7 @@
                 <a:latin typeface="Arial"/>
                 <a:ea typeface="DejaVu Sans"/>
               </a:rPr>
-              <a:t>18.12.2023</a:t>
+              <a:t>20.12.2023</a:t>
             </a:r>
             <a:endParaRPr b="0" lang="en-US" sz="1600" spc="-1" strike="noStrike">
               <a:solidFill>
@@ -6453,8 +6848,8 @@
         </p:nvSpPr>
         <p:spPr>
           <a:xfrm>
-            <a:off x="323640" y="1268640"/>
-            <a:ext cx="8490960" cy="4818240"/>
+            <a:off x="323640" y="1639080"/>
+            <a:ext cx="8489880" cy="4446720"/>
           </a:xfrm>
           <a:prstGeom prst="rect">
             <a:avLst/>
@@ -6493,7 +6888,7 @@
                 <a:latin typeface="Arial"/>
                 <a:ea typeface="DejaVu Sans"/>
               </a:rPr>
-              <a:t>Bugfixes (1/2)</a:t>
+              <a:t>Hotfix</a:t>
             </a:r>
             <a:endParaRPr b="0" lang="en-US" sz="1600" spc="-1" strike="noStrike">
               <a:solidFill>
@@ -6527,7 +6922,7 @@
                 <a:latin typeface="Arial"/>
                 <a:ea typeface="DejaVu Sans"/>
               </a:rPr>
-              <a:t>CodeEU-94: DistanceRun got an unexpected response</a:t>
+              <a:t>CodeEU-273, CodeEU-274: Changes in the AMT shift strategy regarding idling speed caused simulation aborts</a:t>
             </a:r>
             <a:endParaRPr b="0" lang="en-US" sz="1200" spc="-1" strike="noStrike">
               <a:solidFill>
@@ -6561,604 +6956,9 @@
                 <a:latin typeface="Arial"/>
                 <a:ea typeface="DejaVu Sans"/>
               </a:rPr>
-              <a:t>CodeEU-153: DrivingActionAccelerate: Failed to find operating point after Overload</a:t>
+              <a:t>CodeEU-260: regression fix handling overload buffer</a:t>
             </a:r>
             <a:endParaRPr b="0" lang="en-US" sz="1200" spc="-1" strike="noStrike">
-              <a:solidFill>
-                <a:srgbClr val="000000"/>
-              </a:solidFill>
-              <a:latin typeface="Arial"/>
-            </a:endParaRPr>
-          </a:p>
-          <a:p>
-            <a:pPr lvl="1" marL="800280" indent="-343080" defTabSz="914400">
-              <a:lnSpc>
-                <a:spcPct val="100000"/>
-              </a:lnSpc>
-              <a:spcBef>
-                <a:spcPts val="320"/>
-              </a:spcBef>
-              <a:buClr>
-                <a:srgbClr val="000000"/>
-              </a:buClr>
-              <a:buFont typeface="Symbol"/>
-              <a:buChar char=""/>
-              <a:tabLst>
-                <a:tab algn="l" pos="1886040"/>
-              </a:tabLst>
-            </a:pPr>
-            <a:r>
-              <a:rPr b="0" lang="en-US" sz="1200" spc="-1" strike="noStrike">
-                <a:solidFill>
-                  <a:srgbClr val="000000"/>
-                </a:solidFill>
-                <a:latin typeface="Arial"/>
-                <a:ea typeface="DejaVu Sans"/>
-              </a:rPr>
-              <a:t>CodeEU-158: Urban RefLoad DrivingActionAccelerate: Failed to find operating point (IEPC Wheelhub 1 measured)</a:t>
-            </a:r>
-            <a:endParaRPr b="0" lang="en-US" sz="1200" spc="-1" strike="noStrike">
-              <a:solidFill>
-                <a:srgbClr val="000000"/>
-              </a:solidFill>
-              <a:latin typeface="Arial"/>
-            </a:endParaRPr>
-          </a:p>
-          <a:p>
-            <a:pPr lvl="1" marL="800280" indent="-343080" defTabSz="914400">
-              <a:lnSpc>
-                <a:spcPct val="100000"/>
-              </a:lnSpc>
-              <a:spcBef>
-                <a:spcPts val="320"/>
-              </a:spcBef>
-              <a:buClr>
-                <a:srgbClr val="000000"/>
-              </a:buClr>
-              <a:buFont typeface="Symbol"/>
-              <a:buChar char=""/>
-              <a:tabLst>
-                <a:tab algn="l" pos="1886040"/>
-              </a:tabLst>
-            </a:pPr>
-            <a:r>
-              <a:rPr b="0" lang="en-US" sz="1200" spc="-1" strike="noStrike">
-                <a:solidFill>
-                  <a:srgbClr val="000000"/>
-                </a:solidFill>
-                <a:latin typeface="Arial"/>
-                <a:ea typeface="DejaVu Sans"/>
-              </a:rPr>
-              <a:t>CodeEU-168: Vecto Declaration Simulation with P1-Hybrid shows multiple errors - Simulation Aborts!</a:t>
-            </a:r>
-            <a:endParaRPr b="0" lang="en-US" sz="1200" spc="-1" strike="noStrike">
-              <a:solidFill>
-                <a:srgbClr val="000000"/>
-              </a:solidFill>
-              <a:latin typeface="Arial"/>
-            </a:endParaRPr>
-          </a:p>
-          <a:p>
-            <a:pPr lvl="1" marL="800280" indent="-343080" defTabSz="914400">
-              <a:lnSpc>
-                <a:spcPct val="100000"/>
-              </a:lnSpc>
-              <a:spcBef>
-                <a:spcPts val="320"/>
-              </a:spcBef>
-              <a:buClr>
-                <a:srgbClr val="000000"/>
-              </a:buClr>
-              <a:buFont typeface="Symbol"/>
-              <a:buChar char=""/>
-              <a:tabLst>
-                <a:tab algn="l" pos="1886040"/>
-              </a:tabLst>
-            </a:pPr>
-            <a:r>
-              <a:rPr b="0" lang="en-US" sz="1200" spc="-1" strike="noStrike">
-                <a:solidFill>
-                  <a:srgbClr val="000000"/>
-                </a:solidFill>
-                <a:latin typeface="Arial"/>
-                <a:ea typeface="DejaVu Sans"/>
-              </a:rPr>
-              <a:t>CodeEU-191: Boosting limits HEV ovc are not working</a:t>
-            </a:r>
-            <a:endParaRPr b="0" lang="en-US" sz="1200" spc="-1" strike="noStrike">
-              <a:solidFill>
-                <a:srgbClr val="000000"/>
-              </a:solidFill>
-              <a:latin typeface="Arial"/>
-            </a:endParaRPr>
-          </a:p>
-          <a:p>
-            <a:pPr lvl="1" marL="800280" indent="-343080" defTabSz="914400">
-              <a:lnSpc>
-                <a:spcPct val="100000"/>
-              </a:lnSpc>
-              <a:spcBef>
-                <a:spcPts val="320"/>
-              </a:spcBef>
-              <a:buClr>
-                <a:srgbClr val="000000"/>
-              </a:buClr>
-              <a:buFont typeface="Symbol"/>
-              <a:buChar char=""/>
-              <a:tabLst>
-                <a:tab algn="l" pos="1886040"/>
-              </a:tabLst>
-            </a:pPr>
-            <a:r>
-              <a:rPr b="0" lang="en-US" sz="1200" spc="-1" strike="noStrike">
-                <a:solidFill>
-                  <a:srgbClr val="000000"/>
-                </a:solidFill>
-                <a:latin typeface="Arial"/>
-                <a:ea typeface="DejaVu Sans"/>
-              </a:rPr>
-              <a:t>CodeEU-202: EMS Standard Values: Continuous/Overload Torque 0 Nm</a:t>
-            </a:r>
-            <a:endParaRPr b="0" lang="en-US" sz="1200" spc="-1" strike="noStrike">
-              <a:solidFill>
-                <a:srgbClr val="000000"/>
-              </a:solidFill>
-              <a:latin typeface="Arial"/>
-            </a:endParaRPr>
-          </a:p>
-          <a:p>
-            <a:pPr lvl="1" marL="800280" indent="-343080" defTabSz="914400">
-              <a:lnSpc>
-                <a:spcPct val="100000"/>
-              </a:lnSpc>
-              <a:spcBef>
-                <a:spcPts val="320"/>
-              </a:spcBef>
-              <a:buClr>
-                <a:srgbClr val="000000"/>
-              </a:buClr>
-              <a:buFont typeface="Symbol"/>
-              <a:buChar char=""/>
-              <a:tabLst>
-                <a:tab algn="l" pos="1886040"/>
-              </a:tabLst>
-            </a:pPr>
-            <a:r>
-              <a:rPr b="0" lang="en-US" sz="1200" spc="-1" strike="noStrike">
-                <a:solidFill>
-                  <a:srgbClr val="000000"/>
-                </a:solidFill>
-                <a:latin typeface="Arial"/>
-                <a:ea typeface="DejaVu Sans"/>
-              </a:rPr>
-              <a:t>CodeEU-203: HybridStrategy error for IHPC type 1 hybrid lorry</a:t>
-            </a:r>
-            <a:endParaRPr b="0" lang="en-US" sz="1200" spc="-1" strike="noStrike">
-              <a:solidFill>
-                <a:srgbClr val="000000"/>
-              </a:solidFill>
-              <a:latin typeface="Arial"/>
-            </a:endParaRPr>
-          </a:p>
-          <a:p>
-            <a:pPr lvl="1" marL="800280" indent="-343080" defTabSz="914400">
-              <a:lnSpc>
-                <a:spcPct val="100000"/>
-              </a:lnSpc>
-              <a:spcBef>
-                <a:spcPts val="320"/>
-              </a:spcBef>
-              <a:buClr>
-                <a:srgbClr val="000000"/>
-              </a:buClr>
-              <a:buFont typeface="Symbol"/>
-              <a:buChar char=""/>
-              <a:tabLst>
-                <a:tab algn="l" pos="1886040"/>
-              </a:tabLst>
-            </a:pPr>
-            <a:r>
-              <a:rPr b="0" lang="en-US" sz="1200" spc="-1" strike="noStrike">
-                <a:solidFill>
-                  <a:srgbClr val="000000"/>
-                </a:solidFill>
-                <a:latin typeface="Arial"/>
-                <a:ea typeface="DejaVu Sans"/>
-              </a:rPr>
-              <a:t>CodeEU-206: VTP + PEMS test done by Renault Trucks France - VECTO tool errors most probably linked to automatic gearbox (with torque converter)</a:t>
-            </a:r>
-            <a:endParaRPr b="0" lang="en-US" sz="1200" spc="-1" strike="noStrike">
-              <a:solidFill>
-                <a:srgbClr val="000000"/>
-              </a:solidFill>
-              <a:latin typeface="Arial"/>
-            </a:endParaRPr>
-          </a:p>
-          <a:p>
-            <a:pPr lvl="1" marL="800280" indent="-343080" defTabSz="914400">
-              <a:lnSpc>
-                <a:spcPct val="100000"/>
-              </a:lnSpc>
-              <a:spcBef>
-                <a:spcPts val="320"/>
-              </a:spcBef>
-              <a:buClr>
-                <a:srgbClr val="000000"/>
-              </a:buClr>
-              <a:buFont typeface="Symbol"/>
-              <a:buChar char=""/>
-              <a:tabLst>
-                <a:tab algn="l" pos="1886040"/>
-              </a:tabLst>
-            </a:pPr>
-            <a:r>
-              <a:rPr b="0" lang="en-US" sz="1200" spc="-1" strike="noStrike">
-                <a:solidFill>
-                  <a:srgbClr val="000000"/>
-                </a:solidFill>
-                <a:latin typeface="Arial"/>
-                <a:ea typeface="DejaVu Sans"/>
-              </a:rPr>
-              <a:t>CodeEU-211: Hybrid P1 configurations with errors</a:t>
-            </a:r>
-            <a:endParaRPr b="0" lang="en-US" sz="1200" spc="-1" strike="noStrike">
-              <a:solidFill>
-                <a:srgbClr val="000000"/>
-              </a:solidFill>
-              <a:latin typeface="Arial"/>
-            </a:endParaRPr>
-          </a:p>
-          <a:p>
-            <a:pPr lvl="1" marL="800280" indent="-343080" defTabSz="914400">
-              <a:lnSpc>
-                <a:spcPct val="100000"/>
-              </a:lnSpc>
-              <a:spcBef>
-                <a:spcPts val="320"/>
-              </a:spcBef>
-              <a:buClr>
-                <a:srgbClr val="000000"/>
-              </a:buClr>
-              <a:buFont typeface="Symbol"/>
-              <a:buChar char=""/>
-              <a:tabLst>
-                <a:tab algn="l" pos="1886040"/>
-              </a:tabLst>
-            </a:pPr>
-            <a:r>
-              <a:rPr b="0" lang="en-US" sz="1200" spc="-1" strike="noStrike">
-                <a:solidFill>
-                  <a:srgbClr val="000000"/>
-                </a:solidFill>
-                <a:latin typeface="Arial"/>
-                <a:ea typeface="DejaVu Sans"/>
-              </a:rPr>
-              <a:t>CodeEU-215: MultiStep tool help</a:t>
-            </a:r>
-            <a:endParaRPr b="0" lang="en-US" sz="1200" spc="-1" strike="noStrike">
-              <a:solidFill>
-                <a:srgbClr val="000000"/>
-              </a:solidFill>
-              <a:latin typeface="Arial"/>
-            </a:endParaRPr>
-          </a:p>
-          <a:p>
-            <a:pPr lvl="1" marL="800280" indent="-343080" defTabSz="914400">
-              <a:lnSpc>
-                <a:spcPct val="100000"/>
-              </a:lnSpc>
-              <a:spcBef>
-                <a:spcPts val="320"/>
-              </a:spcBef>
-              <a:buClr>
-                <a:srgbClr val="000000"/>
-              </a:buClr>
-              <a:buFont typeface="Symbol"/>
-              <a:buChar char=""/>
-              <a:tabLst>
-                <a:tab algn="l" pos="1886040"/>
-              </a:tabLst>
-            </a:pPr>
-            <a:r>
-              <a:rPr b="0" lang="en-US" sz="1200" spc="-1" strike="noStrike">
-                <a:solidFill>
-                  <a:srgbClr val="000000"/>
-                </a:solidFill>
-                <a:latin typeface="Arial"/>
-                <a:ea typeface="DejaVu Sans"/>
-              </a:rPr>
-              <a:t>CodeEU-216: NrOfGears in CIF is 1 for IEPC no matter how many gears it has</a:t>
-            </a:r>
-            <a:endParaRPr b="0" lang="en-US" sz="1200" spc="-1" strike="noStrike">
-              <a:solidFill>
-                <a:srgbClr val="000000"/>
-              </a:solidFill>
-              <a:latin typeface="Arial"/>
-            </a:endParaRPr>
-          </a:p>
-          <a:p>
-            <a:pPr lvl="1" marL="800280" indent="-343080" defTabSz="914400">
-              <a:lnSpc>
-                <a:spcPct val="100000"/>
-              </a:lnSpc>
-              <a:spcBef>
-                <a:spcPts val="320"/>
-              </a:spcBef>
-              <a:buClr>
-                <a:srgbClr val="000000"/>
-              </a:buClr>
-              <a:buFont typeface="Symbol"/>
-              <a:buChar char=""/>
-              <a:tabLst>
-                <a:tab algn="l" pos="1886040"/>
-              </a:tabLst>
-            </a:pPr>
-            <a:r>
-              <a:rPr b="0" lang="en-US" sz="1200" spc="-1" strike="noStrike">
-                <a:solidFill>
-                  <a:srgbClr val="000000"/>
-                </a:solidFill>
-                <a:latin typeface="Arial"/>
-                <a:ea typeface="DejaVu Sans"/>
-              </a:rPr>
-              <a:t>CodeEU-220: Error manual transmission 2. gear</a:t>
-            </a:r>
-            <a:endParaRPr b="0" lang="en-US" sz="1200" spc="-1" strike="noStrike">
-              <a:solidFill>
-                <a:srgbClr val="000000"/>
-              </a:solidFill>
-              <a:latin typeface="Arial"/>
-            </a:endParaRPr>
-          </a:p>
-          <a:p>
-            <a:pPr lvl="1" marL="800280" indent="-343080" defTabSz="914400">
-              <a:lnSpc>
-                <a:spcPct val="100000"/>
-              </a:lnSpc>
-              <a:spcBef>
-                <a:spcPts val="320"/>
-              </a:spcBef>
-              <a:buClr>
-                <a:srgbClr val="000000"/>
-              </a:buClr>
-              <a:buFont typeface="Symbol"/>
-              <a:buChar char=""/>
-              <a:tabLst>
-                <a:tab algn="l" pos="1886040"/>
-              </a:tabLst>
-            </a:pPr>
-            <a:r>
-              <a:rPr b="0" lang="en-US" sz="1200" spc="-1" strike="noStrike">
-                <a:solidFill>
-                  <a:srgbClr val="000000"/>
-                </a:solidFill>
-                <a:latin typeface="Arial"/>
-                <a:ea typeface="DejaVu Sans"/>
-              </a:rPr>
-              <a:t>CodeEU-224: Issue with PEV complete vehicle simulation (Vecto MultiStage)</a:t>
-            </a:r>
-            <a:endParaRPr b="0" lang="en-US" sz="1200" spc="-1" strike="noStrike">
-              <a:solidFill>
-                <a:srgbClr val="000000"/>
-              </a:solidFill>
-              <a:latin typeface="Arial"/>
-            </a:endParaRPr>
-          </a:p>
-          <a:p>
-            <a:pPr lvl="1" marL="800280" indent="-343080" defTabSz="914400">
-              <a:lnSpc>
-                <a:spcPct val="100000"/>
-              </a:lnSpc>
-              <a:spcBef>
-                <a:spcPts val="320"/>
-              </a:spcBef>
-              <a:buClr>
-                <a:srgbClr val="000000"/>
-              </a:buClr>
-              <a:buFont typeface="Symbol"/>
-              <a:buChar char=""/>
-              <a:tabLst>
-                <a:tab algn="l" pos="1886040"/>
-              </a:tabLst>
-            </a:pPr>
-            <a:r>
-              <a:rPr b="0" lang="en-US" sz="1200" spc="-1" strike="noStrike">
-                <a:solidFill>
-                  <a:srgbClr val="000000"/>
-                </a:solidFill>
-                <a:latin typeface="Arial"/>
-                <a:ea typeface="DejaVu Sans"/>
-              </a:rPr>
-              <a:t>CodeEU-231: IVECO CONFIDENTIAL : hybrid buses completed simulation aborted</a:t>
-            </a:r>
-            <a:endParaRPr b="0" lang="en-US" sz="1200" spc="-1" strike="noStrike">
-              <a:solidFill>
-                <a:srgbClr val="000000"/>
-              </a:solidFill>
-              <a:latin typeface="Arial"/>
-            </a:endParaRPr>
-          </a:p>
-          <a:p>
-            <a:pPr lvl="1" marL="800280" indent="-343080" defTabSz="914400">
-              <a:lnSpc>
-                <a:spcPct val="100000"/>
-              </a:lnSpc>
-              <a:spcBef>
-                <a:spcPts val="320"/>
-              </a:spcBef>
-              <a:buClr>
-                <a:srgbClr val="000000"/>
-              </a:buClr>
-              <a:buFont typeface="Symbol"/>
-              <a:buChar char=""/>
-              <a:tabLst>
-                <a:tab algn="l" pos="1886040"/>
-              </a:tabLst>
-            </a:pPr>
-            <a:r>
-              <a:rPr b="0" lang="en-US" sz="1200" spc="-1" strike="noStrike">
-                <a:solidFill>
-                  <a:srgbClr val="000000"/>
-                </a:solidFill>
-                <a:latin typeface="Arial"/>
-                <a:ea typeface="DejaVu Sans"/>
-              </a:rPr>
-              <a:t>CodeEU-234: Error Conventional Lorry Gear: 1C DistanceRun got an unexpected response</a:t>
-            </a:r>
-            <a:endParaRPr b="0" lang="en-US" sz="1200" spc="-1" strike="noStrike">
-              <a:solidFill>
-                <a:srgbClr val="000000"/>
-              </a:solidFill>
-              <a:latin typeface="Arial"/>
-            </a:endParaRPr>
-          </a:p>
-          <a:p>
-            <a:pPr lvl="1" marL="800280" indent="-343080" defTabSz="914400">
-              <a:lnSpc>
-                <a:spcPct val="100000"/>
-              </a:lnSpc>
-              <a:spcBef>
-                <a:spcPts val="320"/>
-              </a:spcBef>
-              <a:buClr>
-                <a:srgbClr val="000000"/>
-              </a:buClr>
-              <a:buFont typeface="Symbol"/>
-              <a:buChar char=""/>
-              <a:tabLst>
-                <a:tab algn="l" pos="1886040"/>
-              </a:tabLst>
-            </a:pPr>
-            <a:r>
-              <a:rPr b="0" lang="en-US" sz="1200" spc="-1" strike="noStrike">
-                <a:solidFill>
-                  <a:srgbClr val="000000"/>
-                </a:solidFill>
-                <a:latin typeface="Arial"/>
-                <a:ea typeface="DejaVu Sans"/>
-              </a:rPr>
-              <a:t>CodeEU-235: Tyre error calculation buses "invalid xsi:type 'TyreDataDeclarationType'"</a:t>
-            </a:r>
-            <a:endParaRPr b="0" lang="en-US" sz="1200" spc="-1" strike="noStrike">
-              <a:solidFill>
-                <a:srgbClr val="000000"/>
-              </a:solidFill>
-              <a:latin typeface="Arial"/>
-            </a:endParaRPr>
-          </a:p>
-          <a:p>
-            <a:pPr lvl="1" marL="800280" indent="-343080" defTabSz="914400">
-              <a:lnSpc>
-                <a:spcPct val="100000"/>
-              </a:lnSpc>
-              <a:spcBef>
-                <a:spcPts val="320"/>
-              </a:spcBef>
-              <a:buClr>
-                <a:srgbClr val="000000"/>
-              </a:buClr>
-              <a:buFont typeface="Symbol"/>
-              <a:buChar char=""/>
-              <a:tabLst>
-                <a:tab algn="l" pos="1886040"/>
-              </a:tabLst>
-            </a:pPr>
-            <a:r>
-              <a:rPr b="0" lang="en-US" sz="1200" spc="-1" strike="noStrike">
-                <a:solidFill>
-                  <a:srgbClr val="000000"/>
-                </a:solidFill>
-                <a:latin typeface="Arial"/>
-                <a:ea typeface="DejaVu Sans"/>
-              </a:rPr>
-              <a:t>CodeEU-238: Bus VIF files not valid in Multistep VECTO</a:t>
-            </a:r>
-            <a:endParaRPr b="0" lang="en-US" sz="1200" spc="-1" strike="noStrike">
-              <a:solidFill>
-                <a:srgbClr val="000000"/>
-              </a:solidFill>
-              <a:latin typeface="Arial"/>
-            </a:endParaRPr>
-          </a:p>
-          <a:p>
-            <a:pPr lvl="1" marL="800280" indent="-343080" defTabSz="914400">
-              <a:lnSpc>
-                <a:spcPct val="100000"/>
-              </a:lnSpc>
-              <a:spcBef>
-                <a:spcPts val="320"/>
-              </a:spcBef>
-              <a:buClr>
-                <a:srgbClr val="000000"/>
-              </a:buClr>
-              <a:buFont typeface="Symbol"/>
-              <a:buChar char=""/>
-              <a:tabLst>
-                <a:tab algn="l" pos="1886040"/>
-              </a:tabLst>
-            </a:pPr>
-            <a:r>
-              <a:rPr b="0" lang="en-US" sz="1200" spc="-1" strike="noStrike">
-                <a:solidFill>
-                  <a:srgbClr val="000000"/>
-                </a:solidFill>
-                <a:latin typeface="Arial"/>
-                <a:ea typeface="DejaVu Sans"/>
-              </a:rPr>
-              <a:t>CodeEU-243: Simulation aborted: Gear 5 Lossmap not sufficiant</a:t>
-            </a:r>
-            <a:endParaRPr b="0" lang="en-US" sz="1200" spc="-1" strike="noStrike">
-              <a:solidFill>
-                <a:srgbClr val="000000"/>
-              </a:solidFill>
-              <a:latin typeface="Arial"/>
-            </a:endParaRPr>
-          </a:p>
-          <a:p>
-            <a:pPr lvl="1" marL="800280" indent="-343080" defTabSz="914400">
-              <a:lnSpc>
-                <a:spcPct val="100000"/>
-              </a:lnSpc>
-              <a:spcBef>
-                <a:spcPts val="320"/>
-              </a:spcBef>
-              <a:buClr>
-                <a:srgbClr val="000000"/>
-              </a:buClr>
-              <a:buFont typeface="Symbol"/>
-              <a:buChar char=""/>
-              <a:tabLst>
-                <a:tab algn="l" pos="1886040"/>
-              </a:tabLst>
-            </a:pPr>
-            <a:r>
-              <a:rPr b="0" lang="en-US" sz="1200" spc="-1" strike="noStrike">
-                <a:solidFill>
-                  <a:srgbClr val="000000"/>
-                </a:solidFill>
-                <a:latin typeface="Arial"/>
-                <a:ea typeface="DejaVu Sans"/>
-              </a:rPr>
-              <a:t>CodeEU-244: Signature validation fails for old (prior to v4) Manufacturer reports</a:t>
-            </a:r>
-            <a:endParaRPr b="0" lang="en-US" sz="1200" spc="-1" strike="noStrike">
-              <a:solidFill>
-                <a:srgbClr val="000000"/>
-              </a:solidFill>
-              <a:latin typeface="Arial"/>
-            </a:endParaRPr>
-          </a:p>
-          <a:p>
-            <a:pPr indent="0" defTabSz="914400">
-              <a:lnSpc>
-                <a:spcPct val="100000"/>
-              </a:lnSpc>
-              <a:buNone/>
-              <a:tabLst>
-                <a:tab algn="l" pos="0"/>
-              </a:tabLst>
-            </a:pPr>
-            <a:endParaRPr b="0" lang="en-US" sz="1400" spc="-1" strike="noStrike">
               <a:solidFill>
                 <a:srgbClr val="000000"/>
               </a:solidFill>
@@ -7210,7 +7010,7 @@
         <p:spPr>
           <a:xfrm>
             <a:off x="468360" y="476640"/>
-            <a:ext cx="8212320" cy="675000"/>
+            <a:ext cx="8211240" cy="673920"/>
           </a:xfrm>
           <a:prstGeom prst="rect">
             <a:avLst/>
@@ -7279,7 +7079,7 @@
         <p:spPr>
           <a:xfrm>
             <a:off x="323640" y="1268640"/>
-            <a:ext cx="8490960" cy="4818240"/>
+            <a:ext cx="8489880" cy="4817160"/>
           </a:xfrm>
           <a:prstGeom prst="rect">
             <a:avLst/>
@@ -7318,7 +7118,7 @@
                 <a:latin typeface="Arial"/>
                 <a:ea typeface="DejaVu Sans"/>
               </a:rPr>
-              <a:t>Bugfixes (2/2)</a:t>
+              <a:t>Bugfixes (1/2)</a:t>
             </a:r>
             <a:endParaRPr b="0" lang="en-US" sz="1600" spc="-1" strike="noStrike">
               <a:solidFill>
@@ -7352,7 +7152,7 @@
                 <a:latin typeface="Arial"/>
                 <a:ea typeface="DejaVu Sans"/>
               </a:rPr>
-              <a:t>CodeEU-249: Fix handling gear torque limits in case of IEPC WheelHub motor and only one side is measured</a:t>
+              <a:t>CodeEU-94: DistanceRun got an unexpected response</a:t>
             </a:r>
             <a:endParaRPr b="0" lang="en-US" sz="1200" spc="-1" strike="noStrike">
               <a:solidFill>
@@ -7386,7 +7186,7 @@
                 <a:latin typeface="Arial"/>
                 <a:ea typeface="DejaVu Sans"/>
               </a:rPr>
-              <a:t>CodeEU-250: Maximum vehicle speed exceeded during pre-processing</a:t>
+              <a:t>CodeEU-153: DrivingActionAccelerate: Failed to find operating point after Overload</a:t>
             </a:r>
             <a:endParaRPr b="0" lang="en-US" sz="1200" spc="-1" strike="noStrike">
               <a:solidFill>
@@ -7420,7 +7220,7 @@
                 <a:latin typeface="Arial"/>
                 <a:ea typeface="DejaVu Sans"/>
               </a:rPr>
-              <a:t>CodeEU-253: Replace VTP HeavyBus in Generic Vehicles with VTP Truck</a:t>
+              <a:t>CodeEU-158: Urban RefLoad DrivingActionAccelerate: Failed to find operating point (IEPC Wheelhub 1 measured)</a:t>
             </a:r>
             <a:endParaRPr b="0" lang="en-US" sz="1200" spc="-1" strike="noStrike">
               <a:solidFill>
@@ -7454,7 +7254,7 @@
                 <a:latin typeface="Arial"/>
                 <a:ea typeface="DejaVu Sans"/>
               </a:rPr>
-              <a:t>CodeEU-259: Inconsistent calculation of AverageRRC in CIF</a:t>
+              <a:t>CodeEU-168: Vecto Declaration Simulation with P1-Hybrid shows multiple errors - Simulation Aborts!</a:t>
             </a:r>
             <a:endParaRPr b="0" lang="en-US" sz="1200" spc="-1" strike="noStrike">
               <a:solidFill>
@@ -7488,7 +7288,7 @@
                 <a:latin typeface="Arial"/>
                 <a:ea typeface="DejaVu Sans"/>
               </a:rPr>
-              <a:t>CodeEU-260: Handling of overload buffer in case Continuous Torque is 0Nm</a:t>
+              <a:t>CodeEU-191: Boosting limits HEV ovc are not working</a:t>
             </a:r>
             <a:endParaRPr b="0" lang="en-US" sz="1200" spc="-1" strike="noStrike">
               <a:solidFill>
@@ -7522,7 +7322,7 @@
                 <a:latin typeface="Arial"/>
                 <a:ea typeface="DejaVu Sans"/>
               </a:rPr>
-              <a:t>CodeEU-261: SuperCap internal resistance standard values correction</a:t>
+              <a:t>CodeEU-202: EMS Standard Values: Continuous/Overload Torque 0 Nm</a:t>
             </a:r>
             <a:endParaRPr b="0" lang="en-US" sz="1200" spc="-1" strike="noStrike">
               <a:solidFill>
@@ -7556,7 +7356,7 @@
                 <a:latin typeface="Arial"/>
                 <a:ea typeface="DejaVu Sans"/>
               </a:rPr>
-              <a:t>CodeEU-263: Determination of rated power for IEPCs for MRF and CIF</a:t>
+              <a:t>CodeEU-203: HybridStrategy error for IHPC type 1 hybrid lorry</a:t>
             </a:r>
             <a:endParaRPr b="0" lang="en-US" sz="1200" spc="-1" strike="noStrike">
               <a:solidFill>
@@ -7590,7 +7390,7 @@
                 <a:latin typeface="Arial"/>
                 <a:ea typeface="DejaVu Sans"/>
               </a:rPr>
-              <a:t>CodeEU-266: Fix Measured Speed Testcases</a:t>
+              <a:t>CodeEU-206: VTP + PEMS test done by Renault Trucks France - VECTO tool errors most probably linked to automatic gearbox (with torque converter)</a:t>
             </a:r>
             <a:endParaRPr b="0" lang="en-US" sz="1200" spc="-1" strike="noStrike">
               <a:solidFill>
@@ -7600,18 +7400,32 @@
             </a:endParaRPr>
           </a:p>
           <a:p>
-            <a:pPr indent="0" defTabSz="914400">
-              <a:lnSpc>
-                <a:spcPct val="100000"/>
-              </a:lnSpc>
-              <a:spcBef>
-                <a:spcPts val="281"/>
-              </a:spcBef>
-              <a:buNone/>
-              <a:tabLst>
-                <a:tab algn="l" pos="0"/>
-              </a:tabLst>
-            </a:pPr>
+            <a:pPr lvl="1" marL="800280" indent="-343080" defTabSz="914400">
+              <a:lnSpc>
+                <a:spcPct val="100000"/>
+              </a:lnSpc>
+              <a:spcBef>
+                <a:spcPts val="320"/>
+              </a:spcBef>
+              <a:buClr>
+                <a:srgbClr val="000000"/>
+              </a:buClr>
+              <a:buFont typeface="Symbol"/>
+              <a:buChar char=""/>
+              <a:tabLst>
+                <a:tab algn="l" pos="1886040"/>
+              </a:tabLst>
+            </a:pPr>
+            <a:r>
+              <a:rPr b="0" lang="en-US" sz="1200" spc="-1" strike="noStrike">
+                <a:solidFill>
+                  <a:srgbClr val="000000"/>
+                </a:solidFill>
+                <a:latin typeface="Arial"/>
+                <a:ea typeface="DejaVu Sans"/>
+              </a:rPr>
+              <a:t>CodeEU-211: Hybrid P1 configurations with errors</a:t>
+            </a:r>
             <a:endParaRPr b="0" lang="en-US" sz="1200" spc="-1" strike="noStrike">
               <a:solidFill>
                 <a:srgbClr val="000000"/>
@@ -7620,16 +7434,339 @@
             </a:endParaRPr>
           </a:p>
           <a:p>
-            <a:pPr indent="0" defTabSz="914400">
-              <a:lnSpc>
-                <a:spcPct val="100000"/>
-              </a:lnSpc>
-              <a:buNone/>
-              <a:tabLst>
-                <a:tab algn="l" pos="0"/>
-              </a:tabLst>
-            </a:pPr>
-            <a:endParaRPr b="0" lang="en-US" sz="1400" spc="-1" strike="noStrike">
+            <a:pPr lvl="1" marL="800280" indent="-343080" defTabSz="914400">
+              <a:lnSpc>
+                <a:spcPct val="100000"/>
+              </a:lnSpc>
+              <a:spcBef>
+                <a:spcPts val="320"/>
+              </a:spcBef>
+              <a:buClr>
+                <a:srgbClr val="000000"/>
+              </a:buClr>
+              <a:buFont typeface="Symbol"/>
+              <a:buChar char=""/>
+              <a:tabLst>
+                <a:tab algn="l" pos="1886040"/>
+              </a:tabLst>
+            </a:pPr>
+            <a:r>
+              <a:rPr b="0" lang="en-US" sz="1200" spc="-1" strike="noStrike">
+                <a:solidFill>
+                  <a:srgbClr val="000000"/>
+                </a:solidFill>
+                <a:latin typeface="Arial"/>
+                <a:ea typeface="DejaVu Sans"/>
+              </a:rPr>
+              <a:t>CodeEU-215: MultiStep tool help</a:t>
+            </a:r>
+            <a:endParaRPr b="0" lang="en-US" sz="1200" spc="-1" strike="noStrike">
+              <a:solidFill>
+                <a:srgbClr val="000000"/>
+              </a:solidFill>
+              <a:latin typeface="Arial"/>
+            </a:endParaRPr>
+          </a:p>
+          <a:p>
+            <a:pPr lvl="1" marL="800280" indent="-343080" defTabSz="914400">
+              <a:lnSpc>
+                <a:spcPct val="100000"/>
+              </a:lnSpc>
+              <a:spcBef>
+                <a:spcPts val="320"/>
+              </a:spcBef>
+              <a:buClr>
+                <a:srgbClr val="000000"/>
+              </a:buClr>
+              <a:buFont typeface="Symbol"/>
+              <a:buChar char=""/>
+              <a:tabLst>
+                <a:tab algn="l" pos="1886040"/>
+              </a:tabLst>
+            </a:pPr>
+            <a:r>
+              <a:rPr b="0" lang="en-US" sz="1200" spc="-1" strike="noStrike">
+                <a:solidFill>
+                  <a:srgbClr val="000000"/>
+                </a:solidFill>
+                <a:latin typeface="Arial"/>
+                <a:ea typeface="DejaVu Sans"/>
+              </a:rPr>
+              <a:t>CodeEU-216: NrOfGears in CIF is 1 for IEPC no matter how many gears it has</a:t>
+            </a:r>
+            <a:endParaRPr b="0" lang="en-US" sz="1200" spc="-1" strike="noStrike">
+              <a:solidFill>
+                <a:srgbClr val="000000"/>
+              </a:solidFill>
+              <a:latin typeface="Arial"/>
+            </a:endParaRPr>
+          </a:p>
+          <a:p>
+            <a:pPr lvl="1" marL="800280" indent="-343080" defTabSz="914400">
+              <a:lnSpc>
+                <a:spcPct val="100000"/>
+              </a:lnSpc>
+              <a:spcBef>
+                <a:spcPts val="320"/>
+              </a:spcBef>
+              <a:buClr>
+                <a:srgbClr val="000000"/>
+              </a:buClr>
+              <a:buFont typeface="Symbol"/>
+              <a:buChar char=""/>
+              <a:tabLst>
+                <a:tab algn="l" pos="1886040"/>
+              </a:tabLst>
+            </a:pPr>
+            <a:r>
+              <a:rPr b="0" lang="en-US" sz="1200" spc="-1" strike="noStrike">
+                <a:solidFill>
+                  <a:srgbClr val="000000"/>
+                </a:solidFill>
+                <a:latin typeface="Arial"/>
+                <a:ea typeface="DejaVu Sans"/>
+              </a:rPr>
+              <a:t>CodeEU-220: Error manual transmission 2. gear</a:t>
+            </a:r>
+            <a:endParaRPr b="0" lang="en-US" sz="1200" spc="-1" strike="noStrike">
+              <a:solidFill>
+                <a:srgbClr val="000000"/>
+              </a:solidFill>
+              <a:latin typeface="Arial"/>
+            </a:endParaRPr>
+          </a:p>
+          <a:p>
+            <a:pPr lvl="1" marL="800280" indent="-343080" defTabSz="914400">
+              <a:lnSpc>
+                <a:spcPct val="100000"/>
+              </a:lnSpc>
+              <a:spcBef>
+                <a:spcPts val="320"/>
+              </a:spcBef>
+              <a:buClr>
+                <a:srgbClr val="000000"/>
+              </a:buClr>
+              <a:buFont typeface="Symbol"/>
+              <a:buChar char=""/>
+              <a:tabLst>
+                <a:tab algn="l" pos="1886040"/>
+              </a:tabLst>
+            </a:pPr>
+            <a:r>
+              <a:rPr b="0" lang="en-US" sz="1200" spc="-1" strike="noStrike">
+                <a:solidFill>
+                  <a:srgbClr val="000000"/>
+                </a:solidFill>
+                <a:latin typeface="Arial"/>
+                <a:ea typeface="DejaVu Sans"/>
+              </a:rPr>
+              <a:t>CodeEU-224: Issue with PEV complete vehicle simulation (Vecto MultiStage)</a:t>
+            </a:r>
+            <a:endParaRPr b="0" lang="en-US" sz="1200" spc="-1" strike="noStrike">
+              <a:solidFill>
+                <a:srgbClr val="000000"/>
+              </a:solidFill>
+              <a:latin typeface="Arial"/>
+            </a:endParaRPr>
+          </a:p>
+          <a:p>
+            <a:pPr lvl="1" marL="800280" indent="-343080" defTabSz="914400">
+              <a:lnSpc>
+                <a:spcPct val="100000"/>
+              </a:lnSpc>
+              <a:spcBef>
+                <a:spcPts val="320"/>
+              </a:spcBef>
+              <a:buClr>
+                <a:srgbClr val="000000"/>
+              </a:buClr>
+              <a:buFont typeface="Symbol"/>
+              <a:buChar char=""/>
+              <a:tabLst>
+                <a:tab algn="l" pos="1886040"/>
+              </a:tabLst>
+            </a:pPr>
+            <a:r>
+              <a:rPr b="0" lang="en-US" sz="1200" spc="-1" strike="noStrike">
+                <a:solidFill>
+                  <a:srgbClr val="000000"/>
+                </a:solidFill>
+                <a:latin typeface="Arial"/>
+                <a:ea typeface="DejaVu Sans"/>
+              </a:rPr>
+              <a:t>CodeEU-231: IVECO CONFIDENTIAL : hybrid buses completed simulation aborted</a:t>
+            </a:r>
+            <a:endParaRPr b="0" lang="en-US" sz="1200" spc="-1" strike="noStrike">
+              <a:solidFill>
+                <a:srgbClr val="000000"/>
+              </a:solidFill>
+              <a:latin typeface="Arial"/>
+            </a:endParaRPr>
+          </a:p>
+          <a:p>
+            <a:pPr lvl="1" marL="800280" indent="-343080" defTabSz="914400">
+              <a:lnSpc>
+                <a:spcPct val="100000"/>
+              </a:lnSpc>
+              <a:spcBef>
+                <a:spcPts val="320"/>
+              </a:spcBef>
+              <a:buClr>
+                <a:srgbClr val="000000"/>
+              </a:buClr>
+              <a:buFont typeface="Symbol"/>
+              <a:buChar char=""/>
+              <a:tabLst>
+                <a:tab algn="l" pos="1886040"/>
+              </a:tabLst>
+            </a:pPr>
+            <a:r>
+              <a:rPr b="0" lang="en-US" sz="1200" spc="-1" strike="noStrike">
+                <a:solidFill>
+                  <a:srgbClr val="000000"/>
+                </a:solidFill>
+                <a:latin typeface="Arial"/>
+                <a:ea typeface="DejaVu Sans"/>
+              </a:rPr>
+              <a:t>CodeEU-234: Error Conventional Lorry Gear: 1C DistanceRun got an unexpected response</a:t>
+            </a:r>
+            <a:endParaRPr b="0" lang="en-US" sz="1200" spc="-1" strike="noStrike">
+              <a:solidFill>
+                <a:srgbClr val="000000"/>
+              </a:solidFill>
+              <a:latin typeface="Arial"/>
+            </a:endParaRPr>
+          </a:p>
+          <a:p>
+            <a:pPr lvl="1" marL="800280" indent="-343080" defTabSz="914400">
+              <a:lnSpc>
+                <a:spcPct val="100000"/>
+              </a:lnSpc>
+              <a:spcBef>
+                <a:spcPts val="320"/>
+              </a:spcBef>
+              <a:buClr>
+                <a:srgbClr val="000000"/>
+              </a:buClr>
+              <a:buFont typeface="Symbol"/>
+              <a:buChar char=""/>
+              <a:tabLst>
+                <a:tab algn="l" pos="1886040"/>
+              </a:tabLst>
+            </a:pPr>
+            <a:r>
+              <a:rPr b="0" lang="en-US" sz="1200" spc="-1" strike="noStrike">
+                <a:solidFill>
+                  <a:srgbClr val="000000"/>
+                </a:solidFill>
+                <a:latin typeface="Arial"/>
+                <a:ea typeface="DejaVu Sans"/>
+              </a:rPr>
+              <a:t>CodeEU-235: Tyre error calculation buses "invalid xsi:type 'TyreDataDeclarationType'"</a:t>
+            </a:r>
+            <a:endParaRPr b="0" lang="en-US" sz="1200" spc="-1" strike="noStrike">
+              <a:solidFill>
+                <a:srgbClr val="000000"/>
+              </a:solidFill>
+              <a:latin typeface="Arial"/>
+            </a:endParaRPr>
+          </a:p>
+          <a:p>
+            <a:pPr lvl="1" marL="800280" indent="-343080" defTabSz="914400">
+              <a:lnSpc>
+                <a:spcPct val="100000"/>
+              </a:lnSpc>
+              <a:spcBef>
+                <a:spcPts val="320"/>
+              </a:spcBef>
+              <a:buClr>
+                <a:srgbClr val="000000"/>
+              </a:buClr>
+              <a:buFont typeface="Symbol"/>
+              <a:buChar char=""/>
+              <a:tabLst>
+                <a:tab algn="l" pos="1886040"/>
+              </a:tabLst>
+            </a:pPr>
+            <a:r>
+              <a:rPr b="0" lang="en-US" sz="1200" spc="-1" strike="noStrike">
+                <a:solidFill>
+                  <a:srgbClr val="000000"/>
+                </a:solidFill>
+                <a:latin typeface="Arial"/>
+                <a:ea typeface="DejaVu Sans"/>
+              </a:rPr>
+              <a:t>CodeEU-238: Bus VIF files not valid in Multistep VECTO</a:t>
+            </a:r>
+            <a:endParaRPr b="0" lang="en-US" sz="1200" spc="-1" strike="noStrike">
+              <a:solidFill>
+                <a:srgbClr val="000000"/>
+              </a:solidFill>
+              <a:latin typeface="Arial"/>
+            </a:endParaRPr>
+          </a:p>
+          <a:p>
+            <a:pPr lvl="1" marL="800280" indent="-343080" defTabSz="914400">
+              <a:lnSpc>
+                <a:spcPct val="100000"/>
+              </a:lnSpc>
+              <a:spcBef>
+                <a:spcPts val="320"/>
+              </a:spcBef>
+              <a:buClr>
+                <a:srgbClr val="000000"/>
+              </a:buClr>
+              <a:buFont typeface="Symbol"/>
+              <a:buChar char=""/>
+              <a:tabLst>
+                <a:tab algn="l" pos="1886040"/>
+              </a:tabLst>
+            </a:pPr>
+            <a:r>
+              <a:rPr b="0" lang="en-US" sz="1200" spc="-1" strike="noStrike">
+                <a:solidFill>
+                  <a:srgbClr val="000000"/>
+                </a:solidFill>
+                <a:latin typeface="Arial"/>
+                <a:ea typeface="DejaVu Sans"/>
+              </a:rPr>
+              <a:t>CodeEU-243: Simulation aborted: Gear 5 Lossmap not sufficiant</a:t>
+            </a:r>
+            <a:endParaRPr b="0" lang="en-US" sz="1200" spc="-1" strike="noStrike">
+              <a:solidFill>
+                <a:srgbClr val="000000"/>
+              </a:solidFill>
+              <a:latin typeface="Arial"/>
+            </a:endParaRPr>
+          </a:p>
+          <a:p>
+            <a:pPr lvl="1" marL="800280" indent="-343080" defTabSz="914400">
+              <a:lnSpc>
+                <a:spcPct val="100000"/>
+              </a:lnSpc>
+              <a:spcBef>
+                <a:spcPts val="320"/>
+              </a:spcBef>
+              <a:buClr>
+                <a:srgbClr val="000000"/>
+              </a:buClr>
+              <a:buFont typeface="Symbol"/>
+              <a:buChar char=""/>
+              <a:tabLst>
+                <a:tab algn="l" pos="1886040"/>
+              </a:tabLst>
+            </a:pPr>
+            <a:r>
+              <a:rPr b="0" lang="en-US" sz="1200" spc="-1" strike="noStrike">
+                <a:solidFill>
+                  <a:srgbClr val="000000"/>
+                </a:solidFill>
+                <a:latin typeface="Arial"/>
+                <a:ea typeface="DejaVu Sans"/>
+              </a:rPr>
+              <a:t>CodeEU-244: Signature validation fails for old (prior to v4) Manufacturer reports</a:t>
+            </a:r>
+            <a:endParaRPr b="0" lang="en-US" sz="1200" spc="-1" strike="noStrike">
               <a:solidFill>
                 <a:srgbClr val="000000"/>
               </a:solidFill>
@@ -7698,7 +7835,7 @@
         <p:spPr>
           <a:xfrm>
             <a:off x="468360" y="476640"/>
-            <a:ext cx="8212320" cy="675000"/>
+            <a:ext cx="8211240" cy="673920"/>
           </a:xfrm>
           <a:prstGeom prst="rect">
             <a:avLst/>
@@ -7730,7 +7867,7 @@
                 <a:latin typeface="Arial"/>
                 <a:ea typeface="DejaVu Sans"/>
               </a:rPr>
-              <a:t>Vecto 4.0.1.3217 OFFICIAL RELEASE</a:t>
+              <a:t>Vecto 4.0.2.3273 OFFICIAL RELEASE</a:t>
             </a:r>
             <a:br>
               <a:rPr sz="2400"/>
@@ -7743,7 +7880,7 @@
                 <a:latin typeface="Arial"/>
                 <a:ea typeface="DejaVu Sans"/>
               </a:rPr>
-              <a:t>23.10.2023</a:t>
+              <a:t>18.12.2023</a:t>
             </a:r>
             <a:endParaRPr b="0" lang="en-US" sz="1600" spc="-1" strike="noStrike">
               <a:solidFill>
@@ -7767,7 +7904,7 @@
         <p:spPr>
           <a:xfrm>
             <a:off x="323640" y="1268640"/>
-            <a:ext cx="8490960" cy="4818240"/>
+            <a:ext cx="8489880" cy="4817160"/>
           </a:xfrm>
           <a:prstGeom prst="rect">
             <a:avLst/>
@@ -7806,7 +7943,7 @@
                 <a:latin typeface="Arial"/>
                 <a:ea typeface="DejaVu Sans"/>
               </a:rPr>
-              <a:t>Improvements</a:t>
+              <a:t>Bugfixes (2/2)</a:t>
             </a:r>
             <a:endParaRPr b="0" lang="en-US" sz="1600" spc="-1" strike="noStrike">
               <a:solidFill>
@@ -7833,24 +7970,24 @@
               </a:tabLst>
             </a:pPr>
             <a:r>
-              <a:rPr b="0" lang="en-US" sz="1400" spc="-1" strike="noStrike">
-                <a:solidFill>
-                  <a:srgbClr val="000000"/>
-                </a:solidFill>
-                <a:latin typeface="Arial"/>
-                <a:ea typeface="DejaVu Sans"/>
-              </a:rPr>
-              <a:t>VTP mode: create zip archive for input and output files</a:t>
-            </a:r>
-            <a:endParaRPr b="0" lang="en-US" sz="1400" spc="-1" strike="noStrike">
-              <a:solidFill>
-                <a:srgbClr val="000000"/>
-              </a:solidFill>
-              <a:latin typeface="Arial"/>
-            </a:endParaRPr>
-          </a:p>
-          <a:p>
-            <a:pPr marL="343080" indent="-343080" defTabSz="914400">
+              <a:rPr b="0" lang="en-US" sz="1200" spc="-1" strike="noStrike">
+                <a:solidFill>
+                  <a:srgbClr val="000000"/>
+                </a:solidFill>
+                <a:latin typeface="Arial"/>
+                <a:ea typeface="DejaVu Sans"/>
+              </a:rPr>
+              <a:t>CodeEU-249: Fix handling gear torque limits in case of IEPC WheelHub motor and only one side is measured</a:t>
+            </a:r>
+            <a:endParaRPr b="0" lang="en-US" sz="1200" spc="-1" strike="noStrike">
+              <a:solidFill>
+                <a:srgbClr val="000000"/>
+              </a:solidFill>
+              <a:latin typeface="Arial"/>
+            </a:endParaRPr>
+          </a:p>
+          <a:p>
+            <a:pPr lvl="1" marL="800280" indent="-343080" defTabSz="914400">
               <a:lnSpc>
                 <a:spcPct val="100000"/>
               </a:lnSpc>
@@ -7867,16 +8004,16 @@
               </a:tabLst>
             </a:pPr>
             <a:r>
-              <a:rPr b="1" lang="en-US" sz="1600" spc="-1" strike="noStrike">
-                <a:solidFill>
-                  <a:srgbClr val="000000"/>
-                </a:solidFill>
-                <a:latin typeface="Arial"/>
-                <a:ea typeface="DejaVu Sans"/>
-              </a:rPr>
-              <a:t>- Bugfixes</a:t>
-            </a:r>
-            <a:endParaRPr b="0" lang="en-US" sz="1600" spc="-1" strike="noStrike">
+              <a:rPr b="0" lang="en-US" sz="1200" spc="-1" strike="noStrike">
+                <a:solidFill>
+                  <a:srgbClr val="000000"/>
+                </a:solidFill>
+                <a:latin typeface="Arial"/>
+                <a:ea typeface="DejaVu Sans"/>
+              </a:rPr>
+              <a:t>CodeEU-250: Maximum vehicle speed exceeded during pre-processing</a:t>
+            </a:r>
+            <a:endParaRPr b="0" lang="en-US" sz="1200" spc="-1" strike="noStrike">
               <a:solidFill>
                 <a:srgbClr val="000000"/>
               </a:solidFill>
@@ -7901,16 +8038,16 @@
               </a:tabLst>
             </a:pPr>
             <a:r>
-              <a:rPr b="0" lang="en-US" sz="1400" spc="-1" strike="noStrike">
-                <a:solidFill>
-                  <a:srgbClr val="000000"/>
-                </a:solidFill>
-                <a:latin typeface="Arial"/>
-                <a:ea typeface="DejaVu Sans"/>
-              </a:rPr>
-              <a:t>bugfix in CIF for complete(d) buses - do not write PrimaryVehicleSubgroup element</a:t>
-            </a:r>
-            <a:endParaRPr b="0" lang="en-US" sz="1400" spc="-1" strike="noStrike">
+              <a:rPr b="0" lang="en-US" sz="1200" spc="-1" strike="noStrike">
+                <a:solidFill>
+                  <a:srgbClr val="000000"/>
+                </a:solidFill>
+                <a:latin typeface="Arial"/>
+                <a:ea typeface="DejaVu Sans"/>
+              </a:rPr>
+              <a:t>CodeEU-253: Replace VTP HeavyBus in Generic Vehicles with VTP Truck</a:t>
+            </a:r>
+            <a:endParaRPr b="0" lang="en-US" sz="1200" spc="-1" strike="noStrike">
               <a:solidFill>
                 <a:srgbClr val="000000"/>
               </a:solidFill>
@@ -7935,16 +8072,16 @@
               </a:tabLst>
             </a:pPr>
             <a:r>
-              <a:rPr b="0" lang="en-US" sz="1400" spc="-1" strike="noStrike">
-                <a:solidFill>
-                  <a:srgbClr val="000000"/>
-                </a:solidFill>
-                <a:latin typeface="Arial"/>
-                <a:ea typeface="DejaVu Sans"/>
-              </a:rPr>
-              <a:t>fix hybrid strategy: power comparison</a:t>
-            </a:r>
-            <a:endParaRPr b="0" lang="en-US" sz="1400" spc="-1" strike="noStrike">
+              <a:rPr b="0" lang="en-US" sz="1200" spc="-1" strike="noStrike">
+                <a:solidFill>
+                  <a:srgbClr val="000000"/>
+                </a:solidFill>
+                <a:latin typeface="Arial"/>
+                <a:ea typeface="DejaVu Sans"/>
+              </a:rPr>
+              <a:t>CodeEU-259: Inconsistent calculation of AverageRRC in CIF</a:t>
+            </a:r>
+            <a:endParaRPr b="0" lang="en-US" sz="1200" spc="-1" strike="noStrike">
               <a:solidFill>
                 <a:srgbClr val="000000"/>
               </a:solidFill>
@@ -7969,16 +8106,16 @@
               </a:tabLst>
             </a:pPr>
             <a:r>
-              <a:rPr b="0" lang="en-US" sz="1400" spc="-1" strike="noStrike">
-                <a:solidFill>
-                  <a:srgbClr val="000000"/>
-                </a:solidFill>
-                <a:latin typeface="Arial"/>
-                <a:ea typeface="DejaVu Sans"/>
-              </a:rPr>
-              <a:t>fix exempted vehicles do not work (error message that XML version is not supported)</a:t>
-            </a:r>
-            <a:endParaRPr b="0" lang="en-US" sz="1400" spc="-1" strike="noStrike">
+              <a:rPr b="0" lang="en-US" sz="1200" spc="-1" strike="noStrike">
+                <a:solidFill>
+                  <a:srgbClr val="000000"/>
+                </a:solidFill>
+                <a:latin typeface="Arial"/>
+                <a:ea typeface="DejaVu Sans"/>
+              </a:rPr>
+              <a:t>CodeEU-260: Handling of overload buffer in case Continuous Torque is 0Nm</a:t>
+            </a:r>
+            <a:endParaRPr b="0" lang="en-US" sz="1200" spc="-1" strike="noStrike">
               <a:solidFill>
                 <a:srgbClr val="000000"/>
               </a:solidFill>
@@ -8003,16 +8140,16 @@
               </a:tabLst>
             </a:pPr>
             <a:r>
-              <a:rPr b="0" lang="en-US" sz="1400" spc="-1" strike="noStrike">
-                <a:solidFill>
-                  <a:srgbClr val="000000"/>
-                </a:solidFill>
-                <a:latin typeface="Arial"/>
-                <a:ea typeface="DejaVu Sans"/>
-              </a:rPr>
-              <a:t>bugfix in XML schema: remove wrong PS technology entry for lorries</a:t>
-            </a:r>
-            <a:endParaRPr b="0" lang="en-US" sz="1400" spc="-1" strike="noStrike">
+              <a:rPr b="0" lang="en-US" sz="1200" spc="-1" strike="noStrike">
+                <a:solidFill>
+                  <a:srgbClr val="000000"/>
+                </a:solidFill>
+                <a:latin typeface="Arial"/>
+                <a:ea typeface="DejaVu Sans"/>
+              </a:rPr>
+              <a:t>CodeEU-261: SuperCap internal resistance standard values correction</a:t>
+            </a:r>
+            <a:endParaRPr b="0" lang="en-US" sz="1200" spc="-1" strike="noStrike">
               <a:solidFill>
                 <a:srgbClr val="000000"/>
               </a:solidFill>
@@ -8037,16 +8174,50 @@
               </a:tabLst>
             </a:pPr>
             <a:r>
-              <a:rPr b="0" lang="en-US" sz="1400" spc="-1" strike="noStrike">
-                <a:solidFill>
-                  <a:srgbClr val="000000"/>
-                </a:solidFill>
-                <a:latin typeface="Arial"/>
-                <a:ea typeface="DejaVu Sans"/>
-              </a:rPr>
-              <a:t>bugfix for conditioning power demand for IHPC vehicles</a:t>
-            </a:r>
-            <a:endParaRPr b="0" lang="en-US" sz="1400" spc="-1" strike="noStrike">
+              <a:rPr b="0" lang="en-US" sz="1200" spc="-1" strike="noStrike">
+                <a:solidFill>
+                  <a:srgbClr val="000000"/>
+                </a:solidFill>
+                <a:latin typeface="Arial"/>
+                <a:ea typeface="DejaVu Sans"/>
+              </a:rPr>
+              <a:t>CodeEU-263: Determination of rated power for IEPCs for MRF and CIF</a:t>
+            </a:r>
+            <a:endParaRPr b="0" lang="en-US" sz="1200" spc="-1" strike="noStrike">
+              <a:solidFill>
+                <a:srgbClr val="000000"/>
+              </a:solidFill>
+              <a:latin typeface="Arial"/>
+            </a:endParaRPr>
+          </a:p>
+          <a:p>
+            <a:pPr lvl="1" marL="800280" indent="-343080" defTabSz="914400">
+              <a:lnSpc>
+                <a:spcPct val="100000"/>
+              </a:lnSpc>
+              <a:spcBef>
+                <a:spcPts val="320"/>
+              </a:spcBef>
+              <a:buClr>
+                <a:srgbClr val="000000"/>
+              </a:buClr>
+              <a:buFont typeface="Symbol"/>
+              <a:buChar char=""/>
+              <a:tabLst>
+                <a:tab algn="l" pos="1886040"/>
+              </a:tabLst>
+            </a:pPr>
+            <a:r>
+              <a:rPr b="0" lang="en-US" sz="1200" spc="-1" strike="noStrike">
+                <a:solidFill>
+                  <a:srgbClr val="000000"/>
+                </a:solidFill>
+                <a:latin typeface="Arial"/>
+                <a:ea typeface="DejaVu Sans"/>
+              </a:rPr>
+              <a:t>CodeEU-266: Fix Measured Speed Testcases</a:t>
+            </a:r>
+            <a:endParaRPr b="0" lang="en-US" sz="1200" spc="-1" strike="noStrike">
               <a:solidFill>
                 <a:srgbClr val="000000"/>
               </a:solidFill>
@@ -8058,32 +8229,15 @@
               <a:lnSpc>
                 <a:spcPct val="100000"/>
               </a:lnSpc>
+              <a:spcBef>
+                <a:spcPts val="281"/>
+              </a:spcBef>
               <a:buNone/>
               <a:tabLst>
                 <a:tab algn="l" pos="0"/>
               </a:tabLst>
             </a:pPr>
-            <a:endParaRPr b="0" lang="en-US" sz="1400" spc="-1" strike="noStrike">
-              <a:solidFill>
-                <a:srgbClr val="000000"/>
-              </a:solidFill>
-              <a:latin typeface="Arial"/>
-            </a:endParaRPr>
-          </a:p>
-          <a:p>
-            <a:pPr indent="0" defTabSz="914400">
-              <a:lnSpc>
-                <a:spcPct val="100000"/>
-              </a:lnSpc>
-              <a:spcBef>
-                <a:spcPts val="281"/>
-              </a:spcBef>
-              <a:buNone/>
-              <a:tabLst>
-                <a:tab algn="l" pos="0"/>
-              </a:tabLst>
-            </a:pPr>
-            <a:endParaRPr b="0" lang="en-US" sz="1400" spc="-1" strike="noStrike">
+            <a:endParaRPr b="0" lang="en-US" sz="1200" spc="-1" strike="noStrike">
               <a:solidFill>
                 <a:srgbClr val="000000"/>
               </a:solidFill>
@@ -8158,14 +8312,18 @@
       </p:grpSpPr>
       <p:sp>
         <p:nvSpPr>
-          <p:cNvPr id="89" name="Text Box 94"/>
-          <p:cNvSpPr/>
-          <p:nvPr/>
+          <p:cNvPr id="89" name="PlaceHolder 1"/>
+          <p:cNvSpPr>
+            <a:spLocks noGrp="1"/>
+          </p:cNvSpPr>
+          <p:nvPr>
+            <p:ph type="title"/>
+          </p:nvPr>
         </p:nvSpPr>
         <p:spPr>
           <a:xfrm>
-            <a:off x="539640" y="1052640"/>
-            <a:ext cx="8130240" cy="3945600"/>
+            <a:off x="468360" y="476640"/>
+            <a:ext cx="8211240" cy="673920"/>
           </a:xfrm>
           <a:prstGeom prst="rect">
             <a:avLst/>
@@ -8175,168 +8333,44 @@
             <a:noFill/>
           </a:ln>
         </p:spPr>
-        <p:style>
-          <a:lnRef idx="0"/>
-          <a:fillRef idx="0"/>
-          <a:effectRef idx="0"/>
-          <a:fontRef idx="minor"/>
-        </p:style>
         <p:txBody>
-          <a:bodyPr lIns="90000" rIns="90000" tIns="45000" bIns="45000" anchor="t">
-            <a:spAutoFit/>
+          <a:bodyPr numCol="1" spcCol="0" lIns="90000" rIns="90000" tIns="45000" bIns="45000" anchor="ctr">
+            <a:noAutofit/>
           </a:bodyPr>
           <a:p>
-            <a:pPr algn="ctr" defTabSz="914400">
-              <a:lnSpc>
-                <a:spcPct val="100000"/>
-              </a:lnSpc>
-              <a:spcBef>
-                <a:spcPts val="1599"/>
-              </a:spcBef>
-            </a:pPr>
-            <a:r>
-              <a:rPr b="1" lang="en-US" sz="3200" spc="-1" strike="noStrike">
+            <a:pPr indent="0" algn="ctr" defTabSz="914400">
+              <a:lnSpc>
+                <a:spcPct val="100000"/>
+              </a:lnSpc>
+              <a:buNone/>
+              <a:tabLst>
+                <a:tab algn="l" pos="0"/>
+              </a:tabLst>
+            </a:pPr>
+            <a:r>
+              <a:rPr b="1" lang="en-US" sz="2400" spc="-1" strike="noStrike">
                 <a:solidFill>
                   <a:srgbClr val="990000"/>
                 </a:solidFill>
                 <a:latin typeface="Arial"/>
                 <a:ea typeface="DejaVu Sans"/>
               </a:rPr>
-              <a:t>VECTO 4.0.0.3210 </a:t>
-            </a:r>
-            <a:endParaRPr b="0" lang="en-US" sz="3200" spc="-1" strike="noStrike">
-              <a:solidFill>
-                <a:srgbClr val="000000"/>
-              </a:solidFill>
-              <a:latin typeface="Arial"/>
-            </a:endParaRPr>
-          </a:p>
-          <a:p>
-            <a:pPr algn="ctr" defTabSz="914400">
-              <a:lnSpc>
-                <a:spcPct val="100000"/>
-              </a:lnSpc>
-              <a:spcBef>
-                <a:spcPts val="1001"/>
-              </a:spcBef>
-            </a:pPr>
-            <a:r>
-              <a:rPr b="1" lang="en-US" sz="2000" spc="-1" strike="noStrike">
+              <a:t>Vecto 4.0.1.3217 OFFICIAL RELEASE</a:t>
+            </a:r>
+            <a:br>
+              <a:rPr sz="2400"/>
+            </a:br>
+            <a:r>
+              <a:rPr b="1" lang="en-US" sz="1600" spc="-1" strike="noStrike">
                 <a:solidFill>
                   <a:srgbClr val="990000"/>
                 </a:solidFill>
                 <a:latin typeface="Arial"/>
                 <a:ea typeface="DejaVu Sans"/>
               </a:rPr>
-              <a:t>16.10.2023</a:t>
-            </a:r>
-            <a:endParaRPr b="0" lang="en-US" sz="2000" spc="-1" strike="noStrike">
-              <a:solidFill>
-                <a:srgbClr val="000000"/>
-              </a:solidFill>
-              <a:latin typeface="Arial"/>
-            </a:endParaRPr>
-          </a:p>
-          <a:p>
-            <a:pPr algn="ctr" defTabSz="914400">
-              <a:lnSpc>
-                <a:spcPct val="100000"/>
-              </a:lnSpc>
-              <a:spcBef>
-                <a:spcPts val="1001"/>
-              </a:spcBef>
-            </a:pPr>
-            <a:endParaRPr b="0" lang="en-US" sz="2000" spc="-1" strike="noStrike">
-              <a:solidFill>
-                <a:srgbClr val="000000"/>
-              </a:solidFill>
-              <a:latin typeface="Arial"/>
-            </a:endParaRPr>
-          </a:p>
-          <a:p>
-            <a:pPr algn="ctr" defTabSz="914400">
-              <a:lnSpc>
-                <a:spcPct val="100000"/>
-              </a:lnSpc>
-              <a:spcBef>
-                <a:spcPts val="1001"/>
-              </a:spcBef>
-            </a:pPr>
-            <a:endParaRPr b="0" lang="en-US" sz="2000" spc="-1" strike="noStrike">
-              <a:solidFill>
-                <a:srgbClr val="000000"/>
-              </a:solidFill>
-              <a:latin typeface="Arial"/>
-            </a:endParaRPr>
-          </a:p>
-          <a:p>
-            <a:pPr algn="ctr" defTabSz="914400">
-              <a:lnSpc>
-                <a:spcPct val="100000"/>
-              </a:lnSpc>
-              <a:spcBef>
-                <a:spcPts val="1199"/>
-              </a:spcBef>
-            </a:pPr>
-            <a:endParaRPr b="0" lang="en-US" sz="2400" spc="-1" strike="noStrike">
-              <a:solidFill>
-                <a:srgbClr val="000000"/>
-              </a:solidFill>
-              <a:latin typeface="Arial"/>
-            </a:endParaRPr>
-          </a:p>
-          <a:p>
-            <a:pPr algn="ctr" defTabSz="914400">
-              <a:lnSpc>
-                <a:spcPct val="100000"/>
-              </a:lnSpc>
-              <a:spcBef>
-                <a:spcPts val="1199"/>
-              </a:spcBef>
-            </a:pPr>
-            <a:endParaRPr b="0" lang="en-US" sz="2400" spc="-1" strike="noStrike">
-              <a:solidFill>
-                <a:srgbClr val="000000"/>
-              </a:solidFill>
-              <a:latin typeface="Arial"/>
-            </a:endParaRPr>
-          </a:p>
-          <a:p>
-            <a:pPr algn="ctr" defTabSz="914400">
-              <a:lnSpc>
-                <a:spcPct val="100000"/>
-              </a:lnSpc>
-              <a:spcBef>
-                <a:spcPts val="1199"/>
-              </a:spcBef>
-            </a:pPr>
-            <a:endParaRPr b="0" lang="en-US" sz="2400" spc="-1" strike="noStrike">
-              <a:solidFill>
-                <a:srgbClr val="000000"/>
-              </a:solidFill>
-              <a:latin typeface="Arial"/>
-            </a:endParaRPr>
-          </a:p>
-          <a:p>
-            <a:pPr algn="ctr" defTabSz="914400">
-              <a:lnSpc>
-                <a:spcPct val="100000"/>
-              </a:lnSpc>
-              <a:spcBef>
-                <a:spcPts val="1199"/>
-              </a:spcBef>
-            </a:pPr>
-            <a:r>
-              <a:rPr b="1" lang="en-US" sz="2400" spc="-1" strike="noStrike">
-                <a:solidFill>
-                  <a:srgbClr val="990000"/>
-                </a:solidFill>
-                <a:latin typeface="Arial"/>
-                <a:ea typeface="DejaVu Sans"/>
-              </a:rPr>
-              <a:t>Release Notes</a:t>
-            </a:r>
-            <a:endParaRPr b="0" lang="en-US" sz="2400" spc="-1" strike="noStrike">
+              <a:t>23.10.2023</a:t>
+            </a:r>
+            <a:endParaRPr b="0" lang="en-US" sz="1600" spc="-1" strike="noStrike">
               <a:solidFill>
                 <a:srgbClr val="000000"/>
               </a:solidFill>
@@ -8345,29 +8379,378 @@
           </a:p>
         </p:txBody>
       </p:sp>
-      <p:pic>
-        <p:nvPicPr>
-          <p:cNvPr id="90" name="Picture 2" descr=""/>
-          <p:cNvPicPr/>
-          <p:nvPr/>
-        </p:nvPicPr>
-        <p:blipFill>
-          <a:blip r:embed="rId1"/>
-          <a:stretch/>
-        </p:blipFill>
+      <p:sp>
+        <p:nvSpPr>
+          <p:cNvPr id="90" name="PlaceHolder 2"/>
+          <p:cNvSpPr>
+            <a:spLocks noGrp="1"/>
+          </p:cNvSpPr>
+          <p:nvPr>
+            <p:ph/>
+          </p:nvPr>
+        </p:nvSpPr>
         <p:spPr>
           <a:xfrm>
-            <a:off x="2483640" y="2421000"/>
-            <a:ext cx="4170240" cy="1621440"/>
+            <a:off x="323640" y="1268640"/>
+            <a:ext cx="8489880" cy="4817160"/>
           </a:xfrm>
           <a:prstGeom prst="rect">
             <a:avLst/>
           </a:prstGeom>
+          <a:noFill/>
           <a:ln w="0">
             <a:noFill/>
           </a:ln>
         </p:spPr>
-      </p:pic>
+        <p:txBody>
+          <a:bodyPr numCol="1" spcCol="0" lIns="90000" rIns="90000" tIns="45000" bIns="45000" anchor="t">
+            <a:noAutofit/>
+          </a:bodyPr>
+          <a:p>
+            <a:pPr marL="343080" indent="-343080" defTabSz="914400">
+              <a:lnSpc>
+                <a:spcPct val="100000"/>
+              </a:lnSpc>
+              <a:spcBef>
+                <a:spcPts val="320"/>
+              </a:spcBef>
+              <a:buClr>
+                <a:srgbClr val="000000"/>
+              </a:buClr>
+              <a:buFont typeface="Symbol"/>
+              <a:buChar char=""/>
+              <a:tabLst>
+                <a:tab algn="l" pos="1886040"/>
+              </a:tabLst>
+            </a:pPr>
+            <a:r>
+              <a:rPr b="1" lang="en-US" sz="1600" spc="-1" strike="noStrike">
+                <a:solidFill>
+                  <a:srgbClr val="000000"/>
+                </a:solidFill>
+                <a:latin typeface="Arial"/>
+                <a:ea typeface="DejaVu Sans"/>
+              </a:rPr>
+              <a:t>Improvements</a:t>
+            </a:r>
+            <a:endParaRPr b="0" lang="en-US" sz="1600" spc="-1" strike="noStrike">
+              <a:solidFill>
+                <a:srgbClr val="000000"/>
+              </a:solidFill>
+              <a:latin typeface="Arial"/>
+            </a:endParaRPr>
+          </a:p>
+          <a:p>
+            <a:pPr lvl="1" marL="800280" indent="-343080" defTabSz="914400">
+              <a:lnSpc>
+                <a:spcPct val="100000"/>
+              </a:lnSpc>
+              <a:spcBef>
+                <a:spcPts val="320"/>
+              </a:spcBef>
+              <a:buClr>
+                <a:srgbClr val="000000"/>
+              </a:buClr>
+              <a:buFont typeface="Symbol"/>
+              <a:buChar char=""/>
+              <a:tabLst>
+                <a:tab algn="l" pos="1886040"/>
+              </a:tabLst>
+            </a:pPr>
+            <a:r>
+              <a:rPr b="0" lang="en-US" sz="1400" spc="-1" strike="noStrike">
+                <a:solidFill>
+                  <a:srgbClr val="000000"/>
+                </a:solidFill>
+                <a:latin typeface="Arial"/>
+                <a:ea typeface="DejaVu Sans"/>
+              </a:rPr>
+              <a:t>VTP mode: create zip archive for input and output files</a:t>
+            </a:r>
+            <a:endParaRPr b="0" lang="en-US" sz="1400" spc="-1" strike="noStrike">
+              <a:solidFill>
+                <a:srgbClr val="000000"/>
+              </a:solidFill>
+              <a:latin typeface="Arial"/>
+            </a:endParaRPr>
+          </a:p>
+          <a:p>
+            <a:pPr marL="343080" indent="-343080" defTabSz="914400">
+              <a:lnSpc>
+                <a:spcPct val="100000"/>
+              </a:lnSpc>
+              <a:spcBef>
+                <a:spcPts val="320"/>
+              </a:spcBef>
+              <a:buClr>
+                <a:srgbClr val="000000"/>
+              </a:buClr>
+              <a:buFont typeface="Symbol"/>
+              <a:buChar char=""/>
+              <a:tabLst>
+                <a:tab algn="l" pos="1886040"/>
+              </a:tabLst>
+            </a:pPr>
+            <a:r>
+              <a:rPr b="1" lang="en-US" sz="1600" spc="-1" strike="noStrike">
+                <a:solidFill>
+                  <a:srgbClr val="000000"/>
+                </a:solidFill>
+                <a:latin typeface="Arial"/>
+                <a:ea typeface="DejaVu Sans"/>
+              </a:rPr>
+              <a:t>- Bugfixes</a:t>
+            </a:r>
+            <a:endParaRPr b="0" lang="en-US" sz="1600" spc="-1" strike="noStrike">
+              <a:solidFill>
+                <a:srgbClr val="000000"/>
+              </a:solidFill>
+              <a:latin typeface="Arial"/>
+            </a:endParaRPr>
+          </a:p>
+          <a:p>
+            <a:pPr lvl="1" marL="800280" indent="-343080" defTabSz="914400">
+              <a:lnSpc>
+                <a:spcPct val="100000"/>
+              </a:lnSpc>
+              <a:spcBef>
+                <a:spcPts val="320"/>
+              </a:spcBef>
+              <a:buClr>
+                <a:srgbClr val="000000"/>
+              </a:buClr>
+              <a:buFont typeface="Symbol"/>
+              <a:buChar char=""/>
+              <a:tabLst>
+                <a:tab algn="l" pos="1886040"/>
+              </a:tabLst>
+            </a:pPr>
+            <a:r>
+              <a:rPr b="0" lang="en-US" sz="1400" spc="-1" strike="noStrike">
+                <a:solidFill>
+                  <a:srgbClr val="000000"/>
+                </a:solidFill>
+                <a:latin typeface="Arial"/>
+                <a:ea typeface="DejaVu Sans"/>
+              </a:rPr>
+              <a:t>bugfix in CIF for complete(d) buses - do not write PrimaryVehicleSubgroup element</a:t>
+            </a:r>
+            <a:endParaRPr b="0" lang="en-US" sz="1400" spc="-1" strike="noStrike">
+              <a:solidFill>
+                <a:srgbClr val="000000"/>
+              </a:solidFill>
+              <a:latin typeface="Arial"/>
+            </a:endParaRPr>
+          </a:p>
+          <a:p>
+            <a:pPr lvl="1" marL="800280" indent="-343080" defTabSz="914400">
+              <a:lnSpc>
+                <a:spcPct val="100000"/>
+              </a:lnSpc>
+              <a:spcBef>
+                <a:spcPts val="320"/>
+              </a:spcBef>
+              <a:buClr>
+                <a:srgbClr val="000000"/>
+              </a:buClr>
+              <a:buFont typeface="Symbol"/>
+              <a:buChar char=""/>
+              <a:tabLst>
+                <a:tab algn="l" pos="1886040"/>
+              </a:tabLst>
+            </a:pPr>
+            <a:r>
+              <a:rPr b="0" lang="en-US" sz="1400" spc="-1" strike="noStrike">
+                <a:solidFill>
+                  <a:srgbClr val="000000"/>
+                </a:solidFill>
+                <a:latin typeface="Arial"/>
+                <a:ea typeface="DejaVu Sans"/>
+              </a:rPr>
+              <a:t>fix hybrid strategy: power comparison</a:t>
+            </a:r>
+            <a:endParaRPr b="0" lang="en-US" sz="1400" spc="-1" strike="noStrike">
+              <a:solidFill>
+                <a:srgbClr val="000000"/>
+              </a:solidFill>
+              <a:latin typeface="Arial"/>
+            </a:endParaRPr>
+          </a:p>
+          <a:p>
+            <a:pPr lvl="1" marL="800280" indent="-343080" defTabSz="914400">
+              <a:lnSpc>
+                <a:spcPct val="100000"/>
+              </a:lnSpc>
+              <a:spcBef>
+                <a:spcPts val="320"/>
+              </a:spcBef>
+              <a:buClr>
+                <a:srgbClr val="000000"/>
+              </a:buClr>
+              <a:buFont typeface="Symbol"/>
+              <a:buChar char=""/>
+              <a:tabLst>
+                <a:tab algn="l" pos="1886040"/>
+              </a:tabLst>
+            </a:pPr>
+            <a:r>
+              <a:rPr b="0" lang="en-US" sz="1400" spc="-1" strike="noStrike">
+                <a:solidFill>
+                  <a:srgbClr val="000000"/>
+                </a:solidFill>
+                <a:latin typeface="Arial"/>
+                <a:ea typeface="DejaVu Sans"/>
+              </a:rPr>
+              <a:t>fix exempted vehicles do not work (error message that XML version is not supported)</a:t>
+            </a:r>
+            <a:endParaRPr b="0" lang="en-US" sz="1400" spc="-1" strike="noStrike">
+              <a:solidFill>
+                <a:srgbClr val="000000"/>
+              </a:solidFill>
+              <a:latin typeface="Arial"/>
+            </a:endParaRPr>
+          </a:p>
+          <a:p>
+            <a:pPr lvl="1" marL="800280" indent="-343080" defTabSz="914400">
+              <a:lnSpc>
+                <a:spcPct val="100000"/>
+              </a:lnSpc>
+              <a:spcBef>
+                <a:spcPts val="320"/>
+              </a:spcBef>
+              <a:buClr>
+                <a:srgbClr val="000000"/>
+              </a:buClr>
+              <a:buFont typeface="Symbol"/>
+              <a:buChar char=""/>
+              <a:tabLst>
+                <a:tab algn="l" pos="1886040"/>
+              </a:tabLst>
+            </a:pPr>
+            <a:r>
+              <a:rPr b="0" lang="en-US" sz="1400" spc="-1" strike="noStrike">
+                <a:solidFill>
+                  <a:srgbClr val="000000"/>
+                </a:solidFill>
+                <a:latin typeface="Arial"/>
+                <a:ea typeface="DejaVu Sans"/>
+              </a:rPr>
+              <a:t>bugfix in XML schema: remove wrong PS technology entry for lorries</a:t>
+            </a:r>
+            <a:endParaRPr b="0" lang="en-US" sz="1400" spc="-1" strike="noStrike">
+              <a:solidFill>
+                <a:srgbClr val="000000"/>
+              </a:solidFill>
+              <a:latin typeface="Arial"/>
+            </a:endParaRPr>
+          </a:p>
+          <a:p>
+            <a:pPr lvl="1" marL="800280" indent="-343080" defTabSz="914400">
+              <a:lnSpc>
+                <a:spcPct val="100000"/>
+              </a:lnSpc>
+              <a:spcBef>
+                <a:spcPts val="320"/>
+              </a:spcBef>
+              <a:buClr>
+                <a:srgbClr val="000000"/>
+              </a:buClr>
+              <a:buFont typeface="Symbol"/>
+              <a:buChar char=""/>
+              <a:tabLst>
+                <a:tab algn="l" pos="1886040"/>
+              </a:tabLst>
+            </a:pPr>
+            <a:r>
+              <a:rPr b="0" lang="en-US" sz="1400" spc="-1" strike="noStrike">
+                <a:solidFill>
+                  <a:srgbClr val="000000"/>
+                </a:solidFill>
+                <a:latin typeface="Arial"/>
+                <a:ea typeface="DejaVu Sans"/>
+              </a:rPr>
+              <a:t>bugfix for conditioning power demand for IHPC vehicles</a:t>
+            </a:r>
+            <a:endParaRPr b="0" lang="en-US" sz="1400" spc="-1" strike="noStrike">
+              <a:solidFill>
+                <a:srgbClr val="000000"/>
+              </a:solidFill>
+              <a:latin typeface="Arial"/>
+            </a:endParaRPr>
+          </a:p>
+          <a:p>
+            <a:pPr indent="0" defTabSz="914400">
+              <a:lnSpc>
+                <a:spcPct val="100000"/>
+              </a:lnSpc>
+              <a:buNone/>
+              <a:tabLst>
+                <a:tab algn="l" pos="0"/>
+              </a:tabLst>
+            </a:pPr>
+            <a:endParaRPr b="0" lang="en-US" sz="1400" spc="-1" strike="noStrike">
+              <a:solidFill>
+                <a:srgbClr val="000000"/>
+              </a:solidFill>
+              <a:latin typeface="Arial"/>
+            </a:endParaRPr>
+          </a:p>
+          <a:p>
+            <a:pPr indent="0" defTabSz="914400">
+              <a:lnSpc>
+                <a:spcPct val="100000"/>
+              </a:lnSpc>
+              <a:spcBef>
+                <a:spcPts val="281"/>
+              </a:spcBef>
+              <a:buNone/>
+              <a:tabLst>
+                <a:tab algn="l" pos="0"/>
+              </a:tabLst>
+            </a:pPr>
+            <a:endParaRPr b="0" lang="en-US" sz="1400" spc="-1" strike="noStrike">
+              <a:solidFill>
+                <a:srgbClr val="000000"/>
+              </a:solidFill>
+              <a:latin typeface="Arial"/>
+            </a:endParaRPr>
+          </a:p>
+          <a:p>
+            <a:pPr indent="0" defTabSz="914400">
+              <a:lnSpc>
+                <a:spcPct val="100000"/>
+              </a:lnSpc>
+              <a:buNone/>
+              <a:tabLst>
+                <a:tab algn="l" pos="0"/>
+              </a:tabLst>
+            </a:pPr>
+            <a:endParaRPr b="0" lang="en-US" sz="1400" spc="-1" strike="noStrike">
+              <a:solidFill>
+                <a:srgbClr val="000000"/>
+              </a:solidFill>
+              <a:latin typeface="Arial"/>
+            </a:endParaRPr>
+          </a:p>
+          <a:p>
+            <a:pPr indent="0" defTabSz="914400">
+              <a:lnSpc>
+                <a:spcPct val="100000"/>
+              </a:lnSpc>
+              <a:buNone/>
+              <a:tabLst>
+                <a:tab algn="l" pos="0"/>
+              </a:tabLst>
+            </a:pPr>
+            <a:endParaRPr b="0" lang="en-US" sz="1400" spc="-1" strike="noStrike">
+              <a:solidFill>
+                <a:srgbClr val="000000"/>
+              </a:solidFill>
+              <a:latin typeface="Arial"/>
+            </a:endParaRPr>
+          </a:p>
+        </p:txBody>
+      </p:sp>
     </p:spTree>
   </p:cSld>
   <mc:AlternateContent>
@@ -8400,18 +8783,14 @@
       </p:grpSpPr>
       <p:sp>
         <p:nvSpPr>
-          <p:cNvPr id="91" name="PlaceHolder 1"/>
-          <p:cNvSpPr>
-            <a:spLocks noGrp="1"/>
-          </p:cNvSpPr>
-          <p:nvPr>
-            <p:ph type="title"/>
-          </p:nvPr>
+          <p:cNvPr id="91" name="Text Box 94"/>
+          <p:cNvSpPr/>
+          <p:nvPr/>
         </p:nvSpPr>
         <p:spPr>
           <a:xfrm>
-            <a:off x="722160" y="2320200"/>
-            <a:ext cx="7767000" cy="1524600"/>
+            <a:off x="539640" y="1052640"/>
+            <a:ext cx="8129160" cy="3945600"/>
           </a:xfrm>
           <a:prstGeom prst="rect">
             <a:avLst/>
@@ -8421,26 +8800,157 @@
             <a:noFill/>
           </a:ln>
         </p:spPr>
+        <p:style>
+          <a:lnRef idx="0"/>
+          <a:fillRef idx="0"/>
+          <a:effectRef idx="0"/>
+          <a:fontRef idx="minor"/>
+        </p:style>
         <p:txBody>
-          <a:bodyPr lIns="0" rIns="0" tIns="0" bIns="0" anchor="ctr">
-            <a:noAutofit/>
+          <a:bodyPr lIns="90000" rIns="90000" tIns="45000" bIns="45000" anchor="t">
+            <a:spAutoFit/>
           </a:bodyPr>
           <a:p>
-            <a:pPr indent="0" algn="ctr" defTabSz="914400">
-              <a:lnSpc>
-                <a:spcPct val="90000"/>
-              </a:lnSpc>
-              <a:spcBef>
-                <a:spcPts val="4201"/>
-              </a:spcBef>
-              <a:buNone/>
-              <a:tabLst>
-                <a:tab algn="l" pos="0"/>
-              </a:tabLst>
-            </a:pPr>
-            <a:br>
-              <a:rPr sz="2400"/>
-            </a:br>
+            <a:pPr algn="ctr" defTabSz="914400">
+              <a:lnSpc>
+                <a:spcPct val="100000"/>
+              </a:lnSpc>
+              <a:spcBef>
+                <a:spcPts val="1599"/>
+              </a:spcBef>
+            </a:pPr>
+            <a:r>
+              <a:rPr b="1" lang="en-US" sz="3200" spc="-1" strike="noStrike">
+                <a:solidFill>
+                  <a:srgbClr val="990000"/>
+                </a:solidFill>
+                <a:latin typeface="Arial"/>
+                <a:ea typeface="DejaVu Sans"/>
+              </a:rPr>
+              <a:t>VECTO 4.0.0.3210 </a:t>
+            </a:r>
+            <a:endParaRPr b="0" lang="en-US" sz="3200" spc="-1" strike="noStrike">
+              <a:solidFill>
+                <a:srgbClr val="000000"/>
+              </a:solidFill>
+              <a:latin typeface="Arial"/>
+            </a:endParaRPr>
+          </a:p>
+          <a:p>
+            <a:pPr algn="ctr" defTabSz="914400">
+              <a:lnSpc>
+                <a:spcPct val="100000"/>
+              </a:lnSpc>
+              <a:spcBef>
+                <a:spcPts val="1001"/>
+              </a:spcBef>
+            </a:pPr>
+            <a:r>
+              <a:rPr b="1" lang="en-US" sz="2000" spc="-1" strike="noStrike">
+                <a:solidFill>
+                  <a:srgbClr val="990000"/>
+                </a:solidFill>
+                <a:latin typeface="Arial"/>
+                <a:ea typeface="DejaVu Sans"/>
+              </a:rPr>
+              <a:t>16.10.2023</a:t>
+            </a:r>
+            <a:endParaRPr b="0" lang="en-US" sz="2000" spc="-1" strike="noStrike">
+              <a:solidFill>
+                <a:srgbClr val="000000"/>
+              </a:solidFill>
+              <a:latin typeface="Arial"/>
+            </a:endParaRPr>
+          </a:p>
+          <a:p>
+            <a:pPr algn="ctr" defTabSz="914400">
+              <a:lnSpc>
+                <a:spcPct val="100000"/>
+              </a:lnSpc>
+              <a:spcBef>
+                <a:spcPts val="1001"/>
+              </a:spcBef>
+            </a:pPr>
+            <a:endParaRPr b="0" lang="en-US" sz="2000" spc="-1" strike="noStrike">
+              <a:solidFill>
+                <a:srgbClr val="000000"/>
+              </a:solidFill>
+              <a:latin typeface="Arial"/>
+            </a:endParaRPr>
+          </a:p>
+          <a:p>
+            <a:pPr algn="ctr" defTabSz="914400">
+              <a:lnSpc>
+                <a:spcPct val="100000"/>
+              </a:lnSpc>
+              <a:spcBef>
+                <a:spcPts val="1001"/>
+              </a:spcBef>
+            </a:pPr>
+            <a:endParaRPr b="0" lang="en-US" sz="2000" spc="-1" strike="noStrike">
+              <a:solidFill>
+                <a:srgbClr val="000000"/>
+              </a:solidFill>
+              <a:latin typeface="Arial"/>
+            </a:endParaRPr>
+          </a:p>
+          <a:p>
+            <a:pPr algn="ctr" defTabSz="914400">
+              <a:lnSpc>
+                <a:spcPct val="100000"/>
+              </a:lnSpc>
+              <a:spcBef>
+                <a:spcPts val="1199"/>
+              </a:spcBef>
+            </a:pPr>
+            <a:endParaRPr b="0" lang="en-US" sz="2400" spc="-1" strike="noStrike">
+              <a:solidFill>
+                <a:srgbClr val="000000"/>
+              </a:solidFill>
+              <a:latin typeface="Arial"/>
+            </a:endParaRPr>
+          </a:p>
+          <a:p>
+            <a:pPr algn="ctr" defTabSz="914400">
+              <a:lnSpc>
+                <a:spcPct val="100000"/>
+              </a:lnSpc>
+              <a:spcBef>
+                <a:spcPts val="1199"/>
+              </a:spcBef>
+            </a:pPr>
+            <a:endParaRPr b="0" lang="en-US" sz="2400" spc="-1" strike="noStrike">
+              <a:solidFill>
+                <a:srgbClr val="000000"/>
+              </a:solidFill>
+              <a:latin typeface="Arial"/>
+            </a:endParaRPr>
+          </a:p>
+          <a:p>
+            <a:pPr algn="ctr" defTabSz="914400">
+              <a:lnSpc>
+                <a:spcPct val="100000"/>
+              </a:lnSpc>
+              <a:spcBef>
+                <a:spcPts val="1199"/>
+              </a:spcBef>
+            </a:pPr>
+            <a:endParaRPr b="0" lang="en-US" sz="2400" spc="-1" strike="noStrike">
+              <a:solidFill>
+                <a:srgbClr val="000000"/>
+              </a:solidFill>
+              <a:latin typeface="Arial"/>
+            </a:endParaRPr>
+          </a:p>
+          <a:p>
+            <a:pPr algn="ctr" defTabSz="914400">
+              <a:lnSpc>
+                <a:spcPct val="100000"/>
+              </a:lnSpc>
+              <a:spcBef>
+                <a:spcPts val="1199"/>
+              </a:spcBef>
+            </a:pPr>
             <a:r>
               <a:rPr b="1" lang="en-US" sz="2400" spc="-1" strike="noStrike">
                 <a:solidFill>
@@ -8449,30 +8959,8 @@
                 <a:latin typeface="Arial"/>
                 <a:ea typeface="DejaVu Sans"/>
               </a:rPr>
-              <a:t>First official VECTO release for the 2nd Amendment </a:t>
-            </a:r>
-            <a:br>
-              <a:rPr sz="2400"/>
-            </a:br>
-            <a:r>
-              <a:rPr b="1" lang="en-US" sz="2400" spc="-1" strike="noStrike">
-                <a:solidFill>
-                  <a:srgbClr val="990000"/>
-                </a:solidFill>
-                <a:latin typeface="Arial"/>
-                <a:ea typeface="DejaVu Sans"/>
-              </a:rPr>
-              <a:t>of Regulation (EU) 2017/2400</a:t>
-            </a:r>
-            <a:br>
-              <a:rPr sz="2800"/>
-            </a:br>
-            <a:br>
-              <a:rPr sz="2800"/>
-            </a:br>
-            <a:br>
-              <a:rPr sz="2400"/>
-            </a:br>
+              <a:t>Release Notes</a:t>
+            </a:r>
             <a:endParaRPr b="0" lang="en-US" sz="2400" spc="-1" strike="noStrike">
               <a:solidFill>
                 <a:srgbClr val="000000"/>
@@ -8482,65 +8970,29 @@
           </a:p>
         </p:txBody>
       </p:sp>
-      <p:sp>
-        <p:nvSpPr>
-          <p:cNvPr id="92" name="PlaceHolder 2"/>
-          <p:cNvSpPr>
-            <a:spLocks noGrp="1"/>
-          </p:cNvSpPr>
-          <p:nvPr>
-            <p:ph/>
-          </p:nvPr>
-        </p:nvSpPr>
+      <p:pic>
+        <p:nvPicPr>
+          <p:cNvPr id="92" name="Picture 2" descr=""/>
+          <p:cNvPicPr/>
+          <p:nvPr/>
+        </p:nvPicPr>
+        <p:blipFill>
+          <a:blip r:embed="rId1"/>
+          <a:stretch/>
+        </p:blipFill>
         <p:spPr>
           <a:xfrm>
-            <a:off x="722160" y="4276440"/>
-            <a:ext cx="7767000" cy="402120"/>
+            <a:off x="2483640" y="2421000"/>
+            <a:ext cx="4169160" cy="1620360"/>
           </a:xfrm>
           <a:prstGeom prst="rect">
             <a:avLst/>
           </a:prstGeom>
-          <a:noFill/>
           <a:ln w="0">
             <a:noFill/>
           </a:ln>
         </p:spPr>
-        <p:txBody>
-          <a:bodyPr lIns="0" rIns="0" tIns="0" bIns="0" anchor="ctr">
-            <a:noAutofit/>
-          </a:bodyPr>
-          <a:p>
-            <a:pPr indent="0" algn="ctr" defTabSz="914400">
-              <a:lnSpc>
-                <a:spcPct val="90000"/>
-              </a:lnSpc>
-              <a:spcBef>
-                <a:spcPts val="1001"/>
-              </a:spcBef>
-              <a:buNone/>
-              <a:tabLst>
-                <a:tab algn="l" pos="0"/>
-              </a:tabLst>
-            </a:pPr>
-            <a:r>
-              <a:rPr b="0" lang="en-GB" sz="2000" spc="-1" strike="noStrike">
-                <a:solidFill>
-                  <a:schemeClr val="dk1"/>
-                </a:solidFill>
-                <a:latin typeface="Arial"/>
-                <a:ea typeface="DejaVu Sans"/>
-              </a:rPr>
-              <a:t>TUG</a:t>
-            </a:r>
-            <a:endParaRPr b="0" lang="en-US" sz="2000" spc="-1" strike="noStrike">
-              <a:solidFill>
-                <a:srgbClr val="000000"/>
-              </a:solidFill>
-              <a:latin typeface="Arial"/>
-            </a:endParaRPr>
-          </a:p>
-        </p:txBody>
-      </p:sp>
+      </p:pic>
     </p:spTree>
   </p:cSld>
   <mc:AlternateContent>
@@ -8578,581 +9030,13 @@
             <a:spLocks noGrp="1"/>
           </p:cNvSpPr>
           <p:nvPr>
-            <p:ph/>
-          </p:nvPr>
-        </p:nvSpPr>
-        <p:spPr>
-          <a:xfrm>
-            <a:off x="588240" y="1140480"/>
-            <a:ext cx="8389080" cy="5041800"/>
-          </a:xfrm>
-          <a:prstGeom prst="rect">
-            <a:avLst/>
-          </a:prstGeom>
-          <a:noFill/>
-          <a:ln w="0">
-            <a:noFill/>
-          </a:ln>
-        </p:spPr>
-        <p:txBody>
-          <a:bodyPr lIns="0" rIns="0" tIns="0" bIns="0" anchor="t">
-            <a:normAutofit fontScale="64999"/>
-          </a:bodyPr>
-          <a:p>
-            <a:pPr marL="228600" indent="-228600" defTabSz="914400">
-              <a:lnSpc>
-                <a:spcPct val="120000"/>
-              </a:lnSpc>
-              <a:spcBef>
-                <a:spcPts val="601"/>
-              </a:spcBef>
-              <a:buClr>
-                <a:srgbClr val="000000"/>
-              </a:buClr>
-              <a:buFont typeface="Arial"/>
-              <a:buChar char="•"/>
-            </a:pPr>
-            <a:r>
-              <a:rPr b="0" lang="en-US" sz="2000" spc="-1" strike="noStrike">
-                <a:solidFill>
-                  <a:schemeClr val="dk1"/>
-                </a:solidFill>
-                <a:latin typeface="Arial"/>
-                <a:ea typeface="DejaVu Sans"/>
-              </a:rPr>
-              <a:t>Declaration Mode</a:t>
-            </a:r>
-            <a:endParaRPr b="0" lang="en-US" sz="2000" spc="-1" strike="noStrike">
-              <a:solidFill>
-                <a:srgbClr val="000000"/>
-              </a:solidFill>
-              <a:latin typeface="Arial"/>
-            </a:endParaRPr>
-          </a:p>
-          <a:p>
-            <a:pPr lvl="1" marL="716040" indent="-266760" defTabSz="914400">
-              <a:lnSpc>
-                <a:spcPct val="120000"/>
-              </a:lnSpc>
-              <a:spcBef>
-                <a:spcPts val="601"/>
-              </a:spcBef>
-              <a:buClr>
-                <a:srgbClr val="000000"/>
-              </a:buClr>
-              <a:buFont typeface="Wingdings" charset="2"/>
-              <a:buChar char=""/>
-            </a:pPr>
-            <a:r>
-              <a:rPr b="0" lang="en-US" sz="1600" spc="-1" strike="noStrike">
-                <a:solidFill>
-                  <a:schemeClr val="dk1"/>
-                </a:solidFill>
-                <a:latin typeface="Arial"/>
-                <a:ea typeface="DejaVu Sans"/>
-              </a:rPr>
-              <a:t>xEV-Heavy Lorries</a:t>
-            </a:r>
-            <a:endParaRPr b="0" lang="en-US" sz="1600" spc="-1" strike="noStrike">
-              <a:solidFill>
-                <a:srgbClr val="000000"/>
-              </a:solidFill>
-              <a:latin typeface="Arial"/>
-            </a:endParaRPr>
-          </a:p>
-          <a:p>
-            <a:pPr lvl="1" marL="716040" indent="-266760" defTabSz="914400">
-              <a:lnSpc>
-                <a:spcPct val="120000"/>
-              </a:lnSpc>
-              <a:spcBef>
-                <a:spcPts val="601"/>
-              </a:spcBef>
-              <a:buClr>
-                <a:srgbClr val="000000"/>
-              </a:buClr>
-              <a:buFont typeface="Wingdings" charset="2"/>
-              <a:buChar char=""/>
-            </a:pPr>
-            <a:r>
-              <a:rPr b="0" lang="en-US" sz="1600" spc="-1" strike="noStrike">
-                <a:solidFill>
-                  <a:schemeClr val="dk1"/>
-                </a:solidFill>
-                <a:latin typeface="Arial"/>
-                <a:ea typeface="DejaVu Sans"/>
-              </a:rPr>
-              <a:t>Conventional Medium Lorries</a:t>
-            </a:r>
-            <a:endParaRPr b="0" lang="en-US" sz="1600" spc="-1" strike="noStrike">
-              <a:solidFill>
-                <a:srgbClr val="000000"/>
-              </a:solidFill>
-              <a:latin typeface="Arial"/>
-            </a:endParaRPr>
-          </a:p>
-          <a:p>
-            <a:pPr lvl="1" marL="716040" indent="-266760" defTabSz="914400">
-              <a:lnSpc>
-                <a:spcPct val="120000"/>
-              </a:lnSpc>
-              <a:spcBef>
-                <a:spcPts val="601"/>
-              </a:spcBef>
-              <a:buClr>
-                <a:srgbClr val="000000"/>
-              </a:buClr>
-              <a:buFont typeface="Wingdings" charset="2"/>
-              <a:buChar char=""/>
-            </a:pPr>
-            <a:r>
-              <a:rPr b="0" lang="en-US" sz="1600" spc="-1" strike="noStrike">
-                <a:solidFill>
-                  <a:schemeClr val="dk1"/>
-                </a:solidFill>
-                <a:latin typeface="Arial"/>
-                <a:ea typeface="DejaVu Sans"/>
-              </a:rPr>
-              <a:t>xEV Medium Lorries</a:t>
-            </a:r>
-            <a:endParaRPr b="0" lang="en-US" sz="1600" spc="-1" strike="noStrike">
-              <a:solidFill>
-                <a:srgbClr val="000000"/>
-              </a:solidFill>
-              <a:latin typeface="Arial"/>
-            </a:endParaRPr>
-          </a:p>
-          <a:p>
-            <a:pPr lvl="1" marL="716040" indent="-266760" defTabSz="914400">
-              <a:lnSpc>
-                <a:spcPct val="120000"/>
-              </a:lnSpc>
-              <a:spcBef>
-                <a:spcPts val="601"/>
-              </a:spcBef>
-              <a:buClr>
-                <a:srgbClr val="000000"/>
-              </a:buClr>
-              <a:buFont typeface="Wingdings" charset="2"/>
-              <a:buChar char=""/>
-            </a:pPr>
-            <a:r>
-              <a:rPr b="0" lang="en-US" sz="1600" spc="-1" strike="noStrike">
-                <a:solidFill>
-                  <a:schemeClr val="dk1"/>
-                </a:solidFill>
-                <a:latin typeface="Arial"/>
-                <a:ea typeface="DejaVu Sans"/>
-              </a:rPr>
-              <a:t>Conventional Buses</a:t>
-            </a:r>
-            <a:endParaRPr b="0" lang="en-US" sz="1600" spc="-1" strike="noStrike">
-              <a:solidFill>
-                <a:srgbClr val="000000"/>
-              </a:solidFill>
-              <a:latin typeface="Arial"/>
-            </a:endParaRPr>
-          </a:p>
-          <a:p>
-            <a:pPr lvl="1" marL="716040" indent="-266760" defTabSz="914400">
-              <a:lnSpc>
-                <a:spcPct val="120000"/>
-              </a:lnSpc>
-              <a:spcBef>
-                <a:spcPts val="601"/>
-              </a:spcBef>
-              <a:buClr>
-                <a:srgbClr val="000000"/>
-              </a:buClr>
-              <a:buFont typeface="Wingdings" charset="2"/>
-              <a:buChar char=""/>
-            </a:pPr>
-            <a:r>
-              <a:rPr b="0" lang="en-US" sz="1600" spc="-1" strike="noStrike">
-                <a:solidFill>
-                  <a:schemeClr val="dk1"/>
-                </a:solidFill>
-                <a:latin typeface="Arial"/>
-                <a:ea typeface="DejaVu Sans"/>
-              </a:rPr>
-              <a:t>xEV Buses</a:t>
-            </a:r>
-            <a:endParaRPr b="0" lang="en-US" sz="1600" spc="-1" strike="noStrike">
-              <a:solidFill>
-                <a:srgbClr val="000000"/>
-              </a:solidFill>
-              <a:latin typeface="Arial"/>
-            </a:endParaRPr>
-          </a:p>
-          <a:p>
-            <a:pPr marL="228600" indent="-228600" defTabSz="914400">
-              <a:lnSpc>
-                <a:spcPct val="120000"/>
-              </a:lnSpc>
-              <a:spcBef>
-                <a:spcPts val="601"/>
-              </a:spcBef>
-              <a:buClr>
-                <a:srgbClr val="000000"/>
-              </a:buClr>
-              <a:buFont typeface="Arial"/>
-              <a:buChar char="•"/>
-            </a:pPr>
-            <a:r>
-              <a:rPr b="0" lang="en-US" sz="2000" spc="-1" strike="noStrike">
-                <a:solidFill>
-                  <a:schemeClr val="dk1"/>
-                </a:solidFill>
-                <a:latin typeface="Arial"/>
-                <a:ea typeface="DejaVu Sans"/>
-              </a:rPr>
-              <a:t>Dedicated user interface for simulating buses in Declaration Mode using the multistep approach: VECTOMultistep.exe </a:t>
-            </a:r>
-            <a:endParaRPr b="0" lang="en-US" sz="2000" spc="-1" strike="noStrike">
-              <a:solidFill>
-                <a:srgbClr val="000000"/>
-              </a:solidFill>
-              <a:latin typeface="Arial"/>
-            </a:endParaRPr>
-          </a:p>
-          <a:p>
-            <a:pPr marL="228600" indent="-228600" defTabSz="914400">
-              <a:lnSpc>
-                <a:spcPct val="120000"/>
-              </a:lnSpc>
-              <a:spcBef>
-                <a:spcPts val="601"/>
-              </a:spcBef>
-              <a:buClr>
-                <a:srgbClr val="000000"/>
-              </a:buClr>
-              <a:buFont typeface="Arial"/>
-              <a:buChar char="•"/>
-            </a:pPr>
-            <a:r>
-              <a:rPr b="0" lang="en-US" sz="2000" spc="-1" strike="noStrike">
-                <a:solidFill>
-                  <a:schemeClr val="dk1"/>
-                </a:solidFill>
-                <a:latin typeface="Arial"/>
-                <a:ea typeface="DejaVu Sans"/>
-              </a:rPr>
-              <a:t>Engineering Mode</a:t>
-            </a:r>
-            <a:endParaRPr b="0" lang="en-US" sz="2000" spc="-1" strike="noStrike">
-              <a:solidFill>
-                <a:srgbClr val="000000"/>
-              </a:solidFill>
-              <a:latin typeface="Arial"/>
-            </a:endParaRPr>
-          </a:p>
-          <a:p>
-            <a:pPr lvl="1" marL="716040" indent="-266760" defTabSz="914400">
-              <a:lnSpc>
-                <a:spcPct val="120000"/>
-              </a:lnSpc>
-              <a:spcBef>
-                <a:spcPts val="601"/>
-              </a:spcBef>
-              <a:buClr>
-                <a:srgbClr val="000000"/>
-              </a:buClr>
-              <a:buFont typeface="Wingdings" charset="2"/>
-              <a:buChar char=""/>
-            </a:pPr>
-            <a:r>
-              <a:rPr b="0" lang="en-US" sz="1600" spc="-1" strike="noStrike">
-                <a:solidFill>
-                  <a:schemeClr val="dk1"/>
-                </a:solidFill>
-                <a:latin typeface="Arial"/>
-                <a:ea typeface="DejaVu Sans"/>
-              </a:rPr>
-              <a:t>xEV-Vehicles</a:t>
-            </a:r>
-            <a:endParaRPr b="0" lang="en-US" sz="1600" spc="-1" strike="noStrike">
-              <a:solidFill>
-                <a:srgbClr val="000000"/>
-              </a:solidFill>
-              <a:latin typeface="Arial"/>
-            </a:endParaRPr>
-          </a:p>
-          <a:p>
-            <a:pPr marL="228600" indent="-228600" defTabSz="914400">
-              <a:lnSpc>
-                <a:spcPct val="120000"/>
-              </a:lnSpc>
-              <a:spcBef>
-                <a:spcPts val="601"/>
-              </a:spcBef>
-              <a:buClr>
-                <a:srgbClr val="000000"/>
-              </a:buClr>
-              <a:buFont typeface="Arial"/>
-              <a:buChar char="•"/>
-            </a:pPr>
-            <a:r>
-              <a:rPr b="0" lang="pt-BR" sz="2000" spc="-1" strike="noStrike">
-                <a:solidFill>
-                  <a:schemeClr val="dk1"/>
-                </a:solidFill>
-                <a:latin typeface="Arial"/>
-                <a:ea typeface="DejaVu Sans"/>
-              </a:rPr>
-              <a:t>Updated XML-Reports and Vehicle Information Files to support new Vehicle Architectures</a:t>
-            </a:r>
-            <a:endParaRPr b="0" lang="en-US" sz="2000" spc="-1" strike="noStrike">
-              <a:solidFill>
-                <a:srgbClr val="000000"/>
-              </a:solidFill>
-              <a:latin typeface="Arial"/>
-            </a:endParaRPr>
-          </a:p>
-          <a:p>
-            <a:pPr lvl="1" marL="716040" indent="-266760" defTabSz="914400">
-              <a:lnSpc>
-                <a:spcPct val="120000"/>
-              </a:lnSpc>
-              <a:spcBef>
-                <a:spcPts val="601"/>
-              </a:spcBef>
-              <a:buClr>
-                <a:srgbClr val="000000"/>
-              </a:buClr>
-              <a:buFont typeface="Wingdings" charset="2"/>
-              <a:buChar char=""/>
-            </a:pPr>
-            <a:r>
-              <a:rPr b="0" lang="pt-BR" sz="1600" spc="-1" strike="noStrike">
-                <a:solidFill>
-                  <a:schemeClr val="dk1"/>
-                </a:solidFill>
-                <a:latin typeface="Arial"/>
-                <a:ea typeface="DejaVu Sans"/>
-              </a:rPr>
-              <a:t>New Manufacturer Record File (MRF):</a:t>
-            </a:r>
-            <a:endParaRPr b="0" lang="en-US" sz="1600" spc="-1" strike="noStrike">
-              <a:solidFill>
-                <a:srgbClr val="000000"/>
-              </a:solidFill>
-              <a:latin typeface="Arial"/>
-            </a:endParaRPr>
-          </a:p>
-          <a:p>
-            <a:pPr lvl="1" marL="716040" indent="-266760" defTabSz="914400">
-              <a:lnSpc>
-                <a:spcPct val="120000"/>
-              </a:lnSpc>
-              <a:spcBef>
-                <a:spcPts val="601"/>
-              </a:spcBef>
-              <a:buClr>
-                <a:srgbClr val="000000"/>
-              </a:buClr>
-              <a:buFont typeface="Wingdings" charset="2"/>
-              <a:buChar char=""/>
-            </a:pPr>
-            <a:r>
-              <a:rPr b="0" lang="pt-BR" sz="1600" spc="-1" strike="noStrike">
-                <a:solidFill>
-                  <a:schemeClr val="dk1"/>
-                </a:solidFill>
-                <a:latin typeface="Arial"/>
-                <a:ea typeface="DejaVu Sans"/>
-              </a:rPr>
-              <a:t>New Customer Information File (CIF): </a:t>
-            </a:r>
-            <a:endParaRPr b="0" lang="en-US" sz="1600" spc="-1" strike="noStrike">
-              <a:solidFill>
-                <a:srgbClr val="000000"/>
-              </a:solidFill>
-              <a:latin typeface="Arial"/>
-            </a:endParaRPr>
-          </a:p>
-          <a:p>
-            <a:pPr lvl="1" marL="716040" indent="-266760" defTabSz="914400">
-              <a:lnSpc>
-                <a:spcPct val="120000"/>
-              </a:lnSpc>
-              <a:spcBef>
-                <a:spcPts val="601"/>
-              </a:spcBef>
-              <a:buClr>
-                <a:srgbClr val="000000"/>
-              </a:buClr>
-              <a:buFont typeface="Wingdings" charset="2"/>
-              <a:buChar char=""/>
-            </a:pPr>
-            <a:r>
-              <a:rPr b="0" lang="pt-BR" sz="1600" spc="-1" strike="noStrike">
-                <a:solidFill>
-                  <a:schemeClr val="dk1"/>
-                </a:solidFill>
-                <a:latin typeface="Arial"/>
-                <a:ea typeface="DejaVu Sans"/>
-              </a:rPr>
-              <a:t>Multistep Output (VIF):</a:t>
-            </a:r>
-            <a:endParaRPr b="0" lang="en-US" sz="1600" spc="-1" strike="noStrike">
-              <a:solidFill>
-                <a:srgbClr val="000000"/>
-              </a:solidFill>
-              <a:latin typeface="Arial"/>
-            </a:endParaRPr>
-          </a:p>
-          <a:p>
-            <a:pPr marL="228600" indent="-228600" defTabSz="914400">
-              <a:lnSpc>
-                <a:spcPct val="120000"/>
-              </a:lnSpc>
-              <a:spcBef>
-                <a:spcPts val="601"/>
-              </a:spcBef>
-              <a:buClr>
-                <a:srgbClr val="000000"/>
-              </a:buClr>
-              <a:buFont typeface="Arial"/>
-              <a:buChar char="•"/>
-            </a:pPr>
-            <a:r>
-              <a:rPr b="0" lang="pt-BR" sz="2000" spc="-1" strike="noStrike">
-                <a:solidFill>
-                  <a:schemeClr val="dk1"/>
-                </a:solidFill>
-                <a:latin typeface="Arial"/>
-                <a:ea typeface="DejaVu Sans"/>
-              </a:rPr>
-              <a:t>Updated simulation output (.vsum, .vmod)</a:t>
-            </a:r>
-            <a:endParaRPr b="0" lang="en-US" sz="2000" spc="-1" strike="noStrike">
-              <a:solidFill>
-                <a:srgbClr val="000000"/>
-              </a:solidFill>
-              <a:latin typeface="Arial"/>
-            </a:endParaRPr>
-          </a:p>
-          <a:p>
-            <a:pPr marL="228600" indent="-228600" defTabSz="914400">
-              <a:lnSpc>
-                <a:spcPct val="120000"/>
-              </a:lnSpc>
-              <a:spcBef>
-                <a:spcPts val="601"/>
-              </a:spcBef>
-              <a:buClr>
-                <a:srgbClr val="000000"/>
-              </a:buClr>
-              <a:buFont typeface="Arial"/>
-              <a:buChar char="•"/>
-            </a:pPr>
-            <a:r>
-              <a:rPr b="0" lang="pt-BR" sz="2000" spc="-1" strike="noStrike">
-                <a:solidFill>
-                  <a:schemeClr val="dk1"/>
-                </a:solidFill>
-                <a:latin typeface="Arial"/>
-                <a:ea typeface="DejaVu Sans"/>
-              </a:rPr>
-              <a:t>Updated Hashing Tool to handle new powertrain components (electric motor, battery, supercap ...)</a:t>
-            </a:r>
-            <a:endParaRPr b="0" lang="en-US" sz="2000" spc="-1" strike="noStrike">
-              <a:solidFill>
-                <a:srgbClr val="000000"/>
-              </a:solidFill>
-              <a:latin typeface="Arial"/>
-            </a:endParaRPr>
-          </a:p>
-          <a:p>
-            <a:pPr indent="0" defTabSz="914400">
-              <a:lnSpc>
-                <a:spcPct val="120000"/>
-              </a:lnSpc>
-              <a:spcBef>
-                <a:spcPts val="601"/>
-              </a:spcBef>
-              <a:buNone/>
-              <a:tabLst>
-                <a:tab algn="l" pos="0"/>
-              </a:tabLst>
-            </a:pPr>
-            <a:endParaRPr b="0" lang="en-US" sz="2000" spc="-1" strike="noStrike">
-              <a:solidFill>
-                <a:srgbClr val="000000"/>
-              </a:solidFill>
-              <a:latin typeface="Arial"/>
-            </a:endParaRPr>
-          </a:p>
-          <a:p>
-            <a:pPr marL="228600" indent="-228600" defTabSz="914400">
-              <a:lnSpc>
-                <a:spcPct val="120000"/>
-              </a:lnSpc>
-              <a:spcBef>
-                <a:spcPts val="601"/>
-              </a:spcBef>
-              <a:buClr>
-                <a:srgbClr val="000000"/>
-              </a:buClr>
-              <a:buFont typeface="Arial"/>
-              <a:buChar char="•"/>
-              <a:tabLst>
-                <a:tab algn="l" pos="0"/>
-              </a:tabLst>
-            </a:pPr>
-            <a:r>
-              <a:rPr b="0" lang="pt-BR" sz="2000" spc="-1" strike="noStrike">
-                <a:solidFill>
-                  <a:schemeClr val="dk1"/>
-                </a:solidFill>
-                <a:latin typeface="Arial"/>
-                <a:ea typeface="DejaVu Sans"/>
-              </a:rPr>
-              <a:t>Supports .NET Framework 4.8 and .NET 6.0</a:t>
-            </a:r>
-            <a:endParaRPr b="0" lang="en-US" sz="2000" spc="-1" strike="noStrike">
-              <a:solidFill>
-                <a:srgbClr val="000000"/>
-              </a:solidFill>
-              <a:latin typeface="Arial"/>
-            </a:endParaRPr>
-          </a:p>
-          <a:p>
-            <a:pPr indent="0" defTabSz="914400">
-              <a:lnSpc>
-                <a:spcPct val="90000"/>
-              </a:lnSpc>
-              <a:spcBef>
-                <a:spcPts val="1199"/>
-              </a:spcBef>
-              <a:buNone/>
-              <a:tabLst>
-                <a:tab algn="l" pos="0"/>
-              </a:tabLst>
-            </a:pPr>
-            <a:endParaRPr b="0" lang="en-US" sz="2000" spc="-1" strike="noStrike">
-              <a:solidFill>
-                <a:srgbClr val="000000"/>
-              </a:solidFill>
-              <a:latin typeface="Arial"/>
-            </a:endParaRPr>
-          </a:p>
-        </p:txBody>
-      </p:sp>
-      <p:sp>
-        <p:nvSpPr>
-          <p:cNvPr id="94" name="PlaceHolder 2"/>
-          <p:cNvSpPr>
-            <a:spLocks noGrp="1"/>
-          </p:cNvSpPr>
-          <p:nvPr>
             <p:ph type="title"/>
           </p:nvPr>
         </p:nvSpPr>
         <p:spPr>
           <a:xfrm>
-            <a:off x="588240" y="453600"/>
-            <a:ext cx="8223840" cy="473400"/>
+            <a:off x="722160" y="2320200"/>
+            <a:ext cx="7765920" cy="1523520"/>
           </a:xfrm>
           <a:prstGeom prst="rect">
             <a:avLst/>
@@ -9167,26 +9051,113 @@
             <a:noAutofit/>
           </a:bodyPr>
           <a:p>
-            <a:pPr indent="0" defTabSz="914400">
+            <a:pPr indent="0" algn="ctr" defTabSz="914400">
               <a:lnSpc>
                 <a:spcPct val="90000"/>
               </a:lnSpc>
+              <a:spcBef>
+                <a:spcPts val="4201"/>
+              </a:spcBef>
               <a:buNone/>
               <a:tabLst>
                 <a:tab algn="l" pos="0"/>
               </a:tabLst>
             </a:pPr>
-            <a:r>
-              <a:rPr b="1" lang="en-GB" sz="2400" spc="-1" strike="noStrike">
+            <a:br>
+              <a:rPr sz="2400"/>
+            </a:br>
+            <a:r>
+              <a:rPr b="1" lang="en-US" sz="2400" spc="-1" strike="noStrike">
                 <a:solidFill>
                   <a:srgbClr val="990000"/>
                 </a:solidFill>
                 <a:latin typeface="Arial"/>
                 <a:ea typeface="DejaVu Sans"/>
               </a:rPr>
-              <a:t>Features</a:t>
-            </a:r>
+              <a:t>First official VECTO release for the 2nd Amendment </a:t>
+            </a:r>
+            <a:br>
+              <a:rPr sz="2400"/>
+            </a:br>
+            <a:r>
+              <a:rPr b="1" lang="en-US" sz="2400" spc="-1" strike="noStrike">
+                <a:solidFill>
+                  <a:srgbClr val="990000"/>
+                </a:solidFill>
+                <a:latin typeface="Arial"/>
+                <a:ea typeface="DejaVu Sans"/>
+              </a:rPr>
+              <a:t>of Regulation (EU) 2017/2400</a:t>
+            </a:r>
+            <a:br>
+              <a:rPr sz="2800"/>
+            </a:br>
+            <a:br>
+              <a:rPr sz="2800"/>
+            </a:br>
+            <a:br>
+              <a:rPr sz="2400"/>
+            </a:br>
             <a:endParaRPr b="0" lang="en-US" sz="2400" spc="-1" strike="noStrike">
+              <a:solidFill>
+                <a:srgbClr val="000000"/>
+              </a:solidFill>
+              <a:latin typeface="Arial"/>
+            </a:endParaRPr>
+          </a:p>
+        </p:txBody>
+      </p:sp>
+      <p:sp>
+        <p:nvSpPr>
+          <p:cNvPr id="94" name="PlaceHolder 2"/>
+          <p:cNvSpPr>
+            <a:spLocks noGrp="1"/>
+          </p:cNvSpPr>
+          <p:nvPr>
+            <p:ph/>
+          </p:nvPr>
+        </p:nvSpPr>
+        <p:spPr>
+          <a:xfrm>
+            <a:off x="722160" y="4276440"/>
+            <a:ext cx="7765920" cy="401040"/>
+          </a:xfrm>
+          <a:prstGeom prst="rect">
+            <a:avLst/>
+          </a:prstGeom>
+          <a:noFill/>
+          <a:ln w="0">
+            <a:noFill/>
+          </a:ln>
+        </p:spPr>
+        <p:txBody>
+          <a:bodyPr lIns="0" rIns="0" tIns="0" bIns="0" anchor="ctr">
+            <a:noAutofit/>
+          </a:bodyPr>
+          <a:p>
+            <a:pPr indent="0" algn="ctr" defTabSz="914400">
+              <a:lnSpc>
+                <a:spcPct val="90000"/>
+              </a:lnSpc>
+              <a:spcBef>
+                <a:spcPts val="1001"/>
+              </a:spcBef>
+              <a:buNone/>
+              <a:tabLst>
+                <a:tab algn="l" pos="0"/>
+              </a:tabLst>
+            </a:pPr>
+            <a:r>
+              <a:rPr b="0" lang="en-GB" sz="2000" spc="-1" strike="noStrike">
+                <a:solidFill>
+                  <a:schemeClr val="dk1"/>
+                </a:solidFill>
+                <a:latin typeface="Arial"/>
+                <a:ea typeface="DejaVu Sans"/>
+              </a:rPr>
+              <a:t>TUG</a:t>
+            </a:r>
+            <a:endParaRPr b="0" lang="en-US" sz="2000" spc="-1" strike="noStrike">
               <a:solidFill>
                 <a:srgbClr val="000000"/>
               </a:solidFill>
@@ -9238,7 +9209,7 @@
         <p:spPr>
           <a:xfrm>
             <a:off x="468360" y="476640"/>
-            <a:ext cx="8212320" cy="675000"/>
+            <a:ext cx="8211240" cy="673920"/>
           </a:xfrm>
           <a:prstGeom prst="rect">
             <a:avLst/>
@@ -9270,7 +9241,7 @@
                 <a:latin typeface="Arial"/>
                 <a:ea typeface="DejaVu Sans"/>
               </a:rPr>
-              <a:t>Vecto 4.2.0.3448 RELEASE CANDIDATE</a:t>
+              <a:t>Vecto 4.2.1.3469 OFFICIAL RELEASE </a:t>
             </a:r>
             <a:br>
               <a:rPr sz="2400"/>
@@ -9283,7 +9254,7 @@
                 <a:latin typeface="Arial"/>
                 <a:ea typeface="DejaVu Sans"/>
               </a:rPr>
-              <a:t>10.06.2024</a:t>
+              <a:t>01.07.2024</a:t>
             </a:r>
             <a:endParaRPr b="0" lang="en-US" sz="1600" spc="-1" strike="noStrike">
               <a:solidFill>
@@ -9307,7 +9278,7 @@
         <p:spPr>
           <a:xfrm>
             <a:off x="323640" y="1639080"/>
-            <a:ext cx="8490960" cy="4447800"/>
+            <a:ext cx="8489880" cy="4446720"/>
           </a:xfrm>
           <a:prstGeom prst="rect">
             <a:avLst/>
@@ -9376,9 +9347,59 @@
                 <a:latin typeface="Arial"/>
                 <a:ea typeface="DejaVu Sans"/>
               </a:rPr>
-              <a:t>CodeEU-696: Double summary in CIF for vocationals and non vocational missions.</a:t>
+              <a:t>CodeEU-726: Build an XML converter tool for older VECTO jobs</a:t>
             </a:r>
             <a:endParaRPr b="0" lang="en-US" sz="1200" spc="-1" strike="noStrike">
+              <a:solidFill>
+                <a:srgbClr val="000000"/>
+              </a:solidFill>
+              <a:latin typeface="Arial"/>
+            </a:endParaRPr>
+          </a:p>
+          <a:p>
+            <a:pPr marL="343080" indent="0" defTabSz="914400">
+              <a:lnSpc>
+                <a:spcPct val="100000"/>
+              </a:lnSpc>
+              <a:spcBef>
+                <a:spcPts val="320"/>
+              </a:spcBef>
+              <a:buNone/>
+              <a:tabLst>
+                <a:tab algn="l" pos="0"/>
+              </a:tabLst>
+            </a:pPr>
+            <a:endParaRPr b="0" lang="en-US" sz="1200" spc="-1" strike="noStrike">
+              <a:solidFill>
+                <a:srgbClr val="000000"/>
+              </a:solidFill>
+              <a:latin typeface="Arial"/>
+            </a:endParaRPr>
+          </a:p>
+          <a:p>
+            <a:pPr marL="343080" indent="0" defTabSz="914400">
+              <a:lnSpc>
+                <a:spcPct val="100000"/>
+              </a:lnSpc>
+              <a:spcBef>
+                <a:spcPts val="320"/>
+              </a:spcBef>
+              <a:buNone/>
+              <a:tabLst>
+                <a:tab algn="l" pos="0"/>
+              </a:tabLst>
+            </a:pPr>
+            <a:r>
+              <a:rPr b="1" lang="en-US" sz="1600" spc="-1" strike="noStrike">
+                <a:solidFill>
+                  <a:srgbClr val="000000"/>
+                </a:solidFill>
+                <a:latin typeface="Arial"/>
+                <a:ea typeface="DejaVu Sans"/>
+              </a:rPr>
+              <a:t>Bugfixes</a:t>
+            </a:r>
+            <a:endParaRPr b="0" lang="en-US" sz="1600" spc="-1" strike="noStrike">
               <a:solidFill>
                 <a:srgbClr val="000000"/>
               </a:solidFill>
@@ -9410,7 +9431,7 @@
                 <a:latin typeface="Arial"/>
                 <a:ea typeface="DejaVu Sans"/>
               </a:rPr>
-              <a:t>CodeEU-698: Incorporate missions RD, LH and EMS to class 16 vehicles</a:t>
+              <a:t>CodeEU-719: the six new tyre dimensions from line 126 onwards to the latest “wheels.csv” file in the VECTO repository</a:t>
             </a:r>
             <a:endParaRPr b="0" lang="en-US" sz="1200" spc="-1" strike="noStrike">
               <a:solidFill>
@@ -9444,7 +9465,7 @@
                 <a:latin typeface="Arial"/>
                 <a:ea typeface="DejaVu Sans"/>
               </a:rPr>
-              <a:t>CodeEU-697: Re-evaluate subgroup allocations for Long Haul</a:t>
+              <a:t>CodeEU-717: VECTO-4.2.0.3448-RC - Buses AMT Gearbox Type with 1% higher C02 in primary results</a:t>
             </a:r>
             <a:endParaRPr b="0" lang="en-US" sz="1200" spc="-1" strike="noStrike">
               <a:solidFill>
@@ -9478,59 +9499,9 @@
                 <a:latin typeface="Arial"/>
                 <a:ea typeface="DejaVu Sans"/>
               </a:rPr>
-              <a:t>CodeEU-676: Feature: Implement monitoring report</a:t>
+              <a:t>CodeEU-724: Error in Primary Bus Simulation: Object reference not set to an instance of an object</a:t>
             </a:r>
             <a:endParaRPr b="0" lang="en-US" sz="1200" spc="-1" strike="noStrike">
-              <a:solidFill>
-                <a:srgbClr val="000000"/>
-              </a:solidFill>
-              <a:latin typeface="Arial"/>
-            </a:endParaRPr>
-          </a:p>
-          <a:p>
-            <a:pPr marL="343080" indent="0" defTabSz="914400">
-              <a:lnSpc>
-                <a:spcPct val="100000"/>
-              </a:lnSpc>
-              <a:spcBef>
-                <a:spcPts val="320"/>
-              </a:spcBef>
-              <a:buNone/>
-              <a:tabLst>
-                <a:tab algn="l" pos="0"/>
-              </a:tabLst>
-            </a:pPr>
-            <a:endParaRPr b="0" lang="en-US" sz="1200" spc="-1" strike="noStrike">
-              <a:solidFill>
-                <a:srgbClr val="000000"/>
-              </a:solidFill>
-              <a:latin typeface="Arial"/>
-            </a:endParaRPr>
-          </a:p>
-          <a:p>
-            <a:pPr marL="343080" indent="0" defTabSz="914400">
-              <a:lnSpc>
-                <a:spcPct val="100000"/>
-              </a:lnSpc>
-              <a:spcBef>
-                <a:spcPts val="320"/>
-              </a:spcBef>
-              <a:buNone/>
-              <a:tabLst>
-                <a:tab algn="l" pos="0"/>
-              </a:tabLst>
-            </a:pPr>
-            <a:r>
-              <a:rPr b="1" lang="en-US" sz="1600" spc="-1" strike="noStrike">
-                <a:solidFill>
-                  <a:srgbClr val="000000"/>
-                </a:solidFill>
-                <a:latin typeface="Arial"/>
-                <a:ea typeface="DejaVu Sans"/>
-              </a:rPr>
-              <a:t>Bugfixes (1/4)</a:t>
-            </a:r>
-            <a:endParaRPr b="0" lang="en-US" sz="1600" spc="-1" strike="noStrike">
               <a:solidFill>
                 <a:srgbClr val="000000"/>
               </a:solidFill>
@@ -9562,7 +9533,7 @@
                 <a:latin typeface="Arial"/>
                 <a:ea typeface="DejaVu Sans"/>
               </a:rPr>
-              <a:t>CodeEU-471: VectoSimulationException: VF640J869RB022573</a:t>
+              <a:t>CodeEU-716: VECTO-4.2.0.3448-RC - Buses Result Summary section missing in RLST_Customer.xml</a:t>
             </a:r>
             <a:endParaRPr b="0" lang="en-US" sz="1200" spc="-1" strike="noStrike">
               <a:solidFill>
@@ -9596,7 +9567,7 @@
                 <a:latin typeface="Arial"/>
                 <a:ea typeface="DejaVu Sans"/>
               </a:rPr>
-              <a:t>CodeEU-462: Article10-2-issue | Order-Nr 28206354 | HEV P1 Error Mercedes-Benz and Setra Hybrid</a:t>
+              <a:t>CodeEU-694: Primary and Completed heavybus FCV article 9 exempted hashcode mismatch.</a:t>
             </a:r>
             <a:endParaRPr b="0" lang="en-US" sz="1200" spc="-1" strike="noStrike">
               <a:solidFill>
@@ -9630,7 +9601,7 @@
                 <a:latin typeface="Arial"/>
                 <a:ea typeface="DejaVu Sans"/>
               </a:rPr>
-              <a:t>BusesCodeEU-326: Article10-2-issue | Order-Nr 28195581 | HEV P1 Error Mercedes-Benz and Setra Hybrid Buses</a:t>
+              <a:t>CodeEU-735: SMT strategy different between engineering and declaration mode</a:t>
             </a:r>
             <a:endParaRPr b="0" lang="en-US" sz="1200" spc="-1" strike="noStrike">
               <a:solidFill>
@@ -9664,7 +9635,7 @@
                 <a:latin typeface="Arial"/>
                 <a:ea typeface="DejaVu Sans"/>
               </a:rPr>
-              <a:t>CodeEU-348: Article10-2-issue | Order-Nr 28204519 | HEV P1 Error Mercedes-Benz and Setra Hybrid Buses</a:t>
+              <a:t>CodeEU-736: Existing customer reports (CIF) fail validation</a:t>
             </a:r>
             <a:endParaRPr b="0" lang="en-US" sz="1200" spc="-1" strike="noStrike">
               <a:solidFill>
@@ -9698,211 +9669,7 @@
                 <a:latin typeface="Arial"/>
                 <a:ea typeface="DejaVu Sans"/>
               </a:rPr>
-              <a:t>CodeEU-457: Article10-2-issue | Order-Nr 28174000 | HEV P1 Error Mercedes-Benz and Setra Hybrid Buses</a:t>
-            </a:r>
-            <a:endParaRPr b="0" lang="en-US" sz="1200" spc="-1" strike="noStrike">
-              <a:solidFill>
-                <a:srgbClr val="000000"/>
-              </a:solidFill>
-              <a:latin typeface="Arial"/>
-            </a:endParaRPr>
-          </a:p>
-          <a:p>
-            <a:pPr marL="343080" indent="-343080" defTabSz="914400">
-              <a:lnSpc>
-                <a:spcPct val="100000"/>
-              </a:lnSpc>
-              <a:spcBef>
-                <a:spcPts val="320"/>
-              </a:spcBef>
-              <a:buClr>
-                <a:srgbClr val="000000"/>
-              </a:buClr>
-              <a:buFont typeface="Symbol"/>
-              <a:buChar char=""/>
-              <a:tabLst>
-                <a:tab algn="l" pos="1886040"/>
-              </a:tabLst>
-            </a:pPr>
-            <a:r>
-              <a:rPr b="0" lang="en-US" sz="1200" spc="-1" strike="noStrike">
-                <a:solidFill>
-                  <a:srgbClr val="000000"/>
-                </a:solidFill>
-                <a:latin typeface="Arial"/>
-                <a:ea typeface="DejaVu Sans"/>
-              </a:rPr>
-              <a:t>CodeEU-458: Article10-2-issue | Order-Nr 28186528 | HEV P1 Error Mercedes-Benz and Setra Hybrid Buses</a:t>
-            </a:r>
-            <a:endParaRPr b="0" lang="en-US" sz="1200" spc="-1" strike="noStrike">
-              <a:solidFill>
-                <a:srgbClr val="000000"/>
-              </a:solidFill>
-              <a:latin typeface="Arial"/>
-            </a:endParaRPr>
-          </a:p>
-          <a:p>
-            <a:pPr marL="343080" indent="-343080" defTabSz="914400">
-              <a:lnSpc>
-                <a:spcPct val="100000"/>
-              </a:lnSpc>
-              <a:spcBef>
-                <a:spcPts val="320"/>
-              </a:spcBef>
-              <a:buClr>
-                <a:srgbClr val="000000"/>
-              </a:buClr>
-              <a:buFont typeface="Symbol"/>
-              <a:buChar char=""/>
-              <a:tabLst>
-                <a:tab algn="l" pos="1886040"/>
-              </a:tabLst>
-            </a:pPr>
-            <a:r>
-              <a:rPr b="0" lang="en-US" sz="1200" spc="-1" strike="noStrike">
-                <a:solidFill>
-                  <a:srgbClr val="000000"/>
-                </a:solidFill>
-                <a:latin typeface="Arial"/>
-                <a:ea typeface="DejaVu Sans"/>
-              </a:rPr>
-              <a:t>CodeEU-459: Article10-2-issue | Order-Nr 28203057 | HEV P1 Error Mercedes-Benz and Setra Hybrid Buses</a:t>
-            </a:r>
-            <a:endParaRPr b="0" lang="en-US" sz="1200" spc="-1" strike="noStrike">
-              <a:solidFill>
-                <a:srgbClr val="000000"/>
-              </a:solidFill>
-              <a:latin typeface="Arial"/>
-            </a:endParaRPr>
-          </a:p>
-          <a:p>
-            <a:pPr marL="343080" indent="-343080" defTabSz="914400">
-              <a:lnSpc>
-                <a:spcPct val="100000"/>
-              </a:lnSpc>
-              <a:spcBef>
-                <a:spcPts val="320"/>
-              </a:spcBef>
-              <a:buClr>
-                <a:srgbClr val="000000"/>
-              </a:buClr>
-              <a:buFont typeface="Symbol"/>
-              <a:buChar char=""/>
-              <a:tabLst>
-                <a:tab algn="l" pos="1886040"/>
-              </a:tabLst>
-            </a:pPr>
-            <a:r>
-              <a:rPr b="0" lang="en-US" sz="1200" spc="-1" strike="noStrike">
-                <a:solidFill>
-                  <a:srgbClr val="000000"/>
-                </a:solidFill>
-                <a:latin typeface="Arial"/>
-                <a:ea typeface="DejaVu Sans"/>
-              </a:rPr>
-              <a:t>CodeEU-545: IVECO confidential : BUG REPORT : HEV-P1 : UW18m C9 VOITH NXT CRU 48V mild hybrid</a:t>
-            </a:r>
-            <a:endParaRPr b="0" lang="en-US" sz="1200" spc="-1" strike="noStrike">
-              <a:solidFill>
-                <a:srgbClr val="000000"/>
-              </a:solidFill>
-              <a:latin typeface="Arial"/>
-            </a:endParaRPr>
-          </a:p>
-          <a:p>
-            <a:pPr marL="343080" indent="-343080" defTabSz="914400">
-              <a:lnSpc>
-                <a:spcPct val="100000"/>
-              </a:lnSpc>
-              <a:spcBef>
-                <a:spcPts val="320"/>
-              </a:spcBef>
-              <a:buClr>
-                <a:srgbClr val="000000"/>
-              </a:buClr>
-              <a:buFont typeface="Symbol"/>
-              <a:buChar char=""/>
-              <a:tabLst>
-                <a:tab algn="l" pos="1886040"/>
-              </a:tabLst>
-            </a:pPr>
-            <a:r>
-              <a:rPr b="0" lang="en-US" sz="1200" spc="-1" strike="noStrike">
-                <a:solidFill>
-                  <a:srgbClr val="000000"/>
-                </a:solidFill>
-                <a:latin typeface="Arial"/>
-                <a:ea typeface="DejaVu Sans"/>
-              </a:rPr>
-              <a:t>CodeEU-346: Article10-2-issue | Order-Nr 28202338 | HEV P1 Error Mercedes-Benz and Setra Hybrid Buses</a:t>
-            </a:r>
-            <a:endParaRPr b="0" lang="en-US" sz="1200" spc="-1" strike="noStrike">
-              <a:solidFill>
-                <a:srgbClr val="000000"/>
-              </a:solidFill>
-              <a:latin typeface="Arial"/>
-            </a:endParaRPr>
-          </a:p>
-          <a:p>
-            <a:pPr marL="343080" indent="-343080" defTabSz="914400">
-              <a:lnSpc>
-                <a:spcPct val="100000"/>
-              </a:lnSpc>
-              <a:spcBef>
-                <a:spcPts val="320"/>
-              </a:spcBef>
-              <a:buClr>
-                <a:srgbClr val="000000"/>
-              </a:buClr>
-              <a:buFont typeface="Symbol"/>
-              <a:buChar char=""/>
-              <a:tabLst>
-                <a:tab algn="l" pos="1886040"/>
-              </a:tabLst>
-            </a:pPr>
-            <a:r>
-              <a:rPr b="0" lang="en-US" sz="1200" spc="-1" strike="noStrike">
-                <a:solidFill>
-                  <a:srgbClr val="000000"/>
-                </a:solidFill>
-                <a:latin typeface="Arial"/>
-                <a:ea typeface="DejaVu Sans"/>
-              </a:rPr>
-              <a:t>CodeEU-352: Article10-2-issue | Order-Nr 28202130 | HEV P1 Error Mercedes-Benz and Setra Hybrid Buses</a:t>
-            </a:r>
-            <a:endParaRPr b="0" lang="en-US" sz="1200" spc="-1" strike="noStrike">
-              <a:solidFill>
-                <a:srgbClr val="000000"/>
-              </a:solidFill>
-              <a:latin typeface="Arial"/>
-            </a:endParaRPr>
-          </a:p>
-          <a:p>
-            <a:pPr marL="343080" indent="-343080" defTabSz="914400">
-              <a:lnSpc>
-                <a:spcPct val="100000"/>
-              </a:lnSpc>
-              <a:spcBef>
-                <a:spcPts val="320"/>
-              </a:spcBef>
-              <a:buClr>
-                <a:srgbClr val="000000"/>
-              </a:buClr>
-              <a:buFont typeface="Symbol"/>
-              <a:buChar char=""/>
-              <a:tabLst>
-                <a:tab algn="l" pos="1886040"/>
-              </a:tabLst>
-            </a:pPr>
-            <a:r>
-              <a:rPr b="0" lang="en-US" sz="1200" spc="-1" strike="noStrike">
-                <a:solidFill>
-                  <a:srgbClr val="000000"/>
-                </a:solidFill>
-                <a:latin typeface="Arial"/>
-                <a:ea typeface="DejaVu Sans"/>
-              </a:rPr>
-              <a:t>CodeEU-394: Article10-2-issue | Order-Nr 28204065 | HEV P1 Error Mercedes-Benz and Setra Hybrid Buses</a:t>
+              <a:t>CodeEU-737: Missing data from XML report</a:t>
             </a:r>
             <a:endParaRPr b="0" lang="en-US" sz="1200" spc="-1" strike="noStrike">
               <a:solidFill>
@@ -9970,13 +9737,581 @@
             <a:spLocks noGrp="1"/>
           </p:cNvSpPr>
           <p:nvPr>
+            <p:ph/>
+          </p:nvPr>
+        </p:nvSpPr>
+        <p:spPr>
+          <a:xfrm>
+            <a:off x="588240" y="1140480"/>
+            <a:ext cx="8388000" cy="5040720"/>
+          </a:xfrm>
+          <a:prstGeom prst="rect">
+            <a:avLst/>
+          </a:prstGeom>
+          <a:noFill/>
+          <a:ln w="0">
+            <a:noFill/>
+          </a:ln>
+        </p:spPr>
+        <p:txBody>
+          <a:bodyPr lIns="0" rIns="0" tIns="0" bIns="0" anchor="t">
+            <a:normAutofit fontScale="64999"/>
+          </a:bodyPr>
+          <a:p>
+            <a:pPr marL="228600" indent="-228600" defTabSz="914400">
+              <a:lnSpc>
+                <a:spcPct val="120000"/>
+              </a:lnSpc>
+              <a:spcBef>
+                <a:spcPts val="601"/>
+              </a:spcBef>
+              <a:buClr>
+                <a:srgbClr val="000000"/>
+              </a:buClr>
+              <a:buFont typeface="Arial"/>
+              <a:buChar char="•"/>
+            </a:pPr>
+            <a:r>
+              <a:rPr b="0" lang="en-US" sz="2000" spc="-1" strike="noStrike">
+                <a:solidFill>
+                  <a:schemeClr val="dk1"/>
+                </a:solidFill>
+                <a:latin typeface="Arial"/>
+                <a:ea typeface="DejaVu Sans"/>
+              </a:rPr>
+              <a:t>Declaration Mode</a:t>
+            </a:r>
+            <a:endParaRPr b="0" lang="en-US" sz="2000" spc="-1" strike="noStrike">
+              <a:solidFill>
+                <a:srgbClr val="000000"/>
+              </a:solidFill>
+              <a:latin typeface="Arial"/>
+            </a:endParaRPr>
+          </a:p>
+          <a:p>
+            <a:pPr lvl="1" marL="716040" indent="-266760" defTabSz="914400">
+              <a:lnSpc>
+                <a:spcPct val="120000"/>
+              </a:lnSpc>
+              <a:spcBef>
+                <a:spcPts val="601"/>
+              </a:spcBef>
+              <a:buClr>
+                <a:srgbClr val="000000"/>
+              </a:buClr>
+              <a:buFont typeface="Wingdings" charset="2"/>
+              <a:buChar char=""/>
+            </a:pPr>
+            <a:r>
+              <a:rPr b="0" lang="en-US" sz="1600" spc="-1" strike="noStrike">
+                <a:solidFill>
+                  <a:schemeClr val="dk1"/>
+                </a:solidFill>
+                <a:latin typeface="Arial"/>
+                <a:ea typeface="DejaVu Sans"/>
+              </a:rPr>
+              <a:t>xEV-Heavy Lorries</a:t>
+            </a:r>
+            <a:endParaRPr b="0" lang="en-US" sz="1600" spc="-1" strike="noStrike">
+              <a:solidFill>
+                <a:srgbClr val="000000"/>
+              </a:solidFill>
+              <a:latin typeface="Arial"/>
+            </a:endParaRPr>
+          </a:p>
+          <a:p>
+            <a:pPr lvl="1" marL="716040" indent="-266760" defTabSz="914400">
+              <a:lnSpc>
+                <a:spcPct val="120000"/>
+              </a:lnSpc>
+              <a:spcBef>
+                <a:spcPts val="601"/>
+              </a:spcBef>
+              <a:buClr>
+                <a:srgbClr val="000000"/>
+              </a:buClr>
+              <a:buFont typeface="Wingdings" charset="2"/>
+              <a:buChar char=""/>
+            </a:pPr>
+            <a:r>
+              <a:rPr b="0" lang="en-US" sz="1600" spc="-1" strike="noStrike">
+                <a:solidFill>
+                  <a:schemeClr val="dk1"/>
+                </a:solidFill>
+                <a:latin typeface="Arial"/>
+                <a:ea typeface="DejaVu Sans"/>
+              </a:rPr>
+              <a:t>Conventional Medium Lorries</a:t>
+            </a:r>
+            <a:endParaRPr b="0" lang="en-US" sz="1600" spc="-1" strike="noStrike">
+              <a:solidFill>
+                <a:srgbClr val="000000"/>
+              </a:solidFill>
+              <a:latin typeface="Arial"/>
+            </a:endParaRPr>
+          </a:p>
+          <a:p>
+            <a:pPr lvl="1" marL="716040" indent="-266760" defTabSz="914400">
+              <a:lnSpc>
+                <a:spcPct val="120000"/>
+              </a:lnSpc>
+              <a:spcBef>
+                <a:spcPts val="601"/>
+              </a:spcBef>
+              <a:buClr>
+                <a:srgbClr val="000000"/>
+              </a:buClr>
+              <a:buFont typeface="Wingdings" charset="2"/>
+              <a:buChar char=""/>
+            </a:pPr>
+            <a:r>
+              <a:rPr b="0" lang="en-US" sz="1600" spc="-1" strike="noStrike">
+                <a:solidFill>
+                  <a:schemeClr val="dk1"/>
+                </a:solidFill>
+                <a:latin typeface="Arial"/>
+                <a:ea typeface="DejaVu Sans"/>
+              </a:rPr>
+              <a:t>xEV Medium Lorries</a:t>
+            </a:r>
+            <a:endParaRPr b="0" lang="en-US" sz="1600" spc="-1" strike="noStrike">
+              <a:solidFill>
+                <a:srgbClr val="000000"/>
+              </a:solidFill>
+              <a:latin typeface="Arial"/>
+            </a:endParaRPr>
+          </a:p>
+          <a:p>
+            <a:pPr lvl="1" marL="716040" indent="-266760" defTabSz="914400">
+              <a:lnSpc>
+                <a:spcPct val="120000"/>
+              </a:lnSpc>
+              <a:spcBef>
+                <a:spcPts val="601"/>
+              </a:spcBef>
+              <a:buClr>
+                <a:srgbClr val="000000"/>
+              </a:buClr>
+              <a:buFont typeface="Wingdings" charset="2"/>
+              <a:buChar char=""/>
+            </a:pPr>
+            <a:r>
+              <a:rPr b="0" lang="en-US" sz="1600" spc="-1" strike="noStrike">
+                <a:solidFill>
+                  <a:schemeClr val="dk1"/>
+                </a:solidFill>
+                <a:latin typeface="Arial"/>
+                <a:ea typeface="DejaVu Sans"/>
+              </a:rPr>
+              <a:t>Conventional Buses</a:t>
+            </a:r>
+            <a:endParaRPr b="0" lang="en-US" sz="1600" spc="-1" strike="noStrike">
+              <a:solidFill>
+                <a:srgbClr val="000000"/>
+              </a:solidFill>
+              <a:latin typeface="Arial"/>
+            </a:endParaRPr>
+          </a:p>
+          <a:p>
+            <a:pPr lvl="1" marL="716040" indent="-266760" defTabSz="914400">
+              <a:lnSpc>
+                <a:spcPct val="120000"/>
+              </a:lnSpc>
+              <a:spcBef>
+                <a:spcPts val="601"/>
+              </a:spcBef>
+              <a:buClr>
+                <a:srgbClr val="000000"/>
+              </a:buClr>
+              <a:buFont typeface="Wingdings" charset="2"/>
+              <a:buChar char=""/>
+            </a:pPr>
+            <a:r>
+              <a:rPr b="0" lang="en-US" sz="1600" spc="-1" strike="noStrike">
+                <a:solidFill>
+                  <a:schemeClr val="dk1"/>
+                </a:solidFill>
+                <a:latin typeface="Arial"/>
+                <a:ea typeface="DejaVu Sans"/>
+              </a:rPr>
+              <a:t>xEV Buses</a:t>
+            </a:r>
+            <a:endParaRPr b="0" lang="en-US" sz="1600" spc="-1" strike="noStrike">
+              <a:solidFill>
+                <a:srgbClr val="000000"/>
+              </a:solidFill>
+              <a:latin typeface="Arial"/>
+            </a:endParaRPr>
+          </a:p>
+          <a:p>
+            <a:pPr marL="228600" indent="-228600" defTabSz="914400">
+              <a:lnSpc>
+                <a:spcPct val="120000"/>
+              </a:lnSpc>
+              <a:spcBef>
+                <a:spcPts val="601"/>
+              </a:spcBef>
+              <a:buClr>
+                <a:srgbClr val="000000"/>
+              </a:buClr>
+              <a:buFont typeface="Arial"/>
+              <a:buChar char="•"/>
+            </a:pPr>
+            <a:r>
+              <a:rPr b="0" lang="en-US" sz="2000" spc="-1" strike="noStrike">
+                <a:solidFill>
+                  <a:schemeClr val="dk1"/>
+                </a:solidFill>
+                <a:latin typeface="Arial"/>
+                <a:ea typeface="DejaVu Sans"/>
+              </a:rPr>
+              <a:t>Dedicated user interface for simulating buses in Declaration Mode using the multistep approach: VECTOMultistep.exe </a:t>
+            </a:r>
+            <a:endParaRPr b="0" lang="en-US" sz="2000" spc="-1" strike="noStrike">
+              <a:solidFill>
+                <a:srgbClr val="000000"/>
+              </a:solidFill>
+              <a:latin typeface="Arial"/>
+            </a:endParaRPr>
+          </a:p>
+          <a:p>
+            <a:pPr marL="228600" indent="-228600" defTabSz="914400">
+              <a:lnSpc>
+                <a:spcPct val="120000"/>
+              </a:lnSpc>
+              <a:spcBef>
+                <a:spcPts val="601"/>
+              </a:spcBef>
+              <a:buClr>
+                <a:srgbClr val="000000"/>
+              </a:buClr>
+              <a:buFont typeface="Arial"/>
+              <a:buChar char="•"/>
+            </a:pPr>
+            <a:r>
+              <a:rPr b="0" lang="en-US" sz="2000" spc="-1" strike="noStrike">
+                <a:solidFill>
+                  <a:schemeClr val="dk1"/>
+                </a:solidFill>
+                <a:latin typeface="Arial"/>
+                <a:ea typeface="DejaVu Sans"/>
+              </a:rPr>
+              <a:t>Engineering Mode</a:t>
+            </a:r>
+            <a:endParaRPr b="0" lang="en-US" sz="2000" spc="-1" strike="noStrike">
+              <a:solidFill>
+                <a:srgbClr val="000000"/>
+              </a:solidFill>
+              <a:latin typeface="Arial"/>
+            </a:endParaRPr>
+          </a:p>
+          <a:p>
+            <a:pPr lvl="1" marL="716040" indent="-266760" defTabSz="914400">
+              <a:lnSpc>
+                <a:spcPct val="120000"/>
+              </a:lnSpc>
+              <a:spcBef>
+                <a:spcPts val="601"/>
+              </a:spcBef>
+              <a:buClr>
+                <a:srgbClr val="000000"/>
+              </a:buClr>
+              <a:buFont typeface="Wingdings" charset="2"/>
+              <a:buChar char=""/>
+            </a:pPr>
+            <a:r>
+              <a:rPr b="0" lang="en-US" sz="1600" spc="-1" strike="noStrike">
+                <a:solidFill>
+                  <a:schemeClr val="dk1"/>
+                </a:solidFill>
+                <a:latin typeface="Arial"/>
+                <a:ea typeface="DejaVu Sans"/>
+              </a:rPr>
+              <a:t>xEV-Vehicles</a:t>
+            </a:r>
+            <a:endParaRPr b="0" lang="en-US" sz="1600" spc="-1" strike="noStrike">
+              <a:solidFill>
+                <a:srgbClr val="000000"/>
+              </a:solidFill>
+              <a:latin typeface="Arial"/>
+            </a:endParaRPr>
+          </a:p>
+          <a:p>
+            <a:pPr marL="228600" indent="-228600" defTabSz="914400">
+              <a:lnSpc>
+                <a:spcPct val="120000"/>
+              </a:lnSpc>
+              <a:spcBef>
+                <a:spcPts val="601"/>
+              </a:spcBef>
+              <a:buClr>
+                <a:srgbClr val="000000"/>
+              </a:buClr>
+              <a:buFont typeface="Arial"/>
+              <a:buChar char="•"/>
+            </a:pPr>
+            <a:r>
+              <a:rPr b="0" lang="pt-BR" sz="2000" spc="-1" strike="noStrike">
+                <a:solidFill>
+                  <a:schemeClr val="dk1"/>
+                </a:solidFill>
+                <a:latin typeface="Arial"/>
+                <a:ea typeface="DejaVu Sans"/>
+              </a:rPr>
+              <a:t>Updated XML-Reports and Vehicle Information Files to support new Vehicle Architectures</a:t>
+            </a:r>
+            <a:endParaRPr b="0" lang="en-US" sz="2000" spc="-1" strike="noStrike">
+              <a:solidFill>
+                <a:srgbClr val="000000"/>
+              </a:solidFill>
+              <a:latin typeface="Arial"/>
+            </a:endParaRPr>
+          </a:p>
+          <a:p>
+            <a:pPr lvl="1" marL="716040" indent="-266760" defTabSz="914400">
+              <a:lnSpc>
+                <a:spcPct val="120000"/>
+              </a:lnSpc>
+              <a:spcBef>
+                <a:spcPts val="601"/>
+              </a:spcBef>
+              <a:buClr>
+                <a:srgbClr val="000000"/>
+              </a:buClr>
+              <a:buFont typeface="Wingdings" charset="2"/>
+              <a:buChar char=""/>
+            </a:pPr>
+            <a:r>
+              <a:rPr b="0" lang="pt-BR" sz="1600" spc="-1" strike="noStrike">
+                <a:solidFill>
+                  <a:schemeClr val="dk1"/>
+                </a:solidFill>
+                <a:latin typeface="Arial"/>
+                <a:ea typeface="DejaVu Sans"/>
+              </a:rPr>
+              <a:t>New Manufacturer Record File (MRF):</a:t>
+            </a:r>
+            <a:endParaRPr b="0" lang="en-US" sz="1600" spc="-1" strike="noStrike">
+              <a:solidFill>
+                <a:srgbClr val="000000"/>
+              </a:solidFill>
+              <a:latin typeface="Arial"/>
+            </a:endParaRPr>
+          </a:p>
+          <a:p>
+            <a:pPr lvl="1" marL="716040" indent="-266760" defTabSz="914400">
+              <a:lnSpc>
+                <a:spcPct val="120000"/>
+              </a:lnSpc>
+              <a:spcBef>
+                <a:spcPts val="601"/>
+              </a:spcBef>
+              <a:buClr>
+                <a:srgbClr val="000000"/>
+              </a:buClr>
+              <a:buFont typeface="Wingdings" charset="2"/>
+              <a:buChar char=""/>
+            </a:pPr>
+            <a:r>
+              <a:rPr b="0" lang="pt-BR" sz="1600" spc="-1" strike="noStrike">
+                <a:solidFill>
+                  <a:schemeClr val="dk1"/>
+                </a:solidFill>
+                <a:latin typeface="Arial"/>
+                <a:ea typeface="DejaVu Sans"/>
+              </a:rPr>
+              <a:t>New Customer Information File (CIF): </a:t>
+            </a:r>
+            <a:endParaRPr b="0" lang="en-US" sz="1600" spc="-1" strike="noStrike">
+              <a:solidFill>
+                <a:srgbClr val="000000"/>
+              </a:solidFill>
+              <a:latin typeface="Arial"/>
+            </a:endParaRPr>
+          </a:p>
+          <a:p>
+            <a:pPr lvl="1" marL="716040" indent="-266760" defTabSz="914400">
+              <a:lnSpc>
+                <a:spcPct val="120000"/>
+              </a:lnSpc>
+              <a:spcBef>
+                <a:spcPts val="601"/>
+              </a:spcBef>
+              <a:buClr>
+                <a:srgbClr val="000000"/>
+              </a:buClr>
+              <a:buFont typeface="Wingdings" charset="2"/>
+              <a:buChar char=""/>
+            </a:pPr>
+            <a:r>
+              <a:rPr b="0" lang="pt-BR" sz="1600" spc="-1" strike="noStrike">
+                <a:solidFill>
+                  <a:schemeClr val="dk1"/>
+                </a:solidFill>
+                <a:latin typeface="Arial"/>
+                <a:ea typeface="DejaVu Sans"/>
+              </a:rPr>
+              <a:t>Multistep Output (VIF):</a:t>
+            </a:r>
+            <a:endParaRPr b="0" lang="en-US" sz="1600" spc="-1" strike="noStrike">
+              <a:solidFill>
+                <a:srgbClr val="000000"/>
+              </a:solidFill>
+              <a:latin typeface="Arial"/>
+            </a:endParaRPr>
+          </a:p>
+          <a:p>
+            <a:pPr marL="228600" indent="-228600" defTabSz="914400">
+              <a:lnSpc>
+                <a:spcPct val="120000"/>
+              </a:lnSpc>
+              <a:spcBef>
+                <a:spcPts val="601"/>
+              </a:spcBef>
+              <a:buClr>
+                <a:srgbClr val="000000"/>
+              </a:buClr>
+              <a:buFont typeface="Arial"/>
+              <a:buChar char="•"/>
+            </a:pPr>
+            <a:r>
+              <a:rPr b="0" lang="pt-BR" sz="2000" spc="-1" strike="noStrike">
+                <a:solidFill>
+                  <a:schemeClr val="dk1"/>
+                </a:solidFill>
+                <a:latin typeface="Arial"/>
+                <a:ea typeface="DejaVu Sans"/>
+              </a:rPr>
+              <a:t>Updated simulation output (.vsum, .vmod)</a:t>
+            </a:r>
+            <a:endParaRPr b="0" lang="en-US" sz="2000" spc="-1" strike="noStrike">
+              <a:solidFill>
+                <a:srgbClr val="000000"/>
+              </a:solidFill>
+              <a:latin typeface="Arial"/>
+            </a:endParaRPr>
+          </a:p>
+          <a:p>
+            <a:pPr marL="228600" indent="-228600" defTabSz="914400">
+              <a:lnSpc>
+                <a:spcPct val="120000"/>
+              </a:lnSpc>
+              <a:spcBef>
+                <a:spcPts val="601"/>
+              </a:spcBef>
+              <a:buClr>
+                <a:srgbClr val="000000"/>
+              </a:buClr>
+              <a:buFont typeface="Arial"/>
+              <a:buChar char="•"/>
+            </a:pPr>
+            <a:r>
+              <a:rPr b="0" lang="pt-BR" sz="2000" spc="-1" strike="noStrike">
+                <a:solidFill>
+                  <a:schemeClr val="dk1"/>
+                </a:solidFill>
+                <a:latin typeface="Arial"/>
+                <a:ea typeface="DejaVu Sans"/>
+              </a:rPr>
+              <a:t>Updated Hashing Tool to handle new powertrain components (electric motor, battery, supercap ...)</a:t>
+            </a:r>
+            <a:endParaRPr b="0" lang="en-US" sz="2000" spc="-1" strike="noStrike">
+              <a:solidFill>
+                <a:srgbClr val="000000"/>
+              </a:solidFill>
+              <a:latin typeface="Arial"/>
+            </a:endParaRPr>
+          </a:p>
+          <a:p>
+            <a:pPr indent="0" defTabSz="914400">
+              <a:lnSpc>
+                <a:spcPct val="120000"/>
+              </a:lnSpc>
+              <a:spcBef>
+                <a:spcPts val="601"/>
+              </a:spcBef>
+              <a:buNone/>
+              <a:tabLst>
+                <a:tab algn="l" pos="0"/>
+              </a:tabLst>
+            </a:pPr>
+            <a:endParaRPr b="0" lang="en-US" sz="2000" spc="-1" strike="noStrike">
+              <a:solidFill>
+                <a:srgbClr val="000000"/>
+              </a:solidFill>
+              <a:latin typeface="Arial"/>
+            </a:endParaRPr>
+          </a:p>
+          <a:p>
+            <a:pPr marL="228600" indent="-228600" defTabSz="914400">
+              <a:lnSpc>
+                <a:spcPct val="120000"/>
+              </a:lnSpc>
+              <a:spcBef>
+                <a:spcPts val="601"/>
+              </a:spcBef>
+              <a:buClr>
+                <a:srgbClr val="000000"/>
+              </a:buClr>
+              <a:buFont typeface="Arial"/>
+              <a:buChar char="•"/>
+              <a:tabLst>
+                <a:tab algn="l" pos="0"/>
+              </a:tabLst>
+            </a:pPr>
+            <a:r>
+              <a:rPr b="0" lang="pt-BR" sz="2000" spc="-1" strike="noStrike">
+                <a:solidFill>
+                  <a:schemeClr val="dk1"/>
+                </a:solidFill>
+                <a:latin typeface="Arial"/>
+                <a:ea typeface="DejaVu Sans"/>
+              </a:rPr>
+              <a:t>Supports .NET Framework 4.8 and .NET 6.0</a:t>
+            </a:r>
+            <a:endParaRPr b="0" lang="en-US" sz="2000" spc="-1" strike="noStrike">
+              <a:solidFill>
+                <a:srgbClr val="000000"/>
+              </a:solidFill>
+              <a:latin typeface="Arial"/>
+            </a:endParaRPr>
+          </a:p>
+          <a:p>
+            <a:pPr indent="0" defTabSz="914400">
+              <a:lnSpc>
+                <a:spcPct val="90000"/>
+              </a:lnSpc>
+              <a:spcBef>
+                <a:spcPts val="1199"/>
+              </a:spcBef>
+              <a:buNone/>
+              <a:tabLst>
+                <a:tab algn="l" pos="0"/>
+              </a:tabLst>
+            </a:pPr>
+            <a:endParaRPr b="0" lang="en-US" sz="2000" spc="-1" strike="noStrike">
+              <a:solidFill>
+                <a:srgbClr val="000000"/>
+              </a:solidFill>
+              <a:latin typeface="Arial"/>
+            </a:endParaRPr>
+          </a:p>
+        </p:txBody>
+      </p:sp>
+      <p:sp>
+        <p:nvSpPr>
+          <p:cNvPr id="96" name="PlaceHolder 2"/>
+          <p:cNvSpPr>
+            <a:spLocks noGrp="1"/>
+          </p:cNvSpPr>
+          <p:nvPr>
             <p:ph type="title"/>
           </p:nvPr>
         </p:nvSpPr>
         <p:spPr>
           <a:xfrm>
             <a:off x="588240" y="453600"/>
-            <a:ext cx="8223840" cy="1123200"/>
+            <a:ext cx="8222760" cy="472320"/>
           </a:xfrm>
           <a:prstGeom prst="rect">
             <a:avLst/>
@@ -10001,6 +10336,92 @@
               </a:tabLst>
             </a:pPr>
             <a:r>
+              <a:rPr b="1" lang="en-GB" sz="2400" spc="-1" strike="noStrike">
+                <a:solidFill>
+                  <a:srgbClr val="990000"/>
+                </a:solidFill>
+                <a:latin typeface="Arial"/>
+                <a:ea typeface="DejaVu Sans"/>
+              </a:rPr>
+              <a:t>Features</a:t>
+            </a:r>
+            <a:endParaRPr b="0" lang="en-US" sz="2400" spc="-1" strike="noStrike">
+              <a:solidFill>
+                <a:srgbClr val="000000"/>
+              </a:solidFill>
+              <a:latin typeface="Arial"/>
+            </a:endParaRPr>
+          </a:p>
+        </p:txBody>
+      </p:sp>
+    </p:spTree>
+  </p:cSld>
+  <mc:AlternateContent>
+    <mc:Choice Requires="p14">
+      <p:transition spd="slow" p14:dur="2000"/>
+    </mc:Choice>
+    <mc:Fallback>
+      <p:transition spd="slow"/>
+    </mc:Fallback>
+  </mc:AlternateContent>
+</p:sld>
+</file>
+
+<file path=ppt/slides/slide21.xml><?xml version="1.0" encoding="utf-8"?>
+<p:sld xmlns:a="http://schemas.openxmlformats.org/drawingml/2006/main" xmlns:p="http://schemas.openxmlformats.org/presentationml/2006/main" xmlns:r="http://schemas.openxmlformats.org/officeDocument/2006/relationships" xmlns:p14="http://schemas.microsoft.com/office/powerpoint/2010/main" xmlns:p15="http://schemas.microsoft.com/office/powerpoint/2012/main" xmlns:mc="http://schemas.openxmlformats.org/markup-compatibility/2006">
+  <p:cSld>
+    <p:spTree>
+      <p:nvGrpSpPr>
+        <p:cNvPr id="1" name=""/>
+        <p:cNvGrpSpPr/>
+        <p:nvPr/>
+      </p:nvGrpSpPr>
+      <p:grpSpPr>
+        <a:xfrm>
+          <a:off x="0" y="0"/>
+          <a:ext cx="0" cy="0"/>
+          <a:chOff x="0" y="0"/>
+          <a:chExt cx="0" cy="0"/>
+        </a:xfrm>
+      </p:grpSpPr>
+      <p:sp>
+        <p:nvSpPr>
+          <p:cNvPr id="97" name="PlaceHolder 1"/>
+          <p:cNvSpPr>
+            <a:spLocks noGrp="1"/>
+          </p:cNvSpPr>
+          <p:nvPr>
+            <p:ph type="title"/>
+          </p:nvPr>
+        </p:nvSpPr>
+        <p:spPr>
+          <a:xfrm>
+            <a:off x="588240" y="453600"/>
+            <a:ext cx="8222760" cy="1122120"/>
+          </a:xfrm>
+          <a:prstGeom prst="rect">
+            <a:avLst/>
+          </a:prstGeom>
+          <a:noFill/>
+          <a:ln w="0">
+            <a:noFill/>
+          </a:ln>
+        </p:spPr>
+        <p:txBody>
+          <a:bodyPr lIns="0" rIns="0" tIns="0" bIns="0" anchor="ctr">
+            <a:noAutofit/>
+          </a:bodyPr>
+          <a:p>
+            <a:pPr indent="0" defTabSz="914400">
+              <a:lnSpc>
+                <a:spcPct val="90000"/>
+              </a:lnSpc>
+              <a:buNone/>
+              <a:tabLst>
+                <a:tab algn="l" pos="0"/>
+              </a:tabLst>
+            </a:pPr>
+            <a:r>
               <a:rPr b="1" lang="en-US" sz="2400" spc="-1" strike="noStrike">
                 <a:solidFill>
                   <a:srgbClr val="990000"/>
@@ -10024,7 +10445,7 @@
       </p:sp>
       <p:graphicFrame>
         <p:nvGraphicFramePr>
-          <p:cNvPr id="96" name="Inhaltsplatzhalter 4"/>
+          <p:cNvPr id="98" name="Inhaltsplatzhalter 4"/>
           <p:cNvGraphicFramePr/>
           <p:nvPr/>
         </p:nvGraphicFramePr>
@@ -13296,14 +13717,14 @@
       </p:graphicFrame>
       <p:sp>
         <p:nvSpPr>
-          <p:cNvPr id="97" name="Textfeld 8"/>
+          <p:cNvPr id="99" name="Textfeld 8"/>
           <p:cNvSpPr/>
           <p:nvPr/>
         </p:nvSpPr>
         <p:spPr>
           <a:xfrm>
             <a:off x="6509160" y="4789800"/>
-            <a:ext cx="1998360" cy="394920"/>
+            <a:ext cx="1997280" cy="394920"/>
           </a:xfrm>
           <a:prstGeom prst="rect">
             <a:avLst/>
@@ -13417,203 +13838,6 @@
               <a:t> Simulation and editing</a:t>
             </a:r>
             <a:endParaRPr b="0" lang="en-US" sz="1000" spc="-1" strike="noStrike">
-              <a:solidFill>
-                <a:srgbClr val="000000"/>
-              </a:solidFill>
-              <a:latin typeface="Arial"/>
-            </a:endParaRPr>
-          </a:p>
-        </p:txBody>
-      </p:sp>
-    </p:spTree>
-  </p:cSld>
-  <mc:AlternateContent>
-    <mc:Choice Requires="p14">
-      <p:transition spd="slow" p14:dur="2000"/>
-    </mc:Choice>
-    <mc:Fallback>
-      <p:transition spd="slow"/>
-    </mc:Fallback>
-  </mc:AlternateContent>
-</p:sld>
-</file>
-
-<file path=ppt/slides/slide21.xml><?xml version="1.0" encoding="utf-8"?>
-<p:sld xmlns:a="http://schemas.openxmlformats.org/drawingml/2006/main" xmlns:p="http://schemas.openxmlformats.org/presentationml/2006/main" xmlns:r="http://schemas.openxmlformats.org/officeDocument/2006/relationships" xmlns:p14="http://schemas.microsoft.com/office/powerpoint/2010/main" xmlns:p15="http://schemas.microsoft.com/office/powerpoint/2012/main" xmlns:mc="http://schemas.openxmlformats.org/markup-compatibility/2006">
-  <p:cSld>
-    <p:spTree>
-      <p:nvGrpSpPr>
-        <p:cNvPr id="1" name=""/>
-        <p:cNvGrpSpPr/>
-        <p:nvPr/>
-      </p:nvGrpSpPr>
-      <p:grpSpPr>
-        <a:xfrm>
-          <a:off x="0" y="0"/>
-          <a:ext cx="0" cy="0"/>
-          <a:chOff x="0" y="0"/>
-          <a:chExt cx="0" cy="0"/>
-        </a:xfrm>
-      </p:grpSpPr>
-      <p:sp>
-        <p:nvSpPr>
-          <p:cNvPr id="98" name="PlaceHolder 1"/>
-          <p:cNvSpPr>
-            <a:spLocks noGrp="1"/>
-          </p:cNvSpPr>
-          <p:nvPr>
-            <p:ph/>
-          </p:nvPr>
-        </p:nvSpPr>
-        <p:spPr>
-          <a:xfrm>
-            <a:off x="588240" y="1299960"/>
-            <a:ext cx="8389080" cy="4190400"/>
-          </a:xfrm>
-          <a:prstGeom prst="rect">
-            <a:avLst/>
-          </a:prstGeom>
-          <a:noFill/>
-          <a:ln w="0">
-            <a:noFill/>
-          </a:ln>
-        </p:spPr>
-        <p:txBody>
-          <a:bodyPr lIns="0" rIns="0" tIns="0" bIns="0" anchor="t">
-            <a:normAutofit/>
-          </a:bodyPr>
-          <a:p>
-            <a:pPr marL="228600" indent="-228600" defTabSz="914400">
-              <a:lnSpc>
-                <a:spcPct val="90000"/>
-              </a:lnSpc>
-              <a:spcBef>
-                <a:spcPts val="1199"/>
-              </a:spcBef>
-              <a:buClr>
-                <a:srgbClr val="000000"/>
-              </a:buClr>
-              <a:buFont typeface="Arial"/>
-              <a:buChar char="•"/>
-            </a:pPr>
-            <a:r>
-              <a:rPr b="0" lang="en-US" sz="1800" spc="-1" strike="noStrike">
-                <a:solidFill>
-                  <a:schemeClr val="dk1"/>
-                </a:solidFill>
-                <a:latin typeface="Arial"/>
-                <a:ea typeface="DejaVu Sans"/>
-              </a:rPr>
-              <a:t>XML Job Files &lt; v2.4 are no longer supported</a:t>
-            </a:r>
-            <a:endParaRPr b="0" lang="en-US" sz="1800" spc="-1" strike="noStrike">
-              <a:solidFill>
-                <a:srgbClr val="000000"/>
-              </a:solidFill>
-              <a:latin typeface="Arial"/>
-            </a:endParaRPr>
-          </a:p>
-          <a:p>
-            <a:pPr marL="228600" indent="-228600" defTabSz="914400">
-              <a:lnSpc>
-                <a:spcPct val="90000"/>
-              </a:lnSpc>
-              <a:spcBef>
-                <a:spcPts val="1199"/>
-              </a:spcBef>
-              <a:buClr>
-                <a:srgbClr val="000000"/>
-              </a:buClr>
-              <a:buFont typeface="Arial"/>
-              <a:buChar char="•"/>
-            </a:pPr>
-            <a:r>
-              <a:rPr b="0" lang="en-US" sz="1800" spc="-1" strike="noStrike">
-                <a:solidFill>
-                  <a:schemeClr val="dk1"/>
-                </a:solidFill>
-                <a:latin typeface="Arial"/>
-                <a:ea typeface="DejaVu Sans"/>
-              </a:rPr>
-              <a:t>Dropped support for .NET Framework 4.5 (EOL 04/2022)</a:t>
-            </a:r>
-            <a:endParaRPr b="0" lang="en-US" sz="1800" spc="-1" strike="noStrike">
-              <a:solidFill>
-                <a:srgbClr val="000000"/>
-              </a:solidFill>
-              <a:latin typeface="Arial"/>
-            </a:endParaRPr>
-          </a:p>
-          <a:p>
-            <a:pPr indent="0" defTabSz="914400">
-              <a:lnSpc>
-                <a:spcPct val="90000"/>
-              </a:lnSpc>
-              <a:spcBef>
-                <a:spcPts val="1199"/>
-              </a:spcBef>
-              <a:buNone/>
-              <a:tabLst>
-                <a:tab algn="l" pos="0"/>
-              </a:tabLst>
-            </a:pPr>
-            <a:endParaRPr b="0" lang="en-US" sz="1800" spc="-1" strike="noStrike">
-              <a:solidFill>
-                <a:srgbClr val="000000"/>
-              </a:solidFill>
-              <a:latin typeface="Arial"/>
-            </a:endParaRPr>
-          </a:p>
-        </p:txBody>
-      </p:sp>
-      <p:sp>
-        <p:nvSpPr>
-          <p:cNvPr id="99" name="PlaceHolder 2"/>
-          <p:cNvSpPr>
-            <a:spLocks noGrp="1"/>
-          </p:cNvSpPr>
-          <p:nvPr>
-            <p:ph type="title"/>
-          </p:nvPr>
-        </p:nvSpPr>
-        <p:spPr>
-          <a:xfrm>
-            <a:off x="588240" y="453600"/>
-            <a:ext cx="8223840" cy="473400"/>
-          </a:xfrm>
-          <a:prstGeom prst="rect">
-            <a:avLst/>
-          </a:prstGeom>
-          <a:noFill/>
-          <a:ln w="0">
-            <a:noFill/>
-          </a:ln>
-        </p:spPr>
-        <p:txBody>
-          <a:bodyPr lIns="0" rIns="0" tIns="0" bIns="0" anchor="ctr">
-            <a:noAutofit/>
-          </a:bodyPr>
-          <a:p>
-            <a:pPr indent="0" defTabSz="914400">
-              <a:lnSpc>
-                <a:spcPct val="90000"/>
-              </a:lnSpc>
-              <a:buNone/>
-              <a:tabLst>
-                <a:tab algn="l" pos="0"/>
-              </a:tabLst>
-            </a:pPr>
-            <a:r>
-              <a:rPr b="1" lang="en-GB" sz="2400" spc="-1" strike="noStrike">
-                <a:solidFill>
-                  <a:srgbClr val="990000"/>
-                </a:solidFill>
-                <a:latin typeface="Arial"/>
-                <a:ea typeface="DejaVu Sans"/>
-              </a:rPr>
-              <a:t>Changes</a:t>
-            </a:r>
-            <a:endParaRPr b="0" lang="en-US" sz="2400" spc="-1" strike="noStrike">
               <a:solidFill>
                 <a:srgbClr val="000000"/>
               </a:solidFill>
@@ -13659,13 +13883,124 @@
             <a:spLocks noGrp="1"/>
           </p:cNvSpPr>
           <p:nvPr>
+            <p:ph/>
+          </p:nvPr>
+        </p:nvSpPr>
+        <p:spPr>
+          <a:xfrm>
+            <a:off x="588240" y="1299960"/>
+            <a:ext cx="8388000" cy="4189320"/>
+          </a:xfrm>
+          <a:prstGeom prst="rect">
+            <a:avLst/>
+          </a:prstGeom>
+          <a:noFill/>
+          <a:ln w="0">
+            <a:noFill/>
+          </a:ln>
+        </p:spPr>
+        <p:txBody>
+          <a:bodyPr lIns="0" rIns="0" tIns="0" bIns="0" anchor="t">
+            <a:normAutofit/>
+          </a:bodyPr>
+          <a:p>
+            <a:pPr marL="228600" indent="-228600" defTabSz="914400">
+              <a:lnSpc>
+                <a:spcPct val="90000"/>
+              </a:lnSpc>
+              <a:spcBef>
+                <a:spcPts val="1199"/>
+              </a:spcBef>
+              <a:buClr>
+                <a:srgbClr val="000000"/>
+              </a:buClr>
+              <a:buFont typeface="Arial"/>
+              <a:buChar char="•"/>
+            </a:pPr>
+            <a:r>
+              <a:rPr b="0" lang="en-US" sz="1800" spc="-1" strike="noStrike">
+                <a:solidFill>
+                  <a:schemeClr val="dk1"/>
+                </a:solidFill>
+                <a:latin typeface="Arial"/>
+                <a:ea typeface="DejaVu Sans"/>
+              </a:rPr>
+              <a:t>XML Job Files &lt; v2.4 are no longer supported</a:t>
+            </a:r>
+            <a:endParaRPr b="0" lang="en-US" sz="1800" spc="-1" strike="noStrike">
+              <a:solidFill>
+                <a:srgbClr val="000000"/>
+              </a:solidFill>
+              <a:latin typeface="Arial"/>
+            </a:endParaRPr>
+          </a:p>
+          <a:p>
+            <a:pPr marL="228600" indent="-228600" defTabSz="914400">
+              <a:lnSpc>
+                <a:spcPct val="90000"/>
+              </a:lnSpc>
+              <a:spcBef>
+                <a:spcPts val="1199"/>
+              </a:spcBef>
+              <a:buClr>
+                <a:srgbClr val="000000"/>
+              </a:buClr>
+              <a:buFont typeface="Arial"/>
+              <a:buChar char="•"/>
+            </a:pPr>
+            <a:r>
+              <a:rPr b="0" lang="en-US" sz="1800" spc="-1" strike="noStrike">
+                <a:solidFill>
+                  <a:schemeClr val="dk1"/>
+                </a:solidFill>
+                <a:latin typeface="Arial"/>
+                <a:ea typeface="DejaVu Sans"/>
+              </a:rPr>
+              <a:t>Dropped support for .NET Framework 4.5 (EOL 04/2022)</a:t>
+            </a:r>
+            <a:endParaRPr b="0" lang="en-US" sz="1800" spc="-1" strike="noStrike">
+              <a:solidFill>
+                <a:srgbClr val="000000"/>
+              </a:solidFill>
+              <a:latin typeface="Arial"/>
+            </a:endParaRPr>
+          </a:p>
+          <a:p>
+            <a:pPr indent="0" defTabSz="914400">
+              <a:lnSpc>
+                <a:spcPct val="90000"/>
+              </a:lnSpc>
+              <a:spcBef>
+                <a:spcPts val="1199"/>
+              </a:spcBef>
+              <a:buNone/>
+              <a:tabLst>
+                <a:tab algn="l" pos="0"/>
+              </a:tabLst>
+            </a:pPr>
+            <a:endParaRPr b="0" lang="en-US" sz="1800" spc="-1" strike="noStrike">
+              <a:solidFill>
+                <a:srgbClr val="000000"/>
+              </a:solidFill>
+              <a:latin typeface="Arial"/>
+            </a:endParaRPr>
+          </a:p>
+        </p:txBody>
+      </p:sp>
+      <p:sp>
+        <p:nvSpPr>
+          <p:cNvPr id="101" name="PlaceHolder 2"/>
+          <p:cNvSpPr>
+            <a:spLocks noGrp="1"/>
+          </p:cNvSpPr>
+          <p:nvPr>
             <p:ph type="title"/>
           </p:nvPr>
         </p:nvSpPr>
         <p:spPr>
           <a:xfrm>
             <a:off x="588240" y="453600"/>
-            <a:ext cx="8223840" cy="1123200"/>
+            <a:ext cx="8222760" cy="472320"/>
           </a:xfrm>
           <a:prstGeom prst="rect">
             <a:avLst/>
@@ -13690,236 +14025,16 @@
               </a:tabLst>
             </a:pPr>
             <a:r>
-              <a:rPr b="1" lang="en-US" sz="2400" spc="-1" strike="noStrike">
+              <a:rPr b="1" lang="en-GB" sz="2400" spc="-1" strike="noStrike">
                 <a:solidFill>
                   <a:srgbClr val="990000"/>
                 </a:solidFill>
                 <a:latin typeface="Arial"/>
                 <a:ea typeface="DejaVu Sans"/>
               </a:rPr>
-              <a:t>Implementation of Declaration Mode for xEV-Vehicles</a:t>
-            </a:r>
-            <a:br>
-              <a:rPr sz="2400"/>
-            </a:br>
+              <a:t>Changes</a:t>
+            </a:r>
             <a:endParaRPr b="0" lang="en-US" sz="2400" spc="-1" strike="noStrike">
-              <a:solidFill>
-                <a:srgbClr val="000000"/>
-              </a:solidFill>
-              <a:latin typeface="Arial"/>
-            </a:endParaRPr>
-          </a:p>
-        </p:txBody>
-      </p:sp>
-      <p:sp>
-        <p:nvSpPr>
-          <p:cNvPr id="101" name="Textfeld 1"/>
-          <p:cNvSpPr/>
-          <p:nvPr/>
-        </p:nvSpPr>
-        <p:spPr>
-          <a:xfrm>
-            <a:off x="588240" y="1210680"/>
-            <a:ext cx="7962120" cy="3350520"/>
-          </a:xfrm>
-          <a:prstGeom prst="rect">
-            <a:avLst/>
-          </a:prstGeom>
-          <a:noFill/>
-          <a:ln w="0">
-            <a:noFill/>
-          </a:ln>
-        </p:spPr>
-        <p:style>
-          <a:lnRef idx="0"/>
-          <a:fillRef idx="0"/>
-          <a:effectRef idx="0"/>
-          <a:fontRef idx="minor"/>
-        </p:style>
-        <p:txBody>
-          <a:bodyPr lIns="90000" rIns="90000" tIns="45000" bIns="45000" anchor="t">
-            <a:spAutoFit/>
-          </a:bodyPr>
-          <a:p>
-            <a:pPr marL="343080" indent="-343080" defTabSz="914400">
-              <a:lnSpc>
-                <a:spcPct val="100000"/>
-              </a:lnSpc>
-              <a:spcBef>
-                <a:spcPts val="1199"/>
-              </a:spcBef>
-              <a:buClr>
-                <a:srgbClr val="000000"/>
-              </a:buClr>
-              <a:buFont typeface="Arial"/>
-              <a:buChar char="•"/>
-            </a:pPr>
-            <a:r>
-              <a:rPr b="0" lang="en-GB" sz="2000" spc="-1" strike="noStrike">
-                <a:solidFill>
-                  <a:schemeClr val="dk1"/>
-                </a:solidFill>
-                <a:latin typeface="Arial"/>
-                <a:ea typeface="DejaVu Sans"/>
-              </a:rPr>
-              <a:t>Generic auxiliary parametrisation</a:t>
-            </a:r>
-            <a:endParaRPr b="0" lang="en-US" sz="2000" spc="-1" strike="noStrike">
-              <a:solidFill>
-                <a:srgbClr val="000000"/>
-              </a:solidFill>
-              <a:latin typeface="Arial"/>
-            </a:endParaRPr>
-          </a:p>
-          <a:p>
-            <a:pPr marL="343080" indent="-343080" defTabSz="914400">
-              <a:lnSpc>
-                <a:spcPct val="100000"/>
-              </a:lnSpc>
-              <a:spcBef>
-                <a:spcPts val="1199"/>
-              </a:spcBef>
-              <a:buClr>
-                <a:srgbClr val="000000"/>
-              </a:buClr>
-              <a:buFont typeface="Arial"/>
-              <a:buChar char="•"/>
-            </a:pPr>
-            <a:r>
-              <a:rPr b="0" lang="en-GB" sz="2000" spc="-1" strike="noStrike">
-                <a:solidFill>
-                  <a:schemeClr val="dk1"/>
-                </a:solidFill>
-                <a:latin typeface="Arial"/>
-                <a:ea typeface="DejaVu Sans"/>
-              </a:rPr>
-              <a:t>Generic parametrisation of usable SOC range</a:t>
-            </a:r>
-            <a:endParaRPr b="0" lang="en-US" sz="2000" spc="-1" strike="noStrike">
-              <a:solidFill>
-                <a:srgbClr val="000000"/>
-              </a:solidFill>
-              <a:latin typeface="Arial"/>
-            </a:endParaRPr>
-          </a:p>
-          <a:p>
-            <a:pPr marL="343080" indent="-343080" defTabSz="914400">
-              <a:lnSpc>
-                <a:spcPct val="100000"/>
-              </a:lnSpc>
-              <a:spcBef>
-                <a:spcPts val="1199"/>
-              </a:spcBef>
-              <a:buClr>
-                <a:srgbClr val="000000"/>
-              </a:buClr>
-              <a:buFont typeface="Arial"/>
-              <a:buChar char="•"/>
-            </a:pPr>
-            <a:r>
-              <a:rPr b="0" lang="en-GB" sz="2000" spc="-1" strike="noStrike">
-                <a:solidFill>
-                  <a:schemeClr val="dk1"/>
-                </a:solidFill>
-                <a:latin typeface="Arial"/>
-                <a:ea typeface="DejaVu Sans"/>
-              </a:rPr>
-              <a:t>Generic parametrisation of Serial/Parallel Hybrid Strategy parameters</a:t>
-            </a:r>
-            <a:endParaRPr b="0" lang="en-US" sz="2000" spc="-1" strike="noStrike">
-              <a:solidFill>
-                <a:srgbClr val="000000"/>
-              </a:solidFill>
-              <a:latin typeface="Arial"/>
-            </a:endParaRPr>
-          </a:p>
-          <a:p>
-            <a:pPr marL="343080" indent="-343080" defTabSz="914400">
-              <a:lnSpc>
-                <a:spcPct val="100000"/>
-              </a:lnSpc>
-              <a:spcBef>
-                <a:spcPts val="1199"/>
-              </a:spcBef>
-              <a:buClr>
-                <a:srgbClr val="000000"/>
-              </a:buClr>
-              <a:buFont typeface="Arial"/>
-              <a:buChar char="•"/>
-            </a:pPr>
-            <a:r>
-              <a:rPr b="0" lang="en-GB" sz="2000" spc="-1" strike="noStrike">
-                <a:solidFill>
-                  <a:schemeClr val="dk1"/>
-                </a:solidFill>
-                <a:latin typeface="Arial"/>
-                <a:ea typeface="DejaVu Sans"/>
-              </a:rPr>
-              <a:t>Automated simulation of OVC-HEV</a:t>
-            </a:r>
-            <a:endParaRPr b="0" lang="en-US" sz="2000" spc="-1" strike="noStrike">
-              <a:solidFill>
-                <a:srgbClr val="000000"/>
-              </a:solidFill>
-              <a:latin typeface="Arial"/>
-            </a:endParaRPr>
-          </a:p>
-          <a:p>
-            <a:pPr lvl="1" marL="743040" indent="-285840" defTabSz="914400">
-              <a:lnSpc>
-                <a:spcPct val="100000"/>
-              </a:lnSpc>
-              <a:spcBef>
-                <a:spcPts val="1199"/>
-              </a:spcBef>
-              <a:buClr>
-                <a:srgbClr val="000000"/>
-              </a:buClr>
-              <a:buFont typeface="Arial"/>
-              <a:buChar char="•"/>
-            </a:pPr>
-            <a:r>
-              <a:rPr b="0" lang="en-GB" sz="1600" spc="-1" strike="noStrike">
-                <a:solidFill>
-                  <a:schemeClr val="dk1"/>
-                </a:solidFill>
-                <a:latin typeface="Arial"/>
-                <a:ea typeface="DejaVu Sans"/>
-              </a:rPr>
-              <a:t>Charge depleting mode (CD): The propulsion energy is provided by the electric storage only</a:t>
-            </a:r>
-            <a:endParaRPr b="0" lang="en-US" sz="1600" spc="-1" strike="noStrike">
-              <a:solidFill>
-                <a:srgbClr val="000000"/>
-              </a:solidFill>
-              <a:latin typeface="Arial"/>
-            </a:endParaRPr>
-          </a:p>
-          <a:p>
-            <a:pPr lvl="1" marL="743040" indent="-285840" defTabSz="914400">
-              <a:lnSpc>
-                <a:spcPct val="100000"/>
-              </a:lnSpc>
-              <a:spcBef>
-                <a:spcPts val="1199"/>
-              </a:spcBef>
-              <a:buClr>
-                <a:srgbClr val="000000"/>
-              </a:buClr>
-              <a:buFont typeface="Arial"/>
-              <a:buChar char="•"/>
-            </a:pPr>
-            <a:r>
-              <a:rPr b="0" lang="en-GB" sz="1600" spc="-1" strike="noStrike">
-                <a:solidFill>
-                  <a:schemeClr val="dk1"/>
-                </a:solidFill>
-                <a:latin typeface="Arial"/>
-                <a:ea typeface="DejaVu Sans"/>
-              </a:rPr>
-              <a:t>Charge sustaining mode (CS): The propulsion energy is provided by the fuel storage</a:t>
-            </a:r>
-            <a:endParaRPr b="0" lang="en-US" sz="1600" spc="-1" strike="noStrike">
               <a:solidFill>
                 <a:srgbClr val="000000"/>
               </a:solidFill>
@@ -13971,7 +14086,7 @@
         <p:spPr>
           <a:xfrm>
             <a:off x="588240" y="453600"/>
-            <a:ext cx="8223840" cy="1123200"/>
+            <a:ext cx="8222760" cy="1122120"/>
           </a:xfrm>
           <a:prstGeom prst="rect">
             <a:avLst/>
@@ -14003,7 +14118,7 @@
                 <a:latin typeface="Arial"/>
                 <a:ea typeface="DejaVu Sans"/>
               </a:rPr>
-              <a:t>Implementation of Declaration Mode for xEV-Lorries</a:t>
+              <a:t>Implementation of Declaration Mode for xEV-Vehicles</a:t>
             </a:r>
             <a:br>
               <a:rPr sz="2400"/>
@@ -14019,14 +14134,320 @@
       </p:sp>
       <p:sp>
         <p:nvSpPr>
-          <p:cNvPr id="103" name="Inhaltsplatzhalter 5"/>
+          <p:cNvPr id="103" name="Textfeld 1"/>
+          <p:cNvSpPr/>
+          <p:nvPr/>
+        </p:nvSpPr>
+        <p:spPr>
+          <a:xfrm>
+            <a:off x="588240" y="1210680"/>
+            <a:ext cx="7961040" cy="3350520"/>
+          </a:xfrm>
+          <a:prstGeom prst="rect">
+            <a:avLst/>
+          </a:prstGeom>
+          <a:noFill/>
+          <a:ln w="0">
+            <a:noFill/>
+          </a:ln>
+        </p:spPr>
+        <p:style>
+          <a:lnRef idx="0"/>
+          <a:fillRef idx="0"/>
+          <a:effectRef idx="0"/>
+          <a:fontRef idx="minor"/>
+        </p:style>
+        <p:txBody>
+          <a:bodyPr lIns="90000" rIns="90000" tIns="45000" bIns="45000" anchor="t">
+            <a:spAutoFit/>
+          </a:bodyPr>
+          <a:p>
+            <a:pPr marL="343080" indent="-343080" defTabSz="914400">
+              <a:lnSpc>
+                <a:spcPct val="100000"/>
+              </a:lnSpc>
+              <a:spcBef>
+                <a:spcPts val="1199"/>
+              </a:spcBef>
+              <a:buClr>
+                <a:srgbClr val="000000"/>
+              </a:buClr>
+              <a:buFont typeface="Arial"/>
+              <a:buChar char="•"/>
+            </a:pPr>
+            <a:r>
+              <a:rPr b="0" lang="en-GB" sz="2000" spc="-1" strike="noStrike">
+                <a:solidFill>
+                  <a:schemeClr val="dk1"/>
+                </a:solidFill>
+                <a:latin typeface="Arial"/>
+                <a:ea typeface="DejaVu Sans"/>
+              </a:rPr>
+              <a:t>Generic auxiliary parametrisation</a:t>
+            </a:r>
+            <a:endParaRPr b="0" lang="en-US" sz="2000" spc="-1" strike="noStrike">
+              <a:solidFill>
+                <a:srgbClr val="000000"/>
+              </a:solidFill>
+              <a:latin typeface="Arial"/>
+            </a:endParaRPr>
+          </a:p>
+          <a:p>
+            <a:pPr marL="343080" indent="-343080" defTabSz="914400">
+              <a:lnSpc>
+                <a:spcPct val="100000"/>
+              </a:lnSpc>
+              <a:spcBef>
+                <a:spcPts val="1199"/>
+              </a:spcBef>
+              <a:buClr>
+                <a:srgbClr val="000000"/>
+              </a:buClr>
+              <a:buFont typeface="Arial"/>
+              <a:buChar char="•"/>
+            </a:pPr>
+            <a:r>
+              <a:rPr b="0" lang="en-GB" sz="2000" spc="-1" strike="noStrike">
+                <a:solidFill>
+                  <a:schemeClr val="dk1"/>
+                </a:solidFill>
+                <a:latin typeface="Arial"/>
+                <a:ea typeface="DejaVu Sans"/>
+              </a:rPr>
+              <a:t>Generic parametrisation of usable SOC range</a:t>
+            </a:r>
+            <a:endParaRPr b="0" lang="en-US" sz="2000" spc="-1" strike="noStrike">
+              <a:solidFill>
+                <a:srgbClr val="000000"/>
+              </a:solidFill>
+              <a:latin typeface="Arial"/>
+            </a:endParaRPr>
+          </a:p>
+          <a:p>
+            <a:pPr marL="343080" indent="-343080" defTabSz="914400">
+              <a:lnSpc>
+                <a:spcPct val="100000"/>
+              </a:lnSpc>
+              <a:spcBef>
+                <a:spcPts val="1199"/>
+              </a:spcBef>
+              <a:buClr>
+                <a:srgbClr val="000000"/>
+              </a:buClr>
+              <a:buFont typeface="Arial"/>
+              <a:buChar char="•"/>
+            </a:pPr>
+            <a:r>
+              <a:rPr b="0" lang="en-GB" sz="2000" spc="-1" strike="noStrike">
+                <a:solidFill>
+                  <a:schemeClr val="dk1"/>
+                </a:solidFill>
+                <a:latin typeface="Arial"/>
+                <a:ea typeface="DejaVu Sans"/>
+              </a:rPr>
+              <a:t>Generic parametrisation of Serial/Parallel Hybrid Strategy parameters</a:t>
+            </a:r>
+            <a:endParaRPr b="0" lang="en-US" sz="2000" spc="-1" strike="noStrike">
+              <a:solidFill>
+                <a:srgbClr val="000000"/>
+              </a:solidFill>
+              <a:latin typeface="Arial"/>
+            </a:endParaRPr>
+          </a:p>
+          <a:p>
+            <a:pPr marL="343080" indent="-343080" defTabSz="914400">
+              <a:lnSpc>
+                <a:spcPct val="100000"/>
+              </a:lnSpc>
+              <a:spcBef>
+                <a:spcPts val="1199"/>
+              </a:spcBef>
+              <a:buClr>
+                <a:srgbClr val="000000"/>
+              </a:buClr>
+              <a:buFont typeface="Arial"/>
+              <a:buChar char="•"/>
+            </a:pPr>
+            <a:r>
+              <a:rPr b="0" lang="en-GB" sz="2000" spc="-1" strike="noStrike">
+                <a:solidFill>
+                  <a:schemeClr val="dk1"/>
+                </a:solidFill>
+                <a:latin typeface="Arial"/>
+                <a:ea typeface="DejaVu Sans"/>
+              </a:rPr>
+              <a:t>Automated simulation of OVC-HEV</a:t>
+            </a:r>
+            <a:endParaRPr b="0" lang="en-US" sz="2000" spc="-1" strike="noStrike">
+              <a:solidFill>
+                <a:srgbClr val="000000"/>
+              </a:solidFill>
+              <a:latin typeface="Arial"/>
+            </a:endParaRPr>
+          </a:p>
+          <a:p>
+            <a:pPr lvl="1" marL="743040" indent="-285840" defTabSz="914400">
+              <a:lnSpc>
+                <a:spcPct val="100000"/>
+              </a:lnSpc>
+              <a:spcBef>
+                <a:spcPts val="1199"/>
+              </a:spcBef>
+              <a:buClr>
+                <a:srgbClr val="000000"/>
+              </a:buClr>
+              <a:buFont typeface="Arial"/>
+              <a:buChar char="•"/>
+            </a:pPr>
+            <a:r>
+              <a:rPr b="0" lang="en-GB" sz="1600" spc="-1" strike="noStrike">
+                <a:solidFill>
+                  <a:schemeClr val="dk1"/>
+                </a:solidFill>
+                <a:latin typeface="Arial"/>
+                <a:ea typeface="DejaVu Sans"/>
+              </a:rPr>
+              <a:t>Charge depleting mode (CD): The propulsion energy is provided by the electric storage only</a:t>
+            </a:r>
+            <a:endParaRPr b="0" lang="en-US" sz="1600" spc="-1" strike="noStrike">
+              <a:solidFill>
+                <a:srgbClr val="000000"/>
+              </a:solidFill>
+              <a:latin typeface="Arial"/>
+            </a:endParaRPr>
+          </a:p>
+          <a:p>
+            <a:pPr lvl="1" marL="743040" indent="-285840" defTabSz="914400">
+              <a:lnSpc>
+                <a:spcPct val="100000"/>
+              </a:lnSpc>
+              <a:spcBef>
+                <a:spcPts val="1199"/>
+              </a:spcBef>
+              <a:buClr>
+                <a:srgbClr val="000000"/>
+              </a:buClr>
+              <a:buFont typeface="Arial"/>
+              <a:buChar char="•"/>
+            </a:pPr>
+            <a:r>
+              <a:rPr b="0" lang="en-GB" sz="1600" spc="-1" strike="noStrike">
+                <a:solidFill>
+                  <a:schemeClr val="dk1"/>
+                </a:solidFill>
+                <a:latin typeface="Arial"/>
+                <a:ea typeface="DejaVu Sans"/>
+              </a:rPr>
+              <a:t>Charge sustaining mode (CS): The propulsion energy is provided by the fuel storage</a:t>
+            </a:r>
+            <a:endParaRPr b="0" lang="en-US" sz="1600" spc="-1" strike="noStrike">
+              <a:solidFill>
+                <a:srgbClr val="000000"/>
+              </a:solidFill>
+              <a:latin typeface="Arial"/>
+            </a:endParaRPr>
+          </a:p>
+        </p:txBody>
+      </p:sp>
+    </p:spTree>
+  </p:cSld>
+  <mc:AlternateContent>
+    <mc:Choice Requires="p14">
+      <p:transition spd="slow" p14:dur="2000"/>
+    </mc:Choice>
+    <mc:Fallback>
+      <p:transition spd="slow"/>
+    </mc:Fallback>
+  </mc:AlternateContent>
+</p:sld>
+</file>
+
+<file path=ppt/slides/slide24.xml><?xml version="1.0" encoding="utf-8"?>
+<p:sld xmlns:a="http://schemas.openxmlformats.org/drawingml/2006/main" xmlns:p="http://schemas.openxmlformats.org/presentationml/2006/main" xmlns:r="http://schemas.openxmlformats.org/officeDocument/2006/relationships" xmlns:p14="http://schemas.microsoft.com/office/powerpoint/2010/main" xmlns:p15="http://schemas.microsoft.com/office/powerpoint/2012/main" xmlns:mc="http://schemas.openxmlformats.org/markup-compatibility/2006">
+  <p:cSld>
+    <p:spTree>
+      <p:nvGrpSpPr>
+        <p:cNvPr id="1" name=""/>
+        <p:cNvGrpSpPr/>
+        <p:nvPr/>
+      </p:nvGrpSpPr>
+      <p:grpSpPr>
+        <a:xfrm>
+          <a:off x="0" y="0"/>
+          <a:ext cx="0" cy="0"/>
+          <a:chOff x="0" y="0"/>
+          <a:chExt cx="0" cy="0"/>
+        </a:xfrm>
+      </p:grpSpPr>
+      <p:sp>
+        <p:nvSpPr>
+          <p:cNvPr id="104" name="PlaceHolder 1"/>
+          <p:cNvSpPr>
+            <a:spLocks noGrp="1"/>
+          </p:cNvSpPr>
+          <p:nvPr>
+            <p:ph type="title"/>
+          </p:nvPr>
+        </p:nvSpPr>
+        <p:spPr>
+          <a:xfrm>
+            <a:off x="588240" y="453600"/>
+            <a:ext cx="8222760" cy="1122120"/>
+          </a:xfrm>
+          <a:prstGeom prst="rect">
+            <a:avLst/>
+          </a:prstGeom>
+          <a:noFill/>
+          <a:ln w="0">
+            <a:noFill/>
+          </a:ln>
+        </p:spPr>
+        <p:txBody>
+          <a:bodyPr lIns="0" rIns="0" tIns="0" bIns="0" anchor="ctr">
+            <a:noAutofit/>
+          </a:bodyPr>
+          <a:p>
+            <a:pPr indent="0" defTabSz="914400">
+              <a:lnSpc>
+                <a:spcPct val="90000"/>
+              </a:lnSpc>
+              <a:buNone/>
+              <a:tabLst>
+                <a:tab algn="l" pos="0"/>
+              </a:tabLst>
+            </a:pPr>
+            <a:r>
+              <a:rPr b="1" lang="en-US" sz="2400" spc="-1" strike="noStrike">
+                <a:solidFill>
+                  <a:srgbClr val="990000"/>
+                </a:solidFill>
+                <a:latin typeface="Arial"/>
+                <a:ea typeface="DejaVu Sans"/>
+              </a:rPr>
+              <a:t>Implementation of Declaration Mode for xEV-Lorries</a:t>
+            </a:r>
+            <a:br>
+              <a:rPr sz="2400"/>
+            </a:br>
+            <a:endParaRPr b="0" lang="en-US" sz="2400" spc="-1" strike="noStrike">
+              <a:solidFill>
+                <a:srgbClr val="000000"/>
+              </a:solidFill>
+              <a:latin typeface="Arial"/>
+            </a:endParaRPr>
+          </a:p>
+        </p:txBody>
+      </p:sp>
+      <p:sp>
+        <p:nvSpPr>
+          <p:cNvPr id="105" name="Inhaltsplatzhalter 5"/>
           <p:cNvSpPr/>
           <p:nvPr/>
         </p:nvSpPr>
         <p:spPr>
           <a:xfrm>
             <a:off x="749520" y="1085040"/>
-            <a:ext cx="8389080" cy="5123160"/>
+            <a:ext cx="8388000" cy="5122080"/>
           </a:xfrm>
           <a:prstGeom prst="rect">
             <a:avLst/>
@@ -14144,14 +14565,14 @@
       </p:sp>
       <p:sp>
         <p:nvSpPr>
-          <p:cNvPr id="104" name="Titel 4"/>
+          <p:cNvPr id="106" name="Titel 4"/>
           <p:cNvSpPr/>
           <p:nvPr/>
         </p:nvSpPr>
         <p:spPr>
           <a:xfrm>
             <a:off x="588240" y="2622240"/>
-            <a:ext cx="8223840" cy="536040"/>
+            <a:ext cx="8222760" cy="534960"/>
           </a:xfrm>
           <a:prstGeom prst="rect">
             <a:avLst/>
@@ -14201,7 +14622,7 @@
       </p:sp>
       <p:sp>
         <p:nvSpPr>
-          <p:cNvPr id="105" name="PlaceHolder 2"/>
+          <p:cNvPr id="107" name="PlaceHolder 2"/>
           <p:cNvSpPr>
             <a:spLocks noGrp="1"/>
           </p:cNvSpPr>
@@ -14212,7 +14633,7 @@
         <p:spPr>
           <a:xfrm>
             <a:off x="588240" y="2861280"/>
-            <a:ext cx="8389080" cy="1379520"/>
+            <a:ext cx="8388000" cy="1378440"/>
           </a:xfrm>
           <a:prstGeom prst="rect">
             <a:avLst/>
@@ -14419,7 +14840,7 @@
         <p:spPr>
           <a:xfrm>
             <a:off x="468360" y="476640"/>
-            <a:ext cx="8212320" cy="675000"/>
+            <a:ext cx="8211240" cy="673920"/>
           </a:xfrm>
           <a:prstGeom prst="rect">
             <a:avLst/>
@@ -14488,7 +14909,7 @@
         <p:spPr>
           <a:xfrm>
             <a:off x="323640" y="1639080"/>
-            <a:ext cx="8490960" cy="4447800"/>
+            <a:ext cx="8489880" cy="4446720"/>
           </a:xfrm>
           <a:prstGeom prst="rect">
             <a:avLst/>
@@ -14515,57 +14936,17 @@
                 <a:tab algn="l" pos="0"/>
               </a:tabLst>
             </a:pPr>
+            <a:r>
+              <a:rPr b="1" lang="en-US" sz="1600" spc="-1" strike="noStrike">
+                <a:solidFill>
+                  <a:srgbClr val="000000"/>
+                </a:solidFill>
+                <a:latin typeface="Arial"/>
+                <a:ea typeface="DejaVu Sans"/>
+              </a:rPr>
+              <a:t>Features</a:t>
+            </a:r>
             <a:endParaRPr b="0" lang="en-US" sz="1600" spc="-1" strike="noStrike">
-              <a:solidFill>
-                <a:srgbClr val="000000"/>
-              </a:solidFill>
-              <a:latin typeface="Arial"/>
-            </a:endParaRPr>
-          </a:p>
-          <a:p>
-            <a:pPr marL="343080" indent="0" defTabSz="914400">
-              <a:lnSpc>
-                <a:spcPct val="100000"/>
-              </a:lnSpc>
-              <a:spcBef>
-                <a:spcPts val="320"/>
-              </a:spcBef>
-              <a:buNone/>
-              <a:tabLst>
-                <a:tab algn="l" pos="0"/>
-              </a:tabLst>
-            </a:pPr>
-            <a:r>
-              <a:rPr b="1" lang="en-US" sz="1600" spc="-1" strike="noStrike">
-                <a:solidFill>
-                  <a:srgbClr val="000000"/>
-                </a:solidFill>
-                <a:latin typeface="Arial"/>
-                <a:ea typeface="DejaVu Sans"/>
-              </a:rPr>
-              <a:t>Bugfixes (2/4)</a:t>
-            </a:r>
-            <a:endParaRPr b="0" lang="en-US" sz="1600" spc="-1" strike="noStrike">
-              <a:solidFill>
-                <a:srgbClr val="000000"/>
-              </a:solidFill>
-              <a:latin typeface="Arial"/>
-            </a:endParaRPr>
-          </a:p>
-          <a:p>
-            <a:pPr marL="343080" indent="0" defTabSz="914400">
-              <a:lnSpc>
-                <a:spcPct val="100000"/>
-              </a:lnSpc>
-              <a:spcBef>
-                <a:spcPts val="320"/>
-              </a:spcBef>
-              <a:buNone/>
-              <a:tabLst>
-                <a:tab algn="l" pos="0"/>
-              </a:tabLst>
-            </a:pPr>
-            <a:endParaRPr b="0" lang="en-US" sz="1200" spc="-1" strike="noStrike">
               <a:solidFill>
                 <a:srgbClr val="000000"/>
               </a:solidFill>
@@ -14597,7 +14978,7 @@
                 <a:latin typeface="Arial"/>
                 <a:ea typeface="DejaVu Sans"/>
               </a:rPr>
-              <a:t>CodeEU-433: Article10-2-issue | Order-Nr 28192321 | HEV P1 Error Mercedes-Benz and Setra Hybrid Buses</a:t>
+              <a:t>CodeEU-696: Double summary in CIF for vocationals and non vocational missions.</a:t>
             </a:r>
             <a:endParaRPr b="0" lang="en-US" sz="1200" spc="-1" strike="noStrike">
               <a:solidFill>
@@ -14631,7 +15012,7 @@
                 <a:latin typeface="Arial"/>
                 <a:ea typeface="DejaVu Sans"/>
               </a:rPr>
-              <a:t>CodeEU-451: Article10-2-issue | Order-Nr 28204280 | HEV P1 Error Mercedes-Benz and Setra Hybrid Buses</a:t>
+              <a:t>CodeEU-698: Incorporate missions RD, LH and EMS to class 16 vehicles</a:t>
             </a:r>
             <a:endParaRPr b="0" lang="en-US" sz="1200" spc="-1" strike="noStrike">
               <a:solidFill>
@@ -14665,7 +15046,7 @@
                 <a:latin typeface="Arial"/>
                 <a:ea typeface="DejaVu Sans"/>
               </a:rPr>
-              <a:t>CodeEU-452: Article10-2-issue | Order-Nr 28197394 | HEV P1 Error Mercedes-Benz and Setra Hybrid Buses</a:t>
+              <a:t>CodeEU-697: Re-evaluate subgroup allocations for Long Haul</a:t>
             </a:r>
             <a:endParaRPr b="0" lang="en-US" sz="1200" spc="-1" strike="noStrike">
               <a:solidFill>
@@ -14699,9 +15080,59 @@
                 <a:latin typeface="Arial"/>
                 <a:ea typeface="DejaVu Sans"/>
               </a:rPr>
-              <a:t>CodeEU-453: Article10-2-issue | Order-Nr 28199435 | HEV P1 Error Mercedes-Benz and Setra Hybrid Buses</a:t>
+              <a:t>CodeEU-676: Feature: Implement monitoring report</a:t>
             </a:r>
             <a:endParaRPr b="0" lang="en-US" sz="1200" spc="-1" strike="noStrike">
+              <a:solidFill>
+                <a:srgbClr val="000000"/>
+              </a:solidFill>
+              <a:latin typeface="Arial"/>
+            </a:endParaRPr>
+          </a:p>
+          <a:p>
+            <a:pPr marL="343080" indent="0" defTabSz="914400">
+              <a:lnSpc>
+                <a:spcPct val="100000"/>
+              </a:lnSpc>
+              <a:spcBef>
+                <a:spcPts val="320"/>
+              </a:spcBef>
+              <a:buNone/>
+              <a:tabLst>
+                <a:tab algn="l" pos="0"/>
+              </a:tabLst>
+            </a:pPr>
+            <a:endParaRPr b="0" lang="en-US" sz="1200" spc="-1" strike="noStrike">
+              <a:solidFill>
+                <a:srgbClr val="000000"/>
+              </a:solidFill>
+              <a:latin typeface="Arial"/>
+            </a:endParaRPr>
+          </a:p>
+          <a:p>
+            <a:pPr marL="343080" indent="0" defTabSz="914400">
+              <a:lnSpc>
+                <a:spcPct val="100000"/>
+              </a:lnSpc>
+              <a:spcBef>
+                <a:spcPts val="320"/>
+              </a:spcBef>
+              <a:buNone/>
+              <a:tabLst>
+                <a:tab algn="l" pos="0"/>
+              </a:tabLst>
+            </a:pPr>
+            <a:r>
+              <a:rPr b="1" lang="en-US" sz="1600" spc="-1" strike="noStrike">
+                <a:solidFill>
+                  <a:srgbClr val="000000"/>
+                </a:solidFill>
+                <a:latin typeface="Arial"/>
+                <a:ea typeface="DejaVu Sans"/>
+              </a:rPr>
+              <a:t>Bugfixes (1/4)</a:t>
+            </a:r>
+            <a:endParaRPr b="0" lang="en-US" sz="1600" spc="-1" strike="noStrike">
               <a:solidFill>
                 <a:srgbClr val="000000"/>
               </a:solidFill>
@@ -14733,7 +15164,7 @@
                 <a:latin typeface="Arial"/>
                 <a:ea typeface="DejaVu Sans"/>
               </a:rPr>
-              <a:t>CodeEU-454: Article10-2-issue | Order-Nr 28206982 | HEV P1 Error Mercedes-Benz and Setra Hybrid Buses</a:t>
+              <a:t>CodeEU-471: VectoSimulationException: VF640J869RB022573</a:t>
             </a:r>
             <a:endParaRPr b="0" lang="en-US" sz="1200" spc="-1" strike="noStrike">
               <a:solidFill>
@@ -14767,7 +15198,7 @@
                 <a:latin typeface="Arial"/>
                 <a:ea typeface="DejaVu Sans"/>
               </a:rPr>
-              <a:t>CodeEU-655: Article10-2-issue | VECTO-4.0.3 | Order-Nr 28208126 | HEV P1 Error Mercedes-Benz and Setra Hybrid Buses</a:t>
+              <a:t>CodeEU-462: Article10-2-issue | Order-Nr 28206354 | HEV P1 Error Mercedes-Benz and Setra Hybrid</a:t>
             </a:r>
             <a:endParaRPr b="0" lang="en-US" sz="1200" spc="-1" strike="noStrike">
               <a:solidFill>
@@ -14801,7 +15232,7 @@
                 <a:latin typeface="Arial"/>
                 <a:ea typeface="DejaVu Sans"/>
               </a:rPr>
-              <a:t>CodeEU-660: Retarder lossmap error in completed vehicle simulation</a:t>
+              <a:t>BusesCodeEU-326: Article10-2-issue | Order-Nr 28195581 | HEV P1 Error Mercedes-Benz and Setra Hybrid Buses</a:t>
             </a:r>
             <a:endParaRPr b="0" lang="en-US" sz="1200" spc="-1" strike="noStrike">
               <a:solidFill>
@@ -14835,7 +15266,7 @@
                 <a:latin typeface="Arial"/>
                 <a:ea typeface="DejaVu Sans"/>
               </a:rPr>
-              <a:t>CodeEU-662: Generic retarder map speed range insufficient in some cases</a:t>
+              <a:t>CodeEU-348: Article10-2-issue | Order-Nr 28204519 | HEV P1 Error Mercedes-Benz and Setra Hybrid Buses</a:t>
             </a:r>
             <a:endParaRPr b="0" lang="en-US" sz="1200" spc="-1" strike="noStrike">
               <a:solidFill>
@@ -14869,7 +15300,7 @@
                 <a:latin typeface="Arial"/>
                 <a:ea typeface="DejaVu Sans"/>
               </a:rPr>
-              <a:t>CodeEU-648: Error in Multistep Tool PEV/P-HEV</a:t>
+              <a:t>CodeEU-457: Article10-2-issue | Order-Nr 28174000 | HEV P1 Error Mercedes-Benz and Setra Hybrid Buses</a:t>
             </a:r>
             <a:endParaRPr b="0" lang="en-US" sz="1200" spc="-1" strike="noStrike">
               <a:solidFill>
@@ -14903,7 +15334,7 @@
                 <a:latin typeface="Arial"/>
                 <a:ea typeface="DejaVu Sans"/>
               </a:rPr>
-              <a:t>CodeEU-618: PEV vehicles simulation error depending the time format</a:t>
+              <a:t>CodeEU-458: Article10-2-issue | Order-Nr 28186528 | HEV P1 Error Mercedes-Benz and Setra Hybrid Buses</a:t>
             </a:r>
             <a:endParaRPr b="0" lang="en-US" sz="1200" spc="-1" strike="noStrike">
               <a:solidFill>
@@ -14937,7 +15368,7 @@
                 <a:latin typeface="Arial"/>
                 <a:ea typeface="DejaVu Sans"/>
               </a:rPr>
-              <a:t>CodeEU-700: Factor Method Generic IHPC Powermap De-normaization bug</a:t>
+              <a:t>CodeEU-459: Article10-2-issue | Order-Nr 28203057 | HEV P1 Error Mercedes-Benz and Setra Hybrid Buses</a:t>
             </a:r>
             <a:endParaRPr b="0" lang="en-US" sz="1200" spc="-1" strike="noStrike">
               <a:solidFill>
@@ -14971,7 +15402,7 @@
                 <a:latin typeface="Arial"/>
                 <a:ea typeface="DejaVu Sans"/>
               </a:rPr>
-              <a:t>CodeEU-482: Article10-2-issue | Order-Nr 28203040 | HEV P1 Error Mercedes-Benz and Setra Hybrid Buses</a:t>
+              <a:t>CodeEU-545: IVECO confidential : BUG REPORT : HEV-P1 : UW18m C9 VOITH NXT CRU 48V mild hybrid</a:t>
             </a:r>
             <a:endParaRPr b="0" lang="en-US" sz="1200" spc="-1" strike="noStrike">
               <a:solidFill>
@@ -15005,7 +15436,7 @@
                 <a:latin typeface="Arial"/>
                 <a:ea typeface="DejaVu Sans"/>
               </a:rPr>
-              <a:t>CodeEU-514: Article10-2-issue | VECTO-4.0.3 | Order-Nr 28208051 | HEV P1 Error Mercedes-Benz and Setra Hybrid Buses</a:t>
+              <a:t>CodeEU-346: Article10-2-issue | Order-Nr 28202338 | HEV P1 Error Mercedes-Benz and Setra Hybrid Buses</a:t>
             </a:r>
             <a:endParaRPr b="0" lang="en-US" sz="1200" spc="-1" strike="noStrike">
               <a:solidFill>
@@ -15039,8 +15470,62 @@
                 <a:latin typeface="Arial"/>
                 <a:ea typeface="DejaVu Sans"/>
               </a:rPr>
-              <a:t>CodeEU-529: Article10-2-issue | VECTO-4.0.3 | Order-Nr 28199994 | HEV P1 Error Mercedes-Benz and Setra Hybrid Buses</a:t>
-            </a:r>
+              <a:t>CodeEU-352: Article10-2-issue | Order-Nr 28202130 | HEV P1 Error Mercedes-Benz and Setra Hybrid Buses</a:t>
+            </a:r>
+            <a:endParaRPr b="0" lang="en-US" sz="1200" spc="-1" strike="noStrike">
+              <a:solidFill>
+                <a:srgbClr val="000000"/>
+              </a:solidFill>
+              <a:latin typeface="Arial"/>
+            </a:endParaRPr>
+          </a:p>
+          <a:p>
+            <a:pPr marL="343080" indent="-343080" defTabSz="914400">
+              <a:lnSpc>
+                <a:spcPct val="100000"/>
+              </a:lnSpc>
+              <a:spcBef>
+                <a:spcPts val="320"/>
+              </a:spcBef>
+              <a:buClr>
+                <a:srgbClr val="000000"/>
+              </a:buClr>
+              <a:buFont typeface="Symbol"/>
+              <a:buChar char=""/>
+              <a:tabLst>
+                <a:tab algn="l" pos="1886040"/>
+              </a:tabLst>
+            </a:pPr>
+            <a:r>
+              <a:rPr b="0" lang="en-US" sz="1200" spc="-1" strike="noStrike">
+                <a:solidFill>
+                  <a:srgbClr val="000000"/>
+                </a:solidFill>
+                <a:latin typeface="Arial"/>
+                <a:ea typeface="DejaVu Sans"/>
+              </a:rPr>
+              <a:t>CodeEU-394: Article10-2-issue | Order-Nr 28204065 | HEV P1 Error Mercedes-Benz and Setra Hybrid Buses</a:t>
+            </a:r>
+            <a:endParaRPr b="0" lang="en-US" sz="1200" spc="-1" strike="noStrike">
+              <a:solidFill>
+                <a:srgbClr val="000000"/>
+              </a:solidFill>
+              <a:latin typeface="Arial"/>
+            </a:endParaRPr>
+          </a:p>
+          <a:p>
+            <a:pPr marL="343080" indent="0" defTabSz="914400">
+              <a:lnSpc>
+                <a:spcPct val="100000"/>
+              </a:lnSpc>
+              <a:spcBef>
+                <a:spcPts val="320"/>
+              </a:spcBef>
+              <a:buNone/>
+              <a:tabLst>
+                <a:tab algn="l" pos="0"/>
+              </a:tabLst>
+            </a:pPr>
             <a:endParaRPr b="0" lang="en-US" sz="1200" spc="-1" strike="noStrike">
               <a:solidFill>
                 <a:srgbClr val="000000"/>
@@ -15093,7 +15578,7 @@
         <p:spPr>
           <a:xfrm>
             <a:off x="468360" y="476640"/>
-            <a:ext cx="8212320" cy="675000"/>
+            <a:ext cx="8211240" cy="673920"/>
           </a:xfrm>
           <a:prstGeom prst="rect">
             <a:avLst/>
@@ -15162,7 +15647,7 @@
         <p:spPr>
           <a:xfrm>
             <a:off x="323640" y="1639080"/>
-            <a:ext cx="8490960" cy="4447800"/>
+            <a:ext cx="8489880" cy="4446720"/>
           </a:xfrm>
           <a:prstGeom prst="rect">
             <a:avLst/>
@@ -15217,7 +15702,7 @@
                 <a:latin typeface="Arial"/>
                 <a:ea typeface="DejaVu Sans"/>
               </a:rPr>
-              <a:t>Bugfixes (3/4)</a:t>
+              <a:t>Bugfixes (2/4)</a:t>
             </a:r>
             <a:endParaRPr b="0" lang="en-US" sz="1600" spc="-1" strike="noStrike">
               <a:solidFill>
@@ -15271,7 +15756,7 @@
                 <a:latin typeface="Arial"/>
                 <a:ea typeface="DejaVu Sans"/>
               </a:rPr>
-              <a:t>CodeEU-544: IVECO confidential : BUG REPORT : HEV-P1 : CRW LE C9 VOITH NXT CRU 48V mild hybrid</a:t>
+              <a:t>CodeEU-433: Article10-2-issue | Order-Nr 28192321 | HEV P1 Error Mercedes-Benz and Setra Hybrid Buses</a:t>
             </a:r>
             <a:endParaRPr b="0" lang="en-US" sz="1200" spc="-1" strike="noStrike">
               <a:solidFill>
@@ -15305,7 +15790,7 @@
                 <a:latin typeface="Arial"/>
                 <a:ea typeface="DejaVu Sans"/>
               </a:rPr>
-              <a:t>CodeEU-552: Article10-2-issue | VECTO-4.0.3 | Order-Nr 28201759 | HEV P1 Error Mercedes-Benz and Setra Hybrid Buses</a:t>
+              <a:t>CodeEU-451: Article10-2-issue | Order-Nr 28204280 | HEV P1 Error Mercedes-Benz and Setra Hybrid Buses</a:t>
             </a:r>
             <a:endParaRPr b="0" lang="en-US" sz="1200" spc="-1" strike="noStrike">
               <a:solidFill>
@@ -15339,7 +15824,7 @@
                 <a:latin typeface="Arial"/>
                 <a:ea typeface="DejaVu Sans"/>
               </a:rPr>
-              <a:t>CodeEU-556: Article10-2-issue | VECTO-4.0.3 | Order-Nr 28208176 | HEV P1 Error Mercedes-Benz and Setra Hybrid Buses</a:t>
+              <a:t>CodeEU-452: Article10-2-issue | Order-Nr 28197394 | HEV P1 Error Mercedes-Benz and Setra Hybrid Buses</a:t>
             </a:r>
             <a:endParaRPr b="0" lang="en-US" sz="1200" spc="-1" strike="noStrike">
               <a:solidFill>
@@ -15373,7 +15858,7 @@
                 <a:latin typeface="Arial"/>
                 <a:ea typeface="DejaVu Sans"/>
               </a:rPr>
-              <a:t>CodeEU-557: Article10-2-issue | VECTO-4.0.3 | Order-Nr 28209751 | HEV P1 Error Mercedes-Benz and Setra Hybrid Buses</a:t>
+              <a:t>CodeEU-453: Article10-2-issue | Order-Nr 28199435 | HEV P1 Error Mercedes-Benz and Setra Hybrid Buses</a:t>
             </a:r>
             <a:endParaRPr b="0" lang="en-US" sz="1200" spc="-1" strike="noStrike">
               <a:solidFill>
@@ -15407,7 +15892,7 @@
                 <a:latin typeface="Arial"/>
                 <a:ea typeface="DejaVu Sans"/>
               </a:rPr>
-              <a:t>CodeEU-622: Article10-2-issue | VECTO-4.0.3 | Order-Nr 28210594 | HEV P1 Error Mercedes-Benz and Setra Hybrid Buses</a:t>
+              <a:t>CodeEU-454: Article10-2-issue | Order-Nr 28206982 | HEV P1 Error Mercedes-Benz and Setra Hybrid Buses</a:t>
             </a:r>
             <a:endParaRPr b="0" lang="en-US" sz="1200" spc="-1" strike="noStrike">
               <a:solidFill>
@@ -15441,7 +15926,7 @@
                 <a:latin typeface="Arial"/>
                 <a:ea typeface="DejaVu Sans"/>
               </a:rPr>
-              <a:t>CodeEU-632: Article10-2-issue | VECTO-4.0.3 | Order-Nr 28210591 | HEV P1 Error Mercedes-Benz and Setra Hybrid Buses</a:t>
+              <a:t>CodeEU-655: Article10-2-issue | VECTO-4.0.3 | Order-Nr 28208126 | HEV P1 Error Mercedes-Benz and Setra Hybrid Buses</a:t>
             </a:r>
             <a:endParaRPr b="0" lang="en-US" sz="1200" spc="-1" strike="noStrike">
               <a:solidFill>
@@ -15475,7 +15960,7 @@
                 <a:latin typeface="Arial"/>
                 <a:ea typeface="DejaVu Sans"/>
               </a:rPr>
-              <a:t>CodeEU-672: Article10-2-issue | VECTO-4.1.3 | Order-Nr 28208841 | HEV P1 Error Mercedes-Benz and Setra Hybrid Buses</a:t>
+              <a:t>CodeEU-660: Retarder lossmap error in completed vehicle simulation</a:t>
             </a:r>
             <a:endParaRPr b="0" lang="en-US" sz="1200" spc="-1" strike="noStrike">
               <a:solidFill>
@@ -15509,7 +15994,7 @@
                 <a:latin typeface="Arial"/>
                 <a:ea typeface="DejaVu Sans"/>
               </a:rPr>
-              <a:t>CodeEU-673: Article10-2-issue | VECTO-4.1.3 | Order-Nr 28209179 | HEV P1 Error Mercedes-Benz and Setra Hybrid Buses</a:t>
+              <a:t>CodeEU-662: Generic retarder map speed range insufficient in some cases</a:t>
             </a:r>
             <a:endParaRPr b="0" lang="en-US" sz="1200" spc="-1" strike="noStrike">
               <a:solidFill>
@@ -15543,7 +16028,7 @@
                 <a:latin typeface="Arial"/>
                 <a:ea typeface="DejaVu Sans"/>
               </a:rPr>
-              <a:t>CodeEU-674: Article10-2-issue | VECTO-4.1.3 | Order-Nr 28211540 | HEV P1 Error Mercedes-Benz and Setra Hybrid Buses</a:t>
+              <a:t>CodeEU-648: Error in Multistep Tool PEV/P-HEV</a:t>
             </a:r>
             <a:endParaRPr b="0" lang="en-US" sz="1200" spc="-1" strike="noStrike">
               <a:solidFill>
@@ -15553,18 +16038,168 @@
             </a:endParaRPr>
           </a:p>
           <a:p>
-            <a:pPr marL="343080" indent="0" defTabSz="914400">
+            <a:pPr marL="343080" indent="-343080" defTabSz="914400">
               <a:lnSpc>
                 <a:spcPct val="100000"/>
               </a:lnSpc>
               <a:spcBef>
                 <a:spcPts val="320"/>
               </a:spcBef>
-              <a:buNone/>
+              <a:buClr>
+                <a:srgbClr val="000000"/>
+              </a:buClr>
+              <a:buFont typeface="Symbol"/>
+              <a:buChar char=""/>
               <a:tabLst>
                 <a:tab algn="l" pos="1886040"/>
               </a:tabLst>
             </a:pPr>
+            <a:r>
+              <a:rPr b="0" lang="en-US" sz="1200" spc="-1" strike="noStrike">
+                <a:solidFill>
+                  <a:srgbClr val="000000"/>
+                </a:solidFill>
+                <a:latin typeface="Arial"/>
+                <a:ea typeface="DejaVu Sans"/>
+              </a:rPr>
+              <a:t>CodeEU-618: PEV vehicles simulation error depending the time format</a:t>
+            </a:r>
+            <a:endParaRPr b="0" lang="en-US" sz="1200" spc="-1" strike="noStrike">
+              <a:solidFill>
+                <a:srgbClr val="000000"/>
+              </a:solidFill>
+              <a:latin typeface="Arial"/>
+            </a:endParaRPr>
+          </a:p>
+          <a:p>
+            <a:pPr marL="343080" indent="-343080" defTabSz="914400">
+              <a:lnSpc>
+                <a:spcPct val="100000"/>
+              </a:lnSpc>
+              <a:spcBef>
+                <a:spcPts val="320"/>
+              </a:spcBef>
+              <a:buClr>
+                <a:srgbClr val="000000"/>
+              </a:buClr>
+              <a:buFont typeface="Symbol"/>
+              <a:buChar char=""/>
+              <a:tabLst>
+                <a:tab algn="l" pos="1886040"/>
+              </a:tabLst>
+            </a:pPr>
+            <a:r>
+              <a:rPr b="0" lang="en-US" sz="1200" spc="-1" strike="noStrike">
+                <a:solidFill>
+                  <a:srgbClr val="000000"/>
+                </a:solidFill>
+                <a:latin typeface="Arial"/>
+                <a:ea typeface="DejaVu Sans"/>
+              </a:rPr>
+              <a:t>CodeEU-700: Factor Method Generic IHPC Powermap De-normaization bug</a:t>
+            </a:r>
+            <a:endParaRPr b="0" lang="en-US" sz="1200" spc="-1" strike="noStrike">
+              <a:solidFill>
+                <a:srgbClr val="000000"/>
+              </a:solidFill>
+              <a:latin typeface="Arial"/>
+            </a:endParaRPr>
+          </a:p>
+          <a:p>
+            <a:pPr marL="343080" indent="-343080" defTabSz="914400">
+              <a:lnSpc>
+                <a:spcPct val="100000"/>
+              </a:lnSpc>
+              <a:spcBef>
+                <a:spcPts val="320"/>
+              </a:spcBef>
+              <a:buClr>
+                <a:srgbClr val="000000"/>
+              </a:buClr>
+              <a:buFont typeface="Symbol"/>
+              <a:buChar char=""/>
+              <a:tabLst>
+                <a:tab algn="l" pos="1886040"/>
+              </a:tabLst>
+            </a:pPr>
+            <a:r>
+              <a:rPr b="0" lang="en-US" sz="1200" spc="-1" strike="noStrike">
+                <a:solidFill>
+                  <a:srgbClr val="000000"/>
+                </a:solidFill>
+                <a:latin typeface="Arial"/>
+                <a:ea typeface="DejaVu Sans"/>
+              </a:rPr>
+              <a:t>CodeEU-482: Article10-2-issue | Order-Nr 28203040 | HEV P1 Error Mercedes-Benz and Setra Hybrid Buses</a:t>
+            </a:r>
+            <a:endParaRPr b="0" lang="en-US" sz="1200" spc="-1" strike="noStrike">
+              <a:solidFill>
+                <a:srgbClr val="000000"/>
+              </a:solidFill>
+              <a:latin typeface="Arial"/>
+            </a:endParaRPr>
+          </a:p>
+          <a:p>
+            <a:pPr marL="343080" indent="-343080" defTabSz="914400">
+              <a:lnSpc>
+                <a:spcPct val="100000"/>
+              </a:lnSpc>
+              <a:spcBef>
+                <a:spcPts val="320"/>
+              </a:spcBef>
+              <a:buClr>
+                <a:srgbClr val="000000"/>
+              </a:buClr>
+              <a:buFont typeface="Symbol"/>
+              <a:buChar char=""/>
+              <a:tabLst>
+                <a:tab algn="l" pos="1886040"/>
+              </a:tabLst>
+            </a:pPr>
+            <a:r>
+              <a:rPr b="0" lang="en-US" sz="1200" spc="-1" strike="noStrike">
+                <a:solidFill>
+                  <a:srgbClr val="000000"/>
+                </a:solidFill>
+                <a:latin typeface="Arial"/>
+                <a:ea typeface="DejaVu Sans"/>
+              </a:rPr>
+              <a:t>CodeEU-514: Article10-2-issue | VECTO-4.0.3 | Order-Nr 28208051 | HEV P1 Error Mercedes-Benz and Setra Hybrid Buses</a:t>
+            </a:r>
+            <a:endParaRPr b="0" lang="en-US" sz="1200" spc="-1" strike="noStrike">
+              <a:solidFill>
+                <a:srgbClr val="000000"/>
+              </a:solidFill>
+              <a:latin typeface="Arial"/>
+            </a:endParaRPr>
+          </a:p>
+          <a:p>
+            <a:pPr marL="343080" indent="-343080" defTabSz="914400">
+              <a:lnSpc>
+                <a:spcPct val="100000"/>
+              </a:lnSpc>
+              <a:spcBef>
+                <a:spcPts val="320"/>
+              </a:spcBef>
+              <a:buClr>
+                <a:srgbClr val="000000"/>
+              </a:buClr>
+              <a:buFont typeface="Symbol"/>
+              <a:buChar char=""/>
+              <a:tabLst>
+                <a:tab algn="l" pos="1886040"/>
+              </a:tabLst>
+            </a:pPr>
+            <a:r>
+              <a:rPr b="0" lang="en-US" sz="1200" spc="-1" strike="noStrike">
+                <a:solidFill>
+                  <a:srgbClr val="000000"/>
+                </a:solidFill>
+                <a:latin typeface="Arial"/>
+                <a:ea typeface="DejaVu Sans"/>
+              </a:rPr>
+              <a:t>CodeEU-529: Article10-2-issue | VECTO-4.0.3 | Order-Nr 28199994 | HEV P1 Error Mercedes-Benz and Setra Hybrid Buses</a:t>
+            </a:r>
             <a:endParaRPr b="0" lang="en-US" sz="1200" spc="-1" strike="noStrike">
               <a:solidFill>
                 <a:srgbClr val="000000"/>
@@ -15617,7 +16252,7 @@
         <p:spPr>
           <a:xfrm>
             <a:off x="468360" y="476640"/>
-            <a:ext cx="8212320" cy="675000"/>
+            <a:ext cx="8211240" cy="673920"/>
           </a:xfrm>
           <a:prstGeom prst="rect">
             <a:avLst/>
@@ -15686,7 +16321,7 @@
         <p:spPr>
           <a:xfrm>
             <a:off x="323640" y="1639080"/>
-            <a:ext cx="8490960" cy="4447800"/>
+            <a:ext cx="8489880" cy="4446720"/>
           </a:xfrm>
           <a:prstGeom prst="rect">
             <a:avLst/>
@@ -15741,7 +16376,7 @@
                 <a:latin typeface="Arial"/>
                 <a:ea typeface="DejaVu Sans"/>
               </a:rPr>
-              <a:t>Bugfixes (4/4)</a:t>
+              <a:t>Bugfixes (3/4)</a:t>
             </a:r>
             <a:endParaRPr b="0" lang="en-US" sz="1600" spc="-1" strike="noStrike">
               <a:solidFill>
@@ -15795,7 +16430,7 @@
                 <a:latin typeface="Arial"/>
                 <a:ea typeface="DejaVu Sans"/>
               </a:rPr>
-              <a:t>CodeEU-678: Article10-2-issue | VECTO-4.1.3 | Order-Nr 28192673 | HEV P1 Error Mercedes-Benz and Setra Hybrid Buses</a:t>
+              <a:t>CodeEU-544: IVECO confidential : BUG REPORT : HEV-P1 : CRW LE C9 VOITH NXT CRU 48V mild hybrid</a:t>
             </a:r>
             <a:endParaRPr b="0" lang="en-US" sz="1200" spc="-1" strike="noStrike">
               <a:solidFill>
@@ -15829,7 +16464,7 @@
                 <a:latin typeface="Arial"/>
                 <a:ea typeface="DejaVu Sans"/>
               </a:rPr>
-              <a:t>CodeEU-697: Article10-2-issue | VECTO-4.1.3 | Order-Nr 28209551 | HEV P1 Error Mercedes-Benz and Setra Hybrid Buses</a:t>
+              <a:t>CodeEU-552: Article10-2-issue | VECTO-4.0.3 | Order-Nr 28201759 | HEV P1 Error Mercedes-Benz and Setra Hybrid Buses</a:t>
             </a:r>
             <a:endParaRPr b="0" lang="en-US" sz="1200" spc="-1" strike="noStrike">
               <a:solidFill>
@@ -15863,7 +16498,7 @@
                 <a:latin typeface="Arial"/>
                 <a:ea typeface="DejaVu Sans"/>
               </a:rPr>
-              <a:t>CodeEU-685: Article10-2-issue | VECTO-4.1.3 | Order-Nr 28200286 | HEV P1 Error Mercedes-Benz and Setra Hybrid Buses</a:t>
+              <a:t>CodeEU-556: Article10-2-issue | VECTO-4.0.3 | Order-Nr 28208176 | HEV P1 Error Mercedes-Benz and Setra Hybrid Buses</a:t>
             </a:r>
             <a:endParaRPr b="0" lang="en-US" sz="1200" spc="-1" strike="noStrike">
               <a:solidFill>
@@ -15897,7 +16532,7 @@
                 <a:latin typeface="Arial"/>
                 <a:ea typeface="DejaVu Sans"/>
               </a:rPr>
-              <a:t>CodeEU-686: Article10-2-issue | VECTO-4.1.3 | Order-Nr 28201178 | HEV P1 Error Mercedes-Benz and Setra Hybrid Buses</a:t>
+              <a:t>CodeEU-557: Article10-2-issue | VECTO-4.0.3 | Order-Nr 28209751 | HEV P1 Error Mercedes-Benz and Setra Hybrid Buses</a:t>
             </a:r>
             <a:endParaRPr b="0" lang="en-US" sz="1200" spc="-1" strike="noStrike">
               <a:solidFill>
@@ -15931,7 +16566,7 @@
                 <a:latin typeface="Arial"/>
                 <a:ea typeface="DejaVu Sans"/>
               </a:rPr>
-              <a:t>CodeEU-687: Article10-2-issue | VECTO-4.1.3 | Order-Nr 28209679 | HEV P1 Error Mercedes-Benz and Setra Hybrid Buses</a:t>
+              <a:t>CodeEU-622: Article10-2-issue | VECTO-4.0.3 | Order-Nr 28210594 | HEV P1 Error Mercedes-Benz and Setra Hybrid Buses</a:t>
             </a:r>
             <a:endParaRPr b="0" lang="en-US" sz="1200" spc="-1" strike="noStrike">
               <a:solidFill>
@@ -15965,7 +16600,7 @@
                 <a:latin typeface="Arial"/>
                 <a:ea typeface="DejaVu Sans"/>
               </a:rPr>
-              <a:t>CodeEU-692: Article10-2-issue | VECTO-4.1.3 | Order-Nr 28209789 | HEV P1 Error Mercedes-Benz and Setra Hybrid Buses</a:t>
+              <a:t>CodeEU-632: Article10-2-issue | VECTO-4.0.3 | Order-Nr 28210591 | HEV P1 Error Mercedes-Benz and Setra Hybrid Buses</a:t>
             </a:r>
             <a:endParaRPr b="0" lang="en-US" sz="1200" spc="-1" strike="noStrike">
               <a:solidFill>
@@ -15975,6 +16610,108 @@
             </a:endParaRPr>
           </a:p>
           <a:p>
+            <a:pPr marL="343080" indent="-343080" defTabSz="914400">
+              <a:lnSpc>
+                <a:spcPct val="100000"/>
+              </a:lnSpc>
+              <a:spcBef>
+                <a:spcPts val="320"/>
+              </a:spcBef>
+              <a:buClr>
+                <a:srgbClr val="000000"/>
+              </a:buClr>
+              <a:buFont typeface="Symbol"/>
+              <a:buChar char=""/>
+              <a:tabLst>
+                <a:tab algn="l" pos="1886040"/>
+              </a:tabLst>
+            </a:pPr>
+            <a:r>
+              <a:rPr b="0" lang="en-US" sz="1200" spc="-1" strike="noStrike">
+                <a:solidFill>
+                  <a:srgbClr val="000000"/>
+                </a:solidFill>
+                <a:latin typeface="Arial"/>
+                <a:ea typeface="DejaVu Sans"/>
+              </a:rPr>
+              <a:t>CodeEU-672: Article10-2-issue | VECTO-4.1.3 | Order-Nr 28208841 | HEV P1 Error Mercedes-Benz and Setra Hybrid Buses</a:t>
+            </a:r>
+            <a:endParaRPr b="0" lang="en-US" sz="1200" spc="-1" strike="noStrike">
+              <a:solidFill>
+                <a:srgbClr val="000000"/>
+              </a:solidFill>
+              <a:latin typeface="Arial"/>
+            </a:endParaRPr>
+          </a:p>
+          <a:p>
+            <a:pPr marL="343080" indent="-343080" defTabSz="914400">
+              <a:lnSpc>
+                <a:spcPct val="100000"/>
+              </a:lnSpc>
+              <a:spcBef>
+                <a:spcPts val="320"/>
+              </a:spcBef>
+              <a:buClr>
+                <a:srgbClr val="000000"/>
+              </a:buClr>
+              <a:buFont typeface="Symbol"/>
+              <a:buChar char=""/>
+              <a:tabLst>
+                <a:tab algn="l" pos="1886040"/>
+              </a:tabLst>
+            </a:pPr>
+            <a:r>
+              <a:rPr b="0" lang="en-US" sz="1200" spc="-1" strike="noStrike">
+                <a:solidFill>
+                  <a:srgbClr val="000000"/>
+                </a:solidFill>
+                <a:latin typeface="Arial"/>
+                <a:ea typeface="DejaVu Sans"/>
+              </a:rPr>
+              <a:t>CodeEU-673: Article10-2-issue | VECTO-4.1.3 | Order-Nr 28209179 | HEV P1 Error Mercedes-Benz and Setra Hybrid Buses</a:t>
+            </a:r>
+            <a:endParaRPr b="0" lang="en-US" sz="1200" spc="-1" strike="noStrike">
+              <a:solidFill>
+                <a:srgbClr val="000000"/>
+              </a:solidFill>
+              <a:latin typeface="Arial"/>
+            </a:endParaRPr>
+          </a:p>
+          <a:p>
+            <a:pPr marL="343080" indent="-343080" defTabSz="914400">
+              <a:lnSpc>
+                <a:spcPct val="100000"/>
+              </a:lnSpc>
+              <a:spcBef>
+                <a:spcPts val="320"/>
+              </a:spcBef>
+              <a:buClr>
+                <a:srgbClr val="000000"/>
+              </a:buClr>
+              <a:buFont typeface="Symbol"/>
+              <a:buChar char=""/>
+              <a:tabLst>
+                <a:tab algn="l" pos="1886040"/>
+              </a:tabLst>
+            </a:pPr>
+            <a:r>
+              <a:rPr b="0" lang="en-US" sz="1200" spc="-1" strike="noStrike">
+                <a:solidFill>
+                  <a:srgbClr val="000000"/>
+                </a:solidFill>
+                <a:latin typeface="Arial"/>
+                <a:ea typeface="DejaVu Sans"/>
+              </a:rPr>
+              <a:t>CodeEU-674: Article10-2-issue | VECTO-4.1.3 | Order-Nr 28211540 | HEV P1 Error Mercedes-Benz and Setra Hybrid Buses</a:t>
+            </a:r>
+            <a:endParaRPr b="0" lang="en-US" sz="1200" spc="-1" strike="noStrike">
+              <a:solidFill>
+                <a:srgbClr val="000000"/>
+              </a:solidFill>
+              <a:latin typeface="Arial"/>
+            </a:endParaRPr>
+          </a:p>
+          <a:p>
             <a:pPr marL="343080" indent="0" defTabSz="914400">
               <a:lnSpc>
                 <a:spcPct val="100000"/>
@@ -15984,7 +16721,7 @@
               </a:spcBef>
               <a:buNone/>
               <a:tabLst>
-                <a:tab algn="l" pos="1886040"/>
+                <a:tab algn="l" pos="0"/>
               </a:tabLst>
             </a:pPr>
             <a:endParaRPr b="0" lang="en-US" sz="1200" spc="-1" strike="noStrike">
@@ -16039,7 +16776,7 @@
         <p:spPr>
           <a:xfrm>
             <a:off x="468360" y="476640"/>
-            <a:ext cx="8212320" cy="675000"/>
+            <a:ext cx="8211240" cy="673920"/>
           </a:xfrm>
           <a:prstGeom prst="rect">
             <a:avLst/>
@@ -16071,7 +16808,7 @@
                 <a:latin typeface="Arial"/>
                 <a:ea typeface="DejaVu Sans"/>
               </a:rPr>
-              <a:t>Vecto 4.1.3.3415 OFFICIAL RELEASE</a:t>
+              <a:t>Vecto 4.2.0.3448 RELEASE CANDIDATE</a:t>
             </a:r>
             <a:br>
               <a:rPr sz="2400"/>
@@ -16084,7 +16821,7 @@
                 <a:latin typeface="Arial"/>
                 <a:ea typeface="DejaVu Sans"/>
               </a:rPr>
-              <a:t>08.05.2024</a:t>
+              <a:t>10.06.2024</a:t>
             </a:r>
             <a:endParaRPr b="0" lang="en-US" sz="1600" spc="-1" strike="noStrike">
               <a:solidFill>
@@ -16108,7 +16845,7 @@
         <p:spPr>
           <a:xfrm>
             <a:off x="323640" y="1639080"/>
-            <a:ext cx="8490960" cy="4447800"/>
+            <a:ext cx="8489880" cy="4446720"/>
           </a:xfrm>
           <a:prstGeom prst="rect">
             <a:avLst/>
@@ -16143,6 +16880,56 @@
             </a:endParaRPr>
           </a:p>
           <a:p>
+            <a:pPr marL="343080" indent="0" defTabSz="914400">
+              <a:lnSpc>
+                <a:spcPct val="100000"/>
+              </a:lnSpc>
+              <a:spcBef>
+                <a:spcPts val="320"/>
+              </a:spcBef>
+              <a:buNone/>
+              <a:tabLst>
+                <a:tab algn="l" pos="0"/>
+              </a:tabLst>
+            </a:pPr>
+            <a:r>
+              <a:rPr b="1" lang="en-US" sz="1600" spc="-1" strike="noStrike">
+                <a:solidFill>
+                  <a:srgbClr val="000000"/>
+                </a:solidFill>
+                <a:latin typeface="Arial"/>
+                <a:ea typeface="DejaVu Sans"/>
+              </a:rPr>
+              <a:t>Bugfixes (4/4)</a:t>
+            </a:r>
+            <a:endParaRPr b="0" lang="en-US" sz="1600" spc="-1" strike="noStrike">
+              <a:solidFill>
+                <a:srgbClr val="000000"/>
+              </a:solidFill>
+              <a:latin typeface="Arial"/>
+            </a:endParaRPr>
+          </a:p>
+          <a:p>
+            <a:pPr marL="343080" indent="0" defTabSz="914400">
+              <a:lnSpc>
+                <a:spcPct val="100000"/>
+              </a:lnSpc>
+              <a:spcBef>
+                <a:spcPts val="320"/>
+              </a:spcBef>
+              <a:buNone/>
+              <a:tabLst>
+                <a:tab algn="l" pos="0"/>
+              </a:tabLst>
+            </a:pPr>
+            <a:endParaRPr b="0" lang="en-US" sz="1200" spc="-1" strike="noStrike">
+              <a:solidFill>
+                <a:srgbClr val="000000"/>
+              </a:solidFill>
+              <a:latin typeface="Arial"/>
+            </a:endParaRPr>
+          </a:p>
+          <a:p>
             <a:pPr marL="343080" indent="-343080" defTabSz="914400">
               <a:lnSpc>
                 <a:spcPct val="100000"/>
@@ -16160,24 +16947,24 @@
               </a:tabLst>
             </a:pPr>
             <a:r>
-              <a:rPr b="1" lang="en-US" sz="1600" spc="-1" strike="noStrike">
-                <a:solidFill>
-                  <a:srgbClr val="000000"/>
-                </a:solidFill>
-                <a:latin typeface="Arial"/>
-                <a:ea typeface="DejaVu Sans"/>
-              </a:rPr>
-              <a:t>Hotfixes </a:t>
-            </a:r>
-            <a:endParaRPr b="0" lang="en-US" sz="1600" spc="-1" strike="noStrike">
-              <a:solidFill>
-                <a:srgbClr val="000000"/>
-              </a:solidFill>
-              <a:latin typeface="Arial"/>
-            </a:endParaRPr>
-          </a:p>
-          <a:p>
-            <a:pPr lvl="1" marL="800280" indent="-343080" defTabSz="914400">
+              <a:rPr b="0" lang="en-US" sz="1200" spc="-1" strike="noStrike">
+                <a:solidFill>
+                  <a:srgbClr val="000000"/>
+                </a:solidFill>
+                <a:latin typeface="Arial"/>
+                <a:ea typeface="DejaVu Sans"/>
+              </a:rPr>
+              <a:t>CodeEU-678: Article10-2-issue | VECTO-4.1.3 | Order-Nr 28192673 | HEV P1 Error Mercedes-Benz and Setra Hybrid Buses</a:t>
+            </a:r>
+            <a:endParaRPr b="0" lang="en-US" sz="1200" spc="-1" strike="noStrike">
+              <a:solidFill>
+                <a:srgbClr val="000000"/>
+              </a:solidFill>
+              <a:latin typeface="Arial"/>
+            </a:endParaRPr>
+          </a:p>
+          <a:p>
+            <a:pPr marL="343080" indent="-343080" defTabSz="914400">
               <a:lnSpc>
                 <a:spcPct val="100000"/>
               </a:lnSpc>
@@ -16201,8 +16988,164 @@
                 <a:latin typeface="Arial"/>
                 <a:ea typeface="DejaVu Sans"/>
               </a:rPr>
-              <a:t>CodeEU-638: Incorrect construction payloads for group 9 non-vocational vehicle</a:t>
-            </a:r>
+              <a:t>CodeEU-697: Article10-2-issue | VECTO-4.1.3 | Order-Nr 28209551 | HEV P1 Error Mercedes-Benz and Setra Hybrid Buses</a:t>
+            </a:r>
+            <a:endParaRPr b="0" lang="en-US" sz="1200" spc="-1" strike="noStrike">
+              <a:solidFill>
+                <a:srgbClr val="000000"/>
+              </a:solidFill>
+              <a:latin typeface="Arial"/>
+            </a:endParaRPr>
+          </a:p>
+          <a:p>
+            <a:pPr marL="343080" indent="-343080" defTabSz="914400">
+              <a:lnSpc>
+                <a:spcPct val="100000"/>
+              </a:lnSpc>
+              <a:spcBef>
+                <a:spcPts val="320"/>
+              </a:spcBef>
+              <a:buClr>
+                <a:srgbClr val="000000"/>
+              </a:buClr>
+              <a:buFont typeface="Symbol"/>
+              <a:buChar char=""/>
+              <a:tabLst>
+                <a:tab algn="l" pos="1886040"/>
+              </a:tabLst>
+            </a:pPr>
+            <a:r>
+              <a:rPr b="0" lang="en-US" sz="1200" spc="-1" strike="noStrike">
+                <a:solidFill>
+                  <a:srgbClr val="000000"/>
+                </a:solidFill>
+                <a:latin typeface="Arial"/>
+                <a:ea typeface="DejaVu Sans"/>
+              </a:rPr>
+              <a:t>CodeEU-685: Article10-2-issue | VECTO-4.1.3 | Order-Nr 28200286 | HEV P1 Error Mercedes-Benz and Setra Hybrid Buses</a:t>
+            </a:r>
+            <a:endParaRPr b="0" lang="en-US" sz="1200" spc="-1" strike="noStrike">
+              <a:solidFill>
+                <a:srgbClr val="000000"/>
+              </a:solidFill>
+              <a:latin typeface="Arial"/>
+            </a:endParaRPr>
+          </a:p>
+          <a:p>
+            <a:pPr marL="343080" indent="-343080" defTabSz="914400">
+              <a:lnSpc>
+                <a:spcPct val="100000"/>
+              </a:lnSpc>
+              <a:spcBef>
+                <a:spcPts val="320"/>
+              </a:spcBef>
+              <a:buClr>
+                <a:srgbClr val="000000"/>
+              </a:buClr>
+              <a:buFont typeface="Symbol"/>
+              <a:buChar char=""/>
+              <a:tabLst>
+                <a:tab algn="l" pos="1886040"/>
+              </a:tabLst>
+            </a:pPr>
+            <a:r>
+              <a:rPr b="0" lang="en-US" sz="1200" spc="-1" strike="noStrike">
+                <a:solidFill>
+                  <a:srgbClr val="000000"/>
+                </a:solidFill>
+                <a:latin typeface="Arial"/>
+                <a:ea typeface="DejaVu Sans"/>
+              </a:rPr>
+              <a:t>CodeEU-686: Article10-2-issue | VECTO-4.1.3 | Order-Nr 28201178 | HEV P1 Error Mercedes-Benz and Setra Hybrid Buses</a:t>
+            </a:r>
+            <a:endParaRPr b="0" lang="en-US" sz="1200" spc="-1" strike="noStrike">
+              <a:solidFill>
+                <a:srgbClr val="000000"/>
+              </a:solidFill>
+              <a:latin typeface="Arial"/>
+            </a:endParaRPr>
+          </a:p>
+          <a:p>
+            <a:pPr marL="343080" indent="-343080" defTabSz="914400">
+              <a:lnSpc>
+                <a:spcPct val="100000"/>
+              </a:lnSpc>
+              <a:spcBef>
+                <a:spcPts val="320"/>
+              </a:spcBef>
+              <a:buClr>
+                <a:srgbClr val="000000"/>
+              </a:buClr>
+              <a:buFont typeface="Symbol"/>
+              <a:buChar char=""/>
+              <a:tabLst>
+                <a:tab algn="l" pos="1886040"/>
+              </a:tabLst>
+            </a:pPr>
+            <a:r>
+              <a:rPr b="0" lang="en-US" sz="1200" spc="-1" strike="noStrike">
+                <a:solidFill>
+                  <a:srgbClr val="000000"/>
+                </a:solidFill>
+                <a:latin typeface="Arial"/>
+                <a:ea typeface="DejaVu Sans"/>
+              </a:rPr>
+              <a:t>CodeEU-687: Article10-2-issue | VECTO-4.1.3 | Order-Nr 28209679 | HEV P1 Error Mercedes-Benz and Setra Hybrid Buses</a:t>
+            </a:r>
+            <a:endParaRPr b="0" lang="en-US" sz="1200" spc="-1" strike="noStrike">
+              <a:solidFill>
+                <a:srgbClr val="000000"/>
+              </a:solidFill>
+              <a:latin typeface="Arial"/>
+            </a:endParaRPr>
+          </a:p>
+          <a:p>
+            <a:pPr marL="343080" indent="-343080" defTabSz="914400">
+              <a:lnSpc>
+                <a:spcPct val="100000"/>
+              </a:lnSpc>
+              <a:spcBef>
+                <a:spcPts val="320"/>
+              </a:spcBef>
+              <a:buClr>
+                <a:srgbClr val="000000"/>
+              </a:buClr>
+              <a:buFont typeface="Symbol"/>
+              <a:buChar char=""/>
+              <a:tabLst>
+                <a:tab algn="l" pos="1886040"/>
+              </a:tabLst>
+            </a:pPr>
+            <a:r>
+              <a:rPr b="0" lang="en-US" sz="1200" spc="-1" strike="noStrike">
+                <a:solidFill>
+                  <a:srgbClr val="000000"/>
+                </a:solidFill>
+                <a:latin typeface="Arial"/>
+                <a:ea typeface="DejaVu Sans"/>
+              </a:rPr>
+              <a:t>CodeEU-692: Article10-2-issue | VECTO-4.1.3 | Order-Nr 28209789 | HEV P1 Error Mercedes-Benz and Setra Hybrid Buses</a:t>
+            </a:r>
+            <a:endParaRPr b="0" lang="en-US" sz="1200" spc="-1" strike="noStrike">
+              <a:solidFill>
+                <a:srgbClr val="000000"/>
+              </a:solidFill>
+              <a:latin typeface="Arial"/>
+            </a:endParaRPr>
+          </a:p>
+          <a:p>
+            <a:pPr marL="343080" indent="0" defTabSz="914400">
+              <a:lnSpc>
+                <a:spcPct val="100000"/>
+              </a:lnSpc>
+              <a:spcBef>
+                <a:spcPts val="320"/>
+              </a:spcBef>
+              <a:buNone/>
+              <a:tabLst>
+                <a:tab algn="l" pos="0"/>
+              </a:tabLst>
+            </a:pPr>
             <a:endParaRPr b="0" lang="en-US" sz="1200" spc="-1" strike="noStrike">
               <a:solidFill>
                 <a:srgbClr val="000000"/>
@@ -16255,7 +17198,7 @@
         <p:spPr>
           <a:xfrm>
             <a:off x="468360" y="476640"/>
-            <a:ext cx="8212320" cy="675000"/>
+            <a:ext cx="8211240" cy="673920"/>
           </a:xfrm>
           <a:prstGeom prst="rect">
             <a:avLst/>
@@ -16287,7 +17230,7 @@
                 <a:latin typeface="Arial"/>
                 <a:ea typeface="DejaVu Sans"/>
               </a:rPr>
-              <a:t>Vecto 4.1.1.3413 OFFICIAL RELEASE</a:t>
+              <a:t>Vecto 4.1.3.3415 OFFICIAL RELEASE</a:t>
             </a:r>
             <a:br>
               <a:rPr sz="2400"/>
@@ -16300,7 +17243,7 @@
                 <a:latin typeface="Arial"/>
                 <a:ea typeface="DejaVu Sans"/>
               </a:rPr>
-              <a:t>06.05.2024</a:t>
+              <a:t>08.05.2024</a:t>
             </a:r>
             <a:endParaRPr b="0" lang="en-US" sz="1600" spc="-1" strike="noStrike">
               <a:solidFill>
@@ -16324,7 +17267,7 @@
         <p:spPr>
           <a:xfrm>
             <a:off x="323640" y="1639080"/>
-            <a:ext cx="8490960" cy="4447800"/>
+            <a:ext cx="8489880" cy="4446720"/>
           </a:xfrm>
           <a:prstGeom prst="rect">
             <a:avLst/>
@@ -16383,7 +17326,7 @@
                 <a:latin typeface="Arial"/>
                 <a:ea typeface="DejaVu Sans"/>
               </a:rPr>
-              <a:t>Bugfixes </a:t>
+              <a:t>Hotfixes </a:t>
             </a:r>
             <a:endParaRPr b="0" lang="en-US" sz="1600" spc="-1" strike="noStrike">
               <a:solidFill>
@@ -16417,143 +17360,7 @@
                 <a:latin typeface="Arial"/>
                 <a:ea typeface="DejaVu Sans"/>
               </a:rPr>
-              <a:t>CodeEU-615: Multistep freezes after loading VIF chassis</a:t>
-            </a:r>
-            <a:endParaRPr b="0" lang="en-US" sz="1200" spc="-1" strike="noStrike">
-              <a:solidFill>
-                <a:srgbClr val="000000"/>
-              </a:solidFill>
-              <a:latin typeface="Arial"/>
-            </a:endParaRPr>
-          </a:p>
-          <a:p>
-            <a:pPr lvl="1" marL="800280" indent="-343080" defTabSz="914400">
-              <a:lnSpc>
-                <a:spcPct val="100000"/>
-              </a:lnSpc>
-              <a:spcBef>
-                <a:spcPts val="320"/>
-              </a:spcBef>
-              <a:buClr>
-                <a:srgbClr val="000000"/>
-              </a:buClr>
-              <a:buFont typeface="Symbol"/>
-              <a:buChar char=""/>
-              <a:tabLst>
-                <a:tab algn="l" pos="1886040"/>
-              </a:tabLst>
-            </a:pPr>
-            <a:r>
-              <a:rPr b="0" lang="en-US" sz="1200" spc="-1" strike="noStrike">
-                <a:solidFill>
-                  <a:srgbClr val="000000"/>
-                </a:solidFill>
-                <a:latin typeface="Arial"/>
-                <a:ea typeface="DejaVu Sans"/>
-              </a:rPr>
-              <a:t>CodeEU-616: Multistep tool freezes</a:t>
-            </a:r>
-            <a:endParaRPr b="0" lang="en-US" sz="1200" spc="-1" strike="noStrike">
-              <a:solidFill>
-                <a:srgbClr val="000000"/>
-              </a:solidFill>
-              <a:latin typeface="Arial"/>
-            </a:endParaRPr>
-          </a:p>
-          <a:p>
-            <a:pPr lvl="1" marL="800280" indent="-343080" defTabSz="914400">
-              <a:lnSpc>
-                <a:spcPct val="100000"/>
-              </a:lnSpc>
-              <a:spcBef>
-                <a:spcPts val="320"/>
-              </a:spcBef>
-              <a:buClr>
-                <a:srgbClr val="000000"/>
-              </a:buClr>
-              <a:buFont typeface="Symbol"/>
-              <a:buChar char=""/>
-              <a:tabLst>
-                <a:tab algn="l" pos="1886040"/>
-              </a:tabLst>
-            </a:pPr>
-            <a:r>
-              <a:rPr b="0" lang="en-US" sz="1200" spc="-1" strike="noStrike">
-                <a:solidFill>
-                  <a:srgbClr val="000000"/>
-                </a:solidFill>
-                <a:latin typeface="Arial"/>
-                <a:ea typeface="DejaVu Sans"/>
-              </a:rPr>
-              <a:t>CodeEU-619: restore wrong exempted techs in XSD for backwards compatibility</a:t>
-            </a:r>
-            <a:endParaRPr b="0" lang="en-US" sz="1200" spc="-1" strike="noStrike">
-              <a:solidFill>
-                <a:srgbClr val="000000"/>
-              </a:solidFill>
-              <a:latin typeface="Arial"/>
-            </a:endParaRPr>
-          </a:p>
-          <a:p>
-            <a:pPr lvl="1" marL="800280" indent="-343080" defTabSz="914400">
-              <a:lnSpc>
-                <a:spcPct val="100000"/>
-              </a:lnSpc>
-              <a:spcBef>
-                <a:spcPts val="320"/>
-              </a:spcBef>
-              <a:buClr>
-                <a:srgbClr val="000000"/>
-              </a:buClr>
-              <a:buFont typeface="Symbol"/>
-              <a:buChar char=""/>
-              <a:tabLst>
-                <a:tab algn="l" pos="1886040"/>
-              </a:tabLst>
-            </a:pPr>
-            <a:r>
-              <a:rPr b="0" lang="en-US" sz="1200" spc="-1" strike="noStrike">
-                <a:solidFill>
-                  <a:srgbClr val="000000"/>
-                </a:solidFill>
-                <a:latin typeface="Arial"/>
-                <a:ea typeface="DejaVu Sans"/>
-              </a:rPr>
-              <a:t>CodeEU-617: Results change depending the time format</a:t>
-            </a:r>
-            <a:endParaRPr b="0" lang="en-US" sz="1200" spc="-1" strike="noStrike">
-              <a:solidFill>
-                <a:srgbClr val="000000"/>
-              </a:solidFill>
-              <a:latin typeface="Arial"/>
-            </a:endParaRPr>
-          </a:p>
-          <a:p>
-            <a:pPr lvl="1" marL="800280" indent="-343080" defTabSz="914400">
-              <a:lnSpc>
-                <a:spcPct val="100000"/>
-              </a:lnSpc>
-              <a:spcBef>
-                <a:spcPts val="320"/>
-              </a:spcBef>
-              <a:buClr>
-                <a:srgbClr val="000000"/>
-              </a:buClr>
-              <a:buFont typeface="Symbol"/>
-              <a:buChar char=""/>
-              <a:tabLst>
-                <a:tab algn="l" pos="1886040"/>
-              </a:tabLst>
-            </a:pPr>
-            <a:r>
-              <a:rPr b="0" lang="en-US" sz="1200" spc="-1" strike="noStrike">
-                <a:solidFill>
-                  <a:srgbClr val="000000"/>
-                </a:solidFill>
-                <a:latin typeface="Arial"/>
-                <a:ea typeface="DejaVu Sans"/>
-              </a:rPr>
-              <a:t>CodeEU-635: Revert multiple summary in CIF</a:t>
+              <a:t>CodeEU-638: Incorrect construction payloads for group 9 non-vocational vehicle</a:t>
             </a:r>
             <a:endParaRPr b="0" lang="en-US" sz="1200" spc="-1" strike="noStrike">
               <a:solidFill>
@@ -16607,7 +17414,7 @@
         <p:spPr>
           <a:xfrm>
             <a:off x="468360" y="476640"/>
-            <a:ext cx="8212320" cy="675000"/>
+            <a:ext cx="8211240" cy="673920"/>
           </a:xfrm>
           <a:prstGeom prst="rect">
             <a:avLst/>
@@ -16639,7 +17446,7 @@
                 <a:latin typeface="Arial"/>
                 <a:ea typeface="DejaVu Sans"/>
               </a:rPr>
-              <a:t>Vecto 4.1.0.3392 RELEASE CANDIDATE</a:t>
+              <a:t>Vecto 4.1.1.3413 OFFICIAL RELEASE</a:t>
             </a:r>
             <a:br>
               <a:rPr sz="2400"/>
@@ -16652,7 +17459,7 @@
                 <a:latin typeface="Arial"/>
                 <a:ea typeface="DejaVu Sans"/>
               </a:rPr>
-              <a:t>15.04.2024</a:t>
+              <a:t>06.05.2024</a:t>
             </a:r>
             <a:endParaRPr b="0" lang="en-US" sz="1600" spc="-1" strike="noStrike">
               <a:solidFill>
@@ -16676,7 +17483,7 @@
         <p:spPr>
           <a:xfrm>
             <a:off x="323640" y="1639080"/>
-            <a:ext cx="8490960" cy="4447800"/>
+            <a:ext cx="8489880" cy="4446720"/>
           </a:xfrm>
           <a:prstGeom prst="rect">
             <a:avLst/>
@@ -16691,6 +17498,26 @@
             <a:noAutofit/>
           </a:bodyPr>
           <a:p>
+            <a:pPr marL="343080" indent="0" defTabSz="914400">
+              <a:lnSpc>
+                <a:spcPct val="100000"/>
+              </a:lnSpc>
+              <a:spcBef>
+                <a:spcPts val="320"/>
+              </a:spcBef>
+              <a:buNone/>
+              <a:tabLst>
+                <a:tab algn="l" pos="0"/>
+              </a:tabLst>
+            </a:pPr>
+            <a:endParaRPr b="0" lang="en-US" sz="1600" spc="-1" strike="noStrike">
+              <a:solidFill>
+                <a:srgbClr val="000000"/>
+              </a:solidFill>
+              <a:latin typeface="Arial"/>
+            </a:endParaRPr>
+          </a:p>
+          <a:p>
             <a:pPr marL="343080" indent="-343080" defTabSz="914400">
               <a:lnSpc>
                 <a:spcPct val="100000"/>
@@ -16715,50 +17542,17 @@
                 <a:latin typeface="Arial"/>
                 <a:ea typeface="DejaVu Sans"/>
               </a:rPr>
-              <a:t>Features</a:t>
-            </a:r>
-            <a:br>
-              <a:rPr sz="1600"/>
-            </a:br>
-            <a:r>
-              <a:rPr b="0" lang="en-US" sz="1200" spc="-1" strike="noStrike">
-                <a:solidFill>
-                  <a:schemeClr val="dk1"/>
-                </a:solidFill>
-                <a:latin typeface="Arial"/>
-                <a:ea typeface="DejaVu Sans"/>
-              </a:rPr>
-              <a:t>CodeEU-577: Add missing mission profiles to vocational and non-vocational</a:t>
-            </a:r>
-            <a:endParaRPr b="0" lang="en-US" sz="1200" spc="-1" strike="noStrike">
-              <a:solidFill>
-                <a:srgbClr val="000000"/>
-              </a:solidFill>
-              <a:latin typeface="Arial"/>
-            </a:endParaRPr>
-          </a:p>
-          <a:p>
-            <a:pPr marL="343080" indent="0" defTabSz="914400">
-              <a:lnSpc>
-                <a:spcPct val="100000"/>
-              </a:lnSpc>
-              <a:spcBef>
-                <a:spcPts val="320"/>
-              </a:spcBef>
-              <a:buNone/>
-              <a:tabLst>
-                <a:tab algn="l" pos="0"/>
-              </a:tabLst>
-            </a:pPr>
-            <a:endParaRPr b="0" lang="en-US" sz="1200" spc="-1" strike="noStrike">
-              <a:solidFill>
-                <a:srgbClr val="000000"/>
-              </a:solidFill>
-              <a:latin typeface="Arial"/>
-            </a:endParaRPr>
-          </a:p>
-          <a:p>
-            <a:pPr marL="343080" indent="-343080" defTabSz="914400">
+              <a:t>Bugfixes </a:t>
+            </a:r>
+            <a:endParaRPr b="0" lang="en-US" sz="1600" spc="-1" strike="noStrike">
+              <a:solidFill>
+                <a:srgbClr val="000000"/>
+              </a:solidFill>
+              <a:latin typeface="Arial"/>
+            </a:endParaRPr>
+          </a:p>
+          <a:p>
+            <a:pPr lvl="1" marL="800280" indent="-343080" defTabSz="914400">
               <a:lnSpc>
                 <a:spcPct val="100000"/>
               </a:lnSpc>
@@ -16775,16 +17569,16 @@
               </a:tabLst>
             </a:pPr>
             <a:r>
-              <a:rPr b="1" lang="en-US" sz="1600" spc="-1" strike="noStrike">
-                <a:solidFill>
-                  <a:srgbClr val="000000"/>
-                </a:solidFill>
-                <a:latin typeface="Arial"/>
-                <a:ea typeface="DejaVu Sans"/>
-              </a:rPr>
-              <a:t>Bugfixes (1/4)</a:t>
-            </a:r>
-            <a:endParaRPr b="0" lang="en-US" sz="1600" spc="-1" strike="noStrike">
+              <a:rPr b="0" lang="en-US" sz="1200" spc="-1" strike="noStrike">
+                <a:solidFill>
+                  <a:srgbClr val="000000"/>
+                </a:solidFill>
+                <a:latin typeface="Arial"/>
+                <a:ea typeface="DejaVu Sans"/>
+              </a:rPr>
+              <a:t>CodeEU-615: Multistep freezes after loading VIF chassis</a:t>
+            </a:r>
+            <a:endParaRPr b="0" lang="en-US" sz="1200" spc="-1" strike="noStrike">
               <a:solidFill>
                 <a:srgbClr val="000000"/>
               </a:solidFill>
@@ -16816,7 +17610,7 @@
                 <a:latin typeface="Arial"/>
                 <a:ea typeface="DejaVu Sans"/>
               </a:rPr>
-              <a:t>CodeEU-331: Gear 1 DrivingActionAccelerate: Fail</a:t>
+              <a:t>CodeEU-616: Multistep tool freezes</a:t>
             </a:r>
             <a:endParaRPr b="0" lang="en-US" sz="1200" spc="-1" strike="noStrike">
               <a:solidFill>
@@ -16850,7 +17644,7 @@
                 <a:latin typeface="Arial"/>
                 <a:ea typeface="DejaVu Sans"/>
               </a:rPr>
-              <a:t>CodeEU-367: Gear 1 DrivingActionAccelerate: Fail</a:t>
+              <a:t>CodeEU-619: restore wrong exempted techs in XSD for backwards compatibility</a:t>
             </a:r>
             <a:endParaRPr b="0" lang="en-US" sz="1200" spc="-1" strike="noStrike">
               <a:solidFill>
@@ -16884,7 +17678,7 @@
                 <a:latin typeface="Arial"/>
                 <a:ea typeface="DejaVu Sans"/>
               </a:rPr>
-              <a:t>CodeEU-372: ADT Error on Bus Category Primary Vehicle Simulation on VECTO</a:t>
+              <a:t>CodeEU-617: Results change depending the time format</a:t>
             </a:r>
             <a:endParaRPr b="0" lang="en-US" sz="1200" spc="-1" strike="noStrike">
               <a:solidFill>
@@ -16918,266 +17712,8 @@
                 <a:latin typeface="Arial"/>
                 <a:ea typeface="DejaVu Sans"/>
               </a:rPr>
-              <a:t>CodeEU-373: ADT Error on Bus Category Primary Vehicle Simulation on VECTO</a:t>
-            </a:r>
-            <a:endParaRPr b="0" lang="en-US" sz="1200" spc="-1" strike="noStrike">
-              <a:solidFill>
-                <a:srgbClr val="000000"/>
-              </a:solidFill>
-              <a:latin typeface="Arial"/>
-            </a:endParaRPr>
-          </a:p>
-          <a:p>
-            <a:pPr lvl="1" marL="800280" indent="-343080" defTabSz="914400">
-              <a:lnSpc>
-                <a:spcPct val="100000"/>
-              </a:lnSpc>
-              <a:spcBef>
-                <a:spcPts val="320"/>
-              </a:spcBef>
-              <a:buClr>
-                <a:srgbClr val="000000"/>
-              </a:buClr>
-              <a:buFont typeface="Symbol"/>
-              <a:buChar char=""/>
-              <a:tabLst>
-                <a:tab algn="l" pos="1886040"/>
-              </a:tabLst>
-            </a:pPr>
-            <a:r>
-              <a:rPr b="0" lang="en-US" sz="1200" spc="-1" strike="noStrike">
-                <a:solidFill>
-                  <a:srgbClr val="000000"/>
-                </a:solidFill>
-                <a:latin typeface="Arial"/>
-                <a:ea typeface="DejaVu Sans"/>
-              </a:rPr>
-              <a:t>CodeEU-374: ADT Error on Bus Category Primary Vehicle Simulation on VECTO</a:t>
-            </a:r>
-            <a:endParaRPr b="0" lang="en-US" sz="1200" spc="-1" strike="noStrike">
-              <a:solidFill>
-                <a:srgbClr val="000000"/>
-              </a:solidFill>
-              <a:latin typeface="Arial"/>
-            </a:endParaRPr>
-          </a:p>
-          <a:p>
-            <a:pPr lvl="1" marL="800280" indent="-343080" defTabSz="914400">
-              <a:lnSpc>
-                <a:spcPct val="100000"/>
-              </a:lnSpc>
-              <a:spcBef>
-                <a:spcPts val="320"/>
-              </a:spcBef>
-              <a:buClr>
-                <a:srgbClr val="000000"/>
-              </a:buClr>
-              <a:buFont typeface="Symbol"/>
-              <a:buChar char=""/>
-              <a:tabLst>
-                <a:tab algn="l" pos="1886040"/>
-              </a:tabLst>
-            </a:pPr>
-            <a:r>
-              <a:rPr b="0" lang="en-US" sz="1200" spc="-1" strike="noStrike">
-                <a:solidFill>
-                  <a:srgbClr val="000000"/>
-                </a:solidFill>
-                <a:latin typeface="Arial"/>
-                <a:ea typeface="DejaVu Sans"/>
-              </a:rPr>
-              <a:t>CodeEU-375: ADT Error on Bus Category Primary Vehicle Simulation on VECTO</a:t>
-            </a:r>
-            <a:endParaRPr b="0" lang="en-US" sz="1200" spc="-1" strike="noStrike">
-              <a:solidFill>
-                <a:srgbClr val="000000"/>
-              </a:solidFill>
-              <a:latin typeface="Arial"/>
-            </a:endParaRPr>
-          </a:p>
-          <a:p>
-            <a:pPr lvl="1" marL="800280" indent="-343080" defTabSz="914400">
-              <a:lnSpc>
-                <a:spcPct val="100000"/>
-              </a:lnSpc>
-              <a:spcBef>
-                <a:spcPts val="320"/>
-              </a:spcBef>
-              <a:buClr>
-                <a:srgbClr val="000000"/>
-              </a:buClr>
-              <a:buFont typeface="Symbol"/>
-              <a:buChar char=""/>
-              <a:tabLst>
-                <a:tab algn="l" pos="1886040"/>
-              </a:tabLst>
-            </a:pPr>
-            <a:r>
-              <a:rPr b="0" lang="en-US" sz="1200" spc="-1" strike="noStrike">
-                <a:solidFill>
-                  <a:srgbClr val="000000"/>
-                </a:solidFill>
-                <a:latin typeface="Arial"/>
-                <a:ea typeface="DejaVu Sans"/>
-              </a:rPr>
-              <a:t>CodeEU-393: Finished Run VEH-PrimaryBus_nonSmart Interurban _P32SD_ReferenceLoad with ERROR: 16</a:t>
-            </a:r>
-            <a:endParaRPr b="0" lang="en-US" sz="1200" spc="-1" strike="noStrike">
-              <a:solidFill>
-                <a:srgbClr val="000000"/>
-              </a:solidFill>
-              <a:latin typeface="Arial"/>
-            </a:endParaRPr>
-          </a:p>
-          <a:p>
-            <a:pPr lvl="1" marL="800280" indent="-343080" defTabSz="914400">
-              <a:lnSpc>
-                <a:spcPct val="100000"/>
-              </a:lnSpc>
-              <a:spcBef>
-                <a:spcPts val="320"/>
-              </a:spcBef>
-              <a:buClr>
-                <a:srgbClr val="000000"/>
-              </a:buClr>
-              <a:buFont typeface="Symbol"/>
-              <a:buChar char=""/>
-              <a:tabLst>
-                <a:tab algn="l" pos="1886040"/>
-              </a:tabLst>
-            </a:pPr>
-            <a:r>
-              <a:rPr b="0" lang="en-US" sz="1200" spc="-1" strike="noStrike">
-                <a:solidFill>
-                  <a:srgbClr val="000000"/>
-                </a:solidFill>
-                <a:latin typeface="Arial"/>
-                <a:ea typeface="DejaVu Sans"/>
-              </a:rPr>
-              <a:t>CodeEU-439: 615 (Interurban _P32DD_ReferenceLoad) - absTime: 7129.6359 [s], distance: 53875.9765 [m], dt: 0.6388 [s], v: 0.5098 [m/s], Gear: 1 | DrivingActionAccelerate: Failed</a:t>
-            </a:r>
-            <a:endParaRPr b="0" lang="en-US" sz="1200" spc="-1" strike="noStrike">
-              <a:solidFill>
-                <a:srgbClr val="000000"/>
-              </a:solidFill>
-              <a:latin typeface="Arial"/>
-            </a:endParaRPr>
-          </a:p>
-          <a:p>
-            <a:pPr lvl="1" marL="800280" indent="-343080" defTabSz="914400">
-              <a:lnSpc>
-                <a:spcPct val="100000"/>
-              </a:lnSpc>
-              <a:spcBef>
-                <a:spcPts val="320"/>
-              </a:spcBef>
-              <a:buClr>
-                <a:srgbClr val="000000"/>
-              </a:buClr>
-              <a:buFont typeface="Symbol"/>
-              <a:buChar char=""/>
-              <a:tabLst>
-                <a:tab algn="l" pos="1886040"/>
-              </a:tabLst>
-            </a:pPr>
-            <a:r>
-              <a:rPr b="0" lang="en-US" sz="1200" spc="-1" strike="noStrike">
-                <a:solidFill>
-                  <a:srgbClr val="000000"/>
-                </a:solidFill>
-                <a:latin typeface="Arial"/>
-                <a:ea typeface="DejaVu Sans"/>
-              </a:rPr>
-              <a:t>CodeEU-446: Finished Run VEH-PrimaryBus_nonSmart Interurban _P32SD_ReferenceLoad with ERROR: 16</a:t>
-            </a:r>
-            <a:endParaRPr b="0" lang="en-US" sz="1200" spc="-1" strike="noStrike">
-              <a:solidFill>
-                <a:srgbClr val="000000"/>
-              </a:solidFill>
-              <a:latin typeface="Arial"/>
-            </a:endParaRPr>
-          </a:p>
-          <a:p>
-            <a:pPr lvl="1" marL="800280" indent="-343080" defTabSz="914400">
-              <a:lnSpc>
-                <a:spcPct val="100000"/>
-              </a:lnSpc>
-              <a:spcBef>
-                <a:spcPts val="320"/>
-              </a:spcBef>
-              <a:buClr>
-                <a:srgbClr val="000000"/>
-              </a:buClr>
-              <a:buFont typeface="Symbol"/>
-              <a:buChar char=""/>
-              <a:tabLst>
-                <a:tab algn="l" pos="1886040"/>
-              </a:tabLst>
-            </a:pPr>
-            <a:r>
-              <a:rPr b="0" lang="en-US" sz="1200" spc="-1" strike="noStrike">
-                <a:solidFill>
-                  <a:srgbClr val="000000"/>
-                </a:solidFill>
-                <a:latin typeface="Arial"/>
-                <a:ea typeface="DejaVu Sans"/>
-              </a:rPr>
-              <a:t>CodeEU-449: Finished Run VEH-PrimaryBus_nonSmart Interurban _P32SD_ReferenceLoad with ERROR: 16</a:t>
-            </a:r>
-            <a:endParaRPr b="0" lang="en-US" sz="1200" spc="-1" strike="noStrike">
-              <a:solidFill>
-                <a:srgbClr val="000000"/>
-              </a:solidFill>
-              <a:latin typeface="Arial"/>
-            </a:endParaRPr>
-          </a:p>
-          <a:p>
-            <a:pPr lvl="1" marL="800280" indent="-343080" defTabSz="914400">
-              <a:lnSpc>
-                <a:spcPct val="100000"/>
-              </a:lnSpc>
-              <a:spcBef>
-                <a:spcPts val="320"/>
-              </a:spcBef>
-              <a:buClr>
-                <a:srgbClr val="000000"/>
-              </a:buClr>
-              <a:buFont typeface="Symbol"/>
-              <a:buChar char=""/>
-              <a:tabLst>
-                <a:tab algn="l" pos="1886040"/>
-              </a:tabLst>
-            </a:pPr>
-            <a:r>
-              <a:rPr b="0" lang="en-US" sz="1200" spc="-1" strike="noStrike">
-                <a:solidFill>
-                  <a:srgbClr val="000000"/>
-                </a:solidFill>
-                <a:latin typeface="Arial"/>
-                <a:ea typeface="DejaVu Sans"/>
-              </a:rPr>
-              <a:t>CodeEU-478: Finished Run VEH-PrimaryBus_nonSmart Urban _P31SD_ReferenceLoad with ERROR: 4 (Urban _P31SD_ReferenceLoad) - absTime: 8606.6241 [s], distance: 39112.5127 [m], dt: 1.1131 [s], v: 0.1833 [m/s], Gear: 1 | DrivingActionAccelerate: Failed to find operating poi</a:t>
-            </a:r>
-            <a:endParaRPr b="0" lang="en-US" sz="1200" spc="-1" strike="noStrike">
-              <a:solidFill>
-                <a:srgbClr val="000000"/>
-              </a:solidFill>
-              <a:latin typeface="Arial"/>
-            </a:endParaRPr>
-          </a:p>
-          <a:p>
-            <a:pPr marL="800280" indent="0" defTabSz="914400">
-              <a:lnSpc>
-                <a:spcPct val="100000"/>
-              </a:lnSpc>
-              <a:spcBef>
-                <a:spcPts val="320"/>
-              </a:spcBef>
-              <a:buNone/>
-              <a:tabLst>
-                <a:tab algn="l" pos="0"/>
-              </a:tabLst>
-            </a:pPr>
+              <a:t>CodeEU-635: Revert multiple summary in CIF</a:t>
+            </a:r>
             <a:endParaRPr b="0" lang="en-US" sz="1200" spc="-1" strike="noStrike">
               <a:solidFill>
                 <a:srgbClr val="000000"/>
@@ -17230,7 +17766,7 @@
         <p:spPr>
           <a:xfrm>
             <a:off x="468360" y="476640"/>
-            <a:ext cx="8212320" cy="675000"/>
+            <a:ext cx="8211240" cy="673920"/>
           </a:xfrm>
           <a:prstGeom prst="rect">
             <a:avLst/>
@@ -17298,8 +17834,8 @@
         </p:nvSpPr>
         <p:spPr>
           <a:xfrm>
-            <a:off x="323640" y="1459080"/>
-            <a:ext cx="8490960" cy="4655880"/>
+            <a:off x="323640" y="1639080"/>
+            <a:ext cx="8489880" cy="4446720"/>
           </a:xfrm>
           <a:prstGeom prst="rect">
             <a:avLst/>
@@ -17314,26 +17850,6 @@
             <a:noAutofit/>
           </a:bodyPr>
           <a:p>
-            <a:pPr marL="343080" indent="0" defTabSz="914400">
-              <a:lnSpc>
-                <a:spcPct val="100000"/>
-              </a:lnSpc>
-              <a:spcBef>
-                <a:spcPts val="320"/>
-              </a:spcBef>
-              <a:buNone/>
-              <a:tabLst>
-                <a:tab algn="l" pos="0"/>
-              </a:tabLst>
-            </a:pPr>
-            <a:endParaRPr b="0" lang="en-US" sz="1600" spc="-1" strike="noStrike">
-              <a:solidFill>
-                <a:srgbClr val="000000"/>
-              </a:solidFill>
-              <a:latin typeface="Arial"/>
-            </a:endParaRPr>
-          </a:p>
-          <a:p>
             <a:pPr marL="343080" indent="-343080" defTabSz="914400">
               <a:lnSpc>
                 <a:spcPct val="100000"/>
@@ -17358,17 +17874,50 @@
                 <a:latin typeface="Arial"/>
                 <a:ea typeface="DejaVu Sans"/>
               </a:rPr>
-              <a:t>Bugfixes (2/4)</a:t>
-            </a:r>
-            <a:endParaRPr b="0" lang="en-US" sz="1600" spc="-1" strike="noStrike">
-              <a:solidFill>
-                <a:srgbClr val="000000"/>
-              </a:solidFill>
-              <a:latin typeface="Arial"/>
-            </a:endParaRPr>
-          </a:p>
-          <a:p>
-            <a:pPr lvl="1" marL="800280" indent="-343080" defTabSz="914400">
+              <a:t>Features</a:t>
+            </a:r>
+            <a:br>
+              <a:rPr sz="1600"/>
+            </a:br>
+            <a:r>
+              <a:rPr b="0" lang="en-US" sz="1200" spc="-1" strike="noStrike">
+                <a:solidFill>
+                  <a:schemeClr val="dk1"/>
+                </a:solidFill>
+                <a:latin typeface="Arial"/>
+                <a:ea typeface="DejaVu Sans"/>
+              </a:rPr>
+              <a:t>CodeEU-577: Add missing mission profiles to vocational and non-vocational</a:t>
+            </a:r>
+            <a:endParaRPr b="0" lang="en-US" sz="1200" spc="-1" strike="noStrike">
+              <a:solidFill>
+                <a:srgbClr val="000000"/>
+              </a:solidFill>
+              <a:latin typeface="Arial"/>
+            </a:endParaRPr>
+          </a:p>
+          <a:p>
+            <a:pPr marL="343080" indent="0" defTabSz="914400">
+              <a:lnSpc>
+                <a:spcPct val="100000"/>
+              </a:lnSpc>
+              <a:spcBef>
+                <a:spcPts val="320"/>
+              </a:spcBef>
+              <a:buNone/>
+              <a:tabLst>
+                <a:tab algn="l" pos="0"/>
+              </a:tabLst>
+            </a:pPr>
+            <a:endParaRPr b="0" lang="en-US" sz="1200" spc="-1" strike="noStrike">
+              <a:solidFill>
+                <a:srgbClr val="000000"/>
+              </a:solidFill>
+              <a:latin typeface="Arial"/>
+            </a:endParaRPr>
+          </a:p>
+          <a:p>
+            <a:pPr marL="343080" indent="-343080" defTabSz="914400">
               <a:lnSpc>
                 <a:spcPct val="100000"/>
               </a:lnSpc>
@@ -17385,16 +17934,16 @@
               </a:tabLst>
             </a:pPr>
             <a:r>
-              <a:rPr b="0" lang="en-US" sz="1200" spc="-1" strike="noStrike">
-                <a:solidFill>
-                  <a:srgbClr val="000000"/>
-                </a:solidFill>
-                <a:latin typeface="Arial"/>
-                <a:ea typeface="DejaVu Sans"/>
-              </a:rPr>
-              <a:t>CodeEU-481: Finished Run VEH-PrimaryBus_nonSmart Urban _P31SD_ReferenceLoad with ERROR: 4 (Urban _P31SD_ReferenceLoad) - absTime: 8606.6241 [s], distance: 39112.5127 [m], dt: 1.1131 [s], v: 0.1833 [m/s], Gear: 1 |</a:t>
-            </a:r>
-            <a:endParaRPr b="0" lang="en-US" sz="1200" spc="-1" strike="noStrike">
+              <a:rPr b="1" lang="en-US" sz="1600" spc="-1" strike="noStrike">
+                <a:solidFill>
+                  <a:srgbClr val="000000"/>
+                </a:solidFill>
+                <a:latin typeface="Arial"/>
+                <a:ea typeface="DejaVu Sans"/>
+              </a:rPr>
+              <a:t>Bugfixes (1/4)</a:t>
+            </a:r>
+            <a:endParaRPr b="0" lang="en-US" sz="1600" spc="-1" strike="noStrike">
               <a:solidFill>
                 <a:srgbClr val="000000"/>
               </a:solidFill>
@@ -17426,7 +17975,7 @@
                 <a:latin typeface="Arial"/>
                 <a:ea typeface="DejaVu Sans"/>
               </a:rPr>
-              <a:t>CodeEU-488: Finished Run VEH-PrimaryBus_nonSmart Urban _P31SD_ReferenceLoad with ERROR: 4 (Urban _P31SD_ReferenceLoad) - absTime: 8606.6241 [s], distance: 39112.5127 [m], dt: 1.1131 [s], v: 0.1833 [m/s], Gear: 1 | DrivingActionAccelerate: Failed to find operating poi</a:t>
+              <a:t>CodeEU-331: Gear 1 DrivingActionAccelerate: Fail</a:t>
             </a:r>
             <a:endParaRPr b="0" lang="en-US" sz="1200" spc="-1" strike="noStrike">
               <a:solidFill>
@@ -17460,7 +18009,7 @@
                 <a:latin typeface="Arial"/>
                 <a:ea typeface="DejaVu Sans"/>
               </a:rPr>
-              <a:t>CodeEU-494: Finished Run VEH-PrimaryBus_nonSmart Urban _P31SD_ReferenceLoad with ERROR: 26 (Urban _P31SD_ReferenceLoad) - absTime: 8606.6241 [s], distance: 39112.5127 [m], dt: 1.1131 [s], v: 0.1833 [m/s], Gear: 1 | DrivingActionAccelerate: Failed to fi</a:t>
+              <a:t>CodeEU-367: Gear 1 DrivingActionAccelerate: Fail</a:t>
             </a:r>
             <a:endParaRPr b="0" lang="en-US" sz="1200" spc="-1" strike="noStrike">
               <a:solidFill>
@@ -17494,7 +18043,7 @@
                 <a:latin typeface="Arial"/>
                 <a:ea typeface="DejaVu Sans"/>
               </a:rPr>
-              <a:t>CodeEU-420: Finished Run VEH-PrimaryBus_nonSmart Interurban _P32SD_ReferenceLoad with ERROR: 16</a:t>
+              <a:t>CodeEU-372: ADT Error on Bus Category Primary Vehicle Simulation on VECTO</a:t>
             </a:r>
             <a:endParaRPr b="0" lang="en-US" sz="1200" spc="-1" strike="noStrike">
               <a:solidFill>
@@ -17528,7 +18077,7 @@
                 <a:latin typeface="Arial"/>
                 <a:ea typeface="DejaVu Sans"/>
               </a:rPr>
-              <a:t>CodeEU-573: Unhandled powertrain architecture Conventional Vehicle to calculate gradability</a:t>
+              <a:t>CodeEU-373: ADT Error on Bus Category Primary Vehicle Simulation on VECTO</a:t>
             </a:r>
             <a:endParaRPr b="0" lang="en-US" sz="1200" spc="-1" strike="noStrike">
               <a:solidFill>
@@ -17562,7 +18111,7 @@
                 <a:latin typeface="Arial"/>
                 <a:ea typeface="DejaVu Sans"/>
               </a:rPr>
-              <a:t>CodeEU-582: unhandled powertrain architecture ConventionalVehicle to calculate gradability, 11:44:36.63,</a:t>
+              <a:t>CodeEU-374: ADT Error on Bus Category Primary Vehicle Simulation on VECTO</a:t>
             </a:r>
             <a:endParaRPr b="0" lang="en-US" sz="1200" spc="-1" strike="noStrike">
               <a:solidFill>
@@ -17596,7 +18145,7 @@
                 <a:latin typeface="Arial"/>
                 <a:ea typeface="DejaVu Sans"/>
               </a:rPr>
-              <a:t>CodeEU-595: Inconsistency exempted vehicles "Fuel cell vehicle" vs. "FCV Article 9 exempted"</a:t>
+              <a:t>CodeEU-375: ADT Error on Bus Category Primary Vehicle Simulation on VECTO</a:t>
             </a:r>
             <a:endParaRPr b="0" lang="en-US" sz="1200" spc="-1" strike="noStrike">
               <a:solidFill>
@@ -17630,7 +18179,7 @@
                 <a:latin typeface="Arial"/>
                 <a:ea typeface="DejaVu Sans"/>
               </a:rPr>
-              <a:t>CodeEU-501: Help regarding VTP vdri format is not up to date in v4</a:t>
+              <a:t>CodeEU-393: Finished Run VEH-PrimaryBus_nonSmart Interurban _P32SD_ReferenceLoad with ERROR: 16</a:t>
             </a:r>
             <a:endParaRPr b="0" lang="en-US" sz="1200" spc="-1" strike="noStrike">
               <a:solidFill>
@@ -17664,7 +18213,7 @@
                 <a:latin typeface="Arial"/>
                 <a:ea typeface="DejaVu Sans"/>
               </a:rPr>
-              <a:t>CodeEU-594: inadequate validation for auxiliaries in completed vehicle XML</a:t>
+              <a:t>CodeEU-439: 615 (Interurban _P32DD_ReferenceLoad) - absTime: 7129.6359 [s], distance: 53875.9765 [m], dt: 0.6388 [s], v: 0.5098 [m/s], Gear: 1 | DrivingActionAccelerate: Failed</a:t>
             </a:r>
             <a:endParaRPr b="0" lang="en-US" sz="1200" spc="-1" strike="noStrike">
               <a:solidFill>
@@ -17698,7 +18247,7 @@
                 <a:latin typeface="Arial"/>
                 <a:ea typeface="DejaVu Sans"/>
               </a:rPr>
-              <a:t>CodeEU-580: Potential error in XML schema v2.4 (exempted vehicles)</a:t>
+              <a:t>CodeEU-446: Finished Run VEH-PrimaryBus_nonSmart Interurban _P32SD_ReferenceLoad with ERROR: 16</a:t>
             </a:r>
             <a:endParaRPr b="0" lang="en-US" sz="1200" spc="-1" strike="noStrike">
               <a:solidFill>
@@ -17732,7 +18281,7 @@
                 <a:latin typeface="Arial"/>
                 <a:ea typeface="DejaVu Sans"/>
               </a:rPr>
-              <a:t>CodeEU-551: Article-10-2 XLRASF5E00G419905</a:t>
+              <a:t>CodeEU-449: Finished Run VEH-PrimaryBus_nonSmart Interurban _P32SD_ReferenceLoad with ERROR: 16</a:t>
             </a:r>
             <a:endParaRPr b="0" lang="en-US" sz="1200" spc="-1" strike="noStrike">
               <a:solidFill>
@@ -17766,7 +18315,7 @@
                 <a:latin typeface="Arial"/>
                 <a:ea typeface="DejaVu Sans"/>
               </a:rPr>
-              <a:t>CodeEU-547: Max ICE Off timespan for buses</a:t>
+              <a:t>CodeEU-478: Finished Run VEH-PrimaryBus_nonSmart Urban _P31SD_ReferenceLoad with ERROR: 4 (Urban _P31SD_ReferenceLoad) - absTime: 8606.6241 [s], distance: 39112.5127 [m], dt: 1.1131 [s], v: 0.1833 [m/s], Gear: 1 | DrivingActionAccelerate: Failed to find operating poi</a:t>
             </a:r>
             <a:endParaRPr b="0" lang="en-US" sz="1200" spc="-1" strike="noStrike">
               <a:solidFill>
@@ -17776,32 +18325,18 @@
             </a:endParaRPr>
           </a:p>
           <a:p>
-            <a:pPr lvl="1" marL="800280" indent="-343080" defTabSz="914400">
+            <a:pPr marL="800280" indent="0" defTabSz="914400">
               <a:lnSpc>
                 <a:spcPct val="100000"/>
               </a:lnSpc>
               <a:spcBef>
                 <a:spcPts val="320"/>
               </a:spcBef>
-              <a:buClr>
-                <a:srgbClr val="000000"/>
-              </a:buClr>
-              <a:buFont typeface="Symbol"/>
-              <a:buChar char=""/>
-              <a:tabLst>
-                <a:tab algn="l" pos="1886040"/>
-              </a:tabLst>
-            </a:pPr>
-            <a:r>
-              <a:rPr b="0" lang="en-US" sz="1200" spc="-1" strike="noStrike">
-                <a:solidFill>
-                  <a:srgbClr val="000000"/>
-                </a:solidFill>
-                <a:latin typeface="Arial"/>
-                <a:ea typeface="DejaVu Sans"/>
-              </a:rPr>
-              <a:t>CodeEU-583: Incorrect internal resistance for SuperCap used in factor method</a:t>
-            </a:r>
+              <a:buNone/>
+              <a:tabLst>
+                <a:tab algn="l" pos="0"/>
+              </a:tabLst>
+            </a:pPr>
             <a:endParaRPr b="0" lang="en-US" sz="1200" spc="-1" strike="noStrike">
               <a:solidFill>
                 <a:srgbClr val="000000"/>

--- a/Documentation/User Manual Source/Release Notes Vecto4.x.pptx
+++ b/Documentation/User Manual Source/Release Notes Vecto4.x.pptx
@@ -35,6 +35,7 @@
     <p:sldId id="277" r:id="rId30"/>
     <p:sldId id="278" r:id="rId31"/>
     <p:sldId id="279" r:id="rId32"/>
+    <p:sldId id="280" r:id="rId33"/>
   </p:sldIdLst>
   <p:sldSz cx="9144000" cy="6858000"/>
   <p:notesSz cx="7559675" cy="10691813"/>
@@ -116,7 +117,7 @@
         <p:txBody>
           <a:bodyPr/>
           <a:p>
-            <a:fld id="{73C07972-B2CA-4E9B-9D2D-7BC413281780}" type="slidenum">
+            <a:fld id="{F5B43A44-7AC0-4D1A-8D24-F1F355A7A0D7}" type="slidenum">
               <a:t>&lt;#&gt;</a:t>
             </a:fld>
           </a:p>
@@ -290,7 +291,7 @@
         <p:spPr>
           <a:xfrm>
             <a:off x="7996320" y="6599160"/>
-            <a:ext cx="918360" cy="242280"/>
+            <a:ext cx="918000" cy="242280"/>
           </a:xfrm>
           <a:prstGeom prst="rect">
             <a:avLst/>
@@ -319,7 +320,7 @@
                 <a:spcPts val="499"/>
               </a:spcBef>
             </a:pPr>
-            <a:fld id="{1225AA85-981A-4C49-BB6B-E28E60EF6630}" type="slidenum">
+            <a:fld id="{B09BCB07-6CA4-4DCB-99A1-7C50967375FC}" type="slidenum">
               <a:rPr b="1" lang="de-AT" sz="1000" spc="-1" strike="noStrike">
                 <a:solidFill>
                   <a:srgbClr val="7d7d7d"/>
@@ -347,7 +348,7 @@
         <p:spPr>
           <a:xfrm>
             <a:off x="144360" y="6627960"/>
-            <a:ext cx="1875600" cy="208800"/>
+            <a:ext cx="1875240" cy="208440"/>
           </a:xfrm>
           <a:prstGeom prst="rect">
             <a:avLst/>
@@ -408,7 +409,7 @@
         <p:spPr>
           <a:xfrm>
             <a:off x="7389360" y="37800"/>
-            <a:ext cx="1414080" cy="345600"/>
+            <a:ext cx="1413720" cy="345240"/>
           </a:xfrm>
           <a:prstGeom prst="rect">
             <a:avLst/>
@@ -431,7 +432,7 @@
         <p:spPr>
           <a:xfrm>
             <a:off x="107640" y="58680"/>
-            <a:ext cx="971280" cy="325080"/>
+            <a:ext cx="970920" cy="324720"/>
           </a:xfrm>
           <a:prstGeom prst="rect">
             <a:avLst/>
@@ -841,7 +842,7 @@
         <p:spPr>
           <a:xfrm>
             <a:off x="7996320" y="6599160"/>
-            <a:ext cx="918360" cy="242280"/>
+            <a:ext cx="918000" cy="242280"/>
           </a:xfrm>
           <a:prstGeom prst="rect">
             <a:avLst/>
@@ -870,7 +871,7 @@
                 <a:spcPts val="499"/>
               </a:spcBef>
             </a:pPr>
-            <a:fld id="{69389303-FD2F-4320-B55F-B6D5EDC4622A}" type="slidenum">
+            <a:fld id="{E07868BC-FE73-4060-861B-D7D25CF2981A}" type="slidenum">
               <a:rPr b="1" lang="de-AT" sz="1000" spc="-1" strike="noStrike">
                 <a:solidFill>
                   <a:srgbClr val="7d7d7d"/>
@@ -898,7 +899,7 @@
         <p:spPr>
           <a:xfrm>
             <a:off x="144360" y="6627960"/>
-            <a:ext cx="1875600" cy="208800"/>
+            <a:ext cx="1875240" cy="208440"/>
           </a:xfrm>
           <a:prstGeom prst="rect">
             <a:avLst/>
@@ -959,7 +960,7 @@
         <p:spPr>
           <a:xfrm>
             <a:off x="7389360" y="37800"/>
-            <a:ext cx="1414080" cy="345600"/>
+            <a:ext cx="1413720" cy="345240"/>
           </a:xfrm>
           <a:prstGeom prst="rect">
             <a:avLst/>
@@ -982,7 +983,7 @@
         <p:spPr>
           <a:xfrm>
             <a:off x="107640" y="58680"/>
-            <a:ext cx="971280" cy="325080"/>
+            <a:ext cx="970920" cy="324720"/>
           </a:xfrm>
           <a:prstGeom prst="rect">
             <a:avLst/>
@@ -1392,7 +1393,7 @@
         <p:spPr>
           <a:xfrm>
             <a:off x="7996320" y="6599160"/>
-            <a:ext cx="918360" cy="242280"/>
+            <a:ext cx="918000" cy="242280"/>
           </a:xfrm>
           <a:prstGeom prst="rect">
             <a:avLst/>
@@ -1421,7 +1422,7 @@
                 <a:spcPts val="499"/>
               </a:spcBef>
             </a:pPr>
-            <a:fld id="{4F19DA7D-5CF6-4008-88A9-8A4599B29E02}" type="slidenum">
+            <a:fld id="{FD93929F-2757-4BF8-B44A-B6741818C562}" type="slidenum">
               <a:rPr b="1" lang="de-AT" sz="1000" spc="-1" strike="noStrike">
                 <a:solidFill>
                   <a:srgbClr val="7d7d7d"/>
@@ -1449,7 +1450,7 @@
         <p:spPr>
           <a:xfrm>
             <a:off x="144360" y="6627960"/>
-            <a:ext cx="1875600" cy="208800"/>
+            <a:ext cx="1875240" cy="208440"/>
           </a:xfrm>
           <a:prstGeom prst="rect">
             <a:avLst/>
@@ -1510,7 +1511,7 @@
         <p:spPr>
           <a:xfrm>
             <a:off x="7389360" y="37800"/>
-            <a:ext cx="1414080" cy="345600"/>
+            <a:ext cx="1413720" cy="345240"/>
           </a:xfrm>
           <a:prstGeom prst="rect">
             <a:avLst/>
@@ -1533,7 +1534,7 @@
         <p:spPr>
           <a:xfrm>
             <a:off x="107640" y="58680"/>
-            <a:ext cx="971280" cy="325080"/>
+            <a:ext cx="970920" cy="324720"/>
           </a:xfrm>
           <a:prstGeom prst="rect">
             <a:avLst/>
@@ -1639,7 +1640,7 @@
                 <a:tab algn="l" pos="0"/>
               </a:tabLst>
             </a:pPr>
-            <a:fld id="{EC5E592D-DD52-4C41-898B-E3DA2EE4EE62}" type="slidenum">
+            <a:fld id="{BC6FCFC4-74FE-474A-9B7F-C6BB956A4A02}" type="slidenum">
               <a:rPr b="0" lang="en-GB" sz="1400" spc="-1" strike="noStrike">
                 <a:solidFill>
                   <a:srgbClr val="000000"/>
@@ -2015,7 +2016,7 @@
         <p:spPr>
           <a:xfrm>
             <a:off x="7996320" y="6599160"/>
-            <a:ext cx="918360" cy="242280"/>
+            <a:ext cx="918000" cy="242280"/>
           </a:xfrm>
           <a:prstGeom prst="rect">
             <a:avLst/>
@@ -2044,7 +2045,7 @@
                 <a:spcPts val="499"/>
               </a:spcBef>
             </a:pPr>
-            <a:fld id="{83C329BE-18F8-44F3-8608-3C1A19AC10C8}" type="slidenum">
+            <a:fld id="{B0B8B461-286D-4913-B8A1-2684A0E14A6E}" type="slidenum">
               <a:rPr b="1" lang="de-AT" sz="1000" spc="-1" strike="noStrike">
                 <a:solidFill>
                   <a:srgbClr val="7d7d7d"/>
@@ -2072,7 +2073,7 @@
         <p:spPr>
           <a:xfrm>
             <a:off x="144360" y="6627960"/>
-            <a:ext cx="1875600" cy="208800"/>
+            <a:ext cx="1875240" cy="208440"/>
           </a:xfrm>
           <a:prstGeom prst="rect">
             <a:avLst/>
@@ -2133,7 +2134,7 @@
         <p:spPr>
           <a:xfrm>
             <a:off x="7389360" y="37800"/>
-            <a:ext cx="1414080" cy="345600"/>
+            <a:ext cx="1413720" cy="345240"/>
           </a:xfrm>
           <a:prstGeom prst="rect">
             <a:avLst/>
@@ -2156,7 +2157,7 @@
         <p:spPr>
           <a:xfrm>
             <a:off x="107640" y="58680"/>
-            <a:ext cx="971280" cy="325080"/>
+            <a:ext cx="970920" cy="324720"/>
           </a:xfrm>
           <a:prstGeom prst="rect">
             <a:avLst/>
@@ -2566,7 +2567,7 @@
         <p:spPr>
           <a:xfrm>
             <a:off x="7996320" y="6599160"/>
-            <a:ext cx="918360" cy="242280"/>
+            <a:ext cx="918000" cy="242280"/>
           </a:xfrm>
           <a:prstGeom prst="rect">
             <a:avLst/>
@@ -2595,7 +2596,7 @@
                 <a:spcPts val="499"/>
               </a:spcBef>
             </a:pPr>
-            <a:fld id="{64514520-679C-49A2-A313-C183513503BB}" type="slidenum">
+            <a:fld id="{1AF62546-3FF0-4FCB-841D-F738BF1DC73E}" type="slidenum">
               <a:rPr b="1" lang="de-AT" sz="1000" spc="-1" strike="noStrike">
                 <a:solidFill>
                   <a:srgbClr val="7d7d7d"/>
@@ -2623,7 +2624,7 @@
         <p:spPr>
           <a:xfrm>
             <a:off x="144360" y="6627960"/>
-            <a:ext cx="1875600" cy="208800"/>
+            <a:ext cx="1875240" cy="208440"/>
           </a:xfrm>
           <a:prstGeom prst="rect">
             <a:avLst/>
@@ -2684,7 +2685,7 @@
         <p:spPr>
           <a:xfrm>
             <a:off x="7389360" y="37800"/>
-            <a:ext cx="1414080" cy="345600"/>
+            <a:ext cx="1413720" cy="345240"/>
           </a:xfrm>
           <a:prstGeom prst="rect">
             <a:avLst/>
@@ -2707,7 +2708,7 @@
         <p:spPr>
           <a:xfrm>
             <a:off x="107640" y="58680"/>
-            <a:ext cx="971280" cy="325080"/>
+            <a:ext cx="970920" cy="324720"/>
           </a:xfrm>
           <a:prstGeom prst="rect">
             <a:avLst/>
@@ -3117,7 +3118,7 @@
         <p:spPr>
           <a:xfrm>
             <a:off x="7996320" y="6599160"/>
-            <a:ext cx="918360" cy="242280"/>
+            <a:ext cx="918000" cy="242280"/>
           </a:xfrm>
           <a:prstGeom prst="rect">
             <a:avLst/>
@@ -3146,7 +3147,7 @@
                 <a:spcPts val="499"/>
               </a:spcBef>
             </a:pPr>
-            <a:fld id="{0637BEF0-02E6-4AC9-9B18-F81FC588D525}" type="slidenum">
+            <a:fld id="{2D35608C-EF5C-4E09-A0B2-054FE90EF349}" type="slidenum">
               <a:rPr b="1" lang="de-AT" sz="1000" spc="-1" strike="noStrike">
                 <a:solidFill>
                   <a:srgbClr val="7d7d7d"/>
@@ -3174,7 +3175,7 @@
         <p:spPr>
           <a:xfrm>
             <a:off x="144360" y="6627960"/>
-            <a:ext cx="1875600" cy="208800"/>
+            <a:ext cx="1875240" cy="208440"/>
           </a:xfrm>
           <a:prstGeom prst="rect">
             <a:avLst/>
@@ -3235,7 +3236,7 @@
         <p:spPr>
           <a:xfrm>
             <a:off x="7389360" y="37800"/>
-            <a:ext cx="1414080" cy="345600"/>
+            <a:ext cx="1413720" cy="345240"/>
           </a:xfrm>
           <a:prstGeom prst="rect">
             <a:avLst/>
@@ -3258,7 +3259,7 @@
         <p:spPr>
           <a:xfrm>
             <a:off x="107640" y="58680"/>
-            <a:ext cx="971280" cy="325080"/>
+            <a:ext cx="970920" cy="324720"/>
           </a:xfrm>
           <a:prstGeom prst="rect">
             <a:avLst/>
@@ -3668,7 +3669,7 @@
         <p:spPr>
           <a:xfrm>
             <a:off x="7996320" y="6599160"/>
-            <a:ext cx="918360" cy="242280"/>
+            <a:ext cx="918000" cy="242280"/>
           </a:xfrm>
           <a:prstGeom prst="rect">
             <a:avLst/>
@@ -3697,7 +3698,7 @@
                 <a:spcPts val="499"/>
               </a:spcBef>
             </a:pPr>
-            <a:fld id="{34D88BE8-8B30-42A1-AA5C-4293B1677E40}" type="slidenum">
+            <a:fld id="{CECD0170-F99E-488E-A9F4-DD285341D950}" type="slidenum">
               <a:rPr b="1" lang="de-AT" sz="1000" spc="-1" strike="noStrike">
                 <a:solidFill>
                   <a:srgbClr val="7d7d7d"/>
@@ -3725,7 +3726,7 @@
         <p:spPr>
           <a:xfrm>
             <a:off x="144360" y="6627960"/>
-            <a:ext cx="1875600" cy="208800"/>
+            <a:ext cx="1875240" cy="208440"/>
           </a:xfrm>
           <a:prstGeom prst="rect">
             <a:avLst/>
@@ -3786,7 +3787,7 @@
         <p:spPr>
           <a:xfrm>
             <a:off x="7389360" y="37800"/>
-            <a:ext cx="1414080" cy="345600"/>
+            <a:ext cx="1413720" cy="345240"/>
           </a:xfrm>
           <a:prstGeom prst="rect">
             <a:avLst/>
@@ -3809,7 +3810,7 @@
         <p:spPr>
           <a:xfrm>
             <a:off x="107640" y="58680"/>
-            <a:ext cx="971280" cy="325080"/>
+            <a:ext cx="970920" cy="324720"/>
           </a:xfrm>
           <a:prstGeom prst="rect">
             <a:avLst/>
@@ -4170,7 +4171,7 @@
         <p:spPr>
           <a:xfrm>
             <a:off x="539640" y="1052640"/>
-            <a:ext cx="8129160" cy="3945600"/>
+            <a:ext cx="8128800" cy="3945600"/>
           </a:xfrm>
           <a:prstGeom prst="rect">
             <a:avLst/>
@@ -4353,7 +4354,7 @@
         <p:spPr>
           <a:xfrm>
             <a:off x="2483640" y="2421000"/>
-            <a:ext cx="4169160" cy="1620360"/>
+            <a:ext cx="4168800" cy="1620000"/>
           </a:xfrm>
           <a:prstGeom prst="rect">
             <a:avLst/>
@@ -4406,7 +4407,7 @@
         <p:spPr>
           <a:xfrm>
             <a:off x="468360" y="476640"/>
-            <a:ext cx="8211240" cy="673920"/>
+            <a:ext cx="8210880" cy="673560"/>
           </a:xfrm>
           <a:prstGeom prst="rect">
             <a:avLst/>
@@ -4474,8 +4475,8 @@
         </p:nvSpPr>
         <p:spPr>
           <a:xfrm>
-            <a:off x="323640" y="1459080"/>
-            <a:ext cx="8489880" cy="4654800"/>
+            <a:off x="323640" y="1639080"/>
+            <a:ext cx="8489520" cy="4446360"/>
           </a:xfrm>
           <a:prstGeom prst="rect">
             <a:avLst/>
@@ -4490,26 +4491,6 @@
             <a:noAutofit/>
           </a:bodyPr>
           <a:p>
-            <a:pPr marL="343080" indent="0" defTabSz="914400">
-              <a:lnSpc>
-                <a:spcPct val="100000"/>
-              </a:lnSpc>
-              <a:spcBef>
-                <a:spcPts val="320"/>
-              </a:spcBef>
-              <a:buNone/>
-              <a:tabLst>
-                <a:tab algn="l" pos="0"/>
-              </a:tabLst>
-            </a:pPr>
-            <a:endParaRPr b="0" lang="en-US" sz="1600" spc="-1" strike="noStrike">
-              <a:solidFill>
-                <a:srgbClr val="000000"/>
-              </a:solidFill>
-              <a:latin typeface="Arial"/>
-            </a:endParaRPr>
-          </a:p>
-          <a:p>
             <a:pPr marL="343080" indent="-343080" defTabSz="914400">
               <a:lnSpc>
                 <a:spcPct val="100000"/>
@@ -4534,17 +4515,50 @@
                 <a:latin typeface="Arial"/>
                 <a:ea typeface="DejaVu Sans"/>
               </a:rPr>
-              <a:t>Bugfixes (2/4)</a:t>
-            </a:r>
-            <a:endParaRPr b="0" lang="en-US" sz="1600" spc="-1" strike="noStrike">
-              <a:solidFill>
-                <a:srgbClr val="000000"/>
-              </a:solidFill>
-              <a:latin typeface="Arial"/>
-            </a:endParaRPr>
-          </a:p>
-          <a:p>
-            <a:pPr lvl="1" marL="800280" indent="-343080" defTabSz="914400">
+              <a:t>Features</a:t>
+            </a:r>
+            <a:br>
+              <a:rPr sz="1600"/>
+            </a:br>
+            <a:r>
+              <a:rPr b="0" lang="en-US" sz="1200" spc="-1" strike="noStrike">
+                <a:solidFill>
+                  <a:schemeClr val="dk1"/>
+                </a:solidFill>
+                <a:latin typeface="Arial"/>
+                <a:ea typeface="DejaVu Sans"/>
+              </a:rPr>
+              <a:t>CodeEU-577: Add missing mission profiles to vocational and non-vocational</a:t>
+            </a:r>
+            <a:endParaRPr b="0" lang="en-US" sz="1200" spc="-1" strike="noStrike">
+              <a:solidFill>
+                <a:srgbClr val="000000"/>
+              </a:solidFill>
+              <a:latin typeface="Arial"/>
+            </a:endParaRPr>
+          </a:p>
+          <a:p>
+            <a:pPr marL="343080" indent="0" defTabSz="914400">
+              <a:lnSpc>
+                <a:spcPct val="100000"/>
+              </a:lnSpc>
+              <a:spcBef>
+                <a:spcPts val="320"/>
+              </a:spcBef>
+              <a:buNone/>
+              <a:tabLst>
+                <a:tab algn="l" pos="0"/>
+              </a:tabLst>
+            </a:pPr>
+            <a:endParaRPr b="0" lang="en-US" sz="1200" spc="-1" strike="noStrike">
+              <a:solidFill>
+                <a:srgbClr val="000000"/>
+              </a:solidFill>
+              <a:latin typeface="Arial"/>
+            </a:endParaRPr>
+          </a:p>
+          <a:p>
+            <a:pPr marL="343080" indent="-343080" defTabSz="914400">
               <a:lnSpc>
                 <a:spcPct val="100000"/>
               </a:lnSpc>
@@ -4561,16 +4575,16 @@
               </a:tabLst>
             </a:pPr>
             <a:r>
-              <a:rPr b="0" lang="en-US" sz="1200" spc="-1" strike="noStrike">
-                <a:solidFill>
-                  <a:srgbClr val="000000"/>
-                </a:solidFill>
-                <a:latin typeface="Arial"/>
-                <a:ea typeface="DejaVu Sans"/>
-              </a:rPr>
-              <a:t>CodeEU-481: Finished Run VEH-PrimaryBus_nonSmart Urban _P31SD_ReferenceLoad with ERROR: 4 (Urban _P31SD_ReferenceLoad) - absTime: 8606.6241 [s], distance: 39112.5127 [m], dt: 1.1131 [s], v: 0.1833 [m/s], Gear: 1 |</a:t>
-            </a:r>
-            <a:endParaRPr b="0" lang="en-US" sz="1200" spc="-1" strike="noStrike">
+              <a:rPr b="1" lang="en-US" sz="1600" spc="-1" strike="noStrike">
+                <a:solidFill>
+                  <a:srgbClr val="000000"/>
+                </a:solidFill>
+                <a:latin typeface="Arial"/>
+                <a:ea typeface="DejaVu Sans"/>
+              </a:rPr>
+              <a:t>Bugfixes (1/4)</a:t>
+            </a:r>
+            <a:endParaRPr b="0" lang="en-US" sz="1600" spc="-1" strike="noStrike">
               <a:solidFill>
                 <a:srgbClr val="000000"/>
               </a:solidFill>
@@ -4602,7 +4616,7 @@
                 <a:latin typeface="Arial"/>
                 <a:ea typeface="DejaVu Sans"/>
               </a:rPr>
-              <a:t>CodeEU-488: Finished Run VEH-PrimaryBus_nonSmart Urban _P31SD_ReferenceLoad with ERROR: 4 (Urban _P31SD_ReferenceLoad) - absTime: 8606.6241 [s], distance: 39112.5127 [m], dt: 1.1131 [s], v: 0.1833 [m/s], Gear: 1 | DrivingActionAccelerate: Failed to find operating poi</a:t>
+              <a:t>CodeEU-331: Gear 1 DrivingActionAccelerate: Fail</a:t>
             </a:r>
             <a:endParaRPr b="0" lang="en-US" sz="1200" spc="-1" strike="noStrike">
               <a:solidFill>
@@ -4636,7 +4650,7 @@
                 <a:latin typeface="Arial"/>
                 <a:ea typeface="DejaVu Sans"/>
               </a:rPr>
-              <a:t>CodeEU-494: Finished Run VEH-PrimaryBus_nonSmart Urban _P31SD_ReferenceLoad with ERROR: 26 (Urban _P31SD_ReferenceLoad) - absTime: 8606.6241 [s], distance: 39112.5127 [m], dt: 1.1131 [s], v: 0.1833 [m/s], Gear: 1 | DrivingActionAccelerate: Failed to fi</a:t>
+              <a:t>CodeEU-367: Gear 1 DrivingActionAccelerate: Fail</a:t>
             </a:r>
             <a:endParaRPr b="0" lang="en-US" sz="1200" spc="-1" strike="noStrike">
               <a:solidFill>
@@ -4670,7 +4684,7 @@
                 <a:latin typeface="Arial"/>
                 <a:ea typeface="DejaVu Sans"/>
               </a:rPr>
-              <a:t>CodeEU-420: Finished Run VEH-PrimaryBus_nonSmart Interurban _P32SD_ReferenceLoad with ERROR: 16</a:t>
+              <a:t>CodeEU-372: ADT Error on Bus Category Primary Vehicle Simulation on VECTO</a:t>
             </a:r>
             <a:endParaRPr b="0" lang="en-US" sz="1200" spc="-1" strike="noStrike">
               <a:solidFill>
@@ -4704,7 +4718,7 @@
                 <a:latin typeface="Arial"/>
                 <a:ea typeface="DejaVu Sans"/>
               </a:rPr>
-              <a:t>CodeEU-573: Unhandled powertrain architecture Conventional Vehicle to calculate gradability</a:t>
+              <a:t>CodeEU-373: ADT Error on Bus Category Primary Vehicle Simulation on VECTO</a:t>
             </a:r>
             <a:endParaRPr b="0" lang="en-US" sz="1200" spc="-1" strike="noStrike">
               <a:solidFill>
@@ -4738,7 +4752,7 @@
                 <a:latin typeface="Arial"/>
                 <a:ea typeface="DejaVu Sans"/>
               </a:rPr>
-              <a:t>CodeEU-582: unhandled powertrain architecture ConventionalVehicle to calculate gradability, 11:44:36.63,</a:t>
+              <a:t>CodeEU-374: ADT Error on Bus Category Primary Vehicle Simulation on VECTO</a:t>
             </a:r>
             <a:endParaRPr b="0" lang="en-US" sz="1200" spc="-1" strike="noStrike">
               <a:solidFill>
@@ -4772,7 +4786,7 @@
                 <a:latin typeface="Arial"/>
                 <a:ea typeface="DejaVu Sans"/>
               </a:rPr>
-              <a:t>CodeEU-595: Inconsistency exempted vehicles "Fuel cell vehicle" vs. "FCV Article 9 exempted"</a:t>
+              <a:t>CodeEU-375: ADT Error on Bus Category Primary Vehicle Simulation on VECTO</a:t>
             </a:r>
             <a:endParaRPr b="0" lang="en-US" sz="1200" spc="-1" strike="noStrike">
               <a:solidFill>
@@ -4806,7 +4820,7 @@
                 <a:latin typeface="Arial"/>
                 <a:ea typeface="DejaVu Sans"/>
               </a:rPr>
-              <a:t>CodeEU-501: Help regarding VTP vdri format is not up to date in v4</a:t>
+              <a:t>CodeEU-393: Finished Run VEH-PrimaryBus_nonSmart Interurban _P32SD_ReferenceLoad with ERROR: 16</a:t>
             </a:r>
             <a:endParaRPr b="0" lang="en-US" sz="1200" spc="-1" strike="noStrike">
               <a:solidFill>
@@ -4840,7 +4854,7 @@
                 <a:latin typeface="Arial"/>
                 <a:ea typeface="DejaVu Sans"/>
               </a:rPr>
-              <a:t>CodeEU-594: inadequate validation for auxiliaries in completed vehicle XML</a:t>
+              <a:t>CodeEU-439: 615 (Interurban _P32DD_ReferenceLoad) - absTime: 7129.6359 [s], distance: 53875.9765 [m], dt: 0.6388 [s], v: 0.5098 [m/s], Gear: 1 | DrivingActionAccelerate: Failed</a:t>
             </a:r>
             <a:endParaRPr b="0" lang="en-US" sz="1200" spc="-1" strike="noStrike">
               <a:solidFill>
@@ -4874,7 +4888,7 @@
                 <a:latin typeface="Arial"/>
                 <a:ea typeface="DejaVu Sans"/>
               </a:rPr>
-              <a:t>CodeEU-580: Potential error in XML schema v2.4 (exempted vehicles)</a:t>
+              <a:t>CodeEU-446: Finished Run VEH-PrimaryBus_nonSmart Interurban _P32SD_ReferenceLoad with ERROR: 16</a:t>
             </a:r>
             <a:endParaRPr b="0" lang="en-US" sz="1200" spc="-1" strike="noStrike">
               <a:solidFill>
@@ -4908,7 +4922,7 @@
                 <a:latin typeface="Arial"/>
                 <a:ea typeface="DejaVu Sans"/>
               </a:rPr>
-              <a:t>CodeEU-551: Article-10-2 XLRASF5E00G419905</a:t>
+              <a:t>CodeEU-449: Finished Run VEH-PrimaryBus_nonSmart Interurban _P32SD_ReferenceLoad with ERROR: 16</a:t>
             </a:r>
             <a:endParaRPr b="0" lang="en-US" sz="1200" spc="-1" strike="noStrike">
               <a:solidFill>
@@ -4942,7 +4956,7 @@
                 <a:latin typeface="Arial"/>
                 <a:ea typeface="DejaVu Sans"/>
               </a:rPr>
-              <a:t>CodeEU-547: Max ICE Off timespan for buses</a:t>
+              <a:t>CodeEU-478: Finished Run VEH-PrimaryBus_nonSmart Urban _P31SD_ReferenceLoad with ERROR: 4 (Urban _P31SD_ReferenceLoad) - absTime: 8606.6241 [s], distance: 39112.5127 [m], dt: 1.1131 [s], v: 0.1833 [m/s], Gear: 1 | DrivingActionAccelerate: Failed to find operating poi</a:t>
             </a:r>
             <a:endParaRPr b="0" lang="en-US" sz="1200" spc="-1" strike="noStrike">
               <a:solidFill>
@@ -4952,32 +4966,18 @@
             </a:endParaRPr>
           </a:p>
           <a:p>
-            <a:pPr lvl="1" marL="800280" indent="-343080" defTabSz="914400">
-              <a:lnSpc>
-                <a:spcPct val="100000"/>
-              </a:lnSpc>
-              <a:spcBef>
-                <a:spcPts val="320"/>
-              </a:spcBef>
-              <a:buClr>
-                <a:srgbClr val="000000"/>
-              </a:buClr>
-              <a:buFont typeface="Symbol"/>
-              <a:buChar char=""/>
-              <a:tabLst>
-                <a:tab algn="l" pos="1886040"/>
-              </a:tabLst>
-            </a:pPr>
-            <a:r>
-              <a:rPr b="0" lang="en-US" sz="1200" spc="-1" strike="noStrike">
-                <a:solidFill>
-                  <a:srgbClr val="000000"/>
-                </a:solidFill>
-                <a:latin typeface="Arial"/>
-                <a:ea typeface="DejaVu Sans"/>
-              </a:rPr>
-              <a:t>CodeEU-583: Incorrect internal resistance for SuperCap used in factor method</a:t>
-            </a:r>
+            <a:pPr marL="800280" indent="0" defTabSz="914400">
+              <a:lnSpc>
+                <a:spcPct val="100000"/>
+              </a:lnSpc>
+              <a:spcBef>
+                <a:spcPts val="320"/>
+              </a:spcBef>
+              <a:buNone/>
+              <a:tabLst>
+                <a:tab algn="l" pos="0"/>
+              </a:tabLst>
+            </a:pPr>
             <a:endParaRPr b="0" lang="en-US" sz="1200" spc="-1" strike="noStrike">
               <a:solidFill>
                 <a:srgbClr val="000000"/>
@@ -5030,7 +5030,7 @@
         <p:spPr>
           <a:xfrm>
             <a:off x="468360" y="476640"/>
-            <a:ext cx="8211240" cy="673920"/>
+            <a:ext cx="8210880" cy="673560"/>
           </a:xfrm>
           <a:prstGeom prst="rect">
             <a:avLst/>
@@ -5099,7 +5099,7 @@
         <p:spPr>
           <a:xfrm>
             <a:off x="323640" y="1459080"/>
-            <a:ext cx="8489880" cy="4654800"/>
+            <a:ext cx="8489520" cy="4654440"/>
           </a:xfrm>
           <a:prstGeom prst="rect">
             <a:avLst/>
@@ -5158,7 +5158,7 @@
                 <a:latin typeface="Arial"/>
                 <a:ea typeface="DejaVu Sans"/>
               </a:rPr>
-              <a:t>Bugfixes (3/4)</a:t>
+              <a:t>Bugfixes (2/4)</a:t>
             </a:r>
             <a:endParaRPr b="0" lang="en-US" sz="1600" spc="-1" strike="noStrike">
               <a:solidFill>
@@ -5192,7 +5192,7 @@
                 <a:latin typeface="Arial"/>
                 <a:ea typeface="DejaVu Sans"/>
               </a:rPr>
-              <a:t>CodeEU-571: Article10-2-issue | VECTO-4.0.3 | Order-Nr 28202896 | HEV P1 Error Mercedes-Benz and Setra Hybrid Buses</a:t>
+              <a:t>CodeEU-481: Finished Run VEH-PrimaryBus_nonSmart Urban _P31SD_ReferenceLoad with ERROR: 4 (Urban _P31SD_ReferenceLoad) - absTime: 8606.6241 [s], distance: 39112.5127 [m], dt: 1.1131 [s], v: 0.1833 [m/s], Gear: 1 |</a:t>
             </a:r>
             <a:endParaRPr b="0" lang="en-US" sz="1200" spc="-1" strike="noStrike">
               <a:solidFill>
@@ -5226,7 +5226,7 @@
                 <a:latin typeface="Arial"/>
                 <a:ea typeface="DejaVu Sans"/>
               </a:rPr>
-              <a:t>CodeEU-526: VTP calculation aborted on fuel consumption map</a:t>
+              <a:t>CodeEU-488: Finished Run VEH-PrimaryBus_nonSmart Urban _P31SD_ReferenceLoad with ERROR: 4 (Urban _P31SD_ReferenceLoad) - absTime: 8606.6241 [s], distance: 39112.5127 [m], dt: 1.1131 [s], v: 0.1833 [m/s], Gear: 1 | DrivingActionAccelerate: Failed to find operating poi</a:t>
             </a:r>
             <a:endParaRPr b="0" lang="en-US" sz="1200" spc="-1" strike="noStrike">
               <a:solidFill>
@@ -5260,7 +5260,7 @@
                 <a:latin typeface="Arial"/>
                 <a:ea typeface="DejaVu Sans"/>
               </a:rPr>
-              <a:t>CodeEU-502: Error in VECTO calculation WMA10CZZ0RF022326</a:t>
+              <a:t>CodeEU-494: Finished Run VEH-PrimaryBus_nonSmart Urban _P31SD_ReferenceLoad with ERROR: 26 (Urban _P31SD_ReferenceLoad) - absTime: 8606.6241 [s], distance: 39112.5127 [m], dt: 1.1131 [s], v: 0.1833 [m/s], Gear: 1 | DrivingActionAccelerate: Failed to fi</a:t>
             </a:r>
             <a:endParaRPr b="0" lang="en-US" sz="1200" spc="-1" strike="noStrike">
               <a:solidFill>
@@ -5294,7 +5294,7 @@
                 <a:latin typeface="Arial"/>
                 <a:ea typeface="DejaVu Sans"/>
               </a:rPr>
-              <a:t>CodeEU-401: Electric steering system with conventional vehicle not according to 2017/2400</a:t>
+              <a:t>CodeEU-420: Finished Run VEH-PrimaryBus_nonSmart Interurban _P32SD_ReferenceLoad with ERROR: 16</a:t>
             </a:r>
             <a:endParaRPr b="0" lang="en-US" sz="1200" spc="-1" strike="noStrike">
               <a:solidFill>
@@ -5328,7 +5328,7 @@
                 <a:latin typeface="Arial"/>
                 <a:ea typeface="DejaVu Sans"/>
               </a:rPr>
-              <a:t>CodeEU-476: Setting Initial SoC in REESS editor leads to error</a:t>
+              <a:t>CodeEU-573: Unhandled powertrain architecture Conventional Vehicle to calculate gradability</a:t>
             </a:r>
             <a:endParaRPr b="0" lang="en-US" sz="1200" spc="-1" strike="noStrike">
               <a:solidFill>
@@ -5362,7 +5362,7 @@
                 <a:latin typeface="Arial"/>
                 <a:ea typeface="DejaVu Sans"/>
               </a:rPr>
-              <a:t>CodeEU-533: Question about heavy lorry_IEPC_Gb×4speed: Failed to generate electric power map - at least two negative entries are required</a:t>
+              <a:t>CodeEU-582: unhandled powertrain architecture ConventionalVehicle to calculate gradability, 11:44:36.63,</a:t>
             </a:r>
             <a:endParaRPr b="0" lang="en-US" sz="1200" spc="-1" strike="noStrike">
               <a:solidFill>
@@ -5396,7 +5396,7 @@
                 <a:latin typeface="Arial"/>
                 <a:ea typeface="DejaVu Sans"/>
               </a:rPr>
-              <a:t>CodeEU-456: Clarification Documentation official Results</a:t>
+              <a:t>CodeEU-595: Inconsistency exempted vehicles "Fuel cell vehicle" vs. "FCV Article 9 exempted"</a:t>
             </a:r>
             <a:endParaRPr b="0" lang="en-US" sz="1200" spc="-1" strike="noStrike">
               <a:solidFill>
@@ -5430,7 +5430,7 @@
                 <a:latin typeface="Arial"/>
                 <a:ea typeface="DejaVu Sans"/>
               </a:rPr>
-              <a:t>CodeEU-506: Article 10(2) issue - VIN YS2P6X200R2201285</a:t>
+              <a:t>CodeEU-501: Help regarding VTP vdri format is not up to date in v4</a:t>
             </a:r>
             <a:endParaRPr b="0" lang="en-US" sz="1200" spc="-1" strike="noStrike">
               <a:solidFill>
@@ -5464,7 +5464,7 @@
                 <a:latin typeface="Arial"/>
                 <a:ea typeface="DejaVu Sans"/>
               </a:rPr>
-              <a:t>CodeEU-507: Article 10(2) issue - VIN YS2P6X20005732399</a:t>
+              <a:t>CodeEU-594: inadequate validation for auxiliaries in completed vehicle XML</a:t>
             </a:r>
             <a:endParaRPr b="0" lang="en-US" sz="1200" spc="-1" strike="noStrike">
               <a:solidFill>
@@ -5498,7 +5498,7 @@
                 <a:latin typeface="Arial"/>
                 <a:ea typeface="DejaVu Sans"/>
               </a:rPr>
-              <a:t>CodeEU-508: Article 10(2) issue - VIN S2P6X20005734199</a:t>
+              <a:t>CodeEU-580: Potential error in XML schema v2.4 (exempted vehicles)</a:t>
             </a:r>
             <a:endParaRPr b="0" lang="en-US" sz="1200" spc="-1" strike="noStrike">
               <a:solidFill>
@@ -5532,7 +5532,7 @@
                 <a:latin typeface="Arial"/>
                 <a:ea typeface="DejaVu Sans"/>
               </a:rPr>
-              <a:t>CodeEU-499: Object Reference not set Error</a:t>
+              <a:t>CodeEU-551: Article-10-2 XLRASF5E00G419905</a:t>
             </a:r>
             <a:endParaRPr b="0" lang="en-US" sz="1200" spc="-1" strike="noStrike">
               <a:solidFill>
@@ -5566,7 +5566,7 @@
                 <a:latin typeface="Arial"/>
                 <a:ea typeface="DejaVu Sans"/>
               </a:rPr>
-              <a:t>CodeEU-546: Problem with P181 (Cooling Fan Technology) for a conventional vehicle</a:t>
+              <a:t>CodeEU-547: Max ICE Off timespan for buses</a:t>
             </a:r>
             <a:endParaRPr b="0" lang="en-US" sz="1200" spc="-1" strike="noStrike">
               <a:solidFill>
@@ -5600,41 +5600,7 @@
                 <a:latin typeface="Arial"/>
                 <a:ea typeface="DejaVu Sans"/>
               </a:rPr>
-              <a:t>CodeEU-516: Article10-2-issue | VECTO-4.0.3 | Order-Nr 28208044 | HEV P1 Error Mercedes-Benz and Setra Hybrid Buses</a:t>
-            </a:r>
-            <a:endParaRPr b="0" lang="en-US" sz="1200" spc="-1" strike="noStrike">
-              <a:solidFill>
-                <a:srgbClr val="000000"/>
-              </a:solidFill>
-              <a:latin typeface="Arial"/>
-            </a:endParaRPr>
-          </a:p>
-          <a:p>
-            <a:pPr lvl="1" marL="800280" indent="-343080" defTabSz="914400">
-              <a:lnSpc>
-                <a:spcPct val="100000"/>
-              </a:lnSpc>
-              <a:spcBef>
-                <a:spcPts val="320"/>
-              </a:spcBef>
-              <a:buClr>
-                <a:srgbClr val="000000"/>
-              </a:buClr>
-              <a:buFont typeface="Symbol"/>
-              <a:buChar char=""/>
-              <a:tabLst>
-                <a:tab algn="l" pos="1886040"/>
-              </a:tabLst>
-            </a:pPr>
-            <a:r>
-              <a:rPr b="0" lang="en-US" sz="1200" spc="-1" strike="noStrike">
-                <a:solidFill>
-                  <a:srgbClr val="000000"/>
-                </a:solidFill>
-                <a:latin typeface="Arial"/>
-                <a:ea typeface="DejaVu Sans"/>
-              </a:rPr>
-              <a:t>CodeEU-517: Article10-2-issue | VECTO-4.0.3 | Order-Nr 28208037 | HEV P1 Error Mercedes-Benz and Setra Hybrid Buses</a:t>
+              <a:t>CodeEU-583: Incorrect internal resistance for SuperCap used in factor method</a:t>
             </a:r>
             <a:endParaRPr b="0" lang="en-US" sz="1200" spc="-1" strike="noStrike">
               <a:solidFill>
@@ -5688,7 +5654,7 @@
         <p:spPr>
           <a:xfrm>
             <a:off x="468360" y="476640"/>
-            <a:ext cx="8211240" cy="673920"/>
+            <a:ext cx="8210880" cy="673560"/>
           </a:xfrm>
           <a:prstGeom prst="rect">
             <a:avLst/>
@@ -5757,7 +5723,7 @@
         <p:spPr>
           <a:xfrm>
             <a:off x="323640" y="1459080"/>
-            <a:ext cx="8489880" cy="4654800"/>
+            <a:ext cx="8489520" cy="4654440"/>
           </a:xfrm>
           <a:prstGeom prst="rect">
             <a:avLst/>
@@ -5816,7 +5782,7 @@
                 <a:latin typeface="Arial"/>
                 <a:ea typeface="DejaVu Sans"/>
               </a:rPr>
-              <a:t>Bugfixes (4/4)</a:t>
+              <a:t>Bugfixes (3/4)</a:t>
             </a:r>
             <a:endParaRPr b="0" lang="en-US" sz="1600" spc="-1" strike="noStrike">
               <a:solidFill>
@@ -5850,7 +5816,7 @@
                 <a:latin typeface="Arial"/>
                 <a:ea typeface="DejaVu Sans"/>
               </a:rPr>
-              <a:t>CodeEU-519: Article10-2-issue | VECTO-4.0.3 | Order-Nr 10098181 | HEV P1 Error Mercedes-Benz and Setra Hybrid Buses</a:t>
+              <a:t>CodeEU-571: Article10-2-issue | VECTO-4.0.3 | Order-Nr 28202896 | HEV P1 Error Mercedes-Benz and Setra Hybrid Buses</a:t>
             </a:r>
             <a:endParaRPr b="0" lang="en-US" sz="1200" spc="-1" strike="noStrike">
               <a:solidFill>
@@ -5884,7 +5850,7 @@
                 <a:latin typeface="Arial"/>
                 <a:ea typeface="DejaVu Sans"/>
               </a:rPr>
-              <a:t>CodeEU-527: Article10-2-issue | VECTO-4.0.3 | Order-Nr 28196233 | HEV P1 Error Mercedes-Benz and Setra Hybrid Buses</a:t>
+              <a:t>CodeEU-526: VTP calculation aborted on fuel consumption map</a:t>
             </a:r>
             <a:endParaRPr b="0" lang="en-US" sz="1200" spc="-1" strike="noStrike">
               <a:solidFill>
@@ -5918,7 +5884,7 @@
                 <a:latin typeface="Arial"/>
                 <a:ea typeface="DejaVu Sans"/>
               </a:rPr>
-              <a:t>CodeEU-528: Article10-2-issue | VECTO-4.0.3 | Order-Nr 28196652 | HEV P1 Error Mercedes-Benz and Setra Hybrid Buses</a:t>
+              <a:t>CodeEU-502: Error in VECTO calculation WMA10CZZ0RF022326</a:t>
             </a:r>
             <a:endParaRPr b="0" lang="en-US" sz="1200" spc="-1" strike="noStrike">
               <a:solidFill>
@@ -5952,7 +5918,7 @@
                 <a:latin typeface="Arial"/>
                 <a:ea typeface="DejaVu Sans"/>
               </a:rPr>
-              <a:t>CodeEU-338: Eco-roll only, without engine stop, impact on CO2 emission</a:t>
+              <a:t>CodeEU-401: Electric steering system with conventional vehicle not according to 2017/2400</a:t>
             </a:r>
             <a:endParaRPr b="0" lang="en-US" sz="1200" spc="-1" strike="noStrike">
               <a:solidFill>
@@ -5986,7 +5952,7 @@
                 <a:latin typeface="Arial"/>
                 <a:ea typeface="DejaVu Sans"/>
               </a:rPr>
-              <a:t>CodeEU-475: XML files loading in VTP Job not OK; No auxiliary data and torque curve visible, Job can't be saved in VECTO 4.0.3.3330</a:t>
+              <a:t>CodeEU-476: Setting Initial SoC in REESS editor leads to error</a:t>
             </a:r>
             <a:endParaRPr b="0" lang="en-US" sz="1200" spc="-1" strike="noStrike">
               <a:solidFill>
@@ -6020,7 +5986,279 @@
                 <a:latin typeface="Arial"/>
                 <a:ea typeface="DejaVu Sans"/>
               </a:rPr>
-              <a:t>CodeEU-610: VTP mode is broken due to changes in the Clutch component.</a:t>
+              <a:t>CodeEU-533: Question about heavy lorry_IEPC_Gb×4speed: Failed to generate electric power map - at least two negative entries are required</a:t>
+            </a:r>
+            <a:endParaRPr b="0" lang="en-US" sz="1200" spc="-1" strike="noStrike">
+              <a:solidFill>
+                <a:srgbClr val="000000"/>
+              </a:solidFill>
+              <a:latin typeface="Arial"/>
+            </a:endParaRPr>
+          </a:p>
+          <a:p>
+            <a:pPr lvl="1" marL="800280" indent="-343080" defTabSz="914400">
+              <a:lnSpc>
+                <a:spcPct val="100000"/>
+              </a:lnSpc>
+              <a:spcBef>
+                <a:spcPts val="320"/>
+              </a:spcBef>
+              <a:buClr>
+                <a:srgbClr val="000000"/>
+              </a:buClr>
+              <a:buFont typeface="Symbol"/>
+              <a:buChar char=""/>
+              <a:tabLst>
+                <a:tab algn="l" pos="1886040"/>
+              </a:tabLst>
+            </a:pPr>
+            <a:r>
+              <a:rPr b="0" lang="en-US" sz="1200" spc="-1" strike="noStrike">
+                <a:solidFill>
+                  <a:srgbClr val="000000"/>
+                </a:solidFill>
+                <a:latin typeface="Arial"/>
+                <a:ea typeface="DejaVu Sans"/>
+              </a:rPr>
+              <a:t>CodeEU-456: Clarification Documentation official Results</a:t>
+            </a:r>
+            <a:endParaRPr b="0" lang="en-US" sz="1200" spc="-1" strike="noStrike">
+              <a:solidFill>
+                <a:srgbClr val="000000"/>
+              </a:solidFill>
+              <a:latin typeface="Arial"/>
+            </a:endParaRPr>
+          </a:p>
+          <a:p>
+            <a:pPr lvl="1" marL="800280" indent="-343080" defTabSz="914400">
+              <a:lnSpc>
+                <a:spcPct val="100000"/>
+              </a:lnSpc>
+              <a:spcBef>
+                <a:spcPts val="320"/>
+              </a:spcBef>
+              <a:buClr>
+                <a:srgbClr val="000000"/>
+              </a:buClr>
+              <a:buFont typeface="Symbol"/>
+              <a:buChar char=""/>
+              <a:tabLst>
+                <a:tab algn="l" pos="1886040"/>
+              </a:tabLst>
+            </a:pPr>
+            <a:r>
+              <a:rPr b="0" lang="en-US" sz="1200" spc="-1" strike="noStrike">
+                <a:solidFill>
+                  <a:srgbClr val="000000"/>
+                </a:solidFill>
+                <a:latin typeface="Arial"/>
+                <a:ea typeface="DejaVu Sans"/>
+              </a:rPr>
+              <a:t>CodeEU-506: Article 10(2) issue - VIN YS2P6X200R2201285</a:t>
+            </a:r>
+            <a:endParaRPr b="0" lang="en-US" sz="1200" spc="-1" strike="noStrike">
+              <a:solidFill>
+                <a:srgbClr val="000000"/>
+              </a:solidFill>
+              <a:latin typeface="Arial"/>
+            </a:endParaRPr>
+          </a:p>
+          <a:p>
+            <a:pPr lvl="1" marL="800280" indent="-343080" defTabSz="914400">
+              <a:lnSpc>
+                <a:spcPct val="100000"/>
+              </a:lnSpc>
+              <a:spcBef>
+                <a:spcPts val="320"/>
+              </a:spcBef>
+              <a:buClr>
+                <a:srgbClr val="000000"/>
+              </a:buClr>
+              <a:buFont typeface="Symbol"/>
+              <a:buChar char=""/>
+              <a:tabLst>
+                <a:tab algn="l" pos="1886040"/>
+              </a:tabLst>
+            </a:pPr>
+            <a:r>
+              <a:rPr b="0" lang="en-US" sz="1200" spc="-1" strike="noStrike">
+                <a:solidFill>
+                  <a:srgbClr val="000000"/>
+                </a:solidFill>
+                <a:latin typeface="Arial"/>
+                <a:ea typeface="DejaVu Sans"/>
+              </a:rPr>
+              <a:t>CodeEU-507: Article 10(2) issue - VIN YS2P6X20005732399</a:t>
+            </a:r>
+            <a:endParaRPr b="0" lang="en-US" sz="1200" spc="-1" strike="noStrike">
+              <a:solidFill>
+                <a:srgbClr val="000000"/>
+              </a:solidFill>
+              <a:latin typeface="Arial"/>
+            </a:endParaRPr>
+          </a:p>
+          <a:p>
+            <a:pPr lvl="1" marL="800280" indent="-343080" defTabSz="914400">
+              <a:lnSpc>
+                <a:spcPct val="100000"/>
+              </a:lnSpc>
+              <a:spcBef>
+                <a:spcPts val="320"/>
+              </a:spcBef>
+              <a:buClr>
+                <a:srgbClr val="000000"/>
+              </a:buClr>
+              <a:buFont typeface="Symbol"/>
+              <a:buChar char=""/>
+              <a:tabLst>
+                <a:tab algn="l" pos="1886040"/>
+              </a:tabLst>
+            </a:pPr>
+            <a:r>
+              <a:rPr b="0" lang="en-US" sz="1200" spc="-1" strike="noStrike">
+                <a:solidFill>
+                  <a:srgbClr val="000000"/>
+                </a:solidFill>
+                <a:latin typeface="Arial"/>
+                <a:ea typeface="DejaVu Sans"/>
+              </a:rPr>
+              <a:t>CodeEU-508: Article 10(2) issue - VIN S2P6X20005734199</a:t>
+            </a:r>
+            <a:endParaRPr b="0" lang="en-US" sz="1200" spc="-1" strike="noStrike">
+              <a:solidFill>
+                <a:srgbClr val="000000"/>
+              </a:solidFill>
+              <a:latin typeface="Arial"/>
+            </a:endParaRPr>
+          </a:p>
+          <a:p>
+            <a:pPr lvl="1" marL="800280" indent="-343080" defTabSz="914400">
+              <a:lnSpc>
+                <a:spcPct val="100000"/>
+              </a:lnSpc>
+              <a:spcBef>
+                <a:spcPts val="320"/>
+              </a:spcBef>
+              <a:buClr>
+                <a:srgbClr val="000000"/>
+              </a:buClr>
+              <a:buFont typeface="Symbol"/>
+              <a:buChar char=""/>
+              <a:tabLst>
+                <a:tab algn="l" pos="1886040"/>
+              </a:tabLst>
+            </a:pPr>
+            <a:r>
+              <a:rPr b="0" lang="en-US" sz="1200" spc="-1" strike="noStrike">
+                <a:solidFill>
+                  <a:srgbClr val="000000"/>
+                </a:solidFill>
+                <a:latin typeface="Arial"/>
+                <a:ea typeface="DejaVu Sans"/>
+              </a:rPr>
+              <a:t>CodeEU-499: Object Reference not set Error</a:t>
+            </a:r>
+            <a:endParaRPr b="0" lang="en-US" sz="1200" spc="-1" strike="noStrike">
+              <a:solidFill>
+                <a:srgbClr val="000000"/>
+              </a:solidFill>
+              <a:latin typeface="Arial"/>
+            </a:endParaRPr>
+          </a:p>
+          <a:p>
+            <a:pPr lvl="1" marL="800280" indent="-343080" defTabSz="914400">
+              <a:lnSpc>
+                <a:spcPct val="100000"/>
+              </a:lnSpc>
+              <a:spcBef>
+                <a:spcPts val="320"/>
+              </a:spcBef>
+              <a:buClr>
+                <a:srgbClr val="000000"/>
+              </a:buClr>
+              <a:buFont typeface="Symbol"/>
+              <a:buChar char=""/>
+              <a:tabLst>
+                <a:tab algn="l" pos="1886040"/>
+              </a:tabLst>
+            </a:pPr>
+            <a:r>
+              <a:rPr b="0" lang="en-US" sz="1200" spc="-1" strike="noStrike">
+                <a:solidFill>
+                  <a:srgbClr val="000000"/>
+                </a:solidFill>
+                <a:latin typeface="Arial"/>
+                <a:ea typeface="DejaVu Sans"/>
+              </a:rPr>
+              <a:t>CodeEU-546: Problem with P181 (Cooling Fan Technology) for a conventional vehicle</a:t>
+            </a:r>
+            <a:endParaRPr b="0" lang="en-US" sz="1200" spc="-1" strike="noStrike">
+              <a:solidFill>
+                <a:srgbClr val="000000"/>
+              </a:solidFill>
+              <a:latin typeface="Arial"/>
+            </a:endParaRPr>
+          </a:p>
+          <a:p>
+            <a:pPr lvl="1" marL="800280" indent="-343080" defTabSz="914400">
+              <a:lnSpc>
+                <a:spcPct val="100000"/>
+              </a:lnSpc>
+              <a:spcBef>
+                <a:spcPts val="320"/>
+              </a:spcBef>
+              <a:buClr>
+                <a:srgbClr val="000000"/>
+              </a:buClr>
+              <a:buFont typeface="Symbol"/>
+              <a:buChar char=""/>
+              <a:tabLst>
+                <a:tab algn="l" pos="1886040"/>
+              </a:tabLst>
+            </a:pPr>
+            <a:r>
+              <a:rPr b="0" lang="en-US" sz="1200" spc="-1" strike="noStrike">
+                <a:solidFill>
+                  <a:srgbClr val="000000"/>
+                </a:solidFill>
+                <a:latin typeface="Arial"/>
+                <a:ea typeface="DejaVu Sans"/>
+              </a:rPr>
+              <a:t>CodeEU-516: Article10-2-issue | VECTO-4.0.3 | Order-Nr 28208044 | HEV P1 Error Mercedes-Benz and Setra Hybrid Buses</a:t>
+            </a:r>
+            <a:endParaRPr b="0" lang="en-US" sz="1200" spc="-1" strike="noStrike">
+              <a:solidFill>
+                <a:srgbClr val="000000"/>
+              </a:solidFill>
+              <a:latin typeface="Arial"/>
+            </a:endParaRPr>
+          </a:p>
+          <a:p>
+            <a:pPr lvl="1" marL="800280" indent="-343080" defTabSz="914400">
+              <a:lnSpc>
+                <a:spcPct val="100000"/>
+              </a:lnSpc>
+              <a:spcBef>
+                <a:spcPts val="320"/>
+              </a:spcBef>
+              <a:buClr>
+                <a:srgbClr val="000000"/>
+              </a:buClr>
+              <a:buFont typeface="Symbol"/>
+              <a:buChar char=""/>
+              <a:tabLst>
+                <a:tab algn="l" pos="1886040"/>
+              </a:tabLst>
+            </a:pPr>
+            <a:r>
+              <a:rPr b="0" lang="en-US" sz="1200" spc="-1" strike="noStrike">
+                <a:solidFill>
+                  <a:srgbClr val="000000"/>
+                </a:solidFill>
+                <a:latin typeface="Arial"/>
+                <a:ea typeface="DejaVu Sans"/>
+              </a:rPr>
+              <a:t>CodeEU-517: Article10-2-issue | VECTO-4.0.3 | Order-Nr 28208037 | HEV P1 Error Mercedes-Benz and Setra Hybrid Buses</a:t>
             </a:r>
             <a:endParaRPr b="0" lang="en-US" sz="1200" spc="-1" strike="noStrike">
               <a:solidFill>
@@ -6074,7 +6312,7 @@
         <p:spPr>
           <a:xfrm>
             <a:off x="468360" y="476640"/>
-            <a:ext cx="8211240" cy="673920"/>
+            <a:ext cx="8210880" cy="673560"/>
           </a:xfrm>
           <a:prstGeom prst="rect">
             <a:avLst/>
@@ -6106,7 +6344,7 @@
                 <a:latin typeface="Arial"/>
                 <a:ea typeface="DejaVu Sans"/>
               </a:rPr>
-              <a:t>Vecto 4.0.3.3330 OFFICIAL RELEASE</a:t>
+              <a:t>Vecto 4.1.0.3392 RELEASE CANDIDATE</a:t>
             </a:r>
             <a:br>
               <a:rPr sz="2400"/>
@@ -6119,7 +6357,7 @@
                 <a:latin typeface="Arial"/>
                 <a:ea typeface="DejaVu Sans"/>
               </a:rPr>
-              <a:t>13.02.2024</a:t>
+              <a:t>15.04.2024</a:t>
             </a:r>
             <a:endParaRPr b="0" lang="en-US" sz="1600" spc="-1" strike="noStrike">
               <a:solidFill>
@@ -6142,8 +6380,8 @@
         </p:nvSpPr>
         <p:spPr>
           <a:xfrm>
-            <a:off x="323640" y="1639080"/>
-            <a:ext cx="8489880" cy="4446720"/>
+            <a:off x="323640" y="1459080"/>
+            <a:ext cx="8489520" cy="4654440"/>
           </a:xfrm>
           <a:prstGeom prst="rect">
             <a:avLst/>
@@ -6158,6 +6396,26 @@
             <a:noAutofit/>
           </a:bodyPr>
           <a:p>
+            <a:pPr marL="343080" indent="0" defTabSz="914400">
+              <a:lnSpc>
+                <a:spcPct val="100000"/>
+              </a:lnSpc>
+              <a:spcBef>
+                <a:spcPts val="320"/>
+              </a:spcBef>
+              <a:buNone/>
+              <a:tabLst>
+                <a:tab algn="l" pos="0"/>
+              </a:tabLst>
+            </a:pPr>
+            <a:endParaRPr b="0" lang="en-US" sz="1600" spc="-1" strike="noStrike">
+              <a:solidFill>
+                <a:srgbClr val="000000"/>
+              </a:solidFill>
+              <a:latin typeface="Arial"/>
+            </a:endParaRPr>
+          </a:p>
+          <a:p>
             <a:pPr marL="343080" indent="-343080" defTabSz="914400">
               <a:lnSpc>
                 <a:spcPct val="100000"/>
@@ -6182,7 +6440,7 @@
                 <a:latin typeface="Arial"/>
                 <a:ea typeface="DejaVu Sans"/>
               </a:rPr>
-              <a:t>Bugfixes</a:t>
+              <a:t>Bugfixes (4/4)</a:t>
             </a:r>
             <a:endParaRPr b="0" lang="en-US" sz="1600" spc="-1" strike="noStrike">
               <a:solidFill>
@@ -6216,7 +6474,7 @@
                 <a:latin typeface="Arial"/>
                 <a:ea typeface="DejaVu Sans"/>
               </a:rPr>
-              <a:t>CodeEU-293: DistanceRun got an unexpected response</a:t>
+              <a:t>CodeEU-519: Article10-2-issue | VECTO-4.0.3 | Order-Nr 10098181 | HEV P1 Error Mercedes-Benz and Setra Hybrid Buses</a:t>
             </a:r>
             <a:endParaRPr b="0" lang="en-US" sz="1200" spc="-1" strike="noStrike">
               <a:solidFill>
@@ -6250,7 +6508,7 @@
                 <a:latin typeface="Arial"/>
                 <a:ea typeface="DejaVu Sans"/>
               </a:rPr>
-              <a:t>CodeEU-298: Object reference not set to an instance of an object</a:t>
+              <a:t>CodeEU-527: Article10-2-issue | VECTO-4.0.3 | Order-Nr 28196233 | HEV P1 Error Mercedes-Benz and Setra Hybrid Buses</a:t>
             </a:r>
             <a:endParaRPr b="0" lang="en-US" sz="1200" spc="-1" strike="noStrike">
               <a:solidFill>
@@ -6284,7 +6542,7 @@
                 <a:latin typeface="Arial"/>
                 <a:ea typeface="DejaVu Sans"/>
               </a:rPr>
-              <a:t>CodeEU-300: Full drive torque miscalculation</a:t>
+              <a:t>CodeEU-528: Article10-2-issue | VECTO-4.0.3 | Order-Nr 28196652 | HEV P1 Error Mercedes-Benz and Setra Hybrid Buses</a:t>
             </a:r>
             <a:endParaRPr b="0" lang="en-US" sz="1200" spc="-1" strike="noStrike">
               <a:solidFill>
@@ -6318,7 +6576,7 @@
                 <a:latin typeface="Arial"/>
                 <a:ea typeface="DejaVu Sans"/>
               </a:rPr>
-              <a:t>CodeEU-336: Feature: Hashing tool must validate the previous step data for multi-step jobs</a:t>
+              <a:t>CodeEU-338: Eco-roll only, without engine stop, impact on CO2 emission</a:t>
             </a:r>
             <a:endParaRPr b="0" lang="en-US" sz="1200" spc="-1" strike="noStrike">
               <a:solidFill>
@@ -6352,7 +6610,7 @@
                 <a:latin typeface="Arial"/>
                 <a:ea typeface="DejaVu Sans"/>
               </a:rPr>
-              <a:t>CodeEU-337: Electric Citybus - ERROR with "31a-Specific" bus configuration</a:t>
+              <a:t>CodeEU-475: XML files loading in VTP Job not OK; No auxiliary data and torque curve visible, Job can't be saved in VECTO 4.0.3.3330</a:t>
             </a:r>
             <a:endParaRPr b="0" lang="en-US" sz="1200" spc="-1" strike="noStrike">
               <a:solidFill>
@@ -6386,347 +6644,7 @@
                 <a:latin typeface="Arial"/>
                 <a:ea typeface="DejaVu Sans"/>
               </a:rPr>
-              <a:t>CodeEU-343: Cannot simulate Primary Vehicle using vectocmd.exe</a:t>
-            </a:r>
-            <a:endParaRPr b="0" lang="en-US" sz="1200" spc="-1" strike="noStrike">
-              <a:solidFill>
-                <a:srgbClr val="000000"/>
-              </a:solidFill>
-              <a:latin typeface="Arial"/>
-            </a:endParaRPr>
-          </a:p>
-          <a:p>
-            <a:pPr lvl="1" marL="800280" indent="-343080" defTabSz="914400">
-              <a:lnSpc>
-                <a:spcPct val="100000"/>
-              </a:lnSpc>
-              <a:spcBef>
-                <a:spcPts val="320"/>
-              </a:spcBef>
-              <a:buClr>
-                <a:srgbClr val="000000"/>
-              </a:buClr>
-              <a:buFont typeface="Symbol"/>
-              <a:buChar char=""/>
-              <a:tabLst>
-                <a:tab algn="l" pos="1886040"/>
-              </a:tabLst>
-            </a:pPr>
-            <a:r>
-              <a:rPr b="0" lang="en-US" sz="1200" spc="-1" strike="noStrike">
-                <a:solidFill>
-                  <a:srgbClr val="000000"/>
-                </a:solidFill>
-                <a:latin typeface="Arial"/>
-                <a:ea typeface="DejaVu Sans"/>
-              </a:rPr>
-              <a:t>CodeEU-387: VECTO sometimes fails to properly read Tyre data from primary vehicle xml</a:t>
-            </a:r>
-            <a:endParaRPr b="0" lang="en-US" sz="1200" spc="-1" strike="noStrike">
-              <a:solidFill>
-                <a:srgbClr val="000000"/>
-              </a:solidFill>
-              <a:latin typeface="Arial"/>
-            </a:endParaRPr>
-          </a:p>
-          <a:p>
-            <a:pPr lvl="1" marL="800280" indent="-343080" defTabSz="914400">
-              <a:lnSpc>
-                <a:spcPct val="100000"/>
-              </a:lnSpc>
-              <a:spcBef>
-                <a:spcPts val="320"/>
-              </a:spcBef>
-              <a:buClr>
-                <a:srgbClr val="000000"/>
-              </a:buClr>
-              <a:buFont typeface="Symbol"/>
-              <a:buChar char=""/>
-              <a:tabLst>
-                <a:tab algn="l" pos="1886040"/>
-              </a:tabLst>
-            </a:pPr>
-            <a:r>
-              <a:rPr b="0" lang="en-US" sz="1200" spc="-1" strike="noStrike">
-                <a:solidFill>
-                  <a:srgbClr val="000000"/>
-                </a:solidFill>
-                <a:latin typeface="Arial"/>
-                <a:ea typeface="DejaVu Sans"/>
-              </a:rPr>
-              <a:t>CodeEU-427: Vehicle speed resulting to exceeding max gearbox speed</a:t>
-            </a:r>
-            <a:endParaRPr b="0" lang="en-US" sz="1200" spc="-1" strike="noStrike">
-              <a:solidFill>
-                <a:srgbClr val="000000"/>
-              </a:solidFill>
-              <a:latin typeface="Arial"/>
-            </a:endParaRPr>
-          </a:p>
-          <a:p>
-            <a:pPr lvl="1" marL="800280" indent="-343080" defTabSz="914400">
-              <a:lnSpc>
-                <a:spcPct val="100000"/>
-              </a:lnSpc>
-              <a:spcBef>
-                <a:spcPts val="320"/>
-              </a:spcBef>
-              <a:buClr>
-                <a:srgbClr val="000000"/>
-              </a:buClr>
-              <a:buFont typeface="Symbol"/>
-              <a:buChar char=""/>
-              <a:tabLst>
-                <a:tab algn="l" pos="1886040"/>
-              </a:tabLst>
-            </a:pPr>
-            <a:r>
-              <a:rPr b="0" lang="en-US" sz="1200" spc="-1" strike="noStrike">
-                <a:solidFill>
-                  <a:srgbClr val="000000"/>
-                </a:solidFill>
-                <a:latin typeface="Arial"/>
-                <a:ea typeface="DejaVu Sans"/>
-              </a:rPr>
-              <a:t>CodeEU-428: Remove speed safety margin for gearbox re-engaging</a:t>
-            </a:r>
-            <a:endParaRPr b="0" lang="en-US" sz="1200" spc="-1" strike="noStrike">
-              <a:solidFill>
-                <a:srgbClr val="000000"/>
-              </a:solidFill>
-              <a:latin typeface="Arial"/>
-            </a:endParaRPr>
-          </a:p>
-          <a:p>
-            <a:pPr lvl="1" marL="800280" indent="-343080" defTabSz="914400">
-              <a:lnSpc>
-                <a:spcPct val="100000"/>
-              </a:lnSpc>
-              <a:spcBef>
-                <a:spcPts val="320"/>
-              </a:spcBef>
-              <a:buClr>
-                <a:srgbClr val="000000"/>
-              </a:buClr>
-              <a:buFont typeface="Symbol"/>
-              <a:buChar char=""/>
-              <a:tabLst>
-                <a:tab algn="l" pos="1886040"/>
-              </a:tabLst>
-            </a:pPr>
-            <a:r>
-              <a:rPr b="0" lang="en-US" sz="1200" spc="-1" strike="noStrike">
-                <a:solidFill>
-                  <a:srgbClr val="000000"/>
-                </a:solidFill>
-                <a:latin typeface="Arial"/>
-                <a:ea typeface="DejaVu Sans"/>
-              </a:rPr>
-              <a:t>CodeEU-438: Mismatch XML schema vs Regulation (exempted vehicles)</a:t>
-            </a:r>
-            <a:endParaRPr b="0" lang="en-US" sz="1200" spc="-1" strike="noStrike">
-              <a:solidFill>
-                <a:srgbClr val="000000"/>
-              </a:solidFill>
-              <a:latin typeface="Arial"/>
-            </a:endParaRPr>
-          </a:p>
-          <a:p>
-            <a:pPr lvl="1" marL="800280" indent="-343080" defTabSz="914400">
-              <a:lnSpc>
-                <a:spcPct val="100000"/>
-              </a:lnSpc>
-              <a:spcBef>
-                <a:spcPts val="320"/>
-              </a:spcBef>
-              <a:buClr>
-                <a:srgbClr val="000000"/>
-              </a:buClr>
-              <a:buFont typeface="Symbol"/>
-              <a:buChar char=""/>
-              <a:tabLst>
-                <a:tab algn="l" pos="1886040"/>
-              </a:tabLst>
-            </a:pPr>
-            <a:r>
-              <a:rPr b="0" lang="en-US" sz="1200" spc="-1" strike="noStrike">
-                <a:solidFill>
-                  <a:srgbClr val="000000"/>
-                </a:solidFill>
-                <a:latin typeface="Arial"/>
-                <a:ea typeface="DejaVu Sans"/>
-              </a:rPr>
-              <a:t>CodeEU-248: Bus P2 hybrid VECTO error in urban cycle</a:t>
-            </a:r>
-            <a:endParaRPr b="0" lang="en-US" sz="1200" spc="-1" strike="noStrike">
-              <a:solidFill>
-                <a:srgbClr val="000000"/>
-              </a:solidFill>
-              <a:latin typeface="Arial"/>
-            </a:endParaRPr>
-          </a:p>
-          <a:p>
-            <a:pPr lvl="1" marL="800280" indent="-343080" defTabSz="914400">
-              <a:lnSpc>
-                <a:spcPct val="100000"/>
-              </a:lnSpc>
-              <a:spcBef>
-                <a:spcPts val="320"/>
-              </a:spcBef>
-              <a:buClr>
-                <a:srgbClr val="000000"/>
-              </a:buClr>
-              <a:buFont typeface="Symbol"/>
-              <a:buChar char=""/>
-              <a:tabLst>
-                <a:tab algn="l" pos="1886040"/>
-              </a:tabLst>
-            </a:pPr>
-            <a:r>
-              <a:rPr b="0" lang="en-US" sz="1200" spc="-1" strike="noStrike">
-                <a:solidFill>
-                  <a:srgbClr val="000000"/>
-                </a:solidFill>
-                <a:latin typeface="Arial"/>
-                <a:ea typeface="DejaVu Sans"/>
-              </a:rPr>
-              <a:t>CodeEU-278: Simulation crash when writing fuel consumption results to reports</a:t>
-            </a:r>
-            <a:endParaRPr b="0" lang="en-US" sz="1200" spc="-1" strike="noStrike">
-              <a:solidFill>
-                <a:srgbClr val="000000"/>
-              </a:solidFill>
-              <a:latin typeface="Arial"/>
-            </a:endParaRPr>
-          </a:p>
-          <a:p>
-            <a:pPr lvl="1" marL="800280" indent="-343080" defTabSz="914400">
-              <a:lnSpc>
-                <a:spcPct val="100000"/>
-              </a:lnSpc>
-              <a:spcBef>
-                <a:spcPts val="320"/>
-              </a:spcBef>
-              <a:buClr>
-                <a:srgbClr val="000000"/>
-              </a:buClr>
-              <a:buFont typeface="Symbol"/>
-              <a:buChar char=""/>
-              <a:tabLst>
-                <a:tab algn="l" pos="1886040"/>
-              </a:tabLst>
-            </a:pPr>
-            <a:r>
-              <a:rPr b="0" lang="en-US" sz="1200" spc="-1" strike="noStrike">
-                <a:solidFill>
-                  <a:srgbClr val="000000"/>
-                </a:solidFill>
-                <a:latin typeface="Arial"/>
-                <a:ea typeface="DejaVu Sans"/>
-              </a:rPr>
-              <a:t>CodeEU-284: New error message and failed simulation obtained for P2 hybrid buses</a:t>
-            </a:r>
-            <a:endParaRPr b="0" lang="en-US" sz="1200" spc="-1" strike="noStrike">
-              <a:solidFill>
-                <a:srgbClr val="000000"/>
-              </a:solidFill>
-              <a:latin typeface="Arial"/>
-            </a:endParaRPr>
-          </a:p>
-          <a:p>
-            <a:pPr lvl="1" marL="800280" indent="-343080" defTabSz="914400">
-              <a:lnSpc>
-                <a:spcPct val="100000"/>
-              </a:lnSpc>
-              <a:spcBef>
-                <a:spcPts val="320"/>
-              </a:spcBef>
-              <a:buClr>
-                <a:srgbClr val="000000"/>
-              </a:buClr>
-              <a:buFont typeface="Symbol"/>
-              <a:buChar char=""/>
-              <a:tabLst>
-                <a:tab algn="l" pos="1886040"/>
-              </a:tabLst>
-            </a:pPr>
-            <a:r>
-              <a:rPr b="0" lang="en-US" sz="1200" spc="-1" strike="noStrike">
-                <a:solidFill>
-                  <a:srgbClr val="000000"/>
-                </a:solidFill>
-                <a:latin typeface="Arial"/>
-                <a:ea typeface="DejaVu Sans"/>
-              </a:rPr>
-              <a:t>CodeEU-285: PEV vehicle error in routine to write the results with new vecto version  4.0.2.3275</a:t>
-            </a:r>
-            <a:endParaRPr b="0" lang="en-US" sz="1200" spc="-1" strike="noStrike">
-              <a:solidFill>
-                <a:srgbClr val="000000"/>
-              </a:solidFill>
-              <a:latin typeface="Arial"/>
-            </a:endParaRPr>
-          </a:p>
-          <a:p>
-            <a:pPr lvl="1" marL="800280" indent="-343080" defTabSz="914400">
-              <a:lnSpc>
-                <a:spcPct val="100000"/>
-              </a:lnSpc>
-              <a:spcBef>
-                <a:spcPts val="320"/>
-              </a:spcBef>
-              <a:buClr>
-                <a:srgbClr val="000000"/>
-              </a:buClr>
-              <a:buFont typeface="Symbol"/>
-              <a:buChar char=""/>
-              <a:tabLst>
-                <a:tab algn="l" pos="1886040"/>
-              </a:tabLst>
-            </a:pPr>
-            <a:r>
-              <a:rPr b="0" lang="en-US" sz="1200" spc="-1" strike="noStrike">
-                <a:solidFill>
-                  <a:srgbClr val="000000"/>
-                </a:solidFill>
-                <a:latin typeface="Arial"/>
-                <a:ea typeface="DejaVu Sans"/>
-              </a:rPr>
-              <a:t>CodeEU-287: PEV_IEPC error message:"can only operate on SI Objects with the same unit"</a:t>
-            </a:r>
-            <a:endParaRPr b="0" lang="en-US" sz="1200" spc="-1" strike="noStrike">
-              <a:solidFill>
-                <a:srgbClr val="000000"/>
-              </a:solidFill>
-              <a:latin typeface="Arial"/>
-            </a:endParaRPr>
-          </a:p>
-          <a:p>
-            <a:pPr lvl="1" marL="800280" indent="-343080" defTabSz="914400">
-              <a:lnSpc>
-                <a:spcPct val="100000"/>
-              </a:lnSpc>
-              <a:spcBef>
-                <a:spcPts val="320"/>
-              </a:spcBef>
-              <a:buClr>
-                <a:srgbClr val="000000"/>
-              </a:buClr>
-              <a:buFont typeface="Symbol"/>
-              <a:buChar char=""/>
-              <a:tabLst>
-                <a:tab algn="l" pos="1886040"/>
-              </a:tabLst>
-            </a:pPr>
-            <a:r>
-              <a:rPr b="0" lang="en-US" sz="1200" spc="-1" strike="noStrike">
-                <a:solidFill>
-                  <a:srgbClr val="000000"/>
-                </a:solidFill>
-                <a:latin typeface="Arial"/>
-                <a:ea typeface="DejaVu Sans"/>
-              </a:rPr>
-              <a:t>CodeEU-289: VECTO Simulation Error for bus with validated input data</a:t>
+              <a:t>CodeEU-610: VTP mode is broken due to changes in the Clutch component.</a:t>
             </a:r>
             <a:endParaRPr b="0" lang="en-US" sz="1200" spc="-1" strike="noStrike">
               <a:solidFill>
@@ -6780,7 +6698,7 @@
         <p:spPr>
           <a:xfrm>
             <a:off x="468360" y="476640"/>
-            <a:ext cx="8211240" cy="673920"/>
+            <a:ext cx="8210880" cy="673560"/>
           </a:xfrm>
           <a:prstGeom prst="rect">
             <a:avLst/>
@@ -6812,7 +6730,7 @@
                 <a:latin typeface="Arial"/>
                 <a:ea typeface="DejaVu Sans"/>
               </a:rPr>
-              <a:t>Vecto 4.0.2.3275 OFFICIAL RELEASE</a:t>
+              <a:t>Vecto 4.0.3.3330 OFFICIAL RELEASE</a:t>
             </a:r>
             <a:br>
               <a:rPr sz="2400"/>
@@ -6825,7 +6743,7 @@
                 <a:latin typeface="Arial"/>
                 <a:ea typeface="DejaVu Sans"/>
               </a:rPr>
-              <a:t>20.12.2023</a:t>
+              <a:t>13.02.2024</a:t>
             </a:r>
             <a:endParaRPr b="0" lang="en-US" sz="1600" spc="-1" strike="noStrike">
               <a:solidFill>
@@ -6849,7 +6767,7 @@
         <p:spPr>
           <a:xfrm>
             <a:off x="323640" y="1639080"/>
-            <a:ext cx="8489880" cy="4446720"/>
+            <a:ext cx="8489520" cy="4446360"/>
           </a:xfrm>
           <a:prstGeom prst="rect">
             <a:avLst/>
@@ -6888,7 +6806,7 @@
                 <a:latin typeface="Arial"/>
                 <a:ea typeface="DejaVu Sans"/>
               </a:rPr>
-              <a:t>Hotfix</a:t>
+              <a:t>Bugfixes</a:t>
             </a:r>
             <a:endParaRPr b="0" lang="en-US" sz="1600" spc="-1" strike="noStrike">
               <a:solidFill>
@@ -6922,7 +6840,7 @@
                 <a:latin typeface="Arial"/>
                 <a:ea typeface="DejaVu Sans"/>
               </a:rPr>
-              <a:t>CodeEU-273, CodeEU-274: Changes in the AMT shift strategy regarding idling speed caused simulation aborts</a:t>
+              <a:t>CodeEU-293: DistanceRun got an unexpected response</a:t>
             </a:r>
             <a:endParaRPr b="0" lang="en-US" sz="1200" spc="-1" strike="noStrike">
               <a:solidFill>
@@ -6956,7 +6874,483 @@
                 <a:latin typeface="Arial"/>
                 <a:ea typeface="DejaVu Sans"/>
               </a:rPr>
-              <a:t>CodeEU-260: regression fix handling overload buffer</a:t>
+              <a:t>CodeEU-298: Object reference not set to an instance of an object</a:t>
+            </a:r>
+            <a:endParaRPr b="0" lang="en-US" sz="1200" spc="-1" strike="noStrike">
+              <a:solidFill>
+                <a:srgbClr val="000000"/>
+              </a:solidFill>
+              <a:latin typeface="Arial"/>
+            </a:endParaRPr>
+          </a:p>
+          <a:p>
+            <a:pPr lvl="1" marL="800280" indent="-343080" defTabSz="914400">
+              <a:lnSpc>
+                <a:spcPct val="100000"/>
+              </a:lnSpc>
+              <a:spcBef>
+                <a:spcPts val="320"/>
+              </a:spcBef>
+              <a:buClr>
+                <a:srgbClr val="000000"/>
+              </a:buClr>
+              <a:buFont typeface="Symbol"/>
+              <a:buChar char=""/>
+              <a:tabLst>
+                <a:tab algn="l" pos="1886040"/>
+              </a:tabLst>
+            </a:pPr>
+            <a:r>
+              <a:rPr b="0" lang="en-US" sz="1200" spc="-1" strike="noStrike">
+                <a:solidFill>
+                  <a:srgbClr val="000000"/>
+                </a:solidFill>
+                <a:latin typeface="Arial"/>
+                <a:ea typeface="DejaVu Sans"/>
+              </a:rPr>
+              <a:t>CodeEU-300: Full drive torque miscalculation</a:t>
+            </a:r>
+            <a:endParaRPr b="0" lang="en-US" sz="1200" spc="-1" strike="noStrike">
+              <a:solidFill>
+                <a:srgbClr val="000000"/>
+              </a:solidFill>
+              <a:latin typeface="Arial"/>
+            </a:endParaRPr>
+          </a:p>
+          <a:p>
+            <a:pPr lvl="1" marL="800280" indent="-343080" defTabSz="914400">
+              <a:lnSpc>
+                <a:spcPct val="100000"/>
+              </a:lnSpc>
+              <a:spcBef>
+                <a:spcPts val="320"/>
+              </a:spcBef>
+              <a:buClr>
+                <a:srgbClr val="000000"/>
+              </a:buClr>
+              <a:buFont typeface="Symbol"/>
+              <a:buChar char=""/>
+              <a:tabLst>
+                <a:tab algn="l" pos="1886040"/>
+              </a:tabLst>
+            </a:pPr>
+            <a:r>
+              <a:rPr b="0" lang="en-US" sz="1200" spc="-1" strike="noStrike">
+                <a:solidFill>
+                  <a:srgbClr val="000000"/>
+                </a:solidFill>
+                <a:latin typeface="Arial"/>
+                <a:ea typeface="DejaVu Sans"/>
+              </a:rPr>
+              <a:t>CodeEU-336: Feature: Hashing tool must validate the previous step data for multi-step jobs</a:t>
+            </a:r>
+            <a:endParaRPr b="0" lang="en-US" sz="1200" spc="-1" strike="noStrike">
+              <a:solidFill>
+                <a:srgbClr val="000000"/>
+              </a:solidFill>
+              <a:latin typeface="Arial"/>
+            </a:endParaRPr>
+          </a:p>
+          <a:p>
+            <a:pPr lvl="1" marL="800280" indent="-343080" defTabSz="914400">
+              <a:lnSpc>
+                <a:spcPct val="100000"/>
+              </a:lnSpc>
+              <a:spcBef>
+                <a:spcPts val="320"/>
+              </a:spcBef>
+              <a:buClr>
+                <a:srgbClr val="000000"/>
+              </a:buClr>
+              <a:buFont typeface="Symbol"/>
+              <a:buChar char=""/>
+              <a:tabLst>
+                <a:tab algn="l" pos="1886040"/>
+              </a:tabLst>
+            </a:pPr>
+            <a:r>
+              <a:rPr b="0" lang="en-US" sz="1200" spc="-1" strike="noStrike">
+                <a:solidFill>
+                  <a:srgbClr val="000000"/>
+                </a:solidFill>
+                <a:latin typeface="Arial"/>
+                <a:ea typeface="DejaVu Sans"/>
+              </a:rPr>
+              <a:t>CodeEU-337: Electric Citybus - ERROR with "31a-Specific" bus configuration</a:t>
+            </a:r>
+            <a:endParaRPr b="0" lang="en-US" sz="1200" spc="-1" strike="noStrike">
+              <a:solidFill>
+                <a:srgbClr val="000000"/>
+              </a:solidFill>
+              <a:latin typeface="Arial"/>
+            </a:endParaRPr>
+          </a:p>
+          <a:p>
+            <a:pPr lvl="1" marL="800280" indent="-343080" defTabSz="914400">
+              <a:lnSpc>
+                <a:spcPct val="100000"/>
+              </a:lnSpc>
+              <a:spcBef>
+                <a:spcPts val="320"/>
+              </a:spcBef>
+              <a:buClr>
+                <a:srgbClr val="000000"/>
+              </a:buClr>
+              <a:buFont typeface="Symbol"/>
+              <a:buChar char=""/>
+              <a:tabLst>
+                <a:tab algn="l" pos="1886040"/>
+              </a:tabLst>
+            </a:pPr>
+            <a:r>
+              <a:rPr b="0" lang="en-US" sz="1200" spc="-1" strike="noStrike">
+                <a:solidFill>
+                  <a:srgbClr val="000000"/>
+                </a:solidFill>
+                <a:latin typeface="Arial"/>
+                <a:ea typeface="DejaVu Sans"/>
+              </a:rPr>
+              <a:t>CodeEU-343: Cannot simulate Primary Vehicle using vectocmd.exe</a:t>
+            </a:r>
+            <a:endParaRPr b="0" lang="en-US" sz="1200" spc="-1" strike="noStrike">
+              <a:solidFill>
+                <a:srgbClr val="000000"/>
+              </a:solidFill>
+              <a:latin typeface="Arial"/>
+            </a:endParaRPr>
+          </a:p>
+          <a:p>
+            <a:pPr lvl="1" marL="800280" indent="-343080" defTabSz="914400">
+              <a:lnSpc>
+                <a:spcPct val="100000"/>
+              </a:lnSpc>
+              <a:spcBef>
+                <a:spcPts val="320"/>
+              </a:spcBef>
+              <a:buClr>
+                <a:srgbClr val="000000"/>
+              </a:buClr>
+              <a:buFont typeface="Symbol"/>
+              <a:buChar char=""/>
+              <a:tabLst>
+                <a:tab algn="l" pos="1886040"/>
+              </a:tabLst>
+            </a:pPr>
+            <a:r>
+              <a:rPr b="0" lang="en-US" sz="1200" spc="-1" strike="noStrike">
+                <a:solidFill>
+                  <a:srgbClr val="000000"/>
+                </a:solidFill>
+                <a:latin typeface="Arial"/>
+                <a:ea typeface="DejaVu Sans"/>
+              </a:rPr>
+              <a:t>CodeEU-387: VECTO sometimes fails to properly read Tyre data from primary vehicle xml</a:t>
+            </a:r>
+            <a:endParaRPr b="0" lang="en-US" sz="1200" spc="-1" strike="noStrike">
+              <a:solidFill>
+                <a:srgbClr val="000000"/>
+              </a:solidFill>
+              <a:latin typeface="Arial"/>
+            </a:endParaRPr>
+          </a:p>
+          <a:p>
+            <a:pPr lvl="1" marL="800280" indent="-343080" defTabSz="914400">
+              <a:lnSpc>
+                <a:spcPct val="100000"/>
+              </a:lnSpc>
+              <a:spcBef>
+                <a:spcPts val="320"/>
+              </a:spcBef>
+              <a:buClr>
+                <a:srgbClr val="000000"/>
+              </a:buClr>
+              <a:buFont typeface="Symbol"/>
+              <a:buChar char=""/>
+              <a:tabLst>
+                <a:tab algn="l" pos="1886040"/>
+              </a:tabLst>
+            </a:pPr>
+            <a:r>
+              <a:rPr b="0" lang="en-US" sz="1200" spc="-1" strike="noStrike">
+                <a:solidFill>
+                  <a:srgbClr val="000000"/>
+                </a:solidFill>
+                <a:latin typeface="Arial"/>
+                <a:ea typeface="DejaVu Sans"/>
+              </a:rPr>
+              <a:t>CodeEU-427: Vehicle speed resulting to exceeding max gearbox speed</a:t>
+            </a:r>
+            <a:endParaRPr b="0" lang="en-US" sz="1200" spc="-1" strike="noStrike">
+              <a:solidFill>
+                <a:srgbClr val="000000"/>
+              </a:solidFill>
+              <a:latin typeface="Arial"/>
+            </a:endParaRPr>
+          </a:p>
+          <a:p>
+            <a:pPr lvl="1" marL="800280" indent="-343080" defTabSz="914400">
+              <a:lnSpc>
+                <a:spcPct val="100000"/>
+              </a:lnSpc>
+              <a:spcBef>
+                <a:spcPts val="320"/>
+              </a:spcBef>
+              <a:buClr>
+                <a:srgbClr val="000000"/>
+              </a:buClr>
+              <a:buFont typeface="Symbol"/>
+              <a:buChar char=""/>
+              <a:tabLst>
+                <a:tab algn="l" pos="1886040"/>
+              </a:tabLst>
+            </a:pPr>
+            <a:r>
+              <a:rPr b="0" lang="en-US" sz="1200" spc="-1" strike="noStrike">
+                <a:solidFill>
+                  <a:srgbClr val="000000"/>
+                </a:solidFill>
+                <a:latin typeface="Arial"/>
+                <a:ea typeface="DejaVu Sans"/>
+              </a:rPr>
+              <a:t>CodeEU-428: Remove speed safety margin for gearbox re-engaging</a:t>
+            </a:r>
+            <a:endParaRPr b="0" lang="en-US" sz="1200" spc="-1" strike="noStrike">
+              <a:solidFill>
+                <a:srgbClr val="000000"/>
+              </a:solidFill>
+              <a:latin typeface="Arial"/>
+            </a:endParaRPr>
+          </a:p>
+          <a:p>
+            <a:pPr lvl="1" marL="800280" indent="-343080" defTabSz="914400">
+              <a:lnSpc>
+                <a:spcPct val="100000"/>
+              </a:lnSpc>
+              <a:spcBef>
+                <a:spcPts val="320"/>
+              </a:spcBef>
+              <a:buClr>
+                <a:srgbClr val="000000"/>
+              </a:buClr>
+              <a:buFont typeface="Symbol"/>
+              <a:buChar char=""/>
+              <a:tabLst>
+                <a:tab algn="l" pos="1886040"/>
+              </a:tabLst>
+            </a:pPr>
+            <a:r>
+              <a:rPr b="0" lang="en-US" sz="1200" spc="-1" strike="noStrike">
+                <a:solidFill>
+                  <a:srgbClr val="000000"/>
+                </a:solidFill>
+                <a:latin typeface="Arial"/>
+                <a:ea typeface="DejaVu Sans"/>
+              </a:rPr>
+              <a:t>CodeEU-438: Mismatch XML schema vs Regulation (exempted vehicles)</a:t>
+            </a:r>
+            <a:endParaRPr b="0" lang="en-US" sz="1200" spc="-1" strike="noStrike">
+              <a:solidFill>
+                <a:srgbClr val="000000"/>
+              </a:solidFill>
+              <a:latin typeface="Arial"/>
+            </a:endParaRPr>
+          </a:p>
+          <a:p>
+            <a:pPr lvl="1" marL="800280" indent="-343080" defTabSz="914400">
+              <a:lnSpc>
+                <a:spcPct val="100000"/>
+              </a:lnSpc>
+              <a:spcBef>
+                <a:spcPts val="320"/>
+              </a:spcBef>
+              <a:buClr>
+                <a:srgbClr val="000000"/>
+              </a:buClr>
+              <a:buFont typeface="Symbol"/>
+              <a:buChar char=""/>
+              <a:tabLst>
+                <a:tab algn="l" pos="1886040"/>
+              </a:tabLst>
+            </a:pPr>
+            <a:r>
+              <a:rPr b="0" lang="en-US" sz="1200" spc="-1" strike="noStrike">
+                <a:solidFill>
+                  <a:srgbClr val="000000"/>
+                </a:solidFill>
+                <a:latin typeface="Arial"/>
+                <a:ea typeface="DejaVu Sans"/>
+              </a:rPr>
+              <a:t>CodeEU-248: Bus P2 hybrid VECTO error in urban cycle</a:t>
+            </a:r>
+            <a:endParaRPr b="0" lang="en-US" sz="1200" spc="-1" strike="noStrike">
+              <a:solidFill>
+                <a:srgbClr val="000000"/>
+              </a:solidFill>
+              <a:latin typeface="Arial"/>
+            </a:endParaRPr>
+          </a:p>
+          <a:p>
+            <a:pPr lvl="1" marL="800280" indent="-343080" defTabSz="914400">
+              <a:lnSpc>
+                <a:spcPct val="100000"/>
+              </a:lnSpc>
+              <a:spcBef>
+                <a:spcPts val="320"/>
+              </a:spcBef>
+              <a:buClr>
+                <a:srgbClr val="000000"/>
+              </a:buClr>
+              <a:buFont typeface="Symbol"/>
+              <a:buChar char=""/>
+              <a:tabLst>
+                <a:tab algn="l" pos="1886040"/>
+              </a:tabLst>
+            </a:pPr>
+            <a:r>
+              <a:rPr b="0" lang="en-US" sz="1200" spc="-1" strike="noStrike">
+                <a:solidFill>
+                  <a:srgbClr val="000000"/>
+                </a:solidFill>
+                <a:latin typeface="Arial"/>
+                <a:ea typeface="DejaVu Sans"/>
+              </a:rPr>
+              <a:t>CodeEU-278: Simulation crash when writing fuel consumption results to reports</a:t>
+            </a:r>
+            <a:endParaRPr b="0" lang="en-US" sz="1200" spc="-1" strike="noStrike">
+              <a:solidFill>
+                <a:srgbClr val="000000"/>
+              </a:solidFill>
+              <a:latin typeface="Arial"/>
+            </a:endParaRPr>
+          </a:p>
+          <a:p>
+            <a:pPr lvl="1" marL="800280" indent="-343080" defTabSz="914400">
+              <a:lnSpc>
+                <a:spcPct val="100000"/>
+              </a:lnSpc>
+              <a:spcBef>
+                <a:spcPts val="320"/>
+              </a:spcBef>
+              <a:buClr>
+                <a:srgbClr val="000000"/>
+              </a:buClr>
+              <a:buFont typeface="Symbol"/>
+              <a:buChar char=""/>
+              <a:tabLst>
+                <a:tab algn="l" pos="1886040"/>
+              </a:tabLst>
+            </a:pPr>
+            <a:r>
+              <a:rPr b="0" lang="en-US" sz="1200" spc="-1" strike="noStrike">
+                <a:solidFill>
+                  <a:srgbClr val="000000"/>
+                </a:solidFill>
+                <a:latin typeface="Arial"/>
+                <a:ea typeface="DejaVu Sans"/>
+              </a:rPr>
+              <a:t>CodeEU-284: New error message and failed simulation obtained for P2 hybrid buses</a:t>
+            </a:r>
+            <a:endParaRPr b="0" lang="en-US" sz="1200" spc="-1" strike="noStrike">
+              <a:solidFill>
+                <a:srgbClr val="000000"/>
+              </a:solidFill>
+              <a:latin typeface="Arial"/>
+            </a:endParaRPr>
+          </a:p>
+          <a:p>
+            <a:pPr lvl="1" marL="800280" indent="-343080" defTabSz="914400">
+              <a:lnSpc>
+                <a:spcPct val="100000"/>
+              </a:lnSpc>
+              <a:spcBef>
+                <a:spcPts val="320"/>
+              </a:spcBef>
+              <a:buClr>
+                <a:srgbClr val="000000"/>
+              </a:buClr>
+              <a:buFont typeface="Symbol"/>
+              <a:buChar char=""/>
+              <a:tabLst>
+                <a:tab algn="l" pos="1886040"/>
+              </a:tabLst>
+            </a:pPr>
+            <a:r>
+              <a:rPr b="0" lang="en-US" sz="1200" spc="-1" strike="noStrike">
+                <a:solidFill>
+                  <a:srgbClr val="000000"/>
+                </a:solidFill>
+                <a:latin typeface="Arial"/>
+                <a:ea typeface="DejaVu Sans"/>
+              </a:rPr>
+              <a:t>CodeEU-285: PEV vehicle error in routine to write the results with new vecto version  4.0.2.3275</a:t>
+            </a:r>
+            <a:endParaRPr b="0" lang="en-US" sz="1200" spc="-1" strike="noStrike">
+              <a:solidFill>
+                <a:srgbClr val="000000"/>
+              </a:solidFill>
+              <a:latin typeface="Arial"/>
+            </a:endParaRPr>
+          </a:p>
+          <a:p>
+            <a:pPr lvl="1" marL="800280" indent="-343080" defTabSz="914400">
+              <a:lnSpc>
+                <a:spcPct val="100000"/>
+              </a:lnSpc>
+              <a:spcBef>
+                <a:spcPts val="320"/>
+              </a:spcBef>
+              <a:buClr>
+                <a:srgbClr val="000000"/>
+              </a:buClr>
+              <a:buFont typeface="Symbol"/>
+              <a:buChar char=""/>
+              <a:tabLst>
+                <a:tab algn="l" pos="1886040"/>
+              </a:tabLst>
+            </a:pPr>
+            <a:r>
+              <a:rPr b="0" lang="en-US" sz="1200" spc="-1" strike="noStrike">
+                <a:solidFill>
+                  <a:srgbClr val="000000"/>
+                </a:solidFill>
+                <a:latin typeface="Arial"/>
+                <a:ea typeface="DejaVu Sans"/>
+              </a:rPr>
+              <a:t>CodeEU-287: PEV_IEPC error message:"can only operate on SI Objects with the same unit"</a:t>
+            </a:r>
+            <a:endParaRPr b="0" lang="en-US" sz="1200" spc="-1" strike="noStrike">
+              <a:solidFill>
+                <a:srgbClr val="000000"/>
+              </a:solidFill>
+              <a:latin typeface="Arial"/>
+            </a:endParaRPr>
+          </a:p>
+          <a:p>
+            <a:pPr lvl="1" marL="800280" indent="-343080" defTabSz="914400">
+              <a:lnSpc>
+                <a:spcPct val="100000"/>
+              </a:lnSpc>
+              <a:spcBef>
+                <a:spcPts val="320"/>
+              </a:spcBef>
+              <a:buClr>
+                <a:srgbClr val="000000"/>
+              </a:buClr>
+              <a:buFont typeface="Symbol"/>
+              <a:buChar char=""/>
+              <a:tabLst>
+                <a:tab algn="l" pos="1886040"/>
+              </a:tabLst>
+            </a:pPr>
+            <a:r>
+              <a:rPr b="0" lang="en-US" sz="1200" spc="-1" strike="noStrike">
+                <a:solidFill>
+                  <a:srgbClr val="000000"/>
+                </a:solidFill>
+                <a:latin typeface="Arial"/>
+                <a:ea typeface="DejaVu Sans"/>
+              </a:rPr>
+              <a:t>CodeEU-289: VECTO Simulation Error for bus with validated input data</a:t>
             </a:r>
             <a:endParaRPr b="0" lang="en-US" sz="1200" spc="-1" strike="noStrike">
               <a:solidFill>
@@ -7010,7 +7404,7 @@
         <p:spPr>
           <a:xfrm>
             <a:off x="468360" y="476640"/>
-            <a:ext cx="8211240" cy="673920"/>
+            <a:ext cx="8210880" cy="673560"/>
           </a:xfrm>
           <a:prstGeom prst="rect">
             <a:avLst/>
@@ -7042,7 +7436,7 @@
                 <a:latin typeface="Arial"/>
                 <a:ea typeface="DejaVu Sans"/>
               </a:rPr>
-              <a:t>Vecto 4.0.2.3273 OFFICIAL RELEASE</a:t>
+              <a:t>Vecto 4.0.2.3275 OFFICIAL RELEASE</a:t>
             </a:r>
             <a:br>
               <a:rPr sz="2400"/>
@@ -7055,7 +7449,7 @@
                 <a:latin typeface="Arial"/>
                 <a:ea typeface="DejaVu Sans"/>
               </a:rPr>
-              <a:t>18.12.2023</a:t>
+              <a:t>20.12.2023</a:t>
             </a:r>
             <a:endParaRPr b="0" lang="en-US" sz="1600" spc="-1" strike="noStrike">
               <a:solidFill>
@@ -7078,8 +7472,8 @@
         </p:nvSpPr>
         <p:spPr>
           <a:xfrm>
-            <a:off x="323640" y="1268640"/>
-            <a:ext cx="8489880" cy="4817160"/>
+            <a:off x="323640" y="1639080"/>
+            <a:ext cx="8489520" cy="4446360"/>
           </a:xfrm>
           <a:prstGeom prst="rect">
             <a:avLst/>
@@ -7118,7 +7512,7 @@
                 <a:latin typeface="Arial"/>
                 <a:ea typeface="DejaVu Sans"/>
               </a:rPr>
-              <a:t>Bugfixes (1/2)</a:t>
+              <a:t>Hotfix</a:t>
             </a:r>
             <a:endParaRPr b="0" lang="en-US" sz="1600" spc="-1" strike="noStrike">
               <a:solidFill>
@@ -7152,7 +7546,7 @@
                 <a:latin typeface="Arial"/>
                 <a:ea typeface="DejaVu Sans"/>
               </a:rPr>
-              <a:t>CodeEU-94: DistanceRun got an unexpected response</a:t>
+              <a:t>CodeEU-273, CodeEU-274: Changes in the AMT shift strategy regarding idling speed caused simulation aborts</a:t>
             </a:r>
             <a:endParaRPr b="0" lang="en-US" sz="1200" spc="-1" strike="noStrike">
               <a:solidFill>
@@ -7186,604 +7580,9 @@
                 <a:latin typeface="Arial"/>
                 <a:ea typeface="DejaVu Sans"/>
               </a:rPr>
-              <a:t>CodeEU-153: DrivingActionAccelerate: Failed to find operating point after Overload</a:t>
+              <a:t>CodeEU-260: regression fix handling overload buffer</a:t>
             </a:r>
             <a:endParaRPr b="0" lang="en-US" sz="1200" spc="-1" strike="noStrike">
-              <a:solidFill>
-                <a:srgbClr val="000000"/>
-              </a:solidFill>
-              <a:latin typeface="Arial"/>
-            </a:endParaRPr>
-          </a:p>
-          <a:p>
-            <a:pPr lvl="1" marL="800280" indent="-343080" defTabSz="914400">
-              <a:lnSpc>
-                <a:spcPct val="100000"/>
-              </a:lnSpc>
-              <a:spcBef>
-                <a:spcPts val="320"/>
-              </a:spcBef>
-              <a:buClr>
-                <a:srgbClr val="000000"/>
-              </a:buClr>
-              <a:buFont typeface="Symbol"/>
-              <a:buChar char=""/>
-              <a:tabLst>
-                <a:tab algn="l" pos="1886040"/>
-              </a:tabLst>
-            </a:pPr>
-            <a:r>
-              <a:rPr b="0" lang="en-US" sz="1200" spc="-1" strike="noStrike">
-                <a:solidFill>
-                  <a:srgbClr val="000000"/>
-                </a:solidFill>
-                <a:latin typeface="Arial"/>
-                <a:ea typeface="DejaVu Sans"/>
-              </a:rPr>
-              <a:t>CodeEU-158: Urban RefLoad DrivingActionAccelerate: Failed to find operating point (IEPC Wheelhub 1 measured)</a:t>
-            </a:r>
-            <a:endParaRPr b="0" lang="en-US" sz="1200" spc="-1" strike="noStrike">
-              <a:solidFill>
-                <a:srgbClr val="000000"/>
-              </a:solidFill>
-              <a:latin typeface="Arial"/>
-            </a:endParaRPr>
-          </a:p>
-          <a:p>
-            <a:pPr lvl="1" marL="800280" indent="-343080" defTabSz="914400">
-              <a:lnSpc>
-                <a:spcPct val="100000"/>
-              </a:lnSpc>
-              <a:spcBef>
-                <a:spcPts val="320"/>
-              </a:spcBef>
-              <a:buClr>
-                <a:srgbClr val="000000"/>
-              </a:buClr>
-              <a:buFont typeface="Symbol"/>
-              <a:buChar char=""/>
-              <a:tabLst>
-                <a:tab algn="l" pos="1886040"/>
-              </a:tabLst>
-            </a:pPr>
-            <a:r>
-              <a:rPr b="0" lang="en-US" sz="1200" spc="-1" strike="noStrike">
-                <a:solidFill>
-                  <a:srgbClr val="000000"/>
-                </a:solidFill>
-                <a:latin typeface="Arial"/>
-                <a:ea typeface="DejaVu Sans"/>
-              </a:rPr>
-              <a:t>CodeEU-168: Vecto Declaration Simulation with P1-Hybrid shows multiple errors - Simulation Aborts!</a:t>
-            </a:r>
-            <a:endParaRPr b="0" lang="en-US" sz="1200" spc="-1" strike="noStrike">
-              <a:solidFill>
-                <a:srgbClr val="000000"/>
-              </a:solidFill>
-              <a:latin typeface="Arial"/>
-            </a:endParaRPr>
-          </a:p>
-          <a:p>
-            <a:pPr lvl="1" marL="800280" indent="-343080" defTabSz="914400">
-              <a:lnSpc>
-                <a:spcPct val="100000"/>
-              </a:lnSpc>
-              <a:spcBef>
-                <a:spcPts val="320"/>
-              </a:spcBef>
-              <a:buClr>
-                <a:srgbClr val="000000"/>
-              </a:buClr>
-              <a:buFont typeface="Symbol"/>
-              <a:buChar char=""/>
-              <a:tabLst>
-                <a:tab algn="l" pos="1886040"/>
-              </a:tabLst>
-            </a:pPr>
-            <a:r>
-              <a:rPr b="0" lang="en-US" sz="1200" spc="-1" strike="noStrike">
-                <a:solidFill>
-                  <a:srgbClr val="000000"/>
-                </a:solidFill>
-                <a:latin typeface="Arial"/>
-                <a:ea typeface="DejaVu Sans"/>
-              </a:rPr>
-              <a:t>CodeEU-191: Boosting limits HEV ovc are not working</a:t>
-            </a:r>
-            <a:endParaRPr b="0" lang="en-US" sz="1200" spc="-1" strike="noStrike">
-              <a:solidFill>
-                <a:srgbClr val="000000"/>
-              </a:solidFill>
-              <a:latin typeface="Arial"/>
-            </a:endParaRPr>
-          </a:p>
-          <a:p>
-            <a:pPr lvl="1" marL="800280" indent="-343080" defTabSz="914400">
-              <a:lnSpc>
-                <a:spcPct val="100000"/>
-              </a:lnSpc>
-              <a:spcBef>
-                <a:spcPts val="320"/>
-              </a:spcBef>
-              <a:buClr>
-                <a:srgbClr val="000000"/>
-              </a:buClr>
-              <a:buFont typeface="Symbol"/>
-              <a:buChar char=""/>
-              <a:tabLst>
-                <a:tab algn="l" pos="1886040"/>
-              </a:tabLst>
-            </a:pPr>
-            <a:r>
-              <a:rPr b="0" lang="en-US" sz="1200" spc="-1" strike="noStrike">
-                <a:solidFill>
-                  <a:srgbClr val="000000"/>
-                </a:solidFill>
-                <a:latin typeface="Arial"/>
-                <a:ea typeface="DejaVu Sans"/>
-              </a:rPr>
-              <a:t>CodeEU-202: EMS Standard Values: Continuous/Overload Torque 0 Nm</a:t>
-            </a:r>
-            <a:endParaRPr b="0" lang="en-US" sz="1200" spc="-1" strike="noStrike">
-              <a:solidFill>
-                <a:srgbClr val="000000"/>
-              </a:solidFill>
-              <a:latin typeface="Arial"/>
-            </a:endParaRPr>
-          </a:p>
-          <a:p>
-            <a:pPr lvl="1" marL="800280" indent="-343080" defTabSz="914400">
-              <a:lnSpc>
-                <a:spcPct val="100000"/>
-              </a:lnSpc>
-              <a:spcBef>
-                <a:spcPts val="320"/>
-              </a:spcBef>
-              <a:buClr>
-                <a:srgbClr val="000000"/>
-              </a:buClr>
-              <a:buFont typeface="Symbol"/>
-              <a:buChar char=""/>
-              <a:tabLst>
-                <a:tab algn="l" pos="1886040"/>
-              </a:tabLst>
-            </a:pPr>
-            <a:r>
-              <a:rPr b="0" lang="en-US" sz="1200" spc="-1" strike="noStrike">
-                <a:solidFill>
-                  <a:srgbClr val="000000"/>
-                </a:solidFill>
-                <a:latin typeface="Arial"/>
-                <a:ea typeface="DejaVu Sans"/>
-              </a:rPr>
-              <a:t>CodeEU-203: HybridStrategy error for IHPC type 1 hybrid lorry</a:t>
-            </a:r>
-            <a:endParaRPr b="0" lang="en-US" sz="1200" spc="-1" strike="noStrike">
-              <a:solidFill>
-                <a:srgbClr val="000000"/>
-              </a:solidFill>
-              <a:latin typeface="Arial"/>
-            </a:endParaRPr>
-          </a:p>
-          <a:p>
-            <a:pPr lvl="1" marL="800280" indent="-343080" defTabSz="914400">
-              <a:lnSpc>
-                <a:spcPct val="100000"/>
-              </a:lnSpc>
-              <a:spcBef>
-                <a:spcPts val="320"/>
-              </a:spcBef>
-              <a:buClr>
-                <a:srgbClr val="000000"/>
-              </a:buClr>
-              <a:buFont typeface="Symbol"/>
-              <a:buChar char=""/>
-              <a:tabLst>
-                <a:tab algn="l" pos="1886040"/>
-              </a:tabLst>
-            </a:pPr>
-            <a:r>
-              <a:rPr b="0" lang="en-US" sz="1200" spc="-1" strike="noStrike">
-                <a:solidFill>
-                  <a:srgbClr val="000000"/>
-                </a:solidFill>
-                <a:latin typeface="Arial"/>
-                <a:ea typeface="DejaVu Sans"/>
-              </a:rPr>
-              <a:t>CodeEU-206: VTP + PEMS test done by Renault Trucks France - VECTO tool errors most probably linked to automatic gearbox (with torque converter)</a:t>
-            </a:r>
-            <a:endParaRPr b="0" lang="en-US" sz="1200" spc="-1" strike="noStrike">
-              <a:solidFill>
-                <a:srgbClr val="000000"/>
-              </a:solidFill>
-              <a:latin typeface="Arial"/>
-            </a:endParaRPr>
-          </a:p>
-          <a:p>
-            <a:pPr lvl="1" marL="800280" indent="-343080" defTabSz="914400">
-              <a:lnSpc>
-                <a:spcPct val="100000"/>
-              </a:lnSpc>
-              <a:spcBef>
-                <a:spcPts val="320"/>
-              </a:spcBef>
-              <a:buClr>
-                <a:srgbClr val="000000"/>
-              </a:buClr>
-              <a:buFont typeface="Symbol"/>
-              <a:buChar char=""/>
-              <a:tabLst>
-                <a:tab algn="l" pos="1886040"/>
-              </a:tabLst>
-            </a:pPr>
-            <a:r>
-              <a:rPr b="0" lang="en-US" sz="1200" spc="-1" strike="noStrike">
-                <a:solidFill>
-                  <a:srgbClr val="000000"/>
-                </a:solidFill>
-                <a:latin typeface="Arial"/>
-                <a:ea typeface="DejaVu Sans"/>
-              </a:rPr>
-              <a:t>CodeEU-211: Hybrid P1 configurations with errors</a:t>
-            </a:r>
-            <a:endParaRPr b="0" lang="en-US" sz="1200" spc="-1" strike="noStrike">
-              <a:solidFill>
-                <a:srgbClr val="000000"/>
-              </a:solidFill>
-              <a:latin typeface="Arial"/>
-            </a:endParaRPr>
-          </a:p>
-          <a:p>
-            <a:pPr lvl="1" marL="800280" indent="-343080" defTabSz="914400">
-              <a:lnSpc>
-                <a:spcPct val="100000"/>
-              </a:lnSpc>
-              <a:spcBef>
-                <a:spcPts val="320"/>
-              </a:spcBef>
-              <a:buClr>
-                <a:srgbClr val="000000"/>
-              </a:buClr>
-              <a:buFont typeface="Symbol"/>
-              <a:buChar char=""/>
-              <a:tabLst>
-                <a:tab algn="l" pos="1886040"/>
-              </a:tabLst>
-            </a:pPr>
-            <a:r>
-              <a:rPr b="0" lang="en-US" sz="1200" spc="-1" strike="noStrike">
-                <a:solidFill>
-                  <a:srgbClr val="000000"/>
-                </a:solidFill>
-                <a:latin typeface="Arial"/>
-                <a:ea typeface="DejaVu Sans"/>
-              </a:rPr>
-              <a:t>CodeEU-215: MultiStep tool help</a:t>
-            </a:r>
-            <a:endParaRPr b="0" lang="en-US" sz="1200" spc="-1" strike="noStrike">
-              <a:solidFill>
-                <a:srgbClr val="000000"/>
-              </a:solidFill>
-              <a:latin typeface="Arial"/>
-            </a:endParaRPr>
-          </a:p>
-          <a:p>
-            <a:pPr lvl="1" marL="800280" indent="-343080" defTabSz="914400">
-              <a:lnSpc>
-                <a:spcPct val="100000"/>
-              </a:lnSpc>
-              <a:spcBef>
-                <a:spcPts val="320"/>
-              </a:spcBef>
-              <a:buClr>
-                <a:srgbClr val="000000"/>
-              </a:buClr>
-              <a:buFont typeface="Symbol"/>
-              <a:buChar char=""/>
-              <a:tabLst>
-                <a:tab algn="l" pos="1886040"/>
-              </a:tabLst>
-            </a:pPr>
-            <a:r>
-              <a:rPr b="0" lang="en-US" sz="1200" spc="-1" strike="noStrike">
-                <a:solidFill>
-                  <a:srgbClr val="000000"/>
-                </a:solidFill>
-                <a:latin typeface="Arial"/>
-                <a:ea typeface="DejaVu Sans"/>
-              </a:rPr>
-              <a:t>CodeEU-216: NrOfGears in CIF is 1 for IEPC no matter how many gears it has</a:t>
-            </a:r>
-            <a:endParaRPr b="0" lang="en-US" sz="1200" spc="-1" strike="noStrike">
-              <a:solidFill>
-                <a:srgbClr val="000000"/>
-              </a:solidFill>
-              <a:latin typeface="Arial"/>
-            </a:endParaRPr>
-          </a:p>
-          <a:p>
-            <a:pPr lvl="1" marL="800280" indent="-343080" defTabSz="914400">
-              <a:lnSpc>
-                <a:spcPct val="100000"/>
-              </a:lnSpc>
-              <a:spcBef>
-                <a:spcPts val="320"/>
-              </a:spcBef>
-              <a:buClr>
-                <a:srgbClr val="000000"/>
-              </a:buClr>
-              <a:buFont typeface="Symbol"/>
-              <a:buChar char=""/>
-              <a:tabLst>
-                <a:tab algn="l" pos="1886040"/>
-              </a:tabLst>
-            </a:pPr>
-            <a:r>
-              <a:rPr b="0" lang="en-US" sz="1200" spc="-1" strike="noStrike">
-                <a:solidFill>
-                  <a:srgbClr val="000000"/>
-                </a:solidFill>
-                <a:latin typeface="Arial"/>
-                <a:ea typeface="DejaVu Sans"/>
-              </a:rPr>
-              <a:t>CodeEU-220: Error manual transmission 2. gear</a:t>
-            </a:r>
-            <a:endParaRPr b="0" lang="en-US" sz="1200" spc="-1" strike="noStrike">
-              <a:solidFill>
-                <a:srgbClr val="000000"/>
-              </a:solidFill>
-              <a:latin typeface="Arial"/>
-            </a:endParaRPr>
-          </a:p>
-          <a:p>
-            <a:pPr lvl="1" marL="800280" indent="-343080" defTabSz="914400">
-              <a:lnSpc>
-                <a:spcPct val="100000"/>
-              </a:lnSpc>
-              <a:spcBef>
-                <a:spcPts val="320"/>
-              </a:spcBef>
-              <a:buClr>
-                <a:srgbClr val="000000"/>
-              </a:buClr>
-              <a:buFont typeface="Symbol"/>
-              <a:buChar char=""/>
-              <a:tabLst>
-                <a:tab algn="l" pos="1886040"/>
-              </a:tabLst>
-            </a:pPr>
-            <a:r>
-              <a:rPr b="0" lang="en-US" sz="1200" spc="-1" strike="noStrike">
-                <a:solidFill>
-                  <a:srgbClr val="000000"/>
-                </a:solidFill>
-                <a:latin typeface="Arial"/>
-                <a:ea typeface="DejaVu Sans"/>
-              </a:rPr>
-              <a:t>CodeEU-224: Issue with PEV complete vehicle simulation (Vecto MultiStage)</a:t>
-            </a:r>
-            <a:endParaRPr b="0" lang="en-US" sz="1200" spc="-1" strike="noStrike">
-              <a:solidFill>
-                <a:srgbClr val="000000"/>
-              </a:solidFill>
-              <a:latin typeface="Arial"/>
-            </a:endParaRPr>
-          </a:p>
-          <a:p>
-            <a:pPr lvl="1" marL="800280" indent="-343080" defTabSz="914400">
-              <a:lnSpc>
-                <a:spcPct val="100000"/>
-              </a:lnSpc>
-              <a:spcBef>
-                <a:spcPts val="320"/>
-              </a:spcBef>
-              <a:buClr>
-                <a:srgbClr val="000000"/>
-              </a:buClr>
-              <a:buFont typeface="Symbol"/>
-              <a:buChar char=""/>
-              <a:tabLst>
-                <a:tab algn="l" pos="1886040"/>
-              </a:tabLst>
-            </a:pPr>
-            <a:r>
-              <a:rPr b="0" lang="en-US" sz="1200" spc="-1" strike="noStrike">
-                <a:solidFill>
-                  <a:srgbClr val="000000"/>
-                </a:solidFill>
-                <a:latin typeface="Arial"/>
-                <a:ea typeface="DejaVu Sans"/>
-              </a:rPr>
-              <a:t>CodeEU-231: IVECO CONFIDENTIAL : hybrid buses completed simulation aborted</a:t>
-            </a:r>
-            <a:endParaRPr b="0" lang="en-US" sz="1200" spc="-1" strike="noStrike">
-              <a:solidFill>
-                <a:srgbClr val="000000"/>
-              </a:solidFill>
-              <a:latin typeface="Arial"/>
-            </a:endParaRPr>
-          </a:p>
-          <a:p>
-            <a:pPr lvl="1" marL="800280" indent="-343080" defTabSz="914400">
-              <a:lnSpc>
-                <a:spcPct val="100000"/>
-              </a:lnSpc>
-              <a:spcBef>
-                <a:spcPts val="320"/>
-              </a:spcBef>
-              <a:buClr>
-                <a:srgbClr val="000000"/>
-              </a:buClr>
-              <a:buFont typeface="Symbol"/>
-              <a:buChar char=""/>
-              <a:tabLst>
-                <a:tab algn="l" pos="1886040"/>
-              </a:tabLst>
-            </a:pPr>
-            <a:r>
-              <a:rPr b="0" lang="en-US" sz="1200" spc="-1" strike="noStrike">
-                <a:solidFill>
-                  <a:srgbClr val="000000"/>
-                </a:solidFill>
-                <a:latin typeface="Arial"/>
-                <a:ea typeface="DejaVu Sans"/>
-              </a:rPr>
-              <a:t>CodeEU-234: Error Conventional Lorry Gear: 1C DistanceRun got an unexpected response</a:t>
-            </a:r>
-            <a:endParaRPr b="0" lang="en-US" sz="1200" spc="-1" strike="noStrike">
-              <a:solidFill>
-                <a:srgbClr val="000000"/>
-              </a:solidFill>
-              <a:latin typeface="Arial"/>
-            </a:endParaRPr>
-          </a:p>
-          <a:p>
-            <a:pPr lvl="1" marL="800280" indent="-343080" defTabSz="914400">
-              <a:lnSpc>
-                <a:spcPct val="100000"/>
-              </a:lnSpc>
-              <a:spcBef>
-                <a:spcPts val="320"/>
-              </a:spcBef>
-              <a:buClr>
-                <a:srgbClr val="000000"/>
-              </a:buClr>
-              <a:buFont typeface="Symbol"/>
-              <a:buChar char=""/>
-              <a:tabLst>
-                <a:tab algn="l" pos="1886040"/>
-              </a:tabLst>
-            </a:pPr>
-            <a:r>
-              <a:rPr b="0" lang="en-US" sz="1200" spc="-1" strike="noStrike">
-                <a:solidFill>
-                  <a:srgbClr val="000000"/>
-                </a:solidFill>
-                <a:latin typeface="Arial"/>
-                <a:ea typeface="DejaVu Sans"/>
-              </a:rPr>
-              <a:t>CodeEU-235: Tyre error calculation buses "invalid xsi:type 'TyreDataDeclarationType'"</a:t>
-            </a:r>
-            <a:endParaRPr b="0" lang="en-US" sz="1200" spc="-1" strike="noStrike">
-              <a:solidFill>
-                <a:srgbClr val="000000"/>
-              </a:solidFill>
-              <a:latin typeface="Arial"/>
-            </a:endParaRPr>
-          </a:p>
-          <a:p>
-            <a:pPr lvl="1" marL="800280" indent="-343080" defTabSz="914400">
-              <a:lnSpc>
-                <a:spcPct val="100000"/>
-              </a:lnSpc>
-              <a:spcBef>
-                <a:spcPts val="320"/>
-              </a:spcBef>
-              <a:buClr>
-                <a:srgbClr val="000000"/>
-              </a:buClr>
-              <a:buFont typeface="Symbol"/>
-              <a:buChar char=""/>
-              <a:tabLst>
-                <a:tab algn="l" pos="1886040"/>
-              </a:tabLst>
-            </a:pPr>
-            <a:r>
-              <a:rPr b="0" lang="en-US" sz="1200" spc="-1" strike="noStrike">
-                <a:solidFill>
-                  <a:srgbClr val="000000"/>
-                </a:solidFill>
-                <a:latin typeface="Arial"/>
-                <a:ea typeface="DejaVu Sans"/>
-              </a:rPr>
-              <a:t>CodeEU-238: Bus VIF files not valid in Multistep VECTO</a:t>
-            </a:r>
-            <a:endParaRPr b="0" lang="en-US" sz="1200" spc="-1" strike="noStrike">
-              <a:solidFill>
-                <a:srgbClr val="000000"/>
-              </a:solidFill>
-              <a:latin typeface="Arial"/>
-            </a:endParaRPr>
-          </a:p>
-          <a:p>
-            <a:pPr lvl="1" marL="800280" indent="-343080" defTabSz="914400">
-              <a:lnSpc>
-                <a:spcPct val="100000"/>
-              </a:lnSpc>
-              <a:spcBef>
-                <a:spcPts val="320"/>
-              </a:spcBef>
-              <a:buClr>
-                <a:srgbClr val="000000"/>
-              </a:buClr>
-              <a:buFont typeface="Symbol"/>
-              <a:buChar char=""/>
-              <a:tabLst>
-                <a:tab algn="l" pos="1886040"/>
-              </a:tabLst>
-            </a:pPr>
-            <a:r>
-              <a:rPr b="0" lang="en-US" sz="1200" spc="-1" strike="noStrike">
-                <a:solidFill>
-                  <a:srgbClr val="000000"/>
-                </a:solidFill>
-                <a:latin typeface="Arial"/>
-                <a:ea typeface="DejaVu Sans"/>
-              </a:rPr>
-              <a:t>CodeEU-243: Simulation aborted: Gear 5 Lossmap not sufficiant</a:t>
-            </a:r>
-            <a:endParaRPr b="0" lang="en-US" sz="1200" spc="-1" strike="noStrike">
-              <a:solidFill>
-                <a:srgbClr val="000000"/>
-              </a:solidFill>
-              <a:latin typeface="Arial"/>
-            </a:endParaRPr>
-          </a:p>
-          <a:p>
-            <a:pPr lvl="1" marL="800280" indent="-343080" defTabSz="914400">
-              <a:lnSpc>
-                <a:spcPct val="100000"/>
-              </a:lnSpc>
-              <a:spcBef>
-                <a:spcPts val="320"/>
-              </a:spcBef>
-              <a:buClr>
-                <a:srgbClr val="000000"/>
-              </a:buClr>
-              <a:buFont typeface="Symbol"/>
-              <a:buChar char=""/>
-              <a:tabLst>
-                <a:tab algn="l" pos="1886040"/>
-              </a:tabLst>
-            </a:pPr>
-            <a:r>
-              <a:rPr b="0" lang="en-US" sz="1200" spc="-1" strike="noStrike">
-                <a:solidFill>
-                  <a:srgbClr val="000000"/>
-                </a:solidFill>
-                <a:latin typeface="Arial"/>
-                <a:ea typeface="DejaVu Sans"/>
-              </a:rPr>
-              <a:t>CodeEU-244: Signature validation fails for old (prior to v4) Manufacturer reports</a:t>
-            </a:r>
-            <a:endParaRPr b="0" lang="en-US" sz="1200" spc="-1" strike="noStrike">
-              <a:solidFill>
-                <a:srgbClr val="000000"/>
-              </a:solidFill>
-              <a:latin typeface="Arial"/>
-            </a:endParaRPr>
-          </a:p>
-          <a:p>
-            <a:pPr indent="0" defTabSz="914400">
-              <a:lnSpc>
-                <a:spcPct val="100000"/>
-              </a:lnSpc>
-              <a:buNone/>
-              <a:tabLst>
-                <a:tab algn="l" pos="0"/>
-              </a:tabLst>
-            </a:pPr>
-            <a:endParaRPr b="0" lang="en-US" sz="1400" spc="-1" strike="noStrike">
               <a:solidFill>
                 <a:srgbClr val="000000"/>
               </a:solidFill>
@@ -7835,7 +7634,7 @@
         <p:spPr>
           <a:xfrm>
             <a:off x="468360" y="476640"/>
-            <a:ext cx="8211240" cy="673920"/>
+            <a:ext cx="8210880" cy="673560"/>
           </a:xfrm>
           <a:prstGeom prst="rect">
             <a:avLst/>
@@ -7904,7 +7703,7 @@
         <p:spPr>
           <a:xfrm>
             <a:off x="323640" y="1268640"/>
-            <a:ext cx="8489880" cy="4817160"/>
+            <a:ext cx="8489520" cy="4816800"/>
           </a:xfrm>
           <a:prstGeom prst="rect">
             <a:avLst/>
@@ -7943,7 +7742,7 @@
                 <a:latin typeface="Arial"/>
                 <a:ea typeface="DejaVu Sans"/>
               </a:rPr>
-              <a:t>Bugfixes (2/2)</a:t>
+              <a:t>Bugfixes (1/2)</a:t>
             </a:r>
             <a:endParaRPr b="0" lang="en-US" sz="1600" spc="-1" strike="noStrike">
               <a:solidFill>
@@ -7977,7 +7776,7 @@
                 <a:latin typeface="Arial"/>
                 <a:ea typeface="DejaVu Sans"/>
               </a:rPr>
-              <a:t>CodeEU-249: Fix handling gear torque limits in case of IEPC WheelHub motor and only one side is measured</a:t>
+              <a:t>CodeEU-94: DistanceRun got an unexpected response</a:t>
             </a:r>
             <a:endParaRPr b="0" lang="en-US" sz="1200" spc="-1" strike="noStrike">
               <a:solidFill>
@@ -8011,7 +7810,7 @@
                 <a:latin typeface="Arial"/>
                 <a:ea typeface="DejaVu Sans"/>
               </a:rPr>
-              <a:t>CodeEU-250: Maximum vehicle speed exceeded during pre-processing</a:t>
+              <a:t>CodeEU-153: DrivingActionAccelerate: Failed to find operating point after Overload</a:t>
             </a:r>
             <a:endParaRPr b="0" lang="en-US" sz="1200" spc="-1" strike="noStrike">
               <a:solidFill>
@@ -8045,7 +7844,7 @@
                 <a:latin typeface="Arial"/>
                 <a:ea typeface="DejaVu Sans"/>
               </a:rPr>
-              <a:t>CodeEU-253: Replace VTP HeavyBus in Generic Vehicles with VTP Truck</a:t>
+              <a:t>CodeEU-158: Urban RefLoad DrivingActionAccelerate: Failed to find operating point (IEPC Wheelhub 1 measured)</a:t>
             </a:r>
             <a:endParaRPr b="0" lang="en-US" sz="1200" spc="-1" strike="noStrike">
               <a:solidFill>
@@ -8079,7 +7878,7 @@
                 <a:latin typeface="Arial"/>
                 <a:ea typeface="DejaVu Sans"/>
               </a:rPr>
-              <a:t>CodeEU-259: Inconsistent calculation of AverageRRC in CIF</a:t>
+              <a:t>CodeEU-168: Vecto Declaration Simulation with P1-Hybrid shows multiple errors - Simulation Aborts!</a:t>
             </a:r>
             <a:endParaRPr b="0" lang="en-US" sz="1200" spc="-1" strike="noStrike">
               <a:solidFill>
@@ -8113,7 +7912,7 @@
                 <a:latin typeface="Arial"/>
                 <a:ea typeface="DejaVu Sans"/>
               </a:rPr>
-              <a:t>CodeEU-260: Handling of overload buffer in case Continuous Torque is 0Nm</a:t>
+              <a:t>CodeEU-191: Boosting limits HEV ovc are not working</a:t>
             </a:r>
             <a:endParaRPr b="0" lang="en-US" sz="1200" spc="-1" strike="noStrike">
               <a:solidFill>
@@ -8147,7 +7946,7 @@
                 <a:latin typeface="Arial"/>
                 <a:ea typeface="DejaVu Sans"/>
               </a:rPr>
-              <a:t>CodeEU-261: SuperCap internal resistance standard values correction</a:t>
+              <a:t>CodeEU-202: EMS Standard Values: Continuous/Overload Torque 0 Nm</a:t>
             </a:r>
             <a:endParaRPr b="0" lang="en-US" sz="1200" spc="-1" strike="noStrike">
               <a:solidFill>
@@ -8181,7 +7980,7 @@
                 <a:latin typeface="Arial"/>
                 <a:ea typeface="DejaVu Sans"/>
               </a:rPr>
-              <a:t>CodeEU-263: Determination of rated power for IEPCs for MRF and CIF</a:t>
+              <a:t>CodeEU-203: HybridStrategy error for IHPC type 1 hybrid lorry</a:t>
             </a:r>
             <a:endParaRPr b="0" lang="en-US" sz="1200" spc="-1" strike="noStrike">
               <a:solidFill>
@@ -8215,7 +8014,7 @@
                 <a:latin typeface="Arial"/>
                 <a:ea typeface="DejaVu Sans"/>
               </a:rPr>
-              <a:t>CodeEU-266: Fix Measured Speed Testcases</a:t>
+              <a:t>CodeEU-206: VTP + PEMS test done by Renault Trucks France - VECTO tool errors most probably linked to automatic gearbox (with torque converter)</a:t>
             </a:r>
             <a:endParaRPr b="0" lang="en-US" sz="1200" spc="-1" strike="noStrike">
               <a:solidFill>
@@ -8225,18 +8024,32 @@
             </a:endParaRPr>
           </a:p>
           <a:p>
-            <a:pPr indent="0" defTabSz="914400">
-              <a:lnSpc>
-                <a:spcPct val="100000"/>
-              </a:lnSpc>
-              <a:spcBef>
-                <a:spcPts val="281"/>
-              </a:spcBef>
-              <a:buNone/>
-              <a:tabLst>
-                <a:tab algn="l" pos="0"/>
-              </a:tabLst>
-            </a:pPr>
+            <a:pPr lvl="1" marL="800280" indent="-343080" defTabSz="914400">
+              <a:lnSpc>
+                <a:spcPct val="100000"/>
+              </a:lnSpc>
+              <a:spcBef>
+                <a:spcPts val="320"/>
+              </a:spcBef>
+              <a:buClr>
+                <a:srgbClr val="000000"/>
+              </a:buClr>
+              <a:buFont typeface="Symbol"/>
+              <a:buChar char=""/>
+              <a:tabLst>
+                <a:tab algn="l" pos="1886040"/>
+              </a:tabLst>
+            </a:pPr>
+            <a:r>
+              <a:rPr b="0" lang="en-US" sz="1200" spc="-1" strike="noStrike">
+                <a:solidFill>
+                  <a:srgbClr val="000000"/>
+                </a:solidFill>
+                <a:latin typeface="Arial"/>
+                <a:ea typeface="DejaVu Sans"/>
+              </a:rPr>
+              <a:t>CodeEU-211: Hybrid P1 configurations with errors</a:t>
+            </a:r>
             <a:endParaRPr b="0" lang="en-US" sz="1200" spc="-1" strike="noStrike">
               <a:solidFill>
                 <a:srgbClr val="000000"/>
@@ -8245,16 +8058,339 @@
             </a:endParaRPr>
           </a:p>
           <a:p>
-            <a:pPr indent="0" defTabSz="914400">
-              <a:lnSpc>
-                <a:spcPct val="100000"/>
-              </a:lnSpc>
-              <a:buNone/>
-              <a:tabLst>
-                <a:tab algn="l" pos="0"/>
-              </a:tabLst>
-            </a:pPr>
-            <a:endParaRPr b="0" lang="en-US" sz="1400" spc="-1" strike="noStrike">
+            <a:pPr lvl="1" marL="800280" indent="-343080" defTabSz="914400">
+              <a:lnSpc>
+                <a:spcPct val="100000"/>
+              </a:lnSpc>
+              <a:spcBef>
+                <a:spcPts val="320"/>
+              </a:spcBef>
+              <a:buClr>
+                <a:srgbClr val="000000"/>
+              </a:buClr>
+              <a:buFont typeface="Symbol"/>
+              <a:buChar char=""/>
+              <a:tabLst>
+                <a:tab algn="l" pos="1886040"/>
+              </a:tabLst>
+            </a:pPr>
+            <a:r>
+              <a:rPr b="0" lang="en-US" sz="1200" spc="-1" strike="noStrike">
+                <a:solidFill>
+                  <a:srgbClr val="000000"/>
+                </a:solidFill>
+                <a:latin typeface="Arial"/>
+                <a:ea typeface="DejaVu Sans"/>
+              </a:rPr>
+              <a:t>CodeEU-215: MultiStep tool help</a:t>
+            </a:r>
+            <a:endParaRPr b="0" lang="en-US" sz="1200" spc="-1" strike="noStrike">
+              <a:solidFill>
+                <a:srgbClr val="000000"/>
+              </a:solidFill>
+              <a:latin typeface="Arial"/>
+            </a:endParaRPr>
+          </a:p>
+          <a:p>
+            <a:pPr lvl="1" marL="800280" indent="-343080" defTabSz="914400">
+              <a:lnSpc>
+                <a:spcPct val="100000"/>
+              </a:lnSpc>
+              <a:spcBef>
+                <a:spcPts val="320"/>
+              </a:spcBef>
+              <a:buClr>
+                <a:srgbClr val="000000"/>
+              </a:buClr>
+              <a:buFont typeface="Symbol"/>
+              <a:buChar char=""/>
+              <a:tabLst>
+                <a:tab algn="l" pos="1886040"/>
+              </a:tabLst>
+            </a:pPr>
+            <a:r>
+              <a:rPr b="0" lang="en-US" sz="1200" spc="-1" strike="noStrike">
+                <a:solidFill>
+                  <a:srgbClr val="000000"/>
+                </a:solidFill>
+                <a:latin typeface="Arial"/>
+                <a:ea typeface="DejaVu Sans"/>
+              </a:rPr>
+              <a:t>CodeEU-216: NrOfGears in CIF is 1 for IEPC no matter how many gears it has</a:t>
+            </a:r>
+            <a:endParaRPr b="0" lang="en-US" sz="1200" spc="-1" strike="noStrike">
+              <a:solidFill>
+                <a:srgbClr val="000000"/>
+              </a:solidFill>
+              <a:latin typeface="Arial"/>
+            </a:endParaRPr>
+          </a:p>
+          <a:p>
+            <a:pPr lvl="1" marL="800280" indent="-343080" defTabSz="914400">
+              <a:lnSpc>
+                <a:spcPct val="100000"/>
+              </a:lnSpc>
+              <a:spcBef>
+                <a:spcPts val="320"/>
+              </a:spcBef>
+              <a:buClr>
+                <a:srgbClr val="000000"/>
+              </a:buClr>
+              <a:buFont typeface="Symbol"/>
+              <a:buChar char=""/>
+              <a:tabLst>
+                <a:tab algn="l" pos="1886040"/>
+              </a:tabLst>
+            </a:pPr>
+            <a:r>
+              <a:rPr b="0" lang="en-US" sz="1200" spc="-1" strike="noStrike">
+                <a:solidFill>
+                  <a:srgbClr val="000000"/>
+                </a:solidFill>
+                <a:latin typeface="Arial"/>
+                <a:ea typeface="DejaVu Sans"/>
+              </a:rPr>
+              <a:t>CodeEU-220: Error manual transmission 2. gear</a:t>
+            </a:r>
+            <a:endParaRPr b="0" lang="en-US" sz="1200" spc="-1" strike="noStrike">
+              <a:solidFill>
+                <a:srgbClr val="000000"/>
+              </a:solidFill>
+              <a:latin typeface="Arial"/>
+            </a:endParaRPr>
+          </a:p>
+          <a:p>
+            <a:pPr lvl="1" marL="800280" indent="-343080" defTabSz="914400">
+              <a:lnSpc>
+                <a:spcPct val="100000"/>
+              </a:lnSpc>
+              <a:spcBef>
+                <a:spcPts val="320"/>
+              </a:spcBef>
+              <a:buClr>
+                <a:srgbClr val="000000"/>
+              </a:buClr>
+              <a:buFont typeface="Symbol"/>
+              <a:buChar char=""/>
+              <a:tabLst>
+                <a:tab algn="l" pos="1886040"/>
+              </a:tabLst>
+            </a:pPr>
+            <a:r>
+              <a:rPr b="0" lang="en-US" sz="1200" spc="-1" strike="noStrike">
+                <a:solidFill>
+                  <a:srgbClr val="000000"/>
+                </a:solidFill>
+                <a:latin typeface="Arial"/>
+                <a:ea typeface="DejaVu Sans"/>
+              </a:rPr>
+              <a:t>CodeEU-224: Issue with PEV complete vehicle simulation (Vecto MultiStage)</a:t>
+            </a:r>
+            <a:endParaRPr b="0" lang="en-US" sz="1200" spc="-1" strike="noStrike">
+              <a:solidFill>
+                <a:srgbClr val="000000"/>
+              </a:solidFill>
+              <a:latin typeface="Arial"/>
+            </a:endParaRPr>
+          </a:p>
+          <a:p>
+            <a:pPr lvl="1" marL="800280" indent="-343080" defTabSz="914400">
+              <a:lnSpc>
+                <a:spcPct val="100000"/>
+              </a:lnSpc>
+              <a:spcBef>
+                <a:spcPts val="320"/>
+              </a:spcBef>
+              <a:buClr>
+                <a:srgbClr val="000000"/>
+              </a:buClr>
+              <a:buFont typeface="Symbol"/>
+              <a:buChar char=""/>
+              <a:tabLst>
+                <a:tab algn="l" pos="1886040"/>
+              </a:tabLst>
+            </a:pPr>
+            <a:r>
+              <a:rPr b="0" lang="en-US" sz="1200" spc="-1" strike="noStrike">
+                <a:solidFill>
+                  <a:srgbClr val="000000"/>
+                </a:solidFill>
+                <a:latin typeface="Arial"/>
+                <a:ea typeface="DejaVu Sans"/>
+              </a:rPr>
+              <a:t>CodeEU-231: IVECO CONFIDENTIAL : hybrid buses completed simulation aborted</a:t>
+            </a:r>
+            <a:endParaRPr b="0" lang="en-US" sz="1200" spc="-1" strike="noStrike">
+              <a:solidFill>
+                <a:srgbClr val="000000"/>
+              </a:solidFill>
+              <a:latin typeface="Arial"/>
+            </a:endParaRPr>
+          </a:p>
+          <a:p>
+            <a:pPr lvl="1" marL="800280" indent="-343080" defTabSz="914400">
+              <a:lnSpc>
+                <a:spcPct val="100000"/>
+              </a:lnSpc>
+              <a:spcBef>
+                <a:spcPts val="320"/>
+              </a:spcBef>
+              <a:buClr>
+                <a:srgbClr val="000000"/>
+              </a:buClr>
+              <a:buFont typeface="Symbol"/>
+              <a:buChar char=""/>
+              <a:tabLst>
+                <a:tab algn="l" pos="1886040"/>
+              </a:tabLst>
+            </a:pPr>
+            <a:r>
+              <a:rPr b="0" lang="en-US" sz="1200" spc="-1" strike="noStrike">
+                <a:solidFill>
+                  <a:srgbClr val="000000"/>
+                </a:solidFill>
+                <a:latin typeface="Arial"/>
+                <a:ea typeface="DejaVu Sans"/>
+              </a:rPr>
+              <a:t>CodeEU-234: Error Conventional Lorry Gear: 1C DistanceRun got an unexpected response</a:t>
+            </a:r>
+            <a:endParaRPr b="0" lang="en-US" sz="1200" spc="-1" strike="noStrike">
+              <a:solidFill>
+                <a:srgbClr val="000000"/>
+              </a:solidFill>
+              <a:latin typeface="Arial"/>
+            </a:endParaRPr>
+          </a:p>
+          <a:p>
+            <a:pPr lvl="1" marL="800280" indent="-343080" defTabSz="914400">
+              <a:lnSpc>
+                <a:spcPct val="100000"/>
+              </a:lnSpc>
+              <a:spcBef>
+                <a:spcPts val="320"/>
+              </a:spcBef>
+              <a:buClr>
+                <a:srgbClr val="000000"/>
+              </a:buClr>
+              <a:buFont typeface="Symbol"/>
+              <a:buChar char=""/>
+              <a:tabLst>
+                <a:tab algn="l" pos="1886040"/>
+              </a:tabLst>
+            </a:pPr>
+            <a:r>
+              <a:rPr b="0" lang="en-US" sz="1200" spc="-1" strike="noStrike">
+                <a:solidFill>
+                  <a:srgbClr val="000000"/>
+                </a:solidFill>
+                <a:latin typeface="Arial"/>
+                <a:ea typeface="DejaVu Sans"/>
+              </a:rPr>
+              <a:t>CodeEU-235: Tyre error calculation buses "invalid xsi:type 'TyreDataDeclarationType'"</a:t>
+            </a:r>
+            <a:endParaRPr b="0" lang="en-US" sz="1200" spc="-1" strike="noStrike">
+              <a:solidFill>
+                <a:srgbClr val="000000"/>
+              </a:solidFill>
+              <a:latin typeface="Arial"/>
+            </a:endParaRPr>
+          </a:p>
+          <a:p>
+            <a:pPr lvl="1" marL="800280" indent="-343080" defTabSz="914400">
+              <a:lnSpc>
+                <a:spcPct val="100000"/>
+              </a:lnSpc>
+              <a:spcBef>
+                <a:spcPts val="320"/>
+              </a:spcBef>
+              <a:buClr>
+                <a:srgbClr val="000000"/>
+              </a:buClr>
+              <a:buFont typeface="Symbol"/>
+              <a:buChar char=""/>
+              <a:tabLst>
+                <a:tab algn="l" pos="1886040"/>
+              </a:tabLst>
+            </a:pPr>
+            <a:r>
+              <a:rPr b="0" lang="en-US" sz="1200" spc="-1" strike="noStrike">
+                <a:solidFill>
+                  <a:srgbClr val="000000"/>
+                </a:solidFill>
+                <a:latin typeface="Arial"/>
+                <a:ea typeface="DejaVu Sans"/>
+              </a:rPr>
+              <a:t>CodeEU-238: Bus VIF files not valid in Multistep VECTO</a:t>
+            </a:r>
+            <a:endParaRPr b="0" lang="en-US" sz="1200" spc="-1" strike="noStrike">
+              <a:solidFill>
+                <a:srgbClr val="000000"/>
+              </a:solidFill>
+              <a:latin typeface="Arial"/>
+            </a:endParaRPr>
+          </a:p>
+          <a:p>
+            <a:pPr lvl="1" marL="800280" indent="-343080" defTabSz="914400">
+              <a:lnSpc>
+                <a:spcPct val="100000"/>
+              </a:lnSpc>
+              <a:spcBef>
+                <a:spcPts val="320"/>
+              </a:spcBef>
+              <a:buClr>
+                <a:srgbClr val="000000"/>
+              </a:buClr>
+              <a:buFont typeface="Symbol"/>
+              <a:buChar char=""/>
+              <a:tabLst>
+                <a:tab algn="l" pos="1886040"/>
+              </a:tabLst>
+            </a:pPr>
+            <a:r>
+              <a:rPr b="0" lang="en-US" sz="1200" spc="-1" strike="noStrike">
+                <a:solidFill>
+                  <a:srgbClr val="000000"/>
+                </a:solidFill>
+                <a:latin typeface="Arial"/>
+                <a:ea typeface="DejaVu Sans"/>
+              </a:rPr>
+              <a:t>CodeEU-243: Simulation aborted: Gear 5 Lossmap not sufficiant</a:t>
+            </a:r>
+            <a:endParaRPr b="0" lang="en-US" sz="1200" spc="-1" strike="noStrike">
+              <a:solidFill>
+                <a:srgbClr val="000000"/>
+              </a:solidFill>
+              <a:latin typeface="Arial"/>
+            </a:endParaRPr>
+          </a:p>
+          <a:p>
+            <a:pPr lvl="1" marL="800280" indent="-343080" defTabSz="914400">
+              <a:lnSpc>
+                <a:spcPct val="100000"/>
+              </a:lnSpc>
+              <a:spcBef>
+                <a:spcPts val="320"/>
+              </a:spcBef>
+              <a:buClr>
+                <a:srgbClr val="000000"/>
+              </a:buClr>
+              <a:buFont typeface="Symbol"/>
+              <a:buChar char=""/>
+              <a:tabLst>
+                <a:tab algn="l" pos="1886040"/>
+              </a:tabLst>
+            </a:pPr>
+            <a:r>
+              <a:rPr b="0" lang="en-US" sz="1200" spc="-1" strike="noStrike">
+                <a:solidFill>
+                  <a:srgbClr val="000000"/>
+                </a:solidFill>
+                <a:latin typeface="Arial"/>
+                <a:ea typeface="DejaVu Sans"/>
+              </a:rPr>
+              <a:t>CodeEU-244: Signature validation fails for old (prior to v4) Manufacturer reports</a:t>
+            </a:r>
+            <a:endParaRPr b="0" lang="en-US" sz="1200" spc="-1" strike="noStrike">
               <a:solidFill>
                 <a:srgbClr val="000000"/>
               </a:solidFill>
@@ -8323,7 +8459,7 @@
         <p:spPr>
           <a:xfrm>
             <a:off x="468360" y="476640"/>
-            <a:ext cx="8211240" cy="673920"/>
+            <a:ext cx="8210880" cy="673560"/>
           </a:xfrm>
           <a:prstGeom prst="rect">
             <a:avLst/>
@@ -8355,7 +8491,7 @@
                 <a:latin typeface="Arial"/>
                 <a:ea typeface="DejaVu Sans"/>
               </a:rPr>
-              <a:t>Vecto 4.0.1.3217 OFFICIAL RELEASE</a:t>
+              <a:t>Vecto 4.0.2.3273 OFFICIAL RELEASE</a:t>
             </a:r>
             <a:br>
               <a:rPr sz="2400"/>
@@ -8368,7 +8504,7 @@
                 <a:latin typeface="Arial"/>
                 <a:ea typeface="DejaVu Sans"/>
               </a:rPr>
-              <a:t>23.10.2023</a:t>
+              <a:t>18.12.2023</a:t>
             </a:r>
             <a:endParaRPr b="0" lang="en-US" sz="1600" spc="-1" strike="noStrike">
               <a:solidFill>
@@ -8392,7 +8528,7 @@
         <p:spPr>
           <a:xfrm>
             <a:off x="323640" y="1268640"/>
-            <a:ext cx="8489880" cy="4817160"/>
+            <a:ext cx="8489520" cy="4816800"/>
           </a:xfrm>
           <a:prstGeom prst="rect">
             <a:avLst/>
@@ -8431,7 +8567,7 @@
                 <a:latin typeface="Arial"/>
                 <a:ea typeface="DejaVu Sans"/>
               </a:rPr>
-              <a:t>Improvements</a:t>
+              <a:t>Bugfixes (2/2)</a:t>
             </a:r>
             <a:endParaRPr b="0" lang="en-US" sz="1600" spc="-1" strike="noStrike">
               <a:solidFill>
@@ -8458,24 +8594,24 @@
               </a:tabLst>
             </a:pPr>
             <a:r>
-              <a:rPr b="0" lang="en-US" sz="1400" spc="-1" strike="noStrike">
-                <a:solidFill>
-                  <a:srgbClr val="000000"/>
-                </a:solidFill>
-                <a:latin typeface="Arial"/>
-                <a:ea typeface="DejaVu Sans"/>
-              </a:rPr>
-              <a:t>VTP mode: create zip archive for input and output files</a:t>
-            </a:r>
-            <a:endParaRPr b="0" lang="en-US" sz="1400" spc="-1" strike="noStrike">
-              <a:solidFill>
-                <a:srgbClr val="000000"/>
-              </a:solidFill>
-              <a:latin typeface="Arial"/>
-            </a:endParaRPr>
-          </a:p>
-          <a:p>
-            <a:pPr marL="343080" indent="-343080" defTabSz="914400">
+              <a:rPr b="0" lang="en-US" sz="1200" spc="-1" strike="noStrike">
+                <a:solidFill>
+                  <a:srgbClr val="000000"/>
+                </a:solidFill>
+                <a:latin typeface="Arial"/>
+                <a:ea typeface="DejaVu Sans"/>
+              </a:rPr>
+              <a:t>CodeEU-249: Fix handling gear torque limits in case of IEPC WheelHub motor and only one side is measured</a:t>
+            </a:r>
+            <a:endParaRPr b="0" lang="en-US" sz="1200" spc="-1" strike="noStrike">
+              <a:solidFill>
+                <a:srgbClr val="000000"/>
+              </a:solidFill>
+              <a:latin typeface="Arial"/>
+            </a:endParaRPr>
+          </a:p>
+          <a:p>
+            <a:pPr lvl="1" marL="800280" indent="-343080" defTabSz="914400">
               <a:lnSpc>
                 <a:spcPct val="100000"/>
               </a:lnSpc>
@@ -8492,16 +8628,16 @@
               </a:tabLst>
             </a:pPr>
             <a:r>
-              <a:rPr b="1" lang="en-US" sz="1600" spc="-1" strike="noStrike">
-                <a:solidFill>
-                  <a:srgbClr val="000000"/>
-                </a:solidFill>
-                <a:latin typeface="Arial"/>
-                <a:ea typeface="DejaVu Sans"/>
-              </a:rPr>
-              <a:t>- Bugfixes</a:t>
-            </a:r>
-            <a:endParaRPr b="0" lang="en-US" sz="1600" spc="-1" strike="noStrike">
+              <a:rPr b="0" lang="en-US" sz="1200" spc="-1" strike="noStrike">
+                <a:solidFill>
+                  <a:srgbClr val="000000"/>
+                </a:solidFill>
+                <a:latin typeface="Arial"/>
+                <a:ea typeface="DejaVu Sans"/>
+              </a:rPr>
+              <a:t>CodeEU-250: Maximum vehicle speed exceeded during pre-processing</a:t>
+            </a:r>
+            <a:endParaRPr b="0" lang="en-US" sz="1200" spc="-1" strike="noStrike">
               <a:solidFill>
                 <a:srgbClr val="000000"/>
               </a:solidFill>
@@ -8526,16 +8662,16 @@
               </a:tabLst>
             </a:pPr>
             <a:r>
-              <a:rPr b="0" lang="en-US" sz="1400" spc="-1" strike="noStrike">
-                <a:solidFill>
-                  <a:srgbClr val="000000"/>
-                </a:solidFill>
-                <a:latin typeface="Arial"/>
-                <a:ea typeface="DejaVu Sans"/>
-              </a:rPr>
-              <a:t>bugfix in CIF for complete(d) buses - do not write PrimaryVehicleSubgroup element</a:t>
-            </a:r>
-            <a:endParaRPr b="0" lang="en-US" sz="1400" spc="-1" strike="noStrike">
+              <a:rPr b="0" lang="en-US" sz="1200" spc="-1" strike="noStrike">
+                <a:solidFill>
+                  <a:srgbClr val="000000"/>
+                </a:solidFill>
+                <a:latin typeface="Arial"/>
+                <a:ea typeface="DejaVu Sans"/>
+              </a:rPr>
+              <a:t>CodeEU-253: Replace VTP HeavyBus in Generic Vehicles with VTP Truck</a:t>
+            </a:r>
+            <a:endParaRPr b="0" lang="en-US" sz="1200" spc="-1" strike="noStrike">
               <a:solidFill>
                 <a:srgbClr val="000000"/>
               </a:solidFill>
@@ -8560,16 +8696,16 @@
               </a:tabLst>
             </a:pPr>
             <a:r>
-              <a:rPr b="0" lang="en-US" sz="1400" spc="-1" strike="noStrike">
-                <a:solidFill>
-                  <a:srgbClr val="000000"/>
-                </a:solidFill>
-                <a:latin typeface="Arial"/>
-                <a:ea typeface="DejaVu Sans"/>
-              </a:rPr>
-              <a:t>fix hybrid strategy: power comparison</a:t>
-            </a:r>
-            <a:endParaRPr b="0" lang="en-US" sz="1400" spc="-1" strike="noStrike">
+              <a:rPr b="0" lang="en-US" sz="1200" spc="-1" strike="noStrike">
+                <a:solidFill>
+                  <a:srgbClr val="000000"/>
+                </a:solidFill>
+                <a:latin typeface="Arial"/>
+                <a:ea typeface="DejaVu Sans"/>
+              </a:rPr>
+              <a:t>CodeEU-259: Inconsistent calculation of AverageRRC in CIF</a:t>
+            </a:r>
+            <a:endParaRPr b="0" lang="en-US" sz="1200" spc="-1" strike="noStrike">
               <a:solidFill>
                 <a:srgbClr val="000000"/>
               </a:solidFill>
@@ -8594,16 +8730,16 @@
               </a:tabLst>
             </a:pPr>
             <a:r>
-              <a:rPr b="0" lang="en-US" sz="1400" spc="-1" strike="noStrike">
-                <a:solidFill>
-                  <a:srgbClr val="000000"/>
-                </a:solidFill>
-                <a:latin typeface="Arial"/>
-                <a:ea typeface="DejaVu Sans"/>
-              </a:rPr>
-              <a:t>fix exempted vehicles do not work (error message that XML version is not supported)</a:t>
-            </a:r>
-            <a:endParaRPr b="0" lang="en-US" sz="1400" spc="-1" strike="noStrike">
+              <a:rPr b="0" lang="en-US" sz="1200" spc="-1" strike="noStrike">
+                <a:solidFill>
+                  <a:srgbClr val="000000"/>
+                </a:solidFill>
+                <a:latin typeface="Arial"/>
+                <a:ea typeface="DejaVu Sans"/>
+              </a:rPr>
+              <a:t>CodeEU-260: Handling of overload buffer in case Continuous Torque is 0Nm</a:t>
+            </a:r>
+            <a:endParaRPr b="0" lang="en-US" sz="1200" spc="-1" strike="noStrike">
               <a:solidFill>
                 <a:srgbClr val="000000"/>
               </a:solidFill>
@@ -8628,16 +8764,16 @@
               </a:tabLst>
             </a:pPr>
             <a:r>
-              <a:rPr b="0" lang="en-US" sz="1400" spc="-1" strike="noStrike">
-                <a:solidFill>
-                  <a:srgbClr val="000000"/>
-                </a:solidFill>
-                <a:latin typeface="Arial"/>
-                <a:ea typeface="DejaVu Sans"/>
-              </a:rPr>
-              <a:t>bugfix in XML schema: remove wrong PS technology entry for lorries</a:t>
-            </a:r>
-            <a:endParaRPr b="0" lang="en-US" sz="1400" spc="-1" strike="noStrike">
+              <a:rPr b="0" lang="en-US" sz="1200" spc="-1" strike="noStrike">
+                <a:solidFill>
+                  <a:srgbClr val="000000"/>
+                </a:solidFill>
+                <a:latin typeface="Arial"/>
+                <a:ea typeface="DejaVu Sans"/>
+              </a:rPr>
+              <a:t>CodeEU-261: SuperCap internal resistance standard values correction</a:t>
+            </a:r>
+            <a:endParaRPr b="0" lang="en-US" sz="1200" spc="-1" strike="noStrike">
               <a:solidFill>
                 <a:srgbClr val="000000"/>
               </a:solidFill>
@@ -8662,16 +8798,50 @@
               </a:tabLst>
             </a:pPr>
             <a:r>
-              <a:rPr b="0" lang="en-US" sz="1400" spc="-1" strike="noStrike">
-                <a:solidFill>
-                  <a:srgbClr val="000000"/>
-                </a:solidFill>
-                <a:latin typeface="Arial"/>
-                <a:ea typeface="DejaVu Sans"/>
-              </a:rPr>
-              <a:t>bugfix for conditioning power demand for IHPC vehicles</a:t>
-            </a:r>
-            <a:endParaRPr b="0" lang="en-US" sz="1400" spc="-1" strike="noStrike">
+              <a:rPr b="0" lang="en-US" sz="1200" spc="-1" strike="noStrike">
+                <a:solidFill>
+                  <a:srgbClr val="000000"/>
+                </a:solidFill>
+                <a:latin typeface="Arial"/>
+                <a:ea typeface="DejaVu Sans"/>
+              </a:rPr>
+              <a:t>CodeEU-263: Determination of rated power for IEPCs for MRF and CIF</a:t>
+            </a:r>
+            <a:endParaRPr b="0" lang="en-US" sz="1200" spc="-1" strike="noStrike">
+              <a:solidFill>
+                <a:srgbClr val="000000"/>
+              </a:solidFill>
+              <a:latin typeface="Arial"/>
+            </a:endParaRPr>
+          </a:p>
+          <a:p>
+            <a:pPr lvl="1" marL="800280" indent="-343080" defTabSz="914400">
+              <a:lnSpc>
+                <a:spcPct val="100000"/>
+              </a:lnSpc>
+              <a:spcBef>
+                <a:spcPts val="320"/>
+              </a:spcBef>
+              <a:buClr>
+                <a:srgbClr val="000000"/>
+              </a:buClr>
+              <a:buFont typeface="Symbol"/>
+              <a:buChar char=""/>
+              <a:tabLst>
+                <a:tab algn="l" pos="1886040"/>
+              </a:tabLst>
+            </a:pPr>
+            <a:r>
+              <a:rPr b="0" lang="en-US" sz="1200" spc="-1" strike="noStrike">
+                <a:solidFill>
+                  <a:srgbClr val="000000"/>
+                </a:solidFill>
+                <a:latin typeface="Arial"/>
+                <a:ea typeface="DejaVu Sans"/>
+              </a:rPr>
+              <a:t>CodeEU-266: Fix Measured Speed Testcases</a:t>
+            </a:r>
+            <a:endParaRPr b="0" lang="en-US" sz="1200" spc="-1" strike="noStrike">
               <a:solidFill>
                 <a:srgbClr val="000000"/>
               </a:solidFill>
@@ -8683,32 +8853,15 @@
               <a:lnSpc>
                 <a:spcPct val="100000"/>
               </a:lnSpc>
+              <a:spcBef>
+                <a:spcPts val="281"/>
+              </a:spcBef>
               <a:buNone/>
               <a:tabLst>
                 <a:tab algn="l" pos="0"/>
               </a:tabLst>
             </a:pPr>
-            <a:endParaRPr b="0" lang="en-US" sz="1400" spc="-1" strike="noStrike">
-              <a:solidFill>
-                <a:srgbClr val="000000"/>
-              </a:solidFill>
-              <a:latin typeface="Arial"/>
-            </a:endParaRPr>
-          </a:p>
-          <a:p>
-            <a:pPr indent="0" defTabSz="914400">
-              <a:lnSpc>
-                <a:spcPct val="100000"/>
-              </a:lnSpc>
-              <a:spcBef>
-                <a:spcPts val="281"/>
-              </a:spcBef>
-              <a:buNone/>
-              <a:tabLst>
-                <a:tab algn="l" pos="0"/>
-              </a:tabLst>
-            </a:pPr>
-            <a:endParaRPr b="0" lang="en-US" sz="1400" spc="-1" strike="noStrike">
+            <a:endParaRPr b="0" lang="en-US" sz="1200" spc="-1" strike="noStrike">
               <a:solidFill>
                 <a:srgbClr val="000000"/>
               </a:solidFill>
@@ -8783,14 +8936,18 @@
       </p:grpSpPr>
       <p:sp>
         <p:nvSpPr>
-          <p:cNvPr id="91" name="Text Box 94"/>
-          <p:cNvSpPr/>
-          <p:nvPr/>
+          <p:cNvPr id="91" name="PlaceHolder 1"/>
+          <p:cNvSpPr>
+            <a:spLocks noGrp="1"/>
+          </p:cNvSpPr>
+          <p:nvPr>
+            <p:ph type="title"/>
+          </p:nvPr>
         </p:nvSpPr>
         <p:spPr>
           <a:xfrm>
-            <a:off x="539640" y="1052640"/>
-            <a:ext cx="8129160" cy="3945600"/>
+            <a:off x="468360" y="476640"/>
+            <a:ext cx="8210880" cy="673560"/>
           </a:xfrm>
           <a:prstGeom prst="rect">
             <a:avLst/>
@@ -8800,168 +8957,44 @@
             <a:noFill/>
           </a:ln>
         </p:spPr>
-        <p:style>
-          <a:lnRef idx="0"/>
-          <a:fillRef idx="0"/>
-          <a:effectRef idx="0"/>
-          <a:fontRef idx="minor"/>
-        </p:style>
         <p:txBody>
-          <a:bodyPr lIns="90000" rIns="90000" tIns="45000" bIns="45000" anchor="t">
-            <a:spAutoFit/>
+          <a:bodyPr numCol="1" spcCol="0" lIns="90000" rIns="90000" tIns="45000" bIns="45000" anchor="ctr">
+            <a:noAutofit/>
           </a:bodyPr>
           <a:p>
-            <a:pPr algn="ctr" defTabSz="914400">
-              <a:lnSpc>
-                <a:spcPct val="100000"/>
-              </a:lnSpc>
-              <a:spcBef>
-                <a:spcPts val="1599"/>
-              </a:spcBef>
-            </a:pPr>
-            <a:r>
-              <a:rPr b="1" lang="en-US" sz="3200" spc="-1" strike="noStrike">
+            <a:pPr indent="0" algn="ctr" defTabSz="914400">
+              <a:lnSpc>
+                <a:spcPct val="100000"/>
+              </a:lnSpc>
+              <a:buNone/>
+              <a:tabLst>
+                <a:tab algn="l" pos="0"/>
+              </a:tabLst>
+            </a:pPr>
+            <a:r>
+              <a:rPr b="1" lang="en-US" sz="2400" spc="-1" strike="noStrike">
                 <a:solidFill>
                   <a:srgbClr val="990000"/>
                 </a:solidFill>
                 <a:latin typeface="Arial"/>
                 <a:ea typeface="DejaVu Sans"/>
               </a:rPr>
-              <a:t>VECTO 4.0.0.3210 </a:t>
-            </a:r>
-            <a:endParaRPr b="0" lang="en-US" sz="3200" spc="-1" strike="noStrike">
-              <a:solidFill>
-                <a:srgbClr val="000000"/>
-              </a:solidFill>
-              <a:latin typeface="Arial"/>
-            </a:endParaRPr>
-          </a:p>
-          <a:p>
-            <a:pPr algn="ctr" defTabSz="914400">
-              <a:lnSpc>
-                <a:spcPct val="100000"/>
-              </a:lnSpc>
-              <a:spcBef>
-                <a:spcPts val="1001"/>
-              </a:spcBef>
-            </a:pPr>
-            <a:r>
-              <a:rPr b="1" lang="en-US" sz="2000" spc="-1" strike="noStrike">
+              <a:t>Vecto 4.0.1.3217 OFFICIAL RELEASE</a:t>
+            </a:r>
+            <a:br>
+              <a:rPr sz="2400"/>
+            </a:br>
+            <a:r>
+              <a:rPr b="1" lang="en-US" sz="1600" spc="-1" strike="noStrike">
                 <a:solidFill>
                   <a:srgbClr val="990000"/>
                 </a:solidFill>
                 <a:latin typeface="Arial"/>
                 <a:ea typeface="DejaVu Sans"/>
               </a:rPr>
-              <a:t>16.10.2023</a:t>
-            </a:r>
-            <a:endParaRPr b="0" lang="en-US" sz="2000" spc="-1" strike="noStrike">
-              <a:solidFill>
-                <a:srgbClr val="000000"/>
-              </a:solidFill>
-              <a:latin typeface="Arial"/>
-            </a:endParaRPr>
-          </a:p>
-          <a:p>
-            <a:pPr algn="ctr" defTabSz="914400">
-              <a:lnSpc>
-                <a:spcPct val="100000"/>
-              </a:lnSpc>
-              <a:spcBef>
-                <a:spcPts val="1001"/>
-              </a:spcBef>
-            </a:pPr>
-            <a:endParaRPr b="0" lang="en-US" sz="2000" spc="-1" strike="noStrike">
-              <a:solidFill>
-                <a:srgbClr val="000000"/>
-              </a:solidFill>
-              <a:latin typeface="Arial"/>
-            </a:endParaRPr>
-          </a:p>
-          <a:p>
-            <a:pPr algn="ctr" defTabSz="914400">
-              <a:lnSpc>
-                <a:spcPct val="100000"/>
-              </a:lnSpc>
-              <a:spcBef>
-                <a:spcPts val="1001"/>
-              </a:spcBef>
-            </a:pPr>
-            <a:endParaRPr b="0" lang="en-US" sz="2000" spc="-1" strike="noStrike">
-              <a:solidFill>
-                <a:srgbClr val="000000"/>
-              </a:solidFill>
-              <a:latin typeface="Arial"/>
-            </a:endParaRPr>
-          </a:p>
-          <a:p>
-            <a:pPr algn="ctr" defTabSz="914400">
-              <a:lnSpc>
-                <a:spcPct val="100000"/>
-              </a:lnSpc>
-              <a:spcBef>
-                <a:spcPts val="1199"/>
-              </a:spcBef>
-            </a:pPr>
-            <a:endParaRPr b="0" lang="en-US" sz="2400" spc="-1" strike="noStrike">
-              <a:solidFill>
-                <a:srgbClr val="000000"/>
-              </a:solidFill>
-              <a:latin typeface="Arial"/>
-            </a:endParaRPr>
-          </a:p>
-          <a:p>
-            <a:pPr algn="ctr" defTabSz="914400">
-              <a:lnSpc>
-                <a:spcPct val="100000"/>
-              </a:lnSpc>
-              <a:spcBef>
-                <a:spcPts val="1199"/>
-              </a:spcBef>
-            </a:pPr>
-            <a:endParaRPr b="0" lang="en-US" sz="2400" spc="-1" strike="noStrike">
-              <a:solidFill>
-                <a:srgbClr val="000000"/>
-              </a:solidFill>
-              <a:latin typeface="Arial"/>
-            </a:endParaRPr>
-          </a:p>
-          <a:p>
-            <a:pPr algn="ctr" defTabSz="914400">
-              <a:lnSpc>
-                <a:spcPct val="100000"/>
-              </a:lnSpc>
-              <a:spcBef>
-                <a:spcPts val="1199"/>
-              </a:spcBef>
-            </a:pPr>
-            <a:endParaRPr b="0" lang="en-US" sz="2400" spc="-1" strike="noStrike">
-              <a:solidFill>
-                <a:srgbClr val="000000"/>
-              </a:solidFill>
-              <a:latin typeface="Arial"/>
-            </a:endParaRPr>
-          </a:p>
-          <a:p>
-            <a:pPr algn="ctr" defTabSz="914400">
-              <a:lnSpc>
-                <a:spcPct val="100000"/>
-              </a:lnSpc>
-              <a:spcBef>
-                <a:spcPts val="1199"/>
-              </a:spcBef>
-            </a:pPr>
-            <a:r>
-              <a:rPr b="1" lang="en-US" sz="2400" spc="-1" strike="noStrike">
-                <a:solidFill>
-                  <a:srgbClr val="990000"/>
-                </a:solidFill>
-                <a:latin typeface="Arial"/>
-                <a:ea typeface="DejaVu Sans"/>
-              </a:rPr>
-              <a:t>Release Notes</a:t>
-            </a:r>
-            <a:endParaRPr b="0" lang="en-US" sz="2400" spc="-1" strike="noStrike">
+              <a:t>23.10.2023</a:t>
+            </a:r>
+            <a:endParaRPr b="0" lang="en-US" sz="1600" spc="-1" strike="noStrike">
               <a:solidFill>
                 <a:srgbClr val="000000"/>
               </a:solidFill>
@@ -8970,29 +9003,378 @@
           </a:p>
         </p:txBody>
       </p:sp>
-      <p:pic>
-        <p:nvPicPr>
-          <p:cNvPr id="92" name="Picture 2" descr=""/>
-          <p:cNvPicPr/>
-          <p:nvPr/>
-        </p:nvPicPr>
-        <p:blipFill>
-          <a:blip r:embed="rId1"/>
-          <a:stretch/>
-        </p:blipFill>
+      <p:sp>
+        <p:nvSpPr>
+          <p:cNvPr id="92" name="PlaceHolder 2"/>
+          <p:cNvSpPr>
+            <a:spLocks noGrp="1"/>
+          </p:cNvSpPr>
+          <p:nvPr>
+            <p:ph/>
+          </p:nvPr>
+        </p:nvSpPr>
         <p:spPr>
           <a:xfrm>
-            <a:off x="2483640" y="2421000"/>
-            <a:ext cx="4169160" cy="1620360"/>
+            <a:off x="323640" y="1268640"/>
+            <a:ext cx="8489520" cy="4816800"/>
           </a:xfrm>
           <a:prstGeom prst="rect">
             <a:avLst/>
           </a:prstGeom>
+          <a:noFill/>
           <a:ln w="0">
             <a:noFill/>
           </a:ln>
         </p:spPr>
-      </p:pic>
+        <p:txBody>
+          <a:bodyPr numCol="1" spcCol="0" lIns="90000" rIns="90000" tIns="45000" bIns="45000" anchor="t">
+            <a:noAutofit/>
+          </a:bodyPr>
+          <a:p>
+            <a:pPr marL="343080" indent="-343080" defTabSz="914400">
+              <a:lnSpc>
+                <a:spcPct val="100000"/>
+              </a:lnSpc>
+              <a:spcBef>
+                <a:spcPts val="320"/>
+              </a:spcBef>
+              <a:buClr>
+                <a:srgbClr val="000000"/>
+              </a:buClr>
+              <a:buFont typeface="Symbol"/>
+              <a:buChar char=""/>
+              <a:tabLst>
+                <a:tab algn="l" pos="1886040"/>
+              </a:tabLst>
+            </a:pPr>
+            <a:r>
+              <a:rPr b="1" lang="en-US" sz="1600" spc="-1" strike="noStrike">
+                <a:solidFill>
+                  <a:srgbClr val="000000"/>
+                </a:solidFill>
+                <a:latin typeface="Arial"/>
+                <a:ea typeface="DejaVu Sans"/>
+              </a:rPr>
+              <a:t>Improvements</a:t>
+            </a:r>
+            <a:endParaRPr b="0" lang="en-US" sz="1600" spc="-1" strike="noStrike">
+              <a:solidFill>
+                <a:srgbClr val="000000"/>
+              </a:solidFill>
+              <a:latin typeface="Arial"/>
+            </a:endParaRPr>
+          </a:p>
+          <a:p>
+            <a:pPr lvl="1" marL="800280" indent="-343080" defTabSz="914400">
+              <a:lnSpc>
+                <a:spcPct val="100000"/>
+              </a:lnSpc>
+              <a:spcBef>
+                <a:spcPts val="320"/>
+              </a:spcBef>
+              <a:buClr>
+                <a:srgbClr val="000000"/>
+              </a:buClr>
+              <a:buFont typeface="Symbol"/>
+              <a:buChar char=""/>
+              <a:tabLst>
+                <a:tab algn="l" pos="1886040"/>
+              </a:tabLst>
+            </a:pPr>
+            <a:r>
+              <a:rPr b="0" lang="en-US" sz="1400" spc="-1" strike="noStrike">
+                <a:solidFill>
+                  <a:srgbClr val="000000"/>
+                </a:solidFill>
+                <a:latin typeface="Arial"/>
+                <a:ea typeface="DejaVu Sans"/>
+              </a:rPr>
+              <a:t>VTP mode: create zip archive for input and output files</a:t>
+            </a:r>
+            <a:endParaRPr b="0" lang="en-US" sz="1400" spc="-1" strike="noStrike">
+              <a:solidFill>
+                <a:srgbClr val="000000"/>
+              </a:solidFill>
+              <a:latin typeface="Arial"/>
+            </a:endParaRPr>
+          </a:p>
+          <a:p>
+            <a:pPr marL="343080" indent="-343080" defTabSz="914400">
+              <a:lnSpc>
+                <a:spcPct val="100000"/>
+              </a:lnSpc>
+              <a:spcBef>
+                <a:spcPts val="320"/>
+              </a:spcBef>
+              <a:buClr>
+                <a:srgbClr val="000000"/>
+              </a:buClr>
+              <a:buFont typeface="Symbol"/>
+              <a:buChar char=""/>
+              <a:tabLst>
+                <a:tab algn="l" pos="1886040"/>
+              </a:tabLst>
+            </a:pPr>
+            <a:r>
+              <a:rPr b="1" lang="en-US" sz="1600" spc="-1" strike="noStrike">
+                <a:solidFill>
+                  <a:srgbClr val="000000"/>
+                </a:solidFill>
+                <a:latin typeface="Arial"/>
+                <a:ea typeface="DejaVu Sans"/>
+              </a:rPr>
+              <a:t>- Bugfixes</a:t>
+            </a:r>
+            <a:endParaRPr b="0" lang="en-US" sz="1600" spc="-1" strike="noStrike">
+              <a:solidFill>
+                <a:srgbClr val="000000"/>
+              </a:solidFill>
+              <a:latin typeface="Arial"/>
+            </a:endParaRPr>
+          </a:p>
+          <a:p>
+            <a:pPr lvl="1" marL="800280" indent="-343080" defTabSz="914400">
+              <a:lnSpc>
+                <a:spcPct val="100000"/>
+              </a:lnSpc>
+              <a:spcBef>
+                <a:spcPts val="320"/>
+              </a:spcBef>
+              <a:buClr>
+                <a:srgbClr val="000000"/>
+              </a:buClr>
+              <a:buFont typeface="Symbol"/>
+              <a:buChar char=""/>
+              <a:tabLst>
+                <a:tab algn="l" pos="1886040"/>
+              </a:tabLst>
+            </a:pPr>
+            <a:r>
+              <a:rPr b="0" lang="en-US" sz="1400" spc="-1" strike="noStrike">
+                <a:solidFill>
+                  <a:srgbClr val="000000"/>
+                </a:solidFill>
+                <a:latin typeface="Arial"/>
+                <a:ea typeface="DejaVu Sans"/>
+              </a:rPr>
+              <a:t>bugfix in CIF for complete(d) buses - do not write PrimaryVehicleSubgroup element</a:t>
+            </a:r>
+            <a:endParaRPr b="0" lang="en-US" sz="1400" spc="-1" strike="noStrike">
+              <a:solidFill>
+                <a:srgbClr val="000000"/>
+              </a:solidFill>
+              <a:latin typeface="Arial"/>
+            </a:endParaRPr>
+          </a:p>
+          <a:p>
+            <a:pPr lvl="1" marL="800280" indent="-343080" defTabSz="914400">
+              <a:lnSpc>
+                <a:spcPct val="100000"/>
+              </a:lnSpc>
+              <a:spcBef>
+                <a:spcPts val="320"/>
+              </a:spcBef>
+              <a:buClr>
+                <a:srgbClr val="000000"/>
+              </a:buClr>
+              <a:buFont typeface="Symbol"/>
+              <a:buChar char=""/>
+              <a:tabLst>
+                <a:tab algn="l" pos="1886040"/>
+              </a:tabLst>
+            </a:pPr>
+            <a:r>
+              <a:rPr b="0" lang="en-US" sz="1400" spc="-1" strike="noStrike">
+                <a:solidFill>
+                  <a:srgbClr val="000000"/>
+                </a:solidFill>
+                <a:latin typeface="Arial"/>
+                <a:ea typeface="DejaVu Sans"/>
+              </a:rPr>
+              <a:t>fix hybrid strategy: power comparison</a:t>
+            </a:r>
+            <a:endParaRPr b="0" lang="en-US" sz="1400" spc="-1" strike="noStrike">
+              <a:solidFill>
+                <a:srgbClr val="000000"/>
+              </a:solidFill>
+              <a:latin typeface="Arial"/>
+            </a:endParaRPr>
+          </a:p>
+          <a:p>
+            <a:pPr lvl="1" marL="800280" indent="-343080" defTabSz="914400">
+              <a:lnSpc>
+                <a:spcPct val="100000"/>
+              </a:lnSpc>
+              <a:spcBef>
+                <a:spcPts val="320"/>
+              </a:spcBef>
+              <a:buClr>
+                <a:srgbClr val="000000"/>
+              </a:buClr>
+              <a:buFont typeface="Symbol"/>
+              <a:buChar char=""/>
+              <a:tabLst>
+                <a:tab algn="l" pos="1886040"/>
+              </a:tabLst>
+            </a:pPr>
+            <a:r>
+              <a:rPr b="0" lang="en-US" sz="1400" spc="-1" strike="noStrike">
+                <a:solidFill>
+                  <a:srgbClr val="000000"/>
+                </a:solidFill>
+                <a:latin typeface="Arial"/>
+                <a:ea typeface="DejaVu Sans"/>
+              </a:rPr>
+              <a:t>fix exempted vehicles do not work (error message that XML version is not supported)</a:t>
+            </a:r>
+            <a:endParaRPr b="0" lang="en-US" sz="1400" spc="-1" strike="noStrike">
+              <a:solidFill>
+                <a:srgbClr val="000000"/>
+              </a:solidFill>
+              <a:latin typeface="Arial"/>
+            </a:endParaRPr>
+          </a:p>
+          <a:p>
+            <a:pPr lvl="1" marL="800280" indent="-343080" defTabSz="914400">
+              <a:lnSpc>
+                <a:spcPct val="100000"/>
+              </a:lnSpc>
+              <a:spcBef>
+                <a:spcPts val="320"/>
+              </a:spcBef>
+              <a:buClr>
+                <a:srgbClr val="000000"/>
+              </a:buClr>
+              <a:buFont typeface="Symbol"/>
+              <a:buChar char=""/>
+              <a:tabLst>
+                <a:tab algn="l" pos="1886040"/>
+              </a:tabLst>
+            </a:pPr>
+            <a:r>
+              <a:rPr b="0" lang="en-US" sz="1400" spc="-1" strike="noStrike">
+                <a:solidFill>
+                  <a:srgbClr val="000000"/>
+                </a:solidFill>
+                <a:latin typeface="Arial"/>
+                <a:ea typeface="DejaVu Sans"/>
+              </a:rPr>
+              <a:t>bugfix in XML schema: remove wrong PS technology entry for lorries</a:t>
+            </a:r>
+            <a:endParaRPr b="0" lang="en-US" sz="1400" spc="-1" strike="noStrike">
+              <a:solidFill>
+                <a:srgbClr val="000000"/>
+              </a:solidFill>
+              <a:latin typeface="Arial"/>
+            </a:endParaRPr>
+          </a:p>
+          <a:p>
+            <a:pPr lvl="1" marL="800280" indent="-343080" defTabSz="914400">
+              <a:lnSpc>
+                <a:spcPct val="100000"/>
+              </a:lnSpc>
+              <a:spcBef>
+                <a:spcPts val="320"/>
+              </a:spcBef>
+              <a:buClr>
+                <a:srgbClr val="000000"/>
+              </a:buClr>
+              <a:buFont typeface="Symbol"/>
+              <a:buChar char=""/>
+              <a:tabLst>
+                <a:tab algn="l" pos="1886040"/>
+              </a:tabLst>
+            </a:pPr>
+            <a:r>
+              <a:rPr b="0" lang="en-US" sz="1400" spc="-1" strike="noStrike">
+                <a:solidFill>
+                  <a:srgbClr val="000000"/>
+                </a:solidFill>
+                <a:latin typeface="Arial"/>
+                <a:ea typeface="DejaVu Sans"/>
+              </a:rPr>
+              <a:t>bugfix for conditioning power demand for IHPC vehicles</a:t>
+            </a:r>
+            <a:endParaRPr b="0" lang="en-US" sz="1400" spc="-1" strike="noStrike">
+              <a:solidFill>
+                <a:srgbClr val="000000"/>
+              </a:solidFill>
+              <a:latin typeface="Arial"/>
+            </a:endParaRPr>
+          </a:p>
+          <a:p>
+            <a:pPr indent="0" defTabSz="914400">
+              <a:lnSpc>
+                <a:spcPct val="100000"/>
+              </a:lnSpc>
+              <a:buNone/>
+              <a:tabLst>
+                <a:tab algn="l" pos="0"/>
+              </a:tabLst>
+            </a:pPr>
+            <a:endParaRPr b="0" lang="en-US" sz="1400" spc="-1" strike="noStrike">
+              <a:solidFill>
+                <a:srgbClr val="000000"/>
+              </a:solidFill>
+              <a:latin typeface="Arial"/>
+            </a:endParaRPr>
+          </a:p>
+          <a:p>
+            <a:pPr indent="0" defTabSz="914400">
+              <a:lnSpc>
+                <a:spcPct val="100000"/>
+              </a:lnSpc>
+              <a:spcBef>
+                <a:spcPts val="281"/>
+              </a:spcBef>
+              <a:buNone/>
+              <a:tabLst>
+                <a:tab algn="l" pos="0"/>
+              </a:tabLst>
+            </a:pPr>
+            <a:endParaRPr b="0" lang="en-US" sz="1400" spc="-1" strike="noStrike">
+              <a:solidFill>
+                <a:srgbClr val="000000"/>
+              </a:solidFill>
+              <a:latin typeface="Arial"/>
+            </a:endParaRPr>
+          </a:p>
+          <a:p>
+            <a:pPr indent="0" defTabSz="914400">
+              <a:lnSpc>
+                <a:spcPct val="100000"/>
+              </a:lnSpc>
+              <a:buNone/>
+              <a:tabLst>
+                <a:tab algn="l" pos="0"/>
+              </a:tabLst>
+            </a:pPr>
+            <a:endParaRPr b="0" lang="en-US" sz="1400" spc="-1" strike="noStrike">
+              <a:solidFill>
+                <a:srgbClr val="000000"/>
+              </a:solidFill>
+              <a:latin typeface="Arial"/>
+            </a:endParaRPr>
+          </a:p>
+          <a:p>
+            <a:pPr indent="0" defTabSz="914400">
+              <a:lnSpc>
+                <a:spcPct val="100000"/>
+              </a:lnSpc>
+              <a:buNone/>
+              <a:tabLst>
+                <a:tab algn="l" pos="0"/>
+              </a:tabLst>
+            </a:pPr>
+            <a:endParaRPr b="0" lang="en-US" sz="1400" spc="-1" strike="noStrike">
+              <a:solidFill>
+                <a:srgbClr val="000000"/>
+              </a:solidFill>
+              <a:latin typeface="Arial"/>
+            </a:endParaRPr>
+          </a:p>
+        </p:txBody>
+      </p:sp>
     </p:spTree>
   </p:cSld>
   <mc:AlternateContent>
@@ -9025,18 +9407,14 @@
       </p:grpSpPr>
       <p:sp>
         <p:nvSpPr>
-          <p:cNvPr id="93" name="PlaceHolder 1"/>
-          <p:cNvSpPr>
-            <a:spLocks noGrp="1"/>
-          </p:cNvSpPr>
-          <p:nvPr>
-            <p:ph type="title"/>
-          </p:nvPr>
+          <p:cNvPr id="93" name="Text Box 94"/>
+          <p:cNvSpPr/>
+          <p:nvPr/>
         </p:nvSpPr>
         <p:spPr>
           <a:xfrm>
-            <a:off x="722160" y="2320200"/>
-            <a:ext cx="7765920" cy="1523520"/>
+            <a:off x="539640" y="1052640"/>
+            <a:ext cx="8128800" cy="3945600"/>
           </a:xfrm>
           <a:prstGeom prst="rect">
             <a:avLst/>
@@ -9046,26 +9424,157 @@
             <a:noFill/>
           </a:ln>
         </p:spPr>
+        <p:style>
+          <a:lnRef idx="0"/>
+          <a:fillRef idx="0"/>
+          <a:effectRef idx="0"/>
+          <a:fontRef idx="minor"/>
+        </p:style>
         <p:txBody>
-          <a:bodyPr lIns="0" rIns="0" tIns="0" bIns="0" anchor="ctr">
-            <a:noAutofit/>
+          <a:bodyPr lIns="90000" rIns="90000" tIns="45000" bIns="45000" anchor="t">
+            <a:spAutoFit/>
           </a:bodyPr>
           <a:p>
-            <a:pPr indent="0" algn="ctr" defTabSz="914400">
-              <a:lnSpc>
-                <a:spcPct val="90000"/>
-              </a:lnSpc>
-              <a:spcBef>
-                <a:spcPts val="4201"/>
-              </a:spcBef>
-              <a:buNone/>
-              <a:tabLst>
-                <a:tab algn="l" pos="0"/>
-              </a:tabLst>
-            </a:pPr>
-            <a:br>
-              <a:rPr sz="2400"/>
-            </a:br>
+            <a:pPr algn="ctr" defTabSz="914400">
+              <a:lnSpc>
+                <a:spcPct val="100000"/>
+              </a:lnSpc>
+              <a:spcBef>
+                <a:spcPts val="1599"/>
+              </a:spcBef>
+            </a:pPr>
+            <a:r>
+              <a:rPr b="1" lang="en-US" sz="3200" spc="-1" strike="noStrike">
+                <a:solidFill>
+                  <a:srgbClr val="990000"/>
+                </a:solidFill>
+                <a:latin typeface="Arial"/>
+                <a:ea typeface="DejaVu Sans"/>
+              </a:rPr>
+              <a:t>VECTO 4.0.0.3210 </a:t>
+            </a:r>
+            <a:endParaRPr b="0" lang="en-US" sz="3200" spc="-1" strike="noStrike">
+              <a:solidFill>
+                <a:srgbClr val="000000"/>
+              </a:solidFill>
+              <a:latin typeface="Arial"/>
+            </a:endParaRPr>
+          </a:p>
+          <a:p>
+            <a:pPr algn="ctr" defTabSz="914400">
+              <a:lnSpc>
+                <a:spcPct val="100000"/>
+              </a:lnSpc>
+              <a:spcBef>
+                <a:spcPts val="1001"/>
+              </a:spcBef>
+            </a:pPr>
+            <a:r>
+              <a:rPr b="1" lang="en-US" sz="2000" spc="-1" strike="noStrike">
+                <a:solidFill>
+                  <a:srgbClr val="990000"/>
+                </a:solidFill>
+                <a:latin typeface="Arial"/>
+                <a:ea typeface="DejaVu Sans"/>
+              </a:rPr>
+              <a:t>16.10.2023</a:t>
+            </a:r>
+            <a:endParaRPr b="0" lang="en-US" sz="2000" spc="-1" strike="noStrike">
+              <a:solidFill>
+                <a:srgbClr val="000000"/>
+              </a:solidFill>
+              <a:latin typeface="Arial"/>
+            </a:endParaRPr>
+          </a:p>
+          <a:p>
+            <a:pPr algn="ctr" defTabSz="914400">
+              <a:lnSpc>
+                <a:spcPct val="100000"/>
+              </a:lnSpc>
+              <a:spcBef>
+                <a:spcPts val="1001"/>
+              </a:spcBef>
+            </a:pPr>
+            <a:endParaRPr b="0" lang="en-US" sz="2000" spc="-1" strike="noStrike">
+              <a:solidFill>
+                <a:srgbClr val="000000"/>
+              </a:solidFill>
+              <a:latin typeface="Arial"/>
+            </a:endParaRPr>
+          </a:p>
+          <a:p>
+            <a:pPr algn="ctr" defTabSz="914400">
+              <a:lnSpc>
+                <a:spcPct val="100000"/>
+              </a:lnSpc>
+              <a:spcBef>
+                <a:spcPts val="1001"/>
+              </a:spcBef>
+            </a:pPr>
+            <a:endParaRPr b="0" lang="en-US" sz="2000" spc="-1" strike="noStrike">
+              <a:solidFill>
+                <a:srgbClr val="000000"/>
+              </a:solidFill>
+              <a:latin typeface="Arial"/>
+            </a:endParaRPr>
+          </a:p>
+          <a:p>
+            <a:pPr algn="ctr" defTabSz="914400">
+              <a:lnSpc>
+                <a:spcPct val="100000"/>
+              </a:lnSpc>
+              <a:spcBef>
+                <a:spcPts val="1199"/>
+              </a:spcBef>
+            </a:pPr>
+            <a:endParaRPr b="0" lang="en-US" sz="2400" spc="-1" strike="noStrike">
+              <a:solidFill>
+                <a:srgbClr val="000000"/>
+              </a:solidFill>
+              <a:latin typeface="Arial"/>
+            </a:endParaRPr>
+          </a:p>
+          <a:p>
+            <a:pPr algn="ctr" defTabSz="914400">
+              <a:lnSpc>
+                <a:spcPct val="100000"/>
+              </a:lnSpc>
+              <a:spcBef>
+                <a:spcPts val="1199"/>
+              </a:spcBef>
+            </a:pPr>
+            <a:endParaRPr b="0" lang="en-US" sz="2400" spc="-1" strike="noStrike">
+              <a:solidFill>
+                <a:srgbClr val="000000"/>
+              </a:solidFill>
+              <a:latin typeface="Arial"/>
+            </a:endParaRPr>
+          </a:p>
+          <a:p>
+            <a:pPr algn="ctr" defTabSz="914400">
+              <a:lnSpc>
+                <a:spcPct val="100000"/>
+              </a:lnSpc>
+              <a:spcBef>
+                <a:spcPts val="1199"/>
+              </a:spcBef>
+            </a:pPr>
+            <a:endParaRPr b="0" lang="en-US" sz="2400" spc="-1" strike="noStrike">
+              <a:solidFill>
+                <a:srgbClr val="000000"/>
+              </a:solidFill>
+              <a:latin typeface="Arial"/>
+            </a:endParaRPr>
+          </a:p>
+          <a:p>
+            <a:pPr algn="ctr" defTabSz="914400">
+              <a:lnSpc>
+                <a:spcPct val="100000"/>
+              </a:lnSpc>
+              <a:spcBef>
+                <a:spcPts val="1199"/>
+              </a:spcBef>
+            </a:pPr>
             <a:r>
               <a:rPr b="1" lang="en-US" sz="2400" spc="-1" strike="noStrike">
                 <a:solidFill>
@@ -9074,30 +9583,8 @@
                 <a:latin typeface="Arial"/>
                 <a:ea typeface="DejaVu Sans"/>
               </a:rPr>
-              <a:t>First official VECTO release for the 2nd Amendment </a:t>
-            </a:r>
-            <a:br>
-              <a:rPr sz="2400"/>
-            </a:br>
-            <a:r>
-              <a:rPr b="1" lang="en-US" sz="2400" spc="-1" strike="noStrike">
-                <a:solidFill>
-                  <a:srgbClr val="990000"/>
-                </a:solidFill>
-                <a:latin typeface="Arial"/>
-                <a:ea typeface="DejaVu Sans"/>
-              </a:rPr>
-              <a:t>of Regulation (EU) 2017/2400</a:t>
-            </a:r>
-            <a:br>
-              <a:rPr sz="2800"/>
-            </a:br>
-            <a:br>
-              <a:rPr sz="2800"/>
-            </a:br>
-            <a:br>
-              <a:rPr sz="2400"/>
-            </a:br>
+              <a:t>Release Notes</a:t>
+            </a:r>
             <a:endParaRPr b="0" lang="en-US" sz="2400" spc="-1" strike="noStrike">
               <a:solidFill>
                 <a:srgbClr val="000000"/>
@@ -9107,65 +9594,29 @@
           </a:p>
         </p:txBody>
       </p:sp>
-      <p:sp>
-        <p:nvSpPr>
-          <p:cNvPr id="94" name="PlaceHolder 2"/>
-          <p:cNvSpPr>
-            <a:spLocks noGrp="1"/>
-          </p:cNvSpPr>
-          <p:nvPr>
-            <p:ph/>
-          </p:nvPr>
-        </p:nvSpPr>
+      <p:pic>
+        <p:nvPicPr>
+          <p:cNvPr id="94" name="Picture 2" descr=""/>
+          <p:cNvPicPr/>
+          <p:nvPr/>
+        </p:nvPicPr>
+        <p:blipFill>
+          <a:blip r:embed="rId1"/>
+          <a:stretch/>
+        </p:blipFill>
         <p:spPr>
           <a:xfrm>
-            <a:off x="722160" y="4276440"/>
-            <a:ext cx="7765920" cy="401040"/>
+            <a:off x="2483640" y="2421000"/>
+            <a:ext cx="4168800" cy="1620000"/>
           </a:xfrm>
           <a:prstGeom prst="rect">
             <a:avLst/>
           </a:prstGeom>
-          <a:noFill/>
           <a:ln w="0">
             <a:noFill/>
           </a:ln>
         </p:spPr>
-        <p:txBody>
-          <a:bodyPr lIns="0" rIns="0" tIns="0" bIns="0" anchor="ctr">
-            <a:noAutofit/>
-          </a:bodyPr>
-          <a:p>
-            <a:pPr indent="0" algn="ctr" defTabSz="914400">
-              <a:lnSpc>
-                <a:spcPct val="90000"/>
-              </a:lnSpc>
-              <a:spcBef>
-                <a:spcPts val="1001"/>
-              </a:spcBef>
-              <a:buNone/>
-              <a:tabLst>
-                <a:tab algn="l" pos="0"/>
-              </a:tabLst>
-            </a:pPr>
-            <a:r>
-              <a:rPr b="0" lang="en-GB" sz="2000" spc="-1" strike="noStrike">
-                <a:solidFill>
-                  <a:schemeClr val="dk1"/>
-                </a:solidFill>
-                <a:latin typeface="Arial"/>
-                <a:ea typeface="DejaVu Sans"/>
-              </a:rPr>
-              <a:t>TUG</a:t>
-            </a:r>
-            <a:endParaRPr b="0" lang="en-US" sz="2000" spc="-1" strike="noStrike">
-              <a:solidFill>
-                <a:srgbClr val="000000"/>
-              </a:solidFill>
-              <a:latin typeface="Arial"/>
-            </a:endParaRPr>
-          </a:p>
-        </p:txBody>
-      </p:sp>
+      </p:pic>
     </p:spTree>
   </p:cSld>
   <mc:AlternateContent>
@@ -9209,7 +9660,7 @@
         <p:spPr>
           <a:xfrm>
             <a:off x="468360" y="476640"/>
-            <a:ext cx="8211240" cy="673920"/>
+            <a:ext cx="8210880" cy="673560"/>
           </a:xfrm>
           <a:prstGeom prst="rect">
             <a:avLst/>
@@ -9241,7 +9692,7 @@
                 <a:latin typeface="Arial"/>
                 <a:ea typeface="DejaVu Sans"/>
               </a:rPr>
-              <a:t>Vecto 4.2.1.3469 OFFICIAL RELEASE </a:t>
+              <a:t>Vecto 4.2.2.3539 RELEASE CANDIDATE </a:t>
             </a:r>
             <a:br>
               <a:rPr sz="2400"/>
@@ -9254,7 +9705,7 @@
                 <a:latin typeface="Arial"/>
                 <a:ea typeface="DejaVu Sans"/>
               </a:rPr>
-              <a:t>01.07.2024</a:t>
+              <a:t>09.09.2024</a:t>
             </a:r>
             <a:endParaRPr b="0" lang="en-US" sz="1600" spc="-1" strike="noStrike">
               <a:solidFill>
@@ -9278,7 +9729,7 @@
         <p:spPr>
           <a:xfrm>
             <a:off x="323640" y="1639080"/>
-            <a:ext cx="8489880" cy="4446720"/>
+            <a:ext cx="8489520" cy="4446360"/>
           </a:xfrm>
           <a:prstGeom prst="rect">
             <a:avLst/>
@@ -9305,6 +9756,26 @@
                 <a:tab algn="l" pos="0"/>
               </a:tabLst>
             </a:pPr>
+            <a:endParaRPr b="0" lang="en-US" sz="1600" spc="-1" strike="noStrike">
+              <a:solidFill>
+                <a:srgbClr val="000000"/>
+              </a:solidFill>
+              <a:latin typeface="Arial"/>
+            </a:endParaRPr>
+          </a:p>
+          <a:p>
+            <a:pPr marL="343080" indent="0" defTabSz="914400">
+              <a:lnSpc>
+                <a:spcPct val="100000"/>
+              </a:lnSpc>
+              <a:spcBef>
+                <a:spcPts val="320"/>
+              </a:spcBef>
+              <a:buNone/>
+              <a:tabLst>
+                <a:tab algn="l" pos="0"/>
+              </a:tabLst>
+            </a:pPr>
             <a:r>
               <a:rPr b="1" lang="en-US" sz="1600" spc="-1" strike="noStrike">
                 <a:solidFill>
@@ -9313,7 +9784,7 @@
                 <a:latin typeface="Arial"/>
                 <a:ea typeface="DejaVu Sans"/>
               </a:rPr>
-              <a:t>Features</a:t>
+              <a:t>Bugfixes</a:t>
             </a:r>
             <a:endParaRPr b="0" lang="en-US" sz="1600" spc="-1" strike="noStrike">
               <a:solidFill>
@@ -9347,59 +9818,9 @@
                 <a:latin typeface="Arial"/>
                 <a:ea typeface="DejaVu Sans"/>
               </a:rPr>
-              <a:t>CodeEU-726: Build an XML converter tool for older VECTO jobs</a:t>
+              <a:t>CodeEU-710: Hashing tool check fail with VECTO version 3330</a:t>
             </a:r>
             <a:endParaRPr b="0" lang="en-US" sz="1200" spc="-1" strike="noStrike">
-              <a:solidFill>
-                <a:srgbClr val="000000"/>
-              </a:solidFill>
-              <a:latin typeface="Arial"/>
-            </a:endParaRPr>
-          </a:p>
-          <a:p>
-            <a:pPr marL="343080" indent="0" defTabSz="914400">
-              <a:lnSpc>
-                <a:spcPct val="100000"/>
-              </a:lnSpc>
-              <a:spcBef>
-                <a:spcPts val="320"/>
-              </a:spcBef>
-              <a:buNone/>
-              <a:tabLst>
-                <a:tab algn="l" pos="0"/>
-              </a:tabLst>
-            </a:pPr>
-            <a:endParaRPr b="0" lang="en-US" sz="1200" spc="-1" strike="noStrike">
-              <a:solidFill>
-                <a:srgbClr val="000000"/>
-              </a:solidFill>
-              <a:latin typeface="Arial"/>
-            </a:endParaRPr>
-          </a:p>
-          <a:p>
-            <a:pPr marL="343080" indent="0" defTabSz="914400">
-              <a:lnSpc>
-                <a:spcPct val="100000"/>
-              </a:lnSpc>
-              <a:spcBef>
-                <a:spcPts val="320"/>
-              </a:spcBef>
-              <a:buNone/>
-              <a:tabLst>
-                <a:tab algn="l" pos="0"/>
-              </a:tabLst>
-            </a:pPr>
-            <a:r>
-              <a:rPr b="1" lang="en-US" sz="1600" spc="-1" strike="noStrike">
-                <a:solidFill>
-                  <a:srgbClr val="000000"/>
-                </a:solidFill>
-                <a:latin typeface="Arial"/>
-                <a:ea typeface="DejaVu Sans"/>
-              </a:rPr>
-              <a:t>Bugfixes</a:t>
-            </a:r>
-            <a:endParaRPr b="0" lang="en-US" sz="1600" spc="-1" strike="noStrike">
               <a:solidFill>
                 <a:srgbClr val="000000"/>
               </a:solidFill>
@@ -9431,7 +9852,7 @@
                 <a:latin typeface="Arial"/>
                 <a:ea typeface="DejaVu Sans"/>
               </a:rPr>
-              <a:t>CodeEU-719: the six new tyre dimensions from line 126 onwards to the latest “wheels.csv” file in the VECTO repository</a:t>
+              <a:t>CodeEU-711: Hashing tool check fail with VECTO 4.1.3.3415</a:t>
             </a:r>
             <a:endParaRPr b="0" lang="en-US" sz="1200" spc="-1" strike="noStrike">
               <a:solidFill>
@@ -9465,7 +9886,7 @@
                 <a:latin typeface="Arial"/>
                 <a:ea typeface="DejaVu Sans"/>
               </a:rPr>
-              <a:t>CodeEU-717: VECTO-4.2.0.3448-RC - Buses AMT Gearbox Type with 1% higher C02 in primary results</a:t>
+              <a:t>CodeEU-712: VECTO VTP error</a:t>
             </a:r>
             <a:endParaRPr b="0" lang="en-US" sz="1200" spc="-1" strike="noStrike">
               <a:solidFill>
@@ -9499,7 +9920,7 @@
                 <a:latin typeface="Arial"/>
                 <a:ea typeface="DejaVu Sans"/>
               </a:rPr>
-              <a:t>CodeEU-724: Error in Primary Bus Simulation: Object reference not set to an instance of an object</a:t>
+              <a:t>CodeEU-754: "Failed to find operating point"; "Failed to find mechanic power for given electric power" in E2 vehicle</a:t>
             </a:r>
             <a:endParaRPr b="0" lang="en-US" sz="1200" spc="-1" strike="noStrike">
               <a:solidFill>
@@ -9533,7 +9954,7 @@
                 <a:latin typeface="Arial"/>
                 <a:ea typeface="DejaVu Sans"/>
               </a:rPr>
-              <a:t>CodeEU-716: VECTO-4.2.0.3448-RC - Buses Result Summary section missing in RLST_Customer.xml</a:t>
+              <a:t>CodeEU-727: Failure in simulating HEV in different VECTO versions</a:t>
             </a:r>
             <a:endParaRPr b="0" lang="en-US" sz="1200" spc="-1" strike="noStrike">
               <a:solidFill>
@@ -9567,7 +9988,7 @@
                 <a:latin typeface="Arial"/>
                 <a:ea typeface="DejaVu Sans"/>
               </a:rPr>
-              <a:t>CodeEU-694: Primary and Completed heavybus FCV article 9 exempted hashcode mismatch.</a:t>
+              <a:t>CodeEU-749: Double summary for electric vehicles</a:t>
             </a:r>
             <a:endParaRPr b="0" lang="en-US" sz="1200" spc="-1" strike="noStrike">
               <a:solidFill>
@@ -9601,7 +10022,7 @@
                 <a:latin typeface="Arial"/>
                 <a:ea typeface="DejaVu Sans"/>
               </a:rPr>
-              <a:t>CodeEU-735: SMT strategy different between engineering and declaration mode</a:t>
+              <a:t>CodeEU-542: IVECO confidential : BUG REPORT : CRW LE T7D VOITH NXT 5.63</a:t>
             </a:r>
             <a:endParaRPr b="0" lang="en-US" sz="1200" spc="-1" strike="noStrike">
               <a:solidFill>
@@ -9635,7 +10056,7 @@
                 <a:latin typeface="Arial"/>
                 <a:ea typeface="DejaVu Sans"/>
               </a:rPr>
-              <a:t>CodeEU-736: Existing customer reports (CIF) fail validation</a:t>
+              <a:t>CodeEU-663: IHPC: Failed to find operating point </a:t>
             </a:r>
             <a:endParaRPr b="0" lang="en-US" sz="1200" spc="-1" strike="noStrike">
               <a:solidFill>
@@ -9669,7 +10090,7 @@
                 <a:latin typeface="Arial"/>
                 <a:ea typeface="DejaVu Sans"/>
               </a:rPr>
-              <a:t>CodeEU-737: Missing data from XML report</a:t>
+              <a:t>CodeEU-634: Article 10(2) issue - VIN YS2G6X20002202570</a:t>
             </a:r>
             <a:endParaRPr b="0" lang="en-US" sz="1200" spc="-1" strike="noStrike">
               <a:solidFill>
@@ -9679,18 +10100,32 @@
             </a:endParaRPr>
           </a:p>
           <a:p>
-            <a:pPr marL="343080" indent="0" defTabSz="914400">
-              <a:lnSpc>
-                <a:spcPct val="100000"/>
-              </a:lnSpc>
-              <a:spcBef>
-                <a:spcPts val="320"/>
-              </a:spcBef>
-              <a:buNone/>
-              <a:tabLst>
-                <a:tab algn="l" pos="0"/>
-              </a:tabLst>
-            </a:pPr>
+            <a:pPr marL="343080" indent="-343080" defTabSz="914400">
+              <a:lnSpc>
+                <a:spcPct val="100000"/>
+              </a:lnSpc>
+              <a:spcBef>
+                <a:spcPts val="320"/>
+              </a:spcBef>
+              <a:buClr>
+                <a:srgbClr val="000000"/>
+              </a:buClr>
+              <a:buFont typeface="Symbol"/>
+              <a:buChar char=""/>
+              <a:tabLst>
+                <a:tab algn="l" pos="1886040"/>
+              </a:tabLst>
+            </a:pPr>
+            <a:r>
+              <a:rPr b="0" lang="en-US" sz="1200" spc="-1" strike="noStrike">
+                <a:solidFill>
+                  <a:srgbClr val="000000"/>
+                </a:solidFill>
+                <a:latin typeface="Arial"/>
+                <a:ea typeface="DejaVu Sans"/>
+              </a:rPr>
+              <a:t>CodeEU-671: IHPC: simulation abort due to unexpected response</a:t>
+            </a:r>
             <a:endParaRPr b="0" lang="en-US" sz="1200" spc="-1" strike="noStrike">
               <a:solidFill>
                 <a:srgbClr val="000000"/>
@@ -9737,581 +10172,13 @@
             <a:spLocks noGrp="1"/>
           </p:cNvSpPr>
           <p:nvPr>
-            <p:ph/>
-          </p:nvPr>
-        </p:nvSpPr>
-        <p:spPr>
-          <a:xfrm>
-            <a:off x="588240" y="1140480"/>
-            <a:ext cx="8388000" cy="5040720"/>
-          </a:xfrm>
-          <a:prstGeom prst="rect">
-            <a:avLst/>
-          </a:prstGeom>
-          <a:noFill/>
-          <a:ln w="0">
-            <a:noFill/>
-          </a:ln>
-        </p:spPr>
-        <p:txBody>
-          <a:bodyPr lIns="0" rIns="0" tIns="0" bIns="0" anchor="t">
-            <a:normAutofit fontScale="64999"/>
-          </a:bodyPr>
-          <a:p>
-            <a:pPr marL="228600" indent="-228600" defTabSz="914400">
-              <a:lnSpc>
-                <a:spcPct val="120000"/>
-              </a:lnSpc>
-              <a:spcBef>
-                <a:spcPts val="601"/>
-              </a:spcBef>
-              <a:buClr>
-                <a:srgbClr val="000000"/>
-              </a:buClr>
-              <a:buFont typeface="Arial"/>
-              <a:buChar char="•"/>
-            </a:pPr>
-            <a:r>
-              <a:rPr b="0" lang="en-US" sz="2000" spc="-1" strike="noStrike">
-                <a:solidFill>
-                  <a:schemeClr val="dk1"/>
-                </a:solidFill>
-                <a:latin typeface="Arial"/>
-                <a:ea typeface="DejaVu Sans"/>
-              </a:rPr>
-              <a:t>Declaration Mode</a:t>
-            </a:r>
-            <a:endParaRPr b="0" lang="en-US" sz="2000" spc="-1" strike="noStrike">
-              <a:solidFill>
-                <a:srgbClr val="000000"/>
-              </a:solidFill>
-              <a:latin typeface="Arial"/>
-            </a:endParaRPr>
-          </a:p>
-          <a:p>
-            <a:pPr lvl="1" marL="716040" indent="-266760" defTabSz="914400">
-              <a:lnSpc>
-                <a:spcPct val="120000"/>
-              </a:lnSpc>
-              <a:spcBef>
-                <a:spcPts val="601"/>
-              </a:spcBef>
-              <a:buClr>
-                <a:srgbClr val="000000"/>
-              </a:buClr>
-              <a:buFont typeface="Wingdings" charset="2"/>
-              <a:buChar char=""/>
-            </a:pPr>
-            <a:r>
-              <a:rPr b="0" lang="en-US" sz="1600" spc="-1" strike="noStrike">
-                <a:solidFill>
-                  <a:schemeClr val="dk1"/>
-                </a:solidFill>
-                <a:latin typeface="Arial"/>
-                <a:ea typeface="DejaVu Sans"/>
-              </a:rPr>
-              <a:t>xEV-Heavy Lorries</a:t>
-            </a:r>
-            <a:endParaRPr b="0" lang="en-US" sz="1600" spc="-1" strike="noStrike">
-              <a:solidFill>
-                <a:srgbClr val="000000"/>
-              </a:solidFill>
-              <a:latin typeface="Arial"/>
-            </a:endParaRPr>
-          </a:p>
-          <a:p>
-            <a:pPr lvl="1" marL="716040" indent="-266760" defTabSz="914400">
-              <a:lnSpc>
-                <a:spcPct val="120000"/>
-              </a:lnSpc>
-              <a:spcBef>
-                <a:spcPts val="601"/>
-              </a:spcBef>
-              <a:buClr>
-                <a:srgbClr val="000000"/>
-              </a:buClr>
-              <a:buFont typeface="Wingdings" charset="2"/>
-              <a:buChar char=""/>
-            </a:pPr>
-            <a:r>
-              <a:rPr b="0" lang="en-US" sz="1600" spc="-1" strike="noStrike">
-                <a:solidFill>
-                  <a:schemeClr val="dk1"/>
-                </a:solidFill>
-                <a:latin typeface="Arial"/>
-                <a:ea typeface="DejaVu Sans"/>
-              </a:rPr>
-              <a:t>Conventional Medium Lorries</a:t>
-            </a:r>
-            <a:endParaRPr b="0" lang="en-US" sz="1600" spc="-1" strike="noStrike">
-              <a:solidFill>
-                <a:srgbClr val="000000"/>
-              </a:solidFill>
-              <a:latin typeface="Arial"/>
-            </a:endParaRPr>
-          </a:p>
-          <a:p>
-            <a:pPr lvl="1" marL="716040" indent="-266760" defTabSz="914400">
-              <a:lnSpc>
-                <a:spcPct val="120000"/>
-              </a:lnSpc>
-              <a:spcBef>
-                <a:spcPts val="601"/>
-              </a:spcBef>
-              <a:buClr>
-                <a:srgbClr val="000000"/>
-              </a:buClr>
-              <a:buFont typeface="Wingdings" charset="2"/>
-              <a:buChar char=""/>
-            </a:pPr>
-            <a:r>
-              <a:rPr b="0" lang="en-US" sz="1600" spc="-1" strike="noStrike">
-                <a:solidFill>
-                  <a:schemeClr val="dk1"/>
-                </a:solidFill>
-                <a:latin typeface="Arial"/>
-                <a:ea typeface="DejaVu Sans"/>
-              </a:rPr>
-              <a:t>xEV Medium Lorries</a:t>
-            </a:r>
-            <a:endParaRPr b="0" lang="en-US" sz="1600" spc="-1" strike="noStrike">
-              <a:solidFill>
-                <a:srgbClr val="000000"/>
-              </a:solidFill>
-              <a:latin typeface="Arial"/>
-            </a:endParaRPr>
-          </a:p>
-          <a:p>
-            <a:pPr lvl="1" marL="716040" indent="-266760" defTabSz="914400">
-              <a:lnSpc>
-                <a:spcPct val="120000"/>
-              </a:lnSpc>
-              <a:spcBef>
-                <a:spcPts val="601"/>
-              </a:spcBef>
-              <a:buClr>
-                <a:srgbClr val="000000"/>
-              </a:buClr>
-              <a:buFont typeface="Wingdings" charset="2"/>
-              <a:buChar char=""/>
-            </a:pPr>
-            <a:r>
-              <a:rPr b="0" lang="en-US" sz="1600" spc="-1" strike="noStrike">
-                <a:solidFill>
-                  <a:schemeClr val="dk1"/>
-                </a:solidFill>
-                <a:latin typeface="Arial"/>
-                <a:ea typeface="DejaVu Sans"/>
-              </a:rPr>
-              <a:t>Conventional Buses</a:t>
-            </a:r>
-            <a:endParaRPr b="0" lang="en-US" sz="1600" spc="-1" strike="noStrike">
-              <a:solidFill>
-                <a:srgbClr val="000000"/>
-              </a:solidFill>
-              <a:latin typeface="Arial"/>
-            </a:endParaRPr>
-          </a:p>
-          <a:p>
-            <a:pPr lvl="1" marL="716040" indent="-266760" defTabSz="914400">
-              <a:lnSpc>
-                <a:spcPct val="120000"/>
-              </a:lnSpc>
-              <a:spcBef>
-                <a:spcPts val="601"/>
-              </a:spcBef>
-              <a:buClr>
-                <a:srgbClr val="000000"/>
-              </a:buClr>
-              <a:buFont typeface="Wingdings" charset="2"/>
-              <a:buChar char=""/>
-            </a:pPr>
-            <a:r>
-              <a:rPr b="0" lang="en-US" sz="1600" spc="-1" strike="noStrike">
-                <a:solidFill>
-                  <a:schemeClr val="dk1"/>
-                </a:solidFill>
-                <a:latin typeface="Arial"/>
-                <a:ea typeface="DejaVu Sans"/>
-              </a:rPr>
-              <a:t>xEV Buses</a:t>
-            </a:r>
-            <a:endParaRPr b="0" lang="en-US" sz="1600" spc="-1" strike="noStrike">
-              <a:solidFill>
-                <a:srgbClr val="000000"/>
-              </a:solidFill>
-              <a:latin typeface="Arial"/>
-            </a:endParaRPr>
-          </a:p>
-          <a:p>
-            <a:pPr marL="228600" indent="-228600" defTabSz="914400">
-              <a:lnSpc>
-                <a:spcPct val="120000"/>
-              </a:lnSpc>
-              <a:spcBef>
-                <a:spcPts val="601"/>
-              </a:spcBef>
-              <a:buClr>
-                <a:srgbClr val="000000"/>
-              </a:buClr>
-              <a:buFont typeface="Arial"/>
-              <a:buChar char="•"/>
-            </a:pPr>
-            <a:r>
-              <a:rPr b="0" lang="en-US" sz="2000" spc="-1" strike="noStrike">
-                <a:solidFill>
-                  <a:schemeClr val="dk1"/>
-                </a:solidFill>
-                <a:latin typeface="Arial"/>
-                <a:ea typeface="DejaVu Sans"/>
-              </a:rPr>
-              <a:t>Dedicated user interface for simulating buses in Declaration Mode using the multistep approach: VECTOMultistep.exe </a:t>
-            </a:r>
-            <a:endParaRPr b="0" lang="en-US" sz="2000" spc="-1" strike="noStrike">
-              <a:solidFill>
-                <a:srgbClr val="000000"/>
-              </a:solidFill>
-              <a:latin typeface="Arial"/>
-            </a:endParaRPr>
-          </a:p>
-          <a:p>
-            <a:pPr marL="228600" indent="-228600" defTabSz="914400">
-              <a:lnSpc>
-                <a:spcPct val="120000"/>
-              </a:lnSpc>
-              <a:spcBef>
-                <a:spcPts val="601"/>
-              </a:spcBef>
-              <a:buClr>
-                <a:srgbClr val="000000"/>
-              </a:buClr>
-              <a:buFont typeface="Arial"/>
-              <a:buChar char="•"/>
-            </a:pPr>
-            <a:r>
-              <a:rPr b="0" lang="en-US" sz="2000" spc="-1" strike="noStrike">
-                <a:solidFill>
-                  <a:schemeClr val="dk1"/>
-                </a:solidFill>
-                <a:latin typeface="Arial"/>
-                <a:ea typeface="DejaVu Sans"/>
-              </a:rPr>
-              <a:t>Engineering Mode</a:t>
-            </a:r>
-            <a:endParaRPr b="0" lang="en-US" sz="2000" spc="-1" strike="noStrike">
-              <a:solidFill>
-                <a:srgbClr val="000000"/>
-              </a:solidFill>
-              <a:latin typeface="Arial"/>
-            </a:endParaRPr>
-          </a:p>
-          <a:p>
-            <a:pPr lvl="1" marL="716040" indent="-266760" defTabSz="914400">
-              <a:lnSpc>
-                <a:spcPct val="120000"/>
-              </a:lnSpc>
-              <a:spcBef>
-                <a:spcPts val="601"/>
-              </a:spcBef>
-              <a:buClr>
-                <a:srgbClr val="000000"/>
-              </a:buClr>
-              <a:buFont typeface="Wingdings" charset="2"/>
-              <a:buChar char=""/>
-            </a:pPr>
-            <a:r>
-              <a:rPr b="0" lang="en-US" sz="1600" spc="-1" strike="noStrike">
-                <a:solidFill>
-                  <a:schemeClr val="dk1"/>
-                </a:solidFill>
-                <a:latin typeface="Arial"/>
-                <a:ea typeface="DejaVu Sans"/>
-              </a:rPr>
-              <a:t>xEV-Vehicles</a:t>
-            </a:r>
-            <a:endParaRPr b="0" lang="en-US" sz="1600" spc="-1" strike="noStrike">
-              <a:solidFill>
-                <a:srgbClr val="000000"/>
-              </a:solidFill>
-              <a:latin typeface="Arial"/>
-            </a:endParaRPr>
-          </a:p>
-          <a:p>
-            <a:pPr marL="228600" indent="-228600" defTabSz="914400">
-              <a:lnSpc>
-                <a:spcPct val="120000"/>
-              </a:lnSpc>
-              <a:spcBef>
-                <a:spcPts val="601"/>
-              </a:spcBef>
-              <a:buClr>
-                <a:srgbClr val="000000"/>
-              </a:buClr>
-              <a:buFont typeface="Arial"/>
-              <a:buChar char="•"/>
-            </a:pPr>
-            <a:r>
-              <a:rPr b="0" lang="pt-BR" sz="2000" spc="-1" strike="noStrike">
-                <a:solidFill>
-                  <a:schemeClr val="dk1"/>
-                </a:solidFill>
-                <a:latin typeface="Arial"/>
-                <a:ea typeface="DejaVu Sans"/>
-              </a:rPr>
-              <a:t>Updated XML-Reports and Vehicle Information Files to support new Vehicle Architectures</a:t>
-            </a:r>
-            <a:endParaRPr b="0" lang="en-US" sz="2000" spc="-1" strike="noStrike">
-              <a:solidFill>
-                <a:srgbClr val="000000"/>
-              </a:solidFill>
-              <a:latin typeface="Arial"/>
-            </a:endParaRPr>
-          </a:p>
-          <a:p>
-            <a:pPr lvl="1" marL="716040" indent="-266760" defTabSz="914400">
-              <a:lnSpc>
-                <a:spcPct val="120000"/>
-              </a:lnSpc>
-              <a:spcBef>
-                <a:spcPts val="601"/>
-              </a:spcBef>
-              <a:buClr>
-                <a:srgbClr val="000000"/>
-              </a:buClr>
-              <a:buFont typeface="Wingdings" charset="2"/>
-              <a:buChar char=""/>
-            </a:pPr>
-            <a:r>
-              <a:rPr b="0" lang="pt-BR" sz="1600" spc="-1" strike="noStrike">
-                <a:solidFill>
-                  <a:schemeClr val="dk1"/>
-                </a:solidFill>
-                <a:latin typeface="Arial"/>
-                <a:ea typeface="DejaVu Sans"/>
-              </a:rPr>
-              <a:t>New Manufacturer Record File (MRF):</a:t>
-            </a:r>
-            <a:endParaRPr b="0" lang="en-US" sz="1600" spc="-1" strike="noStrike">
-              <a:solidFill>
-                <a:srgbClr val="000000"/>
-              </a:solidFill>
-              <a:latin typeface="Arial"/>
-            </a:endParaRPr>
-          </a:p>
-          <a:p>
-            <a:pPr lvl="1" marL="716040" indent="-266760" defTabSz="914400">
-              <a:lnSpc>
-                <a:spcPct val="120000"/>
-              </a:lnSpc>
-              <a:spcBef>
-                <a:spcPts val="601"/>
-              </a:spcBef>
-              <a:buClr>
-                <a:srgbClr val="000000"/>
-              </a:buClr>
-              <a:buFont typeface="Wingdings" charset="2"/>
-              <a:buChar char=""/>
-            </a:pPr>
-            <a:r>
-              <a:rPr b="0" lang="pt-BR" sz="1600" spc="-1" strike="noStrike">
-                <a:solidFill>
-                  <a:schemeClr val="dk1"/>
-                </a:solidFill>
-                <a:latin typeface="Arial"/>
-                <a:ea typeface="DejaVu Sans"/>
-              </a:rPr>
-              <a:t>New Customer Information File (CIF): </a:t>
-            </a:r>
-            <a:endParaRPr b="0" lang="en-US" sz="1600" spc="-1" strike="noStrike">
-              <a:solidFill>
-                <a:srgbClr val="000000"/>
-              </a:solidFill>
-              <a:latin typeface="Arial"/>
-            </a:endParaRPr>
-          </a:p>
-          <a:p>
-            <a:pPr lvl="1" marL="716040" indent="-266760" defTabSz="914400">
-              <a:lnSpc>
-                <a:spcPct val="120000"/>
-              </a:lnSpc>
-              <a:spcBef>
-                <a:spcPts val="601"/>
-              </a:spcBef>
-              <a:buClr>
-                <a:srgbClr val="000000"/>
-              </a:buClr>
-              <a:buFont typeface="Wingdings" charset="2"/>
-              <a:buChar char=""/>
-            </a:pPr>
-            <a:r>
-              <a:rPr b="0" lang="pt-BR" sz="1600" spc="-1" strike="noStrike">
-                <a:solidFill>
-                  <a:schemeClr val="dk1"/>
-                </a:solidFill>
-                <a:latin typeface="Arial"/>
-                <a:ea typeface="DejaVu Sans"/>
-              </a:rPr>
-              <a:t>Multistep Output (VIF):</a:t>
-            </a:r>
-            <a:endParaRPr b="0" lang="en-US" sz="1600" spc="-1" strike="noStrike">
-              <a:solidFill>
-                <a:srgbClr val="000000"/>
-              </a:solidFill>
-              <a:latin typeface="Arial"/>
-            </a:endParaRPr>
-          </a:p>
-          <a:p>
-            <a:pPr marL="228600" indent="-228600" defTabSz="914400">
-              <a:lnSpc>
-                <a:spcPct val="120000"/>
-              </a:lnSpc>
-              <a:spcBef>
-                <a:spcPts val="601"/>
-              </a:spcBef>
-              <a:buClr>
-                <a:srgbClr val="000000"/>
-              </a:buClr>
-              <a:buFont typeface="Arial"/>
-              <a:buChar char="•"/>
-            </a:pPr>
-            <a:r>
-              <a:rPr b="0" lang="pt-BR" sz="2000" spc="-1" strike="noStrike">
-                <a:solidFill>
-                  <a:schemeClr val="dk1"/>
-                </a:solidFill>
-                <a:latin typeface="Arial"/>
-                <a:ea typeface="DejaVu Sans"/>
-              </a:rPr>
-              <a:t>Updated simulation output (.vsum, .vmod)</a:t>
-            </a:r>
-            <a:endParaRPr b="0" lang="en-US" sz="2000" spc="-1" strike="noStrike">
-              <a:solidFill>
-                <a:srgbClr val="000000"/>
-              </a:solidFill>
-              <a:latin typeface="Arial"/>
-            </a:endParaRPr>
-          </a:p>
-          <a:p>
-            <a:pPr marL="228600" indent="-228600" defTabSz="914400">
-              <a:lnSpc>
-                <a:spcPct val="120000"/>
-              </a:lnSpc>
-              <a:spcBef>
-                <a:spcPts val="601"/>
-              </a:spcBef>
-              <a:buClr>
-                <a:srgbClr val="000000"/>
-              </a:buClr>
-              <a:buFont typeface="Arial"/>
-              <a:buChar char="•"/>
-            </a:pPr>
-            <a:r>
-              <a:rPr b="0" lang="pt-BR" sz="2000" spc="-1" strike="noStrike">
-                <a:solidFill>
-                  <a:schemeClr val="dk1"/>
-                </a:solidFill>
-                <a:latin typeface="Arial"/>
-                <a:ea typeface="DejaVu Sans"/>
-              </a:rPr>
-              <a:t>Updated Hashing Tool to handle new powertrain components (electric motor, battery, supercap ...)</a:t>
-            </a:r>
-            <a:endParaRPr b="0" lang="en-US" sz="2000" spc="-1" strike="noStrike">
-              <a:solidFill>
-                <a:srgbClr val="000000"/>
-              </a:solidFill>
-              <a:latin typeface="Arial"/>
-            </a:endParaRPr>
-          </a:p>
-          <a:p>
-            <a:pPr indent="0" defTabSz="914400">
-              <a:lnSpc>
-                <a:spcPct val="120000"/>
-              </a:lnSpc>
-              <a:spcBef>
-                <a:spcPts val="601"/>
-              </a:spcBef>
-              <a:buNone/>
-              <a:tabLst>
-                <a:tab algn="l" pos="0"/>
-              </a:tabLst>
-            </a:pPr>
-            <a:endParaRPr b="0" lang="en-US" sz="2000" spc="-1" strike="noStrike">
-              <a:solidFill>
-                <a:srgbClr val="000000"/>
-              </a:solidFill>
-              <a:latin typeface="Arial"/>
-            </a:endParaRPr>
-          </a:p>
-          <a:p>
-            <a:pPr marL="228600" indent="-228600" defTabSz="914400">
-              <a:lnSpc>
-                <a:spcPct val="120000"/>
-              </a:lnSpc>
-              <a:spcBef>
-                <a:spcPts val="601"/>
-              </a:spcBef>
-              <a:buClr>
-                <a:srgbClr val="000000"/>
-              </a:buClr>
-              <a:buFont typeface="Arial"/>
-              <a:buChar char="•"/>
-              <a:tabLst>
-                <a:tab algn="l" pos="0"/>
-              </a:tabLst>
-            </a:pPr>
-            <a:r>
-              <a:rPr b="0" lang="pt-BR" sz="2000" spc="-1" strike="noStrike">
-                <a:solidFill>
-                  <a:schemeClr val="dk1"/>
-                </a:solidFill>
-                <a:latin typeface="Arial"/>
-                <a:ea typeface="DejaVu Sans"/>
-              </a:rPr>
-              <a:t>Supports .NET Framework 4.8 and .NET 6.0</a:t>
-            </a:r>
-            <a:endParaRPr b="0" lang="en-US" sz="2000" spc="-1" strike="noStrike">
-              <a:solidFill>
-                <a:srgbClr val="000000"/>
-              </a:solidFill>
-              <a:latin typeface="Arial"/>
-            </a:endParaRPr>
-          </a:p>
-          <a:p>
-            <a:pPr indent="0" defTabSz="914400">
-              <a:lnSpc>
-                <a:spcPct val="90000"/>
-              </a:lnSpc>
-              <a:spcBef>
-                <a:spcPts val="1199"/>
-              </a:spcBef>
-              <a:buNone/>
-              <a:tabLst>
-                <a:tab algn="l" pos="0"/>
-              </a:tabLst>
-            </a:pPr>
-            <a:endParaRPr b="0" lang="en-US" sz="2000" spc="-1" strike="noStrike">
-              <a:solidFill>
-                <a:srgbClr val="000000"/>
-              </a:solidFill>
-              <a:latin typeface="Arial"/>
-            </a:endParaRPr>
-          </a:p>
-        </p:txBody>
-      </p:sp>
-      <p:sp>
-        <p:nvSpPr>
-          <p:cNvPr id="96" name="PlaceHolder 2"/>
-          <p:cNvSpPr>
-            <a:spLocks noGrp="1"/>
-          </p:cNvSpPr>
-          <p:nvPr>
             <p:ph type="title"/>
           </p:nvPr>
         </p:nvSpPr>
         <p:spPr>
           <a:xfrm>
-            <a:off x="588240" y="453600"/>
-            <a:ext cx="8222760" cy="472320"/>
+            <a:off x="722160" y="2320200"/>
+            <a:ext cx="7765560" cy="1523160"/>
           </a:xfrm>
           <a:prstGeom prst="rect">
             <a:avLst/>
@@ -10326,26 +10193,113 @@
             <a:noAutofit/>
           </a:bodyPr>
           <a:p>
-            <a:pPr indent="0" defTabSz="914400">
+            <a:pPr indent="0" algn="ctr" defTabSz="914400">
               <a:lnSpc>
                 <a:spcPct val="90000"/>
               </a:lnSpc>
+              <a:spcBef>
+                <a:spcPts val="4201"/>
+              </a:spcBef>
               <a:buNone/>
               <a:tabLst>
                 <a:tab algn="l" pos="0"/>
               </a:tabLst>
             </a:pPr>
-            <a:r>
-              <a:rPr b="1" lang="en-GB" sz="2400" spc="-1" strike="noStrike">
+            <a:br>
+              <a:rPr sz="2400"/>
+            </a:br>
+            <a:r>
+              <a:rPr b="1" lang="en-US" sz="2400" spc="-1" strike="noStrike">
                 <a:solidFill>
                   <a:srgbClr val="990000"/>
                 </a:solidFill>
                 <a:latin typeface="Arial"/>
                 <a:ea typeface="DejaVu Sans"/>
               </a:rPr>
-              <a:t>Features</a:t>
-            </a:r>
+              <a:t>First official VECTO release for the 2nd Amendment </a:t>
+            </a:r>
+            <a:br>
+              <a:rPr sz="2400"/>
+            </a:br>
+            <a:r>
+              <a:rPr b="1" lang="en-US" sz="2400" spc="-1" strike="noStrike">
+                <a:solidFill>
+                  <a:srgbClr val="990000"/>
+                </a:solidFill>
+                <a:latin typeface="Arial"/>
+                <a:ea typeface="DejaVu Sans"/>
+              </a:rPr>
+              <a:t>of Regulation (EU) 2017/2400</a:t>
+            </a:r>
+            <a:br>
+              <a:rPr sz="2800"/>
+            </a:br>
+            <a:br>
+              <a:rPr sz="2800"/>
+            </a:br>
+            <a:br>
+              <a:rPr sz="2400"/>
+            </a:br>
             <a:endParaRPr b="0" lang="en-US" sz="2400" spc="-1" strike="noStrike">
+              <a:solidFill>
+                <a:srgbClr val="000000"/>
+              </a:solidFill>
+              <a:latin typeface="Arial"/>
+            </a:endParaRPr>
+          </a:p>
+        </p:txBody>
+      </p:sp>
+      <p:sp>
+        <p:nvSpPr>
+          <p:cNvPr id="96" name="PlaceHolder 2"/>
+          <p:cNvSpPr>
+            <a:spLocks noGrp="1"/>
+          </p:cNvSpPr>
+          <p:nvPr>
+            <p:ph/>
+          </p:nvPr>
+        </p:nvSpPr>
+        <p:spPr>
+          <a:xfrm>
+            <a:off x="722160" y="4276440"/>
+            <a:ext cx="7765560" cy="400680"/>
+          </a:xfrm>
+          <a:prstGeom prst="rect">
+            <a:avLst/>
+          </a:prstGeom>
+          <a:noFill/>
+          <a:ln w="0">
+            <a:noFill/>
+          </a:ln>
+        </p:spPr>
+        <p:txBody>
+          <a:bodyPr lIns="0" rIns="0" tIns="0" bIns="0" anchor="ctr">
+            <a:noAutofit/>
+          </a:bodyPr>
+          <a:p>
+            <a:pPr indent="0" algn="ctr" defTabSz="914400">
+              <a:lnSpc>
+                <a:spcPct val="90000"/>
+              </a:lnSpc>
+              <a:spcBef>
+                <a:spcPts val="1001"/>
+              </a:spcBef>
+              <a:buNone/>
+              <a:tabLst>
+                <a:tab algn="l" pos="0"/>
+              </a:tabLst>
+            </a:pPr>
+            <a:r>
+              <a:rPr b="0" lang="en-GB" sz="2000" spc="-1" strike="noStrike">
+                <a:solidFill>
+                  <a:schemeClr val="dk1"/>
+                </a:solidFill>
+                <a:latin typeface="Arial"/>
+                <a:ea typeface="DejaVu Sans"/>
+              </a:rPr>
+              <a:t>TUG</a:t>
+            </a:r>
+            <a:endParaRPr b="0" lang="en-US" sz="2000" spc="-1" strike="noStrike">
               <a:solidFill>
                 <a:srgbClr val="000000"/>
               </a:solidFill>
@@ -10391,13 +10345,581 @@
             <a:spLocks noGrp="1"/>
           </p:cNvSpPr>
           <p:nvPr>
+            <p:ph/>
+          </p:nvPr>
+        </p:nvSpPr>
+        <p:spPr>
+          <a:xfrm>
+            <a:off x="588240" y="1140480"/>
+            <a:ext cx="8387640" cy="5040360"/>
+          </a:xfrm>
+          <a:prstGeom prst="rect">
+            <a:avLst/>
+          </a:prstGeom>
+          <a:noFill/>
+          <a:ln w="0">
+            <a:noFill/>
+          </a:ln>
+        </p:spPr>
+        <p:txBody>
+          <a:bodyPr lIns="0" rIns="0" tIns="0" bIns="0" anchor="t">
+            <a:normAutofit fontScale="64999"/>
+          </a:bodyPr>
+          <a:p>
+            <a:pPr marL="228600" indent="-228600" defTabSz="914400">
+              <a:lnSpc>
+                <a:spcPct val="120000"/>
+              </a:lnSpc>
+              <a:spcBef>
+                <a:spcPts val="601"/>
+              </a:spcBef>
+              <a:buClr>
+                <a:srgbClr val="000000"/>
+              </a:buClr>
+              <a:buFont typeface="Arial"/>
+              <a:buChar char="•"/>
+            </a:pPr>
+            <a:r>
+              <a:rPr b="0" lang="en-US" sz="2000" spc="-1" strike="noStrike">
+                <a:solidFill>
+                  <a:schemeClr val="dk1"/>
+                </a:solidFill>
+                <a:latin typeface="Arial"/>
+                <a:ea typeface="DejaVu Sans"/>
+              </a:rPr>
+              <a:t>Declaration Mode</a:t>
+            </a:r>
+            <a:endParaRPr b="0" lang="en-US" sz="2000" spc="-1" strike="noStrike">
+              <a:solidFill>
+                <a:srgbClr val="000000"/>
+              </a:solidFill>
+              <a:latin typeface="Arial"/>
+            </a:endParaRPr>
+          </a:p>
+          <a:p>
+            <a:pPr lvl="1" marL="716040" indent="-266760" defTabSz="914400">
+              <a:lnSpc>
+                <a:spcPct val="120000"/>
+              </a:lnSpc>
+              <a:spcBef>
+                <a:spcPts val="601"/>
+              </a:spcBef>
+              <a:buClr>
+                <a:srgbClr val="000000"/>
+              </a:buClr>
+              <a:buFont typeface="Wingdings" charset="2"/>
+              <a:buChar char=""/>
+            </a:pPr>
+            <a:r>
+              <a:rPr b="0" lang="en-US" sz="1600" spc="-1" strike="noStrike">
+                <a:solidFill>
+                  <a:schemeClr val="dk1"/>
+                </a:solidFill>
+                <a:latin typeface="Arial"/>
+                <a:ea typeface="DejaVu Sans"/>
+              </a:rPr>
+              <a:t>xEV-Heavy Lorries</a:t>
+            </a:r>
+            <a:endParaRPr b="0" lang="en-US" sz="1600" spc="-1" strike="noStrike">
+              <a:solidFill>
+                <a:srgbClr val="000000"/>
+              </a:solidFill>
+              <a:latin typeface="Arial"/>
+            </a:endParaRPr>
+          </a:p>
+          <a:p>
+            <a:pPr lvl="1" marL="716040" indent="-266760" defTabSz="914400">
+              <a:lnSpc>
+                <a:spcPct val="120000"/>
+              </a:lnSpc>
+              <a:spcBef>
+                <a:spcPts val="601"/>
+              </a:spcBef>
+              <a:buClr>
+                <a:srgbClr val="000000"/>
+              </a:buClr>
+              <a:buFont typeface="Wingdings" charset="2"/>
+              <a:buChar char=""/>
+            </a:pPr>
+            <a:r>
+              <a:rPr b="0" lang="en-US" sz="1600" spc="-1" strike="noStrike">
+                <a:solidFill>
+                  <a:schemeClr val="dk1"/>
+                </a:solidFill>
+                <a:latin typeface="Arial"/>
+                <a:ea typeface="DejaVu Sans"/>
+              </a:rPr>
+              <a:t>Conventional Medium Lorries</a:t>
+            </a:r>
+            <a:endParaRPr b="0" lang="en-US" sz="1600" spc="-1" strike="noStrike">
+              <a:solidFill>
+                <a:srgbClr val="000000"/>
+              </a:solidFill>
+              <a:latin typeface="Arial"/>
+            </a:endParaRPr>
+          </a:p>
+          <a:p>
+            <a:pPr lvl="1" marL="716040" indent="-266760" defTabSz="914400">
+              <a:lnSpc>
+                <a:spcPct val="120000"/>
+              </a:lnSpc>
+              <a:spcBef>
+                <a:spcPts val="601"/>
+              </a:spcBef>
+              <a:buClr>
+                <a:srgbClr val="000000"/>
+              </a:buClr>
+              <a:buFont typeface="Wingdings" charset="2"/>
+              <a:buChar char=""/>
+            </a:pPr>
+            <a:r>
+              <a:rPr b="0" lang="en-US" sz="1600" spc="-1" strike="noStrike">
+                <a:solidFill>
+                  <a:schemeClr val="dk1"/>
+                </a:solidFill>
+                <a:latin typeface="Arial"/>
+                <a:ea typeface="DejaVu Sans"/>
+              </a:rPr>
+              <a:t>xEV Medium Lorries</a:t>
+            </a:r>
+            <a:endParaRPr b="0" lang="en-US" sz="1600" spc="-1" strike="noStrike">
+              <a:solidFill>
+                <a:srgbClr val="000000"/>
+              </a:solidFill>
+              <a:latin typeface="Arial"/>
+            </a:endParaRPr>
+          </a:p>
+          <a:p>
+            <a:pPr lvl="1" marL="716040" indent="-266760" defTabSz="914400">
+              <a:lnSpc>
+                <a:spcPct val="120000"/>
+              </a:lnSpc>
+              <a:spcBef>
+                <a:spcPts val="601"/>
+              </a:spcBef>
+              <a:buClr>
+                <a:srgbClr val="000000"/>
+              </a:buClr>
+              <a:buFont typeface="Wingdings" charset="2"/>
+              <a:buChar char=""/>
+            </a:pPr>
+            <a:r>
+              <a:rPr b="0" lang="en-US" sz="1600" spc="-1" strike="noStrike">
+                <a:solidFill>
+                  <a:schemeClr val="dk1"/>
+                </a:solidFill>
+                <a:latin typeface="Arial"/>
+                <a:ea typeface="DejaVu Sans"/>
+              </a:rPr>
+              <a:t>Conventional Buses</a:t>
+            </a:r>
+            <a:endParaRPr b="0" lang="en-US" sz="1600" spc="-1" strike="noStrike">
+              <a:solidFill>
+                <a:srgbClr val="000000"/>
+              </a:solidFill>
+              <a:latin typeface="Arial"/>
+            </a:endParaRPr>
+          </a:p>
+          <a:p>
+            <a:pPr lvl="1" marL="716040" indent="-266760" defTabSz="914400">
+              <a:lnSpc>
+                <a:spcPct val="120000"/>
+              </a:lnSpc>
+              <a:spcBef>
+                <a:spcPts val="601"/>
+              </a:spcBef>
+              <a:buClr>
+                <a:srgbClr val="000000"/>
+              </a:buClr>
+              <a:buFont typeface="Wingdings" charset="2"/>
+              <a:buChar char=""/>
+            </a:pPr>
+            <a:r>
+              <a:rPr b="0" lang="en-US" sz="1600" spc="-1" strike="noStrike">
+                <a:solidFill>
+                  <a:schemeClr val="dk1"/>
+                </a:solidFill>
+                <a:latin typeface="Arial"/>
+                <a:ea typeface="DejaVu Sans"/>
+              </a:rPr>
+              <a:t>xEV Buses</a:t>
+            </a:r>
+            <a:endParaRPr b="0" lang="en-US" sz="1600" spc="-1" strike="noStrike">
+              <a:solidFill>
+                <a:srgbClr val="000000"/>
+              </a:solidFill>
+              <a:latin typeface="Arial"/>
+            </a:endParaRPr>
+          </a:p>
+          <a:p>
+            <a:pPr marL="228600" indent="-228600" defTabSz="914400">
+              <a:lnSpc>
+                <a:spcPct val="120000"/>
+              </a:lnSpc>
+              <a:spcBef>
+                <a:spcPts val="601"/>
+              </a:spcBef>
+              <a:buClr>
+                <a:srgbClr val="000000"/>
+              </a:buClr>
+              <a:buFont typeface="Arial"/>
+              <a:buChar char="•"/>
+            </a:pPr>
+            <a:r>
+              <a:rPr b="0" lang="en-US" sz="2000" spc="-1" strike="noStrike">
+                <a:solidFill>
+                  <a:schemeClr val="dk1"/>
+                </a:solidFill>
+                <a:latin typeface="Arial"/>
+                <a:ea typeface="DejaVu Sans"/>
+              </a:rPr>
+              <a:t>Dedicated user interface for simulating buses in Declaration Mode using the multistep approach: VECTOMultistep.exe </a:t>
+            </a:r>
+            <a:endParaRPr b="0" lang="en-US" sz="2000" spc="-1" strike="noStrike">
+              <a:solidFill>
+                <a:srgbClr val="000000"/>
+              </a:solidFill>
+              <a:latin typeface="Arial"/>
+            </a:endParaRPr>
+          </a:p>
+          <a:p>
+            <a:pPr marL="228600" indent="-228600" defTabSz="914400">
+              <a:lnSpc>
+                <a:spcPct val="120000"/>
+              </a:lnSpc>
+              <a:spcBef>
+                <a:spcPts val="601"/>
+              </a:spcBef>
+              <a:buClr>
+                <a:srgbClr val="000000"/>
+              </a:buClr>
+              <a:buFont typeface="Arial"/>
+              <a:buChar char="•"/>
+            </a:pPr>
+            <a:r>
+              <a:rPr b="0" lang="en-US" sz="2000" spc="-1" strike="noStrike">
+                <a:solidFill>
+                  <a:schemeClr val="dk1"/>
+                </a:solidFill>
+                <a:latin typeface="Arial"/>
+                <a:ea typeface="DejaVu Sans"/>
+              </a:rPr>
+              <a:t>Engineering Mode</a:t>
+            </a:r>
+            <a:endParaRPr b="0" lang="en-US" sz="2000" spc="-1" strike="noStrike">
+              <a:solidFill>
+                <a:srgbClr val="000000"/>
+              </a:solidFill>
+              <a:latin typeface="Arial"/>
+            </a:endParaRPr>
+          </a:p>
+          <a:p>
+            <a:pPr lvl="1" marL="716040" indent="-266760" defTabSz="914400">
+              <a:lnSpc>
+                <a:spcPct val="120000"/>
+              </a:lnSpc>
+              <a:spcBef>
+                <a:spcPts val="601"/>
+              </a:spcBef>
+              <a:buClr>
+                <a:srgbClr val="000000"/>
+              </a:buClr>
+              <a:buFont typeface="Wingdings" charset="2"/>
+              <a:buChar char=""/>
+            </a:pPr>
+            <a:r>
+              <a:rPr b="0" lang="en-US" sz="1600" spc="-1" strike="noStrike">
+                <a:solidFill>
+                  <a:schemeClr val="dk1"/>
+                </a:solidFill>
+                <a:latin typeface="Arial"/>
+                <a:ea typeface="DejaVu Sans"/>
+              </a:rPr>
+              <a:t>xEV-Vehicles</a:t>
+            </a:r>
+            <a:endParaRPr b="0" lang="en-US" sz="1600" spc="-1" strike="noStrike">
+              <a:solidFill>
+                <a:srgbClr val="000000"/>
+              </a:solidFill>
+              <a:latin typeface="Arial"/>
+            </a:endParaRPr>
+          </a:p>
+          <a:p>
+            <a:pPr marL="228600" indent="-228600" defTabSz="914400">
+              <a:lnSpc>
+                <a:spcPct val="120000"/>
+              </a:lnSpc>
+              <a:spcBef>
+                <a:spcPts val="601"/>
+              </a:spcBef>
+              <a:buClr>
+                <a:srgbClr val="000000"/>
+              </a:buClr>
+              <a:buFont typeface="Arial"/>
+              <a:buChar char="•"/>
+            </a:pPr>
+            <a:r>
+              <a:rPr b="0" lang="pt-BR" sz="2000" spc="-1" strike="noStrike">
+                <a:solidFill>
+                  <a:schemeClr val="dk1"/>
+                </a:solidFill>
+                <a:latin typeface="Arial"/>
+                <a:ea typeface="DejaVu Sans"/>
+              </a:rPr>
+              <a:t>Updated XML-Reports and Vehicle Information Files to support new Vehicle Architectures</a:t>
+            </a:r>
+            <a:endParaRPr b="0" lang="en-US" sz="2000" spc="-1" strike="noStrike">
+              <a:solidFill>
+                <a:srgbClr val="000000"/>
+              </a:solidFill>
+              <a:latin typeface="Arial"/>
+            </a:endParaRPr>
+          </a:p>
+          <a:p>
+            <a:pPr lvl="1" marL="716040" indent="-266760" defTabSz="914400">
+              <a:lnSpc>
+                <a:spcPct val="120000"/>
+              </a:lnSpc>
+              <a:spcBef>
+                <a:spcPts val="601"/>
+              </a:spcBef>
+              <a:buClr>
+                <a:srgbClr val="000000"/>
+              </a:buClr>
+              <a:buFont typeface="Wingdings" charset="2"/>
+              <a:buChar char=""/>
+            </a:pPr>
+            <a:r>
+              <a:rPr b="0" lang="pt-BR" sz="1600" spc="-1" strike="noStrike">
+                <a:solidFill>
+                  <a:schemeClr val="dk1"/>
+                </a:solidFill>
+                <a:latin typeface="Arial"/>
+                <a:ea typeface="DejaVu Sans"/>
+              </a:rPr>
+              <a:t>New Manufacturer Record File (MRF):</a:t>
+            </a:r>
+            <a:endParaRPr b="0" lang="en-US" sz="1600" spc="-1" strike="noStrike">
+              <a:solidFill>
+                <a:srgbClr val="000000"/>
+              </a:solidFill>
+              <a:latin typeface="Arial"/>
+            </a:endParaRPr>
+          </a:p>
+          <a:p>
+            <a:pPr lvl="1" marL="716040" indent="-266760" defTabSz="914400">
+              <a:lnSpc>
+                <a:spcPct val="120000"/>
+              </a:lnSpc>
+              <a:spcBef>
+                <a:spcPts val="601"/>
+              </a:spcBef>
+              <a:buClr>
+                <a:srgbClr val="000000"/>
+              </a:buClr>
+              <a:buFont typeface="Wingdings" charset="2"/>
+              <a:buChar char=""/>
+            </a:pPr>
+            <a:r>
+              <a:rPr b="0" lang="pt-BR" sz="1600" spc="-1" strike="noStrike">
+                <a:solidFill>
+                  <a:schemeClr val="dk1"/>
+                </a:solidFill>
+                <a:latin typeface="Arial"/>
+                <a:ea typeface="DejaVu Sans"/>
+              </a:rPr>
+              <a:t>New Customer Information File (CIF): </a:t>
+            </a:r>
+            <a:endParaRPr b="0" lang="en-US" sz="1600" spc="-1" strike="noStrike">
+              <a:solidFill>
+                <a:srgbClr val="000000"/>
+              </a:solidFill>
+              <a:latin typeface="Arial"/>
+            </a:endParaRPr>
+          </a:p>
+          <a:p>
+            <a:pPr lvl="1" marL="716040" indent="-266760" defTabSz="914400">
+              <a:lnSpc>
+                <a:spcPct val="120000"/>
+              </a:lnSpc>
+              <a:spcBef>
+                <a:spcPts val="601"/>
+              </a:spcBef>
+              <a:buClr>
+                <a:srgbClr val="000000"/>
+              </a:buClr>
+              <a:buFont typeface="Wingdings" charset="2"/>
+              <a:buChar char=""/>
+            </a:pPr>
+            <a:r>
+              <a:rPr b="0" lang="pt-BR" sz="1600" spc="-1" strike="noStrike">
+                <a:solidFill>
+                  <a:schemeClr val="dk1"/>
+                </a:solidFill>
+                <a:latin typeface="Arial"/>
+                <a:ea typeface="DejaVu Sans"/>
+              </a:rPr>
+              <a:t>Multistep Output (VIF):</a:t>
+            </a:r>
+            <a:endParaRPr b="0" lang="en-US" sz="1600" spc="-1" strike="noStrike">
+              <a:solidFill>
+                <a:srgbClr val="000000"/>
+              </a:solidFill>
+              <a:latin typeface="Arial"/>
+            </a:endParaRPr>
+          </a:p>
+          <a:p>
+            <a:pPr marL="228600" indent="-228600" defTabSz="914400">
+              <a:lnSpc>
+                <a:spcPct val="120000"/>
+              </a:lnSpc>
+              <a:spcBef>
+                <a:spcPts val="601"/>
+              </a:spcBef>
+              <a:buClr>
+                <a:srgbClr val="000000"/>
+              </a:buClr>
+              <a:buFont typeface="Arial"/>
+              <a:buChar char="•"/>
+            </a:pPr>
+            <a:r>
+              <a:rPr b="0" lang="pt-BR" sz="2000" spc="-1" strike="noStrike">
+                <a:solidFill>
+                  <a:schemeClr val="dk1"/>
+                </a:solidFill>
+                <a:latin typeface="Arial"/>
+                <a:ea typeface="DejaVu Sans"/>
+              </a:rPr>
+              <a:t>Updated simulation output (.vsum, .vmod)</a:t>
+            </a:r>
+            <a:endParaRPr b="0" lang="en-US" sz="2000" spc="-1" strike="noStrike">
+              <a:solidFill>
+                <a:srgbClr val="000000"/>
+              </a:solidFill>
+              <a:latin typeface="Arial"/>
+            </a:endParaRPr>
+          </a:p>
+          <a:p>
+            <a:pPr marL="228600" indent="-228600" defTabSz="914400">
+              <a:lnSpc>
+                <a:spcPct val="120000"/>
+              </a:lnSpc>
+              <a:spcBef>
+                <a:spcPts val="601"/>
+              </a:spcBef>
+              <a:buClr>
+                <a:srgbClr val="000000"/>
+              </a:buClr>
+              <a:buFont typeface="Arial"/>
+              <a:buChar char="•"/>
+            </a:pPr>
+            <a:r>
+              <a:rPr b="0" lang="pt-BR" sz="2000" spc="-1" strike="noStrike">
+                <a:solidFill>
+                  <a:schemeClr val="dk1"/>
+                </a:solidFill>
+                <a:latin typeface="Arial"/>
+                <a:ea typeface="DejaVu Sans"/>
+              </a:rPr>
+              <a:t>Updated Hashing Tool to handle new powertrain components (electric motor, battery, supercap ...)</a:t>
+            </a:r>
+            <a:endParaRPr b="0" lang="en-US" sz="2000" spc="-1" strike="noStrike">
+              <a:solidFill>
+                <a:srgbClr val="000000"/>
+              </a:solidFill>
+              <a:latin typeface="Arial"/>
+            </a:endParaRPr>
+          </a:p>
+          <a:p>
+            <a:pPr indent="0" defTabSz="914400">
+              <a:lnSpc>
+                <a:spcPct val="120000"/>
+              </a:lnSpc>
+              <a:spcBef>
+                <a:spcPts val="601"/>
+              </a:spcBef>
+              <a:buNone/>
+              <a:tabLst>
+                <a:tab algn="l" pos="0"/>
+              </a:tabLst>
+            </a:pPr>
+            <a:endParaRPr b="0" lang="en-US" sz="2000" spc="-1" strike="noStrike">
+              <a:solidFill>
+                <a:srgbClr val="000000"/>
+              </a:solidFill>
+              <a:latin typeface="Arial"/>
+            </a:endParaRPr>
+          </a:p>
+          <a:p>
+            <a:pPr marL="228600" indent="-228600" defTabSz="914400">
+              <a:lnSpc>
+                <a:spcPct val="120000"/>
+              </a:lnSpc>
+              <a:spcBef>
+                <a:spcPts val="601"/>
+              </a:spcBef>
+              <a:buClr>
+                <a:srgbClr val="000000"/>
+              </a:buClr>
+              <a:buFont typeface="Arial"/>
+              <a:buChar char="•"/>
+              <a:tabLst>
+                <a:tab algn="l" pos="0"/>
+              </a:tabLst>
+            </a:pPr>
+            <a:r>
+              <a:rPr b="0" lang="pt-BR" sz="2000" spc="-1" strike="noStrike">
+                <a:solidFill>
+                  <a:schemeClr val="dk1"/>
+                </a:solidFill>
+                <a:latin typeface="Arial"/>
+                <a:ea typeface="DejaVu Sans"/>
+              </a:rPr>
+              <a:t>Supports .NET Framework 4.8 and .NET 6.0</a:t>
+            </a:r>
+            <a:endParaRPr b="0" lang="en-US" sz="2000" spc="-1" strike="noStrike">
+              <a:solidFill>
+                <a:srgbClr val="000000"/>
+              </a:solidFill>
+              <a:latin typeface="Arial"/>
+            </a:endParaRPr>
+          </a:p>
+          <a:p>
+            <a:pPr indent="0" defTabSz="914400">
+              <a:lnSpc>
+                <a:spcPct val="90000"/>
+              </a:lnSpc>
+              <a:spcBef>
+                <a:spcPts val="1199"/>
+              </a:spcBef>
+              <a:buNone/>
+              <a:tabLst>
+                <a:tab algn="l" pos="0"/>
+              </a:tabLst>
+            </a:pPr>
+            <a:endParaRPr b="0" lang="en-US" sz="2000" spc="-1" strike="noStrike">
+              <a:solidFill>
+                <a:srgbClr val="000000"/>
+              </a:solidFill>
+              <a:latin typeface="Arial"/>
+            </a:endParaRPr>
+          </a:p>
+        </p:txBody>
+      </p:sp>
+      <p:sp>
+        <p:nvSpPr>
+          <p:cNvPr id="98" name="PlaceHolder 2"/>
+          <p:cNvSpPr>
+            <a:spLocks noGrp="1"/>
+          </p:cNvSpPr>
+          <p:nvPr>
             <p:ph type="title"/>
           </p:nvPr>
         </p:nvSpPr>
         <p:spPr>
           <a:xfrm>
             <a:off x="588240" y="453600"/>
-            <a:ext cx="8222760" cy="1122120"/>
+            <a:ext cx="8222400" cy="471960"/>
           </a:xfrm>
           <a:prstGeom prst="rect">
             <a:avLst/>
@@ -10422,6 +10944,92 @@
               </a:tabLst>
             </a:pPr>
             <a:r>
+              <a:rPr b="1" lang="en-GB" sz="2400" spc="-1" strike="noStrike">
+                <a:solidFill>
+                  <a:srgbClr val="990000"/>
+                </a:solidFill>
+                <a:latin typeface="Arial"/>
+                <a:ea typeface="DejaVu Sans"/>
+              </a:rPr>
+              <a:t>Features</a:t>
+            </a:r>
+            <a:endParaRPr b="0" lang="en-US" sz="2400" spc="-1" strike="noStrike">
+              <a:solidFill>
+                <a:srgbClr val="000000"/>
+              </a:solidFill>
+              <a:latin typeface="Arial"/>
+            </a:endParaRPr>
+          </a:p>
+        </p:txBody>
+      </p:sp>
+    </p:spTree>
+  </p:cSld>
+  <mc:AlternateContent>
+    <mc:Choice Requires="p14">
+      <p:transition spd="slow" p14:dur="2000"/>
+    </mc:Choice>
+    <mc:Fallback>
+      <p:transition spd="slow"/>
+    </mc:Fallback>
+  </mc:AlternateContent>
+</p:sld>
+</file>
+
+<file path=ppt/slides/slide22.xml><?xml version="1.0" encoding="utf-8"?>
+<p:sld xmlns:a="http://schemas.openxmlformats.org/drawingml/2006/main" xmlns:p="http://schemas.openxmlformats.org/presentationml/2006/main" xmlns:r="http://schemas.openxmlformats.org/officeDocument/2006/relationships" xmlns:p14="http://schemas.microsoft.com/office/powerpoint/2010/main" xmlns:p15="http://schemas.microsoft.com/office/powerpoint/2012/main" xmlns:mc="http://schemas.openxmlformats.org/markup-compatibility/2006">
+  <p:cSld>
+    <p:spTree>
+      <p:nvGrpSpPr>
+        <p:cNvPr id="1" name=""/>
+        <p:cNvGrpSpPr/>
+        <p:nvPr/>
+      </p:nvGrpSpPr>
+      <p:grpSpPr>
+        <a:xfrm>
+          <a:off x="0" y="0"/>
+          <a:ext cx="0" cy="0"/>
+          <a:chOff x="0" y="0"/>
+          <a:chExt cx="0" cy="0"/>
+        </a:xfrm>
+      </p:grpSpPr>
+      <p:sp>
+        <p:nvSpPr>
+          <p:cNvPr id="99" name="PlaceHolder 1"/>
+          <p:cNvSpPr>
+            <a:spLocks noGrp="1"/>
+          </p:cNvSpPr>
+          <p:nvPr>
+            <p:ph type="title"/>
+          </p:nvPr>
+        </p:nvSpPr>
+        <p:spPr>
+          <a:xfrm>
+            <a:off x="588240" y="453600"/>
+            <a:ext cx="8222400" cy="1121760"/>
+          </a:xfrm>
+          <a:prstGeom prst="rect">
+            <a:avLst/>
+          </a:prstGeom>
+          <a:noFill/>
+          <a:ln w="0">
+            <a:noFill/>
+          </a:ln>
+        </p:spPr>
+        <p:txBody>
+          <a:bodyPr lIns="0" rIns="0" tIns="0" bIns="0" anchor="ctr">
+            <a:noAutofit/>
+          </a:bodyPr>
+          <a:p>
+            <a:pPr indent="0" defTabSz="914400">
+              <a:lnSpc>
+                <a:spcPct val="90000"/>
+              </a:lnSpc>
+              <a:buNone/>
+              <a:tabLst>
+                <a:tab algn="l" pos="0"/>
+              </a:tabLst>
+            </a:pPr>
+            <a:r>
               <a:rPr b="1" lang="en-US" sz="2400" spc="-1" strike="noStrike">
                 <a:solidFill>
                   <a:srgbClr val="990000"/>
@@ -10445,7 +11053,7 @@
       </p:sp>
       <p:graphicFrame>
         <p:nvGraphicFramePr>
-          <p:cNvPr id="98" name="Inhaltsplatzhalter 4"/>
+          <p:cNvPr id="100" name="Inhaltsplatzhalter 4"/>
           <p:cNvGraphicFramePr/>
           <p:nvPr/>
         </p:nvGraphicFramePr>
@@ -13717,14 +14325,14 @@
       </p:graphicFrame>
       <p:sp>
         <p:nvSpPr>
-          <p:cNvPr id="99" name="Textfeld 8"/>
+          <p:cNvPr id="101" name="Textfeld 8"/>
           <p:cNvSpPr/>
           <p:nvPr/>
         </p:nvSpPr>
         <p:spPr>
           <a:xfrm>
             <a:off x="6509160" y="4789800"/>
-            <a:ext cx="1997280" cy="394920"/>
+            <a:ext cx="1996920" cy="394920"/>
           </a:xfrm>
           <a:prstGeom prst="rect">
             <a:avLst/>
@@ -13838,203 +14446,6 @@
               <a:t> Simulation and editing</a:t>
             </a:r>
             <a:endParaRPr b="0" lang="en-US" sz="1000" spc="-1" strike="noStrike">
-              <a:solidFill>
-                <a:srgbClr val="000000"/>
-              </a:solidFill>
-              <a:latin typeface="Arial"/>
-            </a:endParaRPr>
-          </a:p>
-        </p:txBody>
-      </p:sp>
-    </p:spTree>
-  </p:cSld>
-  <mc:AlternateContent>
-    <mc:Choice Requires="p14">
-      <p:transition spd="slow" p14:dur="2000"/>
-    </mc:Choice>
-    <mc:Fallback>
-      <p:transition spd="slow"/>
-    </mc:Fallback>
-  </mc:AlternateContent>
-</p:sld>
-</file>
-
-<file path=ppt/slides/slide22.xml><?xml version="1.0" encoding="utf-8"?>
-<p:sld xmlns:a="http://schemas.openxmlformats.org/drawingml/2006/main" xmlns:p="http://schemas.openxmlformats.org/presentationml/2006/main" xmlns:r="http://schemas.openxmlformats.org/officeDocument/2006/relationships" xmlns:p14="http://schemas.microsoft.com/office/powerpoint/2010/main" xmlns:p15="http://schemas.microsoft.com/office/powerpoint/2012/main" xmlns:mc="http://schemas.openxmlformats.org/markup-compatibility/2006">
-  <p:cSld>
-    <p:spTree>
-      <p:nvGrpSpPr>
-        <p:cNvPr id="1" name=""/>
-        <p:cNvGrpSpPr/>
-        <p:nvPr/>
-      </p:nvGrpSpPr>
-      <p:grpSpPr>
-        <a:xfrm>
-          <a:off x="0" y="0"/>
-          <a:ext cx="0" cy="0"/>
-          <a:chOff x="0" y="0"/>
-          <a:chExt cx="0" cy="0"/>
-        </a:xfrm>
-      </p:grpSpPr>
-      <p:sp>
-        <p:nvSpPr>
-          <p:cNvPr id="100" name="PlaceHolder 1"/>
-          <p:cNvSpPr>
-            <a:spLocks noGrp="1"/>
-          </p:cNvSpPr>
-          <p:nvPr>
-            <p:ph/>
-          </p:nvPr>
-        </p:nvSpPr>
-        <p:spPr>
-          <a:xfrm>
-            <a:off x="588240" y="1299960"/>
-            <a:ext cx="8388000" cy="4189320"/>
-          </a:xfrm>
-          <a:prstGeom prst="rect">
-            <a:avLst/>
-          </a:prstGeom>
-          <a:noFill/>
-          <a:ln w="0">
-            <a:noFill/>
-          </a:ln>
-        </p:spPr>
-        <p:txBody>
-          <a:bodyPr lIns="0" rIns="0" tIns="0" bIns="0" anchor="t">
-            <a:normAutofit/>
-          </a:bodyPr>
-          <a:p>
-            <a:pPr marL="228600" indent="-228600" defTabSz="914400">
-              <a:lnSpc>
-                <a:spcPct val="90000"/>
-              </a:lnSpc>
-              <a:spcBef>
-                <a:spcPts val="1199"/>
-              </a:spcBef>
-              <a:buClr>
-                <a:srgbClr val="000000"/>
-              </a:buClr>
-              <a:buFont typeface="Arial"/>
-              <a:buChar char="•"/>
-            </a:pPr>
-            <a:r>
-              <a:rPr b="0" lang="en-US" sz="1800" spc="-1" strike="noStrike">
-                <a:solidFill>
-                  <a:schemeClr val="dk1"/>
-                </a:solidFill>
-                <a:latin typeface="Arial"/>
-                <a:ea typeface="DejaVu Sans"/>
-              </a:rPr>
-              <a:t>XML Job Files &lt; v2.4 are no longer supported</a:t>
-            </a:r>
-            <a:endParaRPr b="0" lang="en-US" sz="1800" spc="-1" strike="noStrike">
-              <a:solidFill>
-                <a:srgbClr val="000000"/>
-              </a:solidFill>
-              <a:latin typeface="Arial"/>
-            </a:endParaRPr>
-          </a:p>
-          <a:p>
-            <a:pPr marL="228600" indent="-228600" defTabSz="914400">
-              <a:lnSpc>
-                <a:spcPct val="90000"/>
-              </a:lnSpc>
-              <a:spcBef>
-                <a:spcPts val="1199"/>
-              </a:spcBef>
-              <a:buClr>
-                <a:srgbClr val="000000"/>
-              </a:buClr>
-              <a:buFont typeface="Arial"/>
-              <a:buChar char="•"/>
-            </a:pPr>
-            <a:r>
-              <a:rPr b="0" lang="en-US" sz="1800" spc="-1" strike="noStrike">
-                <a:solidFill>
-                  <a:schemeClr val="dk1"/>
-                </a:solidFill>
-                <a:latin typeface="Arial"/>
-                <a:ea typeface="DejaVu Sans"/>
-              </a:rPr>
-              <a:t>Dropped support for .NET Framework 4.5 (EOL 04/2022)</a:t>
-            </a:r>
-            <a:endParaRPr b="0" lang="en-US" sz="1800" spc="-1" strike="noStrike">
-              <a:solidFill>
-                <a:srgbClr val="000000"/>
-              </a:solidFill>
-              <a:latin typeface="Arial"/>
-            </a:endParaRPr>
-          </a:p>
-          <a:p>
-            <a:pPr indent="0" defTabSz="914400">
-              <a:lnSpc>
-                <a:spcPct val="90000"/>
-              </a:lnSpc>
-              <a:spcBef>
-                <a:spcPts val="1199"/>
-              </a:spcBef>
-              <a:buNone/>
-              <a:tabLst>
-                <a:tab algn="l" pos="0"/>
-              </a:tabLst>
-            </a:pPr>
-            <a:endParaRPr b="0" lang="en-US" sz="1800" spc="-1" strike="noStrike">
-              <a:solidFill>
-                <a:srgbClr val="000000"/>
-              </a:solidFill>
-              <a:latin typeface="Arial"/>
-            </a:endParaRPr>
-          </a:p>
-        </p:txBody>
-      </p:sp>
-      <p:sp>
-        <p:nvSpPr>
-          <p:cNvPr id="101" name="PlaceHolder 2"/>
-          <p:cNvSpPr>
-            <a:spLocks noGrp="1"/>
-          </p:cNvSpPr>
-          <p:nvPr>
-            <p:ph type="title"/>
-          </p:nvPr>
-        </p:nvSpPr>
-        <p:spPr>
-          <a:xfrm>
-            <a:off x="588240" y="453600"/>
-            <a:ext cx="8222760" cy="472320"/>
-          </a:xfrm>
-          <a:prstGeom prst="rect">
-            <a:avLst/>
-          </a:prstGeom>
-          <a:noFill/>
-          <a:ln w="0">
-            <a:noFill/>
-          </a:ln>
-        </p:spPr>
-        <p:txBody>
-          <a:bodyPr lIns="0" rIns="0" tIns="0" bIns="0" anchor="ctr">
-            <a:noAutofit/>
-          </a:bodyPr>
-          <a:p>
-            <a:pPr indent="0" defTabSz="914400">
-              <a:lnSpc>
-                <a:spcPct val="90000"/>
-              </a:lnSpc>
-              <a:buNone/>
-              <a:tabLst>
-                <a:tab algn="l" pos="0"/>
-              </a:tabLst>
-            </a:pPr>
-            <a:r>
-              <a:rPr b="1" lang="en-GB" sz="2400" spc="-1" strike="noStrike">
-                <a:solidFill>
-                  <a:srgbClr val="990000"/>
-                </a:solidFill>
-                <a:latin typeface="Arial"/>
-                <a:ea typeface="DejaVu Sans"/>
-              </a:rPr>
-              <a:t>Changes</a:t>
-            </a:r>
-            <a:endParaRPr b="0" lang="en-US" sz="2400" spc="-1" strike="noStrike">
               <a:solidFill>
                 <a:srgbClr val="000000"/>
               </a:solidFill>
@@ -14080,13 +14491,124 @@
             <a:spLocks noGrp="1"/>
           </p:cNvSpPr>
           <p:nvPr>
+            <p:ph/>
+          </p:nvPr>
+        </p:nvSpPr>
+        <p:spPr>
+          <a:xfrm>
+            <a:off x="588240" y="1299960"/>
+            <a:ext cx="8387640" cy="4188960"/>
+          </a:xfrm>
+          <a:prstGeom prst="rect">
+            <a:avLst/>
+          </a:prstGeom>
+          <a:noFill/>
+          <a:ln w="0">
+            <a:noFill/>
+          </a:ln>
+        </p:spPr>
+        <p:txBody>
+          <a:bodyPr lIns="0" rIns="0" tIns="0" bIns="0" anchor="t">
+            <a:normAutofit/>
+          </a:bodyPr>
+          <a:p>
+            <a:pPr marL="228600" indent="-228600" defTabSz="914400">
+              <a:lnSpc>
+                <a:spcPct val="90000"/>
+              </a:lnSpc>
+              <a:spcBef>
+                <a:spcPts val="1199"/>
+              </a:spcBef>
+              <a:buClr>
+                <a:srgbClr val="000000"/>
+              </a:buClr>
+              <a:buFont typeface="Arial"/>
+              <a:buChar char="•"/>
+            </a:pPr>
+            <a:r>
+              <a:rPr b="0" lang="en-US" sz="1800" spc="-1" strike="noStrike">
+                <a:solidFill>
+                  <a:schemeClr val="dk1"/>
+                </a:solidFill>
+                <a:latin typeface="Arial"/>
+                <a:ea typeface="DejaVu Sans"/>
+              </a:rPr>
+              <a:t>XML Job Files &lt; v2.4 are no longer supported</a:t>
+            </a:r>
+            <a:endParaRPr b="0" lang="en-US" sz="1800" spc="-1" strike="noStrike">
+              <a:solidFill>
+                <a:srgbClr val="000000"/>
+              </a:solidFill>
+              <a:latin typeface="Arial"/>
+            </a:endParaRPr>
+          </a:p>
+          <a:p>
+            <a:pPr marL="228600" indent="-228600" defTabSz="914400">
+              <a:lnSpc>
+                <a:spcPct val="90000"/>
+              </a:lnSpc>
+              <a:spcBef>
+                <a:spcPts val="1199"/>
+              </a:spcBef>
+              <a:buClr>
+                <a:srgbClr val="000000"/>
+              </a:buClr>
+              <a:buFont typeface="Arial"/>
+              <a:buChar char="•"/>
+            </a:pPr>
+            <a:r>
+              <a:rPr b="0" lang="en-US" sz="1800" spc="-1" strike="noStrike">
+                <a:solidFill>
+                  <a:schemeClr val="dk1"/>
+                </a:solidFill>
+                <a:latin typeface="Arial"/>
+                <a:ea typeface="DejaVu Sans"/>
+              </a:rPr>
+              <a:t>Dropped support for .NET Framework 4.5 (EOL 04/2022)</a:t>
+            </a:r>
+            <a:endParaRPr b="0" lang="en-US" sz="1800" spc="-1" strike="noStrike">
+              <a:solidFill>
+                <a:srgbClr val="000000"/>
+              </a:solidFill>
+              <a:latin typeface="Arial"/>
+            </a:endParaRPr>
+          </a:p>
+          <a:p>
+            <a:pPr indent="0" defTabSz="914400">
+              <a:lnSpc>
+                <a:spcPct val="90000"/>
+              </a:lnSpc>
+              <a:spcBef>
+                <a:spcPts val="1199"/>
+              </a:spcBef>
+              <a:buNone/>
+              <a:tabLst>
+                <a:tab algn="l" pos="0"/>
+              </a:tabLst>
+            </a:pPr>
+            <a:endParaRPr b="0" lang="en-US" sz="1800" spc="-1" strike="noStrike">
+              <a:solidFill>
+                <a:srgbClr val="000000"/>
+              </a:solidFill>
+              <a:latin typeface="Arial"/>
+            </a:endParaRPr>
+          </a:p>
+        </p:txBody>
+      </p:sp>
+      <p:sp>
+        <p:nvSpPr>
+          <p:cNvPr id="103" name="PlaceHolder 2"/>
+          <p:cNvSpPr>
+            <a:spLocks noGrp="1"/>
+          </p:cNvSpPr>
+          <p:nvPr>
             <p:ph type="title"/>
           </p:nvPr>
         </p:nvSpPr>
         <p:spPr>
           <a:xfrm>
             <a:off x="588240" y="453600"/>
-            <a:ext cx="8222760" cy="1122120"/>
+            <a:ext cx="8222400" cy="471960"/>
           </a:xfrm>
           <a:prstGeom prst="rect">
             <a:avLst/>
@@ -14111,236 +14633,16 @@
               </a:tabLst>
             </a:pPr>
             <a:r>
-              <a:rPr b="1" lang="en-US" sz="2400" spc="-1" strike="noStrike">
+              <a:rPr b="1" lang="en-GB" sz="2400" spc="-1" strike="noStrike">
                 <a:solidFill>
                   <a:srgbClr val="990000"/>
                 </a:solidFill>
                 <a:latin typeface="Arial"/>
                 <a:ea typeface="DejaVu Sans"/>
               </a:rPr>
-              <a:t>Implementation of Declaration Mode for xEV-Vehicles</a:t>
-            </a:r>
-            <a:br>
-              <a:rPr sz="2400"/>
-            </a:br>
+              <a:t>Changes</a:t>
+            </a:r>
             <a:endParaRPr b="0" lang="en-US" sz="2400" spc="-1" strike="noStrike">
-              <a:solidFill>
-                <a:srgbClr val="000000"/>
-              </a:solidFill>
-              <a:latin typeface="Arial"/>
-            </a:endParaRPr>
-          </a:p>
-        </p:txBody>
-      </p:sp>
-      <p:sp>
-        <p:nvSpPr>
-          <p:cNvPr id="103" name="Textfeld 1"/>
-          <p:cNvSpPr/>
-          <p:nvPr/>
-        </p:nvSpPr>
-        <p:spPr>
-          <a:xfrm>
-            <a:off x="588240" y="1210680"/>
-            <a:ext cx="7961040" cy="3350520"/>
-          </a:xfrm>
-          <a:prstGeom prst="rect">
-            <a:avLst/>
-          </a:prstGeom>
-          <a:noFill/>
-          <a:ln w="0">
-            <a:noFill/>
-          </a:ln>
-        </p:spPr>
-        <p:style>
-          <a:lnRef idx="0"/>
-          <a:fillRef idx="0"/>
-          <a:effectRef idx="0"/>
-          <a:fontRef idx="minor"/>
-        </p:style>
-        <p:txBody>
-          <a:bodyPr lIns="90000" rIns="90000" tIns="45000" bIns="45000" anchor="t">
-            <a:spAutoFit/>
-          </a:bodyPr>
-          <a:p>
-            <a:pPr marL="343080" indent="-343080" defTabSz="914400">
-              <a:lnSpc>
-                <a:spcPct val="100000"/>
-              </a:lnSpc>
-              <a:spcBef>
-                <a:spcPts val="1199"/>
-              </a:spcBef>
-              <a:buClr>
-                <a:srgbClr val="000000"/>
-              </a:buClr>
-              <a:buFont typeface="Arial"/>
-              <a:buChar char="•"/>
-            </a:pPr>
-            <a:r>
-              <a:rPr b="0" lang="en-GB" sz="2000" spc="-1" strike="noStrike">
-                <a:solidFill>
-                  <a:schemeClr val="dk1"/>
-                </a:solidFill>
-                <a:latin typeface="Arial"/>
-                <a:ea typeface="DejaVu Sans"/>
-              </a:rPr>
-              <a:t>Generic auxiliary parametrisation</a:t>
-            </a:r>
-            <a:endParaRPr b="0" lang="en-US" sz="2000" spc="-1" strike="noStrike">
-              <a:solidFill>
-                <a:srgbClr val="000000"/>
-              </a:solidFill>
-              <a:latin typeface="Arial"/>
-            </a:endParaRPr>
-          </a:p>
-          <a:p>
-            <a:pPr marL="343080" indent="-343080" defTabSz="914400">
-              <a:lnSpc>
-                <a:spcPct val="100000"/>
-              </a:lnSpc>
-              <a:spcBef>
-                <a:spcPts val="1199"/>
-              </a:spcBef>
-              <a:buClr>
-                <a:srgbClr val="000000"/>
-              </a:buClr>
-              <a:buFont typeface="Arial"/>
-              <a:buChar char="•"/>
-            </a:pPr>
-            <a:r>
-              <a:rPr b="0" lang="en-GB" sz="2000" spc="-1" strike="noStrike">
-                <a:solidFill>
-                  <a:schemeClr val="dk1"/>
-                </a:solidFill>
-                <a:latin typeface="Arial"/>
-                <a:ea typeface="DejaVu Sans"/>
-              </a:rPr>
-              <a:t>Generic parametrisation of usable SOC range</a:t>
-            </a:r>
-            <a:endParaRPr b="0" lang="en-US" sz="2000" spc="-1" strike="noStrike">
-              <a:solidFill>
-                <a:srgbClr val="000000"/>
-              </a:solidFill>
-              <a:latin typeface="Arial"/>
-            </a:endParaRPr>
-          </a:p>
-          <a:p>
-            <a:pPr marL="343080" indent="-343080" defTabSz="914400">
-              <a:lnSpc>
-                <a:spcPct val="100000"/>
-              </a:lnSpc>
-              <a:spcBef>
-                <a:spcPts val="1199"/>
-              </a:spcBef>
-              <a:buClr>
-                <a:srgbClr val="000000"/>
-              </a:buClr>
-              <a:buFont typeface="Arial"/>
-              <a:buChar char="•"/>
-            </a:pPr>
-            <a:r>
-              <a:rPr b="0" lang="en-GB" sz="2000" spc="-1" strike="noStrike">
-                <a:solidFill>
-                  <a:schemeClr val="dk1"/>
-                </a:solidFill>
-                <a:latin typeface="Arial"/>
-                <a:ea typeface="DejaVu Sans"/>
-              </a:rPr>
-              <a:t>Generic parametrisation of Serial/Parallel Hybrid Strategy parameters</a:t>
-            </a:r>
-            <a:endParaRPr b="0" lang="en-US" sz="2000" spc="-1" strike="noStrike">
-              <a:solidFill>
-                <a:srgbClr val="000000"/>
-              </a:solidFill>
-              <a:latin typeface="Arial"/>
-            </a:endParaRPr>
-          </a:p>
-          <a:p>
-            <a:pPr marL="343080" indent="-343080" defTabSz="914400">
-              <a:lnSpc>
-                <a:spcPct val="100000"/>
-              </a:lnSpc>
-              <a:spcBef>
-                <a:spcPts val="1199"/>
-              </a:spcBef>
-              <a:buClr>
-                <a:srgbClr val="000000"/>
-              </a:buClr>
-              <a:buFont typeface="Arial"/>
-              <a:buChar char="•"/>
-            </a:pPr>
-            <a:r>
-              <a:rPr b="0" lang="en-GB" sz="2000" spc="-1" strike="noStrike">
-                <a:solidFill>
-                  <a:schemeClr val="dk1"/>
-                </a:solidFill>
-                <a:latin typeface="Arial"/>
-                <a:ea typeface="DejaVu Sans"/>
-              </a:rPr>
-              <a:t>Automated simulation of OVC-HEV</a:t>
-            </a:r>
-            <a:endParaRPr b="0" lang="en-US" sz="2000" spc="-1" strike="noStrike">
-              <a:solidFill>
-                <a:srgbClr val="000000"/>
-              </a:solidFill>
-              <a:latin typeface="Arial"/>
-            </a:endParaRPr>
-          </a:p>
-          <a:p>
-            <a:pPr lvl="1" marL="743040" indent="-285840" defTabSz="914400">
-              <a:lnSpc>
-                <a:spcPct val="100000"/>
-              </a:lnSpc>
-              <a:spcBef>
-                <a:spcPts val="1199"/>
-              </a:spcBef>
-              <a:buClr>
-                <a:srgbClr val="000000"/>
-              </a:buClr>
-              <a:buFont typeface="Arial"/>
-              <a:buChar char="•"/>
-            </a:pPr>
-            <a:r>
-              <a:rPr b="0" lang="en-GB" sz="1600" spc="-1" strike="noStrike">
-                <a:solidFill>
-                  <a:schemeClr val="dk1"/>
-                </a:solidFill>
-                <a:latin typeface="Arial"/>
-                <a:ea typeface="DejaVu Sans"/>
-              </a:rPr>
-              <a:t>Charge depleting mode (CD): The propulsion energy is provided by the electric storage only</a:t>
-            </a:r>
-            <a:endParaRPr b="0" lang="en-US" sz="1600" spc="-1" strike="noStrike">
-              <a:solidFill>
-                <a:srgbClr val="000000"/>
-              </a:solidFill>
-              <a:latin typeface="Arial"/>
-            </a:endParaRPr>
-          </a:p>
-          <a:p>
-            <a:pPr lvl="1" marL="743040" indent="-285840" defTabSz="914400">
-              <a:lnSpc>
-                <a:spcPct val="100000"/>
-              </a:lnSpc>
-              <a:spcBef>
-                <a:spcPts val="1199"/>
-              </a:spcBef>
-              <a:buClr>
-                <a:srgbClr val="000000"/>
-              </a:buClr>
-              <a:buFont typeface="Arial"/>
-              <a:buChar char="•"/>
-            </a:pPr>
-            <a:r>
-              <a:rPr b="0" lang="en-GB" sz="1600" spc="-1" strike="noStrike">
-                <a:solidFill>
-                  <a:schemeClr val="dk1"/>
-                </a:solidFill>
-                <a:latin typeface="Arial"/>
-                <a:ea typeface="DejaVu Sans"/>
-              </a:rPr>
-              <a:t>Charge sustaining mode (CS): The propulsion energy is provided by the fuel storage</a:t>
-            </a:r>
-            <a:endParaRPr b="0" lang="en-US" sz="1600" spc="-1" strike="noStrike">
               <a:solidFill>
                 <a:srgbClr val="000000"/>
               </a:solidFill>
@@ -14392,7 +14694,7 @@
         <p:spPr>
           <a:xfrm>
             <a:off x="588240" y="453600"/>
-            <a:ext cx="8222760" cy="1122120"/>
+            <a:ext cx="8222400" cy="1121760"/>
           </a:xfrm>
           <a:prstGeom prst="rect">
             <a:avLst/>
@@ -14424,7 +14726,7 @@
                 <a:latin typeface="Arial"/>
                 <a:ea typeface="DejaVu Sans"/>
               </a:rPr>
-              <a:t>Implementation of Declaration Mode for xEV-Lorries</a:t>
+              <a:t>Implementation of Declaration Mode for xEV-Vehicles</a:t>
             </a:r>
             <a:br>
               <a:rPr sz="2400"/>
@@ -14440,14 +14742,320 @@
       </p:sp>
       <p:sp>
         <p:nvSpPr>
-          <p:cNvPr id="105" name="Inhaltsplatzhalter 5"/>
+          <p:cNvPr id="105" name="Textfeld 1"/>
+          <p:cNvSpPr/>
+          <p:nvPr/>
+        </p:nvSpPr>
+        <p:spPr>
+          <a:xfrm>
+            <a:off x="588240" y="1210680"/>
+            <a:ext cx="7960680" cy="3350520"/>
+          </a:xfrm>
+          <a:prstGeom prst="rect">
+            <a:avLst/>
+          </a:prstGeom>
+          <a:noFill/>
+          <a:ln w="0">
+            <a:noFill/>
+          </a:ln>
+        </p:spPr>
+        <p:style>
+          <a:lnRef idx="0"/>
+          <a:fillRef idx="0"/>
+          <a:effectRef idx="0"/>
+          <a:fontRef idx="minor"/>
+        </p:style>
+        <p:txBody>
+          <a:bodyPr lIns="90000" rIns="90000" tIns="45000" bIns="45000" anchor="t">
+            <a:spAutoFit/>
+          </a:bodyPr>
+          <a:p>
+            <a:pPr marL="343080" indent="-343080" defTabSz="914400">
+              <a:lnSpc>
+                <a:spcPct val="100000"/>
+              </a:lnSpc>
+              <a:spcBef>
+                <a:spcPts val="1199"/>
+              </a:spcBef>
+              <a:buClr>
+                <a:srgbClr val="000000"/>
+              </a:buClr>
+              <a:buFont typeface="Arial"/>
+              <a:buChar char="•"/>
+            </a:pPr>
+            <a:r>
+              <a:rPr b="0" lang="en-GB" sz="2000" spc="-1" strike="noStrike">
+                <a:solidFill>
+                  <a:schemeClr val="dk1"/>
+                </a:solidFill>
+                <a:latin typeface="Arial"/>
+                <a:ea typeface="DejaVu Sans"/>
+              </a:rPr>
+              <a:t>Generic auxiliary parametrisation</a:t>
+            </a:r>
+            <a:endParaRPr b="0" lang="en-US" sz="2000" spc="-1" strike="noStrike">
+              <a:solidFill>
+                <a:srgbClr val="000000"/>
+              </a:solidFill>
+              <a:latin typeface="Arial"/>
+            </a:endParaRPr>
+          </a:p>
+          <a:p>
+            <a:pPr marL="343080" indent="-343080" defTabSz="914400">
+              <a:lnSpc>
+                <a:spcPct val="100000"/>
+              </a:lnSpc>
+              <a:spcBef>
+                <a:spcPts val="1199"/>
+              </a:spcBef>
+              <a:buClr>
+                <a:srgbClr val="000000"/>
+              </a:buClr>
+              <a:buFont typeface="Arial"/>
+              <a:buChar char="•"/>
+            </a:pPr>
+            <a:r>
+              <a:rPr b="0" lang="en-GB" sz="2000" spc="-1" strike="noStrike">
+                <a:solidFill>
+                  <a:schemeClr val="dk1"/>
+                </a:solidFill>
+                <a:latin typeface="Arial"/>
+                <a:ea typeface="DejaVu Sans"/>
+              </a:rPr>
+              <a:t>Generic parametrisation of usable SOC range</a:t>
+            </a:r>
+            <a:endParaRPr b="0" lang="en-US" sz="2000" spc="-1" strike="noStrike">
+              <a:solidFill>
+                <a:srgbClr val="000000"/>
+              </a:solidFill>
+              <a:latin typeface="Arial"/>
+            </a:endParaRPr>
+          </a:p>
+          <a:p>
+            <a:pPr marL="343080" indent="-343080" defTabSz="914400">
+              <a:lnSpc>
+                <a:spcPct val="100000"/>
+              </a:lnSpc>
+              <a:spcBef>
+                <a:spcPts val="1199"/>
+              </a:spcBef>
+              <a:buClr>
+                <a:srgbClr val="000000"/>
+              </a:buClr>
+              <a:buFont typeface="Arial"/>
+              <a:buChar char="•"/>
+            </a:pPr>
+            <a:r>
+              <a:rPr b="0" lang="en-GB" sz="2000" spc="-1" strike="noStrike">
+                <a:solidFill>
+                  <a:schemeClr val="dk1"/>
+                </a:solidFill>
+                <a:latin typeface="Arial"/>
+                <a:ea typeface="DejaVu Sans"/>
+              </a:rPr>
+              <a:t>Generic parametrisation of Serial/Parallel Hybrid Strategy parameters</a:t>
+            </a:r>
+            <a:endParaRPr b="0" lang="en-US" sz="2000" spc="-1" strike="noStrike">
+              <a:solidFill>
+                <a:srgbClr val="000000"/>
+              </a:solidFill>
+              <a:latin typeface="Arial"/>
+            </a:endParaRPr>
+          </a:p>
+          <a:p>
+            <a:pPr marL="343080" indent="-343080" defTabSz="914400">
+              <a:lnSpc>
+                <a:spcPct val="100000"/>
+              </a:lnSpc>
+              <a:spcBef>
+                <a:spcPts val="1199"/>
+              </a:spcBef>
+              <a:buClr>
+                <a:srgbClr val="000000"/>
+              </a:buClr>
+              <a:buFont typeface="Arial"/>
+              <a:buChar char="•"/>
+            </a:pPr>
+            <a:r>
+              <a:rPr b="0" lang="en-GB" sz="2000" spc="-1" strike="noStrike">
+                <a:solidFill>
+                  <a:schemeClr val="dk1"/>
+                </a:solidFill>
+                <a:latin typeface="Arial"/>
+                <a:ea typeface="DejaVu Sans"/>
+              </a:rPr>
+              <a:t>Automated simulation of OVC-HEV</a:t>
+            </a:r>
+            <a:endParaRPr b="0" lang="en-US" sz="2000" spc="-1" strike="noStrike">
+              <a:solidFill>
+                <a:srgbClr val="000000"/>
+              </a:solidFill>
+              <a:latin typeface="Arial"/>
+            </a:endParaRPr>
+          </a:p>
+          <a:p>
+            <a:pPr lvl="1" marL="743040" indent="-285840" defTabSz="914400">
+              <a:lnSpc>
+                <a:spcPct val="100000"/>
+              </a:lnSpc>
+              <a:spcBef>
+                <a:spcPts val="1199"/>
+              </a:spcBef>
+              <a:buClr>
+                <a:srgbClr val="000000"/>
+              </a:buClr>
+              <a:buFont typeface="Arial"/>
+              <a:buChar char="•"/>
+            </a:pPr>
+            <a:r>
+              <a:rPr b="0" lang="en-GB" sz="1600" spc="-1" strike="noStrike">
+                <a:solidFill>
+                  <a:schemeClr val="dk1"/>
+                </a:solidFill>
+                <a:latin typeface="Arial"/>
+                <a:ea typeface="DejaVu Sans"/>
+              </a:rPr>
+              <a:t>Charge depleting mode (CD): The propulsion energy is provided by the electric storage only</a:t>
+            </a:r>
+            <a:endParaRPr b="0" lang="en-US" sz="1600" spc="-1" strike="noStrike">
+              <a:solidFill>
+                <a:srgbClr val="000000"/>
+              </a:solidFill>
+              <a:latin typeface="Arial"/>
+            </a:endParaRPr>
+          </a:p>
+          <a:p>
+            <a:pPr lvl="1" marL="743040" indent="-285840" defTabSz="914400">
+              <a:lnSpc>
+                <a:spcPct val="100000"/>
+              </a:lnSpc>
+              <a:spcBef>
+                <a:spcPts val="1199"/>
+              </a:spcBef>
+              <a:buClr>
+                <a:srgbClr val="000000"/>
+              </a:buClr>
+              <a:buFont typeface="Arial"/>
+              <a:buChar char="•"/>
+            </a:pPr>
+            <a:r>
+              <a:rPr b="0" lang="en-GB" sz="1600" spc="-1" strike="noStrike">
+                <a:solidFill>
+                  <a:schemeClr val="dk1"/>
+                </a:solidFill>
+                <a:latin typeface="Arial"/>
+                <a:ea typeface="DejaVu Sans"/>
+              </a:rPr>
+              <a:t>Charge sustaining mode (CS): The propulsion energy is provided by the fuel storage</a:t>
+            </a:r>
+            <a:endParaRPr b="0" lang="en-US" sz="1600" spc="-1" strike="noStrike">
+              <a:solidFill>
+                <a:srgbClr val="000000"/>
+              </a:solidFill>
+              <a:latin typeface="Arial"/>
+            </a:endParaRPr>
+          </a:p>
+        </p:txBody>
+      </p:sp>
+    </p:spTree>
+  </p:cSld>
+  <mc:AlternateContent>
+    <mc:Choice Requires="p14">
+      <p:transition spd="slow" p14:dur="2000"/>
+    </mc:Choice>
+    <mc:Fallback>
+      <p:transition spd="slow"/>
+    </mc:Fallback>
+  </mc:AlternateContent>
+</p:sld>
+</file>
+
+<file path=ppt/slides/slide25.xml><?xml version="1.0" encoding="utf-8"?>
+<p:sld xmlns:a="http://schemas.openxmlformats.org/drawingml/2006/main" xmlns:p="http://schemas.openxmlformats.org/presentationml/2006/main" xmlns:r="http://schemas.openxmlformats.org/officeDocument/2006/relationships" xmlns:p14="http://schemas.microsoft.com/office/powerpoint/2010/main" xmlns:p15="http://schemas.microsoft.com/office/powerpoint/2012/main" xmlns:mc="http://schemas.openxmlformats.org/markup-compatibility/2006">
+  <p:cSld>
+    <p:spTree>
+      <p:nvGrpSpPr>
+        <p:cNvPr id="1" name=""/>
+        <p:cNvGrpSpPr/>
+        <p:nvPr/>
+      </p:nvGrpSpPr>
+      <p:grpSpPr>
+        <a:xfrm>
+          <a:off x="0" y="0"/>
+          <a:ext cx="0" cy="0"/>
+          <a:chOff x="0" y="0"/>
+          <a:chExt cx="0" cy="0"/>
+        </a:xfrm>
+      </p:grpSpPr>
+      <p:sp>
+        <p:nvSpPr>
+          <p:cNvPr id="106" name="PlaceHolder 1"/>
+          <p:cNvSpPr>
+            <a:spLocks noGrp="1"/>
+          </p:cNvSpPr>
+          <p:nvPr>
+            <p:ph type="title"/>
+          </p:nvPr>
+        </p:nvSpPr>
+        <p:spPr>
+          <a:xfrm>
+            <a:off x="588240" y="453600"/>
+            <a:ext cx="8222400" cy="1121760"/>
+          </a:xfrm>
+          <a:prstGeom prst="rect">
+            <a:avLst/>
+          </a:prstGeom>
+          <a:noFill/>
+          <a:ln w="0">
+            <a:noFill/>
+          </a:ln>
+        </p:spPr>
+        <p:txBody>
+          <a:bodyPr lIns="0" rIns="0" tIns="0" bIns="0" anchor="ctr">
+            <a:noAutofit/>
+          </a:bodyPr>
+          <a:p>
+            <a:pPr indent="0" defTabSz="914400">
+              <a:lnSpc>
+                <a:spcPct val="90000"/>
+              </a:lnSpc>
+              <a:buNone/>
+              <a:tabLst>
+                <a:tab algn="l" pos="0"/>
+              </a:tabLst>
+            </a:pPr>
+            <a:r>
+              <a:rPr b="1" lang="en-US" sz="2400" spc="-1" strike="noStrike">
+                <a:solidFill>
+                  <a:srgbClr val="990000"/>
+                </a:solidFill>
+                <a:latin typeface="Arial"/>
+                <a:ea typeface="DejaVu Sans"/>
+              </a:rPr>
+              <a:t>Implementation of Declaration Mode for xEV-Lorries</a:t>
+            </a:r>
+            <a:br>
+              <a:rPr sz="2400"/>
+            </a:br>
+            <a:endParaRPr b="0" lang="en-US" sz="2400" spc="-1" strike="noStrike">
+              <a:solidFill>
+                <a:srgbClr val="000000"/>
+              </a:solidFill>
+              <a:latin typeface="Arial"/>
+            </a:endParaRPr>
+          </a:p>
+        </p:txBody>
+      </p:sp>
+      <p:sp>
+        <p:nvSpPr>
+          <p:cNvPr id="107" name="Inhaltsplatzhalter 5"/>
           <p:cNvSpPr/>
           <p:nvPr/>
         </p:nvSpPr>
         <p:spPr>
           <a:xfrm>
             <a:off x="749520" y="1085040"/>
-            <a:ext cx="8388000" cy="5122080"/>
+            <a:ext cx="8387640" cy="5121720"/>
           </a:xfrm>
           <a:prstGeom prst="rect">
             <a:avLst/>
@@ -14565,14 +15173,14 @@
       </p:sp>
       <p:sp>
         <p:nvSpPr>
-          <p:cNvPr id="106" name="Titel 4"/>
+          <p:cNvPr id="108" name="Titel 4"/>
           <p:cNvSpPr/>
           <p:nvPr/>
         </p:nvSpPr>
         <p:spPr>
           <a:xfrm>
             <a:off x="588240" y="2622240"/>
-            <a:ext cx="8222760" cy="534960"/>
+            <a:ext cx="8222400" cy="534600"/>
           </a:xfrm>
           <a:prstGeom prst="rect">
             <a:avLst/>
@@ -14622,7 +15230,7 @@
       </p:sp>
       <p:sp>
         <p:nvSpPr>
-          <p:cNvPr id="107" name="PlaceHolder 2"/>
+          <p:cNvPr id="109" name="PlaceHolder 2"/>
           <p:cNvSpPr>
             <a:spLocks noGrp="1"/>
           </p:cNvSpPr>
@@ -14633,7 +15241,7 @@
         <p:spPr>
           <a:xfrm>
             <a:off x="588240" y="2861280"/>
-            <a:ext cx="8388000" cy="1378440"/>
+            <a:ext cx="8387640" cy="1378080"/>
           </a:xfrm>
           <a:prstGeom prst="rect">
             <a:avLst/>
@@ -14840,7 +15448,7 @@
         <p:spPr>
           <a:xfrm>
             <a:off x="468360" y="476640"/>
-            <a:ext cx="8211240" cy="673920"/>
+            <a:ext cx="8210880" cy="673560"/>
           </a:xfrm>
           <a:prstGeom prst="rect">
             <a:avLst/>
@@ -14872,7 +15480,7 @@
                 <a:latin typeface="Arial"/>
                 <a:ea typeface="DejaVu Sans"/>
               </a:rPr>
-              <a:t>Vecto 4.2.0.3448 RELEASE CANDIDATE</a:t>
+              <a:t>Vecto 4.2.1.3469 OFFICIAL RELEASE </a:t>
             </a:r>
             <a:br>
               <a:rPr sz="2400"/>
@@ -14885,7 +15493,7 @@
                 <a:latin typeface="Arial"/>
                 <a:ea typeface="DejaVu Sans"/>
               </a:rPr>
-              <a:t>10.06.2024</a:t>
+              <a:t>01.07.2024</a:t>
             </a:r>
             <a:endParaRPr b="0" lang="en-US" sz="1600" spc="-1" strike="noStrike">
               <a:solidFill>
@@ -14909,7 +15517,7 @@
         <p:spPr>
           <a:xfrm>
             <a:off x="323640" y="1639080"/>
-            <a:ext cx="8489880" cy="4446720"/>
+            <a:ext cx="8489520" cy="4446360"/>
           </a:xfrm>
           <a:prstGeom prst="rect">
             <a:avLst/>
@@ -14978,9 +15586,59 @@
                 <a:latin typeface="Arial"/>
                 <a:ea typeface="DejaVu Sans"/>
               </a:rPr>
-              <a:t>CodeEU-696: Double summary in CIF for vocationals and non vocational missions.</a:t>
+              <a:t>CodeEU-726: Build an XML converter tool for older VECTO jobs</a:t>
             </a:r>
             <a:endParaRPr b="0" lang="en-US" sz="1200" spc="-1" strike="noStrike">
+              <a:solidFill>
+                <a:srgbClr val="000000"/>
+              </a:solidFill>
+              <a:latin typeface="Arial"/>
+            </a:endParaRPr>
+          </a:p>
+          <a:p>
+            <a:pPr marL="343080" indent="0" defTabSz="914400">
+              <a:lnSpc>
+                <a:spcPct val="100000"/>
+              </a:lnSpc>
+              <a:spcBef>
+                <a:spcPts val="320"/>
+              </a:spcBef>
+              <a:buNone/>
+              <a:tabLst>
+                <a:tab algn="l" pos="0"/>
+              </a:tabLst>
+            </a:pPr>
+            <a:endParaRPr b="0" lang="en-US" sz="1200" spc="-1" strike="noStrike">
+              <a:solidFill>
+                <a:srgbClr val="000000"/>
+              </a:solidFill>
+              <a:latin typeface="Arial"/>
+            </a:endParaRPr>
+          </a:p>
+          <a:p>
+            <a:pPr marL="343080" indent="0" defTabSz="914400">
+              <a:lnSpc>
+                <a:spcPct val="100000"/>
+              </a:lnSpc>
+              <a:spcBef>
+                <a:spcPts val="320"/>
+              </a:spcBef>
+              <a:buNone/>
+              <a:tabLst>
+                <a:tab algn="l" pos="0"/>
+              </a:tabLst>
+            </a:pPr>
+            <a:r>
+              <a:rPr b="1" lang="en-US" sz="1600" spc="-1" strike="noStrike">
+                <a:solidFill>
+                  <a:srgbClr val="000000"/>
+                </a:solidFill>
+                <a:latin typeface="Arial"/>
+                <a:ea typeface="DejaVu Sans"/>
+              </a:rPr>
+              <a:t>Bugfixes</a:t>
+            </a:r>
+            <a:endParaRPr b="0" lang="en-US" sz="1600" spc="-1" strike="noStrike">
               <a:solidFill>
                 <a:srgbClr val="000000"/>
               </a:solidFill>
@@ -15012,7 +15670,7 @@
                 <a:latin typeface="Arial"/>
                 <a:ea typeface="DejaVu Sans"/>
               </a:rPr>
-              <a:t>CodeEU-698: Incorporate missions RD, LH and EMS to class 16 vehicles</a:t>
+              <a:t>CodeEU-719: the six new tyre dimensions from line 126 onwards to the latest “wheels.csv” file in the VECTO repository</a:t>
             </a:r>
             <a:endParaRPr b="0" lang="en-US" sz="1200" spc="-1" strike="noStrike">
               <a:solidFill>
@@ -15046,7 +15704,7 @@
                 <a:latin typeface="Arial"/>
                 <a:ea typeface="DejaVu Sans"/>
               </a:rPr>
-              <a:t>CodeEU-697: Re-evaluate subgroup allocations for Long Haul</a:t>
+              <a:t>CodeEU-717: VECTO-4.2.0.3448-RC - Buses AMT Gearbox Type with 1% higher C02 in primary results</a:t>
             </a:r>
             <a:endParaRPr b="0" lang="en-US" sz="1200" spc="-1" strike="noStrike">
               <a:solidFill>
@@ -15080,59 +15738,9 @@
                 <a:latin typeface="Arial"/>
                 <a:ea typeface="DejaVu Sans"/>
               </a:rPr>
-              <a:t>CodeEU-676: Feature: Implement monitoring report</a:t>
+              <a:t>CodeEU-724: Error in Primary Bus Simulation: Object reference not set to an instance of an object</a:t>
             </a:r>
             <a:endParaRPr b="0" lang="en-US" sz="1200" spc="-1" strike="noStrike">
-              <a:solidFill>
-                <a:srgbClr val="000000"/>
-              </a:solidFill>
-              <a:latin typeface="Arial"/>
-            </a:endParaRPr>
-          </a:p>
-          <a:p>
-            <a:pPr marL="343080" indent="0" defTabSz="914400">
-              <a:lnSpc>
-                <a:spcPct val="100000"/>
-              </a:lnSpc>
-              <a:spcBef>
-                <a:spcPts val="320"/>
-              </a:spcBef>
-              <a:buNone/>
-              <a:tabLst>
-                <a:tab algn="l" pos="0"/>
-              </a:tabLst>
-            </a:pPr>
-            <a:endParaRPr b="0" lang="en-US" sz="1200" spc="-1" strike="noStrike">
-              <a:solidFill>
-                <a:srgbClr val="000000"/>
-              </a:solidFill>
-              <a:latin typeface="Arial"/>
-            </a:endParaRPr>
-          </a:p>
-          <a:p>
-            <a:pPr marL="343080" indent="0" defTabSz="914400">
-              <a:lnSpc>
-                <a:spcPct val="100000"/>
-              </a:lnSpc>
-              <a:spcBef>
-                <a:spcPts val="320"/>
-              </a:spcBef>
-              <a:buNone/>
-              <a:tabLst>
-                <a:tab algn="l" pos="0"/>
-              </a:tabLst>
-            </a:pPr>
-            <a:r>
-              <a:rPr b="1" lang="en-US" sz="1600" spc="-1" strike="noStrike">
-                <a:solidFill>
-                  <a:srgbClr val="000000"/>
-                </a:solidFill>
-                <a:latin typeface="Arial"/>
-                <a:ea typeface="DejaVu Sans"/>
-              </a:rPr>
-              <a:t>Bugfixes (1/4)</a:t>
-            </a:r>
-            <a:endParaRPr b="0" lang="en-US" sz="1600" spc="-1" strike="noStrike">
               <a:solidFill>
                 <a:srgbClr val="000000"/>
               </a:solidFill>
@@ -15164,7 +15772,7 @@
                 <a:latin typeface="Arial"/>
                 <a:ea typeface="DejaVu Sans"/>
               </a:rPr>
-              <a:t>CodeEU-471: VectoSimulationException: VF640J869RB022573</a:t>
+              <a:t>CodeEU-716: VECTO-4.2.0.3448-RC - Buses Result Summary section missing in RLST_Customer.xml</a:t>
             </a:r>
             <a:endParaRPr b="0" lang="en-US" sz="1200" spc="-1" strike="noStrike">
               <a:solidFill>
@@ -15198,7 +15806,7 @@
                 <a:latin typeface="Arial"/>
                 <a:ea typeface="DejaVu Sans"/>
               </a:rPr>
-              <a:t>CodeEU-462: Article10-2-issue | Order-Nr 28206354 | HEV P1 Error Mercedes-Benz and Setra Hybrid</a:t>
+              <a:t>CodeEU-694: Primary and Completed heavybus FCV article 9 exempted hashcode mismatch.</a:t>
             </a:r>
             <a:endParaRPr b="0" lang="en-US" sz="1200" spc="-1" strike="noStrike">
               <a:solidFill>
@@ -15232,7 +15840,7 @@
                 <a:latin typeface="Arial"/>
                 <a:ea typeface="DejaVu Sans"/>
               </a:rPr>
-              <a:t>BusesCodeEU-326: Article10-2-issue | Order-Nr 28195581 | HEV P1 Error Mercedes-Benz and Setra Hybrid Buses</a:t>
+              <a:t>CodeEU-735: SMT strategy different between engineering and declaration mode</a:t>
             </a:r>
             <a:endParaRPr b="0" lang="en-US" sz="1200" spc="-1" strike="noStrike">
               <a:solidFill>
@@ -15266,7 +15874,7 @@
                 <a:latin typeface="Arial"/>
                 <a:ea typeface="DejaVu Sans"/>
               </a:rPr>
-              <a:t>CodeEU-348: Article10-2-issue | Order-Nr 28204519 | HEV P1 Error Mercedes-Benz and Setra Hybrid Buses</a:t>
+              <a:t>CodeEU-736: Existing customer reports (CIF) fail validation</a:t>
             </a:r>
             <a:endParaRPr b="0" lang="en-US" sz="1200" spc="-1" strike="noStrike">
               <a:solidFill>
@@ -15300,211 +15908,7 @@
                 <a:latin typeface="Arial"/>
                 <a:ea typeface="DejaVu Sans"/>
               </a:rPr>
-              <a:t>CodeEU-457: Article10-2-issue | Order-Nr 28174000 | HEV P1 Error Mercedes-Benz and Setra Hybrid Buses</a:t>
-            </a:r>
-            <a:endParaRPr b="0" lang="en-US" sz="1200" spc="-1" strike="noStrike">
-              <a:solidFill>
-                <a:srgbClr val="000000"/>
-              </a:solidFill>
-              <a:latin typeface="Arial"/>
-            </a:endParaRPr>
-          </a:p>
-          <a:p>
-            <a:pPr marL="343080" indent="-343080" defTabSz="914400">
-              <a:lnSpc>
-                <a:spcPct val="100000"/>
-              </a:lnSpc>
-              <a:spcBef>
-                <a:spcPts val="320"/>
-              </a:spcBef>
-              <a:buClr>
-                <a:srgbClr val="000000"/>
-              </a:buClr>
-              <a:buFont typeface="Symbol"/>
-              <a:buChar char=""/>
-              <a:tabLst>
-                <a:tab algn="l" pos="1886040"/>
-              </a:tabLst>
-            </a:pPr>
-            <a:r>
-              <a:rPr b="0" lang="en-US" sz="1200" spc="-1" strike="noStrike">
-                <a:solidFill>
-                  <a:srgbClr val="000000"/>
-                </a:solidFill>
-                <a:latin typeface="Arial"/>
-                <a:ea typeface="DejaVu Sans"/>
-              </a:rPr>
-              <a:t>CodeEU-458: Article10-2-issue | Order-Nr 28186528 | HEV P1 Error Mercedes-Benz and Setra Hybrid Buses</a:t>
-            </a:r>
-            <a:endParaRPr b="0" lang="en-US" sz="1200" spc="-1" strike="noStrike">
-              <a:solidFill>
-                <a:srgbClr val="000000"/>
-              </a:solidFill>
-              <a:latin typeface="Arial"/>
-            </a:endParaRPr>
-          </a:p>
-          <a:p>
-            <a:pPr marL="343080" indent="-343080" defTabSz="914400">
-              <a:lnSpc>
-                <a:spcPct val="100000"/>
-              </a:lnSpc>
-              <a:spcBef>
-                <a:spcPts val="320"/>
-              </a:spcBef>
-              <a:buClr>
-                <a:srgbClr val="000000"/>
-              </a:buClr>
-              <a:buFont typeface="Symbol"/>
-              <a:buChar char=""/>
-              <a:tabLst>
-                <a:tab algn="l" pos="1886040"/>
-              </a:tabLst>
-            </a:pPr>
-            <a:r>
-              <a:rPr b="0" lang="en-US" sz="1200" spc="-1" strike="noStrike">
-                <a:solidFill>
-                  <a:srgbClr val="000000"/>
-                </a:solidFill>
-                <a:latin typeface="Arial"/>
-                <a:ea typeface="DejaVu Sans"/>
-              </a:rPr>
-              <a:t>CodeEU-459: Article10-2-issue | Order-Nr 28203057 | HEV P1 Error Mercedes-Benz and Setra Hybrid Buses</a:t>
-            </a:r>
-            <a:endParaRPr b="0" lang="en-US" sz="1200" spc="-1" strike="noStrike">
-              <a:solidFill>
-                <a:srgbClr val="000000"/>
-              </a:solidFill>
-              <a:latin typeface="Arial"/>
-            </a:endParaRPr>
-          </a:p>
-          <a:p>
-            <a:pPr marL="343080" indent="-343080" defTabSz="914400">
-              <a:lnSpc>
-                <a:spcPct val="100000"/>
-              </a:lnSpc>
-              <a:spcBef>
-                <a:spcPts val="320"/>
-              </a:spcBef>
-              <a:buClr>
-                <a:srgbClr val="000000"/>
-              </a:buClr>
-              <a:buFont typeface="Symbol"/>
-              <a:buChar char=""/>
-              <a:tabLst>
-                <a:tab algn="l" pos="1886040"/>
-              </a:tabLst>
-            </a:pPr>
-            <a:r>
-              <a:rPr b="0" lang="en-US" sz="1200" spc="-1" strike="noStrike">
-                <a:solidFill>
-                  <a:srgbClr val="000000"/>
-                </a:solidFill>
-                <a:latin typeface="Arial"/>
-                <a:ea typeface="DejaVu Sans"/>
-              </a:rPr>
-              <a:t>CodeEU-545: IVECO confidential : BUG REPORT : HEV-P1 : UW18m C9 VOITH NXT CRU 48V mild hybrid</a:t>
-            </a:r>
-            <a:endParaRPr b="0" lang="en-US" sz="1200" spc="-1" strike="noStrike">
-              <a:solidFill>
-                <a:srgbClr val="000000"/>
-              </a:solidFill>
-              <a:latin typeface="Arial"/>
-            </a:endParaRPr>
-          </a:p>
-          <a:p>
-            <a:pPr marL="343080" indent="-343080" defTabSz="914400">
-              <a:lnSpc>
-                <a:spcPct val="100000"/>
-              </a:lnSpc>
-              <a:spcBef>
-                <a:spcPts val="320"/>
-              </a:spcBef>
-              <a:buClr>
-                <a:srgbClr val="000000"/>
-              </a:buClr>
-              <a:buFont typeface="Symbol"/>
-              <a:buChar char=""/>
-              <a:tabLst>
-                <a:tab algn="l" pos="1886040"/>
-              </a:tabLst>
-            </a:pPr>
-            <a:r>
-              <a:rPr b="0" lang="en-US" sz="1200" spc="-1" strike="noStrike">
-                <a:solidFill>
-                  <a:srgbClr val="000000"/>
-                </a:solidFill>
-                <a:latin typeface="Arial"/>
-                <a:ea typeface="DejaVu Sans"/>
-              </a:rPr>
-              <a:t>CodeEU-346: Article10-2-issue | Order-Nr 28202338 | HEV P1 Error Mercedes-Benz and Setra Hybrid Buses</a:t>
-            </a:r>
-            <a:endParaRPr b="0" lang="en-US" sz="1200" spc="-1" strike="noStrike">
-              <a:solidFill>
-                <a:srgbClr val="000000"/>
-              </a:solidFill>
-              <a:latin typeface="Arial"/>
-            </a:endParaRPr>
-          </a:p>
-          <a:p>
-            <a:pPr marL="343080" indent="-343080" defTabSz="914400">
-              <a:lnSpc>
-                <a:spcPct val="100000"/>
-              </a:lnSpc>
-              <a:spcBef>
-                <a:spcPts val="320"/>
-              </a:spcBef>
-              <a:buClr>
-                <a:srgbClr val="000000"/>
-              </a:buClr>
-              <a:buFont typeface="Symbol"/>
-              <a:buChar char=""/>
-              <a:tabLst>
-                <a:tab algn="l" pos="1886040"/>
-              </a:tabLst>
-            </a:pPr>
-            <a:r>
-              <a:rPr b="0" lang="en-US" sz="1200" spc="-1" strike="noStrike">
-                <a:solidFill>
-                  <a:srgbClr val="000000"/>
-                </a:solidFill>
-                <a:latin typeface="Arial"/>
-                <a:ea typeface="DejaVu Sans"/>
-              </a:rPr>
-              <a:t>CodeEU-352: Article10-2-issue | Order-Nr 28202130 | HEV P1 Error Mercedes-Benz and Setra Hybrid Buses</a:t>
-            </a:r>
-            <a:endParaRPr b="0" lang="en-US" sz="1200" spc="-1" strike="noStrike">
-              <a:solidFill>
-                <a:srgbClr val="000000"/>
-              </a:solidFill>
-              <a:latin typeface="Arial"/>
-            </a:endParaRPr>
-          </a:p>
-          <a:p>
-            <a:pPr marL="343080" indent="-343080" defTabSz="914400">
-              <a:lnSpc>
-                <a:spcPct val="100000"/>
-              </a:lnSpc>
-              <a:spcBef>
-                <a:spcPts val="320"/>
-              </a:spcBef>
-              <a:buClr>
-                <a:srgbClr val="000000"/>
-              </a:buClr>
-              <a:buFont typeface="Symbol"/>
-              <a:buChar char=""/>
-              <a:tabLst>
-                <a:tab algn="l" pos="1886040"/>
-              </a:tabLst>
-            </a:pPr>
-            <a:r>
-              <a:rPr b="0" lang="en-US" sz="1200" spc="-1" strike="noStrike">
-                <a:solidFill>
-                  <a:srgbClr val="000000"/>
-                </a:solidFill>
-                <a:latin typeface="Arial"/>
-                <a:ea typeface="DejaVu Sans"/>
-              </a:rPr>
-              <a:t>CodeEU-394: Article10-2-issue | Order-Nr 28204065 | HEV P1 Error Mercedes-Benz and Setra Hybrid Buses</a:t>
+              <a:t>CodeEU-737: Missing data from XML report</a:t>
             </a:r>
             <a:endParaRPr b="0" lang="en-US" sz="1200" spc="-1" strike="noStrike">
               <a:solidFill>
@@ -15578,7 +15982,7 @@
         <p:spPr>
           <a:xfrm>
             <a:off x="468360" y="476640"/>
-            <a:ext cx="8211240" cy="673920"/>
+            <a:ext cx="8210880" cy="673560"/>
           </a:xfrm>
           <a:prstGeom prst="rect">
             <a:avLst/>
@@ -15647,7 +16051,7 @@
         <p:spPr>
           <a:xfrm>
             <a:off x="323640" y="1639080"/>
-            <a:ext cx="8489880" cy="4446720"/>
+            <a:ext cx="8489520" cy="4446360"/>
           </a:xfrm>
           <a:prstGeom prst="rect">
             <a:avLst/>
@@ -15674,57 +16078,17 @@
                 <a:tab algn="l" pos="0"/>
               </a:tabLst>
             </a:pPr>
+            <a:r>
+              <a:rPr b="1" lang="en-US" sz="1600" spc="-1" strike="noStrike">
+                <a:solidFill>
+                  <a:srgbClr val="000000"/>
+                </a:solidFill>
+                <a:latin typeface="Arial"/>
+                <a:ea typeface="DejaVu Sans"/>
+              </a:rPr>
+              <a:t>Features</a:t>
+            </a:r>
             <a:endParaRPr b="0" lang="en-US" sz="1600" spc="-1" strike="noStrike">
-              <a:solidFill>
-                <a:srgbClr val="000000"/>
-              </a:solidFill>
-              <a:latin typeface="Arial"/>
-            </a:endParaRPr>
-          </a:p>
-          <a:p>
-            <a:pPr marL="343080" indent="0" defTabSz="914400">
-              <a:lnSpc>
-                <a:spcPct val="100000"/>
-              </a:lnSpc>
-              <a:spcBef>
-                <a:spcPts val="320"/>
-              </a:spcBef>
-              <a:buNone/>
-              <a:tabLst>
-                <a:tab algn="l" pos="0"/>
-              </a:tabLst>
-            </a:pPr>
-            <a:r>
-              <a:rPr b="1" lang="en-US" sz="1600" spc="-1" strike="noStrike">
-                <a:solidFill>
-                  <a:srgbClr val="000000"/>
-                </a:solidFill>
-                <a:latin typeface="Arial"/>
-                <a:ea typeface="DejaVu Sans"/>
-              </a:rPr>
-              <a:t>Bugfixes (2/4)</a:t>
-            </a:r>
-            <a:endParaRPr b="0" lang="en-US" sz="1600" spc="-1" strike="noStrike">
-              <a:solidFill>
-                <a:srgbClr val="000000"/>
-              </a:solidFill>
-              <a:latin typeface="Arial"/>
-            </a:endParaRPr>
-          </a:p>
-          <a:p>
-            <a:pPr marL="343080" indent="0" defTabSz="914400">
-              <a:lnSpc>
-                <a:spcPct val="100000"/>
-              </a:lnSpc>
-              <a:spcBef>
-                <a:spcPts val="320"/>
-              </a:spcBef>
-              <a:buNone/>
-              <a:tabLst>
-                <a:tab algn="l" pos="0"/>
-              </a:tabLst>
-            </a:pPr>
-            <a:endParaRPr b="0" lang="en-US" sz="1200" spc="-1" strike="noStrike">
               <a:solidFill>
                 <a:srgbClr val="000000"/>
               </a:solidFill>
@@ -15756,7 +16120,7 @@
                 <a:latin typeface="Arial"/>
                 <a:ea typeface="DejaVu Sans"/>
               </a:rPr>
-              <a:t>CodeEU-433: Article10-2-issue | Order-Nr 28192321 | HEV P1 Error Mercedes-Benz and Setra Hybrid Buses</a:t>
+              <a:t>CodeEU-696: Double summary in CIF for vocationals and non vocational missions.</a:t>
             </a:r>
             <a:endParaRPr b="0" lang="en-US" sz="1200" spc="-1" strike="noStrike">
               <a:solidFill>
@@ -15790,7 +16154,7 @@
                 <a:latin typeface="Arial"/>
                 <a:ea typeface="DejaVu Sans"/>
               </a:rPr>
-              <a:t>CodeEU-451: Article10-2-issue | Order-Nr 28204280 | HEV P1 Error Mercedes-Benz and Setra Hybrid Buses</a:t>
+              <a:t>CodeEU-698: Incorporate missions RD, LH and EMS to class 16 vehicles</a:t>
             </a:r>
             <a:endParaRPr b="0" lang="en-US" sz="1200" spc="-1" strike="noStrike">
               <a:solidFill>
@@ -15824,7 +16188,7 @@
                 <a:latin typeface="Arial"/>
                 <a:ea typeface="DejaVu Sans"/>
               </a:rPr>
-              <a:t>CodeEU-452: Article10-2-issue | Order-Nr 28197394 | HEV P1 Error Mercedes-Benz and Setra Hybrid Buses</a:t>
+              <a:t>CodeEU-697: Re-evaluate subgroup allocations for Long Haul</a:t>
             </a:r>
             <a:endParaRPr b="0" lang="en-US" sz="1200" spc="-1" strike="noStrike">
               <a:solidFill>
@@ -15858,9 +16222,59 @@
                 <a:latin typeface="Arial"/>
                 <a:ea typeface="DejaVu Sans"/>
               </a:rPr>
-              <a:t>CodeEU-453: Article10-2-issue | Order-Nr 28199435 | HEV P1 Error Mercedes-Benz and Setra Hybrid Buses</a:t>
+              <a:t>CodeEU-676: Feature: Implement monitoring report</a:t>
             </a:r>
             <a:endParaRPr b="0" lang="en-US" sz="1200" spc="-1" strike="noStrike">
+              <a:solidFill>
+                <a:srgbClr val="000000"/>
+              </a:solidFill>
+              <a:latin typeface="Arial"/>
+            </a:endParaRPr>
+          </a:p>
+          <a:p>
+            <a:pPr marL="343080" indent="0" defTabSz="914400">
+              <a:lnSpc>
+                <a:spcPct val="100000"/>
+              </a:lnSpc>
+              <a:spcBef>
+                <a:spcPts val="320"/>
+              </a:spcBef>
+              <a:buNone/>
+              <a:tabLst>
+                <a:tab algn="l" pos="0"/>
+              </a:tabLst>
+            </a:pPr>
+            <a:endParaRPr b="0" lang="en-US" sz="1200" spc="-1" strike="noStrike">
+              <a:solidFill>
+                <a:srgbClr val="000000"/>
+              </a:solidFill>
+              <a:latin typeface="Arial"/>
+            </a:endParaRPr>
+          </a:p>
+          <a:p>
+            <a:pPr marL="343080" indent="0" defTabSz="914400">
+              <a:lnSpc>
+                <a:spcPct val="100000"/>
+              </a:lnSpc>
+              <a:spcBef>
+                <a:spcPts val="320"/>
+              </a:spcBef>
+              <a:buNone/>
+              <a:tabLst>
+                <a:tab algn="l" pos="0"/>
+              </a:tabLst>
+            </a:pPr>
+            <a:r>
+              <a:rPr b="1" lang="en-US" sz="1600" spc="-1" strike="noStrike">
+                <a:solidFill>
+                  <a:srgbClr val="000000"/>
+                </a:solidFill>
+                <a:latin typeface="Arial"/>
+                <a:ea typeface="DejaVu Sans"/>
+              </a:rPr>
+              <a:t>Bugfixes (1/4)</a:t>
+            </a:r>
+            <a:endParaRPr b="0" lang="en-US" sz="1600" spc="-1" strike="noStrike">
               <a:solidFill>
                 <a:srgbClr val="000000"/>
               </a:solidFill>
@@ -15892,7 +16306,7 @@
                 <a:latin typeface="Arial"/>
                 <a:ea typeface="DejaVu Sans"/>
               </a:rPr>
-              <a:t>CodeEU-454: Article10-2-issue | Order-Nr 28206982 | HEV P1 Error Mercedes-Benz and Setra Hybrid Buses</a:t>
+              <a:t>CodeEU-471: VectoSimulationException: VF640J869RB022573</a:t>
             </a:r>
             <a:endParaRPr b="0" lang="en-US" sz="1200" spc="-1" strike="noStrike">
               <a:solidFill>
@@ -15926,7 +16340,7 @@
                 <a:latin typeface="Arial"/>
                 <a:ea typeface="DejaVu Sans"/>
               </a:rPr>
-              <a:t>CodeEU-655: Article10-2-issue | VECTO-4.0.3 | Order-Nr 28208126 | HEV P1 Error Mercedes-Benz and Setra Hybrid Buses</a:t>
+              <a:t>CodeEU-462: Article10-2-issue | Order-Nr 28206354 | HEV P1 Error Mercedes-Benz and Setra Hybrid</a:t>
             </a:r>
             <a:endParaRPr b="0" lang="en-US" sz="1200" spc="-1" strike="noStrike">
               <a:solidFill>
@@ -15960,7 +16374,7 @@
                 <a:latin typeface="Arial"/>
                 <a:ea typeface="DejaVu Sans"/>
               </a:rPr>
-              <a:t>CodeEU-660: Retarder lossmap error in completed vehicle simulation</a:t>
+              <a:t>BusesCodeEU-326: Article10-2-issue | Order-Nr 28195581 | HEV P1 Error Mercedes-Benz and Setra Hybrid Buses</a:t>
             </a:r>
             <a:endParaRPr b="0" lang="en-US" sz="1200" spc="-1" strike="noStrike">
               <a:solidFill>
@@ -15994,7 +16408,7 @@
                 <a:latin typeface="Arial"/>
                 <a:ea typeface="DejaVu Sans"/>
               </a:rPr>
-              <a:t>CodeEU-662: Generic retarder map speed range insufficient in some cases</a:t>
+              <a:t>CodeEU-348: Article10-2-issue | Order-Nr 28204519 | HEV P1 Error Mercedes-Benz and Setra Hybrid Buses</a:t>
             </a:r>
             <a:endParaRPr b="0" lang="en-US" sz="1200" spc="-1" strike="noStrike">
               <a:solidFill>
@@ -16028,7 +16442,7 @@
                 <a:latin typeface="Arial"/>
                 <a:ea typeface="DejaVu Sans"/>
               </a:rPr>
-              <a:t>CodeEU-648: Error in Multistep Tool PEV/P-HEV</a:t>
+              <a:t>CodeEU-457: Article10-2-issue | Order-Nr 28174000 | HEV P1 Error Mercedes-Benz and Setra Hybrid Buses</a:t>
             </a:r>
             <a:endParaRPr b="0" lang="en-US" sz="1200" spc="-1" strike="noStrike">
               <a:solidFill>
@@ -16062,7 +16476,7 @@
                 <a:latin typeface="Arial"/>
                 <a:ea typeface="DejaVu Sans"/>
               </a:rPr>
-              <a:t>CodeEU-618: PEV vehicles simulation error depending the time format</a:t>
+              <a:t>CodeEU-458: Article10-2-issue | Order-Nr 28186528 | HEV P1 Error Mercedes-Benz and Setra Hybrid Buses</a:t>
             </a:r>
             <a:endParaRPr b="0" lang="en-US" sz="1200" spc="-1" strike="noStrike">
               <a:solidFill>
@@ -16096,7 +16510,7 @@
                 <a:latin typeface="Arial"/>
                 <a:ea typeface="DejaVu Sans"/>
               </a:rPr>
-              <a:t>CodeEU-700: Factor Method Generic IHPC Powermap De-normaization bug</a:t>
+              <a:t>CodeEU-459: Article10-2-issue | Order-Nr 28203057 | HEV P1 Error Mercedes-Benz and Setra Hybrid Buses</a:t>
             </a:r>
             <a:endParaRPr b="0" lang="en-US" sz="1200" spc="-1" strike="noStrike">
               <a:solidFill>
@@ -16130,7 +16544,7 @@
                 <a:latin typeface="Arial"/>
                 <a:ea typeface="DejaVu Sans"/>
               </a:rPr>
-              <a:t>CodeEU-482: Article10-2-issue | Order-Nr 28203040 | HEV P1 Error Mercedes-Benz and Setra Hybrid Buses</a:t>
+              <a:t>CodeEU-545: IVECO confidential : BUG REPORT : HEV-P1 : UW18m C9 VOITH NXT CRU 48V mild hybrid</a:t>
             </a:r>
             <a:endParaRPr b="0" lang="en-US" sz="1200" spc="-1" strike="noStrike">
               <a:solidFill>
@@ -16164,7 +16578,7 @@
                 <a:latin typeface="Arial"/>
                 <a:ea typeface="DejaVu Sans"/>
               </a:rPr>
-              <a:t>CodeEU-514: Article10-2-issue | VECTO-4.0.3 | Order-Nr 28208051 | HEV P1 Error Mercedes-Benz and Setra Hybrid Buses</a:t>
+              <a:t>CodeEU-346: Article10-2-issue | Order-Nr 28202338 | HEV P1 Error Mercedes-Benz and Setra Hybrid Buses</a:t>
             </a:r>
             <a:endParaRPr b="0" lang="en-US" sz="1200" spc="-1" strike="noStrike">
               <a:solidFill>
@@ -16198,8 +16612,62 @@
                 <a:latin typeface="Arial"/>
                 <a:ea typeface="DejaVu Sans"/>
               </a:rPr>
-              <a:t>CodeEU-529: Article10-2-issue | VECTO-4.0.3 | Order-Nr 28199994 | HEV P1 Error Mercedes-Benz and Setra Hybrid Buses</a:t>
-            </a:r>
+              <a:t>CodeEU-352: Article10-2-issue | Order-Nr 28202130 | HEV P1 Error Mercedes-Benz and Setra Hybrid Buses</a:t>
+            </a:r>
+            <a:endParaRPr b="0" lang="en-US" sz="1200" spc="-1" strike="noStrike">
+              <a:solidFill>
+                <a:srgbClr val="000000"/>
+              </a:solidFill>
+              <a:latin typeface="Arial"/>
+            </a:endParaRPr>
+          </a:p>
+          <a:p>
+            <a:pPr marL="343080" indent="-343080" defTabSz="914400">
+              <a:lnSpc>
+                <a:spcPct val="100000"/>
+              </a:lnSpc>
+              <a:spcBef>
+                <a:spcPts val="320"/>
+              </a:spcBef>
+              <a:buClr>
+                <a:srgbClr val="000000"/>
+              </a:buClr>
+              <a:buFont typeface="Symbol"/>
+              <a:buChar char=""/>
+              <a:tabLst>
+                <a:tab algn="l" pos="1886040"/>
+              </a:tabLst>
+            </a:pPr>
+            <a:r>
+              <a:rPr b="0" lang="en-US" sz="1200" spc="-1" strike="noStrike">
+                <a:solidFill>
+                  <a:srgbClr val="000000"/>
+                </a:solidFill>
+                <a:latin typeface="Arial"/>
+                <a:ea typeface="DejaVu Sans"/>
+              </a:rPr>
+              <a:t>CodeEU-394: Article10-2-issue | Order-Nr 28204065 | HEV P1 Error Mercedes-Benz and Setra Hybrid Buses</a:t>
+            </a:r>
+            <a:endParaRPr b="0" lang="en-US" sz="1200" spc="-1" strike="noStrike">
+              <a:solidFill>
+                <a:srgbClr val="000000"/>
+              </a:solidFill>
+              <a:latin typeface="Arial"/>
+            </a:endParaRPr>
+          </a:p>
+          <a:p>
+            <a:pPr marL="343080" indent="0" defTabSz="914400">
+              <a:lnSpc>
+                <a:spcPct val="100000"/>
+              </a:lnSpc>
+              <a:spcBef>
+                <a:spcPts val="320"/>
+              </a:spcBef>
+              <a:buNone/>
+              <a:tabLst>
+                <a:tab algn="l" pos="0"/>
+              </a:tabLst>
+            </a:pPr>
             <a:endParaRPr b="0" lang="en-US" sz="1200" spc="-1" strike="noStrike">
               <a:solidFill>
                 <a:srgbClr val="000000"/>
@@ -16252,7 +16720,7 @@
         <p:spPr>
           <a:xfrm>
             <a:off x="468360" y="476640"/>
-            <a:ext cx="8211240" cy="673920"/>
+            <a:ext cx="8210880" cy="673560"/>
           </a:xfrm>
           <a:prstGeom prst="rect">
             <a:avLst/>
@@ -16321,7 +16789,7 @@
         <p:spPr>
           <a:xfrm>
             <a:off x="323640" y="1639080"/>
-            <a:ext cx="8489880" cy="4446720"/>
+            <a:ext cx="8489520" cy="4446360"/>
           </a:xfrm>
           <a:prstGeom prst="rect">
             <a:avLst/>
@@ -16376,7 +16844,7 @@
                 <a:latin typeface="Arial"/>
                 <a:ea typeface="DejaVu Sans"/>
               </a:rPr>
-              <a:t>Bugfixes (3/4)</a:t>
+              <a:t>Bugfixes (2/4)</a:t>
             </a:r>
             <a:endParaRPr b="0" lang="en-US" sz="1600" spc="-1" strike="noStrike">
               <a:solidFill>
@@ -16430,7 +16898,7 @@
                 <a:latin typeface="Arial"/>
                 <a:ea typeface="DejaVu Sans"/>
               </a:rPr>
-              <a:t>CodeEU-544: IVECO confidential : BUG REPORT : HEV-P1 : CRW LE C9 VOITH NXT CRU 48V mild hybrid</a:t>
+              <a:t>CodeEU-433: Article10-2-issue | Order-Nr 28192321 | HEV P1 Error Mercedes-Benz and Setra Hybrid Buses</a:t>
             </a:r>
             <a:endParaRPr b="0" lang="en-US" sz="1200" spc="-1" strike="noStrike">
               <a:solidFill>
@@ -16464,7 +16932,7 @@
                 <a:latin typeface="Arial"/>
                 <a:ea typeface="DejaVu Sans"/>
               </a:rPr>
-              <a:t>CodeEU-552: Article10-2-issue | VECTO-4.0.3 | Order-Nr 28201759 | HEV P1 Error Mercedes-Benz and Setra Hybrid Buses</a:t>
+              <a:t>CodeEU-451: Article10-2-issue | Order-Nr 28204280 | HEV P1 Error Mercedes-Benz and Setra Hybrid Buses</a:t>
             </a:r>
             <a:endParaRPr b="0" lang="en-US" sz="1200" spc="-1" strike="noStrike">
               <a:solidFill>
@@ -16498,7 +16966,7 @@
                 <a:latin typeface="Arial"/>
                 <a:ea typeface="DejaVu Sans"/>
               </a:rPr>
-              <a:t>CodeEU-556: Article10-2-issue | VECTO-4.0.3 | Order-Nr 28208176 | HEV P1 Error Mercedes-Benz and Setra Hybrid Buses</a:t>
+              <a:t>CodeEU-452: Article10-2-issue | Order-Nr 28197394 | HEV P1 Error Mercedes-Benz and Setra Hybrid Buses</a:t>
             </a:r>
             <a:endParaRPr b="0" lang="en-US" sz="1200" spc="-1" strike="noStrike">
               <a:solidFill>
@@ -16532,7 +17000,7 @@
                 <a:latin typeface="Arial"/>
                 <a:ea typeface="DejaVu Sans"/>
               </a:rPr>
-              <a:t>CodeEU-557: Article10-2-issue | VECTO-4.0.3 | Order-Nr 28209751 | HEV P1 Error Mercedes-Benz and Setra Hybrid Buses</a:t>
+              <a:t>CodeEU-453: Article10-2-issue | Order-Nr 28199435 | HEV P1 Error Mercedes-Benz and Setra Hybrid Buses</a:t>
             </a:r>
             <a:endParaRPr b="0" lang="en-US" sz="1200" spc="-1" strike="noStrike">
               <a:solidFill>
@@ -16566,7 +17034,7 @@
                 <a:latin typeface="Arial"/>
                 <a:ea typeface="DejaVu Sans"/>
               </a:rPr>
-              <a:t>CodeEU-622: Article10-2-issue | VECTO-4.0.3 | Order-Nr 28210594 | HEV P1 Error Mercedes-Benz and Setra Hybrid Buses</a:t>
+              <a:t>CodeEU-454: Article10-2-issue | Order-Nr 28206982 | HEV P1 Error Mercedes-Benz and Setra Hybrid Buses</a:t>
             </a:r>
             <a:endParaRPr b="0" lang="en-US" sz="1200" spc="-1" strike="noStrike">
               <a:solidFill>
@@ -16600,7 +17068,7 @@
                 <a:latin typeface="Arial"/>
                 <a:ea typeface="DejaVu Sans"/>
               </a:rPr>
-              <a:t>CodeEU-632: Article10-2-issue | VECTO-4.0.3 | Order-Nr 28210591 | HEV P1 Error Mercedes-Benz and Setra Hybrid Buses</a:t>
+              <a:t>CodeEU-655: Article10-2-issue | VECTO-4.0.3 | Order-Nr 28208126 | HEV P1 Error Mercedes-Benz and Setra Hybrid Buses</a:t>
             </a:r>
             <a:endParaRPr b="0" lang="en-US" sz="1200" spc="-1" strike="noStrike">
               <a:solidFill>
@@ -16634,7 +17102,7 @@
                 <a:latin typeface="Arial"/>
                 <a:ea typeface="DejaVu Sans"/>
               </a:rPr>
-              <a:t>CodeEU-672: Article10-2-issue | VECTO-4.1.3 | Order-Nr 28208841 | HEV P1 Error Mercedes-Benz and Setra Hybrid Buses</a:t>
+              <a:t>CodeEU-660: Retarder lossmap error in completed vehicle simulation</a:t>
             </a:r>
             <a:endParaRPr b="0" lang="en-US" sz="1200" spc="-1" strike="noStrike">
               <a:solidFill>
@@ -16668,7 +17136,7 @@
                 <a:latin typeface="Arial"/>
                 <a:ea typeface="DejaVu Sans"/>
               </a:rPr>
-              <a:t>CodeEU-673: Article10-2-issue | VECTO-4.1.3 | Order-Nr 28209179 | HEV P1 Error Mercedes-Benz and Setra Hybrid Buses</a:t>
+              <a:t>CodeEU-662: Generic retarder map speed range insufficient in some cases</a:t>
             </a:r>
             <a:endParaRPr b="0" lang="en-US" sz="1200" spc="-1" strike="noStrike">
               <a:solidFill>
@@ -16702,7 +17170,7 @@
                 <a:latin typeface="Arial"/>
                 <a:ea typeface="DejaVu Sans"/>
               </a:rPr>
-              <a:t>CodeEU-674: Article10-2-issue | VECTO-4.1.3 | Order-Nr 28211540 | HEV P1 Error Mercedes-Benz and Setra Hybrid Buses</a:t>
+              <a:t>CodeEU-648: Error in Multistep Tool PEV/P-HEV</a:t>
             </a:r>
             <a:endParaRPr b="0" lang="en-US" sz="1200" spc="-1" strike="noStrike">
               <a:solidFill>
@@ -16712,18 +17180,168 @@
             </a:endParaRPr>
           </a:p>
           <a:p>
-            <a:pPr marL="343080" indent="0" defTabSz="914400">
-              <a:lnSpc>
-                <a:spcPct val="100000"/>
-              </a:lnSpc>
-              <a:spcBef>
-                <a:spcPts val="320"/>
-              </a:spcBef>
-              <a:buNone/>
-              <a:tabLst>
-                <a:tab algn="l" pos="0"/>
-              </a:tabLst>
-            </a:pPr>
+            <a:pPr marL="343080" indent="-343080" defTabSz="914400">
+              <a:lnSpc>
+                <a:spcPct val="100000"/>
+              </a:lnSpc>
+              <a:spcBef>
+                <a:spcPts val="320"/>
+              </a:spcBef>
+              <a:buClr>
+                <a:srgbClr val="000000"/>
+              </a:buClr>
+              <a:buFont typeface="Symbol"/>
+              <a:buChar char=""/>
+              <a:tabLst>
+                <a:tab algn="l" pos="1886040"/>
+              </a:tabLst>
+            </a:pPr>
+            <a:r>
+              <a:rPr b="0" lang="en-US" sz="1200" spc="-1" strike="noStrike">
+                <a:solidFill>
+                  <a:srgbClr val="000000"/>
+                </a:solidFill>
+                <a:latin typeface="Arial"/>
+                <a:ea typeface="DejaVu Sans"/>
+              </a:rPr>
+              <a:t>CodeEU-618: PEV vehicles simulation error depending the time format</a:t>
+            </a:r>
+            <a:endParaRPr b="0" lang="en-US" sz="1200" spc="-1" strike="noStrike">
+              <a:solidFill>
+                <a:srgbClr val="000000"/>
+              </a:solidFill>
+              <a:latin typeface="Arial"/>
+            </a:endParaRPr>
+          </a:p>
+          <a:p>
+            <a:pPr marL="343080" indent="-343080" defTabSz="914400">
+              <a:lnSpc>
+                <a:spcPct val="100000"/>
+              </a:lnSpc>
+              <a:spcBef>
+                <a:spcPts val="320"/>
+              </a:spcBef>
+              <a:buClr>
+                <a:srgbClr val="000000"/>
+              </a:buClr>
+              <a:buFont typeface="Symbol"/>
+              <a:buChar char=""/>
+              <a:tabLst>
+                <a:tab algn="l" pos="1886040"/>
+              </a:tabLst>
+            </a:pPr>
+            <a:r>
+              <a:rPr b="0" lang="en-US" sz="1200" spc="-1" strike="noStrike">
+                <a:solidFill>
+                  <a:srgbClr val="000000"/>
+                </a:solidFill>
+                <a:latin typeface="Arial"/>
+                <a:ea typeface="DejaVu Sans"/>
+              </a:rPr>
+              <a:t>CodeEU-700: Factor Method Generic IHPC Powermap De-normaization bug</a:t>
+            </a:r>
+            <a:endParaRPr b="0" lang="en-US" sz="1200" spc="-1" strike="noStrike">
+              <a:solidFill>
+                <a:srgbClr val="000000"/>
+              </a:solidFill>
+              <a:latin typeface="Arial"/>
+            </a:endParaRPr>
+          </a:p>
+          <a:p>
+            <a:pPr marL="343080" indent="-343080" defTabSz="914400">
+              <a:lnSpc>
+                <a:spcPct val="100000"/>
+              </a:lnSpc>
+              <a:spcBef>
+                <a:spcPts val="320"/>
+              </a:spcBef>
+              <a:buClr>
+                <a:srgbClr val="000000"/>
+              </a:buClr>
+              <a:buFont typeface="Symbol"/>
+              <a:buChar char=""/>
+              <a:tabLst>
+                <a:tab algn="l" pos="1886040"/>
+              </a:tabLst>
+            </a:pPr>
+            <a:r>
+              <a:rPr b="0" lang="en-US" sz="1200" spc="-1" strike="noStrike">
+                <a:solidFill>
+                  <a:srgbClr val="000000"/>
+                </a:solidFill>
+                <a:latin typeface="Arial"/>
+                <a:ea typeface="DejaVu Sans"/>
+              </a:rPr>
+              <a:t>CodeEU-482: Article10-2-issue | Order-Nr 28203040 | HEV P1 Error Mercedes-Benz and Setra Hybrid Buses</a:t>
+            </a:r>
+            <a:endParaRPr b="0" lang="en-US" sz="1200" spc="-1" strike="noStrike">
+              <a:solidFill>
+                <a:srgbClr val="000000"/>
+              </a:solidFill>
+              <a:latin typeface="Arial"/>
+            </a:endParaRPr>
+          </a:p>
+          <a:p>
+            <a:pPr marL="343080" indent="-343080" defTabSz="914400">
+              <a:lnSpc>
+                <a:spcPct val="100000"/>
+              </a:lnSpc>
+              <a:spcBef>
+                <a:spcPts val="320"/>
+              </a:spcBef>
+              <a:buClr>
+                <a:srgbClr val="000000"/>
+              </a:buClr>
+              <a:buFont typeface="Symbol"/>
+              <a:buChar char=""/>
+              <a:tabLst>
+                <a:tab algn="l" pos="1886040"/>
+              </a:tabLst>
+            </a:pPr>
+            <a:r>
+              <a:rPr b="0" lang="en-US" sz="1200" spc="-1" strike="noStrike">
+                <a:solidFill>
+                  <a:srgbClr val="000000"/>
+                </a:solidFill>
+                <a:latin typeface="Arial"/>
+                <a:ea typeface="DejaVu Sans"/>
+              </a:rPr>
+              <a:t>CodeEU-514: Article10-2-issue | VECTO-4.0.3 | Order-Nr 28208051 | HEV P1 Error Mercedes-Benz and Setra Hybrid Buses</a:t>
+            </a:r>
+            <a:endParaRPr b="0" lang="en-US" sz="1200" spc="-1" strike="noStrike">
+              <a:solidFill>
+                <a:srgbClr val="000000"/>
+              </a:solidFill>
+              <a:latin typeface="Arial"/>
+            </a:endParaRPr>
+          </a:p>
+          <a:p>
+            <a:pPr marL="343080" indent="-343080" defTabSz="914400">
+              <a:lnSpc>
+                <a:spcPct val="100000"/>
+              </a:lnSpc>
+              <a:spcBef>
+                <a:spcPts val="320"/>
+              </a:spcBef>
+              <a:buClr>
+                <a:srgbClr val="000000"/>
+              </a:buClr>
+              <a:buFont typeface="Symbol"/>
+              <a:buChar char=""/>
+              <a:tabLst>
+                <a:tab algn="l" pos="1886040"/>
+              </a:tabLst>
+            </a:pPr>
+            <a:r>
+              <a:rPr b="0" lang="en-US" sz="1200" spc="-1" strike="noStrike">
+                <a:solidFill>
+                  <a:srgbClr val="000000"/>
+                </a:solidFill>
+                <a:latin typeface="Arial"/>
+                <a:ea typeface="DejaVu Sans"/>
+              </a:rPr>
+              <a:t>CodeEU-529: Article10-2-issue | VECTO-4.0.3 | Order-Nr 28199994 | HEV P1 Error Mercedes-Benz and Setra Hybrid Buses</a:t>
+            </a:r>
             <a:endParaRPr b="0" lang="en-US" sz="1200" spc="-1" strike="noStrike">
               <a:solidFill>
                 <a:srgbClr val="000000"/>
@@ -16776,7 +17394,7 @@
         <p:spPr>
           <a:xfrm>
             <a:off x="468360" y="476640"/>
-            <a:ext cx="8211240" cy="673920"/>
+            <a:ext cx="8210880" cy="673560"/>
           </a:xfrm>
           <a:prstGeom prst="rect">
             <a:avLst/>
@@ -16845,7 +17463,7 @@
         <p:spPr>
           <a:xfrm>
             <a:off x="323640" y="1639080"/>
-            <a:ext cx="8489880" cy="4446720"/>
+            <a:ext cx="8489520" cy="4446360"/>
           </a:xfrm>
           <a:prstGeom prst="rect">
             <a:avLst/>
@@ -16900,7 +17518,7 @@
                 <a:latin typeface="Arial"/>
                 <a:ea typeface="DejaVu Sans"/>
               </a:rPr>
-              <a:t>Bugfixes (4/4)</a:t>
+              <a:t>Bugfixes (3/4)</a:t>
             </a:r>
             <a:endParaRPr b="0" lang="en-US" sz="1600" spc="-1" strike="noStrike">
               <a:solidFill>
@@ -16954,7 +17572,7 @@
                 <a:latin typeface="Arial"/>
                 <a:ea typeface="DejaVu Sans"/>
               </a:rPr>
-              <a:t>CodeEU-678: Article10-2-issue | VECTO-4.1.3 | Order-Nr 28192673 | HEV P1 Error Mercedes-Benz and Setra Hybrid Buses</a:t>
+              <a:t>CodeEU-544: IVECO confidential : BUG REPORT : HEV-P1 : CRW LE C9 VOITH NXT CRU 48V mild hybrid</a:t>
             </a:r>
             <a:endParaRPr b="0" lang="en-US" sz="1200" spc="-1" strike="noStrike">
               <a:solidFill>
@@ -16988,7 +17606,7 @@
                 <a:latin typeface="Arial"/>
                 <a:ea typeface="DejaVu Sans"/>
               </a:rPr>
-              <a:t>CodeEU-697: Article10-2-issue | VECTO-4.1.3 | Order-Nr 28209551 | HEV P1 Error Mercedes-Benz and Setra Hybrid Buses</a:t>
+              <a:t>CodeEU-552: Article10-2-issue | VECTO-4.0.3 | Order-Nr 28201759 | HEV P1 Error Mercedes-Benz and Setra Hybrid Buses</a:t>
             </a:r>
             <a:endParaRPr b="0" lang="en-US" sz="1200" spc="-1" strike="noStrike">
               <a:solidFill>
@@ -17022,7 +17640,7 @@
                 <a:latin typeface="Arial"/>
                 <a:ea typeface="DejaVu Sans"/>
               </a:rPr>
-              <a:t>CodeEU-685: Article10-2-issue | VECTO-4.1.3 | Order-Nr 28200286 | HEV P1 Error Mercedes-Benz and Setra Hybrid Buses</a:t>
+              <a:t>CodeEU-556: Article10-2-issue | VECTO-4.0.3 | Order-Nr 28208176 | HEV P1 Error Mercedes-Benz and Setra Hybrid Buses</a:t>
             </a:r>
             <a:endParaRPr b="0" lang="en-US" sz="1200" spc="-1" strike="noStrike">
               <a:solidFill>
@@ -17056,7 +17674,7 @@
                 <a:latin typeface="Arial"/>
                 <a:ea typeface="DejaVu Sans"/>
               </a:rPr>
-              <a:t>CodeEU-686: Article10-2-issue | VECTO-4.1.3 | Order-Nr 28201178 | HEV P1 Error Mercedes-Benz and Setra Hybrid Buses</a:t>
+              <a:t>CodeEU-557: Article10-2-issue | VECTO-4.0.3 | Order-Nr 28209751 | HEV P1 Error Mercedes-Benz and Setra Hybrid Buses</a:t>
             </a:r>
             <a:endParaRPr b="0" lang="en-US" sz="1200" spc="-1" strike="noStrike">
               <a:solidFill>
@@ -17090,7 +17708,7 @@
                 <a:latin typeface="Arial"/>
                 <a:ea typeface="DejaVu Sans"/>
               </a:rPr>
-              <a:t>CodeEU-687: Article10-2-issue | VECTO-4.1.3 | Order-Nr 28209679 | HEV P1 Error Mercedes-Benz and Setra Hybrid Buses</a:t>
+              <a:t>CodeEU-622: Article10-2-issue | VECTO-4.0.3 | Order-Nr 28210594 | HEV P1 Error Mercedes-Benz and Setra Hybrid Buses</a:t>
             </a:r>
             <a:endParaRPr b="0" lang="en-US" sz="1200" spc="-1" strike="noStrike">
               <a:solidFill>
@@ -17124,7 +17742,109 @@
                 <a:latin typeface="Arial"/>
                 <a:ea typeface="DejaVu Sans"/>
               </a:rPr>
-              <a:t>CodeEU-692: Article10-2-issue | VECTO-4.1.3 | Order-Nr 28209789 | HEV P1 Error Mercedes-Benz and Setra Hybrid Buses</a:t>
+              <a:t>CodeEU-632: Article10-2-issue | VECTO-4.0.3 | Order-Nr 28210591 | HEV P1 Error Mercedes-Benz and Setra Hybrid Buses</a:t>
+            </a:r>
+            <a:endParaRPr b="0" lang="en-US" sz="1200" spc="-1" strike="noStrike">
+              <a:solidFill>
+                <a:srgbClr val="000000"/>
+              </a:solidFill>
+              <a:latin typeface="Arial"/>
+            </a:endParaRPr>
+          </a:p>
+          <a:p>
+            <a:pPr marL="343080" indent="-343080" defTabSz="914400">
+              <a:lnSpc>
+                <a:spcPct val="100000"/>
+              </a:lnSpc>
+              <a:spcBef>
+                <a:spcPts val="320"/>
+              </a:spcBef>
+              <a:buClr>
+                <a:srgbClr val="000000"/>
+              </a:buClr>
+              <a:buFont typeface="Symbol"/>
+              <a:buChar char=""/>
+              <a:tabLst>
+                <a:tab algn="l" pos="1886040"/>
+              </a:tabLst>
+            </a:pPr>
+            <a:r>
+              <a:rPr b="0" lang="en-US" sz="1200" spc="-1" strike="noStrike">
+                <a:solidFill>
+                  <a:srgbClr val="000000"/>
+                </a:solidFill>
+                <a:latin typeface="Arial"/>
+                <a:ea typeface="DejaVu Sans"/>
+              </a:rPr>
+              <a:t>CodeEU-672: Article10-2-issue | VECTO-4.1.3 | Order-Nr 28208841 | HEV P1 Error Mercedes-Benz and Setra Hybrid Buses</a:t>
+            </a:r>
+            <a:endParaRPr b="0" lang="en-US" sz="1200" spc="-1" strike="noStrike">
+              <a:solidFill>
+                <a:srgbClr val="000000"/>
+              </a:solidFill>
+              <a:latin typeface="Arial"/>
+            </a:endParaRPr>
+          </a:p>
+          <a:p>
+            <a:pPr marL="343080" indent="-343080" defTabSz="914400">
+              <a:lnSpc>
+                <a:spcPct val="100000"/>
+              </a:lnSpc>
+              <a:spcBef>
+                <a:spcPts val="320"/>
+              </a:spcBef>
+              <a:buClr>
+                <a:srgbClr val="000000"/>
+              </a:buClr>
+              <a:buFont typeface="Symbol"/>
+              <a:buChar char=""/>
+              <a:tabLst>
+                <a:tab algn="l" pos="1886040"/>
+              </a:tabLst>
+            </a:pPr>
+            <a:r>
+              <a:rPr b="0" lang="en-US" sz="1200" spc="-1" strike="noStrike">
+                <a:solidFill>
+                  <a:srgbClr val="000000"/>
+                </a:solidFill>
+                <a:latin typeface="Arial"/>
+                <a:ea typeface="DejaVu Sans"/>
+              </a:rPr>
+              <a:t>CodeEU-673: Article10-2-issue | VECTO-4.1.3 | Order-Nr 28209179 | HEV P1 Error Mercedes-Benz and Setra Hybrid Buses</a:t>
+            </a:r>
+            <a:endParaRPr b="0" lang="en-US" sz="1200" spc="-1" strike="noStrike">
+              <a:solidFill>
+                <a:srgbClr val="000000"/>
+              </a:solidFill>
+              <a:latin typeface="Arial"/>
+            </a:endParaRPr>
+          </a:p>
+          <a:p>
+            <a:pPr marL="343080" indent="-343080" defTabSz="914400">
+              <a:lnSpc>
+                <a:spcPct val="100000"/>
+              </a:lnSpc>
+              <a:spcBef>
+                <a:spcPts val="320"/>
+              </a:spcBef>
+              <a:buClr>
+                <a:srgbClr val="000000"/>
+              </a:buClr>
+              <a:buFont typeface="Symbol"/>
+              <a:buChar char=""/>
+              <a:tabLst>
+                <a:tab algn="l" pos="1886040"/>
+              </a:tabLst>
+            </a:pPr>
+            <a:r>
+              <a:rPr b="0" lang="en-US" sz="1200" spc="-1" strike="noStrike">
+                <a:solidFill>
+                  <a:srgbClr val="000000"/>
+                </a:solidFill>
+                <a:latin typeface="Arial"/>
+                <a:ea typeface="DejaVu Sans"/>
+              </a:rPr>
+              <a:t>CodeEU-674: Article10-2-issue | VECTO-4.1.3 | Order-Nr 28211540 | HEV P1 Error Mercedes-Benz and Setra Hybrid Buses</a:t>
             </a:r>
             <a:endParaRPr b="0" lang="en-US" sz="1200" spc="-1" strike="noStrike">
               <a:solidFill>
@@ -17198,7 +17918,7 @@
         <p:spPr>
           <a:xfrm>
             <a:off x="468360" y="476640"/>
-            <a:ext cx="8211240" cy="673920"/>
+            <a:ext cx="8210880" cy="673560"/>
           </a:xfrm>
           <a:prstGeom prst="rect">
             <a:avLst/>
@@ -17230,7 +17950,7 @@
                 <a:latin typeface="Arial"/>
                 <a:ea typeface="DejaVu Sans"/>
               </a:rPr>
-              <a:t>Vecto 4.1.3.3415 OFFICIAL RELEASE</a:t>
+              <a:t>Vecto 4.2.0.3448 RELEASE CANDIDATE</a:t>
             </a:r>
             <a:br>
               <a:rPr sz="2400"/>
@@ -17243,7 +17963,7 @@
                 <a:latin typeface="Arial"/>
                 <a:ea typeface="DejaVu Sans"/>
               </a:rPr>
-              <a:t>08.05.2024</a:t>
+              <a:t>10.06.2024</a:t>
             </a:r>
             <a:endParaRPr b="0" lang="en-US" sz="1600" spc="-1" strike="noStrike">
               <a:solidFill>
@@ -17267,7 +17987,7 @@
         <p:spPr>
           <a:xfrm>
             <a:off x="323640" y="1639080"/>
-            <a:ext cx="8489880" cy="4446720"/>
+            <a:ext cx="8489520" cy="4446360"/>
           </a:xfrm>
           <a:prstGeom prst="rect">
             <a:avLst/>
@@ -17302,6 +18022,56 @@
             </a:endParaRPr>
           </a:p>
           <a:p>
+            <a:pPr marL="343080" indent="0" defTabSz="914400">
+              <a:lnSpc>
+                <a:spcPct val="100000"/>
+              </a:lnSpc>
+              <a:spcBef>
+                <a:spcPts val="320"/>
+              </a:spcBef>
+              <a:buNone/>
+              <a:tabLst>
+                <a:tab algn="l" pos="0"/>
+              </a:tabLst>
+            </a:pPr>
+            <a:r>
+              <a:rPr b="1" lang="en-US" sz="1600" spc="-1" strike="noStrike">
+                <a:solidFill>
+                  <a:srgbClr val="000000"/>
+                </a:solidFill>
+                <a:latin typeface="Arial"/>
+                <a:ea typeface="DejaVu Sans"/>
+              </a:rPr>
+              <a:t>Bugfixes (4/4)</a:t>
+            </a:r>
+            <a:endParaRPr b="0" lang="en-US" sz="1600" spc="-1" strike="noStrike">
+              <a:solidFill>
+                <a:srgbClr val="000000"/>
+              </a:solidFill>
+              <a:latin typeface="Arial"/>
+            </a:endParaRPr>
+          </a:p>
+          <a:p>
+            <a:pPr marL="343080" indent="0" defTabSz="914400">
+              <a:lnSpc>
+                <a:spcPct val="100000"/>
+              </a:lnSpc>
+              <a:spcBef>
+                <a:spcPts val="320"/>
+              </a:spcBef>
+              <a:buNone/>
+              <a:tabLst>
+                <a:tab algn="l" pos="0"/>
+              </a:tabLst>
+            </a:pPr>
+            <a:endParaRPr b="0" lang="en-US" sz="1200" spc="-1" strike="noStrike">
+              <a:solidFill>
+                <a:srgbClr val="000000"/>
+              </a:solidFill>
+              <a:latin typeface="Arial"/>
+            </a:endParaRPr>
+          </a:p>
+          <a:p>
             <a:pPr marL="343080" indent="-343080" defTabSz="914400">
               <a:lnSpc>
                 <a:spcPct val="100000"/>
@@ -17319,24 +18089,24 @@
               </a:tabLst>
             </a:pPr>
             <a:r>
-              <a:rPr b="1" lang="en-US" sz="1600" spc="-1" strike="noStrike">
-                <a:solidFill>
-                  <a:srgbClr val="000000"/>
-                </a:solidFill>
-                <a:latin typeface="Arial"/>
-                <a:ea typeface="DejaVu Sans"/>
-              </a:rPr>
-              <a:t>Hotfixes </a:t>
-            </a:r>
-            <a:endParaRPr b="0" lang="en-US" sz="1600" spc="-1" strike="noStrike">
-              <a:solidFill>
-                <a:srgbClr val="000000"/>
-              </a:solidFill>
-              <a:latin typeface="Arial"/>
-            </a:endParaRPr>
-          </a:p>
-          <a:p>
-            <a:pPr lvl="1" marL="800280" indent="-343080" defTabSz="914400">
+              <a:rPr b="0" lang="en-US" sz="1200" spc="-1" strike="noStrike">
+                <a:solidFill>
+                  <a:srgbClr val="000000"/>
+                </a:solidFill>
+                <a:latin typeface="Arial"/>
+                <a:ea typeface="DejaVu Sans"/>
+              </a:rPr>
+              <a:t>CodeEU-678: Article10-2-issue | VECTO-4.1.3 | Order-Nr 28192673 | HEV P1 Error Mercedes-Benz and Setra Hybrid Buses</a:t>
+            </a:r>
+            <a:endParaRPr b="0" lang="en-US" sz="1200" spc="-1" strike="noStrike">
+              <a:solidFill>
+                <a:srgbClr val="000000"/>
+              </a:solidFill>
+              <a:latin typeface="Arial"/>
+            </a:endParaRPr>
+          </a:p>
+          <a:p>
+            <a:pPr marL="343080" indent="-343080" defTabSz="914400">
               <a:lnSpc>
                 <a:spcPct val="100000"/>
               </a:lnSpc>
@@ -17360,8 +18130,164 @@
                 <a:latin typeface="Arial"/>
                 <a:ea typeface="DejaVu Sans"/>
               </a:rPr>
-              <a:t>CodeEU-638: Incorrect construction payloads for group 9 non-vocational vehicle</a:t>
-            </a:r>
+              <a:t>CodeEU-697: Article10-2-issue | VECTO-4.1.3 | Order-Nr 28209551 | HEV P1 Error Mercedes-Benz and Setra Hybrid Buses</a:t>
+            </a:r>
+            <a:endParaRPr b="0" lang="en-US" sz="1200" spc="-1" strike="noStrike">
+              <a:solidFill>
+                <a:srgbClr val="000000"/>
+              </a:solidFill>
+              <a:latin typeface="Arial"/>
+            </a:endParaRPr>
+          </a:p>
+          <a:p>
+            <a:pPr marL="343080" indent="-343080" defTabSz="914400">
+              <a:lnSpc>
+                <a:spcPct val="100000"/>
+              </a:lnSpc>
+              <a:spcBef>
+                <a:spcPts val="320"/>
+              </a:spcBef>
+              <a:buClr>
+                <a:srgbClr val="000000"/>
+              </a:buClr>
+              <a:buFont typeface="Symbol"/>
+              <a:buChar char=""/>
+              <a:tabLst>
+                <a:tab algn="l" pos="1886040"/>
+              </a:tabLst>
+            </a:pPr>
+            <a:r>
+              <a:rPr b="0" lang="en-US" sz="1200" spc="-1" strike="noStrike">
+                <a:solidFill>
+                  <a:srgbClr val="000000"/>
+                </a:solidFill>
+                <a:latin typeface="Arial"/>
+                <a:ea typeface="DejaVu Sans"/>
+              </a:rPr>
+              <a:t>CodeEU-685: Article10-2-issue | VECTO-4.1.3 | Order-Nr 28200286 | HEV P1 Error Mercedes-Benz and Setra Hybrid Buses</a:t>
+            </a:r>
+            <a:endParaRPr b="0" lang="en-US" sz="1200" spc="-1" strike="noStrike">
+              <a:solidFill>
+                <a:srgbClr val="000000"/>
+              </a:solidFill>
+              <a:latin typeface="Arial"/>
+            </a:endParaRPr>
+          </a:p>
+          <a:p>
+            <a:pPr marL="343080" indent="-343080" defTabSz="914400">
+              <a:lnSpc>
+                <a:spcPct val="100000"/>
+              </a:lnSpc>
+              <a:spcBef>
+                <a:spcPts val="320"/>
+              </a:spcBef>
+              <a:buClr>
+                <a:srgbClr val="000000"/>
+              </a:buClr>
+              <a:buFont typeface="Symbol"/>
+              <a:buChar char=""/>
+              <a:tabLst>
+                <a:tab algn="l" pos="1886040"/>
+              </a:tabLst>
+            </a:pPr>
+            <a:r>
+              <a:rPr b="0" lang="en-US" sz="1200" spc="-1" strike="noStrike">
+                <a:solidFill>
+                  <a:srgbClr val="000000"/>
+                </a:solidFill>
+                <a:latin typeface="Arial"/>
+                <a:ea typeface="DejaVu Sans"/>
+              </a:rPr>
+              <a:t>CodeEU-686: Article10-2-issue | VECTO-4.1.3 | Order-Nr 28201178 | HEV P1 Error Mercedes-Benz and Setra Hybrid Buses</a:t>
+            </a:r>
+            <a:endParaRPr b="0" lang="en-US" sz="1200" spc="-1" strike="noStrike">
+              <a:solidFill>
+                <a:srgbClr val="000000"/>
+              </a:solidFill>
+              <a:latin typeface="Arial"/>
+            </a:endParaRPr>
+          </a:p>
+          <a:p>
+            <a:pPr marL="343080" indent="-343080" defTabSz="914400">
+              <a:lnSpc>
+                <a:spcPct val="100000"/>
+              </a:lnSpc>
+              <a:spcBef>
+                <a:spcPts val="320"/>
+              </a:spcBef>
+              <a:buClr>
+                <a:srgbClr val="000000"/>
+              </a:buClr>
+              <a:buFont typeface="Symbol"/>
+              <a:buChar char=""/>
+              <a:tabLst>
+                <a:tab algn="l" pos="1886040"/>
+              </a:tabLst>
+            </a:pPr>
+            <a:r>
+              <a:rPr b="0" lang="en-US" sz="1200" spc="-1" strike="noStrike">
+                <a:solidFill>
+                  <a:srgbClr val="000000"/>
+                </a:solidFill>
+                <a:latin typeface="Arial"/>
+                <a:ea typeface="DejaVu Sans"/>
+              </a:rPr>
+              <a:t>CodeEU-687: Article10-2-issue | VECTO-4.1.3 | Order-Nr 28209679 | HEV P1 Error Mercedes-Benz and Setra Hybrid Buses</a:t>
+            </a:r>
+            <a:endParaRPr b="0" lang="en-US" sz="1200" spc="-1" strike="noStrike">
+              <a:solidFill>
+                <a:srgbClr val="000000"/>
+              </a:solidFill>
+              <a:latin typeface="Arial"/>
+            </a:endParaRPr>
+          </a:p>
+          <a:p>
+            <a:pPr marL="343080" indent="-343080" defTabSz="914400">
+              <a:lnSpc>
+                <a:spcPct val="100000"/>
+              </a:lnSpc>
+              <a:spcBef>
+                <a:spcPts val="320"/>
+              </a:spcBef>
+              <a:buClr>
+                <a:srgbClr val="000000"/>
+              </a:buClr>
+              <a:buFont typeface="Symbol"/>
+              <a:buChar char=""/>
+              <a:tabLst>
+                <a:tab algn="l" pos="1886040"/>
+              </a:tabLst>
+            </a:pPr>
+            <a:r>
+              <a:rPr b="0" lang="en-US" sz="1200" spc="-1" strike="noStrike">
+                <a:solidFill>
+                  <a:srgbClr val="000000"/>
+                </a:solidFill>
+                <a:latin typeface="Arial"/>
+                <a:ea typeface="DejaVu Sans"/>
+              </a:rPr>
+              <a:t>CodeEU-692: Article10-2-issue | VECTO-4.1.3 | Order-Nr 28209789 | HEV P1 Error Mercedes-Benz and Setra Hybrid Buses</a:t>
+            </a:r>
+            <a:endParaRPr b="0" lang="en-US" sz="1200" spc="-1" strike="noStrike">
+              <a:solidFill>
+                <a:srgbClr val="000000"/>
+              </a:solidFill>
+              <a:latin typeface="Arial"/>
+            </a:endParaRPr>
+          </a:p>
+          <a:p>
+            <a:pPr marL="343080" indent="0" defTabSz="914400">
+              <a:lnSpc>
+                <a:spcPct val="100000"/>
+              </a:lnSpc>
+              <a:spcBef>
+                <a:spcPts val="320"/>
+              </a:spcBef>
+              <a:buNone/>
+              <a:tabLst>
+                <a:tab algn="l" pos="0"/>
+              </a:tabLst>
+            </a:pPr>
             <a:endParaRPr b="0" lang="en-US" sz="1200" spc="-1" strike="noStrike">
               <a:solidFill>
                 <a:srgbClr val="000000"/>
@@ -17414,7 +18340,7 @@
         <p:spPr>
           <a:xfrm>
             <a:off x="468360" y="476640"/>
-            <a:ext cx="8211240" cy="673920"/>
+            <a:ext cx="8210880" cy="673560"/>
           </a:xfrm>
           <a:prstGeom prst="rect">
             <a:avLst/>
@@ -17446,7 +18372,7 @@
                 <a:latin typeface="Arial"/>
                 <a:ea typeface="DejaVu Sans"/>
               </a:rPr>
-              <a:t>Vecto 4.1.1.3413 OFFICIAL RELEASE</a:t>
+              <a:t>Vecto 4.1.3.3415 OFFICIAL RELEASE</a:t>
             </a:r>
             <a:br>
               <a:rPr sz="2400"/>
@@ -17459,7 +18385,7 @@
                 <a:latin typeface="Arial"/>
                 <a:ea typeface="DejaVu Sans"/>
               </a:rPr>
-              <a:t>06.05.2024</a:t>
+              <a:t>08.05.2024</a:t>
             </a:r>
             <a:endParaRPr b="0" lang="en-US" sz="1600" spc="-1" strike="noStrike">
               <a:solidFill>
@@ -17483,7 +18409,7 @@
         <p:spPr>
           <a:xfrm>
             <a:off x="323640" y="1639080"/>
-            <a:ext cx="8489880" cy="4446720"/>
+            <a:ext cx="8489520" cy="4446360"/>
           </a:xfrm>
           <a:prstGeom prst="rect">
             <a:avLst/>
@@ -17542,7 +18468,7 @@
                 <a:latin typeface="Arial"/>
                 <a:ea typeface="DejaVu Sans"/>
               </a:rPr>
-              <a:t>Bugfixes </a:t>
+              <a:t>Hotfixes </a:t>
             </a:r>
             <a:endParaRPr b="0" lang="en-US" sz="1600" spc="-1" strike="noStrike">
               <a:solidFill>
@@ -17576,143 +18502,7 @@
                 <a:latin typeface="Arial"/>
                 <a:ea typeface="DejaVu Sans"/>
               </a:rPr>
-              <a:t>CodeEU-615: Multistep freezes after loading VIF chassis</a:t>
-            </a:r>
-            <a:endParaRPr b="0" lang="en-US" sz="1200" spc="-1" strike="noStrike">
-              <a:solidFill>
-                <a:srgbClr val="000000"/>
-              </a:solidFill>
-              <a:latin typeface="Arial"/>
-            </a:endParaRPr>
-          </a:p>
-          <a:p>
-            <a:pPr lvl="1" marL="800280" indent="-343080" defTabSz="914400">
-              <a:lnSpc>
-                <a:spcPct val="100000"/>
-              </a:lnSpc>
-              <a:spcBef>
-                <a:spcPts val="320"/>
-              </a:spcBef>
-              <a:buClr>
-                <a:srgbClr val="000000"/>
-              </a:buClr>
-              <a:buFont typeface="Symbol"/>
-              <a:buChar char=""/>
-              <a:tabLst>
-                <a:tab algn="l" pos="1886040"/>
-              </a:tabLst>
-            </a:pPr>
-            <a:r>
-              <a:rPr b="0" lang="en-US" sz="1200" spc="-1" strike="noStrike">
-                <a:solidFill>
-                  <a:srgbClr val="000000"/>
-                </a:solidFill>
-                <a:latin typeface="Arial"/>
-                <a:ea typeface="DejaVu Sans"/>
-              </a:rPr>
-              <a:t>CodeEU-616: Multistep tool freezes</a:t>
-            </a:r>
-            <a:endParaRPr b="0" lang="en-US" sz="1200" spc="-1" strike="noStrike">
-              <a:solidFill>
-                <a:srgbClr val="000000"/>
-              </a:solidFill>
-              <a:latin typeface="Arial"/>
-            </a:endParaRPr>
-          </a:p>
-          <a:p>
-            <a:pPr lvl="1" marL="800280" indent="-343080" defTabSz="914400">
-              <a:lnSpc>
-                <a:spcPct val="100000"/>
-              </a:lnSpc>
-              <a:spcBef>
-                <a:spcPts val="320"/>
-              </a:spcBef>
-              <a:buClr>
-                <a:srgbClr val="000000"/>
-              </a:buClr>
-              <a:buFont typeface="Symbol"/>
-              <a:buChar char=""/>
-              <a:tabLst>
-                <a:tab algn="l" pos="1886040"/>
-              </a:tabLst>
-            </a:pPr>
-            <a:r>
-              <a:rPr b="0" lang="en-US" sz="1200" spc="-1" strike="noStrike">
-                <a:solidFill>
-                  <a:srgbClr val="000000"/>
-                </a:solidFill>
-                <a:latin typeface="Arial"/>
-                <a:ea typeface="DejaVu Sans"/>
-              </a:rPr>
-              <a:t>CodeEU-619: restore wrong exempted techs in XSD for backwards compatibility</a:t>
-            </a:r>
-            <a:endParaRPr b="0" lang="en-US" sz="1200" spc="-1" strike="noStrike">
-              <a:solidFill>
-                <a:srgbClr val="000000"/>
-              </a:solidFill>
-              <a:latin typeface="Arial"/>
-            </a:endParaRPr>
-          </a:p>
-          <a:p>
-            <a:pPr lvl="1" marL="800280" indent="-343080" defTabSz="914400">
-              <a:lnSpc>
-                <a:spcPct val="100000"/>
-              </a:lnSpc>
-              <a:spcBef>
-                <a:spcPts val="320"/>
-              </a:spcBef>
-              <a:buClr>
-                <a:srgbClr val="000000"/>
-              </a:buClr>
-              <a:buFont typeface="Symbol"/>
-              <a:buChar char=""/>
-              <a:tabLst>
-                <a:tab algn="l" pos="1886040"/>
-              </a:tabLst>
-            </a:pPr>
-            <a:r>
-              <a:rPr b="0" lang="en-US" sz="1200" spc="-1" strike="noStrike">
-                <a:solidFill>
-                  <a:srgbClr val="000000"/>
-                </a:solidFill>
-                <a:latin typeface="Arial"/>
-                <a:ea typeface="DejaVu Sans"/>
-              </a:rPr>
-              <a:t>CodeEU-617: Results change depending the time format</a:t>
-            </a:r>
-            <a:endParaRPr b="0" lang="en-US" sz="1200" spc="-1" strike="noStrike">
-              <a:solidFill>
-                <a:srgbClr val="000000"/>
-              </a:solidFill>
-              <a:latin typeface="Arial"/>
-            </a:endParaRPr>
-          </a:p>
-          <a:p>
-            <a:pPr lvl="1" marL="800280" indent="-343080" defTabSz="914400">
-              <a:lnSpc>
-                <a:spcPct val="100000"/>
-              </a:lnSpc>
-              <a:spcBef>
-                <a:spcPts val="320"/>
-              </a:spcBef>
-              <a:buClr>
-                <a:srgbClr val="000000"/>
-              </a:buClr>
-              <a:buFont typeface="Symbol"/>
-              <a:buChar char=""/>
-              <a:tabLst>
-                <a:tab algn="l" pos="1886040"/>
-              </a:tabLst>
-            </a:pPr>
-            <a:r>
-              <a:rPr b="0" lang="en-US" sz="1200" spc="-1" strike="noStrike">
-                <a:solidFill>
-                  <a:srgbClr val="000000"/>
-                </a:solidFill>
-                <a:latin typeface="Arial"/>
-                <a:ea typeface="DejaVu Sans"/>
-              </a:rPr>
-              <a:t>CodeEU-635: Revert multiple summary in CIF</a:t>
+              <a:t>CodeEU-638: Incorrect construction payloads for group 9 non-vocational vehicle</a:t>
             </a:r>
             <a:endParaRPr b="0" lang="en-US" sz="1200" spc="-1" strike="noStrike">
               <a:solidFill>
@@ -17766,7 +18556,7 @@
         <p:spPr>
           <a:xfrm>
             <a:off x="468360" y="476640"/>
-            <a:ext cx="8211240" cy="673920"/>
+            <a:ext cx="8210880" cy="673560"/>
           </a:xfrm>
           <a:prstGeom prst="rect">
             <a:avLst/>
@@ -17798,7 +18588,7 @@
                 <a:latin typeface="Arial"/>
                 <a:ea typeface="DejaVu Sans"/>
               </a:rPr>
-              <a:t>Vecto 4.1.0.3392 RELEASE CANDIDATE</a:t>
+              <a:t>Vecto 4.1.1.3413 OFFICIAL RELEASE</a:t>
             </a:r>
             <a:br>
               <a:rPr sz="2400"/>
@@ -17811,7 +18601,7 @@
                 <a:latin typeface="Arial"/>
                 <a:ea typeface="DejaVu Sans"/>
               </a:rPr>
-              <a:t>15.04.2024</a:t>
+              <a:t>06.05.2024</a:t>
             </a:r>
             <a:endParaRPr b="0" lang="en-US" sz="1600" spc="-1" strike="noStrike">
               <a:solidFill>
@@ -17835,7 +18625,7 @@
         <p:spPr>
           <a:xfrm>
             <a:off x="323640" y="1639080"/>
-            <a:ext cx="8489880" cy="4446720"/>
+            <a:ext cx="8489520" cy="4446360"/>
           </a:xfrm>
           <a:prstGeom prst="rect">
             <a:avLst/>
@@ -17850,6 +18640,26 @@
             <a:noAutofit/>
           </a:bodyPr>
           <a:p>
+            <a:pPr marL="343080" indent="0" defTabSz="914400">
+              <a:lnSpc>
+                <a:spcPct val="100000"/>
+              </a:lnSpc>
+              <a:spcBef>
+                <a:spcPts val="320"/>
+              </a:spcBef>
+              <a:buNone/>
+              <a:tabLst>
+                <a:tab algn="l" pos="0"/>
+              </a:tabLst>
+            </a:pPr>
+            <a:endParaRPr b="0" lang="en-US" sz="1600" spc="-1" strike="noStrike">
+              <a:solidFill>
+                <a:srgbClr val="000000"/>
+              </a:solidFill>
+              <a:latin typeface="Arial"/>
+            </a:endParaRPr>
+          </a:p>
+          <a:p>
             <a:pPr marL="343080" indent="-343080" defTabSz="914400">
               <a:lnSpc>
                 <a:spcPct val="100000"/>
@@ -17874,50 +18684,17 @@
                 <a:latin typeface="Arial"/>
                 <a:ea typeface="DejaVu Sans"/>
               </a:rPr>
-              <a:t>Features</a:t>
-            </a:r>
-            <a:br>
-              <a:rPr sz="1600"/>
-            </a:br>
-            <a:r>
-              <a:rPr b="0" lang="en-US" sz="1200" spc="-1" strike="noStrike">
-                <a:solidFill>
-                  <a:schemeClr val="dk1"/>
-                </a:solidFill>
-                <a:latin typeface="Arial"/>
-                <a:ea typeface="DejaVu Sans"/>
-              </a:rPr>
-              <a:t>CodeEU-577: Add missing mission profiles to vocational and non-vocational</a:t>
-            </a:r>
-            <a:endParaRPr b="0" lang="en-US" sz="1200" spc="-1" strike="noStrike">
-              <a:solidFill>
-                <a:srgbClr val="000000"/>
-              </a:solidFill>
-              <a:latin typeface="Arial"/>
-            </a:endParaRPr>
-          </a:p>
-          <a:p>
-            <a:pPr marL="343080" indent="0" defTabSz="914400">
-              <a:lnSpc>
-                <a:spcPct val="100000"/>
-              </a:lnSpc>
-              <a:spcBef>
-                <a:spcPts val="320"/>
-              </a:spcBef>
-              <a:buNone/>
-              <a:tabLst>
-                <a:tab algn="l" pos="0"/>
-              </a:tabLst>
-            </a:pPr>
-            <a:endParaRPr b="0" lang="en-US" sz="1200" spc="-1" strike="noStrike">
-              <a:solidFill>
-                <a:srgbClr val="000000"/>
-              </a:solidFill>
-              <a:latin typeface="Arial"/>
-            </a:endParaRPr>
-          </a:p>
-          <a:p>
-            <a:pPr marL="343080" indent="-343080" defTabSz="914400">
+              <a:t>Bugfixes </a:t>
+            </a:r>
+            <a:endParaRPr b="0" lang="en-US" sz="1600" spc="-1" strike="noStrike">
+              <a:solidFill>
+                <a:srgbClr val="000000"/>
+              </a:solidFill>
+              <a:latin typeface="Arial"/>
+            </a:endParaRPr>
+          </a:p>
+          <a:p>
+            <a:pPr lvl="1" marL="800280" indent="-343080" defTabSz="914400">
               <a:lnSpc>
                 <a:spcPct val="100000"/>
               </a:lnSpc>
@@ -17934,16 +18711,16 @@
               </a:tabLst>
             </a:pPr>
             <a:r>
-              <a:rPr b="1" lang="en-US" sz="1600" spc="-1" strike="noStrike">
-                <a:solidFill>
-                  <a:srgbClr val="000000"/>
-                </a:solidFill>
-                <a:latin typeface="Arial"/>
-                <a:ea typeface="DejaVu Sans"/>
-              </a:rPr>
-              <a:t>Bugfixes (1/4)</a:t>
-            </a:r>
-            <a:endParaRPr b="0" lang="en-US" sz="1600" spc="-1" strike="noStrike">
+              <a:rPr b="0" lang="en-US" sz="1200" spc="-1" strike="noStrike">
+                <a:solidFill>
+                  <a:srgbClr val="000000"/>
+                </a:solidFill>
+                <a:latin typeface="Arial"/>
+                <a:ea typeface="DejaVu Sans"/>
+              </a:rPr>
+              <a:t>CodeEU-615: Multistep freezes after loading VIF chassis</a:t>
+            </a:r>
+            <a:endParaRPr b="0" lang="en-US" sz="1200" spc="-1" strike="noStrike">
               <a:solidFill>
                 <a:srgbClr val="000000"/>
               </a:solidFill>
@@ -17975,7 +18752,7 @@
                 <a:latin typeface="Arial"/>
                 <a:ea typeface="DejaVu Sans"/>
               </a:rPr>
-              <a:t>CodeEU-331: Gear 1 DrivingActionAccelerate: Fail</a:t>
+              <a:t>CodeEU-616: Multistep tool freezes</a:t>
             </a:r>
             <a:endParaRPr b="0" lang="en-US" sz="1200" spc="-1" strike="noStrike">
               <a:solidFill>
@@ -18009,7 +18786,7 @@
                 <a:latin typeface="Arial"/>
                 <a:ea typeface="DejaVu Sans"/>
               </a:rPr>
-              <a:t>CodeEU-367: Gear 1 DrivingActionAccelerate: Fail</a:t>
+              <a:t>CodeEU-619: restore wrong exempted techs in XSD for backwards compatibility</a:t>
             </a:r>
             <a:endParaRPr b="0" lang="en-US" sz="1200" spc="-1" strike="noStrike">
               <a:solidFill>
@@ -18043,7 +18820,7 @@
                 <a:latin typeface="Arial"/>
                 <a:ea typeface="DejaVu Sans"/>
               </a:rPr>
-              <a:t>CodeEU-372: ADT Error on Bus Category Primary Vehicle Simulation on VECTO</a:t>
+              <a:t>CodeEU-617: Results change depending the time format</a:t>
             </a:r>
             <a:endParaRPr b="0" lang="en-US" sz="1200" spc="-1" strike="noStrike">
               <a:solidFill>
@@ -18077,266 +18854,8 @@
                 <a:latin typeface="Arial"/>
                 <a:ea typeface="DejaVu Sans"/>
               </a:rPr>
-              <a:t>CodeEU-373: ADT Error on Bus Category Primary Vehicle Simulation on VECTO</a:t>
-            </a:r>
-            <a:endParaRPr b="0" lang="en-US" sz="1200" spc="-1" strike="noStrike">
-              <a:solidFill>
-                <a:srgbClr val="000000"/>
-              </a:solidFill>
-              <a:latin typeface="Arial"/>
-            </a:endParaRPr>
-          </a:p>
-          <a:p>
-            <a:pPr lvl="1" marL="800280" indent="-343080" defTabSz="914400">
-              <a:lnSpc>
-                <a:spcPct val="100000"/>
-              </a:lnSpc>
-              <a:spcBef>
-                <a:spcPts val="320"/>
-              </a:spcBef>
-              <a:buClr>
-                <a:srgbClr val="000000"/>
-              </a:buClr>
-              <a:buFont typeface="Symbol"/>
-              <a:buChar char=""/>
-              <a:tabLst>
-                <a:tab algn="l" pos="1886040"/>
-              </a:tabLst>
-            </a:pPr>
-            <a:r>
-              <a:rPr b="0" lang="en-US" sz="1200" spc="-1" strike="noStrike">
-                <a:solidFill>
-                  <a:srgbClr val="000000"/>
-                </a:solidFill>
-                <a:latin typeface="Arial"/>
-                <a:ea typeface="DejaVu Sans"/>
-              </a:rPr>
-              <a:t>CodeEU-374: ADT Error on Bus Category Primary Vehicle Simulation on VECTO</a:t>
-            </a:r>
-            <a:endParaRPr b="0" lang="en-US" sz="1200" spc="-1" strike="noStrike">
-              <a:solidFill>
-                <a:srgbClr val="000000"/>
-              </a:solidFill>
-              <a:latin typeface="Arial"/>
-            </a:endParaRPr>
-          </a:p>
-          <a:p>
-            <a:pPr lvl="1" marL="800280" indent="-343080" defTabSz="914400">
-              <a:lnSpc>
-                <a:spcPct val="100000"/>
-              </a:lnSpc>
-              <a:spcBef>
-                <a:spcPts val="320"/>
-              </a:spcBef>
-              <a:buClr>
-                <a:srgbClr val="000000"/>
-              </a:buClr>
-              <a:buFont typeface="Symbol"/>
-              <a:buChar char=""/>
-              <a:tabLst>
-                <a:tab algn="l" pos="1886040"/>
-              </a:tabLst>
-            </a:pPr>
-            <a:r>
-              <a:rPr b="0" lang="en-US" sz="1200" spc="-1" strike="noStrike">
-                <a:solidFill>
-                  <a:srgbClr val="000000"/>
-                </a:solidFill>
-                <a:latin typeface="Arial"/>
-                <a:ea typeface="DejaVu Sans"/>
-              </a:rPr>
-              <a:t>CodeEU-375: ADT Error on Bus Category Primary Vehicle Simulation on VECTO</a:t>
-            </a:r>
-            <a:endParaRPr b="0" lang="en-US" sz="1200" spc="-1" strike="noStrike">
-              <a:solidFill>
-                <a:srgbClr val="000000"/>
-              </a:solidFill>
-              <a:latin typeface="Arial"/>
-            </a:endParaRPr>
-          </a:p>
-          <a:p>
-            <a:pPr lvl="1" marL="800280" indent="-343080" defTabSz="914400">
-              <a:lnSpc>
-                <a:spcPct val="100000"/>
-              </a:lnSpc>
-              <a:spcBef>
-                <a:spcPts val="320"/>
-              </a:spcBef>
-              <a:buClr>
-                <a:srgbClr val="000000"/>
-              </a:buClr>
-              <a:buFont typeface="Symbol"/>
-              <a:buChar char=""/>
-              <a:tabLst>
-                <a:tab algn="l" pos="1886040"/>
-              </a:tabLst>
-            </a:pPr>
-            <a:r>
-              <a:rPr b="0" lang="en-US" sz="1200" spc="-1" strike="noStrike">
-                <a:solidFill>
-                  <a:srgbClr val="000000"/>
-                </a:solidFill>
-                <a:latin typeface="Arial"/>
-                <a:ea typeface="DejaVu Sans"/>
-              </a:rPr>
-              <a:t>CodeEU-393: Finished Run VEH-PrimaryBus_nonSmart Interurban _P32SD_ReferenceLoad with ERROR: 16</a:t>
-            </a:r>
-            <a:endParaRPr b="0" lang="en-US" sz="1200" spc="-1" strike="noStrike">
-              <a:solidFill>
-                <a:srgbClr val="000000"/>
-              </a:solidFill>
-              <a:latin typeface="Arial"/>
-            </a:endParaRPr>
-          </a:p>
-          <a:p>
-            <a:pPr lvl="1" marL="800280" indent="-343080" defTabSz="914400">
-              <a:lnSpc>
-                <a:spcPct val="100000"/>
-              </a:lnSpc>
-              <a:spcBef>
-                <a:spcPts val="320"/>
-              </a:spcBef>
-              <a:buClr>
-                <a:srgbClr val="000000"/>
-              </a:buClr>
-              <a:buFont typeface="Symbol"/>
-              <a:buChar char=""/>
-              <a:tabLst>
-                <a:tab algn="l" pos="1886040"/>
-              </a:tabLst>
-            </a:pPr>
-            <a:r>
-              <a:rPr b="0" lang="en-US" sz="1200" spc="-1" strike="noStrike">
-                <a:solidFill>
-                  <a:srgbClr val="000000"/>
-                </a:solidFill>
-                <a:latin typeface="Arial"/>
-                <a:ea typeface="DejaVu Sans"/>
-              </a:rPr>
-              <a:t>CodeEU-439: 615 (Interurban _P32DD_ReferenceLoad) - absTime: 7129.6359 [s], distance: 53875.9765 [m], dt: 0.6388 [s], v: 0.5098 [m/s], Gear: 1 | DrivingActionAccelerate: Failed</a:t>
-            </a:r>
-            <a:endParaRPr b="0" lang="en-US" sz="1200" spc="-1" strike="noStrike">
-              <a:solidFill>
-                <a:srgbClr val="000000"/>
-              </a:solidFill>
-              <a:latin typeface="Arial"/>
-            </a:endParaRPr>
-          </a:p>
-          <a:p>
-            <a:pPr lvl="1" marL="800280" indent="-343080" defTabSz="914400">
-              <a:lnSpc>
-                <a:spcPct val="100000"/>
-              </a:lnSpc>
-              <a:spcBef>
-                <a:spcPts val="320"/>
-              </a:spcBef>
-              <a:buClr>
-                <a:srgbClr val="000000"/>
-              </a:buClr>
-              <a:buFont typeface="Symbol"/>
-              <a:buChar char=""/>
-              <a:tabLst>
-                <a:tab algn="l" pos="1886040"/>
-              </a:tabLst>
-            </a:pPr>
-            <a:r>
-              <a:rPr b="0" lang="en-US" sz="1200" spc="-1" strike="noStrike">
-                <a:solidFill>
-                  <a:srgbClr val="000000"/>
-                </a:solidFill>
-                <a:latin typeface="Arial"/>
-                <a:ea typeface="DejaVu Sans"/>
-              </a:rPr>
-              <a:t>CodeEU-446: Finished Run VEH-PrimaryBus_nonSmart Interurban _P32SD_ReferenceLoad with ERROR: 16</a:t>
-            </a:r>
-            <a:endParaRPr b="0" lang="en-US" sz="1200" spc="-1" strike="noStrike">
-              <a:solidFill>
-                <a:srgbClr val="000000"/>
-              </a:solidFill>
-              <a:latin typeface="Arial"/>
-            </a:endParaRPr>
-          </a:p>
-          <a:p>
-            <a:pPr lvl="1" marL="800280" indent="-343080" defTabSz="914400">
-              <a:lnSpc>
-                <a:spcPct val="100000"/>
-              </a:lnSpc>
-              <a:spcBef>
-                <a:spcPts val="320"/>
-              </a:spcBef>
-              <a:buClr>
-                <a:srgbClr val="000000"/>
-              </a:buClr>
-              <a:buFont typeface="Symbol"/>
-              <a:buChar char=""/>
-              <a:tabLst>
-                <a:tab algn="l" pos="1886040"/>
-              </a:tabLst>
-            </a:pPr>
-            <a:r>
-              <a:rPr b="0" lang="en-US" sz="1200" spc="-1" strike="noStrike">
-                <a:solidFill>
-                  <a:srgbClr val="000000"/>
-                </a:solidFill>
-                <a:latin typeface="Arial"/>
-                <a:ea typeface="DejaVu Sans"/>
-              </a:rPr>
-              <a:t>CodeEU-449: Finished Run VEH-PrimaryBus_nonSmart Interurban _P32SD_ReferenceLoad with ERROR: 16</a:t>
-            </a:r>
-            <a:endParaRPr b="0" lang="en-US" sz="1200" spc="-1" strike="noStrike">
-              <a:solidFill>
-                <a:srgbClr val="000000"/>
-              </a:solidFill>
-              <a:latin typeface="Arial"/>
-            </a:endParaRPr>
-          </a:p>
-          <a:p>
-            <a:pPr lvl="1" marL="800280" indent="-343080" defTabSz="914400">
-              <a:lnSpc>
-                <a:spcPct val="100000"/>
-              </a:lnSpc>
-              <a:spcBef>
-                <a:spcPts val="320"/>
-              </a:spcBef>
-              <a:buClr>
-                <a:srgbClr val="000000"/>
-              </a:buClr>
-              <a:buFont typeface="Symbol"/>
-              <a:buChar char=""/>
-              <a:tabLst>
-                <a:tab algn="l" pos="1886040"/>
-              </a:tabLst>
-            </a:pPr>
-            <a:r>
-              <a:rPr b="0" lang="en-US" sz="1200" spc="-1" strike="noStrike">
-                <a:solidFill>
-                  <a:srgbClr val="000000"/>
-                </a:solidFill>
-                <a:latin typeface="Arial"/>
-                <a:ea typeface="DejaVu Sans"/>
-              </a:rPr>
-              <a:t>CodeEU-478: Finished Run VEH-PrimaryBus_nonSmart Urban _P31SD_ReferenceLoad with ERROR: 4 (Urban _P31SD_ReferenceLoad) - absTime: 8606.6241 [s], distance: 39112.5127 [m], dt: 1.1131 [s], v: 0.1833 [m/s], Gear: 1 | DrivingActionAccelerate: Failed to find operating poi</a:t>
-            </a:r>
-            <a:endParaRPr b="0" lang="en-US" sz="1200" spc="-1" strike="noStrike">
-              <a:solidFill>
-                <a:srgbClr val="000000"/>
-              </a:solidFill>
-              <a:latin typeface="Arial"/>
-            </a:endParaRPr>
-          </a:p>
-          <a:p>
-            <a:pPr marL="800280" indent="0" defTabSz="914400">
-              <a:lnSpc>
-                <a:spcPct val="100000"/>
-              </a:lnSpc>
-              <a:spcBef>
-                <a:spcPts val="320"/>
-              </a:spcBef>
-              <a:buNone/>
-              <a:tabLst>
-                <a:tab algn="l" pos="0"/>
-              </a:tabLst>
-            </a:pPr>
+              <a:t>CodeEU-635: Revert multiple summary in CIF</a:t>
+            </a:r>
             <a:endParaRPr b="0" lang="en-US" sz="1200" spc="-1" strike="noStrike">
               <a:solidFill>
                 <a:srgbClr val="000000"/>
